--- a/figures/Figure_3.pptx
+++ b/figures/Figure_3.pptx
@@ -2350,7 +2350,7 @@
           </p:nvSpPr>
           <p:spPr>
             <a:xfrm>
-              <a:off x="1666854" y="1928001"/>
+              <a:off x="1681086" y="1928001"/>
               <a:ext cx="61566" cy="61566"/>
             </a:xfrm>
             <a:prstGeom prst="ellipse">
@@ -2376,7 +2376,7 @@
           </p:nvSpPr>
           <p:spPr>
             <a:xfrm>
-              <a:off x="1906731" y="3030242"/>
+              <a:off x="1911770" y="3030242"/>
               <a:ext cx="61566" cy="61566"/>
             </a:xfrm>
             <a:prstGeom prst="ellipse">
@@ -2402,7 +2402,7 @@
           </p:nvSpPr>
           <p:spPr>
             <a:xfrm>
-              <a:off x="1696402" y="3203890"/>
+              <a:off x="1694874" y="3203890"/>
               <a:ext cx="61566" cy="61566"/>
             </a:xfrm>
             <a:prstGeom prst="ellipse">
@@ -2428,7 +2428,7 @@
           </p:nvSpPr>
           <p:spPr>
             <a:xfrm>
-              <a:off x="1911634" y="2989527"/>
+              <a:off x="1971557" y="2989527"/>
               <a:ext cx="61566" cy="61566"/>
             </a:xfrm>
             <a:prstGeom prst="ellipse">
@@ -2454,7 +2454,7 @@
           </p:nvSpPr>
           <p:spPr>
             <a:xfrm>
-              <a:off x="1726791" y="2528492"/>
+              <a:off x="1654790" y="2528492"/>
               <a:ext cx="61566" cy="61566"/>
             </a:xfrm>
             <a:prstGeom prst="ellipse">
@@ -2480,7 +2480,7 @@
           </p:nvSpPr>
           <p:spPr>
             <a:xfrm>
-              <a:off x="1948526" y="3084677"/>
+              <a:off x="1885787" y="3084677"/>
               <a:ext cx="61566" cy="61566"/>
             </a:xfrm>
             <a:prstGeom prst="ellipse">
@@ -2506,7 +2506,7 @@
           </p:nvSpPr>
           <p:spPr>
             <a:xfrm>
-              <a:off x="1643940" y="3393672"/>
+              <a:off x="1709676" y="3393672"/>
               <a:ext cx="61566" cy="61566"/>
             </a:xfrm>
             <a:prstGeom prst="ellipse">
@@ -2532,7 +2532,7 @@
           </p:nvSpPr>
           <p:spPr>
             <a:xfrm>
-              <a:off x="1904074" y="3281004"/>
+              <a:off x="1937185" y="3281004"/>
               <a:ext cx="61566" cy="61566"/>
             </a:xfrm>
             <a:prstGeom prst="ellipse">
@@ -2558,7 +2558,7 @@
           </p:nvSpPr>
           <p:spPr>
             <a:xfrm>
-              <a:off x="1680206" y="3175782"/>
+              <a:off x="1710440" y="3175782"/>
               <a:ext cx="61566" cy="61566"/>
             </a:xfrm>
             <a:prstGeom prst="ellipse">
@@ -2584,7 +2584,7 @@
           </p:nvSpPr>
           <p:spPr>
             <a:xfrm>
-              <a:off x="1879999" y="3259818"/>
+              <a:off x="1890578" y="3259818"/>
               <a:ext cx="61566" cy="61566"/>
             </a:xfrm>
             <a:prstGeom prst="ellipse">
@@ -2610,7 +2610,7 @@
           </p:nvSpPr>
           <p:spPr>
             <a:xfrm>
-              <a:off x="1709307" y="3565560"/>
+              <a:off x="1669736" y="3565560"/>
               <a:ext cx="61566" cy="61566"/>
             </a:xfrm>
             <a:prstGeom prst="ellipse">
@@ -2636,7 +2636,7 @@
           </p:nvSpPr>
           <p:spPr>
             <a:xfrm>
-              <a:off x="1926535" y="3561784"/>
+              <a:off x="1878533" y="3561784"/>
               <a:ext cx="61566" cy="61566"/>
             </a:xfrm>
             <a:prstGeom prst="ellipse">
@@ -2662,7 +2662,7 @@
           </p:nvSpPr>
           <p:spPr>
             <a:xfrm>
-              <a:off x="1668724" y="3270236"/>
+              <a:off x="1743926" y="3270236"/>
               <a:ext cx="61566" cy="61566"/>
             </a:xfrm>
             <a:prstGeom prst="ellipse">
@@ -2688,7 +2688,7 @@
           </p:nvSpPr>
           <p:spPr>
             <a:xfrm>
-              <a:off x="1899836" y="3333974"/>
+              <a:off x="1912020" y="3333974"/>
               <a:ext cx="61566" cy="61566"/>
             </a:xfrm>
             <a:prstGeom prst="ellipse">
@@ -2714,7 +2714,7 @@
           </p:nvSpPr>
           <p:spPr>
             <a:xfrm>
-              <a:off x="1700910" y="3354470"/>
+              <a:off x="1744745" y="3354470"/>
               <a:ext cx="61566" cy="61566"/>
             </a:xfrm>
             <a:prstGeom prst="ellipse">
@@ -2740,7 +2740,7 @@
           </p:nvSpPr>
           <p:spPr>
             <a:xfrm>
-              <a:off x="1928183" y="3470218"/>
+              <a:off x="1893897" y="3470218"/>
               <a:ext cx="61566" cy="61566"/>
             </a:xfrm>
             <a:prstGeom prst="ellipse">
@@ -2766,7 +2766,7 @@
           </p:nvSpPr>
           <p:spPr>
             <a:xfrm>
-              <a:off x="1732506" y="3295218"/>
+              <a:off x="1651923" y="3295218"/>
               <a:ext cx="61566" cy="61566"/>
             </a:xfrm>
             <a:prstGeom prst="ellipse">
@@ -2792,7 +2792,7 @@
           </p:nvSpPr>
           <p:spPr>
             <a:xfrm>
-              <a:off x="1901298" y="3160193"/>
+              <a:off x="1948751" y="3160193"/>
               <a:ext cx="61566" cy="61566"/>
             </a:xfrm>
             <a:prstGeom prst="ellipse">
@@ -2818,7 +2818,7 @@
           </p:nvSpPr>
           <p:spPr>
             <a:xfrm>
-              <a:off x="1743127" y="2652943"/>
+              <a:off x="1706585" y="2652943"/>
               <a:ext cx="61566" cy="61566"/>
             </a:xfrm>
             <a:prstGeom prst="ellipse">
@@ -2844,7 +2844,7 @@
           </p:nvSpPr>
           <p:spPr>
             <a:xfrm>
-              <a:off x="1935552" y="2665383"/>
+              <a:off x="1914058" y="2665383"/>
               <a:ext cx="61566" cy="61566"/>
             </a:xfrm>
             <a:prstGeom prst="ellipse">
@@ -2870,7 +2870,7 @@
           </p:nvSpPr>
           <p:spPr>
             <a:xfrm>
-              <a:off x="1659632" y="3284169"/>
+              <a:off x="1643525" y="3284169"/>
               <a:ext cx="61566" cy="61566"/>
             </a:xfrm>
             <a:prstGeom prst="ellipse">
@@ -2896,7 +2896,7 @@
           </p:nvSpPr>
           <p:spPr>
             <a:xfrm>
-              <a:off x="1958446" y="3261400"/>
+              <a:off x="1957278" y="3261400"/>
               <a:ext cx="61566" cy="61566"/>
             </a:xfrm>
             <a:prstGeom prst="ellipse">
@@ -2922,7 +2922,7 @@
           </p:nvSpPr>
           <p:spPr>
             <a:xfrm>
-              <a:off x="1663228" y="3089617"/>
+              <a:off x="1664542" y="3089617"/>
               <a:ext cx="61566" cy="61566"/>
             </a:xfrm>
             <a:prstGeom prst="ellipse">
@@ -2948,7 +2948,7 @@
           </p:nvSpPr>
           <p:spPr>
             <a:xfrm>
-              <a:off x="1921631" y="3256684"/>
+              <a:off x="1901580" y="3256684"/>
               <a:ext cx="61566" cy="61566"/>
             </a:xfrm>
             <a:prstGeom prst="ellipse">
@@ -2974,7 +2974,7 @@
           </p:nvSpPr>
           <p:spPr>
             <a:xfrm>
-              <a:off x="1675734" y="2961694"/>
+              <a:off x="1658257" y="2961694"/>
               <a:ext cx="61566" cy="61566"/>
             </a:xfrm>
             <a:prstGeom prst="ellipse">
@@ -3000,7 +3000,7 @@
           </p:nvSpPr>
           <p:spPr>
             <a:xfrm>
-              <a:off x="1969620" y="3431528"/>
+              <a:off x="1931421" y="3431528"/>
               <a:ext cx="61566" cy="61566"/>
             </a:xfrm>
             <a:prstGeom prst="ellipse">
@@ -3026,7 +3026,7 @@
           </p:nvSpPr>
           <p:spPr>
             <a:xfrm>
-              <a:off x="1664321" y="3352176"/>
+              <a:off x="1701447" y="3352176"/>
               <a:ext cx="61566" cy="61566"/>
             </a:xfrm>
             <a:prstGeom prst="ellipse">
@@ -3052,7 +3052,7 @@
           </p:nvSpPr>
           <p:spPr>
             <a:xfrm>
-              <a:off x="1878161" y="3206320"/>
+              <a:off x="1868770" y="3206320"/>
               <a:ext cx="61566" cy="61566"/>
             </a:xfrm>
             <a:prstGeom prst="ellipse">
@@ -3078,7 +3078,7 @@
           </p:nvSpPr>
           <p:spPr>
             <a:xfrm>
-              <a:off x="1728273" y="2911788"/>
+              <a:off x="1700211" y="2911788"/>
               <a:ext cx="61566" cy="61566"/>
             </a:xfrm>
             <a:prstGeom prst="ellipse">
@@ -3104,7 +3104,7 @@
           </p:nvSpPr>
           <p:spPr>
             <a:xfrm>
-              <a:off x="1943982" y="3571764"/>
+              <a:off x="1885278" y="3571764"/>
               <a:ext cx="61566" cy="61566"/>
             </a:xfrm>
             <a:prstGeom prst="ellipse">
@@ -3130,7 +3130,7 @@
           </p:nvSpPr>
           <p:spPr>
             <a:xfrm>
-              <a:off x="1732815" y="3150847"/>
+              <a:off x="1683002" y="3150847"/>
               <a:ext cx="61566" cy="61566"/>
             </a:xfrm>
             <a:prstGeom prst="ellipse">
@@ -3156,7 +3156,7 @@
           </p:nvSpPr>
           <p:spPr>
             <a:xfrm>
-              <a:off x="1897546" y="3155982"/>
+              <a:off x="1918377" y="3155982"/>
               <a:ext cx="61566" cy="61566"/>
             </a:xfrm>
             <a:prstGeom prst="ellipse">
@@ -3182,7 +3182,7 @@
           </p:nvSpPr>
           <p:spPr>
             <a:xfrm>
-              <a:off x="1738141" y="3364376"/>
+              <a:off x="1644245" y="3364376"/>
               <a:ext cx="61566" cy="61566"/>
             </a:xfrm>
             <a:prstGeom prst="ellipse">
@@ -3208,7 +3208,7 @@
           </p:nvSpPr>
           <p:spPr>
             <a:xfrm>
-              <a:off x="1920792" y="3291139"/>
+              <a:off x="1870673" y="3291139"/>
               <a:ext cx="61566" cy="61566"/>
             </a:xfrm>
             <a:prstGeom prst="ellipse">
@@ -3234,7 +3234,7 @@
           </p:nvSpPr>
           <p:spPr>
             <a:xfrm>
-              <a:off x="1712370" y="3197114"/>
+              <a:off x="1684524" y="3197114"/>
               <a:ext cx="61566" cy="61566"/>
             </a:xfrm>
             <a:prstGeom prst="ellipse">
@@ -3260,7 +3260,7 @@
           </p:nvSpPr>
           <p:spPr>
             <a:xfrm>
-              <a:off x="1924281" y="3296559"/>
+              <a:off x="1885491" y="3296559"/>
               <a:ext cx="61566" cy="61566"/>
             </a:xfrm>
             <a:prstGeom prst="ellipse">
@@ -3286,7 +3286,7 @@
           </p:nvSpPr>
           <p:spPr>
             <a:xfrm>
-              <a:off x="1719435" y="3323350"/>
+              <a:off x="1707709" y="3323350"/>
               <a:ext cx="61566" cy="61566"/>
             </a:xfrm>
             <a:prstGeom prst="ellipse">
@@ -3312,7 +3312,7 @@
           </p:nvSpPr>
           <p:spPr>
             <a:xfrm>
-              <a:off x="1967868" y="3358024"/>
+              <a:off x="1876490" y="3358024"/>
               <a:ext cx="61566" cy="61566"/>
             </a:xfrm>
             <a:prstGeom prst="ellipse">
@@ -3338,7 +3338,7 @@
           </p:nvSpPr>
           <p:spPr>
             <a:xfrm>
-              <a:off x="1735534" y="3667972"/>
+              <a:off x="1724998" y="3667972"/>
               <a:ext cx="61566" cy="61566"/>
             </a:xfrm>
             <a:prstGeom prst="ellipse">
@@ -3364,7 +3364,7 @@
           </p:nvSpPr>
           <p:spPr>
             <a:xfrm>
-              <a:off x="1904112" y="3473714"/>
+              <a:off x="1937796" y="3473714"/>
               <a:ext cx="61566" cy="61566"/>
             </a:xfrm>
             <a:prstGeom prst="ellipse">
@@ -3390,7 +3390,7 @@
           </p:nvSpPr>
           <p:spPr>
             <a:xfrm>
-              <a:off x="1698049" y="2976365"/>
+              <a:off x="1716971" y="2976365"/>
               <a:ext cx="61566" cy="61566"/>
             </a:xfrm>
             <a:prstGeom prst="ellipse">
@@ -3416,7 +3416,7 @@
           </p:nvSpPr>
           <p:spPr>
             <a:xfrm>
-              <a:off x="1972194" y="3129920"/>
+              <a:off x="1942938" y="3129920"/>
               <a:ext cx="61566" cy="61566"/>
             </a:xfrm>
             <a:prstGeom prst="ellipse">
@@ -3442,7 +3442,7 @@
           </p:nvSpPr>
           <p:spPr>
             <a:xfrm>
-              <a:off x="1726792" y="3246370"/>
+              <a:off x="1686806" y="3246370"/>
               <a:ext cx="61566" cy="61566"/>
             </a:xfrm>
             <a:prstGeom prst="ellipse">
@@ -3468,7 +3468,7 @@
           </p:nvSpPr>
           <p:spPr>
             <a:xfrm>
-              <a:off x="1867554" y="3069119"/>
+              <a:off x="1916639" y="3069119"/>
               <a:ext cx="61566" cy="61566"/>
             </a:xfrm>
             <a:prstGeom prst="ellipse">
@@ -3494,7 +3494,7 @@
           </p:nvSpPr>
           <p:spPr>
             <a:xfrm>
-              <a:off x="1737462" y="3320621"/>
+              <a:off x="1655174" y="3320621"/>
               <a:ext cx="61566" cy="61566"/>
             </a:xfrm>
             <a:prstGeom prst="ellipse">
@@ -3520,7 +3520,7 @@
           </p:nvSpPr>
           <p:spPr>
             <a:xfrm>
-              <a:off x="1932074" y="3347677"/>
+              <a:off x="1886894" y="3347677"/>
               <a:ext cx="61566" cy="61566"/>
             </a:xfrm>
             <a:prstGeom prst="ellipse">
@@ -3546,7 +3546,7 @@
           </p:nvSpPr>
           <p:spPr>
             <a:xfrm>
-              <a:off x="1690601" y="2931812"/>
+              <a:off x="1678866" y="2931812"/>
               <a:ext cx="61566" cy="61566"/>
             </a:xfrm>
             <a:prstGeom prst="ellipse">
@@ -3572,7 +3572,7 @@
           </p:nvSpPr>
           <p:spPr>
             <a:xfrm>
-              <a:off x="1937630" y="3621630"/>
+              <a:off x="1930033" y="3621630"/>
               <a:ext cx="61566" cy="61566"/>
             </a:xfrm>
             <a:prstGeom prst="ellipse">
@@ -3598,7 +3598,7 @@
           </p:nvSpPr>
           <p:spPr>
             <a:xfrm>
-              <a:off x="1651408" y="3228781"/>
+              <a:off x="1738182" y="3228781"/>
               <a:ext cx="61566" cy="61566"/>
             </a:xfrm>
             <a:prstGeom prst="ellipse">
@@ -3624,7 +3624,7 @@
           </p:nvSpPr>
           <p:spPr>
             <a:xfrm>
-              <a:off x="1947439" y="3165055"/>
+              <a:off x="1964063" y="3165055"/>
               <a:ext cx="61566" cy="61566"/>
             </a:xfrm>
             <a:prstGeom prst="ellipse">
@@ -3650,7 +3650,7 @@
           </p:nvSpPr>
           <p:spPr>
             <a:xfrm>
-              <a:off x="1663178" y="3609723"/>
+              <a:off x="1679305" y="3609723"/>
               <a:ext cx="61566" cy="61566"/>
             </a:xfrm>
             <a:prstGeom prst="ellipse">
@@ -3676,7 +3676,7 @@
           </p:nvSpPr>
           <p:spPr>
             <a:xfrm>
-              <a:off x="1963570" y="3284277"/>
+              <a:off x="1889182" y="3284277"/>
               <a:ext cx="61566" cy="61566"/>
             </a:xfrm>
             <a:prstGeom prst="ellipse">
@@ -3702,7 +3702,7 @@
           </p:nvSpPr>
           <p:spPr>
             <a:xfrm>
-              <a:off x="1733656" y="3193023"/>
+              <a:off x="1719876" y="3193023"/>
               <a:ext cx="61566" cy="61566"/>
             </a:xfrm>
             <a:prstGeom prst="ellipse">
@@ -3728,7 +3728,7 @@
           </p:nvSpPr>
           <p:spPr>
             <a:xfrm>
-              <a:off x="1932392" y="3089478"/>
+              <a:off x="1934301" y="3089478"/>
               <a:ext cx="61566" cy="61566"/>
             </a:xfrm>
             <a:prstGeom prst="ellipse">
@@ -3754,7 +3754,7 @@
           </p:nvSpPr>
           <p:spPr>
             <a:xfrm>
-              <a:off x="1656182" y="2810983"/>
+              <a:off x="1711782" y="2810983"/>
               <a:ext cx="61566" cy="61566"/>
             </a:xfrm>
             <a:prstGeom prst="ellipse">
@@ -3780,7 +3780,7 @@
           </p:nvSpPr>
           <p:spPr>
             <a:xfrm>
-              <a:off x="1932946" y="2762566"/>
+              <a:off x="1953145" y="2762566"/>
               <a:ext cx="61566" cy="61566"/>
             </a:xfrm>
             <a:prstGeom prst="ellipse">
@@ -3806,7 +3806,7 @@
           </p:nvSpPr>
           <p:spPr>
             <a:xfrm>
-              <a:off x="1713989" y="4054658"/>
+              <a:off x="1675894" y="4054658"/>
               <a:ext cx="61566" cy="61566"/>
             </a:xfrm>
             <a:prstGeom prst="ellipse">
@@ -3832,7 +3832,7 @@
           </p:nvSpPr>
           <p:spPr>
             <a:xfrm>
-              <a:off x="1870569" y="3340880"/>
+              <a:off x="1936461" y="3340880"/>
               <a:ext cx="61566" cy="61566"/>
             </a:xfrm>
             <a:prstGeom prst="ellipse">
@@ -3858,7 +3858,7 @@
           </p:nvSpPr>
           <p:spPr>
             <a:xfrm>
-              <a:off x="1715841" y="3038834"/>
+              <a:off x="1693348" y="3038834"/>
               <a:ext cx="61566" cy="61566"/>
             </a:xfrm>
             <a:prstGeom prst="ellipse">
@@ -3884,7 +3884,7 @@
           </p:nvSpPr>
           <p:spPr>
             <a:xfrm>
-              <a:off x="1929644" y="2856434"/>
+              <a:off x="1914079" y="2856434"/>
               <a:ext cx="61566" cy="61566"/>
             </a:xfrm>
             <a:prstGeom prst="ellipse">
@@ -3910,7 +3910,7 @@
           </p:nvSpPr>
           <p:spPr>
             <a:xfrm>
-              <a:off x="1742586" y="3125300"/>
+              <a:off x="1738898" y="3125300"/>
               <a:ext cx="61566" cy="61566"/>
             </a:xfrm>
             <a:prstGeom prst="ellipse">
@@ -3936,7 +3936,7 @@
           </p:nvSpPr>
           <p:spPr>
             <a:xfrm>
-              <a:off x="1912824" y="3086839"/>
+              <a:off x="1886576" y="3086839"/>
               <a:ext cx="61566" cy="61566"/>
             </a:xfrm>
             <a:prstGeom prst="ellipse">
@@ -3962,7 +3962,7 @@
           </p:nvSpPr>
           <p:spPr>
             <a:xfrm>
-              <a:off x="1736956" y="3372136"/>
+              <a:off x="1730912" y="3372136"/>
               <a:ext cx="61566" cy="61566"/>
             </a:xfrm>
             <a:prstGeom prst="ellipse">
@@ -3988,7 +3988,7 @@
           </p:nvSpPr>
           <p:spPr>
             <a:xfrm>
-              <a:off x="1940898" y="3577512"/>
+              <a:off x="1969908" y="3577512"/>
               <a:ext cx="61566" cy="61566"/>
             </a:xfrm>
             <a:prstGeom prst="ellipse">
@@ -4014,7 +4014,7 @@
           </p:nvSpPr>
           <p:spPr>
             <a:xfrm>
-              <a:off x="1655763" y="2892184"/>
+              <a:off x="1737597" y="2892184"/>
               <a:ext cx="61566" cy="61566"/>
             </a:xfrm>
             <a:prstGeom prst="ellipse">
@@ -4040,7 +4040,7 @@
           </p:nvSpPr>
           <p:spPr>
             <a:xfrm>
-              <a:off x="1928766" y="2995154"/>
+              <a:off x="1926113" y="2995154"/>
               <a:ext cx="61566" cy="61566"/>
             </a:xfrm>
             <a:prstGeom prst="ellipse">
@@ -4066,7 +4066,7 @@
           </p:nvSpPr>
           <p:spPr>
             <a:xfrm>
-              <a:off x="1732380" y="2633231"/>
+              <a:off x="1698472" y="2633231"/>
               <a:ext cx="61566" cy="61566"/>
             </a:xfrm>
             <a:prstGeom prst="ellipse">
@@ -4092,7 +4092,7 @@
           </p:nvSpPr>
           <p:spPr>
             <a:xfrm>
-              <a:off x="1952309" y="2520878"/>
+              <a:off x="1934135" y="2520878"/>
               <a:ext cx="61566" cy="61566"/>
             </a:xfrm>
             <a:prstGeom prst="ellipse">
@@ -4118,7 +4118,7 @@
           </p:nvSpPr>
           <p:spPr>
             <a:xfrm>
-              <a:off x="1657122" y="2947451"/>
+              <a:off x="1712428" y="2947451"/>
               <a:ext cx="61566" cy="61566"/>
             </a:xfrm>
             <a:prstGeom prst="ellipse">
@@ -4144,7 +4144,7 @@
           </p:nvSpPr>
           <p:spPr>
             <a:xfrm>
-              <a:off x="1918825" y="2681214"/>
+              <a:off x="1906190" y="2681214"/>
               <a:ext cx="61566" cy="61566"/>
             </a:xfrm>
             <a:prstGeom prst="ellipse">
@@ -4170,7 +4170,7 @@
           </p:nvSpPr>
           <p:spPr>
             <a:xfrm>
-              <a:off x="1734779" y="3403037"/>
+              <a:off x="1654280" y="3403037"/>
               <a:ext cx="61566" cy="61566"/>
             </a:xfrm>
             <a:prstGeom prst="ellipse">
@@ -4196,7 +4196,7 @@
           </p:nvSpPr>
           <p:spPr>
             <a:xfrm>
-              <a:off x="1943003" y="3235366"/>
+              <a:off x="1870584" y="3235366"/>
               <a:ext cx="61566" cy="61566"/>
             </a:xfrm>
             <a:prstGeom prst="ellipse">
@@ -4222,7 +4222,7 @@
           </p:nvSpPr>
           <p:spPr>
             <a:xfrm>
-              <a:off x="1660238" y="3347207"/>
+              <a:off x="1697220" y="3347207"/>
               <a:ext cx="61566" cy="61566"/>
             </a:xfrm>
             <a:prstGeom prst="ellipse">
@@ -4248,7 +4248,7 @@
           </p:nvSpPr>
           <p:spPr>
             <a:xfrm>
-              <a:off x="1869039" y="3443421"/>
+              <a:off x="1926882" y="3443421"/>
               <a:ext cx="61566" cy="61566"/>
             </a:xfrm>
             <a:prstGeom prst="ellipse">
@@ -4274,7 +4274,7 @@
           </p:nvSpPr>
           <p:spPr>
             <a:xfrm>
-              <a:off x="1735986" y="2974843"/>
+              <a:off x="1676023" y="2974843"/>
               <a:ext cx="61566" cy="61566"/>
             </a:xfrm>
             <a:prstGeom prst="ellipse">
@@ -4300,7 +4300,7 @@
           </p:nvSpPr>
           <p:spPr>
             <a:xfrm>
-              <a:off x="1973984" y="3056370"/>
+              <a:off x="1909743" y="3056370"/>
               <a:ext cx="61566" cy="61566"/>
             </a:xfrm>
             <a:prstGeom prst="ellipse">
@@ -4326,7 +4326,7 @@
           </p:nvSpPr>
           <p:spPr>
             <a:xfrm>
-              <a:off x="1659021" y="2892603"/>
+              <a:off x="1695224" y="2892603"/>
               <a:ext cx="61566" cy="61566"/>
             </a:xfrm>
             <a:prstGeom prst="ellipse">
@@ -4352,7 +4352,7 @@
           </p:nvSpPr>
           <p:spPr>
             <a:xfrm>
-              <a:off x="1907744" y="2612066"/>
+              <a:off x="1968700" y="2612066"/>
               <a:ext cx="61566" cy="61566"/>
             </a:xfrm>
             <a:prstGeom prst="ellipse">
@@ -4378,7 +4378,7 @@
           </p:nvSpPr>
           <p:spPr>
             <a:xfrm>
-              <a:off x="1655836" y="3377218"/>
+              <a:off x="1657744" y="3377218"/>
               <a:ext cx="61566" cy="61566"/>
             </a:xfrm>
             <a:prstGeom prst="ellipse">
@@ -4404,7 +4404,7 @@
           </p:nvSpPr>
           <p:spPr>
             <a:xfrm>
-              <a:off x="1944292" y="3173833"/>
+              <a:off x="1924084" y="3173833"/>
               <a:ext cx="61566" cy="61566"/>
             </a:xfrm>
             <a:prstGeom prst="ellipse">
@@ -4430,7 +4430,7 @@
           </p:nvSpPr>
           <p:spPr>
             <a:xfrm>
-              <a:off x="1655926" y="2972978"/>
+              <a:off x="1732938" y="2972978"/>
               <a:ext cx="61566" cy="61566"/>
             </a:xfrm>
             <a:prstGeom prst="ellipse">
@@ -4456,7 +4456,7 @@
           </p:nvSpPr>
           <p:spPr>
             <a:xfrm>
-              <a:off x="1933014" y="3077098"/>
+              <a:off x="1952009" y="3077098"/>
               <a:ext cx="61566" cy="61566"/>
             </a:xfrm>
             <a:prstGeom prst="ellipse">
@@ -4482,7 +4482,7 @@
           </p:nvSpPr>
           <p:spPr>
             <a:xfrm>
-              <a:off x="1647590" y="3391274"/>
+              <a:off x="1749241" y="3391274"/>
               <a:ext cx="61566" cy="61566"/>
             </a:xfrm>
             <a:prstGeom prst="ellipse">
@@ -4508,7 +4508,7 @@
           </p:nvSpPr>
           <p:spPr>
             <a:xfrm>
-              <a:off x="1876978" y="2548268"/>
+              <a:off x="1866161" y="2548268"/>
               <a:ext cx="61566" cy="61566"/>
             </a:xfrm>
             <a:prstGeom prst="ellipse">
@@ -4534,7 +4534,7 @@
           </p:nvSpPr>
           <p:spPr>
             <a:xfrm>
-              <a:off x="1673714" y="2880321"/>
+              <a:off x="1737348" y="2880321"/>
               <a:ext cx="61566" cy="61566"/>
             </a:xfrm>
             <a:prstGeom prst="ellipse">
@@ -4560,7 +4560,7 @@
           </p:nvSpPr>
           <p:spPr>
             <a:xfrm>
-              <a:off x="1913695" y="2296765"/>
+              <a:off x="1942960" y="2296765"/>
               <a:ext cx="61566" cy="61566"/>
             </a:xfrm>
             <a:prstGeom prst="ellipse">
@@ -4586,7 +4586,7 @@
           </p:nvSpPr>
           <p:spPr>
             <a:xfrm>
-              <a:off x="1701337" y="3038022"/>
+              <a:off x="1695128" y="3038022"/>
               <a:ext cx="61566" cy="61566"/>
             </a:xfrm>
             <a:prstGeom prst="ellipse">
@@ -4612,7 +4612,7 @@
           </p:nvSpPr>
           <p:spPr>
             <a:xfrm>
-              <a:off x="1948228" y="3041648"/>
+              <a:off x="1966653" y="3041648"/>
               <a:ext cx="61566" cy="61566"/>
             </a:xfrm>
             <a:prstGeom prst="ellipse">
@@ -4638,7 +4638,7 @@
           </p:nvSpPr>
           <p:spPr>
             <a:xfrm>
-              <a:off x="1679934" y="3161323"/>
+              <a:off x="1697187" y="3161323"/>
               <a:ext cx="61566" cy="61566"/>
             </a:xfrm>
             <a:prstGeom prst="ellipse">
@@ -4664,7 +4664,7 @@
           </p:nvSpPr>
           <p:spPr>
             <a:xfrm>
-              <a:off x="1919795" y="2822739"/>
+              <a:off x="1911406" y="2822739"/>
               <a:ext cx="61566" cy="61566"/>
             </a:xfrm>
             <a:prstGeom prst="ellipse">
@@ -4690,7 +4690,7 @@
           </p:nvSpPr>
           <p:spPr>
             <a:xfrm>
-              <a:off x="1681262" y="3930024"/>
+              <a:off x="1724631" y="3930024"/>
               <a:ext cx="61566" cy="61566"/>
             </a:xfrm>
             <a:prstGeom prst="ellipse">
@@ -4716,7 +4716,7 @@
           </p:nvSpPr>
           <p:spPr>
             <a:xfrm>
-              <a:off x="1871154" y="3566066"/>
+              <a:off x="1974379" y="3566066"/>
               <a:ext cx="61566" cy="61566"/>
             </a:xfrm>
             <a:prstGeom prst="ellipse">
@@ -4742,7 +4742,7 @@
           </p:nvSpPr>
           <p:spPr>
             <a:xfrm>
-              <a:off x="1737270" y="2813625"/>
+              <a:off x="1708458" y="2813625"/>
               <a:ext cx="61566" cy="61566"/>
             </a:xfrm>
             <a:prstGeom prst="ellipse">
@@ -4768,7 +4768,7 @@
           </p:nvSpPr>
           <p:spPr>
             <a:xfrm>
-              <a:off x="1884224" y="2597033"/>
+              <a:off x="1870031" y="2597033"/>
               <a:ext cx="61566" cy="61566"/>
             </a:xfrm>
             <a:prstGeom prst="ellipse">
@@ -4794,7 +4794,7 @@
           </p:nvSpPr>
           <p:spPr>
             <a:xfrm>
-              <a:off x="1694621" y="3020528"/>
+              <a:off x="1735866" y="3020528"/>
               <a:ext cx="61566" cy="61566"/>
             </a:xfrm>
             <a:prstGeom prst="ellipse">
@@ -4820,7 +4820,7 @@
           </p:nvSpPr>
           <p:spPr>
             <a:xfrm>
-              <a:off x="1901322" y="3182367"/>
+              <a:off x="1958263" y="3182367"/>
               <a:ext cx="61566" cy="61566"/>
             </a:xfrm>
             <a:prstGeom prst="ellipse">
@@ -4846,7 +4846,7 @@
           </p:nvSpPr>
           <p:spPr>
             <a:xfrm>
-              <a:off x="1683551" y="2715796"/>
+              <a:off x="1655918" y="2715796"/>
               <a:ext cx="61566" cy="61566"/>
             </a:xfrm>
             <a:prstGeom prst="ellipse">
@@ -4872,7 +4872,7 @@
           </p:nvSpPr>
           <p:spPr>
             <a:xfrm>
-              <a:off x="1874729" y="2461185"/>
+              <a:off x="1917167" y="2461185"/>
               <a:ext cx="61566" cy="61566"/>
             </a:xfrm>
             <a:prstGeom prst="ellipse">
@@ -4898,7 +4898,7 @@
           </p:nvSpPr>
           <p:spPr>
             <a:xfrm>
-              <a:off x="1745598" y="3134152"/>
+              <a:off x="1725067" y="3134152"/>
               <a:ext cx="61566" cy="61566"/>
             </a:xfrm>
             <a:prstGeom prst="ellipse">
@@ -4924,7 +4924,7 @@
           </p:nvSpPr>
           <p:spPr>
             <a:xfrm>
-              <a:off x="1881636" y="2788847"/>
+              <a:off x="1948809" y="2788847"/>
               <a:ext cx="61566" cy="61566"/>
             </a:xfrm>
             <a:prstGeom prst="ellipse">
@@ -4950,7 +4950,7 @@
           </p:nvSpPr>
           <p:spPr>
             <a:xfrm>
-              <a:off x="1716117" y="2779820"/>
+              <a:off x="1651654" y="2779820"/>
               <a:ext cx="61566" cy="61566"/>
             </a:xfrm>
             <a:prstGeom prst="ellipse">
@@ -4976,7 +4976,7 @@
           </p:nvSpPr>
           <p:spPr>
             <a:xfrm>
-              <a:off x="1945050" y="2970252"/>
+              <a:off x="1869421" y="2970252"/>
               <a:ext cx="61566" cy="61566"/>
             </a:xfrm>
             <a:prstGeom prst="ellipse">
@@ -5002,7 +5002,7 @@
           </p:nvSpPr>
           <p:spPr>
             <a:xfrm>
-              <a:off x="1707309" y="2884468"/>
+              <a:off x="1727793" y="2884468"/>
               <a:ext cx="61566" cy="61566"/>
             </a:xfrm>
             <a:prstGeom prst="ellipse">
@@ -5028,7 +5028,7 @@
           </p:nvSpPr>
           <p:spPr>
             <a:xfrm>
-              <a:off x="1925456" y="3203274"/>
+              <a:off x="1929381" y="3203274"/>
               <a:ext cx="61566" cy="61566"/>
             </a:xfrm>
             <a:prstGeom prst="ellipse">
@@ -5054,7 +5054,7 @@
           </p:nvSpPr>
           <p:spPr>
             <a:xfrm>
-              <a:off x="1707124" y="2552192"/>
+              <a:off x="1689165" y="2552192"/>
               <a:ext cx="61566" cy="61566"/>
             </a:xfrm>
             <a:prstGeom prst="ellipse">
@@ -5080,7 +5080,7 @@
           </p:nvSpPr>
           <p:spPr>
             <a:xfrm>
-              <a:off x="1953758" y="2680938"/>
+              <a:off x="1942375" y="2680938"/>
               <a:ext cx="61566" cy="61566"/>
             </a:xfrm>
             <a:prstGeom prst="ellipse">
@@ -5106,7 +5106,7 @@
           </p:nvSpPr>
           <p:spPr>
             <a:xfrm>
-              <a:off x="1733096" y="3154599"/>
+              <a:off x="1722696" y="3154599"/>
               <a:ext cx="61566" cy="61566"/>
             </a:xfrm>
             <a:prstGeom prst="ellipse">
@@ -5132,7 +5132,7 @@
           </p:nvSpPr>
           <p:spPr>
             <a:xfrm>
-              <a:off x="1892038" y="3309676"/>
+              <a:off x="1952775" y="3309676"/>
               <a:ext cx="61566" cy="61566"/>
             </a:xfrm>
             <a:prstGeom prst="ellipse">
@@ -5158,7 +5158,7 @@
           </p:nvSpPr>
           <p:spPr>
             <a:xfrm>
-              <a:off x="1725535" y="3245455"/>
+              <a:off x="1751557" y="3245455"/>
               <a:ext cx="61566" cy="61566"/>
             </a:xfrm>
             <a:prstGeom prst="ellipse">
@@ -5184,7 +5184,7 @@
           </p:nvSpPr>
           <p:spPr>
             <a:xfrm>
-              <a:off x="1907158" y="3291634"/>
+              <a:off x="1969423" y="3291634"/>
               <a:ext cx="61566" cy="61566"/>
             </a:xfrm>
             <a:prstGeom prst="ellipse">
@@ -5210,7 +5210,7 @@
           </p:nvSpPr>
           <p:spPr>
             <a:xfrm>
-              <a:off x="1701383" y="3167825"/>
+              <a:off x="1749280" y="3167825"/>
               <a:ext cx="61566" cy="61566"/>
             </a:xfrm>
             <a:prstGeom prst="ellipse">
@@ -5236,7 +5236,7 @@
           </p:nvSpPr>
           <p:spPr>
             <a:xfrm>
-              <a:off x="1897052" y="3179339"/>
+              <a:off x="1910648" y="3179339"/>
               <a:ext cx="61566" cy="61566"/>
             </a:xfrm>
             <a:prstGeom prst="ellipse">
@@ -5262,7 +5262,7 @@
           </p:nvSpPr>
           <p:spPr>
             <a:xfrm>
-              <a:off x="1649830" y="1723155"/>
+              <a:off x="1700049" y="1723155"/>
               <a:ext cx="61566" cy="61566"/>
             </a:xfrm>
             <a:prstGeom prst="ellipse">
@@ -5288,7 +5288,7 @@
           </p:nvSpPr>
           <p:spPr>
             <a:xfrm>
-              <a:off x="1901120" y="2128534"/>
+              <a:off x="1870033" y="2128534"/>
               <a:ext cx="61566" cy="61566"/>
             </a:xfrm>
             <a:prstGeom prst="ellipse">
@@ -5314,7 +5314,7 @@
           </p:nvSpPr>
           <p:spPr>
             <a:xfrm>
-              <a:off x="1643483" y="2175161"/>
+              <a:off x="1668983" y="2175161"/>
               <a:ext cx="61566" cy="61566"/>
             </a:xfrm>
             <a:prstGeom prst="ellipse">
@@ -5340,7 +5340,7 @@
           </p:nvSpPr>
           <p:spPr>
             <a:xfrm>
-              <a:off x="1964736" y="2470210"/>
+              <a:off x="1896142" y="2470210"/>
               <a:ext cx="61566" cy="61566"/>
             </a:xfrm>
             <a:prstGeom prst="ellipse">
@@ -5366,7 +5366,7 @@
           </p:nvSpPr>
           <p:spPr>
             <a:xfrm>
-              <a:off x="1663326" y="3428389"/>
+              <a:off x="1714253" y="3428389"/>
               <a:ext cx="61566" cy="61566"/>
             </a:xfrm>
             <a:prstGeom prst="ellipse">
@@ -5392,7 +5392,7 @@
           </p:nvSpPr>
           <p:spPr>
             <a:xfrm>
-              <a:off x="1951430" y="3248280"/>
+              <a:off x="1901813" y="3248280"/>
               <a:ext cx="61566" cy="61566"/>
             </a:xfrm>
             <a:prstGeom prst="ellipse">
@@ -5418,7 +5418,7 @@
           </p:nvSpPr>
           <p:spPr>
             <a:xfrm>
-              <a:off x="1659426" y="3522232"/>
+              <a:off x="1691081" y="3522232"/>
               <a:ext cx="61566" cy="61566"/>
             </a:xfrm>
             <a:prstGeom prst="ellipse">
@@ -5444,7 +5444,7 @@
           </p:nvSpPr>
           <p:spPr>
             <a:xfrm>
-              <a:off x="1888018" y="3457630"/>
+              <a:off x="1934532" y="3457630"/>
               <a:ext cx="61566" cy="61566"/>
             </a:xfrm>
             <a:prstGeom prst="ellipse">
@@ -5470,7 +5470,7 @@
           </p:nvSpPr>
           <p:spPr>
             <a:xfrm>
-              <a:off x="1740183" y="3294570"/>
+              <a:off x="1704910" y="3294570"/>
               <a:ext cx="61566" cy="61566"/>
             </a:xfrm>
             <a:prstGeom prst="ellipse">
@@ -5496,7 +5496,7 @@
           </p:nvSpPr>
           <p:spPr>
             <a:xfrm>
-              <a:off x="1895669" y="3381516"/>
+              <a:off x="1953163" y="3381516"/>
               <a:ext cx="61566" cy="61566"/>
             </a:xfrm>
             <a:prstGeom prst="ellipse">
@@ -5522,7 +5522,7 @@
           </p:nvSpPr>
           <p:spPr>
             <a:xfrm>
-              <a:off x="1748134" y="2846731"/>
+              <a:off x="1715810" y="2846731"/>
               <a:ext cx="61566" cy="61566"/>
             </a:xfrm>
             <a:prstGeom prst="ellipse">
@@ -5548,7 +5548,7 @@
           </p:nvSpPr>
           <p:spPr>
             <a:xfrm>
-              <a:off x="1890152" y="3273240"/>
+              <a:off x="1880976" y="3273240"/>
               <a:ext cx="61566" cy="61566"/>
             </a:xfrm>
             <a:prstGeom prst="ellipse">
@@ -5574,7 +5574,7 @@
           </p:nvSpPr>
           <p:spPr>
             <a:xfrm>
-              <a:off x="1752048" y="3241353"/>
+              <a:off x="1647774" y="3241353"/>
               <a:ext cx="61566" cy="61566"/>
             </a:xfrm>
             <a:prstGeom prst="ellipse">
@@ -5600,7 +5600,7 @@
           </p:nvSpPr>
           <p:spPr>
             <a:xfrm>
-              <a:off x="1907401" y="3393084"/>
+              <a:off x="1871169" y="3393084"/>
               <a:ext cx="61566" cy="61566"/>
             </a:xfrm>
             <a:prstGeom prst="ellipse">
@@ -5626,7 +5626,7 @@
           </p:nvSpPr>
           <p:spPr>
             <a:xfrm>
-              <a:off x="1696204" y="3072289"/>
+              <a:off x="1732742" y="3072289"/>
               <a:ext cx="61566" cy="61566"/>
             </a:xfrm>
             <a:prstGeom prst="ellipse">
@@ -5652,7 +5652,7 @@
           </p:nvSpPr>
           <p:spPr>
             <a:xfrm>
-              <a:off x="1891865" y="3261270"/>
+              <a:off x="1906368" y="3261270"/>
               <a:ext cx="61566" cy="61566"/>
             </a:xfrm>
             <a:prstGeom prst="ellipse">
@@ -5678,7 +5678,7 @@
           </p:nvSpPr>
           <p:spPr>
             <a:xfrm>
-              <a:off x="1745846" y="3112521"/>
+              <a:off x="1692683" y="3112521"/>
               <a:ext cx="61566" cy="61566"/>
             </a:xfrm>
             <a:prstGeom prst="ellipse">
@@ -5704,7 +5704,7 @@
           </p:nvSpPr>
           <p:spPr>
             <a:xfrm>
-              <a:off x="1939584" y="3270085"/>
+              <a:off x="1914903" y="3270085"/>
               <a:ext cx="61566" cy="61566"/>
             </a:xfrm>
             <a:prstGeom prst="ellipse">
@@ -5730,7 +5730,7 @@
           </p:nvSpPr>
           <p:spPr>
             <a:xfrm>
-              <a:off x="1742963" y="3033374"/>
+              <a:off x="1663664" y="3033374"/>
               <a:ext cx="61566" cy="61566"/>
             </a:xfrm>
             <a:prstGeom prst="ellipse">
@@ -5756,7 +5756,7 @@
           </p:nvSpPr>
           <p:spPr>
             <a:xfrm>
-              <a:off x="1868001" y="3169719"/>
+              <a:off x="1924259" y="3169719"/>
               <a:ext cx="61566" cy="61566"/>
             </a:xfrm>
             <a:prstGeom prst="ellipse">
@@ -5782,7 +5782,7 @@
           </p:nvSpPr>
           <p:spPr>
             <a:xfrm>
-              <a:off x="1729811" y="3393218"/>
+              <a:off x="1667042" y="3393218"/>
               <a:ext cx="61566" cy="61566"/>
             </a:xfrm>
             <a:prstGeom prst="ellipse">
@@ -5808,7 +5808,7 @@
           </p:nvSpPr>
           <p:spPr>
             <a:xfrm>
-              <a:off x="1960017" y="3172375"/>
+              <a:off x="1927012" y="3172375"/>
               <a:ext cx="61566" cy="61566"/>
             </a:xfrm>
             <a:prstGeom prst="ellipse">
@@ -5834,7 +5834,7 @@
           </p:nvSpPr>
           <p:spPr>
             <a:xfrm>
-              <a:off x="1742673" y="3039865"/>
+              <a:off x="1653242" y="3039865"/>
               <a:ext cx="61566" cy="61566"/>
             </a:xfrm>
             <a:prstGeom prst="ellipse">
@@ -5860,7 +5860,7 @@
           </p:nvSpPr>
           <p:spPr>
             <a:xfrm>
-              <a:off x="1924913" y="3133499"/>
+              <a:off x="1882420" y="3133499"/>
               <a:ext cx="61566" cy="61566"/>
             </a:xfrm>
             <a:prstGeom prst="ellipse">
@@ -5886,7 +5886,7 @@
           </p:nvSpPr>
           <p:spPr>
             <a:xfrm>
-              <a:off x="1674539" y="3322384"/>
+              <a:off x="1715522" y="3322384"/>
               <a:ext cx="61566" cy="61566"/>
             </a:xfrm>
             <a:prstGeom prst="ellipse">
@@ -5912,7 +5912,7 @@
           </p:nvSpPr>
           <p:spPr>
             <a:xfrm>
-              <a:off x="1900055" y="3226809"/>
+              <a:off x="1942038" y="3226809"/>
               <a:ext cx="61566" cy="61566"/>
             </a:xfrm>
             <a:prstGeom prst="ellipse">
@@ -5938,7 +5938,7 @@
           </p:nvSpPr>
           <p:spPr>
             <a:xfrm>
-              <a:off x="1718648" y="3353212"/>
+              <a:off x="1688932" y="3353212"/>
               <a:ext cx="61566" cy="61566"/>
             </a:xfrm>
             <a:prstGeom prst="ellipse">
@@ -5964,7 +5964,7 @@
           </p:nvSpPr>
           <p:spPr>
             <a:xfrm>
-              <a:off x="1907717" y="3535969"/>
+              <a:off x="1908089" y="3535969"/>
               <a:ext cx="61566" cy="61566"/>
             </a:xfrm>
             <a:prstGeom prst="ellipse">
@@ -5990,7 +5990,7 @@
           </p:nvSpPr>
           <p:spPr>
             <a:xfrm>
-              <a:off x="1719663" y="3040390"/>
+              <a:off x="1655531" y="3040390"/>
               <a:ext cx="61566" cy="61566"/>
             </a:xfrm>
             <a:prstGeom prst="ellipse">
@@ -6016,7 +6016,7 @@
           </p:nvSpPr>
           <p:spPr>
             <a:xfrm>
-              <a:off x="1916373" y="3291462"/>
+              <a:off x="1959314" y="3291462"/>
               <a:ext cx="61566" cy="61566"/>
             </a:xfrm>
             <a:prstGeom prst="ellipse">
@@ -6042,7 +6042,7 @@
           </p:nvSpPr>
           <p:spPr>
             <a:xfrm>
-              <a:off x="1665892" y="3120609"/>
+              <a:off x="1694300" y="3120609"/>
               <a:ext cx="61566" cy="61566"/>
             </a:xfrm>
             <a:prstGeom prst="ellipse">
@@ -6068,7 +6068,7 @@
           </p:nvSpPr>
           <p:spPr>
             <a:xfrm>
-              <a:off x="1916695" y="3448036"/>
+              <a:off x="1876489" y="3448036"/>
               <a:ext cx="61566" cy="61566"/>
             </a:xfrm>
             <a:prstGeom prst="ellipse">
@@ -6094,7 +6094,7 @@
           </p:nvSpPr>
           <p:spPr>
             <a:xfrm>
-              <a:off x="1679942" y="3152639"/>
+              <a:off x="1720363" y="3152639"/>
               <a:ext cx="61566" cy="61566"/>
             </a:xfrm>
             <a:prstGeom prst="ellipse">
@@ -6120,7 +6120,7 @@
           </p:nvSpPr>
           <p:spPr>
             <a:xfrm>
-              <a:off x="1869987" y="3369945"/>
+              <a:off x="1939626" y="3369945"/>
               <a:ext cx="61566" cy="61566"/>
             </a:xfrm>
             <a:prstGeom prst="ellipse">
@@ -6146,7 +6146,7 @@
           </p:nvSpPr>
           <p:spPr>
             <a:xfrm>
-              <a:off x="1743218" y="2183182"/>
+              <a:off x="1751915" y="2183182"/>
               <a:ext cx="61566" cy="61566"/>
             </a:xfrm>
             <a:prstGeom prst="ellipse">
@@ -6172,7 +6172,7 @@
           </p:nvSpPr>
           <p:spPr>
             <a:xfrm>
-              <a:off x="1952001" y="3457770"/>
+              <a:off x="1938916" y="3457770"/>
               <a:ext cx="61566" cy="61566"/>
             </a:xfrm>
             <a:prstGeom prst="ellipse">
@@ -6198,7 +6198,7 @@
           </p:nvSpPr>
           <p:spPr>
             <a:xfrm>
-              <a:off x="1677386" y="3645375"/>
+              <a:off x="1725845" y="3645375"/>
               <a:ext cx="61566" cy="61566"/>
             </a:xfrm>
             <a:prstGeom prst="ellipse">
@@ -6224,7 +6224,7 @@
           </p:nvSpPr>
           <p:spPr>
             <a:xfrm>
-              <a:off x="1882796" y="3201802"/>
+              <a:off x="1952909" y="3201802"/>
               <a:ext cx="61566" cy="61566"/>
             </a:xfrm>
             <a:prstGeom prst="ellipse">
@@ -6250,7 +6250,7 @@
           </p:nvSpPr>
           <p:spPr>
             <a:xfrm>
-              <a:off x="1730008" y="3536065"/>
+              <a:off x="1705154" y="3536065"/>
               <a:ext cx="61566" cy="61566"/>
             </a:xfrm>
             <a:prstGeom prst="ellipse">
@@ -6276,7 +6276,7 @@
           </p:nvSpPr>
           <p:spPr>
             <a:xfrm>
-              <a:off x="1970941" y="3324701"/>
+              <a:off x="1906266" y="3324701"/>
               <a:ext cx="61566" cy="61566"/>
             </a:xfrm>
             <a:prstGeom prst="ellipse">
@@ -6302,7 +6302,7 @@
           </p:nvSpPr>
           <p:spPr>
             <a:xfrm>
-              <a:off x="1661079" y="3122217"/>
+              <a:off x="1690548" y="3122217"/>
               <a:ext cx="61566" cy="61566"/>
             </a:xfrm>
             <a:prstGeom prst="ellipse">
@@ -6328,7 +6328,7 @@
           </p:nvSpPr>
           <p:spPr>
             <a:xfrm>
-              <a:off x="1925426" y="3303611"/>
+              <a:off x="1921481" y="3303611"/>
               <a:ext cx="61566" cy="61566"/>
             </a:xfrm>
             <a:prstGeom prst="ellipse">
@@ -6354,7 +6354,7 @@
           </p:nvSpPr>
           <p:spPr>
             <a:xfrm>
-              <a:off x="1693968" y="3143593"/>
+              <a:off x="1700838" y="3143593"/>
               <a:ext cx="61566" cy="61566"/>
             </a:xfrm>
             <a:prstGeom prst="ellipse">
@@ -6380,7 +6380,7 @@
           </p:nvSpPr>
           <p:spPr>
             <a:xfrm>
-              <a:off x="1956403" y="3103827"/>
+              <a:off x="1877452" y="3103827"/>
               <a:ext cx="61566" cy="61566"/>
             </a:xfrm>
             <a:prstGeom prst="ellipse">
@@ -6406,7 +6406,7 @@
           </p:nvSpPr>
           <p:spPr>
             <a:xfrm>
-              <a:off x="1674575" y="2590740"/>
+              <a:off x="1713819" y="2590740"/>
               <a:ext cx="61566" cy="61566"/>
             </a:xfrm>
             <a:prstGeom prst="ellipse">
@@ -6432,7 +6432,7 @@
           </p:nvSpPr>
           <p:spPr>
             <a:xfrm>
-              <a:off x="1896069" y="2576387"/>
+              <a:off x="1874850" y="2576387"/>
               <a:ext cx="61566" cy="61566"/>
             </a:xfrm>
             <a:prstGeom prst="ellipse">
@@ -6458,7 +6458,7 @@
           </p:nvSpPr>
           <p:spPr>
             <a:xfrm>
-              <a:off x="1701653" y="2497262"/>
+              <a:off x="1656219" y="2497262"/>
               <a:ext cx="61566" cy="61566"/>
             </a:xfrm>
             <a:prstGeom prst="ellipse">
@@ -6484,7 +6484,7 @@
           </p:nvSpPr>
           <p:spPr>
             <a:xfrm>
-              <a:off x="1922247" y="2391386"/>
+              <a:off x="1889155" y="2391386"/>
               <a:ext cx="61566" cy="61566"/>
             </a:xfrm>
             <a:prstGeom prst="ellipse">
@@ -6510,7 +6510,7 @@
           </p:nvSpPr>
           <p:spPr>
             <a:xfrm>
-              <a:off x="1697882" y="3184716"/>
+              <a:off x="1725079" y="3184716"/>
               <a:ext cx="61566" cy="61566"/>
             </a:xfrm>
             <a:prstGeom prst="ellipse">
@@ -6536,7 +6536,7 @@
           </p:nvSpPr>
           <p:spPr>
             <a:xfrm>
-              <a:off x="1887790" y="2880629"/>
+              <a:off x="1960155" y="2880629"/>
               <a:ext cx="61566" cy="61566"/>
             </a:xfrm>
             <a:prstGeom prst="ellipse">
@@ -6562,7 +6562,7 @@
           </p:nvSpPr>
           <p:spPr>
             <a:xfrm>
-              <a:off x="1685694" y="2698095"/>
+              <a:off x="1652112" y="2698095"/>
               <a:ext cx="61566" cy="61566"/>
             </a:xfrm>
             <a:prstGeom prst="ellipse">
@@ -6588,7 +6588,7 @@
           </p:nvSpPr>
           <p:spPr>
             <a:xfrm>
-              <a:off x="1970585" y="2942752"/>
+              <a:off x="1941296" y="2942752"/>
               <a:ext cx="61566" cy="61566"/>
             </a:xfrm>
             <a:prstGeom prst="ellipse">
@@ -6614,7 +6614,7 @@
           </p:nvSpPr>
           <p:spPr>
             <a:xfrm>
-              <a:off x="1747851" y="2506351"/>
+              <a:off x="1746498" y="2506351"/>
               <a:ext cx="61566" cy="61566"/>
             </a:xfrm>
             <a:prstGeom prst="ellipse">
@@ -6640,7 +6640,7 @@
           </p:nvSpPr>
           <p:spPr>
             <a:xfrm>
-              <a:off x="1961076" y="2329416"/>
+              <a:off x="1894166" y="2329416"/>
               <a:ext cx="61566" cy="61566"/>
             </a:xfrm>
             <a:prstGeom prst="ellipse">
@@ -6666,7 +6666,7 @@
           </p:nvSpPr>
           <p:spPr>
             <a:xfrm>
-              <a:off x="1710972" y="3282928"/>
+              <a:off x="1743756" y="3282928"/>
               <a:ext cx="61566" cy="61566"/>
             </a:xfrm>
             <a:prstGeom prst="ellipse">
@@ -6692,7 +6692,7 @@
           </p:nvSpPr>
           <p:spPr>
             <a:xfrm>
-              <a:off x="1948255" y="3389436"/>
+              <a:off x="1935966" y="3389436"/>
               <a:ext cx="61566" cy="61566"/>
             </a:xfrm>
             <a:prstGeom prst="ellipse">
@@ -6718,7 +6718,7 @@
           </p:nvSpPr>
           <p:spPr>
             <a:xfrm>
-              <a:off x="1751090" y="2942296"/>
+              <a:off x="1647115" y="2942296"/>
               <a:ext cx="61566" cy="61566"/>
             </a:xfrm>
             <a:prstGeom prst="ellipse">
@@ -6744,7 +6744,7 @@
           </p:nvSpPr>
           <p:spPr>
             <a:xfrm>
-              <a:off x="1962477" y="3192005"/>
+              <a:off x="1965966" y="3192005"/>
               <a:ext cx="61566" cy="61566"/>
             </a:xfrm>
             <a:prstGeom prst="ellipse">
@@ -6770,7 +6770,7 @@
           </p:nvSpPr>
           <p:spPr>
             <a:xfrm>
-              <a:off x="1735894" y="2429260"/>
+              <a:off x="1710544" y="2429260"/>
               <a:ext cx="61566" cy="61566"/>
             </a:xfrm>
             <a:prstGeom prst="ellipse">
@@ -6796,7 +6796,7 @@
           </p:nvSpPr>
           <p:spPr>
             <a:xfrm>
-              <a:off x="1934383" y="2686774"/>
+              <a:off x="1913938" y="2686774"/>
               <a:ext cx="61566" cy="61566"/>
             </a:xfrm>
             <a:prstGeom prst="ellipse">
@@ -6822,7 +6822,7 @@
           </p:nvSpPr>
           <p:spPr>
             <a:xfrm>
-              <a:off x="1709386" y="3728646"/>
+              <a:off x="1696679" y="3728646"/>
               <a:ext cx="61566" cy="61566"/>
             </a:xfrm>
             <a:prstGeom prst="ellipse">
@@ -6848,7 +6848,7 @@
           </p:nvSpPr>
           <p:spPr>
             <a:xfrm>
-              <a:off x="1871002" y="2970091"/>
+              <a:off x="1884601" y="2970091"/>
               <a:ext cx="61566" cy="61566"/>
             </a:xfrm>
             <a:prstGeom prst="ellipse">
@@ -6874,7 +6874,7 @@
           </p:nvSpPr>
           <p:spPr>
             <a:xfrm>
-              <a:off x="3217720" y="2248423"/>
+              <a:off x="3214291" y="2248423"/>
               <a:ext cx="61566" cy="61566"/>
             </a:xfrm>
             <a:prstGeom prst="ellipse">
@@ -6900,7 +6900,7 @@
           </p:nvSpPr>
           <p:spPr>
             <a:xfrm>
-              <a:off x="3412376" y="2402394"/>
+              <a:off x="3483579" y="2402394"/>
               <a:ext cx="61566" cy="61566"/>
             </a:xfrm>
             <a:prstGeom prst="ellipse">
@@ -6926,7 +6926,7 @@
           </p:nvSpPr>
           <p:spPr>
             <a:xfrm>
-              <a:off x="3279539" y="2647495"/>
+              <a:off x="3194351" y="2647495"/>
               <a:ext cx="61566" cy="61566"/>
             </a:xfrm>
             <a:prstGeom prst="ellipse">
@@ -6952,7 +6952,7 @@
           </p:nvSpPr>
           <p:spPr>
             <a:xfrm>
-              <a:off x="3467887" y="3082330"/>
+              <a:off x="3472793" y="3082330"/>
               <a:ext cx="61566" cy="61566"/>
             </a:xfrm>
             <a:prstGeom prst="ellipse">
@@ -6978,7 +6978,7 @@
           </p:nvSpPr>
           <p:spPr>
             <a:xfrm>
-              <a:off x="3253329" y="3043180"/>
+              <a:off x="3282027" y="3043180"/>
               <a:ext cx="61566" cy="61566"/>
             </a:xfrm>
             <a:prstGeom prst="ellipse">
@@ -7004,7 +7004,7 @@
           </p:nvSpPr>
           <p:spPr>
             <a:xfrm>
-              <a:off x="3425096" y="3100606"/>
+              <a:off x="3424711" y="3100606"/>
               <a:ext cx="61566" cy="61566"/>
             </a:xfrm>
             <a:prstGeom prst="ellipse">
@@ -7030,7 +7030,7 @@
           </p:nvSpPr>
           <p:spPr>
             <a:xfrm>
-              <a:off x="3228202" y="2677424"/>
+              <a:off x="3230952" y="2677424"/>
               <a:ext cx="61566" cy="61566"/>
             </a:xfrm>
             <a:prstGeom prst="ellipse">
@@ -7056,7 +7056,7 @@
           </p:nvSpPr>
           <p:spPr>
             <a:xfrm>
-              <a:off x="3495652" y="2813758"/>
+              <a:off x="3415359" y="2813758"/>
               <a:ext cx="61566" cy="61566"/>
             </a:xfrm>
             <a:prstGeom prst="ellipse">
@@ -7082,7 +7082,7 @@
           </p:nvSpPr>
           <p:spPr>
             <a:xfrm>
-              <a:off x="3281692" y="2581442"/>
+              <a:off x="3189172" y="2581442"/>
               <a:ext cx="61566" cy="61566"/>
             </a:xfrm>
             <a:prstGeom prst="ellipse">
@@ -7108,7 +7108,7 @@
           </p:nvSpPr>
           <p:spPr>
             <a:xfrm>
-              <a:off x="3485574" y="2696997"/>
+              <a:off x="3455025" y="2696997"/>
               <a:ext cx="61566" cy="61566"/>
             </a:xfrm>
             <a:prstGeom prst="ellipse">
@@ -7134,7 +7134,7 @@
           </p:nvSpPr>
           <p:spPr>
             <a:xfrm>
-              <a:off x="3224066" y="2694668"/>
+              <a:off x="3183807" y="2694668"/>
               <a:ext cx="61566" cy="61566"/>
             </a:xfrm>
             <a:prstGeom prst="ellipse">
@@ -7160,7 +7160,7 @@
           </p:nvSpPr>
           <p:spPr>
             <a:xfrm>
-              <a:off x="3470571" y="2891167"/>
+              <a:off x="3471946" y="2891167"/>
               <a:ext cx="61566" cy="61566"/>
             </a:xfrm>
             <a:prstGeom prst="ellipse">
@@ -7186,7 +7186,7 @@
           </p:nvSpPr>
           <p:spPr>
             <a:xfrm>
-              <a:off x="3289902" y="2868118"/>
+              <a:off x="3196725" y="2868118"/>
               <a:ext cx="61566" cy="61566"/>
             </a:xfrm>
             <a:prstGeom prst="ellipse">
@@ -7212,7 +7212,7 @@
           </p:nvSpPr>
           <p:spPr>
             <a:xfrm>
-              <a:off x="3431312" y="2922755"/>
+              <a:off x="3453761" y="2922755"/>
               <a:ext cx="61566" cy="61566"/>
             </a:xfrm>
             <a:prstGeom prst="ellipse">
@@ -7238,7 +7238,7 @@
           </p:nvSpPr>
           <p:spPr>
             <a:xfrm>
-              <a:off x="3187059" y="2586945"/>
+              <a:off x="3194487" y="2586945"/>
               <a:ext cx="61566" cy="61566"/>
             </a:xfrm>
             <a:prstGeom prst="ellipse">
@@ -7264,7 +7264,7 @@
           </p:nvSpPr>
           <p:spPr>
             <a:xfrm>
-              <a:off x="3407478" y="2790343"/>
+              <a:off x="3430015" y="2790343"/>
               <a:ext cx="61566" cy="61566"/>
             </a:xfrm>
             <a:prstGeom prst="ellipse">
@@ -7290,7 +7290,7 @@
           </p:nvSpPr>
           <p:spPr>
             <a:xfrm>
-              <a:off x="3263664" y="3266190"/>
+              <a:off x="3288574" y="3266190"/>
               <a:ext cx="61566" cy="61566"/>
             </a:xfrm>
             <a:prstGeom prst="ellipse">
@@ -7316,7 +7316,7 @@
           </p:nvSpPr>
           <p:spPr>
             <a:xfrm>
-              <a:off x="3405880" y="3552208"/>
+              <a:off x="3494668" y="3552208"/>
               <a:ext cx="61566" cy="61566"/>
             </a:xfrm>
             <a:prstGeom prst="ellipse">
@@ -7342,7 +7342,7 @@
           </p:nvSpPr>
           <p:spPr>
             <a:xfrm>
-              <a:off x="3259814" y="3032043"/>
+              <a:off x="3271645" y="3032043"/>
               <a:ext cx="61566" cy="61566"/>
             </a:xfrm>
             <a:prstGeom prst="ellipse">
@@ -7368,7 +7368,7 @@
           </p:nvSpPr>
           <p:spPr>
             <a:xfrm>
-              <a:off x="3412442" y="3527825"/>
+              <a:off x="3485078" y="3527825"/>
               <a:ext cx="61566" cy="61566"/>
             </a:xfrm>
             <a:prstGeom prst="ellipse">
@@ -7394,7 +7394,7 @@
           </p:nvSpPr>
           <p:spPr>
             <a:xfrm>
-              <a:off x="3199511" y="2705023"/>
+              <a:off x="3279227" y="2705023"/>
               <a:ext cx="61566" cy="61566"/>
             </a:xfrm>
             <a:prstGeom prst="ellipse">
@@ -7420,7 +7420,7 @@
           </p:nvSpPr>
           <p:spPr>
             <a:xfrm>
-              <a:off x="3488424" y="2918815"/>
+              <a:off x="3412498" y="2918815"/>
               <a:ext cx="61566" cy="61566"/>
             </a:xfrm>
             <a:prstGeom prst="ellipse">
@@ -7446,7 +7446,7 @@
           </p:nvSpPr>
           <p:spPr>
             <a:xfrm>
-              <a:off x="3249922" y="2571530"/>
+              <a:off x="3257239" y="2571530"/>
               <a:ext cx="61566" cy="61566"/>
             </a:xfrm>
             <a:prstGeom prst="ellipse">
@@ -7472,7 +7472,7 @@
           </p:nvSpPr>
           <p:spPr>
             <a:xfrm>
-              <a:off x="3485715" y="3085301"/>
+              <a:off x="3426265" y="3085301"/>
               <a:ext cx="61566" cy="61566"/>
             </a:xfrm>
             <a:prstGeom prst="ellipse">
@@ -7498,7 +7498,7 @@
           </p:nvSpPr>
           <p:spPr>
             <a:xfrm>
-              <a:off x="3227590" y="2714126"/>
+              <a:off x="3254252" y="2714126"/>
               <a:ext cx="61566" cy="61566"/>
             </a:xfrm>
             <a:prstGeom prst="ellipse">
@@ -7524,7 +7524,7 @@
           </p:nvSpPr>
           <p:spPr>
             <a:xfrm>
-              <a:off x="3407331" y="3035386"/>
+              <a:off x="3407349" y="3035386"/>
               <a:ext cx="61566" cy="61566"/>
             </a:xfrm>
             <a:prstGeom prst="ellipse">
@@ -7550,7 +7550,7 @@
           </p:nvSpPr>
           <p:spPr>
             <a:xfrm>
-              <a:off x="3233471" y="3235726"/>
+              <a:off x="3236943" y="3235726"/>
               <a:ext cx="61566" cy="61566"/>
             </a:xfrm>
             <a:prstGeom prst="ellipse">
@@ -7576,7 +7576,7 @@
           </p:nvSpPr>
           <p:spPr>
             <a:xfrm>
-              <a:off x="3436473" y="3433762"/>
+              <a:off x="3469502" y="3433762"/>
               <a:ext cx="61566" cy="61566"/>
             </a:xfrm>
             <a:prstGeom prst="ellipse">
@@ -7602,7 +7602,7 @@
           </p:nvSpPr>
           <p:spPr>
             <a:xfrm>
-              <a:off x="3266828" y="2669586"/>
+              <a:off x="3239917" y="2669586"/>
               <a:ext cx="61566" cy="61566"/>
             </a:xfrm>
             <a:prstGeom prst="ellipse">
@@ -7628,7 +7628,7 @@
           </p:nvSpPr>
           <p:spPr>
             <a:xfrm>
-              <a:off x="3424355" y="3115201"/>
+              <a:off x="3458064" y="3115201"/>
               <a:ext cx="61566" cy="61566"/>
             </a:xfrm>
             <a:prstGeom prst="ellipse">
@@ -7654,7 +7654,7 @@
           </p:nvSpPr>
           <p:spPr>
             <a:xfrm>
-              <a:off x="3281459" y="3433579"/>
+              <a:off x="3246600" y="3433579"/>
               <a:ext cx="61566" cy="61566"/>
             </a:xfrm>
             <a:prstGeom prst="ellipse">
@@ -7680,7 +7680,7 @@
           </p:nvSpPr>
           <p:spPr>
             <a:xfrm>
-              <a:off x="3511230" y="3231493"/>
+              <a:off x="3400741" y="3231493"/>
               <a:ext cx="61566" cy="61566"/>
             </a:xfrm>
             <a:prstGeom prst="ellipse">
@@ -7706,7 +7706,7 @@
           </p:nvSpPr>
           <p:spPr>
             <a:xfrm>
-              <a:off x="3288730" y="2930161"/>
+              <a:off x="3283199" y="2930161"/>
               <a:ext cx="61566" cy="61566"/>
             </a:xfrm>
             <a:prstGeom prst="ellipse">
@@ -7732,7 +7732,7 @@
           </p:nvSpPr>
           <p:spPr>
             <a:xfrm>
-              <a:off x="3459566" y="3041640"/>
+              <a:off x="3493646" y="3041640"/>
               <a:ext cx="61566" cy="61566"/>
             </a:xfrm>
             <a:prstGeom prst="ellipse">
@@ -7758,7 +7758,7 @@
           </p:nvSpPr>
           <p:spPr>
             <a:xfrm>
-              <a:off x="3260845" y="2976852"/>
+              <a:off x="3239854" y="2976852"/>
               <a:ext cx="61566" cy="61566"/>
             </a:xfrm>
             <a:prstGeom prst="ellipse">
@@ -7784,7 +7784,7 @@
           </p:nvSpPr>
           <p:spPr>
             <a:xfrm>
-              <a:off x="3482616" y="3234056"/>
+              <a:off x="3424744" y="3234056"/>
               <a:ext cx="61566" cy="61566"/>
             </a:xfrm>
             <a:prstGeom prst="ellipse">
@@ -7810,7 +7810,7 @@
           </p:nvSpPr>
           <p:spPr>
             <a:xfrm>
-              <a:off x="3248224" y="2643901"/>
+              <a:off x="3197983" y="2643901"/>
               <a:ext cx="61566" cy="61566"/>
             </a:xfrm>
             <a:prstGeom prst="ellipse">
@@ -7836,7 +7836,7 @@
           </p:nvSpPr>
           <p:spPr>
             <a:xfrm>
-              <a:off x="3406215" y="2880237"/>
+              <a:off x="3470344" y="2880237"/>
               <a:ext cx="61566" cy="61566"/>
             </a:xfrm>
             <a:prstGeom prst="ellipse">
@@ -7862,7 +7862,7 @@
           </p:nvSpPr>
           <p:spPr>
             <a:xfrm>
-              <a:off x="3184600" y="2490276"/>
+              <a:off x="3260291" y="2490276"/>
               <a:ext cx="61566" cy="61566"/>
             </a:xfrm>
             <a:prstGeom prst="ellipse">
@@ -7888,7 +7888,7 @@
           </p:nvSpPr>
           <p:spPr>
             <a:xfrm>
-              <a:off x="3458387" y="2846676"/>
+              <a:off x="3504543" y="2846676"/>
               <a:ext cx="61566" cy="61566"/>
             </a:xfrm>
             <a:prstGeom prst="ellipse">
@@ -7914,7 +7914,7 @@
           </p:nvSpPr>
           <p:spPr>
             <a:xfrm>
-              <a:off x="3219415" y="2937893"/>
+              <a:off x="3233030" y="2937893"/>
               <a:ext cx="61566" cy="61566"/>
             </a:xfrm>
             <a:prstGeom prst="ellipse">
@@ -7940,7 +7940,7 @@
           </p:nvSpPr>
           <p:spPr>
             <a:xfrm>
-              <a:off x="3429732" y="3688349"/>
+              <a:off x="3457689" y="3688349"/>
               <a:ext cx="61566" cy="61566"/>
             </a:xfrm>
             <a:prstGeom prst="ellipse">
@@ -7966,7 +7966,7 @@
           </p:nvSpPr>
           <p:spPr>
             <a:xfrm>
-              <a:off x="3200666" y="3354104"/>
+              <a:off x="3272154" y="3354104"/>
               <a:ext cx="61566" cy="61566"/>
             </a:xfrm>
             <a:prstGeom prst="ellipse">
@@ -7992,7 +7992,7 @@
           </p:nvSpPr>
           <p:spPr>
             <a:xfrm>
-              <a:off x="3460193" y="3481264"/>
+              <a:off x="3506255" y="3481264"/>
               <a:ext cx="61566" cy="61566"/>
             </a:xfrm>
             <a:prstGeom prst="ellipse">
@@ -8018,7 +8018,7 @@
           </p:nvSpPr>
           <p:spPr>
             <a:xfrm>
-              <a:off x="3266037" y="2749257"/>
+              <a:off x="3180060" y="2749257"/>
               <a:ext cx="61566" cy="61566"/>
             </a:xfrm>
             <a:prstGeom prst="ellipse">
@@ -8044,7 +8044,7 @@
           </p:nvSpPr>
           <p:spPr>
             <a:xfrm>
-              <a:off x="3493696" y="2725128"/>
+              <a:off x="3422566" y="2725128"/>
               <a:ext cx="61566" cy="61566"/>
             </a:xfrm>
             <a:prstGeom prst="ellipse">
@@ -8070,7 +8070,7 @@
           </p:nvSpPr>
           <p:spPr>
             <a:xfrm>
-              <a:off x="3214737" y="2661398"/>
+              <a:off x="3236438" y="2661398"/>
               <a:ext cx="61566" cy="61566"/>
             </a:xfrm>
             <a:prstGeom prst="ellipse">
@@ -8096,7 +8096,7 @@
           </p:nvSpPr>
           <p:spPr>
             <a:xfrm>
-              <a:off x="3448128" y="3242868"/>
+              <a:off x="3494057" y="3242868"/>
               <a:ext cx="61566" cy="61566"/>
             </a:xfrm>
             <a:prstGeom prst="ellipse">
@@ -8122,7 +8122,7 @@
           </p:nvSpPr>
           <p:spPr>
             <a:xfrm>
-              <a:off x="3261522" y="2708229"/>
+              <a:off x="3213376" y="2708229"/>
               <a:ext cx="61566" cy="61566"/>
             </a:xfrm>
             <a:prstGeom prst="ellipse">
@@ -8148,7 +8148,7 @@
           </p:nvSpPr>
           <p:spPr>
             <a:xfrm>
-              <a:off x="3467414" y="2877243"/>
+              <a:off x="3404701" y="2877243"/>
               <a:ext cx="61566" cy="61566"/>
             </a:xfrm>
             <a:prstGeom prst="ellipse">
@@ -8174,7 +8174,7 @@
           </p:nvSpPr>
           <p:spPr>
             <a:xfrm>
-              <a:off x="3183139" y="3669817"/>
+              <a:off x="3258204" y="3669817"/>
               <a:ext cx="61566" cy="61566"/>
             </a:xfrm>
             <a:prstGeom prst="ellipse">
@@ -8200,7 +8200,7 @@
           </p:nvSpPr>
           <p:spPr>
             <a:xfrm>
-              <a:off x="3493130" y="3493411"/>
+              <a:off x="3448558" y="3493411"/>
               <a:ext cx="61566" cy="61566"/>
             </a:xfrm>
             <a:prstGeom prst="ellipse">
@@ -8226,7 +8226,7 @@
           </p:nvSpPr>
           <p:spPr>
             <a:xfrm>
-              <a:off x="3194106" y="3231394"/>
+              <a:off x="3230140" y="3231394"/>
               <a:ext cx="61566" cy="61566"/>
             </a:xfrm>
             <a:prstGeom prst="ellipse">
@@ -8252,7 +8252,7 @@
           </p:nvSpPr>
           <p:spPr>
             <a:xfrm>
-              <a:off x="3441920" y="3285893"/>
+              <a:off x="3492153" y="3285893"/>
               <a:ext cx="61566" cy="61566"/>
             </a:xfrm>
             <a:prstGeom prst="ellipse">
@@ -8278,7 +8278,7 @@
           </p:nvSpPr>
           <p:spPr>
             <a:xfrm>
-              <a:off x="3194961" y="3348593"/>
+              <a:off x="3277603" y="3348593"/>
               <a:ext cx="61566" cy="61566"/>
             </a:xfrm>
             <a:prstGeom prst="ellipse">
@@ -8304,7 +8304,7 @@
           </p:nvSpPr>
           <p:spPr>
             <a:xfrm>
-              <a:off x="3447783" y="3269647"/>
+              <a:off x="3405975" y="3269647"/>
               <a:ext cx="61566" cy="61566"/>
             </a:xfrm>
             <a:prstGeom prst="ellipse">
@@ -8330,7 +8330,7 @@
           </p:nvSpPr>
           <p:spPr>
             <a:xfrm>
-              <a:off x="3180788" y="3125084"/>
+              <a:off x="3254102" y="3125084"/>
               <a:ext cx="61566" cy="61566"/>
             </a:xfrm>
             <a:prstGeom prst="ellipse">
@@ -8356,7 +8356,7 @@
           </p:nvSpPr>
           <p:spPr>
             <a:xfrm>
-              <a:off x="3453395" y="3372038"/>
+              <a:off x="3404067" y="3372038"/>
               <a:ext cx="61566" cy="61566"/>
             </a:xfrm>
             <a:prstGeom prst="ellipse">
@@ -8382,7 +8382,7 @@
           </p:nvSpPr>
           <p:spPr>
             <a:xfrm>
-              <a:off x="3228051" y="3708280"/>
+              <a:off x="3201981" y="3708280"/>
               <a:ext cx="61566" cy="61566"/>
             </a:xfrm>
             <a:prstGeom prst="ellipse">
@@ -8408,7 +8408,7 @@
           </p:nvSpPr>
           <p:spPr>
             <a:xfrm>
-              <a:off x="3484746" y="4012008"/>
+              <a:off x="3400959" y="4012008"/>
               <a:ext cx="61566" cy="61566"/>
             </a:xfrm>
             <a:prstGeom prst="ellipse">
@@ -8434,7 +8434,7 @@
           </p:nvSpPr>
           <p:spPr>
             <a:xfrm>
-              <a:off x="3280593" y="2659630"/>
+              <a:off x="3287394" y="2659630"/>
               <a:ext cx="61566" cy="61566"/>
             </a:xfrm>
             <a:prstGeom prst="ellipse">
@@ -8460,7 +8460,7 @@
           </p:nvSpPr>
           <p:spPr>
             <a:xfrm>
-              <a:off x="3426565" y="2580939"/>
+              <a:off x="3456904" y="2580939"/>
               <a:ext cx="61566" cy="61566"/>
             </a:xfrm>
             <a:prstGeom prst="ellipse">
@@ -8486,7 +8486,7 @@
           </p:nvSpPr>
           <p:spPr>
             <a:xfrm>
-              <a:off x="3229068" y="3122391"/>
+              <a:off x="3260376" y="3122391"/>
               <a:ext cx="61566" cy="61566"/>
             </a:xfrm>
             <a:prstGeom prst="ellipse">
@@ -8512,7 +8512,7 @@
           </p:nvSpPr>
           <p:spPr>
             <a:xfrm>
-              <a:off x="3486146" y="3257282"/>
+              <a:off x="3485657" y="3257282"/>
               <a:ext cx="61566" cy="61566"/>
             </a:xfrm>
             <a:prstGeom prst="ellipse">
@@ -8538,7 +8538,7 @@
           </p:nvSpPr>
           <p:spPr>
             <a:xfrm>
-              <a:off x="3230287" y="2618322"/>
+              <a:off x="3182151" y="2618322"/>
               <a:ext cx="61566" cy="61566"/>
             </a:xfrm>
             <a:prstGeom prst="ellipse">
@@ -8564,7 +8564,7 @@
           </p:nvSpPr>
           <p:spPr>
             <a:xfrm>
-              <a:off x="3440448" y="2480825"/>
+              <a:off x="3452277" y="2480825"/>
               <a:ext cx="61566" cy="61566"/>
             </a:xfrm>
             <a:prstGeom prst="ellipse">
@@ -8590,7 +8590,7 @@
           </p:nvSpPr>
           <p:spPr>
             <a:xfrm>
-              <a:off x="3240075" y="2894203"/>
+              <a:off x="3188275" y="2894203"/>
               <a:ext cx="61566" cy="61566"/>
             </a:xfrm>
             <a:prstGeom prst="ellipse">
@@ -8616,7 +8616,7 @@
           </p:nvSpPr>
           <p:spPr>
             <a:xfrm>
-              <a:off x="3502698" y="2924572"/>
+              <a:off x="3478433" y="2924572"/>
               <a:ext cx="61566" cy="61566"/>
             </a:xfrm>
             <a:prstGeom prst="ellipse">
@@ -8642,7 +8642,7 @@
           </p:nvSpPr>
           <p:spPr>
             <a:xfrm>
-              <a:off x="3278089" y="2646874"/>
+              <a:off x="3214754" y="2646874"/>
               <a:ext cx="61566" cy="61566"/>
             </a:xfrm>
             <a:prstGeom prst="ellipse">
@@ -8668,7 +8668,7 @@
           </p:nvSpPr>
           <p:spPr>
             <a:xfrm>
-              <a:off x="3456731" y="2770715"/>
+              <a:off x="3446395" y="2770715"/>
               <a:ext cx="61566" cy="61566"/>
             </a:xfrm>
             <a:prstGeom prst="ellipse">
@@ -8694,7 +8694,7 @@
           </p:nvSpPr>
           <p:spPr>
             <a:xfrm>
-              <a:off x="3213141" y="3991963"/>
+              <a:off x="3283190" y="3991963"/>
               <a:ext cx="61566" cy="61566"/>
             </a:xfrm>
             <a:prstGeom prst="ellipse">
@@ -8720,7 +8720,7 @@
           </p:nvSpPr>
           <p:spPr>
             <a:xfrm>
-              <a:off x="3417241" y="3908244"/>
+              <a:off x="3505352" y="3908244"/>
               <a:ext cx="61566" cy="61566"/>
             </a:xfrm>
             <a:prstGeom prst="ellipse">
@@ -8746,7 +8746,7 @@
           </p:nvSpPr>
           <p:spPr>
             <a:xfrm>
-              <a:off x="3188523" y="2684533"/>
+              <a:off x="3269466" y="2684533"/>
               <a:ext cx="61566" cy="61566"/>
             </a:xfrm>
             <a:prstGeom prst="ellipse">
@@ -8772,7 +8772,7 @@
           </p:nvSpPr>
           <p:spPr>
             <a:xfrm>
-              <a:off x="3480404" y="2918504"/>
+              <a:off x="3443449" y="2918504"/>
               <a:ext cx="61566" cy="61566"/>
             </a:xfrm>
             <a:prstGeom prst="ellipse">
@@ -8798,7 +8798,7 @@
           </p:nvSpPr>
           <p:spPr>
             <a:xfrm>
-              <a:off x="3199645" y="2947174"/>
+              <a:off x="3239812" y="2947174"/>
               <a:ext cx="61566" cy="61566"/>
             </a:xfrm>
             <a:prstGeom prst="ellipse">
@@ -8824,7 +8824,7 @@
           </p:nvSpPr>
           <p:spPr>
             <a:xfrm>
-              <a:off x="3483768" y="2905665"/>
+              <a:off x="3486066" y="2905665"/>
               <a:ext cx="61566" cy="61566"/>
             </a:xfrm>
             <a:prstGeom prst="ellipse">
@@ -8850,7 +8850,7 @@
           </p:nvSpPr>
           <p:spPr>
             <a:xfrm>
-              <a:off x="3264386" y="2771112"/>
+              <a:off x="3193152" y="2771112"/>
               <a:ext cx="61566" cy="61566"/>
             </a:xfrm>
             <a:prstGeom prst="ellipse">
@@ -8876,7 +8876,7 @@
           </p:nvSpPr>
           <p:spPr>
             <a:xfrm>
-              <a:off x="3495077" y="3093577"/>
+              <a:off x="3417407" y="3093577"/>
               <a:ext cx="61566" cy="61566"/>
             </a:xfrm>
             <a:prstGeom prst="ellipse">
@@ -8902,7 +8902,7 @@
           </p:nvSpPr>
           <p:spPr>
             <a:xfrm>
-              <a:off x="3285159" y="2406450"/>
+              <a:off x="3197150" y="2406450"/>
               <a:ext cx="61566" cy="61566"/>
             </a:xfrm>
             <a:prstGeom prst="ellipse">
@@ -8928,7 +8928,7 @@
           </p:nvSpPr>
           <p:spPr>
             <a:xfrm>
-              <a:off x="3406514" y="2614744"/>
+              <a:off x="3464310" y="2614744"/>
               <a:ext cx="61566" cy="61566"/>
             </a:xfrm>
             <a:prstGeom prst="ellipse">
@@ -8954,7 +8954,7 @@
           </p:nvSpPr>
           <p:spPr>
             <a:xfrm>
-              <a:off x="3278736" y="2639665"/>
+              <a:off x="3189691" y="2639665"/>
               <a:ext cx="61566" cy="61566"/>
             </a:xfrm>
             <a:prstGeom prst="ellipse">
@@ -8980,7 +8980,7 @@
           </p:nvSpPr>
           <p:spPr>
             <a:xfrm>
-              <a:off x="3507048" y="2667125"/>
+              <a:off x="3434058" y="2667125"/>
               <a:ext cx="61566" cy="61566"/>
             </a:xfrm>
             <a:prstGeom prst="ellipse">
@@ -9006,7 +9006,7 @@
           </p:nvSpPr>
           <p:spPr>
             <a:xfrm>
-              <a:off x="3200668" y="3114643"/>
+              <a:off x="3180898" y="3114643"/>
               <a:ext cx="61566" cy="61566"/>
             </a:xfrm>
             <a:prstGeom prst="ellipse">
@@ -9032,7 +9032,7 @@
           </p:nvSpPr>
           <p:spPr>
             <a:xfrm>
-              <a:off x="3477399" y="3574432"/>
+              <a:off x="3447538" y="3574432"/>
               <a:ext cx="61566" cy="61566"/>
             </a:xfrm>
             <a:prstGeom prst="ellipse">
@@ -9058,7 +9058,7 @@
           </p:nvSpPr>
           <p:spPr>
             <a:xfrm>
-              <a:off x="3284625" y="3068145"/>
+              <a:off x="3210383" y="3068145"/>
               <a:ext cx="61566" cy="61566"/>
             </a:xfrm>
             <a:prstGeom prst="ellipse">
@@ -9084,7 +9084,7 @@
           </p:nvSpPr>
           <p:spPr>
             <a:xfrm>
-              <a:off x="3486008" y="2944608"/>
+              <a:off x="3444964" y="2944608"/>
               <a:ext cx="61566" cy="61566"/>
             </a:xfrm>
             <a:prstGeom prst="ellipse">
@@ -9110,7 +9110,7 @@
           </p:nvSpPr>
           <p:spPr>
             <a:xfrm>
-              <a:off x="3224894" y="2667701"/>
+              <a:off x="3278142" y="2667701"/>
               <a:ext cx="61566" cy="61566"/>
             </a:xfrm>
             <a:prstGeom prst="ellipse">
@@ -9136,7 +9136,7 @@
           </p:nvSpPr>
           <p:spPr>
             <a:xfrm>
-              <a:off x="3419647" y="2904562"/>
+              <a:off x="3489575" y="2904562"/>
               <a:ext cx="61566" cy="61566"/>
             </a:xfrm>
             <a:prstGeom prst="ellipse">
@@ -9162,7 +9162,7 @@
           </p:nvSpPr>
           <p:spPr>
             <a:xfrm>
-              <a:off x="3212015" y="3022086"/>
+              <a:off x="3194766" y="3022086"/>
               <a:ext cx="61566" cy="61566"/>
             </a:xfrm>
             <a:prstGeom prst="ellipse">
@@ -9188,7 +9188,7 @@
           </p:nvSpPr>
           <p:spPr>
             <a:xfrm>
-              <a:off x="3409420" y="3380549"/>
+              <a:off x="3425645" y="3380549"/>
               <a:ext cx="61566" cy="61566"/>
             </a:xfrm>
             <a:prstGeom prst="ellipse">
@@ -9214,7 +9214,7 @@
           </p:nvSpPr>
           <p:spPr>
             <a:xfrm>
-              <a:off x="3217894" y="2788566"/>
+              <a:off x="3245158" y="2788566"/>
               <a:ext cx="61566" cy="61566"/>
             </a:xfrm>
             <a:prstGeom prst="ellipse">
@@ -9240,7 +9240,7 @@
           </p:nvSpPr>
           <p:spPr>
             <a:xfrm>
-              <a:off x="3432309" y="2982588"/>
+              <a:off x="3445711" y="2982588"/>
               <a:ext cx="61566" cy="61566"/>
             </a:xfrm>
             <a:prstGeom prst="ellipse">
@@ -9266,7 +9266,7 @@
           </p:nvSpPr>
           <p:spPr>
             <a:xfrm>
-              <a:off x="3224897" y="2694323"/>
+              <a:off x="3262933" y="2694323"/>
               <a:ext cx="61566" cy="61566"/>
             </a:xfrm>
             <a:prstGeom prst="ellipse">
@@ -9292,7 +9292,7 @@
           </p:nvSpPr>
           <p:spPr>
             <a:xfrm>
-              <a:off x="3461719" y="2920690"/>
+              <a:off x="3441210" y="2920690"/>
               <a:ext cx="61566" cy="61566"/>
             </a:xfrm>
             <a:prstGeom prst="ellipse">
@@ -9318,7 +9318,7 @@
           </p:nvSpPr>
           <p:spPr>
             <a:xfrm>
-              <a:off x="3276801" y="2284466"/>
+              <a:off x="3232588" y="2284466"/>
               <a:ext cx="61566" cy="61566"/>
             </a:xfrm>
             <a:prstGeom prst="ellipse">
@@ -9344,7 +9344,7 @@
           </p:nvSpPr>
           <p:spPr>
             <a:xfrm>
-              <a:off x="3443733" y="2660565"/>
+              <a:off x="3499071" y="2660565"/>
               <a:ext cx="61566" cy="61566"/>
             </a:xfrm>
             <a:prstGeom prst="ellipse">
@@ -9370,7 +9370,7 @@
           </p:nvSpPr>
           <p:spPr>
             <a:xfrm>
-              <a:off x="3217021" y="2532920"/>
+              <a:off x="3258696" y="2532920"/>
               <a:ext cx="61566" cy="61566"/>
             </a:xfrm>
             <a:prstGeom prst="ellipse">
@@ -9396,7 +9396,7 @@
           </p:nvSpPr>
           <p:spPr>
             <a:xfrm>
-              <a:off x="3463635" y="3135112"/>
+              <a:off x="3429992" y="3135112"/>
               <a:ext cx="61566" cy="61566"/>
             </a:xfrm>
             <a:prstGeom prst="ellipse">
@@ -9422,7 +9422,7 @@
           </p:nvSpPr>
           <p:spPr>
             <a:xfrm>
-              <a:off x="3230252" y="2198102"/>
+              <a:off x="3245266" y="2198102"/>
               <a:ext cx="61566" cy="61566"/>
             </a:xfrm>
             <a:prstGeom prst="ellipse">
@@ -9448,7 +9448,7 @@
           </p:nvSpPr>
           <p:spPr>
             <a:xfrm>
-              <a:off x="3445123" y="2707406"/>
+              <a:off x="3506329" y="2707406"/>
               <a:ext cx="61566" cy="61566"/>
             </a:xfrm>
             <a:prstGeom prst="ellipse">
@@ -9474,7 +9474,7 @@
           </p:nvSpPr>
           <p:spPr>
             <a:xfrm>
-              <a:off x="3228451" y="2582017"/>
+              <a:off x="3263221" y="2582017"/>
               <a:ext cx="61566" cy="61566"/>
             </a:xfrm>
             <a:prstGeom prst="ellipse">
@@ -9500,7 +9500,7 @@
           </p:nvSpPr>
           <p:spPr>
             <a:xfrm>
-              <a:off x="3424177" y="2723368"/>
+              <a:off x="3416249" y="2723368"/>
               <a:ext cx="61566" cy="61566"/>
             </a:xfrm>
             <a:prstGeom prst="ellipse">
@@ -9526,7 +9526,7 @@
           </p:nvSpPr>
           <p:spPr>
             <a:xfrm>
-              <a:off x="3226526" y="2818782"/>
+              <a:off x="3234202" y="2818782"/>
               <a:ext cx="61566" cy="61566"/>
             </a:xfrm>
             <a:prstGeom prst="ellipse">
@@ -9552,7 +9552,7 @@
           </p:nvSpPr>
           <p:spPr>
             <a:xfrm>
-              <a:off x="3405766" y="2611345"/>
+              <a:off x="3401595" y="2611345"/>
               <a:ext cx="61566" cy="61566"/>
             </a:xfrm>
             <a:prstGeom prst="ellipse">
@@ -9578,7 +9578,7 @@
           </p:nvSpPr>
           <p:spPr>
             <a:xfrm>
-              <a:off x="3262683" y="2881758"/>
+              <a:off x="3261182" y="2881758"/>
               <a:ext cx="61566" cy="61566"/>
             </a:xfrm>
             <a:prstGeom prst="ellipse">
@@ -9604,7 +9604,7 @@
           </p:nvSpPr>
           <p:spPr>
             <a:xfrm>
-              <a:off x="3421958" y="3159845"/>
+              <a:off x="3498768" y="3159845"/>
               <a:ext cx="61566" cy="61566"/>
             </a:xfrm>
             <a:prstGeom prst="ellipse">
@@ -9630,7 +9630,7 @@
           </p:nvSpPr>
           <p:spPr>
             <a:xfrm>
-              <a:off x="3244921" y="3196126"/>
+              <a:off x="3263650" y="3196126"/>
               <a:ext cx="61566" cy="61566"/>
             </a:xfrm>
             <a:prstGeom prst="ellipse">
@@ -9656,7 +9656,7 @@
           </p:nvSpPr>
           <p:spPr>
             <a:xfrm>
-              <a:off x="3411849" y="3081431"/>
+              <a:off x="3406580" y="3081431"/>
               <a:ext cx="61566" cy="61566"/>
             </a:xfrm>
             <a:prstGeom prst="ellipse">
@@ -9682,7 +9682,7 @@
           </p:nvSpPr>
           <p:spPr>
             <a:xfrm>
-              <a:off x="3231932" y="3347048"/>
+              <a:off x="3207074" y="3347048"/>
               <a:ext cx="61566" cy="61566"/>
             </a:xfrm>
             <a:prstGeom prst="ellipse">
@@ -9708,7 +9708,7 @@
           </p:nvSpPr>
           <p:spPr>
             <a:xfrm>
-              <a:off x="3438150" y="3140853"/>
+              <a:off x="3416521" y="3140853"/>
               <a:ext cx="61566" cy="61566"/>
             </a:xfrm>
             <a:prstGeom prst="ellipse">
@@ -9734,7 +9734,7 @@
           </p:nvSpPr>
           <p:spPr>
             <a:xfrm>
-              <a:off x="3219813" y="2632612"/>
+              <a:off x="3200495" y="2632612"/>
               <a:ext cx="61566" cy="61566"/>
             </a:xfrm>
             <a:prstGeom prst="ellipse">
@@ -9760,7 +9760,7 @@
           </p:nvSpPr>
           <p:spPr>
             <a:xfrm>
-              <a:off x="3462901" y="2688731"/>
+              <a:off x="3449640" y="2688731"/>
               <a:ext cx="61566" cy="61566"/>
             </a:xfrm>
             <a:prstGeom prst="ellipse">
@@ -9786,7 +9786,7 @@
           </p:nvSpPr>
           <p:spPr>
             <a:xfrm>
-              <a:off x="3194512" y="3299484"/>
+              <a:off x="3217413" y="3299484"/>
               <a:ext cx="61566" cy="61566"/>
             </a:xfrm>
             <a:prstGeom prst="ellipse">
@@ -9812,7 +9812,7 @@
           </p:nvSpPr>
           <p:spPr>
             <a:xfrm>
-              <a:off x="3431713" y="3112150"/>
+              <a:off x="3443248" y="3112150"/>
               <a:ext cx="61566" cy="61566"/>
             </a:xfrm>
             <a:prstGeom prst="ellipse">
@@ -9838,7 +9838,7 @@
           </p:nvSpPr>
           <p:spPr>
             <a:xfrm>
-              <a:off x="3216703" y="3019598"/>
+              <a:off x="3226657" y="3019598"/>
               <a:ext cx="61566" cy="61566"/>
             </a:xfrm>
             <a:prstGeom prst="ellipse">
@@ -9864,7 +9864,7 @@
           </p:nvSpPr>
           <p:spPr>
             <a:xfrm>
-              <a:off x="3451483" y="3373134"/>
+              <a:off x="3429102" y="3373134"/>
               <a:ext cx="61566" cy="61566"/>
             </a:xfrm>
             <a:prstGeom prst="ellipse">
@@ -9890,7 +9890,7 @@
           </p:nvSpPr>
           <p:spPr>
             <a:xfrm>
-              <a:off x="3205065" y="3086308"/>
+              <a:off x="3198425" y="3086308"/>
               <a:ext cx="61566" cy="61566"/>
             </a:xfrm>
             <a:prstGeom prst="ellipse">
@@ -9916,7 +9916,7 @@
           </p:nvSpPr>
           <p:spPr>
             <a:xfrm>
-              <a:off x="3439216" y="3060088"/>
+              <a:off x="3444139" y="3060088"/>
               <a:ext cx="61566" cy="61566"/>
             </a:xfrm>
             <a:prstGeom prst="ellipse">
@@ -9942,7 +9942,7 @@
           </p:nvSpPr>
           <p:spPr>
             <a:xfrm>
-              <a:off x="3180391" y="3171443"/>
+              <a:off x="3273698" y="3171443"/>
               <a:ext cx="61566" cy="61566"/>
             </a:xfrm>
             <a:prstGeom prst="ellipse">
@@ -9968,7 +9968,7 @@
           </p:nvSpPr>
           <p:spPr>
             <a:xfrm>
-              <a:off x="3434086" y="3515765"/>
+              <a:off x="3468250" y="3515765"/>
               <a:ext cx="61566" cy="61566"/>
             </a:xfrm>
             <a:prstGeom prst="ellipse">
@@ -9994,7 +9994,7 @@
           </p:nvSpPr>
           <p:spPr>
             <a:xfrm>
-              <a:off x="3288963" y="2793041"/>
+              <a:off x="3187384" y="2793041"/>
               <a:ext cx="61566" cy="61566"/>
             </a:xfrm>
             <a:prstGeom prst="ellipse">
@@ -10020,7 +10020,7 @@
           </p:nvSpPr>
           <p:spPr>
             <a:xfrm>
-              <a:off x="3483122" y="2778016"/>
+              <a:off x="3432560" y="2778016"/>
               <a:ext cx="61566" cy="61566"/>
             </a:xfrm>
             <a:prstGeom prst="ellipse">
@@ -10046,7 +10046,7 @@
           </p:nvSpPr>
           <p:spPr>
             <a:xfrm>
-              <a:off x="3271536" y="3094097"/>
+              <a:off x="3252260" y="3094097"/>
               <a:ext cx="61566" cy="61566"/>
             </a:xfrm>
             <a:prstGeom prst="ellipse">
@@ -10072,7 +10072,7 @@
           </p:nvSpPr>
           <p:spPr>
             <a:xfrm>
-              <a:off x="3435258" y="3235857"/>
+              <a:off x="3460339" y="3235857"/>
               <a:ext cx="61566" cy="61566"/>
             </a:xfrm>
             <a:prstGeom prst="ellipse">
@@ -10098,7 +10098,7 @@
           </p:nvSpPr>
           <p:spPr>
             <a:xfrm>
-              <a:off x="3268592" y="2866522"/>
+              <a:off x="3192413" y="2866522"/>
               <a:ext cx="61566" cy="61566"/>
             </a:xfrm>
             <a:prstGeom prst="ellipse">
@@ -10124,7 +10124,7 @@
           </p:nvSpPr>
           <p:spPr>
             <a:xfrm>
-              <a:off x="3469753" y="2886885"/>
+              <a:off x="3424774" y="2886885"/>
               <a:ext cx="61566" cy="61566"/>
             </a:xfrm>
             <a:prstGeom prst="ellipse">
@@ -10150,7 +10150,7 @@
           </p:nvSpPr>
           <p:spPr>
             <a:xfrm>
-              <a:off x="3230344" y="2559645"/>
+              <a:off x="3191711" y="2559645"/>
               <a:ext cx="61566" cy="61566"/>
             </a:xfrm>
             <a:prstGeom prst="ellipse">
@@ -10176,7 +10176,7 @@
           </p:nvSpPr>
           <p:spPr>
             <a:xfrm>
-              <a:off x="3509204" y="2629376"/>
+              <a:off x="3410685" y="2629376"/>
               <a:ext cx="61566" cy="61566"/>
             </a:xfrm>
             <a:prstGeom prst="ellipse">
@@ -10202,7 +10202,7 @@
           </p:nvSpPr>
           <p:spPr>
             <a:xfrm>
-              <a:off x="3182988" y="2923583"/>
+              <a:off x="3224608" y="2923583"/>
               <a:ext cx="61566" cy="61566"/>
             </a:xfrm>
             <a:prstGeom prst="ellipse">
@@ -10228,7 +10228,7 @@
           </p:nvSpPr>
           <p:spPr>
             <a:xfrm>
-              <a:off x="3498399" y="2993403"/>
+              <a:off x="3498781" y="2993403"/>
               <a:ext cx="61566" cy="61566"/>
             </a:xfrm>
             <a:prstGeom prst="ellipse">
@@ -10254,7 +10254,7 @@
           </p:nvSpPr>
           <p:spPr>
             <a:xfrm>
-              <a:off x="3266100" y="3043028"/>
+              <a:off x="3231757" y="3043028"/>
               <a:ext cx="61566" cy="61566"/>
             </a:xfrm>
             <a:prstGeom prst="ellipse">
@@ -10280,7 +10280,7 @@
           </p:nvSpPr>
           <p:spPr>
             <a:xfrm>
-              <a:off x="3427233" y="2972822"/>
+              <a:off x="3449007" y="2972822"/>
               <a:ext cx="61566" cy="61566"/>
             </a:xfrm>
             <a:prstGeom prst="ellipse">
@@ -10306,7 +10306,7 @@
           </p:nvSpPr>
           <p:spPr>
             <a:xfrm>
-              <a:off x="3248577" y="2648131"/>
+              <a:off x="3212124" y="2648131"/>
               <a:ext cx="61566" cy="61566"/>
             </a:xfrm>
             <a:prstGeom prst="ellipse">
@@ -10332,7 +10332,7 @@
           </p:nvSpPr>
           <p:spPr>
             <a:xfrm>
-              <a:off x="3504882" y="3255395"/>
+              <a:off x="3500630" y="3255395"/>
               <a:ext cx="61566" cy="61566"/>
             </a:xfrm>
             <a:prstGeom prst="ellipse">
@@ -10358,7 +10358,7 @@
           </p:nvSpPr>
           <p:spPr>
             <a:xfrm>
-              <a:off x="3271810" y="3043750"/>
+              <a:off x="3257883" y="3043750"/>
               <a:ext cx="61566" cy="61566"/>
             </a:xfrm>
             <a:prstGeom prst="ellipse">
@@ -10384,7 +10384,7 @@
           </p:nvSpPr>
           <p:spPr>
             <a:xfrm>
-              <a:off x="3433843" y="3461615"/>
+              <a:off x="3467173" y="3461615"/>
               <a:ext cx="61566" cy="61566"/>
             </a:xfrm>
             <a:prstGeom prst="ellipse">
@@ -10410,7 +10410,7 @@
           </p:nvSpPr>
           <p:spPr>
             <a:xfrm>
-              <a:off x="3237280" y="3022448"/>
+              <a:off x="3262030" y="3022448"/>
               <a:ext cx="61566" cy="61566"/>
             </a:xfrm>
             <a:prstGeom prst="ellipse">
@@ -10436,7 +10436,7 @@
           </p:nvSpPr>
           <p:spPr>
             <a:xfrm>
-              <a:off x="3496729" y="2824435"/>
+              <a:off x="3403845" y="2824435"/>
               <a:ext cx="61566" cy="61566"/>
             </a:xfrm>
             <a:prstGeom prst="ellipse">
@@ -10462,7 +10462,7 @@
           </p:nvSpPr>
           <p:spPr>
             <a:xfrm>
-              <a:off x="3240326" y="2846456"/>
+              <a:off x="3258944" y="2846456"/>
               <a:ext cx="61566" cy="61566"/>
             </a:xfrm>
             <a:prstGeom prst="ellipse">
@@ -10488,7 +10488,7 @@
           </p:nvSpPr>
           <p:spPr>
             <a:xfrm>
-              <a:off x="3494270" y="3058158"/>
+              <a:off x="3492000" y="3058158"/>
               <a:ext cx="61566" cy="61566"/>
             </a:xfrm>
             <a:prstGeom prst="ellipse">
@@ -10514,7 +10514,7 @@
           </p:nvSpPr>
           <p:spPr>
             <a:xfrm>
-              <a:off x="3210678" y="3447297"/>
+              <a:off x="3218099" y="3447297"/>
               <a:ext cx="61566" cy="61566"/>
             </a:xfrm>
             <a:prstGeom prst="ellipse">
@@ -10540,7 +10540,7 @@
           </p:nvSpPr>
           <p:spPr>
             <a:xfrm>
-              <a:off x="3402245" y="3240291"/>
+              <a:off x="3492993" y="3240291"/>
               <a:ext cx="61566" cy="61566"/>
             </a:xfrm>
             <a:prstGeom prst="ellipse">
@@ -10566,7 +10566,7 @@
           </p:nvSpPr>
           <p:spPr>
             <a:xfrm>
-              <a:off x="3182320" y="2858928"/>
+              <a:off x="3219620" y="2858928"/>
               <a:ext cx="61566" cy="61566"/>
             </a:xfrm>
             <a:prstGeom prst="ellipse">
@@ -10592,7 +10592,7 @@
           </p:nvSpPr>
           <p:spPr>
             <a:xfrm>
-              <a:off x="3416857" y="2751089"/>
+              <a:off x="3428772" y="2751089"/>
               <a:ext cx="61566" cy="61566"/>
             </a:xfrm>
             <a:prstGeom prst="ellipse">
@@ -10618,7 +10618,7 @@
           </p:nvSpPr>
           <p:spPr>
             <a:xfrm>
-              <a:off x="3217409" y="2813447"/>
+              <a:off x="3270213" y="2813447"/>
               <a:ext cx="61566" cy="61566"/>
             </a:xfrm>
             <a:prstGeom prst="ellipse">
@@ -10644,7 +10644,7 @@
           </p:nvSpPr>
           <p:spPr>
             <a:xfrm>
-              <a:off x="3497477" y="2690622"/>
+              <a:off x="3491163" y="2690622"/>
               <a:ext cx="61566" cy="61566"/>
             </a:xfrm>
             <a:prstGeom prst="ellipse">
@@ -10670,7 +10670,7 @@
           </p:nvSpPr>
           <p:spPr>
             <a:xfrm>
-              <a:off x="3202131" y="3402524"/>
+              <a:off x="3289400" y="3402524"/>
               <a:ext cx="61566" cy="61566"/>
             </a:xfrm>
             <a:prstGeom prst="ellipse">
@@ -10696,7 +10696,7 @@
           </p:nvSpPr>
           <p:spPr>
             <a:xfrm>
-              <a:off x="3461432" y="2866244"/>
+              <a:off x="3419305" y="2866244"/>
               <a:ext cx="61566" cy="61566"/>
             </a:xfrm>
             <a:prstGeom prst="ellipse">
@@ -10722,7 +10722,7 @@
           </p:nvSpPr>
           <p:spPr>
             <a:xfrm>
-              <a:off x="3286306" y="3504063"/>
+              <a:off x="3284172" y="3504063"/>
               <a:ext cx="61566" cy="61566"/>
             </a:xfrm>
             <a:prstGeom prst="ellipse">
@@ -10748,7 +10748,7 @@
           </p:nvSpPr>
           <p:spPr>
             <a:xfrm>
-              <a:off x="3494898" y="3418060"/>
+              <a:off x="3403254" y="3418060"/>
               <a:ext cx="61566" cy="61566"/>
             </a:xfrm>
             <a:prstGeom prst="ellipse">
@@ -10774,7 +10774,7 @@
           </p:nvSpPr>
           <p:spPr>
             <a:xfrm>
-              <a:off x="3246000" y="2622472"/>
+              <a:off x="3202106" y="2622472"/>
               <a:ext cx="61566" cy="61566"/>
             </a:xfrm>
             <a:prstGeom prst="ellipse">
@@ -10800,7 +10800,7 @@
           </p:nvSpPr>
           <p:spPr>
             <a:xfrm>
-              <a:off x="3429948" y="2822803"/>
+              <a:off x="3449520" y="2822803"/>
               <a:ext cx="61566" cy="61566"/>
             </a:xfrm>
             <a:prstGeom prst="ellipse">
@@ -10826,7 +10826,7 @@
           </p:nvSpPr>
           <p:spPr>
             <a:xfrm>
-              <a:off x="3247581" y="3142512"/>
+              <a:off x="3215381" y="3142512"/>
               <a:ext cx="61566" cy="61566"/>
             </a:xfrm>
             <a:prstGeom prst="ellipse">
@@ -10852,7 +10852,7 @@
           </p:nvSpPr>
           <p:spPr>
             <a:xfrm>
-              <a:off x="3419259" y="3130348"/>
+              <a:off x="3423578" y="3130348"/>
               <a:ext cx="61566" cy="61566"/>
             </a:xfrm>
             <a:prstGeom prst="ellipse">
@@ -10878,7 +10878,7 @@
           </p:nvSpPr>
           <p:spPr>
             <a:xfrm>
-              <a:off x="3202928" y="2969786"/>
+              <a:off x="3235019" y="2969786"/>
               <a:ext cx="61566" cy="61566"/>
             </a:xfrm>
             <a:prstGeom prst="ellipse">
@@ -10904,7 +10904,7 @@
           </p:nvSpPr>
           <p:spPr>
             <a:xfrm>
-              <a:off x="3450273" y="2998002"/>
+              <a:off x="3479559" y="2998002"/>
               <a:ext cx="61566" cy="61566"/>
             </a:xfrm>
             <a:prstGeom prst="ellipse">
@@ -10930,7 +10930,7 @@
           </p:nvSpPr>
           <p:spPr>
             <a:xfrm>
-              <a:off x="3215339" y="2815633"/>
+              <a:off x="3196694" y="2815633"/>
               <a:ext cx="61566" cy="61566"/>
             </a:xfrm>
             <a:prstGeom prst="ellipse">
@@ -10956,7 +10956,7 @@
           </p:nvSpPr>
           <p:spPr>
             <a:xfrm>
-              <a:off x="3418495" y="3032140"/>
+              <a:off x="3411821" y="3032140"/>
               <a:ext cx="61566" cy="61566"/>
             </a:xfrm>
             <a:prstGeom prst="ellipse">
@@ -10982,7 +10982,7 @@
           </p:nvSpPr>
           <p:spPr>
             <a:xfrm>
-              <a:off x="3226051" y="3066360"/>
+              <a:off x="3190973" y="3066360"/>
               <a:ext cx="61566" cy="61566"/>
             </a:xfrm>
             <a:prstGeom prst="ellipse">
@@ -11008,7 +11008,7 @@
           </p:nvSpPr>
           <p:spPr>
             <a:xfrm>
-              <a:off x="3445826" y="2782444"/>
+              <a:off x="3468693" y="2782444"/>
               <a:ext cx="61566" cy="61566"/>
             </a:xfrm>
             <a:prstGeom prst="ellipse">
@@ -11034,7 +11034,7 @@
           </p:nvSpPr>
           <p:spPr>
             <a:xfrm>
-              <a:off x="3180272" y="3147309"/>
+              <a:off x="3201956" y="3147309"/>
               <a:ext cx="61566" cy="61566"/>
             </a:xfrm>
             <a:prstGeom prst="ellipse">
@@ -11060,7 +11060,7 @@
           </p:nvSpPr>
           <p:spPr>
             <a:xfrm>
-              <a:off x="3439985" y="2894934"/>
+              <a:off x="3426449" y="2894934"/>
               <a:ext cx="61566" cy="61566"/>
             </a:xfrm>
             <a:prstGeom prst="ellipse">
@@ -11086,7 +11086,7 @@
           </p:nvSpPr>
           <p:spPr>
             <a:xfrm>
-              <a:off x="3241242" y="2752191"/>
+              <a:off x="3202667" y="2752191"/>
               <a:ext cx="61566" cy="61566"/>
             </a:xfrm>
             <a:prstGeom prst="ellipse">
@@ -11112,7 +11112,7 @@
           </p:nvSpPr>
           <p:spPr>
             <a:xfrm>
-              <a:off x="3433382" y="2677576"/>
+              <a:off x="3439633" y="2677576"/>
               <a:ext cx="61566" cy="61566"/>
             </a:xfrm>
             <a:prstGeom prst="ellipse">
@@ -11138,7 +11138,7 @@
           </p:nvSpPr>
           <p:spPr>
             <a:xfrm>
-              <a:off x="3271224" y="2423422"/>
+              <a:off x="3261395" y="2423422"/>
               <a:ext cx="61566" cy="61566"/>
             </a:xfrm>
             <a:prstGeom prst="ellipse">
@@ -11164,7 +11164,7 @@
           </p:nvSpPr>
           <p:spPr>
             <a:xfrm>
-              <a:off x="3439519" y="2388582"/>
+              <a:off x="3416473" y="2388582"/>
               <a:ext cx="61566" cy="61566"/>
             </a:xfrm>
             <a:prstGeom prst="ellipse">
@@ -11190,7 +11190,7 @@
           </p:nvSpPr>
           <p:spPr>
             <a:xfrm>
-              <a:off x="3222789" y="2699609"/>
+              <a:off x="3181275" y="2699609"/>
               <a:ext cx="61566" cy="61566"/>
             </a:xfrm>
             <a:prstGeom prst="ellipse">
@@ -11216,7 +11216,7 @@
           </p:nvSpPr>
           <p:spPr>
             <a:xfrm>
-              <a:off x="3473758" y="2622605"/>
+              <a:off x="3415312" y="2622605"/>
               <a:ext cx="61566" cy="61566"/>
             </a:xfrm>
             <a:prstGeom prst="ellipse">
@@ -11242,7 +11242,7 @@
           </p:nvSpPr>
           <p:spPr>
             <a:xfrm>
-              <a:off x="3251299" y="2582915"/>
+              <a:off x="3251261" y="2582915"/>
               <a:ext cx="61566" cy="61566"/>
             </a:xfrm>
             <a:prstGeom prst="ellipse">
@@ -11268,7 +11268,7 @@
           </p:nvSpPr>
           <p:spPr>
             <a:xfrm>
-              <a:off x="3401104" y="2516397"/>
+              <a:off x="3510307" y="2516397"/>
               <a:ext cx="61566" cy="61566"/>
             </a:xfrm>
             <a:prstGeom prst="ellipse">
@@ -11294,7 +11294,7 @@
           </p:nvSpPr>
           <p:spPr>
             <a:xfrm>
-              <a:off x="3260031" y="2740623"/>
+              <a:off x="3197417" y="2740623"/>
               <a:ext cx="61566" cy="61566"/>
             </a:xfrm>
             <a:prstGeom prst="ellipse">
@@ -11320,7 +11320,7 @@
           </p:nvSpPr>
           <p:spPr>
             <a:xfrm>
-              <a:off x="3416467" y="2916926"/>
+              <a:off x="3454221" y="2916926"/>
               <a:ext cx="61566" cy="61566"/>
             </a:xfrm>
             <a:prstGeom prst="ellipse">
@@ -11346,7 +11346,7 @@
           </p:nvSpPr>
           <p:spPr>
             <a:xfrm>
-              <a:off x="3241898" y="3168260"/>
+              <a:off x="3274645" y="3168260"/>
               <a:ext cx="61566" cy="61566"/>
             </a:xfrm>
             <a:prstGeom prst="ellipse">
@@ -11372,7 +11372,7 @@
           </p:nvSpPr>
           <p:spPr>
             <a:xfrm>
-              <a:off x="3429816" y="3125870"/>
+              <a:off x="3417108" y="3125870"/>
               <a:ext cx="61566" cy="61566"/>
             </a:xfrm>
             <a:prstGeom prst="ellipse">
@@ -11398,7 +11398,7 @@
           </p:nvSpPr>
           <p:spPr>
             <a:xfrm>
-              <a:off x="3186478" y="3052650"/>
+              <a:off x="3267244" y="3052650"/>
               <a:ext cx="61566" cy="61566"/>
             </a:xfrm>
             <a:prstGeom prst="ellipse">
@@ -11424,7 +11424,7 @@
           </p:nvSpPr>
           <p:spPr>
             <a:xfrm>
-              <a:off x="3460993" y="2874347"/>
+              <a:off x="3496459" y="2874347"/>
               <a:ext cx="61566" cy="61566"/>
             </a:xfrm>
             <a:prstGeom prst="ellipse">
@@ -11450,7 +11450,7 @@
           </p:nvSpPr>
           <p:spPr>
             <a:xfrm>
-              <a:off x="3266559" y="2909905"/>
+              <a:off x="3202667" y="2909905"/>
               <a:ext cx="61566" cy="61566"/>
             </a:xfrm>
             <a:prstGeom prst="ellipse">
@@ -11476,7 +11476,7 @@
           </p:nvSpPr>
           <p:spPr>
             <a:xfrm>
-              <a:off x="3402520" y="2678654"/>
+              <a:off x="3426134" y="2678654"/>
               <a:ext cx="61566" cy="61566"/>
             </a:xfrm>
             <a:prstGeom prst="ellipse">
@@ -11502,7 +11502,7 @@
           </p:nvSpPr>
           <p:spPr>
             <a:xfrm>
-              <a:off x="3267132" y="2410322"/>
+              <a:off x="3279728" y="2410322"/>
               <a:ext cx="61566" cy="61566"/>
             </a:xfrm>
             <a:prstGeom prst="ellipse">
@@ -11528,7 +11528,7 @@
           </p:nvSpPr>
           <p:spPr>
             <a:xfrm>
-              <a:off x="3447642" y="2461588"/>
+              <a:off x="3463604" y="2461588"/>
               <a:ext cx="61566" cy="61566"/>
             </a:xfrm>
             <a:prstGeom prst="ellipse">
@@ -11554,7 +11554,7 @@
           </p:nvSpPr>
           <p:spPr>
             <a:xfrm>
-              <a:off x="3216219" y="3312987"/>
+              <a:off x="3192181" y="3312987"/>
               <a:ext cx="61566" cy="61566"/>
             </a:xfrm>
             <a:prstGeom prst="ellipse">
@@ -11580,7 +11580,7 @@
           </p:nvSpPr>
           <p:spPr>
             <a:xfrm>
-              <a:off x="3495962" y="2696515"/>
+              <a:off x="3467075" y="2696515"/>
               <a:ext cx="61566" cy="61566"/>
             </a:xfrm>
             <a:prstGeom prst="ellipse">
@@ -11606,7 +11606,7 @@
           </p:nvSpPr>
           <p:spPr>
             <a:xfrm>
-              <a:off x="3188930" y="2749958"/>
+              <a:off x="3188944" y="2749958"/>
               <a:ext cx="61566" cy="61566"/>
             </a:xfrm>
             <a:prstGeom prst="ellipse">
@@ -11632,7 +11632,7 @@
           </p:nvSpPr>
           <p:spPr>
             <a:xfrm>
-              <a:off x="3468741" y="2949466"/>
+              <a:off x="3452560" y="2949466"/>
               <a:ext cx="61566" cy="61566"/>
             </a:xfrm>
             <a:prstGeom prst="ellipse">
@@ -11658,7 +11658,7 @@
           </p:nvSpPr>
           <p:spPr>
             <a:xfrm>
-              <a:off x="3204169" y="2528481"/>
+              <a:off x="3217474" y="2528481"/>
               <a:ext cx="61566" cy="61566"/>
             </a:xfrm>
             <a:prstGeom prst="ellipse">
@@ -11684,7 +11684,7 @@
           </p:nvSpPr>
           <p:spPr>
             <a:xfrm>
-              <a:off x="3407801" y="2592256"/>
+              <a:off x="3489974" y="2592256"/>
               <a:ext cx="61566" cy="61566"/>
             </a:xfrm>
             <a:prstGeom prst="ellipse">
@@ -11710,7 +11710,7 @@
           </p:nvSpPr>
           <p:spPr>
             <a:xfrm>
-              <a:off x="3238028" y="2373130"/>
+              <a:off x="3267900" y="2373130"/>
               <a:ext cx="61566" cy="61566"/>
             </a:xfrm>
             <a:prstGeom prst="ellipse">
@@ -11736,7 +11736,7 @@
           </p:nvSpPr>
           <p:spPr>
             <a:xfrm>
-              <a:off x="3502123" y="2351876"/>
+              <a:off x="3427431" y="2351876"/>
               <a:ext cx="61566" cy="61566"/>
             </a:xfrm>
             <a:prstGeom prst="ellipse">
@@ -11762,7 +11762,7 @@
           </p:nvSpPr>
           <p:spPr>
             <a:xfrm>
-              <a:off x="3216917" y="2315841"/>
+              <a:off x="3279629" y="2315841"/>
               <a:ext cx="61566" cy="61566"/>
             </a:xfrm>
             <a:prstGeom prst="ellipse">
@@ -11788,7 +11788,7 @@
           </p:nvSpPr>
           <p:spPr>
             <a:xfrm>
-              <a:off x="3416133" y="2151169"/>
+              <a:off x="3418882" y="2151169"/>
               <a:ext cx="61566" cy="61566"/>
             </a:xfrm>
             <a:prstGeom prst="ellipse">
@@ -11814,7 +11814,7 @@
           </p:nvSpPr>
           <p:spPr>
             <a:xfrm>
-              <a:off x="3216171" y="1665802"/>
+              <a:off x="3270150" y="1665802"/>
               <a:ext cx="61566" cy="61566"/>
             </a:xfrm>
             <a:prstGeom prst="ellipse">
@@ -11840,7 +11840,7 @@
           </p:nvSpPr>
           <p:spPr>
             <a:xfrm>
-              <a:off x="3401146" y="2537313"/>
+              <a:off x="3430106" y="2537313"/>
               <a:ext cx="61566" cy="61566"/>
             </a:xfrm>
             <a:prstGeom prst="ellipse">
@@ -11866,7 +11866,7 @@
           </p:nvSpPr>
           <p:spPr>
             <a:xfrm>
-              <a:off x="3203768" y="2765099"/>
+              <a:off x="3257135" y="2765099"/>
               <a:ext cx="61566" cy="61566"/>
             </a:xfrm>
             <a:prstGeom prst="ellipse">
@@ -11892,7 +11892,7 @@
           </p:nvSpPr>
           <p:spPr>
             <a:xfrm>
-              <a:off x="3462215" y="2815118"/>
+              <a:off x="3416847" y="2815118"/>
               <a:ext cx="61566" cy="61566"/>
             </a:xfrm>
             <a:prstGeom prst="ellipse">
@@ -11918,7 +11918,7 @@
           </p:nvSpPr>
           <p:spPr>
             <a:xfrm>
-              <a:off x="3226214" y="2468941"/>
+              <a:off x="3202366" y="2468941"/>
               <a:ext cx="61566" cy="61566"/>
             </a:xfrm>
             <a:prstGeom prst="ellipse">
@@ -11944,7 +11944,7 @@
           </p:nvSpPr>
           <p:spPr>
             <a:xfrm>
-              <a:off x="3424371" y="2423861"/>
+              <a:off x="3422573" y="2423861"/>
               <a:ext cx="61566" cy="61566"/>
             </a:xfrm>
             <a:prstGeom prst="ellipse">
@@ -11970,7 +11970,7 @@
           </p:nvSpPr>
           <p:spPr>
             <a:xfrm>
-              <a:off x="4760517" y="3266289"/>
+              <a:off x="4762142" y="3266289"/>
               <a:ext cx="61566" cy="61566"/>
             </a:xfrm>
             <a:prstGeom prst="ellipse">
@@ -11996,7 +11996,7 @@
           </p:nvSpPr>
           <p:spPr>
             <a:xfrm>
-              <a:off x="5027320" y="2998579"/>
+              <a:off x="5029502" y="2998579"/>
               <a:ext cx="61566" cy="61566"/>
             </a:xfrm>
             <a:prstGeom prst="ellipse">
@@ -12022,7 +12022,7 @@
           </p:nvSpPr>
           <p:spPr>
             <a:xfrm>
-              <a:off x="4769336" y="2425413"/>
+              <a:off x="4729785" y="2425413"/>
               <a:ext cx="61566" cy="61566"/>
             </a:xfrm>
             <a:prstGeom prst="ellipse">
@@ -12048,7 +12048,7 @@
           </p:nvSpPr>
           <p:spPr>
             <a:xfrm>
-              <a:off x="4996437" y="2678075"/>
+              <a:off x="4953697" y="2678075"/>
               <a:ext cx="61566" cy="61566"/>
             </a:xfrm>
             <a:prstGeom prst="ellipse">
@@ -12074,7 +12074,7 @@
           </p:nvSpPr>
           <p:spPr>
             <a:xfrm>
-              <a:off x="4761596" y="2475486"/>
+              <a:off x="4756754" y="2475486"/>
               <a:ext cx="61566" cy="61566"/>
             </a:xfrm>
             <a:prstGeom prst="ellipse">
@@ -12100,7 +12100,7 @@
           </p:nvSpPr>
           <p:spPr>
             <a:xfrm>
-              <a:off x="4984058" y="2976467"/>
+              <a:off x="5004221" y="2976467"/>
               <a:ext cx="61566" cy="61566"/>
             </a:xfrm>
             <a:prstGeom prst="ellipse">
@@ -12126,7 +12126,7 @@
           </p:nvSpPr>
           <p:spPr>
             <a:xfrm>
-              <a:off x="4738292" y="2198523"/>
+              <a:off x="4738434" y="2198523"/>
               <a:ext cx="61566" cy="61566"/>
             </a:xfrm>
             <a:prstGeom prst="ellipse">
@@ -12152,7 +12152,7 @@
           </p:nvSpPr>
           <p:spPr>
             <a:xfrm>
-              <a:off x="4966587" y="2457382"/>
+              <a:off x="5013842" y="2457382"/>
               <a:ext cx="61566" cy="61566"/>
             </a:xfrm>
             <a:prstGeom prst="ellipse">
@@ -12178,7 +12178,7 @@
           </p:nvSpPr>
           <p:spPr>
             <a:xfrm>
-              <a:off x="4801117" y="2520652"/>
+              <a:off x="4758686" y="2520652"/>
               <a:ext cx="61566" cy="61566"/>
             </a:xfrm>
             <a:prstGeom prst="ellipse">
@@ -12204,7 +12204,7 @@
           </p:nvSpPr>
           <p:spPr>
             <a:xfrm>
-              <a:off x="5016658" y="2658414"/>
+              <a:off x="4939704" y="2658414"/>
               <a:ext cx="61566" cy="61566"/>
             </a:xfrm>
             <a:prstGeom prst="ellipse">
@@ -12230,7 +12230,7 @@
           </p:nvSpPr>
           <p:spPr>
             <a:xfrm>
-              <a:off x="4739514" y="2691377"/>
+              <a:off x="4773864" y="2691377"/>
               <a:ext cx="61566" cy="61566"/>
             </a:xfrm>
             <a:prstGeom prst="ellipse">
@@ -12256,7 +12256,7 @@
           </p:nvSpPr>
           <p:spPr>
             <a:xfrm>
-              <a:off x="4977037" y="3154518"/>
+              <a:off x="4949420" y="3154518"/>
               <a:ext cx="61566" cy="61566"/>
             </a:xfrm>
             <a:prstGeom prst="ellipse">
@@ -12282,7 +12282,7 @@
           </p:nvSpPr>
           <p:spPr>
             <a:xfrm>
-              <a:off x="4789486" y="2561329"/>
+              <a:off x="4724022" y="2561329"/>
               <a:ext cx="61566" cy="61566"/>
             </a:xfrm>
             <a:prstGeom prst="ellipse">
@@ -12308,7 +12308,7 @@
           </p:nvSpPr>
           <p:spPr>
             <a:xfrm>
-              <a:off x="5032235" y="2626090"/>
+              <a:off x="4991991" y="2626090"/>
               <a:ext cx="61566" cy="61566"/>
             </a:xfrm>
             <a:prstGeom prst="ellipse">
@@ -12334,7 +12334,7 @@
           </p:nvSpPr>
           <p:spPr>
             <a:xfrm>
-              <a:off x="4763899" y="2777392"/>
+              <a:off x="4729872" y="2777392"/>
               <a:ext cx="61566" cy="61566"/>
             </a:xfrm>
             <a:prstGeom prst="ellipse">
@@ -12360,7 +12360,7 @@
           </p:nvSpPr>
           <p:spPr>
             <a:xfrm>
-              <a:off x="5018883" y="2773302"/>
+              <a:off x="5027977" y="2773302"/>
               <a:ext cx="61566" cy="61566"/>
             </a:xfrm>
             <a:prstGeom prst="ellipse">
@@ -12386,7 +12386,7 @@
           </p:nvSpPr>
           <p:spPr>
             <a:xfrm>
-              <a:off x="4760343" y="2859939"/>
+              <a:off x="4810095" y="2859939"/>
               <a:ext cx="61566" cy="61566"/>
             </a:xfrm>
             <a:prstGeom prst="ellipse">
@@ -12412,7 +12412,7 @@
           </p:nvSpPr>
           <p:spPr>
             <a:xfrm>
-              <a:off x="4945077" y="2895756"/>
+              <a:off x="4954738" y="2895756"/>
               <a:ext cx="61566" cy="61566"/>
             </a:xfrm>
             <a:prstGeom prst="ellipse">
@@ -12438,7 +12438,7 @@
           </p:nvSpPr>
           <p:spPr>
             <a:xfrm>
-              <a:off x="4750246" y="3015592"/>
+              <a:off x="4788982" y="3015592"/>
               <a:ext cx="61566" cy="61566"/>
             </a:xfrm>
             <a:prstGeom prst="ellipse">
@@ -12464,7 +12464,7 @@
           </p:nvSpPr>
           <p:spPr>
             <a:xfrm>
-              <a:off x="4963445" y="3197622"/>
+              <a:off x="5018553" y="3197622"/>
               <a:ext cx="61566" cy="61566"/>
             </a:xfrm>
             <a:prstGeom prst="ellipse">
@@ -12490,7 +12490,7 @@
           </p:nvSpPr>
           <p:spPr>
             <a:xfrm>
-              <a:off x="4718391" y="3149780"/>
+              <a:off x="4791545" y="3149780"/>
               <a:ext cx="61566" cy="61566"/>
             </a:xfrm>
             <a:prstGeom prst="ellipse">
@@ -12516,7 +12516,7 @@
           </p:nvSpPr>
           <p:spPr>
             <a:xfrm>
-              <a:off x="4992177" y="3559716"/>
+              <a:off x="5016316" y="3559716"/>
               <a:ext cx="61566" cy="61566"/>
             </a:xfrm>
             <a:prstGeom prst="ellipse">
@@ -12542,7 +12542,7 @@
           </p:nvSpPr>
           <p:spPr>
             <a:xfrm>
-              <a:off x="4754010" y="2472478"/>
+              <a:off x="4747821" y="2472478"/>
               <a:ext cx="61566" cy="61566"/>
             </a:xfrm>
             <a:prstGeom prst="ellipse">
@@ -12568,7 +12568,7 @@
           </p:nvSpPr>
           <p:spPr>
             <a:xfrm>
-              <a:off x="4995622" y="2715908"/>
+              <a:off x="4942223" y="2715908"/>
               <a:ext cx="61566" cy="61566"/>
             </a:xfrm>
             <a:prstGeom prst="ellipse">
@@ -12594,7 +12594,7 @@
           </p:nvSpPr>
           <p:spPr>
             <a:xfrm>
-              <a:off x="4807533" y="3007309"/>
+              <a:off x="4740799" y="3007309"/>
               <a:ext cx="61566" cy="61566"/>
             </a:xfrm>
             <a:prstGeom prst="ellipse">
@@ -12620,7 +12620,7 @@
           </p:nvSpPr>
           <p:spPr>
             <a:xfrm>
-              <a:off x="5003384" y="3211433"/>
+              <a:off x="5028439" y="3211433"/>
               <a:ext cx="61566" cy="61566"/>
             </a:xfrm>
             <a:prstGeom prst="ellipse">
@@ -12646,7 +12646,7 @@
           </p:nvSpPr>
           <p:spPr>
             <a:xfrm>
-              <a:off x="4799614" y="2213701"/>
+              <a:off x="4765090" y="2213701"/>
               <a:ext cx="61566" cy="61566"/>
             </a:xfrm>
             <a:prstGeom prst="ellipse">
@@ -12672,7 +12672,7 @@
           </p:nvSpPr>
           <p:spPr>
             <a:xfrm>
-              <a:off x="4981281" y="2582746"/>
+              <a:off x="5042316" y="2582746"/>
               <a:ext cx="61566" cy="61566"/>
             </a:xfrm>
             <a:prstGeom prst="ellipse">
@@ -12698,7 +12698,7 @@
           </p:nvSpPr>
           <p:spPr>
             <a:xfrm>
-              <a:off x="4751062" y="2471015"/>
+              <a:off x="4826138" y="2471015"/>
               <a:ext cx="61566" cy="61566"/>
             </a:xfrm>
             <a:prstGeom prst="ellipse">
@@ -12724,7 +12724,7 @@
           </p:nvSpPr>
           <p:spPr>
             <a:xfrm>
-              <a:off x="5001871" y="2655997"/>
+              <a:off x="4989881" y="2655997"/>
               <a:ext cx="61566" cy="61566"/>
             </a:xfrm>
             <a:prstGeom prst="ellipse">
@@ -12750,7 +12750,7 @@
           </p:nvSpPr>
           <p:spPr>
             <a:xfrm>
-              <a:off x="4757837" y="2229993"/>
+              <a:off x="4733878" y="2229993"/>
               <a:ext cx="61566" cy="61566"/>
             </a:xfrm>
             <a:prstGeom prst="ellipse">
@@ -12776,7 +12776,7 @@
           </p:nvSpPr>
           <p:spPr>
             <a:xfrm>
-              <a:off x="5024922" y="2554263"/>
+              <a:off x="5010514" y="2554263"/>
               <a:ext cx="61566" cy="61566"/>
             </a:xfrm>
             <a:prstGeom prst="ellipse">
@@ -12802,7 +12802,7 @@
           </p:nvSpPr>
           <p:spPr>
             <a:xfrm>
-              <a:off x="4747226" y="3724848"/>
+              <a:off x="4777402" y="3724848"/>
               <a:ext cx="61566" cy="61566"/>
             </a:xfrm>
             <a:prstGeom prst="ellipse">
@@ -12828,7 +12828,7 @@
           </p:nvSpPr>
           <p:spPr>
             <a:xfrm>
-              <a:off x="5018563" y="3507676"/>
+              <a:off x="5035613" y="3507676"/>
               <a:ext cx="61566" cy="61566"/>
             </a:xfrm>
             <a:prstGeom prst="ellipse">
@@ -12854,7 +12854,7 @@
           </p:nvSpPr>
           <p:spPr>
             <a:xfrm>
-              <a:off x="4800865" y="3302413"/>
+              <a:off x="4787055" y="3302413"/>
               <a:ext cx="61566" cy="61566"/>
             </a:xfrm>
             <a:prstGeom prst="ellipse">
@@ -12880,7 +12880,7 @@
           </p:nvSpPr>
           <p:spPr>
             <a:xfrm>
-              <a:off x="5009431" y="2981635"/>
+              <a:off x="4956683" y="2981635"/>
               <a:ext cx="61566" cy="61566"/>
             </a:xfrm>
             <a:prstGeom prst="ellipse">
@@ -12906,7 +12906,7 @@
           </p:nvSpPr>
           <p:spPr>
             <a:xfrm>
-              <a:off x="4771881" y="2240656"/>
+              <a:off x="4822469" y="2240656"/>
               <a:ext cx="61566" cy="61566"/>
             </a:xfrm>
             <a:prstGeom prst="ellipse">
@@ -12932,7 +12932,7 @@
           </p:nvSpPr>
           <p:spPr>
             <a:xfrm>
-              <a:off x="4981759" y="2765896"/>
+              <a:off x="4938995" y="2765896"/>
               <a:ext cx="61566" cy="61566"/>
             </a:xfrm>
             <a:prstGeom prst="ellipse">
@@ -12958,7 +12958,7 @@
           </p:nvSpPr>
           <p:spPr>
             <a:xfrm>
-              <a:off x="4771290" y="2909027"/>
+              <a:off x="4770391" y="2909027"/>
               <a:ext cx="61566" cy="61566"/>
             </a:xfrm>
             <a:prstGeom prst="ellipse">
@@ -12984,7 +12984,7 @@
           </p:nvSpPr>
           <p:spPr>
             <a:xfrm>
-              <a:off x="4977380" y="3216630"/>
+              <a:off x="5008085" y="3216630"/>
               <a:ext cx="61566" cy="61566"/>
             </a:xfrm>
             <a:prstGeom prst="ellipse">
@@ -13010,7 +13010,7 @@
           </p:nvSpPr>
           <p:spPr>
             <a:xfrm>
-              <a:off x="4820934" y="2549423"/>
+              <a:off x="4740312" y="2549423"/>
               <a:ext cx="61566" cy="61566"/>
             </a:xfrm>
             <a:prstGeom prst="ellipse">
@@ -13036,7 +13036,7 @@
           </p:nvSpPr>
           <p:spPr>
             <a:xfrm>
-              <a:off x="4991540" y="2733111"/>
+              <a:off x="5048111" y="2733111"/>
               <a:ext cx="61566" cy="61566"/>
             </a:xfrm>
             <a:prstGeom prst="ellipse">
@@ -13062,7 +13062,7 @@
           </p:nvSpPr>
           <p:spPr>
             <a:xfrm>
-              <a:off x="4718973" y="2741824"/>
+              <a:off x="4812863" y="2741824"/>
               <a:ext cx="61566" cy="61566"/>
             </a:xfrm>
             <a:prstGeom prst="ellipse">
@@ -13088,7 +13088,7 @@
           </p:nvSpPr>
           <p:spPr>
             <a:xfrm>
-              <a:off x="4991471" y="2967918"/>
+              <a:off x="4951154" y="2967918"/>
               <a:ext cx="61566" cy="61566"/>
             </a:xfrm>
             <a:prstGeom prst="ellipse">
@@ -13114,7 +13114,7 @@
           </p:nvSpPr>
           <p:spPr>
             <a:xfrm>
-              <a:off x="4787404" y="3560626"/>
+              <a:off x="4745726" y="3560626"/>
               <a:ext cx="61566" cy="61566"/>
             </a:xfrm>
             <a:prstGeom prst="ellipse">
@@ -13140,7 +13140,7 @@
           </p:nvSpPr>
           <p:spPr>
             <a:xfrm>
-              <a:off x="5038566" y="3292212"/>
+              <a:off x="5009670" y="3292212"/>
               <a:ext cx="61566" cy="61566"/>
             </a:xfrm>
             <a:prstGeom prst="ellipse">
@@ -13166,7 +13166,7 @@
           </p:nvSpPr>
           <p:spPr>
             <a:xfrm>
-              <a:off x="4736533" y="2914837"/>
+              <a:off x="4733529" y="2914837"/>
               <a:ext cx="61566" cy="61566"/>
             </a:xfrm>
             <a:prstGeom prst="ellipse">
@@ -13192,7 +13192,7 @@
           </p:nvSpPr>
           <p:spPr>
             <a:xfrm>
-              <a:off x="5028903" y="3118051"/>
+              <a:off x="4988084" y="3118051"/>
               <a:ext cx="61566" cy="61566"/>
             </a:xfrm>
             <a:prstGeom prst="ellipse">
@@ -13218,7 +13218,7 @@
           </p:nvSpPr>
           <p:spPr>
             <a:xfrm>
-              <a:off x="4791967" y="2720215"/>
+              <a:off x="4755165" y="2720215"/>
               <a:ext cx="61566" cy="61566"/>
             </a:xfrm>
             <a:prstGeom prst="ellipse">
@@ -13244,7 +13244,7 @@
           </p:nvSpPr>
           <p:spPr>
             <a:xfrm>
-              <a:off x="4974232" y="3085560"/>
+              <a:off x="5022337" y="3085560"/>
               <a:ext cx="61566" cy="61566"/>
             </a:xfrm>
             <a:prstGeom prst="ellipse">
@@ -13270,7 +13270,7 @@
           </p:nvSpPr>
           <p:spPr>
             <a:xfrm>
-              <a:off x="4763264" y="2811001"/>
+              <a:off x="4732537" y="2811001"/>
               <a:ext cx="61566" cy="61566"/>
             </a:xfrm>
             <a:prstGeom prst="ellipse">
@@ -13296,7 +13296,7 @@
           </p:nvSpPr>
           <p:spPr>
             <a:xfrm>
-              <a:off x="5010003" y="2764387"/>
+              <a:off x="4960599" y="2764387"/>
               <a:ext cx="61566" cy="61566"/>
             </a:xfrm>
             <a:prstGeom prst="ellipse">
@@ -13322,7 +13322,7 @@
           </p:nvSpPr>
           <p:spPr>
             <a:xfrm>
-              <a:off x="4756337" y="3483295"/>
+              <a:off x="4817859" y="3483295"/>
               <a:ext cx="61566" cy="61566"/>
             </a:xfrm>
             <a:prstGeom prst="ellipse">
@@ -13348,7 +13348,7 @@
           </p:nvSpPr>
           <p:spPr>
             <a:xfrm>
-              <a:off x="5047523" y="3969119"/>
+              <a:off x="4973987" y="3969119"/>
               <a:ext cx="61566" cy="61566"/>
             </a:xfrm>
             <a:prstGeom prst="ellipse">
@@ -13374,7 +13374,7 @@
           </p:nvSpPr>
           <p:spPr>
             <a:xfrm>
-              <a:off x="4740945" y="2451328"/>
+              <a:off x="4808904" y="2451328"/>
               <a:ext cx="61566" cy="61566"/>
             </a:xfrm>
             <a:prstGeom prst="ellipse">
@@ -13400,7 +13400,7 @@
           </p:nvSpPr>
           <p:spPr>
             <a:xfrm>
-              <a:off x="5002778" y="2617745"/>
+              <a:off x="5020410" y="2617745"/>
               <a:ext cx="61566" cy="61566"/>
             </a:xfrm>
             <a:prstGeom prst="ellipse">
@@ -13426,7 +13426,7 @@
           </p:nvSpPr>
           <p:spPr>
             <a:xfrm>
-              <a:off x="4793333" y="2577501"/>
+              <a:off x="4766292" y="2577501"/>
               <a:ext cx="61566" cy="61566"/>
             </a:xfrm>
             <a:prstGeom prst="ellipse">
@@ -13452,7 +13452,7 @@
           </p:nvSpPr>
           <p:spPr>
             <a:xfrm>
-              <a:off x="4978076" y="2659879"/>
+              <a:off x="4990377" y="2659879"/>
               <a:ext cx="61566" cy="61566"/>
             </a:xfrm>
             <a:prstGeom prst="ellipse">
@@ -13478,7 +13478,7 @@
           </p:nvSpPr>
           <p:spPr>
             <a:xfrm>
-              <a:off x="4738861" y="2265108"/>
+              <a:off x="4810583" y="2265108"/>
               <a:ext cx="61566" cy="61566"/>
             </a:xfrm>
             <a:prstGeom prst="ellipse">
@@ -13504,7 +13504,7 @@
           </p:nvSpPr>
           <p:spPr>
             <a:xfrm>
-              <a:off x="5023655" y="2512269"/>
+              <a:off x="5044321" y="2512269"/>
               <a:ext cx="61566" cy="61566"/>
             </a:xfrm>
             <a:prstGeom prst="ellipse">
@@ -13530,7 +13530,7 @@
           </p:nvSpPr>
           <p:spPr>
             <a:xfrm>
-              <a:off x="4777819" y="2358148"/>
+              <a:off x="4753219" y="2358148"/>
               <a:ext cx="61566" cy="61566"/>
             </a:xfrm>
             <a:prstGeom prst="ellipse">
@@ -13556,7 +13556,7 @@
           </p:nvSpPr>
           <p:spPr>
             <a:xfrm>
-              <a:off x="4975163" y="2422585"/>
+              <a:off x="5001744" y="2422585"/>
               <a:ext cx="61566" cy="61566"/>
             </a:xfrm>
             <a:prstGeom prst="ellipse">
@@ -13582,7 +13582,7 @@
           </p:nvSpPr>
           <p:spPr>
             <a:xfrm>
-              <a:off x="4799960" y="2311362"/>
+              <a:off x="4785897" y="2311362"/>
               <a:ext cx="61566" cy="61566"/>
             </a:xfrm>
             <a:prstGeom prst="ellipse">
@@ -13608,7 +13608,7 @@
           </p:nvSpPr>
           <p:spPr>
             <a:xfrm>
-              <a:off x="4950969" y="2433006"/>
+              <a:off x="4997986" y="2433006"/>
               <a:ext cx="61566" cy="61566"/>
             </a:xfrm>
             <a:prstGeom prst="ellipse">
@@ -13634,7 +13634,7 @@
           </p:nvSpPr>
           <p:spPr>
             <a:xfrm>
-              <a:off x="4731906" y="2814916"/>
+              <a:off x="4734256" y="2814916"/>
               <a:ext cx="61566" cy="61566"/>
             </a:xfrm>
             <a:prstGeom prst="ellipse">
@@ -13660,7 +13660,7 @@
           </p:nvSpPr>
           <p:spPr>
             <a:xfrm>
-              <a:off x="5012556" y="2651773"/>
+              <a:off x="4955303" y="2651773"/>
               <a:ext cx="61566" cy="61566"/>
             </a:xfrm>
             <a:prstGeom prst="ellipse">
@@ -13686,7 +13686,7 @@
           </p:nvSpPr>
           <p:spPr>
             <a:xfrm>
-              <a:off x="4758509" y="2550285"/>
+              <a:off x="4790455" y="2550285"/>
               <a:ext cx="61566" cy="61566"/>
             </a:xfrm>
             <a:prstGeom prst="ellipse">
@@ -13712,7 +13712,7 @@
           </p:nvSpPr>
           <p:spPr>
             <a:xfrm>
-              <a:off x="4967086" y="2651083"/>
+              <a:off x="5010359" y="2651083"/>
               <a:ext cx="61566" cy="61566"/>
             </a:xfrm>
             <a:prstGeom prst="ellipse">
@@ -13738,7 +13738,7 @@
           </p:nvSpPr>
           <p:spPr>
             <a:xfrm>
-              <a:off x="4757467" y="2110666"/>
+              <a:off x="4758553" y="2110666"/>
               <a:ext cx="61566" cy="61566"/>
             </a:xfrm>
             <a:prstGeom prst="ellipse">
@@ -13764,7 +13764,7 @@
           </p:nvSpPr>
           <p:spPr>
             <a:xfrm>
-              <a:off x="4983563" y="2439639"/>
+              <a:off x="4962464" y="2439639"/>
               <a:ext cx="61566" cy="61566"/>
             </a:xfrm>
             <a:prstGeom prst="ellipse">
@@ -13790,7 +13790,7 @@
           </p:nvSpPr>
           <p:spPr>
             <a:xfrm>
-              <a:off x="4727118" y="2302403"/>
+              <a:off x="4755322" y="2302403"/>
               <a:ext cx="61566" cy="61566"/>
             </a:xfrm>
             <a:prstGeom prst="ellipse">
@@ -13816,7 +13816,7 @@
           </p:nvSpPr>
           <p:spPr>
             <a:xfrm>
-              <a:off x="4998116" y="2615882"/>
+              <a:off x="4950730" y="2615882"/>
               <a:ext cx="61566" cy="61566"/>
             </a:xfrm>
             <a:prstGeom prst="ellipse">
@@ -13842,7 +13842,7 @@
           </p:nvSpPr>
           <p:spPr>
             <a:xfrm>
-              <a:off x="4772650" y="2435098"/>
+              <a:off x="4818344" y="2435098"/>
               <a:ext cx="61566" cy="61566"/>
             </a:xfrm>
             <a:prstGeom prst="ellipse">
@@ -13868,7 +13868,7 @@
           </p:nvSpPr>
           <p:spPr>
             <a:xfrm>
-              <a:off x="5003213" y="2468782"/>
+              <a:off x="5039397" y="2468782"/>
               <a:ext cx="61566" cy="61566"/>
             </a:xfrm>
             <a:prstGeom prst="ellipse">
@@ -13894,7 +13894,7 @@
           </p:nvSpPr>
           <p:spPr>
             <a:xfrm>
-              <a:off x="4731898" y="2485724"/>
+              <a:off x="4747484" y="2485724"/>
               <a:ext cx="61566" cy="61566"/>
             </a:xfrm>
             <a:prstGeom prst="ellipse">
@@ -13920,7 +13920,7 @@
           </p:nvSpPr>
           <p:spPr>
             <a:xfrm>
-              <a:off x="4970853" y="2674880"/>
+              <a:off x="5035877" y="2674880"/>
               <a:ext cx="61566" cy="61566"/>
             </a:xfrm>
             <a:prstGeom prst="ellipse">
@@ -13946,7 +13946,7 @@
           </p:nvSpPr>
           <p:spPr>
             <a:xfrm>
-              <a:off x="4752414" y="2168860"/>
+              <a:off x="4720147" y="2168860"/>
               <a:ext cx="61566" cy="61566"/>
             </a:xfrm>
             <a:prstGeom prst="ellipse">
@@ -13972,7 +13972,7 @@
           </p:nvSpPr>
           <p:spPr>
             <a:xfrm>
-              <a:off x="5014835" y="2325591"/>
+              <a:off x="4967734" y="2325591"/>
               <a:ext cx="61566" cy="61566"/>
             </a:xfrm>
             <a:prstGeom prst="ellipse">
@@ -13998,7 +13998,7 @@
           </p:nvSpPr>
           <p:spPr>
             <a:xfrm>
-              <a:off x="4811291" y="2212748"/>
+              <a:off x="4771864" y="2212748"/>
               <a:ext cx="61566" cy="61566"/>
             </a:xfrm>
             <a:prstGeom prst="ellipse">
@@ -14024,7 +14024,7 @@
           </p:nvSpPr>
           <p:spPr>
             <a:xfrm>
-              <a:off x="5004546" y="2169248"/>
+              <a:off x="4995558" y="2169248"/>
               <a:ext cx="61566" cy="61566"/>
             </a:xfrm>
             <a:prstGeom prst="ellipse">
@@ -14050,7 +14050,7 @@
           </p:nvSpPr>
           <p:spPr>
             <a:xfrm>
-              <a:off x="4717133" y="2486002"/>
+              <a:off x="4808974" y="2486002"/>
               <a:ext cx="61566" cy="61566"/>
             </a:xfrm>
             <a:prstGeom prst="ellipse">
@@ -14076,7 +14076,7 @@
           </p:nvSpPr>
           <p:spPr>
             <a:xfrm>
-              <a:off x="5016486" y="2519665"/>
+              <a:off x="4946183" y="2519665"/>
               <a:ext cx="61566" cy="61566"/>
             </a:xfrm>
             <a:prstGeom prst="ellipse">
@@ -14102,7 +14102,7 @@
           </p:nvSpPr>
           <p:spPr>
             <a:xfrm>
-              <a:off x="4769549" y="2024078"/>
+              <a:off x="4718324" y="2024078"/>
               <a:ext cx="61566" cy="61566"/>
             </a:xfrm>
             <a:prstGeom prst="ellipse">
@@ -14128,7 +14128,7 @@
           </p:nvSpPr>
           <p:spPr>
             <a:xfrm>
-              <a:off x="5014940" y="2747236"/>
+              <a:off x="4991175" y="2747236"/>
               <a:ext cx="61566" cy="61566"/>
             </a:xfrm>
             <a:prstGeom prst="ellipse">
@@ -14154,7 +14154,7 @@
           </p:nvSpPr>
           <p:spPr>
             <a:xfrm>
-              <a:off x="4779770" y="2289778"/>
+              <a:off x="4769598" y="2289778"/>
               <a:ext cx="61566" cy="61566"/>
             </a:xfrm>
             <a:prstGeom prst="ellipse">
@@ -14180,7 +14180,7 @@
           </p:nvSpPr>
           <p:spPr>
             <a:xfrm>
-              <a:off x="5017069" y="2580809"/>
+              <a:off x="4974009" y="2580809"/>
               <a:ext cx="61566" cy="61566"/>
             </a:xfrm>
             <a:prstGeom prst="ellipse">
@@ -14206,7 +14206,7 @@
           </p:nvSpPr>
           <p:spPr>
             <a:xfrm>
-              <a:off x="4818457" y="2133995"/>
+              <a:off x="4790157" y="2133995"/>
               <a:ext cx="61566" cy="61566"/>
             </a:xfrm>
             <a:prstGeom prst="ellipse">
@@ -14232,7 +14232,7 @@
           </p:nvSpPr>
           <p:spPr>
             <a:xfrm>
-              <a:off x="4957930" y="2419218"/>
+              <a:off x="5013777" y="2419218"/>
               <a:ext cx="61566" cy="61566"/>
             </a:xfrm>
             <a:prstGeom prst="ellipse">
@@ -14258,7 +14258,7 @@
           </p:nvSpPr>
           <p:spPr>
             <a:xfrm>
-              <a:off x="4781921" y="2370496"/>
+              <a:off x="4771669" y="2370496"/>
               <a:ext cx="61566" cy="61566"/>
             </a:xfrm>
             <a:prstGeom prst="ellipse">
@@ -14284,7 +14284,7 @@
           </p:nvSpPr>
           <p:spPr>
             <a:xfrm>
-              <a:off x="4986396" y="2626945"/>
+              <a:off x="5036633" y="2626945"/>
               <a:ext cx="61566" cy="61566"/>
             </a:xfrm>
             <a:prstGeom prst="ellipse">
@@ -14310,7 +14310,7 @@
           </p:nvSpPr>
           <p:spPr>
             <a:xfrm>
-              <a:off x="4807081" y="1776967"/>
+              <a:off x="4747718" y="1776967"/>
               <a:ext cx="61566" cy="61566"/>
             </a:xfrm>
             <a:prstGeom prst="ellipse">
@@ -14336,7 +14336,7 @@
           </p:nvSpPr>
           <p:spPr>
             <a:xfrm>
-              <a:off x="4969706" y="2377370"/>
+              <a:off x="5023672" y="2377370"/>
               <a:ext cx="61566" cy="61566"/>
             </a:xfrm>
             <a:prstGeom prst="ellipse">
@@ -14362,7 +14362,7 @@
           </p:nvSpPr>
           <p:spPr>
             <a:xfrm>
-              <a:off x="4805943" y="2715422"/>
+              <a:off x="4792397" y="2715422"/>
               <a:ext cx="61566" cy="61566"/>
             </a:xfrm>
             <a:prstGeom prst="ellipse">
@@ -14388,7 +14388,7 @@
           </p:nvSpPr>
           <p:spPr>
             <a:xfrm>
-              <a:off x="5037832" y="2845389"/>
+              <a:off x="4980195" y="2845389"/>
               <a:ext cx="61566" cy="61566"/>
             </a:xfrm>
             <a:prstGeom prst="ellipse">
@@ -14414,7 +14414,7 @@
           </p:nvSpPr>
           <p:spPr>
             <a:xfrm>
-              <a:off x="4718067" y="2368388"/>
+              <a:off x="4751469" y="2368388"/>
               <a:ext cx="61566" cy="61566"/>
             </a:xfrm>
             <a:prstGeom prst="ellipse">
@@ -14440,7 +14440,7 @@
           </p:nvSpPr>
           <p:spPr>
             <a:xfrm>
-              <a:off x="5028217" y="2732179"/>
+              <a:off x="5044022" y="2732179"/>
               <a:ext cx="61566" cy="61566"/>
             </a:xfrm>
             <a:prstGeom prst="ellipse">
@@ -14466,7 +14466,7 @@
           </p:nvSpPr>
           <p:spPr>
             <a:xfrm>
-              <a:off x="4799769" y="2314894"/>
+              <a:off x="4815156" y="2314894"/>
               <a:ext cx="61566" cy="61566"/>
             </a:xfrm>
             <a:prstGeom prst="ellipse">
@@ -14492,7 +14492,7 @@
           </p:nvSpPr>
           <p:spPr>
             <a:xfrm>
-              <a:off x="4946969" y="2793807"/>
+              <a:off x="4939339" y="2793807"/>
               <a:ext cx="61566" cy="61566"/>
             </a:xfrm>
             <a:prstGeom prst="ellipse">
@@ -14518,7 +14518,7 @@
           </p:nvSpPr>
           <p:spPr>
             <a:xfrm>
-              <a:off x="4762700" y="2879167"/>
+              <a:off x="4809442" y="2879167"/>
               <a:ext cx="61566" cy="61566"/>
             </a:xfrm>
             <a:prstGeom prst="ellipse">
@@ -14544,7 +14544,7 @@
           </p:nvSpPr>
           <p:spPr>
             <a:xfrm>
-              <a:off x="4984478" y="2737448"/>
+              <a:off x="4996470" y="2737448"/>
               <a:ext cx="61566" cy="61566"/>
             </a:xfrm>
             <a:prstGeom prst="ellipse">
@@ -14570,7 +14570,7 @@
           </p:nvSpPr>
           <p:spPr>
             <a:xfrm>
-              <a:off x="4795841" y="2403438"/>
+              <a:off x="4754719" y="2403438"/>
               <a:ext cx="61566" cy="61566"/>
             </a:xfrm>
             <a:prstGeom prst="ellipse">
@@ -14596,7 +14596,7 @@
           </p:nvSpPr>
           <p:spPr>
             <a:xfrm>
-              <a:off x="4954698" y="2656992"/>
+              <a:off x="4983667" y="2656992"/>
               <a:ext cx="61566" cy="61566"/>
             </a:xfrm>
             <a:prstGeom prst="ellipse">
@@ -14622,7 +14622,7 @@
           </p:nvSpPr>
           <p:spPr>
             <a:xfrm>
-              <a:off x="4821276" y="2188945"/>
+              <a:off x="4802798" y="2188945"/>
               <a:ext cx="61566" cy="61566"/>
             </a:xfrm>
             <a:prstGeom prst="ellipse">
@@ -14648,7 +14648,7 @@
           </p:nvSpPr>
           <p:spPr>
             <a:xfrm>
-              <a:off x="4985875" y="2586750"/>
+              <a:off x="4983888" y="2586750"/>
               <a:ext cx="61566" cy="61566"/>
             </a:xfrm>
             <a:prstGeom prst="ellipse">
@@ -14674,7 +14674,7 @@
           </p:nvSpPr>
           <p:spPr>
             <a:xfrm>
-              <a:off x="4759557" y="3070479"/>
+              <a:off x="4753098" y="3070479"/>
               <a:ext cx="61566" cy="61566"/>
             </a:xfrm>
             <a:prstGeom prst="ellipse">
@@ -14700,7 +14700,7 @@
           </p:nvSpPr>
           <p:spPr>
             <a:xfrm>
-              <a:off x="4937620" y="2929876"/>
+              <a:off x="4946680" y="2929876"/>
               <a:ext cx="61566" cy="61566"/>
             </a:xfrm>
             <a:prstGeom prst="ellipse">
@@ -14726,7 +14726,7 @@
           </p:nvSpPr>
           <p:spPr>
             <a:xfrm>
-              <a:off x="4746720" y="2781773"/>
+              <a:off x="4791601" y="2781773"/>
               <a:ext cx="61566" cy="61566"/>
             </a:xfrm>
             <a:prstGeom prst="ellipse">
@@ -14752,7 +14752,7 @@
           </p:nvSpPr>
           <p:spPr>
             <a:xfrm>
-              <a:off x="5030645" y="3210102"/>
+              <a:off x="4954078" y="3210102"/>
               <a:ext cx="61566" cy="61566"/>
             </a:xfrm>
             <a:prstGeom prst="ellipse">
@@ -14778,7 +14778,7 @@
           </p:nvSpPr>
           <p:spPr>
             <a:xfrm>
-              <a:off x="4774541" y="2447017"/>
+              <a:off x="4737905" y="2447017"/>
               <a:ext cx="61566" cy="61566"/>
             </a:xfrm>
             <a:prstGeom prst="ellipse">
@@ -14804,7 +14804,7 @@
           </p:nvSpPr>
           <p:spPr>
             <a:xfrm>
-              <a:off x="4991634" y="2582842"/>
+              <a:off x="4955936" y="2582842"/>
               <a:ext cx="61566" cy="61566"/>
             </a:xfrm>
             <a:prstGeom prst="ellipse">
@@ -14830,7 +14830,7 @@
           </p:nvSpPr>
           <p:spPr>
             <a:xfrm>
-              <a:off x="4746737" y="2405960"/>
+              <a:off x="4773041" y="2405960"/>
               <a:ext cx="61566" cy="61566"/>
             </a:xfrm>
             <a:prstGeom prst="ellipse">
@@ -14856,7 +14856,7 @@
           </p:nvSpPr>
           <p:spPr>
             <a:xfrm>
-              <a:off x="5023621" y="2407397"/>
+              <a:off x="4998655" y="2407397"/>
               <a:ext cx="61566" cy="61566"/>
             </a:xfrm>
             <a:prstGeom prst="ellipse">
@@ -14882,7 +14882,7 @@
           </p:nvSpPr>
           <p:spPr>
             <a:xfrm>
-              <a:off x="4755852" y="2358356"/>
+              <a:off x="4794435" y="2358356"/>
               <a:ext cx="61566" cy="61566"/>
             </a:xfrm>
             <a:prstGeom prst="ellipse">
@@ -14908,7 +14908,7 @@
           </p:nvSpPr>
           <p:spPr>
             <a:xfrm>
-              <a:off x="4967431" y="2650182"/>
+              <a:off x="5008627" y="2650182"/>
               <a:ext cx="61566" cy="61566"/>
             </a:xfrm>
             <a:prstGeom prst="ellipse">
@@ -14934,7 +14934,7 @@
           </p:nvSpPr>
           <p:spPr>
             <a:xfrm>
-              <a:off x="4793892" y="2464257"/>
+              <a:off x="4783651" y="2464257"/>
               <a:ext cx="61566" cy="61566"/>
             </a:xfrm>
             <a:prstGeom prst="ellipse">
@@ -14960,7 +14960,7 @@
           </p:nvSpPr>
           <p:spPr>
             <a:xfrm>
-              <a:off x="4974504" y="2711951"/>
+              <a:off x="4949173" y="2711951"/>
               <a:ext cx="61566" cy="61566"/>
             </a:xfrm>
             <a:prstGeom prst="ellipse">
@@ -14986,7 +14986,7 @@
           </p:nvSpPr>
           <p:spPr>
             <a:xfrm>
-              <a:off x="4822737" y="2305278"/>
+              <a:off x="4808481" y="2305278"/>
               <a:ext cx="61566" cy="61566"/>
             </a:xfrm>
             <a:prstGeom prst="ellipse">
@@ -15012,7 +15012,7 @@
           </p:nvSpPr>
           <p:spPr>
             <a:xfrm>
-              <a:off x="4999434" y="3061199"/>
+              <a:off x="4981507" y="3061199"/>
               <a:ext cx="61566" cy="61566"/>
             </a:xfrm>
             <a:prstGeom prst="ellipse">
@@ -15038,7 +15038,7 @@
           </p:nvSpPr>
           <p:spPr>
             <a:xfrm>
-              <a:off x="4772375" y="3496530"/>
+              <a:off x="4777325" y="3496530"/>
               <a:ext cx="61566" cy="61566"/>
             </a:xfrm>
             <a:prstGeom prst="ellipse">
@@ -15064,7 +15064,7 @@
           </p:nvSpPr>
           <p:spPr>
             <a:xfrm>
-              <a:off x="4937870" y="3413244"/>
+              <a:off x="5011038" y="3413244"/>
               <a:ext cx="61566" cy="61566"/>
             </a:xfrm>
             <a:prstGeom prst="ellipse">
@@ -15090,7 +15090,7 @@
           </p:nvSpPr>
           <p:spPr>
             <a:xfrm>
-              <a:off x="4806878" y="2705130"/>
+              <a:off x="4723688" y="2705130"/>
               <a:ext cx="61566" cy="61566"/>
             </a:xfrm>
             <a:prstGeom prst="ellipse">
@@ -15116,7 +15116,7 @@
           </p:nvSpPr>
           <p:spPr>
             <a:xfrm>
-              <a:off x="4974235" y="3081195"/>
+              <a:off x="5032684" y="3081195"/>
               <a:ext cx="61566" cy="61566"/>
             </a:xfrm>
             <a:prstGeom prst="ellipse">
@@ -15142,7 +15142,7 @@
           </p:nvSpPr>
           <p:spPr>
             <a:xfrm>
-              <a:off x="4732955" y="2621196"/>
+              <a:off x="4717821" y="2621196"/>
               <a:ext cx="61566" cy="61566"/>
             </a:xfrm>
             <a:prstGeom prst="ellipse">
@@ -15168,7 +15168,7 @@
           </p:nvSpPr>
           <p:spPr>
             <a:xfrm>
-              <a:off x="5007903" y="2591566"/>
+              <a:off x="5018562" y="2591566"/>
               <a:ext cx="61566" cy="61566"/>
             </a:xfrm>
             <a:prstGeom prst="ellipse">
@@ -15194,7 +15194,7 @@
           </p:nvSpPr>
           <p:spPr>
             <a:xfrm>
-              <a:off x="4731086" y="2609518"/>
+              <a:off x="4793675" y="2609518"/>
               <a:ext cx="61566" cy="61566"/>
             </a:xfrm>
             <a:prstGeom prst="ellipse">
@@ -15220,7 +15220,7 @@
           </p:nvSpPr>
           <p:spPr>
             <a:xfrm>
-              <a:off x="5012319" y="2456568"/>
+              <a:off x="5033164" y="2456568"/>
               <a:ext cx="61566" cy="61566"/>
             </a:xfrm>
             <a:prstGeom prst="ellipse">
@@ -15246,7 +15246,7 @@
           </p:nvSpPr>
           <p:spPr>
             <a:xfrm>
-              <a:off x="4812700" y="3056326"/>
+              <a:off x="4816057" y="3056326"/>
               <a:ext cx="61566" cy="61566"/>
             </a:xfrm>
             <a:prstGeom prst="ellipse">
@@ -15272,7 +15272,7 @@
           </p:nvSpPr>
           <p:spPr>
             <a:xfrm>
-              <a:off x="5009846" y="3030904"/>
+              <a:off x="4976205" y="3030904"/>
               <a:ext cx="61566" cy="61566"/>
             </a:xfrm>
             <a:prstGeom prst="ellipse">
@@ -15298,7 +15298,7 @@
           </p:nvSpPr>
           <p:spPr>
             <a:xfrm>
-              <a:off x="4750374" y="3144480"/>
+              <a:off x="4787186" y="3144480"/>
               <a:ext cx="61566" cy="61566"/>
             </a:xfrm>
             <a:prstGeom prst="ellipse">
@@ -15324,7 +15324,7 @@
           </p:nvSpPr>
           <p:spPr>
             <a:xfrm>
-              <a:off x="5024332" y="3274206"/>
+              <a:off x="4948062" y="3274206"/>
               <a:ext cx="61566" cy="61566"/>
             </a:xfrm>
             <a:prstGeom prst="ellipse">
@@ -15350,7 +15350,7 @@
           </p:nvSpPr>
           <p:spPr>
             <a:xfrm>
-              <a:off x="4813442" y="2582934"/>
+              <a:off x="4775528" y="2582934"/>
               <a:ext cx="61566" cy="61566"/>
             </a:xfrm>
             <a:prstGeom prst="ellipse">
@@ -15376,7 +15376,7 @@
           </p:nvSpPr>
           <p:spPr>
             <a:xfrm>
-              <a:off x="5044703" y="3070681"/>
+              <a:off x="4957153" y="3070681"/>
               <a:ext cx="61566" cy="61566"/>
             </a:xfrm>
             <a:prstGeom prst="ellipse">
@@ -15402,7 +15402,7 @@
           </p:nvSpPr>
           <p:spPr>
             <a:xfrm>
-              <a:off x="4814667" y="2772257"/>
+              <a:off x="4776574" y="2772257"/>
               <a:ext cx="61566" cy="61566"/>
             </a:xfrm>
             <a:prstGeom prst="ellipse">
@@ -15428,7 +15428,7 @@
           </p:nvSpPr>
           <p:spPr>
             <a:xfrm>
-              <a:off x="4997823" y="3162555"/>
+              <a:off x="5032686" y="3162555"/>
               <a:ext cx="61566" cy="61566"/>
             </a:xfrm>
             <a:prstGeom prst="ellipse">
@@ -15454,7 +15454,7 @@
           </p:nvSpPr>
           <p:spPr>
             <a:xfrm>
-              <a:off x="4779176" y="2125412"/>
+              <a:off x="4813844" y="2125412"/>
               <a:ext cx="61566" cy="61566"/>
             </a:xfrm>
             <a:prstGeom prst="ellipse">
@@ -15480,7 +15480,7 @@
           </p:nvSpPr>
           <p:spPr>
             <a:xfrm>
-              <a:off x="5025965" y="2626171"/>
+              <a:off x="5024054" y="2626171"/>
               <a:ext cx="61566" cy="61566"/>
             </a:xfrm>
             <a:prstGeom prst="ellipse">
@@ -15506,7 +15506,7 @@
           </p:nvSpPr>
           <p:spPr>
             <a:xfrm>
-              <a:off x="4811390" y="2346961"/>
+              <a:off x="4814455" y="2346961"/>
               <a:ext cx="61566" cy="61566"/>
             </a:xfrm>
             <a:prstGeom prst="ellipse">
@@ -15532,7 +15532,7 @@
           </p:nvSpPr>
           <p:spPr>
             <a:xfrm>
-              <a:off x="5003325" y="2736010"/>
+              <a:off x="5005787" y="2736010"/>
               <a:ext cx="61566" cy="61566"/>
             </a:xfrm>
             <a:prstGeom prst="ellipse">
@@ -15558,7 +15558,7 @@
           </p:nvSpPr>
           <p:spPr>
             <a:xfrm>
-              <a:off x="4754857" y="2351125"/>
+              <a:off x="4740880" y="2351125"/>
               <a:ext cx="61566" cy="61566"/>
             </a:xfrm>
             <a:prstGeom prst="ellipse">
@@ -15584,7 +15584,7 @@
           </p:nvSpPr>
           <p:spPr>
             <a:xfrm>
-              <a:off x="5034915" y="2975804"/>
+              <a:off x="5035349" y="2975804"/>
               <a:ext cx="61566" cy="61566"/>
             </a:xfrm>
             <a:prstGeom prst="ellipse">
@@ -15610,7 +15610,7 @@
           </p:nvSpPr>
           <p:spPr>
             <a:xfrm>
-              <a:off x="4730096" y="2650991"/>
+              <a:off x="4792312" y="2650991"/>
               <a:ext cx="61566" cy="61566"/>
             </a:xfrm>
             <a:prstGeom prst="ellipse">
@@ -15636,7 +15636,7 @@
           </p:nvSpPr>
           <p:spPr>
             <a:xfrm>
-              <a:off x="5025175" y="3166964"/>
+              <a:off x="4957149" y="3166964"/>
               <a:ext cx="61566" cy="61566"/>
             </a:xfrm>
             <a:prstGeom prst="ellipse">
@@ -15662,7 +15662,7 @@
           </p:nvSpPr>
           <p:spPr>
             <a:xfrm>
-              <a:off x="4728271" y="2000398"/>
+              <a:off x="4751255" y="2000398"/>
               <a:ext cx="61566" cy="61566"/>
             </a:xfrm>
             <a:prstGeom prst="ellipse">
@@ -15688,7 +15688,7 @@
           </p:nvSpPr>
           <p:spPr>
             <a:xfrm>
-              <a:off x="4960356" y="2420461"/>
+              <a:off x="5038526" y="2420461"/>
               <a:ext cx="61566" cy="61566"/>
             </a:xfrm>
             <a:prstGeom prst="ellipse">
@@ -15714,7 +15714,7 @@
           </p:nvSpPr>
           <p:spPr>
             <a:xfrm>
-              <a:off x="4788228" y="2816614"/>
+              <a:off x="4756607" y="2816614"/>
               <a:ext cx="61566" cy="61566"/>
             </a:xfrm>
             <a:prstGeom prst="ellipse">
@@ -15740,7 +15740,7 @@
           </p:nvSpPr>
           <p:spPr>
             <a:xfrm>
-              <a:off x="4956900" y="3424228"/>
+              <a:off x="4996797" y="3424228"/>
               <a:ext cx="61566" cy="61566"/>
             </a:xfrm>
             <a:prstGeom prst="ellipse">
@@ -15766,7 +15766,7 @@
           </p:nvSpPr>
           <p:spPr>
             <a:xfrm>
-              <a:off x="4717321" y="3377207"/>
+              <a:off x="4722591" y="3377207"/>
               <a:ext cx="61566" cy="61566"/>
             </a:xfrm>
             <a:prstGeom prst="ellipse">
@@ -15792,7 +15792,7 @@
           </p:nvSpPr>
           <p:spPr>
             <a:xfrm>
-              <a:off x="4993397" y="3038906"/>
+              <a:off x="5047331" y="3038906"/>
               <a:ext cx="61566" cy="61566"/>
             </a:xfrm>
             <a:prstGeom prst="ellipse">
@@ -15818,7 +15818,7 @@
           </p:nvSpPr>
           <p:spPr>
             <a:xfrm>
-              <a:off x="4766812" y="2423842"/>
+              <a:off x="4808635" y="2423842"/>
               <a:ext cx="61566" cy="61566"/>
             </a:xfrm>
             <a:prstGeom prst="ellipse">
@@ -15844,7 +15844,7 @@
           </p:nvSpPr>
           <p:spPr>
             <a:xfrm>
-              <a:off x="5028435" y="3017734"/>
+              <a:off x="5043373" y="3017734"/>
               <a:ext cx="61566" cy="61566"/>
             </a:xfrm>
             <a:prstGeom prst="ellipse">
@@ -15870,7 +15870,7 @@
           </p:nvSpPr>
           <p:spPr>
             <a:xfrm>
-              <a:off x="4813215" y="2285059"/>
+              <a:off x="4734754" y="2285059"/>
               <a:ext cx="61566" cy="61566"/>
             </a:xfrm>
             <a:prstGeom prst="ellipse">
@@ -15896,7 +15896,7 @@
           </p:nvSpPr>
           <p:spPr>
             <a:xfrm>
-              <a:off x="4967313" y="3064071"/>
+              <a:off x="5041714" y="3064071"/>
               <a:ext cx="61566" cy="61566"/>
             </a:xfrm>
             <a:prstGeom prst="ellipse">
@@ -15922,7 +15922,7 @@
           </p:nvSpPr>
           <p:spPr>
             <a:xfrm>
-              <a:off x="4813981" y="2237460"/>
+              <a:off x="4727748" y="2237460"/>
               <a:ext cx="61566" cy="61566"/>
             </a:xfrm>
             <a:prstGeom prst="ellipse">
@@ -15948,7 +15948,7 @@
           </p:nvSpPr>
           <p:spPr>
             <a:xfrm>
-              <a:off x="4982052" y="2455816"/>
+              <a:off x="5022784" y="2455816"/>
               <a:ext cx="61566" cy="61566"/>
             </a:xfrm>
             <a:prstGeom prst="ellipse">
@@ -15974,7 +15974,7 @@
           </p:nvSpPr>
           <p:spPr>
             <a:xfrm>
-              <a:off x="4787167" y="3434225"/>
+              <a:off x="4787203" y="3434225"/>
               <a:ext cx="61566" cy="61566"/>
             </a:xfrm>
             <a:prstGeom prst="ellipse">
@@ -16000,7 +16000,7 @@
           </p:nvSpPr>
           <p:spPr>
             <a:xfrm>
-              <a:off x="5045787" y="3242788"/>
+              <a:off x="4965445" y="3242788"/>
               <a:ext cx="61566" cy="61566"/>
             </a:xfrm>
             <a:prstGeom prst="ellipse">
@@ -16026,7 +16026,7 @@
           </p:nvSpPr>
           <p:spPr>
             <a:xfrm>
-              <a:off x="4760960" y="3073040"/>
+              <a:off x="4809097" y="3073040"/>
               <a:ext cx="61566" cy="61566"/>
             </a:xfrm>
             <a:prstGeom prst="ellipse">
@@ -16052,7 +16052,7 @@
           </p:nvSpPr>
           <p:spPr>
             <a:xfrm>
-              <a:off x="4959965" y="3514435"/>
+              <a:off x="5019864" y="3514435"/>
               <a:ext cx="61566" cy="61566"/>
             </a:xfrm>
             <a:prstGeom prst="ellipse">
@@ -16078,7 +16078,7 @@
           </p:nvSpPr>
           <p:spPr>
             <a:xfrm>
-              <a:off x="4823611" y="2672804"/>
+              <a:off x="4805133" y="2672804"/>
               <a:ext cx="61566" cy="61566"/>
             </a:xfrm>
             <a:prstGeom prst="ellipse">
@@ -16104,7 +16104,7 @@
           </p:nvSpPr>
           <p:spPr>
             <a:xfrm>
-              <a:off x="5014860" y="3023408"/>
+              <a:off x="5021317" y="3023408"/>
               <a:ext cx="61566" cy="61566"/>
             </a:xfrm>
             <a:prstGeom prst="ellipse">
@@ -16130,7 +16130,7 @@
           </p:nvSpPr>
           <p:spPr>
             <a:xfrm>
-              <a:off x="4785553" y="2130854"/>
+              <a:off x="4812731" y="2130854"/>
               <a:ext cx="61566" cy="61566"/>
             </a:xfrm>
             <a:prstGeom prst="ellipse">
@@ -16156,7 +16156,7 @@
           </p:nvSpPr>
           <p:spPr>
             <a:xfrm>
-              <a:off x="5046714" y="2712118"/>
+              <a:off x="4987833" y="2712118"/>
               <a:ext cx="61566" cy="61566"/>
             </a:xfrm>
             <a:prstGeom prst="ellipse">
@@ -16182,7 +16182,7 @@
           </p:nvSpPr>
           <p:spPr>
             <a:xfrm>
-              <a:off x="4822918" y="2008824"/>
+              <a:off x="4795911" y="2008824"/>
               <a:ext cx="61566" cy="61566"/>
             </a:xfrm>
             <a:prstGeom prst="ellipse">
@@ -16208,7 +16208,7 @@
           </p:nvSpPr>
           <p:spPr>
             <a:xfrm>
-              <a:off x="5045228" y="2286195"/>
+              <a:off x="5037295" y="2286195"/>
               <a:ext cx="61566" cy="61566"/>
             </a:xfrm>
             <a:prstGeom prst="ellipse">
@@ -16234,7 +16234,7 @@
           </p:nvSpPr>
           <p:spPr>
             <a:xfrm>
-              <a:off x="4781732" y="2634715"/>
+              <a:off x="4781038" y="2634715"/>
               <a:ext cx="61566" cy="61566"/>
             </a:xfrm>
             <a:prstGeom prst="ellipse">
@@ -16260,7 +16260,7 @@
           </p:nvSpPr>
           <p:spPr>
             <a:xfrm>
-              <a:off x="4948187" y="3167266"/>
+              <a:off x="5007968" y="3167266"/>
               <a:ext cx="61566" cy="61566"/>
             </a:xfrm>
             <a:prstGeom prst="ellipse">
@@ -16286,7 +16286,7 @@
           </p:nvSpPr>
           <p:spPr>
             <a:xfrm>
-              <a:off x="4785445" y="2743627"/>
+              <a:off x="4748759" y="2743627"/>
               <a:ext cx="61566" cy="61566"/>
             </a:xfrm>
             <a:prstGeom prst="ellipse">
@@ -16312,7 +16312,7 @@
           </p:nvSpPr>
           <p:spPr>
             <a:xfrm>
-              <a:off x="5039567" y="2931531"/>
+              <a:off x="4968811" y="2931531"/>
               <a:ext cx="61566" cy="61566"/>
             </a:xfrm>
             <a:prstGeom prst="ellipse">
@@ -16338,7 +16338,7 @@
           </p:nvSpPr>
           <p:spPr>
             <a:xfrm>
-              <a:off x="4777194" y="2922342"/>
+              <a:off x="4775783" y="2922342"/>
               <a:ext cx="61566" cy="61566"/>
             </a:xfrm>
             <a:prstGeom prst="ellipse">
@@ -16364,7 +16364,7 @@
           </p:nvSpPr>
           <p:spPr>
             <a:xfrm>
-              <a:off x="5017222" y="2991768"/>
+              <a:off x="4974123" y="2991768"/>
               <a:ext cx="61566" cy="61566"/>
             </a:xfrm>
             <a:prstGeom prst="ellipse">
@@ -16390,7 +16390,7 @@
           </p:nvSpPr>
           <p:spPr>
             <a:xfrm>
-              <a:off x="4825088" y="2372612"/>
+              <a:off x="4776455" y="2372612"/>
               <a:ext cx="61566" cy="61566"/>
             </a:xfrm>
             <a:prstGeom prst="ellipse">
@@ -16416,7 +16416,7 @@
           </p:nvSpPr>
           <p:spPr>
             <a:xfrm>
-              <a:off x="4998654" y="2704667"/>
+              <a:off x="5026996" y="2704667"/>
               <a:ext cx="61566" cy="61566"/>
             </a:xfrm>
             <a:prstGeom prst="ellipse">
@@ -16442,7 +16442,7 @@
           </p:nvSpPr>
           <p:spPr>
             <a:xfrm>
-              <a:off x="4797118" y="2836010"/>
+              <a:off x="4766291" y="2836010"/>
               <a:ext cx="61566" cy="61566"/>
             </a:xfrm>
             <a:prstGeom prst="ellipse">
@@ -16468,7 +16468,7 @@
           </p:nvSpPr>
           <p:spPr>
             <a:xfrm>
-              <a:off x="4999726" y="3261301"/>
+              <a:off x="4986006" y="3261301"/>
               <a:ext cx="61566" cy="61566"/>
             </a:xfrm>
             <a:prstGeom prst="ellipse">
@@ -16494,7 +16494,7 @@
           </p:nvSpPr>
           <p:spPr>
             <a:xfrm>
-              <a:off x="4770266" y="2426681"/>
+              <a:off x="4786688" y="2426681"/>
               <a:ext cx="61566" cy="61566"/>
             </a:xfrm>
             <a:prstGeom prst="ellipse">
@@ -16520,7 +16520,7 @@
           </p:nvSpPr>
           <p:spPr>
             <a:xfrm>
-              <a:off x="4961814" y="3124757"/>
+              <a:off x="5018155" y="3124757"/>
               <a:ext cx="61566" cy="61566"/>
             </a:xfrm>
             <a:prstGeom prst="ellipse">
@@ -16546,7 +16546,7 @@
           </p:nvSpPr>
           <p:spPr>
             <a:xfrm>
-              <a:off x="4729732" y="2814804"/>
+              <a:off x="4736540" y="2814804"/>
               <a:ext cx="61566" cy="61566"/>
             </a:xfrm>
             <a:prstGeom prst="ellipse">
@@ -16572,7 +16572,7 @@
           </p:nvSpPr>
           <p:spPr>
             <a:xfrm>
-              <a:off x="5002414" y="3005246"/>
+              <a:off x="4989945" y="3005246"/>
               <a:ext cx="61566" cy="61566"/>
             </a:xfrm>
             <a:prstGeom prst="ellipse">
@@ -16598,7 +16598,7 @@
           </p:nvSpPr>
           <p:spPr>
             <a:xfrm>
-              <a:off x="4820263" y="3087535"/>
+              <a:off x="4770660" y="3087535"/>
               <a:ext cx="61566" cy="61566"/>
             </a:xfrm>
             <a:prstGeom prst="ellipse">
@@ -16624,7 +16624,7 @@
           </p:nvSpPr>
           <p:spPr>
             <a:xfrm>
-              <a:off x="5031036" y="2856035"/>
+              <a:off x="5033493" y="2856035"/>
               <a:ext cx="61566" cy="61566"/>
             </a:xfrm>
             <a:prstGeom prst="ellipse">
@@ -16650,7 +16650,7 @@
           </p:nvSpPr>
           <p:spPr>
             <a:xfrm>
-              <a:off x="4745584" y="2200826"/>
+              <a:off x="4789057" y="2200826"/>
               <a:ext cx="61566" cy="61566"/>
             </a:xfrm>
             <a:prstGeom prst="ellipse">
@@ -16676,7 +16676,7 @@
           </p:nvSpPr>
           <p:spPr>
             <a:xfrm>
-              <a:off x="5007010" y="2825552"/>
+              <a:off x="4975315" y="2825552"/>
               <a:ext cx="61566" cy="61566"/>
             </a:xfrm>
             <a:prstGeom prst="ellipse">
@@ -16702,7 +16702,7 @@
           </p:nvSpPr>
           <p:spPr>
             <a:xfrm>
-              <a:off x="4821504" y="2445320"/>
+              <a:off x="4716265" y="2445320"/>
               <a:ext cx="61566" cy="61566"/>
             </a:xfrm>
             <a:prstGeom prst="ellipse">
@@ -16728,7 +16728,7 @@
           </p:nvSpPr>
           <p:spPr>
             <a:xfrm>
-              <a:off x="5023405" y="2654234"/>
+              <a:off x="4951524" y="2654234"/>
               <a:ext cx="61566" cy="61566"/>
             </a:xfrm>
             <a:prstGeom prst="ellipse">
@@ -16754,7 +16754,7 @@
           </p:nvSpPr>
           <p:spPr>
             <a:xfrm>
-              <a:off x="4796685" y="1764005"/>
+              <a:off x="4772049" y="1764005"/>
               <a:ext cx="61566" cy="61566"/>
             </a:xfrm>
             <a:prstGeom prst="ellipse">
@@ -16780,7 +16780,7 @@
           </p:nvSpPr>
           <p:spPr>
             <a:xfrm>
-              <a:off x="5017734" y="2233631"/>
+              <a:off x="4948338" y="2233631"/>
               <a:ext cx="61566" cy="61566"/>
             </a:xfrm>
             <a:prstGeom prst="ellipse">
@@ -16806,7 +16806,7 @@
           </p:nvSpPr>
           <p:spPr>
             <a:xfrm>
-              <a:off x="4773181" y="2963617"/>
+              <a:off x="4804356" y="2963617"/>
               <a:ext cx="61566" cy="61566"/>
             </a:xfrm>
             <a:prstGeom prst="ellipse">
@@ -16832,7 +16832,7 @@
           </p:nvSpPr>
           <p:spPr>
             <a:xfrm>
-              <a:off x="4940971" y="3204685"/>
+              <a:off x="5047282" y="3204685"/>
               <a:ext cx="61566" cy="61566"/>
             </a:xfrm>
             <a:prstGeom prst="ellipse">
@@ -16858,7 +16858,7 @@
           </p:nvSpPr>
           <p:spPr>
             <a:xfrm>
-              <a:off x="4749760" y="2869254"/>
+              <a:off x="4743863" y="2869254"/>
               <a:ext cx="61566" cy="61566"/>
             </a:xfrm>
             <a:prstGeom prst="ellipse">
@@ -16884,7 +16884,7 @@
           </p:nvSpPr>
           <p:spPr>
             <a:xfrm>
-              <a:off x="4945732" y="2343971"/>
+              <a:off x="5025760" y="2343971"/>
               <a:ext cx="61566" cy="61566"/>
             </a:xfrm>
             <a:prstGeom prst="ellipse">
@@ -16910,7 +16910,7 @@
           </p:nvSpPr>
           <p:spPr>
             <a:xfrm>
-              <a:off x="4764722" y="2816846"/>
+              <a:off x="4811718" y="2816846"/>
               <a:ext cx="61566" cy="61566"/>
             </a:xfrm>
             <a:prstGeom prst="ellipse">
@@ -16936,7 +16936,7 @@
           </p:nvSpPr>
           <p:spPr>
             <a:xfrm>
-              <a:off x="5035630" y="2453019"/>
+              <a:off x="4952597" y="2453019"/>
               <a:ext cx="61566" cy="61566"/>
             </a:xfrm>
             <a:prstGeom prst="ellipse">
@@ -16962,7 +16962,7 @@
           </p:nvSpPr>
           <p:spPr>
             <a:xfrm>
-              <a:off x="4737670" y="2876084"/>
+              <a:off x="4725193" y="2876084"/>
               <a:ext cx="61566" cy="61566"/>
             </a:xfrm>
             <a:prstGeom prst="ellipse">
@@ -16988,7 +16988,7 @@
           </p:nvSpPr>
           <p:spPr>
             <a:xfrm>
-              <a:off x="4972798" y="2748247"/>
+              <a:off x="5033076" y="2748247"/>
               <a:ext cx="61566" cy="61566"/>
             </a:xfrm>
             <a:prstGeom prst="ellipse">
@@ -17014,7 +17014,7 @@
           </p:nvSpPr>
           <p:spPr>
             <a:xfrm>
-              <a:off x="4717359" y="3628076"/>
+              <a:off x="4773714" y="3628076"/>
               <a:ext cx="61566" cy="61566"/>
             </a:xfrm>
             <a:prstGeom prst="ellipse">
@@ -17040,7 +17040,7 @@
           </p:nvSpPr>
           <p:spPr>
             <a:xfrm>
-              <a:off x="4957275" y="3213347"/>
+              <a:off x="4945588" y="3213347"/>
               <a:ext cx="61566" cy="61566"/>
             </a:xfrm>
             <a:prstGeom prst="ellipse">
@@ -17066,7 +17066,7 @@
           </p:nvSpPr>
           <p:spPr>
             <a:xfrm>
-              <a:off x="4816142" y="2814912"/>
+              <a:off x="4817440" y="2814912"/>
               <a:ext cx="61566" cy="61566"/>
             </a:xfrm>
             <a:prstGeom prst="ellipse">
@@ -17092,7 +17092,7 @@
           </p:nvSpPr>
           <p:spPr>
             <a:xfrm>
-              <a:off x="5010646" y="2944393"/>
+              <a:off x="5016296" y="2944393"/>
               <a:ext cx="61566" cy="61566"/>
             </a:xfrm>
             <a:prstGeom prst="ellipse">
@@ -17118,7 +17118,7 @@
           </p:nvSpPr>
           <p:spPr>
             <a:xfrm>
-              <a:off x="4724686" y="2381001"/>
+              <a:off x="4825186" y="2381001"/>
               <a:ext cx="61566" cy="61566"/>
             </a:xfrm>
             <a:prstGeom prst="ellipse">
@@ -17144,7 +17144,7 @@
           </p:nvSpPr>
           <p:spPr>
             <a:xfrm>
-              <a:off x="5039118" y="2593400"/>
+              <a:off x="5019861" y="2593400"/>
               <a:ext cx="61566" cy="61566"/>
             </a:xfrm>
             <a:prstGeom prst="ellipse">
@@ -17170,7 +17170,7 @@
           </p:nvSpPr>
           <p:spPr>
             <a:xfrm>
-              <a:off x="4770719" y="3068658"/>
+              <a:off x="4749948" y="3068658"/>
               <a:ext cx="61566" cy="61566"/>
             </a:xfrm>
             <a:prstGeom prst="ellipse">
@@ -17196,7 +17196,7 @@
           </p:nvSpPr>
           <p:spPr>
             <a:xfrm>
-              <a:off x="4957127" y="3137927"/>
+              <a:off x="4970633" y="3137927"/>
               <a:ext cx="61566" cy="61566"/>
             </a:xfrm>
             <a:prstGeom prst="ellipse">
@@ -17222,7 +17222,7 @@
           </p:nvSpPr>
           <p:spPr>
             <a:xfrm>
-              <a:off x="4806430" y="3772718"/>
+              <a:off x="4775692" y="3772718"/>
               <a:ext cx="61566" cy="61566"/>
             </a:xfrm>
             <a:prstGeom prst="ellipse">
@@ -17248,7 +17248,7 @@
           </p:nvSpPr>
           <p:spPr>
             <a:xfrm>
-              <a:off x="4939351" y="3554756"/>
+              <a:off x="5011332" y="3554756"/>
               <a:ext cx="61566" cy="61566"/>
             </a:xfrm>
             <a:prstGeom prst="ellipse">
@@ -17274,7 +17274,7 @@
           </p:nvSpPr>
           <p:spPr>
             <a:xfrm>
-              <a:off x="4783148" y="3330300"/>
+              <a:off x="4821134" y="3330300"/>
               <a:ext cx="61566" cy="61566"/>
             </a:xfrm>
             <a:prstGeom prst="ellipse">
@@ -17300,7 +17300,7 @@
           </p:nvSpPr>
           <p:spPr>
             <a:xfrm>
-              <a:off x="4944376" y="2945012"/>
+              <a:off x="4950467" y="2945012"/>
               <a:ext cx="61566" cy="61566"/>
             </a:xfrm>
             <a:prstGeom prst="ellipse">
@@ -17326,7 +17326,7 @@
           </p:nvSpPr>
           <p:spPr>
             <a:xfrm>
-              <a:off x="4775040" y="3064262"/>
+              <a:off x="4778438" y="3064262"/>
               <a:ext cx="61566" cy="61566"/>
             </a:xfrm>
             <a:prstGeom prst="ellipse">
@@ -17352,7 +17352,7 @@
           </p:nvSpPr>
           <p:spPr>
             <a:xfrm>
-              <a:off x="5008685" y="2688585"/>
+              <a:off x="4976971" y="2688585"/>
               <a:ext cx="61566" cy="61566"/>
             </a:xfrm>
             <a:prstGeom prst="ellipse">
@@ -17378,7 +17378,7 @@
           </p:nvSpPr>
           <p:spPr>
             <a:xfrm>
-              <a:off x="4816108" y="2904466"/>
+              <a:off x="4799742" y="2904466"/>
               <a:ext cx="61566" cy="61566"/>
             </a:xfrm>
             <a:prstGeom prst="ellipse">
@@ -17404,7 +17404,7 @@
           </p:nvSpPr>
           <p:spPr>
             <a:xfrm>
-              <a:off x="4995229" y="2638117"/>
+              <a:off x="4975000" y="2638117"/>
               <a:ext cx="61566" cy="61566"/>
             </a:xfrm>
             <a:prstGeom prst="ellipse">
@@ -17430,7 +17430,7 @@
           </p:nvSpPr>
           <p:spPr>
             <a:xfrm>
-              <a:off x="4794304" y="2723863"/>
+              <a:off x="4798266" y="2723863"/>
               <a:ext cx="61566" cy="61566"/>
             </a:xfrm>
             <a:prstGeom prst="ellipse">
@@ -17456,7 +17456,7 @@
           </p:nvSpPr>
           <p:spPr>
             <a:xfrm>
-              <a:off x="5033397" y="2967243"/>
+              <a:off x="4941738" y="2967243"/>
               <a:ext cx="61566" cy="61566"/>
             </a:xfrm>
             <a:prstGeom prst="ellipse">
@@ -17482,7 +17482,7 @@
           </p:nvSpPr>
           <p:spPr>
             <a:xfrm>
-              <a:off x="4777980" y="2947238"/>
+              <a:off x="4789738" y="2947238"/>
               <a:ext cx="61566" cy="61566"/>
             </a:xfrm>
             <a:prstGeom prst="ellipse">
@@ -17508,7 +17508,7 @@
           </p:nvSpPr>
           <p:spPr>
             <a:xfrm>
-              <a:off x="5030829" y="2976497"/>
+              <a:off x="5021208" y="2976497"/>
               <a:ext cx="61566" cy="61566"/>
             </a:xfrm>
             <a:prstGeom prst="ellipse">
@@ -17534,7 +17534,7 @@
           </p:nvSpPr>
           <p:spPr>
             <a:xfrm>
-              <a:off x="4721442" y="2901065"/>
+              <a:off x="4726930" y="2901065"/>
               <a:ext cx="61566" cy="61566"/>
             </a:xfrm>
             <a:prstGeom prst="ellipse">
@@ -17560,7 +17560,7 @@
           </p:nvSpPr>
           <p:spPr>
             <a:xfrm>
-              <a:off x="5000822" y="2795997"/>
+              <a:off x="5011596" y="2795997"/>
               <a:ext cx="61566" cy="61566"/>
             </a:xfrm>
             <a:prstGeom prst="ellipse">
@@ -17586,7 +17586,7 @@
           </p:nvSpPr>
           <p:spPr>
             <a:xfrm>
-              <a:off x="4826049" y="2707403"/>
+              <a:off x="4739042" y="2707403"/>
               <a:ext cx="61566" cy="61566"/>
             </a:xfrm>
             <a:prstGeom prst="ellipse">
@@ -17612,7 +17612,7 @@
           </p:nvSpPr>
           <p:spPr>
             <a:xfrm>
-              <a:off x="5037829" y="2552646"/>
+              <a:off x="5047092" y="2552646"/>
               <a:ext cx="61566" cy="61566"/>
             </a:xfrm>
             <a:prstGeom prst="ellipse">
@@ -17638,7 +17638,7 @@
           </p:nvSpPr>
           <p:spPr>
             <a:xfrm>
-              <a:off x="4781311" y="2753021"/>
+              <a:off x="4742725" y="2753021"/>
               <a:ext cx="61566" cy="61566"/>
             </a:xfrm>
             <a:prstGeom prst="ellipse">
@@ -17664,7 +17664,7 @@
           </p:nvSpPr>
           <p:spPr>
             <a:xfrm>
-              <a:off x="5019462" y="2736404"/>
+              <a:off x="4944483" y="2736404"/>
               <a:ext cx="61566" cy="61566"/>
             </a:xfrm>
             <a:prstGeom prst="ellipse">
@@ -17690,7 +17690,7 @@
           </p:nvSpPr>
           <p:spPr>
             <a:xfrm>
-              <a:off x="4817175" y="3014029"/>
+              <a:off x="4773596" y="3014029"/>
               <a:ext cx="61566" cy="61566"/>
             </a:xfrm>
             <a:prstGeom prst="ellipse">
@@ -17716,7 +17716,7 @@
           </p:nvSpPr>
           <p:spPr>
             <a:xfrm>
-              <a:off x="4991248" y="2634571"/>
+              <a:off x="5005189" y="2634571"/>
               <a:ext cx="61566" cy="61566"/>
             </a:xfrm>
             <a:prstGeom prst="ellipse">
@@ -17742,7 +17742,7 @@
           </p:nvSpPr>
           <p:spPr>
             <a:xfrm>
-              <a:off x="4748894" y="2484187"/>
+              <a:off x="4756284" y="2484187"/>
               <a:ext cx="61566" cy="61566"/>
             </a:xfrm>
             <a:prstGeom prst="ellipse">
@@ -17768,7 +17768,7 @@
           </p:nvSpPr>
           <p:spPr>
             <a:xfrm>
-              <a:off x="4990947" y="2267684"/>
+              <a:off x="5010191" y="2267684"/>
               <a:ext cx="61566" cy="61566"/>
             </a:xfrm>
             <a:prstGeom prst="ellipse">
@@ -17794,7 +17794,7 @@
           </p:nvSpPr>
           <p:spPr>
             <a:xfrm>
-              <a:off x="4758402" y="3231183"/>
+              <a:off x="4786687" y="3231183"/>
               <a:ext cx="61566" cy="61566"/>
             </a:xfrm>
             <a:prstGeom prst="ellipse">
@@ -17820,7 +17820,7 @@
           </p:nvSpPr>
           <p:spPr>
             <a:xfrm>
-              <a:off x="5029523" y="3215302"/>
+              <a:off x="4993403" y="3215302"/>
               <a:ext cx="61566" cy="61566"/>
             </a:xfrm>
             <a:prstGeom prst="ellipse">
@@ -17846,7 +17846,7 @@
           </p:nvSpPr>
           <p:spPr>
             <a:xfrm>
-              <a:off x="4810041" y="3492364"/>
+              <a:off x="4770428" y="3492364"/>
               <a:ext cx="61566" cy="61566"/>
             </a:xfrm>
             <a:prstGeom prst="ellipse">
@@ -17872,7 +17872,7 @@
           </p:nvSpPr>
           <p:spPr>
             <a:xfrm>
-              <a:off x="4984505" y="3224609"/>
+              <a:off x="5045220" y="3224609"/>
               <a:ext cx="61566" cy="61566"/>
             </a:xfrm>
             <a:prstGeom prst="ellipse">
@@ -17898,7 +17898,7 @@
           </p:nvSpPr>
           <p:spPr>
             <a:xfrm>
-              <a:off x="4749754" y="2085588"/>
+              <a:off x="4717518" y="2085588"/>
               <a:ext cx="61566" cy="61566"/>
             </a:xfrm>
             <a:prstGeom prst="ellipse">
@@ -17924,7 +17924,7 @@
           </p:nvSpPr>
           <p:spPr>
             <a:xfrm>
-              <a:off x="5022472" y="2255251"/>
+              <a:off x="5035181" y="2255251"/>
               <a:ext cx="61566" cy="61566"/>
             </a:xfrm>
             <a:prstGeom prst="ellipse">
@@ -17950,7 +17950,7 @@
           </p:nvSpPr>
           <p:spPr>
             <a:xfrm>
-              <a:off x="6341573" y="2507357"/>
+              <a:off x="6272607" y="2507357"/>
               <a:ext cx="61566" cy="61566"/>
             </a:xfrm>
             <a:prstGeom prst="ellipse">
@@ -17976,7 +17976,7 @@
           </p:nvSpPr>
           <p:spPr>
             <a:xfrm>
-              <a:off x="6576925" y="2572442"/>
+              <a:off x="6515711" y="2572442"/>
               <a:ext cx="61566" cy="61566"/>
             </a:xfrm>
             <a:prstGeom prst="ellipse">
@@ -18002,7 +18002,7 @@
           </p:nvSpPr>
           <p:spPr>
             <a:xfrm>
-              <a:off x="6274157" y="3172006"/>
+              <a:off x="6329761" y="3172006"/>
               <a:ext cx="61566" cy="61566"/>
             </a:xfrm>
             <a:prstGeom prst="ellipse">
@@ -18028,7 +18028,7 @@
           </p:nvSpPr>
           <p:spPr>
             <a:xfrm>
-              <a:off x="6497072" y="3553426"/>
+              <a:off x="6524208" y="3553426"/>
               <a:ext cx="61566" cy="61566"/>
             </a:xfrm>
             <a:prstGeom prst="ellipse">
@@ -18054,7 +18054,7 @@
           </p:nvSpPr>
           <p:spPr>
             <a:xfrm>
-              <a:off x="6345326" y="2567467"/>
+              <a:off x="6356667" y="2567467"/>
               <a:ext cx="61566" cy="61566"/>
             </a:xfrm>
             <a:prstGeom prst="ellipse">
@@ -18080,7 +18080,7 @@
           </p:nvSpPr>
           <p:spPr>
             <a:xfrm>
-              <a:off x="6563362" y="2359144"/>
+              <a:off x="6552321" y="2359144"/>
               <a:ext cx="61566" cy="61566"/>
             </a:xfrm>
             <a:prstGeom prst="ellipse">
@@ -18106,7 +18106,7 @@
           </p:nvSpPr>
           <p:spPr>
             <a:xfrm>
-              <a:off x="6301658" y="2967100"/>
+              <a:off x="6262269" y="2967100"/>
               <a:ext cx="61566" cy="61566"/>
             </a:xfrm>
             <a:prstGeom prst="ellipse">
@@ -18132,7 +18132,7 @@
           </p:nvSpPr>
           <p:spPr>
             <a:xfrm>
-              <a:off x="6493161" y="2698863"/>
+              <a:off x="6561113" y="2698863"/>
               <a:ext cx="61566" cy="61566"/>
             </a:xfrm>
             <a:prstGeom prst="ellipse">
@@ -18158,7 +18158,7 @@
           </p:nvSpPr>
           <p:spPr>
             <a:xfrm>
-              <a:off x="6329561" y="2332494"/>
+              <a:off x="6313391" y="2332494"/>
               <a:ext cx="61566" cy="61566"/>
             </a:xfrm>
             <a:prstGeom prst="ellipse">
@@ -18184,7 +18184,7 @@
           </p:nvSpPr>
           <p:spPr>
             <a:xfrm>
-              <a:off x="6482956" y="2852440"/>
+              <a:off x="6500228" y="2852440"/>
               <a:ext cx="61566" cy="61566"/>
             </a:xfrm>
             <a:prstGeom prst="ellipse">
@@ -18210,7 +18210,7 @@
           </p:nvSpPr>
           <p:spPr>
             <a:xfrm>
-              <a:off x="6302018" y="1895312"/>
+              <a:off x="6271978" y="1895312"/>
               <a:ext cx="61566" cy="61566"/>
             </a:xfrm>
             <a:prstGeom prst="ellipse">
@@ -18236,7 +18236,7 @@
           </p:nvSpPr>
           <p:spPr>
             <a:xfrm>
-              <a:off x="6581115" y="2288613"/>
+              <a:off x="6496249" y="2288613"/>
               <a:ext cx="61566" cy="61566"/>
             </a:xfrm>
             <a:prstGeom prst="ellipse">
@@ -18262,7 +18262,7 @@
           </p:nvSpPr>
           <p:spPr>
             <a:xfrm>
-              <a:off x="6355358" y="3178611"/>
+              <a:off x="6297211" y="3178611"/>
               <a:ext cx="61566" cy="61566"/>
             </a:xfrm>
             <a:prstGeom prst="ellipse">
@@ -18288,7 +18288,7 @@
           </p:nvSpPr>
           <p:spPr>
             <a:xfrm>
-              <a:off x="6523762" y="3073830"/>
+              <a:off x="6557703" y="3073830"/>
               <a:ext cx="61566" cy="61566"/>
             </a:xfrm>
             <a:prstGeom prst="ellipse">
@@ -18314,7 +18314,7 @@
           </p:nvSpPr>
           <p:spPr>
             <a:xfrm>
-              <a:off x="6282489" y="2650014"/>
+              <a:off x="6353985" y="2650014"/>
               <a:ext cx="61566" cy="61566"/>
             </a:xfrm>
             <a:prstGeom prst="ellipse">
@@ -18340,7 +18340,7 @@
           </p:nvSpPr>
           <p:spPr>
             <a:xfrm>
-              <a:off x="6543186" y="2859262"/>
+              <a:off x="6543410" y="2859262"/>
               <a:ext cx="61566" cy="61566"/>
             </a:xfrm>
             <a:prstGeom prst="ellipse">
@@ -18366,7 +18366,7 @@
           </p:nvSpPr>
           <p:spPr>
             <a:xfrm>
-              <a:off x="6283699" y="2676581"/>
+              <a:off x="6336507" y="2676581"/>
               <a:ext cx="61566" cy="61566"/>
             </a:xfrm>
             <a:prstGeom prst="ellipse">
@@ -18392,7 +18392,7 @@
           </p:nvSpPr>
           <p:spPr>
             <a:xfrm>
-              <a:off x="6565417" y="2793957"/>
+              <a:off x="6582309" y="2793957"/>
               <a:ext cx="61566" cy="61566"/>
             </a:xfrm>
             <a:prstGeom prst="ellipse">
@@ -18418,7 +18418,7 @@
           </p:nvSpPr>
           <p:spPr>
             <a:xfrm>
-              <a:off x="6296645" y="3111149"/>
+              <a:off x="6281631" y="3111149"/>
               <a:ext cx="61566" cy="61566"/>
             </a:xfrm>
             <a:prstGeom prst="ellipse">
@@ -18444,7 +18444,7 @@
           </p:nvSpPr>
           <p:spPr>
             <a:xfrm>
-              <a:off x="6558906" y="2557120"/>
+              <a:off x="6509383" y="2557120"/>
               <a:ext cx="61566" cy="61566"/>
             </a:xfrm>
             <a:prstGeom prst="ellipse">
@@ -18470,7 +18470,7 @@
           </p:nvSpPr>
           <p:spPr>
             <a:xfrm>
-              <a:off x="6315102" y="1703185"/>
+              <a:off x="6304318" y="1703185"/>
               <a:ext cx="61566" cy="61566"/>
             </a:xfrm>
             <a:prstGeom prst="ellipse">
@@ -18496,7 +18496,7 @@
           </p:nvSpPr>
           <p:spPr>
             <a:xfrm>
-              <a:off x="6556835" y="2045643"/>
+              <a:off x="6575839" y="2045643"/>
               <a:ext cx="61566" cy="61566"/>
             </a:xfrm>
             <a:prstGeom prst="ellipse">
@@ -18522,7 +18522,7 @@
           </p:nvSpPr>
           <p:spPr>
             <a:xfrm>
-              <a:off x="6283918" y="3029461"/>
+              <a:off x="6353177" y="3029461"/>
               <a:ext cx="61566" cy="61566"/>
             </a:xfrm>
             <a:prstGeom prst="ellipse">
@@ -18548,7 +18548,7 @@
           </p:nvSpPr>
           <p:spPr>
             <a:xfrm>
-              <a:off x="6535776" y="2752452"/>
+              <a:off x="6566565" y="2752452"/>
               <a:ext cx="61566" cy="61566"/>
             </a:xfrm>
             <a:prstGeom prst="ellipse">
@@ -18574,7 +18574,7 @@
           </p:nvSpPr>
           <p:spPr>
             <a:xfrm>
-              <a:off x="6271585" y="2754702"/>
+              <a:off x="6317606" y="2754702"/>
               <a:ext cx="61566" cy="61566"/>
             </a:xfrm>
             <a:prstGeom prst="ellipse">
@@ -18600,7 +18600,7 @@
           </p:nvSpPr>
           <p:spPr>
             <a:xfrm>
-              <a:off x="6533131" y="2731454"/>
+              <a:off x="6564776" y="2731454"/>
               <a:ext cx="61566" cy="61566"/>
             </a:xfrm>
             <a:prstGeom prst="ellipse">
@@ -18626,7 +18626,7 @@
           </p:nvSpPr>
           <p:spPr>
             <a:xfrm>
-              <a:off x="6292540" y="2275074"/>
+              <a:off x="6291428" y="2275074"/>
               <a:ext cx="61566" cy="61566"/>
             </a:xfrm>
             <a:prstGeom prst="ellipse">
@@ -18652,7 +18652,7 @@
           </p:nvSpPr>
           <p:spPr>
             <a:xfrm>
-              <a:off x="6532508" y="3364719"/>
+              <a:off x="6574236" y="3364719"/>
               <a:ext cx="61566" cy="61566"/>
             </a:xfrm>
             <a:prstGeom prst="ellipse">
@@ -18678,7 +18678,7 @@
           </p:nvSpPr>
           <p:spPr>
             <a:xfrm>
-              <a:off x="6296358" y="2768230"/>
+              <a:off x="6285362" y="2768230"/>
               <a:ext cx="61566" cy="61566"/>
             </a:xfrm>
             <a:prstGeom prst="ellipse">
@@ -18704,7 +18704,7 @@
           </p:nvSpPr>
           <p:spPr>
             <a:xfrm>
-              <a:off x="6565247" y="2688830"/>
+              <a:off x="6515253" y="2688830"/>
               <a:ext cx="61566" cy="61566"/>
             </a:xfrm>
             <a:prstGeom prst="ellipse">
@@ -18730,7 +18730,7 @@
           </p:nvSpPr>
           <p:spPr>
             <a:xfrm>
-              <a:off x="6271759" y="3115928"/>
+              <a:off x="6357320" y="3115928"/>
               <a:ext cx="61566" cy="61566"/>
             </a:xfrm>
             <a:prstGeom prst="ellipse">
@@ -18756,7 +18756,7 @@
           </p:nvSpPr>
           <p:spPr>
             <a:xfrm>
-              <a:off x="6476615" y="3251255"/>
+              <a:off x="6504865" y="3251255"/>
               <a:ext cx="61566" cy="61566"/>
             </a:xfrm>
             <a:prstGeom prst="ellipse">
@@ -18782,7 +18782,7 @@
           </p:nvSpPr>
           <p:spPr>
             <a:xfrm>
-              <a:off x="6318994" y="3019912"/>
+              <a:off x="6279410" y="3019912"/>
               <a:ext cx="61566" cy="61566"/>
             </a:xfrm>
             <a:prstGeom prst="ellipse">
@@ -18808,7 +18808,7 @@
           </p:nvSpPr>
           <p:spPr>
             <a:xfrm>
-              <a:off x="6478589" y="3204605"/>
+              <a:off x="6524687" y="3204605"/>
               <a:ext cx="61566" cy="61566"/>
             </a:xfrm>
             <a:prstGeom prst="ellipse">
@@ -18834,7 +18834,7 @@
           </p:nvSpPr>
           <p:spPr>
             <a:xfrm>
-              <a:off x="6278467" y="2844294"/>
+              <a:off x="6289148" y="2844294"/>
               <a:ext cx="61566" cy="61566"/>
             </a:xfrm>
             <a:prstGeom prst="ellipse">
@@ -18860,7 +18860,7 @@
           </p:nvSpPr>
           <p:spPr>
             <a:xfrm>
-              <a:off x="6545010" y="2389558"/>
+              <a:off x="6570328" y="2389558"/>
               <a:ext cx="61566" cy="61566"/>
             </a:xfrm>
             <a:prstGeom prst="ellipse">
@@ -18886,7 +18886,7 @@
           </p:nvSpPr>
           <p:spPr>
             <a:xfrm>
-              <a:off x="6325525" y="2928422"/>
+              <a:off x="6315000" y="2928422"/>
               <a:ext cx="61566" cy="61566"/>
             </a:xfrm>
             <a:prstGeom prst="ellipse">
@@ -18912,7 +18912,7 @@
           </p:nvSpPr>
           <p:spPr>
             <a:xfrm>
-              <a:off x="6516848" y="2578968"/>
+              <a:off x="6530443" y="2578968"/>
               <a:ext cx="61566" cy="61566"/>
             </a:xfrm>
             <a:prstGeom prst="ellipse">
@@ -18938,7 +18938,7 @@
           </p:nvSpPr>
           <p:spPr>
             <a:xfrm>
-              <a:off x="6294627" y="2480326"/>
+              <a:off x="6287008" y="2480326"/>
               <a:ext cx="61566" cy="61566"/>
             </a:xfrm>
             <a:prstGeom prst="ellipse">
@@ -18964,7 +18964,7 @@
           </p:nvSpPr>
           <p:spPr>
             <a:xfrm>
-              <a:off x="6516069" y="3212975"/>
+              <a:off x="6487816" y="3212975"/>
               <a:ext cx="61566" cy="61566"/>
             </a:xfrm>
             <a:prstGeom prst="ellipse">
@@ -18990,7 +18990,7 @@
           </p:nvSpPr>
           <p:spPr>
             <a:xfrm>
-              <a:off x="6270913" y="3071583"/>
+              <a:off x="6277016" y="3071583"/>
               <a:ext cx="61566" cy="61566"/>
             </a:xfrm>
             <a:prstGeom prst="ellipse">
@@ -19016,7 +19016,7 @@
           </p:nvSpPr>
           <p:spPr>
             <a:xfrm>
-              <a:off x="6479925" y="3028694"/>
+              <a:off x="6475342" y="3028694"/>
               <a:ext cx="61566" cy="61566"/>
             </a:xfrm>
             <a:prstGeom prst="ellipse">
@@ -19042,7 +19042,7 @@
           </p:nvSpPr>
           <p:spPr>
             <a:xfrm>
-              <a:off x="6270824" y="2295212"/>
+              <a:off x="6317820" y="2295212"/>
               <a:ext cx="61566" cy="61566"/>
             </a:xfrm>
             <a:prstGeom prst="ellipse">
@@ -19068,7 +19068,7 @@
           </p:nvSpPr>
           <p:spPr>
             <a:xfrm>
-              <a:off x="6561728" y="2637866"/>
+              <a:off x="6549715" y="2637866"/>
               <a:ext cx="61566" cy="61566"/>
             </a:xfrm>
             <a:prstGeom prst="ellipse">
@@ -19094,7 +19094,7 @@
           </p:nvSpPr>
           <p:spPr>
             <a:xfrm>
-              <a:off x="6353500" y="3122841"/>
+              <a:off x="6322113" y="3122841"/>
               <a:ext cx="61566" cy="61566"/>
             </a:xfrm>
             <a:prstGeom prst="ellipse">
@@ -19120,7 +19120,7 @@
           </p:nvSpPr>
           <p:spPr>
             <a:xfrm>
-              <a:off x="6529531" y="3513432"/>
+              <a:off x="6569648" y="3513432"/>
               <a:ext cx="61566" cy="61566"/>
             </a:xfrm>
             <a:prstGeom prst="ellipse">
@@ -19146,7 +19146,7 @@
           </p:nvSpPr>
           <p:spPr>
             <a:xfrm>
-              <a:off x="6323184" y="3307582"/>
+              <a:off x="6253158" y="3307582"/>
               <a:ext cx="61566" cy="61566"/>
             </a:xfrm>
             <a:prstGeom prst="ellipse">
@@ -19172,7 +19172,7 @@
           </p:nvSpPr>
           <p:spPr>
             <a:xfrm>
-              <a:off x="6479934" y="2865664"/>
+              <a:off x="6498627" y="2865664"/>
               <a:ext cx="61566" cy="61566"/>
             </a:xfrm>
             <a:prstGeom prst="ellipse">
@@ -19198,7 +19198,7 @@
           </p:nvSpPr>
           <p:spPr>
             <a:xfrm>
-              <a:off x="6264860" y="2162084"/>
+              <a:off x="6295092" y="2162084"/>
               <a:ext cx="61566" cy="61566"/>
             </a:xfrm>
             <a:prstGeom prst="ellipse">
@@ -19224,7 +19224,7 @@
           </p:nvSpPr>
           <p:spPr>
             <a:xfrm>
-              <a:off x="6549021" y="2804888"/>
+              <a:off x="6545074" y="2804888"/>
               <a:ext cx="61566" cy="61566"/>
             </a:xfrm>
             <a:prstGeom prst="ellipse">
@@ -19250,7 +19250,7 @@
           </p:nvSpPr>
           <p:spPr>
             <a:xfrm>
-              <a:off x="6260354" y="2357993"/>
+              <a:off x="6303939" y="2357993"/>
               <a:ext cx="61566" cy="61566"/>
             </a:xfrm>
             <a:prstGeom prst="ellipse">
@@ -19276,7 +19276,7 @@
           </p:nvSpPr>
           <p:spPr>
             <a:xfrm>
-              <a:off x="6544326" y="2843406"/>
+              <a:off x="6481253" y="2843406"/>
               <a:ext cx="61566" cy="61566"/>
             </a:xfrm>
             <a:prstGeom prst="ellipse">
@@ -19302,7 +19302,7 @@
           </p:nvSpPr>
           <p:spPr>
             <a:xfrm>
-              <a:off x="6259058" y="2497102"/>
+              <a:off x="6330375" y="2497102"/>
               <a:ext cx="61566" cy="61566"/>
             </a:xfrm>
             <a:prstGeom prst="ellipse">
@@ -19328,7 +19328,7 @@
           </p:nvSpPr>
           <p:spPr>
             <a:xfrm>
-              <a:off x="6519887" y="2867742"/>
+              <a:off x="6551797" y="2867742"/>
               <a:ext cx="61566" cy="61566"/>
             </a:xfrm>
             <a:prstGeom prst="ellipse">
@@ -19354,7 +19354,7 @@
           </p:nvSpPr>
           <p:spPr>
             <a:xfrm>
-              <a:off x="6262813" y="3157977"/>
+              <a:off x="6308933" y="3157977"/>
               <a:ext cx="61566" cy="61566"/>
             </a:xfrm>
             <a:prstGeom prst="ellipse">
@@ -19380,7 +19380,7 @@
           </p:nvSpPr>
           <p:spPr>
             <a:xfrm>
-              <a:off x="6579929" y="2490342"/>
+              <a:off x="6535537" y="2490342"/>
               <a:ext cx="61566" cy="61566"/>
             </a:xfrm>
             <a:prstGeom prst="ellipse">
@@ -19406,7 +19406,7 @@
           </p:nvSpPr>
           <p:spPr>
             <a:xfrm>
-              <a:off x="6303659" y="3043295"/>
+              <a:off x="6303515" y="3043295"/>
               <a:ext cx="61566" cy="61566"/>
             </a:xfrm>
             <a:prstGeom prst="ellipse">
@@ -19432,7 +19432,7 @@
           </p:nvSpPr>
           <p:spPr>
             <a:xfrm>
-              <a:off x="6560290" y="2685219"/>
+              <a:off x="6554307" y="2685219"/>
               <a:ext cx="61566" cy="61566"/>
             </a:xfrm>
             <a:prstGeom prst="ellipse">
@@ -19458,7 +19458,7 @@
           </p:nvSpPr>
           <p:spPr>
             <a:xfrm>
-              <a:off x="6291352" y="2412468"/>
+              <a:off x="6363130" y="2412468"/>
               <a:ext cx="61566" cy="61566"/>
             </a:xfrm>
             <a:prstGeom prst="ellipse">
@@ -19484,7 +19484,7 @@
           </p:nvSpPr>
           <p:spPr>
             <a:xfrm>
-              <a:off x="6478859" y="2791571"/>
+              <a:off x="6562499" y="2791571"/>
               <a:ext cx="61566" cy="61566"/>
             </a:xfrm>
             <a:prstGeom prst="ellipse">
@@ -19510,7 +19510,7 @@
           </p:nvSpPr>
           <p:spPr>
             <a:xfrm>
-              <a:off x="6278598" y="2578828"/>
+              <a:off x="6304371" y="2578828"/>
               <a:ext cx="61566" cy="61566"/>
             </a:xfrm>
             <a:prstGeom prst="ellipse">
@@ -19536,7 +19536,7 @@
           </p:nvSpPr>
           <p:spPr>
             <a:xfrm>
-              <a:off x="6506927" y="2246378"/>
+              <a:off x="6539314" y="2246378"/>
               <a:ext cx="61566" cy="61566"/>
             </a:xfrm>
             <a:prstGeom prst="ellipse">
@@ -19562,7 +19562,7 @@
           </p:nvSpPr>
           <p:spPr>
             <a:xfrm>
-              <a:off x="6346868" y="2927267"/>
+              <a:off x="6306867" y="2927267"/>
               <a:ext cx="61566" cy="61566"/>
             </a:xfrm>
             <a:prstGeom prst="ellipse">
@@ -19588,7 +19588,7 @@
           </p:nvSpPr>
           <p:spPr>
             <a:xfrm>
-              <a:off x="6504783" y="2700959"/>
+              <a:off x="6505867" y="2700959"/>
               <a:ext cx="61566" cy="61566"/>
             </a:xfrm>
             <a:prstGeom prst="ellipse">
@@ -19614,7 +19614,7 @@
           </p:nvSpPr>
           <p:spPr>
             <a:xfrm>
-              <a:off x="6310789" y="2244217"/>
+              <a:off x="6350862" y="2244217"/>
               <a:ext cx="61566" cy="61566"/>
             </a:xfrm>
             <a:prstGeom prst="ellipse">
@@ -19640,7 +19640,7 @@
           </p:nvSpPr>
           <p:spPr>
             <a:xfrm>
-              <a:off x="6541374" y="2342752"/>
+              <a:off x="6526540" y="2342752"/>
               <a:ext cx="61566" cy="61566"/>
             </a:xfrm>
             <a:prstGeom prst="ellipse">
@@ -19666,7 +19666,7 @@
           </p:nvSpPr>
           <p:spPr>
             <a:xfrm>
-              <a:off x="6297998" y="2928333"/>
+              <a:off x="6273346" y="2928333"/>
               <a:ext cx="61566" cy="61566"/>
             </a:xfrm>
             <a:prstGeom prst="ellipse">
@@ -19692,7 +19692,7 @@
           </p:nvSpPr>
           <p:spPr>
             <a:xfrm>
-              <a:off x="6492858" y="2992563"/>
+              <a:off x="6568444" y="2992563"/>
               <a:ext cx="61566" cy="61566"/>
             </a:xfrm>
             <a:prstGeom prst="ellipse">
@@ -19718,7 +19718,7 @@
           </p:nvSpPr>
           <p:spPr>
             <a:xfrm>
-              <a:off x="6271936" y="2513812"/>
+              <a:off x="6322116" y="2513812"/>
               <a:ext cx="61566" cy="61566"/>
             </a:xfrm>
             <a:prstGeom prst="ellipse">
@@ -19744,7 +19744,7 @@
           </p:nvSpPr>
           <p:spPr>
             <a:xfrm>
-              <a:off x="6499260" y="2849597"/>
+              <a:off x="6547758" y="2849597"/>
               <a:ext cx="61566" cy="61566"/>
             </a:xfrm>
             <a:prstGeom prst="ellipse">
@@ -19770,7 +19770,7 @@
           </p:nvSpPr>
           <p:spPr>
             <a:xfrm>
-              <a:off x="6355442" y="3502921"/>
+              <a:off x="6259530" y="3502921"/>
               <a:ext cx="61566" cy="61566"/>
             </a:xfrm>
             <a:prstGeom prst="ellipse">
@@ -19796,7 +19796,7 @@
           </p:nvSpPr>
           <p:spPr>
             <a:xfrm>
-              <a:off x="6576254" y="3578920"/>
+              <a:off x="6575175" y="3578920"/>
               <a:ext cx="61566" cy="61566"/>
             </a:xfrm>
             <a:prstGeom prst="ellipse">
@@ -19822,7 +19822,7 @@
           </p:nvSpPr>
           <p:spPr>
             <a:xfrm>
-              <a:off x="6359355" y="2336652"/>
+              <a:off x="6301399" y="2336652"/>
               <a:ext cx="61566" cy="61566"/>
             </a:xfrm>
             <a:prstGeom prst="ellipse">
@@ -19848,7 +19848,7 @@
           </p:nvSpPr>
           <p:spPr>
             <a:xfrm>
-              <a:off x="6553954" y="2981375"/>
+              <a:off x="6577825" y="2981375"/>
               <a:ext cx="61566" cy="61566"/>
             </a:xfrm>
             <a:prstGeom prst="ellipse">
@@ -19874,7 +19874,7 @@
           </p:nvSpPr>
           <p:spPr>
             <a:xfrm>
-              <a:off x="6321076" y="2549471"/>
+              <a:off x="6269129" y="2549471"/>
               <a:ext cx="61566" cy="61566"/>
             </a:xfrm>
             <a:prstGeom prst="ellipse">
@@ -19900,7 +19900,7 @@
           </p:nvSpPr>
           <p:spPr>
             <a:xfrm>
-              <a:off x="6528932" y="2837877"/>
+              <a:off x="6583957" y="2837877"/>
               <a:ext cx="61566" cy="61566"/>
             </a:xfrm>
             <a:prstGeom prst="ellipse">
@@ -19926,7 +19926,7 @@
           </p:nvSpPr>
           <p:spPr>
             <a:xfrm>
-              <a:off x="6356538" y="2636047"/>
+              <a:off x="6293653" y="2636047"/>
               <a:ext cx="61566" cy="61566"/>
             </a:xfrm>
             <a:prstGeom prst="ellipse">
@@ -19952,7 +19952,7 @@
           </p:nvSpPr>
           <p:spPr>
             <a:xfrm>
-              <a:off x="6568556" y="3027980"/>
+              <a:off x="6579334" y="3027980"/>
               <a:ext cx="61566" cy="61566"/>
             </a:xfrm>
             <a:prstGeom prst="ellipse">
@@ -19978,7 +19978,7 @@
           </p:nvSpPr>
           <p:spPr>
             <a:xfrm>
-              <a:off x="6268738" y="2515461"/>
+              <a:off x="6322221" y="2515461"/>
               <a:ext cx="61566" cy="61566"/>
             </a:xfrm>
             <a:prstGeom prst="ellipse">
@@ -20004,7 +20004,7 @@
           </p:nvSpPr>
           <p:spPr>
             <a:xfrm>
-              <a:off x="6559171" y="2542619"/>
+              <a:off x="6555378" y="2542619"/>
               <a:ext cx="61566" cy="61566"/>
             </a:xfrm>
             <a:prstGeom prst="ellipse">
@@ -20030,7 +20030,7 @@
           </p:nvSpPr>
           <p:spPr>
             <a:xfrm>
-              <a:off x="6274277" y="2544885"/>
+              <a:off x="6334690" y="2544885"/>
               <a:ext cx="61566" cy="61566"/>
             </a:xfrm>
             <a:prstGeom prst="ellipse">
@@ -20056,7 +20056,7 @@
           </p:nvSpPr>
           <p:spPr>
             <a:xfrm>
-              <a:off x="6565849" y="2888358"/>
+              <a:off x="6478420" y="2888358"/>
               <a:ext cx="61566" cy="61566"/>
             </a:xfrm>
             <a:prstGeom prst="ellipse">
@@ -20082,7 +20082,7 @@
           </p:nvSpPr>
           <p:spPr>
             <a:xfrm>
-              <a:off x="6356147" y="2756023"/>
+              <a:off x="6315548" y="2756023"/>
               <a:ext cx="61566" cy="61566"/>
             </a:xfrm>
             <a:prstGeom prst="ellipse">
@@ -20108,7 +20108,7 @@
           </p:nvSpPr>
           <p:spPr>
             <a:xfrm>
-              <a:off x="6483011" y="2819277"/>
+              <a:off x="6548710" y="2819277"/>
               <a:ext cx="61566" cy="61566"/>
             </a:xfrm>
             <a:prstGeom prst="ellipse">
@@ -20134,7 +20134,7 @@
           </p:nvSpPr>
           <p:spPr>
             <a:xfrm>
-              <a:off x="6260135" y="2620412"/>
+              <a:off x="6252881" y="2620412"/>
               <a:ext cx="61566" cy="61566"/>
             </a:xfrm>
             <a:prstGeom prst="ellipse">
@@ -20160,7 +20160,7 @@
           </p:nvSpPr>
           <p:spPr>
             <a:xfrm>
-              <a:off x="6479590" y="2478741"/>
+              <a:off x="6491829" y="2478741"/>
               <a:ext cx="61566" cy="61566"/>
             </a:xfrm>
             <a:prstGeom prst="ellipse">
@@ -20186,7 +20186,7 @@
           </p:nvSpPr>
           <p:spPr>
             <a:xfrm>
-              <a:off x="6273834" y="2930720"/>
+              <a:off x="6325807" y="2930720"/>
               <a:ext cx="61566" cy="61566"/>
             </a:xfrm>
             <a:prstGeom prst="ellipse">
@@ -20212,7 +20212,7 @@
           </p:nvSpPr>
           <p:spPr>
             <a:xfrm>
-              <a:off x="6520629" y="3434264"/>
+              <a:off x="6557939" y="3434264"/>
               <a:ext cx="61566" cy="61566"/>
             </a:xfrm>
             <a:prstGeom prst="ellipse">
@@ -20238,7 +20238,7 @@
           </p:nvSpPr>
           <p:spPr>
             <a:xfrm>
-              <a:off x="6348146" y="3197697"/>
+              <a:off x="6270070" y="3197697"/>
               <a:ext cx="61566" cy="61566"/>
             </a:xfrm>
             <a:prstGeom prst="ellipse">
@@ -20264,7 +20264,7 @@
           </p:nvSpPr>
           <p:spPr>
             <a:xfrm>
-              <a:off x="6513303" y="2718804"/>
+              <a:off x="6555909" y="2718804"/>
               <a:ext cx="61566" cy="61566"/>
             </a:xfrm>
             <a:prstGeom prst="ellipse">
@@ -20290,7 +20290,7 @@
           </p:nvSpPr>
           <p:spPr>
             <a:xfrm>
-              <a:off x="6289927" y="2734356"/>
+              <a:off x="6262454" y="2734356"/>
               <a:ext cx="61566" cy="61566"/>
             </a:xfrm>
             <a:prstGeom prst="ellipse">
@@ -20316,7 +20316,7 @@
           </p:nvSpPr>
           <p:spPr>
             <a:xfrm>
-              <a:off x="6505991" y="2784148"/>
+              <a:off x="6522466" y="2784148"/>
               <a:ext cx="61566" cy="61566"/>
             </a:xfrm>
             <a:prstGeom prst="ellipse">
@@ -20342,7 +20342,7 @@
           </p:nvSpPr>
           <p:spPr>
             <a:xfrm>
-              <a:off x="6306827" y="2789554"/>
+              <a:off x="6363088" y="2789554"/>
               <a:ext cx="61566" cy="61566"/>
             </a:xfrm>
             <a:prstGeom prst="ellipse">
@@ -20368,7 +20368,7 @@
           </p:nvSpPr>
           <p:spPr>
             <a:xfrm>
-              <a:off x="6488402" y="3021071"/>
+              <a:off x="6493425" y="3021071"/>
               <a:ext cx="61566" cy="61566"/>
             </a:xfrm>
             <a:prstGeom prst="ellipse">
@@ -20394,7 +20394,7 @@
           </p:nvSpPr>
           <p:spPr>
             <a:xfrm>
-              <a:off x="6269071" y="2846502"/>
+              <a:off x="6301054" y="2846502"/>
               <a:ext cx="61566" cy="61566"/>
             </a:xfrm>
             <a:prstGeom prst="ellipse">
@@ -20420,7 +20420,7 @@
           </p:nvSpPr>
           <p:spPr>
             <a:xfrm>
-              <a:off x="6503507" y="2412109"/>
+              <a:off x="6502582" y="2412109"/>
               <a:ext cx="61566" cy="61566"/>
             </a:xfrm>
             <a:prstGeom prst="ellipse">
@@ -20446,7 +20446,7 @@
           </p:nvSpPr>
           <p:spPr>
             <a:xfrm>
-              <a:off x="6359544" y="1904791"/>
+              <a:off x="6333060" y="1904791"/>
               <a:ext cx="61566" cy="61566"/>
             </a:xfrm>
             <a:prstGeom prst="ellipse">
@@ -20472,7 +20472,7 @@
           </p:nvSpPr>
           <p:spPr>
             <a:xfrm>
-              <a:off x="6562517" y="2281028"/>
+              <a:off x="6500352" y="2281028"/>
               <a:ext cx="61566" cy="61566"/>
             </a:xfrm>
             <a:prstGeom prst="ellipse">
@@ -20498,7 +20498,7 @@
           </p:nvSpPr>
           <p:spPr>
             <a:xfrm>
-              <a:off x="6273877" y="2442352"/>
+              <a:off x="6300540" y="2442352"/>
               <a:ext cx="61566" cy="61566"/>
             </a:xfrm>
             <a:prstGeom prst="ellipse">
@@ -20524,7 +20524,7 @@
           </p:nvSpPr>
           <p:spPr>
             <a:xfrm>
-              <a:off x="6489431" y="2530607"/>
+              <a:off x="6577107" y="2530607"/>
               <a:ext cx="61566" cy="61566"/>
             </a:xfrm>
             <a:prstGeom prst="ellipse">
@@ -20550,7 +20550,7 @@
           </p:nvSpPr>
           <p:spPr>
             <a:xfrm>
-              <a:off x="6337615" y="2187410"/>
+              <a:off x="6292420" y="2187410"/>
               <a:ext cx="61566" cy="61566"/>
             </a:xfrm>
             <a:prstGeom prst="ellipse">
@@ -20576,7 +20576,7 @@
           </p:nvSpPr>
           <p:spPr>
             <a:xfrm>
-              <a:off x="6520861" y="2452633"/>
+              <a:off x="6584023" y="2452633"/>
               <a:ext cx="61566" cy="61566"/>
             </a:xfrm>
             <a:prstGeom prst="ellipse">
@@ -20602,7 +20602,7 @@
           </p:nvSpPr>
           <p:spPr>
             <a:xfrm>
-              <a:off x="6277947" y="3038012"/>
+              <a:off x="6335824" y="3038012"/>
               <a:ext cx="61566" cy="61566"/>
             </a:xfrm>
             <a:prstGeom prst="ellipse">
@@ -20628,7 +20628,7 @@
           </p:nvSpPr>
           <p:spPr>
             <a:xfrm>
-              <a:off x="6561477" y="3038085"/>
+              <a:off x="6568295" y="3038085"/>
               <a:ext cx="61566" cy="61566"/>
             </a:xfrm>
             <a:prstGeom prst="ellipse">
@@ -20654,7 +20654,7 @@
           </p:nvSpPr>
           <p:spPr>
             <a:xfrm>
-              <a:off x="6275522" y="2440508"/>
+              <a:off x="6343453" y="2440508"/>
               <a:ext cx="61566" cy="61566"/>
             </a:xfrm>
             <a:prstGeom prst="ellipse">
@@ -20680,7 +20680,7 @@
           </p:nvSpPr>
           <p:spPr>
             <a:xfrm>
-              <a:off x="6550613" y="2554040"/>
+              <a:off x="6563302" y="2554040"/>
               <a:ext cx="61566" cy="61566"/>
             </a:xfrm>
             <a:prstGeom prst="ellipse">
@@ -20706,7 +20706,7 @@
           </p:nvSpPr>
           <p:spPr>
             <a:xfrm>
-              <a:off x="6314508" y="2609599"/>
+              <a:off x="6329992" y="2609599"/>
               <a:ext cx="61566" cy="61566"/>
             </a:xfrm>
             <a:prstGeom prst="ellipse">
@@ -20732,7 +20732,7 @@
           </p:nvSpPr>
           <p:spPr>
             <a:xfrm>
-              <a:off x="6509117" y="2552685"/>
+              <a:off x="6482662" y="2552685"/>
               <a:ext cx="61566" cy="61566"/>
             </a:xfrm>
             <a:prstGeom prst="ellipse">
@@ -20758,7 +20758,7 @@
           </p:nvSpPr>
           <p:spPr>
             <a:xfrm>
-              <a:off x="6345838" y="3044608"/>
+              <a:off x="6293391" y="3044608"/>
               <a:ext cx="61566" cy="61566"/>
             </a:xfrm>
             <a:prstGeom prst="ellipse">
@@ -20784,7 +20784,7 @@
           </p:nvSpPr>
           <p:spPr>
             <a:xfrm>
-              <a:off x="6540985" y="2868659"/>
+              <a:off x="6507638" y="2868659"/>
               <a:ext cx="61566" cy="61566"/>
             </a:xfrm>
             <a:prstGeom prst="ellipse">
@@ -20810,7 +20810,7 @@
           </p:nvSpPr>
           <p:spPr>
             <a:xfrm>
-              <a:off x="6355063" y="2191455"/>
+              <a:off x="6351492" y="2191455"/>
               <a:ext cx="61566" cy="61566"/>
             </a:xfrm>
             <a:prstGeom prst="ellipse">
@@ -20836,7 +20836,7 @@
           </p:nvSpPr>
           <p:spPr>
             <a:xfrm>
-              <a:off x="6541831" y="2610151"/>
+              <a:off x="6547817" y="2610151"/>
               <a:ext cx="61566" cy="61566"/>
             </a:xfrm>
             <a:prstGeom prst="ellipse">
@@ -20862,7 +20862,7 @@
           </p:nvSpPr>
           <p:spPr>
             <a:xfrm>
-              <a:off x="6284848" y="2813991"/>
+              <a:off x="6320661" y="2813991"/>
               <a:ext cx="61566" cy="61566"/>
             </a:xfrm>
             <a:prstGeom prst="ellipse">
@@ -20888,7 +20888,7 @@
           </p:nvSpPr>
           <p:spPr>
             <a:xfrm>
-              <a:off x="6538102" y="2715715"/>
+              <a:off x="6559186" y="2715715"/>
               <a:ext cx="61566" cy="61566"/>
             </a:xfrm>
             <a:prstGeom prst="ellipse">
@@ -20914,7 +20914,7 @@
           </p:nvSpPr>
           <p:spPr>
             <a:xfrm>
-              <a:off x="6358543" y="2655123"/>
+              <a:off x="6301861" y="2655123"/>
               <a:ext cx="61566" cy="61566"/>
             </a:xfrm>
             <a:prstGeom prst="ellipse">
@@ -20940,7 +20940,7 @@
           </p:nvSpPr>
           <p:spPr>
             <a:xfrm>
-              <a:off x="6495941" y="3032965"/>
+              <a:off x="6582577" y="3032965"/>
               <a:ext cx="61566" cy="61566"/>
             </a:xfrm>
             <a:prstGeom prst="ellipse">
@@ -20966,7 +20966,7 @@
           </p:nvSpPr>
           <p:spPr>
             <a:xfrm>
-              <a:off x="6255992" y="2746358"/>
+              <a:off x="6319023" y="2746358"/>
               <a:ext cx="61566" cy="61566"/>
             </a:xfrm>
             <a:prstGeom prst="ellipse">
@@ -20992,7 +20992,7 @@
           </p:nvSpPr>
           <p:spPr>
             <a:xfrm>
-              <a:off x="6575712" y="2945493"/>
+              <a:off x="6480449" y="2945493"/>
               <a:ext cx="61566" cy="61566"/>
             </a:xfrm>
             <a:prstGeom prst="ellipse">
@@ -21018,7 +21018,7 @@
           </p:nvSpPr>
           <p:spPr>
             <a:xfrm>
-              <a:off x="6308649" y="2494262"/>
+              <a:off x="6277619" y="2494262"/>
               <a:ext cx="61566" cy="61566"/>
             </a:xfrm>
             <a:prstGeom prst="ellipse">
@@ -21044,7 +21044,7 @@
           </p:nvSpPr>
           <p:spPr>
             <a:xfrm>
-              <a:off x="6491740" y="2787609"/>
+              <a:off x="6476757" y="2787609"/>
               <a:ext cx="61566" cy="61566"/>
             </a:xfrm>
             <a:prstGeom prst="ellipse">
@@ -21070,7 +21070,7 @@
           </p:nvSpPr>
           <p:spPr>
             <a:xfrm>
-              <a:off x="6257108" y="2491164"/>
+              <a:off x="6348737" y="2491164"/>
               <a:ext cx="61566" cy="61566"/>
             </a:xfrm>
             <a:prstGeom prst="ellipse">
@@ -21096,7 +21096,7 @@
           </p:nvSpPr>
           <p:spPr>
             <a:xfrm>
-              <a:off x="6535032" y="2959681"/>
+              <a:off x="6571880" y="2959681"/>
               <a:ext cx="61566" cy="61566"/>
             </a:xfrm>
             <a:prstGeom prst="ellipse">
@@ -21122,7 +21122,7 @@
           </p:nvSpPr>
           <p:spPr>
             <a:xfrm>
-              <a:off x="6321844" y="2766194"/>
+              <a:off x="6307962" y="2766194"/>
               <a:ext cx="61566" cy="61566"/>
             </a:xfrm>
             <a:prstGeom prst="ellipse">
@@ -21148,7 +21148,7 @@
           </p:nvSpPr>
           <p:spPr>
             <a:xfrm>
-              <a:off x="6516024" y="2822394"/>
+              <a:off x="6500328" y="2822394"/>
               <a:ext cx="61566" cy="61566"/>
             </a:xfrm>
             <a:prstGeom prst="ellipse">
@@ -21174,7 +21174,7 @@
           </p:nvSpPr>
           <p:spPr>
             <a:xfrm>
-              <a:off x="6281055" y="2398046"/>
+              <a:off x="6289711" y="2398046"/>
               <a:ext cx="61566" cy="61566"/>
             </a:xfrm>
             <a:prstGeom prst="ellipse">
@@ -21200,7 +21200,7 @@
           </p:nvSpPr>
           <p:spPr>
             <a:xfrm>
-              <a:off x="6524883" y="2623386"/>
+              <a:off x="6536009" y="2623386"/>
               <a:ext cx="61566" cy="61566"/>
             </a:xfrm>
             <a:prstGeom prst="ellipse">
@@ -21226,7 +21226,7 @@
           </p:nvSpPr>
           <p:spPr>
             <a:xfrm>
-              <a:off x="6357673" y="2915482"/>
+              <a:off x="6344006" y="2915482"/>
               <a:ext cx="61566" cy="61566"/>
             </a:xfrm>
             <a:prstGeom prst="ellipse">
@@ -21252,7 +21252,7 @@
           </p:nvSpPr>
           <p:spPr>
             <a:xfrm>
-              <a:off x="6497290" y="2395983"/>
+              <a:off x="6534139" y="2395983"/>
               <a:ext cx="61566" cy="61566"/>
             </a:xfrm>
             <a:prstGeom prst="ellipse">
@@ -21278,7 +21278,7 @@
           </p:nvSpPr>
           <p:spPr>
             <a:xfrm>
-              <a:off x="6319218" y="2237133"/>
+              <a:off x="6338009" y="2237133"/>
               <a:ext cx="61566" cy="61566"/>
             </a:xfrm>
             <a:prstGeom prst="ellipse">
@@ -21304,7 +21304,7 @@
           </p:nvSpPr>
           <p:spPr>
             <a:xfrm>
-              <a:off x="6553078" y="2228453"/>
+              <a:off x="6522735" y="2228453"/>
               <a:ext cx="61566" cy="61566"/>
             </a:xfrm>
             <a:prstGeom prst="ellipse">
@@ -21330,7 +21330,7 @@
           </p:nvSpPr>
           <p:spPr>
             <a:xfrm>
-              <a:off x="6265376" y="2665694"/>
+              <a:off x="6347374" y="2665694"/>
               <a:ext cx="61566" cy="61566"/>
             </a:xfrm>
             <a:prstGeom prst="ellipse">
@@ -21356,7 +21356,7 @@
           </p:nvSpPr>
           <p:spPr>
             <a:xfrm>
-              <a:off x="6543987" y="2746669"/>
+              <a:off x="6490810" y="2746669"/>
               <a:ext cx="61566" cy="61566"/>
             </a:xfrm>
             <a:prstGeom prst="ellipse">
@@ -21382,7 +21382,7 @@
           </p:nvSpPr>
           <p:spPr>
             <a:xfrm>
-              <a:off x="6309921" y="2793167"/>
+              <a:off x="6299189" y="2793167"/>
               <a:ext cx="61566" cy="61566"/>
             </a:xfrm>
             <a:prstGeom prst="ellipse">
@@ -21408,7 +21408,7 @@
           </p:nvSpPr>
           <p:spPr>
             <a:xfrm>
-              <a:off x="6570567" y="2619463"/>
+              <a:off x="6509104" y="2619463"/>
               <a:ext cx="61566" cy="61566"/>
             </a:xfrm>
             <a:prstGeom prst="ellipse">
@@ -21434,7 +21434,7 @@
           </p:nvSpPr>
           <p:spPr>
             <a:xfrm>
-              <a:off x="6270491" y="2152050"/>
+              <a:off x="6259899" y="2152050"/>
               <a:ext cx="61566" cy="61566"/>
             </a:xfrm>
             <a:prstGeom prst="ellipse">
@@ -21460,7 +21460,7 @@
           </p:nvSpPr>
           <p:spPr>
             <a:xfrm>
-              <a:off x="6544707" y="3104456"/>
+              <a:off x="6508472" y="3104456"/>
               <a:ext cx="61566" cy="61566"/>
             </a:xfrm>
             <a:prstGeom prst="ellipse">
@@ -21486,7 +21486,7 @@
           </p:nvSpPr>
           <p:spPr>
             <a:xfrm>
-              <a:off x="6255667" y="3159505"/>
+              <a:off x="6277661" y="3159505"/>
               <a:ext cx="61566" cy="61566"/>
             </a:xfrm>
             <a:prstGeom prst="ellipse">
@@ -21512,7 +21512,7 @@
           </p:nvSpPr>
           <p:spPr>
             <a:xfrm>
-              <a:off x="6477735" y="2647310"/>
+              <a:off x="6504586" y="2647310"/>
               <a:ext cx="61566" cy="61566"/>
             </a:xfrm>
             <a:prstGeom prst="ellipse">
@@ -21538,7 +21538,7 @@
           </p:nvSpPr>
           <p:spPr>
             <a:xfrm>
-              <a:off x="6355567" y="2860130"/>
+              <a:off x="6349090" y="2860130"/>
               <a:ext cx="61566" cy="61566"/>
             </a:xfrm>
             <a:prstGeom prst="ellipse">
@@ -21564,7 +21564,7 @@
           </p:nvSpPr>
           <p:spPr>
             <a:xfrm>
-              <a:off x="6506509" y="3362173"/>
+              <a:off x="6572792" y="3362173"/>
               <a:ext cx="61566" cy="61566"/>
             </a:xfrm>
             <a:prstGeom prst="ellipse">
@@ -21590,7 +21590,7 @@
           </p:nvSpPr>
           <p:spPr>
             <a:xfrm>
-              <a:off x="6293273" y="2680068"/>
+              <a:off x="6363662" y="2680068"/>
               <a:ext cx="61566" cy="61566"/>
             </a:xfrm>
             <a:prstGeom prst="ellipse">
@@ -21616,7 +21616,7 @@
           </p:nvSpPr>
           <p:spPr>
             <a:xfrm>
-              <a:off x="6495086" y="2691983"/>
+              <a:off x="6503380" y="2691983"/>
               <a:ext cx="61566" cy="61566"/>
             </a:xfrm>
             <a:prstGeom prst="ellipse">
@@ -21642,7 +21642,7 @@
           </p:nvSpPr>
           <p:spPr>
             <a:xfrm>
-              <a:off x="6350861" y="2719838"/>
+              <a:off x="6271042" y="2719838"/>
               <a:ext cx="61566" cy="61566"/>
             </a:xfrm>
             <a:prstGeom prst="ellipse">
@@ -21668,7 +21668,7 @@
           </p:nvSpPr>
           <p:spPr>
             <a:xfrm>
-              <a:off x="6487981" y="2714144"/>
+              <a:off x="6477240" y="2714144"/>
               <a:ext cx="61566" cy="61566"/>
             </a:xfrm>
             <a:prstGeom prst="ellipse">
@@ -21694,7 +21694,7 @@
           </p:nvSpPr>
           <p:spPr>
             <a:xfrm>
-              <a:off x="6261692" y="2694738"/>
+              <a:off x="6290910" y="2694738"/>
               <a:ext cx="61566" cy="61566"/>
             </a:xfrm>
             <a:prstGeom prst="ellipse">
@@ -21720,7 +21720,7 @@
           </p:nvSpPr>
           <p:spPr>
             <a:xfrm>
-              <a:off x="6526167" y="2976514"/>
+              <a:off x="6533780" y="2976514"/>
               <a:ext cx="61566" cy="61566"/>
             </a:xfrm>
             <a:prstGeom prst="ellipse">
@@ -21746,7 +21746,7 @@
           </p:nvSpPr>
           <p:spPr>
             <a:xfrm>
-              <a:off x="6353296" y="2732022"/>
+              <a:off x="6280457" y="2732022"/>
               <a:ext cx="61566" cy="61566"/>
             </a:xfrm>
             <a:prstGeom prst="ellipse">
@@ -21772,7 +21772,7 @@
           </p:nvSpPr>
           <p:spPr>
             <a:xfrm>
-              <a:off x="6476776" y="2606908"/>
+              <a:off x="6578615" y="2606908"/>
               <a:ext cx="61566" cy="61566"/>
             </a:xfrm>
             <a:prstGeom prst="ellipse">
@@ -21798,7 +21798,7 @@
           </p:nvSpPr>
           <p:spPr>
             <a:xfrm>
-              <a:off x="6349690" y="3124265"/>
+              <a:off x="6268851" y="3124265"/>
               <a:ext cx="61566" cy="61566"/>
             </a:xfrm>
             <a:prstGeom prst="ellipse">
@@ -21824,7 +21824,7 @@
           </p:nvSpPr>
           <p:spPr>
             <a:xfrm>
-              <a:off x="6519663" y="2729951"/>
+              <a:off x="6541795" y="2729951"/>
               <a:ext cx="61566" cy="61566"/>
             </a:xfrm>
             <a:prstGeom prst="ellipse">
@@ -21850,7 +21850,7 @@
           </p:nvSpPr>
           <p:spPr>
             <a:xfrm>
-              <a:off x="6342878" y="3036901"/>
+              <a:off x="6331943" y="3036901"/>
               <a:ext cx="61566" cy="61566"/>
             </a:xfrm>
             <a:prstGeom prst="ellipse">
@@ -21876,7 +21876,7 @@
           </p:nvSpPr>
           <p:spPr>
             <a:xfrm>
-              <a:off x="6508785" y="2364609"/>
+              <a:off x="6513246" y="2364609"/>
               <a:ext cx="61566" cy="61566"/>
             </a:xfrm>
             <a:prstGeom prst="ellipse">
@@ -21902,7 +21902,7 @@
           </p:nvSpPr>
           <p:spPr>
             <a:xfrm>
-              <a:off x="6358925" y="3248220"/>
+              <a:off x="6312436" y="3248220"/>
               <a:ext cx="61566" cy="61566"/>
             </a:xfrm>
             <a:prstGeom prst="ellipse">
@@ -21928,7 +21928,7 @@
           </p:nvSpPr>
           <p:spPr>
             <a:xfrm>
-              <a:off x="6568265" y="3401773"/>
+              <a:off x="6475800" y="3401773"/>
               <a:ext cx="61566" cy="61566"/>
             </a:xfrm>
             <a:prstGeom prst="ellipse">
@@ -21954,7 +21954,7 @@
           </p:nvSpPr>
           <p:spPr>
             <a:xfrm>
-              <a:off x="6340073" y="3015936"/>
+              <a:off x="6269537" y="3015936"/>
               <a:ext cx="61566" cy="61566"/>
             </a:xfrm>
             <a:prstGeom prst="ellipse">
@@ -21980,7 +21980,7 @@
           </p:nvSpPr>
           <p:spPr>
             <a:xfrm>
-              <a:off x="6515321" y="2900930"/>
+              <a:off x="6521846" y="2900930"/>
               <a:ext cx="61566" cy="61566"/>
             </a:xfrm>
             <a:prstGeom prst="ellipse">
@@ -22006,7 +22006,7 @@
           </p:nvSpPr>
           <p:spPr>
             <a:xfrm>
-              <a:off x="6356815" y="2883078"/>
+              <a:off x="6348243" y="2883078"/>
               <a:ext cx="61566" cy="61566"/>
             </a:xfrm>
             <a:prstGeom prst="ellipse">
@@ -22032,7 +22032,7 @@
           </p:nvSpPr>
           <p:spPr>
             <a:xfrm>
-              <a:off x="6580073" y="2705648"/>
+              <a:off x="6521792" y="2705648"/>
               <a:ext cx="61566" cy="61566"/>
             </a:xfrm>
             <a:prstGeom prst="ellipse">
@@ -22058,7 +22058,7 @@
           </p:nvSpPr>
           <p:spPr>
             <a:xfrm>
-              <a:off x="6339863" y="2765496"/>
+              <a:off x="6319802" y="2765496"/>
               <a:ext cx="61566" cy="61566"/>
             </a:xfrm>
             <a:prstGeom prst="ellipse">
@@ -22084,7 +22084,7 @@
           </p:nvSpPr>
           <p:spPr>
             <a:xfrm>
-              <a:off x="6563245" y="2655800"/>
+              <a:off x="6537487" y="2655800"/>
               <a:ext cx="61566" cy="61566"/>
             </a:xfrm>
             <a:prstGeom prst="ellipse">
@@ -22110,7 +22110,7 @@
           </p:nvSpPr>
           <p:spPr>
             <a:xfrm>
-              <a:off x="6270731" y="2849381"/>
+              <a:off x="6348551" y="2849381"/>
               <a:ext cx="61566" cy="61566"/>
             </a:xfrm>
             <a:prstGeom prst="ellipse">
@@ -22136,7 +22136,7 @@
           </p:nvSpPr>
           <p:spPr>
             <a:xfrm>
-              <a:off x="6513918" y="3077000"/>
+              <a:off x="6547794" y="3077000"/>
               <a:ext cx="61566" cy="61566"/>
             </a:xfrm>
             <a:prstGeom prst="ellipse">
@@ -22162,7 +22162,7 @@
           </p:nvSpPr>
           <p:spPr>
             <a:xfrm>
-              <a:off x="6352988" y="2713231"/>
+              <a:off x="6336658" y="2713231"/>
               <a:ext cx="61566" cy="61566"/>
             </a:xfrm>
             <a:prstGeom prst="ellipse">
@@ -22188,7 +22188,7 @@
           </p:nvSpPr>
           <p:spPr>
             <a:xfrm>
-              <a:off x="6510798" y="2545326"/>
+              <a:off x="6543763" y="2545326"/>
               <a:ext cx="61566" cy="61566"/>
             </a:xfrm>
             <a:prstGeom prst="ellipse">
@@ -22214,7 +22214,7 @@
           </p:nvSpPr>
           <p:spPr>
             <a:xfrm>
-              <a:off x="6354518" y="2965268"/>
+              <a:off x="6299175" y="2965268"/>
               <a:ext cx="61566" cy="61566"/>
             </a:xfrm>
             <a:prstGeom prst="ellipse">
@@ -22240,7 +22240,7 @@
           </p:nvSpPr>
           <p:spPr>
             <a:xfrm>
-              <a:off x="6560784" y="2717897"/>
+              <a:off x="6482657" y="2717897"/>
               <a:ext cx="61566" cy="61566"/>
             </a:xfrm>
             <a:prstGeom prst="ellipse">
@@ -22266,7 +22266,7 @@
           </p:nvSpPr>
           <p:spPr>
             <a:xfrm>
-              <a:off x="6301468" y="3008505"/>
+              <a:off x="6346386" y="3008505"/>
               <a:ext cx="61566" cy="61566"/>
             </a:xfrm>
             <a:prstGeom prst="ellipse">
@@ -22292,7 +22292,7 @@
           </p:nvSpPr>
           <p:spPr>
             <a:xfrm>
-              <a:off x="6557729" y="3154152"/>
+              <a:off x="6486319" y="3154152"/>
               <a:ext cx="61566" cy="61566"/>
             </a:xfrm>
             <a:prstGeom prst="ellipse">
@@ -22318,7 +22318,7 @@
           </p:nvSpPr>
           <p:spPr>
             <a:xfrm>
-              <a:off x="6315910" y="3007414"/>
+              <a:off x="6303093" y="3007414"/>
               <a:ext cx="61566" cy="61566"/>
             </a:xfrm>
             <a:prstGeom prst="ellipse">
@@ -22344,7 +22344,7 @@
           </p:nvSpPr>
           <p:spPr>
             <a:xfrm>
-              <a:off x="6503041" y="2657262"/>
+              <a:off x="6578995" y="2657262"/>
               <a:ext cx="61566" cy="61566"/>
             </a:xfrm>
             <a:prstGeom prst="ellipse">
@@ -22370,7 +22370,7 @@
           </p:nvSpPr>
           <p:spPr>
             <a:xfrm>
-              <a:off x="6305124" y="2888561"/>
+              <a:off x="6297542" y="2888561"/>
               <a:ext cx="61566" cy="61566"/>
             </a:xfrm>
             <a:prstGeom prst="ellipse">
@@ -22396,7 +22396,7 @@
           </p:nvSpPr>
           <p:spPr>
             <a:xfrm>
-              <a:off x="6579971" y="2997114"/>
+              <a:off x="6520924" y="2997114"/>
               <a:ext cx="61566" cy="61566"/>
             </a:xfrm>
             <a:prstGeom prst="ellipse">
@@ -22422,7 +22422,7 @@
           </p:nvSpPr>
           <p:spPr>
             <a:xfrm>
-              <a:off x="6314035" y="2514534"/>
+              <a:off x="6302696" y="2514534"/>
               <a:ext cx="61566" cy="61566"/>
             </a:xfrm>
             <a:prstGeom prst="ellipse">
@@ -22448,7 +22448,7 @@
           </p:nvSpPr>
           <p:spPr>
             <a:xfrm>
-              <a:off x="6515312" y="2629551"/>
+              <a:off x="6536608" y="2629551"/>
               <a:ext cx="61566" cy="61566"/>
             </a:xfrm>
             <a:prstGeom prst="ellipse">
@@ -22474,7 +22474,7 @@
           </p:nvSpPr>
           <p:spPr>
             <a:xfrm>
-              <a:off x="6356031" y="2687315"/>
+              <a:off x="6294927" y="2687315"/>
               <a:ext cx="61566" cy="61566"/>
             </a:xfrm>
             <a:prstGeom prst="ellipse">
@@ -22500,7 +22500,7 @@
           </p:nvSpPr>
           <p:spPr>
             <a:xfrm>
-              <a:off x="6570797" y="2845227"/>
+              <a:off x="6520076" y="2845227"/>
               <a:ext cx="61566" cy="61566"/>
             </a:xfrm>
             <a:prstGeom prst="ellipse">
@@ -22526,7 +22526,7 @@
           </p:nvSpPr>
           <p:spPr>
             <a:xfrm>
-              <a:off x="6298341" y="2865057"/>
+              <a:off x="6280384" y="2865057"/>
               <a:ext cx="61566" cy="61566"/>
             </a:xfrm>
             <a:prstGeom prst="ellipse">
@@ -22552,7 +22552,7 @@
           </p:nvSpPr>
           <p:spPr>
             <a:xfrm>
-              <a:off x="6487176" y="2794844"/>
+              <a:off x="6486528" y="2794844"/>
               <a:ext cx="61566" cy="61566"/>
             </a:xfrm>
             <a:prstGeom prst="ellipse">
@@ -22578,7 +22578,7 @@
           </p:nvSpPr>
           <p:spPr>
             <a:xfrm>
-              <a:off x="6291758" y="2846219"/>
+              <a:off x="6339508" y="2846219"/>
               <a:ext cx="61566" cy="61566"/>
             </a:xfrm>
             <a:prstGeom prst="ellipse">
@@ -22604,7 +22604,7 @@
           </p:nvSpPr>
           <p:spPr>
             <a:xfrm>
-              <a:off x="6487955" y="2896332"/>
+              <a:off x="6486138" y="2896332"/>
               <a:ext cx="61566" cy="61566"/>
             </a:xfrm>
             <a:prstGeom prst="ellipse">
@@ -22630,7 +22630,7 @@
           </p:nvSpPr>
           <p:spPr>
             <a:xfrm>
-              <a:off x="6359043" y="2179884"/>
+              <a:off x="6273761" y="2179884"/>
               <a:ext cx="61566" cy="61566"/>
             </a:xfrm>
             <a:prstGeom prst="ellipse">
@@ -22656,7 +22656,7 @@
           </p:nvSpPr>
           <p:spPr>
             <a:xfrm>
-              <a:off x="6478640" y="2371840"/>
+              <a:off x="6511810" y="2371840"/>
               <a:ext cx="61566" cy="61566"/>
             </a:xfrm>
             <a:prstGeom prst="ellipse">
@@ -22682,7 +22682,7 @@
           </p:nvSpPr>
           <p:spPr>
             <a:xfrm>
-              <a:off x="6273766" y="2266372"/>
+              <a:off x="6316461" y="2266372"/>
               <a:ext cx="61566" cy="61566"/>
             </a:xfrm>
             <a:prstGeom prst="ellipse">
@@ -22708,7 +22708,7 @@
           </p:nvSpPr>
           <p:spPr>
             <a:xfrm>
-              <a:off x="6515920" y="2614415"/>
+              <a:off x="6552266" y="2614415"/>
               <a:ext cx="61566" cy="61566"/>
             </a:xfrm>
             <a:prstGeom prst="ellipse">
@@ -22734,7 +22734,7 @@
           </p:nvSpPr>
           <p:spPr>
             <a:xfrm>
-              <a:off x="6351409" y="1910538"/>
+              <a:off x="6305820" y="1910538"/>
               <a:ext cx="61566" cy="61566"/>
             </a:xfrm>
             <a:prstGeom prst="ellipse">
@@ -22760,7 +22760,7 @@
           </p:nvSpPr>
           <p:spPr>
             <a:xfrm>
-              <a:off x="6487117" y="2052793"/>
+              <a:off x="6573992" y="2052793"/>
               <a:ext cx="61566" cy="61566"/>
             </a:xfrm>
             <a:prstGeom prst="ellipse">
@@ -22786,7 +22786,7 @@
           </p:nvSpPr>
           <p:spPr>
             <a:xfrm>
-              <a:off x="6359159" y="2595030"/>
+              <a:off x="6268375" y="2595030"/>
               <a:ext cx="61566" cy="61566"/>
             </a:xfrm>
             <a:prstGeom prst="ellipse">
@@ -22812,7 +22812,7 @@
           </p:nvSpPr>
           <p:spPr>
             <a:xfrm>
-              <a:off x="6570319" y="2647088"/>
+              <a:off x="6521177" y="2647088"/>
               <a:ext cx="61566" cy="61566"/>
             </a:xfrm>
             <a:prstGeom prst="ellipse">
@@ -22838,7 +22838,7 @@
           </p:nvSpPr>
           <p:spPr>
             <a:xfrm>
-              <a:off x="6282551" y="2374367"/>
+              <a:off x="6322965" y="2374367"/>
               <a:ext cx="61566" cy="61566"/>
             </a:xfrm>
             <a:prstGeom prst="ellipse">
@@ -22864,7 +22864,7 @@
           </p:nvSpPr>
           <p:spPr>
             <a:xfrm>
-              <a:off x="6510972" y="2458161"/>
+              <a:off x="6512286" y="2458161"/>
               <a:ext cx="61566" cy="61566"/>
             </a:xfrm>
             <a:prstGeom prst="ellipse">
@@ -22890,7 +22890,7 @@
           </p:nvSpPr>
           <p:spPr>
             <a:xfrm>
-              <a:off x="6261838" y="2644620"/>
+              <a:off x="6347081" y="2644620"/>
               <a:ext cx="61566" cy="61566"/>
             </a:xfrm>
             <a:prstGeom prst="ellipse">
@@ -22916,7 +22916,7 @@
           </p:nvSpPr>
           <p:spPr>
             <a:xfrm>
-              <a:off x="6582046" y="2850322"/>
+              <a:off x="6546059" y="2850322"/>
               <a:ext cx="61566" cy="61566"/>
             </a:xfrm>
             <a:prstGeom prst="ellipse">
@@ -22942,7 +22942,7 @@
           </p:nvSpPr>
           <p:spPr>
             <a:xfrm>
-              <a:off x="6282067" y="3199030"/>
+              <a:off x="6329555" y="3199030"/>
               <a:ext cx="61566" cy="61566"/>
             </a:xfrm>
             <a:prstGeom prst="ellipse">
@@ -22968,7 +22968,7 @@
           </p:nvSpPr>
           <p:spPr>
             <a:xfrm>
-              <a:off x="6520836" y="3241000"/>
+              <a:off x="6483171" y="3241000"/>
               <a:ext cx="61566" cy="61566"/>
             </a:xfrm>
             <a:prstGeom prst="ellipse">
@@ -22994,7 +22994,7 @@
           </p:nvSpPr>
           <p:spPr>
             <a:xfrm>
-              <a:off x="6274123" y="2849201"/>
+              <a:off x="6317041" y="2849201"/>
               <a:ext cx="61566" cy="61566"/>
             </a:xfrm>
             <a:prstGeom prst="ellipse">
@@ -23020,7 +23020,7 @@
           </p:nvSpPr>
           <p:spPr>
             <a:xfrm>
-              <a:off x="6569209" y="2747894"/>
+              <a:off x="6554837" y="2747894"/>
               <a:ext cx="61566" cy="61566"/>
             </a:xfrm>
             <a:prstGeom prst="ellipse">
@@ -23046,7 +23046,7 @@
           </p:nvSpPr>
           <p:spPr>
             <a:xfrm>
-              <a:off x="6314349" y="2198964"/>
+              <a:off x="6307038" y="2198964"/>
               <a:ext cx="61566" cy="61566"/>
             </a:xfrm>
             <a:prstGeom prst="ellipse">
@@ -23072,7 +23072,7 @@
           </p:nvSpPr>
           <p:spPr>
             <a:xfrm>
-              <a:off x="6524036" y="2484339"/>
+              <a:off x="6494638" y="2484339"/>
               <a:ext cx="61566" cy="61566"/>
             </a:xfrm>
             <a:prstGeom prst="ellipse">
@@ -23098,7 +23098,7 @@
           </p:nvSpPr>
           <p:spPr>
             <a:xfrm>
-              <a:off x="6331040" y="2755085"/>
+              <a:off x="6278237" y="2755085"/>
               <a:ext cx="61566" cy="61566"/>
             </a:xfrm>
             <a:prstGeom prst="ellipse">
@@ -23124,7 +23124,7 @@
           </p:nvSpPr>
           <p:spPr>
             <a:xfrm>
-              <a:off x="6491275" y="2804328"/>
+              <a:off x="6478417" y="2804328"/>
               <a:ext cx="61566" cy="61566"/>
             </a:xfrm>
             <a:prstGeom prst="ellipse">
@@ -23150,7 +23150,7 @@
           </p:nvSpPr>
           <p:spPr>
             <a:xfrm>
-              <a:off x="6275128" y="2599039"/>
+              <a:off x="6344952" y="2599039"/>
               <a:ext cx="61566" cy="61566"/>
             </a:xfrm>
             <a:prstGeom prst="ellipse">
@@ -23176,7 +23176,7 @@
           </p:nvSpPr>
           <p:spPr>
             <a:xfrm>
-              <a:off x="6583687" y="2612252"/>
+              <a:off x="6559454" y="2612252"/>
               <a:ext cx="61566" cy="61566"/>
             </a:xfrm>
             <a:prstGeom prst="ellipse">
@@ -23202,7 +23202,7 @@
           </p:nvSpPr>
           <p:spPr>
             <a:xfrm>
-              <a:off x="6278339" y="2332396"/>
+              <a:off x="6299697" y="2332396"/>
               <a:ext cx="61566" cy="61566"/>
             </a:xfrm>
             <a:prstGeom prst="ellipse">
@@ -23228,7 +23228,7 @@
           </p:nvSpPr>
           <p:spPr>
             <a:xfrm>
-              <a:off x="6511788" y="2369180"/>
+              <a:off x="6546133" y="2369180"/>
               <a:ext cx="61566" cy="61566"/>
             </a:xfrm>
             <a:prstGeom prst="ellipse">
@@ -23254,7 +23254,7 @@
           </p:nvSpPr>
           <p:spPr>
             <a:xfrm>
-              <a:off x="6280151" y="2441693"/>
+              <a:off x="6312377" y="2441693"/>
               <a:ext cx="61566" cy="61566"/>
             </a:xfrm>
             <a:prstGeom prst="ellipse">
@@ -23280,7 +23280,7 @@
           </p:nvSpPr>
           <p:spPr>
             <a:xfrm>
-              <a:off x="6557036" y="2798212"/>
+              <a:off x="6575963" y="2798212"/>
               <a:ext cx="61566" cy="61566"/>
             </a:xfrm>
             <a:prstGeom prst="ellipse">
@@ -23306,7 +23306,7 @@
           </p:nvSpPr>
           <p:spPr>
             <a:xfrm>
-              <a:off x="6309731" y="2704229"/>
+              <a:off x="6333199" y="2704229"/>
               <a:ext cx="61566" cy="61566"/>
             </a:xfrm>
             <a:prstGeom prst="ellipse">
@@ -23332,7 +23332,7 @@
           </p:nvSpPr>
           <p:spPr>
             <a:xfrm>
-              <a:off x="6567641" y="2990649"/>
+              <a:off x="6515604" y="2990649"/>
               <a:ext cx="61566" cy="61566"/>
             </a:xfrm>
             <a:prstGeom prst="ellipse">
@@ -23358,7 +23358,7 @@
           </p:nvSpPr>
           <p:spPr>
             <a:xfrm>
-              <a:off x="6266396" y="2623455"/>
+              <a:off x="6305403" y="2623455"/>
               <a:ext cx="61566" cy="61566"/>
             </a:xfrm>
             <a:prstGeom prst="ellipse">
@@ -23384,7 +23384,7 @@
           </p:nvSpPr>
           <p:spPr>
             <a:xfrm>
-              <a:off x="6571013" y="2304996"/>
+              <a:off x="6551013" y="2304996"/>
               <a:ext cx="61566" cy="61566"/>
             </a:xfrm>
             <a:prstGeom prst="ellipse">
@@ -23410,7 +23410,7 @@
           </p:nvSpPr>
           <p:spPr>
             <a:xfrm>
-              <a:off x="6337612" y="2904593"/>
+              <a:off x="6269511" y="2904593"/>
               <a:ext cx="61566" cy="61566"/>
             </a:xfrm>
             <a:prstGeom prst="ellipse">
@@ -23436,7 +23436,7 @@
           </p:nvSpPr>
           <p:spPr>
             <a:xfrm>
-              <a:off x="6581111" y="2504559"/>
+              <a:off x="6523393" y="2504559"/>
               <a:ext cx="61566" cy="61566"/>
             </a:xfrm>
             <a:prstGeom prst="ellipse">
@@ -23462,7 +23462,7 @@
           </p:nvSpPr>
           <p:spPr>
             <a:xfrm>
-              <a:off x="6351038" y="3294756"/>
+              <a:off x="6314475" y="3294756"/>
               <a:ext cx="61566" cy="61566"/>
             </a:xfrm>
             <a:prstGeom prst="ellipse">
@@ -23488,7 +23488,7 @@
           </p:nvSpPr>
           <p:spPr>
             <a:xfrm>
-              <a:off x="6526271" y="2689129"/>
+              <a:off x="6562252" y="2689129"/>
               <a:ext cx="61566" cy="61566"/>
             </a:xfrm>
             <a:prstGeom prst="ellipse">
@@ -23514,7 +23514,7 @@
           </p:nvSpPr>
           <p:spPr>
             <a:xfrm>
-              <a:off x="6257314" y="2469880"/>
+              <a:off x="6296366" y="2469880"/>
               <a:ext cx="61566" cy="61566"/>
             </a:xfrm>
             <a:prstGeom prst="ellipse">
@@ -23540,7 +23540,7 @@
           </p:nvSpPr>
           <p:spPr>
             <a:xfrm>
-              <a:off x="6501135" y="2908157"/>
+              <a:off x="6522202" y="2908157"/>
               <a:ext cx="61566" cy="61566"/>
             </a:xfrm>
             <a:prstGeom prst="ellipse">
@@ -23566,7 +23566,7 @@
           </p:nvSpPr>
           <p:spPr>
             <a:xfrm>
-              <a:off x="6333130" y="2617821"/>
+              <a:off x="6304653" y="2617821"/>
               <a:ext cx="61566" cy="61566"/>
             </a:xfrm>
             <a:prstGeom prst="ellipse">
@@ -23592,7 +23592,7 @@
           </p:nvSpPr>
           <p:spPr>
             <a:xfrm>
-              <a:off x="6583041" y="2755729"/>
+              <a:off x="6540152" y="2755729"/>
               <a:ext cx="61566" cy="61566"/>
             </a:xfrm>
             <a:prstGeom prst="ellipse">
@@ -23618,7 +23618,7 @@
           </p:nvSpPr>
           <p:spPr>
             <a:xfrm>
-              <a:off x="6254082" y="2482403"/>
+              <a:off x="6318597" y="2482403"/>
               <a:ext cx="61566" cy="61566"/>
             </a:xfrm>
             <a:prstGeom prst="ellipse">
@@ -23644,7 +23644,7 @@
           </p:nvSpPr>
           <p:spPr>
             <a:xfrm>
-              <a:off x="6584064" y="2615783"/>
+              <a:off x="6506284" y="2615783"/>
               <a:ext cx="61566" cy="61566"/>
             </a:xfrm>
             <a:prstGeom prst="ellipse">
@@ -23670,7 +23670,7 @@
           </p:nvSpPr>
           <p:spPr>
             <a:xfrm>
-              <a:off x="6330152" y="2965075"/>
+              <a:off x="6262876" y="2965075"/>
               <a:ext cx="61566" cy="61566"/>
             </a:xfrm>
             <a:prstGeom prst="ellipse">
@@ -23696,7 +23696,7 @@
           </p:nvSpPr>
           <p:spPr>
             <a:xfrm>
-              <a:off x="6577834" y="2893218"/>
+              <a:off x="6511131" y="2893218"/>
               <a:ext cx="61566" cy="61566"/>
             </a:xfrm>
             <a:prstGeom prst="ellipse">
@@ -23722,7 +23722,7 @@
           </p:nvSpPr>
           <p:spPr>
             <a:xfrm>
-              <a:off x="6274846" y="2919530"/>
+              <a:off x="6329688" y="2919530"/>
               <a:ext cx="61566" cy="61566"/>
             </a:xfrm>
             <a:prstGeom prst="ellipse">
@@ -23748,7 +23748,7 @@
           </p:nvSpPr>
           <p:spPr>
             <a:xfrm>
-              <a:off x="6569456" y="2904259"/>
+              <a:off x="6510550" y="2904259"/>
               <a:ext cx="61566" cy="61566"/>
             </a:xfrm>
             <a:prstGeom prst="ellipse">
@@ -23774,7 +23774,7 @@
           </p:nvSpPr>
           <p:spPr>
             <a:xfrm>
-              <a:off x="6253688" y="2765346"/>
+              <a:off x="6310330" y="2765346"/>
               <a:ext cx="61566" cy="61566"/>
             </a:xfrm>
             <a:prstGeom prst="ellipse">
@@ -23800,7 +23800,7 @@
           </p:nvSpPr>
           <p:spPr>
             <a:xfrm>
-              <a:off x="6556670" y="2919079"/>
+              <a:off x="6497740" y="2919079"/>
               <a:ext cx="61566" cy="61566"/>
             </a:xfrm>
             <a:prstGeom prst="ellipse">
@@ -23826,7 +23826,7 @@
           </p:nvSpPr>
           <p:spPr>
             <a:xfrm>
-              <a:off x="6269225" y="2854417"/>
+              <a:off x="6305987" y="2854417"/>
               <a:ext cx="61566" cy="61566"/>
             </a:xfrm>
             <a:prstGeom prst="ellipse">
@@ -23852,7 +23852,7 @@
           </p:nvSpPr>
           <p:spPr>
             <a:xfrm>
-              <a:off x="6476447" y="3026402"/>
+              <a:off x="6488648" y="3026402"/>
               <a:ext cx="61566" cy="61566"/>
             </a:xfrm>
             <a:prstGeom prst="ellipse">
@@ -23878,7 +23878,7 @@
           </p:nvSpPr>
           <p:spPr>
             <a:xfrm>
-              <a:off x="6252362" y="2836824"/>
+              <a:off x="6330509" y="2836824"/>
               <a:ext cx="61566" cy="61566"/>
             </a:xfrm>
             <a:prstGeom prst="ellipse">
@@ -23904,7 +23904,7 @@
           </p:nvSpPr>
           <p:spPr>
             <a:xfrm>
-              <a:off x="6510733" y="2605902"/>
+              <a:off x="6496365" y="2605902"/>
               <a:ext cx="61566" cy="61566"/>
             </a:xfrm>
             <a:prstGeom prst="ellipse">
@@ -23930,7 +23930,7 @@
           </p:nvSpPr>
           <p:spPr>
             <a:xfrm>
-              <a:off x="6324248" y="2332213"/>
+              <a:off x="6346049" y="2332213"/>
               <a:ext cx="61566" cy="61566"/>
             </a:xfrm>
             <a:prstGeom prst="ellipse">
@@ -23956,7 +23956,7 @@
           </p:nvSpPr>
           <p:spPr>
             <a:xfrm>
-              <a:off x="6490495" y="2756787"/>
+              <a:off x="6581508" y="2756787"/>
               <a:ext cx="61566" cy="61566"/>
             </a:xfrm>
             <a:prstGeom prst="ellipse">
@@ -23982,7 +23982,7 @@
           </p:nvSpPr>
           <p:spPr>
             <a:xfrm>
-              <a:off x="6280717" y="2855039"/>
+              <a:off x="6289893" y="2855039"/>
               <a:ext cx="61566" cy="61566"/>
             </a:xfrm>
             <a:prstGeom prst="ellipse">
@@ -24008,7 +24008,7 @@
           </p:nvSpPr>
           <p:spPr>
             <a:xfrm>
-              <a:off x="6509626" y="3181399"/>
+              <a:off x="6504383" y="3181399"/>
               <a:ext cx="61566" cy="61566"/>
             </a:xfrm>
             <a:prstGeom prst="ellipse">
@@ -24034,7 +24034,7 @@
           </p:nvSpPr>
           <p:spPr>
             <a:xfrm>
-              <a:off x="6255230" y="2749610"/>
+              <a:off x="6357060" y="2749610"/>
               <a:ext cx="61566" cy="61566"/>
             </a:xfrm>
             <a:prstGeom prst="ellipse">
@@ -24060,7 +24060,7 @@
           </p:nvSpPr>
           <p:spPr>
             <a:xfrm>
-              <a:off x="6571074" y="2581256"/>
+              <a:off x="6563148" y="2581256"/>
               <a:ext cx="61566" cy="61566"/>
             </a:xfrm>
             <a:prstGeom prst="ellipse">
@@ -24086,7 +24086,7 @@
           </p:nvSpPr>
           <p:spPr>
             <a:xfrm>
-              <a:off x="6277342" y="2696789"/>
+              <a:off x="6354943" y="2696789"/>
               <a:ext cx="61566" cy="61566"/>
             </a:xfrm>
             <a:prstGeom prst="ellipse">
@@ -24112,7 +24112,7 @@
           </p:nvSpPr>
           <p:spPr>
             <a:xfrm>
-              <a:off x="6543723" y="3200089"/>
+              <a:off x="6546240" y="3200089"/>
               <a:ext cx="61566" cy="61566"/>
             </a:xfrm>
             <a:prstGeom prst="ellipse">
@@ -24138,7 +24138,7 @@
           </p:nvSpPr>
           <p:spPr>
             <a:xfrm>
-              <a:off x="6297197" y="2936113"/>
+              <a:off x="6255300" y="2936113"/>
               <a:ext cx="61566" cy="61566"/>
             </a:xfrm>
             <a:prstGeom prst="ellipse">
@@ -24164,7 +24164,7 @@
           </p:nvSpPr>
           <p:spPr>
             <a:xfrm>
-              <a:off x="6551704" y="2526205"/>
+              <a:off x="6515204" y="2526205"/>
               <a:ext cx="61566" cy="61566"/>
             </a:xfrm>
             <a:prstGeom prst="ellipse">
@@ -24190,7 +24190,7 @@
           </p:nvSpPr>
           <p:spPr>
             <a:xfrm>
-              <a:off x="6328061" y="2340154"/>
+              <a:off x="6267839" y="2340154"/>
               <a:ext cx="61566" cy="61566"/>
             </a:xfrm>
             <a:prstGeom prst="ellipse">
@@ -24216,7 +24216,7 @@
           </p:nvSpPr>
           <p:spPr>
             <a:xfrm>
-              <a:off x="6492802" y="2543392"/>
+              <a:off x="6536626" y="2543392"/>
               <a:ext cx="61566" cy="61566"/>
             </a:xfrm>
             <a:prstGeom prst="ellipse">
@@ -24242,7 +24242,7 @@
           </p:nvSpPr>
           <p:spPr>
             <a:xfrm>
-              <a:off x="6285562" y="2888543"/>
+              <a:off x="6360300" y="2888543"/>
               <a:ext cx="61566" cy="61566"/>
             </a:xfrm>
             <a:prstGeom prst="ellipse">
@@ -24268,7 +24268,7 @@
           </p:nvSpPr>
           <p:spPr>
             <a:xfrm>
-              <a:off x="6525405" y="2939160"/>
+              <a:off x="6542267" y="2939160"/>
               <a:ext cx="61566" cy="61566"/>
             </a:xfrm>
             <a:prstGeom prst="ellipse">
@@ -24294,7 +24294,7 @@
           </p:nvSpPr>
           <p:spPr>
             <a:xfrm>
-              <a:off x="6283078" y="2714791"/>
+              <a:off x="6311695" y="2714791"/>
               <a:ext cx="61566" cy="61566"/>
             </a:xfrm>
             <a:prstGeom prst="ellipse">
@@ -24320,7 +24320,7 @@
           </p:nvSpPr>
           <p:spPr>
             <a:xfrm>
-              <a:off x="6517197" y="2955322"/>
+              <a:off x="6506155" y="2955322"/>
               <a:ext cx="61566" cy="61566"/>
             </a:xfrm>
             <a:prstGeom prst="ellipse">
@@ -24346,7 +24346,7 @@
           </p:nvSpPr>
           <p:spPr>
             <a:xfrm>
-              <a:off x="6345742" y="2896357"/>
+              <a:off x="6352229" y="2896357"/>
               <a:ext cx="61566" cy="61566"/>
             </a:xfrm>
             <a:prstGeom prst="ellipse">
@@ -24372,7 +24372,7 @@
           </p:nvSpPr>
           <p:spPr>
             <a:xfrm>
-              <a:off x="6498421" y="2606848"/>
+              <a:off x="6517557" y="2606848"/>
               <a:ext cx="61566" cy="61566"/>
             </a:xfrm>
             <a:prstGeom prst="ellipse">
@@ -24398,7 +24398,7 @@
           </p:nvSpPr>
           <p:spPr>
             <a:xfrm>
-              <a:off x="6288009" y="2729700"/>
+              <a:off x="6349442" y="2729700"/>
               <a:ext cx="61566" cy="61566"/>
             </a:xfrm>
             <a:prstGeom prst="ellipse">
@@ -24424,7 +24424,7 @@
           </p:nvSpPr>
           <p:spPr>
             <a:xfrm>
-              <a:off x="6496292" y="2543828"/>
+              <a:off x="6484801" y="2543828"/>
               <a:ext cx="61566" cy="61566"/>
             </a:xfrm>
             <a:prstGeom prst="ellipse">
@@ -24450,7 +24450,7 @@
           </p:nvSpPr>
           <p:spPr>
             <a:xfrm>
-              <a:off x="6304730" y="2896900"/>
+              <a:off x="6274069" y="2896900"/>
               <a:ext cx="61566" cy="61566"/>
             </a:xfrm>
             <a:prstGeom prst="ellipse">
@@ -24476,7 +24476,7 @@
           </p:nvSpPr>
           <p:spPr>
             <a:xfrm>
-              <a:off x="6530633" y="2707308"/>
+              <a:off x="6583393" y="2707308"/>
               <a:ext cx="61566" cy="61566"/>
             </a:xfrm>
             <a:prstGeom prst="ellipse">
@@ -24502,7 +24502,7 @@
           </p:nvSpPr>
           <p:spPr>
             <a:xfrm>
-              <a:off x="6353160" y="2436464"/>
+              <a:off x="6294742" y="2436464"/>
               <a:ext cx="61566" cy="61566"/>
             </a:xfrm>
             <a:prstGeom prst="ellipse">
@@ -24528,7 +24528,7 @@
           </p:nvSpPr>
           <p:spPr>
             <a:xfrm>
-              <a:off x="6565284" y="2523615"/>
+              <a:off x="6559968" y="2523615"/>
               <a:ext cx="61566" cy="61566"/>
             </a:xfrm>
             <a:prstGeom prst="ellipse">
@@ -24554,7 +24554,7 @@
           </p:nvSpPr>
           <p:spPr>
             <a:xfrm>
-              <a:off x="6257646" y="2635955"/>
+              <a:off x="6308983" y="2635955"/>
               <a:ext cx="61566" cy="61566"/>
             </a:xfrm>
             <a:prstGeom prst="ellipse">
@@ -24580,7 +24580,7 @@
           </p:nvSpPr>
           <p:spPr>
             <a:xfrm>
-              <a:off x="6485921" y="3005171"/>
+              <a:off x="6512390" y="3005171"/>
               <a:ext cx="61566" cy="61566"/>
             </a:xfrm>
             <a:prstGeom prst="ellipse">
@@ -24606,7 +24606,7 @@
           </p:nvSpPr>
           <p:spPr>
             <a:xfrm>
-              <a:off x="6336253" y="2835889"/>
+              <a:off x="6354698" y="2835889"/>
               <a:ext cx="61566" cy="61566"/>
             </a:xfrm>
             <a:prstGeom prst="ellipse">
@@ -24632,7 +24632,7 @@
           </p:nvSpPr>
           <p:spPr>
             <a:xfrm>
-              <a:off x="6513651" y="2507506"/>
+              <a:off x="6580602" y="2507506"/>
               <a:ext cx="61566" cy="61566"/>
             </a:xfrm>
             <a:prstGeom prst="ellipse">
@@ -24658,7 +24658,7 @@
           </p:nvSpPr>
           <p:spPr>
             <a:xfrm>
-              <a:off x="6264500" y="2282341"/>
+              <a:off x="6292435" y="2282341"/>
               <a:ext cx="61566" cy="61566"/>
             </a:xfrm>
             <a:prstGeom prst="ellipse">
@@ -24684,7 +24684,7 @@
           </p:nvSpPr>
           <p:spPr>
             <a:xfrm>
-              <a:off x="6558909" y="2457654"/>
+              <a:off x="6540510" y="2457654"/>
               <a:ext cx="61566" cy="61566"/>
             </a:xfrm>
             <a:prstGeom prst="ellipse">
@@ -24710,7 +24710,7 @@
           </p:nvSpPr>
           <p:spPr>
             <a:xfrm>
-              <a:off x="6283670" y="2549946"/>
+              <a:off x="6331787" y="2549946"/>
               <a:ext cx="61566" cy="61566"/>
             </a:xfrm>
             <a:prstGeom prst="ellipse">
@@ -24736,7 +24736,7 @@
           </p:nvSpPr>
           <p:spPr>
             <a:xfrm>
-              <a:off x="6513012" y="2695799"/>
+              <a:off x="6544019" y="2695799"/>
               <a:ext cx="61566" cy="61566"/>
             </a:xfrm>
             <a:prstGeom prst="ellipse">
@@ -24762,7 +24762,7 @@
           </p:nvSpPr>
           <p:spPr>
             <a:xfrm>
-              <a:off x="6299822" y="2704258"/>
+              <a:off x="6313778" y="2704258"/>
               <a:ext cx="61566" cy="61566"/>
             </a:xfrm>
             <a:prstGeom prst="ellipse">
@@ -24788,7 +24788,7 @@
           </p:nvSpPr>
           <p:spPr>
             <a:xfrm>
-              <a:off x="6490322" y="2845436"/>
+              <a:off x="6578667" y="2845436"/>
               <a:ext cx="61566" cy="61566"/>
             </a:xfrm>
             <a:prstGeom prst="ellipse">
@@ -24814,7 +24814,7 @@
           </p:nvSpPr>
           <p:spPr>
             <a:xfrm>
-              <a:off x="6346276" y="3282869"/>
+              <a:off x="6295486" y="3282869"/>
               <a:ext cx="61566" cy="61566"/>
             </a:xfrm>
             <a:prstGeom prst="ellipse">
@@ -24840,7 +24840,7 @@
           </p:nvSpPr>
           <p:spPr>
             <a:xfrm>
-              <a:off x="6556763" y="3284692"/>
+              <a:off x="6576609" y="3284692"/>
               <a:ext cx="61566" cy="61566"/>
             </a:xfrm>
             <a:prstGeom prst="ellipse">
@@ -24866,7 +24866,7 @@
           </p:nvSpPr>
           <p:spPr>
             <a:xfrm>
-              <a:off x="6330933" y="3888507"/>
+              <a:off x="6330157" y="3888507"/>
               <a:ext cx="61566" cy="61566"/>
             </a:xfrm>
             <a:prstGeom prst="ellipse">
@@ -24892,7 +24892,7 @@
           </p:nvSpPr>
           <p:spPr>
             <a:xfrm>
-              <a:off x="6532112" y="3598731"/>
+              <a:off x="6495071" y="3598731"/>
               <a:ext cx="61566" cy="61566"/>
             </a:xfrm>
             <a:prstGeom prst="ellipse">
@@ -24918,7 +24918,7 @@
           </p:nvSpPr>
           <p:spPr>
             <a:xfrm>
-              <a:off x="6313717" y="2434524"/>
+              <a:off x="6309945" y="2434524"/>
               <a:ext cx="61566" cy="61566"/>
             </a:xfrm>
             <a:prstGeom prst="ellipse">
@@ -24944,7 +24944,7 @@
           </p:nvSpPr>
           <p:spPr>
             <a:xfrm>
-              <a:off x="6529640" y="2676211"/>
+              <a:off x="6513939" y="2676211"/>
               <a:ext cx="61566" cy="61566"/>
             </a:xfrm>
             <a:prstGeom prst="ellipse">
@@ -24970,7 +24970,7 @@
           </p:nvSpPr>
           <p:spPr>
             <a:xfrm>
-              <a:off x="6294034" y="2126904"/>
+              <a:off x="6330644" y="2126904"/>
               <a:ext cx="61566" cy="61566"/>
             </a:xfrm>
             <a:prstGeom prst="ellipse">
@@ -24996,7 +24996,7 @@
           </p:nvSpPr>
           <p:spPr>
             <a:xfrm>
-              <a:off x="6574497" y="2464795"/>
+              <a:off x="6581713" y="2464795"/>
               <a:ext cx="61566" cy="61566"/>
             </a:xfrm>
             <a:prstGeom prst="ellipse">
@@ -25022,7 +25022,7 @@
           </p:nvSpPr>
           <p:spPr>
             <a:xfrm>
-              <a:off x="6297804" y="3100546"/>
+              <a:off x="6327767" y="3100546"/>
               <a:ext cx="61566" cy="61566"/>
             </a:xfrm>
             <a:prstGeom prst="ellipse">
@@ -25048,7 +25048,7 @@
           </p:nvSpPr>
           <p:spPr>
             <a:xfrm>
-              <a:off x="6513809" y="2714013"/>
+              <a:off x="6578144" y="2714013"/>
               <a:ext cx="61566" cy="61566"/>
             </a:xfrm>
             <a:prstGeom prst="ellipse">
@@ -25074,7 +25074,7 @@
           </p:nvSpPr>
           <p:spPr>
             <a:xfrm>
-              <a:off x="6303245" y="2851731"/>
+              <a:off x="6335305" y="2851731"/>
               <a:ext cx="61566" cy="61566"/>
             </a:xfrm>
             <a:prstGeom prst="ellipse">
@@ -25100,7 +25100,7 @@
           </p:nvSpPr>
           <p:spPr>
             <a:xfrm>
-              <a:off x="6514448" y="2592885"/>
+              <a:off x="6519310" y="2592885"/>
               <a:ext cx="61566" cy="61566"/>
             </a:xfrm>
             <a:prstGeom prst="ellipse">
@@ -25126,7 +25126,7 @@
           </p:nvSpPr>
           <p:spPr>
             <a:xfrm>
-              <a:off x="6280752" y="2605152"/>
+              <a:off x="6272490" y="2605152"/>
               <a:ext cx="61566" cy="61566"/>
             </a:xfrm>
             <a:prstGeom prst="ellipse">
@@ -25152,7 +25152,7 @@
           </p:nvSpPr>
           <p:spPr>
             <a:xfrm>
-              <a:off x="6506254" y="2577342"/>
+              <a:off x="6527437" y="2577342"/>
               <a:ext cx="61566" cy="61566"/>
             </a:xfrm>
             <a:prstGeom prst="ellipse">
@@ -25178,7 +25178,7 @@
           </p:nvSpPr>
           <p:spPr>
             <a:xfrm>
-              <a:off x="6360811" y="2823542"/>
+              <a:off x="6358855" y="2823542"/>
               <a:ext cx="61566" cy="61566"/>
             </a:xfrm>
             <a:prstGeom prst="ellipse">
@@ -25204,7 +25204,7 @@
           </p:nvSpPr>
           <p:spPr>
             <a:xfrm>
-              <a:off x="6506425" y="2687047"/>
+              <a:off x="6555152" y="2687047"/>
               <a:ext cx="61566" cy="61566"/>
             </a:xfrm>
             <a:prstGeom prst="ellipse">
@@ -25230,7 +25230,7 @@
           </p:nvSpPr>
           <p:spPr>
             <a:xfrm>
-              <a:off x="6312834" y="2605053"/>
+              <a:off x="6311953" y="2605053"/>
               <a:ext cx="61566" cy="61566"/>
             </a:xfrm>
             <a:prstGeom prst="ellipse">
@@ -25256,7 +25256,7 @@
           </p:nvSpPr>
           <p:spPr>
             <a:xfrm>
-              <a:off x="6480013" y="2679743"/>
+              <a:off x="6528964" y="2679743"/>
               <a:ext cx="61566" cy="61566"/>
             </a:xfrm>
             <a:prstGeom prst="ellipse">
@@ -25282,7 +25282,7 @@
           </p:nvSpPr>
           <p:spPr>
             <a:xfrm>
-              <a:off x="1728933" y="2460044"/>
+              <a:off x="1727990" y="2460044"/>
               <a:ext cx="0" cy="472934"/>
             </a:xfrm>
             <a:custGeom>
@@ -25322,7 +25322,7 @@
           </p:nvSpPr>
           <p:spPr>
             <a:xfrm>
-              <a:off x="1728933" y="3353650"/>
+              <a:off x="1727990" y="3353650"/>
               <a:ext cx="0" cy="607156"/>
             </a:xfrm>
             <a:custGeom>
@@ -25362,13 +25362,13 @@
           </p:nvSpPr>
           <p:spPr>
             <a:xfrm>
-              <a:off x="1618103" y="2932979"/>
-              <a:ext cx="221659" cy="420671"/>
+              <a:off x="1617119" y="2932979"/>
+              <a:ext cx="221743" cy="420671"/>
             </a:xfrm>
             <a:custGeom>
               <a:avLst/>
               <a:pathLst>
-                <a:path w="221659" h="420671">
+                <a:path w="221743" h="420671">
                   <a:moveTo>
                     <a:pt x="0" y="0"/>
                   </a:moveTo>
@@ -25376,10 +25376,10 @@
                     <a:pt x="0" y="420671"/>
                   </a:lnTo>
                   <a:lnTo>
-                    <a:pt x="221659" y="420671"/>
+                    <a:pt x="221743" y="420671"/>
                   </a:lnTo>
                   <a:lnTo>
-                    <a:pt x="221659" y="0"/>
+                    <a:pt x="221743" y="0"/>
                   </a:lnTo>
                   <a:close/>
                 </a:path>
@@ -25409,18 +25409,18 @@
           </p:nvSpPr>
           <p:spPr>
             <a:xfrm>
-              <a:off x="1618103" y="3174376"/>
-              <a:ext cx="221659" cy="0"/>
+              <a:off x="1617119" y="3174376"/>
+              <a:ext cx="221743" cy="0"/>
             </a:xfrm>
             <a:custGeom>
               <a:avLst/>
               <a:pathLst>
-                <a:path w="221659" h="0">
+                <a:path w="221743" h="0">
                   <a:moveTo>
                     <a:pt x="0" y="0"/>
                   </a:moveTo>
                   <a:lnTo>
-                    <a:pt x="221659" y="0"/>
+                    <a:pt x="221743" y="0"/>
                   </a:lnTo>
                 </a:path>
               </a:pathLst>
@@ -25449,7 +25449,7 @@
           </p:nvSpPr>
           <p:spPr>
             <a:xfrm>
-              <a:off x="3265359" y="2228885"/>
+              <a:off x="3264997" y="2228885"/>
               <a:ext cx="0" cy="448927"/>
             </a:xfrm>
             <a:custGeom>
@@ -25489,7 +25489,7 @@
           </p:nvSpPr>
           <p:spPr>
             <a:xfrm>
-              <a:off x="3265359" y="3112551"/>
+              <a:off x="3264997" y="3112551"/>
               <a:ext cx="0" cy="626512"/>
             </a:xfrm>
             <a:custGeom>
@@ -25529,13 +25529,13 @@
           </p:nvSpPr>
           <p:spPr>
             <a:xfrm>
-              <a:off x="3154529" y="2677813"/>
-              <a:ext cx="221659" cy="434737"/>
+              <a:off x="3154126" y="2677813"/>
+              <a:ext cx="221743" cy="434737"/>
             </a:xfrm>
             <a:custGeom>
               <a:avLst/>
               <a:pathLst>
-                <a:path w="221659" h="434737">
+                <a:path w="221743" h="434737">
                   <a:moveTo>
                     <a:pt x="0" y="0"/>
                   </a:moveTo>
@@ -25543,10 +25543,10 @@
                     <a:pt x="0" y="434737"/>
                   </a:lnTo>
                   <a:lnTo>
-                    <a:pt x="221659" y="434737"/>
+                    <a:pt x="221743" y="434737"/>
                   </a:lnTo>
                   <a:lnTo>
-                    <a:pt x="221659" y="0"/>
+                    <a:pt x="221743" y="0"/>
                   </a:lnTo>
                   <a:close/>
                 </a:path>
@@ -25576,18 +25576,18 @@
           </p:nvSpPr>
           <p:spPr>
             <a:xfrm>
-              <a:off x="3154529" y="2847991"/>
-              <a:ext cx="221659" cy="0"/>
+              <a:off x="3154126" y="2847991"/>
+              <a:ext cx="221743" cy="0"/>
             </a:xfrm>
             <a:custGeom>
               <a:avLst/>
               <a:pathLst>
-                <a:path w="221659" h="0">
+                <a:path w="221743" h="0">
                   <a:moveTo>
                     <a:pt x="0" y="0"/>
                   </a:moveTo>
                   <a:lnTo>
-                    <a:pt x="221659" y="0"/>
+                    <a:pt x="221743" y="0"/>
                   </a:lnTo>
                 </a:path>
               </a:pathLst>
@@ -25616,7 +25616,7 @@
           </p:nvSpPr>
           <p:spPr>
             <a:xfrm>
-              <a:off x="4801786" y="1794788"/>
+              <a:off x="4802004" y="1794788"/>
               <a:ext cx="0" cy="594247"/>
             </a:xfrm>
             <a:custGeom>
@@ -25656,7 +25656,7 @@
           </p:nvSpPr>
           <p:spPr>
             <a:xfrm>
-              <a:off x="4801786" y="2937529"/>
+              <a:off x="4802004" y="2937529"/>
               <a:ext cx="0" cy="818101"/>
             </a:xfrm>
             <a:custGeom>
@@ -25696,13 +25696,13 @@
           </p:nvSpPr>
           <p:spPr>
             <a:xfrm>
-              <a:off x="4690956" y="2389035"/>
-              <a:ext cx="221659" cy="548493"/>
+              <a:off x="4691132" y="2389035"/>
+              <a:ext cx="221743" cy="548493"/>
             </a:xfrm>
             <a:custGeom>
               <a:avLst/>
               <a:pathLst>
-                <a:path w="221659" h="548493">
+                <a:path w="221743" h="548493">
                   <a:moveTo>
                     <a:pt x="0" y="0"/>
                   </a:moveTo>
@@ -25710,10 +25710,10 @@
                     <a:pt x="0" y="548493"/>
                   </a:lnTo>
                   <a:lnTo>
-                    <a:pt x="221659" y="548493"/>
+                    <a:pt x="221743" y="548493"/>
                   </a:lnTo>
                   <a:lnTo>
-                    <a:pt x="221659" y="0"/>
+                    <a:pt x="221743" y="0"/>
                   </a:lnTo>
                   <a:close/>
                 </a:path>
@@ -25743,18 +25743,18 @@
           </p:nvSpPr>
           <p:spPr>
             <a:xfrm>
-              <a:off x="4690956" y="2651979"/>
-              <a:ext cx="221659" cy="0"/>
+              <a:off x="4691132" y="2651979"/>
+              <a:ext cx="221743" cy="0"/>
             </a:xfrm>
             <a:custGeom>
               <a:avLst/>
               <a:pathLst>
-                <a:path w="221659" h="0">
+                <a:path w="221743" h="0">
                   <a:moveTo>
                     <a:pt x="0" y="0"/>
                   </a:moveTo>
                   <a:lnTo>
-                    <a:pt x="221659" y="0"/>
+                    <a:pt x="221743" y="0"/>
                   </a:lnTo>
                 </a:path>
               </a:pathLst>
@@ -25783,7 +25783,7 @@
           </p:nvSpPr>
           <p:spPr>
             <a:xfrm>
-              <a:off x="6338212" y="1926095"/>
+              <a:off x="6339011" y="1926095"/>
               <a:ext cx="0" cy="598950"/>
             </a:xfrm>
             <a:custGeom>
@@ -25823,7 +25823,7 @@
           </p:nvSpPr>
           <p:spPr>
             <a:xfrm>
-              <a:off x="6338212" y="2950313"/>
+              <a:off x="6339011" y="2950313"/>
               <a:ext cx="0" cy="583391"/>
             </a:xfrm>
             <a:custGeom>
@@ -25863,13 +25863,13 @@
           </p:nvSpPr>
           <p:spPr>
             <a:xfrm>
-              <a:off x="6227382" y="2525045"/>
-              <a:ext cx="221659" cy="425267"/>
+              <a:off x="6228139" y="2525045"/>
+              <a:ext cx="221743" cy="425267"/>
             </a:xfrm>
             <a:custGeom>
               <a:avLst/>
               <a:pathLst>
-                <a:path w="221659" h="425267">
+                <a:path w="221743" h="425267">
                   <a:moveTo>
                     <a:pt x="0" y="0"/>
                   </a:moveTo>
@@ -25877,10 +25877,10 @@
                     <a:pt x="0" y="425267"/>
                   </a:lnTo>
                   <a:lnTo>
-                    <a:pt x="221659" y="425267"/>
+                    <a:pt x="221743" y="425267"/>
                   </a:lnTo>
                   <a:lnTo>
-                    <a:pt x="221659" y="0"/>
+                    <a:pt x="221743" y="0"/>
                   </a:lnTo>
                   <a:close/>
                 </a:path>
@@ -25910,18 +25910,18 @@
           </p:nvSpPr>
           <p:spPr>
             <a:xfrm>
-              <a:off x="6227382" y="2760483"/>
-              <a:ext cx="221659" cy="0"/>
+              <a:off x="6228139" y="2760483"/>
+              <a:ext cx="221743" cy="0"/>
             </a:xfrm>
             <a:custGeom>
               <a:avLst/>
               <a:pathLst>
-                <a:path w="221659" h="0">
+                <a:path w="221743" h="0">
                   <a:moveTo>
                     <a:pt x="0" y="0"/>
                   </a:moveTo>
                   <a:lnTo>
-                    <a:pt x="221659" y="0"/>
+                    <a:pt x="221743" y="0"/>
                   </a:lnTo>
                 </a:path>
               </a:pathLst>
@@ -25950,7 +25950,7 @@
           </p:nvSpPr>
           <p:spPr>
             <a:xfrm>
-              <a:off x="1950592" y="2491969"/>
+              <a:off x="1949734" y="2491969"/>
               <a:ext cx="0" cy="508986"/>
             </a:xfrm>
             <a:custGeom>
@@ -25990,7 +25990,7 @@
           </p:nvSpPr>
           <p:spPr>
             <a:xfrm>
-              <a:off x="1950592" y="3347971"/>
+              <a:off x="1949734" y="3347971"/>
               <a:ext cx="0" cy="304441"/>
             </a:xfrm>
             <a:custGeom>
@@ -26030,13 +26030,13 @@
           </p:nvSpPr>
           <p:spPr>
             <a:xfrm>
-              <a:off x="1839762" y="3000955"/>
-              <a:ext cx="221659" cy="347016"/>
+              <a:off x="1838862" y="3000955"/>
+              <a:ext cx="221743" cy="347016"/>
             </a:xfrm>
             <a:custGeom>
               <a:avLst/>
               <a:pathLst>
-                <a:path w="221659" h="347016">
+                <a:path w="221743" h="347016">
                   <a:moveTo>
                     <a:pt x="0" y="0"/>
                   </a:moveTo>
@@ -26044,10 +26044,10 @@
                     <a:pt x="0" y="347016"/>
                   </a:lnTo>
                   <a:lnTo>
-                    <a:pt x="221659" y="347016"/>
+                    <a:pt x="221743" y="347016"/>
                   </a:lnTo>
                   <a:lnTo>
-                    <a:pt x="221659" y="0"/>
+                    <a:pt x="221743" y="0"/>
                   </a:lnTo>
                   <a:close/>
                 </a:path>
@@ -26077,18 +26077,18 @@
           </p:nvSpPr>
           <p:spPr>
             <a:xfrm>
-              <a:off x="1839762" y="3213150"/>
-              <a:ext cx="221659" cy="0"/>
+              <a:off x="1838862" y="3213150"/>
+              <a:ext cx="221743" cy="0"/>
             </a:xfrm>
             <a:custGeom>
               <a:avLst/>
               <a:pathLst>
-                <a:path w="221659" h="0">
+                <a:path w="221743" h="0">
                   <a:moveTo>
                     <a:pt x="0" y="0"/>
                   </a:moveTo>
                   <a:lnTo>
-                    <a:pt x="221659" y="0"/>
+                    <a:pt x="221743" y="0"/>
                   </a:lnTo>
                 </a:path>
               </a:pathLst>
@@ -26117,7 +26117,7 @@
           </p:nvSpPr>
           <p:spPr>
             <a:xfrm>
-              <a:off x="3487019" y="2181952"/>
+              <a:off x="3486740" y="2181952"/>
               <a:ext cx="0" cy="572639"/>
             </a:xfrm>
             <a:custGeom>
@@ -26157,7 +26157,7 @@
           </p:nvSpPr>
           <p:spPr>
             <a:xfrm>
-              <a:off x="3487019" y="3185880"/>
+              <a:off x="3486740" y="3185880"/>
               <a:ext cx="0" cy="533251"/>
             </a:xfrm>
             <a:custGeom>
@@ -26197,13 +26197,13 @@
           </p:nvSpPr>
           <p:spPr>
             <a:xfrm>
-              <a:off x="3376189" y="2754591"/>
-              <a:ext cx="221659" cy="431288"/>
+              <a:off x="3375869" y="2754591"/>
+              <a:ext cx="221743" cy="431288"/>
             </a:xfrm>
             <a:custGeom>
               <a:avLst/>
               <a:pathLst>
-                <a:path w="221659" h="431288">
+                <a:path w="221743" h="431288">
                   <a:moveTo>
                     <a:pt x="0" y="0"/>
                   </a:moveTo>
@@ -26211,10 +26211,10 @@
                     <a:pt x="0" y="431288"/>
                   </a:lnTo>
                   <a:lnTo>
-                    <a:pt x="221659" y="431288"/>
+                    <a:pt x="221743" y="431288"/>
                   </a:lnTo>
                   <a:lnTo>
-                    <a:pt x="221659" y="0"/>
+                    <a:pt x="221743" y="0"/>
                   </a:lnTo>
                   <a:close/>
                 </a:path>
@@ -26244,18 +26244,18 @@
           </p:nvSpPr>
           <p:spPr>
             <a:xfrm>
-              <a:off x="3376189" y="2952506"/>
-              <a:ext cx="221659" cy="0"/>
+              <a:off x="3375869" y="2952506"/>
+              <a:ext cx="221743" cy="0"/>
             </a:xfrm>
             <a:custGeom>
               <a:avLst/>
               <a:pathLst>
-                <a:path w="221659" h="0">
+                <a:path w="221743" h="0">
                   <a:moveTo>
                     <a:pt x="0" y="0"/>
                   </a:moveTo>
                   <a:lnTo>
-                    <a:pt x="221659" y="0"/>
+                    <a:pt x="221743" y="0"/>
                   </a:lnTo>
                 </a:path>
               </a:pathLst>
@@ -26284,7 +26284,7 @@
           </p:nvSpPr>
           <p:spPr>
             <a:xfrm>
-              <a:off x="5023445" y="2200031"/>
+              <a:off x="5023747" y="2200031"/>
               <a:ext cx="0" cy="435392"/>
             </a:xfrm>
             <a:custGeom>
@@ -26324,7 +26324,7 @@
           </p:nvSpPr>
           <p:spPr>
             <a:xfrm>
-              <a:off x="5023445" y="3098159"/>
+              <a:off x="5023747" y="3098159"/>
               <a:ext cx="0" cy="492339"/>
             </a:xfrm>
             <a:custGeom>
@@ -26364,13 +26364,13 @@
           </p:nvSpPr>
           <p:spPr>
             <a:xfrm>
-              <a:off x="4912615" y="2635424"/>
-              <a:ext cx="221659" cy="462735"/>
+              <a:off x="4912876" y="2635424"/>
+              <a:ext cx="221743" cy="462735"/>
             </a:xfrm>
             <a:custGeom>
               <a:avLst/>
               <a:pathLst>
-                <a:path w="221659" h="462735">
+                <a:path w="221743" h="462735">
                   <a:moveTo>
                     <a:pt x="0" y="0"/>
                   </a:moveTo>
@@ -26378,10 +26378,10 @@
                     <a:pt x="0" y="462735"/>
                   </a:lnTo>
                   <a:lnTo>
-                    <a:pt x="221659" y="462735"/>
+                    <a:pt x="221743" y="462735"/>
                   </a:lnTo>
                   <a:lnTo>
-                    <a:pt x="221659" y="0"/>
+                    <a:pt x="221743" y="0"/>
                   </a:lnTo>
                   <a:close/>
                 </a:path>
@@ -26411,18 +26411,18 @@
           </p:nvSpPr>
           <p:spPr>
             <a:xfrm>
-              <a:off x="4912615" y="2779030"/>
-              <a:ext cx="221659" cy="0"/>
+              <a:off x="4912876" y="2779030"/>
+              <a:ext cx="221743" cy="0"/>
             </a:xfrm>
             <a:custGeom>
               <a:avLst/>
               <a:pathLst>
-                <a:path w="221659" h="0">
+                <a:path w="221743" h="0">
                   <a:moveTo>
                     <a:pt x="0" y="0"/>
                   </a:moveTo>
                   <a:lnTo>
-                    <a:pt x="221659" y="0"/>
+                    <a:pt x="221743" y="0"/>
                   </a:lnTo>
                 </a:path>
               </a:pathLst>
@@ -26451,7 +26451,7 @@
           </p:nvSpPr>
           <p:spPr>
             <a:xfrm>
-              <a:off x="6559871" y="2259236"/>
+              <a:off x="6560754" y="2259236"/>
               <a:ext cx="0" cy="348888"/>
             </a:xfrm>
             <a:custGeom>
@@ -26491,7 +26491,7 @@
           </p:nvSpPr>
           <p:spPr>
             <a:xfrm>
-              <a:off x="6559871" y="2949862"/>
+              <a:off x="6560754" y="2949862"/>
               <a:ext cx="0" cy="482693"/>
             </a:xfrm>
             <a:custGeom>
@@ -26531,13 +26531,13 @@
           </p:nvSpPr>
           <p:spPr>
             <a:xfrm>
-              <a:off x="6449042" y="2608125"/>
-              <a:ext cx="221659" cy="341737"/>
+              <a:off x="6449882" y="2608125"/>
+              <a:ext cx="221743" cy="341737"/>
             </a:xfrm>
             <a:custGeom>
               <a:avLst/>
               <a:pathLst>
-                <a:path w="221659" h="341737">
+                <a:path w="221743" h="341737">
                   <a:moveTo>
                     <a:pt x="0" y="0"/>
                   </a:moveTo>
@@ -26545,10 +26545,10 @@
                     <a:pt x="0" y="341737"/>
                   </a:lnTo>
                   <a:lnTo>
-                    <a:pt x="221659" y="341737"/>
+                    <a:pt x="221743" y="341737"/>
                   </a:lnTo>
                   <a:lnTo>
-                    <a:pt x="221659" y="0"/>
+                    <a:pt x="221743" y="0"/>
                   </a:lnTo>
                   <a:close/>
                 </a:path>
@@ -26578,18 +26578,18 @@
           </p:nvSpPr>
           <p:spPr>
             <a:xfrm>
-              <a:off x="6449042" y="2749587"/>
-              <a:ext cx="221659" cy="0"/>
+              <a:off x="6449882" y="2749587"/>
+              <a:ext cx="221743" cy="0"/>
             </a:xfrm>
             <a:custGeom>
               <a:avLst/>
               <a:pathLst>
-                <a:path w="221659" h="0">
+                <a:path w="221743" h="0">
                   <a:moveTo>
                     <a:pt x="0" y="0"/>
                   </a:moveTo>
                   <a:lnTo>
-                    <a:pt x="221659" y="0"/>
+                    <a:pt x="221743" y="0"/>
                   </a:lnTo>
                 </a:path>
               </a:pathLst>
@@ -26618,39 +26618,39 @@
           </p:nvSpPr>
           <p:spPr>
             <a:xfrm>
-              <a:off x="1839762" y="2505552"/>
-              <a:ext cx="4654849" cy="667920"/>
+              <a:off x="1838862" y="2505552"/>
+              <a:ext cx="4656607" cy="667920"/>
             </a:xfrm>
             <a:custGeom>
               <a:avLst/>
               <a:pathLst>
-                <a:path w="4654849" h="667920">
+                <a:path w="4656607" h="667920">
                   <a:moveTo>
                     <a:pt x="0" y="333651"/>
                   </a:moveTo>
                   <a:lnTo>
-                    <a:pt x="1152629" y="301632"/>
+                    <a:pt x="1153064" y="301632"/>
                   </a:lnTo>
                   <a:lnTo>
-                    <a:pt x="2216594" y="252387"/>
+                    <a:pt x="2217432" y="252387"/>
                   </a:lnTo>
                   <a:lnTo>
-                    <a:pt x="3546551" y="132694"/>
+                    <a:pt x="3547891" y="132694"/>
                   </a:lnTo>
                   <a:lnTo>
-                    <a:pt x="4654849" y="0"/>
+                    <a:pt x="4656607" y="0"/>
                   </a:lnTo>
                   <a:lnTo>
-                    <a:pt x="4654849" y="299410"/>
+                    <a:pt x="4656607" y="299410"/>
                   </a:lnTo>
                   <a:lnTo>
-                    <a:pt x="3546551" y="333897"/>
+                    <a:pt x="3547891" y="333897"/>
                   </a:lnTo>
                   <a:lnTo>
-                    <a:pt x="2216594" y="414822"/>
+                    <a:pt x="2217432" y="414822"/>
                   </a:lnTo>
                   <a:lnTo>
-                    <a:pt x="1152629" y="526071"/>
+                    <a:pt x="1153064" y="526071"/>
                   </a:lnTo>
                   <a:lnTo>
                     <a:pt x="0" y="667920"/>
@@ -26679,27 +26679,27 @@
           </p:nvSpPr>
           <p:spPr>
             <a:xfrm>
-              <a:off x="1839762" y="2505552"/>
-              <a:ext cx="4654849" cy="333651"/>
+              <a:off x="1838862" y="2505552"/>
+              <a:ext cx="4656607" cy="333651"/>
             </a:xfrm>
             <a:custGeom>
               <a:avLst/>
               <a:pathLst>
-                <a:path w="4654849" h="333651">
+                <a:path w="4656607" h="333651">
                   <a:moveTo>
                     <a:pt x="0" y="333651"/>
                   </a:moveTo>
                   <a:lnTo>
-                    <a:pt x="1152629" y="301632"/>
+                    <a:pt x="1153064" y="301632"/>
                   </a:lnTo>
                   <a:lnTo>
-                    <a:pt x="2216594" y="252387"/>
+                    <a:pt x="2217432" y="252387"/>
                   </a:lnTo>
                   <a:lnTo>
-                    <a:pt x="3546551" y="132694"/>
+                    <a:pt x="3547891" y="132694"/>
                   </a:lnTo>
                   <a:lnTo>
-                    <a:pt x="4654849" y="0"/>
+                    <a:pt x="4656607" y="0"/>
                   </a:lnTo>
                 </a:path>
               </a:pathLst>
@@ -26719,24 +26719,24 @@
           </p:nvSpPr>
           <p:spPr>
             <a:xfrm>
-              <a:off x="1839762" y="2804963"/>
-              <a:ext cx="4654849" cy="368509"/>
+              <a:off x="1838862" y="2804963"/>
+              <a:ext cx="4656607" cy="368509"/>
             </a:xfrm>
             <a:custGeom>
               <a:avLst/>
               <a:pathLst>
-                <a:path w="4654849" h="368509">
+                <a:path w="4656607" h="368509">
                   <a:moveTo>
-                    <a:pt x="4654849" y="0"/>
+                    <a:pt x="4656607" y="0"/>
                   </a:moveTo>
                   <a:lnTo>
-                    <a:pt x="3546551" y="34486"/>
+                    <a:pt x="3547891" y="34486"/>
                   </a:lnTo>
                   <a:lnTo>
-                    <a:pt x="2216594" y="115411"/>
+                    <a:pt x="2217432" y="115411"/>
                   </a:lnTo>
                   <a:lnTo>
-                    <a:pt x="1152629" y="226660"/>
+                    <a:pt x="1153064" y="226660"/>
                   </a:lnTo>
                   <a:lnTo>
                     <a:pt x="0" y="368509"/>
@@ -26759,39 +26759,39 @@
           </p:nvSpPr>
           <p:spPr>
             <a:xfrm>
-              <a:off x="1839762" y="2645021"/>
-              <a:ext cx="4654849" cy="605448"/>
+              <a:off x="1838862" y="2645021"/>
+              <a:ext cx="4656607" cy="605448"/>
             </a:xfrm>
             <a:custGeom>
               <a:avLst/>
               <a:pathLst>
-                <a:path w="4654849" h="605448">
+                <a:path w="4656607" h="605448">
                   <a:moveTo>
                     <a:pt x="0" y="324761"/>
                   </a:moveTo>
                   <a:lnTo>
-                    <a:pt x="1152629" y="286605"/>
+                    <a:pt x="1153064" y="286605"/>
                   </a:lnTo>
                   <a:lnTo>
-                    <a:pt x="2216594" y="234980"/>
+                    <a:pt x="2217432" y="234980"/>
                   </a:lnTo>
                   <a:lnTo>
-                    <a:pt x="3546551" y="121921"/>
+                    <a:pt x="3547891" y="121921"/>
                   </a:lnTo>
                   <a:lnTo>
-                    <a:pt x="4654849" y="0"/>
+                    <a:pt x="4656607" y="0"/>
                   </a:lnTo>
                   <a:lnTo>
-                    <a:pt x="4654849" y="250519"/>
+                    <a:pt x="4656607" y="250519"/>
                   </a:lnTo>
                   <a:lnTo>
-                    <a:pt x="3546551" y="290428"/>
+                    <a:pt x="3547891" y="290428"/>
                   </a:lnTo>
                   <a:lnTo>
-                    <a:pt x="2216594" y="371566"/>
+                    <a:pt x="2217432" y="371566"/>
                   </a:lnTo>
                   <a:lnTo>
-                    <a:pt x="1152629" y="475299"/>
+                    <a:pt x="1153064" y="475299"/>
                   </a:lnTo>
                   <a:lnTo>
                     <a:pt x="0" y="605448"/>
@@ -26820,27 +26820,27 @@
           </p:nvSpPr>
           <p:spPr>
             <a:xfrm>
-              <a:off x="1839762" y="2645021"/>
-              <a:ext cx="4654849" cy="324761"/>
+              <a:off x="1838862" y="2645021"/>
+              <a:ext cx="4656607" cy="324761"/>
             </a:xfrm>
             <a:custGeom>
               <a:avLst/>
               <a:pathLst>
-                <a:path w="4654849" h="324761">
+                <a:path w="4656607" h="324761">
                   <a:moveTo>
                     <a:pt x="0" y="324761"/>
                   </a:moveTo>
                   <a:lnTo>
-                    <a:pt x="1152629" y="286605"/>
+                    <a:pt x="1153064" y="286605"/>
                   </a:lnTo>
                   <a:lnTo>
-                    <a:pt x="2216594" y="234980"/>
+                    <a:pt x="2217432" y="234980"/>
                   </a:lnTo>
                   <a:lnTo>
-                    <a:pt x="3546551" y="121921"/>
+                    <a:pt x="3547891" y="121921"/>
                   </a:lnTo>
                   <a:lnTo>
-                    <a:pt x="4654849" y="0"/>
+                    <a:pt x="4656607" y="0"/>
                   </a:lnTo>
                 </a:path>
               </a:pathLst>
@@ -26860,24 +26860,24 @@
           </p:nvSpPr>
           <p:spPr>
             <a:xfrm>
-              <a:off x="1839762" y="2895540"/>
-              <a:ext cx="4654849" cy="354929"/>
+              <a:off x="1838862" y="2895540"/>
+              <a:ext cx="4656607" cy="354929"/>
             </a:xfrm>
             <a:custGeom>
               <a:avLst/>
               <a:pathLst>
-                <a:path w="4654849" h="354929">
+                <a:path w="4656607" h="354929">
                   <a:moveTo>
-                    <a:pt x="4654849" y="0"/>
+                    <a:pt x="4656607" y="0"/>
                   </a:moveTo>
                   <a:lnTo>
-                    <a:pt x="3546551" y="39909"/>
+                    <a:pt x="3547891" y="39909"/>
                   </a:lnTo>
                   <a:lnTo>
-                    <a:pt x="2216594" y="121047"/>
+                    <a:pt x="2217432" y="121047"/>
                   </a:lnTo>
                   <a:lnTo>
-                    <a:pt x="1152629" y="224780"/>
+                    <a:pt x="1153064" y="224780"/>
                   </a:lnTo>
                   <a:lnTo>
                     <a:pt x="0" y="354929"/>
@@ -26900,27 +26900,27 @@
           </p:nvSpPr>
           <p:spPr>
             <a:xfrm>
-              <a:off x="1839762" y="2655257"/>
-              <a:ext cx="4654849" cy="351080"/>
+              <a:off x="1838862" y="2655257"/>
+              <a:ext cx="4656607" cy="351080"/>
             </a:xfrm>
             <a:custGeom>
               <a:avLst/>
               <a:pathLst>
-                <a:path w="4654849" h="351080">
+                <a:path w="4656607" h="351080">
                   <a:moveTo>
                     <a:pt x="0" y="351080"/>
                   </a:moveTo>
                   <a:lnTo>
-                    <a:pt x="1152629" y="264146"/>
+                    <a:pt x="1153064" y="264146"/>
                   </a:lnTo>
                   <a:lnTo>
-                    <a:pt x="2216594" y="183899"/>
+                    <a:pt x="2217432" y="183899"/>
                   </a:lnTo>
                   <a:lnTo>
-                    <a:pt x="3546551" y="83590"/>
+                    <a:pt x="3547891" y="83590"/>
                   </a:lnTo>
                   <a:lnTo>
-                    <a:pt x="4654849" y="0"/>
+                    <a:pt x="4656607" y="0"/>
                   </a:lnTo>
                 </a:path>
               </a:pathLst>
@@ -26949,27 +26949,27 @@
           </p:nvSpPr>
           <p:spPr>
             <a:xfrm>
-              <a:off x="1839762" y="2770281"/>
-              <a:ext cx="4654849" cy="339845"/>
+              <a:off x="1838862" y="2770281"/>
+              <a:ext cx="4656607" cy="339845"/>
             </a:xfrm>
             <a:custGeom>
               <a:avLst/>
               <a:pathLst>
-                <a:path w="4654849" h="339845">
+                <a:path w="4656607" h="339845">
                   <a:moveTo>
                     <a:pt x="0" y="339845"/>
                   </a:moveTo>
                   <a:lnTo>
-                    <a:pt x="1152629" y="255693"/>
+                    <a:pt x="1153064" y="255693"/>
                   </a:lnTo>
                   <a:lnTo>
-                    <a:pt x="2216594" y="178014"/>
+                    <a:pt x="2217432" y="178014"/>
                   </a:lnTo>
                   <a:lnTo>
-                    <a:pt x="3546551" y="80915"/>
+                    <a:pt x="3547891" y="80915"/>
                   </a:lnTo>
                   <a:lnTo>
-                    <a:pt x="4654849" y="0"/>
+                    <a:pt x="4656607" y="0"/>
                   </a:lnTo>
                 </a:path>
               </a:pathLst>
@@ -26998,7 +26998,7 @@
           </p:nvSpPr>
           <p:spPr>
             <a:xfrm>
-              <a:off x="1839762" y="1075464"/>
+              <a:off x="1838862" y="1075464"/>
               <a:ext cx="743315" cy="82021"/>
             </a:xfrm>
             <a:prstGeom prst="rect">
@@ -27044,7 +27044,7 @@
           </p:nvSpPr>
           <p:spPr>
             <a:xfrm>
-              <a:off x="2583078" y="1075464"/>
+              <a:off x="2582178" y="1075464"/>
               <a:ext cx="76260" cy="82021"/>
             </a:xfrm>
             <a:prstGeom prst="rect">
@@ -27090,7 +27090,7 @@
           </p:nvSpPr>
           <p:spPr>
             <a:xfrm>
-              <a:off x="2671944" y="1075464"/>
+              <a:off x="2671044" y="1075464"/>
               <a:ext cx="25420" cy="82021"/>
             </a:xfrm>
             <a:prstGeom prst="rect">
@@ -27136,7 +27136,7 @@
           </p:nvSpPr>
           <p:spPr>
             <a:xfrm>
-              <a:off x="2709668" y="1075464"/>
+              <a:off x="2708767" y="1075464"/>
               <a:ext cx="63550" cy="82021"/>
             </a:xfrm>
             <a:prstGeom prst="rect">
@@ -27182,7 +27182,7 @@
           </p:nvSpPr>
           <p:spPr>
             <a:xfrm>
-              <a:off x="2782449" y="1075464"/>
+              <a:off x="2781549" y="1075464"/>
               <a:ext cx="63550" cy="82021"/>
             </a:xfrm>
             <a:prstGeom prst="rect">
@@ -27228,7 +27228,7 @@
           </p:nvSpPr>
           <p:spPr>
             <a:xfrm>
-              <a:off x="2855190" y="1075464"/>
+              <a:off x="2854289" y="1075464"/>
               <a:ext cx="63550" cy="82021"/>
             </a:xfrm>
             <a:prstGeom prst="rect">
@@ -27274,7 +27274,7 @@
           </p:nvSpPr>
           <p:spPr>
             <a:xfrm>
-              <a:off x="2927903" y="1075464"/>
+              <a:off x="2927003" y="1075464"/>
               <a:ext cx="416143" cy="82021"/>
             </a:xfrm>
             <a:prstGeom prst="rect">
@@ -27320,7 +27320,7 @@
           </p:nvSpPr>
           <p:spPr>
             <a:xfrm>
-              <a:off x="3344046" y="1075464"/>
+              <a:off x="3343146" y="1075464"/>
               <a:ext cx="63459" cy="82021"/>
             </a:xfrm>
             <a:prstGeom prst="rect">
@@ -27366,7 +27366,7 @@
           </p:nvSpPr>
           <p:spPr>
             <a:xfrm>
-              <a:off x="3407506" y="1075464"/>
+              <a:off x="3406605" y="1075464"/>
               <a:ext cx="63550" cy="82021"/>
             </a:xfrm>
             <a:prstGeom prst="rect">
@@ -27412,7 +27412,7 @@
           </p:nvSpPr>
           <p:spPr>
             <a:xfrm>
-              <a:off x="3480246" y="1075464"/>
+              <a:off x="3479346" y="1075464"/>
               <a:ext cx="416143" cy="82021"/>
             </a:xfrm>
             <a:prstGeom prst="rect">
@@ -27458,7 +27458,7 @@
           </p:nvSpPr>
           <p:spPr>
             <a:xfrm>
-              <a:off x="1839762" y="1276351"/>
+              <a:off x="1838862" y="1276351"/>
               <a:ext cx="730605" cy="82021"/>
             </a:xfrm>
             <a:prstGeom prst="rect">
@@ -27504,7 +27504,7 @@
           </p:nvSpPr>
           <p:spPr>
             <a:xfrm>
-              <a:off x="2570368" y="1276351"/>
+              <a:off x="2569468" y="1276351"/>
               <a:ext cx="76260" cy="82021"/>
             </a:xfrm>
             <a:prstGeom prst="rect">
@@ -27550,7 +27550,7 @@
           </p:nvSpPr>
           <p:spPr>
             <a:xfrm>
-              <a:off x="2659234" y="1276351"/>
+              <a:off x="2658334" y="1276351"/>
               <a:ext cx="25420" cy="82021"/>
             </a:xfrm>
             <a:prstGeom prst="rect">
@@ -27596,7 +27596,7 @@
           </p:nvSpPr>
           <p:spPr>
             <a:xfrm>
-              <a:off x="2696958" y="1276351"/>
+              <a:off x="2696057" y="1276351"/>
               <a:ext cx="63550" cy="82021"/>
             </a:xfrm>
             <a:prstGeom prst="rect">
@@ -27642,7 +27642,7 @@
           </p:nvSpPr>
           <p:spPr>
             <a:xfrm>
-              <a:off x="2769739" y="1276351"/>
+              <a:off x="2768839" y="1276351"/>
               <a:ext cx="63550" cy="82021"/>
             </a:xfrm>
             <a:prstGeom prst="rect">
@@ -27688,7 +27688,7 @@
           </p:nvSpPr>
           <p:spPr>
             <a:xfrm>
-              <a:off x="2842480" y="1276351"/>
+              <a:off x="2841579" y="1276351"/>
               <a:ext cx="63550" cy="82021"/>
             </a:xfrm>
             <a:prstGeom prst="rect">
@@ -27734,7 +27734,7 @@
           </p:nvSpPr>
           <p:spPr>
             <a:xfrm>
-              <a:off x="2915193" y="1276351"/>
+              <a:off x="2914292" y="1276351"/>
               <a:ext cx="416143" cy="82021"/>
             </a:xfrm>
             <a:prstGeom prst="rect">
@@ -27780,7 +27780,7 @@
           </p:nvSpPr>
           <p:spPr>
             <a:xfrm>
-              <a:off x="3331336" y="1276351"/>
+              <a:off x="3330436" y="1276351"/>
               <a:ext cx="63459" cy="82021"/>
             </a:xfrm>
             <a:prstGeom prst="rect">
@@ -27826,7 +27826,7 @@
           </p:nvSpPr>
           <p:spPr>
             <a:xfrm>
-              <a:off x="3394796" y="1276351"/>
+              <a:off x="3393895" y="1276351"/>
               <a:ext cx="63550" cy="82021"/>
             </a:xfrm>
             <a:prstGeom prst="rect">
@@ -27872,7 +27872,7 @@
           </p:nvSpPr>
           <p:spPr>
             <a:xfrm>
-              <a:off x="3467536" y="1276351"/>
+              <a:off x="3466636" y="1276351"/>
               <a:ext cx="416143" cy="82021"/>
             </a:xfrm>
             <a:prstGeom prst="rect">
@@ -27918,7 +27918,7 @@
           </p:nvSpPr>
           <p:spPr>
             <a:xfrm>
-              <a:off x="1779412" y="1596063"/>
+              <a:off x="1778512" y="1596063"/>
               <a:ext cx="120700" cy="82021"/>
             </a:xfrm>
             <a:prstGeom prst="rect">
@@ -27964,7 +27964,7 @@
           </p:nvSpPr>
           <p:spPr>
             <a:xfrm>
-              <a:off x="3309529" y="1535842"/>
+              <a:off x="3309209" y="1535842"/>
               <a:ext cx="133319" cy="82021"/>
             </a:xfrm>
             <a:prstGeom prst="rect">
@@ -28010,7 +28010,7 @@
           </p:nvSpPr>
           <p:spPr>
             <a:xfrm>
-              <a:off x="4845955" y="1638956"/>
+              <a:off x="4846216" y="1638956"/>
               <a:ext cx="133319" cy="82021"/>
             </a:xfrm>
             <a:prstGeom prst="rect">
@@ -28056,7 +28056,7 @@
           </p:nvSpPr>
           <p:spPr>
             <a:xfrm>
-              <a:off x="6426822" y="1575095"/>
+              <a:off x="6427662" y="1575095"/>
               <a:ext cx="44439" cy="82021"/>
             </a:xfrm>
             <a:prstGeom prst="rect">
@@ -28139,7 +28139,7 @@
                 </a:path>
               </a:pathLst>
             </a:custGeom>
-            <a:ln w="21681" cap="flat">
+            <a:ln w="11086" cap="flat">
               <a:solidFill>
                 <a:srgbClr val="000000">
                   <a:alpha val="100000"/>
@@ -28455,9 +28455,9 @@
                 </a:path>
               </a:pathLst>
             </a:custGeom>
-            <a:ln w="21681" cap="flat">
+            <a:ln w="11086" cap="flat">
               <a:solidFill>
-                <a:srgbClr val="000000">
+                <a:srgbClr val="333333">
                   <a:alpha val="100000"/>
                 </a:srgbClr>
               </a:solidFill>
@@ -28495,9 +28495,9 @@
                 </a:path>
               </a:pathLst>
             </a:custGeom>
-            <a:ln w="21681" cap="flat">
+            <a:ln w="11086" cap="flat">
               <a:solidFill>
-                <a:srgbClr val="000000">
+                <a:srgbClr val="333333">
                   <a:alpha val="100000"/>
                 </a:srgbClr>
               </a:solidFill>
@@ -28535,9 +28535,9 @@
                 </a:path>
               </a:pathLst>
             </a:custGeom>
-            <a:ln w="21681" cap="flat">
+            <a:ln w="11086" cap="flat">
               <a:solidFill>
-                <a:srgbClr val="000000">
+                <a:srgbClr val="333333">
                   <a:alpha val="100000"/>
                 </a:srgbClr>
               </a:solidFill>
@@ -28575,9 +28575,9 @@
                 </a:path>
               </a:pathLst>
             </a:custGeom>
-            <a:ln w="21681" cap="flat">
+            <a:ln w="11086" cap="flat">
               <a:solidFill>
-                <a:srgbClr val="000000">
+                <a:srgbClr val="333333">
                   <a:alpha val="100000"/>
                 </a:srgbClr>
               </a:solidFill>
@@ -28615,9 +28615,9 @@
                 </a:path>
               </a:pathLst>
             </a:custGeom>
-            <a:ln w="21681" cap="flat">
+            <a:ln w="11086" cap="flat">
               <a:solidFill>
-                <a:srgbClr val="000000">
+                <a:srgbClr val="333333">
                   <a:alpha val="100000"/>
                 </a:srgbClr>
               </a:solidFill>
@@ -28655,9 +28655,9 @@
                 </a:path>
               </a:pathLst>
             </a:custGeom>
-            <a:ln w="21681" cap="flat">
+            <a:ln w="11086" cap="flat">
               <a:solidFill>
-                <a:srgbClr val="000000">
+                <a:srgbClr val="333333">
                   <a:alpha val="100000"/>
                 </a:srgbClr>
               </a:solidFill>
@@ -28695,7 +28695,7 @@
                 </a:path>
               </a:pathLst>
             </a:custGeom>
-            <a:ln w="21681" cap="flat">
+            <a:ln w="11086" cap="flat">
               <a:solidFill>
                 <a:srgbClr val="000000">
                   <a:alpha val="100000"/>
@@ -28719,7 +28719,7 @@
           </p:nvSpPr>
           <p:spPr>
             <a:xfrm>
-              <a:off x="1839762" y="4248157"/>
+              <a:off x="1838862" y="4248157"/>
               <a:ext cx="0" cy="28468"/>
             </a:xfrm>
             <a:custGeom>
@@ -28735,9 +28735,9 @@
                 </a:path>
               </a:pathLst>
             </a:custGeom>
-            <a:ln w="21681" cap="flat">
+            <a:ln w="11086" cap="flat">
               <a:solidFill>
-                <a:srgbClr val="000000">
+                <a:srgbClr val="333333">
                   <a:alpha val="100000"/>
                 </a:srgbClr>
               </a:solidFill>
@@ -28759,7 +28759,7 @@
           </p:nvSpPr>
           <p:spPr>
             <a:xfrm>
-              <a:off x="3376189" y="4248157"/>
+              <a:off x="3375869" y="4248157"/>
               <a:ext cx="0" cy="28468"/>
             </a:xfrm>
             <a:custGeom>
@@ -28775,9 +28775,9 @@
                 </a:path>
               </a:pathLst>
             </a:custGeom>
-            <a:ln w="21681" cap="flat">
+            <a:ln w="11086" cap="flat">
               <a:solidFill>
-                <a:srgbClr val="000000">
+                <a:srgbClr val="333333">
                   <a:alpha val="100000"/>
                 </a:srgbClr>
               </a:solidFill>
@@ -28799,7 +28799,7 @@
           </p:nvSpPr>
           <p:spPr>
             <a:xfrm>
-              <a:off x="4912615" y="4248157"/>
+              <a:off x="4912876" y="4248157"/>
               <a:ext cx="0" cy="28468"/>
             </a:xfrm>
             <a:custGeom>
@@ -28815,9 +28815,9 @@
                 </a:path>
               </a:pathLst>
             </a:custGeom>
-            <a:ln w="21681" cap="flat">
+            <a:ln w="11086" cap="flat">
               <a:solidFill>
-                <a:srgbClr val="000000">
+                <a:srgbClr val="333333">
                   <a:alpha val="100000"/>
                 </a:srgbClr>
               </a:solidFill>
@@ -28839,7 +28839,7 @@
           </p:nvSpPr>
           <p:spPr>
             <a:xfrm>
-              <a:off x="6449042" y="4248157"/>
+              <a:off x="6449882" y="4248157"/>
               <a:ext cx="0" cy="28468"/>
             </a:xfrm>
             <a:custGeom>
@@ -28855,9 +28855,9 @@
                 </a:path>
               </a:pathLst>
             </a:custGeom>
-            <a:ln w="21681" cap="flat">
+            <a:ln w="11086" cap="flat">
               <a:solidFill>
-                <a:srgbClr val="000000">
+                <a:srgbClr val="333333">
                   <a:alpha val="100000"/>
                 </a:srgbClr>
               </a:solidFill>
@@ -28879,7 +28879,7 @@
           </p:nvSpPr>
           <p:spPr>
             <a:xfrm>
-              <a:off x="1811507" y="4299400"/>
+              <a:off x="1810607" y="4299400"/>
               <a:ext cx="56509" cy="72877"/>
             </a:xfrm>
             <a:prstGeom prst="rect">
@@ -28925,7 +28925,7 @@
           </p:nvSpPr>
           <p:spPr>
             <a:xfrm>
-              <a:off x="3347934" y="4299400"/>
+              <a:off x="3347614" y="4299400"/>
               <a:ext cx="56509" cy="72877"/>
             </a:xfrm>
             <a:prstGeom prst="rect">
@@ -28971,7 +28971,7 @@
           </p:nvSpPr>
           <p:spPr>
             <a:xfrm>
-              <a:off x="4884360" y="4299400"/>
+              <a:off x="4884621" y="4299400"/>
               <a:ext cx="56509" cy="72877"/>
             </a:xfrm>
             <a:prstGeom prst="rect">
@@ -29017,7 +29017,7 @@
           </p:nvSpPr>
           <p:spPr>
             <a:xfrm>
-              <a:off x="6420787" y="4299400"/>
+              <a:off x="6421627" y="4299400"/>
               <a:ext cx="56509" cy="72877"/>
             </a:xfrm>
             <a:prstGeom prst="rect">

--- a/figures/Figure_3.pptx
+++ b/figures/Figure_3.pptx
@@ -2350,7 +2350,7 @@
           </p:nvSpPr>
           <p:spPr>
             <a:xfrm>
-              <a:off x="1681086" y="1928001"/>
+              <a:off x="1665809" y="1928001"/>
               <a:ext cx="61566" cy="61566"/>
             </a:xfrm>
             <a:prstGeom prst="ellipse">
@@ -2376,7 +2376,7 @@
           </p:nvSpPr>
           <p:spPr>
             <a:xfrm>
-              <a:off x="1911770" y="3030242"/>
+              <a:off x="1868759" y="3030242"/>
               <a:ext cx="61566" cy="61566"/>
             </a:xfrm>
             <a:prstGeom prst="ellipse">
@@ -2402,7 +2402,7 @@
           </p:nvSpPr>
           <p:spPr>
             <a:xfrm>
-              <a:off x="1694874" y="3203890"/>
+              <a:off x="1658143" y="3203890"/>
               <a:ext cx="61566" cy="61566"/>
             </a:xfrm>
             <a:prstGeom prst="ellipse">
@@ -2428,7 +2428,7 @@
           </p:nvSpPr>
           <p:spPr>
             <a:xfrm>
-              <a:off x="1971557" y="2989527"/>
+              <a:off x="1901496" y="2989527"/>
               <a:ext cx="61566" cy="61566"/>
             </a:xfrm>
             <a:prstGeom prst="ellipse">
@@ -2454,7 +2454,7 @@
           </p:nvSpPr>
           <p:spPr>
             <a:xfrm>
-              <a:off x="1654790" y="2528492"/>
+              <a:off x="1674131" y="2528492"/>
               <a:ext cx="61566" cy="61566"/>
             </a:xfrm>
             <a:prstGeom prst="ellipse">
@@ -2480,7 +2480,7 @@
           </p:nvSpPr>
           <p:spPr>
             <a:xfrm>
-              <a:off x="1885787" y="3084677"/>
+              <a:off x="1974955" y="3084677"/>
               <a:ext cx="61566" cy="61566"/>
             </a:xfrm>
             <a:prstGeom prst="ellipse">
@@ -2506,7 +2506,7 @@
           </p:nvSpPr>
           <p:spPr>
             <a:xfrm>
-              <a:off x="1709676" y="3393672"/>
+              <a:off x="1712547" y="3393672"/>
               <a:ext cx="61566" cy="61566"/>
             </a:xfrm>
             <a:prstGeom prst="ellipse">
@@ -2532,7 +2532,7 @@
           </p:nvSpPr>
           <p:spPr>
             <a:xfrm>
-              <a:off x="1937185" y="3281004"/>
+              <a:off x="1909135" y="3281004"/>
               <a:ext cx="61566" cy="61566"/>
             </a:xfrm>
             <a:prstGeom prst="ellipse">
@@ -2558,7 +2558,7 @@
           </p:nvSpPr>
           <p:spPr>
             <a:xfrm>
-              <a:off x="1710440" y="3175782"/>
+              <a:off x="1702854" y="3175782"/>
               <a:ext cx="61566" cy="61566"/>
             </a:xfrm>
             <a:prstGeom prst="ellipse">
@@ -2584,7 +2584,7 @@
           </p:nvSpPr>
           <p:spPr>
             <a:xfrm>
-              <a:off x="1890578" y="3259818"/>
+              <a:off x="1886826" y="3259818"/>
               <a:ext cx="61566" cy="61566"/>
             </a:xfrm>
             <a:prstGeom prst="ellipse">
@@ -2610,7 +2610,7 @@
           </p:nvSpPr>
           <p:spPr>
             <a:xfrm>
-              <a:off x="1669736" y="3565560"/>
+              <a:off x="1739981" y="3565560"/>
               <a:ext cx="61566" cy="61566"/>
             </a:xfrm>
             <a:prstGeom prst="ellipse">
@@ -2636,7 +2636,7 @@
           </p:nvSpPr>
           <p:spPr>
             <a:xfrm>
-              <a:off x="1878533" y="3561784"/>
+              <a:off x="1965072" y="3561784"/>
               <a:ext cx="61566" cy="61566"/>
             </a:xfrm>
             <a:prstGeom prst="ellipse">
@@ -2662,7 +2662,7 @@
           </p:nvSpPr>
           <p:spPr>
             <a:xfrm>
-              <a:off x="1743926" y="3270236"/>
+              <a:off x="1680737" y="3270236"/>
               <a:ext cx="61566" cy="61566"/>
             </a:xfrm>
             <a:prstGeom prst="ellipse">
@@ -2688,7 +2688,7 @@
           </p:nvSpPr>
           <p:spPr>
             <a:xfrm>
-              <a:off x="1912020" y="3333974"/>
+              <a:off x="1870230" y="3333974"/>
               <a:ext cx="61566" cy="61566"/>
             </a:xfrm>
             <a:prstGeom prst="ellipse">
@@ -2714,7 +2714,7 @@
           </p:nvSpPr>
           <p:spPr>
             <a:xfrm>
-              <a:off x="1744745" y="3354470"/>
+              <a:off x="1732302" y="3354470"/>
               <a:ext cx="61566" cy="61566"/>
             </a:xfrm>
             <a:prstGeom prst="ellipse">
@@ -2740,7 +2740,7 @@
           </p:nvSpPr>
           <p:spPr>
             <a:xfrm>
-              <a:off x="1893897" y="3470218"/>
+              <a:off x="1943037" y="3470218"/>
               <a:ext cx="61566" cy="61566"/>
             </a:xfrm>
             <a:prstGeom prst="ellipse">
@@ -2766,7 +2766,7 @@
           </p:nvSpPr>
           <p:spPr>
             <a:xfrm>
-              <a:off x="1651923" y="3295218"/>
+              <a:off x="1734193" y="3295218"/>
               <a:ext cx="61566" cy="61566"/>
             </a:xfrm>
             <a:prstGeom prst="ellipse">
@@ -2792,7 +2792,7 @@
           </p:nvSpPr>
           <p:spPr>
             <a:xfrm>
-              <a:off x="1948751" y="3160193"/>
+              <a:off x="1895722" y="3160193"/>
               <a:ext cx="61566" cy="61566"/>
             </a:xfrm>
             <a:prstGeom prst="ellipse">
@@ -2818,7 +2818,7 @@
           </p:nvSpPr>
           <p:spPr>
             <a:xfrm>
-              <a:off x="1706585" y="2652943"/>
+              <a:off x="1745748" y="2652943"/>
               <a:ext cx="61566" cy="61566"/>
             </a:xfrm>
             <a:prstGeom prst="ellipse">
@@ -2844,7 +2844,7 @@
           </p:nvSpPr>
           <p:spPr>
             <a:xfrm>
-              <a:off x="1914058" y="2665383"/>
+              <a:off x="1915499" y="2665383"/>
               <a:ext cx="61566" cy="61566"/>
             </a:xfrm>
             <a:prstGeom prst="ellipse">
@@ -2870,7 +2870,7 @@
           </p:nvSpPr>
           <p:spPr>
             <a:xfrm>
-              <a:off x="1643525" y="3284169"/>
+              <a:off x="1742376" y="3284169"/>
               <a:ext cx="61566" cy="61566"/>
             </a:xfrm>
             <a:prstGeom prst="ellipse">
@@ -2896,7 +2896,7 @@
           </p:nvSpPr>
           <p:spPr>
             <a:xfrm>
-              <a:off x="1957278" y="3261400"/>
+              <a:off x="1897610" y="3261400"/>
               <a:ext cx="61566" cy="61566"/>
             </a:xfrm>
             <a:prstGeom prst="ellipse">
@@ -2922,7 +2922,7 @@
           </p:nvSpPr>
           <p:spPr>
             <a:xfrm>
-              <a:off x="1664542" y="3089617"/>
+              <a:off x="1682447" y="3089617"/>
               <a:ext cx="61566" cy="61566"/>
             </a:xfrm>
             <a:prstGeom prst="ellipse">
@@ -2948,7 +2948,7 @@
           </p:nvSpPr>
           <p:spPr>
             <a:xfrm>
-              <a:off x="1901580" y="3256684"/>
+              <a:off x="1940240" y="3256684"/>
               <a:ext cx="61566" cy="61566"/>
             </a:xfrm>
             <a:prstGeom prst="ellipse">
@@ -2974,7 +2974,7 @@
           </p:nvSpPr>
           <p:spPr>
             <a:xfrm>
-              <a:off x="1658257" y="2961694"/>
+              <a:off x="1676572" y="2961694"/>
               <a:ext cx="61566" cy="61566"/>
             </a:xfrm>
             <a:prstGeom prst="ellipse">
@@ -3000,7 +3000,7 @@
           </p:nvSpPr>
           <p:spPr>
             <a:xfrm>
-              <a:off x="1931421" y="3431528"/>
+              <a:off x="1975128" y="3431528"/>
               <a:ext cx="61566" cy="61566"/>
             </a:xfrm>
             <a:prstGeom prst="ellipse">
@@ -3026,7 +3026,7 @@
           </p:nvSpPr>
           <p:spPr>
             <a:xfrm>
-              <a:off x="1701447" y="3352176"/>
+              <a:off x="1733936" y="3352176"/>
               <a:ext cx="61566" cy="61566"/>
             </a:xfrm>
             <a:prstGeom prst="ellipse">
@@ -3052,7 +3052,7 @@
           </p:nvSpPr>
           <p:spPr>
             <a:xfrm>
-              <a:off x="1868770" y="3206320"/>
+              <a:off x="1900986" y="3206320"/>
               <a:ext cx="61566" cy="61566"/>
             </a:xfrm>
             <a:prstGeom prst="ellipse">
@@ -3078,7 +3078,7 @@
           </p:nvSpPr>
           <p:spPr>
             <a:xfrm>
-              <a:off x="1700211" y="2911788"/>
+              <a:off x="1705072" y="2911788"/>
               <a:ext cx="61566" cy="61566"/>
             </a:xfrm>
             <a:prstGeom prst="ellipse">
@@ -3104,7 +3104,7 @@
           </p:nvSpPr>
           <p:spPr>
             <a:xfrm>
-              <a:off x="1885278" y="3571764"/>
+              <a:off x="1975696" y="3571764"/>
               <a:ext cx="61566" cy="61566"/>
             </a:xfrm>
             <a:prstGeom prst="ellipse">
@@ -3130,7 +3130,7 @@
           </p:nvSpPr>
           <p:spPr>
             <a:xfrm>
-              <a:off x="1683002" y="3150847"/>
+              <a:off x="1723047" y="3150847"/>
               <a:ext cx="61566" cy="61566"/>
             </a:xfrm>
             <a:prstGeom prst="ellipse">
@@ -3156,7 +3156,7 @@
           </p:nvSpPr>
           <p:spPr>
             <a:xfrm>
-              <a:off x="1918377" y="3155982"/>
+              <a:off x="1905419" y="3155982"/>
               <a:ext cx="61566" cy="61566"/>
             </a:xfrm>
             <a:prstGeom prst="ellipse">
@@ -3182,7 +3182,7 @@
           </p:nvSpPr>
           <p:spPr>
             <a:xfrm>
-              <a:off x="1644245" y="3364376"/>
+              <a:off x="1696589" y="3364376"/>
               <a:ext cx="61566" cy="61566"/>
             </a:xfrm>
             <a:prstGeom prst="ellipse">
@@ -3208,7 +3208,7 @@
           </p:nvSpPr>
           <p:spPr>
             <a:xfrm>
-              <a:off x="1870673" y="3291139"/>
+              <a:off x="1941877" y="3291139"/>
               <a:ext cx="61566" cy="61566"/>
             </a:xfrm>
             <a:prstGeom prst="ellipse">
@@ -3234,7 +3234,7 @@
           </p:nvSpPr>
           <p:spPr>
             <a:xfrm>
-              <a:off x="1684524" y="3197114"/>
+              <a:off x="1652641" y="3197114"/>
               <a:ext cx="61566" cy="61566"/>
             </a:xfrm>
             <a:prstGeom prst="ellipse">
@@ -3260,7 +3260,7 @@
           </p:nvSpPr>
           <p:spPr>
             <a:xfrm>
-              <a:off x="1885491" y="3296559"/>
+              <a:off x="1968604" y="3296559"/>
               <a:ext cx="61566" cy="61566"/>
             </a:xfrm>
             <a:prstGeom prst="ellipse">
@@ -3286,7 +3286,7 @@
           </p:nvSpPr>
           <p:spPr>
             <a:xfrm>
-              <a:off x="1707709" y="3323350"/>
+              <a:off x="1740624" y="3323350"/>
               <a:ext cx="61566" cy="61566"/>
             </a:xfrm>
             <a:prstGeom prst="ellipse">
@@ -3312,7 +3312,7 @@
           </p:nvSpPr>
           <p:spPr>
             <a:xfrm>
-              <a:off x="1876490" y="3358024"/>
+              <a:off x="1887627" y="3358024"/>
               <a:ext cx="61566" cy="61566"/>
             </a:xfrm>
             <a:prstGeom prst="ellipse">
@@ -3338,7 +3338,7 @@
           </p:nvSpPr>
           <p:spPr>
             <a:xfrm>
-              <a:off x="1724998" y="3667972"/>
+              <a:off x="1725313" y="3667972"/>
               <a:ext cx="61566" cy="61566"/>
             </a:xfrm>
             <a:prstGeom prst="ellipse">
@@ -3364,7 +3364,7 @@
           </p:nvSpPr>
           <p:spPr>
             <a:xfrm>
-              <a:off x="1937796" y="3473714"/>
+              <a:off x="1922863" y="3473714"/>
               <a:ext cx="61566" cy="61566"/>
             </a:xfrm>
             <a:prstGeom prst="ellipse">
@@ -3390,7 +3390,7 @@
           </p:nvSpPr>
           <p:spPr>
             <a:xfrm>
-              <a:off x="1716971" y="2976365"/>
+              <a:off x="1649554" y="2976365"/>
               <a:ext cx="61566" cy="61566"/>
             </a:xfrm>
             <a:prstGeom prst="ellipse">
@@ -3416,7 +3416,7 @@
           </p:nvSpPr>
           <p:spPr>
             <a:xfrm>
-              <a:off x="1942938" y="3129920"/>
+              <a:off x="1949708" y="3129920"/>
               <a:ext cx="61566" cy="61566"/>
             </a:xfrm>
             <a:prstGeom prst="ellipse">
@@ -3442,7 +3442,7 @@
           </p:nvSpPr>
           <p:spPr>
             <a:xfrm>
-              <a:off x="1686806" y="3246370"/>
+              <a:off x="1715308" y="3246370"/>
               <a:ext cx="61566" cy="61566"/>
             </a:xfrm>
             <a:prstGeom prst="ellipse">
@@ -3468,7 +3468,7 @@
           </p:nvSpPr>
           <p:spPr>
             <a:xfrm>
-              <a:off x="1916639" y="3069119"/>
+              <a:off x="1887724" y="3069119"/>
               <a:ext cx="61566" cy="61566"/>
             </a:xfrm>
             <a:prstGeom prst="ellipse">
@@ -3494,7 +3494,7 @@
           </p:nvSpPr>
           <p:spPr>
             <a:xfrm>
-              <a:off x="1655174" y="3320621"/>
+              <a:off x="1720512" y="3320621"/>
               <a:ext cx="61566" cy="61566"/>
             </a:xfrm>
             <a:prstGeom prst="ellipse">
@@ -3520,7 +3520,7 @@
           </p:nvSpPr>
           <p:spPr>
             <a:xfrm>
-              <a:off x="1886894" y="3347677"/>
+              <a:off x="1865080" y="3347677"/>
               <a:ext cx="61566" cy="61566"/>
             </a:xfrm>
             <a:prstGeom prst="ellipse">
@@ -3546,7 +3546,7 @@
           </p:nvSpPr>
           <p:spPr>
             <a:xfrm>
-              <a:off x="1678866" y="2931812"/>
+              <a:off x="1645348" y="2931812"/>
               <a:ext cx="61566" cy="61566"/>
             </a:xfrm>
             <a:prstGeom prst="ellipse">
@@ -3572,7 +3572,7 @@
           </p:nvSpPr>
           <p:spPr>
             <a:xfrm>
-              <a:off x="1930033" y="3621630"/>
+              <a:off x="1948254" y="3621630"/>
               <a:ext cx="61566" cy="61566"/>
             </a:xfrm>
             <a:prstGeom prst="ellipse">
@@ -3598,7 +3598,7 @@
           </p:nvSpPr>
           <p:spPr>
             <a:xfrm>
-              <a:off x="1738182" y="3228781"/>
+              <a:off x="1724544" y="3228781"/>
               <a:ext cx="61566" cy="61566"/>
             </a:xfrm>
             <a:prstGeom prst="ellipse">
@@ -3624,7 +3624,7 @@
           </p:nvSpPr>
           <p:spPr>
             <a:xfrm>
-              <a:off x="1964063" y="3165055"/>
+              <a:off x="1908359" y="3165055"/>
               <a:ext cx="61566" cy="61566"/>
             </a:xfrm>
             <a:prstGeom prst="ellipse">
@@ -3650,7 +3650,7 @@
           </p:nvSpPr>
           <p:spPr>
             <a:xfrm>
-              <a:off x="1679305" y="3609723"/>
+              <a:off x="1660824" y="3609723"/>
               <a:ext cx="61566" cy="61566"/>
             </a:xfrm>
             <a:prstGeom prst="ellipse">
@@ -3676,7 +3676,7 @@
           </p:nvSpPr>
           <p:spPr>
             <a:xfrm>
-              <a:off x="1889182" y="3284277"/>
+              <a:off x="1876881" y="3284277"/>
               <a:ext cx="61566" cy="61566"/>
             </a:xfrm>
             <a:prstGeom prst="ellipse">
@@ -3702,7 +3702,7 @@
           </p:nvSpPr>
           <p:spPr>
             <a:xfrm>
-              <a:off x="1719876" y="3193023"/>
+              <a:off x="1752502" y="3193023"/>
               <a:ext cx="61566" cy="61566"/>
             </a:xfrm>
             <a:prstGeom prst="ellipse">
@@ -3728,7 +3728,7 @@
           </p:nvSpPr>
           <p:spPr>
             <a:xfrm>
-              <a:off x="1934301" y="3089478"/>
+              <a:off x="1887249" y="3089478"/>
               <a:ext cx="61566" cy="61566"/>
             </a:xfrm>
             <a:prstGeom prst="ellipse">
@@ -3754,7 +3754,7 @@
           </p:nvSpPr>
           <p:spPr>
             <a:xfrm>
-              <a:off x="1711782" y="2810983"/>
+              <a:off x="1689250" y="2810983"/>
               <a:ext cx="61566" cy="61566"/>
             </a:xfrm>
             <a:prstGeom prst="ellipse">
@@ -3780,7 +3780,7 @@
           </p:nvSpPr>
           <p:spPr>
             <a:xfrm>
-              <a:off x="1953145" y="2762566"/>
+              <a:off x="1921266" y="2762566"/>
               <a:ext cx="61566" cy="61566"/>
             </a:xfrm>
             <a:prstGeom prst="ellipse">
@@ -3806,7 +3806,7 @@
           </p:nvSpPr>
           <p:spPr>
             <a:xfrm>
-              <a:off x="1675894" y="4054658"/>
+              <a:off x="1644831" y="4054658"/>
               <a:ext cx="61566" cy="61566"/>
             </a:xfrm>
             <a:prstGeom prst="ellipse">
@@ -3832,7 +3832,7 @@
           </p:nvSpPr>
           <p:spPr>
             <a:xfrm>
-              <a:off x="1936461" y="3340880"/>
+              <a:off x="1881489" y="3340880"/>
               <a:ext cx="61566" cy="61566"/>
             </a:xfrm>
             <a:prstGeom prst="ellipse">
@@ -3858,7 +3858,7 @@
           </p:nvSpPr>
           <p:spPr>
             <a:xfrm>
-              <a:off x="1693348" y="3038834"/>
+              <a:off x="1717850" y="3038834"/>
               <a:ext cx="61566" cy="61566"/>
             </a:xfrm>
             <a:prstGeom prst="ellipse">
@@ -3884,7 +3884,7 @@
           </p:nvSpPr>
           <p:spPr>
             <a:xfrm>
-              <a:off x="1914079" y="2856434"/>
+              <a:off x="1917299" y="2856434"/>
               <a:ext cx="61566" cy="61566"/>
             </a:xfrm>
             <a:prstGeom prst="ellipse">
@@ -3910,7 +3910,7 @@
           </p:nvSpPr>
           <p:spPr>
             <a:xfrm>
-              <a:off x="1738898" y="3125300"/>
+              <a:off x="1652847" y="3125300"/>
               <a:ext cx="61566" cy="61566"/>
             </a:xfrm>
             <a:prstGeom prst="ellipse">
@@ -3936,7 +3936,7 @@
           </p:nvSpPr>
           <p:spPr>
             <a:xfrm>
-              <a:off x="1886576" y="3086839"/>
+              <a:off x="1884647" y="3086839"/>
               <a:ext cx="61566" cy="61566"/>
             </a:xfrm>
             <a:prstGeom prst="ellipse">
@@ -3962,7 +3962,7 @@
           </p:nvSpPr>
           <p:spPr>
             <a:xfrm>
-              <a:off x="1730912" y="3372136"/>
+              <a:off x="1693053" y="3372136"/>
               <a:ext cx="61566" cy="61566"/>
             </a:xfrm>
             <a:prstGeom prst="ellipse">
@@ -3988,7 +3988,7 @@
           </p:nvSpPr>
           <p:spPr>
             <a:xfrm>
-              <a:off x="1969908" y="3577512"/>
+              <a:off x="1867138" y="3577512"/>
               <a:ext cx="61566" cy="61566"/>
             </a:xfrm>
             <a:prstGeom prst="ellipse">
@@ -4014,7 +4014,7 @@
           </p:nvSpPr>
           <p:spPr>
             <a:xfrm>
-              <a:off x="1737597" y="2892184"/>
+              <a:off x="1733893" y="2892184"/>
               <a:ext cx="61566" cy="61566"/>
             </a:xfrm>
             <a:prstGeom prst="ellipse">
@@ -4040,7 +4040,7 @@
           </p:nvSpPr>
           <p:spPr>
             <a:xfrm>
-              <a:off x="1926113" y="2995154"/>
+              <a:off x="1865023" y="2995154"/>
               <a:ext cx="61566" cy="61566"/>
             </a:xfrm>
             <a:prstGeom prst="ellipse">
@@ -4066,7 +4066,7 @@
           </p:nvSpPr>
           <p:spPr>
             <a:xfrm>
-              <a:off x="1698472" y="2633231"/>
+              <a:off x="1684455" y="2633231"/>
               <a:ext cx="61566" cy="61566"/>
             </a:xfrm>
             <a:prstGeom prst="ellipse">
@@ -4092,7 +4092,7 @@
           </p:nvSpPr>
           <p:spPr>
             <a:xfrm>
-              <a:off x="1934135" y="2520878"/>
+              <a:off x="1888166" y="2520878"/>
               <a:ext cx="61566" cy="61566"/>
             </a:xfrm>
             <a:prstGeom prst="ellipse">
@@ -4118,7 +4118,7 @@
           </p:nvSpPr>
           <p:spPr>
             <a:xfrm>
-              <a:off x="1712428" y="2947451"/>
+              <a:off x="1654593" y="2947451"/>
               <a:ext cx="61566" cy="61566"/>
             </a:xfrm>
             <a:prstGeom prst="ellipse">
@@ -4144,7 +4144,7 @@
           </p:nvSpPr>
           <p:spPr>
             <a:xfrm>
-              <a:off x="1906190" y="2681214"/>
+              <a:off x="1968193" y="2681214"/>
               <a:ext cx="61566" cy="61566"/>
             </a:xfrm>
             <a:prstGeom prst="ellipse">
@@ -4170,7 +4170,7 @@
           </p:nvSpPr>
           <p:spPr>
             <a:xfrm>
-              <a:off x="1654280" y="3403037"/>
+              <a:off x="1737957" y="3403037"/>
               <a:ext cx="61566" cy="61566"/>
             </a:xfrm>
             <a:prstGeom prst="ellipse">
@@ -4196,7 +4196,7 @@
           </p:nvSpPr>
           <p:spPr>
             <a:xfrm>
-              <a:off x="1870584" y="3235366"/>
+              <a:off x="1937604" y="3235366"/>
               <a:ext cx="61566" cy="61566"/>
             </a:xfrm>
             <a:prstGeom prst="ellipse">
@@ -4222,7 +4222,7 @@
           </p:nvSpPr>
           <p:spPr>
             <a:xfrm>
-              <a:off x="1697220" y="3347207"/>
+              <a:off x="1663643" y="3347207"/>
               <a:ext cx="61566" cy="61566"/>
             </a:xfrm>
             <a:prstGeom prst="ellipse">
@@ -4248,7 +4248,7 @@
           </p:nvSpPr>
           <p:spPr>
             <a:xfrm>
-              <a:off x="1926882" y="3443421"/>
+              <a:off x="1886227" y="3443421"/>
               <a:ext cx="61566" cy="61566"/>
             </a:xfrm>
             <a:prstGeom prst="ellipse">
@@ -4274,7 +4274,7 @@
           </p:nvSpPr>
           <p:spPr>
             <a:xfrm>
-              <a:off x="1676023" y="2974843"/>
+              <a:off x="1748761" y="2974843"/>
               <a:ext cx="61566" cy="61566"/>
             </a:xfrm>
             <a:prstGeom prst="ellipse">
@@ -4300,7 +4300,7 @@
           </p:nvSpPr>
           <p:spPr>
             <a:xfrm>
-              <a:off x="1909743" y="3056370"/>
+              <a:off x="1919306" y="3056370"/>
               <a:ext cx="61566" cy="61566"/>
             </a:xfrm>
             <a:prstGeom prst="ellipse">
@@ -4326,7 +4326,7 @@
           </p:nvSpPr>
           <p:spPr>
             <a:xfrm>
-              <a:off x="1695224" y="2892603"/>
+              <a:off x="1667329" y="2892603"/>
               <a:ext cx="61566" cy="61566"/>
             </a:xfrm>
             <a:prstGeom prst="ellipse">
@@ -4352,7 +4352,7 @@
           </p:nvSpPr>
           <p:spPr>
             <a:xfrm>
-              <a:off x="1968700" y="2612066"/>
+              <a:off x="1897383" y="2612066"/>
               <a:ext cx="61566" cy="61566"/>
             </a:xfrm>
             <a:prstGeom prst="ellipse">
@@ -4378,7 +4378,7 @@
           </p:nvSpPr>
           <p:spPr>
             <a:xfrm>
-              <a:off x="1657744" y="3377218"/>
+              <a:off x="1740981" y="3377218"/>
               <a:ext cx="61566" cy="61566"/>
             </a:xfrm>
             <a:prstGeom prst="ellipse">
@@ -4404,7 +4404,7 @@
           </p:nvSpPr>
           <p:spPr>
             <a:xfrm>
-              <a:off x="1924084" y="3173833"/>
+              <a:off x="1917850" y="3173833"/>
               <a:ext cx="61566" cy="61566"/>
             </a:xfrm>
             <a:prstGeom prst="ellipse">
@@ -4430,7 +4430,7 @@
           </p:nvSpPr>
           <p:spPr>
             <a:xfrm>
-              <a:off x="1732938" y="2972978"/>
+              <a:off x="1687290" y="2972978"/>
               <a:ext cx="61566" cy="61566"/>
             </a:xfrm>
             <a:prstGeom prst="ellipse">
@@ -4456,7 +4456,7 @@
           </p:nvSpPr>
           <p:spPr>
             <a:xfrm>
-              <a:off x="1952009" y="3077098"/>
+              <a:off x="1894352" y="3077098"/>
               <a:ext cx="61566" cy="61566"/>
             </a:xfrm>
             <a:prstGeom prst="ellipse">
@@ -4482,7 +4482,7 @@
           </p:nvSpPr>
           <p:spPr>
             <a:xfrm>
-              <a:off x="1749241" y="3391274"/>
+              <a:off x="1713583" y="3391274"/>
               <a:ext cx="61566" cy="61566"/>
             </a:xfrm>
             <a:prstGeom prst="ellipse">
@@ -4508,7 +4508,7 @@
           </p:nvSpPr>
           <p:spPr>
             <a:xfrm>
-              <a:off x="1866161" y="2548268"/>
+              <a:off x="1889161" y="2548268"/>
               <a:ext cx="61566" cy="61566"/>
             </a:xfrm>
             <a:prstGeom prst="ellipse">
@@ -4534,7 +4534,7 @@
           </p:nvSpPr>
           <p:spPr>
             <a:xfrm>
-              <a:off x="1737348" y="2880321"/>
+              <a:off x="1736204" y="2880321"/>
               <a:ext cx="61566" cy="61566"/>
             </a:xfrm>
             <a:prstGeom prst="ellipse">
@@ -4560,7 +4560,7 @@
           </p:nvSpPr>
           <p:spPr>
             <a:xfrm>
-              <a:off x="1942960" y="2296765"/>
+              <a:off x="1868925" y="2296765"/>
               <a:ext cx="61566" cy="61566"/>
             </a:xfrm>
             <a:prstGeom prst="ellipse">
@@ -4586,7 +4586,7 @@
           </p:nvSpPr>
           <p:spPr>
             <a:xfrm>
-              <a:off x="1695128" y="3038022"/>
+              <a:off x="1658637" y="3038022"/>
               <a:ext cx="61566" cy="61566"/>
             </a:xfrm>
             <a:prstGeom prst="ellipse">
@@ -4612,7 +4612,7 @@
           </p:nvSpPr>
           <p:spPr>
             <a:xfrm>
-              <a:off x="1966653" y="3041648"/>
+              <a:off x="1898342" y="3041648"/>
               <a:ext cx="61566" cy="61566"/>
             </a:xfrm>
             <a:prstGeom prst="ellipse">
@@ -4638,7 +4638,7 @@
           </p:nvSpPr>
           <p:spPr>
             <a:xfrm>
-              <a:off x="1697187" y="3161323"/>
+              <a:off x="1741758" y="3161323"/>
               <a:ext cx="61566" cy="61566"/>
             </a:xfrm>
             <a:prstGeom prst="ellipse">
@@ -4664,7 +4664,7 @@
           </p:nvSpPr>
           <p:spPr>
             <a:xfrm>
-              <a:off x="1911406" y="2822739"/>
+              <a:off x="1926784" y="2822739"/>
               <a:ext cx="61566" cy="61566"/>
             </a:xfrm>
             <a:prstGeom prst="ellipse">
@@ -4690,7 +4690,7 @@
           </p:nvSpPr>
           <p:spPr>
             <a:xfrm>
-              <a:off x="1724631" y="3930024"/>
+              <a:off x="1752161" y="3930024"/>
               <a:ext cx="61566" cy="61566"/>
             </a:xfrm>
             <a:prstGeom prst="ellipse">
@@ -4716,7 +4716,7 @@
           </p:nvSpPr>
           <p:spPr>
             <a:xfrm>
-              <a:off x="1974379" y="3566066"/>
+              <a:off x="1958466" y="3566066"/>
               <a:ext cx="61566" cy="61566"/>
             </a:xfrm>
             <a:prstGeom prst="ellipse">
@@ -4742,7 +4742,7 @@
           </p:nvSpPr>
           <p:spPr>
             <a:xfrm>
-              <a:off x="1708458" y="2813625"/>
+              <a:off x="1703149" y="2813625"/>
               <a:ext cx="61566" cy="61566"/>
             </a:xfrm>
             <a:prstGeom prst="ellipse">
@@ -4768,7 +4768,7 @@
           </p:nvSpPr>
           <p:spPr>
             <a:xfrm>
-              <a:off x="1870031" y="2597033"/>
+              <a:off x="1959562" y="2597033"/>
               <a:ext cx="61566" cy="61566"/>
             </a:xfrm>
             <a:prstGeom prst="ellipse">
@@ -4794,7 +4794,7 @@
           </p:nvSpPr>
           <p:spPr>
             <a:xfrm>
-              <a:off x="1735866" y="3020528"/>
+              <a:off x="1643472" y="3020528"/>
               <a:ext cx="61566" cy="61566"/>
             </a:xfrm>
             <a:prstGeom prst="ellipse">
@@ -4820,7 +4820,7 @@
           </p:nvSpPr>
           <p:spPr>
             <a:xfrm>
-              <a:off x="1958263" y="3182367"/>
+              <a:off x="1934848" y="3182367"/>
               <a:ext cx="61566" cy="61566"/>
             </a:xfrm>
             <a:prstGeom prst="ellipse">
@@ -4846,7 +4846,7 @@
           </p:nvSpPr>
           <p:spPr>
             <a:xfrm>
-              <a:off x="1655918" y="2715796"/>
+              <a:off x="1688388" y="2715796"/>
               <a:ext cx="61566" cy="61566"/>
             </a:xfrm>
             <a:prstGeom prst="ellipse">
@@ -4872,7 +4872,7 @@
           </p:nvSpPr>
           <p:spPr>
             <a:xfrm>
-              <a:off x="1917167" y="2461185"/>
+              <a:off x="1895823" y="2461185"/>
               <a:ext cx="61566" cy="61566"/>
             </a:xfrm>
             <a:prstGeom prst="ellipse">
@@ -4898,7 +4898,7 @@
           </p:nvSpPr>
           <p:spPr>
             <a:xfrm>
-              <a:off x="1725067" y="3134152"/>
+              <a:off x="1684789" y="3134152"/>
               <a:ext cx="61566" cy="61566"/>
             </a:xfrm>
             <a:prstGeom prst="ellipse">
@@ -4924,7 +4924,7 @@
           </p:nvSpPr>
           <p:spPr>
             <a:xfrm>
-              <a:off x="1948809" y="2788847"/>
+              <a:off x="1960113" y="2788847"/>
               <a:ext cx="61566" cy="61566"/>
             </a:xfrm>
             <a:prstGeom prst="ellipse">
@@ -4950,7 +4950,7 @@
           </p:nvSpPr>
           <p:spPr>
             <a:xfrm>
-              <a:off x="1651654" y="2779820"/>
+              <a:off x="1708786" y="2779820"/>
               <a:ext cx="61566" cy="61566"/>
             </a:xfrm>
             <a:prstGeom prst="ellipse">
@@ -4976,7 +4976,7 @@
           </p:nvSpPr>
           <p:spPr>
             <a:xfrm>
-              <a:off x="1869421" y="2970252"/>
+              <a:off x="1961658" y="2970252"/>
               <a:ext cx="61566" cy="61566"/>
             </a:xfrm>
             <a:prstGeom prst="ellipse">
@@ -5002,7 +5002,7 @@
           </p:nvSpPr>
           <p:spPr>
             <a:xfrm>
-              <a:off x="1727793" y="2884468"/>
+              <a:off x="1748072" y="2884468"/>
               <a:ext cx="61566" cy="61566"/>
             </a:xfrm>
             <a:prstGeom prst="ellipse">
@@ -5028,7 +5028,7 @@
           </p:nvSpPr>
           <p:spPr>
             <a:xfrm>
-              <a:off x="1929381" y="3203274"/>
+              <a:off x="1959223" y="3203274"/>
               <a:ext cx="61566" cy="61566"/>
             </a:xfrm>
             <a:prstGeom prst="ellipse">
@@ -5054,7 +5054,7 @@
           </p:nvSpPr>
           <p:spPr>
             <a:xfrm>
-              <a:off x="1689165" y="2552192"/>
+              <a:off x="1717645" y="2552192"/>
               <a:ext cx="61566" cy="61566"/>
             </a:xfrm>
             <a:prstGeom prst="ellipse">
@@ -5080,7 +5080,7 @@
           </p:nvSpPr>
           <p:spPr>
             <a:xfrm>
-              <a:off x="1942375" y="2680938"/>
+              <a:off x="1886314" y="2680938"/>
               <a:ext cx="61566" cy="61566"/>
             </a:xfrm>
             <a:prstGeom prst="ellipse">
@@ -5106,7 +5106,7 @@
           </p:nvSpPr>
           <p:spPr>
             <a:xfrm>
-              <a:off x="1722696" y="3154599"/>
+              <a:off x="1669851" y="3154599"/>
               <a:ext cx="61566" cy="61566"/>
             </a:xfrm>
             <a:prstGeom prst="ellipse">
@@ -5132,7 +5132,7 @@
           </p:nvSpPr>
           <p:spPr>
             <a:xfrm>
-              <a:off x="1952775" y="3309676"/>
+              <a:off x="1941013" y="3309676"/>
               <a:ext cx="61566" cy="61566"/>
             </a:xfrm>
             <a:prstGeom prst="ellipse">
@@ -5158,7 +5158,7 @@
           </p:nvSpPr>
           <p:spPr>
             <a:xfrm>
-              <a:off x="1751557" y="3245455"/>
+              <a:off x="1723426" y="3245455"/>
               <a:ext cx="61566" cy="61566"/>
             </a:xfrm>
             <a:prstGeom prst="ellipse">
@@ -5184,7 +5184,7 @@
           </p:nvSpPr>
           <p:spPr>
             <a:xfrm>
-              <a:off x="1969423" y="3291634"/>
+              <a:off x="1930752" y="3291634"/>
               <a:ext cx="61566" cy="61566"/>
             </a:xfrm>
             <a:prstGeom prst="ellipse">
@@ -5210,7 +5210,7 @@
           </p:nvSpPr>
           <p:spPr>
             <a:xfrm>
-              <a:off x="1749280" y="3167825"/>
+              <a:off x="1652728" y="3167825"/>
               <a:ext cx="61566" cy="61566"/>
             </a:xfrm>
             <a:prstGeom prst="ellipse">
@@ -5236,7 +5236,7 @@
           </p:nvSpPr>
           <p:spPr>
             <a:xfrm>
-              <a:off x="1910648" y="3179339"/>
+              <a:off x="1900468" y="3179339"/>
               <a:ext cx="61566" cy="61566"/>
             </a:xfrm>
             <a:prstGeom prst="ellipse">
@@ -5262,7 +5262,7 @@
           </p:nvSpPr>
           <p:spPr>
             <a:xfrm>
-              <a:off x="1700049" y="1723155"/>
+              <a:off x="1680281" y="1723155"/>
               <a:ext cx="61566" cy="61566"/>
             </a:xfrm>
             <a:prstGeom prst="ellipse">
@@ -5288,7 +5288,7 @@
           </p:nvSpPr>
           <p:spPr>
             <a:xfrm>
-              <a:off x="1870033" y="2128534"/>
+              <a:off x="1943292" y="2128534"/>
               <a:ext cx="61566" cy="61566"/>
             </a:xfrm>
             <a:prstGeom prst="ellipse">
@@ -5314,7 +5314,7 @@
           </p:nvSpPr>
           <p:spPr>
             <a:xfrm>
-              <a:off x="1668983" y="2175161"/>
+              <a:off x="1672815" y="2175161"/>
               <a:ext cx="61566" cy="61566"/>
             </a:xfrm>
             <a:prstGeom prst="ellipse">
@@ -5340,7 +5340,7 @@
           </p:nvSpPr>
           <p:spPr>
             <a:xfrm>
-              <a:off x="1896142" y="2470210"/>
+              <a:off x="1917946" y="2470210"/>
               <a:ext cx="61566" cy="61566"/>
             </a:xfrm>
             <a:prstGeom prst="ellipse">
@@ -5366,7 +5366,7 @@
           </p:nvSpPr>
           <p:spPr>
             <a:xfrm>
-              <a:off x="1714253" y="3428389"/>
+              <a:off x="1727933" y="3428389"/>
               <a:ext cx="61566" cy="61566"/>
             </a:xfrm>
             <a:prstGeom prst="ellipse">
@@ -5392,7 +5392,7 @@
           </p:nvSpPr>
           <p:spPr>
             <a:xfrm>
-              <a:off x="1901813" y="3248280"/>
+              <a:off x="1866799" y="3248280"/>
               <a:ext cx="61566" cy="61566"/>
             </a:xfrm>
             <a:prstGeom prst="ellipse">
@@ -5418,7 +5418,7 @@
           </p:nvSpPr>
           <p:spPr>
             <a:xfrm>
-              <a:off x="1691081" y="3522232"/>
+              <a:off x="1660694" y="3522232"/>
               <a:ext cx="61566" cy="61566"/>
             </a:xfrm>
             <a:prstGeom prst="ellipse">
@@ -5444,7 +5444,7 @@
           </p:nvSpPr>
           <p:spPr>
             <a:xfrm>
-              <a:off x="1934532" y="3457630"/>
+              <a:off x="1874845" y="3457630"/>
               <a:ext cx="61566" cy="61566"/>
             </a:xfrm>
             <a:prstGeom prst="ellipse">
@@ -5470,7 +5470,7 @@
           </p:nvSpPr>
           <p:spPr>
             <a:xfrm>
-              <a:off x="1704910" y="3294570"/>
+              <a:off x="1726552" y="3294570"/>
               <a:ext cx="61566" cy="61566"/>
             </a:xfrm>
             <a:prstGeom prst="ellipse">
@@ -5496,7 +5496,7 @@
           </p:nvSpPr>
           <p:spPr>
             <a:xfrm>
-              <a:off x="1953163" y="3381516"/>
+              <a:off x="1957100" y="3381516"/>
               <a:ext cx="61566" cy="61566"/>
             </a:xfrm>
             <a:prstGeom prst="ellipse">
@@ -5522,7 +5522,7 @@
           </p:nvSpPr>
           <p:spPr>
             <a:xfrm>
-              <a:off x="1715810" y="2846731"/>
+              <a:off x="1695817" y="2846731"/>
               <a:ext cx="61566" cy="61566"/>
             </a:xfrm>
             <a:prstGeom prst="ellipse">
@@ -5548,7 +5548,7 @@
           </p:nvSpPr>
           <p:spPr>
             <a:xfrm>
-              <a:off x="1880976" y="3273240"/>
+              <a:off x="1870578" y="3273240"/>
               <a:ext cx="61566" cy="61566"/>
             </a:xfrm>
             <a:prstGeom prst="ellipse">
@@ -5574,7 +5574,7 @@
           </p:nvSpPr>
           <p:spPr>
             <a:xfrm>
-              <a:off x="1647774" y="3241353"/>
+              <a:off x="1676376" y="3241353"/>
               <a:ext cx="61566" cy="61566"/>
             </a:xfrm>
             <a:prstGeom prst="ellipse">
@@ -5600,7 +5600,7 @@
           </p:nvSpPr>
           <p:spPr>
             <a:xfrm>
-              <a:off x="1871169" y="3393084"/>
+              <a:off x="1934848" y="3393084"/>
               <a:ext cx="61566" cy="61566"/>
             </a:xfrm>
             <a:prstGeom prst="ellipse">
@@ -5626,7 +5626,7 @@
           </p:nvSpPr>
           <p:spPr>
             <a:xfrm>
-              <a:off x="1732742" y="3072289"/>
+              <a:off x="1674759" y="3072289"/>
               <a:ext cx="61566" cy="61566"/>
             </a:xfrm>
             <a:prstGeom prst="ellipse">
@@ -5652,7 +5652,7 @@
           </p:nvSpPr>
           <p:spPr>
             <a:xfrm>
-              <a:off x="1906368" y="3261270"/>
+              <a:off x="1919177" y="3261270"/>
               <a:ext cx="61566" cy="61566"/>
             </a:xfrm>
             <a:prstGeom prst="ellipse">
@@ -5678,7 +5678,7 @@
           </p:nvSpPr>
           <p:spPr>
             <a:xfrm>
-              <a:off x="1692683" y="3112521"/>
+              <a:off x="1653541" y="3112521"/>
               <a:ext cx="61566" cy="61566"/>
             </a:xfrm>
             <a:prstGeom prst="ellipse">
@@ -5704,7 +5704,7 @@
           </p:nvSpPr>
           <p:spPr>
             <a:xfrm>
-              <a:off x="1914903" y="3270085"/>
+              <a:off x="1930294" y="3270085"/>
               <a:ext cx="61566" cy="61566"/>
             </a:xfrm>
             <a:prstGeom prst="ellipse">
@@ -5730,7 +5730,7 @@
           </p:nvSpPr>
           <p:spPr>
             <a:xfrm>
-              <a:off x="1663664" y="3033374"/>
+              <a:off x="1724215" y="3033374"/>
               <a:ext cx="61566" cy="61566"/>
             </a:xfrm>
             <a:prstGeom prst="ellipse">
@@ -5756,7 +5756,7 @@
           </p:nvSpPr>
           <p:spPr>
             <a:xfrm>
-              <a:off x="1924259" y="3169719"/>
+              <a:off x="1895414" y="3169719"/>
               <a:ext cx="61566" cy="61566"/>
             </a:xfrm>
             <a:prstGeom prst="ellipse">
@@ -5782,7 +5782,7 @@
           </p:nvSpPr>
           <p:spPr>
             <a:xfrm>
-              <a:off x="1667042" y="3393218"/>
+              <a:off x="1644505" y="3393218"/>
               <a:ext cx="61566" cy="61566"/>
             </a:xfrm>
             <a:prstGeom prst="ellipse">
@@ -5808,7 +5808,7 @@
           </p:nvSpPr>
           <p:spPr>
             <a:xfrm>
-              <a:off x="1927012" y="3172375"/>
+              <a:off x="1869647" y="3172375"/>
               <a:ext cx="61566" cy="61566"/>
             </a:xfrm>
             <a:prstGeom prst="ellipse">
@@ -5834,7 +5834,7 @@
           </p:nvSpPr>
           <p:spPr>
             <a:xfrm>
-              <a:off x="1653242" y="3039865"/>
+              <a:off x="1674760" y="3039865"/>
               <a:ext cx="61566" cy="61566"/>
             </a:xfrm>
             <a:prstGeom prst="ellipse">
@@ -5860,7 +5860,7 @@
           </p:nvSpPr>
           <p:spPr>
             <a:xfrm>
-              <a:off x="1882420" y="3133499"/>
+              <a:off x="1872826" y="3133499"/>
               <a:ext cx="61566" cy="61566"/>
             </a:xfrm>
             <a:prstGeom prst="ellipse">
@@ -5886,7 +5886,7 @@
           </p:nvSpPr>
           <p:spPr>
             <a:xfrm>
-              <a:off x="1715522" y="3322384"/>
+              <a:off x="1750613" y="3322384"/>
               <a:ext cx="61566" cy="61566"/>
             </a:xfrm>
             <a:prstGeom prst="ellipse">
@@ -5912,7 +5912,7 @@
           </p:nvSpPr>
           <p:spPr>
             <a:xfrm>
-              <a:off x="1942038" y="3226809"/>
+              <a:off x="1928282" y="3226809"/>
               <a:ext cx="61566" cy="61566"/>
             </a:xfrm>
             <a:prstGeom prst="ellipse">
@@ -5938,7 +5938,7 @@
           </p:nvSpPr>
           <p:spPr>
             <a:xfrm>
-              <a:off x="1688932" y="3353212"/>
+              <a:off x="1674198" y="3353212"/>
               <a:ext cx="61566" cy="61566"/>
             </a:xfrm>
             <a:prstGeom prst="ellipse">
@@ -5964,7 +5964,7 @@
           </p:nvSpPr>
           <p:spPr>
             <a:xfrm>
-              <a:off x="1908089" y="3535969"/>
+              <a:off x="1918606" y="3535969"/>
               <a:ext cx="61566" cy="61566"/>
             </a:xfrm>
             <a:prstGeom prst="ellipse">
@@ -5990,7 +5990,7 @@
           </p:nvSpPr>
           <p:spPr>
             <a:xfrm>
-              <a:off x="1655531" y="3040390"/>
+              <a:off x="1715957" y="3040390"/>
               <a:ext cx="61566" cy="61566"/>
             </a:xfrm>
             <a:prstGeom prst="ellipse">
@@ -6016,7 +6016,7 @@
           </p:nvSpPr>
           <p:spPr>
             <a:xfrm>
-              <a:off x="1959314" y="3291462"/>
+              <a:off x="1942893" y="3291462"/>
               <a:ext cx="61566" cy="61566"/>
             </a:xfrm>
             <a:prstGeom prst="ellipse">
@@ -6042,7 +6042,7 @@
           </p:nvSpPr>
           <p:spPr>
             <a:xfrm>
-              <a:off x="1694300" y="3120609"/>
+              <a:off x="1749248" y="3120609"/>
               <a:ext cx="61566" cy="61566"/>
             </a:xfrm>
             <a:prstGeom prst="ellipse">
@@ -6068,7 +6068,7 @@
           </p:nvSpPr>
           <p:spPr>
             <a:xfrm>
-              <a:off x="1876489" y="3448036"/>
+              <a:off x="1955290" y="3448036"/>
               <a:ext cx="61566" cy="61566"/>
             </a:xfrm>
             <a:prstGeom prst="ellipse">
@@ -6094,7 +6094,7 @@
           </p:nvSpPr>
           <p:spPr>
             <a:xfrm>
-              <a:off x="1720363" y="3152639"/>
+              <a:off x="1696529" y="3152639"/>
               <a:ext cx="61566" cy="61566"/>
             </a:xfrm>
             <a:prstGeom prst="ellipse">
@@ -6120,7 +6120,7 @@
           </p:nvSpPr>
           <p:spPr>
             <a:xfrm>
-              <a:off x="1939626" y="3369945"/>
+              <a:off x="1866958" y="3369945"/>
               <a:ext cx="61566" cy="61566"/>
             </a:xfrm>
             <a:prstGeom prst="ellipse">
@@ -6146,7 +6146,7 @@
           </p:nvSpPr>
           <p:spPr>
             <a:xfrm>
-              <a:off x="1751915" y="2183182"/>
+              <a:off x="1711138" y="2183182"/>
               <a:ext cx="61566" cy="61566"/>
             </a:xfrm>
             <a:prstGeom prst="ellipse">
@@ -6172,7 +6172,7 @@
           </p:nvSpPr>
           <p:spPr>
             <a:xfrm>
-              <a:off x="1938916" y="3457770"/>
+              <a:off x="1934109" y="3457770"/>
               <a:ext cx="61566" cy="61566"/>
             </a:xfrm>
             <a:prstGeom prst="ellipse">
@@ -6198,7 +6198,7 @@
           </p:nvSpPr>
           <p:spPr>
             <a:xfrm>
-              <a:off x="1725845" y="3645375"/>
+              <a:off x="1724498" y="3645375"/>
               <a:ext cx="61566" cy="61566"/>
             </a:xfrm>
             <a:prstGeom prst="ellipse">
@@ -6224,7 +6224,7 @@
           </p:nvSpPr>
           <p:spPr>
             <a:xfrm>
-              <a:off x="1952909" y="3201802"/>
+              <a:off x="1949168" y="3201802"/>
               <a:ext cx="61566" cy="61566"/>
             </a:xfrm>
             <a:prstGeom prst="ellipse">
@@ -6250,7 +6250,7 @@
           </p:nvSpPr>
           <p:spPr>
             <a:xfrm>
-              <a:off x="1705154" y="3536065"/>
+              <a:off x="1732899" y="3536065"/>
               <a:ext cx="61566" cy="61566"/>
             </a:xfrm>
             <a:prstGeom prst="ellipse">
@@ -6276,7 +6276,7 @@
           </p:nvSpPr>
           <p:spPr>
             <a:xfrm>
-              <a:off x="1906266" y="3324701"/>
+              <a:off x="1975610" y="3324701"/>
               <a:ext cx="61566" cy="61566"/>
             </a:xfrm>
             <a:prstGeom prst="ellipse">
@@ -6302,7 +6302,7 @@
           </p:nvSpPr>
           <p:spPr>
             <a:xfrm>
-              <a:off x="1690548" y="3122217"/>
+              <a:off x="1731187" y="3122217"/>
               <a:ext cx="61566" cy="61566"/>
             </a:xfrm>
             <a:prstGeom prst="ellipse">
@@ -6328,7 +6328,7 @@
           </p:nvSpPr>
           <p:spPr>
             <a:xfrm>
-              <a:off x="1921481" y="3303611"/>
+              <a:off x="1913735" y="3303611"/>
               <a:ext cx="61566" cy="61566"/>
             </a:xfrm>
             <a:prstGeom prst="ellipse">
@@ -6354,7 +6354,7 @@
           </p:nvSpPr>
           <p:spPr>
             <a:xfrm>
-              <a:off x="1700838" y="3143593"/>
+              <a:off x="1750956" y="3143593"/>
               <a:ext cx="61566" cy="61566"/>
             </a:xfrm>
             <a:prstGeom prst="ellipse">
@@ -6380,7 +6380,7 @@
           </p:nvSpPr>
           <p:spPr>
             <a:xfrm>
-              <a:off x="1877452" y="3103827"/>
+              <a:off x="1928590" y="3103827"/>
               <a:ext cx="61566" cy="61566"/>
             </a:xfrm>
             <a:prstGeom prst="ellipse">
@@ -6406,7 +6406,7 @@
           </p:nvSpPr>
           <p:spPr>
             <a:xfrm>
-              <a:off x="1713819" y="2590740"/>
+              <a:off x="1731364" y="2590740"/>
               <a:ext cx="61566" cy="61566"/>
             </a:xfrm>
             <a:prstGeom prst="ellipse">
@@ -6432,7 +6432,7 @@
           </p:nvSpPr>
           <p:spPr>
             <a:xfrm>
-              <a:off x="1874850" y="2576387"/>
+              <a:off x="1923013" y="2576387"/>
               <a:ext cx="61566" cy="61566"/>
             </a:xfrm>
             <a:prstGeom prst="ellipse">
@@ -6458,7 +6458,7 @@
           </p:nvSpPr>
           <p:spPr>
             <a:xfrm>
-              <a:off x="1656219" y="2497262"/>
+              <a:off x="1646559" y="2497262"/>
               <a:ext cx="61566" cy="61566"/>
             </a:xfrm>
             <a:prstGeom prst="ellipse">
@@ -6484,7 +6484,7 @@
           </p:nvSpPr>
           <p:spPr>
             <a:xfrm>
-              <a:off x="1889155" y="2391386"/>
+              <a:off x="1885081" y="2391386"/>
               <a:ext cx="61566" cy="61566"/>
             </a:xfrm>
             <a:prstGeom prst="ellipse">
@@ -6510,7 +6510,7 @@
           </p:nvSpPr>
           <p:spPr>
             <a:xfrm>
-              <a:off x="1725079" y="3184716"/>
+              <a:off x="1669208" y="3184716"/>
               <a:ext cx="61566" cy="61566"/>
             </a:xfrm>
             <a:prstGeom prst="ellipse">
@@ -6536,7 +6536,7 @@
           </p:nvSpPr>
           <p:spPr>
             <a:xfrm>
-              <a:off x="1960155" y="2880629"/>
+              <a:off x="1880128" y="2880629"/>
               <a:ext cx="61566" cy="61566"/>
             </a:xfrm>
             <a:prstGeom prst="ellipse">
@@ -6562,7 +6562,7 @@
           </p:nvSpPr>
           <p:spPr>
             <a:xfrm>
-              <a:off x="1652112" y="2698095"/>
+              <a:off x="1718762" y="2698095"/>
               <a:ext cx="61566" cy="61566"/>
             </a:xfrm>
             <a:prstGeom prst="ellipse">
@@ -6588,7 +6588,7 @@
           </p:nvSpPr>
           <p:spPr>
             <a:xfrm>
-              <a:off x="1941296" y="2942752"/>
+              <a:off x="1941183" y="2942752"/>
               <a:ext cx="61566" cy="61566"/>
             </a:xfrm>
             <a:prstGeom prst="ellipse">
@@ -6614,7 +6614,7 @@
           </p:nvSpPr>
           <p:spPr>
             <a:xfrm>
-              <a:off x="1746498" y="2506351"/>
+              <a:off x="1748078" y="2506351"/>
               <a:ext cx="61566" cy="61566"/>
             </a:xfrm>
             <a:prstGeom prst="ellipse">
@@ -6640,7 +6640,7 @@
           </p:nvSpPr>
           <p:spPr>
             <a:xfrm>
-              <a:off x="1894166" y="2329416"/>
+              <a:off x="1923601" y="2329416"/>
               <a:ext cx="61566" cy="61566"/>
             </a:xfrm>
             <a:prstGeom prst="ellipse">
@@ -6666,7 +6666,7 @@
           </p:nvSpPr>
           <p:spPr>
             <a:xfrm>
-              <a:off x="1743756" y="3282928"/>
+              <a:off x="1746341" y="3282928"/>
               <a:ext cx="61566" cy="61566"/>
             </a:xfrm>
             <a:prstGeom prst="ellipse">
@@ -6692,7 +6692,7 @@
           </p:nvSpPr>
           <p:spPr>
             <a:xfrm>
-              <a:off x="1935966" y="3389436"/>
+              <a:off x="1911885" y="3389436"/>
               <a:ext cx="61566" cy="61566"/>
             </a:xfrm>
             <a:prstGeom prst="ellipse">
@@ -6718,7 +6718,7 @@
           </p:nvSpPr>
           <p:spPr>
             <a:xfrm>
-              <a:off x="1647115" y="2942296"/>
+              <a:off x="1678330" y="2942296"/>
               <a:ext cx="61566" cy="61566"/>
             </a:xfrm>
             <a:prstGeom prst="ellipse">
@@ -6744,7 +6744,7 @@
           </p:nvSpPr>
           <p:spPr>
             <a:xfrm>
-              <a:off x="1965966" y="3192005"/>
+              <a:off x="1890908" y="3192005"/>
               <a:ext cx="61566" cy="61566"/>
             </a:xfrm>
             <a:prstGeom prst="ellipse">
@@ -6770,7 +6770,7 @@
           </p:nvSpPr>
           <p:spPr>
             <a:xfrm>
-              <a:off x="1710544" y="2429260"/>
+              <a:off x="1749940" y="2429260"/>
               <a:ext cx="61566" cy="61566"/>
             </a:xfrm>
             <a:prstGeom prst="ellipse">
@@ -6796,7 +6796,7 @@
           </p:nvSpPr>
           <p:spPr>
             <a:xfrm>
-              <a:off x="1913938" y="2686774"/>
+              <a:off x="1909967" y="2686774"/>
               <a:ext cx="61566" cy="61566"/>
             </a:xfrm>
             <a:prstGeom prst="ellipse">
@@ -6822,7 +6822,7 @@
           </p:nvSpPr>
           <p:spPr>
             <a:xfrm>
-              <a:off x="1696679" y="3728646"/>
+              <a:off x="1737094" y="3728646"/>
               <a:ext cx="61566" cy="61566"/>
             </a:xfrm>
             <a:prstGeom prst="ellipse">
@@ -6848,7 +6848,7 @@
           </p:nvSpPr>
           <p:spPr>
             <a:xfrm>
-              <a:off x="1884601" y="2970091"/>
+              <a:off x="1952537" y="2970091"/>
               <a:ext cx="61566" cy="61566"/>
             </a:xfrm>
             <a:prstGeom prst="ellipse">
@@ -6874,7 +6874,7 @@
           </p:nvSpPr>
           <p:spPr>
             <a:xfrm>
-              <a:off x="3214291" y="2248423"/>
+              <a:off x="3271047" y="2248423"/>
               <a:ext cx="61566" cy="61566"/>
             </a:xfrm>
             <a:prstGeom prst="ellipse">
@@ -6900,7 +6900,7 @@
           </p:nvSpPr>
           <p:spPr>
             <a:xfrm>
-              <a:off x="3483579" y="2402394"/>
+              <a:off x="3485401" y="2402394"/>
               <a:ext cx="61566" cy="61566"/>
             </a:xfrm>
             <a:prstGeom prst="ellipse">
@@ -6926,7 +6926,7 @@
           </p:nvSpPr>
           <p:spPr>
             <a:xfrm>
-              <a:off x="3194351" y="2647495"/>
+              <a:off x="3244784" y="2647495"/>
               <a:ext cx="61566" cy="61566"/>
             </a:xfrm>
             <a:prstGeom prst="ellipse">
@@ -6952,7 +6952,7 @@
           </p:nvSpPr>
           <p:spPr>
             <a:xfrm>
-              <a:off x="3472793" y="3082330"/>
+              <a:off x="3444162" y="3082330"/>
               <a:ext cx="61566" cy="61566"/>
             </a:xfrm>
             <a:prstGeom prst="ellipse">
@@ -6978,7 +6978,7 @@
           </p:nvSpPr>
           <p:spPr>
             <a:xfrm>
-              <a:off x="3282027" y="3043180"/>
+              <a:off x="3269328" y="3043180"/>
               <a:ext cx="61566" cy="61566"/>
             </a:xfrm>
             <a:prstGeom prst="ellipse">
@@ -7004,7 +7004,7 @@
           </p:nvSpPr>
           <p:spPr>
             <a:xfrm>
-              <a:off x="3424711" y="3100606"/>
+              <a:off x="3488032" y="3100606"/>
               <a:ext cx="61566" cy="61566"/>
             </a:xfrm>
             <a:prstGeom prst="ellipse">
@@ -7030,7 +7030,7 @@
           </p:nvSpPr>
           <p:spPr>
             <a:xfrm>
-              <a:off x="3230952" y="2677424"/>
+              <a:off x="3251627" y="2677424"/>
               <a:ext cx="61566" cy="61566"/>
             </a:xfrm>
             <a:prstGeom prst="ellipse">
@@ -7056,7 +7056,7 @@
           </p:nvSpPr>
           <p:spPr>
             <a:xfrm>
-              <a:off x="3415359" y="2813758"/>
+              <a:off x="3440956" y="2813758"/>
               <a:ext cx="61566" cy="61566"/>
             </a:xfrm>
             <a:prstGeom prst="ellipse">
@@ -7082,7 +7082,7 @@
           </p:nvSpPr>
           <p:spPr>
             <a:xfrm>
-              <a:off x="3189172" y="2581442"/>
+              <a:off x="3190925" y="2581442"/>
               <a:ext cx="61566" cy="61566"/>
             </a:xfrm>
             <a:prstGeom prst="ellipse">
@@ -7108,7 +7108,7 @@
           </p:nvSpPr>
           <p:spPr>
             <a:xfrm>
-              <a:off x="3455025" y="2696997"/>
+              <a:off x="3444143" y="2696997"/>
               <a:ext cx="61566" cy="61566"/>
             </a:xfrm>
             <a:prstGeom prst="ellipse">
@@ -7134,7 +7134,7 @@
           </p:nvSpPr>
           <p:spPr>
             <a:xfrm>
-              <a:off x="3183807" y="2694668"/>
+              <a:off x="3257133" y="2694668"/>
               <a:ext cx="61566" cy="61566"/>
             </a:xfrm>
             <a:prstGeom prst="ellipse">
@@ -7160,7 +7160,7 @@
           </p:nvSpPr>
           <p:spPr>
             <a:xfrm>
-              <a:off x="3471946" y="2891167"/>
+              <a:off x="3496894" y="2891167"/>
               <a:ext cx="61566" cy="61566"/>
             </a:xfrm>
             <a:prstGeom prst="ellipse">
@@ -7186,7 +7186,7 @@
           </p:nvSpPr>
           <p:spPr>
             <a:xfrm>
-              <a:off x="3196725" y="2868118"/>
+              <a:off x="3211072" y="2868118"/>
               <a:ext cx="61566" cy="61566"/>
             </a:xfrm>
             <a:prstGeom prst="ellipse">
@@ -7212,7 +7212,7 @@
           </p:nvSpPr>
           <p:spPr>
             <a:xfrm>
-              <a:off x="3453761" y="2922755"/>
+              <a:off x="3442298" y="2922755"/>
               <a:ext cx="61566" cy="61566"/>
             </a:xfrm>
             <a:prstGeom prst="ellipse">
@@ -7238,7 +7238,7 @@
           </p:nvSpPr>
           <p:spPr>
             <a:xfrm>
-              <a:off x="3194487" y="2586945"/>
+              <a:off x="3216400" y="2586945"/>
               <a:ext cx="61566" cy="61566"/>
             </a:xfrm>
             <a:prstGeom prst="ellipse">
@@ -7264,7 +7264,7 @@
           </p:nvSpPr>
           <p:spPr>
             <a:xfrm>
-              <a:off x="3430015" y="2790343"/>
+              <a:off x="3413328" y="2790343"/>
               <a:ext cx="61566" cy="61566"/>
             </a:xfrm>
             <a:prstGeom prst="ellipse">
@@ -7290,7 +7290,7 @@
           </p:nvSpPr>
           <p:spPr>
             <a:xfrm>
-              <a:off x="3288574" y="3266190"/>
+              <a:off x="3232042" y="3266190"/>
               <a:ext cx="61566" cy="61566"/>
             </a:xfrm>
             <a:prstGeom prst="ellipse">
@@ -7316,7 +7316,7 @@
           </p:nvSpPr>
           <p:spPr>
             <a:xfrm>
-              <a:off x="3494668" y="3552208"/>
+              <a:off x="3428640" y="3552208"/>
               <a:ext cx="61566" cy="61566"/>
             </a:xfrm>
             <a:prstGeom prst="ellipse">
@@ -7342,7 +7342,7 @@
           </p:nvSpPr>
           <p:spPr>
             <a:xfrm>
-              <a:off x="3271645" y="3032043"/>
+              <a:off x="3210460" y="3032043"/>
               <a:ext cx="61566" cy="61566"/>
             </a:xfrm>
             <a:prstGeom prst="ellipse">
@@ -7368,7 +7368,7 @@
           </p:nvSpPr>
           <p:spPr>
             <a:xfrm>
-              <a:off x="3485078" y="3527825"/>
+              <a:off x="3507512" y="3527825"/>
               <a:ext cx="61566" cy="61566"/>
             </a:xfrm>
             <a:prstGeom prst="ellipse">
@@ -7394,7 +7394,7 @@
           </p:nvSpPr>
           <p:spPr>
             <a:xfrm>
-              <a:off x="3279227" y="2705023"/>
+              <a:off x="3215629" y="2705023"/>
               <a:ext cx="61566" cy="61566"/>
             </a:xfrm>
             <a:prstGeom prst="ellipse">
@@ -7420,7 +7420,7 @@
           </p:nvSpPr>
           <p:spPr>
             <a:xfrm>
-              <a:off x="3412498" y="2918815"/>
+              <a:off x="3438730" y="2918815"/>
               <a:ext cx="61566" cy="61566"/>
             </a:xfrm>
             <a:prstGeom prst="ellipse">
@@ -7446,7 +7446,7 @@
           </p:nvSpPr>
           <p:spPr>
             <a:xfrm>
-              <a:off x="3257239" y="2571530"/>
+              <a:off x="3270525" y="2571530"/>
               <a:ext cx="61566" cy="61566"/>
             </a:xfrm>
             <a:prstGeom prst="ellipse">
@@ -7472,7 +7472,7 @@
           </p:nvSpPr>
           <p:spPr>
             <a:xfrm>
-              <a:off x="3426265" y="3085301"/>
+              <a:off x="3480765" y="3085301"/>
               <a:ext cx="61566" cy="61566"/>
             </a:xfrm>
             <a:prstGeom prst="ellipse">
@@ -7498,7 +7498,7 @@
           </p:nvSpPr>
           <p:spPr>
             <a:xfrm>
-              <a:off x="3254252" y="2714126"/>
+              <a:off x="3233204" y="2714126"/>
               <a:ext cx="61566" cy="61566"/>
             </a:xfrm>
             <a:prstGeom prst="ellipse">
@@ -7524,7 +7524,7 @@
           </p:nvSpPr>
           <p:spPr>
             <a:xfrm>
-              <a:off x="3407349" y="3035386"/>
+              <a:off x="3469078" y="3035386"/>
               <a:ext cx="61566" cy="61566"/>
             </a:xfrm>
             <a:prstGeom prst="ellipse">
@@ -7550,7 +7550,7 @@
           </p:nvSpPr>
           <p:spPr>
             <a:xfrm>
-              <a:off x="3236943" y="3235726"/>
+              <a:off x="3211535" y="3235726"/>
               <a:ext cx="61566" cy="61566"/>
             </a:xfrm>
             <a:prstGeom prst="ellipse">
@@ -7576,7 +7576,7 @@
           </p:nvSpPr>
           <p:spPr>
             <a:xfrm>
-              <a:off x="3469502" y="3433762"/>
+              <a:off x="3415161" y="3433762"/>
               <a:ext cx="61566" cy="61566"/>
             </a:xfrm>
             <a:prstGeom prst="ellipse">
@@ -7602,7 +7602,7 @@
           </p:nvSpPr>
           <p:spPr>
             <a:xfrm>
-              <a:off x="3239917" y="2669586"/>
+              <a:off x="3195806" y="2669586"/>
               <a:ext cx="61566" cy="61566"/>
             </a:xfrm>
             <a:prstGeom prst="ellipse">
@@ -7628,7 +7628,7 @@
           </p:nvSpPr>
           <p:spPr>
             <a:xfrm>
-              <a:off x="3458064" y="3115201"/>
+              <a:off x="3480836" y="3115201"/>
               <a:ext cx="61566" cy="61566"/>
             </a:xfrm>
             <a:prstGeom prst="ellipse">
@@ -7654,7 +7654,7 @@
           </p:nvSpPr>
           <p:spPr>
             <a:xfrm>
-              <a:off x="3246600" y="3433579"/>
+              <a:off x="3225929" y="3433579"/>
               <a:ext cx="61566" cy="61566"/>
             </a:xfrm>
             <a:prstGeom prst="ellipse">
@@ -7680,7 +7680,7 @@
           </p:nvSpPr>
           <p:spPr>
             <a:xfrm>
-              <a:off x="3400741" y="3231493"/>
+              <a:off x="3409080" y="3231493"/>
               <a:ext cx="61566" cy="61566"/>
             </a:xfrm>
             <a:prstGeom prst="ellipse">
@@ -7706,7 +7706,7 @@
           </p:nvSpPr>
           <p:spPr>
             <a:xfrm>
-              <a:off x="3283199" y="2930161"/>
+              <a:off x="3225840" y="2930161"/>
               <a:ext cx="61566" cy="61566"/>
             </a:xfrm>
             <a:prstGeom prst="ellipse">
@@ -7732,7 +7732,7 @@
           </p:nvSpPr>
           <p:spPr>
             <a:xfrm>
-              <a:off x="3493646" y="3041640"/>
+              <a:off x="3481029" y="3041640"/>
               <a:ext cx="61566" cy="61566"/>
             </a:xfrm>
             <a:prstGeom prst="ellipse">
@@ -7758,7 +7758,7 @@
           </p:nvSpPr>
           <p:spPr>
             <a:xfrm>
-              <a:off x="3239854" y="2976852"/>
+              <a:off x="3247981" y="2976852"/>
               <a:ext cx="61566" cy="61566"/>
             </a:xfrm>
             <a:prstGeom prst="ellipse">
@@ -7784,7 +7784,7 @@
           </p:nvSpPr>
           <p:spPr>
             <a:xfrm>
-              <a:off x="3424744" y="3234056"/>
+              <a:off x="3443048" y="3234056"/>
               <a:ext cx="61566" cy="61566"/>
             </a:xfrm>
             <a:prstGeom prst="ellipse">
@@ -7810,7 +7810,7 @@
           </p:nvSpPr>
           <p:spPr>
             <a:xfrm>
-              <a:off x="3197983" y="2643901"/>
+              <a:off x="3234279" y="2643901"/>
               <a:ext cx="61566" cy="61566"/>
             </a:xfrm>
             <a:prstGeom prst="ellipse">
@@ -7836,7 +7836,7 @@
           </p:nvSpPr>
           <p:spPr>
             <a:xfrm>
-              <a:off x="3470344" y="2880237"/>
+              <a:off x="3488580" y="2880237"/>
               <a:ext cx="61566" cy="61566"/>
             </a:xfrm>
             <a:prstGeom prst="ellipse">
@@ -7862,7 +7862,7 @@
           </p:nvSpPr>
           <p:spPr>
             <a:xfrm>
-              <a:off x="3260291" y="2490276"/>
+              <a:off x="3246166" y="2490276"/>
               <a:ext cx="61566" cy="61566"/>
             </a:xfrm>
             <a:prstGeom prst="ellipse">
@@ -7888,7 +7888,7 @@
           </p:nvSpPr>
           <p:spPr>
             <a:xfrm>
-              <a:off x="3504543" y="2846676"/>
+              <a:off x="3482714" y="2846676"/>
               <a:ext cx="61566" cy="61566"/>
             </a:xfrm>
             <a:prstGeom prst="ellipse">
@@ -7914,7 +7914,7 @@
           </p:nvSpPr>
           <p:spPr>
             <a:xfrm>
-              <a:off x="3233030" y="2937893"/>
+              <a:off x="3265642" y="2937893"/>
               <a:ext cx="61566" cy="61566"/>
             </a:xfrm>
             <a:prstGeom prst="ellipse">
@@ -7940,7 +7940,7 @@
           </p:nvSpPr>
           <p:spPr>
             <a:xfrm>
-              <a:off x="3457689" y="3688349"/>
+              <a:off x="3507835" y="3688349"/>
               <a:ext cx="61566" cy="61566"/>
             </a:xfrm>
             <a:prstGeom prst="ellipse">
@@ -7966,7 +7966,7 @@
           </p:nvSpPr>
           <p:spPr>
             <a:xfrm>
-              <a:off x="3272154" y="3354104"/>
+              <a:off x="3259154" y="3354104"/>
               <a:ext cx="61566" cy="61566"/>
             </a:xfrm>
             <a:prstGeom prst="ellipse">
@@ -7992,7 +7992,7 @@
           </p:nvSpPr>
           <p:spPr>
             <a:xfrm>
-              <a:off x="3506255" y="3481264"/>
+              <a:off x="3405517" y="3481264"/>
               <a:ext cx="61566" cy="61566"/>
             </a:xfrm>
             <a:prstGeom prst="ellipse">
@@ -8018,7 +8018,7 @@
           </p:nvSpPr>
           <p:spPr>
             <a:xfrm>
-              <a:off x="3180060" y="2749257"/>
+              <a:off x="3241917" y="2749257"/>
               <a:ext cx="61566" cy="61566"/>
             </a:xfrm>
             <a:prstGeom prst="ellipse">
@@ -8044,7 +8044,7 @@
           </p:nvSpPr>
           <p:spPr>
             <a:xfrm>
-              <a:off x="3422566" y="2725128"/>
+              <a:off x="3469595" y="2725128"/>
               <a:ext cx="61566" cy="61566"/>
             </a:xfrm>
             <a:prstGeom prst="ellipse">
@@ -8070,7 +8070,7 @@
           </p:nvSpPr>
           <p:spPr>
             <a:xfrm>
-              <a:off x="3236438" y="2661398"/>
+              <a:off x="3215895" y="2661398"/>
               <a:ext cx="61566" cy="61566"/>
             </a:xfrm>
             <a:prstGeom prst="ellipse">
@@ -8096,7 +8096,7 @@
           </p:nvSpPr>
           <p:spPr>
             <a:xfrm>
-              <a:off x="3494057" y="3242868"/>
+              <a:off x="3485080" y="3242868"/>
               <a:ext cx="61566" cy="61566"/>
             </a:xfrm>
             <a:prstGeom prst="ellipse">
@@ -8122,7 +8122,7 @@
           </p:nvSpPr>
           <p:spPr>
             <a:xfrm>
-              <a:off x="3213376" y="2708229"/>
+              <a:off x="3215799" y="2708229"/>
               <a:ext cx="61566" cy="61566"/>
             </a:xfrm>
             <a:prstGeom prst="ellipse">
@@ -8148,7 +8148,7 @@
           </p:nvSpPr>
           <p:spPr>
             <a:xfrm>
-              <a:off x="3404701" y="2877243"/>
+              <a:off x="3420592" y="2877243"/>
               <a:ext cx="61566" cy="61566"/>
             </a:xfrm>
             <a:prstGeom prst="ellipse">
@@ -8174,7 +8174,7 @@
           </p:nvSpPr>
           <p:spPr>
             <a:xfrm>
-              <a:off x="3258204" y="3669817"/>
+              <a:off x="3217906" y="3669817"/>
               <a:ext cx="61566" cy="61566"/>
             </a:xfrm>
             <a:prstGeom prst="ellipse">
@@ -8200,7 +8200,7 @@
           </p:nvSpPr>
           <p:spPr>
             <a:xfrm>
-              <a:off x="3448558" y="3493411"/>
+              <a:off x="3424328" y="3493411"/>
               <a:ext cx="61566" cy="61566"/>
             </a:xfrm>
             <a:prstGeom prst="ellipse">
@@ -8226,7 +8226,7 @@
           </p:nvSpPr>
           <p:spPr>
             <a:xfrm>
-              <a:off x="3230140" y="3231394"/>
+              <a:off x="3254661" y="3231394"/>
               <a:ext cx="61566" cy="61566"/>
             </a:xfrm>
             <a:prstGeom prst="ellipse">
@@ -8252,7 +8252,7 @@
           </p:nvSpPr>
           <p:spPr>
             <a:xfrm>
-              <a:off x="3492153" y="3285893"/>
+              <a:off x="3463549" y="3285893"/>
               <a:ext cx="61566" cy="61566"/>
             </a:xfrm>
             <a:prstGeom prst="ellipse">
@@ -8278,7 +8278,7 @@
           </p:nvSpPr>
           <p:spPr>
             <a:xfrm>
-              <a:off x="3277603" y="3348593"/>
+              <a:off x="3252636" y="3348593"/>
               <a:ext cx="61566" cy="61566"/>
             </a:xfrm>
             <a:prstGeom prst="ellipse">
@@ -8304,7 +8304,7 @@
           </p:nvSpPr>
           <p:spPr>
             <a:xfrm>
-              <a:off x="3405975" y="3269647"/>
+              <a:off x="3430934" y="3269647"/>
               <a:ext cx="61566" cy="61566"/>
             </a:xfrm>
             <a:prstGeom prst="ellipse">
@@ -8330,7 +8330,7 @@
           </p:nvSpPr>
           <p:spPr>
             <a:xfrm>
-              <a:off x="3254102" y="3125084"/>
+              <a:off x="3214008" y="3125084"/>
               <a:ext cx="61566" cy="61566"/>
             </a:xfrm>
             <a:prstGeom prst="ellipse">
@@ -8356,7 +8356,7 @@
           </p:nvSpPr>
           <p:spPr>
             <a:xfrm>
-              <a:off x="3404067" y="3372038"/>
+              <a:off x="3504331" y="3372038"/>
               <a:ext cx="61566" cy="61566"/>
             </a:xfrm>
             <a:prstGeom prst="ellipse">
@@ -8382,7 +8382,7 @@
           </p:nvSpPr>
           <p:spPr>
             <a:xfrm>
-              <a:off x="3201981" y="3708280"/>
+              <a:off x="3243647" y="3708280"/>
               <a:ext cx="61566" cy="61566"/>
             </a:xfrm>
             <a:prstGeom prst="ellipse">
@@ -8408,7 +8408,7 @@
           </p:nvSpPr>
           <p:spPr>
             <a:xfrm>
-              <a:off x="3400959" y="4012008"/>
+              <a:off x="3412769" y="4012008"/>
               <a:ext cx="61566" cy="61566"/>
             </a:xfrm>
             <a:prstGeom prst="ellipse">
@@ -8434,7 +8434,7 @@
           </p:nvSpPr>
           <p:spPr>
             <a:xfrm>
-              <a:off x="3287394" y="2659630"/>
+              <a:off x="3183409" y="2659630"/>
               <a:ext cx="61566" cy="61566"/>
             </a:xfrm>
             <a:prstGeom prst="ellipse">
@@ -8460,7 +8460,7 @@
           </p:nvSpPr>
           <p:spPr>
             <a:xfrm>
-              <a:off x="3456904" y="2580939"/>
+              <a:off x="3407039" y="2580939"/>
               <a:ext cx="61566" cy="61566"/>
             </a:xfrm>
             <a:prstGeom prst="ellipse">
@@ -8486,7 +8486,7 @@
           </p:nvSpPr>
           <p:spPr>
             <a:xfrm>
-              <a:off x="3260376" y="3122391"/>
+              <a:off x="3280025" y="3122391"/>
               <a:ext cx="61566" cy="61566"/>
             </a:xfrm>
             <a:prstGeom prst="ellipse">
@@ -8512,7 +8512,7 @@
           </p:nvSpPr>
           <p:spPr>
             <a:xfrm>
-              <a:off x="3485657" y="3257282"/>
+              <a:off x="3481178" y="3257282"/>
               <a:ext cx="61566" cy="61566"/>
             </a:xfrm>
             <a:prstGeom prst="ellipse">
@@ -8538,7 +8538,7 @@
           </p:nvSpPr>
           <p:spPr>
             <a:xfrm>
-              <a:off x="3182151" y="2618322"/>
+              <a:off x="3251576" y="2618322"/>
               <a:ext cx="61566" cy="61566"/>
             </a:xfrm>
             <a:prstGeom prst="ellipse">
@@ -8564,7 +8564,7 @@
           </p:nvSpPr>
           <p:spPr>
             <a:xfrm>
-              <a:off x="3452277" y="2480825"/>
+              <a:off x="3485738" y="2480825"/>
               <a:ext cx="61566" cy="61566"/>
             </a:xfrm>
             <a:prstGeom prst="ellipse">
@@ -8590,7 +8590,7 @@
           </p:nvSpPr>
           <p:spPr>
             <a:xfrm>
-              <a:off x="3188275" y="2894203"/>
+              <a:off x="3239187" y="2894203"/>
               <a:ext cx="61566" cy="61566"/>
             </a:xfrm>
             <a:prstGeom prst="ellipse">
@@ -8616,7 +8616,7 @@
           </p:nvSpPr>
           <p:spPr>
             <a:xfrm>
-              <a:off x="3478433" y="2924572"/>
+              <a:off x="3413587" y="2924572"/>
               <a:ext cx="61566" cy="61566"/>
             </a:xfrm>
             <a:prstGeom prst="ellipse">
@@ -8642,7 +8642,7 @@
           </p:nvSpPr>
           <p:spPr>
             <a:xfrm>
-              <a:off x="3214754" y="2646874"/>
+              <a:off x="3249489" y="2646874"/>
               <a:ext cx="61566" cy="61566"/>
             </a:xfrm>
             <a:prstGeom prst="ellipse">
@@ -8668,7 +8668,7 @@
           </p:nvSpPr>
           <p:spPr>
             <a:xfrm>
-              <a:off x="3446395" y="2770715"/>
+              <a:off x="3483853" y="2770715"/>
               <a:ext cx="61566" cy="61566"/>
             </a:xfrm>
             <a:prstGeom prst="ellipse">
@@ -8694,7 +8694,7 @@
           </p:nvSpPr>
           <p:spPr>
             <a:xfrm>
-              <a:off x="3283190" y="3991963"/>
+              <a:off x="3226468" y="3991963"/>
               <a:ext cx="61566" cy="61566"/>
             </a:xfrm>
             <a:prstGeom prst="ellipse">
@@ -8720,7 +8720,7 @@
           </p:nvSpPr>
           <p:spPr>
             <a:xfrm>
-              <a:off x="3505352" y="3908244"/>
+              <a:off x="3429896" y="3908244"/>
               <a:ext cx="61566" cy="61566"/>
             </a:xfrm>
             <a:prstGeom prst="ellipse">
@@ -8746,7 +8746,7 @@
           </p:nvSpPr>
           <p:spPr>
             <a:xfrm>
-              <a:off x="3269466" y="2684533"/>
+              <a:off x="3190559" y="2684533"/>
               <a:ext cx="61566" cy="61566"/>
             </a:xfrm>
             <a:prstGeom prst="ellipse">
@@ -8772,7 +8772,7 @@
           </p:nvSpPr>
           <p:spPr>
             <a:xfrm>
-              <a:off x="3443449" y="2918504"/>
+              <a:off x="3409589" y="2918504"/>
               <a:ext cx="61566" cy="61566"/>
             </a:xfrm>
             <a:prstGeom prst="ellipse">
@@ -8798,7 +8798,7 @@
           </p:nvSpPr>
           <p:spPr>
             <a:xfrm>
-              <a:off x="3239812" y="2947174"/>
+              <a:off x="3261058" y="2947174"/>
               <a:ext cx="61566" cy="61566"/>
             </a:xfrm>
             <a:prstGeom prst="ellipse">
@@ -8824,7 +8824,7 @@
           </p:nvSpPr>
           <p:spPr>
             <a:xfrm>
-              <a:off x="3486066" y="2905665"/>
+              <a:off x="3435819" y="2905665"/>
               <a:ext cx="61566" cy="61566"/>
             </a:xfrm>
             <a:prstGeom prst="ellipse">
@@ -8850,7 +8850,7 @@
           </p:nvSpPr>
           <p:spPr>
             <a:xfrm>
-              <a:off x="3193152" y="2771112"/>
+              <a:off x="3179785" y="2771112"/>
               <a:ext cx="61566" cy="61566"/>
             </a:xfrm>
             <a:prstGeom prst="ellipse">
@@ -8876,7 +8876,7 @@
           </p:nvSpPr>
           <p:spPr>
             <a:xfrm>
-              <a:off x="3417407" y="3093577"/>
+              <a:off x="3466966" y="3093577"/>
               <a:ext cx="61566" cy="61566"/>
             </a:xfrm>
             <a:prstGeom prst="ellipse">
@@ -8902,7 +8902,7 @@
           </p:nvSpPr>
           <p:spPr>
             <a:xfrm>
-              <a:off x="3197150" y="2406450"/>
+              <a:off x="3183734" y="2406450"/>
               <a:ext cx="61566" cy="61566"/>
             </a:xfrm>
             <a:prstGeom prst="ellipse">
@@ -8928,7 +8928,7 @@
           </p:nvSpPr>
           <p:spPr>
             <a:xfrm>
-              <a:off x="3464310" y="2614744"/>
+              <a:off x="3446988" y="2614744"/>
               <a:ext cx="61566" cy="61566"/>
             </a:xfrm>
             <a:prstGeom prst="ellipse">
@@ -8954,7 +8954,7 @@
           </p:nvSpPr>
           <p:spPr>
             <a:xfrm>
-              <a:off x="3189691" y="2639665"/>
+              <a:off x="3210010" y="2639665"/>
               <a:ext cx="61566" cy="61566"/>
             </a:xfrm>
             <a:prstGeom prst="ellipse">
@@ -8980,7 +8980,7 @@
           </p:nvSpPr>
           <p:spPr>
             <a:xfrm>
-              <a:off x="3434058" y="2667125"/>
+              <a:off x="3451613" y="2667125"/>
               <a:ext cx="61566" cy="61566"/>
             </a:xfrm>
             <a:prstGeom prst="ellipse">
@@ -9006,7 +9006,7 @@
           </p:nvSpPr>
           <p:spPr>
             <a:xfrm>
-              <a:off x="3180898" y="3114643"/>
+              <a:off x="3256357" y="3114643"/>
               <a:ext cx="61566" cy="61566"/>
             </a:xfrm>
             <a:prstGeom prst="ellipse">
@@ -9032,7 +9032,7 @@
           </p:nvSpPr>
           <p:spPr>
             <a:xfrm>
-              <a:off x="3447538" y="3574432"/>
+              <a:off x="3452997" y="3574432"/>
               <a:ext cx="61566" cy="61566"/>
             </a:xfrm>
             <a:prstGeom prst="ellipse">
@@ -9058,7 +9058,7 @@
           </p:nvSpPr>
           <p:spPr>
             <a:xfrm>
-              <a:off x="3210383" y="3068145"/>
+              <a:off x="3250671" y="3068145"/>
               <a:ext cx="61566" cy="61566"/>
             </a:xfrm>
             <a:prstGeom prst="ellipse">
@@ -9084,7 +9084,7 @@
           </p:nvSpPr>
           <p:spPr>
             <a:xfrm>
-              <a:off x="3444964" y="2944608"/>
+              <a:off x="3494903" y="2944608"/>
               <a:ext cx="61566" cy="61566"/>
             </a:xfrm>
             <a:prstGeom prst="ellipse">
@@ -9110,7 +9110,7 @@
           </p:nvSpPr>
           <p:spPr>
             <a:xfrm>
-              <a:off x="3278142" y="2667701"/>
+              <a:off x="3192004" y="2667701"/>
               <a:ext cx="61566" cy="61566"/>
             </a:xfrm>
             <a:prstGeom prst="ellipse">
@@ -9136,7 +9136,7 @@
           </p:nvSpPr>
           <p:spPr>
             <a:xfrm>
-              <a:off x="3489575" y="2904562"/>
+              <a:off x="3447930" y="2904562"/>
               <a:ext cx="61566" cy="61566"/>
             </a:xfrm>
             <a:prstGeom prst="ellipse">
@@ -9162,7 +9162,7 @@
           </p:nvSpPr>
           <p:spPr>
             <a:xfrm>
-              <a:off x="3194766" y="3022086"/>
+              <a:off x="3203114" y="3022086"/>
               <a:ext cx="61566" cy="61566"/>
             </a:xfrm>
             <a:prstGeom prst="ellipse">
@@ -9188,7 +9188,7 @@
           </p:nvSpPr>
           <p:spPr>
             <a:xfrm>
-              <a:off x="3425645" y="3380549"/>
+              <a:off x="3488892" y="3380549"/>
               <a:ext cx="61566" cy="61566"/>
             </a:xfrm>
             <a:prstGeom prst="ellipse">
@@ -9214,7 +9214,7 @@
           </p:nvSpPr>
           <p:spPr>
             <a:xfrm>
-              <a:off x="3245158" y="2788566"/>
+              <a:off x="3208544" y="2788566"/>
               <a:ext cx="61566" cy="61566"/>
             </a:xfrm>
             <a:prstGeom prst="ellipse">
@@ -9240,7 +9240,7 @@
           </p:nvSpPr>
           <p:spPr>
             <a:xfrm>
-              <a:off x="3445711" y="2982588"/>
+              <a:off x="3438007" y="2982588"/>
               <a:ext cx="61566" cy="61566"/>
             </a:xfrm>
             <a:prstGeom prst="ellipse">
@@ -9266,7 +9266,7 @@
           </p:nvSpPr>
           <p:spPr>
             <a:xfrm>
-              <a:off x="3262933" y="2694323"/>
+              <a:off x="3269616" y="2694323"/>
               <a:ext cx="61566" cy="61566"/>
             </a:xfrm>
             <a:prstGeom prst="ellipse">
@@ -9292,7 +9292,7 @@
           </p:nvSpPr>
           <p:spPr>
             <a:xfrm>
-              <a:off x="3441210" y="2920690"/>
+              <a:off x="3410177" y="2920690"/>
               <a:ext cx="61566" cy="61566"/>
             </a:xfrm>
             <a:prstGeom prst="ellipse">
@@ -9318,7 +9318,7 @@
           </p:nvSpPr>
           <p:spPr>
             <a:xfrm>
-              <a:off x="3232588" y="2284466"/>
+              <a:off x="3228663" y="2284466"/>
               <a:ext cx="61566" cy="61566"/>
             </a:xfrm>
             <a:prstGeom prst="ellipse">
@@ -9344,7 +9344,7 @@
           </p:nvSpPr>
           <p:spPr>
             <a:xfrm>
-              <a:off x="3499071" y="2660565"/>
+              <a:off x="3415114" y="2660565"/>
               <a:ext cx="61566" cy="61566"/>
             </a:xfrm>
             <a:prstGeom prst="ellipse">
@@ -9370,7 +9370,7 @@
           </p:nvSpPr>
           <p:spPr>
             <a:xfrm>
-              <a:off x="3258696" y="2532920"/>
+              <a:off x="3262790" y="2532920"/>
               <a:ext cx="61566" cy="61566"/>
             </a:xfrm>
             <a:prstGeom prst="ellipse">
@@ -9396,7 +9396,7 @@
           </p:nvSpPr>
           <p:spPr>
             <a:xfrm>
-              <a:off x="3429992" y="3135112"/>
+              <a:off x="3440272" y="3135112"/>
               <a:ext cx="61566" cy="61566"/>
             </a:xfrm>
             <a:prstGeom prst="ellipse">
@@ -9422,7 +9422,7 @@
           </p:nvSpPr>
           <p:spPr>
             <a:xfrm>
-              <a:off x="3245266" y="2198102"/>
+              <a:off x="3285159" y="2198102"/>
               <a:ext cx="61566" cy="61566"/>
             </a:xfrm>
             <a:prstGeom prst="ellipse">
@@ -9448,7 +9448,7 @@
           </p:nvSpPr>
           <p:spPr>
             <a:xfrm>
-              <a:off x="3506329" y="2707406"/>
+              <a:off x="3445147" y="2707406"/>
               <a:ext cx="61566" cy="61566"/>
             </a:xfrm>
             <a:prstGeom prst="ellipse">
@@ -9474,7 +9474,7 @@
           </p:nvSpPr>
           <p:spPr>
             <a:xfrm>
-              <a:off x="3263221" y="2582017"/>
+              <a:off x="3201915" y="2582017"/>
               <a:ext cx="61566" cy="61566"/>
             </a:xfrm>
             <a:prstGeom prst="ellipse">
@@ -9500,7 +9500,7 @@
           </p:nvSpPr>
           <p:spPr>
             <a:xfrm>
-              <a:off x="3416249" y="2723368"/>
+              <a:off x="3410151" y="2723368"/>
               <a:ext cx="61566" cy="61566"/>
             </a:xfrm>
             <a:prstGeom prst="ellipse">
@@ -9526,7 +9526,7 @@
           </p:nvSpPr>
           <p:spPr>
             <a:xfrm>
-              <a:off x="3234202" y="2818782"/>
+              <a:off x="3272243" y="2818782"/>
               <a:ext cx="61566" cy="61566"/>
             </a:xfrm>
             <a:prstGeom prst="ellipse">
@@ -9552,7 +9552,7 @@
           </p:nvSpPr>
           <p:spPr>
             <a:xfrm>
-              <a:off x="3401595" y="2611345"/>
+              <a:off x="3416137" y="2611345"/>
               <a:ext cx="61566" cy="61566"/>
             </a:xfrm>
             <a:prstGeom prst="ellipse">
@@ -9578,7 +9578,7 @@
           </p:nvSpPr>
           <p:spPr>
             <a:xfrm>
-              <a:off x="3261182" y="2881758"/>
+              <a:off x="3232548" y="2881758"/>
               <a:ext cx="61566" cy="61566"/>
             </a:xfrm>
             <a:prstGeom prst="ellipse">
@@ -9604,7 +9604,7 @@
           </p:nvSpPr>
           <p:spPr>
             <a:xfrm>
-              <a:off x="3498768" y="3159845"/>
+              <a:off x="3419389" y="3159845"/>
               <a:ext cx="61566" cy="61566"/>
             </a:xfrm>
             <a:prstGeom prst="ellipse">
@@ -9630,7 +9630,7 @@
           </p:nvSpPr>
           <p:spPr>
             <a:xfrm>
-              <a:off x="3263650" y="3196126"/>
+              <a:off x="3224288" y="3196126"/>
               <a:ext cx="61566" cy="61566"/>
             </a:xfrm>
             <a:prstGeom prst="ellipse">
@@ -9656,7 +9656,7 @@
           </p:nvSpPr>
           <p:spPr>
             <a:xfrm>
-              <a:off x="3406580" y="3081431"/>
+              <a:off x="3447301" y="3081431"/>
               <a:ext cx="61566" cy="61566"/>
             </a:xfrm>
             <a:prstGeom prst="ellipse">
@@ -9682,7 +9682,7 @@
           </p:nvSpPr>
           <p:spPr>
             <a:xfrm>
-              <a:off x="3207074" y="3347048"/>
+              <a:off x="3255456" y="3347048"/>
               <a:ext cx="61566" cy="61566"/>
             </a:xfrm>
             <a:prstGeom prst="ellipse">
@@ -9708,7 +9708,7 @@
           </p:nvSpPr>
           <p:spPr>
             <a:xfrm>
-              <a:off x="3416521" y="3140853"/>
+              <a:off x="3407752" y="3140853"/>
               <a:ext cx="61566" cy="61566"/>
             </a:xfrm>
             <a:prstGeom prst="ellipse">
@@ -9734,7 +9734,7 @@
           </p:nvSpPr>
           <p:spPr>
             <a:xfrm>
-              <a:off x="3200495" y="2632612"/>
+              <a:off x="3269914" y="2632612"/>
               <a:ext cx="61566" cy="61566"/>
             </a:xfrm>
             <a:prstGeom prst="ellipse">
@@ -9760,7 +9760,7 @@
           </p:nvSpPr>
           <p:spPr>
             <a:xfrm>
-              <a:off x="3449640" y="2688731"/>
+              <a:off x="3422807" y="2688731"/>
               <a:ext cx="61566" cy="61566"/>
             </a:xfrm>
             <a:prstGeom prst="ellipse">
@@ -9786,7 +9786,7 @@
           </p:nvSpPr>
           <p:spPr>
             <a:xfrm>
-              <a:off x="3217413" y="3299484"/>
+              <a:off x="3188357" y="3299484"/>
               <a:ext cx="61566" cy="61566"/>
             </a:xfrm>
             <a:prstGeom prst="ellipse">
@@ -9812,7 +9812,7 @@
           </p:nvSpPr>
           <p:spPr>
             <a:xfrm>
-              <a:off x="3443248" y="3112150"/>
+              <a:off x="3438591" y="3112150"/>
               <a:ext cx="61566" cy="61566"/>
             </a:xfrm>
             <a:prstGeom prst="ellipse">
@@ -9838,7 +9838,7 @@
           </p:nvSpPr>
           <p:spPr>
             <a:xfrm>
-              <a:off x="3226657" y="3019598"/>
+              <a:off x="3285698" y="3019598"/>
               <a:ext cx="61566" cy="61566"/>
             </a:xfrm>
             <a:prstGeom prst="ellipse">
@@ -9864,7 +9864,7 @@
           </p:nvSpPr>
           <p:spPr>
             <a:xfrm>
-              <a:off x="3429102" y="3373134"/>
+              <a:off x="3463415" y="3373134"/>
               <a:ext cx="61566" cy="61566"/>
             </a:xfrm>
             <a:prstGeom prst="ellipse">
@@ -9890,7 +9890,7 @@
           </p:nvSpPr>
           <p:spPr>
             <a:xfrm>
-              <a:off x="3198425" y="3086308"/>
+              <a:off x="3205151" y="3086308"/>
               <a:ext cx="61566" cy="61566"/>
             </a:xfrm>
             <a:prstGeom prst="ellipse">
@@ -9916,7 +9916,7 @@
           </p:nvSpPr>
           <p:spPr>
             <a:xfrm>
-              <a:off x="3444139" y="3060088"/>
+              <a:off x="3469937" y="3060088"/>
               <a:ext cx="61566" cy="61566"/>
             </a:xfrm>
             <a:prstGeom prst="ellipse">
@@ -9942,7 +9942,7 @@
           </p:nvSpPr>
           <p:spPr>
             <a:xfrm>
-              <a:off x="3273698" y="3171443"/>
+              <a:off x="3188535" y="3171443"/>
               <a:ext cx="61566" cy="61566"/>
             </a:xfrm>
             <a:prstGeom prst="ellipse">
@@ -9968,7 +9968,7 @@
           </p:nvSpPr>
           <p:spPr>
             <a:xfrm>
-              <a:off x="3468250" y="3515765"/>
+              <a:off x="3455726" y="3515765"/>
               <a:ext cx="61566" cy="61566"/>
             </a:xfrm>
             <a:prstGeom prst="ellipse">
@@ -9994,7 +9994,7 @@
           </p:nvSpPr>
           <p:spPr>
             <a:xfrm>
-              <a:off x="3187384" y="2793041"/>
+              <a:off x="3187792" y="2793041"/>
               <a:ext cx="61566" cy="61566"/>
             </a:xfrm>
             <a:prstGeom prst="ellipse">
@@ -10020,7 +10020,7 @@
           </p:nvSpPr>
           <p:spPr>
             <a:xfrm>
-              <a:off x="3432560" y="2778016"/>
+              <a:off x="3416886" y="2778016"/>
               <a:ext cx="61566" cy="61566"/>
             </a:xfrm>
             <a:prstGeom prst="ellipse">
@@ -10046,7 +10046,7 @@
           </p:nvSpPr>
           <p:spPr>
             <a:xfrm>
-              <a:off x="3252260" y="3094097"/>
+              <a:off x="3221224" y="3094097"/>
               <a:ext cx="61566" cy="61566"/>
             </a:xfrm>
             <a:prstGeom prst="ellipse">
@@ -10072,7 +10072,7 @@
           </p:nvSpPr>
           <p:spPr>
             <a:xfrm>
-              <a:off x="3460339" y="3235857"/>
+              <a:off x="3418105" y="3235857"/>
               <a:ext cx="61566" cy="61566"/>
             </a:xfrm>
             <a:prstGeom prst="ellipse">
@@ -10098,7 +10098,7 @@
           </p:nvSpPr>
           <p:spPr>
             <a:xfrm>
-              <a:off x="3192413" y="2866522"/>
+              <a:off x="3286235" y="2866522"/>
               <a:ext cx="61566" cy="61566"/>
             </a:xfrm>
             <a:prstGeom prst="ellipse">
@@ -10124,7 +10124,7 @@
           </p:nvSpPr>
           <p:spPr>
             <a:xfrm>
-              <a:off x="3424774" y="2886885"/>
+              <a:off x="3424655" y="2886885"/>
               <a:ext cx="61566" cy="61566"/>
             </a:xfrm>
             <a:prstGeom prst="ellipse">
@@ -10150,7 +10150,7 @@
           </p:nvSpPr>
           <p:spPr>
             <a:xfrm>
-              <a:off x="3191711" y="2559645"/>
+              <a:off x="3258374" y="2559645"/>
               <a:ext cx="61566" cy="61566"/>
             </a:xfrm>
             <a:prstGeom prst="ellipse">
@@ -10176,7 +10176,7 @@
           </p:nvSpPr>
           <p:spPr>
             <a:xfrm>
-              <a:off x="3410685" y="2629376"/>
+              <a:off x="3496711" y="2629376"/>
               <a:ext cx="61566" cy="61566"/>
             </a:xfrm>
             <a:prstGeom prst="ellipse">
@@ -10202,7 +10202,7 @@
           </p:nvSpPr>
           <p:spPr>
             <a:xfrm>
-              <a:off x="3224608" y="2923583"/>
+              <a:off x="3192706" y="2923583"/>
               <a:ext cx="61566" cy="61566"/>
             </a:xfrm>
             <a:prstGeom prst="ellipse">
@@ -10228,7 +10228,7 @@
           </p:nvSpPr>
           <p:spPr>
             <a:xfrm>
-              <a:off x="3498781" y="2993403"/>
+              <a:off x="3462079" y="2993403"/>
               <a:ext cx="61566" cy="61566"/>
             </a:xfrm>
             <a:prstGeom prst="ellipse">
@@ -10254,7 +10254,7 @@
           </p:nvSpPr>
           <p:spPr>
             <a:xfrm>
-              <a:off x="3231757" y="3043028"/>
+              <a:off x="3220059" y="3043028"/>
               <a:ext cx="61566" cy="61566"/>
             </a:xfrm>
             <a:prstGeom prst="ellipse">
@@ -10280,7 +10280,7 @@
           </p:nvSpPr>
           <p:spPr>
             <a:xfrm>
-              <a:off x="3449007" y="2972822"/>
+              <a:off x="3441039" y="2972822"/>
               <a:ext cx="61566" cy="61566"/>
             </a:xfrm>
             <a:prstGeom prst="ellipse">
@@ -10306,7 +10306,7 @@
           </p:nvSpPr>
           <p:spPr>
             <a:xfrm>
-              <a:off x="3212124" y="2648131"/>
+              <a:off x="3182673" y="2648131"/>
               <a:ext cx="61566" cy="61566"/>
             </a:xfrm>
             <a:prstGeom prst="ellipse">
@@ -10332,7 +10332,7 @@
           </p:nvSpPr>
           <p:spPr>
             <a:xfrm>
-              <a:off x="3500630" y="3255395"/>
+              <a:off x="3454380" y="3255395"/>
               <a:ext cx="61566" cy="61566"/>
             </a:xfrm>
             <a:prstGeom prst="ellipse">
@@ -10358,7 +10358,7 @@
           </p:nvSpPr>
           <p:spPr>
             <a:xfrm>
-              <a:off x="3257883" y="3043750"/>
+              <a:off x="3263744" y="3043750"/>
               <a:ext cx="61566" cy="61566"/>
             </a:xfrm>
             <a:prstGeom prst="ellipse">
@@ -10384,7 +10384,7 @@
           </p:nvSpPr>
           <p:spPr>
             <a:xfrm>
-              <a:off x="3467173" y="3461615"/>
+              <a:off x="3459516" y="3461615"/>
               <a:ext cx="61566" cy="61566"/>
             </a:xfrm>
             <a:prstGeom prst="ellipse">
@@ -10410,7 +10410,7 @@
           </p:nvSpPr>
           <p:spPr>
             <a:xfrm>
-              <a:off x="3262030" y="3022448"/>
+              <a:off x="3211888" y="3022448"/>
               <a:ext cx="61566" cy="61566"/>
             </a:xfrm>
             <a:prstGeom prst="ellipse">
@@ -10436,7 +10436,7 @@
           </p:nvSpPr>
           <p:spPr>
             <a:xfrm>
-              <a:off x="3403845" y="2824435"/>
+              <a:off x="3500599" y="2824435"/>
               <a:ext cx="61566" cy="61566"/>
             </a:xfrm>
             <a:prstGeom prst="ellipse">
@@ -10462,7 +10462,7 @@
           </p:nvSpPr>
           <p:spPr>
             <a:xfrm>
-              <a:off x="3258944" y="2846456"/>
+              <a:off x="3181410" y="2846456"/>
               <a:ext cx="61566" cy="61566"/>
             </a:xfrm>
             <a:prstGeom prst="ellipse">
@@ -10488,7 +10488,7 @@
           </p:nvSpPr>
           <p:spPr>
             <a:xfrm>
-              <a:off x="3492000" y="3058158"/>
+              <a:off x="3406449" y="3058158"/>
               <a:ext cx="61566" cy="61566"/>
             </a:xfrm>
             <a:prstGeom prst="ellipse">
@@ -10514,7 +10514,7 @@
           </p:nvSpPr>
           <p:spPr>
             <a:xfrm>
-              <a:off x="3218099" y="3447297"/>
+              <a:off x="3278636" y="3447297"/>
               <a:ext cx="61566" cy="61566"/>
             </a:xfrm>
             <a:prstGeom prst="ellipse">
@@ -10540,7 +10540,7 @@
           </p:nvSpPr>
           <p:spPr>
             <a:xfrm>
-              <a:off x="3492993" y="3240291"/>
+              <a:off x="3453666" y="3240291"/>
               <a:ext cx="61566" cy="61566"/>
             </a:xfrm>
             <a:prstGeom prst="ellipse">
@@ -10566,7 +10566,7 @@
           </p:nvSpPr>
           <p:spPr>
             <a:xfrm>
-              <a:off x="3219620" y="2858928"/>
+              <a:off x="3258986" y="2858928"/>
               <a:ext cx="61566" cy="61566"/>
             </a:xfrm>
             <a:prstGeom prst="ellipse">
@@ -10592,7 +10592,7 @@
           </p:nvSpPr>
           <p:spPr>
             <a:xfrm>
-              <a:off x="3428772" y="2751089"/>
+              <a:off x="3411802" y="2751089"/>
               <a:ext cx="61566" cy="61566"/>
             </a:xfrm>
             <a:prstGeom prst="ellipse">
@@ -10618,7 +10618,7 @@
           </p:nvSpPr>
           <p:spPr>
             <a:xfrm>
-              <a:off x="3270213" y="2813447"/>
+              <a:off x="3241585" y="2813447"/>
               <a:ext cx="61566" cy="61566"/>
             </a:xfrm>
             <a:prstGeom prst="ellipse">
@@ -10644,7 +10644,7 @@
           </p:nvSpPr>
           <p:spPr>
             <a:xfrm>
-              <a:off x="3491163" y="2690622"/>
+              <a:off x="3482093" y="2690622"/>
               <a:ext cx="61566" cy="61566"/>
             </a:xfrm>
             <a:prstGeom prst="ellipse">
@@ -10670,7 +10670,7 @@
           </p:nvSpPr>
           <p:spPr>
             <a:xfrm>
-              <a:off x="3289400" y="3402524"/>
+              <a:off x="3181429" y="3402524"/>
               <a:ext cx="61566" cy="61566"/>
             </a:xfrm>
             <a:prstGeom prst="ellipse">
@@ -10696,7 +10696,7 @@
           </p:nvSpPr>
           <p:spPr>
             <a:xfrm>
-              <a:off x="3419305" y="2866244"/>
+              <a:off x="3508896" y="2866244"/>
               <a:ext cx="61566" cy="61566"/>
             </a:xfrm>
             <a:prstGeom prst="ellipse">
@@ -10722,7 +10722,7 @@
           </p:nvSpPr>
           <p:spPr>
             <a:xfrm>
-              <a:off x="3284172" y="3504063"/>
+              <a:off x="3238555" y="3504063"/>
               <a:ext cx="61566" cy="61566"/>
             </a:xfrm>
             <a:prstGeom prst="ellipse">
@@ -10748,7 +10748,7 @@
           </p:nvSpPr>
           <p:spPr>
             <a:xfrm>
-              <a:off x="3403254" y="3418060"/>
+              <a:off x="3477757" y="3418060"/>
               <a:ext cx="61566" cy="61566"/>
             </a:xfrm>
             <a:prstGeom prst="ellipse">
@@ -10774,7 +10774,7 @@
           </p:nvSpPr>
           <p:spPr>
             <a:xfrm>
-              <a:off x="3202106" y="2622472"/>
+              <a:off x="3211686" y="2622472"/>
               <a:ext cx="61566" cy="61566"/>
             </a:xfrm>
             <a:prstGeom prst="ellipse">
@@ -10800,7 +10800,7 @@
           </p:nvSpPr>
           <p:spPr>
             <a:xfrm>
-              <a:off x="3449520" y="2822803"/>
+              <a:off x="3437411" y="2822803"/>
               <a:ext cx="61566" cy="61566"/>
             </a:xfrm>
             <a:prstGeom prst="ellipse">
@@ -10826,7 +10826,7 @@
           </p:nvSpPr>
           <p:spPr>
             <a:xfrm>
-              <a:off x="3215381" y="3142512"/>
+              <a:off x="3223788" y="3142512"/>
               <a:ext cx="61566" cy="61566"/>
             </a:xfrm>
             <a:prstGeom prst="ellipse">
@@ -10852,7 +10852,7 @@
           </p:nvSpPr>
           <p:spPr>
             <a:xfrm>
-              <a:off x="3423578" y="3130348"/>
+              <a:off x="3426870" y="3130348"/>
               <a:ext cx="61566" cy="61566"/>
             </a:xfrm>
             <a:prstGeom prst="ellipse">
@@ -10878,7 +10878,7 @@
           </p:nvSpPr>
           <p:spPr>
             <a:xfrm>
-              <a:off x="3235019" y="2969786"/>
+              <a:off x="3193862" y="2969786"/>
               <a:ext cx="61566" cy="61566"/>
             </a:xfrm>
             <a:prstGeom prst="ellipse">
@@ -10904,7 +10904,7 @@
           </p:nvSpPr>
           <p:spPr>
             <a:xfrm>
-              <a:off x="3479559" y="2998002"/>
+              <a:off x="3450642" y="2998002"/>
               <a:ext cx="61566" cy="61566"/>
             </a:xfrm>
             <a:prstGeom prst="ellipse">
@@ -10930,7 +10930,7 @@
           </p:nvSpPr>
           <p:spPr>
             <a:xfrm>
-              <a:off x="3196694" y="2815633"/>
+              <a:off x="3241495" y="2815633"/>
               <a:ext cx="61566" cy="61566"/>
             </a:xfrm>
             <a:prstGeom prst="ellipse">
@@ -10956,7 +10956,7 @@
           </p:nvSpPr>
           <p:spPr>
             <a:xfrm>
-              <a:off x="3411821" y="3032140"/>
+              <a:off x="3435294" y="3032140"/>
               <a:ext cx="61566" cy="61566"/>
             </a:xfrm>
             <a:prstGeom prst="ellipse">
@@ -10982,7 +10982,7 @@
           </p:nvSpPr>
           <p:spPr>
             <a:xfrm>
-              <a:off x="3190973" y="3066360"/>
+              <a:off x="3229426" y="3066360"/>
               <a:ext cx="61566" cy="61566"/>
             </a:xfrm>
             <a:prstGeom prst="ellipse">
@@ -11008,7 +11008,7 @@
           </p:nvSpPr>
           <p:spPr>
             <a:xfrm>
-              <a:off x="3468693" y="2782444"/>
+              <a:off x="3505772" y="2782444"/>
               <a:ext cx="61566" cy="61566"/>
             </a:xfrm>
             <a:prstGeom prst="ellipse">
@@ -11034,7 +11034,7 @@
           </p:nvSpPr>
           <p:spPr>
             <a:xfrm>
-              <a:off x="3201956" y="3147309"/>
+              <a:off x="3206155" y="3147309"/>
               <a:ext cx="61566" cy="61566"/>
             </a:xfrm>
             <a:prstGeom prst="ellipse">
@@ -11060,7 +11060,7 @@
           </p:nvSpPr>
           <p:spPr>
             <a:xfrm>
-              <a:off x="3426449" y="2894934"/>
+              <a:off x="3489240" y="2894934"/>
               <a:ext cx="61566" cy="61566"/>
             </a:xfrm>
             <a:prstGeom prst="ellipse">
@@ -11086,7 +11086,7 @@
           </p:nvSpPr>
           <p:spPr>
             <a:xfrm>
-              <a:off x="3202667" y="2752191"/>
+              <a:off x="3266981" y="2752191"/>
               <a:ext cx="61566" cy="61566"/>
             </a:xfrm>
             <a:prstGeom prst="ellipse">
@@ -11112,7 +11112,7 @@
           </p:nvSpPr>
           <p:spPr>
             <a:xfrm>
-              <a:off x="3439633" y="2677576"/>
+              <a:off x="3471926" y="2677576"/>
               <a:ext cx="61566" cy="61566"/>
             </a:xfrm>
             <a:prstGeom prst="ellipse">
@@ -11138,7 +11138,7 @@
           </p:nvSpPr>
           <p:spPr>
             <a:xfrm>
-              <a:off x="3261395" y="2423422"/>
+              <a:off x="3233846" y="2423422"/>
               <a:ext cx="61566" cy="61566"/>
             </a:xfrm>
             <a:prstGeom prst="ellipse">
@@ -11164,7 +11164,7 @@
           </p:nvSpPr>
           <p:spPr>
             <a:xfrm>
-              <a:off x="3416473" y="2388582"/>
+              <a:off x="3461132" y="2388582"/>
               <a:ext cx="61566" cy="61566"/>
             </a:xfrm>
             <a:prstGeom prst="ellipse">
@@ -11190,7 +11190,7 @@
           </p:nvSpPr>
           <p:spPr>
             <a:xfrm>
-              <a:off x="3181275" y="2699609"/>
+              <a:off x="3266668" y="2699609"/>
               <a:ext cx="61566" cy="61566"/>
             </a:xfrm>
             <a:prstGeom prst="ellipse">
@@ -11216,7 +11216,7 @@
           </p:nvSpPr>
           <p:spPr>
             <a:xfrm>
-              <a:off x="3415312" y="2622605"/>
+              <a:off x="3501592" y="2622605"/>
               <a:ext cx="61566" cy="61566"/>
             </a:xfrm>
             <a:prstGeom prst="ellipse">
@@ -11242,7 +11242,7 @@
           </p:nvSpPr>
           <p:spPr>
             <a:xfrm>
-              <a:off x="3251261" y="2582915"/>
+              <a:off x="3257504" y="2582915"/>
               <a:ext cx="61566" cy="61566"/>
             </a:xfrm>
             <a:prstGeom prst="ellipse">
@@ -11268,7 +11268,7 @@
           </p:nvSpPr>
           <p:spPr>
             <a:xfrm>
-              <a:off x="3510307" y="2516397"/>
+              <a:off x="3425531" y="2516397"/>
               <a:ext cx="61566" cy="61566"/>
             </a:xfrm>
             <a:prstGeom prst="ellipse">
@@ -11294,7 +11294,7 @@
           </p:nvSpPr>
           <p:spPr>
             <a:xfrm>
-              <a:off x="3197417" y="2740623"/>
+              <a:off x="3191343" y="2740623"/>
               <a:ext cx="61566" cy="61566"/>
             </a:xfrm>
             <a:prstGeom prst="ellipse">
@@ -11320,7 +11320,7 @@
           </p:nvSpPr>
           <p:spPr>
             <a:xfrm>
-              <a:off x="3454221" y="2916926"/>
+              <a:off x="3438666" y="2916926"/>
               <a:ext cx="61566" cy="61566"/>
             </a:xfrm>
             <a:prstGeom prst="ellipse">
@@ -11346,7 +11346,7 @@
           </p:nvSpPr>
           <p:spPr>
             <a:xfrm>
-              <a:off x="3274645" y="3168260"/>
+              <a:off x="3201270" y="3168260"/>
               <a:ext cx="61566" cy="61566"/>
             </a:xfrm>
             <a:prstGeom prst="ellipse">
@@ -11372,7 +11372,7 @@
           </p:nvSpPr>
           <p:spPr>
             <a:xfrm>
-              <a:off x="3417108" y="3125870"/>
+              <a:off x="3504835" y="3125870"/>
               <a:ext cx="61566" cy="61566"/>
             </a:xfrm>
             <a:prstGeom prst="ellipse">
@@ -11398,7 +11398,7 @@
           </p:nvSpPr>
           <p:spPr>
             <a:xfrm>
-              <a:off x="3267244" y="3052650"/>
+              <a:off x="3282668" y="3052650"/>
               <a:ext cx="61566" cy="61566"/>
             </a:xfrm>
             <a:prstGeom prst="ellipse">
@@ -11424,7 +11424,7 @@
           </p:nvSpPr>
           <p:spPr>
             <a:xfrm>
-              <a:off x="3496459" y="2874347"/>
+              <a:off x="3488829" y="2874347"/>
               <a:ext cx="61566" cy="61566"/>
             </a:xfrm>
             <a:prstGeom prst="ellipse">
@@ -11450,7 +11450,7 @@
           </p:nvSpPr>
           <p:spPr>
             <a:xfrm>
-              <a:off x="3202667" y="2909905"/>
+              <a:off x="3180737" y="2909905"/>
               <a:ext cx="61566" cy="61566"/>
             </a:xfrm>
             <a:prstGeom prst="ellipse">
@@ -11476,7 +11476,7 @@
           </p:nvSpPr>
           <p:spPr>
             <a:xfrm>
-              <a:off x="3426134" y="2678654"/>
+              <a:off x="3464688" y="2678654"/>
               <a:ext cx="61566" cy="61566"/>
             </a:xfrm>
             <a:prstGeom prst="ellipse">
@@ -11502,7 +11502,7 @@
           </p:nvSpPr>
           <p:spPr>
             <a:xfrm>
-              <a:off x="3279728" y="2410322"/>
+              <a:off x="3210549" y="2410322"/>
               <a:ext cx="61566" cy="61566"/>
             </a:xfrm>
             <a:prstGeom prst="ellipse">
@@ -11528,7 +11528,7 @@
           </p:nvSpPr>
           <p:spPr>
             <a:xfrm>
-              <a:off x="3463604" y="2461588"/>
+              <a:off x="3470595" y="2461588"/>
               <a:ext cx="61566" cy="61566"/>
             </a:xfrm>
             <a:prstGeom prst="ellipse">
@@ -11554,7 +11554,7 @@
           </p:nvSpPr>
           <p:spPr>
             <a:xfrm>
-              <a:off x="3192181" y="3312987"/>
+              <a:off x="3233992" y="3312987"/>
               <a:ext cx="61566" cy="61566"/>
             </a:xfrm>
             <a:prstGeom prst="ellipse">
@@ -11580,7 +11580,7 @@
           </p:nvSpPr>
           <p:spPr>
             <a:xfrm>
-              <a:off x="3467075" y="2696515"/>
+              <a:off x="3429447" y="2696515"/>
               <a:ext cx="61566" cy="61566"/>
             </a:xfrm>
             <a:prstGeom prst="ellipse">
@@ -11606,7 +11606,7 @@
           </p:nvSpPr>
           <p:spPr>
             <a:xfrm>
-              <a:off x="3188944" y="2749958"/>
+              <a:off x="3250299" y="2749958"/>
               <a:ext cx="61566" cy="61566"/>
             </a:xfrm>
             <a:prstGeom prst="ellipse">
@@ -11632,7 +11632,7 @@
           </p:nvSpPr>
           <p:spPr>
             <a:xfrm>
-              <a:off x="3452560" y="2949466"/>
+              <a:off x="3494474" y="2949466"/>
               <a:ext cx="61566" cy="61566"/>
             </a:xfrm>
             <a:prstGeom prst="ellipse">
@@ -11658,7 +11658,7 @@
           </p:nvSpPr>
           <p:spPr>
             <a:xfrm>
-              <a:off x="3217474" y="2528481"/>
+              <a:off x="3240699" y="2528481"/>
               <a:ext cx="61566" cy="61566"/>
             </a:xfrm>
             <a:prstGeom prst="ellipse">
@@ -11684,7 +11684,7 @@
           </p:nvSpPr>
           <p:spPr>
             <a:xfrm>
-              <a:off x="3489974" y="2592256"/>
+              <a:off x="3401957" y="2592256"/>
               <a:ext cx="61566" cy="61566"/>
             </a:xfrm>
             <a:prstGeom prst="ellipse">
@@ -11710,7 +11710,7 @@
           </p:nvSpPr>
           <p:spPr>
             <a:xfrm>
-              <a:off x="3267900" y="2373130"/>
+              <a:off x="3240076" y="2373130"/>
               <a:ext cx="61566" cy="61566"/>
             </a:xfrm>
             <a:prstGeom prst="ellipse">
@@ -11736,7 +11736,7 @@
           </p:nvSpPr>
           <p:spPr>
             <a:xfrm>
-              <a:off x="3427431" y="2351876"/>
+              <a:off x="3490199" y="2351876"/>
               <a:ext cx="61566" cy="61566"/>
             </a:xfrm>
             <a:prstGeom prst="ellipse">
@@ -11762,7 +11762,7 @@
           </p:nvSpPr>
           <p:spPr>
             <a:xfrm>
-              <a:off x="3279629" y="2315841"/>
+              <a:off x="3245588" y="2315841"/>
               <a:ext cx="61566" cy="61566"/>
             </a:xfrm>
             <a:prstGeom prst="ellipse">
@@ -11788,7 +11788,7 @@
           </p:nvSpPr>
           <p:spPr>
             <a:xfrm>
-              <a:off x="3418882" y="2151169"/>
+              <a:off x="3446010" y="2151169"/>
               <a:ext cx="61566" cy="61566"/>
             </a:xfrm>
             <a:prstGeom prst="ellipse">
@@ -11814,7 +11814,7 @@
           </p:nvSpPr>
           <p:spPr>
             <a:xfrm>
-              <a:off x="3270150" y="1665802"/>
+              <a:off x="3234859" y="1665802"/>
               <a:ext cx="61566" cy="61566"/>
             </a:xfrm>
             <a:prstGeom prst="ellipse">
@@ -11840,7 +11840,7 @@
           </p:nvSpPr>
           <p:spPr>
             <a:xfrm>
-              <a:off x="3430106" y="2537313"/>
+              <a:off x="3482672" y="2537313"/>
               <a:ext cx="61566" cy="61566"/>
             </a:xfrm>
             <a:prstGeom prst="ellipse">
@@ -11866,7 +11866,7 @@
           </p:nvSpPr>
           <p:spPr>
             <a:xfrm>
-              <a:off x="3257135" y="2765099"/>
+              <a:off x="3269124" y="2765099"/>
               <a:ext cx="61566" cy="61566"/>
             </a:xfrm>
             <a:prstGeom prst="ellipse">
@@ -11892,7 +11892,7 @@
           </p:nvSpPr>
           <p:spPr>
             <a:xfrm>
-              <a:off x="3416847" y="2815118"/>
+              <a:off x="3449664" y="2815118"/>
               <a:ext cx="61566" cy="61566"/>
             </a:xfrm>
             <a:prstGeom prst="ellipse">
@@ -11918,7 +11918,7 @@
           </p:nvSpPr>
           <p:spPr>
             <a:xfrm>
-              <a:off x="3202366" y="2468941"/>
+              <a:off x="3273116" y="2468941"/>
               <a:ext cx="61566" cy="61566"/>
             </a:xfrm>
             <a:prstGeom prst="ellipse">
@@ -11944,7 +11944,7 @@
           </p:nvSpPr>
           <p:spPr>
             <a:xfrm>
-              <a:off x="3422573" y="2423861"/>
+              <a:off x="3481353" y="2423861"/>
               <a:ext cx="61566" cy="61566"/>
             </a:xfrm>
             <a:prstGeom prst="ellipse">
@@ -11970,7 +11970,7 @@
           </p:nvSpPr>
           <p:spPr>
             <a:xfrm>
-              <a:off x="4762142" y="3266289"/>
+              <a:off x="4816765" y="3266289"/>
               <a:ext cx="61566" cy="61566"/>
             </a:xfrm>
             <a:prstGeom prst="ellipse">
@@ -11996,7 +11996,7 @@
           </p:nvSpPr>
           <p:spPr>
             <a:xfrm>
-              <a:off x="5029502" y="2998579"/>
+              <a:off x="4998293" y="2998579"/>
               <a:ext cx="61566" cy="61566"/>
             </a:xfrm>
             <a:prstGeom prst="ellipse">
@@ -12022,7 +12022,7 @@
           </p:nvSpPr>
           <p:spPr>
             <a:xfrm>
-              <a:off x="4729785" y="2425413"/>
+              <a:off x="4792540" y="2425413"/>
               <a:ext cx="61566" cy="61566"/>
             </a:xfrm>
             <a:prstGeom prst="ellipse">
@@ -12048,7 +12048,7 @@
           </p:nvSpPr>
           <p:spPr>
             <a:xfrm>
-              <a:off x="4953697" y="2678075"/>
+              <a:off x="4972907" y="2678075"/>
               <a:ext cx="61566" cy="61566"/>
             </a:xfrm>
             <a:prstGeom prst="ellipse">
@@ -12074,7 +12074,7 @@
           </p:nvSpPr>
           <p:spPr>
             <a:xfrm>
-              <a:off x="4756754" y="2475486"/>
+              <a:off x="4791414" y="2475486"/>
               <a:ext cx="61566" cy="61566"/>
             </a:xfrm>
             <a:prstGeom prst="ellipse">
@@ -12100,7 +12100,7 @@
           </p:nvSpPr>
           <p:spPr>
             <a:xfrm>
-              <a:off x="5004221" y="2976467"/>
+              <a:off x="5004588" y="2976467"/>
               <a:ext cx="61566" cy="61566"/>
             </a:xfrm>
             <a:prstGeom prst="ellipse">
@@ -12126,7 +12126,7 @@
           </p:nvSpPr>
           <p:spPr>
             <a:xfrm>
-              <a:off x="4738434" y="2198523"/>
+              <a:off x="4793168" y="2198523"/>
               <a:ext cx="61566" cy="61566"/>
             </a:xfrm>
             <a:prstGeom prst="ellipse">
@@ -12152,7 +12152,7 @@
           </p:nvSpPr>
           <p:spPr>
             <a:xfrm>
-              <a:off x="5013842" y="2457382"/>
+              <a:off x="5043893" y="2457382"/>
               <a:ext cx="61566" cy="61566"/>
             </a:xfrm>
             <a:prstGeom prst="ellipse">
@@ -12178,7 +12178,7 @@
           </p:nvSpPr>
           <p:spPr>
             <a:xfrm>
-              <a:off x="4758686" y="2520652"/>
+              <a:off x="4756767" y="2520652"/>
               <a:ext cx="61566" cy="61566"/>
             </a:xfrm>
             <a:prstGeom prst="ellipse">
@@ -12204,7 +12204,7 @@
           </p:nvSpPr>
           <p:spPr>
             <a:xfrm>
-              <a:off x="4939704" y="2658414"/>
+              <a:off x="5024360" y="2658414"/>
               <a:ext cx="61566" cy="61566"/>
             </a:xfrm>
             <a:prstGeom prst="ellipse">
@@ -12230,7 +12230,7 @@
           </p:nvSpPr>
           <p:spPr>
             <a:xfrm>
-              <a:off x="4773864" y="2691377"/>
+              <a:off x="4755861" y="2691377"/>
               <a:ext cx="61566" cy="61566"/>
             </a:xfrm>
             <a:prstGeom prst="ellipse">
@@ -12256,7 +12256,7 @@
           </p:nvSpPr>
           <p:spPr>
             <a:xfrm>
-              <a:off x="4949420" y="3154518"/>
+              <a:off x="5035058" y="3154518"/>
               <a:ext cx="61566" cy="61566"/>
             </a:xfrm>
             <a:prstGeom prst="ellipse">
@@ -12282,7 +12282,7 @@
           </p:nvSpPr>
           <p:spPr>
             <a:xfrm>
-              <a:off x="4724022" y="2561329"/>
+              <a:off x="4747333" y="2561329"/>
               <a:ext cx="61566" cy="61566"/>
             </a:xfrm>
             <a:prstGeom prst="ellipse">
@@ -12308,7 +12308,7 @@
           </p:nvSpPr>
           <p:spPr>
             <a:xfrm>
-              <a:off x="4991991" y="2626090"/>
+              <a:off x="4955475" y="2626090"/>
               <a:ext cx="61566" cy="61566"/>
             </a:xfrm>
             <a:prstGeom prst="ellipse">
@@ -12334,7 +12334,7 @@
           </p:nvSpPr>
           <p:spPr>
             <a:xfrm>
-              <a:off x="4729872" y="2777392"/>
+              <a:off x="4753594" y="2777392"/>
               <a:ext cx="61566" cy="61566"/>
             </a:xfrm>
             <a:prstGeom prst="ellipse">
@@ -12360,7 +12360,7 @@
           </p:nvSpPr>
           <p:spPr>
             <a:xfrm>
-              <a:off x="5027977" y="2773302"/>
+              <a:off x="4987721" y="2773302"/>
               <a:ext cx="61566" cy="61566"/>
             </a:xfrm>
             <a:prstGeom prst="ellipse">
@@ -12386,7 +12386,7 @@
           </p:nvSpPr>
           <p:spPr>
             <a:xfrm>
-              <a:off x="4810095" y="2859939"/>
+              <a:off x="4726392" y="2859939"/>
               <a:ext cx="61566" cy="61566"/>
             </a:xfrm>
             <a:prstGeom prst="ellipse">
@@ -12412,7 +12412,7 @@
           </p:nvSpPr>
           <p:spPr>
             <a:xfrm>
-              <a:off x="4954738" y="2895756"/>
+              <a:off x="4996481" y="2895756"/>
               <a:ext cx="61566" cy="61566"/>
             </a:xfrm>
             <a:prstGeom prst="ellipse">
@@ -12438,7 +12438,7 @@
           </p:nvSpPr>
           <p:spPr>
             <a:xfrm>
-              <a:off x="4788982" y="3015592"/>
+              <a:off x="4754022" y="3015592"/>
               <a:ext cx="61566" cy="61566"/>
             </a:xfrm>
             <a:prstGeom prst="ellipse">
@@ -12464,7 +12464,7 @@
           </p:nvSpPr>
           <p:spPr>
             <a:xfrm>
-              <a:off x="5018553" y="3197622"/>
+              <a:off x="5037824" y="3197622"/>
               <a:ext cx="61566" cy="61566"/>
             </a:xfrm>
             <a:prstGeom prst="ellipse">
@@ -12490,7 +12490,7 @@
           </p:nvSpPr>
           <p:spPr>
             <a:xfrm>
-              <a:off x="4791545" y="3149780"/>
+              <a:off x="4794131" y="3149780"/>
               <a:ext cx="61566" cy="61566"/>
             </a:xfrm>
             <a:prstGeom prst="ellipse">
@@ -12516,7 +12516,7 @@
           </p:nvSpPr>
           <p:spPr>
             <a:xfrm>
-              <a:off x="5016316" y="3559716"/>
+              <a:off x="4959708" y="3559716"/>
               <a:ext cx="61566" cy="61566"/>
             </a:xfrm>
             <a:prstGeom prst="ellipse">
@@ -12542,7 +12542,7 @@
           </p:nvSpPr>
           <p:spPr>
             <a:xfrm>
-              <a:off x="4747821" y="2472478"/>
+              <a:off x="4733184" y="2472478"/>
               <a:ext cx="61566" cy="61566"/>
             </a:xfrm>
             <a:prstGeom prst="ellipse">
@@ -12568,7 +12568,7 @@
           </p:nvSpPr>
           <p:spPr>
             <a:xfrm>
-              <a:off x="4942223" y="2715908"/>
+              <a:off x="5040842" y="2715908"/>
               <a:ext cx="61566" cy="61566"/>
             </a:xfrm>
             <a:prstGeom prst="ellipse">
@@ -12594,7 +12594,7 @@
           </p:nvSpPr>
           <p:spPr>
             <a:xfrm>
-              <a:off x="4740799" y="3007309"/>
+              <a:off x="4717536" y="3007309"/>
               <a:ext cx="61566" cy="61566"/>
             </a:xfrm>
             <a:prstGeom prst="ellipse">
@@ -12620,7 +12620,7 @@
           </p:nvSpPr>
           <p:spPr>
             <a:xfrm>
-              <a:off x="5028439" y="3211433"/>
+              <a:off x="4944067" y="3211433"/>
               <a:ext cx="61566" cy="61566"/>
             </a:xfrm>
             <a:prstGeom prst="ellipse">
@@ -12646,7 +12646,7 @@
           </p:nvSpPr>
           <p:spPr>
             <a:xfrm>
-              <a:off x="4765090" y="2213701"/>
+              <a:off x="4716078" y="2213701"/>
               <a:ext cx="61566" cy="61566"/>
             </a:xfrm>
             <a:prstGeom prst="ellipse">
@@ -12672,7 +12672,7 @@
           </p:nvSpPr>
           <p:spPr>
             <a:xfrm>
-              <a:off x="5042316" y="2582746"/>
+              <a:off x="4947555" y="2582746"/>
               <a:ext cx="61566" cy="61566"/>
             </a:xfrm>
             <a:prstGeom prst="ellipse">
@@ -12698,7 +12698,7 @@
           </p:nvSpPr>
           <p:spPr>
             <a:xfrm>
-              <a:off x="4826138" y="2471015"/>
+              <a:off x="4783706" y="2471015"/>
               <a:ext cx="61566" cy="61566"/>
             </a:xfrm>
             <a:prstGeom prst="ellipse">
@@ -12724,7 +12724,7 @@
           </p:nvSpPr>
           <p:spPr>
             <a:xfrm>
-              <a:off x="4989881" y="2655997"/>
+              <a:off x="5029095" y="2655997"/>
               <a:ext cx="61566" cy="61566"/>
             </a:xfrm>
             <a:prstGeom prst="ellipse">
@@ -12750,7 +12750,7 @@
           </p:nvSpPr>
           <p:spPr>
             <a:xfrm>
-              <a:off x="4733878" y="2229993"/>
+              <a:off x="4734934" y="2229993"/>
               <a:ext cx="61566" cy="61566"/>
             </a:xfrm>
             <a:prstGeom prst="ellipse">
@@ -12776,7 +12776,7 @@
           </p:nvSpPr>
           <p:spPr>
             <a:xfrm>
-              <a:off x="5010514" y="2554263"/>
+              <a:off x="5023175" y="2554263"/>
               <a:ext cx="61566" cy="61566"/>
             </a:xfrm>
             <a:prstGeom prst="ellipse">
@@ -12802,7 +12802,7 @@
           </p:nvSpPr>
           <p:spPr>
             <a:xfrm>
-              <a:off x="4777402" y="3724848"/>
+              <a:off x="4756523" y="3724848"/>
               <a:ext cx="61566" cy="61566"/>
             </a:xfrm>
             <a:prstGeom prst="ellipse">
@@ -12828,7 +12828,7 @@
           </p:nvSpPr>
           <p:spPr>
             <a:xfrm>
-              <a:off x="5035613" y="3507676"/>
+              <a:off x="5041507" y="3507676"/>
               <a:ext cx="61566" cy="61566"/>
             </a:xfrm>
             <a:prstGeom prst="ellipse">
@@ -12854,7 +12854,7 @@
           </p:nvSpPr>
           <p:spPr>
             <a:xfrm>
-              <a:off x="4787055" y="3302413"/>
+              <a:off x="4726441" y="3302413"/>
               <a:ext cx="61566" cy="61566"/>
             </a:xfrm>
             <a:prstGeom prst="ellipse">
@@ -12880,7 +12880,7 @@
           </p:nvSpPr>
           <p:spPr>
             <a:xfrm>
-              <a:off x="4956683" y="2981635"/>
+              <a:off x="4947135" y="2981635"/>
               <a:ext cx="61566" cy="61566"/>
             </a:xfrm>
             <a:prstGeom prst="ellipse">
@@ -12906,7 +12906,7 @@
           </p:nvSpPr>
           <p:spPr>
             <a:xfrm>
-              <a:off x="4822469" y="2240656"/>
+              <a:off x="4797649" y="2240656"/>
               <a:ext cx="61566" cy="61566"/>
             </a:xfrm>
             <a:prstGeom prst="ellipse">
@@ -12932,7 +12932,7 @@
           </p:nvSpPr>
           <p:spPr>
             <a:xfrm>
-              <a:off x="4938995" y="2765896"/>
+              <a:off x="5027621" y="2765896"/>
               <a:ext cx="61566" cy="61566"/>
             </a:xfrm>
             <a:prstGeom prst="ellipse">
@@ -12958,7 +12958,7 @@
           </p:nvSpPr>
           <p:spPr>
             <a:xfrm>
-              <a:off x="4770391" y="2909027"/>
+              <a:off x="4741767" y="2909027"/>
               <a:ext cx="61566" cy="61566"/>
             </a:xfrm>
             <a:prstGeom prst="ellipse">
@@ -12984,7 +12984,7 @@
           </p:nvSpPr>
           <p:spPr>
             <a:xfrm>
-              <a:off x="5008085" y="3216630"/>
+              <a:off x="5039882" y="3216630"/>
               <a:ext cx="61566" cy="61566"/>
             </a:xfrm>
             <a:prstGeom prst="ellipse">
@@ -13010,7 +13010,7 @@
           </p:nvSpPr>
           <p:spPr>
             <a:xfrm>
-              <a:off x="4740312" y="2549423"/>
+              <a:off x="4752733" y="2549423"/>
               <a:ext cx="61566" cy="61566"/>
             </a:xfrm>
             <a:prstGeom prst="ellipse">
@@ -13036,7 +13036,7 @@
           </p:nvSpPr>
           <p:spPr>
             <a:xfrm>
-              <a:off x="5048111" y="2733111"/>
+              <a:off x="4991278" y="2733111"/>
               <a:ext cx="61566" cy="61566"/>
             </a:xfrm>
             <a:prstGeom prst="ellipse">
@@ -13062,7 +13062,7 @@
           </p:nvSpPr>
           <p:spPr>
             <a:xfrm>
-              <a:off x="4812863" y="2741824"/>
+              <a:off x="4814167" y="2741824"/>
               <a:ext cx="61566" cy="61566"/>
             </a:xfrm>
             <a:prstGeom prst="ellipse">
@@ -13088,7 +13088,7 @@
           </p:nvSpPr>
           <p:spPr>
             <a:xfrm>
-              <a:off x="4951154" y="2967918"/>
+              <a:off x="5026962" y="2967918"/>
               <a:ext cx="61566" cy="61566"/>
             </a:xfrm>
             <a:prstGeom prst="ellipse">
@@ -13114,7 +13114,7 @@
           </p:nvSpPr>
           <p:spPr>
             <a:xfrm>
-              <a:off x="4745726" y="3560626"/>
+              <a:off x="4777622" y="3560626"/>
               <a:ext cx="61566" cy="61566"/>
             </a:xfrm>
             <a:prstGeom prst="ellipse">
@@ -13140,7 +13140,7 @@
           </p:nvSpPr>
           <p:spPr>
             <a:xfrm>
-              <a:off x="5009670" y="3292212"/>
+              <a:off x="5040093" y="3292212"/>
               <a:ext cx="61566" cy="61566"/>
             </a:xfrm>
             <a:prstGeom prst="ellipse">
@@ -13166,7 +13166,7 @@
           </p:nvSpPr>
           <p:spPr>
             <a:xfrm>
-              <a:off x="4733529" y="2914837"/>
+              <a:off x="4753009" y="2914837"/>
               <a:ext cx="61566" cy="61566"/>
             </a:xfrm>
             <a:prstGeom prst="ellipse">
@@ -13192,7 +13192,7 @@
           </p:nvSpPr>
           <p:spPr>
             <a:xfrm>
-              <a:off x="4988084" y="3118051"/>
+              <a:off x="5030619" y="3118051"/>
               <a:ext cx="61566" cy="61566"/>
             </a:xfrm>
             <a:prstGeom prst="ellipse">
@@ -13218,7 +13218,7 @@
           </p:nvSpPr>
           <p:spPr>
             <a:xfrm>
-              <a:off x="4755165" y="2720215"/>
+              <a:off x="4749982" y="2720215"/>
               <a:ext cx="61566" cy="61566"/>
             </a:xfrm>
             <a:prstGeom prst="ellipse">
@@ -13244,7 +13244,7 @@
           </p:nvSpPr>
           <p:spPr>
             <a:xfrm>
-              <a:off x="5022337" y="3085560"/>
+              <a:off x="4954248" y="3085560"/>
               <a:ext cx="61566" cy="61566"/>
             </a:xfrm>
             <a:prstGeom prst="ellipse">
@@ -13270,7 +13270,7 @@
           </p:nvSpPr>
           <p:spPr>
             <a:xfrm>
-              <a:off x="4732537" y="2811001"/>
+              <a:off x="4752919" y="2811001"/>
               <a:ext cx="61566" cy="61566"/>
             </a:xfrm>
             <a:prstGeom prst="ellipse">
@@ -13296,7 +13296,7 @@
           </p:nvSpPr>
           <p:spPr>
             <a:xfrm>
-              <a:off x="4960599" y="2764387"/>
+              <a:off x="4954883" y="2764387"/>
               <a:ext cx="61566" cy="61566"/>
             </a:xfrm>
             <a:prstGeom prst="ellipse">
@@ -13322,7 +13322,7 @@
           </p:nvSpPr>
           <p:spPr>
             <a:xfrm>
-              <a:off x="4817859" y="3483295"/>
+              <a:off x="4745448" y="3483295"/>
               <a:ext cx="61566" cy="61566"/>
             </a:xfrm>
             <a:prstGeom prst="ellipse">
@@ -13348,7 +13348,7 @@
           </p:nvSpPr>
           <p:spPr>
             <a:xfrm>
-              <a:off x="4973987" y="3969119"/>
+              <a:off x="5015156" y="3969119"/>
               <a:ext cx="61566" cy="61566"/>
             </a:xfrm>
             <a:prstGeom prst="ellipse">
@@ -13374,7 +13374,7 @@
           </p:nvSpPr>
           <p:spPr>
             <a:xfrm>
-              <a:off x="4808904" y="2451328"/>
+              <a:off x="4751985" y="2451328"/>
               <a:ext cx="61566" cy="61566"/>
             </a:xfrm>
             <a:prstGeom prst="ellipse">
@@ -13400,7 +13400,7 @@
           </p:nvSpPr>
           <p:spPr>
             <a:xfrm>
-              <a:off x="5020410" y="2617745"/>
+              <a:off x="5040806" y="2617745"/>
               <a:ext cx="61566" cy="61566"/>
             </a:xfrm>
             <a:prstGeom prst="ellipse">
@@ -13426,7 +13426,7 @@
           </p:nvSpPr>
           <p:spPr>
             <a:xfrm>
-              <a:off x="4766292" y="2577501"/>
+              <a:off x="4759817" y="2577501"/>
               <a:ext cx="61566" cy="61566"/>
             </a:xfrm>
             <a:prstGeom prst="ellipse">
@@ -13452,7 +13452,7 @@
           </p:nvSpPr>
           <p:spPr>
             <a:xfrm>
-              <a:off x="4990377" y="2659879"/>
+              <a:off x="5007425" y="2659879"/>
               <a:ext cx="61566" cy="61566"/>
             </a:xfrm>
             <a:prstGeom prst="ellipse">
@@ -13478,7 +13478,7 @@
           </p:nvSpPr>
           <p:spPr>
             <a:xfrm>
-              <a:off x="4810583" y="2265108"/>
+              <a:off x="4824022" y="2265108"/>
               <a:ext cx="61566" cy="61566"/>
             </a:xfrm>
             <a:prstGeom prst="ellipse">
@@ -13504,7 +13504,7 @@
           </p:nvSpPr>
           <p:spPr>
             <a:xfrm>
-              <a:off x="5044321" y="2512269"/>
+              <a:off x="4983414" y="2512269"/>
               <a:ext cx="61566" cy="61566"/>
             </a:xfrm>
             <a:prstGeom prst="ellipse">
@@ -13530,7 +13530,7 @@
           </p:nvSpPr>
           <p:spPr>
             <a:xfrm>
-              <a:off x="4753219" y="2358148"/>
+              <a:off x="4773753" y="2358148"/>
               <a:ext cx="61566" cy="61566"/>
             </a:xfrm>
             <a:prstGeom prst="ellipse">
@@ -13556,7 +13556,7 @@
           </p:nvSpPr>
           <p:spPr>
             <a:xfrm>
-              <a:off x="5001744" y="2422585"/>
+              <a:off x="4939090" y="2422585"/>
               <a:ext cx="61566" cy="61566"/>
             </a:xfrm>
             <a:prstGeom prst="ellipse">
@@ -13582,7 +13582,7 @@
           </p:nvSpPr>
           <p:spPr>
             <a:xfrm>
-              <a:off x="4785897" y="2311362"/>
+              <a:off x="4759541" y="2311362"/>
               <a:ext cx="61566" cy="61566"/>
             </a:xfrm>
             <a:prstGeom prst="ellipse">
@@ -13608,7 +13608,7 @@
           </p:nvSpPr>
           <p:spPr>
             <a:xfrm>
-              <a:off x="4997986" y="2433006"/>
+              <a:off x="4997612" y="2433006"/>
               <a:ext cx="61566" cy="61566"/>
             </a:xfrm>
             <a:prstGeom prst="ellipse">
@@ -13634,7 +13634,7 @@
           </p:nvSpPr>
           <p:spPr>
             <a:xfrm>
-              <a:off x="4734256" y="2814916"/>
+              <a:off x="4717904" y="2814916"/>
               <a:ext cx="61566" cy="61566"/>
             </a:xfrm>
             <a:prstGeom prst="ellipse">
@@ -13660,7 +13660,7 @@
           </p:nvSpPr>
           <p:spPr>
             <a:xfrm>
-              <a:off x="4955303" y="2651773"/>
+              <a:off x="5018607" y="2651773"/>
               <a:ext cx="61566" cy="61566"/>
             </a:xfrm>
             <a:prstGeom prst="ellipse">
@@ -13686,7 +13686,7 @@
           </p:nvSpPr>
           <p:spPr>
             <a:xfrm>
-              <a:off x="4790455" y="2550285"/>
+              <a:off x="4727170" y="2550285"/>
               <a:ext cx="61566" cy="61566"/>
             </a:xfrm>
             <a:prstGeom prst="ellipse">
@@ -13712,7 +13712,7 @@
           </p:nvSpPr>
           <p:spPr>
             <a:xfrm>
-              <a:off x="5010359" y="2651083"/>
+              <a:off x="5044611" y="2651083"/>
               <a:ext cx="61566" cy="61566"/>
             </a:xfrm>
             <a:prstGeom prst="ellipse">
@@ -13738,7 +13738,7 @@
           </p:nvSpPr>
           <p:spPr>
             <a:xfrm>
-              <a:off x="4758553" y="2110666"/>
+              <a:off x="4817980" y="2110666"/>
               <a:ext cx="61566" cy="61566"/>
             </a:xfrm>
             <a:prstGeom prst="ellipse">
@@ -13764,7 +13764,7 @@
           </p:nvSpPr>
           <p:spPr>
             <a:xfrm>
-              <a:off x="4962464" y="2439639"/>
+              <a:off x="5009916" y="2439639"/>
               <a:ext cx="61566" cy="61566"/>
             </a:xfrm>
             <a:prstGeom prst="ellipse">
@@ -13790,7 +13790,7 @@
           </p:nvSpPr>
           <p:spPr>
             <a:xfrm>
-              <a:off x="4755322" y="2302403"/>
+              <a:off x="4776934" y="2302403"/>
               <a:ext cx="61566" cy="61566"/>
             </a:xfrm>
             <a:prstGeom prst="ellipse">
@@ -13816,7 +13816,7 @@
           </p:nvSpPr>
           <p:spPr>
             <a:xfrm>
-              <a:off x="4950730" y="2615882"/>
+              <a:off x="4995828" y="2615882"/>
               <a:ext cx="61566" cy="61566"/>
             </a:xfrm>
             <a:prstGeom prst="ellipse">
@@ -13842,7 +13842,7 @@
           </p:nvSpPr>
           <p:spPr>
             <a:xfrm>
-              <a:off x="4818344" y="2435098"/>
+              <a:off x="4757462" y="2435098"/>
               <a:ext cx="61566" cy="61566"/>
             </a:xfrm>
             <a:prstGeom prst="ellipse">
@@ -13868,7 +13868,7 @@
           </p:nvSpPr>
           <p:spPr>
             <a:xfrm>
-              <a:off x="5039397" y="2468782"/>
+              <a:off x="4989968" y="2468782"/>
               <a:ext cx="61566" cy="61566"/>
             </a:xfrm>
             <a:prstGeom prst="ellipse">
@@ -13894,7 +13894,7 @@
           </p:nvSpPr>
           <p:spPr>
             <a:xfrm>
-              <a:off x="4747484" y="2485724"/>
+              <a:off x="4806052" y="2485724"/>
               <a:ext cx="61566" cy="61566"/>
             </a:xfrm>
             <a:prstGeom prst="ellipse">
@@ -13920,7 +13920,7 @@
           </p:nvSpPr>
           <p:spPr>
             <a:xfrm>
-              <a:off x="5035877" y="2674880"/>
+              <a:off x="4966965" y="2674880"/>
               <a:ext cx="61566" cy="61566"/>
             </a:xfrm>
             <a:prstGeom prst="ellipse">
@@ -13946,7 +13946,7 @@
           </p:nvSpPr>
           <p:spPr>
             <a:xfrm>
-              <a:off x="4720147" y="2168860"/>
+              <a:off x="4724302" y="2168860"/>
               <a:ext cx="61566" cy="61566"/>
             </a:xfrm>
             <a:prstGeom prst="ellipse">
@@ -13972,7 +13972,7 @@
           </p:nvSpPr>
           <p:spPr>
             <a:xfrm>
-              <a:off x="4967734" y="2325591"/>
+              <a:off x="4969117" y="2325591"/>
               <a:ext cx="61566" cy="61566"/>
             </a:xfrm>
             <a:prstGeom prst="ellipse">
@@ -13998,7 +13998,7 @@
           </p:nvSpPr>
           <p:spPr>
             <a:xfrm>
-              <a:off x="4771864" y="2212748"/>
+              <a:off x="4777208" y="2212748"/>
               <a:ext cx="61566" cy="61566"/>
             </a:xfrm>
             <a:prstGeom prst="ellipse">
@@ -14024,7 +14024,7 @@
           </p:nvSpPr>
           <p:spPr>
             <a:xfrm>
-              <a:off x="4995558" y="2169248"/>
+              <a:off x="5038266" y="2169248"/>
               <a:ext cx="61566" cy="61566"/>
             </a:xfrm>
             <a:prstGeom prst="ellipse">
@@ -14050,7 +14050,7 @@
           </p:nvSpPr>
           <p:spPr>
             <a:xfrm>
-              <a:off x="4808974" y="2486002"/>
+              <a:off x="4800560" y="2486002"/>
               <a:ext cx="61566" cy="61566"/>
             </a:xfrm>
             <a:prstGeom prst="ellipse">
@@ -14076,7 +14076,7 @@
           </p:nvSpPr>
           <p:spPr>
             <a:xfrm>
-              <a:off x="4946183" y="2519665"/>
+              <a:off x="4951630" y="2519665"/>
               <a:ext cx="61566" cy="61566"/>
             </a:xfrm>
             <a:prstGeom prst="ellipse">
@@ -14102,7 +14102,7 @@
           </p:nvSpPr>
           <p:spPr>
             <a:xfrm>
-              <a:off x="4718324" y="2024078"/>
+              <a:off x="4739276" y="2024078"/>
               <a:ext cx="61566" cy="61566"/>
             </a:xfrm>
             <a:prstGeom prst="ellipse">
@@ -14128,7 +14128,7 @@
           </p:nvSpPr>
           <p:spPr>
             <a:xfrm>
-              <a:off x="4991175" y="2747236"/>
+              <a:off x="5039990" y="2747236"/>
               <a:ext cx="61566" cy="61566"/>
             </a:xfrm>
             <a:prstGeom prst="ellipse">
@@ -14154,7 +14154,7 @@
           </p:nvSpPr>
           <p:spPr>
             <a:xfrm>
-              <a:off x="4769598" y="2289778"/>
+              <a:off x="4752071" y="2289778"/>
               <a:ext cx="61566" cy="61566"/>
             </a:xfrm>
             <a:prstGeom prst="ellipse">
@@ -14180,7 +14180,7 @@
           </p:nvSpPr>
           <p:spPr>
             <a:xfrm>
-              <a:off x="4974009" y="2580809"/>
+              <a:off x="4971453" y="2580809"/>
               <a:ext cx="61566" cy="61566"/>
             </a:xfrm>
             <a:prstGeom prst="ellipse">
@@ -14206,7 +14206,7 @@
           </p:nvSpPr>
           <p:spPr>
             <a:xfrm>
-              <a:off x="4790157" y="2133995"/>
+              <a:off x="4804156" y="2133995"/>
               <a:ext cx="61566" cy="61566"/>
             </a:xfrm>
             <a:prstGeom prst="ellipse">
@@ -14232,7 +14232,7 @@
           </p:nvSpPr>
           <p:spPr>
             <a:xfrm>
-              <a:off x="5013777" y="2419218"/>
+              <a:off x="4998676" y="2419218"/>
               <a:ext cx="61566" cy="61566"/>
             </a:xfrm>
             <a:prstGeom prst="ellipse">
@@ -14258,7 +14258,7 @@
           </p:nvSpPr>
           <p:spPr>
             <a:xfrm>
-              <a:off x="4771669" y="2370496"/>
+              <a:off x="4727227" y="2370496"/>
               <a:ext cx="61566" cy="61566"/>
             </a:xfrm>
             <a:prstGeom prst="ellipse">
@@ -14284,7 +14284,7 @@
           </p:nvSpPr>
           <p:spPr>
             <a:xfrm>
-              <a:off x="5036633" y="2626945"/>
+              <a:off x="5022983" y="2626945"/>
               <a:ext cx="61566" cy="61566"/>
             </a:xfrm>
             <a:prstGeom prst="ellipse">
@@ -14310,7 +14310,7 @@
           </p:nvSpPr>
           <p:spPr>
             <a:xfrm>
-              <a:off x="4747718" y="1776967"/>
+              <a:off x="4765205" y="1776967"/>
               <a:ext cx="61566" cy="61566"/>
             </a:xfrm>
             <a:prstGeom prst="ellipse">
@@ -14336,7 +14336,7 @@
           </p:nvSpPr>
           <p:spPr>
             <a:xfrm>
-              <a:off x="5023672" y="2377370"/>
+              <a:off x="4956209" y="2377370"/>
               <a:ext cx="61566" cy="61566"/>
             </a:xfrm>
             <a:prstGeom prst="ellipse">
@@ -14362,7 +14362,7 @@
           </p:nvSpPr>
           <p:spPr>
             <a:xfrm>
-              <a:off x="4792397" y="2715422"/>
+              <a:off x="4814817" y="2715422"/>
               <a:ext cx="61566" cy="61566"/>
             </a:xfrm>
             <a:prstGeom prst="ellipse">
@@ -14388,7 +14388,7 @@
           </p:nvSpPr>
           <p:spPr>
             <a:xfrm>
-              <a:off x="4980195" y="2845389"/>
+              <a:off x="4965412" y="2845389"/>
               <a:ext cx="61566" cy="61566"/>
             </a:xfrm>
             <a:prstGeom prst="ellipse">
@@ -14414,7 +14414,7 @@
           </p:nvSpPr>
           <p:spPr>
             <a:xfrm>
-              <a:off x="4751469" y="2368388"/>
+              <a:off x="4772695" y="2368388"/>
               <a:ext cx="61566" cy="61566"/>
             </a:xfrm>
             <a:prstGeom prst="ellipse">
@@ -14440,7 +14440,7 @@
           </p:nvSpPr>
           <p:spPr>
             <a:xfrm>
-              <a:off x="5044022" y="2732179"/>
+              <a:off x="4948384" y="2732179"/>
               <a:ext cx="61566" cy="61566"/>
             </a:xfrm>
             <a:prstGeom prst="ellipse">
@@ -14466,7 +14466,7 @@
           </p:nvSpPr>
           <p:spPr>
             <a:xfrm>
-              <a:off x="4815156" y="2314894"/>
+              <a:off x="4816960" y="2314894"/>
               <a:ext cx="61566" cy="61566"/>
             </a:xfrm>
             <a:prstGeom prst="ellipse">
@@ -14492,7 +14492,7 @@
           </p:nvSpPr>
           <p:spPr>
             <a:xfrm>
-              <a:off x="4939339" y="2793807"/>
+              <a:off x="4962200" y="2793807"/>
               <a:ext cx="61566" cy="61566"/>
             </a:xfrm>
             <a:prstGeom prst="ellipse">
@@ -14518,7 +14518,7 @@
           </p:nvSpPr>
           <p:spPr>
             <a:xfrm>
-              <a:off x="4809442" y="2879167"/>
+              <a:off x="4802115" y="2879167"/>
               <a:ext cx="61566" cy="61566"/>
             </a:xfrm>
             <a:prstGeom prst="ellipse">
@@ -14544,7 +14544,7 @@
           </p:nvSpPr>
           <p:spPr>
             <a:xfrm>
-              <a:off x="4996470" y="2737448"/>
+              <a:off x="5033504" y="2737448"/>
               <a:ext cx="61566" cy="61566"/>
             </a:xfrm>
             <a:prstGeom prst="ellipse">
@@ -14570,7 +14570,7 @@
           </p:nvSpPr>
           <p:spPr>
             <a:xfrm>
-              <a:off x="4754719" y="2403438"/>
+              <a:off x="4726532" y="2403438"/>
               <a:ext cx="61566" cy="61566"/>
             </a:xfrm>
             <a:prstGeom prst="ellipse">
@@ -14596,7 +14596,7 @@
           </p:nvSpPr>
           <p:spPr>
             <a:xfrm>
-              <a:off x="4983667" y="2656992"/>
+              <a:off x="5040442" y="2656992"/>
               <a:ext cx="61566" cy="61566"/>
             </a:xfrm>
             <a:prstGeom prst="ellipse">
@@ -14622,7 +14622,7 @@
           </p:nvSpPr>
           <p:spPr>
             <a:xfrm>
-              <a:off x="4802798" y="2188945"/>
+              <a:off x="4788379" y="2188945"/>
               <a:ext cx="61566" cy="61566"/>
             </a:xfrm>
             <a:prstGeom prst="ellipse">
@@ -14648,7 +14648,7 @@
           </p:nvSpPr>
           <p:spPr>
             <a:xfrm>
-              <a:off x="4983888" y="2586750"/>
+              <a:off x="5038825" y="2586750"/>
               <a:ext cx="61566" cy="61566"/>
             </a:xfrm>
             <a:prstGeom prst="ellipse">
@@ -14674,7 +14674,7 @@
           </p:nvSpPr>
           <p:spPr>
             <a:xfrm>
-              <a:off x="4753098" y="3070479"/>
+              <a:off x="4824834" y="3070479"/>
               <a:ext cx="61566" cy="61566"/>
             </a:xfrm>
             <a:prstGeom prst="ellipse">
@@ -14700,7 +14700,7 @@
           </p:nvSpPr>
           <p:spPr>
             <a:xfrm>
-              <a:off x="4946680" y="2929876"/>
+              <a:off x="5039948" y="2929876"/>
               <a:ext cx="61566" cy="61566"/>
             </a:xfrm>
             <a:prstGeom prst="ellipse">
@@ -14726,7 +14726,7 @@
           </p:nvSpPr>
           <p:spPr>
             <a:xfrm>
-              <a:off x="4791601" y="2781773"/>
+              <a:off x="4744018" y="2781773"/>
               <a:ext cx="61566" cy="61566"/>
             </a:xfrm>
             <a:prstGeom prst="ellipse">
@@ -14752,7 +14752,7 @@
           </p:nvSpPr>
           <p:spPr>
             <a:xfrm>
-              <a:off x="4954078" y="3210102"/>
+              <a:off x="4985286" y="3210102"/>
               <a:ext cx="61566" cy="61566"/>
             </a:xfrm>
             <a:prstGeom prst="ellipse">
@@ -14778,7 +14778,7 @@
           </p:nvSpPr>
           <p:spPr>
             <a:xfrm>
-              <a:off x="4737905" y="2447017"/>
+              <a:off x="4722649" y="2447017"/>
               <a:ext cx="61566" cy="61566"/>
             </a:xfrm>
             <a:prstGeom prst="ellipse">
@@ -14804,7 +14804,7 @@
           </p:nvSpPr>
           <p:spPr>
             <a:xfrm>
-              <a:off x="4955936" y="2582842"/>
+              <a:off x="4996152" y="2582842"/>
               <a:ext cx="61566" cy="61566"/>
             </a:xfrm>
             <a:prstGeom prst="ellipse">
@@ -14830,7 +14830,7 @@
           </p:nvSpPr>
           <p:spPr>
             <a:xfrm>
-              <a:off x="4773041" y="2405960"/>
+              <a:off x="4734824" y="2405960"/>
               <a:ext cx="61566" cy="61566"/>
             </a:xfrm>
             <a:prstGeom prst="ellipse">
@@ -14856,7 +14856,7 @@
           </p:nvSpPr>
           <p:spPr>
             <a:xfrm>
-              <a:off x="4998655" y="2407397"/>
+              <a:off x="4992010" y="2407397"/>
               <a:ext cx="61566" cy="61566"/>
             </a:xfrm>
             <a:prstGeom prst="ellipse">
@@ -14882,7 +14882,7 @@
           </p:nvSpPr>
           <p:spPr>
             <a:xfrm>
-              <a:off x="4794435" y="2358356"/>
+              <a:off x="4803957" y="2358356"/>
               <a:ext cx="61566" cy="61566"/>
             </a:xfrm>
             <a:prstGeom prst="ellipse">
@@ -14908,7 +14908,7 @@
           </p:nvSpPr>
           <p:spPr>
             <a:xfrm>
-              <a:off x="5008627" y="2650182"/>
+              <a:off x="5035698" y="2650182"/>
               <a:ext cx="61566" cy="61566"/>
             </a:xfrm>
             <a:prstGeom prst="ellipse">
@@ -14934,7 +14934,7 @@
           </p:nvSpPr>
           <p:spPr>
             <a:xfrm>
-              <a:off x="4783651" y="2464257"/>
+              <a:off x="4823703" y="2464257"/>
               <a:ext cx="61566" cy="61566"/>
             </a:xfrm>
             <a:prstGeom prst="ellipse">
@@ -14960,7 +14960,7 @@
           </p:nvSpPr>
           <p:spPr>
             <a:xfrm>
-              <a:off x="4949173" y="2711951"/>
+              <a:off x="5033647" y="2711951"/>
               <a:ext cx="61566" cy="61566"/>
             </a:xfrm>
             <a:prstGeom prst="ellipse">
@@ -14986,7 +14986,7 @@
           </p:nvSpPr>
           <p:spPr>
             <a:xfrm>
-              <a:off x="4808481" y="2305278"/>
+              <a:off x="4748103" y="2305278"/>
               <a:ext cx="61566" cy="61566"/>
             </a:xfrm>
             <a:prstGeom prst="ellipse">
@@ -15012,7 +15012,7 @@
           </p:nvSpPr>
           <p:spPr>
             <a:xfrm>
-              <a:off x="4981507" y="3061199"/>
+              <a:off x="5041753" y="3061199"/>
               <a:ext cx="61566" cy="61566"/>
             </a:xfrm>
             <a:prstGeom prst="ellipse">
@@ -15038,7 +15038,7 @@
           </p:nvSpPr>
           <p:spPr>
             <a:xfrm>
-              <a:off x="4777325" y="3496530"/>
+              <a:off x="4768660" y="3496530"/>
               <a:ext cx="61566" cy="61566"/>
             </a:xfrm>
             <a:prstGeom prst="ellipse">
@@ -15064,7 +15064,7 @@
           </p:nvSpPr>
           <p:spPr>
             <a:xfrm>
-              <a:off x="5011038" y="3413244"/>
+              <a:off x="4971524" y="3413244"/>
               <a:ext cx="61566" cy="61566"/>
             </a:xfrm>
             <a:prstGeom prst="ellipse">
@@ -15090,7 +15090,7 @@
           </p:nvSpPr>
           <p:spPr>
             <a:xfrm>
-              <a:off x="4723688" y="2705130"/>
+              <a:off x="4732774" y="2705130"/>
               <a:ext cx="61566" cy="61566"/>
             </a:xfrm>
             <a:prstGeom prst="ellipse">
@@ -15116,7 +15116,7 @@
           </p:nvSpPr>
           <p:spPr>
             <a:xfrm>
-              <a:off x="5032684" y="3081195"/>
+              <a:off x="4996652" y="3081195"/>
               <a:ext cx="61566" cy="61566"/>
             </a:xfrm>
             <a:prstGeom prst="ellipse">
@@ -15142,7 +15142,7 @@
           </p:nvSpPr>
           <p:spPr>
             <a:xfrm>
-              <a:off x="4717821" y="2621196"/>
+              <a:off x="4774134" y="2621196"/>
               <a:ext cx="61566" cy="61566"/>
             </a:xfrm>
             <a:prstGeom prst="ellipse">
@@ -15168,7 +15168,7 @@
           </p:nvSpPr>
           <p:spPr>
             <a:xfrm>
-              <a:off x="5018562" y="2591566"/>
+              <a:off x="4980133" y="2591566"/>
               <a:ext cx="61566" cy="61566"/>
             </a:xfrm>
             <a:prstGeom prst="ellipse">
@@ -15194,7 +15194,7 @@
           </p:nvSpPr>
           <p:spPr>
             <a:xfrm>
-              <a:off x="4793675" y="2609518"/>
+              <a:off x="4724393" y="2609518"/>
               <a:ext cx="61566" cy="61566"/>
             </a:xfrm>
             <a:prstGeom prst="ellipse">
@@ -15220,7 +15220,7 @@
           </p:nvSpPr>
           <p:spPr>
             <a:xfrm>
-              <a:off x="5033164" y="2456568"/>
+              <a:off x="4992647" y="2456568"/>
               <a:ext cx="61566" cy="61566"/>
             </a:xfrm>
             <a:prstGeom prst="ellipse">
@@ -15246,7 +15246,7 @@
           </p:nvSpPr>
           <p:spPr>
             <a:xfrm>
-              <a:off x="4816057" y="3056326"/>
+              <a:off x="4766321" y="3056326"/>
               <a:ext cx="61566" cy="61566"/>
             </a:xfrm>
             <a:prstGeom prst="ellipse">
@@ -15272,7 +15272,7 @@
           </p:nvSpPr>
           <p:spPr>
             <a:xfrm>
-              <a:off x="4976205" y="3030904"/>
+              <a:off x="5039168" y="3030904"/>
               <a:ext cx="61566" cy="61566"/>
             </a:xfrm>
             <a:prstGeom prst="ellipse">
@@ -15298,7 +15298,7 @@
           </p:nvSpPr>
           <p:spPr>
             <a:xfrm>
-              <a:off x="4787186" y="3144480"/>
+              <a:off x="4728999" y="3144480"/>
               <a:ext cx="61566" cy="61566"/>
             </a:xfrm>
             <a:prstGeom prst="ellipse">
@@ -15324,7 +15324,7 @@
           </p:nvSpPr>
           <p:spPr>
             <a:xfrm>
-              <a:off x="4948062" y="3274206"/>
+              <a:off x="5022071" y="3274206"/>
               <a:ext cx="61566" cy="61566"/>
             </a:xfrm>
             <a:prstGeom prst="ellipse">
@@ -15350,7 +15350,7 @@
           </p:nvSpPr>
           <p:spPr>
             <a:xfrm>
-              <a:off x="4775528" y="2582934"/>
+              <a:off x="4809940" y="2582934"/>
               <a:ext cx="61566" cy="61566"/>
             </a:xfrm>
             <a:prstGeom prst="ellipse">
@@ -15376,7 +15376,7 @@
           </p:nvSpPr>
           <p:spPr>
             <a:xfrm>
-              <a:off x="4957153" y="3070681"/>
+              <a:off x="5010469" y="3070681"/>
               <a:ext cx="61566" cy="61566"/>
             </a:xfrm>
             <a:prstGeom prst="ellipse">
@@ -15402,7 +15402,7 @@
           </p:nvSpPr>
           <p:spPr>
             <a:xfrm>
-              <a:off x="4776574" y="2772257"/>
+              <a:off x="4740839" y="2772257"/>
               <a:ext cx="61566" cy="61566"/>
             </a:xfrm>
             <a:prstGeom prst="ellipse">
@@ -15428,7 +15428,7 @@
           </p:nvSpPr>
           <p:spPr>
             <a:xfrm>
-              <a:off x="5032686" y="3162555"/>
+              <a:off x="4970438" y="3162555"/>
               <a:ext cx="61566" cy="61566"/>
             </a:xfrm>
             <a:prstGeom prst="ellipse">
@@ -15454,7 +15454,7 @@
           </p:nvSpPr>
           <p:spPr>
             <a:xfrm>
-              <a:off x="4813844" y="2125412"/>
+              <a:off x="4784990" y="2125412"/>
               <a:ext cx="61566" cy="61566"/>
             </a:xfrm>
             <a:prstGeom prst="ellipse">
@@ -15480,7 +15480,7 @@
           </p:nvSpPr>
           <p:spPr>
             <a:xfrm>
-              <a:off x="5024054" y="2626171"/>
+              <a:off x="4968848" y="2626171"/>
               <a:ext cx="61566" cy="61566"/>
             </a:xfrm>
             <a:prstGeom prst="ellipse">
@@ -15506,7 +15506,7 @@
           </p:nvSpPr>
           <p:spPr>
             <a:xfrm>
-              <a:off x="4814455" y="2346961"/>
+              <a:off x="4786809" y="2346961"/>
               <a:ext cx="61566" cy="61566"/>
             </a:xfrm>
             <a:prstGeom prst="ellipse">
@@ -15532,7 +15532,7 @@
           </p:nvSpPr>
           <p:spPr>
             <a:xfrm>
-              <a:off x="5005787" y="2736010"/>
+              <a:off x="4963368" y="2736010"/>
               <a:ext cx="61566" cy="61566"/>
             </a:xfrm>
             <a:prstGeom prst="ellipse">
@@ -15558,7 +15558,7 @@
           </p:nvSpPr>
           <p:spPr>
             <a:xfrm>
-              <a:off x="4740880" y="2351125"/>
+              <a:off x="4809459" y="2351125"/>
               <a:ext cx="61566" cy="61566"/>
             </a:xfrm>
             <a:prstGeom prst="ellipse">
@@ -15584,7 +15584,7 @@
           </p:nvSpPr>
           <p:spPr>
             <a:xfrm>
-              <a:off x="5035349" y="2975804"/>
+              <a:off x="5013125" y="2975804"/>
               <a:ext cx="61566" cy="61566"/>
             </a:xfrm>
             <a:prstGeom prst="ellipse">
@@ -15610,7 +15610,7 @@
           </p:nvSpPr>
           <p:spPr>
             <a:xfrm>
-              <a:off x="4792312" y="2650991"/>
+              <a:off x="4736655" y="2650991"/>
               <a:ext cx="61566" cy="61566"/>
             </a:xfrm>
             <a:prstGeom prst="ellipse">
@@ -15636,7 +15636,7 @@
           </p:nvSpPr>
           <p:spPr>
             <a:xfrm>
-              <a:off x="4957149" y="3166964"/>
+              <a:off x="4959869" y="3166964"/>
               <a:ext cx="61566" cy="61566"/>
             </a:xfrm>
             <a:prstGeom prst="ellipse">
@@ -15662,7 +15662,7 @@
           </p:nvSpPr>
           <p:spPr>
             <a:xfrm>
-              <a:off x="4751255" y="2000398"/>
+              <a:off x="4743419" y="2000398"/>
               <a:ext cx="61566" cy="61566"/>
             </a:xfrm>
             <a:prstGeom prst="ellipse">
@@ -15688,7 +15688,7 @@
           </p:nvSpPr>
           <p:spPr>
             <a:xfrm>
-              <a:off x="5038526" y="2420461"/>
+              <a:off x="5034549" y="2420461"/>
               <a:ext cx="61566" cy="61566"/>
             </a:xfrm>
             <a:prstGeom prst="ellipse">
@@ -15714,7 +15714,7 @@
           </p:nvSpPr>
           <p:spPr>
             <a:xfrm>
-              <a:off x="4756607" y="2816614"/>
+              <a:off x="4762627" y="2816614"/>
               <a:ext cx="61566" cy="61566"/>
             </a:xfrm>
             <a:prstGeom prst="ellipse">
@@ -15740,7 +15740,7 @@
           </p:nvSpPr>
           <p:spPr>
             <a:xfrm>
-              <a:off x="4996797" y="3424228"/>
+              <a:off x="5034842" y="3424228"/>
               <a:ext cx="61566" cy="61566"/>
             </a:xfrm>
             <a:prstGeom prst="ellipse">
@@ -15766,7 +15766,7 @@
           </p:nvSpPr>
           <p:spPr>
             <a:xfrm>
-              <a:off x="4722591" y="3377207"/>
+              <a:off x="4742999" y="3377207"/>
               <a:ext cx="61566" cy="61566"/>
             </a:xfrm>
             <a:prstGeom prst="ellipse">
@@ -15792,7 +15792,7 @@
           </p:nvSpPr>
           <p:spPr>
             <a:xfrm>
-              <a:off x="5047331" y="3038906"/>
+              <a:off x="4946688" y="3038906"/>
               <a:ext cx="61566" cy="61566"/>
             </a:xfrm>
             <a:prstGeom prst="ellipse">
@@ -15818,7 +15818,7 @@
           </p:nvSpPr>
           <p:spPr>
             <a:xfrm>
-              <a:off x="4808635" y="2423842"/>
+              <a:off x="4752866" y="2423842"/>
               <a:ext cx="61566" cy="61566"/>
             </a:xfrm>
             <a:prstGeom prst="ellipse">
@@ -15844,7 +15844,7 @@
           </p:nvSpPr>
           <p:spPr>
             <a:xfrm>
-              <a:off x="5043373" y="3017734"/>
+              <a:off x="5019666" y="3017734"/>
               <a:ext cx="61566" cy="61566"/>
             </a:xfrm>
             <a:prstGeom prst="ellipse">
@@ -15870,7 +15870,7 @@
           </p:nvSpPr>
           <p:spPr>
             <a:xfrm>
-              <a:off x="4734754" y="2285059"/>
+              <a:off x="4720139" y="2285059"/>
               <a:ext cx="61566" cy="61566"/>
             </a:xfrm>
             <a:prstGeom prst="ellipse">
@@ -15896,7 +15896,7 @@
           </p:nvSpPr>
           <p:spPr>
             <a:xfrm>
-              <a:off x="5041714" y="3064071"/>
+              <a:off x="5038860" y="3064071"/>
               <a:ext cx="61566" cy="61566"/>
             </a:xfrm>
             <a:prstGeom prst="ellipse">
@@ -15922,7 +15922,7 @@
           </p:nvSpPr>
           <p:spPr>
             <a:xfrm>
-              <a:off x="4727748" y="2237460"/>
+              <a:off x="4726628" y="2237460"/>
               <a:ext cx="61566" cy="61566"/>
             </a:xfrm>
             <a:prstGeom prst="ellipse">
@@ -15948,7 +15948,7 @@
           </p:nvSpPr>
           <p:spPr>
             <a:xfrm>
-              <a:off x="5022784" y="2455816"/>
+              <a:off x="4997815" y="2455816"/>
               <a:ext cx="61566" cy="61566"/>
             </a:xfrm>
             <a:prstGeom prst="ellipse">
@@ -15974,7 +15974,7 @@
           </p:nvSpPr>
           <p:spPr>
             <a:xfrm>
-              <a:off x="4787203" y="3434225"/>
+              <a:off x="4720347" y="3434225"/>
               <a:ext cx="61566" cy="61566"/>
             </a:xfrm>
             <a:prstGeom prst="ellipse">
@@ -16000,7 +16000,7 @@
           </p:nvSpPr>
           <p:spPr>
             <a:xfrm>
-              <a:off x="4965445" y="3242788"/>
+              <a:off x="4974205" y="3242788"/>
               <a:ext cx="61566" cy="61566"/>
             </a:xfrm>
             <a:prstGeom prst="ellipse">
@@ -16026,7 +16026,7 @@
           </p:nvSpPr>
           <p:spPr>
             <a:xfrm>
-              <a:off x="4809097" y="3073040"/>
+              <a:off x="4738847" y="3073040"/>
               <a:ext cx="61566" cy="61566"/>
             </a:xfrm>
             <a:prstGeom prst="ellipse">
@@ -16052,7 +16052,7 @@
           </p:nvSpPr>
           <p:spPr>
             <a:xfrm>
-              <a:off x="5019864" y="3514435"/>
+              <a:off x="4975047" y="3514435"/>
               <a:ext cx="61566" cy="61566"/>
             </a:xfrm>
             <a:prstGeom prst="ellipse">
@@ -16078,7 +16078,7 @@
           </p:nvSpPr>
           <p:spPr>
             <a:xfrm>
-              <a:off x="4805133" y="2672804"/>
+              <a:off x="4778975" y="2672804"/>
               <a:ext cx="61566" cy="61566"/>
             </a:xfrm>
             <a:prstGeom prst="ellipse">
@@ -16104,7 +16104,7 @@
           </p:nvSpPr>
           <p:spPr>
             <a:xfrm>
-              <a:off x="5021317" y="3023408"/>
+              <a:off x="4940422" y="3023408"/>
               <a:ext cx="61566" cy="61566"/>
             </a:xfrm>
             <a:prstGeom prst="ellipse">
@@ -16130,7 +16130,7 @@
           </p:nvSpPr>
           <p:spPr>
             <a:xfrm>
-              <a:off x="4812731" y="2130854"/>
+              <a:off x="4754253" y="2130854"/>
               <a:ext cx="61566" cy="61566"/>
             </a:xfrm>
             <a:prstGeom prst="ellipse">
@@ -16156,7 +16156,7 @@
           </p:nvSpPr>
           <p:spPr>
             <a:xfrm>
-              <a:off x="4987833" y="2712118"/>
+              <a:off x="4973678" y="2712118"/>
               <a:ext cx="61566" cy="61566"/>
             </a:xfrm>
             <a:prstGeom prst="ellipse">
@@ -16182,7 +16182,7 @@
           </p:nvSpPr>
           <p:spPr>
             <a:xfrm>
-              <a:off x="4795911" y="2008824"/>
+              <a:off x="4726075" y="2008824"/>
               <a:ext cx="61566" cy="61566"/>
             </a:xfrm>
             <a:prstGeom prst="ellipse">
@@ -16208,7 +16208,7 @@
           </p:nvSpPr>
           <p:spPr>
             <a:xfrm>
-              <a:off x="5037295" y="2286195"/>
+              <a:off x="4982013" y="2286195"/>
               <a:ext cx="61566" cy="61566"/>
             </a:xfrm>
             <a:prstGeom prst="ellipse">
@@ -16234,7 +16234,7 @@
           </p:nvSpPr>
           <p:spPr>
             <a:xfrm>
-              <a:off x="4781038" y="2634715"/>
+              <a:off x="4783917" y="2634715"/>
               <a:ext cx="61566" cy="61566"/>
             </a:xfrm>
             <a:prstGeom prst="ellipse">
@@ -16260,7 +16260,7 @@
           </p:nvSpPr>
           <p:spPr>
             <a:xfrm>
-              <a:off x="5007968" y="3167266"/>
+              <a:off x="4942200" y="3167266"/>
               <a:ext cx="61566" cy="61566"/>
             </a:xfrm>
             <a:prstGeom prst="ellipse">
@@ -16286,7 +16286,7 @@
           </p:nvSpPr>
           <p:spPr>
             <a:xfrm>
-              <a:off x="4748759" y="2743627"/>
+              <a:off x="4728098" y="2743627"/>
               <a:ext cx="61566" cy="61566"/>
             </a:xfrm>
             <a:prstGeom prst="ellipse">
@@ -16312,7 +16312,7 @@
           </p:nvSpPr>
           <p:spPr>
             <a:xfrm>
-              <a:off x="4968811" y="2931531"/>
+              <a:off x="5017338" y="2931531"/>
               <a:ext cx="61566" cy="61566"/>
             </a:xfrm>
             <a:prstGeom prst="ellipse">
@@ -16338,7 +16338,7 @@
           </p:nvSpPr>
           <p:spPr>
             <a:xfrm>
-              <a:off x="4775783" y="2922342"/>
+              <a:off x="4802713" y="2922342"/>
               <a:ext cx="61566" cy="61566"/>
             </a:xfrm>
             <a:prstGeom prst="ellipse">
@@ -16364,7 +16364,7 @@
           </p:nvSpPr>
           <p:spPr>
             <a:xfrm>
-              <a:off x="4974123" y="2991768"/>
+              <a:off x="4946678" y="2991768"/>
               <a:ext cx="61566" cy="61566"/>
             </a:xfrm>
             <a:prstGeom prst="ellipse">
@@ -16390,7 +16390,7 @@
           </p:nvSpPr>
           <p:spPr>
             <a:xfrm>
-              <a:off x="4776455" y="2372612"/>
+              <a:off x="4754259" y="2372612"/>
               <a:ext cx="61566" cy="61566"/>
             </a:xfrm>
             <a:prstGeom prst="ellipse">
@@ -16416,7 +16416,7 @@
           </p:nvSpPr>
           <p:spPr>
             <a:xfrm>
-              <a:off x="5026996" y="2704667"/>
+              <a:off x="4938743" y="2704667"/>
               <a:ext cx="61566" cy="61566"/>
             </a:xfrm>
             <a:prstGeom prst="ellipse">
@@ -16442,7 +16442,7 @@
           </p:nvSpPr>
           <p:spPr>
             <a:xfrm>
-              <a:off x="4766291" y="2836010"/>
+              <a:off x="4752728" y="2836010"/>
               <a:ext cx="61566" cy="61566"/>
             </a:xfrm>
             <a:prstGeom prst="ellipse">
@@ -16468,7 +16468,7 @@
           </p:nvSpPr>
           <p:spPr>
             <a:xfrm>
-              <a:off x="4986006" y="3261301"/>
+              <a:off x="4963804" y="3261301"/>
               <a:ext cx="61566" cy="61566"/>
             </a:xfrm>
             <a:prstGeom prst="ellipse">
@@ -16494,7 +16494,7 @@
           </p:nvSpPr>
           <p:spPr>
             <a:xfrm>
-              <a:off x="4786688" y="2426681"/>
+              <a:off x="4751536" y="2426681"/>
               <a:ext cx="61566" cy="61566"/>
             </a:xfrm>
             <a:prstGeom prst="ellipse">
@@ -16520,7 +16520,7 @@
           </p:nvSpPr>
           <p:spPr>
             <a:xfrm>
-              <a:off x="5018155" y="3124757"/>
+              <a:off x="5009886" y="3124757"/>
               <a:ext cx="61566" cy="61566"/>
             </a:xfrm>
             <a:prstGeom prst="ellipse">
@@ -16546,7 +16546,7 @@
           </p:nvSpPr>
           <p:spPr>
             <a:xfrm>
-              <a:off x="4736540" y="2814804"/>
+              <a:off x="4715868" y="2814804"/>
               <a:ext cx="61566" cy="61566"/>
             </a:xfrm>
             <a:prstGeom prst="ellipse">
@@ -16572,7 +16572,7 @@
           </p:nvSpPr>
           <p:spPr>
             <a:xfrm>
-              <a:off x="4989945" y="3005246"/>
+              <a:off x="4962174" y="3005246"/>
               <a:ext cx="61566" cy="61566"/>
             </a:xfrm>
             <a:prstGeom prst="ellipse">
@@ -16598,7 +16598,7 @@
           </p:nvSpPr>
           <p:spPr>
             <a:xfrm>
-              <a:off x="4770660" y="3087535"/>
+              <a:off x="4785733" y="3087535"/>
               <a:ext cx="61566" cy="61566"/>
             </a:xfrm>
             <a:prstGeom prst="ellipse">
@@ -16624,7 +16624,7 @@
           </p:nvSpPr>
           <p:spPr>
             <a:xfrm>
-              <a:off x="5033493" y="2856035"/>
+              <a:off x="5038859" y="2856035"/>
               <a:ext cx="61566" cy="61566"/>
             </a:xfrm>
             <a:prstGeom prst="ellipse">
@@ -16650,7 +16650,7 @@
           </p:nvSpPr>
           <p:spPr>
             <a:xfrm>
-              <a:off x="4789057" y="2200826"/>
+              <a:off x="4781614" y="2200826"/>
               <a:ext cx="61566" cy="61566"/>
             </a:xfrm>
             <a:prstGeom prst="ellipse">
@@ -16676,7 +16676,7 @@
           </p:nvSpPr>
           <p:spPr>
             <a:xfrm>
-              <a:off x="4975315" y="2825552"/>
+              <a:off x="4989502" y="2825552"/>
               <a:ext cx="61566" cy="61566"/>
             </a:xfrm>
             <a:prstGeom prst="ellipse">
@@ -16702,7 +16702,7 @@
           </p:nvSpPr>
           <p:spPr>
             <a:xfrm>
-              <a:off x="4716265" y="2445320"/>
+              <a:off x="4797523" y="2445320"/>
               <a:ext cx="61566" cy="61566"/>
             </a:xfrm>
             <a:prstGeom prst="ellipse">
@@ -16728,7 +16728,7 @@
           </p:nvSpPr>
           <p:spPr>
             <a:xfrm>
-              <a:off x="4951524" y="2654234"/>
+              <a:off x="4982425" y="2654234"/>
               <a:ext cx="61566" cy="61566"/>
             </a:xfrm>
             <a:prstGeom prst="ellipse">
@@ -16754,7 +16754,7 @@
           </p:nvSpPr>
           <p:spPr>
             <a:xfrm>
-              <a:off x="4772049" y="1764005"/>
+              <a:off x="4806189" y="1764005"/>
               <a:ext cx="61566" cy="61566"/>
             </a:xfrm>
             <a:prstGeom prst="ellipse">
@@ -16780,7 +16780,7 @@
           </p:nvSpPr>
           <p:spPr>
             <a:xfrm>
-              <a:off x="4948338" y="2233631"/>
+              <a:off x="4974111" y="2233631"/>
               <a:ext cx="61566" cy="61566"/>
             </a:xfrm>
             <a:prstGeom prst="ellipse">
@@ -16806,7 +16806,7 @@
           </p:nvSpPr>
           <p:spPr>
             <a:xfrm>
-              <a:off x="4804356" y="2963617"/>
+              <a:off x="4790579" y="2963617"/>
               <a:ext cx="61566" cy="61566"/>
             </a:xfrm>
             <a:prstGeom prst="ellipse">
@@ -16832,7 +16832,7 @@
           </p:nvSpPr>
           <p:spPr>
             <a:xfrm>
-              <a:off x="5047282" y="3204685"/>
+              <a:off x="5003661" y="3204685"/>
               <a:ext cx="61566" cy="61566"/>
             </a:xfrm>
             <a:prstGeom prst="ellipse">
@@ -16858,7 +16858,7 @@
           </p:nvSpPr>
           <p:spPr>
             <a:xfrm>
-              <a:off x="4743863" y="2869254"/>
+              <a:off x="4747974" y="2869254"/>
               <a:ext cx="61566" cy="61566"/>
             </a:xfrm>
             <a:prstGeom prst="ellipse">
@@ -16884,7 +16884,7 @@
           </p:nvSpPr>
           <p:spPr>
             <a:xfrm>
-              <a:off x="5025760" y="2343971"/>
+              <a:off x="4992227" y="2343971"/>
               <a:ext cx="61566" cy="61566"/>
             </a:xfrm>
             <a:prstGeom prst="ellipse">
@@ -16910,7 +16910,7 @@
           </p:nvSpPr>
           <p:spPr>
             <a:xfrm>
-              <a:off x="4811718" y="2816846"/>
+              <a:off x="4818758" y="2816846"/>
               <a:ext cx="61566" cy="61566"/>
             </a:xfrm>
             <a:prstGeom prst="ellipse">
@@ -16936,7 +16936,7 @@
           </p:nvSpPr>
           <p:spPr>
             <a:xfrm>
-              <a:off x="4952597" y="2453019"/>
+              <a:off x="4956842" y="2453019"/>
               <a:ext cx="61566" cy="61566"/>
             </a:xfrm>
             <a:prstGeom prst="ellipse">
@@ -16962,7 +16962,7 @@
           </p:nvSpPr>
           <p:spPr>
             <a:xfrm>
-              <a:off x="4725193" y="2876084"/>
+              <a:off x="4765081" y="2876084"/>
               <a:ext cx="61566" cy="61566"/>
             </a:xfrm>
             <a:prstGeom prst="ellipse">
@@ -16988,7 +16988,7 @@
           </p:nvSpPr>
           <p:spPr>
             <a:xfrm>
-              <a:off x="5033076" y="2748247"/>
+              <a:off x="5021261" y="2748247"/>
               <a:ext cx="61566" cy="61566"/>
             </a:xfrm>
             <a:prstGeom prst="ellipse">
@@ -17014,7 +17014,7 @@
           </p:nvSpPr>
           <p:spPr>
             <a:xfrm>
-              <a:off x="4773714" y="3628076"/>
+              <a:off x="4777628" y="3628076"/>
               <a:ext cx="61566" cy="61566"/>
             </a:xfrm>
             <a:prstGeom prst="ellipse">
@@ -17040,7 +17040,7 @@
           </p:nvSpPr>
           <p:spPr>
             <a:xfrm>
-              <a:off x="4945588" y="3213347"/>
+              <a:off x="4943339" y="3213347"/>
               <a:ext cx="61566" cy="61566"/>
             </a:xfrm>
             <a:prstGeom prst="ellipse">
@@ -17066,7 +17066,7 @@
           </p:nvSpPr>
           <p:spPr>
             <a:xfrm>
-              <a:off x="4817440" y="2814912"/>
+              <a:off x="4734659" y="2814912"/>
               <a:ext cx="61566" cy="61566"/>
             </a:xfrm>
             <a:prstGeom prst="ellipse">
@@ -17092,7 +17092,7 @@
           </p:nvSpPr>
           <p:spPr>
             <a:xfrm>
-              <a:off x="5016296" y="2944393"/>
+              <a:off x="4981600" y="2944393"/>
               <a:ext cx="61566" cy="61566"/>
             </a:xfrm>
             <a:prstGeom prst="ellipse">
@@ -17118,7 +17118,7 @@
           </p:nvSpPr>
           <p:spPr>
             <a:xfrm>
-              <a:off x="4825186" y="2381001"/>
+              <a:off x="4784253" y="2381001"/>
               <a:ext cx="61566" cy="61566"/>
             </a:xfrm>
             <a:prstGeom prst="ellipse">
@@ -17144,7 +17144,7 @@
           </p:nvSpPr>
           <p:spPr>
             <a:xfrm>
-              <a:off x="5019861" y="2593400"/>
+              <a:off x="5042683" y="2593400"/>
               <a:ext cx="61566" cy="61566"/>
             </a:xfrm>
             <a:prstGeom prst="ellipse">
@@ -17170,7 +17170,7 @@
           </p:nvSpPr>
           <p:spPr>
             <a:xfrm>
-              <a:off x="4749948" y="3068658"/>
+              <a:off x="4773367" y="3068658"/>
               <a:ext cx="61566" cy="61566"/>
             </a:xfrm>
             <a:prstGeom prst="ellipse">
@@ -17196,7 +17196,7 @@
           </p:nvSpPr>
           <p:spPr>
             <a:xfrm>
-              <a:off x="4970633" y="3137927"/>
+              <a:off x="5005011" y="3137927"/>
               <a:ext cx="61566" cy="61566"/>
             </a:xfrm>
             <a:prstGeom prst="ellipse">
@@ -17222,7 +17222,7 @@
           </p:nvSpPr>
           <p:spPr>
             <a:xfrm>
-              <a:off x="4775692" y="3772718"/>
+              <a:off x="4721892" y="3772718"/>
               <a:ext cx="61566" cy="61566"/>
             </a:xfrm>
             <a:prstGeom prst="ellipse">
@@ -17248,7 +17248,7 @@
           </p:nvSpPr>
           <p:spPr>
             <a:xfrm>
-              <a:off x="5011332" y="3554756"/>
+              <a:off x="4940040" y="3554756"/>
               <a:ext cx="61566" cy="61566"/>
             </a:xfrm>
             <a:prstGeom prst="ellipse">
@@ -17274,7 +17274,7 @@
           </p:nvSpPr>
           <p:spPr>
             <a:xfrm>
-              <a:off x="4821134" y="3330300"/>
+              <a:off x="4755827" y="3330300"/>
               <a:ext cx="61566" cy="61566"/>
             </a:xfrm>
             <a:prstGeom prst="ellipse">
@@ -17300,7 +17300,7 @@
           </p:nvSpPr>
           <p:spPr>
             <a:xfrm>
-              <a:off x="4950467" y="2945012"/>
+              <a:off x="4987525" y="2945012"/>
               <a:ext cx="61566" cy="61566"/>
             </a:xfrm>
             <a:prstGeom prst="ellipse">
@@ -17326,7 +17326,7 @@
           </p:nvSpPr>
           <p:spPr>
             <a:xfrm>
-              <a:off x="4778438" y="3064262"/>
+              <a:off x="4824301" y="3064262"/>
               <a:ext cx="61566" cy="61566"/>
             </a:xfrm>
             <a:prstGeom prst="ellipse">
@@ -17352,7 +17352,7 @@
           </p:nvSpPr>
           <p:spPr>
             <a:xfrm>
-              <a:off x="4976971" y="2688585"/>
+              <a:off x="5036584" y="2688585"/>
               <a:ext cx="61566" cy="61566"/>
             </a:xfrm>
             <a:prstGeom prst="ellipse">
@@ -17378,7 +17378,7 @@
           </p:nvSpPr>
           <p:spPr>
             <a:xfrm>
-              <a:off x="4799742" y="2904466"/>
+              <a:off x="4762703" y="2904466"/>
               <a:ext cx="61566" cy="61566"/>
             </a:xfrm>
             <a:prstGeom prst="ellipse">
@@ -17404,7 +17404,7 @@
           </p:nvSpPr>
           <p:spPr>
             <a:xfrm>
-              <a:off x="4975000" y="2638117"/>
+              <a:off x="5042886" y="2638117"/>
               <a:ext cx="61566" cy="61566"/>
             </a:xfrm>
             <a:prstGeom prst="ellipse">
@@ -17430,7 +17430,7 @@
           </p:nvSpPr>
           <p:spPr>
             <a:xfrm>
-              <a:off x="4798266" y="2723863"/>
+              <a:off x="4790576" y="2723863"/>
               <a:ext cx="61566" cy="61566"/>
             </a:xfrm>
             <a:prstGeom prst="ellipse">
@@ -17456,7 +17456,7 @@
           </p:nvSpPr>
           <p:spPr>
             <a:xfrm>
-              <a:off x="4941738" y="2967243"/>
+              <a:off x="4958941" y="2967243"/>
               <a:ext cx="61566" cy="61566"/>
             </a:xfrm>
             <a:prstGeom prst="ellipse">
@@ -17482,7 +17482,7 @@
           </p:nvSpPr>
           <p:spPr>
             <a:xfrm>
-              <a:off x="4789738" y="2947238"/>
+              <a:off x="4815147" y="2947238"/>
               <a:ext cx="61566" cy="61566"/>
             </a:xfrm>
             <a:prstGeom prst="ellipse">
@@ -17508,7 +17508,7 @@
           </p:nvSpPr>
           <p:spPr>
             <a:xfrm>
-              <a:off x="5021208" y="2976497"/>
+              <a:off x="5040009" y="2976497"/>
               <a:ext cx="61566" cy="61566"/>
             </a:xfrm>
             <a:prstGeom prst="ellipse">
@@ -17534,7 +17534,7 @@
           </p:nvSpPr>
           <p:spPr>
             <a:xfrm>
-              <a:off x="4726930" y="2901065"/>
+              <a:off x="4797936" y="2901065"/>
               <a:ext cx="61566" cy="61566"/>
             </a:xfrm>
             <a:prstGeom prst="ellipse">
@@ -17560,7 +17560,7 @@
           </p:nvSpPr>
           <p:spPr>
             <a:xfrm>
-              <a:off x="5011596" y="2795997"/>
+              <a:off x="4972540" y="2795997"/>
               <a:ext cx="61566" cy="61566"/>
             </a:xfrm>
             <a:prstGeom prst="ellipse">
@@ -17586,7 +17586,7 @@
           </p:nvSpPr>
           <p:spPr>
             <a:xfrm>
-              <a:off x="4739042" y="2707403"/>
+              <a:off x="4732999" y="2707403"/>
               <a:ext cx="61566" cy="61566"/>
             </a:xfrm>
             <a:prstGeom prst="ellipse">
@@ -17612,7 +17612,7 @@
           </p:nvSpPr>
           <p:spPr>
             <a:xfrm>
-              <a:off x="5047092" y="2552646"/>
+              <a:off x="4949132" y="2552646"/>
               <a:ext cx="61566" cy="61566"/>
             </a:xfrm>
             <a:prstGeom prst="ellipse">
@@ -17638,7 +17638,7 @@
           </p:nvSpPr>
           <p:spPr>
             <a:xfrm>
-              <a:off x="4742725" y="2753021"/>
+              <a:off x="4799611" y="2753021"/>
               <a:ext cx="61566" cy="61566"/>
             </a:xfrm>
             <a:prstGeom prst="ellipse">
@@ -17664,7 +17664,7 @@
           </p:nvSpPr>
           <p:spPr>
             <a:xfrm>
-              <a:off x="4944483" y="2736404"/>
+              <a:off x="5019879" y="2736404"/>
               <a:ext cx="61566" cy="61566"/>
             </a:xfrm>
             <a:prstGeom prst="ellipse">
@@ -17690,7 +17690,7 @@
           </p:nvSpPr>
           <p:spPr>
             <a:xfrm>
-              <a:off x="4773596" y="3014029"/>
+              <a:off x="4716251" y="3014029"/>
               <a:ext cx="61566" cy="61566"/>
             </a:xfrm>
             <a:prstGeom prst="ellipse">
@@ -17716,7 +17716,7 @@
           </p:nvSpPr>
           <p:spPr>
             <a:xfrm>
-              <a:off x="5005189" y="2634571"/>
+              <a:off x="4939729" y="2634571"/>
               <a:ext cx="61566" cy="61566"/>
             </a:xfrm>
             <a:prstGeom prst="ellipse">
@@ -17742,7 +17742,7 @@
           </p:nvSpPr>
           <p:spPr>
             <a:xfrm>
-              <a:off x="4756284" y="2484187"/>
+              <a:off x="4722812" y="2484187"/>
               <a:ext cx="61566" cy="61566"/>
             </a:xfrm>
             <a:prstGeom prst="ellipse">
@@ -17768,7 +17768,7 @@
           </p:nvSpPr>
           <p:spPr>
             <a:xfrm>
-              <a:off x="5010191" y="2267684"/>
+              <a:off x="5023229" y="2267684"/>
               <a:ext cx="61566" cy="61566"/>
             </a:xfrm>
             <a:prstGeom prst="ellipse">
@@ -17794,7 +17794,7 @@
           </p:nvSpPr>
           <p:spPr>
             <a:xfrm>
-              <a:off x="4786687" y="3231183"/>
+              <a:off x="4720202" y="3231183"/>
               <a:ext cx="61566" cy="61566"/>
             </a:xfrm>
             <a:prstGeom prst="ellipse">
@@ -17820,7 +17820,7 @@
           </p:nvSpPr>
           <p:spPr>
             <a:xfrm>
-              <a:off x="4993403" y="3215302"/>
+              <a:off x="5038798" y="3215302"/>
               <a:ext cx="61566" cy="61566"/>
             </a:xfrm>
             <a:prstGeom prst="ellipse">
@@ -17846,7 +17846,7 @@
           </p:nvSpPr>
           <p:spPr>
             <a:xfrm>
-              <a:off x="4770428" y="3492364"/>
+              <a:off x="4803295" y="3492364"/>
               <a:ext cx="61566" cy="61566"/>
             </a:xfrm>
             <a:prstGeom prst="ellipse">
@@ -17872,7 +17872,7 @@
           </p:nvSpPr>
           <p:spPr>
             <a:xfrm>
-              <a:off x="5045220" y="3224609"/>
+              <a:off x="5008152" y="3224609"/>
               <a:ext cx="61566" cy="61566"/>
             </a:xfrm>
             <a:prstGeom prst="ellipse">
@@ -17898,7 +17898,7 @@
           </p:nvSpPr>
           <p:spPr>
             <a:xfrm>
-              <a:off x="4717518" y="2085588"/>
+              <a:off x="4765468" y="2085588"/>
               <a:ext cx="61566" cy="61566"/>
             </a:xfrm>
             <a:prstGeom prst="ellipse">
@@ -17924,7 +17924,7 @@
           </p:nvSpPr>
           <p:spPr>
             <a:xfrm>
-              <a:off x="5035181" y="2255251"/>
+              <a:off x="4951153" y="2255251"/>
               <a:ext cx="61566" cy="61566"/>
             </a:xfrm>
             <a:prstGeom prst="ellipse">
@@ -17950,7 +17950,7 @@
           </p:nvSpPr>
           <p:spPr>
             <a:xfrm>
-              <a:off x="6272607" y="2507357"/>
+              <a:off x="6344528" y="2507357"/>
               <a:ext cx="61566" cy="61566"/>
             </a:xfrm>
             <a:prstGeom prst="ellipse">
@@ -17976,7 +17976,7 @@
           </p:nvSpPr>
           <p:spPr>
             <a:xfrm>
-              <a:off x="6515711" y="2572442"/>
+              <a:off x="6504081" y="2572442"/>
               <a:ext cx="61566" cy="61566"/>
             </a:xfrm>
             <a:prstGeom prst="ellipse">
@@ -18002,7 +18002,7 @@
           </p:nvSpPr>
           <p:spPr>
             <a:xfrm>
-              <a:off x="6329761" y="3172006"/>
+              <a:off x="6282605" y="3172006"/>
               <a:ext cx="61566" cy="61566"/>
             </a:xfrm>
             <a:prstGeom prst="ellipse">
@@ -18028,7 +18028,7 @@
           </p:nvSpPr>
           <p:spPr>
             <a:xfrm>
-              <a:off x="6524208" y="3553426"/>
+              <a:off x="6562023" y="3553426"/>
               <a:ext cx="61566" cy="61566"/>
             </a:xfrm>
             <a:prstGeom prst="ellipse">
@@ -18054,7 +18054,7 @@
           </p:nvSpPr>
           <p:spPr>
             <a:xfrm>
-              <a:off x="6356667" y="2567467"/>
+              <a:off x="6268838" y="2567467"/>
               <a:ext cx="61566" cy="61566"/>
             </a:xfrm>
             <a:prstGeom prst="ellipse">
@@ -18080,7 +18080,7 @@
           </p:nvSpPr>
           <p:spPr>
             <a:xfrm>
-              <a:off x="6552321" y="2359144"/>
+              <a:off x="6528824" y="2359144"/>
               <a:ext cx="61566" cy="61566"/>
             </a:xfrm>
             <a:prstGeom prst="ellipse">
@@ -18106,7 +18106,7 @@
           </p:nvSpPr>
           <p:spPr>
             <a:xfrm>
-              <a:off x="6262269" y="2967100"/>
+              <a:off x="6265408" y="2967100"/>
               <a:ext cx="61566" cy="61566"/>
             </a:xfrm>
             <a:prstGeom prst="ellipse">
@@ -18132,7 +18132,7 @@
           </p:nvSpPr>
           <p:spPr>
             <a:xfrm>
-              <a:off x="6561113" y="2698863"/>
+              <a:off x="6485968" y="2698863"/>
               <a:ext cx="61566" cy="61566"/>
             </a:xfrm>
             <a:prstGeom prst="ellipse">
@@ -18158,7 +18158,7 @@
           </p:nvSpPr>
           <p:spPr>
             <a:xfrm>
-              <a:off x="6313391" y="2332494"/>
+              <a:off x="6266822" y="2332494"/>
               <a:ext cx="61566" cy="61566"/>
             </a:xfrm>
             <a:prstGeom prst="ellipse">
@@ -18184,7 +18184,7 @@
           </p:nvSpPr>
           <p:spPr>
             <a:xfrm>
-              <a:off x="6500228" y="2852440"/>
+              <a:off x="6530140" y="2852440"/>
               <a:ext cx="61566" cy="61566"/>
             </a:xfrm>
             <a:prstGeom prst="ellipse">
@@ -18210,7 +18210,7 @@
           </p:nvSpPr>
           <p:spPr>
             <a:xfrm>
-              <a:off x="6271978" y="1895312"/>
+              <a:off x="6309705" y="1895312"/>
               <a:ext cx="61566" cy="61566"/>
             </a:xfrm>
             <a:prstGeom prst="ellipse">
@@ -18236,7 +18236,7 @@
           </p:nvSpPr>
           <p:spPr>
             <a:xfrm>
-              <a:off x="6496249" y="2288613"/>
+              <a:off x="6551375" y="2288613"/>
               <a:ext cx="61566" cy="61566"/>
             </a:xfrm>
             <a:prstGeom prst="ellipse">
@@ -18262,7 +18262,7 @@
           </p:nvSpPr>
           <p:spPr>
             <a:xfrm>
-              <a:off x="6297211" y="3178611"/>
+              <a:off x="6333781" y="3178611"/>
               <a:ext cx="61566" cy="61566"/>
             </a:xfrm>
             <a:prstGeom prst="ellipse">
@@ -18288,7 +18288,7 @@
           </p:nvSpPr>
           <p:spPr>
             <a:xfrm>
-              <a:off x="6557703" y="3073830"/>
+              <a:off x="6487777" y="3073830"/>
               <a:ext cx="61566" cy="61566"/>
             </a:xfrm>
             <a:prstGeom prst="ellipse">
@@ -18314,7 +18314,7 @@
           </p:nvSpPr>
           <p:spPr>
             <a:xfrm>
-              <a:off x="6353985" y="2650014"/>
+              <a:off x="6358381" y="2650014"/>
               <a:ext cx="61566" cy="61566"/>
             </a:xfrm>
             <a:prstGeom prst="ellipse">
@@ -18340,7 +18340,7 @@
           </p:nvSpPr>
           <p:spPr>
             <a:xfrm>
-              <a:off x="6543410" y="2859262"/>
+              <a:off x="6525036" y="2859262"/>
               <a:ext cx="61566" cy="61566"/>
             </a:xfrm>
             <a:prstGeom prst="ellipse">
@@ -18366,7 +18366,7 @@
           </p:nvSpPr>
           <p:spPr>
             <a:xfrm>
-              <a:off x="6336507" y="2676581"/>
+              <a:off x="6359750" y="2676581"/>
               <a:ext cx="61566" cy="61566"/>
             </a:xfrm>
             <a:prstGeom prst="ellipse">
@@ -18392,7 +18392,7 @@
           </p:nvSpPr>
           <p:spPr>
             <a:xfrm>
-              <a:off x="6582309" y="2793957"/>
+              <a:off x="6560267" y="2793957"/>
               <a:ext cx="61566" cy="61566"/>
             </a:xfrm>
             <a:prstGeom prst="ellipse">
@@ -18418,7 +18418,7 @@
           </p:nvSpPr>
           <p:spPr>
             <a:xfrm>
-              <a:off x="6281631" y="3111149"/>
+              <a:off x="6350621" y="3111149"/>
               <a:ext cx="61566" cy="61566"/>
             </a:xfrm>
             <a:prstGeom prst="ellipse">
@@ -18444,7 +18444,7 @@
           </p:nvSpPr>
           <p:spPr>
             <a:xfrm>
-              <a:off x="6509383" y="2557120"/>
+              <a:off x="6506497" y="2557120"/>
               <a:ext cx="61566" cy="61566"/>
             </a:xfrm>
             <a:prstGeom prst="ellipse">
@@ -18470,7 +18470,7 @@
           </p:nvSpPr>
           <p:spPr>
             <a:xfrm>
-              <a:off x="6304318" y="1703185"/>
+              <a:off x="6331233" y="1703185"/>
               <a:ext cx="61566" cy="61566"/>
             </a:xfrm>
             <a:prstGeom prst="ellipse">
@@ -18496,7 +18496,7 @@
           </p:nvSpPr>
           <p:spPr>
             <a:xfrm>
-              <a:off x="6575839" y="2045643"/>
+              <a:off x="6544660" y="2045643"/>
               <a:ext cx="61566" cy="61566"/>
             </a:xfrm>
             <a:prstGeom prst="ellipse">
@@ -18522,7 +18522,7 @@
           </p:nvSpPr>
           <p:spPr>
             <a:xfrm>
-              <a:off x="6353177" y="3029461"/>
+              <a:off x="6334206" y="3029461"/>
               <a:ext cx="61566" cy="61566"/>
             </a:xfrm>
             <a:prstGeom prst="ellipse">
@@ -18548,7 +18548,7 @@
           </p:nvSpPr>
           <p:spPr>
             <a:xfrm>
-              <a:off x="6566565" y="2752452"/>
+              <a:off x="6515678" y="2752452"/>
               <a:ext cx="61566" cy="61566"/>
             </a:xfrm>
             <a:prstGeom prst="ellipse">
@@ -18574,7 +18574,7 @@
           </p:nvSpPr>
           <p:spPr>
             <a:xfrm>
-              <a:off x="6317606" y="2754702"/>
+              <a:off x="6312883" y="2754702"/>
               <a:ext cx="61566" cy="61566"/>
             </a:xfrm>
             <a:prstGeom prst="ellipse">
@@ -18600,7 +18600,7 @@
           </p:nvSpPr>
           <p:spPr>
             <a:xfrm>
-              <a:off x="6564776" y="2731454"/>
+              <a:off x="6510928" y="2731454"/>
               <a:ext cx="61566" cy="61566"/>
             </a:xfrm>
             <a:prstGeom prst="ellipse">
@@ -18626,7 +18626,7 @@
           </p:nvSpPr>
           <p:spPr>
             <a:xfrm>
-              <a:off x="6291428" y="2275074"/>
+              <a:off x="6313258" y="2275074"/>
               <a:ext cx="61566" cy="61566"/>
             </a:xfrm>
             <a:prstGeom prst="ellipse">
@@ -18652,7 +18652,7 @@
           </p:nvSpPr>
           <p:spPr>
             <a:xfrm>
-              <a:off x="6574236" y="3364719"/>
+              <a:off x="6575201" y="3364719"/>
               <a:ext cx="61566" cy="61566"/>
             </a:xfrm>
             <a:prstGeom prst="ellipse">
@@ -18678,7 +18678,7 @@
           </p:nvSpPr>
           <p:spPr>
             <a:xfrm>
-              <a:off x="6285362" y="2768230"/>
+              <a:off x="6362569" y="2768230"/>
               <a:ext cx="61566" cy="61566"/>
             </a:xfrm>
             <a:prstGeom prst="ellipse">
@@ -18704,7 +18704,7 @@
           </p:nvSpPr>
           <p:spPr>
             <a:xfrm>
-              <a:off x="6515253" y="2688830"/>
+              <a:off x="6540732" y="2688830"/>
               <a:ext cx="61566" cy="61566"/>
             </a:xfrm>
             <a:prstGeom prst="ellipse">
@@ -18730,7 +18730,7 @@
           </p:nvSpPr>
           <p:spPr>
             <a:xfrm>
-              <a:off x="6357320" y="3115928"/>
+              <a:off x="6348388" y="3115928"/>
               <a:ext cx="61566" cy="61566"/>
             </a:xfrm>
             <a:prstGeom prst="ellipse">
@@ -18756,7 +18756,7 @@
           </p:nvSpPr>
           <p:spPr>
             <a:xfrm>
-              <a:off x="6504865" y="3251255"/>
+              <a:off x="6478945" y="3251255"/>
               <a:ext cx="61566" cy="61566"/>
             </a:xfrm>
             <a:prstGeom prst="ellipse">
@@ -18782,7 +18782,7 @@
           </p:nvSpPr>
           <p:spPr>
             <a:xfrm>
-              <a:off x="6279410" y="3019912"/>
+              <a:off x="6282268" y="3019912"/>
               <a:ext cx="61566" cy="61566"/>
             </a:xfrm>
             <a:prstGeom prst="ellipse">
@@ -18808,7 +18808,7 @@
           </p:nvSpPr>
           <p:spPr>
             <a:xfrm>
-              <a:off x="6524687" y="3204605"/>
+              <a:off x="6506309" y="3204605"/>
               <a:ext cx="61566" cy="61566"/>
             </a:xfrm>
             <a:prstGeom prst="ellipse">
@@ -18834,7 +18834,7 @@
           </p:nvSpPr>
           <p:spPr>
             <a:xfrm>
-              <a:off x="6289148" y="2844294"/>
+              <a:off x="6278353" y="2844294"/>
               <a:ext cx="61566" cy="61566"/>
             </a:xfrm>
             <a:prstGeom prst="ellipse">
@@ -18860,7 +18860,7 @@
           </p:nvSpPr>
           <p:spPr>
             <a:xfrm>
-              <a:off x="6570328" y="2389558"/>
+              <a:off x="6545057" y="2389558"/>
               <a:ext cx="61566" cy="61566"/>
             </a:xfrm>
             <a:prstGeom prst="ellipse">
@@ -18886,7 +18886,7 @@
           </p:nvSpPr>
           <p:spPr>
             <a:xfrm>
-              <a:off x="6315000" y="2928422"/>
+              <a:off x="6312068" y="2928422"/>
               <a:ext cx="61566" cy="61566"/>
             </a:xfrm>
             <a:prstGeom prst="ellipse">
@@ -18912,7 +18912,7 @@
           </p:nvSpPr>
           <p:spPr>
             <a:xfrm>
-              <a:off x="6530443" y="2578968"/>
+              <a:off x="6542098" y="2578968"/>
               <a:ext cx="61566" cy="61566"/>
             </a:xfrm>
             <a:prstGeom prst="ellipse">
@@ -18938,7 +18938,7 @@
           </p:nvSpPr>
           <p:spPr>
             <a:xfrm>
-              <a:off x="6287008" y="2480326"/>
+              <a:off x="6361905" y="2480326"/>
               <a:ext cx="61566" cy="61566"/>
             </a:xfrm>
             <a:prstGeom prst="ellipse">
@@ -18964,7 +18964,7 @@
           </p:nvSpPr>
           <p:spPr>
             <a:xfrm>
-              <a:off x="6487816" y="3212975"/>
+              <a:off x="6534064" y="3212975"/>
               <a:ext cx="61566" cy="61566"/>
             </a:xfrm>
             <a:prstGeom prst="ellipse">
@@ -18990,7 +18990,7 @@
           </p:nvSpPr>
           <p:spPr>
             <a:xfrm>
-              <a:off x="6277016" y="3071583"/>
+              <a:off x="6326467" y="3071583"/>
               <a:ext cx="61566" cy="61566"/>
             </a:xfrm>
             <a:prstGeom prst="ellipse">
@@ -19016,7 +19016,7 @@
           </p:nvSpPr>
           <p:spPr>
             <a:xfrm>
-              <a:off x="6475342" y="3028694"/>
+              <a:off x="6571006" y="3028694"/>
               <a:ext cx="61566" cy="61566"/>
             </a:xfrm>
             <a:prstGeom prst="ellipse">
@@ -19042,7 +19042,7 @@
           </p:nvSpPr>
           <p:spPr>
             <a:xfrm>
-              <a:off x="6317820" y="2295212"/>
+              <a:off x="6332354" y="2295212"/>
               <a:ext cx="61566" cy="61566"/>
             </a:xfrm>
             <a:prstGeom prst="ellipse">
@@ -19068,7 +19068,7 @@
           </p:nvSpPr>
           <p:spPr>
             <a:xfrm>
-              <a:off x="6549715" y="2637866"/>
+              <a:off x="6569281" y="2637866"/>
               <a:ext cx="61566" cy="61566"/>
             </a:xfrm>
             <a:prstGeom prst="ellipse">
@@ -19094,7 +19094,7 @@
           </p:nvSpPr>
           <p:spPr>
             <a:xfrm>
-              <a:off x="6322113" y="3122841"/>
+              <a:off x="6281314" y="3122841"/>
               <a:ext cx="61566" cy="61566"/>
             </a:xfrm>
             <a:prstGeom prst="ellipse">
@@ -19120,7 +19120,7 @@
           </p:nvSpPr>
           <p:spPr>
             <a:xfrm>
-              <a:off x="6569648" y="3513432"/>
+              <a:off x="6556002" y="3513432"/>
               <a:ext cx="61566" cy="61566"/>
             </a:xfrm>
             <a:prstGeom prst="ellipse">
@@ -19146,7 +19146,7 @@
           </p:nvSpPr>
           <p:spPr>
             <a:xfrm>
-              <a:off x="6253158" y="3307582"/>
+              <a:off x="6288183" y="3307582"/>
               <a:ext cx="61566" cy="61566"/>
             </a:xfrm>
             <a:prstGeom prst="ellipse">
@@ -19172,7 +19172,7 @@
           </p:nvSpPr>
           <p:spPr>
             <a:xfrm>
-              <a:off x="6498627" y="2865664"/>
+              <a:off x="6475228" y="2865664"/>
               <a:ext cx="61566" cy="61566"/>
             </a:xfrm>
             <a:prstGeom prst="ellipse">
@@ -19198,7 +19198,7 @@
           </p:nvSpPr>
           <p:spPr>
             <a:xfrm>
-              <a:off x="6295092" y="2162084"/>
+              <a:off x="6291412" y="2162084"/>
               <a:ext cx="61566" cy="61566"/>
             </a:xfrm>
             <a:prstGeom prst="ellipse">
@@ -19224,7 +19224,7 @@
           </p:nvSpPr>
           <p:spPr>
             <a:xfrm>
-              <a:off x="6545074" y="2804888"/>
+              <a:off x="6510197" y="2804888"/>
               <a:ext cx="61566" cy="61566"/>
             </a:xfrm>
             <a:prstGeom prst="ellipse">
@@ -19250,7 +19250,7 @@
           </p:nvSpPr>
           <p:spPr>
             <a:xfrm>
-              <a:off x="6303939" y="2357993"/>
+              <a:off x="6309312" y="2357993"/>
               <a:ext cx="61566" cy="61566"/>
             </a:xfrm>
             <a:prstGeom prst="ellipse">
@@ -19276,7 +19276,7 @@
           </p:nvSpPr>
           <p:spPr>
             <a:xfrm>
-              <a:off x="6481253" y="2843406"/>
+              <a:off x="6579739" y="2843406"/>
               <a:ext cx="61566" cy="61566"/>
             </a:xfrm>
             <a:prstGeom prst="ellipse">
@@ -19302,7 +19302,7 @@
           </p:nvSpPr>
           <p:spPr>
             <a:xfrm>
-              <a:off x="6330375" y="2497102"/>
+              <a:off x="6277472" y="2497102"/>
               <a:ext cx="61566" cy="61566"/>
             </a:xfrm>
             <a:prstGeom prst="ellipse">
@@ -19328,7 +19328,7 @@
           </p:nvSpPr>
           <p:spPr>
             <a:xfrm>
-              <a:off x="6551797" y="2867742"/>
+              <a:off x="6491886" y="2867742"/>
               <a:ext cx="61566" cy="61566"/>
             </a:xfrm>
             <a:prstGeom prst="ellipse">
@@ -19354,7 +19354,7 @@
           </p:nvSpPr>
           <p:spPr>
             <a:xfrm>
-              <a:off x="6308933" y="3157977"/>
+              <a:off x="6254798" y="3157977"/>
               <a:ext cx="61566" cy="61566"/>
             </a:xfrm>
             <a:prstGeom prst="ellipse">
@@ -19380,7 +19380,7 @@
           </p:nvSpPr>
           <p:spPr>
             <a:xfrm>
-              <a:off x="6535537" y="2490342"/>
+              <a:off x="6515110" y="2490342"/>
               <a:ext cx="61566" cy="61566"/>
             </a:xfrm>
             <a:prstGeom prst="ellipse">
@@ -19406,7 +19406,7 @@
           </p:nvSpPr>
           <p:spPr>
             <a:xfrm>
-              <a:off x="6303515" y="3043295"/>
+              <a:off x="6333168" y="3043295"/>
               <a:ext cx="61566" cy="61566"/>
             </a:xfrm>
             <a:prstGeom prst="ellipse">
@@ -19432,7 +19432,7 @@
           </p:nvSpPr>
           <p:spPr>
             <a:xfrm>
-              <a:off x="6554307" y="2685219"/>
+              <a:off x="6512130" y="2685219"/>
               <a:ext cx="61566" cy="61566"/>
             </a:xfrm>
             <a:prstGeom prst="ellipse">
@@ -19458,7 +19458,7 @@
           </p:nvSpPr>
           <p:spPr>
             <a:xfrm>
-              <a:off x="6363130" y="2412468"/>
+              <a:off x="6278056" y="2412468"/>
               <a:ext cx="61566" cy="61566"/>
             </a:xfrm>
             <a:prstGeom prst="ellipse">
@@ -19484,7 +19484,7 @@
           </p:nvSpPr>
           <p:spPr>
             <a:xfrm>
-              <a:off x="6562499" y="2791571"/>
+              <a:off x="6578295" y="2791571"/>
               <a:ext cx="61566" cy="61566"/>
             </a:xfrm>
             <a:prstGeom prst="ellipse">
@@ -19510,7 +19510,7 @@
           </p:nvSpPr>
           <p:spPr>
             <a:xfrm>
-              <a:off x="6304371" y="2578828"/>
+              <a:off x="6270867" y="2578828"/>
               <a:ext cx="61566" cy="61566"/>
             </a:xfrm>
             <a:prstGeom prst="ellipse">
@@ -19536,7 +19536,7 @@
           </p:nvSpPr>
           <p:spPr>
             <a:xfrm>
-              <a:off x="6539314" y="2246378"/>
+              <a:off x="6566985" y="2246378"/>
               <a:ext cx="61566" cy="61566"/>
             </a:xfrm>
             <a:prstGeom prst="ellipse">
@@ -19562,7 +19562,7 @@
           </p:nvSpPr>
           <p:spPr>
             <a:xfrm>
-              <a:off x="6306867" y="2927267"/>
+              <a:off x="6362395" y="2927267"/>
               <a:ext cx="61566" cy="61566"/>
             </a:xfrm>
             <a:prstGeom prst="ellipse">
@@ -19588,7 +19588,7 @@
           </p:nvSpPr>
           <p:spPr>
             <a:xfrm>
-              <a:off x="6505867" y="2700959"/>
+              <a:off x="6564732" y="2700959"/>
               <a:ext cx="61566" cy="61566"/>
             </a:xfrm>
             <a:prstGeom prst="ellipse">
@@ -19614,7 +19614,7 @@
           </p:nvSpPr>
           <p:spPr>
             <a:xfrm>
-              <a:off x="6350862" y="2244217"/>
+              <a:off x="6350101" y="2244217"/>
               <a:ext cx="61566" cy="61566"/>
             </a:xfrm>
             <a:prstGeom prst="ellipse">
@@ -19640,7 +19640,7 @@
           </p:nvSpPr>
           <p:spPr>
             <a:xfrm>
-              <a:off x="6526540" y="2342752"/>
+              <a:off x="6476879" y="2342752"/>
               <a:ext cx="61566" cy="61566"/>
             </a:xfrm>
             <a:prstGeom prst="ellipse">
@@ -19666,7 +19666,7 @@
           </p:nvSpPr>
           <p:spPr>
             <a:xfrm>
-              <a:off x="6273346" y="2928333"/>
+              <a:off x="6349846" y="2928333"/>
               <a:ext cx="61566" cy="61566"/>
             </a:xfrm>
             <a:prstGeom prst="ellipse">
@@ -19692,7 +19692,7 @@
           </p:nvSpPr>
           <p:spPr>
             <a:xfrm>
-              <a:off x="6568444" y="2992563"/>
+              <a:off x="6583175" y="2992563"/>
               <a:ext cx="61566" cy="61566"/>
             </a:xfrm>
             <a:prstGeom prst="ellipse">
@@ -19718,7 +19718,7 @@
           </p:nvSpPr>
           <p:spPr>
             <a:xfrm>
-              <a:off x="6322116" y="2513812"/>
+              <a:off x="6359986" y="2513812"/>
               <a:ext cx="61566" cy="61566"/>
             </a:xfrm>
             <a:prstGeom prst="ellipse">
@@ -19744,7 +19744,7 @@
           </p:nvSpPr>
           <p:spPr>
             <a:xfrm>
-              <a:off x="6547758" y="2849597"/>
+              <a:off x="6487506" y="2849597"/>
               <a:ext cx="61566" cy="61566"/>
             </a:xfrm>
             <a:prstGeom prst="ellipse">
@@ -19770,7 +19770,7 @@
           </p:nvSpPr>
           <p:spPr>
             <a:xfrm>
-              <a:off x="6259530" y="3502921"/>
+              <a:off x="6286611" y="3502921"/>
               <a:ext cx="61566" cy="61566"/>
             </a:xfrm>
             <a:prstGeom prst="ellipse">
@@ -19796,7 +19796,7 @@
           </p:nvSpPr>
           <p:spPr>
             <a:xfrm>
-              <a:off x="6575175" y="3578920"/>
+              <a:off x="6577721" y="3578920"/>
               <a:ext cx="61566" cy="61566"/>
             </a:xfrm>
             <a:prstGeom prst="ellipse">
@@ -19822,7 +19822,7 @@
           </p:nvSpPr>
           <p:spPr>
             <a:xfrm>
-              <a:off x="6301399" y="2336652"/>
+              <a:off x="6306778" y="2336652"/>
               <a:ext cx="61566" cy="61566"/>
             </a:xfrm>
             <a:prstGeom prst="ellipse">
@@ -19848,7 +19848,7 @@
           </p:nvSpPr>
           <p:spPr>
             <a:xfrm>
-              <a:off x="6577825" y="2981375"/>
+              <a:off x="6531402" y="2981375"/>
               <a:ext cx="61566" cy="61566"/>
             </a:xfrm>
             <a:prstGeom prst="ellipse">
@@ -19874,7 +19874,7 @@
           </p:nvSpPr>
           <p:spPr>
             <a:xfrm>
-              <a:off x="6269129" y="2549471"/>
+              <a:off x="6310282" y="2549471"/>
               <a:ext cx="61566" cy="61566"/>
             </a:xfrm>
             <a:prstGeom prst="ellipse">
@@ -19900,7 +19900,7 @@
           </p:nvSpPr>
           <p:spPr>
             <a:xfrm>
-              <a:off x="6583957" y="2837877"/>
+              <a:off x="6532492" y="2837877"/>
               <a:ext cx="61566" cy="61566"/>
             </a:xfrm>
             <a:prstGeom prst="ellipse">
@@ -19926,7 +19926,7 @@
           </p:nvSpPr>
           <p:spPr>
             <a:xfrm>
-              <a:off x="6293653" y="2636047"/>
+              <a:off x="6274685" y="2636047"/>
               <a:ext cx="61566" cy="61566"/>
             </a:xfrm>
             <a:prstGeom prst="ellipse">
@@ -19952,7 +19952,7 @@
           </p:nvSpPr>
           <p:spPr>
             <a:xfrm>
-              <a:off x="6579334" y="3027980"/>
+              <a:off x="6547301" y="3027980"/>
               <a:ext cx="61566" cy="61566"/>
             </a:xfrm>
             <a:prstGeom prst="ellipse">
@@ -19978,7 +19978,7 @@
           </p:nvSpPr>
           <p:spPr>
             <a:xfrm>
-              <a:off x="6322221" y="2515461"/>
+              <a:off x="6311132" y="2515461"/>
               <a:ext cx="61566" cy="61566"/>
             </a:xfrm>
             <a:prstGeom prst="ellipse">
@@ -20004,7 +20004,7 @@
           </p:nvSpPr>
           <p:spPr>
             <a:xfrm>
-              <a:off x="6555378" y="2542619"/>
+              <a:off x="6485923" y="2542619"/>
               <a:ext cx="61566" cy="61566"/>
             </a:xfrm>
             <a:prstGeom prst="ellipse">
@@ -20030,7 +20030,7 @@
           </p:nvSpPr>
           <p:spPr>
             <a:xfrm>
-              <a:off x="6334690" y="2544885"/>
+              <a:off x="6294684" y="2544885"/>
               <a:ext cx="61566" cy="61566"/>
             </a:xfrm>
             <a:prstGeom prst="ellipse">
@@ -20056,7 +20056,7 @@
           </p:nvSpPr>
           <p:spPr>
             <a:xfrm>
-              <a:off x="6478420" y="2888358"/>
+              <a:off x="6517176" y="2888358"/>
               <a:ext cx="61566" cy="61566"/>
             </a:xfrm>
             <a:prstGeom prst="ellipse">
@@ -20082,7 +20082,7 @@
           </p:nvSpPr>
           <p:spPr>
             <a:xfrm>
-              <a:off x="6315548" y="2756023"/>
+              <a:off x="6264048" y="2756023"/>
               <a:ext cx="61566" cy="61566"/>
             </a:xfrm>
             <a:prstGeom prst="ellipse">
@@ -20108,7 +20108,7 @@
           </p:nvSpPr>
           <p:spPr>
             <a:xfrm>
-              <a:off x="6548710" y="2819277"/>
+              <a:off x="6511190" y="2819277"/>
               <a:ext cx="61566" cy="61566"/>
             </a:xfrm>
             <a:prstGeom prst="ellipse">
@@ -20134,7 +20134,7 @@
           </p:nvSpPr>
           <p:spPr>
             <a:xfrm>
-              <a:off x="6252881" y="2620412"/>
+              <a:off x="6353772" y="2620412"/>
               <a:ext cx="61566" cy="61566"/>
             </a:xfrm>
             <a:prstGeom prst="ellipse">
@@ -20160,7 +20160,7 @@
           </p:nvSpPr>
           <p:spPr>
             <a:xfrm>
-              <a:off x="6491829" y="2478741"/>
+              <a:off x="6572676" y="2478741"/>
               <a:ext cx="61566" cy="61566"/>
             </a:xfrm>
             <a:prstGeom prst="ellipse">
@@ -20186,7 +20186,7 @@
           </p:nvSpPr>
           <p:spPr>
             <a:xfrm>
-              <a:off x="6325807" y="2930720"/>
+              <a:off x="6350024" y="2930720"/>
               <a:ext cx="61566" cy="61566"/>
             </a:xfrm>
             <a:prstGeom prst="ellipse">
@@ -20212,7 +20212,7 @@
           </p:nvSpPr>
           <p:spPr>
             <a:xfrm>
-              <a:off x="6557939" y="3434264"/>
+              <a:off x="6522627" y="3434264"/>
               <a:ext cx="61566" cy="61566"/>
             </a:xfrm>
             <a:prstGeom prst="ellipse">
@@ -20238,7 +20238,7 @@
           </p:nvSpPr>
           <p:spPr>
             <a:xfrm>
-              <a:off x="6270070" y="3197697"/>
+              <a:off x="6352573" y="3197697"/>
               <a:ext cx="61566" cy="61566"/>
             </a:xfrm>
             <a:prstGeom prst="ellipse">
@@ -20264,7 +20264,7 @@
           </p:nvSpPr>
           <p:spPr>
             <a:xfrm>
-              <a:off x="6555909" y="2718804"/>
+              <a:off x="6493806" y="2718804"/>
               <a:ext cx="61566" cy="61566"/>
             </a:xfrm>
             <a:prstGeom prst="ellipse">
@@ -20290,7 +20290,7 @@
           </p:nvSpPr>
           <p:spPr>
             <a:xfrm>
-              <a:off x="6262454" y="2734356"/>
+              <a:off x="6347834" y="2734356"/>
               <a:ext cx="61566" cy="61566"/>
             </a:xfrm>
             <a:prstGeom prst="ellipse">
@@ -20316,7 +20316,7 @@
           </p:nvSpPr>
           <p:spPr>
             <a:xfrm>
-              <a:off x="6522466" y="2784148"/>
+              <a:off x="6512464" y="2784148"/>
               <a:ext cx="61566" cy="61566"/>
             </a:xfrm>
             <a:prstGeom prst="ellipse">
@@ -20342,7 +20342,7 @@
           </p:nvSpPr>
           <p:spPr>
             <a:xfrm>
-              <a:off x="6363088" y="2789554"/>
+              <a:off x="6304608" y="2789554"/>
               <a:ext cx="61566" cy="61566"/>
             </a:xfrm>
             <a:prstGeom prst="ellipse">
@@ -20368,7 +20368,7 @@
           </p:nvSpPr>
           <p:spPr>
             <a:xfrm>
-              <a:off x="6493425" y="3021071"/>
+              <a:off x="6575372" y="3021071"/>
               <a:ext cx="61566" cy="61566"/>
             </a:xfrm>
             <a:prstGeom prst="ellipse">
@@ -20394,7 +20394,7 @@
           </p:nvSpPr>
           <p:spPr>
             <a:xfrm>
-              <a:off x="6301054" y="2846502"/>
+              <a:off x="6315102" y="2846502"/>
               <a:ext cx="61566" cy="61566"/>
             </a:xfrm>
             <a:prstGeom prst="ellipse">
@@ -20420,7 +20420,7 @@
           </p:nvSpPr>
           <p:spPr>
             <a:xfrm>
-              <a:off x="6502582" y="2412109"/>
+              <a:off x="6572293" y="2412109"/>
               <a:ext cx="61566" cy="61566"/>
             </a:xfrm>
             <a:prstGeom prst="ellipse">
@@ -20446,7 +20446,7 @@
           </p:nvSpPr>
           <p:spPr>
             <a:xfrm>
-              <a:off x="6333060" y="1904791"/>
+              <a:off x="6264793" y="1904791"/>
               <a:ext cx="61566" cy="61566"/>
             </a:xfrm>
             <a:prstGeom prst="ellipse">
@@ -20472,7 +20472,7 @@
           </p:nvSpPr>
           <p:spPr>
             <a:xfrm>
-              <a:off x="6500352" y="2281028"/>
+              <a:off x="6520773" y="2281028"/>
               <a:ext cx="61566" cy="61566"/>
             </a:xfrm>
             <a:prstGeom prst="ellipse">
@@ -20498,7 +20498,7 @@
           </p:nvSpPr>
           <p:spPr>
             <a:xfrm>
-              <a:off x="6300540" y="2442352"/>
+              <a:off x="6359630" y="2442352"/>
               <a:ext cx="61566" cy="61566"/>
             </a:xfrm>
             <a:prstGeom prst="ellipse">
@@ -20524,7 +20524,7 @@
           </p:nvSpPr>
           <p:spPr>
             <a:xfrm>
-              <a:off x="6577107" y="2530607"/>
+              <a:off x="6523756" y="2530607"/>
               <a:ext cx="61566" cy="61566"/>
             </a:xfrm>
             <a:prstGeom prst="ellipse">
@@ -20550,7 +20550,7 @@
           </p:nvSpPr>
           <p:spPr>
             <a:xfrm>
-              <a:off x="6292420" y="2187410"/>
+              <a:off x="6273511" y="2187410"/>
               <a:ext cx="61566" cy="61566"/>
             </a:xfrm>
             <a:prstGeom prst="ellipse">
@@ -20576,7 +20576,7 @@
           </p:nvSpPr>
           <p:spPr>
             <a:xfrm>
-              <a:off x="6584023" y="2452633"/>
+              <a:off x="6529107" y="2452633"/>
               <a:ext cx="61566" cy="61566"/>
             </a:xfrm>
             <a:prstGeom prst="ellipse">
@@ -20602,7 +20602,7 @@
           </p:nvSpPr>
           <p:spPr>
             <a:xfrm>
-              <a:off x="6335824" y="3038012"/>
+              <a:off x="6362622" y="3038012"/>
               <a:ext cx="61566" cy="61566"/>
             </a:xfrm>
             <a:prstGeom prst="ellipse">
@@ -20628,7 +20628,7 @@
           </p:nvSpPr>
           <p:spPr>
             <a:xfrm>
-              <a:off x="6568295" y="3038085"/>
+              <a:off x="6518740" y="3038085"/>
               <a:ext cx="61566" cy="61566"/>
             </a:xfrm>
             <a:prstGeom prst="ellipse">
@@ -20654,7 +20654,7 @@
           </p:nvSpPr>
           <p:spPr>
             <a:xfrm>
-              <a:off x="6343453" y="2440508"/>
+              <a:off x="6297525" y="2440508"/>
               <a:ext cx="61566" cy="61566"/>
             </a:xfrm>
             <a:prstGeom prst="ellipse">
@@ -20680,7 +20680,7 @@
           </p:nvSpPr>
           <p:spPr>
             <a:xfrm>
-              <a:off x="6563302" y="2554040"/>
+              <a:off x="6495036" y="2554040"/>
               <a:ext cx="61566" cy="61566"/>
             </a:xfrm>
             <a:prstGeom prst="ellipse">
@@ -20706,7 +20706,7 @@
           </p:nvSpPr>
           <p:spPr>
             <a:xfrm>
-              <a:off x="6329992" y="2609599"/>
+              <a:off x="6285006" y="2609599"/>
               <a:ext cx="61566" cy="61566"/>
             </a:xfrm>
             <a:prstGeom prst="ellipse">
@@ -20732,7 +20732,7 @@
           </p:nvSpPr>
           <p:spPr>
             <a:xfrm>
-              <a:off x="6482662" y="2552685"/>
+              <a:off x="6504469" y="2552685"/>
               <a:ext cx="61566" cy="61566"/>
             </a:xfrm>
             <a:prstGeom prst="ellipse">
@@ -20758,7 +20758,7 @@
           </p:nvSpPr>
           <p:spPr>
             <a:xfrm>
-              <a:off x="6293391" y="3044608"/>
+              <a:off x="6284950" y="3044608"/>
               <a:ext cx="61566" cy="61566"/>
             </a:xfrm>
             <a:prstGeom prst="ellipse">
@@ -20784,7 +20784,7 @@
           </p:nvSpPr>
           <p:spPr>
             <a:xfrm>
-              <a:off x="6507638" y="2868659"/>
+              <a:off x="6564296" y="2868659"/>
               <a:ext cx="61566" cy="61566"/>
             </a:xfrm>
             <a:prstGeom prst="ellipse">
@@ -20810,7 +20810,7 @@
           </p:nvSpPr>
           <p:spPr>
             <a:xfrm>
-              <a:off x="6351492" y="2191455"/>
+              <a:off x="6344226" y="2191455"/>
               <a:ext cx="61566" cy="61566"/>
             </a:xfrm>
             <a:prstGeom prst="ellipse">
@@ -20836,7 +20836,7 @@
           </p:nvSpPr>
           <p:spPr>
             <a:xfrm>
-              <a:off x="6547817" y="2610151"/>
+              <a:off x="6494692" y="2610151"/>
               <a:ext cx="61566" cy="61566"/>
             </a:xfrm>
             <a:prstGeom prst="ellipse">
@@ -20862,7 +20862,7 @@
           </p:nvSpPr>
           <p:spPr>
             <a:xfrm>
-              <a:off x="6320661" y="2813991"/>
+              <a:off x="6342714" y="2813991"/>
               <a:ext cx="61566" cy="61566"/>
             </a:xfrm>
             <a:prstGeom prst="ellipse">
@@ -20888,7 +20888,7 @@
           </p:nvSpPr>
           <p:spPr>
             <a:xfrm>
-              <a:off x="6559186" y="2715715"/>
+              <a:off x="6539743" y="2715715"/>
               <a:ext cx="61566" cy="61566"/>
             </a:xfrm>
             <a:prstGeom prst="ellipse">
@@ -20914,7 +20914,7 @@
           </p:nvSpPr>
           <p:spPr>
             <a:xfrm>
-              <a:off x="6301861" y="2655123"/>
+              <a:off x="6338280" y="2655123"/>
               <a:ext cx="61566" cy="61566"/>
             </a:xfrm>
             <a:prstGeom prst="ellipse">
@@ -20940,7 +20940,7 @@
           </p:nvSpPr>
           <p:spPr>
             <a:xfrm>
-              <a:off x="6582577" y="3032965"/>
+              <a:off x="6565306" y="3032965"/>
               <a:ext cx="61566" cy="61566"/>
             </a:xfrm>
             <a:prstGeom prst="ellipse">
@@ -20966,7 +20966,7 @@
           </p:nvSpPr>
           <p:spPr>
             <a:xfrm>
-              <a:off x="6319023" y="2746358"/>
+              <a:off x="6256406" y="2746358"/>
               <a:ext cx="61566" cy="61566"/>
             </a:xfrm>
             <a:prstGeom prst="ellipse">
@@ -20992,7 +20992,7 @@
           </p:nvSpPr>
           <p:spPr>
             <a:xfrm>
-              <a:off x="6480449" y="2945493"/>
+              <a:off x="6544349" y="2945493"/>
               <a:ext cx="61566" cy="61566"/>
             </a:xfrm>
             <a:prstGeom prst="ellipse">
@@ -21018,7 +21018,7 @@
           </p:nvSpPr>
           <p:spPr>
             <a:xfrm>
-              <a:off x="6277619" y="2494262"/>
+              <a:off x="6345552" y="2494262"/>
               <a:ext cx="61566" cy="61566"/>
             </a:xfrm>
             <a:prstGeom prst="ellipse">
@@ -21044,7 +21044,7 @@
           </p:nvSpPr>
           <p:spPr>
             <a:xfrm>
-              <a:off x="6476757" y="2787609"/>
+              <a:off x="6520393" y="2787609"/>
               <a:ext cx="61566" cy="61566"/>
             </a:xfrm>
             <a:prstGeom prst="ellipse">
@@ -21070,7 +21070,7 @@
           </p:nvSpPr>
           <p:spPr>
             <a:xfrm>
-              <a:off x="6348737" y="2491164"/>
+              <a:off x="6357714" y="2491164"/>
               <a:ext cx="61566" cy="61566"/>
             </a:xfrm>
             <a:prstGeom prst="ellipse">
@@ -21096,7 +21096,7 @@
           </p:nvSpPr>
           <p:spPr>
             <a:xfrm>
-              <a:off x="6571880" y="2959681"/>
+              <a:off x="6526032" y="2959681"/>
               <a:ext cx="61566" cy="61566"/>
             </a:xfrm>
             <a:prstGeom prst="ellipse">
@@ -21122,7 +21122,7 @@
           </p:nvSpPr>
           <p:spPr>
             <a:xfrm>
-              <a:off x="6307962" y="2766194"/>
+              <a:off x="6351574" y="2766194"/>
               <a:ext cx="61566" cy="61566"/>
             </a:xfrm>
             <a:prstGeom prst="ellipse">
@@ -21148,7 +21148,7 @@
           </p:nvSpPr>
           <p:spPr>
             <a:xfrm>
-              <a:off x="6500328" y="2822394"/>
+              <a:off x="6551682" y="2822394"/>
               <a:ext cx="61566" cy="61566"/>
             </a:xfrm>
             <a:prstGeom prst="ellipse">
@@ -21174,7 +21174,7 @@
           </p:nvSpPr>
           <p:spPr>
             <a:xfrm>
-              <a:off x="6289711" y="2398046"/>
+              <a:off x="6283021" y="2398046"/>
               <a:ext cx="61566" cy="61566"/>
             </a:xfrm>
             <a:prstGeom prst="ellipse">
@@ -21200,7 +21200,7 @@
           </p:nvSpPr>
           <p:spPr>
             <a:xfrm>
-              <a:off x="6536009" y="2623386"/>
+              <a:off x="6480194" y="2623386"/>
               <a:ext cx="61566" cy="61566"/>
             </a:xfrm>
             <a:prstGeom prst="ellipse">
@@ -21226,7 +21226,7 @@
           </p:nvSpPr>
           <p:spPr>
             <a:xfrm>
-              <a:off x="6344006" y="2915482"/>
+              <a:off x="6258251" y="2915482"/>
               <a:ext cx="61566" cy="61566"/>
             </a:xfrm>
             <a:prstGeom prst="ellipse">
@@ -21252,7 +21252,7 @@
           </p:nvSpPr>
           <p:spPr>
             <a:xfrm>
-              <a:off x="6534139" y="2395983"/>
+              <a:off x="6540421" y="2395983"/>
               <a:ext cx="61566" cy="61566"/>
             </a:xfrm>
             <a:prstGeom prst="ellipse">
@@ -21278,7 +21278,7 @@
           </p:nvSpPr>
           <p:spPr>
             <a:xfrm>
-              <a:off x="6338009" y="2237133"/>
+              <a:off x="6339072" y="2237133"/>
               <a:ext cx="61566" cy="61566"/>
             </a:xfrm>
             <a:prstGeom prst="ellipse">
@@ -21304,7 +21304,7 @@
           </p:nvSpPr>
           <p:spPr>
             <a:xfrm>
-              <a:off x="6522735" y="2228453"/>
+              <a:off x="6549654" y="2228453"/>
               <a:ext cx="61566" cy="61566"/>
             </a:xfrm>
             <a:prstGeom prst="ellipse">
@@ -21330,7 +21330,7 @@
           </p:nvSpPr>
           <p:spPr>
             <a:xfrm>
-              <a:off x="6347374" y="2665694"/>
+              <a:off x="6290033" y="2665694"/>
               <a:ext cx="61566" cy="61566"/>
             </a:xfrm>
             <a:prstGeom prst="ellipse">
@@ -21356,7 +21356,7 @@
           </p:nvSpPr>
           <p:spPr>
             <a:xfrm>
-              <a:off x="6490810" y="2746669"/>
+              <a:off x="6496153" y="2746669"/>
               <a:ext cx="61566" cy="61566"/>
             </a:xfrm>
             <a:prstGeom prst="ellipse">
@@ -21382,7 +21382,7 @@
           </p:nvSpPr>
           <p:spPr>
             <a:xfrm>
-              <a:off x="6299189" y="2793167"/>
+              <a:off x="6324035" y="2793167"/>
               <a:ext cx="61566" cy="61566"/>
             </a:xfrm>
             <a:prstGeom prst="ellipse">
@@ -21408,7 +21408,7 @@
           </p:nvSpPr>
           <p:spPr>
             <a:xfrm>
-              <a:off x="6509104" y="2619463"/>
+              <a:off x="6474524" y="2619463"/>
               <a:ext cx="61566" cy="61566"/>
             </a:xfrm>
             <a:prstGeom prst="ellipse">
@@ -21434,7 +21434,7 @@
           </p:nvSpPr>
           <p:spPr>
             <a:xfrm>
-              <a:off x="6259899" y="2152050"/>
+              <a:off x="6344716" y="2152050"/>
               <a:ext cx="61566" cy="61566"/>
             </a:xfrm>
             <a:prstGeom prst="ellipse">
@@ -21460,7 +21460,7 @@
           </p:nvSpPr>
           <p:spPr>
             <a:xfrm>
-              <a:off x="6508472" y="3104456"/>
+              <a:off x="6571250" y="3104456"/>
               <a:ext cx="61566" cy="61566"/>
             </a:xfrm>
             <a:prstGeom prst="ellipse">
@@ -21486,7 +21486,7 @@
           </p:nvSpPr>
           <p:spPr>
             <a:xfrm>
-              <a:off x="6277661" y="3159505"/>
+              <a:off x="6286574" y="3159505"/>
               <a:ext cx="61566" cy="61566"/>
             </a:xfrm>
             <a:prstGeom prst="ellipse">
@@ -21512,7 +21512,7 @@
           </p:nvSpPr>
           <p:spPr>
             <a:xfrm>
-              <a:off x="6504586" y="2647310"/>
+              <a:off x="6577956" y="2647310"/>
               <a:ext cx="61566" cy="61566"/>
             </a:xfrm>
             <a:prstGeom prst="ellipse">
@@ -21538,7 +21538,7 @@
           </p:nvSpPr>
           <p:spPr>
             <a:xfrm>
-              <a:off x="6349090" y="2860130"/>
+              <a:off x="6293382" y="2860130"/>
               <a:ext cx="61566" cy="61566"/>
             </a:xfrm>
             <a:prstGeom prst="ellipse">
@@ -21564,7 +21564,7 @@
           </p:nvSpPr>
           <p:spPr>
             <a:xfrm>
-              <a:off x="6572792" y="3362173"/>
+              <a:off x="6511663" y="3362173"/>
               <a:ext cx="61566" cy="61566"/>
             </a:xfrm>
             <a:prstGeom prst="ellipse">
@@ -21590,7 +21590,7 @@
           </p:nvSpPr>
           <p:spPr>
             <a:xfrm>
-              <a:off x="6363662" y="2680068"/>
+              <a:off x="6361614" y="2680068"/>
               <a:ext cx="61566" cy="61566"/>
             </a:xfrm>
             <a:prstGeom prst="ellipse">
@@ -21616,7 +21616,7 @@
           </p:nvSpPr>
           <p:spPr>
             <a:xfrm>
-              <a:off x="6503380" y="2691983"/>
+              <a:off x="6547893" y="2691983"/>
               <a:ext cx="61566" cy="61566"/>
             </a:xfrm>
             <a:prstGeom prst="ellipse">
@@ -21642,7 +21642,7 @@
           </p:nvSpPr>
           <p:spPr>
             <a:xfrm>
-              <a:off x="6271042" y="2719838"/>
+              <a:off x="6320505" y="2719838"/>
               <a:ext cx="61566" cy="61566"/>
             </a:xfrm>
             <a:prstGeom prst="ellipse">
@@ -21668,7 +21668,7 @@
           </p:nvSpPr>
           <p:spPr>
             <a:xfrm>
-              <a:off x="6477240" y="2714144"/>
+              <a:off x="6481277" y="2714144"/>
               <a:ext cx="61566" cy="61566"/>
             </a:xfrm>
             <a:prstGeom prst="ellipse">
@@ -21694,7 +21694,7 @@
           </p:nvSpPr>
           <p:spPr>
             <a:xfrm>
-              <a:off x="6290910" y="2694738"/>
+              <a:off x="6305929" y="2694738"/>
               <a:ext cx="61566" cy="61566"/>
             </a:xfrm>
             <a:prstGeom prst="ellipse">
@@ -21720,7 +21720,7 @@
           </p:nvSpPr>
           <p:spPr>
             <a:xfrm>
-              <a:off x="6533780" y="2976514"/>
+              <a:off x="6552987" y="2976514"/>
               <a:ext cx="61566" cy="61566"/>
             </a:xfrm>
             <a:prstGeom prst="ellipse">
@@ -21746,7 +21746,7 @@
           </p:nvSpPr>
           <p:spPr>
             <a:xfrm>
-              <a:off x="6280457" y="2732022"/>
+              <a:off x="6280094" y="2732022"/>
               <a:ext cx="61566" cy="61566"/>
             </a:xfrm>
             <a:prstGeom prst="ellipse">
@@ -21772,7 +21772,7 @@
           </p:nvSpPr>
           <p:spPr>
             <a:xfrm>
-              <a:off x="6578615" y="2606908"/>
+              <a:off x="6530724" y="2606908"/>
               <a:ext cx="61566" cy="61566"/>
             </a:xfrm>
             <a:prstGeom prst="ellipse">
@@ -21798,7 +21798,7 @@
           </p:nvSpPr>
           <p:spPr>
             <a:xfrm>
-              <a:off x="6268851" y="3124265"/>
+              <a:off x="6263681" y="3124265"/>
               <a:ext cx="61566" cy="61566"/>
             </a:xfrm>
             <a:prstGeom prst="ellipse">
@@ -21824,7 +21824,7 @@
           </p:nvSpPr>
           <p:spPr>
             <a:xfrm>
-              <a:off x="6541795" y="2729951"/>
+              <a:off x="6520250" y="2729951"/>
               <a:ext cx="61566" cy="61566"/>
             </a:xfrm>
             <a:prstGeom prst="ellipse">
@@ -21850,7 +21850,7 @@
           </p:nvSpPr>
           <p:spPr>
             <a:xfrm>
-              <a:off x="6331943" y="3036901"/>
+              <a:off x="6347036" y="3036901"/>
               <a:ext cx="61566" cy="61566"/>
             </a:xfrm>
             <a:prstGeom prst="ellipse">
@@ -21876,7 +21876,7 @@
           </p:nvSpPr>
           <p:spPr>
             <a:xfrm>
-              <a:off x="6513246" y="2364609"/>
+              <a:off x="6568887" y="2364609"/>
               <a:ext cx="61566" cy="61566"/>
             </a:xfrm>
             <a:prstGeom prst="ellipse">
@@ -21902,7 +21902,7 @@
           </p:nvSpPr>
           <p:spPr>
             <a:xfrm>
-              <a:off x="6312436" y="3248220"/>
+              <a:off x="6295154" y="3248220"/>
               <a:ext cx="61566" cy="61566"/>
             </a:xfrm>
             <a:prstGeom prst="ellipse">
@@ -21928,7 +21928,7 @@
           </p:nvSpPr>
           <p:spPr>
             <a:xfrm>
-              <a:off x="6475800" y="3401773"/>
+              <a:off x="6526468" y="3401773"/>
               <a:ext cx="61566" cy="61566"/>
             </a:xfrm>
             <a:prstGeom prst="ellipse">
@@ -21954,7 +21954,7 @@
           </p:nvSpPr>
           <p:spPr>
             <a:xfrm>
-              <a:off x="6269537" y="3015936"/>
+              <a:off x="6324525" y="3015936"/>
               <a:ext cx="61566" cy="61566"/>
             </a:xfrm>
             <a:prstGeom prst="ellipse">
@@ -21980,7 +21980,7 @@
           </p:nvSpPr>
           <p:spPr>
             <a:xfrm>
-              <a:off x="6521846" y="2900930"/>
+              <a:off x="6577305" y="2900930"/>
               <a:ext cx="61566" cy="61566"/>
             </a:xfrm>
             <a:prstGeom prst="ellipse">
@@ -22006,7 +22006,7 @@
           </p:nvSpPr>
           <p:spPr>
             <a:xfrm>
-              <a:off x="6348243" y="2883078"/>
+              <a:off x="6290404" y="2883078"/>
               <a:ext cx="61566" cy="61566"/>
             </a:xfrm>
             <a:prstGeom prst="ellipse">
@@ -22032,7 +22032,7 @@
           </p:nvSpPr>
           <p:spPr>
             <a:xfrm>
-              <a:off x="6521792" y="2705648"/>
+              <a:off x="6474004" y="2705648"/>
               <a:ext cx="61566" cy="61566"/>
             </a:xfrm>
             <a:prstGeom prst="ellipse">
@@ -22058,7 +22058,7 @@
           </p:nvSpPr>
           <p:spPr>
             <a:xfrm>
-              <a:off x="6319802" y="2765496"/>
+              <a:off x="6297849" y="2765496"/>
               <a:ext cx="61566" cy="61566"/>
             </a:xfrm>
             <a:prstGeom prst="ellipse">
@@ -22084,7 +22084,7 @@
           </p:nvSpPr>
           <p:spPr>
             <a:xfrm>
-              <a:off x="6537487" y="2655800"/>
+              <a:off x="6517166" y="2655800"/>
               <a:ext cx="61566" cy="61566"/>
             </a:xfrm>
             <a:prstGeom prst="ellipse">
@@ -22110,7 +22110,7 @@
           </p:nvSpPr>
           <p:spPr>
             <a:xfrm>
-              <a:off x="6348551" y="2849381"/>
+              <a:off x="6269914" y="2849381"/>
               <a:ext cx="61566" cy="61566"/>
             </a:xfrm>
             <a:prstGeom prst="ellipse">
@@ -22136,7 +22136,7 @@
           </p:nvSpPr>
           <p:spPr>
             <a:xfrm>
-              <a:off x="6547794" y="3077000"/>
+              <a:off x="6559554" y="3077000"/>
               <a:ext cx="61566" cy="61566"/>
             </a:xfrm>
             <a:prstGeom prst="ellipse">
@@ -22162,7 +22162,7 @@
           </p:nvSpPr>
           <p:spPr>
             <a:xfrm>
-              <a:off x="6336658" y="2713231"/>
+              <a:off x="6322332" y="2713231"/>
               <a:ext cx="61566" cy="61566"/>
             </a:xfrm>
             <a:prstGeom prst="ellipse">
@@ -22188,7 +22188,7 @@
           </p:nvSpPr>
           <p:spPr>
             <a:xfrm>
-              <a:off x="6543763" y="2545326"/>
+              <a:off x="6575860" y="2545326"/>
               <a:ext cx="61566" cy="61566"/>
             </a:xfrm>
             <a:prstGeom prst="ellipse">
@@ -22214,7 +22214,7 @@
           </p:nvSpPr>
           <p:spPr>
             <a:xfrm>
-              <a:off x="6299175" y="2965268"/>
+              <a:off x="6308496" y="2965268"/>
               <a:ext cx="61566" cy="61566"/>
             </a:xfrm>
             <a:prstGeom prst="ellipse">
@@ -22240,7 +22240,7 @@
           </p:nvSpPr>
           <p:spPr>
             <a:xfrm>
-              <a:off x="6482657" y="2717897"/>
+              <a:off x="6529358" y="2717897"/>
               <a:ext cx="61566" cy="61566"/>
             </a:xfrm>
             <a:prstGeom prst="ellipse">
@@ -22266,7 +22266,7 @@
           </p:nvSpPr>
           <p:spPr>
             <a:xfrm>
-              <a:off x="6346386" y="3008505"/>
+              <a:off x="6278272" y="3008505"/>
               <a:ext cx="61566" cy="61566"/>
             </a:xfrm>
             <a:prstGeom prst="ellipse">
@@ -22292,7 +22292,7 @@
           </p:nvSpPr>
           <p:spPr>
             <a:xfrm>
-              <a:off x="6486319" y="3154152"/>
+              <a:off x="6549990" y="3154152"/>
               <a:ext cx="61566" cy="61566"/>
             </a:xfrm>
             <a:prstGeom prst="ellipse">
@@ -22318,7 +22318,7 @@
           </p:nvSpPr>
           <p:spPr>
             <a:xfrm>
-              <a:off x="6303093" y="3007414"/>
+              <a:off x="6255918" y="3007414"/>
               <a:ext cx="61566" cy="61566"/>
             </a:xfrm>
             <a:prstGeom prst="ellipse">
@@ -22344,7 +22344,7 @@
           </p:nvSpPr>
           <p:spPr>
             <a:xfrm>
-              <a:off x="6578995" y="2657262"/>
+              <a:off x="6482521" y="2657262"/>
               <a:ext cx="61566" cy="61566"/>
             </a:xfrm>
             <a:prstGeom prst="ellipse">
@@ -22370,7 +22370,7 @@
           </p:nvSpPr>
           <p:spPr>
             <a:xfrm>
-              <a:off x="6297542" y="2888561"/>
+              <a:off x="6277622" y="2888561"/>
               <a:ext cx="61566" cy="61566"/>
             </a:xfrm>
             <a:prstGeom prst="ellipse">
@@ -22396,7 +22396,7 @@
           </p:nvSpPr>
           <p:spPr>
             <a:xfrm>
-              <a:off x="6520924" y="2997114"/>
+              <a:off x="6507717" y="2997114"/>
               <a:ext cx="61566" cy="61566"/>
             </a:xfrm>
             <a:prstGeom prst="ellipse">
@@ -22422,7 +22422,7 @@
           </p:nvSpPr>
           <p:spPr>
             <a:xfrm>
-              <a:off x="6302696" y="2514534"/>
+              <a:off x="6283496" y="2514534"/>
               <a:ext cx="61566" cy="61566"/>
             </a:xfrm>
             <a:prstGeom prst="ellipse">
@@ -22448,7 +22448,7 @@
           </p:nvSpPr>
           <p:spPr>
             <a:xfrm>
-              <a:off x="6536608" y="2629551"/>
+              <a:off x="6567778" y="2629551"/>
               <a:ext cx="61566" cy="61566"/>
             </a:xfrm>
             <a:prstGeom prst="ellipse">
@@ -22474,7 +22474,7 @@
           </p:nvSpPr>
           <p:spPr>
             <a:xfrm>
-              <a:off x="6294927" y="2687315"/>
+              <a:off x="6317759" y="2687315"/>
               <a:ext cx="61566" cy="61566"/>
             </a:xfrm>
             <a:prstGeom prst="ellipse">
@@ -22500,7 +22500,7 @@
           </p:nvSpPr>
           <p:spPr>
             <a:xfrm>
-              <a:off x="6520076" y="2845227"/>
+              <a:off x="6482270" y="2845227"/>
               <a:ext cx="61566" cy="61566"/>
             </a:xfrm>
             <a:prstGeom prst="ellipse">
@@ -22526,7 +22526,7 @@
           </p:nvSpPr>
           <p:spPr>
             <a:xfrm>
-              <a:off x="6280384" y="2865057"/>
+              <a:off x="6328283" y="2865057"/>
               <a:ext cx="61566" cy="61566"/>
             </a:xfrm>
             <a:prstGeom prst="ellipse">
@@ -22552,7 +22552,7 @@
           </p:nvSpPr>
           <p:spPr>
             <a:xfrm>
-              <a:off x="6486528" y="2794844"/>
+              <a:off x="6569237" y="2794844"/>
               <a:ext cx="61566" cy="61566"/>
             </a:xfrm>
             <a:prstGeom prst="ellipse">
@@ -22578,7 +22578,7 @@
           </p:nvSpPr>
           <p:spPr>
             <a:xfrm>
-              <a:off x="6339508" y="2846219"/>
+              <a:off x="6286752" y="2846219"/>
               <a:ext cx="61566" cy="61566"/>
             </a:xfrm>
             <a:prstGeom prst="ellipse">
@@ -22604,7 +22604,7 @@
           </p:nvSpPr>
           <p:spPr>
             <a:xfrm>
-              <a:off x="6486138" y="2896332"/>
+              <a:off x="6575200" y="2896332"/>
               <a:ext cx="61566" cy="61566"/>
             </a:xfrm>
             <a:prstGeom prst="ellipse">
@@ -22630,7 +22630,7 @@
           </p:nvSpPr>
           <p:spPr>
             <a:xfrm>
-              <a:off x="6273761" y="2179884"/>
+              <a:off x="6272910" y="2179884"/>
               <a:ext cx="61566" cy="61566"/>
             </a:xfrm>
             <a:prstGeom prst="ellipse">
@@ -22656,7 +22656,7 @@
           </p:nvSpPr>
           <p:spPr>
             <a:xfrm>
-              <a:off x="6511810" y="2371840"/>
+              <a:off x="6547743" y="2371840"/>
               <a:ext cx="61566" cy="61566"/>
             </a:xfrm>
             <a:prstGeom prst="ellipse">
@@ -22682,7 +22682,7 @@
           </p:nvSpPr>
           <p:spPr>
             <a:xfrm>
-              <a:off x="6316461" y="2266372"/>
+              <a:off x="6309631" y="2266372"/>
               <a:ext cx="61566" cy="61566"/>
             </a:xfrm>
             <a:prstGeom prst="ellipse">
@@ -22708,7 +22708,7 @@
           </p:nvSpPr>
           <p:spPr>
             <a:xfrm>
-              <a:off x="6552266" y="2614415"/>
+              <a:off x="6575815" y="2614415"/>
               <a:ext cx="61566" cy="61566"/>
             </a:xfrm>
             <a:prstGeom prst="ellipse">
@@ -22734,7 +22734,7 @@
           </p:nvSpPr>
           <p:spPr>
             <a:xfrm>
-              <a:off x="6305820" y="1910538"/>
+              <a:off x="6264361" y="1910538"/>
               <a:ext cx="61566" cy="61566"/>
             </a:xfrm>
             <a:prstGeom prst="ellipse">
@@ -22760,7 +22760,7 @@
           </p:nvSpPr>
           <p:spPr>
             <a:xfrm>
-              <a:off x="6573992" y="2052793"/>
+              <a:off x="6555074" y="2052793"/>
               <a:ext cx="61566" cy="61566"/>
             </a:xfrm>
             <a:prstGeom prst="ellipse">
@@ -22786,7 +22786,7 @@
           </p:nvSpPr>
           <p:spPr>
             <a:xfrm>
-              <a:off x="6268375" y="2595030"/>
+              <a:off x="6275790" y="2595030"/>
               <a:ext cx="61566" cy="61566"/>
             </a:xfrm>
             <a:prstGeom prst="ellipse">
@@ -22812,7 +22812,7 @@
           </p:nvSpPr>
           <p:spPr>
             <a:xfrm>
-              <a:off x="6521177" y="2647088"/>
+              <a:off x="6479702" y="2647088"/>
               <a:ext cx="61566" cy="61566"/>
             </a:xfrm>
             <a:prstGeom prst="ellipse">
@@ -22838,7 +22838,7 @@
           </p:nvSpPr>
           <p:spPr>
             <a:xfrm>
-              <a:off x="6322965" y="2374367"/>
+              <a:off x="6292293" y="2374367"/>
               <a:ext cx="61566" cy="61566"/>
             </a:xfrm>
             <a:prstGeom prst="ellipse">
@@ -22864,7 +22864,7 @@
           </p:nvSpPr>
           <p:spPr>
             <a:xfrm>
-              <a:off x="6512286" y="2458161"/>
+              <a:off x="6482744" y="2458161"/>
               <a:ext cx="61566" cy="61566"/>
             </a:xfrm>
             <a:prstGeom prst="ellipse">
@@ -22890,7 +22890,7 @@
           </p:nvSpPr>
           <p:spPr>
             <a:xfrm>
-              <a:off x="6347081" y="2644620"/>
+              <a:off x="6257094" y="2644620"/>
               <a:ext cx="61566" cy="61566"/>
             </a:xfrm>
             <a:prstGeom prst="ellipse">
@@ -22916,7 +22916,7 @@
           </p:nvSpPr>
           <p:spPr>
             <a:xfrm>
-              <a:off x="6546059" y="2850322"/>
+              <a:off x="6513388" y="2850322"/>
               <a:ext cx="61566" cy="61566"/>
             </a:xfrm>
             <a:prstGeom prst="ellipse">
@@ -22942,7 +22942,7 @@
           </p:nvSpPr>
           <p:spPr>
             <a:xfrm>
-              <a:off x="6329555" y="3199030"/>
+              <a:off x="6291876" y="3199030"/>
               <a:ext cx="61566" cy="61566"/>
             </a:xfrm>
             <a:prstGeom prst="ellipse">
@@ -22968,7 +22968,7 @@
           </p:nvSpPr>
           <p:spPr>
             <a:xfrm>
-              <a:off x="6483171" y="3241000"/>
+              <a:off x="6492342" y="3241000"/>
               <a:ext cx="61566" cy="61566"/>
             </a:xfrm>
             <a:prstGeom prst="ellipse">
@@ -22994,7 +22994,7 @@
           </p:nvSpPr>
           <p:spPr>
             <a:xfrm>
-              <a:off x="6317041" y="2849201"/>
+              <a:off x="6257980" y="2849201"/>
               <a:ext cx="61566" cy="61566"/>
             </a:xfrm>
             <a:prstGeom prst="ellipse">
@@ -23020,7 +23020,7 @@
           </p:nvSpPr>
           <p:spPr>
             <a:xfrm>
-              <a:off x="6554837" y="2747894"/>
+              <a:off x="6478217" y="2747894"/>
               <a:ext cx="61566" cy="61566"/>
             </a:xfrm>
             <a:prstGeom prst="ellipse">
@@ -23046,7 +23046,7 @@
           </p:nvSpPr>
           <p:spPr>
             <a:xfrm>
-              <a:off x="6307038" y="2198964"/>
+              <a:off x="6340198" y="2198964"/>
               <a:ext cx="61566" cy="61566"/>
             </a:xfrm>
             <a:prstGeom prst="ellipse">
@@ -23072,7 +23072,7 @@
           </p:nvSpPr>
           <p:spPr>
             <a:xfrm>
-              <a:off x="6494638" y="2484339"/>
+              <a:off x="6549929" y="2484339"/>
               <a:ext cx="61566" cy="61566"/>
             </a:xfrm>
             <a:prstGeom prst="ellipse">
@@ -23098,7 +23098,7 @@
           </p:nvSpPr>
           <p:spPr>
             <a:xfrm>
-              <a:off x="6278237" y="2755085"/>
+              <a:off x="6264171" y="2755085"/>
               <a:ext cx="61566" cy="61566"/>
             </a:xfrm>
             <a:prstGeom prst="ellipse">
@@ -23124,7 +23124,7 @@
           </p:nvSpPr>
           <p:spPr>
             <a:xfrm>
-              <a:off x="6478417" y="2804328"/>
+              <a:off x="6583598" y="2804328"/>
               <a:ext cx="61566" cy="61566"/>
             </a:xfrm>
             <a:prstGeom prst="ellipse">
@@ -23150,7 +23150,7 @@
           </p:nvSpPr>
           <p:spPr>
             <a:xfrm>
-              <a:off x="6344952" y="2599039"/>
+              <a:off x="6361055" y="2599039"/>
               <a:ext cx="61566" cy="61566"/>
             </a:xfrm>
             <a:prstGeom prst="ellipse">
@@ -23176,7 +23176,7 @@
           </p:nvSpPr>
           <p:spPr>
             <a:xfrm>
-              <a:off x="6559454" y="2612252"/>
+              <a:off x="6533364" y="2612252"/>
               <a:ext cx="61566" cy="61566"/>
             </a:xfrm>
             <a:prstGeom prst="ellipse">
@@ -23202,7 +23202,7 @@
           </p:nvSpPr>
           <p:spPr>
             <a:xfrm>
-              <a:off x="6299697" y="2332396"/>
+              <a:off x="6338655" y="2332396"/>
               <a:ext cx="61566" cy="61566"/>
             </a:xfrm>
             <a:prstGeom prst="ellipse">
@@ -23228,7 +23228,7 @@
           </p:nvSpPr>
           <p:spPr>
             <a:xfrm>
-              <a:off x="6546133" y="2369180"/>
+              <a:off x="6508367" y="2369180"/>
               <a:ext cx="61566" cy="61566"/>
             </a:xfrm>
             <a:prstGeom prst="ellipse">
@@ -23254,7 +23254,7 @@
           </p:nvSpPr>
           <p:spPr>
             <a:xfrm>
-              <a:off x="6312377" y="2441693"/>
+              <a:off x="6277567" y="2441693"/>
               <a:ext cx="61566" cy="61566"/>
             </a:xfrm>
             <a:prstGeom prst="ellipse">
@@ -23280,7 +23280,7 @@
           </p:nvSpPr>
           <p:spPr>
             <a:xfrm>
-              <a:off x="6575963" y="2798212"/>
+              <a:off x="6527775" y="2798212"/>
               <a:ext cx="61566" cy="61566"/>
             </a:xfrm>
             <a:prstGeom prst="ellipse">
@@ -23306,7 +23306,7 @@
           </p:nvSpPr>
           <p:spPr>
             <a:xfrm>
-              <a:off x="6333199" y="2704229"/>
+              <a:off x="6360729" y="2704229"/>
               <a:ext cx="61566" cy="61566"/>
             </a:xfrm>
             <a:prstGeom prst="ellipse">
@@ -23332,7 +23332,7 @@
           </p:nvSpPr>
           <p:spPr>
             <a:xfrm>
-              <a:off x="6515604" y="2990649"/>
+              <a:off x="6548503" y="2990649"/>
               <a:ext cx="61566" cy="61566"/>
             </a:xfrm>
             <a:prstGeom prst="ellipse">
@@ -23358,7 +23358,7 @@
           </p:nvSpPr>
           <p:spPr>
             <a:xfrm>
-              <a:off x="6305403" y="2623455"/>
+              <a:off x="6342583" y="2623455"/>
               <a:ext cx="61566" cy="61566"/>
             </a:xfrm>
             <a:prstGeom prst="ellipse">
@@ -23384,7 +23384,7 @@
           </p:nvSpPr>
           <p:spPr>
             <a:xfrm>
-              <a:off x="6551013" y="2304996"/>
+              <a:off x="6489951" y="2304996"/>
               <a:ext cx="61566" cy="61566"/>
             </a:xfrm>
             <a:prstGeom prst="ellipse">
@@ -23410,7 +23410,7 @@
           </p:nvSpPr>
           <p:spPr>
             <a:xfrm>
-              <a:off x="6269511" y="2904593"/>
+              <a:off x="6273857" y="2904593"/>
               <a:ext cx="61566" cy="61566"/>
             </a:xfrm>
             <a:prstGeom prst="ellipse">
@@ -23436,7 +23436,7 @@
           </p:nvSpPr>
           <p:spPr>
             <a:xfrm>
-              <a:off x="6523393" y="2504559"/>
+              <a:off x="6554812" y="2504559"/>
               <a:ext cx="61566" cy="61566"/>
             </a:xfrm>
             <a:prstGeom prst="ellipse">
@@ -23462,7 +23462,7 @@
           </p:nvSpPr>
           <p:spPr>
             <a:xfrm>
-              <a:off x="6314475" y="3294756"/>
+              <a:off x="6344396" y="3294756"/>
               <a:ext cx="61566" cy="61566"/>
             </a:xfrm>
             <a:prstGeom prst="ellipse">
@@ -23488,7 +23488,7 @@
           </p:nvSpPr>
           <p:spPr>
             <a:xfrm>
-              <a:off x="6562252" y="2689129"/>
+              <a:off x="6550369" y="2689129"/>
               <a:ext cx="61566" cy="61566"/>
             </a:xfrm>
             <a:prstGeom prst="ellipse">
@@ -23514,7 +23514,7 @@
           </p:nvSpPr>
           <p:spPr>
             <a:xfrm>
-              <a:off x="6296366" y="2469880"/>
+              <a:off x="6357073" y="2469880"/>
               <a:ext cx="61566" cy="61566"/>
             </a:xfrm>
             <a:prstGeom prst="ellipse">
@@ -23540,7 +23540,7 @@
           </p:nvSpPr>
           <p:spPr>
             <a:xfrm>
-              <a:off x="6522202" y="2908157"/>
+              <a:off x="6543028" y="2908157"/>
               <a:ext cx="61566" cy="61566"/>
             </a:xfrm>
             <a:prstGeom prst="ellipse">
@@ -23566,7 +23566,7 @@
           </p:nvSpPr>
           <p:spPr>
             <a:xfrm>
-              <a:off x="6304653" y="2617821"/>
+              <a:off x="6352927" y="2617821"/>
               <a:ext cx="61566" cy="61566"/>
             </a:xfrm>
             <a:prstGeom prst="ellipse">
@@ -23592,7 +23592,7 @@
           </p:nvSpPr>
           <p:spPr>
             <a:xfrm>
-              <a:off x="6540152" y="2755729"/>
+              <a:off x="6488256" y="2755729"/>
               <a:ext cx="61566" cy="61566"/>
             </a:xfrm>
             <a:prstGeom prst="ellipse">
@@ -23618,7 +23618,7 @@
           </p:nvSpPr>
           <p:spPr>
             <a:xfrm>
-              <a:off x="6318597" y="2482403"/>
+              <a:off x="6330184" y="2482403"/>
               <a:ext cx="61566" cy="61566"/>
             </a:xfrm>
             <a:prstGeom prst="ellipse">
@@ -23644,7 +23644,7 @@
           </p:nvSpPr>
           <p:spPr>
             <a:xfrm>
-              <a:off x="6506284" y="2615783"/>
+              <a:off x="6479614" y="2615783"/>
               <a:ext cx="61566" cy="61566"/>
             </a:xfrm>
             <a:prstGeom prst="ellipse">
@@ -23670,7 +23670,7 @@
           </p:nvSpPr>
           <p:spPr>
             <a:xfrm>
-              <a:off x="6262876" y="2965075"/>
+              <a:off x="6332311" y="2965075"/>
               <a:ext cx="61566" cy="61566"/>
             </a:xfrm>
             <a:prstGeom prst="ellipse">
@@ -23696,7 +23696,7 @@
           </p:nvSpPr>
           <p:spPr>
             <a:xfrm>
-              <a:off x="6511131" y="2893218"/>
+              <a:off x="6531528" y="2893218"/>
               <a:ext cx="61566" cy="61566"/>
             </a:xfrm>
             <a:prstGeom prst="ellipse">
@@ -23722,7 +23722,7 @@
           </p:nvSpPr>
           <p:spPr>
             <a:xfrm>
-              <a:off x="6329688" y="2919530"/>
+              <a:off x="6260508" y="2919530"/>
               <a:ext cx="61566" cy="61566"/>
             </a:xfrm>
             <a:prstGeom prst="ellipse">
@@ -23748,7 +23748,7 @@
           </p:nvSpPr>
           <p:spPr>
             <a:xfrm>
-              <a:off x="6510550" y="2904259"/>
+              <a:off x="6544518" y="2904259"/>
               <a:ext cx="61566" cy="61566"/>
             </a:xfrm>
             <a:prstGeom prst="ellipse">
@@ -23774,7 +23774,7 @@
           </p:nvSpPr>
           <p:spPr>
             <a:xfrm>
-              <a:off x="6310330" y="2765346"/>
+              <a:off x="6326319" y="2765346"/>
               <a:ext cx="61566" cy="61566"/>
             </a:xfrm>
             <a:prstGeom prst="ellipse">
@@ -23800,7 +23800,7 @@
           </p:nvSpPr>
           <p:spPr>
             <a:xfrm>
-              <a:off x="6497740" y="2919079"/>
+              <a:off x="6560758" y="2919079"/>
               <a:ext cx="61566" cy="61566"/>
             </a:xfrm>
             <a:prstGeom prst="ellipse">
@@ -23826,7 +23826,7 @@
           </p:nvSpPr>
           <p:spPr>
             <a:xfrm>
-              <a:off x="6305987" y="2854417"/>
+              <a:off x="6255553" y="2854417"/>
               <a:ext cx="61566" cy="61566"/>
             </a:xfrm>
             <a:prstGeom prst="ellipse">
@@ -23852,7 +23852,7 @@
           </p:nvSpPr>
           <p:spPr>
             <a:xfrm>
-              <a:off x="6488648" y="3026402"/>
+              <a:off x="6543904" y="3026402"/>
               <a:ext cx="61566" cy="61566"/>
             </a:xfrm>
             <a:prstGeom prst="ellipse">
@@ -23878,7 +23878,7 @@
           </p:nvSpPr>
           <p:spPr>
             <a:xfrm>
-              <a:off x="6330509" y="2836824"/>
+              <a:off x="6281653" y="2836824"/>
               <a:ext cx="61566" cy="61566"/>
             </a:xfrm>
             <a:prstGeom prst="ellipse">
@@ -23904,7 +23904,7 @@
           </p:nvSpPr>
           <p:spPr>
             <a:xfrm>
-              <a:off x="6496365" y="2605902"/>
+              <a:off x="6561074" y="2605902"/>
               <a:ext cx="61566" cy="61566"/>
             </a:xfrm>
             <a:prstGeom prst="ellipse">
@@ -23930,7 +23930,7 @@
           </p:nvSpPr>
           <p:spPr>
             <a:xfrm>
-              <a:off x="6346049" y="2332213"/>
+              <a:off x="6305624" y="2332213"/>
               <a:ext cx="61566" cy="61566"/>
             </a:xfrm>
             <a:prstGeom prst="ellipse">
@@ -23956,7 +23956,7 @@
           </p:nvSpPr>
           <p:spPr>
             <a:xfrm>
-              <a:off x="6581508" y="2756787"/>
+              <a:off x="6529667" y="2756787"/>
               <a:ext cx="61566" cy="61566"/>
             </a:xfrm>
             <a:prstGeom prst="ellipse">
@@ -23982,7 +23982,7 @@
           </p:nvSpPr>
           <p:spPr>
             <a:xfrm>
-              <a:off x="6289893" y="2855039"/>
+              <a:off x="6350009" y="2855039"/>
               <a:ext cx="61566" cy="61566"/>
             </a:xfrm>
             <a:prstGeom prst="ellipse">
@@ -24008,7 +24008,7 @@
           </p:nvSpPr>
           <p:spPr>
             <a:xfrm>
-              <a:off x="6504383" y="3181399"/>
+              <a:off x="6544149" y="3181399"/>
               <a:ext cx="61566" cy="61566"/>
             </a:xfrm>
             <a:prstGeom prst="ellipse">
@@ -24034,7 +24034,7 @@
           </p:nvSpPr>
           <p:spPr>
             <a:xfrm>
-              <a:off x="6357060" y="2749610"/>
+              <a:off x="6287234" y="2749610"/>
               <a:ext cx="61566" cy="61566"/>
             </a:xfrm>
             <a:prstGeom prst="ellipse">
@@ -24060,7 +24060,7 @@
           </p:nvSpPr>
           <p:spPr>
             <a:xfrm>
-              <a:off x="6563148" y="2581256"/>
+              <a:off x="6556366" y="2581256"/>
               <a:ext cx="61566" cy="61566"/>
             </a:xfrm>
             <a:prstGeom prst="ellipse">
@@ -24086,7 +24086,7 @@
           </p:nvSpPr>
           <p:spPr>
             <a:xfrm>
-              <a:off x="6354943" y="2696789"/>
+              <a:off x="6349914" y="2696789"/>
               <a:ext cx="61566" cy="61566"/>
             </a:xfrm>
             <a:prstGeom prst="ellipse">
@@ -24112,7 +24112,7 @@
           </p:nvSpPr>
           <p:spPr>
             <a:xfrm>
-              <a:off x="6546240" y="3200089"/>
+              <a:off x="6506249" y="3200089"/>
               <a:ext cx="61566" cy="61566"/>
             </a:xfrm>
             <a:prstGeom prst="ellipse">
@@ -24138,7 +24138,7 @@
           </p:nvSpPr>
           <p:spPr>
             <a:xfrm>
-              <a:off x="6255300" y="2936113"/>
+              <a:off x="6361352" y="2936113"/>
               <a:ext cx="61566" cy="61566"/>
             </a:xfrm>
             <a:prstGeom prst="ellipse">
@@ -24164,7 +24164,7 @@
           </p:nvSpPr>
           <p:spPr>
             <a:xfrm>
-              <a:off x="6515204" y="2526205"/>
+              <a:off x="6580430" y="2526205"/>
               <a:ext cx="61566" cy="61566"/>
             </a:xfrm>
             <a:prstGeom prst="ellipse">
@@ -24190,7 +24190,7 @@
           </p:nvSpPr>
           <p:spPr>
             <a:xfrm>
-              <a:off x="6267839" y="2340154"/>
+              <a:off x="6328548" y="2340154"/>
               <a:ext cx="61566" cy="61566"/>
             </a:xfrm>
             <a:prstGeom prst="ellipse">
@@ -24216,7 +24216,7 @@
           </p:nvSpPr>
           <p:spPr>
             <a:xfrm>
-              <a:off x="6536626" y="2543392"/>
+              <a:off x="6489232" y="2543392"/>
               <a:ext cx="61566" cy="61566"/>
             </a:xfrm>
             <a:prstGeom prst="ellipse">
@@ -24242,7 +24242,7 @@
           </p:nvSpPr>
           <p:spPr>
             <a:xfrm>
-              <a:off x="6360300" y="2888543"/>
+              <a:off x="6255307" y="2888543"/>
               <a:ext cx="61566" cy="61566"/>
             </a:xfrm>
             <a:prstGeom prst="ellipse">
@@ -24268,7 +24268,7 @@
           </p:nvSpPr>
           <p:spPr>
             <a:xfrm>
-              <a:off x="6542267" y="2939160"/>
+              <a:off x="6483094" y="2939160"/>
               <a:ext cx="61566" cy="61566"/>
             </a:xfrm>
             <a:prstGeom prst="ellipse">
@@ -24294,7 +24294,7 @@
           </p:nvSpPr>
           <p:spPr>
             <a:xfrm>
-              <a:off x="6311695" y="2714791"/>
+              <a:off x="6270160" y="2714791"/>
               <a:ext cx="61566" cy="61566"/>
             </a:xfrm>
             <a:prstGeom prst="ellipse">
@@ -24320,7 +24320,7 @@
           </p:nvSpPr>
           <p:spPr>
             <a:xfrm>
-              <a:off x="6506155" y="2955322"/>
+              <a:off x="6561268" y="2955322"/>
               <a:ext cx="61566" cy="61566"/>
             </a:xfrm>
             <a:prstGeom prst="ellipse">
@@ -24346,7 +24346,7 @@
           </p:nvSpPr>
           <p:spPr>
             <a:xfrm>
-              <a:off x="6352229" y="2896357"/>
+              <a:off x="6328065" y="2896357"/>
               <a:ext cx="61566" cy="61566"/>
             </a:xfrm>
             <a:prstGeom prst="ellipse">
@@ -24372,7 +24372,7 @@
           </p:nvSpPr>
           <p:spPr>
             <a:xfrm>
-              <a:off x="6517557" y="2606848"/>
+              <a:off x="6528556" y="2606848"/>
               <a:ext cx="61566" cy="61566"/>
             </a:xfrm>
             <a:prstGeom prst="ellipse">
@@ -24398,7 +24398,7 @@
           </p:nvSpPr>
           <p:spPr>
             <a:xfrm>
-              <a:off x="6349442" y="2729700"/>
+              <a:off x="6275268" y="2729700"/>
               <a:ext cx="61566" cy="61566"/>
             </a:xfrm>
             <a:prstGeom prst="ellipse">
@@ -24424,7 +24424,7 @@
           </p:nvSpPr>
           <p:spPr>
             <a:xfrm>
-              <a:off x="6484801" y="2543828"/>
+              <a:off x="6475743" y="2543828"/>
               <a:ext cx="61566" cy="61566"/>
             </a:xfrm>
             <a:prstGeom prst="ellipse">
@@ -24450,7 +24450,7 @@
           </p:nvSpPr>
           <p:spPr>
             <a:xfrm>
-              <a:off x="6274069" y="2896900"/>
+              <a:off x="6306558" y="2896900"/>
               <a:ext cx="61566" cy="61566"/>
             </a:xfrm>
             <a:prstGeom prst="ellipse">
@@ -24476,7 +24476,7 @@
           </p:nvSpPr>
           <p:spPr>
             <a:xfrm>
-              <a:off x="6583393" y="2707308"/>
+              <a:off x="6584076" y="2707308"/>
               <a:ext cx="61566" cy="61566"/>
             </a:xfrm>
             <a:prstGeom prst="ellipse">
@@ -24502,7 +24502,7 @@
           </p:nvSpPr>
           <p:spPr>
             <a:xfrm>
-              <a:off x="6294742" y="2436464"/>
+              <a:off x="6361859" y="2436464"/>
               <a:ext cx="61566" cy="61566"/>
             </a:xfrm>
             <a:prstGeom prst="ellipse">
@@ -24528,7 +24528,7 @@
           </p:nvSpPr>
           <p:spPr>
             <a:xfrm>
-              <a:off x="6559968" y="2523615"/>
+              <a:off x="6569941" y="2523615"/>
               <a:ext cx="61566" cy="61566"/>
             </a:xfrm>
             <a:prstGeom prst="ellipse">
@@ -24554,7 +24554,7 @@
           </p:nvSpPr>
           <p:spPr>
             <a:xfrm>
-              <a:off x="6308983" y="2635955"/>
+              <a:off x="6256341" y="2635955"/>
               <a:ext cx="61566" cy="61566"/>
             </a:xfrm>
             <a:prstGeom prst="ellipse">
@@ -24580,7 +24580,7 @@
           </p:nvSpPr>
           <p:spPr>
             <a:xfrm>
-              <a:off x="6512390" y="3005171"/>
+              <a:off x="6510010" y="3005171"/>
               <a:ext cx="61566" cy="61566"/>
             </a:xfrm>
             <a:prstGeom prst="ellipse">
@@ -24606,7 +24606,7 @@
           </p:nvSpPr>
           <p:spPr>
             <a:xfrm>
-              <a:off x="6354698" y="2835889"/>
+              <a:off x="6300285" y="2835889"/>
               <a:ext cx="61566" cy="61566"/>
             </a:xfrm>
             <a:prstGeom prst="ellipse">
@@ -24632,7 +24632,7 @@
           </p:nvSpPr>
           <p:spPr>
             <a:xfrm>
-              <a:off x="6580602" y="2507506"/>
+              <a:off x="6528554" y="2507506"/>
               <a:ext cx="61566" cy="61566"/>
             </a:xfrm>
             <a:prstGeom prst="ellipse">
@@ -24658,7 +24658,7 @@
           </p:nvSpPr>
           <p:spPr>
             <a:xfrm>
-              <a:off x="6292435" y="2282341"/>
+              <a:off x="6314953" y="2282341"/>
               <a:ext cx="61566" cy="61566"/>
             </a:xfrm>
             <a:prstGeom prst="ellipse">
@@ -24684,7 +24684,7 @@
           </p:nvSpPr>
           <p:spPr>
             <a:xfrm>
-              <a:off x="6540510" y="2457654"/>
+              <a:off x="6503423" y="2457654"/>
               <a:ext cx="61566" cy="61566"/>
             </a:xfrm>
             <a:prstGeom prst="ellipse">
@@ -24710,7 +24710,7 @@
           </p:nvSpPr>
           <p:spPr>
             <a:xfrm>
-              <a:off x="6331787" y="2549946"/>
+              <a:off x="6306873" y="2549946"/>
               <a:ext cx="61566" cy="61566"/>
             </a:xfrm>
             <a:prstGeom prst="ellipse">
@@ -24736,7 +24736,7 @@
           </p:nvSpPr>
           <p:spPr>
             <a:xfrm>
-              <a:off x="6544019" y="2695799"/>
+              <a:off x="6478766" y="2695799"/>
               <a:ext cx="61566" cy="61566"/>
             </a:xfrm>
             <a:prstGeom prst="ellipse">
@@ -24762,7 +24762,7 @@
           </p:nvSpPr>
           <p:spPr>
             <a:xfrm>
-              <a:off x="6313778" y="2704258"/>
+              <a:off x="6332556" y="2704258"/>
               <a:ext cx="61566" cy="61566"/>
             </a:xfrm>
             <a:prstGeom prst="ellipse">
@@ -24788,7 +24788,7 @@
           </p:nvSpPr>
           <p:spPr>
             <a:xfrm>
-              <a:off x="6578667" y="2845436"/>
+              <a:off x="6572105" y="2845436"/>
               <a:ext cx="61566" cy="61566"/>
             </a:xfrm>
             <a:prstGeom prst="ellipse">
@@ -24814,7 +24814,7 @@
           </p:nvSpPr>
           <p:spPr>
             <a:xfrm>
-              <a:off x="6295486" y="3282869"/>
+              <a:off x="6355724" y="3282869"/>
               <a:ext cx="61566" cy="61566"/>
             </a:xfrm>
             <a:prstGeom prst="ellipse">
@@ -24840,7 +24840,7 @@
           </p:nvSpPr>
           <p:spPr>
             <a:xfrm>
-              <a:off x="6576609" y="3284692"/>
+              <a:off x="6518303" y="3284692"/>
               <a:ext cx="61566" cy="61566"/>
             </a:xfrm>
             <a:prstGeom prst="ellipse">
@@ -24866,7 +24866,7 @@
           </p:nvSpPr>
           <p:spPr>
             <a:xfrm>
-              <a:off x="6330157" y="3888507"/>
+              <a:off x="6259666" y="3888507"/>
               <a:ext cx="61566" cy="61566"/>
             </a:xfrm>
             <a:prstGeom prst="ellipse">
@@ -24892,7 +24892,7 @@
           </p:nvSpPr>
           <p:spPr>
             <a:xfrm>
-              <a:off x="6495071" y="3598731"/>
+              <a:off x="6490649" y="3598731"/>
               <a:ext cx="61566" cy="61566"/>
             </a:xfrm>
             <a:prstGeom prst="ellipse">
@@ -24918,7 +24918,7 @@
           </p:nvSpPr>
           <p:spPr>
             <a:xfrm>
-              <a:off x="6309945" y="2434524"/>
+              <a:off x="6344949" y="2434524"/>
               <a:ext cx="61566" cy="61566"/>
             </a:xfrm>
             <a:prstGeom prst="ellipse">
@@ -24944,7 +24944,7 @@
           </p:nvSpPr>
           <p:spPr>
             <a:xfrm>
-              <a:off x="6513939" y="2676211"/>
+              <a:off x="6564652" y="2676211"/>
               <a:ext cx="61566" cy="61566"/>
             </a:xfrm>
             <a:prstGeom prst="ellipse">
@@ -24970,7 +24970,7 @@
           </p:nvSpPr>
           <p:spPr>
             <a:xfrm>
-              <a:off x="6330644" y="2126904"/>
+              <a:off x="6278037" y="2126904"/>
               <a:ext cx="61566" cy="61566"/>
             </a:xfrm>
             <a:prstGeom prst="ellipse">
@@ -24996,7 +24996,7 @@
           </p:nvSpPr>
           <p:spPr>
             <a:xfrm>
-              <a:off x="6581713" y="2464795"/>
+              <a:off x="6490919" y="2464795"/>
               <a:ext cx="61566" cy="61566"/>
             </a:xfrm>
             <a:prstGeom prst="ellipse">
@@ -25022,7 +25022,7 @@
           </p:nvSpPr>
           <p:spPr>
             <a:xfrm>
-              <a:off x="6327767" y="3100546"/>
+              <a:off x="6270005" y="3100546"/>
               <a:ext cx="61566" cy="61566"/>
             </a:xfrm>
             <a:prstGeom prst="ellipse">
@@ -25048,7 +25048,7 @@
           </p:nvSpPr>
           <p:spPr>
             <a:xfrm>
-              <a:off x="6578144" y="2714013"/>
+              <a:off x="6485090" y="2714013"/>
               <a:ext cx="61566" cy="61566"/>
             </a:xfrm>
             <a:prstGeom prst="ellipse">
@@ -25074,7 +25074,7 @@
           </p:nvSpPr>
           <p:spPr>
             <a:xfrm>
-              <a:off x="6335305" y="2851731"/>
+              <a:off x="6261976" y="2851731"/>
               <a:ext cx="61566" cy="61566"/>
             </a:xfrm>
             <a:prstGeom prst="ellipse">
@@ -25100,7 +25100,7 @@
           </p:nvSpPr>
           <p:spPr>
             <a:xfrm>
-              <a:off x="6519310" y="2592885"/>
+              <a:off x="6552395" y="2592885"/>
               <a:ext cx="61566" cy="61566"/>
             </a:xfrm>
             <a:prstGeom prst="ellipse">
@@ -25126,7 +25126,7 @@
           </p:nvSpPr>
           <p:spPr>
             <a:xfrm>
-              <a:off x="6272490" y="2605152"/>
+              <a:off x="6277379" y="2605152"/>
               <a:ext cx="61566" cy="61566"/>
             </a:xfrm>
             <a:prstGeom prst="ellipse">
@@ -25152,7 +25152,7 @@
           </p:nvSpPr>
           <p:spPr>
             <a:xfrm>
-              <a:off x="6527437" y="2577342"/>
+              <a:off x="6506172" y="2577342"/>
               <a:ext cx="61566" cy="61566"/>
             </a:xfrm>
             <a:prstGeom prst="ellipse">
@@ -25178,7 +25178,7 @@
           </p:nvSpPr>
           <p:spPr>
             <a:xfrm>
-              <a:off x="6358855" y="2823542"/>
+              <a:off x="6336573" y="2823542"/>
               <a:ext cx="61566" cy="61566"/>
             </a:xfrm>
             <a:prstGeom prst="ellipse">
@@ -25204,7 +25204,7 @@
           </p:nvSpPr>
           <p:spPr>
             <a:xfrm>
-              <a:off x="6555152" y="2687047"/>
+              <a:off x="6509644" y="2687047"/>
               <a:ext cx="61566" cy="61566"/>
             </a:xfrm>
             <a:prstGeom prst="ellipse">
@@ -25230,7 +25230,7 @@
           </p:nvSpPr>
           <p:spPr>
             <a:xfrm>
-              <a:off x="6311953" y="2605053"/>
+              <a:off x="6267414" y="2605053"/>
               <a:ext cx="61566" cy="61566"/>
             </a:xfrm>
             <a:prstGeom prst="ellipse">
@@ -25256,7 +25256,7 @@
           </p:nvSpPr>
           <p:spPr>
             <a:xfrm>
-              <a:off x="6528964" y="2679743"/>
+              <a:off x="6513228" y="2679743"/>
               <a:ext cx="61566" cy="61566"/>
             </a:xfrm>
             <a:prstGeom prst="ellipse">
@@ -25282,7 +25282,7 @@
           </p:nvSpPr>
           <p:spPr>
             <a:xfrm>
-              <a:off x="1727990" y="2460044"/>
+              <a:off x="1729476" y="2460044"/>
               <a:ext cx="0" cy="472934"/>
             </a:xfrm>
             <a:custGeom>
@@ -25322,7 +25322,7 @@
           </p:nvSpPr>
           <p:spPr>
             <a:xfrm>
-              <a:off x="1727990" y="3353650"/>
+              <a:off x="1729476" y="3353650"/>
               <a:ext cx="0" cy="607156"/>
             </a:xfrm>
             <a:custGeom>
@@ -25362,13 +25362,13 @@
           </p:nvSpPr>
           <p:spPr>
             <a:xfrm>
-              <a:off x="1617119" y="2932979"/>
-              <a:ext cx="221743" cy="420671"/>
+              <a:off x="1618658" y="2932979"/>
+              <a:ext cx="221637" cy="420671"/>
             </a:xfrm>
             <a:custGeom>
               <a:avLst/>
               <a:pathLst>
-                <a:path w="221743" h="420671">
+                <a:path w="221637" h="420671">
                   <a:moveTo>
                     <a:pt x="0" y="0"/>
                   </a:moveTo>
@@ -25376,10 +25376,10 @@
                     <a:pt x="0" y="420671"/>
                   </a:lnTo>
                   <a:lnTo>
-                    <a:pt x="221743" y="420671"/>
+                    <a:pt x="221637" y="420671"/>
                   </a:lnTo>
                   <a:lnTo>
-                    <a:pt x="221743" y="0"/>
+                    <a:pt x="221637" y="0"/>
                   </a:lnTo>
                   <a:close/>
                 </a:path>
@@ -25409,18 +25409,18 @@
           </p:nvSpPr>
           <p:spPr>
             <a:xfrm>
-              <a:off x="1617119" y="3174376"/>
-              <a:ext cx="221743" cy="0"/>
+              <a:off x="1618658" y="3174376"/>
+              <a:ext cx="221637" cy="0"/>
             </a:xfrm>
             <a:custGeom>
               <a:avLst/>
               <a:pathLst>
-                <a:path w="221743" h="0">
+                <a:path w="221637" h="0">
                   <a:moveTo>
                     <a:pt x="0" y="0"/>
                   </a:moveTo>
                   <a:lnTo>
-                    <a:pt x="221743" y="0"/>
+                    <a:pt x="221637" y="0"/>
                   </a:lnTo>
                 </a:path>
               </a:pathLst>
@@ -25449,7 +25449,7 @@
           </p:nvSpPr>
           <p:spPr>
             <a:xfrm>
-              <a:off x="3264997" y="2228885"/>
+              <a:off x="3265747" y="2228885"/>
               <a:ext cx="0" cy="448927"/>
             </a:xfrm>
             <a:custGeom>
@@ -25489,7 +25489,7 @@
           </p:nvSpPr>
           <p:spPr>
             <a:xfrm>
-              <a:off x="3264997" y="3112551"/>
+              <a:off x="3265747" y="3112551"/>
               <a:ext cx="0" cy="626512"/>
             </a:xfrm>
             <a:custGeom>
@@ -25529,13 +25529,13 @@
           </p:nvSpPr>
           <p:spPr>
             <a:xfrm>
-              <a:off x="3154126" y="2677813"/>
-              <a:ext cx="221743" cy="434737"/>
+              <a:off x="3154928" y="2677813"/>
+              <a:ext cx="221637" cy="434737"/>
             </a:xfrm>
             <a:custGeom>
               <a:avLst/>
               <a:pathLst>
-                <a:path w="221743" h="434737">
+                <a:path w="221637" h="434737">
                   <a:moveTo>
                     <a:pt x="0" y="0"/>
                   </a:moveTo>
@@ -25543,10 +25543,10 @@
                     <a:pt x="0" y="434737"/>
                   </a:lnTo>
                   <a:lnTo>
-                    <a:pt x="221743" y="434737"/>
+                    <a:pt x="221637" y="434737"/>
                   </a:lnTo>
                   <a:lnTo>
-                    <a:pt x="221743" y="0"/>
+                    <a:pt x="221637" y="0"/>
                   </a:lnTo>
                   <a:close/>
                 </a:path>
@@ -25576,18 +25576,18 @@
           </p:nvSpPr>
           <p:spPr>
             <a:xfrm>
-              <a:off x="3154126" y="2847991"/>
-              <a:ext cx="221743" cy="0"/>
+              <a:off x="3154928" y="2847991"/>
+              <a:ext cx="221637" cy="0"/>
             </a:xfrm>
             <a:custGeom>
               <a:avLst/>
               <a:pathLst>
-                <a:path w="221743" h="0">
+                <a:path w="221637" h="0">
                   <a:moveTo>
                     <a:pt x="0" y="0"/>
                   </a:moveTo>
                   <a:lnTo>
-                    <a:pt x="221743" y="0"/>
+                    <a:pt x="221637" y="0"/>
                   </a:lnTo>
                 </a:path>
               </a:pathLst>
@@ -25616,7 +25616,7 @@
           </p:nvSpPr>
           <p:spPr>
             <a:xfrm>
-              <a:off x="4802004" y="1794788"/>
+              <a:off x="4802018" y="1794788"/>
               <a:ext cx="0" cy="594247"/>
             </a:xfrm>
             <a:custGeom>
@@ -25656,7 +25656,7 @@
           </p:nvSpPr>
           <p:spPr>
             <a:xfrm>
-              <a:off x="4802004" y="2937529"/>
+              <a:off x="4802018" y="2937529"/>
               <a:ext cx="0" cy="818101"/>
             </a:xfrm>
             <a:custGeom>
@@ -25696,13 +25696,13 @@
           </p:nvSpPr>
           <p:spPr>
             <a:xfrm>
-              <a:off x="4691132" y="2389035"/>
-              <a:ext cx="221743" cy="548493"/>
+              <a:off x="4691199" y="2389035"/>
+              <a:ext cx="221637" cy="548493"/>
             </a:xfrm>
             <a:custGeom>
               <a:avLst/>
               <a:pathLst>
-                <a:path w="221743" h="548493">
+                <a:path w="221637" h="548493">
                   <a:moveTo>
                     <a:pt x="0" y="0"/>
                   </a:moveTo>
@@ -25710,10 +25710,10 @@
                     <a:pt x="0" y="548493"/>
                   </a:lnTo>
                   <a:lnTo>
-                    <a:pt x="221743" y="548493"/>
+                    <a:pt x="221637" y="548493"/>
                   </a:lnTo>
                   <a:lnTo>
-                    <a:pt x="221743" y="0"/>
+                    <a:pt x="221637" y="0"/>
                   </a:lnTo>
                   <a:close/>
                 </a:path>
@@ -25743,18 +25743,18 @@
           </p:nvSpPr>
           <p:spPr>
             <a:xfrm>
-              <a:off x="4691132" y="2651979"/>
-              <a:ext cx="221743" cy="0"/>
+              <a:off x="4691199" y="2651979"/>
+              <a:ext cx="221637" cy="0"/>
             </a:xfrm>
             <a:custGeom>
               <a:avLst/>
               <a:pathLst>
-                <a:path w="221743" h="0">
+                <a:path w="221637" h="0">
                   <a:moveTo>
                     <a:pt x="0" y="0"/>
                   </a:moveTo>
                   <a:lnTo>
-                    <a:pt x="221743" y="0"/>
+                    <a:pt x="221637" y="0"/>
                   </a:lnTo>
                 </a:path>
               </a:pathLst>
@@ -25783,7 +25783,7 @@
           </p:nvSpPr>
           <p:spPr>
             <a:xfrm>
-              <a:off x="6339011" y="1926095"/>
+              <a:off x="6338288" y="1926095"/>
               <a:ext cx="0" cy="598950"/>
             </a:xfrm>
             <a:custGeom>
@@ -25823,7 +25823,7 @@
           </p:nvSpPr>
           <p:spPr>
             <a:xfrm>
-              <a:off x="6339011" y="2950313"/>
+              <a:off x="6338288" y="2950313"/>
               <a:ext cx="0" cy="583391"/>
             </a:xfrm>
             <a:custGeom>
@@ -25863,13 +25863,13 @@
           </p:nvSpPr>
           <p:spPr>
             <a:xfrm>
-              <a:off x="6228139" y="2525045"/>
-              <a:ext cx="221743" cy="425267"/>
+              <a:off x="6227470" y="2525045"/>
+              <a:ext cx="221637" cy="425267"/>
             </a:xfrm>
             <a:custGeom>
               <a:avLst/>
               <a:pathLst>
-                <a:path w="221743" h="425267">
+                <a:path w="221637" h="425267">
                   <a:moveTo>
                     <a:pt x="0" y="0"/>
                   </a:moveTo>
@@ -25877,10 +25877,10 @@
                     <a:pt x="0" y="425267"/>
                   </a:lnTo>
                   <a:lnTo>
-                    <a:pt x="221743" y="425267"/>
+                    <a:pt x="221637" y="425267"/>
                   </a:lnTo>
                   <a:lnTo>
-                    <a:pt x="221743" y="0"/>
+                    <a:pt x="221637" y="0"/>
                   </a:lnTo>
                   <a:close/>
                 </a:path>
@@ -25910,18 +25910,18 @@
           </p:nvSpPr>
           <p:spPr>
             <a:xfrm>
-              <a:off x="6228139" y="2760483"/>
-              <a:ext cx="221743" cy="0"/>
+              <a:off x="6227470" y="2760483"/>
+              <a:ext cx="221637" cy="0"/>
             </a:xfrm>
             <a:custGeom>
               <a:avLst/>
               <a:pathLst>
-                <a:path w="221743" h="0">
+                <a:path w="221637" h="0">
                   <a:moveTo>
                     <a:pt x="0" y="0"/>
                   </a:moveTo>
                   <a:lnTo>
-                    <a:pt x="221743" y="0"/>
+                    <a:pt x="221637" y="0"/>
                   </a:lnTo>
                 </a:path>
               </a:pathLst>
@@ -25950,7 +25950,7 @@
           </p:nvSpPr>
           <p:spPr>
             <a:xfrm>
-              <a:off x="1949734" y="2491969"/>
+              <a:off x="1951113" y="2491969"/>
               <a:ext cx="0" cy="508986"/>
             </a:xfrm>
             <a:custGeom>
@@ -25990,7 +25990,7 @@
           </p:nvSpPr>
           <p:spPr>
             <a:xfrm>
-              <a:off x="1949734" y="3347971"/>
+              <a:off x="1951113" y="3347971"/>
               <a:ext cx="0" cy="304441"/>
             </a:xfrm>
             <a:custGeom>
@@ -26030,13 +26030,13 @@
           </p:nvSpPr>
           <p:spPr>
             <a:xfrm>
-              <a:off x="1838862" y="3000955"/>
-              <a:ext cx="221743" cy="347016"/>
+              <a:off x="1840295" y="3000955"/>
+              <a:ext cx="221637" cy="347016"/>
             </a:xfrm>
             <a:custGeom>
               <a:avLst/>
               <a:pathLst>
-                <a:path w="221743" h="347016">
+                <a:path w="221637" h="347016">
                   <a:moveTo>
                     <a:pt x="0" y="0"/>
                   </a:moveTo>
@@ -26044,10 +26044,10 @@
                     <a:pt x="0" y="347016"/>
                   </a:lnTo>
                   <a:lnTo>
-                    <a:pt x="221743" y="347016"/>
+                    <a:pt x="221637" y="347016"/>
                   </a:lnTo>
                   <a:lnTo>
-                    <a:pt x="221743" y="0"/>
+                    <a:pt x="221637" y="0"/>
                   </a:lnTo>
                   <a:close/>
                 </a:path>
@@ -26077,18 +26077,18 @@
           </p:nvSpPr>
           <p:spPr>
             <a:xfrm>
-              <a:off x="1838862" y="3213150"/>
-              <a:ext cx="221743" cy="0"/>
+              <a:off x="1840295" y="3213150"/>
+              <a:ext cx="221637" cy="0"/>
             </a:xfrm>
             <a:custGeom>
               <a:avLst/>
               <a:pathLst>
-                <a:path w="221743" h="0">
+                <a:path w="221637" h="0">
                   <a:moveTo>
                     <a:pt x="0" y="0"/>
                   </a:moveTo>
                   <a:lnTo>
-                    <a:pt x="221743" y="0"/>
+                    <a:pt x="221637" y="0"/>
                   </a:lnTo>
                 </a:path>
               </a:pathLst>
@@ -26117,7 +26117,7 @@
           </p:nvSpPr>
           <p:spPr>
             <a:xfrm>
-              <a:off x="3486740" y="2181952"/>
+              <a:off x="3487384" y="2181952"/>
               <a:ext cx="0" cy="572639"/>
             </a:xfrm>
             <a:custGeom>
@@ -26157,7 +26157,7 @@
           </p:nvSpPr>
           <p:spPr>
             <a:xfrm>
-              <a:off x="3486740" y="3185880"/>
+              <a:off x="3487384" y="3185880"/>
               <a:ext cx="0" cy="533251"/>
             </a:xfrm>
             <a:custGeom>
@@ -26197,13 +26197,13 @@
           </p:nvSpPr>
           <p:spPr>
             <a:xfrm>
-              <a:off x="3375869" y="2754591"/>
-              <a:ext cx="221743" cy="431288"/>
+              <a:off x="3376565" y="2754591"/>
+              <a:ext cx="221637" cy="431288"/>
             </a:xfrm>
             <a:custGeom>
               <a:avLst/>
               <a:pathLst>
-                <a:path w="221743" h="431288">
+                <a:path w="221637" h="431288">
                   <a:moveTo>
                     <a:pt x="0" y="0"/>
                   </a:moveTo>
@@ -26211,10 +26211,10 @@
                     <a:pt x="0" y="431288"/>
                   </a:lnTo>
                   <a:lnTo>
-                    <a:pt x="221743" y="431288"/>
+                    <a:pt x="221637" y="431288"/>
                   </a:lnTo>
                   <a:lnTo>
-                    <a:pt x="221743" y="0"/>
+                    <a:pt x="221637" y="0"/>
                   </a:lnTo>
                   <a:close/>
                 </a:path>
@@ -26244,18 +26244,18 @@
           </p:nvSpPr>
           <p:spPr>
             <a:xfrm>
-              <a:off x="3375869" y="2952506"/>
-              <a:ext cx="221743" cy="0"/>
+              <a:off x="3376565" y="2952506"/>
+              <a:ext cx="221637" cy="0"/>
             </a:xfrm>
             <a:custGeom>
               <a:avLst/>
               <a:pathLst>
-                <a:path w="221743" h="0">
+                <a:path w="221637" h="0">
                   <a:moveTo>
                     <a:pt x="0" y="0"/>
                   </a:moveTo>
                   <a:lnTo>
-                    <a:pt x="221743" y="0"/>
+                    <a:pt x="221637" y="0"/>
                   </a:lnTo>
                 </a:path>
               </a:pathLst>
@@ -26284,7 +26284,7 @@
           </p:nvSpPr>
           <p:spPr>
             <a:xfrm>
-              <a:off x="5023747" y="2200031"/>
+              <a:off x="5023655" y="2200031"/>
               <a:ext cx="0" cy="435392"/>
             </a:xfrm>
             <a:custGeom>
@@ -26324,7 +26324,7 @@
           </p:nvSpPr>
           <p:spPr>
             <a:xfrm>
-              <a:off x="5023747" y="3098159"/>
+              <a:off x="5023655" y="3098159"/>
               <a:ext cx="0" cy="492339"/>
             </a:xfrm>
             <a:custGeom>
@@ -26364,13 +26364,13 @@
           </p:nvSpPr>
           <p:spPr>
             <a:xfrm>
-              <a:off x="4912876" y="2635424"/>
-              <a:ext cx="221743" cy="462735"/>
+              <a:off x="4912836" y="2635424"/>
+              <a:ext cx="221637" cy="462735"/>
             </a:xfrm>
             <a:custGeom>
               <a:avLst/>
               <a:pathLst>
-                <a:path w="221743" h="462735">
+                <a:path w="221637" h="462735">
                   <a:moveTo>
                     <a:pt x="0" y="0"/>
                   </a:moveTo>
@@ -26378,10 +26378,10 @@
                     <a:pt x="0" y="462735"/>
                   </a:lnTo>
                   <a:lnTo>
-                    <a:pt x="221743" y="462735"/>
+                    <a:pt x="221637" y="462735"/>
                   </a:lnTo>
                   <a:lnTo>
-                    <a:pt x="221743" y="0"/>
+                    <a:pt x="221637" y="0"/>
                   </a:lnTo>
                   <a:close/>
                 </a:path>
@@ -26411,18 +26411,18 @@
           </p:nvSpPr>
           <p:spPr>
             <a:xfrm>
-              <a:off x="4912876" y="2779030"/>
-              <a:ext cx="221743" cy="0"/>
+              <a:off x="4912836" y="2779030"/>
+              <a:ext cx="221637" cy="0"/>
             </a:xfrm>
             <a:custGeom>
               <a:avLst/>
               <a:pathLst>
-                <a:path w="221743" h="0">
+                <a:path w="221637" h="0">
                   <a:moveTo>
                     <a:pt x="0" y="0"/>
                   </a:moveTo>
                   <a:lnTo>
-                    <a:pt x="221743" y="0"/>
+                    <a:pt x="221637" y="0"/>
                   </a:lnTo>
                 </a:path>
               </a:pathLst>
@@ -26451,7 +26451,7 @@
           </p:nvSpPr>
           <p:spPr>
             <a:xfrm>
-              <a:off x="6560754" y="2259236"/>
+              <a:off x="6559925" y="2259236"/>
               <a:ext cx="0" cy="348888"/>
             </a:xfrm>
             <a:custGeom>
@@ -26491,7 +26491,7 @@
           </p:nvSpPr>
           <p:spPr>
             <a:xfrm>
-              <a:off x="6560754" y="2949862"/>
+              <a:off x="6559925" y="2949862"/>
               <a:ext cx="0" cy="482693"/>
             </a:xfrm>
             <a:custGeom>
@@ -26531,13 +26531,13 @@
           </p:nvSpPr>
           <p:spPr>
             <a:xfrm>
-              <a:off x="6449882" y="2608125"/>
-              <a:ext cx="221743" cy="341737"/>
+              <a:off x="6449107" y="2608125"/>
+              <a:ext cx="221637" cy="341737"/>
             </a:xfrm>
             <a:custGeom>
               <a:avLst/>
               <a:pathLst>
-                <a:path w="221743" h="341737">
+                <a:path w="221637" h="341737">
                   <a:moveTo>
                     <a:pt x="0" y="0"/>
                   </a:moveTo>
@@ -26545,10 +26545,10 @@
                     <a:pt x="0" y="341737"/>
                   </a:lnTo>
                   <a:lnTo>
-                    <a:pt x="221743" y="341737"/>
+                    <a:pt x="221637" y="341737"/>
                   </a:lnTo>
                   <a:lnTo>
-                    <a:pt x="221743" y="0"/>
+                    <a:pt x="221637" y="0"/>
                   </a:lnTo>
                   <a:close/>
                 </a:path>
@@ -26578,18 +26578,18 @@
           </p:nvSpPr>
           <p:spPr>
             <a:xfrm>
-              <a:off x="6449882" y="2749587"/>
-              <a:ext cx="221743" cy="0"/>
+              <a:off x="6449107" y="2749587"/>
+              <a:ext cx="221637" cy="0"/>
             </a:xfrm>
             <a:custGeom>
               <a:avLst/>
               <a:pathLst>
-                <a:path w="221743" h="0">
+                <a:path w="221637" h="0">
                   <a:moveTo>
                     <a:pt x="0" y="0"/>
                   </a:moveTo>
                   <a:lnTo>
-                    <a:pt x="221743" y="0"/>
+                    <a:pt x="221637" y="0"/>
                   </a:lnTo>
                 </a:path>
               </a:pathLst>
@@ -26618,39 +26618,39 @@
           </p:nvSpPr>
           <p:spPr>
             <a:xfrm>
-              <a:off x="1838862" y="2505552"/>
-              <a:ext cx="4656607" cy="667920"/>
+              <a:off x="1840295" y="2505552"/>
+              <a:ext cx="4654377" cy="667920"/>
             </a:xfrm>
             <a:custGeom>
               <a:avLst/>
               <a:pathLst>
-                <a:path w="4656607" h="667920">
+                <a:path w="4654377" h="667920">
                   <a:moveTo>
                     <a:pt x="0" y="333651"/>
                   </a:moveTo>
                   <a:lnTo>
-                    <a:pt x="1153064" y="301632"/>
+                    <a:pt x="1152512" y="301632"/>
                   </a:lnTo>
                   <a:lnTo>
-                    <a:pt x="2217432" y="252387"/>
+                    <a:pt x="2216370" y="252387"/>
                   </a:lnTo>
                   <a:lnTo>
-                    <a:pt x="3547891" y="132694"/>
+                    <a:pt x="3546192" y="132694"/>
                   </a:lnTo>
                   <a:lnTo>
-                    <a:pt x="4656607" y="0"/>
+                    <a:pt x="4654377" y="0"/>
                   </a:lnTo>
                   <a:lnTo>
-                    <a:pt x="4656607" y="299410"/>
+                    <a:pt x="4654377" y="299410"/>
                   </a:lnTo>
                   <a:lnTo>
-                    <a:pt x="3547891" y="333897"/>
+                    <a:pt x="3546192" y="333897"/>
                   </a:lnTo>
                   <a:lnTo>
-                    <a:pt x="2217432" y="414822"/>
+                    <a:pt x="2216370" y="414822"/>
                   </a:lnTo>
                   <a:lnTo>
-                    <a:pt x="1153064" y="526071"/>
+                    <a:pt x="1152512" y="526071"/>
                   </a:lnTo>
                   <a:lnTo>
                     <a:pt x="0" y="667920"/>
@@ -26679,27 +26679,27 @@
           </p:nvSpPr>
           <p:spPr>
             <a:xfrm>
-              <a:off x="1838862" y="2505552"/>
-              <a:ext cx="4656607" cy="333651"/>
+              <a:off x="1840295" y="2505552"/>
+              <a:ext cx="4654377" cy="333651"/>
             </a:xfrm>
             <a:custGeom>
               <a:avLst/>
               <a:pathLst>
-                <a:path w="4656607" h="333651">
+                <a:path w="4654377" h="333651">
                   <a:moveTo>
                     <a:pt x="0" y="333651"/>
                   </a:moveTo>
                   <a:lnTo>
-                    <a:pt x="1153064" y="301632"/>
+                    <a:pt x="1152512" y="301632"/>
                   </a:lnTo>
                   <a:lnTo>
-                    <a:pt x="2217432" y="252387"/>
+                    <a:pt x="2216370" y="252387"/>
                   </a:lnTo>
                   <a:lnTo>
-                    <a:pt x="3547891" y="132694"/>
+                    <a:pt x="3546192" y="132694"/>
                   </a:lnTo>
                   <a:lnTo>
-                    <a:pt x="4656607" y="0"/>
+                    <a:pt x="4654377" y="0"/>
                   </a:lnTo>
                 </a:path>
               </a:pathLst>
@@ -26719,24 +26719,24 @@
           </p:nvSpPr>
           <p:spPr>
             <a:xfrm>
-              <a:off x="1838862" y="2804963"/>
-              <a:ext cx="4656607" cy="368509"/>
+              <a:off x="1840295" y="2804963"/>
+              <a:ext cx="4654377" cy="368509"/>
             </a:xfrm>
             <a:custGeom>
               <a:avLst/>
               <a:pathLst>
-                <a:path w="4656607" h="368509">
+                <a:path w="4654377" h="368509">
                   <a:moveTo>
-                    <a:pt x="4656607" y="0"/>
+                    <a:pt x="4654377" y="0"/>
                   </a:moveTo>
                   <a:lnTo>
-                    <a:pt x="3547891" y="34486"/>
+                    <a:pt x="3546192" y="34486"/>
                   </a:lnTo>
                   <a:lnTo>
-                    <a:pt x="2217432" y="115411"/>
+                    <a:pt x="2216370" y="115411"/>
                   </a:lnTo>
                   <a:lnTo>
-                    <a:pt x="1153064" y="226660"/>
+                    <a:pt x="1152512" y="226660"/>
                   </a:lnTo>
                   <a:lnTo>
                     <a:pt x="0" y="368509"/>
@@ -26759,39 +26759,39 @@
           </p:nvSpPr>
           <p:spPr>
             <a:xfrm>
-              <a:off x="1838862" y="2645021"/>
-              <a:ext cx="4656607" cy="605448"/>
+              <a:off x="1840295" y="2645021"/>
+              <a:ext cx="4654377" cy="605448"/>
             </a:xfrm>
             <a:custGeom>
               <a:avLst/>
               <a:pathLst>
-                <a:path w="4656607" h="605448">
+                <a:path w="4654377" h="605448">
                   <a:moveTo>
                     <a:pt x="0" y="324761"/>
                   </a:moveTo>
                   <a:lnTo>
-                    <a:pt x="1153064" y="286605"/>
+                    <a:pt x="1152512" y="286605"/>
                   </a:lnTo>
                   <a:lnTo>
-                    <a:pt x="2217432" y="234980"/>
+                    <a:pt x="2216370" y="234980"/>
                   </a:lnTo>
                   <a:lnTo>
-                    <a:pt x="3547891" y="121921"/>
+                    <a:pt x="3546192" y="121921"/>
                   </a:lnTo>
                   <a:lnTo>
-                    <a:pt x="4656607" y="0"/>
+                    <a:pt x="4654377" y="0"/>
                   </a:lnTo>
                   <a:lnTo>
-                    <a:pt x="4656607" y="250519"/>
+                    <a:pt x="4654377" y="250519"/>
                   </a:lnTo>
                   <a:lnTo>
-                    <a:pt x="3547891" y="290428"/>
+                    <a:pt x="3546192" y="290428"/>
                   </a:lnTo>
                   <a:lnTo>
-                    <a:pt x="2217432" y="371566"/>
+                    <a:pt x="2216370" y="371566"/>
                   </a:lnTo>
                   <a:lnTo>
-                    <a:pt x="1153064" y="475299"/>
+                    <a:pt x="1152512" y="475299"/>
                   </a:lnTo>
                   <a:lnTo>
                     <a:pt x="0" y="605448"/>
@@ -26820,27 +26820,27 @@
           </p:nvSpPr>
           <p:spPr>
             <a:xfrm>
-              <a:off x="1838862" y="2645021"/>
-              <a:ext cx="4656607" cy="324761"/>
+              <a:off x="1840295" y="2645021"/>
+              <a:ext cx="4654377" cy="324761"/>
             </a:xfrm>
             <a:custGeom>
               <a:avLst/>
               <a:pathLst>
-                <a:path w="4656607" h="324761">
+                <a:path w="4654377" h="324761">
                   <a:moveTo>
                     <a:pt x="0" y="324761"/>
                   </a:moveTo>
                   <a:lnTo>
-                    <a:pt x="1153064" y="286605"/>
+                    <a:pt x="1152512" y="286605"/>
                   </a:lnTo>
                   <a:lnTo>
-                    <a:pt x="2217432" y="234980"/>
+                    <a:pt x="2216370" y="234980"/>
                   </a:lnTo>
                   <a:lnTo>
-                    <a:pt x="3547891" y="121921"/>
+                    <a:pt x="3546192" y="121921"/>
                   </a:lnTo>
                   <a:lnTo>
-                    <a:pt x="4656607" y="0"/>
+                    <a:pt x="4654377" y="0"/>
                   </a:lnTo>
                 </a:path>
               </a:pathLst>
@@ -26860,24 +26860,24 @@
           </p:nvSpPr>
           <p:spPr>
             <a:xfrm>
-              <a:off x="1838862" y="2895540"/>
-              <a:ext cx="4656607" cy="354929"/>
+              <a:off x="1840295" y="2895540"/>
+              <a:ext cx="4654377" cy="354929"/>
             </a:xfrm>
             <a:custGeom>
               <a:avLst/>
               <a:pathLst>
-                <a:path w="4656607" h="354929">
+                <a:path w="4654377" h="354929">
                   <a:moveTo>
-                    <a:pt x="4656607" y="0"/>
+                    <a:pt x="4654377" y="0"/>
                   </a:moveTo>
                   <a:lnTo>
-                    <a:pt x="3547891" y="39909"/>
+                    <a:pt x="3546192" y="39909"/>
                   </a:lnTo>
                   <a:lnTo>
-                    <a:pt x="2217432" y="121047"/>
+                    <a:pt x="2216370" y="121047"/>
                   </a:lnTo>
                   <a:lnTo>
-                    <a:pt x="1153064" y="224780"/>
+                    <a:pt x="1152512" y="224780"/>
                   </a:lnTo>
                   <a:lnTo>
                     <a:pt x="0" y="354929"/>
@@ -26900,27 +26900,27 @@
           </p:nvSpPr>
           <p:spPr>
             <a:xfrm>
-              <a:off x="1838862" y="2655257"/>
-              <a:ext cx="4656607" cy="351080"/>
+              <a:off x="1840295" y="2655257"/>
+              <a:ext cx="4654377" cy="351080"/>
             </a:xfrm>
             <a:custGeom>
               <a:avLst/>
               <a:pathLst>
-                <a:path w="4656607" h="351080">
+                <a:path w="4654377" h="351080">
                   <a:moveTo>
                     <a:pt x="0" y="351080"/>
                   </a:moveTo>
                   <a:lnTo>
-                    <a:pt x="1153064" y="264146"/>
+                    <a:pt x="1152512" y="264146"/>
                   </a:lnTo>
                   <a:lnTo>
-                    <a:pt x="2217432" y="183899"/>
+                    <a:pt x="2216370" y="183899"/>
                   </a:lnTo>
                   <a:lnTo>
-                    <a:pt x="3547891" y="83590"/>
+                    <a:pt x="3546192" y="83590"/>
                   </a:lnTo>
                   <a:lnTo>
-                    <a:pt x="4656607" y="0"/>
+                    <a:pt x="4654377" y="0"/>
                   </a:lnTo>
                 </a:path>
               </a:pathLst>
@@ -26949,27 +26949,27 @@
           </p:nvSpPr>
           <p:spPr>
             <a:xfrm>
-              <a:off x="1838862" y="2770281"/>
-              <a:ext cx="4656607" cy="339845"/>
+              <a:off x="1840295" y="2770281"/>
+              <a:ext cx="4654377" cy="339845"/>
             </a:xfrm>
             <a:custGeom>
               <a:avLst/>
               <a:pathLst>
-                <a:path w="4656607" h="339845">
+                <a:path w="4654377" h="339845">
                   <a:moveTo>
                     <a:pt x="0" y="339845"/>
                   </a:moveTo>
                   <a:lnTo>
-                    <a:pt x="1153064" y="255693"/>
+                    <a:pt x="1152512" y="255693"/>
                   </a:lnTo>
                   <a:lnTo>
-                    <a:pt x="2217432" y="178014"/>
+                    <a:pt x="2216370" y="178014"/>
                   </a:lnTo>
                   <a:lnTo>
-                    <a:pt x="3547891" y="80915"/>
+                    <a:pt x="3546192" y="80915"/>
                   </a:lnTo>
                   <a:lnTo>
-                    <a:pt x="4656607" y="0"/>
+                    <a:pt x="4654377" y="0"/>
                   </a:lnTo>
                 </a:path>
               </a:pathLst>
@@ -26998,7 +26998,7 @@
           </p:nvSpPr>
           <p:spPr>
             <a:xfrm>
-              <a:off x="1838862" y="1075464"/>
+              <a:off x="1840295" y="1075464"/>
               <a:ext cx="743315" cy="82021"/>
             </a:xfrm>
             <a:prstGeom prst="rect">
@@ -27044,7 +27044,7 @@
           </p:nvSpPr>
           <p:spPr>
             <a:xfrm>
-              <a:off x="2582178" y="1075464"/>
+              <a:off x="2583610" y="1075464"/>
               <a:ext cx="76260" cy="82021"/>
             </a:xfrm>
             <a:prstGeom prst="rect">
@@ -27090,7 +27090,7 @@
           </p:nvSpPr>
           <p:spPr>
             <a:xfrm>
-              <a:off x="2671044" y="1075464"/>
+              <a:off x="2672476" y="1075464"/>
               <a:ext cx="25420" cy="82021"/>
             </a:xfrm>
             <a:prstGeom prst="rect">
@@ -27136,7 +27136,7 @@
           </p:nvSpPr>
           <p:spPr>
             <a:xfrm>
-              <a:off x="2708767" y="1075464"/>
+              <a:off x="2710200" y="1075464"/>
               <a:ext cx="63550" cy="82021"/>
             </a:xfrm>
             <a:prstGeom prst="rect">
@@ -27182,7 +27182,7 @@
           </p:nvSpPr>
           <p:spPr>
             <a:xfrm>
-              <a:off x="2781549" y="1075464"/>
+              <a:off x="2782982" y="1075464"/>
               <a:ext cx="63550" cy="82021"/>
             </a:xfrm>
             <a:prstGeom prst="rect">
@@ -27228,7 +27228,7 @@
           </p:nvSpPr>
           <p:spPr>
             <a:xfrm>
-              <a:off x="2854289" y="1075464"/>
+              <a:off x="2855722" y="1075464"/>
               <a:ext cx="63550" cy="82021"/>
             </a:xfrm>
             <a:prstGeom prst="rect">
@@ -27274,7 +27274,7 @@
           </p:nvSpPr>
           <p:spPr>
             <a:xfrm>
-              <a:off x="2927003" y="1075464"/>
+              <a:off x="2928435" y="1075464"/>
               <a:ext cx="416143" cy="82021"/>
             </a:xfrm>
             <a:prstGeom prst="rect">
@@ -27320,7 +27320,7 @@
           </p:nvSpPr>
           <p:spPr>
             <a:xfrm>
-              <a:off x="3343146" y="1075464"/>
+              <a:off x="3344579" y="1075464"/>
               <a:ext cx="63459" cy="82021"/>
             </a:xfrm>
             <a:prstGeom prst="rect">
@@ -27366,7 +27366,7 @@
           </p:nvSpPr>
           <p:spPr>
             <a:xfrm>
-              <a:off x="3406605" y="1075464"/>
+              <a:off x="3408038" y="1075464"/>
               <a:ext cx="63550" cy="82021"/>
             </a:xfrm>
             <a:prstGeom prst="rect">
@@ -27412,7 +27412,7 @@
           </p:nvSpPr>
           <p:spPr>
             <a:xfrm>
-              <a:off x="3479346" y="1075464"/>
+              <a:off x="3480779" y="1075464"/>
               <a:ext cx="416143" cy="82021"/>
             </a:xfrm>
             <a:prstGeom prst="rect">
@@ -27458,7 +27458,7 @@
           </p:nvSpPr>
           <p:spPr>
             <a:xfrm>
-              <a:off x="1838862" y="1276351"/>
+              <a:off x="1840295" y="1276351"/>
               <a:ext cx="730605" cy="82021"/>
             </a:xfrm>
             <a:prstGeom prst="rect">
@@ -27504,7 +27504,7 @@
           </p:nvSpPr>
           <p:spPr>
             <a:xfrm>
-              <a:off x="2569468" y="1276351"/>
+              <a:off x="2570900" y="1276351"/>
               <a:ext cx="76260" cy="82021"/>
             </a:xfrm>
             <a:prstGeom prst="rect">
@@ -27550,7 +27550,7 @@
           </p:nvSpPr>
           <p:spPr>
             <a:xfrm>
-              <a:off x="2658334" y="1276351"/>
+              <a:off x="2659766" y="1276351"/>
               <a:ext cx="25420" cy="82021"/>
             </a:xfrm>
             <a:prstGeom prst="rect">
@@ -27596,7 +27596,7 @@
           </p:nvSpPr>
           <p:spPr>
             <a:xfrm>
-              <a:off x="2696057" y="1276351"/>
+              <a:off x="2697490" y="1276351"/>
               <a:ext cx="63550" cy="82021"/>
             </a:xfrm>
             <a:prstGeom prst="rect">
@@ -27642,7 +27642,7 @@
           </p:nvSpPr>
           <p:spPr>
             <a:xfrm>
-              <a:off x="2768839" y="1276351"/>
+              <a:off x="2770271" y="1276351"/>
               <a:ext cx="63550" cy="82021"/>
             </a:xfrm>
             <a:prstGeom prst="rect">
@@ -27688,7 +27688,7 @@
           </p:nvSpPr>
           <p:spPr>
             <a:xfrm>
-              <a:off x="2841579" y="1276351"/>
+              <a:off x="2843012" y="1276351"/>
               <a:ext cx="63550" cy="82021"/>
             </a:xfrm>
             <a:prstGeom prst="rect">
@@ -27734,7 +27734,7 @@
           </p:nvSpPr>
           <p:spPr>
             <a:xfrm>
-              <a:off x="2914292" y="1276351"/>
+              <a:off x="2915725" y="1276351"/>
               <a:ext cx="416143" cy="82021"/>
             </a:xfrm>
             <a:prstGeom prst="rect">
@@ -27780,7 +27780,7 @@
           </p:nvSpPr>
           <p:spPr>
             <a:xfrm>
-              <a:off x="3330436" y="1276351"/>
+              <a:off x="3331869" y="1276351"/>
               <a:ext cx="63459" cy="82021"/>
             </a:xfrm>
             <a:prstGeom prst="rect">
@@ -27826,7 +27826,7 @@
           </p:nvSpPr>
           <p:spPr>
             <a:xfrm>
-              <a:off x="3393895" y="1276351"/>
+              <a:off x="3395328" y="1276351"/>
               <a:ext cx="63550" cy="82021"/>
             </a:xfrm>
             <a:prstGeom prst="rect">
@@ -27872,7 +27872,7 @@
           </p:nvSpPr>
           <p:spPr>
             <a:xfrm>
-              <a:off x="3466636" y="1276351"/>
+              <a:off x="3468068" y="1276351"/>
               <a:ext cx="416143" cy="82021"/>
             </a:xfrm>
             <a:prstGeom prst="rect">
@@ -27918,7 +27918,7 @@
           </p:nvSpPr>
           <p:spPr>
             <a:xfrm>
-              <a:off x="1778512" y="1596063"/>
+              <a:off x="1779944" y="1596063"/>
               <a:ext cx="120700" cy="82021"/>
             </a:xfrm>
             <a:prstGeom prst="rect">
@@ -27964,7 +27964,7 @@
           </p:nvSpPr>
           <p:spPr>
             <a:xfrm>
-              <a:off x="3309209" y="1535842"/>
+              <a:off x="3309906" y="1535842"/>
               <a:ext cx="133319" cy="82021"/>
             </a:xfrm>
             <a:prstGeom prst="rect">
@@ -28010,7 +28010,7 @@
           </p:nvSpPr>
           <p:spPr>
             <a:xfrm>
-              <a:off x="4846216" y="1638956"/>
+              <a:off x="4846176" y="1638956"/>
               <a:ext cx="133319" cy="82021"/>
             </a:xfrm>
             <a:prstGeom prst="rect">
@@ -28056,7 +28056,7 @@
           </p:nvSpPr>
           <p:spPr>
             <a:xfrm>
-              <a:off x="6427662" y="1575095"/>
+              <a:off x="6426887" y="1575095"/>
               <a:ext cx="44439" cy="82021"/>
             </a:xfrm>
             <a:prstGeom prst="rect">
@@ -28719,7 +28719,7 @@
           </p:nvSpPr>
           <p:spPr>
             <a:xfrm>
-              <a:off x="1838862" y="4248157"/>
+              <a:off x="1840295" y="4248157"/>
               <a:ext cx="0" cy="28468"/>
             </a:xfrm>
             <a:custGeom>
@@ -28759,7 +28759,7 @@
           </p:nvSpPr>
           <p:spPr>
             <a:xfrm>
-              <a:off x="3375869" y="4248157"/>
+              <a:off x="3376565" y="4248157"/>
               <a:ext cx="0" cy="28468"/>
             </a:xfrm>
             <a:custGeom>
@@ -28799,7 +28799,7 @@
           </p:nvSpPr>
           <p:spPr>
             <a:xfrm>
-              <a:off x="4912876" y="4248157"/>
+              <a:off x="4912836" y="4248157"/>
               <a:ext cx="0" cy="28468"/>
             </a:xfrm>
             <a:custGeom>
@@ -28839,7 +28839,7 @@
           </p:nvSpPr>
           <p:spPr>
             <a:xfrm>
-              <a:off x="6449882" y="4248157"/>
+              <a:off x="6449107" y="4248157"/>
               <a:ext cx="0" cy="28468"/>
             </a:xfrm>
             <a:custGeom>
@@ -28879,7 +28879,7 @@
           </p:nvSpPr>
           <p:spPr>
             <a:xfrm>
-              <a:off x="1810607" y="4299400"/>
+              <a:off x="1812040" y="4299400"/>
               <a:ext cx="56509" cy="72877"/>
             </a:xfrm>
             <a:prstGeom prst="rect">
@@ -28925,7 +28925,7 @@
           </p:nvSpPr>
           <p:spPr>
             <a:xfrm>
-              <a:off x="3347614" y="4299400"/>
+              <a:off x="3348310" y="4299400"/>
               <a:ext cx="56509" cy="72877"/>
             </a:xfrm>
             <a:prstGeom prst="rect">
@@ -28971,7 +28971,7 @@
           </p:nvSpPr>
           <p:spPr>
             <a:xfrm>
-              <a:off x="4884621" y="4299400"/>
+              <a:off x="4884581" y="4299400"/>
               <a:ext cx="56509" cy="72877"/>
             </a:xfrm>
             <a:prstGeom prst="rect">
@@ -29017,7 +29017,7 @@
           </p:nvSpPr>
           <p:spPr>
             <a:xfrm>
-              <a:off x="6421627" y="4299400"/>
+              <a:off x="6420852" y="4299400"/>
               <a:ext cx="56509" cy="72877"/>
             </a:xfrm>
             <a:prstGeom prst="rect">
@@ -29109,8 +29109,8 @@
           </p:nvSpPr>
           <p:spPr>
             <a:xfrm rot="-5400000">
-              <a:off x="551884" y="2554674"/>
-              <a:ext cx="861090" cy="91165"/>
+              <a:off x="-44487" y="2554674"/>
+              <a:ext cx="2053833" cy="91165"/>
             </a:xfrm>
             <a:prstGeom prst="rect">
               <a:avLst/>
@@ -29142,7 +29142,7 @@
                   <a:latin typeface="Helvetica"/>
                   <a:cs typeface="Helvetica"/>
                 </a:rPr>
-                <a:t>Gini Coefficient</a:t>
+                <a:t>Gini coefficient of biomass inequality</a:t>
               </a:r>
             </a:p>
           </p:txBody>

--- a/figures/Figure_3.pptx
+++ b/figures/Figure_3.pptx
@@ -2250,9 +2250,9 @@
         <p:grpSpPr>
           <a:xfrm>
             <a:off x="914400" y="914400"/>
-            <a:ext cx="6120000" cy="3960000"/>
+            <a:ext cx="4320000" cy="3600000"/>
             <a:chOff x="914400" y="914400"/>
-            <a:chExt cx="6120000" cy="3960000"/>
+            <a:chExt cx="4320000" cy="3600000"/>
           </a:xfrm>
         </p:grpSpPr>
         <p:sp>
@@ -2264,7 +2264,7 @@
           <p:spPr>
             <a:xfrm>
               <a:off x="914400" y="914400"/>
-              <a:ext cx="6120000" cy="3960000"/>
+              <a:ext cx="4320000" cy="3600000"/>
             </a:xfrm>
             <a:prstGeom prst="rect">
               <a:avLst/>
@@ -2299,7 +2299,7 @@
           <p:spPr>
             <a:xfrm>
               <a:off x="914400" y="914400"/>
-              <a:ext cx="6120000" cy="3960000"/>
+              <a:ext cx="4320000" cy="3600000"/>
             </a:xfrm>
             <a:prstGeom prst="rect">
               <a:avLst/>
@@ -2325,7 +2325,7 @@
           <p:spPr>
             <a:xfrm>
               <a:off x="1343534" y="952357"/>
-              <a:ext cx="5640255" cy="3250515"/>
+              <a:ext cx="3840255" cy="2890515"/>
             </a:xfrm>
             <a:prstGeom prst="rect">
               <a:avLst/>
@@ -2350,7 +2350,7 @@
           </p:nvSpPr>
           <p:spPr>
             <a:xfrm>
-              <a:off x="1716679" y="1913764"/>
+              <a:off x="1632109" y="1803832"/>
               <a:ext cx="62384" cy="62384"/>
             </a:xfrm>
             <a:prstGeom prst="ellipse">
@@ -2376,7 +2376,7 @@
           </p:nvSpPr>
           <p:spPr>
             <a:xfrm>
-              <a:off x="1923882" y="3000860"/>
+              <a:off x="1769431" y="2770530"/>
               <a:ext cx="62384" cy="62384"/>
             </a:xfrm>
             <a:prstGeom prst="ellipse">
@@ -2402,7 +2402,7 @@
           </p:nvSpPr>
           <p:spPr>
             <a:xfrm>
-              <a:off x="1740498" y="3172122"/>
+              <a:off x="1569039" y="2922825"/>
               <a:ext cx="62384" cy="62384"/>
             </a:xfrm>
             <a:prstGeom prst="ellipse">
@@ -2428,7 +2428,7 @@
           </p:nvSpPr>
           <p:spPr>
             <a:xfrm>
-              <a:off x="1939546" y="2960704"/>
+              <a:off x="1774104" y="2734822"/>
               <a:ext cx="62384" cy="62384"/>
             </a:xfrm>
             <a:prstGeom prst="ellipse">
@@ -2454,7 +2454,7 @@
           </p:nvSpPr>
           <p:spPr>
             <a:xfrm>
-              <a:off x="1784733" y="2506004"/>
+              <a:off x="1615655" y="2330481"/>
               <a:ext cx="62384" cy="62384"/>
             </a:xfrm>
             <a:prstGeom prst="ellipse">
@@ -2480,7 +2480,7 @@
           </p:nvSpPr>
           <p:spPr>
             <a:xfrm>
-              <a:off x="1952445" y="3054547"/>
+              <a:off x="1719382" y="2818272"/>
               <a:ext cx="62384" cy="62384"/>
             </a:xfrm>
             <a:prstGeom prst="ellipse">
@@ -2506,7 +2506,7 @@
           </p:nvSpPr>
           <p:spPr>
             <a:xfrm>
-              <a:off x="1758261" y="3359296"/>
+              <a:off x="1602096" y="3089269"/>
               <a:ext cx="62384" cy="62384"/>
             </a:xfrm>
             <a:prstGeom prst="ellipse">
@@ -2532,7 +2532,7 @@
           </p:nvSpPr>
           <p:spPr>
             <a:xfrm>
-              <a:off x="1965446" y="3248176"/>
+              <a:off x="1765967" y="2990456"/>
               <a:ext cx="62384" cy="62384"/>
             </a:xfrm>
             <a:prstGeom prst="ellipse">
@@ -2558,7 +2558,7 @@
           </p:nvSpPr>
           <p:spPr>
             <a:xfrm>
-              <a:off x="1757998" y="3144401"/>
+              <a:off x="1614139" y="2898173"/>
               <a:ext cx="62384" cy="62384"/>
             </a:xfrm>
             <a:prstGeom prst="ellipse">
@@ -2584,7 +2584,7 @@
           </p:nvSpPr>
           <p:spPr>
             <a:xfrm>
-              <a:off x="1996054" y="3227282"/>
+              <a:off x="1771530" y="2971875"/>
               <a:ext cx="62384" cy="62384"/>
             </a:xfrm>
             <a:prstGeom prst="ellipse">
@@ -2610,7 +2610,7 @@
           </p:nvSpPr>
           <p:spPr>
             <a:xfrm>
-              <a:off x="1757005" y="3528823"/>
+              <a:off x="1599066" y="3240021"/>
               <a:ext cx="62384" cy="62384"/>
             </a:xfrm>
             <a:prstGeom prst="ellipse">
@@ -2636,7 +2636,7 @@
           </p:nvSpPr>
           <p:spPr>
             <a:xfrm>
-              <a:off x="1965371" y="3525099"/>
+              <a:off x="1777644" y="3236709"/>
               <a:ext cx="62384" cy="62384"/>
             </a:xfrm>
             <a:prstGeom prst="ellipse">
@@ -2662,7 +2662,7 @@
           </p:nvSpPr>
           <p:spPr>
             <a:xfrm>
-              <a:off x="1777416" y="3237557"/>
+              <a:off x="1562070" y="2981013"/>
               <a:ext cx="62384" cy="62384"/>
             </a:xfrm>
             <a:prstGeom prst="ellipse">
@@ -2688,7 +2688,7 @@
           </p:nvSpPr>
           <p:spPr>
             <a:xfrm>
-              <a:off x="1997944" y="3300419"/>
+              <a:off x="1723919" y="3036913"/>
               <a:ext cx="62384" cy="62384"/>
             </a:xfrm>
             <a:prstGeom prst="ellipse">
@@ -2714,7 +2714,7 @@
           </p:nvSpPr>
           <p:spPr>
             <a:xfrm>
-              <a:off x="1747855" y="3320634"/>
+              <a:off x="1625164" y="3054889"/>
               <a:ext cx="62384" cy="62384"/>
             </a:xfrm>
             <a:prstGeom prst="ellipse">
@@ -2740,7 +2740,7 @@
           </p:nvSpPr>
           <p:spPr>
             <a:xfrm>
-              <a:off x="2000185" y="3434791"/>
+              <a:off x="1774546" y="3156403"/>
               <a:ext cx="62384" cy="62384"/>
             </a:xfrm>
             <a:prstGeom prst="ellipse">
@@ -2766,7 +2766,7 @@
           </p:nvSpPr>
           <p:spPr>
             <a:xfrm>
-              <a:off x="1768994" y="3262196"/>
+              <a:off x="1612057" y="3002923"/>
               <a:ext cx="62384" cy="62384"/>
             </a:xfrm>
             <a:prstGeom prst="ellipse">
@@ -2792,7 +2792,7 @@
           </p:nvSpPr>
           <p:spPr>
             <a:xfrm>
-              <a:off x="2005455" y="3129026"/>
+              <a:off x="1721780" y="2884502"/>
               <a:ext cx="62384" cy="62384"/>
             </a:xfrm>
             <a:prstGeom prst="ellipse">
@@ -2818,7 +2818,7 @@
           </p:nvSpPr>
           <p:spPr>
             <a:xfrm>
-              <a:off x="1678865" y="2628746"/>
+              <a:off x="1615917" y="2439628"/>
               <a:ext cx="62384" cy="62384"/>
             </a:xfrm>
             <a:prstGeom prst="ellipse">
@@ -2844,7 +2844,7 @@
           </p:nvSpPr>
           <p:spPr>
             <a:xfrm>
-              <a:off x="1966445" y="2641015"/>
+              <a:off x="1770953" y="2450538"/>
               <a:ext cx="62384" cy="62384"/>
             </a:xfrm>
             <a:prstGeom prst="ellipse">
@@ -2870,7 +2870,7 @@
           </p:nvSpPr>
           <p:spPr>
             <a:xfrm>
-              <a:off x="1787467" y="3251298"/>
+              <a:off x="1600137" y="2993232"/>
               <a:ext cx="62384" cy="62384"/>
             </a:xfrm>
             <a:prstGeom prst="ellipse">
@@ -2896,7 +2896,7 @@
           </p:nvSpPr>
           <p:spPr>
             <a:xfrm>
-              <a:off x="1959664" y="3228842"/>
+              <a:off x="1739124" y="2973263"/>
               <a:ext cx="62384" cy="62384"/>
             </a:xfrm>
             <a:prstGeom prst="ellipse">
@@ -2922,7 +2922,7 @@
           </p:nvSpPr>
           <p:spPr>
             <a:xfrm>
-              <a:off x="1711284" y="3059419"/>
+              <a:off x="1627418" y="2822604"/>
               <a:ext cx="62384" cy="62384"/>
             </a:xfrm>
             <a:prstGeom prst="ellipse">
@@ -2948,7 +2948,7 @@
           </p:nvSpPr>
           <p:spPr>
             <a:xfrm>
-              <a:off x="1983584" y="3224191"/>
+              <a:off x="1712981" y="2969127"/>
               <a:ext cx="62384" cy="62384"/>
             </a:xfrm>
             <a:prstGeom prst="ellipse">
@@ -2974,7 +2974,7 @@
           </p:nvSpPr>
           <p:spPr>
             <a:xfrm>
-              <a:off x="1739607" y="2933254"/>
+              <a:off x="1585171" y="2710412"/>
               <a:ext cx="62384" cy="62384"/>
             </a:xfrm>
             <a:prstGeom prst="ellipse">
@@ -3000,7 +3000,7 @@
           </p:nvSpPr>
           <p:spPr>
             <a:xfrm>
-              <a:off x="1984583" y="3396633"/>
+              <a:off x="1729288" y="3122471"/>
               <a:ext cx="62384" cy="62384"/>
             </a:xfrm>
             <a:prstGeom prst="ellipse">
@@ -3026,7 +3026,7 @@
           </p:nvSpPr>
           <p:spPr>
             <a:xfrm>
-              <a:off x="1742145" y="3318371"/>
+              <a:off x="1604412" y="3052876"/>
               <a:ext cx="62384" cy="62384"/>
             </a:xfrm>
             <a:prstGeom prst="ellipse">
@@ -3052,7 +3052,7 @@
           </p:nvSpPr>
           <p:spPr>
             <a:xfrm>
-              <a:off x="1975543" y="3174519"/>
+              <a:off x="1756006" y="2924956"/>
               <a:ext cx="62384" cy="62384"/>
             </a:xfrm>
             <a:prstGeom prst="ellipse">
@@ -3078,7 +3078,7 @@
           </p:nvSpPr>
           <p:spPr>
             <a:xfrm>
-              <a:off x="1763902" y="2884034"/>
+              <a:off x="1607838" y="2666643"/>
               <a:ext cx="62384" cy="62384"/>
             </a:xfrm>
             <a:prstGeom prst="ellipse">
@@ -3104,7 +3104,7 @@
           </p:nvSpPr>
           <p:spPr>
             <a:xfrm>
-              <a:off x="1972750" y="3534942"/>
+              <a:off x="1756185" y="3245462"/>
               <a:ext cx="62384" cy="62384"/>
             </a:xfrm>
             <a:prstGeom prst="ellipse">
@@ -3130,7 +3130,7 @@
           </p:nvSpPr>
           <p:spPr>
             <a:xfrm>
-              <a:off x="1702965" y="3119808"/>
+              <a:off x="1610785" y="2876305"/>
               <a:ext cx="62384" cy="62384"/>
             </a:xfrm>
             <a:prstGeom prst="ellipse">
@@ -3156,7 +3156,7 @@
           </p:nvSpPr>
           <p:spPr>
             <a:xfrm>
-              <a:off x="1910435" y="3124873"/>
+              <a:off x="1738035" y="2880808"/>
               <a:ext cx="62384" cy="62384"/>
             </a:xfrm>
             <a:prstGeom prst="ellipse">
@@ -3182,7 +3182,7 @@
           </p:nvSpPr>
           <p:spPr>
             <a:xfrm>
-              <a:off x="1687347" y="3330403"/>
+              <a:off x="1605497" y="3063576"/>
               <a:ext cx="62384" cy="62384"/>
             </a:xfrm>
             <a:prstGeom prst="ellipse">
@@ -3208,7 +3208,7 @@
           </p:nvSpPr>
           <p:spPr>
             <a:xfrm>
-              <a:off x="1999294" y="3258172"/>
+              <a:off x="1775389" y="2999345"/>
               <a:ext cx="62384" cy="62384"/>
             </a:xfrm>
             <a:prstGeom prst="ellipse">
@@ -3234,7 +3234,7 @@
           </p:nvSpPr>
           <p:spPr>
             <a:xfrm>
-              <a:off x="1688341" y="3165439"/>
+              <a:off x="1571597" y="2916882"/>
               <a:ext cx="62384" cy="62384"/>
             </a:xfrm>
             <a:prstGeom prst="ellipse">
@@ -3260,7 +3260,7 @@
           </p:nvSpPr>
           <p:spPr>
             <a:xfrm>
-              <a:off x="1913421" y="3263518"/>
+              <a:off x="1741885" y="3004099"/>
               <a:ext cx="62384" cy="62384"/>
             </a:xfrm>
             <a:prstGeom prst="ellipse">
@@ -3286,7 +3286,7 @@
           </p:nvSpPr>
           <p:spPr>
             <a:xfrm>
-              <a:off x="1774761" y="3289941"/>
+              <a:off x="1589278" y="3027595"/>
               <a:ext cx="62384" cy="62384"/>
             </a:xfrm>
             <a:prstGeom prst="ellipse">
@@ -3312,7 +3312,7 @@
           </p:nvSpPr>
           <p:spPr>
             <a:xfrm>
-              <a:off x="1904076" y="3324138"/>
+              <a:off x="1729830" y="3058005"/>
               <a:ext cx="62384" cy="62384"/>
             </a:xfrm>
             <a:prstGeom prst="ellipse">
@@ -3338,7 +3338,7 @@
           </p:nvSpPr>
           <p:spPr>
             <a:xfrm>
-              <a:off x="1775724" y="3629828"/>
+              <a:off x="1571789" y="3329839"/>
               <a:ext cx="62384" cy="62384"/>
             </a:xfrm>
             <a:prstGeom prst="ellipse">
@@ -3364,7 +3364,7 @@
           </p:nvSpPr>
           <p:spPr>
             <a:xfrm>
-              <a:off x="1993511" y="3438239"/>
+              <a:off x="1768137" y="3159469"/>
               <a:ext cx="62384" cy="62384"/>
             </a:xfrm>
             <a:prstGeom prst="ellipse">
@@ -3390,7 +3390,7 @@
           </p:nvSpPr>
           <p:spPr>
             <a:xfrm>
-              <a:off x="1771949" y="2947723"/>
+              <a:off x="1594308" y="2723279"/>
               <a:ext cx="62384" cy="62384"/>
             </a:xfrm>
             <a:prstGeom prst="ellipse">
@@ -3416,7 +3416,7 @@
           </p:nvSpPr>
           <p:spPr>
             <a:xfrm>
-              <a:off x="1944079" y="3099168"/>
+              <a:off x="1773786" y="2857951"/>
               <a:ext cx="62384" cy="62384"/>
             </a:xfrm>
             <a:prstGeom prst="ellipse">
@@ -3442,7 +3442,7 @@
           </p:nvSpPr>
           <p:spPr>
             <a:xfrm>
-              <a:off x="1732312" y="3214018"/>
+              <a:off x="1614169" y="2960081"/>
               <a:ext cx="62384" cy="62384"/>
             </a:xfrm>
             <a:prstGeom prst="ellipse">
@@ -3468,7 +3468,7 @@
           </p:nvSpPr>
           <p:spPr>
             <a:xfrm>
-              <a:off x="1998239" y="3039203"/>
+              <a:off x="1745224" y="2804627"/>
               <a:ext cx="62384" cy="62384"/>
             </a:xfrm>
             <a:prstGeom prst="ellipse">
@@ -3494,7 +3494,7 @@
           </p:nvSpPr>
           <p:spPr>
             <a:xfrm>
-              <a:off x="1730624" y="3287249"/>
+              <a:off x="1633816" y="3025202"/>
               <a:ext cx="62384" cy="62384"/>
             </a:xfrm>
             <a:prstGeom prst="ellipse">
@@ -3520,7 +3520,7 @@
           </p:nvSpPr>
           <p:spPr>
             <a:xfrm>
-              <a:off x="1996768" y="3313934"/>
+              <a:off x="1750166" y="3048931"/>
               <a:ext cx="62384" cy="62384"/>
             </a:xfrm>
             <a:prstGeom prst="ellipse">
@@ -3546,7 +3546,7 @@
           </p:nvSpPr>
           <p:spPr>
             <a:xfrm>
-              <a:off x="1726781" y="2903783"/>
+              <a:off x="1562719" y="2684204"/>
               <a:ext cx="62384" cy="62384"/>
             </a:xfrm>
             <a:prstGeom prst="ellipse">
@@ -3572,7 +3572,7 @@
           </p:nvSpPr>
           <p:spPr>
             <a:xfrm>
-              <a:off x="1954847" y="3584123"/>
+              <a:off x="1758573" y="3289196"/>
               <a:ext cx="62384" cy="62384"/>
             </a:xfrm>
             <a:prstGeom prst="ellipse">
@@ -3598,7 +3598,7 @@
           </p:nvSpPr>
           <p:spPr>
             <a:xfrm>
-              <a:off x="1766653" y="3196671"/>
+              <a:off x="1616467" y="2944655"/>
               <a:ext cx="62384" cy="62384"/>
             </a:xfrm>
             <a:prstGeom prst="ellipse">
@@ -3624,7 +3624,7 @@
           </p:nvSpPr>
           <p:spPr>
             <a:xfrm>
-              <a:off x="1980367" y="3133821"/>
+              <a:off x="1728848" y="2888765"/>
               <a:ext cx="62384" cy="62384"/>
             </a:xfrm>
             <a:prstGeom prst="ellipse">
@@ -3650,7 +3650,7 @@
           </p:nvSpPr>
           <p:spPr>
             <a:xfrm>
-              <a:off x="1743439" y="3572379"/>
+              <a:off x="1634414" y="3278753"/>
               <a:ext cx="62384" cy="62384"/>
             </a:xfrm>
             <a:prstGeom prst="ellipse">
@@ -3676,7 +3676,7 @@
           </p:nvSpPr>
           <p:spPr>
             <a:xfrm>
-              <a:off x="1944493" y="3251405"/>
+              <a:off x="1748696" y="2993327"/>
               <a:ext cx="62384" cy="62384"/>
             </a:xfrm>
             <a:prstGeom prst="ellipse">
@@ -3702,7 +3702,7 @@
           </p:nvSpPr>
           <p:spPr>
             <a:xfrm>
-              <a:off x="1734577" y="3161405"/>
+              <a:off x="1578436" y="2913294"/>
               <a:ext cx="62384" cy="62384"/>
             </a:xfrm>
             <a:prstGeom prst="ellipse">
@@ -3728,7 +3728,7 @@
           </p:nvSpPr>
           <p:spPr>
             <a:xfrm>
-              <a:off x="1972674" y="3059282"/>
+              <a:off x="1750095" y="2822482"/>
               <a:ext cx="62384" cy="62384"/>
             </a:xfrm>
             <a:prstGeom prst="ellipse">
@@ -3754,7 +3754,7 @@
           </p:nvSpPr>
           <p:spPr>
             <a:xfrm>
-              <a:off x="1735200" y="2784614"/>
+              <a:off x="1584401" y="2578234"/>
               <a:ext cx="62384" cy="62384"/>
             </a:xfrm>
             <a:prstGeom prst="ellipse">
@@ -3780,7 +3780,7 @@
           </p:nvSpPr>
           <p:spPr>
             <a:xfrm>
-              <a:off x="1943777" y="2736862"/>
+              <a:off x="1758525" y="2535771"/>
               <a:ext cx="62384" cy="62384"/>
             </a:xfrm>
             <a:prstGeom prst="ellipse">
@@ -3806,7 +3806,7 @@
           </p:nvSpPr>
           <p:spPr>
             <a:xfrm>
-              <a:off x="1773667" y="4011201"/>
+              <a:off x="1575756" y="3668974"/>
               <a:ext cx="62384" cy="62384"/>
             </a:xfrm>
             <a:prstGeom prst="ellipse">
@@ -3832,7 +3832,7 @@
           </p:nvSpPr>
           <p:spPr>
             <a:xfrm>
-              <a:off x="1990919" y="3307230"/>
+              <a:off x="1761779" y="3042969"/>
               <a:ext cx="62384" cy="62384"/>
             </a:xfrm>
             <a:prstGeom prst="ellipse">
@@ -3858,7 +3858,7 @@
           </p:nvSpPr>
           <p:spPr>
             <a:xfrm>
-              <a:off x="1702892" y="3009334"/>
+              <a:off x="1577455" y="2778066"/>
               <a:ext cx="62384" cy="62384"/>
             </a:xfrm>
             <a:prstGeom prst="ellipse">
@@ -3884,7 +3884,7 @@
           </p:nvSpPr>
           <p:spPr>
             <a:xfrm>
-              <a:off x="1991892" y="2829440"/>
+              <a:off x="1758542" y="2618095"/>
               <a:ext cx="62384" cy="62384"/>
             </a:xfrm>
             <a:prstGeom prst="ellipse">
@@ -3910,7 +3910,7 @@
           </p:nvSpPr>
           <p:spPr>
             <a:xfrm>
-              <a:off x="1783294" y="3094612"/>
+              <a:off x="1590294" y="2853899"/>
               <a:ext cx="62384" cy="62384"/>
             </a:xfrm>
             <a:prstGeom prst="ellipse">
@@ -3936,7 +3936,7 @@
           </p:nvSpPr>
           <p:spPr>
             <a:xfrm>
-              <a:off x="1901908" y="3056679"/>
+              <a:off x="1722136" y="2820167"/>
               <a:ext cx="62384" cy="62384"/>
             </a:xfrm>
             <a:prstGeom prst="ellipse">
@@ -3962,7 +3962,7 @@
           </p:nvSpPr>
           <p:spPr>
             <a:xfrm>
-              <a:off x="1728315" y="3338057"/>
+              <a:off x="1607214" y="3070382"/>
               <a:ext cx="62384" cy="62384"/>
             </a:xfrm>
             <a:prstGeom prst="ellipse">
@@ -3988,7 +3988,7 @@
           </p:nvSpPr>
           <p:spPr>
             <a:xfrm>
-              <a:off x="1934612" y="3540611"/>
+              <a:off x="1724531" y="3250503"/>
               <a:ext cx="62384" cy="62384"/>
             </a:xfrm>
             <a:prstGeom prst="ellipse">
@@ -4014,7 +4014,7 @@
           </p:nvSpPr>
           <p:spPr>
             <a:xfrm>
-              <a:off x="1712421" y="2864699"/>
+              <a:off x="1609540" y="2649449"/>
               <a:ext cx="62384" cy="62384"/>
             </a:xfrm>
             <a:prstGeom prst="ellipse">
@@ -4040,7 +4040,7 @@
           </p:nvSpPr>
           <p:spPr>
             <a:xfrm>
-              <a:off x="1911920" y="2966254"/>
+              <a:off x="1733993" y="2739757"/>
               <a:ext cx="62384" cy="62384"/>
             </a:xfrm>
             <a:prstGeom prst="ellipse">
@@ -4066,7 +4066,7 @@
           </p:nvSpPr>
           <p:spPr>
             <a:xfrm>
-              <a:off x="1678801" y="2609304"/>
+              <a:off x="1580658" y="2422340"/>
               <a:ext cx="62384" cy="62384"/>
             </a:xfrm>
             <a:prstGeom prst="ellipse">
@@ -4092,7 +4092,7 @@
           </p:nvSpPr>
           <p:spPr>
             <a:xfrm>
-              <a:off x="1919726" y="2498495"/>
+              <a:off x="1771210" y="2323803"/>
               <a:ext cx="62384" cy="62384"/>
             </a:xfrm>
             <a:prstGeom prst="ellipse">
@@ -4118,7 +4118,7 @@
           </p:nvSpPr>
           <p:spPr>
             <a:xfrm>
-              <a:off x="1771752" y="2919207"/>
+              <a:off x="1576816" y="2697920"/>
               <a:ext cx="62384" cy="62384"/>
             </a:xfrm>
             <a:prstGeom prst="ellipse">
@@ -4144,7 +4144,7 @@
           </p:nvSpPr>
           <p:spPr>
             <a:xfrm>
-              <a:off x="1958426" y="2656628"/>
+              <a:off x="1738641" y="2464423"/>
               <a:ext cx="62384" cy="62384"/>
             </a:xfrm>
             <a:prstGeom prst="ellipse">
@@ -4170,7 +4170,7 @@
           </p:nvSpPr>
           <p:spPr>
             <a:xfrm>
-              <a:off x="1775306" y="3368533"/>
+              <a:off x="1589462" y="3097483"/>
               <a:ext cx="62384" cy="62384"/>
             </a:xfrm>
             <a:prstGeom prst="ellipse">
@@ -4196,7 +4196,7 @@
           </p:nvSpPr>
           <p:spPr>
             <a:xfrm>
-              <a:off x="1949387" y="3203166"/>
+              <a:off x="1780098" y="2950431"/>
               <a:ext cx="62384" cy="62384"/>
             </a:xfrm>
             <a:prstGeom prst="ellipse">
@@ -4222,7 +4222,7 @@
           </p:nvSpPr>
           <p:spPr>
             <a:xfrm>
-              <a:off x="1700059" y="3313470"/>
+              <a:off x="1629228" y="3048519"/>
               <a:ext cx="62384" cy="62384"/>
             </a:xfrm>
             <a:prstGeom prst="ellipse">
@@ -4248,7 +4248,7 @@
           </p:nvSpPr>
           <p:spPr>
             <a:xfrm>
-              <a:off x="1901494" y="3408362"/>
+              <a:off x="1773559" y="3132901"/>
               <a:ext cx="62384" cy="62384"/>
             </a:xfrm>
             <a:prstGeom prst="ellipse">
@@ -4274,7 +4274,7 @@
           </p:nvSpPr>
           <p:spPr>
             <a:xfrm>
-              <a:off x="1694192" y="2946222"/>
+              <a:off x="1591174" y="2721944"/>
               <a:ext cx="62384" cy="62384"/>
             </a:xfrm>
             <a:prstGeom prst="ellipse">
@@ -4300,7 +4300,7 @@
           </p:nvSpPr>
           <p:spPr>
             <a:xfrm>
-              <a:off x="1950373" y="3026629"/>
+              <a:off x="1743998" y="2793445"/>
               <a:ext cx="62384" cy="62384"/>
             </a:xfrm>
             <a:prstGeom prst="ellipse">
@@ -4326,7 +4326,7 @@
           </p:nvSpPr>
           <p:spPr>
             <a:xfrm>
-              <a:off x="1710979" y="2865112"/>
+              <a:off x="1610861" y="2649817"/>
               <a:ext cx="62384" cy="62384"/>
             </a:xfrm>
             <a:prstGeom prst="ellipse">
@@ -4352,7 +4352,7 @@
           </p:nvSpPr>
           <p:spPr>
             <a:xfrm>
-              <a:off x="1917368" y="2588430"/>
+              <a:off x="1769782" y="2403778"/>
               <a:ext cx="62384" cy="62384"/>
             </a:xfrm>
             <a:prstGeom prst="ellipse">
@@ -4378,7 +4378,7 @@
           </p:nvSpPr>
           <p:spPr>
             <a:xfrm>
-              <a:off x="1757586" y="3343069"/>
+              <a:off x="1608266" y="3074839"/>
               <a:ext cx="62384" cy="62384"/>
             </a:xfrm>
             <a:prstGeom prst="ellipse">
@@ -4404,7 +4404,7 @@
           </p:nvSpPr>
           <p:spPr>
             <a:xfrm>
-              <a:off x="1941201" y="3142479"/>
+              <a:off x="1743095" y="2896464"/>
               <a:ext cx="62384" cy="62384"/>
             </a:xfrm>
             <a:prstGeom prst="ellipse">
@@ -4430,7 +4430,7 @@
           </p:nvSpPr>
           <p:spPr>
             <a:xfrm>
-              <a:off x="1768597" y="2944383"/>
+              <a:off x="1628113" y="2720308"/>
               <a:ext cx="62384" cy="62384"/>
             </a:xfrm>
             <a:prstGeom prst="ellipse">
@@ -4456,7 +4456,7 @@
           </p:nvSpPr>
           <p:spPr>
             <a:xfrm>
-              <a:off x="1911555" y="3047073"/>
+              <a:off x="1726374" y="2811625"/>
               <a:ext cx="62384" cy="62384"/>
             </a:xfrm>
             <a:prstGeom prst="ellipse">
@@ -4482,7 +4482,7 @@
           </p:nvSpPr>
           <p:spPr>
             <a:xfrm>
-              <a:off x="1719068" y="3356932"/>
+              <a:off x="1599662" y="3087167"/>
               <a:ext cx="62384" cy="62384"/>
             </a:xfrm>
             <a:prstGeom prst="ellipse">
@@ -4508,7 +4508,7 @@
           </p:nvSpPr>
           <p:spPr>
             <a:xfrm>
-              <a:off x="1909992" y="2525509"/>
+              <a:off x="1746064" y="2347825"/>
               <a:ext cx="62384" cy="62384"/>
             </a:xfrm>
             <a:prstGeom prst="ellipse">
@@ -4534,7 +4534,7 @@
           </p:nvSpPr>
           <p:spPr>
             <a:xfrm>
-              <a:off x="1748347" y="2852999"/>
+              <a:off x="1578373" y="2639045"/>
               <a:ext cx="62384" cy="62384"/>
             </a:xfrm>
             <a:prstGeom prst="ellipse">
@@ -4560,7 +4560,7 @@
           </p:nvSpPr>
           <p:spPr>
             <a:xfrm>
-              <a:off x="1936367" y="2277461"/>
+              <a:off x="1775650" y="2127249"/>
               <a:ext cx="62384" cy="62384"/>
             </a:xfrm>
             <a:prstGeom prst="ellipse">
@@ -4586,7 +4586,7 @@
           </p:nvSpPr>
           <p:spPr>
             <a:xfrm>
-              <a:off x="1682386" y="3008533"/>
+              <a:off x="1600840" y="2777354"/>
               <a:ext cx="62384" cy="62384"/>
             </a:xfrm>
             <a:prstGeom prst="ellipse">
@@ -4612,7 +4612,7 @@
           </p:nvSpPr>
           <p:spPr>
             <a:xfrm>
-              <a:off x="1934437" y="3012109"/>
+              <a:off x="1722036" y="2780534"/>
               <a:ext cx="62384" cy="62384"/>
             </a:xfrm>
             <a:prstGeom prst="ellipse">
@@ -4638,7 +4638,7 @@
           </p:nvSpPr>
           <p:spPr>
             <a:xfrm>
-              <a:off x="1696515" y="3130140"/>
+              <a:off x="1635428" y="2885492"/>
               <a:ext cx="62384" cy="62384"/>
             </a:xfrm>
             <a:prstGeom prst="ellipse">
@@ -4664,7 +4664,7 @@
           </p:nvSpPr>
           <p:spPr>
             <a:xfrm>
-              <a:off x="1975181" y="2796209"/>
+              <a:off x="1744885" y="2588544"/>
               <a:ext cx="62384" cy="62384"/>
             </a:xfrm>
             <a:prstGeom prst="ellipse">
@@ -4690,7 +4690,7 @@
           </p:nvSpPr>
           <p:spPr>
             <a:xfrm>
-              <a:off x="1735379" y="3888279"/>
+              <a:off x="1582586" y="3559667"/>
               <a:ext cx="62384" cy="62384"/>
             </a:xfrm>
             <a:prstGeom prst="ellipse">
@@ -4716,7 +4716,7 @@
           </p:nvSpPr>
           <p:spPr>
             <a:xfrm>
-              <a:off x="1959447" y="3529322"/>
+              <a:off x="1717277" y="3240465"/>
               <a:ext cx="62384" cy="62384"/>
             </a:xfrm>
             <a:prstGeom prst="ellipse">
@@ -4742,7 +4742,7 @@
           </p:nvSpPr>
           <p:spPr>
             <a:xfrm>
-              <a:off x="1774143" y="2787219"/>
+              <a:off x="1615083" y="2580551"/>
               <a:ext cx="62384" cy="62384"/>
             </a:xfrm>
             <a:prstGeom prst="ellipse">
@@ -4768,7 +4768,7 @@
           </p:nvSpPr>
           <p:spPr>
             <a:xfrm>
-              <a:off x="1972545" y="2573604"/>
+              <a:off x="1766685" y="2390593"/>
               <a:ext cx="62384" cy="62384"/>
             </a:xfrm>
             <a:prstGeom prst="ellipse">
@@ -4794,7 +4794,7 @@
           </p:nvSpPr>
           <p:spPr>
             <a:xfrm>
-              <a:off x="1756173" y="2991280"/>
+              <a:off x="1633456" y="2762011"/>
               <a:ext cx="62384" cy="62384"/>
             </a:xfrm>
             <a:prstGeom prst="ellipse">
@@ -4820,7 +4820,7 @@
           </p:nvSpPr>
           <p:spPr>
             <a:xfrm>
-              <a:off x="1973540" y="3150895"/>
+              <a:off x="1729641" y="2903949"/>
               <a:ext cx="62384" cy="62384"/>
             </a:xfrm>
             <a:prstGeom prst="ellipse">
@@ -4846,7 +4846,7 @@
           </p:nvSpPr>
           <p:spPr>
             <a:xfrm>
-              <a:off x="1787502" y="2690735"/>
+              <a:off x="1631893" y="2494752"/>
               <a:ext cx="62384" cy="62384"/>
             </a:xfrm>
             <a:prstGeom prst="ellipse">
@@ -4872,7 +4872,7 @@
           </p:nvSpPr>
           <p:spPr>
             <a:xfrm>
-              <a:off x="1957621" y="2439622"/>
+              <a:off x="1732684" y="2271451"/>
               <a:ext cx="62384" cy="62384"/>
             </a:xfrm>
             <a:prstGeom prst="ellipse">
@@ -4898,7 +4898,7 @@
           </p:nvSpPr>
           <p:spPr>
             <a:xfrm>
-              <a:off x="1683083" y="3103342"/>
+              <a:off x="1623054" y="2861663"/>
               <a:ext cx="62384" cy="62384"/>
             </a:xfrm>
             <a:prstGeom prst="ellipse">
@@ -4924,7 +4924,7 @@
           </p:nvSpPr>
           <p:spPr>
             <a:xfrm>
-              <a:off x="1908834" y="2762782"/>
+              <a:off x="1744727" y="2558820"/>
               <a:ext cx="62384" cy="62384"/>
             </a:xfrm>
             <a:prstGeom prst="ellipse">
@@ -4950,7 +4950,7 @@
           </p:nvSpPr>
           <p:spPr>
             <a:xfrm>
-              <a:off x="1749133" y="2753879"/>
+              <a:off x="1618092" y="2550903"/>
               <a:ext cx="62384" cy="62384"/>
             </a:xfrm>
             <a:prstGeom prst="ellipse">
@@ -4976,7 +4976,7 @@
           </p:nvSpPr>
           <p:spPr>
             <a:xfrm>
-              <a:off x="1948327" y="2941695"/>
+              <a:off x="1773017" y="2717918"/>
               <a:ext cx="62384" cy="62384"/>
             </a:xfrm>
             <a:prstGeom prst="ellipse">
@@ -5002,7 +5002,7 @@
           </p:nvSpPr>
           <p:spPr>
             <a:xfrm>
-              <a:off x="1682306" y="2857089"/>
+              <a:off x="1602640" y="2642682"/>
               <a:ext cx="62384" cy="62384"/>
             </a:xfrm>
             <a:prstGeom prst="ellipse">
@@ -5028,7 +5028,7 @@
           </p:nvSpPr>
           <p:spPr>
             <a:xfrm>
-              <a:off x="1986152" y="3171515"/>
+              <a:off x="1731537" y="2922285"/>
               <a:ext cx="62384" cy="62384"/>
             </a:xfrm>
             <a:prstGeom prst="ellipse">
@@ -5054,7 +5054,7 @@
           </p:nvSpPr>
           <p:spPr>
             <a:xfrm>
-              <a:off x="1763698" y="2529378"/>
+              <a:off x="1563223" y="2351266"/>
               <a:ext cx="62384" cy="62384"/>
             </a:xfrm>
             <a:prstGeom prst="ellipse">
@@ -5080,7 +5080,7 @@
           </p:nvSpPr>
           <p:spPr>
             <a:xfrm>
-              <a:off x="1977547" y="2656355"/>
+              <a:off x="1777741" y="2464180"/>
               <a:ext cx="62384" cy="62384"/>
             </a:xfrm>
             <a:prstGeom prst="ellipse">
@@ -5106,7 +5106,7 @@
           </p:nvSpPr>
           <p:spPr>
             <a:xfrm>
-              <a:off x="1746451" y="3123509"/>
+              <a:off x="1569624" y="2879596"/>
               <a:ext cx="62384" cy="62384"/>
             </a:xfrm>
             <a:prstGeom prst="ellipse">
@@ -5132,7 +5132,7 @@
           </p:nvSpPr>
           <p:spPr>
             <a:xfrm>
-              <a:off x="1926806" y="3276454"/>
+              <a:off x="1718214" y="3015602"/>
               <a:ext cx="62384" cy="62384"/>
             </a:xfrm>
             <a:prstGeom prst="ellipse">
@@ -5158,7 +5158,7 @@
           </p:nvSpPr>
           <p:spPr>
             <a:xfrm>
-              <a:off x="1734391" y="3213116"/>
+              <a:off x="1593413" y="2959279"/>
               <a:ext cx="62384" cy="62384"/>
             </a:xfrm>
             <a:prstGeom prst="ellipse">
@@ -5184,7 +5184,7 @@
           </p:nvSpPr>
           <p:spPr>
             <a:xfrm>
-              <a:off x="1990497" y="3258660"/>
+              <a:off x="1760884" y="2999779"/>
               <a:ext cx="62384" cy="62384"/>
             </a:xfrm>
             <a:prstGeom prst="ellipse">
@@ -5210,7 +5210,7 @@
           </p:nvSpPr>
           <p:spPr>
             <a:xfrm>
-              <a:off x="1692576" y="3136552"/>
+              <a:off x="1562093" y="2891195"/>
               <a:ext cx="62384" cy="62384"/>
             </a:xfrm>
             <a:prstGeom prst="ellipse">
@@ -5236,7 +5236,7 @@
           </p:nvSpPr>
           <p:spPr>
             <a:xfrm>
-              <a:off x="1923710" y="3147909"/>
+              <a:off x="1718441" y="2901293"/>
               <a:ext cx="62384" cy="62384"/>
             </a:xfrm>
             <a:prstGeom prst="ellipse">
@@ -5262,7 +5262,7 @@
           </p:nvSpPr>
           <p:spPr>
             <a:xfrm>
-              <a:off x="1760839" y="1711732"/>
+              <a:off x="1579338" y="1624175"/>
               <a:ext cx="62384" cy="62384"/>
             </a:xfrm>
             <a:prstGeom prst="ellipse">
@@ -5288,7 +5288,7 @@
           </p:nvSpPr>
           <p:spPr>
             <a:xfrm>
-              <a:off x="1947478" y="2111541"/>
+              <a:off x="1745312" y="1979705"/>
               <a:ext cx="62384" cy="62384"/>
             </a:xfrm>
             <a:prstGeom prst="ellipse">
@@ -5314,7 +5314,7 @@
           </p:nvSpPr>
           <p:spPr>
             <a:xfrm>
-              <a:off x="1683957" y="2157528"/>
+              <a:off x="1573821" y="2020599"/>
               <a:ext cx="62384" cy="62384"/>
             </a:xfrm>
             <a:prstGeom prst="ellipse">
@@ -5340,7 +5340,7 @@
           </p:nvSpPr>
           <p:spPr>
             <a:xfrm>
-              <a:off x="1934086" y="2448523"/>
+              <a:off x="1733046" y="2279365"/>
               <a:ext cx="62384" cy="62384"/>
             </a:xfrm>
             <a:prstGeom prst="ellipse">
@@ -5366,7 +5366,7 @@
           </p:nvSpPr>
           <p:spPr>
             <a:xfrm>
-              <a:off x="1729927" y="3393537"/>
+              <a:off x="1576424" y="3119717"/>
               <a:ext cx="62384" cy="62384"/>
             </a:xfrm>
             <a:prstGeom prst="ellipse">
@@ -5392,7 +5392,7 @@
           </p:nvSpPr>
           <p:spPr>
             <a:xfrm>
-              <a:off x="1967735" y="3215902"/>
+              <a:off x="1723320" y="2961756"/>
               <a:ext cx="62384" cy="62384"/>
             </a:xfrm>
             <a:prstGeom prst="ellipse">
@@ -5418,7 +5418,7 @@
           </p:nvSpPr>
           <p:spPr>
             <a:xfrm>
-              <a:off x="1761909" y="3486090"/>
+              <a:off x="1591103" y="3202020"/>
               <a:ext cx="62384" cy="62384"/>
             </a:xfrm>
             <a:prstGeom prst="ellipse">
@@ -5444,7 +5444,7 @@
           </p:nvSpPr>
           <p:spPr>
             <a:xfrm>
-              <a:off x="1918644" y="3422376"/>
+              <a:off x="1719960" y="3145362"/>
               <a:ext cx="62384" cy="62384"/>
             </a:xfrm>
             <a:prstGeom prst="ellipse">
@@ -5470,7 +5470,7 @@
           </p:nvSpPr>
           <p:spPr>
             <a:xfrm>
-              <a:off x="1736161" y="3261556"/>
+              <a:off x="1588282" y="3002354"/>
               <a:ext cx="62384" cy="62384"/>
             </a:xfrm>
             <a:prstGeom prst="ellipse">
@@ -5496,7 +5496,7 @@
           </p:nvSpPr>
           <p:spPr>
             <a:xfrm>
-              <a:off x="2001764" y="3347308"/>
+              <a:off x="1732552" y="3078609"/>
               <a:ext cx="62384" cy="62384"/>
             </a:xfrm>
             <a:prstGeom prst="ellipse">
@@ -5522,7 +5522,7 @@
           </p:nvSpPr>
           <p:spPr>
             <a:xfrm>
-              <a:off x="1691833" y="2819871"/>
+              <a:off x="1601245" y="2609586"/>
               <a:ext cx="62384" cy="62384"/>
             </a:xfrm>
             <a:prstGeom prst="ellipse">
@@ -5548,7 +5548,7 @@
           </p:nvSpPr>
           <p:spPr>
             <a:xfrm>
-              <a:off x="1940022" y="3240519"/>
+              <a:off x="1772914" y="2983647"/>
               <a:ext cx="62384" cy="62384"/>
             </a:xfrm>
             <a:prstGeom prst="ellipse">
@@ -5574,7 +5574,7 @@
           </p:nvSpPr>
           <p:spPr>
             <a:xfrm>
-              <a:off x="1716531" y="3209070"/>
+              <a:off x="1618654" y="2955681"/>
               <a:ext cx="62384" cy="62384"/>
             </a:xfrm>
             <a:prstGeom prst="ellipse">
@@ -5600,7 +5600,7 @@
           </p:nvSpPr>
           <p:spPr>
             <a:xfrm>
-              <a:off x="1928963" y="3358716"/>
+              <a:off x="1723215" y="3088754"/>
               <a:ext cx="62384" cy="62384"/>
             </a:xfrm>
             <a:prstGeom prst="ellipse">
@@ -5626,7 +5626,7 @@
           </p:nvSpPr>
           <p:spPr>
             <a:xfrm>
-              <a:off x="1732519" y="3042330"/>
+              <a:off x="1626943" y="2807407"/>
               <a:ext cx="62384" cy="62384"/>
             </a:xfrm>
             <a:prstGeom prst="ellipse">
@@ -5652,7 +5652,7 @@
           </p:nvSpPr>
           <p:spPr>
             <a:xfrm>
-              <a:off x="1927480" y="3228714"/>
+              <a:off x="1747428" y="2973149"/>
               <a:ext cx="62384" cy="62384"/>
             </a:xfrm>
             <a:prstGeom prst="ellipse">
@@ -5678,7 +5678,7 @@
           </p:nvSpPr>
           <p:spPr>
             <a:xfrm>
-              <a:off x="1681592" y="3082009"/>
+              <a:off x="1611705" y="2842692"/>
               <a:ext cx="62384" cy="62384"/>
             </a:xfrm>
             <a:prstGeom prst="ellipse">
@@ -5704,7 +5704,7 @@
           </p:nvSpPr>
           <p:spPr>
             <a:xfrm>
-              <a:off x="1938523" y="3237408"/>
+              <a:off x="1721522" y="2980880"/>
               <a:ext cx="62384" cy="62384"/>
             </a:xfrm>
             <a:prstGeom prst="ellipse">
@@ -5730,7 +5730,7 @@
           </p:nvSpPr>
           <p:spPr>
             <a:xfrm>
-              <a:off x="1751246" y="3003949"/>
+              <a:off x="1602055" y="2773278"/>
               <a:ext cx="62384" cy="62384"/>
             </a:xfrm>
             <a:prstGeom prst="ellipse">
@@ -5756,7 +5756,7 @@
           </p:nvSpPr>
           <p:spPr>
             <a:xfrm>
-              <a:off x="1926444" y="3138421"/>
+              <a:off x="1786215" y="2892856"/>
               <a:ext cx="62384" cy="62384"/>
             </a:xfrm>
             <a:prstGeom prst="ellipse">
@@ -5782,7 +5782,7 @@
           </p:nvSpPr>
           <p:spPr>
             <a:xfrm>
-              <a:off x="1771736" y="3358849"/>
+              <a:off x="1615882" y="3088872"/>
               <a:ext cx="62384" cy="62384"/>
             </a:xfrm>
             <a:prstGeom prst="ellipse">
@@ -5808,7 +5808,7 @@
           </p:nvSpPr>
           <p:spPr>
             <a:xfrm>
-              <a:off x="1947498" y="3141040"/>
+              <a:off x="1735552" y="2895185"/>
               <a:ext cx="62384" cy="62384"/>
             </a:xfrm>
             <a:prstGeom prst="ellipse">
@@ -5834,7 +5834,7 @@
           </p:nvSpPr>
           <p:spPr>
             <a:xfrm>
-              <a:off x="1767441" y="3010351"/>
+              <a:off x="1612243" y="2778970"/>
               <a:ext cx="62384" cy="62384"/>
             </a:xfrm>
             <a:prstGeom prst="ellipse">
@@ -5860,7 +5860,7 @@
           </p:nvSpPr>
           <p:spPr>
             <a:xfrm>
-              <a:off x="1905258" y="3102699"/>
+              <a:off x="1760542" y="2861090"/>
               <a:ext cx="62384" cy="62384"/>
             </a:xfrm>
             <a:prstGeom prst="ellipse">
@@ -5886,7 +5886,7 @@
           </p:nvSpPr>
           <p:spPr>
             <a:xfrm>
-              <a:off x="1735742" y="3288988"/>
+              <a:off x="1616900" y="3026748"/>
               <a:ext cx="62384" cy="62384"/>
             </a:xfrm>
             <a:prstGeom prst="ellipse">
@@ -5912,7 +5912,7 @@
           </p:nvSpPr>
           <p:spPr>
             <a:xfrm>
-              <a:off x="1932849" y="3194727"/>
+              <a:off x="1785963" y="2942926"/>
               <a:ext cx="62384" cy="62384"/>
             </a:xfrm>
             <a:prstGeom prst="ellipse">
@@ -5938,7 +5938,7 @@
           </p:nvSpPr>
           <p:spPr>
             <a:xfrm>
-              <a:off x="1715854" y="3319393"/>
+              <a:off x="1629443" y="3053785"/>
               <a:ext cx="62384" cy="62384"/>
             </a:xfrm>
             <a:prstGeom prst="ellipse">
@@ -5964,7 +5964,7 @@
           </p:nvSpPr>
           <p:spPr>
             <a:xfrm>
-              <a:off x="1933338" y="3499639"/>
+              <a:off x="1771517" y="3214068"/>
               <a:ext cx="62384" cy="62384"/>
             </a:xfrm>
             <a:prstGeom prst="ellipse">
@@ -5990,7 +5990,7 @@
           </p:nvSpPr>
           <p:spPr>
             <a:xfrm>
-              <a:off x="1755499" y="3010868"/>
+              <a:off x="1615221" y="2779430"/>
               <a:ext cx="62384" cy="62384"/>
             </a:xfrm>
             <a:prstGeom prst="ellipse">
@@ -6016,7 +6016,7 @@
           </p:nvSpPr>
           <p:spPr>
             <a:xfrm>
-              <a:off x="1997967" y="3258491"/>
+              <a:off x="1722631" y="2999628"/>
               <a:ext cx="62384" cy="62384"/>
             </a:xfrm>
             <a:prstGeom prst="ellipse">
@@ -6042,7 +6042,7 @@
           </p:nvSpPr>
           <p:spPr>
             <a:xfrm>
-              <a:off x="1764750" y="3089986"/>
+              <a:off x="1601999" y="2849785"/>
               <a:ext cx="62384" cy="62384"/>
             </a:xfrm>
             <a:prstGeom prst="ellipse">
@@ -6068,7 +6068,7 @@
           </p:nvSpPr>
           <p:spPr>
             <a:xfrm>
-              <a:off x="1917767" y="3412914"/>
+              <a:off x="1768530" y="3136949"/>
               <a:ext cx="62384" cy="62384"/>
             </a:xfrm>
             <a:prstGeom prst="ellipse">
@@ -6094,7 +6094,7 @@
           </p:nvSpPr>
           <p:spPr>
             <a:xfrm>
-              <a:off x="1734332" y="3121575"/>
+              <a:off x="1564450" y="2877876"/>
               <a:ext cx="62384" cy="62384"/>
             </a:xfrm>
             <a:prstGeom prst="ellipse">
@@ -6120,7 +6120,7 @@
           </p:nvSpPr>
           <p:spPr>
             <a:xfrm>
-              <a:off x="1938291" y="3335895"/>
+              <a:off x="1761310" y="3068460"/>
               <a:ext cx="62384" cy="62384"/>
             </a:xfrm>
             <a:prstGeom prst="ellipse">
@@ -6146,7 +6146,7 @@
           </p:nvSpPr>
           <p:spPr>
             <a:xfrm>
-              <a:off x="1787725" y="2165439"/>
+              <a:off x="1604278" y="2027633"/>
               <a:ext cx="62384" cy="62384"/>
             </a:xfrm>
             <a:prstGeom prst="ellipse">
@@ -6172,7 +6172,7 @@
           </p:nvSpPr>
           <p:spPr>
             <a:xfrm>
-              <a:off x="1970912" y="3422514"/>
+              <a:off x="1722740" y="3145486"/>
               <a:ext cx="62384" cy="62384"/>
             </a:xfrm>
             <a:prstGeom prst="ellipse">
@@ -6198,7 +6198,7 @@
           </p:nvSpPr>
           <p:spPr>
             <a:xfrm>
-              <a:off x="1739611" y="3607542"/>
+              <a:off x="1564131" y="3310021"/>
               <a:ext cx="62384" cy="62384"/>
             </a:xfrm>
             <a:prstGeom prst="ellipse">
@@ -6224,7 +6224,7 @@
           </p:nvSpPr>
           <p:spPr>
             <a:xfrm>
-              <a:off x="1996017" y="3170063"/>
+              <a:off x="1743775" y="2920993"/>
               <a:ext cx="62384" cy="62384"/>
             </a:xfrm>
             <a:prstGeom prst="ellipse">
@@ -6250,7 +6250,7 @@
           </p:nvSpPr>
           <p:spPr>
             <a:xfrm>
-              <a:off x="1749062" y="3499733"/>
+              <a:off x="1587906" y="3214152"/>
               <a:ext cx="62384" cy="62384"/>
             </a:xfrm>
             <a:prstGeom prst="ellipse">
@@ -6276,7 +6276,7 @@
           </p:nvSpPr>
           <p:spPr>
             <a:xfrm>
-              <a:off x="1995768" y="3291273"/>
+              <a:off x="1765887" y="3028780"/>
               <a:ext cx="62384" cy="62384"/>
             </a:xfrm>
             <a:prstGeom prst="ellipse">
@@ -6302,7 +6302,7 @@
           </p:nvSpPr>
           <p:spPr>
             <a:xfrm>
-              <a:off x="1703068" y="3091571"/>
+              <a:off x="1615313" y="2851195"/>
               <a:ext cx="62384" cy="62384"/>
             </a:xfrm>
             <a:prstGeom prst="ellipse">
@@ -6328,7 +6328,7 @@
           </p:nvSpPr>
           <p:spPr>
             <a:xfrm>
-              <a:off x="1935671" y="3270473"/>
+              <a:off x="1762336" y="3010283"/>
               <a:ext cx="62384" cy="62384"/>
             </a:xfrm>
             <a:prstGeom prst="ellipse">
@@ -6354,7 +6354,7 @@
           </p:nvSpPr>
           <p:spPr>
             <a:xfrm>
-              <a:off x="1741484" y="3112653"/>
+              <a:off x="1570270" y="2869942"/>
               <a:ext cx="62384" cy="62384"/>
             </a:xfrm>
             <a:prstGeom prst="ellipse">
@@ -6380,7 +6380,7 @@
           </p:nvSpPr>
           <p:spPr>
             <a:xfrm>
-              <a:off x="1997196" y="3073434"/>
+              <a:off x="1780972" y="2835067"/>
               <a:ext cx="62384" cy="62384"/>
             </a:xfrm>
             <a:prstGeom prst="ellipse">
@@ -6406,7 +6406,7 @@
           </p:nvSpPr>
           <p:spPr>
             <a:xfrm>
-              <a:off x="1713364" y="2567397"/>
+              <a:off x="1591455" y="2385074"/>
               <a:ext cx="62384" cy="62384"/>
             </a:xfrm>
             <a:prstGeom prst="ellipse">
@@ -6432,7 +6432,7 @@
           </p:nvSpPr>
           <p:spPr>
             <a:xfrm>
-              <a:off x="1977112" y="2553241"/>
+              <a:off x="1714576" y="2372486"/>
               <a:ext cx="62384" cy="62384"/>
             </a:xfrm>
             <a:prstGeom prst="ellipse">
@@ -6458,7 +6458,7 @@
           </p:nvSpPr>
           <p:spPr>
             <a:xfrm>
-              <a:off x="1733506" y="2475203"/>
+              <a:off x="1599518" y="2303091"/>
               <a:ext cx="62384" cy="62384"/>
             </a:xfrm>
             <a:prstGeom prst="ellipse">
@@ -6484,7 +6484,7 @@
           </p:nvSpPr>
           <p:spPr>
             <a:xfrm>
-              <a:off x="1937107" y="2370782"/>
+              <a:off x="1760706" y="2210234"/>
               <a:ext cx="62384" cy="62384"/>
             </a:xfrm>
             <a:prstGeom prst="ellipse">
@@ -6510,7 +6510,7 @@
           </p:nvSpPr>
           <p:spPr>
             <a:xfrm>
-              <a:off x="1716423" y="3153212"/>
+              <a:off x="1631683" y="2906009"/>
               <a:ext cx="62384" cy="62384"/>
             </a:xfrm>
             <a:prstGeom prst="ellipse">
@@ -6536,7 +6536,7 @@
           </p:nvSpPr>
           <p:spPr>
             <a:xfrm>
-              <a:off x="1906099" y="2853303"/>
+              <a:off x="1730329" y="2639315"/>
               <a:ext cx="62384" cy="62384"/>
             </a:xfrm>
             <a:prstGeom prst="ellipse">
@@ -6562,7 +6562,7 @@
           </p:nvSpPr>
           <p:spPr>
             <a:xfrm>
-              <a:off x="1781537" y="2673277"/>
+              <a:off x="1608834" y="2479227"/>
               <a:ext cx="62384" cy="62384"/>
             </a:xfrm>
             <a:prstGeom prst="ellipse">
@@ -6588,7 +6588,7 @@
           </p:nvSpPr>
           <p:spPr>
             <a:xfrm>
-              <a:off x="1991635" y="2914572"/>
+              <a:off x="1781876" y="2693799"/>
               <a:ext cx="62384" cy="62384"/>
             </a:xfrm>
             <a:prstGeom prst="ellipse">
@@ -6614,7 +6614,7 @@
           </p:nvSpPr>
           <p:spPr>
             <a:xfrm>
-              <a:off x="1727512" y="2484167"/>
+              <a:off x="1591789" y="2311062"/>
               <a:ext cx="62384" cy="62384"/>
             </a:xfrm>
             <a:prstGeom prst="ellipse">
@@ -6640,7 +6640,7 @@
           </p:nvSpPr>
           <p:spPr>
             <a:xfrm>
-              <a:off x="1965119" y="2309664"/>
+              <a:off x="1721641" y="2155885"/>
               <a:ext cx="62384" cy="62384"/>
             </a:xfrm>
             <a:prstGeom prst="ellipse">
@@ -6666,7 +6666,7 @@
           </p:nvSpPr>
           <p:spPr>
             <a:xfrm>
-              <a:off x="1764463" y="3250074"/>
+              <a:off x="1618383" y="2992143"/>
               <a:ext cx="62384" cy="62384"/>
             </a:xfrm>
             <a:prstGeom prst="ellipse">
@@ -6692,7 +6692,7 @@
           </p:nvSpPr>
           <p:spPr>
             <a:xfrm>
-              <a:off x="1942429" y="3355119"/>
+              <a:off x="1728973" y="3085554"/>
               <a:ext cx="62384" cy="62384"/>
             </a:xfrm>
             <a:prstGeom prst="ellipse">
@@ -6718,7 +6718,7 @@
           </p:nvSpPr>
           <p:spPr>
             <a:xfrm>
-              <a:off x="1769323" y="2914123"/>
+              <a:off x="1561842" y="2693399"/>
               <a:ext cx="62384" cy="62384"/>
             </a:xfrm>
             <a:prstGeom prst="ellipse">
@@ -6744,7 +6744,7 @@
           </p:nvSpPr>
           <p:spPr>
             <a:xfrm>
-              <a:off x="1907799" y="3160400"/>
+              <a:off x="1720557" y="2912401"/>
               <a:ext cx="62384" cy="62384"/>
             </a:xfrm>
             <a:prstGeom prst="ellipse">
@@ -6770,7 +6770,7 @@
           </p:nvSpPr>
           <p:spPr>
             <a:xfrm>
-              <a:off x="1702016" y="2408136"/>
+              <a:off x="1625411" y="2243452"/>
               <a:ext cx="62384" cy="62384"/>
             </a:xfrm>
             <a:prstGeom prst="ellipse">
@@ -6796,7 +6796,7 @@
           </p:nvSpPr>
           <p:spPr>
             <a:xfrm>
-              <a:off x="1926108" y="2662111"/>
+              <a:off x="1754549" y="2469299"/>
               <a:ext cx="62384" cy="62384"/>
             </a:xfrm>
             <a:prstGeom prst="ellipse">
@@ -6822,7 +6822,7 @@
           </p:nvSpPr>
           <p:spPr>
             <a:xfrm>
-              <a:off x="1698009" y="3689668"/>
+              <a:off x="1621810" y="3383052"/>
               <a:ext cx="62384" cy="62384"/>
             </a:xfrm>
             <a:prstGeom prst="ellipse">
@@ -6848,7 +6848,7 @@
           </p:nvSpPr>
           <p:spPr>
             <a:xfrm>
-              <a:off x="1976909" y="2941536"/>
+              <a:off x="1730434" y="2717776"/>
               <a:ext cx="62384" cy="62384"/>
             </a:xfrm>
             <a:prstGeom prst="ellipse">
@@ -6874,7 +6874,7 @@
           </p:nvSpPr>
           <p:spPr>
             <a:xfrm>
-              <a:off x="3313661" y="2229783"/>
+              <a:off x="2674888" y="2084851"/>
               <a:ext cx="62384" cy="62384"/>
             </a:xfrm>
             <a:prstGeom prst="ellipse">
@@ -6900,7 +6900,7 @@
           </p:nvSpPr>
           <p:spPr>
             <a:xfrm>
-              <a:off x="3454567" y="2381638"/>
+              <a:off x="2786731" y="2219888"/>
               <a:ext cx="62384" cy="62384"/>
             </a:xfrm>
             <a:prstGeom prst="ellipse">
@@ -6926,7 +6926,7 @@
           </p:nvSpPr>
           <p:spPr>
             <a:xfrm>
-              <a:off x="3229800" y="2623372"/>
+              <a:off x="2610988" y="2434850"/>
               <a:ext cx="62384" cy="62384"/>
             </a:xfrm>
             <a:prstGeom prst="ellipse">
@@ -6952,7 +6952,7 @@
           </p:nvSpPr>
           <p:spPr>
             <a:xfrm>
-              <a:off x="3525924" y="3052233"/>
+              <a:off x="2822324" y="2816213"/>
               <a:ext cx="62384" cy="62384"/>
             </a:xfrm>
             <a:prstGeom prst="ellipse">
@@ -6978,7 +6978,7 @@
           </p:nvSpPr>
           <p:spPr>
             <a:xfrm>
-              <a:off x="3289787" y="3013621"/>
+              <a:off x="2600595" y="2781878"/>
               <a:ext cx="62384" cy="62384"/>
             </a:xfrm>
             <a:prstGeom prst="ellipse">
@@ -7004,7 +7004,7 @@
           </p:nvSpPr>
           <p:spPr>
             <a:xfrm>
-              <a:off x="3457777" y="3070257"/>
+              <a:off x="2776775" y="2832242"/>
               <a:ext cx="62384" cy="62384"/>
             </a:xfrm>
             <a:prstGeom prst="ellipse">
@@ -7030,7 +7030,7 @@
           </p:nvSpPr>
           <p:spPr>
             <a:xfrm>
-              <a:off x="3262310" y="2652890"/>
+              <a:off x="2672232" y="2461099"/>
               <a:ext cx="62384" cy="62384"/>
             </a:xfrm>
             <a:prstGeom prst="ellipse">
@@ -7056,7 +7056,7 @@
           </p:nvSpPr>
           <p:spPr>
             <a:xfrm>
-              <a:off x="3434628" y="2787351"/>
+              <a:off x="2820926" y="2580668"/>
               <a:ext cx="62384" cy="62384"/>
             </a:xfrm>
             <a:prstGeom prst="ellipse">
@@ -7082,7 +7082,7 @@
           </p:nvSpPr>
           <p:spPr>
             <a:xfrm>
-              <a:off x="3274452" y="2558227"/>
+              <a:off x="2642128" y="2376920"/>
               <a:ext cx="62384" cy="62384"/>
             </a:xfrm>
             <a:prstGeom prst="ellipse">
@@ -7108,7 +7108,7 @@
           </p:nvSpPr>
           <p:spPr>
             <a:xfrm>
-              <a:off x="3486604" y="2672194"/>
+              <a:off x="2793327" y="2478265"/>
               <a:ext cx="62384" cy="62384"/>
             </a:xfrm>
             <a:prstGeom prst="ellipse">
@@ -7134,7 +7134,7 @@
           </p:nvSpPr>
           <p:spPr>
             <a:xfrm>
-              <a:off x="3290530" y="2669897"/>
+              <a:off x="2663416" y="2476222"/>
               <a:ext cx="62384" cy="62384"/>
             </a:xfrm>
             <a:prstGeom prst="ellipse">
@@ -7160,7 +7160,7 @@
           </p:nvSpPr>
           <p:spPr>
             <a:xfrm>
-              <a:off x="3521996" y="2863696"/>
+              <a:off x="2759361" y="2648558"/>
               <a:ext cx="62384" cy="62384"/>
             </a:xfrm>
             <a:prstGeom prst="ellipse">
@@ -7186,7 +7186,7 @@
           </p:nvSpPr>
           <p:spPr>
             <a:xfrm>
-              <a:off x="3275098" y="2840964"/>
+              <a:off x="2672994" y="2628343"/>
               <a:ext cx="62384" cy="62384"/>
             </a:xfrm>
             <a:prstGeom prst="ellipse">
@@ -7212,7 +7212,7 @@
           </p:nvSpPr>
           <p:spPr>
             <a:xfrm>
-              <a:off x="3439274" y="2894850"/>
+              <a:off x="2810781" y="2676261"/>
               <a:ext cx="62384" cy="62384"/>
             </a:xfrm>
             <a:prstGeom prst="ellipse">
@@ -7238,7 +7238,7 @@
           </p:nvSpPr>
           <p:spPr>
             <a:xfrm>
-              <a:off x="3242475" y="2563654"/>
+              <a:off x="2645421" y="2381745"/>
               <a:ext cx="62384" cy="62384"/>
             </a:xfrm>
             <a:prstGeom prst="ellipse">
@@ -7264,7 +7264,7 @@
           </p:nvSpPr>
           <p:spPr>
             <a:xfrm>
-              <a:off x="3489606" y="2764258"/>
+              <a:off x="2776888" y="2560132"/>
               <a:ext cx="62384" cy="62384"/>
             </a:xfrm>
             <a:prstGeom prst="ellipse">
@@ -7290,7 +7290,7 @@
           </p:nvSpPr>
           <p:spPr>
             <a:xfrm>
-              <a:off x="3262038" y="3233566"/>
+              <a:off x="2657796" y="2977464"/>
               <a:ext cx="62384" cy="62384"/>
             </a:xfrm>
             <a:prstGeom prst="ellipse">
@@ -7316,7 +7316,7 @@
           </p:nvSpPr>
           <p:spPr>
             <a:xfrm>
-              <a:off x="3461291" y="3515655"/>
+              <a:off x="2765060" y="3228311"/>
               <a:ext cx="62384" cy="62384"/>
             </a:xfrm>
             <a:prstGeom prst="ellipse">
@@ -7342,7 +7342,7 @@
           </p:nvSpPr>
           <p:spPr>
             <a:xfrm>
-              <a:off x="3307400" y="3002637"/>
+              <a:off x="2638546" y="2772110"/>
               <a:ext cx="62384" cy="62384"/>
             </a:xfrm>
             <a:prstGeom prst="ellipse">
@@ -7368,7 +7368,7 @@
           </p:nvSpPr>
           <p:spPr>
             <a:xfrm>
-              <a:off x="3479822" y="3491606"/>
+              <a:off x="2768250" y="3206926"/>
               <a:ext cx="62384" cy="62384"/>
             </a:xfrm>
             <a:prstGeom prst="ellipse">
@@ -7394,7 +7394,7 @@
           </p:nvSpPr>
           <p:spPr>
             <a:xfrm>
-              <a:off x="3309659" y="2680109"/>
+              <a:off x="2639190" y="2485303"/>
               <a:ext cx="62384" cy="62384"/>
             </a:xfrm>
             <a:prstGeom prst="ellipse">
@@ -7420,7 +7420,7 @@
           </p:nvSpPr>
           <p:spPr>
             <a:xfrm>
-              <a:off x="3439922" y="2890964"/>
+              <a:off x="2791983" y="2672806"/>
               <a:ext cx="62384" cy="62384"/>
             </a:xfrm>
             <a:prstGeom prst="ellipse">
@@ -7446,7 +7446,7 @@
           </p:nvSpPr>
           <p:spPr>
             <a:xfrm>
-              <a:off x="3204766" y="2548450"/>
+              <a:off x="2626772" y="2368226"/>
               <a:ext cx="62384" cy="62384"/>
             </a:xfrm>
             <a:prstGeom prst="ellipse">
@@ -7472,7 +7472,7 @@
           </p:nvSpPr>
           <p:spPr>
             <a:xfrm>
-              <a:off x="3491409" y="3055163"/>
+              <a:off x="2817438" y="2818819"/>
               <a:ext cx="62384" cy="62384"/>
             </a:xfrm>
             <a:prstGeom prst="ellipse">
@@ -7498,7 +7498,7 @@
           </p:nvSpPr>
           <p:spPr>
             <a:xfrm>
-              <a:off x="3229365" y="2689088"/>
+              <a:off x="2637632" y="2493287"/>
               <a:ext cx="62384" cy="62384"/>
             </a:xfrm>
             <a:prstGeom prst="ellipse">
@@ -7524,7 +7524,7 @@
           </p:nvSpPr>
           <p:spPr>
             <a:xfrm>
-              <a:off x="3480644" y="3005934"/>
+              <a:off x="2750877" y="2775042"/>
               <a:ext cx="62384" cy="62384"/>
             </a:xfrm>
             <a:prstGeom prst="ellipse">
@@ -7550,7 +7550,7 @@
           </p:nvSpPr>
           <p:spPr>
             <a:xfrm>
-              <a:off x="3297922" y="3203521"/>
+              <a:off x="2601643" y="2950746"/>
               <a:ext cx="62384" cy="62384"/>
             </a:xfrm>
             <a:prstGeom prst="ellipse">
@@ -7576,7 +7576,7 @@
           </p:nvSpPr>
           <p:spPr>
             <a:xfrm>
-              <a:off x="3513379" y="3398836"/>
+              <a:off x="2775357" y="3124429"/>
               <a:ext cx="62384" cy="62384"/>
             </a:xfrm>
             <a:prstGeom prst="ellipse">
@@ -7602,7 +7602,7 @@
           </p:nvSpPr>
           <p:spPr>
             <a:xfrm>
-              <a:off x="3287882" y="2645160"/>
+              <a:off x="2659138" y="2454225"/>
               <a:ext cx="62384" cy="62384"/>
             </a:xfrm>
             <a:prstGeom prst="ellipse">
@@ -7628,7 +7628,7 @@
           </p:nvSpPr>
           <p:spPr>
             <a:xfrm>
-              <a:off x="3444576" y="3084652"/>
+              <a:off x="2752811" y="2845042"/>
               <a:ext cx="62384" cy="62384"/>
             </a:xfrm>
             <a:prstGeom prst="ellipse">
@@ -7654,7 +7654,7 @@
           </p:nvSpPr>
           <p:spPr>
             <a:xfrm>
-              <a:off x="3229743" y="3398656"/>
+              <a:off x="2669311" y="3124269"/>
               <a:ext cx="62384" cy="62384"/>
             </a:xfrm>
             <a:prstGeom prst="ellipse">
@@ -7680,7 +7680,7 @@
           </p:nvSpPr>
           <p:spPr>
             <a:xfrm>
-              <a:off x="3499150" y="3199346"/>
+              <a:off x="2817609" y="2947033"/>
               <a:ext cx="62384" cy="62384"/>
             </a:xfrm>
             <a:prstGeom prst="ellipse">
@@ -7706,7 +7706,7 @@
           </p:nvSpPr>
           <p:spPr>
             <a:xfrm>
-              <a:off x="3232229" y="2902154"/>
+              <a:off x="2673774" y="2682757"/>
               <a:ext cx="62384" cy="62384"/>
             </a:xfrm>
             <a:prstGeom prst="ellipse">
@@ -7732,7 +7732,7 @@
           </p:nvSpPr>
           <p:spPr>
             <a:xfrm>
-              <a:off x="3518848" y="3012102"/>
+              <a:off x="2783572" y="2780527"/>
               <a:ext cx="62384" cy="62384"/>
             </a:xfrm>
             <a:prstGeom prst="ellipse">
@@ -7758,7 +7758,7 @@
           </p:nvSpPr>
           <p:spPr>
             <a:xfrm>
-              <a:off x="3305519" y="2948204"/>
+              <a:off x="2631945" y="2723706"/>
               <a:ext cx="62384" cy="62384"/>
             </a:xfrm>
             <a:prstGeom prst="ellipse">
@@ -7784,7 +7784,7 @@
           </p:nvSpPr>
           <p:spPr>
             <a:xfrm>
-              <a:off x="3528476" y="3201874"/>
+              <a:off x="2779790" y="2949282"/>
               <a:ext cx="62384" cy="62384"/>
             </a:xfrm>
             <a:prstGeom prst="ellipse">
@@ -7810,7 +7810,7 @@
           </p:nvSpPr>
           <p:spPr>
             <a:xfrm>
-              <a:off x="3293849" y="2619827"/>
+              <a:off x="2651432" y="2431697"/>
               <a:ext cx="62384" cy="62384"/>
             </a:xfrm>
             <a:prstGeom prst="ellipse">
@@ -7836,7 +7836,7 @@
           </p:nvSpPr>
           <p:spPr>
             <a:xfrm>
-              <a:off x="3455445" y="2852916"/>
+              <a:off x="2791357" y="2638972"/>
               <a:ext cx="62384" cy="62384"/>
             </a:xfrm>
             <a:prstGeom prst="ellipse">
@@ -7862,7 +7862,7 @@
           </p:nvSpPr>
           <p:spPr>
             <a:xfrm>
-              <a:off x="3278686" y="2468313"/>
+              <a:off x="2668479" y="2296964"/>
               <a:ext cx="62384" cy="62384"/>
             </a:xfrm>
             <a:prstGeom prst="ellipse">
@@ -7888,7 +7888,7 @@
           </p:nvSpPr>
           <p:spPr>
             <a:xfrm>
-              <a:off x="3459432" y="2819817"/>
+              <a:off x="2752166" y="2609538"/>
               <a:ext cx="62384" cy="62384"/>
             </a:xfrm>
             <a:prstGeom prst="ellipse">
@@ -7914,7 +7914,7 @@
           </p:nvSpPr>
           <p:spPr>
             <a:xfrm>
-              <a:off x="3282298" y="2909780"/>
+              <a:off x="2620995" y="2689538"/>
               <a:ext cx="62384" cy="62384"/>
             </a:xfrm>
             <a:prstGeom prst="ellipse">
@@ -7940,7 +7940,7 @@
           </p:nvSpPr>
           <p:spPr>
             <a:xfrm>
-              <a:off x="3453709" y="3649925"/>
+              <a:off x="2787515" y="3347710"/>
               <a:ext cx="62384" cy="62384"/>
             </a:xfrm>
             <a:prstGeom prst="ellipse">
@@ -7966,7 +7966,7 @@
           </p:nvSpPr>
           <p:spPr>
             <a:xfrm>
-              <a:off x="3234370" y="3320272"/>
+              <a:off x="2661820" y="3054567"/>
               <a:ext cx="62384" cy="62384"/>
             </a:xfrm>
             <a:prstGeom prst="ellipse">
@@ -7992,7 +7992,7 @@
           </p:nvSpPr>
           <p:spPr>
             <a:xfrm>
-              <a:off x="3531244" y="3445686"/>
+              <a:off x="2755922" y="3166091"/>
               <a:ext cx="62384" cy="62384"/>
             </a:xfrm>
             <a:prstGeom prst="ellipse">
@@ -8018,7 +8018,7 @@
           </p:nvSpPr>
           <p:spPr>
             <a:xfrm>
-              <a:off x="3245273" y="2723736"/>
+              <a:off x="2609430" y="2524098"/>
               <a:ext cx="62384" cy="62384"/>
             </a:xfrm>
             <a:prstGeom prst="ellipse">
@@ -8044,7 +8044,7 @@
           </p:nvSpPr>
           <p:spPr>
             <a:xfrm>
-              <a:off x="3468233" y="2699939"/>
+              <a:off x="2797104" y="2502937"/>
               <a:ext cx="62384" cy="62384"/>
             </a:xfrm>
             <a:prstGeom prst="ellipse">
@@ -8070,7 +8070,7 @@
           </p:nvSpPr>
           <p:spPr>
             <a:xfrm>
-              <a:off x="3271526" y="2637084"/>
+              <a:off x="2627807" y="2447043"/>
               <a:ext cx="62384" cy="62384"/>
             </a:xfrm>
             <a:prstGeom prst="ellipse">
@@ -8096,7 +8096,7 @@
           </p:nvSpPr>
           <p:spPr>
             <a:xfrm>
-              <a:off x="3487354" y="3210565"/>
+              <a:off x="2767155" y="2957010"/>
               <a:ext cx="62384" cy="62384"/>
             </a:xfrm>
             <a:prstGeom prst="ellipse">
@@ -8122,7 +8122,7 @@
           </p:nvSpPr>
           <p:spPr>
             <a:xfrm>
-              <a:off x="3312514" y="2683272"/>
+              <a:off x="2671866" y="2488115"/>
               <a:ext cx="62384" cy="62384"/>
             </a:xfrm>
             <a:prstGeom prst="ellipse">
@@ -8148,7 +8148,7 @@
           </p:nvSpPr>
           <p:spPr>
             <a:xfrm>
-              <a:off x="3469657" y="2849963"/>
+              <a:off x="2763509" y="2636345"/>
               <a:ext cx="62384" cy="62384"/>
             </a:xfrm>
             <a:prstGeom prst="ellipse">
@@ -8174,7 +8174,7 @@
           </p:nvSpPr>
           <p:spPr>
             <a:xfrm>
-              <a:off x="3221859" y="3631648"/>
+              <a:off x="2662167" y="3331458"/>
               <a:ext cx="62384" cy="62384"/>
             </a:xfrm>
             <a:prstGeom prst="ellipse">
@@ -8200,7 +8200,7 @@
           </p:nvSpPr>
           <p:spPr>
             <a:xfrm>
-              <a:off x="3500145" y="3457666"/>
+              <a:off x="2778501" y="3176744"/>
               <a:ext cx="62384" cy="62384"/>
             </a:xfrm>
             <a:prstGeom prst="ellipse">
@@ -8226,7 +8226,7 @@
           </p:nvSpPr>
           <p:spPr>
             <a:xfrm>
-              <a:off x="3213114" y="3199248"/>
+              <a:off x="2670353" y="2946947"/>
               <a:ext cx="62384" cy="62384"/>
             </a:xfrm>
             <a:prstGeom prst="ellipse">
@@ -8252,7 +8252,7 @@
           </p:nvSpPr>
           <p:spPr>
             <a:xfrm>
-              <a:off x="3442318" y="3252998"/>
+              <a:off x="2754396" y="2994744"/>
               <a:ext cx="62384" cy="62384"/>
             </a:xfrm>
             <a:prstGeom prst="ellipse">
@@ -8278,7 +8278,7 @@
           </p:nvSpPr>
           <p:spPr>
             <a:xfrm>
-              <a:off x="3208499" y="3314837"/>
+              <a:off x="2601910" y="3049734"/>
               <a:ext cx="62384" cy="62384"/>
             </a:xfrm>
             <a:prstGeom prst="ellipse">
@@ -8304,7 +8304,7 @@
           </p:nvSpPr>
           <p:spPr>
             <a:xfrm>
-              <a:off x="3514161" y="3236976"/>
+              <a:off x="2823279" y="2980496"/>
               <a:ext cx="62384" cy="62384"/>
             </a:xfrm>
             <a:prstGeom prst="ellipse">
@@ -8330,7 +8330,7 @@
           </p:nvSpPr>
           <p:spPr>
             <a:xfrm>
-              <a:off x="3285871" y="3094399"/>
+              <a:off x="2665312" y="2853710"/>
               <a:ext cx="62384" cy="62384"/>
             </a:xfrm>
             <a:prstGeom prst="ellipse">
@@ -8356,7 +8356,7 @@
           </p:nvSpPr>
           <p:spPr>
             <a:xfrm>
-              <a:off x="3480876" y="3337960"/>
+              <a:off x="2798072" y="3070296"/>
               <a:ext cx="62384" cy="62384"/>
             </a:xfrm>
             <a:prstGeom prst="ellipse">
@@ -8382,7 +8382,7 @@
           </p:nvSpPr>
           <p:spPr>
             <a:xfrm>
-              <a:off x="3248294" y="3669582"/>
+              <a:off x="2658344" y="3365191"/>
               <a:ext cx="62384" cy="62384"/>
             </a:xfrm>
             <a:prstGeom prst="ellipse">
@@ -8408,7 +8408,7 @@
           </p:nvSpPr>
           <p:spPr>
             <a:xfrm>
-              <a:off x="3505783" y="3969136"/>
+              <a:off x="2824738" y="3631569"/>
               <a:ext cx="62384" cy="62384"/>
             </a:xfrm>
             <a:prstGeom prst="ellipse">
@@ -8434,7 +8434,7 @@
           </p:nvSpPr>
           <p:spPr>
             <a:xfrm>
-              <a:off x="3281323" y="2635340"/>
+              <a:off x="2645005" y="2445492"/>
               <a:ext cx="62384" cy="62384"/>
             </a:xfrm>
             <a:prstGeom prst="ellipse">
@@ -8460,7 +8460,7 @@
           </p:nvSpPr>
           <p:spPr>
             <a:xfrm>
-              <a:off x="3490843" y="2557731"/>
+              <a:off x="2818979" y="2376479"/>
               <a:ext cx="62384" cy="62384"/>
             </a:xfrm>
             <a:prstGeom prst="ellipse">
@@ -8486,7 +8486,7 @@
           </p:nvSpPr>
           <p:spPr>
             <a:xfrm>
-              <a:off x="3288879" y="3091743"/>
+              <a:off x="2635722" y="2851348"/>
               <a:ext cx="62384" cy="62384"/>
             </a:xfrm>
             <a:prstGeom prst="ellipse">
@@ -8512,7 +8512,7 @@
           </p:nvSpPr>
           <p:spPr>
             <a:xfrm>
-              <a:off x="3436614" y="3224781"/>
+              <a:off x="2796237" y="2969651"/>
               <a:ext cx="62384" cy="62384"/>
             </a:xfrm>
             <a:prstGeom prst="ellipse">
@@ -8538,7 +8538,7 @@
           </p:nvSpPr>
           <p:spPr>
             <a:xfrm>
-              <a:off x="3226021" y="2594599"/>
+              <a:off x="2665979" y="2409264"/>
               <a:ext cx="62384" cy="62384"/>
             </a:xfrm>
             <a:prstGeom prst="ellipse">
@@ -8564,7 +8564,7 @@
           </p:nvSpPr>
           <p:spPr>
             <a:xfrm>
-              <a:off x="3483571" y="2458992"/>
+              <a:off x="2782758" y="2288675"/>
               <a:ext cx="62384" cy="62384"/>
             </a:xfrm>
             <a:prstGeom prst="ellipse">
@@ -8590,7 +8590,7 @@
           </p:nvSpPr>
           <p:spPr>
             <a:xfrm>
-              <a:off x="3241175" y="2866690"/>
+              <a:off x="2672904" y="2651220"/>
               <a:ext cx="62384" cy="62384"/>
             </a:xfrm>
             <a:prstGeom prst="ellipse">
@@ -8616,7 +8616,7 @@
           </p:nvSpPr>
           <p:spPr>
             <a:xfrm>
-              <a:off x="3429254" y="2896642"/>
+              <a:off x="2778184" y="2677855"/>
               <a:ext cx="62384" cy="62384"/>
             </a:xfrm>
             <a:prstGeom prst="ellipse">
@@ -8642,7 +8642,7 @@
           </p:nvSpPr>
           <p:spPr>
             <a:xfrm>
-              <a:off x="3253894" y="2622760"/>
+              <a:off x="2655420" y="2434305"/>
               <a:ext cx="62384" cy="62384"/>
             </a:xfrm>
             <a:prstGeom prst="ellipse">
@@ -8668,7 +8668,7 @@
           </p:nvSpPr>
           <p:spPr>
             <a:xfrm>
-              <a:off x="3512374" y="2744899"/>
+              <a:off x="2823371" y="2542918"/>
               <a:ext cx="62384" cy="62384"/>
             </a:xfrm>
             <a:prstGeom prst="ellipse">
@@ -8694,7 +8694,7 @@
           </p:nvSpPr>
           <p:spPr>
             <a:xfrm>
-              <a:off x="3243637" y="3949368"/>
+              <a:off x="2666761" y="3613989"/>
               <a:ext cx="62384" cy="62384"/>
             </a:xfrm>
             <a:prstGeom prst="ellipse">
@@ -8720,7 +8720,7 @@
           </p:nvSpPr>
           <p:spPr>
             <a:xfrm>
-              <a:off x="3451140" y="3866798"/>
+              <a:off x="2763620" y="3540565"/>
               <a:ext cx="62384" cy="62384"/>
             </a:xfrm>
             <a:prstGeom prst="ellipse">
@@ -8746,7 +8746,7 @@
           </p:nvSpPr>
           <p:spPr>
             <a:xfrm>
-              <a:off x="3285077" y="2659901"/>
+              <a:off x="2672947" y="2467333"/>
               <a:ext cx="62384" cy="62384"/>
             </a:xfrm>
             <a:prstGeom prst="ellipse">
@@ -8772,7 +8772,7 @@
           </p:nvSpPr>
           <p:spPr>
             <a:xfrm>
-              <a:off x="3487150" y="2890658"/>
+              <a:off x="2780826" y="2672533"/>
               <a:ext cx="62384" cy="62384"/>
             </a:xfrm>
             <a:prstGeom prst="ellipse">
@@ -8798,7 +8798,7 @@
           </p:nvSpPr>
           <p:spPr>
             <a:xfrm>
-              <a:off x="3228540" y="2918934"/>
+              <a:off x="2667270" y="2697677"/>
               <a:ext cx="62384" cy="62384"/>
             </a:xfrm>
             <a:prstGeom prst="ellipse">
@@ -8824,7 +8824,7 @@
           </p:nvSpPr>
           <p:spPr>
             <a:xfrm>
-              <a:off x="3446447" y="2877994"/>
+              <a:off x="2800247" y="2661272"/>
               <a:ext cx="62384" cy="62384"/>
             </a:xfrm>
             <a:prstGeom prst="ellipse">
@@ -8850,7 +8850,7 @@
           </p:nvSpPr>
           <p:spPr>
             <a:xfrm>
-              <a:off x="3302502" y="2745291"/>
+              <a:off x="2629326" y="2543266"/>
               <a:ext cx="62384" cy="62384"/>
             </a:xfrm>
             <a:prstGeom prst="ellipse">
@@ -8876,7 +8876,7 @@
           </p:nvSpPr>
           <p:spPr>
             <a:xfrm>
-              <a:off x="3468741" y="3063325"/>
+              <a:off x="2812498" y="2826078"/>
               <a:ext cx="62384" cy="62384"/>
             </a:xfrm>
             <a:prstGeom prst="ellipse">
@@ -8902,7 +8902,7 @@
           </p:nvSpPr>
           <p:spPr>
             <a:xfrm>
-              <a:off x="3232582" y="2385639"/>
+              <a:off x="2635830" y="2223446"/>
               <a:ext cx="62384" cy="62384"/>
             </a:xfrm>
             <a:prstGeom prst="ellipse">
@@ -8928,7 +8928,7 @@
           </p:nvSpPr>
           <p:spPr>
             <a:xfrm>
-              <a:off x="3474993" y="2591071"/>
+              <a:off x="2770048" y="2406126"/>
               <a:ext cx="62384" cy="62384"/>
             </a:xfrm>
             <a:prstGeom prst="ellipse">
@@ -8954,7 +8954,7 @@
           </p:nvSpPr>
           <p:spPr>
             <a:xfrm>
-              <a:off x="3260131" y="2615650"/>
+              <a:off x="2602768" y="2427983"/>
               <a:ext cx="62384" cy="62384"/>
             </a:xfrm>
             <a:prstGeom prst="ellipse">
@@ -8980,7 +8980,7 @@
           </p:nvSpPr>
           <p:spPr>
             <a:xfrm>
-              <a:off x="3530586" y="2642732"/>
+              <a:off x="2768979" y="2452066"/>
               <a:ext cx="62384" cy="62384"/>
             </a:xfrm>
             <a:prstGeom prst="ellipse">
@@ -9006,7 +9006,7 @@
           </p:nvSpPr>
           <p:spPr>
             <a:xfrm>
-              <a:off x="3207469" y="3084102"/>
+              <a:off x="2656225" y="2844553"/>
               <a:ext cx="62384" cy="62384"/>
             </a:xfrm>
             <a:prstGeom prst="ellipse">
@@ -9032,7 +9032,7 @@
           </p:nvSpPr>
           <p:spPr>
             <a:xfrm>
-              <a:off x="3511608" y="3537573"/>
+              <a:off x="2784092" y="3247802"/>
               <a:ext cx="62384" cy="62384"/>
             </a:xfrm>
             <a:prstGeom prst="ellipse">
@@ -9058,7 +9058,7 @@
           </p:nvSpPr>
           <p:spPr>
             <a:xfrm>
-              <a:off x="3205038" y="3038243"/>
+              <a:off x="2636599" y="2803773"/>
               <a:ext cx="62384" cy="62384"/>
             </a:xfrm>
             <a:prstGeom prst="ellipse">
@@ -9084,7 +9084,7 @@
           </p:nvSpPr>
           <p:spPr>
             <a:xfrm>
-              <a:off x="3504037" y="2916403"/>
+              <a:off x="2771228" y="2695427"/>
               <a:ext cx="62384" cy="62384"/>
             </a:xfrm>
             <a:prstGeom prst="ellipse">
@@ -9110,7 +9110,7 @@
           </p:nvSpPr>
           <p:spPr>
             <a:xfrm>
-              <a:off x="3281090" y="2643301"/>
+              <a:off x="2651086" y="2452571"/>
               <a:ext cx="62384" cy="62384"/>
             </a:xfrm>
             <a:prstGeom prst="ellipse">
@@ -9136,7 +9136,7 @@
           </p:nvSpPr>
           <p:spPr>
             <a:xfrm>
-              <a:off x="3451738" y="2876907"/>
+              <a:off x="2795996" y="2660305"/>
               <a:ext cx="62384" cy="62384"/>
             </a:xfrm>
             <a:prstGeom prst="ellipse">
@@ -9162,7 +9162,7 @@
           </p:nvSpPr>
           <p:spPr>
             <a:xfrm>
-              <a:off x="3210271" y="2992816"/>
+              <a:off x="2608469" y="2763377"/>
               <a:ext cx="62384" cy="62384"/>
             </a:xfrm>
             <a:prstGeom prst="ellipse">
@@ -9188,7 +9188,7 @@
           </p:nvSpPr>
           <p:spPr>
             <a:xfrm>
-              <a:off x="3484441" y="3346354"/>
+              <a:off x="2815906" y="3077760"/>
               <a:ext cx="62384" cy="62384"/>
             </a:xfrm>
             <a:prstGeom prst="ellipse">
@@ -9214,7 +9214,7 @@
           </p:nvSpPr>
           <p:spPr>
             <a:xfrm>
-              <a:off x="3294534" y="2762505"/>
+              <a:off x="2605193" y="2558573"/>
               <a:ext cx="62384" cy="62384"/>
             </a:xfrm>
             <a:prstGeom prst="ellipse">
@@ -9240,7 +9240,7 @@
           </p:nvSpPr>
           <p:spPr>
             <a:xfrm>
-              <a:off x="3475728" y="2953861"/>
+              <a:off x="2774082" y="2728736"/>
               <a:ext cx="62384" cy="62384"/>
             </a:xfrm>
             <a:prstGeom prst="ellipse">
@@ -9266,7 +9266,7 @@
           </p:nvSpPr>
           <p:spPr>
             <a:xfrm>
-              <a:off x="3288334" y="2669556"/>
+              <a:off x="2646173" y="2475919"/>
               <a:ext cx="62384" cy="62384"/>
             </a:xfrm>
             <a:prstGeom prst="ellipse">
@@ -9292,7 +9292,7 @@
           </p:nvSpPr>
           <p:spPr>
             <a:xfrm>
-              <a:off x="3507135" y="2892814"/>
+              <a:off x="2787396" y="2674450"/>
               <a:ext cx="62384" cy="62384"/>
             </a:xfrm>
             <a:prstGeom prst="ellipse">
@@ -9318,7 +9318,7 @@
           </p:nvSpPr>
           <p:spPr>
             <a:xfrm>
-              <a:off x="3233753" y="2265331"/>
+              <a:off x="2611339" y="2116462"/>
               <a:ext cx="62384" cy="62384"/>
             </a:xfrm>
             <a:prstGeom prst="ellipse">
@@ -9344,7 +9344,7 @@
           </p:nvSpPr>
           <p:spPr>
             <a:xfrm>
-              <a:off x="3469293" y="2636262"/>
+              <a:off x="2812708" y="2446312"/>
               <a:ext cx="62384" cy="62384"/>
             </a:xfrm>
             <a:prstGeom prst="ellipse">
@@ -9370,7 +9370,7 @@
           </p:nvSpPr>
           <p:spPr>
             <a:xfrm>
-              <a:off x="3215946" y="2510371"/>
+              <a:off x="2613212" y="2334364"/>
               <a:ext cx="62384" cy="62384"/>
             </a:xfrm>
             <a:prstGeom prst="ellipse">
@@ -9396,7 +9396,7 @@
           </p:nvSpPr>
           <p:spPr>
             <a:xfrm>
-              <a:off x="3505645" y="3104289"/>
+              <a:off x="2822247" y="2862504"/>
               <a:ext cx="62384" cy="62384"/>
             </a:xfrm>
             <a:prstGeom prst="ellipse">
@@ -9422,7 +9422,7 @@
           </p:nvSpPr>
           <p:spPr>
             <a:xfrm>
-              <a:off x="3271196" y="2180153"/>
+              <a:off x="2631966" y="2040718"/>
               <a:ext cx="62384" cy="62384"/>
             </a:xfrm>
             <a:prstGeom prst="ellipse">
@@ -9448,7 +9448,7 @@
           </p:nvSpPr>
           <p:spPr>
             <a:xfrm>
-              <a:off x="3435232" y="2682460"/>
+              <a:off x="2775473" y="2487393"/>
               <a:ext cx="62384" cy="62384"/>
             </a:xfrm>
             <a:prstGeom prst="ellipse">
@@ -9474,7 +9474,7 @@
           </p:nvSpPr>
           <p:spPr>
             <a:xfrm>
-              <a:off x="3302971" y="2558794"/>
+              <a:off x="2667177" y="2377424"/>
               <a:ext cx="62384" cy="62384"/>
             </a:xfrm>
             <a:prstGeom prst="ellipse">
@@ -9500,7 +9500,7 @@
           </p:nvSpPr>
           <p:spPr>
             <a:xfrm>
-              <a:off x="3471481" y="2698203"/>
+              <a:off x="2789339" y="2501393"/>
               <a:ext cx="62384" cy="62384"/>
             </a:xfrm>
             <a:prstGeom prst="ellipse">
@@ -9526,7 +9526,7 @@
           </p:nvSpPr>
           <p:spPr>
             <a:xfrm>
-              <a:off x="3274462" y="2792306"/>
+              <a:off x="2630017" y="2585074"/>
               <a:ext cx="62384" cy="62384"/>
             </a:xfrm>
             <a:prstGeom prst="ellipse">
@@ -9552,7 +9552,7 @@
           </p:nvSpPr>
           <p:spPr>
             <a:xfrm>
-              <a:off x="3439633" y="2587719"/>
+              <a:off x="2780228" y="2403145"/>
               <a:ext cx="62384" cy="62384"/>
             </a:xfrm>
             <a:prstGeom prst="ellipse">
@@ -9578,7 +9578,7 @@
           </p:nvSpPr>
           <p:spPr>
             <a:xfrm>
-              <a:off x="3216255" y="2854416"/>
+              <a:off x="2606922" y="2640306"/>
               <a:ext cx="62384" cy="62384"/>
             </a:xfrm>
             <a:prstGeom prst="ellipse">
@@ -9604,7 +9604,7 @@
           </p:nvSpPr>
           <p:spPr>
             <a:xfrm>
-              <a:off x="3445345" y="3128683"/>
+              <a:off x="2765264" y="2884196"/>
               <a:ext cx="62384" cy="62384"/>
             </a:xfrm>
             <a:prstGeom prst="ellipse">
@@ -9630,7 +9630,7 @@
           </p:nvSpPr>
           <p:spPr>
             <a:xfrm>
-              <a:off x="3205028" y="3164465"/>
+              <a:off x="2608582" y="2916016"/>
               <a:ext cx="62384" cy="62384"/>
             </a:xfrm>
             <a:prstGeom prst="ellipse">
@@ -9656,7 +9656,7 @@
           </p:nvSpPr>
           <p:spPr>
             <a:xfrm>
-              <a:off x="3498178" y="3051346"/>
+              <a:off x="2775384" y="2815425"/>
               <a:ext cx="62384" cy="62384"/>
             </a:xfrm>
             <a:prstGeom prst="ellipse">
@@ -9682,7 +9682,7 @@
           </p:nvSpPr>
           <p:spPr>
             <a:xfrm>
-              <a:off x="3208620" y="3313314"/>
+              <a:off x="2656176" y="3048379"/>
               <a:ext cx="62384" cy="62384"/>
             </a:xfrm>
             <a:prstGeom prst="ellipse">
@@ -9708,7 +9708,7 @@
           </p:nvSpPr>
           <p:spPr>
             <a:xfrm>
-              <a:off x="3514801" y="3109951"/>
+              <a:off x="2756542" y="2867539"/>
               <a:ext cx="62384" cy="62384"/>
             </a:xfrm>
             <a:prstGeom prst="ellipse">
@@ -9734,7 +9734,7 @@
           </p:nvSpPr>
           <p:spPr>
             <a:xfrm>
-              <a:off x="3248190" y="2608694"/>
+              <a:off x="2626334" y="2421797"/>
               <a:ext cx="62384" cy="62384"/>
             </a:xfrm>
             <a:prstGeom prst="ellipse">
@@ -9760,7 +9760,7 @@
           </p:nvSpPr>
           <p:spPr>
             <a:xfrm>
-              <a:off x="3478311" y="2664042"/>
+              <a:off x="2817755" y="2471015"/>
               <a:ext cx="62384" cy="62384"/>
             </a:xfrm>
             <a:prstGeom prst="ellipse">
@@ -9786,7 +9786,7 @@
           </p:nvSpPr>
           <p:spPr>
             <a:xfrm>
-              <a:off x="3204234" y="3266403"/>
+              <a:off x="2644751" y="3006664"/>
               <a:ext cx="62384" cy="62384"/>
             </a:xfrm>
             <a:prstGeom prst="ellipse">
@@ -9812,7 +9812,7 @@
           </p:nvSpPr>
           <p:spPr>
             <a:xfrm>
-              <a:off x="3518303" y="3081642"/>
+              <a:off x="2803150" y="2842366"/>
               <a:ext cx="62384" cy="62384"/>
             </a:xfrm>
             <a:prstGeom prst="ellipse">
@@ -9838,7 +9838,7 @@
           </p:nvSpPr>
           <p:spPr>
             <a:xfrm>
-              <a:off x="3293990" y="2990362"/>
+              <a:off x="2641664" y="2761195"/>
               <a:ext cx="62384" cy="62384"/>
             </a:xfrm>
             <a:prstGeom prst="ellipse">
@@ -9864,7 +9864,7 @@
           </p:nvSpPr>
           <p:spPr>
             <a:xfrm>
-              <a:off x="3523240" y="3339041"/>
+              <a:off x="2774315" y="3071257"/>
               <a:ext cx="62384" cy="62384"/>
             </a:xfrm>
             <a:prstGeom prst="ellipse">
@@ -9890,7 +9890,7 @@
           </p:nvSpPr>
           <p:spPr>
             <a:xfrm>
-              <a:off x="3291875" y="3056156"/>
+              <a:off x="2632759" y="2819702"/>
               <a:ext cx="62384" cy="62384"/>
             </a:xfrm>
             <a:prstGeom prst="ellipse">
@@ -9916,7 +9916,7 @@
           </p:nvSpPr>
           <p:spPr>
             <a:xfrm>
-              <a:off x="3463083" y="3030296"/>
+              <a:off x="2763153" y="2796706"/>
               <a:ext cx="62384" cy="62384"/>
             </a:xfrm>
             <a:prstGeom prst="ellipse">
@@ -9942,7 +9942,7 @@
           </p:nvSpPr>
           <p:spPr>
             <a:xfrm>
-              <a:off x="3292466" y="3140121"/>
+              <a:off x="2633782" y="2894368"/>
               <a:ext cx="62384" cy="62384"/>
             </a:xfrm>
             <a:prstGeom prst="ellipse">
@@ -9968,7 +9968,7 @@
           </p:nvSpPr>
           <p:spPr>
             <a:xfrm>
-              <a:off x="3513769" y="3479712"/>
+              <a:off x="2787703" y="3196349"/>
               <a:ext cx="62384" cy="62384"/>
             </a:xfrm>
             <a:prstGeom prst="ellipse">
@@ -9994,7 +9994,7 @@
           </p:nvSpPr>
           <p:spPr>
             <a:xfrm>
-              <a:off x="3295964" y="2766918"/>
+              <a:off x="2624474" y="2562498"/>
               <a:ext cx="62384" cy="62384"/>
             </a:xfrm>
             <a:prstGeom prst="ellipse">
@@ -10020,7 +10020,7 @@
           </p:nvSpPr>
           <p:spPr>
             <a:xfrm>
-              <a:off x="3482402" y="2752100"/>
+              <a:off x="2786029" y="2549321"/>
               <a:ext cx="62384" cy="62384"/>
             </a:xfrm>
             <a:prstGeom prst="ellipse">
@@ -10046,7 +10046,7 @@
           </p:nvSpPr>
           <p:spPr>
             <a:xfrm>
-              <a:off x="3271393" y="3063837"/>
+              <a:off x="2665362" y="2826533"/>
               <a:ext cx="62384" cy="62384"/>
             </a:xfrm>
             <a:prstGeom prst="ellipse">
@@ -10072,7 +10072,7 @@
           </p:nvSpPr>
           <p:spPr>
             <a:xfrm>
-              <a:off x="3458461" y="3203650"/>
+              <a:off x="2758441" y="2950861"/>
               <a:ext cx="62384" cy="62384"/>
             </a:xfrm>
             <a:prstGeom prst="ellipse">
@@ -10098,7 +10098,7 @@
           </p:nvSpPr>
           <p:spPr>
             <a:xfrm>
-              <a:off x="3276812" y="2839390"/>
+              <a:off x="2644516" y="2626943"/>
               <a:ext cx="62384" cy="62384"/>
             </a:xfrm>
             <a:prstGeom prst="ellipse">
@@ -10124,7 +10124,7 @@
           </p:nvSpPr>
           <p:spPr>
             <a:xfrm>
-              <a:off x="3434304" y="2859473"/>
+              <a:off x="2774706" y="2644802"/>
               <a:ext cx="62384" cy="62384"/>
             </a:xfrm>
             <a:prstGeom prst="ellipse">
@@ -10150,7 +10150,7 @@
           </p:nvSpPr>
           <p:spPr>
             <a:xfrm>
-              <a:off x="3272878" y="2536729"/>
+              <a:off x="2666413" y="2357803"/>
               <a:ext cx="62384" cy="62384"/>
             </a:xfrm>
             <a:prstGeom prst="ellipse">
@@ -10176,7 +10176,7 @@
           </p:nvSpPr>
           <p:spPr>
             <a:xfrm>
-              <a:off x="3445248" y="2605502"/>
+              <a:off x="2800976" y="2418959"/>
               <a:ext cx="62384" cy="62384"/>
             </a:xfrm>
             <a:prstGeom prst="ellipse">
@@ -10202,7 +10202,7 @@
           </p:nvSpPr>
           <p:spPr>
             <a:xfrm>
-              <a:off x="3291307" y="2895667"/>
+              <a:off x="2620929" y="2676988"/>
               <a:ext cx="62384" cy="62384"/>
             </a:xfrm>
             <a:prstGeom prst="ellipse">
@@ -10228,7 +10228,7 @@
           </p:nvSpPr>
           <p:spPr>
             <a:xfrm>
-              <a:off x="3499758" y="2964527"/>
+              <a:off x="2766510" y="2738221"/>
               <a:ext cx="62384" cy="62384"/>
             </a:xfrm>
             <a:prstGeom prst="ellipse">
@@ -10254,7 +10254,7 @@
           </p:nvSpPr>
           <p:spPr>
             <a:xfrm>
-              <a:off x="3251181" y="3013470"/>
+              <a:off x="2655031" y="2781744"/>
               <a:ext cx="62384" cy="62384"/>
             </a:xfrm>
             <a:prstGeom prst="ellipse">
@@ -10280,7 +10280,7 @@
           </p:nvSpPr>
           <p:spPr>
             <a:xfrm>
-              <a:off x="3523490" y="2944229"/>
+              <a:off x="2767282" y="2720172"/>
               <a:ext cx="62384" cy="62384"/>
             </a:xfrm>
             <a:prstGeom prst="ellipse">
@@ -10306,7 +10306,7 @@
           </p:nvSpPr>
           <p:spPr>
             <a:xfrm>
-              <a:off x="3293024" y="2623999"/>
+              <a:off x="2669552" y="2435407"/>
               <a:ext cx="62384" cy="62384"/>
             </a:xfrm>
             <a:prstGeom prst="ellipse">
@@ -10332,7 +10332,7 @@
           </p:nvSpPr>
           <p:spPr>
             <a:xfrm>
-              <a:off x="3491731" y="3222919"/>
+              <a:off x="2799141" y="2967996"/>
               <a:ext cx="62384" cy="62384"/>
             </a:xfrm>
             <a:prstGeom prst="ellipse">
@@ -10358,7 +10358,7 @@
           </p:nvSpPr>
           <p:spPr>
             <a:xfrm>
-              <a:off x="3224696" y="3014182"/>
+              <a:off x="2673151" y="2782377"/>
               <a:ext cx="62384" cy="62384"/>
             </a:xfrm>
             <a:prstGeom prst="ellipse">
@@ -10384,7 +10384,7 @@
           </p:nvSpPr>
           <p:spPr>
             <a:xfrm>
-              <a:off x="3470466" y="3426306"/>
+              <a:off x="2811042" y="3148857"/>
               <a:ext cx="62384" cy="62384"/>
             </a:xfrm>
             <a:prstGeom prst="ellipse">
@@ -10410,7 +10410,7 @@
           </p:nvSpPr>
           <p:spPr>
             <a:xfrm>
-              <a:off x="3281883" y="2993173"/>
+              <a:off x="2627720" y="2763695"/>
               <a:ext cx="62384" cy="62384"/>
             </a:xfrm>
             <a:prstGeom prst="ellipse">
@@ -10436,7 +10436,7 @@
           </p:nvSpPr>
           <p:spPr>
             <a:xfrm>
-              <a:off x="3456892" y="2797881"/>
+              <a:off x="2777086" y="2590032"/>
               <a:ext cx="62384" cy="62384"/>
             </a:xfrm>
             <a:prstGeom prst="ellipse">
@@ -10462,7 +10462,7 @@
           </p:nvSpPr>
           <p:spPr>
             <a:xfrm>
-              <a:off x="3241115" y="2819599"/>
+              <a:off x="2625698" y="2609345"/>
               <a:ext cx="62384" cy="62384"/>
             </a:xfrm>
             <a:prstGeom prst="ellipse">
@@ -10488,7 +10488,7 @@
           </p:nvSpPr>
           <p:spPr>
             <a:xfrm>
-              <a:off x="3478624" y="3028392"/>
+              <a:off x="2774732" y="2795014"/>
               <a:ext cx="62384" cy="62384"/>
             </a:xfrm>
             <a:prstGeom prst="ellipse">
@@ -10514,7 +10514,7 @@
           </p:nvSpPr>
           <p:spPr>
             <a:xfrm>
-              <a:off x="3210913" y="3412185"/>
+              <a:off x="2624091" y="3136301"/>
               <a:ext cx="62384" cy="62384"/>
             </a:xfrm>
             <a:prstGeom prst="ellipse">
@@ -10540,7 +10540,7 @@
           </p:nvSpPr>
           <p:spPr>
             <a:xfrm>
-              <a:off x="3530790" y="3208023"/>
+              <a:off x="2810885" y="2954749"/>
               <a:ext cx="62384" cy="62384"/>
             </a:xfrm>
             <a:prstGeom prst="ellipse">
@@ -10566,7 +10566,7 @@
           </p:nvSpPr>
           <p:spPr>
             <a:xfrm>
-              <a:off x="3209610" y="2831900"/>
+              <a:off x="2667320" y="2620283"/>
               <a:ext cx="62384" cy="62384"/>
             </a:xfrm>
             <a:prstGeom prst="ellipse">
@@ -10592,7 +10592,7 @@
           </p:nvSpPr>
           <p:spPr>
             <a:xfrm>
-              <a:off x="3495985" y="2725542"/>
+              <a:off x="2778406" y="2525704"/>
               <a:ext cx="62384" cy="62384"/>
             </a:xfrm>
             <a:prstGeom prst="ellipse">
@@ -10618,7 +10618,7 @@
           </p:nvSpPr>
           <p:spPr>
             <a:xfrm>
-              <a:off x="3221613" y="2787044"/>
+              <a:off x="2622311" y="2580395"/>
               <a:ext cx="62384" cy="62384"/>
             </a:xfrm>
             <a:prstGeom prst="ellipse">
@@ -10644,7 +10644,7 @@
           </p:nvSpPr>
           <p:spPr>
             <a:xfrm>
-              <a:off x="3523122" y="2665906"/>
+              <a:off x="2755490" y="2472673"/>
               <a:ext cx="62384" cy="62384"/>
             </a:xfrm>
             <a:prstGeom prst="ellipse">
@@ -10670,7 +10670,7 @@
           </p:nvSpPr>
           <p:spPr>
             <a:xfrm>
-              <a:off x="3304156" y="3368027"/>
+              <a:off x="2612392" y="3097033"/>
               <a:ext cx="62384" cy="62384"/>
             </a:xfrm>
             <a:prstGeom prst="ellipse">
@@ -10696,7 +10696,7 @@
           </p:nvSpPr>
           <p:spPr>
             <a:xfrm>
-              <a:off x="3508284" y="2839115"/>
+              <a:off x="2789769" y="2626699"/>
               <a:ext cx="62384" cy="62384"/>
             </a:xfrm>
             <a:prstGeom prst="ellipse">
@@ -10722,7 +10722,7 @@
           </p:nvSpPr>
           <p:spPr>
             <a:xfrm>
-              <a:off x="3213641" y="3468171"/>
+              <a:off x="2623276" y="3186086"/>
               <a:ext cx="62384" cy="62384"/>
             </a:xfrm>
             <a:prstGeom prst="ellipse">
@@ -10748,7 +10748,7 @@
           </p:nvSpPr>
           <p:spPr>
             <a:xfrm>
-              <a:off x="3494524" y="3383350"/>
+              <a:off x="2766432" y="3110659"/>
               <a:ext cx="62384" cy="62384"/>
             </a:xfrm>
             <a:prstGeom prst="ellipse">
@@ -10774,7 +10774,7 @@
           </p:nvSpPr>
           <p:spPr>
             <a:xfrm>
-              <a:off x="3243627" y="2598692"/>
+              <a:off x="2620240" y="2412903"/>
               <a:ext cx="62384" cy="62384"/>
             </a:xfrm>
             <a:prstGeom prst="ellipse">
@@ -10800,7 +10800,7 @@
           </p:nvSpPr>
           <p:spPr>
             <a:xfrm>
-              <a:off x="3497372" y="2796271"/>
+              <a:off x="2773676" y="2588600"/>
               <a:ext cx="62384" cy="62384"/>
             </a:xfrm>
             <a:prstGeom prst="ellipse">
@@ -10826,7 +10826,7 @@
           </p:nvSpPr>
           <p:spPr>
             <a:xfrm>
-              <a:off x="3280765" y="3111588"/>
+              <a:off x="2634022" y="2868995"/>
               <a:ext cx="62384" cy="62384"/>
             </a:xfrm>
             <a:prstGeom prst="ellipse">
@@ -10852,7 +10852,7 @@
           </p:nvSpPr>
           <p:spPr>
             <a:xfrm>
-              <a:off x="3508037" y="3099591"/>
+              <a:off x="2810936" y="2858326"/>
               <a:ext cx="62384" cy="62384"/>
             </a:xfrm>
             <a:prstGeom prst="ellipse">
@@ -10878,7 +10878,7 @@
           </p:nvSpPr>
           <p:spPr>
             <a:xfrm>
-              <a:off x="3260700" y="2941235"/>
+              <a:off x="2652896" y="2717509"/>
               <a:ext cx="62384" cy="62384"/>
             </a:xfrm>
             <a:prstGeom prst="ellipse">
@@ -10904,7 +10904,7 @@
           </p:nvSpPr>
           <p:spPr>
             <a:xfrm>
-              <a:off x="3439322" y="2969063"/>
+              <a:off x="2786435" y="2742255"/>
               <a:ext cx="62384" cy="62384"/>
             </a:xfrm>
             <a:prstGeom prst="ellipse">
@@ -10930,7 +10930,7 @@
           </p:nvSpPr>
           <p:spPr>
             <a:xfrm>
-              <a:off x="3221602" y="2789199"/>
+              <a:off x="2651815" y="2582312"/>
               <a:ext cx="62384" cy="62384"/>
             </a:xfrm>
             <a:prstGeom prst="ellipse">
@@ -10956,7 +10956,7 @@
           </p:nvSpPr>
           <p:spPr>
             <a:xfrm>
-              <a:off x="3514026" y="3002732"/>
+              <a:off x="2805656" y="2772195"/>
               <a:ext cx="62384" cy="62384"/>
             </a:xfrm>
             <a:prstGeom prst="ellipse">
@@ -10982,7 +10982,7 @@
           </p:nvSpPr>
           <p:spPr>
             <a:xfrm>
-              <a:off x="3306063" y="3036482"/>
+              <a:off x="2614575" y="2802207"/>
               <a:ext cx="62384" cy="62384"/>
             </a:xfrm>
             <a:prstGeom prst="ellipse">
@@ -11008,7 +11008,7 @@
           </p:nvSpPr>
           <p:spPr>
             <a:xfrm>
-              <a:off x="3504939" y="2756467"/>
+              <a:off x="2806221" y="2553204"/>
               <a:ext cx="62384" cy="62384"/>
             </a:xfrm>
             <a:prstGeom prst="ellipse">
@@ -11034,7 +11034,7 @@
           </p:nvSpPr>
           <p:spPr>
             <a:xfrm>
-              <a:off x="3212774" y="3116319"/>
+              <a:off x="2662548" y="2873202"/>
               <a:ext cx="62384" cy="62384"/>
             </a:xfrm>
             <a:prstGeom prst="ellipse">
@@ -11060,7 +11060,7 @@
           </p:nvSpPr>
           <p:spPr>
             <a:xfrm>
-              <a:off x="3532117" y="2867411"/>
+              <a:off x="2766510" y="2651861"/>
               <a:ext cx="62384" cy="62384"/>
             </a:xfrm>
             <a:prstGeom prst="ellipse">
@@ -11086,7 +11086,7 @@
           </p:nvSpPr>
           <p:spPr>
             <a:xfrm>
-              <a:off x="3288707" y="2726630"/>
+              <a:off x="2659820" y="2526671"/>
               <a:ext cx="62384" cy="62384"/>
             </a:xfrm>
             <a:prstGeom prst="ellipse">
@@ -11112,7 +11112,7 @@
           </p:nvSpPr>
           <p:spPr>
             <a:xfrm>
-              <a:off x="3465376" y="2653040"/>
+              <a:off x="2775689" y="2461232"/>
               <a:ext cx="62384" cy="62384"/>
             </a:xfrm>
             <a:prstGeom prst="ellipse">
@@ -11138,7 +11138,7 @@
           </p:nvSpPr>
           <p:spPr>
             <a:xfrm>
-              <a:off x="3237282" y="2402378"/>
+              <a:off x="2657702" y="2238331"/>
               <a:ext cx="62384" cy="62384"/>
             </a:xfrm>
             <a:prstGeom prst="ellipse">
@@ -11164,7 +11164,7 @@
           </p:nvSpPr>
           <p:spPr>
             <a:xfrm>
-              <a:off x="3434688" y="2368017"/>
+              <a:off x="2764875" y="2207776"/>
               <a:ext cx="62384" cy="62384"/>
             </a:xfrm>
             <a:prstGeom prst="ellipse">
@@ -11190,7 +11190,7 @@
           </p:nvSpPr>
           <p:spPr>
             <a:xfrm>
-              <a:off x="3279389" y="2674770"/>
+              <a:off x="2621219" y="2480555"/>
               <a:ext cx="62384" cy="62384"/>
             </a:xfrm>
             <a:prstGeom prst="ellipse">
@@ -11216,7 +11216,7 @@
           </p:nvSpPr>
           <p:spPr>
             <a:xfrm>
-              <a:off x="3473866" y="2598824"/>
+              <a:off x="2765479" y="2413021"/>
               <a:ext cx="62384" cy="62384"/>
             </a:xfrm>
             <a:prstGeom prst="ellipse">
@@ -11242,7 +11242,7 @@
           </p:nvSpPr>
           <p:spPr>
             <a:xfrm>
-              <a:off x="3288198" y="2559680"/>
+              <a:off x="2635999" y="2378212"/>
               <a:ext cx="62384" cy="62384"/>
             </a:xfrm>
             <a:prstGeom prst="ellipse">
@@ -11268,7 +11268,7 @@
           </p:nvSpPr>
           <p:spPr>
             <a:xfrm>
-              <a:off x="3497297" y="2494075"/>
+              <a:off x="2766237" y="2319873"/>
               <a:ext cx="62384" cy="62384"/>
             </a:xfrm>
             <a:prstGeom prst="ellipse">
@@ -11294,7 +11294,7 @@
           </p:nvSpPr>
           <p:spPr>
             <a:xfrm>
-              <a:off x="3275255" y="2715220"/>
+              <a:off x="2669070" y="2516526"/>
               <a:ext cx="62384" cy="62384"/>
             </a:xfrm>
             <a:prstGeom prst="ellipse">
@@ -11320,7 +11320,7 @@
           </p:nvSpPr>
           <p:spPr>
             <a:xfrm>
-              <a:off x="3431940" y="2889101"/>
+              <a:off x="2792850" y="2671149"/>
               <a:ext cx="62384" cy="62384"/>
             </a:xfrm>
             <a:prstGeom prst="ellipse">
@@ -11346,7 +11346,7 @@
           </p:nvSpPr>
           <p:spPr>
             <a:xfrm>
-              <a:off x="3237845" y="3136982"/>
+              <a:off x="2628065" y="2891576"/>
               <a:ext cx="62384" cy="62384"/>
             </a:xfrm>
             <a:prstGeom prst="ellipse">
@@ -11372,7 +11372,7 @@
           </p:nvSpPr>
           <p:spPr>
             <a:xfrm>
-              <a:off x="3430370" y="3095175"/>
+              <a:off x="2762539" y="2854399"/>
               <a:ext cx="62384" cy="62384"/>
             </a:xfrm>
             <a:prstGeom prst="ellipse">
@@ -11398,7 +11398,7 @@
           </p:nvSpPr>
           <p:spPr>
             <a:xfrm>
-              <a:off x="3255664" y="3022960"/>
+              <a:off x="2608164" y="2790183"/>
               <a:ext cx="62384" cy="62384"/>
             </a:xfrm>
             <a:prstGeom prst="ellipse">
@@ -11424,7 +11424,7 @@
           </p:nvSpPr>
           <p:spPr>
             <a:xfrm>
-              <a:off x="3472268" y="2847107"/>
+              <a:off x="2755952" y="2633806"/>
               <a:ext cx="62384" cy="62384"/>
             </a:xfrm>
             <a:prstGeom prst="ellipse">
@@ -11450,7 +11450,7 @@
           </p:nvSpPr>
           <p:spPr>
             <a:xfrm>
-              <a:off x="3280586" y="2882177"/>
+              <a:off x="2605772" y="2664992"/>
               <a:ext cx="62384" cy="62384"/>
             </a:xfrm>
             <a:prstGeom prst="ellipse">
@@ -11476,7 +11476,7 @@
           </p:nvSpPr>
           <p:spPr>
             <a:xfrm>
-              <a:off x="3524795" y="2654103"/>
+              <a:off x="2779489" y="2462177"/>
               <a:ext cx="62384" cy="62384"/>
             </a:xfrm>
             <a:prstGeom prst="ellipse">
@@ -11502,7 +11502,7 @@
           </p:nvSpPr>
           <p:spPr>
             <a:xfrm>
-              <a:off x="3265613" y="2389458"/>
+              <a:off x="2603713" y="2226842"/>
               <a:ext cx="62384" cy="62384"/>
             </a:xfrm>
             <a:prstGeom prst="ellipse">
@@ -11528,7 +11528,7 @@
           </p:nvSpPr>
           <p:spPr>
             <a:xfrm>
-              <a:off x="3453537" y="2440019"/>
+              <a:off x="2762984" y="2271804"/>
               <a:ext cx="62384" cy="62384"/>
             </a:xfrm>
             <a:prstGeom prst="ellipse">
@@ -11554,7 +11554,7 @@
           </p:nvSpPr>
           <p:spPr>
             <a:xfrm>
-              <a:off x="3231220" y="3279720"/>
+              <a:off x="2610613" y="3018506"/>
               <a:ext cx="62384" cy="62384"/>
             </a:xfrm>
             <a:prstGeom prst="ellipse">
@@ -11580,7 +11580,7 @@
           </p:nvSpPr>
           <p:spPr>
             <a:xfrm>
-              <a:off x="3445803" y="2671718"/>
+              <a:off x="2802929" y="2477842"/>
               <a:ext cx="62384" cy="62384"/>
             </a:xfrm>
             <a:prstGeom prst="ellipse">
@@ -11606,7 +11606,7 @@
           </p:nvSpPr>
           <p:spPr>
             <a:xfrm>
-              <a:off x="3224824" y="2724427"/>
+              <a:off x="2623905" y="2524713"/>
               <a:ext cx="62384" cy="62384"/>
             </a:xfrm>
             <a:prstGeom prst="ellipse">
@@ -11632,7 +11632,7 @@
           </p:nvSpPr>
           <p:spPr>
             <a:xfrm>
-              <a:off x="3429938" y="2921194"/>
+              <a:off x="2776470" y="2699687"/>
               <a:ext cx="62384" cy="62384"/>
             </a:xfrm>
             <a:prstGeom prst="ellipse">
@@ -11658,7 +11658,7 @@
           </p:nvSpPr>
           <p:spPr>
             <a:xfrm>
-              <a:off x="3297124" y="2505994"/>
+              <a:off x="2610779" y="2330471"/>
               <a:ext cx="62384" cy="62384"/>
             </a:xfrm>
             <a:prstGeom prst="ellipse">
@@ -11684,7 +11684,7 @@
           </p:nvSpPr>
           <p:spPr>
             <a:xfrm>
-              <a:off x="3445321" y="2568892"/>
+              <a:off x="2772220" y="2386403"/>
               <a:ext cx="62384" cy="62384"/>
             </a:xfrm>
             <a:prstGeom prst="ellipse">
@@ -11710,7 +11710,7 @@
           </p:nvSpPr>
           <p:spPr>
             <a:xfrm>
-              <a:off x="3256100" y="2352777"/>
+              <a:off x="2669094" y="2194223"/>
               <a:ext cx="62384" cy="62384"/>
             </a:xfrm>
             <a:prstGeom prst="ellipse">
@@ -11736,7 +11736,7 @@
           </p:nvSpPr>
           <p:spPr>
             <a:xfrm>
-              <a:off x="3502024" y="2331815"/>
+              <a:off x="2807965" y="2175583"/>
               <a:ext cx="62384" cy="62384"/>
             </a:xfrm>
             <a:prstGeom prst="ellipse">
@@ -11762,7 +11762,7 @@
           </p:nvSpPr>
           <p:spPr>
             <a:xfrm>
-              <a:off x="3271051" y="2296274"/>
+              <a:off x="2654360" y="2143979"/>
               <a:ext cx="62384" cy="62384"/>
             </a:xfrm>
             <a:prstGeom prst="ellipse">
@@ -11788,7 +11788,7 @@
           </p:nvSpPr>
           <p:spPr>
             <a:xfrm>
-              <a:off x="3461047" y="2133865"/>
+              <a:off x="2773260" y="1999557"/>
               <a:ext cx="62384" cy="62384"/>
             </a:xfrm>
             <a:prstGeom prst="ellipse">
@@ -11814,7 +11814,7 @@
           </p:nvSpPr>
           <p:spPr>
             <a:xfrm>
-              <a:off x="3293526" y="1655167"/>
+              <a:off x="2647189" y="1573875"/>
               <a:ext cx="62384" cy="62384"/>
             </a:xfrm>
             <a:prstGeom prst="ellipse">
@@ -11840,7 +11840,7 @@
           </p:nvSpPr>
           <p:spPr>
             <a:xfrm>
-              <a:off x="3513109" y="2514704"/>
+              <a:off x="2770881" y="2338217"/>
               <a:ext cx="62384" cy="62384"/>
             </a:xfrm>
             <a:prstGeom prst="ellipse">
@@ -11866,7 +11866,7 @@
           </p:nvSpPr>
           <p:spPr>
             <a:xfrm>
-              <a:off x="3257722" y="2739360"/>
+              <a:off x="2661560" y="2537992"/>
               <a:ext cx="62384" cy="62384"/>
             </a:xfrm>
             <a:prstGeom prst="ellipse">
@@ -11892,7 +11892,7 @@
           </p:nvSpPr>
           <p:spPr>
             <a:xfrm>
-              <a:off x="3451312" y="2788692"/>
+              <a:off x="2797097" y="2581861"/>
               <a:ext cx="62384" cy="62384"/>
             </a:xfrm>
             <a:prstGeom prst="ellipse">
@@ -11918,7 +11918,7 @@
           </p:nvSpPr>
           <p:spPr>
             <a:xfrm>
-              <a:off x="3313982" y="2447272"/>
+              <a:off x="2672069" y="2278253"/>
               <a:ext cx="62384" cy="62384"/>
             </a:xfrm>
             <a:prstGeom prst="ellipse">
@@ -11944,7 +11944,7 @@
           </p:nvSpPr>
           <p:spPr>
             <a:xfrm>
-              <a:off x="3446833" y="2402811"/>
+              <a:off x="2820344" y="2238716"/>
               <a:ext cx="62384" cy="62384"/>
             </a:xfrm>
             <a:prstGeom prst="ellipse">
@@ -11970,7 +11970,7 @@
           </p:nvSpPr>
           <p:spPr>
             <a:xfrm>
-              <a:off x="4748269" y="3233664"/>
+              <a:off x="3665695" y="2977551"/>
               <a:ext cx="62384" cy="62384"/>
             </a:xfrm>
             <a:prstGeom prst="ellipse">
@@ -11996,7 +11996,7 @@
           </p:nvSpPr>
           <p:spPr>
             <a:xfrm>
-              <a:off x="5026508" y="2969632"/>
+              <a:off x="3841291" y="2742761"/>
               <a:ext cx="62384" cy="62384"/>
             </a:xfrm>
             <a:prstGeom prst="ellipse">
@@ -12022,7 +12022,7 @@
           </p:nvSpPr>
           <p:spPr>
             <a:xfrm>
-              <a:off x="4833176" y="2404341"/>
+              <a:off x="3674693" y="2240077"/>
               <a:ext cx="62384" cy="62384"/>
             </a:xfrm>
             <a:prstGeom prst="ellipse">
@@ -12048,7 +12048,7 @@
           </p:nvSpPr>
           <p:spPr>
             <a:xfrm>
-              <a:off x="4965759" y="2653532"/>
+              <a:off x="3803871" y="2461670"/>
               <a:ext cx="62384" cy="62384"/>
             </a:xfrm>
             <a:prstGeom prst="ellipse">
@@ -12074,7 +12074,7 @@
           </p:nvSpPr>
           <p:spPr>
             <a:xfrm>
-              <a:off x="4816461" y="2453726"/>
+              <a:off x="3690356" y="2283992"/>
               <a:ext cx="62384" cy="62384"/>
             </a:xfrm>
             <a:prstGeom prst="ellipse">
@@ -12100,7 +12100,7 @@
           </p:nvSpPr>
           <p:spPr>
             <a:xfrm>
-              <a:off x="4953669" y="2947824"/>
+              <a:off x="3801792" y="2723369"/>
               <a:ext cx="62384" cy="62384"/>
             </a:xfrm>
             <a:prstGeom prst="ellipse">
@@ -12126,7 +12126,7 @@
           </p:nvSpPr>
           <p:spPr>
             <a:xfrm>
-              <a:off x="4786877" y="2180568"/>
+              <a:off x="3689488" y="2041087"/>
               <a:ext cx="62384" cy="62384"/>
             </a:xfrm>
             <a:prstGeom prst="ellipse">
@@ -12152,7 +12152,7 @@
           </p:nvSpPr>
           <p:spPr>
             <a:xfrm>
-              <a:off x="4984013" y="2435872"/>
+              <a:off x="3799486" y="2268115"/>
               <a:ext cx="62384" cy="62384"/>
             </a:xfrm>
             <a:prstGeom prst="ellipse">
@@ -12178,7 +12178,7 @@
           </p:nvSpPr>
           <p:spPr>
             <a:xfrm>
-              <a:off x="4814659" y="2498272"/>
+              <a:off x="3687902" y="2323605"/>
               <a:ext cx="62384" cy="62384"/>
             </a:xfrm>
             <a:prstGeom prst="ellipse">
@@ -12204,7 +12204,7 @@
           </p:nvSpPr>
           <p:spPr>
             <a:xfrm>
-              <a:off x="5050628" y="2634141"/>
+              <a:off x="3833970" y="2444426"/>
               <a:ext cx="62384" cy="62384"/>
             </a:xfrm>
             <a:prstGeom prst="ellipse">
@@ -12230,7 +12230,7 @@
           </p:nvSpPr>
           <p:spPr>
             <a:xfrm>
-              <a:off x="4810733" y="2666651"/>
+              <a:off x="3649698" y="2473336"/>
               <a:ext cx="62384" cy="62384"/>
             </a:xfrm>
             <a:prstGeom prst="ellipse">
@@ -12256,7 +12256,7 @@
           </p:nvSpPr>
           <p:spPr>
             <a:xfrm>
-              <a:off x="4961426" y="3123428"/>
+              <a:off x="3862548" y="2879524"/>
               <a:ext cx="62384" cy="62384"/>
             </a:xfrm>
             <a:prstGeom prst="ellipse">
@@ -12282,7 +12282,7 @@
           </p:nvSpPr>
           <p:spPr>
             <a:xfrm>
-              <a:off x="4787649" y="2538390"/>
+              <a:off x="3684629" y="2359280"/>
               <a:ext cx="62384" cy="62384"/>
             </a:xfrm>
             <a:prstGeom prst="ellipse">
@@ -12308,7 +12308,7 @@
           </p:nvSpPr>
           <p:spPr>
             <a:xfrm>
-              <a:off x="5036792" y="2602261"/>
+              <a:off x="3823937" y="2416077"/>
               <a:ext cx="62384" cy="62384"/>
             </a:xfrm>
             <a:prstGeom prst="ellipse">
@@ -12334,7 +12334,7 @@
           </p:nvSpPr>
           <p:spPr>
             <a:xfrm>
-              <a:off x="4811985" y="2751484"/>
+              <a:off x="3677669" y="2548773"/>
               <a:ext cx="62384" cy="62384"/>
             </a:xfrm>
             <a:prstGeom prst="ellipse">
@@ -12360,7 +12360,7 @@
           </p:nvSpPr>
           <p:spPr>
             <a:xfrm>
-              <a:off x="5011028" y="2747451"/>
+              <a:off x="3804484" y="2545186"/>
               <a:ext cx="62384" cy="62384"/>
             </a:xfrm>
             <a:prstGeom prst="ellipse">
@@ -12386,7 +12386,7 @@
           </p:nvSpPr>
           <p:spPr>
             <a:xfrm>
-              <a:off x="4772712" y="2832897"/>
+              <a:off x="3703397" y="2621169"/>
               <a:ext cx="62384" cy="62384"/>
             </a:xfrm>
             <a:prstGeom prst="ellipse">
@@ -12412,7 +12412,7 @@
           </p:nvSpPr>
           <p:spPr>
             <a:xfrm>
-              <a:off x="4953314" y="2868222"/>
+              <a:off x="3828191" y="2652582"/>
               <a:ext cx="62384" cy="62384"/>
             </a:xfrm>
             <a:prstGeom prst="ellipse">
@@ -12438,7 +12438,7 @@
           </p:nvSpPr>
           <p:spPr>
             <a:xfrm>
-              <a:off x="4830549" y="2986412"/>
+              <a:off x="3683753" y="2757682"/>
               <a:ext cx="62384" cy="62384"/>
             </a:xfrm>
             <a:prstGeom prst="ellipse">
@@ -12464,7 +12464,7 @@
           </p:nvSpPr>
           <p:spPr>
             <a:xfrm>
-              <a:off x="4985848" y="3165940"/>
+              <a:off x="3859222" y="2917328"/>
               <a:ext cx="62384" cy="62384"/>
             </a:xfrm>
             <a:prstGeom prst="ellipse">
@@ -12490,7 +12490,7 @@
           </p:nvSpPr>
           <p:spPr>
             <a:xfrm>
-              <a:off x="4758047" y="3118756"/>
+              <a:off x="3714224" y="2875369"/>
               <a:ext cx="62384" cy="62384"/>
             </a:xfrm>
             <a:prstGeom prst="ellipse">
@@ -12516,7 +12516,7 @@
           </p:nvSpPr>
           <p:spPr>
             <a:xfrm>
-              <a:off x="4984191" y="3523059"/>
+              <a:off x="3854656" y="3234895"/>
               <a:ext cx="62384" cy="62384"/>
             </a:xfrm>
             <a:prstGeom prst="ellipse">
@@ -12542,7 +12542,7 @@
           </p:nvSpPr>
           <p:spPr>
             <a:xfrm>
-              <a:off x="4778747" y="2450760"/>
+              <a:off x="3670611" y="2281355"/>
               <a:ext cx="62384" cy="62384"/>
             </a:xfrm>
             <a:prstGeom prst="ellipse">
@@ -12568,7 +12568,7 @@
           </p:nvSpPr>
           <p:spPr>
             <a:xfrm>
-              <a:off x="5011820" y="2690845"/>
+              <a:off x="3836991" y="2494850"/>
               <a:ext cx="62384" cy="62384"/>
             </a:xfrm>
             <a:prstGeom prst="ellipse">
@@ -12594,7 +12594,7 @@
           </p:nvSpPr>
           <p:spPr>
             <a:xfrm>
-              <a:off x="4825976" y="2978242"/>
+              <a:off x="3641373" y="2750417"/>
               <a:ext cx="62384" cy="62384"/>
             </a:xfrm>
             <a:prstGeom prst="ellipse">
@@ -12620,7 +12620,7 @@
           </p:nvSpPr>
           <p:spPr>
             <a:xfrm>
-              <a:off x="4951885" y="3179561"/>
+              <a:off x="3825828" y="2929440"/>
               <a:ext cx="62384" cy="62384"/>
             </a:xfrm>
             <a:prstGeom prst="ellipse">
@@ -12646,7 +12646,7 @@
           </p:nvSpPr>
           <p:spPr>
             <a:xfrm>
-              <a:off x="4837723" y="2195539"/>
+              <a:off x="3646677" y="2054400"/>
               <a:ext cx="62384" cy="62384"/>
             </a:xfrm>
             <a:prstGeom prst="ellipse">
@@ -12672,7 +12672,7 @@
           </p:nvSpPr>
           <p:spPr>
             <a:xfrm>
-              <a:off x="5048143" y="2559513"/>
+              <a:off x="3795925" y="2378063"/>
               <a:ext cx="62384" cy="62384"/>
             </a:xfrm>
             <a:prstGeom prst="ellipse">
@@ -12698,7 +12698,7 @@
           </p:nvSpPr>
           <p:spPr>
             <a:xfrm>
-              <a:off x="4766638" y="2449316"/>
+              <a:off x="3646462" y="2280071"/>
               <a:ext cx="62384" cy="62384"/>
             </a:xfrm>
             <a:prstGeom prst="ellipse">
@@ -12724,7 +12724,7 @@
           </p:nvSpPr>
           <p:spPr>
             <a:xfrm>
-              <a:off x="4987730" y="2631758"/>
+              <a:off x="3838130" y="2442307"/>
               <a:ext cx="62384" cy="62384"/>
             </a:xfrm>
             <a:prstGeom prst="ellipse">
@@ -12750,7 +12750,7 @@
           </p:nvSpPr>
           <p:spPr>
             <a:xfrm>
-              <a:off x="4830132" y="2211606"/>
+              <a:off x="3697718" y="2068688"/>
               <a:ext cx="62384" cy="62384"/>
             </a:xfrm>
             <a:prstGeom prst="ellipse">
@@ -12776,7 +12776,7 @@
           </p:nvSpPr>
           <p:spPr>
             <a:xfrm>
-              <a:off x="4987279" y="2531421"/>
+              <a:off x="3805762" y="2353083"/>
               <a:ext cx="62384" cy="62384"/>
             </a:xfrm>
             <a:prstGeom prst="ellipse">
@@ -12802,7 +12802,7 @@
           </p:nvSpPr>
           <p:spPr>
             <a:xfrm>
-              <a:off x="4753319" y="3685922"/>
+              <a:off x="3683714" y="3379721"/>
               <a:ext cx="62384" cy="62384"/>
             </a:xfrm>
             <a:prstGeom prst="ellipse">
@@ -12828,7 +12828,7 @@
           </p:nvSpPr>
           <p:spPr>
             <a:xfrm>
-              <a:off x="4956152" y="3471734"/>
+              <a:off x="3843974" y="3189255"/>
               <a:ext cx="62384" cy="62384"/>
             </a:xfrm>
             <a:prstGeom prst="ellipse">
@@ -12854,7 +12854,7 @@
           </p:nvSpPr>
           <p:spPr>
             <a:xfrm>
-              <a:off x="4739762" y="3269292"/>
+              <a:off x="3674898" y="3009233"/>
               <a:ext cx="62384" cy="62384"/>
             </a:xfrm>
             <a:prstGeom prst="ellipse">
@@ -12880,7 +12880,7 @@
           </p:nvSpPr>
           <p:spPr>
             <a:xfrm>
-              <a:off x="4985801" y="2952921"/>
+              <a:off x="3800931" y="2727901"/>
               <a:ext cx="62384" cy="62384"/>
             </a:xfrm>
             <a:prstGeom prst="ellipse">
@@ -12906,7 +12906,7 @@
           </p:nvSpPr>
           <p:spPr>
             <a:xfrm>
-              <a:off x="4804669" y="2222123"/>
+              <a:off x="3706344" y="2078040"/>
               <a:ext cx="62384" cy="62384"/>
             </a:xfrm>
             <a:prstGeom prst="ellipse">
@@ -12932,7 +12932,7 @@
           </p:nvSpPr>
           <p:spPr>
             <a:xfrm>
-              <a:off x="5048102" y="2740146"/>
+              <a:off x="3855602" y="2538691"/>
               <a:ext cx="62384" cy="62384"/>
             </a:xfrm>
             <a:prstGeom prst="ellipse">
@@ -12958,7 +12958,7 @@
           </p:nvSpPr>
           <p:spPr>
             <a:xfrm>
-              <a:off x="4764043" y="2881311"/>
+              <a:off x="3697925" y="2664221"/>
               <a:ext cx="62384" cy="62384"/>
             </a:xfrm>
             <a:prstGeom prst="ellipse">
@@ -12984,7 +12984,7 @@
           </p:nvSpPr>
           <p:spPr>
             <a:xfrm>
-              <a:off x="4953166" y="3184687"/>
+              <a:off x="3815729" y="2933998"/>
               <a:ext cx="62384" cy="62384"/>
             </a:xfrm>
             <a:prstGeom prst="ellipse">
@@ -13010,7 +13010,7 @@
           </p:nvSpPr>
           <p:spPr>
             <a:xfrm>
-              <a:off x="4813453" y="2526647"/>
+              <a:off x="3674570" y="2348837"/>
               <a:ext cx="62384" cy="62384"/>
             </a:xfrm>
             <a:prstGeom prst="ellipse">
@@ -13036,7 +13036,7 @@
           </p:nvSpPr>
           <p:spPr>
             <a:xfrm>
-              <a:off x="4955588" y="2707812"/>
+              <a:off x="3861018" y="2509938"/>
               <a:ext cx="62384" cy="62384"/>
             </a:xfrm>
             <a:prstGeom prst="ellipse">
@@ -13062,7 +13062,7 @@
           </p:nvSpPr>
           <p:spPr>
             <a:xfrm>
-              <a:off x="4790350" y="2716405"/>
+              <a:off x="3675189" y="2517579"/>
               <a:ext cx="62384" cy="62384"/>
             </a:xfrm>
             <a:prstGeom prst="ellipse">
@@ -13088,7 +13088,7 @@
           </p:nvSpPr>
           <p:spPr>
             <a:xfrm>
-              <a:off x="4964272" y="2939393"/>
+              <a:off x="3806291" y="2715871"/>
               <a:ext cx="62384" cy="62384"/>
             </a:xfrm>
             <a:prstGeom prst="ellipse">
@@ -13114,7 +13114,7 @@
           </p:nvSpPr>
           <p:spPr>
             <a:xfrm>
-              <a:off x="4791502" y="3523957"/>
+              <a:off x="3670722" y="3235693"/>
               <a:ext cx="62384" cy="62384"/>
             </a:xfrm>
             <a:prstGeom prst="ellipse">
@@ -13140,7 +13140,7 @@
           </p:nvSpPr>
           <p:spPr>
             <a:xfrm>
-              <a:off x="4954090" y="3259231"/>
+              <a:off x="3843127" y="3000286"/>
               <a:ext cx="62384" cy="62384"/>
             </a:xfrm>
             <a:prstGeom prst="ellipse">
@@ -13166,7 +13166,7 @@
           </p:nvSpPr>
           <p:spPr>
             <a:xfrm>
-              <a:off x="4736784" y="2887041"/>
+              <a:off x="3653302" y="2669317"/>
               <a:ext cx="62384" cy="62384"/>
             </a:xfrm>
             <a:prstGeom prst="ellipse">
@@ -13192,7 +13192,7 @@
           </p:nvSpPr>
           <p:spPr>
             <a:xfrm>
-              <a:off x="5000694" y="3087463"/>
+              <a:off x="3833962" y="2847542"/>
               <a:ext cx="62384" cy="62384"/>
             </a:xfrm>
             <a:prstGeom prst="ellipse">
@@ -13218,7 +13218,7 @@
           </p:nvSpPr>
           <p:spPr>
             <a:xfrm>
-              <a:off x="4829275" y="2695092"/>
+              <a:off x="3659438" y="2498627"/>
               <a:ext cx="62384" cy="62384"/>
             </a:xfrm>
             <a:prstGeom prst="ellipse">
@@ -13244,7 +13244,7 @@
           </p:nvSpPr>
           <p:spPr>
             <a:xfrm>
-              <a:off x="5011700" y="3055418"/>
+              <a:off x="3853035" y="2819046"/>
               <a:ext cx="62384" cy="62384"/>
             </a:xfrm>
             <a:prstGeom prst="ellipse">
@@ -13270,7 +13270,7 @@
           </p:nvSpPr>
           <p:spPr>
             <a:xfrm>
-              <a:off x="4802022" y="2784631"/>
+              <a:off x="3687164" y="2578249"/>
               <a:ext cx="62384" cy="62384"/>
             </a:xfrm>
             <a:prstGeom prst="ellipse">
@@ -13296,7 +13296,7 @@
           </p:nvSpPr>
           <p:spPr>
             <a:xfrm>
-              <a:off x="5008783" y="2738658"/>
+              <a:off x="3821950" y="2537367"/>
               <a:ext cx="62384" cy="62384"/>
             </a:xfrm>
             <a:prstGeom prst="ellipse">
@@ -13322,7 +13322,7 @@
           </p:nvSpPr>
           <p:spPr>
             <a:xfrm>
-              <a:off x="4820114" y="3447688"/>
+              <a:off x="3699144" y="3167872"/>
               <a:ext cx="62384" cy="62384"/>
             </a:xfrm>
             <a:prstGeom prst="ellipse">
@@ -13348,7 +13348,7 @@
           </p:nvSpPr>
           <p:spPr>
             <a:xfrm>
-              <a:off x="5020693" y="3926837"/>
+              <a:off x="3861506" y="3593954"/>
               <a:ext cx="62384" cy="62384"/>
             </a:xfrm>
             <a:prstGeom prst="ellipse">
@@ -13374,7 +13374,7 @@
           </p:nvSpPr>
           <p:spPr>
             <a:xfrm>
-              <a:off x="4797900" y="2429900"/>
+              <a:off x="3706810" y="2262805"/>
               <a:ext cx="62384" cy="62384"/>
             </a:xfrm>
             <a:prstGeom prst="ellipse">
@@ -13400,7 +13400,7 @@
           </p:nvSpPr>
           <p:spPr>
             <a:xfrm>
-              <a:off x="4986824" y="2594031"/>
+              <a:off x="3852358" y="2408758"/>
               <a:ext cx="62384" cy="62384"/>
             </a:xfrm>
             <a:prstGeom prst="ellipse">
@@ -13426,7 +13426,7 @@
           </p:nvSpPr>
           <p:spPr>
             <a:xfrm>
-              <a:off x="4835425" y="2554339"/>
+              <a:off x="3687422" y="2373463"/>
               <a:ext cx="62384" cy="62384"/>
             </a:xfrm>
             <a:prstGeom prst="ellipse">
@@ -13452,7 +13452,7 @@
           </p:nvSpPr>
           <p:spPr>
             <a:xfrm>
-              <a:off x="5037878" y="2635586"/>
+              <a:off x="3797580" y="2445711"/>
               <a:ext cx="62384" cy="62384"/>
             </a:xfrm>
             <a:prstGeom prst="ellipse">
@@ -13478,7 +13478,7 @@
           </p:nvSpPr>
           <p:spPr>
             <a:xfrm>
-              <a:off x="4732629" y="2246239"/>
+              <a:off x="3691349" y="2099485"/>
               <a:ext cx="62384" cy="62384"/>
             </a:xfrm>
             <a:prstGeom prst="ellipse">
@@ -13504,7 +13504,7 @@
           </p:nvSpPr>
           <p:spPr>
             <a:xfrm>
-              <a:off x="5056791" y="2490004"/>
+              <a:off x="3842324" y="2316253"/>
               <a:ext cx="62384" cy="62384"/>
             </a:xfrm>
             <a:prstGeom prst="ellipse">
@@ -13530,7 +13530,7 @@
           </p:nvSpPr>
           <p:spPr>
             <a:xfrm>
-              <a:off x="4836077" y="2338001"/>
+              <a:off x="3666506" y="2181084"/>
               <a:ext cx="62384" cy="62384"/>
             </a:xfrm>
             <a:prstGeom prst="ellipse">
@@ -13556,7 +13556,7 @@
           </p:nvSpPr>
           <p:spPr>
             <a:xfrm>
-              <a:off x="5009221" y="2401552"/>
+              <a:off x="3840645" y="2237597"/>
               <a:ext cx="62384" cy="62384"/>
             </a:xfrm>
             <a:prstGeom prst="ellipse">
@@ -13582,7 +13582,7 @@
           </p:nvSpPr>
           <p:spPr>
             <a:xfrm>
-              <a:off x="4755965" y="2291858"/>
+              <a:off x="3707637" y="2140051"/>
               <a:ext cx="62384" cy="62384"/>
             </a:xfrm>
             <a:prstGeom prst="ellipse">
@@ -13608,7 +13608,7 @@
           </p:nvSpPr>
           <p:spPr>
             <a:xfrm>
-              <a:off x="4989920" y="2411830"/>
+              <a:off x="3811211" y="2246736"/>
               <a:ext cx="62384" cy="62384"/>
             </a:xfrm>
             <a:prstGeom prst="ellipse">
@@ -13634,7 +13634,7 @@
           </p:nvSpPr>
           <p:spPr>
             <a:xfrm>
-              <a:off x="4768834" y="2788493"/>
+              <a:off x="3708983" y="2581683"/>
               <a:ext cx="62384" cy="62384"/>
             </a:xfrm>
             <a:prstGeom prst="ellipse">
@@ -13660,7 +13660,7 @@
           </p:nvSpPr>
           <p:spPr>
             <a:xfrm>
-              <a:off x="5012791" y="2627591"/>
+              <a:off x="3805727" y="2438602"/>
               <a:ext cx="62384" cy="62384"/>
             </a:xfrm>
             <a:prstGeom prst="ellipse">
@@ -13686,7 +13686,7 @@
           </p:nvSpPr>
           <p:spPr>
             <a:xfrm>
-              <a:off x="4793947" y="2527498"/>
+              <a:off x="3713463" y="2349594"/>
               <a:ext cx="62384" cy="62384"/>
             </a:xfrm>
             <a:prstGeom prst="ellipse">
@@ -13712,7 +13712,7 @@
           </p:nvSpPr>
           <p:spPr>
             <a:xfrm>
-              <a:off x="4984035" y="2626911"/>
+              <a:off x="3851887" y="2437996"/>
               <a:ext cx="62384" cy="62384"/>
             </a:xfrm>
             <a:prstGeom prst="ellipse">
@@ -13738,7 +13738,7 @@
           </p:nvSpPr>
           <p:spPr>
             <a:xfrm>
-              <a:off x="4810326" y="2093919"/>
+              <a:off x="3679671" y="1964034"/>
               <a:ext cx="62384" cy="62384"/>
             </a:xfrm>
             <a:prstGeom prst="ellipse">
@@ -13764,7 +13764,7 @@
           </p:nvSpPr>
           <p:spPr>
             <a:xfrm>
-              <a:off x="5028008" y="2418372"/>
+              <a:off x="3831180" y="2252554"/>
               <a:ext cx="62384" cy="62384"/>
             </a:xfrm>
             <a:prstGeom prst="ellipse">
@@ -13790,7 +13790,7 @@
           </p:nvSpPr>
           <p:spPr>
             <a:xfrm>
-              <a:off x="4789374" y="2283022"/>
+              <a:off x="3713232" y="2132194"/>
               <a:ext cx="62384" cy="62384"/>
             </a:xfrm>
             <a:prstGeom prst="ellipse">
@@ -13816,7 +13816,7 @@
           </p:nvSpPr>
           <p:spPr>
             <a:xfrm>
-              <a:off x="4957342" y="2592193"/>
+              <a:off x="3799178" y="2407124"/>
               <a:ext cx="62384" cy="62384"/>
             </a:xfrm>
             <a:prstGeom prst="ellipse">
@@ -13842,7 +13842,7 @@
           </p:nvSpPr>
           <p:spPr>
             <a:xfrm>
-              <a:off x="4760433" y="2413894"/>
+              <a:off x="3706376" y="2248572"/>
               <a:ext cx="62384" cy="62384"/>
             </a:xfrm>
             <a:prstGeom prst="ellipse">
@@ -13868,7 +13868,7 @@
           </p:nvSpPr>
           <p:spPr>
             <a:xfrm>
-              <a:off x="5051273" y="2447114"/>
+              <a:off x="3805518" y="2278113"/>
               <a:ext cx="62384" cy="62384"/>
             </a:xfrm>
             <a:prstGeom prst="ellipse">
@@ -13894,7 +13894,7 @@
           </p:nvSpPr>
           <p:spPr>
             <a:xfrm>
-              <a:off x="4769389" y="2463824"/>
+              <a:off x="3654192" y="2292972"/>
               <a:ext cx="62384" cy="62384"/>
             </a:xfrm>
             <a:prstGeom prst="ellipse">
@@ -13920,7 +13920,7 @@
           </p:nvSpPr>
           <p:spPr>
             <a:xfrm>
-              <a:off x="4993582" y="2650381"/>
+              <a:off x="3821739" y="2458867"/>
               <a:ext cx="62384" cy="62384"/>
             </a:xfrm>
             <a:prstGeom prst="ellipse">
@@ -13946,7 +13946,7 @@
           </p:nvSpPr>
           <p:spPr>
             <a:xfrm>
-              <a:off x="4785088" y="2151314"/>
+              <a:off x="3639581" y="2015073"/>
               <a:ext cx="62384" cy="62384"/>
             </a:xfrm>
             <a:prstGeom prst="ellipse">
@@ -13972,7 +13972,7 @@
           </p:nvSpPr>
           <p:spPr>
             <a:xfrm>
-              <a:off x="4982829" y="2305891"/>
+              <a:off x="3855109" y="2152530"/>
               <a:ext cx="62384" cy="62384"/>
             </a:xfrm>
             <a:prstGeom prst="ellipse">
@@ -13998,7 +13998,7 @@
           </p:nvSpPr>
           <p:spPr>
             <a:xfrm>
-              <a:off x="4774948" y="2194599"/>
+              <a:off x="3703507" y="2053564"/>
               <a:ext cx="62384" cy="62384"/>
             </a:xfrm>
             <a:prstGeom prst="ellipse">
@@ -14024,7 +14024,7 @@
           </p:nvSpPr>
           <p:spPr>
             <a:xfrm>
-              <a:off x="5007289" y="2151696"/>
+              <a:off x="3853222" y="2015413"/>
               <a:ext cx="62384" cy="62384"/>
             </a:xfrm>
             <a:prstGeom prst="ellipse">
@@ -14050,7 +14050,7 @@
           </p:nvSpPr>
           <p:spPr>
             <a:xfrm>
-              <a:off x="4804541" y="2464098"/>
+              <a:off x="3660112" y="2293216"/>
               <a:ext cx="62384" cy="62384"/>
             </a:xfrm>
             <a:prstGeom prst="ellipse">
@@ -14076,7 +14076,7 @@
           </p:nvSpPr>
           <p:spPr>
             <a:xfrm>
-              <a:off x="5013486" y="2497298"/>
+              <a:off x="3795292" y="2322739"/>
               <a:ext cx="62384" cy="62384"/>
             </a:xfrm>
             <a:prstGeom prst="ellipse">
@@ -14102,7 +14102,7 @@
           </p:nvSpPr>
           <p:spPr>
             <a:xfrm>
-              <a:off x="4782741" y="2008521"/>
+              <a:off x="3701771" y="1888094"/>
               <a:ext cx="62384" cy="62384"/>
             </a:xfrm>
             <a:prstGeom prst="ellipse">
@@ -14128,7 +14128,7 @@
           </p:nvSpPr>
           <p:spPr>
             <a:xfrm>
-              <a:off x="5029023" y="2721742"/>
+              <a:off x="3794169" y="2522325"/>
               <a:ext cx="62384" cy="62384"/>
             </a:xfrm>
             <a:prstGeom prst="ellipse">
@@ -14154,7 +14154,7 @@
           </p:nvSpPr>
           <p:spPr>
             <a:xfrm>
-              <a:off x="4806657" y="2270570"/>
+              <a:off x="3669009" y="2121121"/>
               <a:ext cx="62384" cy="62384"/>
             </a:xfrm>
             <a:prstGeom prst="ellipse">
@@ -14180,7 +14180,7 @@
           </p:nvSpPr>
           <p:spPr>
             <a:xfrm>
-              <a:off x="4965961" y="2557603"/>
+              <a:off x="3845607" y="2376364"/>
               <a:ext cx="62384" cy="62384"/>
             </a:xfrm>
             <a:prstGeom prst="ellipse">
@@ -14206,7 +14206,7 @@
           </p:nvSpPr>
           <p:spPr>
             <a:xfrm>
-              <a:off x="4801392" y="2116928"/>
+              <a:off x="3686973" y="1984495"/>
               <a:ext cx="62384" cy="62384"/>
             </a:xfrm>
             <a:prstGeom prst="ellipse">
@@ -14232,7 +14232,7 @@
           </p:nvSpPr>
           <p:spPr>
             <a:xfrm>
-              <a:off x="5057709" y="2398232"/>
+              <a:off x="3791564" y="2234644"/>
               <a:ext cx="62384" cy="62384"/>
             </a:xfrm>
             <a:prstGeom prst="ellipse">
@@ -14258,7 +14258,7 @@
           </p:nvSpPr>
           <p:spPr>
             <a:xfrm>
-              <a:off x="4798699" y="2350179"/>
+              <a:off x="3679619" y="2191913"/>
               <a:ext cx="62384" cy="62384"/>
             </a:xfrm>
             <a:prstGeom prst="ellipse">
@@ -14284,7 +14284,7 @@
           </p:nvSpPr>
           <p:spPr>
             <a:xfrm>
-              <a:off x="5057166" y="2603104"/>
+              <a:off x="3811136" y="2416827"/>
               <a:ext cx="62384" cy="62384"/>
             </a:xfrm>
             <a:prstGeom prst="ellipse">
@@ -14310,7 +14310,7 @@
           </p:nvSpPr>
           <p:spPr>
             <a:xfrm>
-              <a:off x="4811641" y="1764805"/>
+              <a:off x="3678686" y="1671371"/>
               <a:ext cx="62384" cy="62384"/>
             </a:xfrm>
             <a:prstGeom prst="ellipse">
@@ -14336,7 +14336,7 @@
           </p:nvSpPr>
           <p:spPr>
             <a:xfrm>
-              <a:off x="5038650" y="2356958"/>
+              <a:off x="3809103" y="2197942"/>
               <a:ext cx="62384" cy="62384"/>
             </a:xfrm>
             <a:prstGeom prst="ellipse">
@@ -14362,7 +14362,7 @@
           </p:nvSpPr>
           <p:spPr>
             <a:xfrm>
-              <a:off x="4828027" y="2690366"/>
+              <a:off x="3667130" y="2494424"/>
               <a:ext cx="62384" cy="62384"/>
             </a:xfrm>
             <a:prstGeom prst="ellipse">
@@ -14388,7 +14388,7 @@
           </p:nvSpPr>
           <p:spPr>
             <a:xfrm>
-              <a:off x="5050026" y="2818547"/>
+              <a:off x="3815196" y="2608409"/>
               <a:ext cx="62384" cy="62384"/>
             </a:xfrm>
             <a:prstGeom prst="ellipse">
@@ -14414,7 +14414,7 @@
           </p:nvSpPr>
           <p:spPr>
             <a:xfrm>
-              <a:off x="4826863" y="2348100"/>
+              <a:off x="3713969" y="2190065"/>
               <a:ext cx="62384" cy="62384"/>
             </a:xfrm>
             <a:prstGeom prst="ellipse">
@@ -14440,7 +14440,7 @@
           </p:nvSpPr>
           <p:spPr>
             <a:xfrm>
-              <a:off x="5008017" y="2706893"/>
+              <a:off x="3816629" y="2509120"/>
               <a:ext cx="62384" cy="62384"/>
             </a:xfrm>
             <a:prstGeom prst="ellipse">
@@ -14466,7 +14466,7 @@
           </p:nvSpPr>
           <p:spPr>
             <a:xfrm>
-              <a:off x="4758273" y="2295340"/>
+              <a:off x="3701088" y="2143148"/>
               <a:ext cx="62384" cy="62384"/>
             </a:xfrm>
             <a:prstGeom prst="ellipse">
@@ -14492,7 +14492,7 @@
           </p:nvSpPr>
           <p:spPr>
             <a:xfrm>
-              <a:off x="5038607" y="2767674"/>
+              <a:off x="3858829" y="2563170"/>
               <a:ext cx="62384" cy="62384"/>
             </a:xfrm>
             <a:prstGeom prst="ellipse">
@@ -14518,7 +14518,7 @@
           </p:nvSpPr>
           <p:spPr>
             <a:xfrm>
-              <a:off x="4796455" y="2851861"/>
+              <a:off x="3679322" y="2638033"/>
               <a:ext cx="62384" cy="62384"/>
             </a:xfrm>
             <a:prstGeom prst="ellipse">
@@ -14544,7 +14544,7 @@
           </p:nvSpPr>
           <p:spPr>
             <a:xfrm>
-              <a:off x="5046801" y="2712089"/>
+              <a:off x="3832023" y="2513741"/>
               <a:ext cx="62384" cy="62384"/>
             </a:xfrm>
             <a:prstGeom prst="ellipse">
@@ -14570,7 +14570,7 @@
           </p:nvSpPr>
           <p:spPr>
             <a:xfrm>
-              <a:off x="4812004" y="2382668"/>
+              <a:off x="3676371" y="2220804"/>
               <a:ext cx="62384" cy="62384"/>
             </a:xfrm>
             <a:prstGeom prst="ellipse">
@@ -14596,7 +14596,7 @@
           </p:nvSpPr>
           <p:spPr>
             <a:xfrm>
-              <a:off x="4983952" y="2632739"/>
+              <a:off x="3829818" y="2443179"/>
               <a:ext cx="62384" cy="62384"/>
             </a:xfrm>
             <a:prstGeom prst="ellipse">
@@ -14622,7 +14622,7 @@
           </p:nvSpPr>
           <p:spPr>
             <a:xfrm>
-              <a:off x="4820650" y="2171122"/>
+              <a:off x="3702620" y="2032687"/>
               <a:ext cx="62384" cy="62384"/>
             </a:xfrm>
             <a:prstGeom prst="ellipse">
@@ -14648,7 +14648,7 @@
           </p:nvSpPr>
           <p:spPr>
             <a:xfrm>
-              <a:off x="5057239" y="2563462"/>
+              <a:off x="3822638" y="2381575"/>
               <a:ext cx="62384" cy="62384"/>
             </a:xfrm>
             <a:prstGeom prst="ellipse">
@@ -14674,7 +14674,7 @@
           </p:nvSpPr>
           <p:spPr>
             <a:xfrm>
-              <a:off x="4742520" y="3040544"/>
+              <a:off x="3656603" y="2805819"/>
               <a:ext cx="62384" cy="62384"/>
             </a:xfrm>
             <a:prstGeom prst="ellipse">
@@ -14700,7 +14700,7 @@
           </p:nvSpPr>
           <p:spPr>
             <a:xfrm>
-              <a:off x="5025691" y="2901873"/>
+              <a:off x="3847787" y="2682506"/>
               <a:ext cx="62384" cy="62384"/>
             </a:xfrm>
             <a:prstGeom prst="ellipse">
@@ -14726,7 +14726,7 @@
           </p:nvSpPr>
           <p:spPr>
             <a:xfrm>
-              <a:off x="4741136" y="2755806"/>
+              <a:off x="3703919" y="2552616"/>
               <a:ext cx="62384" cy="62384"/>
             </a:xfrm>
             <a:prstGeom prst="ellipse">
@@ -14752,7 +14752,7 @@
           </p:nvSpPr>
           <p:spPr>
             <a:xfrm>
-              <a:off x="5011762" y="3178249"/>
+              <a:off x="3814956" y="2928273"/>
               <a:ext cx="62384" cy="62384"/>
             </a:xfrm>
             <a:prstGeom prst="ellipse">
@@ -14778,7 +14778,7 @@
           </p:nvSpPr>
           <p:spPr>
             <a:xfrm>
-              <a:off x="4799556" y="2425649"/>
+              <a:off x="3699314" y="2259025"/>
               <a:ext cx="62384" cy="62384"/>
             </a:xfrm>
             <a:prstGeom prst="ellipse">
@@ -14804,7 +14804,7 @@
           </p:nvSpPr>
           <p:spPr>
             <a:xfrm>
-              <a:off x="4970191" y="2559607"/>
+              <a:off x="3816653" y="2378147"/>
               <a:ext cx="62384" cy="62384"/>
             </a:xfrm>
             <a:prstGeom prst="ellipse">
@@ -14830,7 +14830,7 @@
           </p:nvSpPr>
           <p:spPr>
             <a:xfrm>
-              <a:off x="4822413" y="2385155"/>
+              <a:off x="3680522" y="2223016"/>
               <a:ext cx="62384" cy="62384"/>
             </a:xfrm>
             <a:prstGeom prst="ellipse">
@@ -14856,7 +14856,7 @@
           </p:nvSpPr>
           <p:spPr>
             <a:xfrm>
-              <a:off x="5044457" y="2386573"/>
+              <a:off x="3835780" y="2224277"/>
               <a:ext cx="62384" cy="62384"/>
             </a:xfrm>
             <a:prstGeom prst="ellipse">
@@ -14882,7 +14882,7 @@
           </p:nvSpPr>
           <p:spPr>
             <a:xfrm>
-              <a:off x="4760571" y="2338206"/>
+              <a:off x="3703253" y="2181266"/>
               <a:ext cx="62384" cy="62384"/>
             </a:xfrm>
             <a:prstGeom prst="ellipse">
@@ -14908,7 +14908,7 @@
           </p:nvSpPr>
           <p:spPr>
             <a:xfrm>
-              <a:off x="4964007" y="2626022"/>
+              <a:off x="3806867" y="2437206"/>
               <a:ext cx="62384" cy="62384"/>
             </a:xfrm>
             <a:prstGeom prst="ellipse">
@@ -14934,7 +14934,7 @@
           </p:nvSpPr>
           <p:spPr>
             <a:xfrm>
-              <a:off x="4732278" y="2442652"/>
+              <a:off x="3702485" y="2274145"/>
               <a:ext cx="62384" cy="62384"/>
             </a:xfrm>
             <a:prstGeom prst="ellipse">
@@ -14960,7 +14960,7 @@
           </p:nvSpPr>
           <p:spPr>
             <a:xfrm>
-              <a:off x="4975998" y="2686943"/>
+              <a:off x="3802748" y="2491380"/>
               <a:ext cx="62384" cy="62384"/>
             </a:xfrm>
             <a:prstGeom prst="ellipse">
@@ -14986,7 +14986,7 @@
           </p:nvSpPr>
           <p:spPr>
             <a:xfrm>
-              <a:off x="4801003" y="2285857"/>
+              <a:off x="3650058" y="2134715"/>
               <a:ext cx="62384" cy="62384"/>
             </a:xfrm>
             <a:prstGeom prst="ellipse">
@@ -15012,7 +15012,7 @@
           </p:nvSpPr>
           <p:spPr>
             <a:xfrm>
-              <a:off x="5042363" y="3031392"/>
+              <a:off x="3820437" y="2797681"/>
               <a:ext cx="62384" cy="62384"/>
             </a:xfrm>
             <a:prstGeom prst="ellipse">
@@ -15038,7 +15038,7 @@
           </p:nvSpPr>
           <p:spPr>
             <a:xfrm>
-              <a:off x="4784606" y="3460741"/>
+              <a:off x="3659466" y="3179479"/>
               <a:ext cx="62384" cy="62384"/>
             </a:xfrm>
             <a:prstGeom prst="ellipse">
@@ -15064,7 +15064,7 @@
           </p:nvSpPr>
           <p:spPr>
             <a:xfrm>
-              <a:off x="5004603" y="3378600"/>
+              <a:off x="3829071" y="3106435"/>
               <a:ext cx="62384" cy="62384"/>
             </a:xfrm>
             <a:prstGeom prst="ellipse">
@@ -15090,7 +15090,7 @@
           </p:nvSpPr>
           <p:spPr>
             <a:xfrm>
-              <a:off x="4756656" y="2680215"/>
+              <a:off x="3661823" y="2485398"/>
               <a:ext cx="62384" cy="62384"/>
             </a:xfrm>
             <a:prstGeom prst="ellipse">
@@ -15116,7 +15116,7 @@
           </p:nvSpPr>
           <p:spPr>
             <a:xfrm>
-              <a:off x="4998122" y="3051113"/>
+              <a:off x="3862015" y="2815218"/>
               <a:ext cx="62384" cy="62384"/>
             </a:xfrm>
             <a:prstGeom prst="ellipse">
@@ -15142,7 +15142,7 @@
           </p:nvSpPr>
           <p:spPr>
             <a:xfrm>
-              <a:off x="4838704" y="2597435"/>
+              <a:off x="3663232" y="2411785"/>
               <a:ext cx="62384" cy="62384"/>
             </a:xfrm>
             <a:prstGeom prst="ellipse">
@@ -15168,7 +15168,7 @@
           </p:nvSpPr>
           <p:spPr>
             <a:xfrm>
-              <a:off x="4989905" y="2568212"/>
+              <a:off x="3846504" y="2385799"/>
               <a:ext cx="62384" cy="62384"/>
             </a:xfrm>
             <a:prstGeom prst="ellipse">
@@ -15194,7 +15194,7 @@
           </p:nvSpPr>
           <p:spPr>
             <a:xfrm>
-              <a:off x="4806662" y="2585917"/>
+              <a:off x="3684410" y="2401543"/>
               <a:ext cx="62384" cy="62384"/>
             </a:xfrm>
             <a:prstGeom prst="ellipse">
@@ -15220,7 +15220,7 @@
           </p:nvSpPr>
           <p:spPr>
             <a:xfrm>
-              <a:off x="4960190" y="2435068"/>
+              <a:off x="3849164" y="2267401"/>
               <a:ext cx="62384" cy="62384"/>
             </a:xfrm>
             <a:prstGeom prst="ellipse">
@@ -15246,7 +15246,7 @@
           </p:nvSpPr>
           <p:spPr>
             <a:xfrm>
-              <a:off x="4838638" y="3026585"/>
+              <a:off x="3656329" y="2793407"/>
               <a:ext cx="62384" cy="62384"/>
             </a:xfrm>
             <a:prstGeom prst="ellipse">
@@ -15272,7 +15272,7 @@
           </p:nvSpPr>
           <p:spPr>
             <a:xfrm>
-              <a:off x="5047414" y="3001513"/>
+              <a:off x="3811047" y="2771111"/>
               <a:ext cx="62384" cy="62384"/>
             </a:xfrm>
             <a:prstGeom prst="ellipse">
@@ -15298,7 +15298,7 @@
           </p:nvSpPr>
           <p:spPr>
             <a:xfrm>
-              <a:off x="4776661" y="3113528"/>
+              <a:off x="3706196" y="2870721"/>
               <a:ext cx="62384" cy="62384"/>
             </a:xfrm>
             <a:prstGeom prst="ellipse">
@@ -15324,7 +15324,7 @@
           </p:nvSpPr>
           <p:spPr>
             <a:xfrm>
-              <a:off x="5048163" y="3241473"/>
+              <a:off x="3794941" y="2984495"/>
               <a:ext cx="62384" cy="62384"/>
             </a:xfrm>
             <a:prstGeom prst="ellipse">
@@ -15350,7 +15350,7 @@
           </p:nvSpPr>
           <p:spPr>
             <a:xfrm>
-              <a:off x="4739701" y="2559698"/>
+              <a:off x="3682775" y="2378228"/>
               <a:ext cx="62384" cy="62384"/>
             </a:xfrm>
             <a:prstGeom prst="ellipse">
@@ -15376,7 +15376,7 @@
           </p:nvSpPr>
           <p:spPr>
             <a:xfrm>
-              <a:off x="5049155" y="3040744"/>
+              <a:off x="3801970" y="2805997"/>
               <a:ext cx="62384" cy="62384"/>
             </a:xfrm>
             <a:prstGeom prst="ellipse">
@@ -15402,7 +15402,7 @@
           </p:nvSpPr>
           <p:spPr>
             <a:xfrm>
-              <a:off x="4764992" y="2746420"/>
+              <a:off x="3648300" y="2544270"/>
               <a:ext cx="62384" cy="62384"/>
             </a:xfrm>
             <a:prstGeom prst="ellipse">
@@ -15428,7 +15428,7 @@
           </p:nvSpPr>
           <p:spPr>
             <a:xfrm>
-              <a:off x="4984789" y="3131355"/>
+              <a:off x="3808174" y="2886573"/>
               <a:ext cx="62384" cy="62384"/>
             </a:xfrm>
             <a:prstGeom prst="ellipse">
@@ -15454,7 +15454,7 @@
           </p:nvSpPr>
           <p:spPr>
             <a:xfrm>
-              <a:off x="4829249" y="2108462"/>
+              <a:off x="3712844" y="1976967"/>
               <a:ext cx="62384" cy="62384"/>
             </a:xfrm>
             <a:prstGeom prst="ellipse">
@@ -15480,7 +15480,7 @@
           </p:nvSpPr>
           <p:spPr>
             <a:xfrm>
-              <a:off x="5042839" y="2602341"/>
+              <a:off x="3801706" y="2416148"/>
               <a:ext cx="62384" cy="62384"/>
             </a:xfrm>
             <a:prstGeom prst="ellipse">
@@ -15506,7 +15506,7 @@
           </p:nvSpPr>
           <p:spPr>
             <a:xfrm>
-              <a:off x="4762205" y="2326967"/>
+              <a:off x="3680575" y="2171272"/>
               <a:ext cx="62384" cy="62384"/>
             </a:xfrm>
             <a:prstGeom prst="ellipse">
@@ -15532,7 +15532,7 @@
           </p:nvSpPr>
           <p:spPr>
             <a:xfrm>
-              <a:off x="5039122" y="2710671"/>
+              <a:off x="3859989" y="2512480"/>
               <a:ext cx="62384" cy="62384"/>
             </a:xfrm>
             <a:prstGeom prst="ellipse">
@@ -15558,7 +15558,7 @@
           </p:nvSpPr>
           <p:spPr>
             <a:xfrm>
-              <a:off x="4771680" y="2331074"/>
+              <a:off x="3700697" y="2174924"/>
               <a:ext cx="62384" cy="62384"/>
             </a:xfrm>
             <a:prstGeom prst="ellipse">
@@ -15584,7 +15584,7 @@
           </p:nvSpPr>
           <p:spPr>
             <a:xfrm>
-              <a:off x="4990162" y="2947170"/>
+              <a:off x="3810887" y="2722787"/>
               <a:ext cx="62384" cy="62384"/>
             </a:xfrm>
             <a:prstGeom prst="ellipse">
@@ -15610,7 +15610,7 @@
           </p:nvSpPr>
           <p:spPr>
             <a:xfrm>
-              <a:off x="4745759" y="2626820"/>
+              <a:off x="3712141" y="2437916"/>
               <a:ext cx="62384" cy="62384"/>
             </a:xfrm>
             <a:prstGeom prst="ellipse">
@@ -15636,7 +15636,7 @@
           </p:nvSpPr>
           <p:spPr>
             <a:xfrm>
-              <a:off x="5022520" y="3135704"/>
+              <a:off x="3789528" y="2890440"/>
               <a:ext cx="62384" cy="62384"/>
             </a:xfrm>
             <a:prstGeom prst="ellipse">
@@ -15662,7 +15662,7 @@
           </p:nvSpPr>
           <p:spPr>
             <a:xfrm>
-              <a:off x="4766524" y="1985166"/>
+              <a:off x="3654521" y="1867326"/>
               <a:ext cx="62384" cy="62384"/>
             </a:xfrm>
             <a:prstGeom prst="ellipse">
@@ -15688,7 +15688,7 @@
           </p:nvSpPr>
           <p:spPr>
             <a:xfrm>
-              <a:off x="4974839" y="2399457"/>
+              <a:off x="3840068" y="2235734"/>
               <a:ext cx="62384" cy="62384"/>
             </a:xfrm>
             <a:prstGeom prst="ellipse">
@@ -15714,7 +15714,7 @@
           </p:nvSpPr>
           <p:spPr>
             <a:xfrm>
-              <a:off x="4805778" y="2790167"/>
+              <a:off x="3668421" y="2583172"/>
               <a:ext cx="62384" cy="62384"/>
             </a:xfrm>
             <a:prstGeom prst="ellipse">
@@ -15740,7 +15740,7 @@
           </p:nvSpPr>
           <p:spPr>
             <a:xfrm>
-              <a:off x="4960672" y="3389432"/>
+              <a:off x="3847725" y="3116068"/>
               <a:ext cx="62384" cy="62384"/>
             </a:xfrm>
             <a:prstGeom prst="ellipse">
@@ -15766,7 +15766,7 @@
           </p:nvSpPr>
           <p:spPr>
             <a:xfrm>
-              <a:off x="4816340" y="3343058"/>
+              <a:off x="3701439" y="3074829"/>
               <a:ext cx="62384" cy="62384"/>
             </a:xfrm>
             <a:prstGeom prst="ellipse">
@@ -15792,7 +15792,7 @@
           </p:nvSpPr>
           <p:spPr>
             <a:xfrm>
-              <a:off x="4963548" y="3009405"/>
+              <a:off x="3808159" y="2778129"/>
               <a:ext cx="62384" cy="62384"/>
             </a:xfrm>
             <a:prstGeom prst="ellipse">
@@ -15818,7 +15818,7 @@
           </p:nvSpPr>
           <p:spPr>
             <a:xfrm>
-              <a:off x="4753612" y="2402792"/>
+              <a:off x="3701457" y="2238700"/>
               <a:ext cx="62384" cy="62384"/>
             </a:xfrm>
             <a:prstGeom prst="ellipse">
@@ -15844,7 +15844,7 @@
           </p:nvSpPr>
           <p:spPr>
             <a:xfrm>
-              <a:off x="4994511" y="2988524"/>
+              <a:off x="3813094" y="2759561"/>
               <a:ext cx="62384" cy="62384"/>
             </a:xfrm>
             <a:prstGeom prst="ellipse">
@@ -15870,7 +15870,7 @@
           </p:nvSpPr>
           <p:spPr>
             <a:xfrm>
-              <a:off x="4756798" y="2265916"/>
+              <a:off x="3662595" y="2116983"/>
               <a:ext cx="62384" cy="62384"/>
             </a:xfrm>
             <a:prstGeom prst="ellipse">
@@ -15896,7 +15896,7 @@
           </p:nvSpPr>
           <p:spPr>
             <a:xfrm>
-              <a:off x="5043264" y="3034224"/>
+              <a:off x="3859178" y="2800199"/>
               <a:ext cx="62384" cy="62384"/>
             </a:xfrm>
             <a:prstGeom prst="ellipse">
@@ -15922,7 +15922,7 @@
           </p:nvSpPr>
           <p:spPr>
             <a:xfrm>
-              <a:off x="4834712" y="2218971"/>
+              <a:off x="3652611" y="2075237"/>
               <a:ext cx="62384" cy="62384"/>
             </a:xfrm>
             <a:prstGeom prst="ellipse">
@@ -15948,7 +15948,7 @@
           </p:nvSpPr>
           <p:spPr>
             <a:xfrm>
-              <a:off x="5005385" y="2434327"/>
+              <a:off x="3861893" y="2266742"/>
               <a:ext cx="62384" cy="62384"/>
             </a:xfrm>
             <a:prstGeom prst="ellipse">
@@ -15974,7 +15974,7 @@
           </p:nvSpPr>
           <p:spPr>
             <a:xfrm>
-              <a:off x="4809842" y="3399292"/>
+              <a:off x="3680046" y="3124836"/>
               <a:ext cx="62384" cy="62384"/>
             </a:xfrm>
             <a:prstGeom prst="ellipse">
@@ -16000,7 +16000,7 @@
           </p:nvSpPr>
           <p:spPr>
             <a:xfrm>
-              <a:off x="5017204" y="3210485"/>
+              <a:off x="3804854" y="2956939"/>
               <a:ext cx="62384" cy="62384"/>
             </a:xfrm>
             <a:prstGeom prst="ellipse">
@@ -16026,7 +16026,7 @@
           </p:nvSpPr>
           <p:spPr>
             <a:xfrm>
-              <a:off x="4794936" y="3043070"/>
+              <a:off x="3675390" y="2808065"/>
               <a:ext cx="62384" cy="62384"/>
             </a:xfrm>
             <a:prstGeom prst="ellipse">
@@ -16052,7 +16052,7 @@
           </p:nvSpPr>
           <p:spPr>
             <a:xfrm>
-              <a:off x="5042944" y="3478400"/>
+              <a:off x="3798285" y="3195182"/>
               <a:ext cx="62384" cy="62384"/>
             </a:xfrm>
             <a:prstGeom prst="ellipse">
@@ -16078,7 +16078,7 @@
           </p:nvSpPr>
           <p:spPr>
             <a:xfrm>
-              <a:off x="4807375" y="2648333"/>
+              <a:off x="3672404" y="2457047"/>
               <a:ext cx="62384" cy="62384"/>
             </a:xfrm>
             <a:prstGeom prst="ellipse">
@@ -16104,7 +16104,7 @@
           </p:nvSpPr>
           <p:spPr>
             <a:xfrm>
-              <a:off x="5025613" y="2994120"/>
+              <a:off x="3813739" y="2764537"/>
               <a:ext cx="62384" cy="62384"/>
             </a:xfrm>
             <a:prstGeom prst="ellipse">
@@ -16130,7 +16130,7 @@
           </p:nvSpPr>
           <p:spPr>
             <a:xfrm>
-              <a:off x="4832612" y="2113830"/>
+              <a:off x="3662093" y="1981740"/>
               <a:ext cx="62384" cy="62384"/>
             </a:xfrm>
             <a:prstGeom prst="ellipse">
@@ -16156,7 +16156,7 @@
           </p:nvSpPr>
           <p:spPr>
             <a:xfrm>
-              <a:off x="5038965" y="2687108"/>
+              <a:off x="3853185" y="2491527"/>
               <a:ext cx="62384" cy="62384"/>
             </a:xfrm>
             <a:prstGeom prst="ellipse">
@@ -16182,7 +16182,7 @@
           </p:nvSpPr>
           <p:spPr>
             <a:xfrm>
-              <a:off x="4738290" y="1993476"/>
+              <a:off x="3692917" y="1874716"/>
               <a:ext cx="62384" cy="62384"/>
             </a:xfrm>
             <a:prstGeom prst="ellipse">
@@ -16208,7 +16208,7 @@
           </p:nvSpPr>
           <p:spPr>
             <a:xfrm>
-              <a:off x="4975562" y="2267037"/>
+              <a:off x="3806347" y="2117979"/>
               <a:ext cx="62384" cy="62384"/>
             </a:xfrm>
             <a:prstGeom prst="ellipse">
@@ -16234,7 +16234,7 @@
           </p:nvSpPr>
           <p:spPr>
             <a:xfrm>
-              <a:off x="4762385" y="2610767"/>
+              <a:off x="3694644" y="2423641"/>
               <a:ext cx="62384" cy="62384"/>
             </a:xfrm>
             <a:prstGeom prst="ellipse">
@@ -16260,7 +16260,7 @@
           </p:nvSpPr>
           <p:spPr>
             <a:xfrm>
-              <a:off x="4986796" y="3136002"/>
+              <a:off x="3814835" y="2890705"/>
               <a:ext cx="62384" cy="62384"/>
             </a:xfrm>
             <a:prstGeom prst="ellipse">
@@ -16286,7 +16286,7 @@
           </p:nvSpPr>
           <p:spPr>
             <a:xfrm>
-              <a:off x="4835279" y="2718183"/>
+              <a:off x="3646029" y="2519161"/>
               <a:ext cx="62384" cy="62384"/>
             </a:xfrm>
             <a:prstGeom prst="ellipse">
@@ -16312,7 +16312,7 @@
           </p:nvSpPr>
           <p:spPr>
             <a:xfrm>
-              <a:off x="5026792" y="2903506"/>
+              <a:off x="3836123" y="2683958"/>
               <a:ext cx="62384" cy="62384"/>
             </a:xfrm>
             <a:prstGeom prst="ellipse">
@@ -16338,7 +16338,7 @@
           </p:nvSpPr>
           <p:spPr>
             <a:xfrm>
-              <a:off x="4815819" y="2894442"/>
+              <a:off x="3663850" y="2675899"/>
               <a:ext cx="62384" cy="62384"/>
             </a:xfrm>
             <a:prstGeom prst="ellipse">
@@ -16364,7 +16364,7 @@
           </p:nvSpPr>
           <p:spPr>
             <a:xfrm>
-              <a:off x="5056297" y="2962915"/>
+              <a:off x="3802680" y="2736788"/>
               <a:ext cx="62384" cy="62384"/>
             </a:xfrm>
             <a:prstGeom prst="ellipse">
@@ -16390,7 +16390,7 @@
           </p:nvSpPr>
           <p:spPr>
             <a:xfrm>
-              <a:off x="4836425" y="2352266"/>
+              <a:off x="3687725" y="2193769"/>
               <a:ext cx="62384" cy="62384"/>
             </a:xfrm>
             <a:prstGeom prst="ellipse">
@@ -16416,7 +16416,7 @@
           </p:nvSpPr>
           <p:spPr>
             <a:xfrm>
-              <a:off x="5002726" y="2679759"/>
+              <a:off x="3843082" y="2484992"/>
               <a:ext cx="62384" cy="62384"/>
             </a:xfrm>
             <a:prstGeom prst="ellipse">
@@ -16442,7 +16442,7 @@
           </p:nvSpPr>
           <p:spPr>
             <a:xfrm>
-              <a:off x="4746865" y="2809296"/>
+              <a:off x="3662300" y="2600183"/>
               <a:ext cx="62384" cy="62384"/>
             </a:xfrm>
             <a:prstGeom prst="ellipse">
@@ -16468,7 +16468,7 @@
           </p:nvSpPr>
           <p:spPr>
             <a:xfrm>
-              <a:off x="5045404" y="3228745"/>
+              <a:off x="3822392" y="2973177"/>
               <a:ext cx="62384" cy="62384"/>
             </a:xfrm>
             <a:prstGeom prst="ellipse">
@@ -16494,7 +16494,7 @@
           </p:nvSpPr>
           <p:spPr>
             <a:xfrm>
-              <a:off x="4835034" y="2405592"/>
+              <a:off x="3679739" y="2241189"/>
               <a:ext cx="62384" cy="62384"/>
             </a:xfrm>
             <a:prstGeom prst="ellipse">
@@ -16520,7 +16520,7 @@
           </p:nvSpPr>
           <p:spPr>
             <a:xfrm>
-              <a:off x="4993087" y="3094076"/>
+              <a:off x="3802879" y="2853423"/>
               <a:ext cx="62384" cy="62384"/>
             </a:xfrm>
             <a:prstGeom prst="ellipse">
@@ -16546,7 +16546,7 @@
           </p:nvSpPr>
           <p:spPr>
             <a:xfrm>
-              <a:off x="4821623" y="2788382"/>
+              <a:off x="3708725" y="2581585"/>
               <a:ext cx="62384" cy="62384"/>
             </a:xfrm>
             <a:prstGeom prst="ellipse">
@@ -16572,7 +16572,7 @@
           </p:nvSpPr>
           <p:spPr>
             <a:xfrm>
-              <a:off x="5019299" y="2976207"/>
+              <a:off x="3842338" y="2748608"/>
               <a:ext cx="62384" cy="62384"/>
             </a:xfrm>
             <a:prstGeom prst="ellipse">
@@ -16598,7 +16598,7 @@
           </p:nvSpPr>
           <p:spPr>
             <a:xfrm>
-              <a:off x="4788106" y="3057366"/>
+              <a:off x="3695632" y="2820778"/>
               <a:ext cx="62384" cy="62384"/>
             </a:xfrm>
             <a:prstGeom prst="ellipse">
@@ -16624,7 +16624,7 @@
           </p:nvSpPr>
           <p:spPr>
             <a:xfrm>
-              <a:off x="5019969" y="2829047"/>
+              <a:off x="3837385" y="2617746"/>
               <a:ext cx="62384" cy="62384"/>
             </a:xfrm>
             <a:prstGeom prst="ellipse">
@@ -16650,7 +16650,7 @@
           </p:nvSpPr>
           <p:spPr>
             <a:xfrm>
-              <a:off x="4736537" y="2182840"/>
+              <a:off x="3673220" y="2043107"/>
               <a:ext cx="62384" cy="62384"/>
             </a:xfrm>
             <a:prstGeom prst="ellipse">
@@ -16676,7 +16676,7 @@
           </p:nvSpPr>
           <p:spPr>
             <a:xfrm>
-              <a:off x="5000232" y="2798983"/>
+              <a:off x="3790718" y="2591011"/>
               <a:ext cx="62384" cy="62384"/>
             </a:xfrm>
             <a:prstGeom prst="ellipse">
@@ -16702,7 +16702,7 @@
           </p:nvSpPr>
           <p:spPr>
             <a:xfrm>
-              <a:off x="4750811" y="2423975"/>
+              <a:off x="3641333" y="2257537"/>
               <a:ext cx="62384" cy="62384"/>
             </a:xfrm>
             <a:prstGeom prst="ellipse">
@@ -16728,7 +16728,7 @@
           </p:nvSpPr>
           <p:spPr>
             <a:xfrm>
-              <a:off x="5026214" y="2630018"/>
+              <a:off x="3816651" y="2440760"/>
               <a:ext cx="62384" cy="62384"/>
             </a:xfrm>
             <a:prstGeom prst="ellipse">
@@ -16754,7 +16754,7 @@
           </p:nvSpPr>
           <p:spPr>
             <a:xfrm>
-              <a:off x="4739255" y="1752021"/>
+              <a:off x="3655219" y="1660002"/>
               <a:ext cx="62384" cy="62384"/>
             </a:xfrm>
             <a:prstGeom prst="ellipse">
@@ -16780,7 +16780,7 @@
           </p:nvSpPr>
           <p:spPr>
             <a:xfrm>
-              <a:off x="5007735" y="2215195"/>
+              <a:off x="3848498" y="2071879"/>
               <a:ext cx="62384" cy="62384"/>
             </a:xfrm>
             <a:prstGeom prst="ellipse">
@@ -16806,7 +16806,7 @@
           </p:nvSpPr>
           <p:spPr>
             <a:xfrm>
-              <a:off x="4754036" y="2935150"/>
+              <a:off x="3643592" y="2712098"/>
               <a:ext cx="62384" cy="62384"/>
             </a:xfrm>
             <a:prstGeom prst="ellipse">
@@ -16832,7 +16832,7 @@
           </p:nvSpPr>
           <p:spPr>
             <a:xfrm>
-              <a:off x="4993496" y="3172907"/>
+              <a:off x="3803787" y="2923522"/>
               <a:ext cx="62384" cy="62384"/>
             </a:xfrm>
             <a:prstGeom prst="ellipse">
@@ -16858,7 +16858,7 @@
           </p:nvSpPr>
           <p:spPr>
             <a:xfrm>
-              <a:off x="4739855" y="2842084"/>
+              <a:off x="3692342" y="2629339"/>
               <a:ext cx="62384" cy="62384"/>
             </a:xfrm>
             <a:prstGeom prst="ellipse">
@@ -16884,7 +16884,7 @@
           </p:nvSpPr>
           <p:spPr>
             <a:xfrm>
-              <a:off x="5022977" y="2324019"/>
+              <a:off x="3814270" y="2168650"/>
               <a:ext cx="62384" cy="62384"/>
             </a:xfrm>
             <a:prstGeom prst="ellipse">
@@ -16910,7 +16910,7 @@
           </p:nvSpPr>
           <p:spPr>
             <a:xfrm>
-              <a:off x="4766123" y="2790396"/>
+              <a:off x="3649876" y="2583375"/>
               <a:ext cx="62384" cy="62384"/>
             </a:xfrm>
             <a:prstGeom prst="ellipse">
@@ -16936,7 +16936,7 @@
           </p:nvSpPr>
           <p:spPr>
             <a:xfrm>
-              <a:off x="5024779" y="2431568"/>
+              <a:off x="3810226" y="2264289"/>
               <a:ext cx="62384" cy="62384"/>
             </a:xfrm>
             <a:prstGeom prst="ellipse">
@@ -16962,7 +16962,7 @@
           </p:nvSpPr>
           <p:spPr>
             <a:xfrm>
-              <a:off x="4815804" y="2848821"/>
+              <a:off x="3681120" y="2635330"/>
               <a:ext cx="62384" cy="62384"/>
             </a:xfrm>
             <a:prstGeom prst="ellipse">
@@ -16988,7 +16988,7 @@
           </p:nvSpPr>
           <p:spPr>
             <a:xfrm>
-              <a:off x="5004244" y="2722740"/>
+              <a:off x="3860946" y="2523212"/>
               <a:ext cx="62384" cy="62384"/>
             </a:xfrm>
             <a:prstGeom prst="ellipse">
@@ -17014,7 +17014,7 @@
           </p:nvSpPr>
           <p:spPr>
             <a:xfrm>
-              <a:off x="4747112" y="3590480"/>
+              <a:off x="3694973" y="3294849"/>
               <a:ext cx="62384" cy="62384"/>
             </a:xfrm>
             <a:prstGeom prst="ellipse">
@@ -17040,7 +17040,7 @@
           </p:nvSpPr>
           <p:spPr>
             <a:xfrm>
-              <a:off x="5050189" y="3181449"/>
+              <a:off x="3823105" y="2931119"/>
               <a:ext cx="62384" cy="62384"/>
             </a:xfrm>
             <a:prstGeom prst="ellipse">
@@ -17066,7 +17066,7 @@
           </p:nvSpPr>
           <p:spPr>
             <a:xfrm>
-              <a:off x="4731693" y="2788489"/>
+              <a:off x="3710755" y="2581680"/>
               <a:ext cx="62384" cy="62384"/>
             </a:xfrm>
             <a:prstGeom prst="ellipse">
@@ -17092,7 +17092,7 @@
           </p:nvSpPr>
           <p:spPr>
             <a:xfrm>
-              <a:off x="5025840" y="2916191"/>
+              <a:off x="3824019" y="2695238"/>
               <a:ext cx="62384" cy="62384"/>
             </a:xfrm>
             <a:prstGeom prst="ellipse">
@@ -17118,7 +17118,7 @@
           </p:nvSpPr>
           <p:spPr>
             <a:xfrm>
-              <a:off x="4741933" y="2360540"/>
+              <a:off x="3674447" y="2201127"/>
               <a:ext cx="62384" cy="62384"/>
             </a:xfrm>
             <a:prstGeom prst="ellipse">
@@ -17144,7 +17144,7 @@
           </p:nvSpPr>
           <p:spPr>
             <a:xfrm>
-              <a:off x="5045603" y="2570020"/>
+              <a:off x="3821236" y="2387407"/>
               <a:ext cx="62384" cy="62384"/>
             </a:xfrm>
             <a:prstGeom prst="ellipse">
@@ -17170,7 +17170,7 @@
           </p:nvSpPr>
           <p:spPr>
             <a:xfrm>
-              <a:off x="4776439" y="3038748"/>
+              <a:off x="3644894" y="2804222"/>
               <a:ext cx="62384" cy="62384"/>
             </a:xfrm>
             <a:prstGeom prst="ellipse">
@@ -17196,7 +17196,7 @@
           </p:nvSpPr>
           <p:spPr>
             <a:xfrm>
-              <a:off x="5024936" y="3107066"/>
+              <a:off x="3841313" y="2864974"/>
               <a:ext cx="62384" cy="62384"/>
             </a:xfrm>
             <a:prstGeom prst="ellipse">
@@ -17222,7 +17222,7 @@
           </p:nvSpPr>
           <p:spPr>
             <a:xfrm>
-              <a:off x="4811626" y="3733135"/>
+              <a:off x="3646280" y="3421704"/>
               <a:ext cx="62384" cy="62384"/>
             </a:xfrm>
             <a:prstGeom prst="ellipse">
@@ -17248,7 +17248,7 @@
           </p:nvSpPr>
           <p:spPr>
             <a:xfrm>
-              <a:off x="4968325" y="3518168"/>
+              <a:off x="3838868" y="3230545"/>
               <a:ext cx="62384" cy="62384"/>
             </a:xfrm>
             <a:prstGeom prst="ellipse">
@@ -17274,7 +17274,7 @@
           </p:nvSpPr>
           <p:spPr>
             <a:xfrm>
-              <a:off x="4763827" y="3296795"/>
+              <a:off x="3655218" y="3033690"/>
               <a:ext cx="62384" cy="62384"/>
             </a:xfrm>
             <a:prstGeom prst="ellipse">
@@ -17300,7 +17300,7 @@
           </p:nvSpPr>
           <p:spPr>
             <a:xfrm>
-              <a:off x="4985572" y="2916801"/>
+              <a:off x="3801591" y="2695781"/>
               <a:ext cx="62384" cy="62384"/>
             </a:xfrm>
             <a:prstGeom prst="ellipse">
@@ -17326,7 +17326,7 @@
           </p:nvSpPr>
           <p:spPr>
             <a:xfrm>
-              <a:off x="4826678" y="3034413"/>
+              <a:off x="3643801" y="2800367"/>
               <a:ext cx="62384" cy="62384"/>
             </a:xfrm>
             <a:prstGeom prst="ellipse">
@@ -17352,7 +17352,7 @@
           </p:nvSpPr>
           <p:spPr>
             <a:xfrm>
-              <a:off x="4992010" y="2663898"/>
+              <a:off x="3863856" y="2470887"/>
               <a:ext cx="62384" cy="62384"/>
             </a:xfrm>
             <a:prstGeom prst="ellipse">
@@ -17378,7 +17378,7 @@
           </p:nvSpPr>
           <p:spPr>
             <a:xfrm>
-              <a:off x="4772719" y="2876812"/>
+              <a:off x="3707545" y="2660221"/>
               <a:ext cx="62384" cy="62384"/>
             </a:xfrm>
             <a:prstGeom prst="ellipse">
@@ -17404,7 +17404,7 @@
           </p:nvSpPr>
           <p:spPr>
             <a:xfrm>
-              <a:off x="4990152" y="2614123"/>
+              <a:off x="3790799" y="2426625"/>
               <a:ext cx="62384" cy="62384"/>
             </a:xfrm>
             <a:prstGeom prst="ellipse">
@@ -17430,7 +17430,7 @@
           </p:nvSpPr>
           <p:spPr>
             <a:xfrm>
-              <a:off x="4801795" y="2698690"/>
+              <a:off x="3712244" y="2501826"/>
               <a:ext cx="62384" cy="62384"/>
             </a:xfrm>
             <a:prstGeom prst="ellipse">
@@ -17456,7 +17456,7 @@
           </p:nvSpPr>
           <p:spPr>
             <a:xfrm>
-              <a:off x="5049329" y="2938727"/>
+              <a:off x="3855011" y="2715278"/>
               <a:ext cx="62384" cy="62384"/>
             </a:xfrm>
             <a:prstGeom prst="ellipse">
@@ -17482,7 +17482,7 @@
           </p:nvSpPr>
           <p:spPr>
             <a:xfrm>
-              <a:off x="4774402" y="2918997"/>
+              <a:off x="3711273" y="2697734"/>
               <a:ext cx="62384" cy="62384"/>
             </a:xfrm>
             <a:prstGeom prst="ellipse">
@@ -17508,7 +17508,7 @@
           </p:nvSpPr>
           <p:spPr>
             <a:xfrm>
-              <a:off x="4999468" y="2947854"/>
+              <a:off x="3813583" y="2723395"/>
               <a:ext cx="62384" cy="62384"/>
             </a:xfrm>
             <a:prstGeom prst="ellipse">
@@ -17534,7 +17534,7 @@
           </p:nvSpPr>
           <p:spPr>
             <a:xfrm>
-              <a:off x="4732529" y="2873458"/>
+              <a:off x="3655946" y="2657238"/>
               <a:ext cx="62384" cy="62384"/>
             </a:xfrm>
             <a:prstGeom prst="ellipse">
@@ -17560,7 +17560,7 @@
           </p:nvSpPr>
           <p:spPr>
             <a:xfrm>
-              <a:off x="4975765" y="2769833"/>
+              <a:off x="3804458" y="2565090"/>
               <a:ext cx="62384" cy="62384"/>
             </a:xfrm>
             <a:prstGeom prst="ellipse">
@@ -17586,7 +17586,7 @@
           </p:nvSpPr>
           <p:spPr>
             <a:xfrm>
-              <a:off x="4828643" y="2682457"/>
+              <a:off x="3705147" y="2487391"/>
               <a:ext cx="62384" cy="62384"/>
             </a:xfrm>
             <a:prstGeom prst="ellipse">
@@ -17612,7 +17612,7 @@
           </p:nvSpPr>
           <p:spPr>
             <a:xfrm>
-              <a:off x="5002486" y="2529826"/>
+              <a:off x="3810697" y="2351664"/>
               <a:ext cx="62384" cy="62384"/>
             </a:xfrm>
             <a:prstGeom prst="ellipse">
@@ -17638,7 +17638,7 @@
           </p:nvSpPr>
           <p:spPr>
             <a:xfrm>
-              <a:off x="4820819" y="2727448"/>
+              <a:off x="3640158" y="2527400"/>
               <a:ext cx="62384" cy="62384"/>
             </a:xfrm>
             <a:prstGeom prst="ellipse">
@@ -17664,7 +17664,7 @@
           </p:nvSpPr>
           <p:spPr>
             <a:xfrm>
-              <a:off x="4977292" y="2711059"/>
+              <a:off x="3841475" y="2512826"/>
               <a:ext cx="62384" cy="62384"/>
             </a:xfrm>
             <a:prstGeom prst="ellipse">
@@ -17690,7 +17690,7 @@
           </p:nvSpPr>
           <p:spPr>
             <a:xfrm>
-              <a:off x="4816267" y="2984870"/>
+              <a:off x="3649301" y="2756311"/>
               <a:ext cx="62384" cy="62384"/>
             </a:xfrm>
             <a:prstGeom prst="ellipse">
@@ -17716,7 +17716,7 @@
           </p:nvSpPr>
           <p:spPr>
             <a:xfrm>
-              <a:off x="5047841" y="2610626"/>
+              <a:off x="3847592" y="2423515"/>
               <a:ext cx="62384" cy="62384"/>
             </a:xfrm>
             <a:prstGeom prst="ellipse">
@@ -17742,7 +17742,7 @@
           </p:nvSpPr>
           <p:spPr>
             <a:xfrm>
-              <a:off x="4742195" y="2462307"/>
+              <a:off x="3643823" y="2291623"/>
               <a:ext cx="62384" cy="62384"/>
             </a:xfrm>
             <a:prstGeom prst="ellipse">
@@ -17768,7 +17768,7 @@
           </p:nvSpPr>
           <p:spPr>
             <a:xfrm>
-              <a:off x="5035454" y="2248780"/>
+              <a:off x="3827152" y="2101744"/>
               <a:ext cx="62384" cy="62384"/>
             </a:xfrm>
             <a:prstGeom prst="ellipse">
@@ -17794,7 +17794,7 @@
           </p:nvSpPr>
           <p:spPr>
             <a:xfrm>
-              <a:off x="4762771" y="3199041"/>
+              <a:off x="3655818" y="2946762"/>
               <a:ext cx="62384" cy="62384"/>
             </a:xfrm>
             <a:prstGeom prst="ellipse">
@@ -17820,7 +17820,7 @@
           </p:nvSpPr>
           <p:spPr>
             <a:xfrm>
-              <a:off x="5017251" y="3183378"/>
+              <a:off x="3834804" y="2932834"/>
               <a:ext cx="62384" cy="62384"/>
             </a:xfrm>
             <a:prstGeom prst="ellipse">
@@ -17846,7 +17846,7 @@
           </p:nvSpPr>
           <p:spPr>
             <a:xfrm>
-              <a:off x="4742574" y="3456633"/>
+              <a:off x="3652321" y="3175826"/>
               <a:ext cx="62384" cy="62384"/>
             </a:xfrm>
             <a:prstGeom prst="ellipse">
@@ -17872,7 +17872,7 @@
           </p:nvSpPr>
           <p:spPr>
             <a:xfrm>
-              <a:off x="4958102" y="3192557"/>
+              <a:off x="3838180" y="2940996"/>
               <a:ext cx="62384" cy="62384"/>
             </a:xfrm>
             <a:prstGeom prst="ellipse">
@@ -17898,7 +17898,7 @@
           </p:nvSpPr>
           <p:spPr>
             <a:xfrm>
-              <a:off x="4828919" y="2069186"/>
+              <a:off x="3688990" y="1942040"/>
               <a:ext cx="62384" cy="62384"/>
             </a:xfrm>
             <a:prstGeom prst="ellipse">
@@ -17924,7 +17924,7 @@
           </p:nvSpPr>
           <p:spPr>
             <a:xfrm>
-              <a:off x="5053230" y="2236518"/>
+              <a:off x="3849763" y="2090840"/>
               <a:ext cx="62384" cy="62384"/>
             </a:xfrm>
             <a:prstGeom prst="ellipse">
@@ -17950,7 +17950,7 @@
           </p:nvSpPr>
           <p:spPr>
             <a:xfrm>
-              <a:off x="6266601" y="2485160"/>
+              <a:off x="4733749" y="2311945"/>
               <a:ext cx="62384" cy="62384"/>
             </a:xfrm>
             <a:prstGeom prst="ellipse">
@@ -17976,7 +17976,7 @@
           </p:nvSpPr>
           <p:spPr>
             <a:xfrm>
-              <a:off x="6496574" y="2549351"/>
+              <a:off x="4892326" y="2369026"/>
               <a:ext cx="62384" cy="62384"/>
             </a:xfrm>
             <a:prstGeom prst="ellipse">
@@ -18002,7 +18002,7 @@
           </p:nvSpPr>
           <p:spPr>
             <a:xfrm>
-              <a:off x="6352093" y="3140677"/>
+              <a:off x="4705299" y="2894862"/>
               <a:ext cx="62384" cy="62384"/>
             </a:xfrm>
             <a:prstGeom prst="ellipse">
@@ -18028,7 +18028,7 @@
           </p:nvSpPr>
           <p:spPr>
             <a:xfrm>
-              <a:off x="6543812" y="3516855"/>
+              <a:off x="4861045" y="3229378"/>
               <a:ext cx="62384" cy="62384"/>
             </a:xfrm>
             <a:prstGeom prst="ellipse">
@@ -18054,7 +18054,7 @@
           </p:nvSpPr>
           <p:spPr>
             <a:xfrm>
-              <a:off x="6338038" y="2544444"/>
+              <a:off x="4728613" y="2364663"/>
               <a:ext cx="62384" cy="62384"/>
             </a:xfrm>
             <a:prstGeom prst="ellipse">
@@ -18080,7 +18080,7 @@
           </p:nvSpPr>
           <p:spPr>
             <a:xfrm>
-              <a:off x="6563795" y="2338983"/>
+              <a:off x="4857584" y="2181957"/>
               <a:ext cx="62384" cy="62384"/>
             </a:xfrm>
             <a:prstGeom prst="ellipse">
@@ -18106,7 +18106,7 @@
           </p:nvSpPr>
           <p:spPr>
             <a:xfrm>
-              <a:off x="6307468" y="2938586"/>
+              <a:off x="4740856" y="2715153"/>
               <a:ext cx="62384" cy="62384"/>
             </a:xfrm>
             <a:prstGeom prst="ellipse">
@@ -18132,7 +18132,7 @@
           </p:nvSpPr>
           <p:spPr>
             <a:xfrm>
-              <a:off x="6495780" y="2674034"/>
+              <a:off x="4853952" y="2479901"/>
               <a:ext cx="62384" cy="62384"/>
             </a:xfrm>
             <a:prstGeom prst="ellipse">
@@ -18158,7 +18158,7 @@
           </p:nvSpPr>
           <p:spPr>
             <a:xfrm>
-              <a:off x="6363092" y="2312700"/>
+              <a:off x="4720839" y="2158585"/>
               <a:ext cx="62384" cy="62384"/>
             </a:xfrm>
             <a:prstGeom prst="ellipse">
@@ -18184,7 +18184,7 @@
           </p:nvSpPr>
           <p:spPr>
             <a:xfrm>
-              <a:off x="6567031" y="2825501"/>
+              <a:off x="4870836" y="2614593"/>
               <a:ext cx="62384" cy="62384"/>
             </a:xfrm>
             <a:prstGeom prst="ellipse">
@@ -18210,7 +18210,7 @@
           </p:nvSpPr>
           <p:spPr>
             <a:xfrm>
-              <a:off x="6285606" y="1881524"/>
+              <a:off x="4690539" y="1775162"/>
               <a:ext cx="62384" cy="62384"/>
             </a:xfrm>
             <a:prstGeom prst="ellipse">
@@ -18236,7 +18236,7 @@
           </p:nvSpPr>
           <p:spPr>
             <a:xfrm>
-              <a:off x="6580618" y="2269421"/>
+              <a:off x="4874660" y="2120099"/>
               <a:ext cx="62384" cy="62384"/>
             </a:xfrm>
             <a:prstGeom prst="ellipse">
@@ -18262,7 +18262,7 @@
           </p:nvSpPr>
           <p:spPr>
             <a:xfrm>
-              <a:off x="6266979" y="3147191"/>
+              <a:off x="4710853" y="2900655"/>
               <a:ext cx="62384" cy="62384"/>
             </a:xfrm>
             <a:prstGeom prst="ellipse">
@@ -18288,7 +18288,7 @@
           </p:nvSpPr>
           <p:spPr>
             <a:xfrm>
-              <a:off x="6545585" y="3043849"/>
+              <a:off x="4846452" y="2808759"/>
               <a:ext cx="62384" cy="62384"/>
             </a:xfrm>
             <a:prstGeom prst="ellipse">
@@ -18314,7 +18314,7 @@
           </p:nvSpPr>
           <p:spPr>
             <a:xfrm>
-              <a:off x="6327977" y="2625856"/>
+              <a:off x="4722831" y="2437059"/>
               <a:ext cx="62384" cy="62384"/>
             </a:xfrm>
             <a:prstGeom prst="ellipse">
@@ -18340,7 +18340,7 @@
           </p:nvSpPr>
           <p:spPr>
             <a:xfrm>
-              <a:off x="6541680" y="2832229"/>
+              <a:off x="4884539" y="2620576"/>
               <a:ext cx="62384" cy="62384"/>
             </a:xfrm>
             <a:prstGeom prst="ellipse">
@@ -18366,7 +18366,7 @@
           </p:nvSpPr>
           <p:spPr>
             <a:xfrm>
-              <a:off x="6334985" y="2652058"/>
+              <a:off x="4717934" y="2460359"/>
               <a:ext cx="62384" cy="62384"/>
             </a:xfrm>
             <a:prstGeom prst="ellipse">
@@ -18392,7 +18392,7 @@
           </p:nvSpPr>
           <p:spPr>
             <a:xfrm>
-              <a:off x="6493720" y="2767821"/>
+              <a:off x="4832185" y="2563301"/>
               <a:ext cx="62384" cy="62384"/>
             </a:xfrm>
             <a:prstGeom prst="ellipse">
@@ -18418,7 +18418,7 @@
           </p:nvSpPr>
           <p:spPr>
             <a:xfrm>
-              <a:off x="6309387" y="3080656"/>
+              <a:off x="4729513" y="2841489"/>
               <a:ext cx="62384" cy="62384"/>
             </a:xfrm>
             <a:prstGeom prst="ellipse">
@@ -18444,7 +18444,7 @@
           </p:nvSpPr>
           <p:spPr>
             <a:xfrm>
-              <a:off x="6568431" y="2534239"/>
+              <a:off x="4852205" y="2355588"/>
               <a:ext cx="62384" cy="62384"/>
             </a:xfrm>
             <a:prstGeom prst="ellipse">
@@ -18470,7 +18470,7 @@
           </p:nvSpPr>
           <p:spPr>
             <a:xfrm>
-              <a:off x="6335998" y="1692036"/>
+              <a:off x="4730634" y="1606661"/>
               <a:ext cx="62384" cy="62384"/>
             </a:xfrm>
             <a:prstGeom prst="ellipse">
@@ -18496,7 +18496,7 @@
           </p:nvSpPr>
           <p:spPr>
             <a:xfrm>
-              <a:off x="6505600" y="2029790"/>
+              <a:off x="4893833" y="1907008"/>
               <a:ext cx="62384" cy="62384"/>
             </a:xfrm>
             <a:prstGeom prst="ellipse">
@@ -18522,7 +18522,7 @@
           </p:nvSpPr>
           <p:spPr>
             <a:xfrm>
-              <a:off x="6302282" y="3000090"/>
+              <a:off x="4727363" y="2769845"/>
               <a:ext cx="62384" cy="62384"/>
             </a:xfrm>
             <a:prstGeom prst="ellipse">
@@ -18548,7 +18548,7 @@
           </p:nvSpPr>
           <p:spPr>
             <a:xfrm>
-              <a:off x="6585125" y="2726887"/>
+              <a:off x="4832613" y="2526901"/>
               <a:ext cx="62384" cy="62384"/>
             </a:xfrm>
             <a:prstGeom prst="ellipse">
@@ -18574,7 +18574,7 @@
           </p:nvSpPr>
           <p:spPr>
             <a:xfrm>
-              <a:off x="6327453" y="2729106"/>
+              <a:off x="4698360" y="2528874"/>
               <a:ext cx="62384" cy="62384"/>
             </a:xfrm>
             <a:prstGeom prst="ellipse">
@@ -18600,7 +18600,7 @@
           </p:nvSpPr>
           <p:spPr>
             <a:xfrm>
-              <a:off x="6503296" y="2706177"/>
+              <a:off x="4832731" y="2508484"/>
               <a:ext cx="62384" cy="62384"/>
             </a:xfrm>
             <a:prstGeom prst="ellipse">
@@ -18626,7 +18626,7 @@
           </p:nvSpPr>
           <p:spPr>
             <a:xfrm>
-              <a:off x="6326193" y="2256068"/>
+              <a:off x="4698647" y="2108226"/>
               <a:ext cx="62384" cy="62384"/>
             </a:xfrm>
             <a:prstGeom prst="ellipse">
@@ -18652,7 +18652,7 @@
           </p:nvSpPr>
           <p:spPr>
             <a:xfrm>
-              <a:off x="6562227" y="3330741"/>
+              <a:off x="4837333" y="3063877"/>
               <a:ext cx="62384" cy="62384"/>
             </a:xfrm>
             <a:prstGeom prst="ellipse">
@@ -18678,7 +18678,7 @@
           </p:nvSpPr>
           <p:spPr>
             <a:xfrm>
-              <a:off x="6275083" y="2742448"/>
+              <a:off x="4680597" y="2540738"/>
               <a:ext cx="62384" cy="62384"/>
             </a:xfrm>
             <a:prstGeom prst="ellipse">
@@ -18704,7 +18704,7 @@
           </p:nvSpPr>
           <p:spPr>
             <a:xfrm>
-              <a:off x="6522875" y="2664139"/>
+              <a:off x="4897856" y="2471101"/>
               <a:ext cx="62384" cy="62384"/>
             </a:xfrm>
             <a:prstGeom prst="ellipse">
@@ -18730,7 +18730,7 @@
           </p:nvSpPr>
           <p:spPr>
             <a:xfrm>
-              <a:off x="6352500" y="3085369"/>
+              <a:off x="4690627" y="2845680"/>
               <a:ext cx="62384" cy="62384"/>
             </a:xfrm>
             <a:prstGeom prst="ellipse">
@@ -18756,7 +18756,7 @@
           </p:nvSpPr>
           <p:spPr>
             <a:xfrm>
-              <a:off x="6510899" y="3218837"/>
+              <a:off x="4880527" y="2964366"/>
               <a:ext cx="62384" cy="62384"/>
             </a:xfrm>
             <a:prstGeom prst="ellipse">
@@ -18782,7 +18782,7 @@
           </p:nvSpPr>
           <p:spPr>
             <a:xfrm>
-              <a:off x="6299173" y="2990672"/>
+              <a:off x="4718676" y="2761471"/>
               <a:ext cx="62384" cy="62384"/>
             </a:xfrm>
             <a:prstGeom prst="ellipse">
@@ -18808,7 +18808,7 @@
           </p:nvSpPr>
           <p:spPr>
             <a:xfrm>
-              <a:off x="6543868" y="3172828"/>
+              <a:off x="4872483" y="2923452"/>
               <a:ext cx="62384" cy="62384"/>
             </a:xfrm>
             <a:prstGeom prst="ellipse">
@@ -18834,7 +18834,7 @@
           </p:nvSpPr>
           <p:spPr>
             <a:xfrm>
-              <a:off x="6277287" y="2817467"/>
+              <a:off x="4743694" y="2607449"/>
               <a:ext cx="62384" cy="62384"/>
             </a:xfrm>
             <a:prstGeom prst="ellipse">
@@ -18860,7 +18860,7 @@
           </p:nvSpPr>
           <p:spPr>
             <a:xfrm>
-              <a:off x="6539264" y="2368979"/>
+              <a:off x="4902819" y="2208631"/>
               <a:ext cx="62384" cy="62384"/>
             </a:xfrm>
             <a:prstGeom prst="ellipse">
@@ -18886,7 +18886,7 @@
           </p:nvSpPr>
           <p:spPr>
             <a:xfrm>
-              <a:off x="6270524" y="2900439"/>
+              <a:off x="4702239" y="2681231"/>
               <a:ext cx="62384" cy="62384"/>
             </a:xfrm>
             <a:prstGeom prst="ellipse">
@@ -18912,7 +18912,7 @@
           </p:nvSpPr>
           <p:spPr>
             <a:xfrm>
-              <a:off x="6506474" y="2555787"/>
+              <a:off x="4873546" y="2374750"/>
               <a:ext cx="62384" cy="62384"/>
             </a:xfrm>
             <a:prstGeom prst="ellipse">
@@ -18938,7 +18938,7 @@
           </p:nvSpPr>
           <p:spPr>
             <a:xfrm>
-              <a:off x="6274615" y="2458500"/>
+              <a:off x="4683402" y="2288238"/>
               <a:ext cx="62384" cy="62384"/>
             </a:xfrm>
             <a:prstGeom prst="ellipse">
@@ -18964,7 +18964,7 @@
           </p:nvSpPr>
           <p:spPr>
             <a:xfrm>
-              <a:off x="6516661" y="3181082"/>
+              <a:off x="4864405" y="2930793"/>
               <a:ext cx="62384" cy="62384"/>
             </a:xfrm>
             <a:prstGeom prst="ellipse">
@@ -18990,7 +18990,7 @@
           </p:nvSpPr>
           <p:spPr>
             <a:xfrm>
-              <a:off x="6363337" y="3041633"/>
+              <a:off x="4699853" y="2806788"/>
               <a:ext cx="62384" cy="62384"/>
             </a:xfrm>
             <a:prstGeom prst="ellipse">
@@ -19016,7 +19016,7 @@
           </p:nvSpPr>
           <p:spPr>
             <a:xfrm>
-              <a:off x="6499948" y="2999334"/>
+              <a:off x="4862992" y="2769173"/>
               <a:ext cx="62384" cy="62384"/>
             </a:xfrm>
             <a:prstGeom prst="ellipse">
@@ -19042,7 +19042,7 @@
           </p:nvSpPr>
           <p:spPr>
             <a:xfrm>
-              <a:off x="6315525" y="2275930"/>
+              <a:off x="4717922" y="2125887"/>
               <a:ext cx="62384" cy="62384"/>
             </a:xfrm>
             <a:prstGeom prst="ellipse">
@@ -19068,7 +19068,7 @@
           </p:nvSpPr>
           <p:spPr>
             <a:xfrm>
-              <a:off x="6504660" y="2613876"/>
+              <a:off x="4868471" y="2426405"/>
               <a:ext cx="62384" cy="62384"/>
             </a:xfrm>
             <a:prstGeom prst="ellipse">
@@ -19094,7 +19094,7 @@
           </p:nvSpPr>
           <p:spPr>
             <a:xfrm>
-              <a:off x="6363814" y="3092186"/>
+              <a:off x="4725745" y="2851742"/>
               <a:ext cx="62384" cy="62384"/>
             </a:xfrm>
             <a:prstGeom prst="ellipse">
@@ -19120,7 +19120,7 @@
           </p:nvSpPr>
           <p:spPr>
             <a:xfrm>
-              <a:off x="6547416" y="3477411"/>
+              <a:off x="4871037" y="3194303"/>
               <a:ext cx="62384" cy="62384"/>
             </a:xfrm>
             <a:prstGeom prst="ellipse">
@@ -19146,7 +19146,7 @@
           </p:nvSpPr>
           <p:spPr>
             <a:xfrm>
-              <a:off x="6355814" y="3274389"/>
+              <a:off x="4747482" y="3013766"/>
               <a:ext cx="62384" cy="62384"/>
             </a:xfrm>
             <a:prstGeom prst="ellipse">
@@ -19172,7 +19172,7 @@
           </p:nvSpPr>
           <p:spPr>
             <a:xfrm>
-              <a:off x="6518290" y="2838543"/>
+              <a:off x="4871276" y="2626191"/>
               <a:ext cx="62384" cy="62384"/>
             </a:xfrm>
             <a:prstGeom prst="ellipse">
@@ -19198,7 +19198,7 @@
           </p:nvSpPr>
           <p:spPr>
             <a:xfrm>
-              <a:off x="6267314" y="2144630"/>
+              <a:off x="4735625" y="2009130"/>
               <a:ext cx="62384" cy="62384"/>
             </a:xfrm>
             <a:prstGeom prst="ellipse">
@@ -19224,7 +19224,7 @@
           </p:nvSpPr>
           <p:spPr>
             <a:xfrm>
-              <a:off x="6585223" y="2778603"/>
+              <a:off x="4875732" y="2572888"/>
               <a:ext cx="62384" cy="62384"/>
             </a:xfrm>
             <a:prstGeom prst="ellipse">
@@ -19250,7 +19250,7 @@
           </p:nvSpPr>
           <p:spPr>
             <a:xfrm>
-              <a:off x="6336095" y="2337847"/>
+              <a:off x="4740286" y="2180947"/>
               <a:ext cx="62384" cy="62384"/>
             </a:xfrm>
             <a:prstGeom prst="ellipse">
@@ -19276,7 +19276,7 @@
           </p:nvSpPr>
           <p:spPr>
             <a:xfrm>
-              <a:off x="6493216" y="2816591"/>
+              <a:off x="4858933" y="2606670"/>
               <a:ext cx="62384" cy="62384"/>
             </a:xfrm>
             <a:prstGeom prst="ellipse">
@@ -19302,7 +19302,7 @@
           </p:nvSpPr>
           <p:spPr>
             <a:xfrm>
-              <a:off x="6258579" y="2475045"/>
+              <a:off x="4721931" y="2302950"/>
               <a:ext cx="62384" cy="62384"/>
             </a:xfrm>
             <a:prstGeom prst="ellipse">
@@ -19328,7 +19328,7 @@
           </p:nvSpPr>
           <p:spPr>
             <a:xfrm>
-              <a:off x="6583400" y="2840593"/>
+              <a:off x="4886635" y="2628013"/>
               <a:ext cx="62384" cy="62384"/>
             </a:xfrm>
             <a:prstGeom prst="ellipse">
@@ -19354,7 +19354,7 @@
           </p:nvSpPr>
           <p:spPr>
             <a:xfrm>
-              <a:off x="6284208" y="3126841"/>
+              <a:off x="4712104" y="2882558"/>
               <a:ext cx="62384" cy="62384"/>
             </a:xfrm>
             <a:prstGeom prst="ellipse">
@@ -19380,7 +19380,7 @@
           </p:nvSpPr>
           <p:spPr>
             <a:xfrm>
-              <a:off x="6498329" y="2468378"/>
+              <a:off x="4860349" y="2297022"/>
               <a:ext cx="62384" cy="62384"/>
             </a:xfrm>
             <a:prstGeom prst="ellipse">
@@ -19406,7 +19406,7 @@
           </p:nvSpPr>
           <p:spPr>
             <a:xfrm>
-              <a:off x="6344924" y="3013733"/>
+              <a:off x="4746674" y="2781978"/>
               <a:ext cx="62384" cy="62384"/>
             </a:xfrm>
             <a:prstGeom prst="ellipse">
@@ -19432,7 +19432,7 @@
           </p:nvSpPr>
           <p:spPr>
             <a:xfrm>
-              <a:off x="6544238" y="2660578"/>
+              <a:off x="4829799" y="2467935"/>
               <a:ext cx="62384" cy="62384"/>
             </a:xfrm>
             <a:prstGeom prst="ellipse">
@@ -19458,7 +19458,7 @@
           </p:nvSpPr>
           <p:spPr>
             <a:xfrm>
-              <a:off x="6340852" y="2391574"/>
+              <a:off x="4750879" y="2228724"/>
               <a:ext cx="62384" cy="62384"/>
             </a:xfrm>
             <a:prstGeom prst="ellipse">
@@ -19484,7 +19484,7 @@
           </p:nvSpPr>
           <p:spPr>
             <a:xfrm>
-              <a:off x="6518926" y="2765468"/>
+              <a:off x="4854489" y="2561209"/>
               <a:ext cx="62384" cy="62384"/>
             </a:xfrm>
             <a:prstGeom prst="ellipse">
@@ -19510,7 +19510,7 @@
           </p:nvSpPr>
           <p:spPr>
             <a:xfrm>
-              <a:off x="6305941" y="2555649"/>
+              <a:off x="4693058" y="2374627"/>
               <a:ext cx="62384" cy="62384"/>
             </a:xfrm>
             <a:prstGeom prst="ellipse">
@@ -19536,7 +19536,7 @@
           </p:nvSpPr>
           <p:spPr>
             <a:xfrm>
-              <a:off x="6585998" y="2227766"/>
+              <a:off x="4843132" y="2083058"/>
               <a:ext cx="62384" cy="62384"/>
             </a:xfrm>
             <a:prstGeom prst="ellipse">
@@ -19562,7 +19562,7 @@
           </p:nvSpPr>
           <p:spPr>
             <a:xfrm>
-              <a:off x="6294091" y="2899300"/>
+              <a:off x="4742254" y="2680218"/>
               <a:ext cx="62384" cy="62384"/>
             </a:xfrm>
             <a:prstGeom prst="ellipse">
@@ -19588,7 +19588,7 @@
           </p:nvSpPr>
           <p:spPr>
             <a:xfrm>
-              <a:off x="6535662" y="2676101"/>
+              <a:off x="4893891" y="2481739"/>
               <a:ext cx="62384" cy="62384"/>
             </a:xfrm>
             <a:prstGeom prst="ellipse">
@@ -19614,7 +19614,7 @@
           </p:nvSpPr>
           <p:spPr>
             <a:xfrm>
-              <a:off x="6333226" y="2225635"/>
+              <a:off x="4752561" y="2081163"/>
               <a:ext cx="62384" cy="62384"/>
             </a:xfrm>
             <a:prstGeom prst="ellipse">
@@ -19640,7 +19640,7 @@
           </p:nvSpPr>
           <p:spPr>
             <a:xfrm>
-              <a:off x="6500906" y="2322816"/>
+              <a:off x="4837928" y="2167581"/>
               <a:ext cx="62384" cy="62384"/>
             </a:xfrm>
             <a:prstGeom prst="ellipse">
@@ -19666,7 +19666,7 @@
           </p:nvSpPr>
           <p:spPr>
             <a:xfrm>
-              <a:off x="6256687" y="2900351"/>
+              <a:off x="4703267" y="2681153"/>
               <a:ext cx="62384" cy="62384"/>
             </a:xfrm>
             <a:prstGeom prst="ellipse">
@@ -19692,7 +19692,7 @@
           </p:nvSpPr>
           <p:spPr>
             <a:xfrm>
-              <a:off x="6514636" y="2963699"/>
+              <a:off x="4846034" y="2737485"/>
               <a:ext cx="62384" cy="62384"/>
             </a:xfrm>
             <a:prstGeom prst="ellipse">
@@ -19718,7 +19718,7 @@
           </p:nvSpPr>
           <p:spPr>
             <a:xfrm>
-              <a:off x="6361583" y="2491525"/>
+              <a:off x="4742073" y="2317605"/>
               <a:ext cx="62384" cy="62384"/>
             </a:xfrm>
             <a:prstGeom prst="ellipse">
@@ -19744,7 +19744,7 @@
           </p:nvSpPr>
           <p:spPr>
             <a:xfrm>
-              <a:off x="6525654" y="2822698"/>
+              <a:off x="4884508" y="2612100"/>
               <a:ext cx="62384" cy="62384"/>
             </a:xfrm>
             <a:prstGeom prst="ellipse">
@@ -19770,7 +19770,7 @@
           </p:nvSpPr>
           <p:spPr>
             <a:xfrm>
-              <a:off x="6262994" y="3467045"/>
+              <a:off x="4734671" y="3185085"/>
               <a:ext cx="62384" cy="62384"/>
             </a:xfrm>
             <a:prstGeom prst="ellipse">
@@ -19796,7 +19796,7 @@
           </p:nvSpPr>
           <p:spPr>
             <a:xfrm>
-              <a:off x="6503354" y="3541999"/>
+              <a:off x="4838796" y="3251737"/>
               <a:ext cx="62384" cy="62384"/>
             </a:xfrm>
             <a:prstGeom prst="ellipse">
@@ -19822,7 +19822,7 @@
           </p:nvSpPr>
           <p:spPr>
             <a:xfrm>
-              <a:off x="6286329" y="2316800"/>
+              <a:off x="4707084" y="2162231"/>
               <a:ext cx="62384" cy="62384"/>
             </a:xfrm>
             <a:prstGeom prst="ellipse">
@@ -19848,7 +19848,7 @@
           </p:nvSpPr>
           <p:spPr>
             <a:xfrm>
-              <a:off x="6541076" y="2952664"/>
+              <a:off x="4882303" y="2727672"/>
               <a:ext cx="62384" cy="62384"/>
             </a:xfrm>
             <a:prstGeom prst="ellipse">
@@ -19874,7 +19874,7 @@
           </p:nvSpPr>
           <p:spPr>
             <a:xfrm>
-              <a:off x="6358283" y="2526695"/>
+              <a:off x="4730722" y="2348880"/>
               <a:ext cx="62384" cy="62384"/>
             </a:xfrm>
             <a:prstGeom prst="ellipse">
@@ -19900,7 +19900,7 @@
           </p:nvSpPr>
           <p:spPr>
             <a:xfrm>
-              <a:off x="6578889" y="2811138"/>
+              <a:off x="4892059" y="2601820"/>
               <a:ext cx="62384" cy="62384"/>
             </a:xfrm>
             <a:prstGeom prst="ellipse">
@@ -19926,7 +19926,7 @@
           </p:nvSpPr>
           <p:spPr>
             <a:xfrm>
-              <a:off x="6264723" y="2612081"/>
+              <a:off x="4692028" y="2424810"/>
               <a:ext cx="62384" cy="62384"/>
             </a:xfrm>
             <a:prstGeom prst="ellipse">
@@ -19952,7 +19952,7 @@
           </p:nvSpPr>
           <p:spPr>
             <a:xfrm>
-              <a:off x="6508633" y="2998630"/>
+              <a:off x="4839153" y="2768547"/>
               <a:ext cx="62384" cy="62384"/>
             </a:xfrm>
             <a:prstGeom prst="ellipse">
@@ -19978,7 +19978,7 @@
           </p:nvSpPr>
           <p:spPr>
             <a:xfrm>
-              <a:off x="6357519" y="2493152"/>
+              <a:off x="4678919" y="2319052"/>
               <a:ext cx="62384" cy="62384"/>
             </a:xfrm>
             <a:prstGeom prst="ellipse">
@@ -20004,7 +20004,7 @@
           </p:nvSpPr>
           <p:spPr>
             <a:xfrm>
-              <a:off x="6580989" y="2519937"/>
+              <a:off x="4831601" y="2342871"/>
               <a:ext cx="62384" cy="62384"/>
             </a:xfrm>
             <a:prstGeom prst="ellipse">
@@ -20030,7 +20030,7 @@
           </p:nvSpPr>
           <p:spPr>
             <a:xfrm>
-              <a:off x="6326942" y="2522172"/>
+              <a:off x="4719380" y="2344858"/>
               <a:ext cx="62384" cy="62384"/>
             </a:xfrm>
             <a:prstGeom prst="ellipse">
@@ -20056,7 +20056,7 @@
           </p:nvSpPr>
           <p:spPr>
             <a:xfrm>
-              <a:off x="6514274" y="2860925"/>
+              <a:off x="4855186" y="2646094"/>
               <a:ext cx="62384" cy="62384"/>
             </a:xfrm>
             <a:prstGeom prst="ellipse">
@@ -20082,7 +20082,7 @@
           </p:nvSpPr>
           <p:spPr>
             <a:xfrm>
-              <a:off x="6331387" y="2730409"/>
+              <a:off x="4718441" y="2530032"/>
               <a:ext cx="62384" cy="62384"/>
             </a:xfrm>
             <a:prstGeom prst="ellipse">
@@ -20108,7 +20108,7 @@
           </p:nvSpPr>
           <p:spPr>
             <a:xfrm>
-              <a:off x="6499274" y="2792794"/>
+              <a:off x="4884140" y="2585508"/>
               <a:ext cx="62384" cy="62384"/>
             </a:xfrm>
             <a:prstGeom prst="ellipse">
@@ -20134,7 +20134,7 @@
           </p:nvSpPr>
           <p:spPr>
             <a:xfrm>
-              <a:off x="6322405" y="2596661"/>
+              <a:off x="4688969" y="2411097"/>
               <a:ext cx="62384" cy="62384"/>
             </a:xfrm>
             <a:prstGeom prst="ellipse">
@@ -20160,7 +20160,7 @@
           </p:nvSpPr>
           <p:spPr>
             <a:xfrm>
-              <a:off x="6567765" y="2456937"/>
+              <a:off x="4880374" y="2286848"/>
               <a:ext cx="62384" cy="62384"/>
             </a:xfrm>
             <a:prstGeom prst="ellipse">
@@ -20186,7 +20186,7 @@
           </p:nvSpPr>
           <p:spPr>
             <a:xfrm>
-              <a:off x="6307692" y="2902705"/>
+              <a:off x="4693312" y="2683246"/>
               <a:ext cx="62384" cy="62384"/>
             </a:xfrm>
             <a:prstGeom prst="ellipse">
@@ -20212,7 +20212,7 @@
           </p:nvSpPr>
           <p:spPr>
             <a:xfrm>
-              <a:off x="6570099" y="3399331"/>
+              <a:off x="4898248" y="3124870"/>
               <a:ext cx="62384" cy="62384"/>
             </a:xfrm>
             <a:prstGeom prst="ellipse">
@@ -20238,7 +20238,7 @@
           </p:nvSpPr>
           <p:spPr>
             <a:xfrm>
-              <a:off x="6346305" y="3166015"/>
+              <a:off x="4731646" y="2917394"/>
               <a:ext cx="62384" cy="62384"/>
             </a:xfrm>
             <a:prstGeom prst="ellipse">
@@ -20264,7 +20264,7 @@
           </p:nvSpPr>
           <p:spPr>
             <a:xfrm>
-              <a:off x="6508212" y="2693701"/>
+              <a:off x="4873302" y="2497390"/>
               <a:ext cx="62384" cy="62384"/>
             </a:xfrm>
             <a:prstGeom prst="ellipse">
@@ -20290,7 +20290,7 @@
           </p:nvSpPr>
           <p:spPr>
             <a:xfrm>
-              <a:off x="6338823" y="2709039"/>
+              <a:off x="4722979" y="2511029"/>
               <a:ext cx="62384" cy="62384"/>
             </a:xfrm>
             <a:prstGeom prst="ellipse">
@@ -20316,7 +20316,7 @@
           </p:nvSpPr>
           <p:spPr>
             <a:xfrm>
-              <a:off x="6517590" y="2758147"/>
+              <a:off x="4897314" y="2554699"/>
               <a:ext cx="62384" cy="62384"/>
             </a:xfrm>
             <a:prstGeom prst="ellipse">
@@ -20342,7 +20342,7 @@
           </p:nvSpPr>
           <p:spPr>
             <a:xfrm>
-              <a:off x="6348214" y="2763479"/>
+              <a:off x="4721629" y="2559440"/>
               <a:ext cx="62384" cy="62384"/>
             </a:xfrm>
             <a:prstGeom prst="ellipse">
@@ -20368,7 +20368,7 @@
           </p:nvSpPr>
           <p:spPr>
             <a:xfrm>
-              <a:off x="6500017" y="2991815"/>
+              <a:off x="4886776" y="2762487"/>
               <a:ext cx="62384" cy="62384"/>
             </a:xfrm>
             <a:prstGeom prst="ellipse">
@@ -20394,7 +20394,7 @@
           </p:nvSpPr>
           <p:spPr>
             <a:xfrm>
-              <a:off x="6292603" y="2819645"/>
+              <a:off x="4691886" y="2609385"/>
               <a:ext cx="62384" cy="62384"/>
             </a:xfrm>
             <a:prstGeom prst="ellipse">
@@ -20420,7 +20420,7 @@
           </p:nvSpPr>
           <p:spPr>
             <a:xfrm>
-              <a:off x="6579631" y="2391220"/>
+              <a:off x="4844794" y="2228409"/>
               <a:ext cx="62384" cy="62384"/>
             </a:xfrm>
             <a:prstGeom prst="ellipse">
@@ -20446,7 +20446,7 @@
           </p:nvSpPr>
           <p:spPr>
             <a:xfrm>
-              <a:off x="6342072" y="1890873"/>
+              <a:off x="4686613" y="1783476"/>
               <a:ext cx="62384" cy="62384"/>
             </a:xfrm>
             <a:prstGeom prst="ellipse">
@@ -20472,7 +20472,7 @@
           </p:nvSpPr>
           <p:spPr>
             <a:xfrm>
-              <a:off x="6499285" y="2261940"/>
+              <a:off x="4847091" y="2113447"/>
               <a:ext cx="62384" cy="62384"/>
             </a:xfrm>
             <a:prstGeom prst="ellipse">
@@ -20498,7 +20498,7 @@
           </p:nvSpPr>
           <p:spPr>
             <a:xfrm>
-              <a:off x="6338643" y="2421047"/>
+              <a:off x="4719674" y="2254933"/>
               <a:ext cx="62384" cy="62384"/>
             </a:xfrm>
             <a:prstGeom prst="ellipse">
@@ -20524,7 +20524,7 @@
           </p:nvSpPr>
           <p:spPr>
             <a:xfrm>
-              <a:off x="6551192" y="2508090"/>
+              <a:off x="4829765" y="2332335"/>
               <a:ext cx="62384" cy="62384"/>
             </a:xfrm>
             <a:prstGeom prst="ellipse">
@@ -20550,7 +20550,7 @@
           </p:nvSpPr>
           <p:spPr>
             <a:xfrm>
-              <a:off x="6265055" y="2169608"/>
+              <a:off x="4751737" y="2031341"/>
               <a:ext cx="62384" cy="62384"/>
             </a:xfrm>
             <a:prstGeom prst="ellipse">
@@ -20576,7 +20576,7 @@
           </p:nvSpPr>
           <p:spPr>
             <a:xfrm>
-              <a:off x="6492531" y="2431187"/>
+              <a:off x="4886042" y="2263950"/>
               <a:ext cx="62384" cy="62384"/>
             </a:xfrm>
             <a:prstGeom prst="ellipse">
@@ -20602,7 +20602,7 @@
           </p:nvSpPr>
           <p:spPr>
             <a:xfrm>
-              <a:off x="6287016" y="3008523"/>
+              <a:off x="4722545" y="2777345"/>
               <a:ext cx="62384" cy="62384"/>
             </a:xfrm>
             <a:prstGeom prst="ellipse">
@@ -20628,7 +20628,7 @@
           </p:nvSpPr>
           <p:spPr>
             <a:xfrm>
-              <a:off x="6586137" y="3008595"/>
+              <a:off x="4895297" y="2777409"/>
               <a:ext cx="62384" cy="62384"/>
             </a:xfrm>
             <a:prstGeom prst="ellipse">
@@ -20654,7 +20654,7 @@
           </p:nvSpPr>
           <p:spPr>
             <a:xfrm>
-              <a:off x="6345282" y="2419229"/>
+              <a:off x="4736810" y="2253316"/>
               <a:ext cx="62384" cy="62384"/>
             </a:xfrm>
             <a:prstGeom prst="ellipse">
@@ -20680,7 +20680,7 @@
           </p:nvSpPr>
           <p:spPr>
             <a:xfrm>
-              <a:off x="6550072" y="2531201"/>
+              <a:off x="4830731" y="2352887"/>
               <a:ext cx="62384" cy="62384"/>
             </a:xfrm>
             <a:prstGeom prst="ellipse">
@@ -20706,7 +20706,7 @@
           </p:nvSpPr>
           <p:spPr>
             <a:xfrm>
-              <a:off x="6260393" y="2585997"/>
+              <a:off x="4728207" y="2401614"/>
               <a:ext cx="62384" cy="62384"/>
             </a:xfrm>
             <a:prstGeom prst="ellipse">
@@ -20732,7 +20732,7 @@
           </p:nvSpPr>
           <p:spPr>
             <a:xfrm>
-              <a:off x="6500468" y="2529865"/>
+              <a:off x="4874035" y="2351698"/>
               <a:ext cx="62384" cy="62384"/>
             </a:xfrm>
             <a:prstGeom prst="ellipse">
@@ -20758,7 +20758,7 @@
           </p:nvSpPr>
           <p:spPr>
             <a:xfrm>
-              <a:off x="6339778" y="3015029"/>
+              <a:off x="4715302" y="2783130"/>
               <a:ext cx="62384" cy="62384"/>
             </a:xfrm>
             <a:prstGeom prst="ellipse">
@@ -20784,7 +20784,7 @@
           </p:nvSpPr>
           <p:spPr>
             <a:xfrm>
-              <a:off x="6509468" y="2841497"/>
+              <a:off x="4871174" y="2628817"/>
               <a:ext cx="62384" cy="62384"/>
             </a:xfrm>
             <a:prstGeom prst="ellipse">
@@ -20810,7 +20810,7 @@
           </p:nvSpPr>
           <p:spPr>
             <a:xfrm>
-              <a:off x="6256822" y="2173598"/>
+              <a:off x="4735283" y="2034889"/>
               <a:ext cx="62384" cy="62384"/>
             </a:xfrm>
             <a:prstGeom prst="ellipse">
@@ -20836,7 +20836,7 @@
           </p:nvSpPr>
           <p:spPr>
             <a:xfrm>
-              <a:off x="6539186" y="2586541"/>
+              <a:off x="4882946" y="2402098"/>
               <a:ext cx="62384" cy="62384"/>
             </a:xfrm>
             <a:prstGeom prst="ellipse">
@@ -20862,7 +20862,7 @@
           </p:nvSpPr>
           <p:spPr>
             <a:xfrm>
-              <a:off x="6327373" y="2787580"/>
+              <a:off x="4706088" y="2580871"/>
               <a:ext cx="62384" cy="62384"/>
             </a:xfrm>
             <a:prstGeom prst="ellipse">
@@ -20888,7 +20888,7 @@
           </p:nvSpPr>
           <p:spPr>
             <a:xfrm>
-              <a:off x="6568978" y="2690655"/>
+              <a:off x="4830046" y="2494681"/>
               <a:ext cx="62384" cy="62384"/>
             </a:xfrm>
             <a:prstGeom prst="ellipse">
@@ -20914,7 +20914,7 @@
           </p:nvSpPr>
           <p:spPr>
             <a:xfrm>
-              <a:off x="6318498" y="2630895"/>
+              <a:off x="4686879" y="2441539"/>
               <a:ext cx="62384" cy="62384"/>
             </a:xfrm>
             <a:prstGeom prst="ellipse">
@@ -20940,7 +20940,7 @@
           </p:nvSpPr>
           <p:spPr>
             <a:xfrm>
-              <a:off x="6556912" y="3003545"/>
+              <a:off x="4898135" y="2772918"/>
               <a:ext cx="62384" cy="62384"/>
             </a:xfrm>
             <a:prstGeom prst="ellipse">
@@ -20966,7 +20966,7 @@
           </p:nvSpPr>
           <p:spPr>
             <a:xfrm>
-              <a:off x="6343578" y="2720876"/>
+              <a:off x="4695862" y="2521555"/>
               <a:ext cx="62384" cy="62384"/>
             </a:xfrm>
             <a:prstGeom prst="ellipse">
@@ -20992,7 +20992,7 @@
           </p:nvSpPr>
           <p:spPr>
             <a:xfrm>
-              <a:off x="6523122" y="2917275"/>
+              <a:off x="4835453" y="2696203"/>
               <a:ext cx="62384" cy="62384"/>
             </a:xfrm>
             <a:prstGeom prst="ellipse">
@@ -21018,7 +21018,7 @@
           </p:nvSpPr>
           <p:spPr>
             <a:xfrm>
-              <a:off x="6274088" y="2472245"/>
+              <a:off x="4727149" y="2300460"/>
               <a:ext cx="62384" cy="62384"/>
             </a:xfrm>
             <a:prstGeom prst="ellipse">
@@ -21044,7 +21044,7 @@
           </p:nvSpPr>
           <p:spPr>
             <a:xfrm>
-              <a:off x="6532366" y="2761561"/>
+              <a:off x="4903097" y="2557734"/>
               <a:ext cx="62384" cy="62384"/>
             </a:xfrm>
             <a:prstGeom prst="ellipse">
@@ -21070,7 +21070,7 @@
           </p:nvSpPr>
           <p:spPr>
             <a:xfrm>
-              <a:off x="6269413" y="2469189"/>
+              <a:off x="4692138" y="2297743"/>
               <a:ext cx="62384" cy="62384"/>
             </a:xfrm>
             <a:prstGeom prst="ellipse">
@@ -21096,7 +21096,7 @@
           </p:nvSpPr>
           <p:spPr>
             <a:xfrm>
-              <a:off x="6482004" y="2931269"/>
+              <a:off x="4895591" y="2708646"/>
               <a:ext cx="62384" cy="62384"/>
             </a:xfrm>
             <a:prstGeom prst="ellipse">
@@ -21122,7 +21122,7 @@
           </p:nvSpPr>
           <p:spPr>
             <a:xfrm>
-              <a:off x="6360010" y="2740440"/>
+              <a:off x="4708623" y="2538953"/>
               <a:ext cx="62384" cy="62384"/>
             </a:xfrm>
             <a:prstGeom prst="ellipse">
@@ -21148,7 +21148,7 @@
           </p:nvSpPr>
           <p:spPr>
             <a:xfrm>
-              <a:off x="6501619" y="2795868"/>
+              <a:off x="4876987" y="2588241"/>
               <a:ext cx="62384" cy="62384"/>
             </a:xfrm>
             <a:prstGeom prst="ellipse">
@@ -21174,7 +21174,7 @@
           </p:nvSpPr>
           <p:spPr>
             <a:xfrm>
-              <a:off x="6337481" y="2377350"/>
+              <a:off x="4697305" y="2216075"/>
               <a:ext cx="62384" cy="62384"/>
             </a:xfrm>
             <a:prstGeom prst="ellipse">
@@ -21200,7 +21200,7 @@
           </p:nvSpPr>
           <p:spPr>
             <a:xfrm>
-              <a:off x="6562945" y="2599594"/>
+              <a:off x="4885675" y="2413705"/>
               <a:ext cx="62384" cy="62384"/>
             </a:xfrm>
             <a:prstGeom prst="ellipse">
@@ -21226,7 +21226,7 @@
           </p:nvSpPr>
           <p:spPr>
             <a:xfrm>
-              <a:off x="6259915" y="2887677"/>
+              <a:off x="4682692" y="2669883"/>
               <a:ext cx="62384" cy="62384"/>
             </a:xfrm>
             <a:prstGeom prst="ellipse">
@@ -21252,7 +21252,7 @@
           </p:nvSpPr>
           <p:spPr>
             <a:xfrm>
-              <a:off x="6583157" y="2375315"/>
+              <a:off x="4847660" y="2214266"/>
               <a:ext cx="62384" cy="62384"/>
             </a:xfrm>
             <a:prstGeom prst="ellipse">
@@ -21278,7 +21278,7 @@
           </p:nvSpPr>
           <p:spPr>
             <a:xfrm>
-              <a:off x="6260304" y="2218648"/>
+              <a:off x="4683283" y="2074950"/>
               <a:ext cx="62384" cy="62384"/>
             </a:xfrm>
             <a:prstGeom prst="ellipse">
@@ -21304,7 +21304,7 @@
           </p:nvSpPr>
           <p:spPr>
             <a:xfrm>
-              <a:off x="6547592" y="2210088"/>
+              <a:off x="4830305" y="2067337"/>
               <a:ext cx="62384" cy="62384"/>
             </a:xfrm>
             <a:prstGeom prst="ellipse">
@@ -21330,7 +21330,7 @@
           </p:nvSpPr>
           <p:spPr>
             <a:xfrm>
-              <a:off x="6264305" y="2641321"/>
+              <a:off x="4739246" y="2450811"/>
               <a:ext cx="62384" cy="62384"/>
             </a:xfrm>
             <a:prstGeom prst="ellipse">
@@ -21356,7 +21356,7 @@
           </p:nvSpPr>
           <p:spPr>
             <a:xfrm>
-              <a:off x="6500612" y="2721183"/>
+              <a:off x="4840346" y="2521828"/>
               <a:ext cx="62384" cy="62384"/>
             </a:xfrm>
             <a:prstGeom prst="ellipse">
@@ -21382,7 +21382,7 @@
           </p:nvSpPr>
           <p:spPr>
             <a:xfrm>
-              <a:off x="6354472" y="2767042"/>
+              <a:off x="4735058" y="2562608"/>
               <a:ext cx="62384" cy="62384"/>
             </a:xfrm>
             <a:prstGeom prst="ellipse">
@@ -21408,7 +21408,7 @@
           </p:nvSpPr>
           <p:spPr>
             <a:xfrm>
-              <a:off x="6574478" y="2595726"/>
+              <a:off x="4844430" y="2410265"/>
               <a:ext cx="62384" cy="62384"/>
             </a:xfrm>
             <a:prstGeom prst="ellipse">
@@ -21434,7 +21434,7 @@
           </p:nvSpPr>
           <p:spPr>
             <a:xfrm>
-              <a:off x="6359778" y="2134735"/>
+              <a:off x="4697415" y="2000330"/>
               <a:ext cx="62384" cy="62384"/>
             </a:xfrm>
             <a:prstGeom prst="ellipse">
@@ -21460,7 +21460,7 @@
           </p:nvSpPr>
           <p:spPr>
             <a:xfrm>
-              <a:off x="6515530" y="3074055"/>
+              <a:off x="4860407" y="2835619"/>
               <a:ext cx="62384" cy="62384"/>
             </a:xfrm>
             <a:prstGeom prst="ellipse">
@@ -21486,7 +21486,7 @@
           </p:nvSpPr>
           <p:spPr>
             <a:xfrm>
-              <a:off x="6361416" y="3128347"/>
+              <a:off x="4713509" y="2883898"/>
               <a:ext cx="62384" cy="62384"/>
             </a:xfrm>
             <a:prstGeom prst="ellipse">
@@ -21512,7 +21512,7 @@
           </p:nvSpPr>
           <p:spPr>
             <a:xfrm>
-              <a:off x="6487689" y="2623189"/>
+              <a:off x="4897635" y="2434687"/>
               <a:ext cx="62384" cy="62384"/>
             </a:xfrm>
             <a:prstGeom prst="ellipse">
@@ -21538,7 +21538,7 @@
           </p:nvSpPr>
           <p:spPr>
             <a:xfrm>
-              <a:off x="6294511" y="2833085"/>
+              <a:off x="4711403" y="2621337"/>
               <a:ext cx="62384" cy="62384"/>
             </a:xfrm>
             <a:prstGeom prst="ellipse">
@@ -21564,7 +21564,7 @@
           </p:nvSpPr>
           <p:spPr>
             <a:xfrm>
-              <a:off x="6565448" y="3328230"/>
+              <a:off x="4834714" y="3061644"/>
               <a:ext cx="62384" cy="62384"/>
             </a:xfrm>
             <a:prstGeom prst="ellipse">
@@ -21590,7 +21590,7 @@
           </p:nvSpPr>
           <p:spPr>
             <a:xfrm>
-              <a:off x="6300914" y="2655498"/>
+              <a:off x="4695312" y="2463417"/>
               <a:ext cx="62384" cy="62384"/>
             </a:xfrm>
             <a:prstGeom prst="ellipse">
@@ -21616,7 +21616,7 @@
           </p:nvSpPr>
           <p:spPr>
             <a:xfrm>
-              <a:off x="6536143" y="2667249"/>
+              <a:off x="4847773" y="2473867"/>
               <a:ext cx="62384" cy="62384"/>
             </a:xfrm>
             <a:prstGeom prst="ellipse">
@@ -21642,7 +21642,7 @@
           </p:nvSpPr>
           <p:spPr>
             <a:xfrm>
-              <a:off x="6305555" y="2694721"/>
+              <a:off x="4750803" y="2498297"/>
               <a:ext cx="62384" cy="62384"/>
             </a:xfrm>
             <a:prstGeom prst="ellipse">
@@ -21668,7 +21668,7 @@
           </p:nvSpPr>
           <p:spPr>
             <a:xfrm>
-              <a:off x="6522809" y="2689105"/>
+              <a:off x="4880763" y="2493303"/>
               <a:ext cx="62384" cy="62384"/>
             </a:xfrm>
             <a:prstGeom prst="ellipse">
@@ -21694,7 +21694,7 @@
           </p:nvSpPr>
           <p:spPr>
             <a:xfrm>
-              <a:off x="6320779" y="2669966"/>
+              <a:off x="4733886" y="2476284"/>
               <a:ext cx="62384" cy="62384"/>
             </a:xfrm>
             <a:prstGeom prst="ellipse">
@@ -21720,7 +21720,7 @@
           </p:nvSpPr>
           <p:spPr>
             <a:xfrm>
-              <a:off x="6572456" y="2947870"/>
+              <a:off x="4835052" y="2723409"/>
               <a:ext cx="62384" cy="62384"/>
             </a:xfrm>
             <a:prstGeom prst="ellipse">
@@ -21746,7 +21746,7 @@
           </p:nvSpPr>
           <p:spPr>
             <a:xfrm>
-              <a:off x="6289822" y="2706737"/>
+              <a:off x="4727384" y="2508982"/>
               <a:ext cx="62384" cy="62384"/>
             </a:xfrm>
             <a:prstGeom prst="ellipse">
@@ -21772,7 +21772,7 @@
           </p:nvSpPr>
           <p:spPr>
             <a:xfrm>
-              <a:off x="6485516" y="2583343"/>
+              <a:off x="4865167" y="2399254"/>
               <a:ext cx="62384" cy="62384"/>
             </a:xfrm>
             <a:prstGeom prst="ellipse">
@@ -21798,7 +21798,7 @@
           </p:nvSpPr>
           <p:spPr>
             <a:xfrm>
-              <a:off x="6330764" y="3093591"/>
+              <a:off x="4716245" y="2852992"/>
               <a:ext cx="62384" cy="62384"/>
             </a:xfrm>
             <a:prstGeom prst="ellipse">
@@ -21824,7 +21824,7 @@
           </p:nvSpPr>
           <p:spPr>
             <a:xfrm>
-              <a:off x="6554946" y="2704696"/>
+              <a:off x="4891093" y="2507167"/>
               <a:ext cx="62384" cy="62384"/>
             </a:xfrm>
             <a:prstGeom prst="ellipse">
@@ -21850,7 +21850,7 @@
           </p:nvSpPr>
           <p:spPr>
             <a:xfrm>
-              <a:off x="6266175" y="3007428"/>
+              <a:off x="4680641" y="2776371"/>
               <a:ext cx="62384" cy="62384"/>
             </a:xfrm>
             <a:prstGeom prst="ellipse">
@@ -21876,7 +21876,7 @@
           </p:nvSpPr>
           <p:spPr>
             <a:xfrm>
-              <a:off x="6513320" y="2344373"/>
+              <a:off x="4860208" y="2186750"/>
               <a:ext cx="62384" cy="62384"/>
             </a:xfrm>
             <a:prstGeom prst="ellipse">
@@ -21902,7 +21902,7 @@
           </p:nvSpPr>
           <p:spPr>
             <a:xfrm>
-              <a:off x="6294718" y="3215843"/>
+              <a:off x="4697432" y="2961704"/>
               <a:ext cx="62384" cy="62384"/>
             </a:xfrm>
             <a:prstGeom prst="ellipse">
@@ -21928,7 +21928,7 @@
           </p:nvSpPr>
           <p:spPr>
             <a:xfrm>
-              <a:off x="6534628" y="3367287"/>
+              <a:off x="4849379" y="3096375"/>
               <a:ext cx="62384" cy="62384"/>
             </a:xfrm>
             <a:prstGeom prst="ellipse">
@@ -21954,7 +21954,7 @@
           </p:nvSpPr>
           <p:spPr>
             <a:xfrm>
-              <a:off x="6296516" y="2986750"/>
+              <a:off x="4689839" y="2757983"/>
               <a:ext cx="62384" cy="62384"/>
             </a:xfrm>
             <a:prstGeom prst="ellipse">
@@ -21980,7 +21980,7 @@
           </p:nvSpPr>
           <p:spPr>
             <a:xfrm>
-              <a:off x="6488814" y="2873324"/>
+              <a:off x="4869872" y="2657120"/>
               <a:ext cx="62384" cy="62384"/>
             </a:xfrm>
             <a:prstGeom prst="ellipse">
@@ -22006,7 +22006,7 @@
           </p:nvSpPr>
           <p:spPr>
             <a:xfrm>
-              <a:off x="6312710" y="2855718"/>
+              <a:off x="4702481" y="2641463"/>
               <a:ext cx="62384" cy="62384"/>
             </a:xfrm>
             <a:prstGeom prst="ellipse">
@@ -22032,7 +22032,7 @@
           </p:nvSpPr>
           <p:spPr>
             <a:xfrm>
-              <a:off x="6541908" y="2680726"/>
+              <a:off x="4849137" y="2485852"/>
               <a:ext cx="62384" cy="62384"/>
             </a:xfrm>
             <a:prstGeom prst="ellipse">
@@ -22058,7 +22058,7 @@
           </p:nvSpPr>
           <p:spPr>
             <a:xfrm>
-              <a:off x="6294478" y="2739751"/>
+              <a:off x="4747699" y="2538340"/>
               <a:ext cx="62384" cy="62384"/>
             </a:xfrm>
             <a:prstGeom prst="ellipse">
@@ -22084,7 +22084,7 @@
           </p:nvSpPr>
           <p:spPr>
             <a:xfrm>
-              <a:off x="6536849" y="2631563"/>
+              <a:off x="4877701" y="2442134"/>
               <a:ext cx="62384" cy="62384"/>
             </a:xfrm>
             <a:prstGeom prst="ellipse">
@@ -22110,7 +22110,7 @@
           </p:nvSpPr>
           <p:spPr>
             <a:xfrm>
-              <a:off x="6329144" y="2822484"/>
+              <a:off x="4687010" y="2611910"/>
               <a:ext cx="62384" cy="62384"/>
             </a:xfrm>
             <a:prstGeom prst="ellipse">
@@ -22136,7 +22136,7 @@
           </p:nvSpPr>
           <p:spPr>
             <a:xfrm>
-              <a:off x="6515028" y="3046975"/>
+              <a:off x="4892066" y="2811538"/>
               <a:ext cx="62384" cy="62384"/>
             </a:xfrm>
             <a:prstGeom prst="ellipse">
@@ -22162,7 +22162,7 @@
           </p:nvSpPr>
           <p:spPr>
             <a:xfrm>
-              <a:off x="6356886" y="2688205"/>
+              <a:off x="4743552" y="2492503"/>
               <a:ext cx="62384" cy="62384"/>
             </a:xfrm>
             <a:prstGeom prst="ellipse">
@@ -22188,7 +22188,7 @@
           </p:nvSpPr>
           <p:spPr>
             <a:xfrm>
-              <a:off x="6525692" y="2522607"/>
+              <a:off x="4894117" y="2345244"/>
               <a:ext cx="62384" cy="62384"/>
             </a:xfrm>
             <a:prstGeom prst="ellipse">
@@ -22214,7 +22214,7 @@
           </p:nvSpPr>
           <p:spPr>
             <a:xfrm>
-              <a:off x="6322521" y="2936779"/>
+              <a:off x="4730044" y="2713547"/>
               <a:ext cx="62384" cy="62384"/>
             </a:xfrm>
             <a:prstGeom prst="ellipse">
@@ -22240,7 +22240,7 @@
           </p:nvSpPr>
           <p:spPr>
             <a:xfrm>
-              <a:off x="6488022" y="2692807"/>
+              <a:off x="4869021" y="2496595"/>
               <a:ext cx="62384" cy="62384"/>
             </a:xfrm>
             <a:prstGeom prst="ellipse">
@@ -22266,7 +22266,7 @@
           </p:nvSpPr>
           <p:spPr>
             <a:xfrm>
-              <a:off x="6334802" y="2979422"/>
+              <a:off x="4694468" y="2751467"/>
               <a:ext cx="62384" cy="62384"/>
             </a:xfrm>
             <a:prstGeom prst="ellipse">
@@ -22292,7 +22292,7 @@
           </p:nvSpPr>
           <p:spPr>
             <a:xfrm>
-              <a:off x="6561893" y="3123067"/>
+              <a:off x="4865289" y="2879203"/>
               <a:ext cx="62384" cy="62384"/>
             </a:xfrm>
             <a:prstGeom prst="ellipse">
@@ -22318,7 +22318,7 @@
           </p:nvSpPr>
           <p:spPr>
             <a:xfrm>
-              <a:off x="6319921" y="2978346"/>
+              <a:off x="4680819" y="2750510"/>
               <a:ext cx="62384" cy="62384"/>
             </a:xfrm>
             <a:prstGeom prst="ellipse">
@@ -22344,7 +22344,7 @@
           </p:nvSpPr>
           <p:spPr>
             <a:xfrm>
-              <a:off x="6516520" y="2633005"/>
+              <a:off x="4899775" y="2443416"/>
               <a:ext cx="62384" cy="62384"/>
             </a:xfrm>
             <a:prstGeom prst="ellipse">
@@ -22370,7 +22370,7 @@
           </p:nvSpPr>
           <p:spPr>
             <a:xfrm>
-              <a:off x="6291632" y="2861126"/>
+              <a:off x="4695366" y="2646272"/>
               <a:ext cx="62384" cy="62384"/>
             </a:xfrm>
             <a:prstGeom prst="ellipse">
@@ -22396,7 +22396,7 @@
           </p:nvSpPr>
           <p:spPr>
             <a:xfrm>
-              <a:off x="6567186" y="2968187"/>
+              <a:off x="4834927" y="2741476"/>
               <a:ext cx="62384" cy="62384"/>
             </a:xfrm>
             <a:prstGeom prst="ellipse">
@@ -22422,7 +22422,7 @@
           </p:nvSpPr>
           <p:spPr>
             <a:xfrm>
-              <a:off x="6282935" y="2492238"/>
+              <a:off x="4693154" y="2318239"/>
               <a:ext cx="62384" cy="62384"/>
             </a:xfrm>
             <a:prstGeom prst="ellipse">
@@ -22448,7 +22448,7 @@
           </p:nvSpPr>
           <p:spPr>
             <a:xfrm>
-              <a:off x="6513384" y="2605675"/>
+              <a:off x="4836747" y="2419113"/>
               <a:ext cx="62384" cy="62384"/>
             </a:xfrm>
             <a:prstGeom prst="ellipse">
@@ -22474,7 +22474,7 @@
           </p:nvSpPr>
           <p:spPr>
             <a:xfrm>
-              <a:off x="6325728" y="2662645"/>
+              <a:off x="4735235" y="2469773"/>
               <a:ext cx="62384" cy="62384"/>
             </a:xfrm>
             <a:prstGeom prst="ellipse">
@@ -22500,7 +22500,7 @@
           </p:nvSpPr>
           <p:spPr>
             <a:xfrm>
-              <a:off x="6569843" y="2818387"/>
+              <a:off x="4881285" y="2608267"/>
               <a:ext cx="62384" cy="62384"/>
             </a:xfrm>
             <a:prstGeom prst="ellipse">
@@ -22526,7 +22526,7 @@
           </p:nvSpPr>
           <p:spPr>
             <a:xfrm>
-              <a:off x="6272508" y="2837944"/>
+              <a:off x="4742318" y="2625658"/>
               <a:ext cx="62384" cy="62384"/>
             </a:xfrm>
             <a:prstGeom prst="ellipse">
@@ -22552,7 +22552,7 @@
           </p:nvSpPr>
           <p:spPr>
             <a:xfrm>
-              <a:off x="6580250" y="2768696"/>
+              <a:off x="4853120" y="2564079"/>
               <a:ext cx="62384" cy="62384"/>
             </a:xfrm>
             <a:prstGeom prst="ellipse">
@@ -22578,7 +22578,7 @@
           </p:nvSpPr>
           <p:spPr>
             <a:xfrm>
-              <a:off x="6330518" y="2819365"/>
+              <a:off x="4693513" y="2609136"/>
               <a:ext cx="62384" cy="62384"/>
             </a:xfrm>
             <a:prstGeom prst="ellipse">
@@ -22604,7 +22604,7 @@
           </p:nvSpPr>
           <p:spPr>
             <a:xfrm>
-              <a:off x="6538218" y="2868790"/>
+              <a:off x="4852181" y="2653088"/>
               <a:ext cx="62384" cy="62384"/>
             </a:xfrm>
             <a:prstGeom prst="ellipse">
@@ -22630,7 +22630,7 @@
           </p:nvSpPr>
           <p:spPr>
             <a:xfrm>
-              <a:off x="6256217" y="2162186"/>
+              <a:off x="4701044" y="2024741"/>
               <a:ext cx="62384" cy="62384"/>
             </a:xfrm>
             <a:prstGeom prst="ellipse">
@@ -22656,7 +22656,7 @@
           </p:nvSpPr>
           <p:spPr>
             <a:xfrm>
-              <a:off x="6570330" y="2351505"/>
+              <a:off x="4865864" y="2193092"/>
               <a:ext cx="62384" cy="62384"/>
             </a:xfrm>
             <a:prstGeom prst="ellipse">
@@ -22682,7 +22682,7 @@
           </p:nvSpPr>
           <p:spPr>
             <a:xfrm>
-              <a:off x="6311831" y="2247486"/>
+              <a:off x="4722108" y="2100594"/>
               <a:ext cx="62384" cy="62384"/>
             </a:xfrm>
             <a:prstGeom prst="ellipse">
@@ -22708,7 +22708,7 @@
           </p:nvSpPr>
           <p:spPr>
             <a:xfrm>
-              <a:off x="6574225" y="2590746"/>
+              <a:off x="4853181" y="2405837"/>
               <a:ext cx="62384" cy="62384"/>
             </a:xfrm>
             <a:prstGeom prst="ellipse">
@@ -22734,7 +22734,7 @@
           </p:nvSpPr>
           <p:spPr>
             <a:xfrm>
-              <a:off x="6346860" y="1896541"/>
+              <a:off x="4741329" y="1788516"/>
               <a:ext cx="62384" cy="62384"/>
             </a:xfrm>
             <a:prstGeom prst="ellipse">
@@ -22760,7 +22760,7 @@
           </p:nvSpPr>
           <p:spPr>
             <a:xfrm>
-              <a:off x="6584049" y="2036842"/>
+              <a:off x="4854532" y="1913279"/>
               <a:ext cx="62384" cy="62384"/>
             </a:xfrm>
             <a:prstGeom prst="ellipse">
@@ -22786,7 +22786,7 @@
           </p:nvSpPr>
           <p:spPr>
             <a:xfrm>
-              <a:off x="6262171" y="2571628"/>
+              <a:off x="4724124" y="2388837"/>
               <a:ext cx="62384" cy="62384"/>
             </a:xfrm>
             <a:prstGeom prst="ellipse">
@@ -22812,7 +22812,7 @@
           </p:nvSpPr>
           <p:spPr>
             <a:xfrm>
-              <a:off x="6542193" y="2622970"/>
+              <a:off x="4845903" y="2434493"/>
               <a:ext cx="62384" cy="62384"/>
             </a:xfrm>
             <a:prstGeom prst="ellipse">
@@ -22838,7 +22838,7 @@
           </p:nvSpPr>
           <p:spPr>
             <a:xfrm>
-              <a:off x="6325494" y="2353997"/>
+              <a:off x="4708193" y="2195308"/>
               <a:ext cx="62384" cy="62384"/>
             </a:xfrm>
             <a:prstGeom prst="ellipse">
@@ -22864,7 +22864,7 @@
           </p:nvSpPr>
           <p:spPr>
             <a:xfrm>
-              <a:off x="6507465" y="2436639"/>
+              <a:off x="4879450" y="2268798"/>
               <a:ext cx="62384" cy="62384"/>
             </a:xfrm>
             <a:prstGeom prst="ellipse">
@@ -22890,7 +22890,7 @@
           </p:nvSpPr>
           <p:spPr>
             <a:xfrm>
-              <a:off x="6342660" y="2620537"/>
+              <a:off x="4750918" y="2432329"/>
               <a:ext cx="62384" cy="62384"/>
             </a:xfrm>
             <a:prstGeom prst="ellipse">
@@ -22916,7 +22916,7 @@
           </p:nvSpPr>
           <p:spPr>
             <a:xfrm>
-              <a:off x="6490971" y="2823412"/>
+              <a:off x="4832320" y="2612735"/>
               <a:ext cx="62384" cy="62384"/>
             </a:xfrm>
             <a:prstGeom prst="ellipse">
@@ -22942,7 +22942,7 @@
           </p:nvSpPr>
           <p:spPr>
             <a:xfrm>
-              <a:off x="6294525" y="3167329"/>
+              <a:off x="4735511" y="2918563"/>
               <a:ext cx="62384" cy="62384"/>
             </a:xfrm>
             <a:prstGeom prst="ellipse">
@@ -22968,7 +22968,7 @@
           </p:nvSpPr>
           <p:spPr>
             <a:xfrm>
-              <a:off x="6578252" y="3208722"/>
+              <a:off x="4900431" y="2955371"/>
               <a:ext cx="62384" cy="62384"/>
             </a:xfrm>
             <a:prstGeom prst="ellipse">
@@ -22994,7 +22994,7 @@
           </p:nvSpPr>
           <p:spPr>
             <a:xfrm>
-              <a:off x="6281519" y="2822307"/>
+              <a:off x="4748771" y="2611752"/>
               <a:ext cx="62384" cy="62384"/>
             </a:xfrm>
             <a:prstGeom prst="ellipse">
@@ -23020,7 +23020,7 @@
           </p:nvSpPr>
           <p:spPr>
             <a:xfrm>
-              <a:off x="6574510" y="2722391"/>
+              <a:off x="4839760" y="2522902"/>
               <a:ext cx="62384" cy="62384"/>
             </a:xfrm>
             <a:prstGeom prst="ellipse">
@@ -23046,7 +23046,7 @@
           </p:nvSpPr>
           <p:spPr>
             <a:xfrm>
-              <a:off x="6364157" y="2181004"/>
+              <a:off x="4747366" y="2041474"/>
               <a:ext cx="62384" cy="62384"/>
             </a:xfrm>
             <a:prstGeom prst="ellipse">
@@ -23072,7 +23072,7 @@
           </p:nvSpPr>
           <p:spPr>
             <a:xfrm>
-              <a:off x="6486251" y="2462458"/>
+              <a:off x="4867956" y="2291757"/>
               <a:ext cx="62384" cy="62384"/>
             </a:xfrm>
             <a:prstGeom prst="ellipse">
@@ -23098,7 +23098,7 @@
           </p:nvSpPr>
           <p:spPr>
             <a:xfrm>
-              <a:off x="6271950" y="2729484"/>
+              <a:off x="4687238" y="2529210"/>
               <a:ext cx="62384" cy="62384"/>
             </a:xfrm>
             <a:prstGeom prst="ellipse">
@@ -23124,7 +23124,7 @@
           </p:nvSpPr>
           <p:spPr>
             <a:xfrm>
-              <a:off x="6480181" y="2778050"/>
+              <a:off x="4864491" y="2572397"/>
               <a:ext cx="62384" cy="62384"/>
             </a:xfrm>
             <a:prstGeom prst="ellipse">
@@ -23150,7 +23150,7 @@
           </p:nvSpPr>
           <p:spPr>
             <a:xfrm>
-              <a:off x="6262521" y="2575582"/>
+              <a:off x="4729405" y="2392352"/>
               <a:ext cx="62384" cy="62384"/>
             </a:xfrm>
             <a:prstGeom prst="ellipse">
@@ -23176,7 +23176,7 @@
           </p:nvSpPr>
           <p:spPr>
             <a:xfrm>
-              <a:off x="6504805" y="2588613"/>
+              <a:off x="4900287" y="2403941"/>
               <a:ext cx="62384" cy="62384"/>
             </a:xfrm>
             <a:prstGeom prst="ellipse">
@@ -23202,7 +23202,7 @@
           </p:nvSpPr>
           <p:spPr>
             <a:xfrm>
-              <a:off x="6314391" y="2312602"/>
+              <a:off x="4717933" y="2158498"/>
               <a:ext cx="62384" cy="62384"/>
             </a:xfrm>
             <a:prstGeom prst="ellipse">
@@ -23228,7 +23228,7 @@
           </p:nvSpPr>
           <p:spPr>
             <a:xfrm>
-              <a:off x="6549418" y="2348881"/>
+              <a:off x="4875492" y="2190759"/>
               <a:ext cx="62384" cy="62384"/>
             </a:xfrm>
             <a:prstGeom prst="ellipse">
@@ -23254,7 +23254,7 @@
           </p:nvSpPr>
           <p:spPr>
             <a:xfrm>
-              <a:off x="6300125" y="2420398"/>
+              <a:off x="4685962" y="2254355"/>
               <a:ext cx="62384" cy="62384"/>
             </a:xfrm>
             <a:prstGeom prst="ellipse">
@@ -23280,7 +23280,7 @@
           </p:nvSpPr>
           <p:spPr>
             <a:xfrm>
-              <a:off x="6536011" y="2772019"/>
+              <a:off x="4844234" y="2567034"/>
               <a:ext cx="62384" cy="62384"/>
             </a:xfrm>
             <a:prstGeom prst="ellipse">
@@ -23306,7 +23306,7 @@
           </p:nvSpPr>
           <p:spPr>
             <a:xfrm>
-              <a:off x="6364532" y="2679327"/>
+              <a:off x="4702519" y="2484607"/>
               <a:ext cx="62384" cy="62384"/>
             </a:xfrm>
             <a:prstGeom prst="ellipse">
@@ -23332,7 +23332,7 @@
           </p:nvSpPr>
           <p:spPr>
             <a:xfrm>
-              <a:off x="6509459" y="2961811"/>
+              <a:off x="4845460" y="2735806"/>
               <a:ext cx="62384" cy="62384"/>
             </a:xfrm>
             <a:prstGeom prst="ellipse">
@@ -23358,7 +23358,7 @@
           </p:nvSpPr>
           <p:spPr>
             <a:xfrm>
-              <a:off x="6299192" y="2599663"/>
+              <a:off x="4729479" y="2413766"/>
               <a:ext cx="62384" cy="62384"/>
             </a:xfrm>
             <a:prstGeom prst="ellipse">
@@ -23384,7 +23384,7 @@
           </p:nvSpPr>
           <p:spPr>
             <a:xfrm>
-              <a:off x="6482348" y="2285579"/>
+              <a:off x="4857695" y="2134468"/>
               <a:ext cx="62384" cy="62384"/>
             </a:xfrm>
             <a:prstGeom prst="ellipse">
@@ -23410,7 +23410,7 @@
           </p:nvSpPr>
           <p:spPr>
             <a:xfrm>
-              <a:off x="6348801" y="2876938"/>
+              <a:off x="4684101" y="2660332"/>
               <a:ext cx="62384" cy="62384"/>
             </a:xfrm>
             <a:prstGeom prst="ellipse">
@@ -23436,7 +23436,7 @@
           </p:nvSpPr>
           <p:spPr>
             <a:xfrm>
-              <a:off x="6558051" y="2482400"/>
+              <a:off x="4877993" y="2309491"/>
               <a:ext cx="62384" cy="62384"/>
             </a:xfrm>
             <a:prstGeom prst="ellipse">
@@ -23462,7 +23462,7 @@
           </p:nvSpPr>
           <p:spPr>
             <a:xfrm>
-              <a:off x="6354063" y="3261739"/>
+              <a:off x="4737435" y="3002517"/>
               <a:ext cx="62384" cy="62384"/>
             </a:xfrm>
             <a:prstGeom prst="ellipse">
@@ -23488,7 +23488,7 @@
           </p:nvSpPr>
           <p:spPr>
             <a:xfrm>
-              <a:off x="6513543" y="2664434"/>
+              <a:off x="4857588" y="2471364"/>
               <a:ext cx="62384" cy="62384"/>
             </a:xfrm>
             <a:prstGeom prst="ellipse">
@@ -23514,7 +23514,7 @@
           </p:nvSpPr>
           <p:spPr>
             <a:xfrm>
-              <a:off x="6279379" y="2448198"/>
+              <a:off x="4707057" y="2279076"/>
               <a:ext cx="62384" cy="62384"/>
             </a:xfrm>
             <a:prstGeom prst="ellipse">
@@ -23540,7 +23540,7 @@
           </p:nvSpPr>
           <p:spPr>
             <a:xfrm>
-              <a:off x="6538249" y="2880452"/>
+              <a:off x="4833184" y="2663458"/>
               <a:ext cx="62384" cy="62384"/>
             </a:xfrm>
             <a:prstGeom prst="ellipse">
@@ -23566,7 +23566,7 @@
           </p:nvSpPr>
           <p:spPr>
             <a:xfrm>
-              <a:off x="6336033" y="2594106"/>
+              <a:off x="4734096" y="2408825"/>
               <a:ext cx="62384" cy="62384"/>
             </a:xfrm>
             <a:prstGeom prst="ellipse">
@@ -23592,7 +23592,7 @@
           </p:nvSpPr>
           <p:spPr>
             <a:xfrm>
-              <a:off x="6485997" y="2730119"/>
+              <a:off x="4874344" y="2529775"/>
               <a:ext cx="62384" cy="62384"/>
             </a:xfrm>
             <a:prstGeom prst="ellipse">
@@ -23618,7 +23618,7 @@
           </p:nvSpPr>
           <p:spPr>
             <a:xfrm>
-              <a:off x="6357683" y="2460548"/>
+              <a:off x="4691259" y="2290059"/>
               <a:ext cx="62384" cy="62384"/>
             </a:xfrm>
             <a:prstGeom prst="ellipse">
@@ -23644,7 +23644,7 @@
           </p:nvSpPr>
           <p:spPr>
             <a:xfrm>
-              <a:off x="6490070" y="2592096"/>
+              <a:off x="4842429" y="2407038"/>
               <a:ext cx="62384" cy="62384"/>
             </a:xfrm>
             <a:prstGeom prst="ellipse">
@@ -23670,7 +23670,7 @@
           </p:nvSpPr>
           <p:spPr>
             <a:xfrm>
-              <a:off x="6356661" y="2936588"/>
+              <a:off x="4695961" y="2713377"/>
               <a:ext cx="62384" cy="62384"/>
             </a:xfrm>
             <a:prstGeom prst="ellipse">
@@ -23696,7 +23696,7 @@
           </p:nvSpPr>
           <p:spPr>
             <a:xfrm>
-              <a:off x="6507074" y="2865719"/>
+              <a:off x="4881229" y="2650356"/>
               <a:ext cx="62384" cy="62384"/>
             </a:xfrm>
             <a:prstGeom prst="ellipse">
@@ -23722,7 +23722,7 @@
           </p:nvSpPr>
           <p:spPr>
             <a:xfrm>
-              <a:off x="6357317" y="2891669"/>
+              <a:off x="4700401" y="2673432"/>
               <a:ext cx="62384" cy="62384"/>
             </a:xfrm>
             <a:prstGeom prst="ellipse">
@@ -23748,7 +23748,7 @@
           </p:nvSpPr>
           <p:spPr>
             <a:xfrm>
-              <a:off x="6478517" y="2876608"/>
+              <a:off x="4842634" y="2660040"/>
               <a:ext cx="62384" cy="62384"/>
             </a:xfrm>
             <a:prstGeom prst="ellipse">
@@ -23774,7 +23774,7 @@
           </p:nvSpPr>
           <p:spPr>
             <a:xfrm>
-              <a:off x="6317745" y="2739604"/>
+              <a:off x="4728208" y="2538209"/>
               <a:ext cx="62384" cy="62384"/>
             </a:xfrm>
             <a:prstGeom prst="ellipse">
@@ -23800,7 +23800,7 @@
           </p:nvSpPr>
           <p:spPr>
             <a:xfrm>
-              <a:off x="6558173" y="2891225"/>
+              <a:off x="4897336" y="2673037"/>
               <a:ext cx="62384" cy="62384"/>
             </a:xfrm>
             <a:prstGeom prst="ellipse">
@@ -23826,7 +23826,7 @@
           </p:nvSpPr>
           <p:spPr>
             <a:xfrm>
-              <a:off x="6267416" y="2827451"/>
+              <a:off x="4726522" y="2616327"/>
               <a:ext cx="62384" cy="62384"/>
             </a:xfrm>
             <a:prstGeom prst="ellipse">
@@ -23852,7 +23852,7 @@
           </p:nvSpPr>
           <p:spPr>
             <a:xfrm>
-              <a:off x="6566756" y="2997073"/>
+              <a:off x="4872144" y="2767163"/>
               <a:ext cx="62384" cy="62384"/>
             </a:xfrm>
             <a:prstGeom prst="ellipse">
@@ -23878,7 +23878,7 @@
           </p:nvSpPr>
           <p:spPr>
             <a:xfrm>
-              <a:off x="6306764" y="2810100"/>
+              <a:off x="4689650" y="2600897"/>
               <a:ext cx="62384" cy="62384"/>
             </a:xfrm>
             <a:prstGeom prst="ellipse">
@@ -23904,7 +23904,7 @@
           </p:nvSpPr>
           <p:spPr>
             <a:xfrm>
-              <a:off x="6531352" y="2582351"/>
+              <a:off x="4888949" y="2398371"/>
               <a:ext cx="62384" cy="62384"/>
             </a:xfrm>
             <a:prstGeom prst="ellipse">
@@ -23930,7 +23930,7 @@
           </p:nvSpPr>
           <p:spPr>
             <a:xfrm>
-              <a:off x="6314247" y="2312422"/>
+              <a:off x="4683715" y="2158338"/>
               <a:ext cx="62384" cy="62384"/>
             </a:xfrm>
             <a:prstGeom prst="ellipse">
@@ -23956,7 +23956,7 @@
           </p:nvSpPr>
           <p:spPr>
             <a:xfrm>
-              <a:off x="6517458" y="2731162"/>
+              <a:off x="4898571" y="2530702"/>
               <a:ext cx="62384" cy="62384"/>
             </a:xfrm>
             <a:prstGeom prst="ellipse">
@@ -23982,7 +23982,7 @@
           </p:nvSpPr>
           <p:spPr>
             <a:xfrm>
-              <a:off x="6317654" y="2828065"/>
+              <a:off x="4747168" y="2616873"/>
               <a:ext cx="62384" cy="62384"/>
             </a:xfrm>
             <a:prstGeom prst="ellipse">
@@ -24008,7 +24008,7 @@
           </p:nvSpPr>
           <p:spPr>
             <a:xfrm>
-              <a:off x="6546932" y="3149941"/>
+              <a:off x="4863317" y="2903100"/>
               <a:ext cx="62384" cy="62384"/>
             </a:xfrm>
             <a:prstGeom prst="ellipse">
@@ -24034,7 +24034,7 @@
           </p:nvSpPr>
           <p:spPr>
             <a:xfrm>
-              <a:off x="6274145" y="2724084"/>
+              <a:off x="4684433" y="2524408"/>
               <a:ext cx="62384" cy="62384"/>
             </a:xfrm>
             <a:prstGeom prst="ellipse">
@@ -24060,7 +24060,7 @@
           </p:nvSpPr>
           <p:spPr>
             <a:xfrm>
-              <a:off x="6572801" y="2558044"/>
+              <a:off x="4868204" y="2376757"/>
               <a:ext cx="62384" cy="62384"/>
             </a:xfrm>
             <a:prstGeom prst="ellipse">
@@ -24086,7 +24086,7 @@
           </p:nvSpPr>
           <p:spPr>
             <a:xfrm>
-              <a:off x="6283130" y="2671989"/>
+              <a:off x="4727053" y="2478082"/>
               <a:ext cx="62384" cy="62384"/>
             </a:xfrm>
             <a:prstGeom prst="ellipse">
@@ -24112,7 +24112,7 @@
           </p:nvSpPr>
           <p:spPr>
             <a:xfrm>
-              <a:off x="6548264" y="3168374"/>
+              <a:off x="4901069" y="2919492"/>
               <a:ext cx="62384" cy="62384"/>
             </a:xfrm>
             <a:prstGeom prst="ellipse">
@@ -24138,7 +24138,7 @@
           </p:nvSpPr>
           <p:spPr>
             <a:xfrm>
-              <a:off x="6309715" y="2908024"/>
+              <a:off x="4691923" y="2687976"/>
               <a:ext cx="62384" cy="62384"/>
             </a:xfrm>
             <a:prstGeom prst="ellipse">
@@ -24164,7 +24164,7 @@
           </p:nvSpPr>
           <p:spPr>
             <a:xfrm>
-              <a:off x="6569403" y="2503749"/>
+              <a:off x="4828926" y="2328475"/>
               <a:ext cx="62384" cy="62384"/>
             </a:xfrm>
             <a:prstGeom prst="ellipse">
@@ -24190,7 +24190,7 @@
           </p:nvSpPr>
           <p:spPr>
             <a:xfrm>
-              <a:off x="6357343" y="2320254"/>
+              <a:off x="4715159" y="2165302"/>
               <a:ext cx="62384" cy="62384"/>
             </a:xfrm>
             <a:prstGeom prst="ellipse">
@@ -24216,7 +24216,7 @@
           </p:nvSpPr>
           <p:spPr>
             <a:xfrm>
-              <a:off x="6478850" y="2520700"/>
+              <a:off x="4847411" y="2343548"/>
               <a:ext cx="62384" cy="62384"/>
             </a:xfrm>
             <a:prstGeom prst="ellipse">
@@ -24242,7 +24242,7 @@
           </p:nvSpPr>
           <p:spPr>
             <a:xfrm>
-              <a:off x="6326668" y="2861108"/>
+              <a:off x="4723840" y="2646256"/>
               <a:ext cx="62384" cy="62384"/>
             </a:xfrm>
             <a:prstGeom prst="ellipse">
@@ -24268,7 +24268,7 @@
           </p:nvSpPr>
           <p:spPr>
             <a:xfrm>
-              <a:off x="6543484" y="2911030"/>
+              <a:off x="4857421" y="2690649"/>
               <a:ext cx="62384" cy="62384"/>
             </a:xfrm>
             <a:prstGeom prst="ellipse">
@@ -24294,7 +24294,7 @@
           </p:nvSpPr>
           <p:spPr>
             <a:xfrm>
-              <a:off x="6327992" y="2689744"/>
+              <a:off x="4704572" y="2493871"/>
               <a:ext cx="62384" cy="62384"/>
             </a:xfrm>
             <a:prstGeom prst="ellipse">
@@ -24320,7 +24320,7 @@
           </p:nvSpPr>
           <p:spPr>
             <a:xfrm>
-              <a:off x="6511554" y="2926969"/>
+              <a:off x="4831153" y="2704823"/>
               <a:ext cx="62384" cy="62384"/>
             </a:xfrm>
             <a:prstGeom prst="ellipse">
@@ -24346,7 +24346,7 @@
           </p:nvSpPr>
           <p:spPr>
             <a:xfrm>
-              <a:off x="6363730" y="2868815"/>
+              <a:off x="4727255" y="2653109"/>
               <a:ext cx="62384" cy="62384"/>
             </a:xfrm>
             <a:prstGeom prst="ellipse">
@@ -24372,7 +24372,7 @@
           </p:nvSpPr>
           <p:spPr>
             <a:xfrm>
-              <a:off x="6584532" y="2583284"/>
+              <a:off x="4886355" y="2399201"/>
               <a:ext cx="62384" cy="62384"/>
             </a:xfrm>
             <a:prstGeom prst="ellipse">
@@ -24398,7 +24398,7 @@
           </p:nvSpPr>
           <p:spPr>
             <a:xfrm>
-              <a:off x="6340676" y="2704448"/>
+              <a:off x="4727324" y="2506946"/>
               <a:ext cx="62384" cy="62384"/>
             </a:xfrm>
             <a:prstGeom prst="ellipse">
@@ -24424,7 +24424,7 @@
           </p:nvSpPr>
           <p:spPr>
             <a:xfrm>
-              <a:off x="6548524" y="2521129"/>
+              <a:off x="4883376" y="2343931"/>
               <a:ext cx="62384" cy="62384"/>
             </a:xfrm>
             <a:prstGeom prst="ellipse">
@@ -24450,7 +24450,7 @@
           </p:nvSpPr>
           <p:spPr>
             <a:xfrm>
-              <a:off x="6329411" y="2869350"/>
+              <a:off x="4715241" y="2653586"/>
               <a:ext cx="62384" cy="62384"/>
             </a:xfrm>
             <a:prstGeom prst="ellipse">
@@ -24476,7 +24476,7 @@
           </p:nvSpPr>
           <p:spPr>
             <a:xfrm>
-              <a:off x="6550080" y="2682364"/>
+              <a:off x="4829129" y="2487308"/>
               <a:ext cx="62384" cy="62384"/>
             </a:xfrm>
             <a:prstGeom prst="ellipse">
@@ -24502,7 +24502,7 @@
           </p:nvSpPr>
           <p:spPr>
             <a:xfrm>
-              <a:off x="6304624" y="2415240"/>
+              <a:off x="4735091" y="2249769"/>
               <a:ext cx="62384" cy="62384"/>
             </a:xfrm>
             <a:prstGeom prst="ellipse">
@@ -24528,7 +24528,7 @@
           </p:nvSpPr>
           <p:spPr>
             <a:xfrm>
-              <a:off x="6482621" y="2501194"/>
+              <a:off x="4893124" y="2326204"/>
               <a:ext cx="62384" cy="62384"/>
             </a:xfrm>
             <a:prstGeom prst="ellipse">
@@ -24554,7 +24554,7 @@
           </p:nvSpPr>
           <p:spPr>
             <a:xfrm>
-              <a:off x="6281170" y="2611990"/>
+              <a:off x="4747750" y="2424729"/>
               <a:ext cx="62384" cy="62384"/>
             </a:xfrm>
             <a:prstGeom prst="ellipse">
@@ -24580,7 +24580,7 @@
           </p:nvSpPr>
           <p:spPr>
             <a:xfrm>
-              <a:off x="6526858" y="2976134"/>
+              <a:off x="4839088" y="2748542"/>
               <a:ext cx="62384" cy="62384"/>
             </a:xfrm>
             <a:prstGeom prst="ellipse">
@@ -24606,7 +24606,7 @@
           </p:nvSpPr>
           <p:spPr>
             <a:xfrm>
-              <a:off x="6292558" y="2809178"/>
+              <a:off x="4741065" y="2600077"/>
               <a:ext cx="62384" cy="62384"/>
             </a:xfrm>
             <a:prstGeom prst="ellipse">
@@ -24632,7 +24632,7 @@
           </p:nvSpPr>
           <p:spPr>
             <a:xfrm>
-              <a:off x="6555212" y="2485306"/>
+              <a:off x="4848223" y="2312075"/>
               <a:ext cx="62384" cy="62384"/>
             </a:xfrm>
             <a:prstGeom prst="ellipse">
@@ -24658,7 +24658,7 @@
           </p:nvSpPr>
           <p:spPr>
             <a:xfrm>
-              <a:off x="6363364" y="2263235"/>
+              <a:off x="4685573" y="2114599"/>
               <a:ext cx="62384" cy="62384"/>
             </a:xfrm>
             <a:prstGeom prst="ellipse">
@@ -24684,7 +24684,7 @@
           </p:nvSpPr>
           <p:spPr>
             <a:xfrm>
-              <a:off x="6501539" y="2436140"/>
+              <a:off x="4837854" y="2268354"/>
               <a:ext cx="62384" cy="62384"/>
             </a:xfrm>
             <a:prstGeom prst="ellipse">
@@ -24710,7 +24710,7 @@
           </p:nvSpPr>
           <p:spPr>
             <a:xfrm>
-              <a:off x="6343229" y="2527164"/>
+              <a:off x="4713813" y="2349297"/>
               <a:ext cx="62384" cy="62384"/>
             </a:xfrm>
             <a:prstGeom prst="ellipse">
@@ -24736,7 +24736,7 @@
           </p:nvSpPr>
           <p:spPr>
             <a:xfrm>
-              <a:off x="6514397" y="2671012"/>
+              <a:off x="4876455" y="2477214"/>
               <a:ext cx="62384" cy="62384"/>
             </a:xfrm>
             <a:prstGeom prst="ellipse">
@@ -24762,7 +24762,7 @@
           </p:nvSpPr>
           <p:spPr>
             <a:xfrm>
-              <a:off x="6299724" y="2679355"/>
+              <a:off x="4706631" y="2484633"/>
               <a:ext cx="62384" cy="62384"/>
             </a:xfrm>
             <a:prstGeom prst="ellipse">
@@ -24788,7 +24788,7 @@
           </p:nvSpPr>
           <p:spPr>
             <a:xfrm>
-              <a:off x="6582613" y="2818594"/>
+              <a:off x="4902309" y="2608450"/>
               <a:ext cx="62384" cy="62384"/>
             </a:xfrm>
             <a:prstGeom prst="ellipse">
@@ -24814,7 +24814,7 @@
           </p:nvSpPr>
           <p:spPr>
             <a:xfrm>
-              <a:off x="6360979" y="3250016"/>
+              <a:off x="4722764" y="2992092"/>
               <a:ext cx="62384" cy="62384"/>
             </a:xfrm>
             <a:prstGeom prst="ellipse">
@@ -24840,7 +24840,7 @@
           </p:nvSpPr>
           <p:spPr>
             <a:xfrm>
-              <a:off x="6543225" y="3251814"/>
+              <a:off x="4878032" y="2993690"/>
               <a:ext cx="62384" cy="62384"/>
             </a:xfrm>
             <a:prstGeom prst="ellipse">
@@ -24866,7 +24866,7 @@
           </p:nvSpPr>
           <p:spPr>
             <a:xfrm>
-              <a:off x="6300338" y="3847333"/>
+              <a:off x="4726585" y="3523255"/>
               <a:ext cx="62384" cy="62384"/>
             </a:xfrm>
             <a:prstGeom prst="ellipse">
@@ -24892,7 +24892,7 @@
           </p:nvSpPr>
           <p:spPr>
             <a:xfrm>
-              <a:off x="6524013" y="3561538"/>
+              <a:off x="4871983" y="3269113"/>
               <a:ext cx="62384" cy="62384"/>
             </a:xfrm>
             <a:prstGeom prst="ellipse">
@@ -24918,7 +24918,7 @@
           </p:nvSpPr>
           <p:spPr>
             <a:xfrm>
-              <a:off x="6269936" y="2413328"/>
+              <a:off x="4706067" y="2248068"/>
               <a:ext cx="62384" cy="62384"/>
             </a:xfrm>
             <a:prstGeom prst="ellipse">
@@ -24944,7 +24944,7 @@
           </p:nvSpPr>
           <p:spPr>
             <a:xfrm>
-              <a:off x="6533413" y="2651693"/>
+              <a:off x="4899421" y="2460034"/>
               <a:ext cx="62384" cy="62384"/>
             </a:xfrm>
             <a:prstGeom prst="ellipse">
@@ -24970,7 +24970,7 @@
           </p:nvSpPr>
           <p:spPr>
             <a:xfrm>
-              <a:off x="6275589" y="2109934"/>
+              <a:off x="4700342" y="1978275"/>
               <a:ext cx="62384" cy="62384"/>
             </a:xfrm>
             <a:prstGeom prst="ellipse">
@@ -24996,7 +24996,7 @@
           </p:nvSpPr>
           <p:spPr>
             <a:xfrm>
-              <a:off x="6487260" y="2443183"/>
+              <a:off x="4859176" y="2274617"/>
               <a:ext cx="62384" cy="62384"/>
             </a:xfrm>
             <a:prstGeom prst="ellipse">
@@ -25022,7 +25022,7 @@
           </p:nvSpPr>
           <p:spPr>
             <a:xfrm>
-              <a:off x="6356715" y="3070198"/>
+              <a:off x="4695629" y="2832189"/>
               <a:ext cx="62384" cy="62384"/>
             </a:xfrm>
             <a:prstGeom prst="ellipse">
@@ -25048,7 +25048,7 @@
           </p:nvSpPr>
           <p:spPr>
             <a:xfrm>
-              <a:off x="6584731" y="2688976"/>
+              <a:off x="4850158" y="2493188"/>
               <a:ext cx="62384" cy="62384"/>
             </a:xfrm>
             <a:prstGeom prst="ellipse">
@@ -25074,7 +25074,7 @@
           </p:nvSpPr>
           <p:spPr>
             <a:xfrm>
-              <a:off x="6347513" y="2824802"/>
+              <a:off x="4686158" y="2613971"/>
               <a:ext cx="62384" cy="62384"/>
             </a:xfrm>
             <a:prstGeom prst="ellipse">
@@ -25100,7 +25100,7 @@
           </p:nvSpPr>
           <p:spPr>
             <a:xfrm>
-              <a:off x="6557031" y="2569513"/>
+              <a:off x="4851552" y="2386955"/>
               <a:ext cx="62384" cy="62384"/>
             </a:xfrm>
             <a:prstGeom prst="ellipse">
@@ -25126,7 +25126,7 @@
           </p:nvSpPr>
           <p:spPr>
             <a:xfrm>
-              <a:off x="6325447" y="2581611"/>
+              <a:off x="4684978" y="2397714"/>
               <a:ext cx="62384" cy="62384"/>
             </a:xfrm>
             <a:prstGeom prst="ellipse">
@@ -25152,7 +25152,7 @@
           </p:nvSpPr>
           <p:spPr>
             <a:xfrm>
-              <a:off x="6563354" y="2554183"/>
+              <a:off x="4850861" y="2373323"/>
               <a:ext cx="62384" cy="62384"/>
             </a:xfrm>
             <a:prstGeom prst="ellipse">
@@ -25178,7 +25178,7 @@
           </p:nvSpPr>
           <p:spPr>
             <a:xfrm>
-              <a:off x="6319096" y="2797000"/>
+              <a:off x="4708120" y="2589248"/>
               <a:ext cx="62384" cy="62384"/>
             </a:xfrm>
             <a:prstGeom prst="ellipse">
@@ -25204,7 +25204,7 @@
           </p:nvSpPr>
           <p:spPr>
             <a:xfrm>
-              <a:off x="6518254" y="2662381"/>
+              <a:off x="4887692" y="2469538"/>
               <a:ext cx="62384" cy="62384"/>
             </a:xfrm>
             <a:prstGeom prst="ellipse">
@@ -25230,7 +25230,7 @@
           </p:nvSpPr>
           <p:spPr>
             <a:xfrm>
-              <a:off x="6338743" y="2581513"/>
+              <a:off x="4738764" y="2397627"/>
               <a:ext cx="62384" cy="62384"/>
             </a:xfrm>
             <a:prstGeom prst="ellipse">
@@ -25256,7 +25256,7 @@
           </p:nvSpPr>
           <p:spPr>
             <a:xfrm>
-              <a:off x="6554161" y="2655177"/>
+              <a:off x="4863453" y="2463132"/>
               <a:ext cx="62384" cy="62384"/>
             </a:xfrm>
             <a:prstGeom prst="ellipse">
@@ -25282,15 +25282,15 @@
           </p:nvSpPr>
           <p:spPr>
             <a:xfrm>
-              <a:off x="1764046" y="2439328"/>
-              <a:ext cx="0" cy="466436"/>
+              <a:off x="1630325" y="2274644"/>
+              <a:ext cx="0" cy="414778"/>
             </a:xfrm>
             <a:custGeom>
               <a:avLst/>
               <a:pathLst>
-                <a:path w="0" h="466436">
+                <a:path w="0" h="414778">
                   <a:moveTo>
-                    <a:pt x="0" y="466436"/>
+                    <a:pt x="0" y="414778"/>
                   </a:moveTo>
                   <a:lnTo>
                     <a:pt x="0" y="0"/>
@@ -25322,18 +25322,18 @@
           </p:nvSpPr>
           <p:spPr>
             <a:xfrm>
-              <a:off x="1764046" y="3320657"/>
-              <a:ext cx="0" cy="598814"/>
+              <a:off x="1630325" y="3058364"/>
+              <a:ext cx="0" cy="532494"/>
             </a:xfrm>
             <a:custGeom>
               <a:avLst/>
               <a:pathLst>
-                <a:path w="0" h="598814">
+                <a:path w="0" h="532494">
                   <a:moveTo>
                     <a:pt x="0" y="0"/>
                   </a:moveTo>
                   <a:lnTo>
-                    <a:pt x="0" y="598814"/>
+                    <a:pt x="0" y="532494"/>
                   </a:lnTo>
                 </a:path>
               </a:pathLst>
@@ -25362,24 +25362,24 @@
           </p:nvSpPr>
           <p:spPr>
             <a:xfrm>
-              <a:off x="1653962" y="2905765"/>
-              <a:ext cx="220168" cy="414891"/>
+              <a:off x="1555382" y="2689422"/>
+              <a:ext cx="149886" cy="368941"/>
             </a:xfrm>
             <a:custGeom>
               <a:avLst/>
               <a:pathLst>
-                <a:path w="220168" h="414891">
+                <a:path w="149886" h="368941">
                   <a:moveTo>
                     <a:pt x="0" y="0"/>
                   </a:moveTo>
                   <a:lnTo>
-                    <a:pt x="0" y="414891"/>
+                    <a:pt x="0" y="368941"/>
                   </a:lnTo>
                   <a:lnTo>
-                    <a:pt x="220168" y="414891"/>
+                    <a:pt x="149886" y="368941"/>
                   </a:lnTo>
                   <a:lnTo>
-                    <a:pt x="220168" y="0"/>
+                    <a:pt x="149886" y="0"/>
                   </a:lnTo>
                   <a:close/>
                 </a:path>
@@ -25409,18 +25409,18 @@
           </p:nvSpPr>
           <p:spPr>
             <a:xfrm>
-              <a:off x="1653962" y="3143846"/>
-              <a:ext cx="220168" cy="0"/>
+              <a:off x="1555382" y="2901135"/>
+              <a:ext cx="149886" cy="0"/>
             </a:xfrm>
             <a:custGeom>
               <a:avLst/>
               <a:pathLst>
-                <a:path w="220168" h="0">
+                <a:path w="149886" h="0">
                   <a:moveTo>
                     <a:pt x="0" y="0"/>
                   </a:moveTo>
                   <a:lnTo>
-                    <a:pt x="220168" y="0"/>
+                    <a:pt x="149886" y="0"/>
                   </a:lnTo>
                 </a:path>
               </a:pathLst>
@@ -25449,15 +25449,15 @@
           </p:nvSpPr>
           <p:spPr>
             <a:xfrm>
-              <a:off x="3290141" y="2211345"/>
-              <a:ext cx="0" cy="442759"/>
+              <a:off x="2669258" y="2071910"/>
+              <a:ext cx="0" cy="393723"/>
             </a:xfrm>
             <a:custGeom>
               <a:avLst/>
               <a:pathLst>
-                <a:path w="0" h="442759">
+                <a:path w="0" h="393723">
                   <a:moveTo>
-                    <a:pt x="0" y="442759"/>
+                    <a:pt x="0" y="393723"/>
                   </a:moveTo>
                   <a:lnTo>
                     <a:pt x="0" y="0"/>
@@ -25489,18 +25489,18 @@
           </p:nvSpPr>
           <p:spPr>
             <a:xfrm>
-              <a:off x="3290141" y="3082870"/>
-              <a:ext cx="0" cy="617904"/>
+              <a:off x="2669258" y="2846912"/>
+              <a:ext cx="0" cy="549470"/>
             </a:xfrm>
             <a:custGeom>
               <a:avLst/>
               <a:pathLst>
-                <a:path w="0" h="617904">
+                <a:path w="0" h="549470">
                   <a:moveTo>
                     <a:pt x="0" y="0"/>
                   </a:moveTo>
                   <a:lnTo>
-                    <a:pt x="0" y="617904"/>
+                    <a:pt x="0" y="549470"/>
                   </a:lnTo>
                 </a:path>
               </a:pathLst>
@@ -25529,24 +25529,24 @@
           </p:nvSpPr>
           <p:spPr>
             <a:xfrm>
-              <a:off x="3180057" y="2654105"/>
-              <a:ext cx="220168" cy="428764"/>
+              <a:off x="2594315" y="2465634"/>
+              <a:ext cx="149886" cy="381278"/>
             </a:xfrm>
             <a:custGeom>
               <a:avLst/>
               <a:pathLst>
-                <a:path w="220168" h="428764">
+                <a:path w="149886" h="381278">
                   <a:moveTo>
                     <a:pt x="0" y="0"/>
                   </a:moveTo>
                   <a:lnTo>
-                    <a:pt x="0" y="428764"/>
+                    <a:pt x="0" y="381278"/>
                   </a:lnTo>
                   <a:lnTo>
-                    <a:pt x="220168" y="428764"/>
+                    <a:pt x="149886" y="381278"/>
                   </a:lnTo>
                   <a:lnTo>
-                    <a:pt x="220168" y="0"/>
+                    <a:pt x="149886" y="0"/>
                   </a:lnTo>
                   <a:close/>
                 </a:path>
@@ -25576,18 +25576,18 @@
           </p:nvSpPr>
           <p:spPr>
             <a:xfrm>
-              <a:off x="3180057" y="2821945"/>
-              <a:ext cx="220168" cy="0"/>
+              <a:off x="2594315" y="2614885"/>
+              <a:ext cx="149886" cy="0"/>
             </a:xfrm>
             <a:custGeom>
               <a:avLst/>
               <a:pathLst>
-                <a:path w="220168" h="0">
+                <a:path w="149886" h="0">
                   <a:moveTo>
                     <a:pt x="0" y="0"/>
                   </a:moveTo>
                   <a:lnTo>
-                    <a:pt x="220168" y="0"/>
+                    <a:pt x="149886" y="0"/>
                   </a:lnTo>
                 </a:path>
               </a:pathLst>
@@ -25616,15 +25616,15 @@
           </p:nvSpPr>
           <p:spPr>
             <a:xfrm>
-              <a:off x="4816236" y="1783213"/>
-              <a:ext cx="0" cy="586082"/>
+              <a:off x="3708191" y="1691195"/>
+              <a:ext cx="0" cy="521172"/>
             </a:xfrm>
             <a:custGeom>
               <a:avLst/>
               <a:pathLst>
-                <a:path w="0" h="586082">
+                <a:path w="0" h="521172">
                   <a:moveTo>
-                    <a:pt x="0" y="586082"/>
+                    <a:pt x="0" y="521172"/>
                   </a:moveTo>
                   <a:lnTo>
                     <a:pt x="0" y="0"/>
@@ -25656,18 +25656,18 @@
           </p:nvSpPr>
           <p:spPr>
             <a:xfrm>
-              <a:off x="4816236" y="2910253"/>
-              <a:ext cx="0" cy="806861"/>
+              <a:off x="3708191" y="2693413"/>
+              <a:ext cx="0" cy="717499"/>
             </a:xfrm>
             <a:custGeom>
               <a:avLst/>
               <a:pathLst>
-                <a:path w="0" h="806861">
+                <a:path w="0" h="717499">
                   <a:moveTo>
                     <a:pt x="0" y="0"/>
                   </a:moveTo>
                   <a:lnTo>
-                    <a:pt x="0" y="806861"/>
+                    <a:pt x="0" y="717499"/>
                   </a:lnTo>
                 </a:path>
               </a:pathLst>
@@ -25696,24 +25696,24 @@
           </p:nvSpPr>
           <p:spPr>
             <a:xfrm>
-              <a:off x="4706151" y="2369296"/>
-              <a:ext cx="220168" cy="540957"/>
+              <a:off x="3633248" y="2212367"/>
+              <a:ext cx="149886" cy="481045"/>
             </a:xfrm>
             <a:custGeom>
               <a:avLst/>
               <a:pathLst>
-                <a:path w="220168" h="540957">
+                <a:path w="149886" h="481045">
                   <a:moveTo>
                     <a:pt x="0" y="0"/>
                   </a:moveTo>
                   <a:lnTo>
-                    <a:pt x="0" y="540957"/>
+                    <a:pt x="0" y="481045"/>
                   </a:lnTo>
                   <a:lnTo>
-                    <a:pt x="220168" y="540957"/>
+                    <a:pt x="149886" y="481045"/>
                   </a:lnTo>
                   <a:lnTo>
-                    <a:pt x="220168" y="0"/>
+                    <a:pt x="149886" y="0"/>
                   </a:lnTo>
                   <a:close/>
                 </a:path>
@@ -25743,18 +25743,18 @@
           </p:nvSpPr>
           <p:spPr>
             <a:xfrm>
-              <a:off x="4706151" y="2628627"/>
-              <a:ext cx="220168" cy="0"/>
+              <a:off x="3633248" y="2442977"/>
+              <a:ext cx="149886" cy="0"/>
             </a:xfrm>
             <a:custGeom>
               <a:avLst/>
               <a:pathLst>
-                <a:path w="220168" h="0">
+                <a:path w="149886" h="0">
                   <a:moveTo>
                     <a:pt x="0" y="0"/>
                   </a:moveTo>
                   <a:lnTo>
-                    <a:pt x="220168" y="0"/>
+                    <a:pt x="149886" y="0"/>
                   </a:lnTo>
                 </a:path>
               </a:pathLst>
@@ -25783,15 +25783,15 @@
           </p:nvSpPr>
           <p:spPr>
             <a:xfrm>
-              <a:off x="6342330" y="1912716"/>
-              <a:ext cx="0" cy="590721"/>
+              <a:off x="4747124" y="1806354"/>
+              <a:ext cx="0" cy="525297"/>
             </a:xfrm>
             <a:custGeom>
               <a:avLst/>
               <a:pathLst>
-                <a:path w="0" h="590721">
+                <a:path w="0" h="525297">
                   <a:moveTo>
-                    <a:pt x="0" y="590721"/>
+                    <a:pt x="0" y="525297"/>
                   </a:moveTo>
                   <a:lnTo>
                     <a:pt x="0" y="0"/>
@@ -25823,18 +25823,18 @@
           </p:nvSpPr>
           <p:spPr>
             <a:xfrm>
-              <a:off x="6342330" y="2922861"/>
-              <a:ext cx="0" cy="575376"/>
+              <a:off x="4747124" y="2704625"/>
+              <a:ext cx="0" cy="511652"/>
             </a:xfrm>
             <a:custGeom>
               <a:avLst/>
               <a:pathLst>
-                <a:path w="0" h="575376">
+                <a:path w="0" h="511652">
                   <a:moveTo>
                     <a:pt x="0" y="0"/>
                   </a:moveTo>
                   <a:lnTo>
-                    <a:pt x="0" y="575376"/>
+                    <a:pt x="0" y="511652"/>
                   </a:lnTo>
                 </a:path>
               </a:pathLst>
@@ -25863,24 +25863,24 @@
           </p:nvSpPr>
           <p:spPr>
             <a:xfrm>
-              <a:off x="6232246" y="2503437"/>
-              <a:ext cx="220168" cy="419424"/>
+              <a:off x="4672181" y="2331652"/>
+              <a:ext cx="149886" cy="372972"/>
             </a:xfrm>
             <a:custGeom>
               <a:avLst/>
               <a:pathLst>
-                <a:path w="220168" h="419424">
+                <a:path w="149886" h="372972">
                   <a:moveTo>
                     <a:pt x="0" y="0"/>
                   </a:moveTo>
                   <a:lnTo>
-                    <a:pt x="0" y="419424"/>
+                    <a:pt x="0" y="372972"/>
                   </a:lnTo>
                   <a:lnTo>
-                    <a:pt x="220168" y="419424"/>
+                    <a:pt x="149886" y="372972"/>
                   </a:lnTo>
                   <a:lnTo>
-                    <a:pt x="220168" y="0"/>
+                    <a:pt x="149886" y="0"/>
                   </a:lnTo>
                   <a:close/>
                 </a:path>
@@ -25910,18 +25910,18 @@
           </p:nvSpPr>
           <p:spPr>
             <a:xfrm>
-              <a:off x="6232246" y="2735640"/>
-              <a:ext cx="220168" cy="0"/>
+              <a:off x="4672181" y="2538138"/>
+              <a:ext cx="149886" cy="0"/>
             </a:xfrm>
             <a:custGeom>
               <a:avLst/>
               <a:pathLst>
-                <a:path w="220168" h="0">
+                <a:path w="149886" h="0">
                   <a:moveTo>
                     <a:pt x="0" y="0"/>
                   </a:moveTo>
                   <a:lnTo>
-                    <a:pt x="220168" y="0"/>
+                    <a:pt x="149886" y="0"/>
                   </a:lnTo>
                 </a:path>
               </a:pathLst>
@@ -25950,15 +25950,15 @@
           </p:nvSpPr>
           <p:spPr>
             <a:xfrm>
-              <a:off x="1984215" y="2470815"/>
-              <a:ext cx="0" cy="501992"/>
+              <a:off x="1780212" y="2302643"/>
+              <a:ext cx="0" cy="446396"/>
             </a:xfrm>
             <a:custGeom>
               <a:avLst/>
               <a:pathLst>
-                <a:path w="0" h="501992">
+                <a:path w="0" h="446396">
                   <a:moveTo>
-                    <a:pt x="0" y="501992"/>
+                    <a:pt x="0" y="446396"/>
                   </a:moveTo>
                   <a:lnTo>
                     <a:pt x="0" y="0"/>
@@ -25990,18 +25990,18 @@
           </p:nvSpPr>
           <p:spPr>
             <a:xfrm>
-              <a:off x="1984215" y="3315056"/>
-              <a:ext cx="0" cy="300258"/>
+              <a:off x="1780212" y="3053383"/>
+              <a:ext cx="0" cy="267004"/>
             </a:xfrm>
             <a:custGeom>
               <a:avLst/>
               <a:pathLst>
-                <a:path w="0" h="300258">
+                <a:path w="0" h="267004">
                   <a:moveTo>
                     <a:pt x="0" y="0"/>
                   </a:moveTo>
                   <a:lnTo>
-                    <a:pt x="0" y="300258"/>
+                    <a:pt x="0" y="267004"/>
                   </a:lnTo>
                 </a:path>
               </a:pathLst>
@@ -26030,24 +26030,24 @@
           </p:nvSpPr>
           <p:spPr>
             <a:xfrm>
-              <a:off x="1874131" y="2972807"/>
-              <a:ext cx="220168" cy="342248"/>
+              <a:off x="1705269" y="2749039"/>
+              <a:ext cx="149886" cy="304344"/>
             </a:xfrm>
             <a:custGeom>
               <a:avLst/>
               <a:pathLst>
-                <a:path w="220168" h="342248">
+                <a:path w="149886" h="304344">
                   <a:moveTo>
                     <a:pt x="0" y="0"/>
                   </a:moveTo>
                   <a:lnTo>
-                    <a:pt x="0" y="342248"/>
+                    <a:pt x="0" y="304344"/>
                   </a:lnTo>
                   <a:lnTo>
-                    <a:pt x="220168" y="342248"/>
+                    <a:pt x="149886" y="304344"/>
                   </a:lnTo>
                   <a:lnTo>
-                    <a:pt x="220168" y="0"/>
+                    <a:pt x="149886" y="0"/>
                   </a:lnTo>
                   <a:close/>
                 </a:path>
@@ -26077,18 +26077,18 @@
           </p:nvSpPr>
           <p:spPr>
             <a:xfrm>
-              <a:off x="1874131" y="3182087"/>
-              <a:ext cx="220168" cy="0"/>
+              <a:off x="1705269" y="2935141"/>
+              <a:ext cx="149886" cy="0"/>
             </a:xfrm>
             <a:custGeom>
               <a:avLst/>
               <a:pathLst>
-                <a:path w="220168" h="0">
+                <a:path w="149886" h="0">
                   <a:moveTo>
                     <a:pt x="0" y="0"/>
                   </a:moveTo>
                   <a:lnTo>
-                    <a:pt x="220168" y="0"/>
+                    <a:pt x="149886" y="0"/>
                   </a:lnTo>
                 </a:path>
               </a:pathLst>
@@ -26117,15 +26117,15 @@
           </p:nvSpPr>
           <p:spPr>
             <a:xfrm>
-              <a:off x="3510310" y="2165058"/>
-              <a:ext cx="0" cy="564771"/>
+              <a:off x="2819145" y="2030749"/>
+              <a:ext cx="0" cy="502222"/>
             </a:xfrm>
             <a:custGeom>
               <a:avLst/>
               <a:pathLst>
-                <a:path w="0" h="564771">
+                <a:path w="0" h="502222">
                   <a:moveTo>
-                    <a:pt x="0" y="564771"/>
+                    <a:pt x="0" y="502222"/>
                   </a:moveTo>
                   <a:lnTo>
                     <a:pt x="0" y="0"/>
@@ -26157,18 +26157,18 @@
           </p:nvSpPr>
           <p:spPr>
             <a:xfrm>
-              <a:off x="3510310" y="3155192"/>
-              <a:ext cx="0" cy="525925"/>
+              <a:off x="2819145" y="2911224"/>
+              <a:ext cx="0" cy="467677"/>
             </a:xfrm>
             <a:custGeom>
               <a:avLst/>
               <a:pathLst>
-                <a:path w="0" h="525925">
+                <a:path w="0" h="467677">
                   <a:moveTo>
                     <a:pt x="0" y="0"/>
                   </a:moveTo>
                   <a:lnTo>
-                    <a:pt x="0" y="525925"/>
+                    <a:pt x="0" y="467677"/>
                   </a:lnTo>
                 </a:path>
               </a:pathLst>
@@ -26197,24 +26197,24 @@
           </p:nvSpPr>
           <p:spPr>
             <a:xfrm>
-              <a:off x="3400226" y="2729829"/>
-              <a:ext cx="220168" cy="425362"/>
+              <a:off x="2744202" y="2532971"/>
+              <a:ext cx="149886" cy="378253"/>
             </a:xfrm>
             <a:custGeom>
               <a:avLst/>
               <a:pathLst>
-                <a:path w="220168" h="425362">
+                <a:path w="149886" h="378253">
                   <a:moveTo>
                     <a:pt x="0" y="0"/>
                   </a:moveTo>
                   <a:lnTo>
-                    <a:pt x="0" y="425362"/>
+                    <a:pt x="0" y="378253"/>
                   </a:lnTo>
                   <a:lnTo>
-                    <a:pt x="220168" y="425362"/>
+                    <a:pt x="149886" y="378253"/>
                   </a:lnTo>
                   <a:lnTo>
-                    <a:pt x="220168" y="0"/>
+                    <a:pt x="149886" y="0"/>
                   </a:lnTo>
                   <a:close/>
                 </a:path>
@@ -26244,18 +26244,18 @@
           </p:nvSpPr>
           <p:spPr>
             <a:xfrm>
-              <a:off x="3400226" y="2925024"/>
-              <a:ext cx="220168" cy="0"/>
+              <a:off x="2744202" y="2706548"/>
+              <a:ext cx="149886" cy="0"/>
             </a:xfrm>
             <a:custGeom>
               <a:avLst/>
               <a:pathLst>
-                <a:path w="220168" h="0">
+                <a:path w="149886" h="0">
                   <a:moveTo>
                     <a:pt x="0" y="0"/>
                   </a:moveTo>
                   <a:lnTo>
-                    <a:pt x="220168" y="0"/>
+                    <a:pt x="149886" y="0"/>
                   </a:lnTo>
                 </a:path>
               </a:pathLst>
@@ -26284,15 +26284,15 @@
           </p:nvSpPr>
           <p:spPr>
             <a:xfrm>
-              <a:off x="5036405" y="2182888"/>
-              <a:ext cx="0" cy="429410"/>
+              <a:off x="3858078" y="2046605"/>
+              <a:ext cx="0" cy="381852"/>
             </a:xfrm>
             <a:custGeom>
               <a:avLst/>
               <a:pathLst>
-                <a:path w="0" h="429410">
+                <a:path w="0" h="381852">
                   <a:moveTo>
-                    <a:pt x="0" y="429410"/>
+                    <a:pt x="0" y="381852"/>
                   </a:moveTo>
                   <a:lnTo>
                     <a:pt x="0" y="0"/>
@@ -26324,18 +26324,18 @@
           </p:nvSpPr>
           <p:spPr>
             <a:xfrm>
-              <a:off x="5036405" y="3068676"/>
-              <a:ext cx="0" cy="485575"/>
+              <a:off x="3858078" y="2834290"/>
+              <a:ext cx="0" cy="431796"/>
             </a:xfrm>
             <a:custGeom>
               <a:avLst/>
               <a:pathLst>
-                <a:path w="0" h="485575">
+                <a:path w="0" h="431796">
                   <a:moveTo>
                     <a:pt x="0" y="0"/>
                   </a:moveTo>
                   <a:lnTo>
-                    <a:pt x="0" y="485575"/>
+                    <a:pt x="0" y="431796"/>
                   </a:lnTo>
                 </a:path>
               </a:pathLst>
@@ -26364,24 +26364,24 @@
           </p:nvSpPr>
           <p:spPr>
             <a:xfrm>
-              <a:off x="4926320" y="2612299"/>
-              <a:ext cx="220168" cy="456377"/>
+              <a:off x="3783135" y="2428458"/>
+              <a:ext cx="149886" cy="405832"/>
             </a:xfrm>
             <a:custGeom>
               <a:avLst/>
               <a:pathLst>
-                <a:path w="220168" h="456377">
+                <a:path w="149886" h="405832">
                   <a:moveTo>
                     <a:pt x="0" y="0"/>
                   </a:moveTo>
                   <a:lnTo>
-                    <a:pt x="0" y="456377"/>
+                    <a:pt x="0" y="405832"/>
                   </a:lnTo>
                   <a:lnTo>
-                    <a:pt x="220168" y="456377"/>
+                    <a:pt x="149886" y="405832"/>
                   </a:lnTo>
                   <a:lnTo>
-                    <a:pt x="220168" y="0"/>
+                    <a:pt x="149886" y="0"/>
                   </a:lnTo>
                   <a:close/>
                 </a:path>
@@ -26411,18 +26411,18 @@
           </p:nvSpPr>
           <p:spPr>
             <a:xfrm>
-              <a:off x="4926320" y="2753932"/>
-              <a:ext cx="220168" cy="0"/>
+              <a:off x="3783135" y="2554405"/>
+              <a:ext cx="149886" cy="0"/>
             </a:xfrm>
             <a:custGeom>
               <a:avLst/>
               <a:pathLst>
-                <a:path w="220168" h="0">
+                <a:path w="149886" h="0">
                   <a:moveTo>
                     <a:pt x="0" y="0"/>
                   </a:moveTo>
                   <a:lnTo>
-                    <a:pt x="220168" y="0"/>
+                    <a:pt x="149886" y="0"/>
                   </a:lnTo>
                 </a:path>
               </a:pathLst>
@@ -26451,15 +26451,15 @@
           </p:nvSpPr>
           <p:spPr>
             <a:xfrm>
-              <a:off x="6562499" y="2241280"/>
-              <a:ext cx="0" cy="344095"/>
+              <a:off x="4897011" y="2098530"/>
+              <a:ext cx="0" cy="305986"/>
             </a:xfrm>
             <a:custGeom>
               <a:avLst/>
               <a:pathLst>
-                <a:path w="0" h="344095">
+                <a:path w="0" h="305986">
                   <a:moveTo>
-                    <a:pt x="0" y="344095"/>
+                    <a:pt x="0" y="305986"/>
                   </a:moveTo>
                   <a:lnTo>
                     <a:pt x="0" y="0"/>
@@ -26491,18 +26491,18 @@
           </p:nvSpPr>
           <p:spPr>
             <a:xfrm>
-              <a:off x="6562499" y="2922417"/>
-              <a:ext cx="0" cy="476061"/>
+              <a:off x="4897011" y="2704230"/>
+              <a:ext cx="0" cy="423337"/>
             </a:xfrm>
             <a:custGeom>
               <a:avLst/>
               <a:pathLst>
-                <a:path w="0" h="476061">
+                <a:path w="0" h="423337">
                   <a:moveTo>
                     <a:pt x="0" y="0"/>
                   </a:moveTo>
                   <a:lnTo>
-                    <a:pt x="0" y="476061"/>
+                    <a:pt x="0" y="423337"/>
                   </a:lnTo>
                 </a:path>
               </a:pathLst>
@@ -26531,24 +26531,24 @@
           </p:nvSpPr>
           <p:spPr>
             <a:xfrm>
-              <a:off x="6452415" y="2585375"/>
-              <a:ext cx="220168" cy="337041"/>
+              <a:off x="4822068" y="2404516"/>
+              <a:ext cx="149886" cy="299713"/>
             </a:xfrm>
             <a:custGeom>
               <a:avLst/>
               <a:pathLst>
-                <a:path w="220168" h="337041">
+                <a:path w="149886" h="299713">
                   <a:moveTo>
                     <a:pt x="0" y="0"/>
                   </a:moveTo>
                   <a:lnTo>
-                    <a:pt x="0" y="337041"/>
+                    <a:pt x="0" y="299713"/>
                   </a:lnTo>
                   <a:lnTo>
-                    <a:pt x="220168" y="337041"/>
+                    <a:pt x="149886" y="299713"/>
                   </a:lnTo>
                   <a:lnTo>
-                    <a:pt x="220168" y="0"/>
+                    <a:pt x="149886" y="0"/>
                   </a:lnTo>
                   <a:close/>
                 </a:path>
@@ -26578,18 +26578,18 @@
           </p:nvSpPr>
           <p:spPr>
             <a:xfrm>
-              <a:off x="6452415" y="2724893"/>
-              <a:ext cx="220168" cy="0"/>
+              <a:off x="4822068" y="2528582"/>
+              <a:ext cx="149886" cy="0"/>
             </a:xfrm>
             <a:custGeom>
               <a:avLst/>
               <a:pathLst>
-                <a:path w="220168" h="0">
+                <a:path w="149886" h="0">
                   <a:moveTo>
                     <a:pt x="0" y="0"/>
                   </a:moveTo>
                   <a:lnTo>
-                    <a:pt x="220168" y="0"/>
+                    <a:pt x="149886" y="0"/>
                   </a:lnTo>
                 </a:path>
               </a:pathLst>
@@ -26618,42 +26618,42 @@
           </p:nvSpPr>
           <p:spPr>
             <a:xfrm>
-              <a:off x="1874131" y="2484211"/>
-              <a:ext cx="4623547" cy="658743"/>
+              <a:off x="1705269" y="2314556"/>
+              <a:ext cx="3147613" cy="585786"/>
             </a:xfrm>
             <a:custGeom>
               <a:avLst/>
               <a:pathLst>
-                <a:path w="4623547" h="658743">
+                <a:path w="3147613" h="585786">
                   <a:moveTo>
-                    <a:pt x="0" y="329067"/>
+                    <a:pt x="0" y="292622"/>
                   </a:moveTo>
                   <a:lnTo>
-                    <a:pt x="1144878" y="297487"/>
+                    <a:pt x="779409" y="264540"/>
                   </a:lnTo>
                   <a:lnTo>
-                    <a:pt x="2201689" y="248919"/>
+                    <a:pt x="1498863" y="221351"/>
                   </a:lnTo>
                   <a:lnTo>
-                    <a:pt x="3522702" y="130871"/>
+                    <a:pt x="2398181" y="116377"/>
                   </a:lnTo>
                   <a:lnTo>
-                    <a:pt x="4623547" y="0"/>
+                    <a:pt x="3147613" y="0"/>
                   </a:lnTo>
                   <a:lnTo>
-                    <a:pt x="4623547" y="295296"/>
+                    <a:pt x="3147613" y="262592"/>
                   </a:lnTo>
                   <a:lnTo>
-                    <a:pt x="3522702" y="329309"/>
+                    <a:pt x="2398181" y="292838"/>
                   </a:lnTo>
                   <a:lnTo>
-                    <a:pt x="2201689" y="409122"/>
+                    <a:pt x="1498863" y="363811"/>
                   </a:lnTo>
                   <a:lnTo>
-                    <a:pt x="1144878" y="518843"/>
+                    <a:pt x="779409" y="461380"/>
                   </a:lnTo>
                   <a:lnTo>
-                    <a:pt x="0" y="658743"/>
+                    <a:pt x="0" y="585786"/>
                   </a:lnTo>
                   <a:close/>
                 </a:path>
@@ -26679,27 +26679,27 @@
           </p:nvSpPr>
           <p:spPr>
             <a:xfrm>
-              <a:off x="1874131" y="2484211"/>
-              <a:ext cx="4623547" cy="329067"/>
+              <a:off x="1705269" y="2314556"/>
+              <a:ext cx="3147613" cy="292622"/>
             </a:xfrm>
             <a:custGeom>
               <a:avLst/>
               <a:pathLst>
-                <a:path w="4623547" h="329067">
+                <a:path w="3147613" h="292622">
                   <a:moveTo>
-                    <a:pt x="0" y="329067"/>
+                    <a:pt x="0" y="292622"/>
                   </a:moveTo>
                   <a:lnTo>
-                    <a:pt x="1144878" y="297487"/>
+                    <a:pt x="779409" y="264540"/>
                   </a:lnTo>
                   <a:lnTo>
-                    <a:pt x="2201689" y="248919"/>
+                    <a:pt x="1498863" y="221351"/>
                   </a:lnTo>
                   <a:lnTo>
-                    <a:pt x="3522702" y="130871"/>
+                    <a:pt x="2398181" y="116377"/>
                   </a:lnTo>
                   <a:lnTo>
-                    <a:pt x="4623547" y="0"/>
+                    <a:pt x="3147613" y="0"/>
                   </a:lnTo>
                 </a:path>
               </a:pathLst>
@@ -26719,27 +26719,27 @@
           </p:nvSpPr>
           <p:spPr>
             <a:xfrm>
-              <a:off x="1874131" y="2779508"/>
-              <a:ext cx="4623547" cy="363446"/>
+              <a:off x="1705269" y="2577148"/>
+              <a:ext cx="3147613" cy="323194"/>
             </a:xfrm>
             <a:custGeom>
               <a:avLst/>
               <a:pathLst>
-                <a:path w="4623547" h="363446">
+                <a:path w="3147613" h="323194">
                   <a:moveTo>
-                    <a:pt x="4623547" y="0"/>
+                    <a:pt x="3147613" y="0"/>
                   </a:moveTo>
                   <a:lnTo>
-                    <a:pt x="3522702" y="34012"/>
+                    <a:pt x="2398181" y="30245"/>
                   </a:lnTo>
                   <a:lnTo>
-                    <a:pt x="2201689" y="113825"/>
+                    <a:pt x="1498863" y="101219"/>
                   </a:lnTo>
                   <a:lnTo>
-                    <a:pt x="1144878" y="223546"/>
+                    <a:pt x="779409" y="198788"/>
                   </a:lnTo>
                   <a:lnTo>
-                    <a:pt x="0" y="363446"/>
+                    <a:pt x="0" y="323194"/>
                   </a:lnTo>
                 </a:path>
               </a:pathLst>
@@ -26759,42 +26759,42 @@
           </p:nvSpPr>
           <p:spPr>
             <a:xfrm>
-              <a:off x="1874131" y="2621764"/>
-              <a:ext cx="4623547" cy="597129"/>
+              <a:off x="1705269" y="2436875"/>
+              <a:ext cx="3147613" cy="530996"/>
             </a:xfrm>
             <a:custGeom>
               <a:avLst/>
               <a:pathLst>
-                <a:path w="4623547" h="597129">
+                <a:path w="3147613" h="530996">
                   <a:moveTo>
-                    <a:pt x="0" y="320299"/>
+                    <a:pt x="0" y="284825"/>
                   </a:moveTo>
                   <a:lnTo>
-                    <a:pt x="1144878" y="282667"/>
+                    <a:pt x="779409" y="251361"/>
                   </a:lnTo>
                   <a:lnTo>
-                    <a:pt x="2201689" y="231752"/>
+                    <a:pt x="1498863" y="206085"/>
                   </a:lnTo>
                   <a:lnTo>
-                    <a:pt x="3522702" y="120246"/>
+                    <a:pt x="2398181" y="106928"/>
                   </a:lnTo>
                   <a:lnTo>
-                    <a:pt x="4623547" y="0"/>
+                    <a:pt x="3147613" y="0"/>
                   </a:lnTo>
                   <a:lnTo>
-                    <a:pt x="4623547" y="247077"/>
+                    <a:pt x="3147613" y="219712"/>
                   </a:lnTo>
                   <a:lnTo>
-                    <a:pt x="3522702" y="286438"/>
+                    <a:pt x="2398181" y="254714"/>
                   </a:lnTo>
                   <a:lnTo>
-                    <a:pt x="2201689" y="366461"/>
+                    <a:pt x="1498863" y="325875"/>
                   </a:lnTo>
                   <a:lnTo>
-                    <a:pt x="1144878" y="468769"/>
+                    <a:pt x="779409" y="416852"/>
                   </a:lnTo>
                   <a:lnTo>
-                    <a:pt x="0" y="597129"/>
+                    <a:pt x="0" y="530996"/>
                   </a:lnTo>
                   <a:close/>
                 </a:path>
@@ -26820,27 +26820,27 @@
           </p:nvSpPr>
           <p:spPr>
             <a:xfrm>
-              <a:off x="1874131" y="2621764"/>
-              <a:ext cx="4623547" cy="320299"/>
+              <a:off x="1705269" y="2436875"/>
+              <a:ext cx="3147613" cy="284825"/>
             </a:xfrm>
             <a:custGeom>
               <a:avLst/>
               <a:pathLst>
-                <a:path w="4623547" h="320299">
+                <a:path w="3147613" h="284825">
                   <a:moveTo>
-                    <a:pt x="0" y="320299"/>
+                    <a:pt x="0" y="284825"/>
                   </a:moveTo>
                   <a:lnTo>
-                    <a:pt x="1144878" y="282667"/>
+                    <a:pt x="779409" y="251361"/>
                   </a:lnTo>
                   <a:lnTo>
-                    <a:pt x="2201689" y="231752"/>
+                    <a:pt x="1498863" y="206085"/>
                   </a:lnTo>
                   <a:lnTo>
-                    <a:pt x="3522702" y="120246"/>
+                    <a:pt x="2398181" y="106928"/>
                   </a:lnTo>
                   <a:lnTo>
-                    <a:pt x="4623547" y="0"/>
+                    <a:pt x="3147613" y="0"/>
                   </a:lnTo>
                 </a:path>
               </a:pathLst>
@@ -26860,27 +26860,27 @@
           </p:nvSpPr>
           <p:spPr>
             <a:xfrm>
-              <a:off x="1874131" y="2868841"/>
-              <a:ext cx="4623547" cy="350052"/>
+              <a:off x="1705269" y="2656588"/>
+              <a:ext cx="3147613" cy="311283"/>
             </a:xfrm>
             <a:custGeom>
               <a:avLst/>
               <a:pathLst>
-                <a:path w="4623547" h="350052">
+                <a:path w="3147613" h="311283">
                   <a:moveTo>
-                    <a:pt x="4623547" y="0"/>
+                    <a:pt x="3147613" y="0"/>
                   </a:moveTo>
                   <a:lnTo>
-                    <a:pt x="3522702" y="39361"/>
+                    <a:pt x="2398181" y="35002"/>
                   </a:lnTo>
                   <a:lnTo>
-                    <a:pt x="2201689" y="119384"/>
+                    <a:pt x="1498863" y="106162"/>
                   </a:lnTo>
                   <a:lnTo>
-                    <a:pt x="1144878" y="221692"/>
+                    <a:pt x="779409" y="197139"/>
                   </a:lnTo>
                   <a:lnTo>
-                    <a:pt x="0" y="350052"/>
+                    <a:pt x="0" y="311283"/>
                   </a:lnTo>
                 </a:path>
               </a:pathLst>
@@ -26900,27 +26900,27 @@
           </p:nvSpPr>
           <p:spPr>
             <a:xfrm>
-              <a:off x="1874131" y="2631860"/>
-              <a:ext cx="4623547" cy="346257"/>
+              <a:off x="1705269" y="2445852"/>
+              <a:ext cx="3147613" cy="307908"/>
             </a:xfrm>
             <a:custGeom>
               <a:avLst/>
               <a:pathLst>
-                <a:path w="4623547" h="346257">
+                <a:path w="3147613" h="307908">
                   <a:moveTo>
-                    <a:pt x="0" y="346257"/>
+                    <a:pt x="0" y="307908"/>
                   </a:moveTo>
                   <a:lnTo>
-                    <a:pt x="1144878" y="260517"/>
+                    <a:pt x="779409" y="231664"/>
                   </a:lnTo>
                   <a:lnTo>
-                    <a:pt x="2201689" y="181372"/>
+                    <a:pt x="1498863" y="161285"/>
                   </a:lnTo>
                   <a:lnTo>
-                    <a:pt x="3522702" y="82442"/>
+                    <a:pt x="2398181" y="73311"/>
                   </a:lnTo>
                   <a:lnTo>
-                    <a:pt x="4623547" y="0"/>
+                    <a:pt x="3147613" y="0"/>
                   </a:lnTo>
                 </a:path>
               </a:pathLst>
@@ -26949,27 +26949,27 @@
           </p:nvSpPr>
           <p:spPr>
             <a:xfrm>
-              <a:off x="1874131" y="2745303"/>
-              <a:ext cx="4623547" cy="335175"/>
+              <a:off x="1705269" y="2546731"/>
+              <a:ext cx="3147613" cy="298054"/>
             </a:xfrm>
             <a:custGeom>
               <a:avLst/>
               <a:pathLst>
-                <a:path w="4623547" h="335175">
+                <a:path w="3147613" h="298054">
                   <a:moveTo>
-                    <a:pt x="0" y="335175"/>
+                    <a:pt x="0" y="298054"/>
                   </a:moveTo>
                   <a:lnTo>
-                    <a:pt x="1144878" y="252180"/>
+                    <a:pt x="779409" y="224250"/>
                   </a:lnTo>
                   <a:lnTo>
-                    <a:pt x="2201689" y="175568"/>
+                    <a:pt x="1498863" y="156123"/>
                   </a:lnTo>
                   <a:lnTo>
-                    <a:pt x="3522702" y="79803"/>
+                    <a:pt x="2398181" y="70965"/>
                   </a:lnTo>
                   <a:lnTo>
-                    <a:pt x="4623547" y="0"/>
+                    <a:pt x="3147613" y="0"/>
                   </a:lnTo>
                 </a:path>
               </a:pathLst>
@@ -26998,7 +26998,7 @@
           </p:nvSpPr>
           <p:spPr>
             <a:xfrm>
-              <a:off x="1874131" y="1067151"/>
+              <a:off x="1705269" y="1047951"/>
               <a:ext cx="825794" cy="91165"/>
             </a:xfrm>
             <a:prstGeom prst="rect">
@@ -27044,7 +27044,7 @@
           </p:nvSpPr>
           <p:spPr>
             <a:xfrm>
-              <a:off x="2699926" y="1067242"/>
+              <a:off x="2531063" y="1048042"/>
               <a:ext cx="84673" cy="91074"/>
             </a:xfrm>
             <a:prstGeom prst="rect">
@@ -27090,7 +27090,7 @@
           </p:nvSpPr>
           <p:spPr>
             <a:xfrm>
-              <a:off x="2798603" y="1067242"/>
+              <a:off x="2629741" y="1048042"/>
               <a:ext cx="28254" cy="91074"/>
             </a:xfrm>
             <a:prstGeom prst="rect">
@@ -27136,7 +27136,7 @@
           </p:nvSpPr>
           <p:spPr>
             <a:xfrm>
-              <a:off x="2840519" y="1067242"/>
+              <a:off x="2671657" y="1048042"/>
               <a:ext cx="70591" cy="91074"/>
             </a:xfrm>
             <a:prstGeom prst="rect">
@@ -27182,7 +27182,7 @@
           </p:nvSpPr>
           <p:spPr>
             <a:xfrm>
-              <a:off x="2921357" y="1067242"/>
+              <a:off x="2752494" y="1048042"/>
               <a:ext cx="70591" cy="91074"/>
             </a:xfrm>
             <a:prstGeom prst="rect">
@@ -27228,7 +27228,7 @@
           </p:nvSpPr>
           <p:spPr>
             <a:xfrm>
-              <a:off x="3002153" y="1067242"/>
+              <a:off x="2833291" y="1048042"/>
               <a:ext cx="70591" cy="91074"/>
             </a:xfrm>
             <a:prstGeom prst="rect">
@@ -27274,7 +27274,7 @@
           </p:nvSpPr>
           <p:spPr>
             <a:xfrm>
-              <a:off x="3082936" y="1067151"/>
+              <a:off x="2914073" y="1047951"/>
               <a:ext cx="462412" cy="91165"/>
             </a:xfrm>
             <a:prstGeom prst="rect">
@@ -27320,7 +27320,7 @@
           </p:nvSpPr>
           <p:spPr>
             <a:xfrm>
-              <a:off x="3545348" y="1067151"/>
+              <a:off x="3376485" y="1047951"/>
               <a:ext cx="70591" cy="91165"/>
             </a:xfrm>
             <a:prstGeom prst="rect">
@@ -27366,7 +27366,7 @@
           </p:nvSpPr>
           <p:spPr>
             <a:xfrm>
-              <a:off x="3615940" y="1067242"/>
+              <a:off x="3447077" y="1048042"/>
               <a:ext cx="70591" cy="91074"/>
             </a:xfrm>
             <a:prstGeom prst="rect">
@@ -27412,7 +27412,7 @@
           </p:nvSpPr>
           <p:spPr>
             <a:xfrm>
-              <a:off x="3696736" y="1067151"/>
+              <a:off x="3527873" y="1047951"/>
               <a:ext cx="462412" cy="91165"/>
             </a:xfrm>
             <a:prstGeom prst="rect">
@@ -27458,7 +27458,7 @@
           </p:nvSpPr>
           <p:spPr>
             <a:xfrm>
-              <a:off x="1874131" y="1265277"/>
+              <a:off x="1705269" y="1224134"/>
               <a:ext cx="811712" cy="91165"/>
             </a:xfrm>
             <a:prstGeom prst="rect">
@@ -27504,7 +27504,7 @@
           </p:nvSpPr>
           <p:spPr>
             <a:xfrm>
-              <a:off x="2685844" y="1265369"/>
+              <a:off x="2516981" y="1224226"/>
               <a:ext cx="84673" cy="91074"/>
             </a:xfrm>
             <a:prstGeom prst="rect">
@@ -27550,7 +27550,7 @@
           </p:nvSpPr>
           <p:spPr>
             <a:xfrm>
-              <a:off x="2784521" y="1265369"/>
+              <a:off x="2615659" y="1224226"/>
               <a:ext cx="28254" cy="91074"/>
             </a:xfrm>
             <a:prstGeom prst="rect">
@@ -27596,7 +27596,7 @@
           </p:nvSpPr>
           <p:spPr>
             <a:xfrm>
-              <a:off x="2826437" y="1265369"/>
+              <a:off x="2657575" y="1224226"/>
               <a:ext cx="70591" cy="91074"/>
             </a:xfrm>
             <a:prstGeom prst="rect">
@@ -27642,7 +27642,7 @@
           </p:nvSpPr>
           <p:spPr>
             <a:xfrm>
-              <a:off x="2907275" y="1265369"/>
+              <a:off x="2738413" y="1224226"/>
               <a:ext cx="70591" cy="91074"/>
             </a:xfrm>
             <a:prstGeom prst="rect">
@@ -27688,7 +27688,7 @@
           </p:nvSpPr>
           <p:spPr>
             <a:xfrm>
-              <a:off x="2988071" y="1265369"/>
+              <a:off x="2819209" y="1224226"/>
               <a:ext cx="70591" cy="91074"/>
             </a:xfrm>
             <a:prstGeom prst="rect">
@@ -27734,7 +27734,7 @@
           </p:nvSpPr>
           <p:spPr>
             <a:xfrm>
-              <a:off x="3068854" y="1265277"/>
+              <a:off x="2899992" y="1224134"/>
               <a:ext cx="462412" cy="91165"/>
             </a:xfrm>
             <a:prstGeom prst="rect">
@@ -27780,7 +27780,7 @@
           </p:nvSpPr>
           <p:spPr>
             <a:xfrm>
-              <a:off x="3531266" y="1265277"/>
+              <a:off x="3362404" y="1224134"/>
               <a:ext cx="70591" cy="91165"/>
             </a:xfrm>
             <a:prstGeom prst="rect">
@@ -27826,7 +27826,7 @@
           </p:nvSpPr>
           <p:spPr>
             <a:xfrm>
-              <a:off x="3601858" y="1265369"/>
+              <a:off x="3432995" y="1224226"/>
               <a:ext cx="70591" cy="91074"/>
             </a:xfrm>
             <a:prstGeom prst="rect">
@@ -27872,7 +27872,7 @@
           </p:nvSpPr>
           <p:spPr>
             <a:xfrm>
-              <a:off x="3682654" y="1265277"/>
+              <a:off x="3513792" y="1224134"/>
               <a:ext cx="462412" cy="91165"/>
             </a:xfrm>
             <a:prstGeom prst="rect">
@@ -27918,7 +27918,7 @@
           </p:nvSpPr>
           <p:spPr>
             <a:xfrm>
-              <a:off x="1807105" y="1582083"/>
+              <a:off x="1638243" y="1507292"/>
               <a:ext cx="134051" cy="91165"/>
             </a:xfrm>
             <a:prstGeom prst="rect">
@@ -27964,7 +27964,7 @@
           </p:nvSpPr>
           <p:spPr>
             <a:xfrm>
-              <a:off x="3326022" y="1522690"/>
+              <a:off x="2669998" y="1454476"/>
               <a:ext cx="148407" cy="91165"/>
             </a:xfrm>
             <a:prstGeom prst="rect">
@@ -28010,7 +28010,7 @@
           </p:nvSpPr>
           <p:spPr>
             <a:xfrm>
-              <a:off x="4852117" y="1624387"/>
+              <a:off x="3708931" y="1544910"/>
               <a:ext cx="148407" cy="91165"/>
             </a:xfrm>
             <a:prstGeom prst="rect">
@@ -28056,7 +28056,7 @@
           </p:nvSpPr>
           <p:spPr>
             <a:xfrm>
-              <a:off x="6427680" y="1561403"/>
+              <a:off x="4797333" y="1488902"/>
               <a:ext cx="49469" cy="91165"/>
             </a:xfrm>
             <a:prstGeom prst="rect">
@@ -28103,7 +28103,7 @@
           <p:spPr>
             <a:xfrm>
               <a:off x="1343534" y="952357"/>
-              <a:ext cx="5640255" cy="3250515"/>
+              <a:ext cx="3840255" cy="2890515"/>
             </a:xfrm>
             <a:prstGeom prst="rect">
               <a:avLst/>
@@ -28124,14 +28124,14 @@
           <p:spPr>
             <a:xfrm>
               <a:off x="1343534" y="952357"/>
-              <a:ext cx="0" cy="3250515"/>
+              <a:ext cx="0" cy="2890515"/>
             </a:xfrm>
             <a:custGeom>
               <a:avLst/>
               <a:pathLst>
-                <a:path w="0" h="3250515">
+                <a:path w="0" h="2890515">
                   <a:moveTo>
-                    <a:pt x="0" y="3250515"/>
+                    <a:pt x="0" y="2890515"/>
                   </a:moveTo>
                   <a:lnTo>
                     <a:pt x="0" y="0"/>
@@ -28163,7 +28163,7 @@
           </p:nvSpPr>
           <p:spPr>
             <a:xfrm>
-              <a:off x="1127766" y="4007076"/>
+              <a:off x="1127766" y="3664218"/>
               <a:ext cx="158831" cy="82021"/>
             </a:xfrm>
             <a:prstGeom prst="rect">
@@ -28209,7 +28209,7 @@
           </p:nvSpPr>
           <p:spPr>
             <a:xfrm>
-              <a:off x="1127766" y="3511759"/>
+              <a:off x="1127766" y="3223759"/>
               <a:ext cx="158831" cy="82021"/>
             </a:xfrm>
             <a:prstGeom prst="rect">
@@ -28255,7 +28255,7 @@
           </p:nvSpPr>
           <p:spPr>
             <a:xfrm>
-              <a:off x="1127766" y="3016442"/>
+              <a:off x="1127766" y="2783299"/>
               <a:ext cx="158831" cy="82021"/>
             </a:xfrm>
             <a:prstGeom prst="rect">
@@ -28301,7 +28301,7 @@
           </p:nvSpPr>
           <p:spPr>
             <a:xfrm>
-              <a:off x="1127766" y="2521126"/>
+              <a:off x="1127766" y="2342840"/>
               <a:ext cx="158831" cy="82021"/>
             </a:xfrm>
             <a:prstGeom prst="rect">
@@ -28347,7 +28347,7 @@
           </p:nvSpPr>
           <p:spPr>
             <a:xfrm>
-              <a:off x="1127766" y="2025809"/>
+              <a:off x="1127766" y="1902380"/>
               <a:ext cx="158831" cy="82021"/>
             </a:xfrm>
             <a:prstGeom prst="rect">
@@ -28393,7 +28393,7 @@
           </p:nvSpPr>
           <p:spPr>
             <a:xfrm>
-              <a:off x="1127766" y="1530492"/>
+              <a:off x="1127766" y="1461921"/>
               <a:ext cx="158831" cy="82021"/>
             </a:xfrm>
             <a:prstGeom prst="rect">
@@ -28439,7 +28439,7 @@
           </p:nvSpPr>
           <p:spPr>
             <a:xfrm>
-              <a:off x="1311902" y="4048086"/>
+              <a:off x="1311902" y="3705229"/>
               <a:ext cx="31631" cy="0"/>
             </a:xfrm>
             <a:custGeom>
@@ -28479,7 +28479,7 @@
           </p:nvSpPr>
           <p:spPr>
             <a:xfrm>
-              <a:off x="1311902" y="3552770"/>
+              <a:off x="1311902" y="3264770"/>
               <a:ext cx="31631" cy="0"/>
             </a:xfrm>
             <a:custGeom>
@@ -28519,7 +28519,7 @@
           </p:nvSpPr>
           <p:spPr>
             <a:xfrm>
-              <a:off x="1311902" y="3057453"/>
+              <a:off x="1311902" y="2824310"/>
               <a:ext cx="31631" cy="0"/>
             </a:xfrm>
             <a:custGeom>
@@ -28559,7 +28559,7 @@
           </p:nvSpPr>
           <p:spPr>
             <a:xfrm>
-              <a:off x="1311902" y="2562136"/>
+              <a:off x="1311902" y="2383851"/>
               <a:ext cx="31631" cy="0"/>
             </a:xfrm>
             <a:custGeom>
@@ -28599,7 +28599,7 @@
           </p:nvSpPr>
           <p:spPr>
             <a:xfrm>
-              <a:off x="1311902" y="2066820"/>
+              <a:off x="1311902" y="1943391"/>
               <a:ext cx="31631" cy="0"/>
             </a:xfrm>
             <a:custGeom>
@@ -28639,7 +28639,7 @@
           </p:nvSpPr>
           <p:spPr>
             <a:xfrm>
-              <a:off x="1311902" y="1571503"/>
+              <a:off x="1311902" y="1502932"/>
               <a:ext cx="31631" cy="0"/>
             </a:xfrm>
             <a:custGeom>
@@ -28679,18 +28679,18 @@
           </p:nvSpPr>
           <p:spPr>
             <a:xfrm>
-              <a:off x="1343534" y="4202873"/>
-              <a:ext cx="5640255" cy="0"/>
+              <a:off x="1343534" y="3842873"/>
+              <a:ext cx="3840255" cy="0"/>
             </a:xfrm>
             <a:custGeom>
               <a:avLst/>
               <a:pathLst>
-                <a:path w="5640255" h="0">
+                <a:path w="3840255" h="0">
                   <a:moveTo>
                     <a:pt x="0" y="0"/>
                   </a:moveTo>
                   <a:lnTo>
-                    <a:pt x="5640255" y="0"/>
+                    <a:pt x="3840255" y="0"/>
                   </a:lnTo>
                 </a:path>
               </a:pathLst>
@@ -28719,7 +28719,7 @@
           </p:nvSpPr>
           <p:spPr>
             <a:xfrm>
-              <a:off x="1874131" y="4202873"/>
+              <a:off x="1705269" y="3842873"/>
               <a:ext cx="0" cy="31631"/>
             </a:xfrm>
             <a:custGeom>
@@ -28759,7 +28759,7 @@
           </p:nvSpPr>
           <p:spPr>
             <a:xfrm>
-              <a:off x="3400226" y="4202873"/>
+              <a:off x="2744202" y="3842873"/>
               <a:ext cx="0" cy="31631"/>
             </a:xfrm>
             <a:custGeom>
@@ -28799,7 +28799,7 @@
           </p:nvSpPr>
           <p:spPr>
             <a:xfrm>
-              <a:off x="4926320" y="4202873"/>
+              <a:off x="3783135" y="3842873"/>
               <a:ext cx="0" cy="31631"/>
             </a:xfrm>
             <a:custGeom>
@@ -28839,7 +28839,7 @@
           </p:nvSpPr>
           <p:spPr>
             <a:xfrm>
-              <a:off x="6452415" y="4202873"/>
+              <a:off x="4822068" y="3842873"/>
               <a:ext cx="0" cy="31631"/>
             </a:xfrm>
             <a:custGeom>
@@ -28879,7 +28879,7 @@
           </p:nvSpPr>
           <p:spPr>
             <a:xfrm>
-              <a:off x="1842356" y="4259809"/>
+              <a:off x="1673493" y="3899809"/>
               <a:ext cx="63550" cy="82021"/>
             </a:xfrm>
             <a:prstGeom prst="rect">
@@ -28925,7 +28925,7 @@
           </p:nvSpPr>
           <p:spPr>
             <a:xfrm>
-              <a:off x="3368450" y="4259809"/>
+              <a:off x="2712426" y="3899809"/>
               <a:ext cx="63550" cy="82021"/>
             </a:xfrm>
             <a:prstGeom prst="rect">
@@ -28971,7 +28971,7 @@
           </p:nvSpPr>
           <p:spPr>
             <a:xfrm>
-              <a:off x="4894545" y="4259809"/>
+              <a:off x="3751359" y="3899809"/>
               <a:ext cx="63550" cy="82021"/>
             </a:xfrm>
             <a:prstGeom prst="rect">
@@ -29017,7 +29017,7 @@
           </p:nvSpPr>
           <p:spPr>
             <a:xfrm>
-              <a:off x="6420639" y="4259809"/>
+              <a:off x="4790292" y="3899809"/>
               <a:ext cx="63550" cy="82021"/>
             </a:xfrm>
             <a:prstGeom prst="rect">
@@ -29063,7 +29063,7 @@
           </p:nvSpPr>
           <p:spPr>
             <a:xfrm>
-              <a:off x="3876357" y="4435879"/>
+              <a:off x="2976357" y="4075879"/>
               <a:ext cx="574608" cy="100218"/>
             </a:xfrm>
             <a:prstGeom prst="rect">
@@ -29109,7 +29109,7 @@
           </p:nvSpPr>
           <p:spPr>
             <a:xfrm rot="-5400000">
-              <a:off x="-145482" y="2527506"/>
+              <a:off x="-145482" y="2347506"/>
               <a:ext cx="2259390" cy="100218"/>
             </a:xfrm>
             <a:prstGeom prst="rect">
@@ -29155,7 +29155,7 @@
           </p:nvSpPr>
           <p:spPr>
             <a:xfrm>
-              <a:off x="2770783" y="4656442"/>
+              <a:off x="1870783" y="4296442"/>
               <a:ext cx="2785756" cy="180000"/>
             </a:xfrm>
             <a:prstGeom prst="rect">
@@ -29181,7 +29181,7 @@
           </p:nvSpPr>
           <p:spPr>
             <a:xfrm>
-              <a:off x="2770783" y="4700722"/>
+              <a:off x="1870783" y="4340722"/>
               <a:ext cx="825703" cy="91440"/>
             </a:xfrm>
             <a:prstGeom prst="rect">
@@ -29227,7 +29227,7 @@
           </p:nvSpPr>
           <p:spPr>
             <a:xfrm>
-              <a:off x="3659749" y="4656442"/>
+              <a:off x="2759749" y="4296442"/>
               <a:ext cx="179999" cy="180000"/>
             </a:xfrm>
             <a:prstGeom prst="rect">
@@ -29253,7 +29253,7 @@
           </p:nvSpPr>
           <p:spPr>
             <a:xfrm>
-              <a:off x="3718557" y="4715250"/>
+              <a:off x="2818557" y="4355250"/>
               <a:ext cx="62384" cy="62384"/>
             </a:xfrm>
             <a:prstGeom prst="ellipse">
@@ -29279,7 +29279,7 @@
           </p:nvSpPr>
           <p:spPr>
             <a:xfrm>
-              <a:off x="3749749" y="4791442"/>
+              <a:off x="2849749" y="4431442"/>
               <a:ext cx="0" cy="26999"/>
             </a:xfrm>
             <a:custGeom>
@@ -29319,7 +29319,7 @@
           </p:nvSpPr>
           <p:spPr>
             <a:xfrm>
-              <a:off x="3749749" y="4674442"/>
+              <a:off x="2849749" y="4314442"/>
               <a:ext cx="0" cy="26999"/>
             </a:xfrm>
             <a:custGeom>
@@ -29359,8 +29359,8 @@
           </p:nvSpPr>
           <p:spPr>
             <a:xfrm>
-              <a:off x="3682249" y="4701442"/>
-              <a:ext cx="134999" cy="89999"/>
+              <a:off x="2782249" y="4341442"/>
+              <a:ext cx="135000" cy="89999"/>
             </a:xfrm>
             <a:prstGeom prst="rect">
               <a:avLst/>
@@ -29389,18 +29389,18 @@
           </p:nvSpPr>
           <p:spPr>
             <a:xfrm>
-              <a:off x="3682249" y="4746442"/>
-              <a:ext cx="135000" cy="0"/>
+              <a:off x="2782249" y="4386442"/>
+              <a:ext cx="134999" cy="0"/>
             </a:xfrm>
             <a:custGeom>
               <a:avLst/>
               <a:pathLst>
-                <a:path w="135000" h="0">
+                <a:path w="134999" h="0">
                   <a:moveTo>
                     <a:pt x="0" y="0"/>
                   </a:moveTo>
                   <a:lnTo>
-                    <a:pt x="135000" y="0"/>
+                    <a:pt x="134999" y="0"/>
                   </a:lnTo>
                 </a:path>
               </a:pathLst>
@@ -29429,7 +29429,7 @@
           </p:nvSpPr>
           <p:spPr>
             <a:xfrm>
-              <a:off x="3749749" y="4818442"/>
+              <a:off x="2849749" y="4458442"/>
               <a:ext cx="0" cy="0"/>
             </a:xfrm>
             <a:custGeom>
@@ -29469,7 +29469,7 @@
           </p:nvSpPr>
           <p:spPr>
             <a:xfrm>
-              <a:off x="3749749" y="4674442"/>
+              <a:off x="2849749" y="4314442"/>
               <a:ext cx="0" cy="0"/>
             </a:xfrm>
             <a:custGeom>
@@ -29509,18 +29509,18 @@
           </p:nvSpPr>
           <p:spPr>
             <a:xfrm>
-              <a:off x="3677749" y="4746442"/>
-              <a:ext cx="143999" cy="0"/>
+              <a:off x="2777749" y="4386442"/>
+              <a:ext cx="144000" cy="0"/>
             </a:xfrm>
             <a:custGeom>
               <a:avLst/>
               <a:pathLst>
-                <a:path w="143999" h="0">
+                <a:path w="144000" h="0">
                   <a:moveTo>
                     <a:pt x="0" y="0"/>
                   </a:moveTo>
                   <a:lnTo>
-                    <a:pt x="143999" y="0"/>
+                    <a:pt x="144000" y="0"/>
                   </a:lnTo>
                 </a:path>
               </a:pathLst>
@@ -29549,8 +29549,8 @@
           </p:nvSpPr>
           <p:spPr>
             <a:xfrm>
-              <a:off x="4646131" y="4656442"/>
-              <a:ext cx="180000" cy="180000"/>
+              <a:off x="3746131" y="4296442"/>
+              <a:ext cx="179999" cy="180000"/>
             </a:xfrm>
             <a:prstGeom prst="rect">
               <a:avLst/>
@@ -29575,7 +29575,7 @@
           </p:nvSpPr>
           <p:spPr>
             <a:xfrm>
-              <a:off x="4704939" y="4715250"/>
+              <a:off x="3804939" y="4355250"/>
               <a:ext cx="62384" cy="62384"/>
             </a:xfrm>
             <a:prstGeom prst="ellipse">
@@ -29601,7 +29601,7 @@
           </p:nvSpPr>
           <p:spPr>
             <a:xfrm>
-              <a:off x="4736131" y="4791442"/>
+              <a:off x="3836131" y="4431442"/>
               <a:ext cx="0" cy="26999"/>
             </a:xfrm>
             <a:custGeom>
@@ -29641,7 +29641,7 @@
           </p:nvSpPr>
           <p:spPr>
             <a:xfrm>
-              <a:off x="4736131" y="4674442"/>
+              <a:off x="3836131" y="4314442"/>
               <a:ext cx="0" cy="26999"/>
             </a:xfrm>
             <a:custGeom>
@@ -29681,7 +29681,7 @@
           </p:nvSpPr>
           <p:spPr>
             <a:xfrm>
-              <a:off x="4668631" y="4701442"/>
+              <a:off x="3768631" y="4341442"/>
               <a:ext cx="135000" cy="89999"/>
             </a:xfrm>
             <a:prstGeom prst="rect">
@@ -29711,18 +29711,18 @@
           </p:nvSpPr>
           <p:spPr>
             <a:xfrm>
-              <a:off x="4668631" y="4746442"/>
-              <a:ext cx="135000" cy="0"/>
+              <a:off x="3768631" y="4386442"/>
+              <a:ext cx="134999" cy="0"/>
             </a:xfrm>
             <a:custGeom>
               <a:avLst/>
               <a:pathLst>
-                <a:path w="135000" h="0">
+                <a:path w="134999" h="0">
                   <a:moveTo>
                     <a:pt x="0" y="0"/>
                   </a:moveTo>
                   <a:lnTo>
-                    <a:pt x="135000" y="0"/>
+                    <a:pt x="134999" y="0"/>
                   </a:lnTo>
                 </a:path>
               </a:pathLst>
@@ -29751,7 +29751,7 @@
           </p:nvSpPr>
           <p:spPr>
             <a:xfrm>
-              <a:off x="4736131" y="4818442"/>
+              <a:off x="3836131" y="4458442"/>
               <a:ext cx="0" cy="0"/>
             </a:xfrm>
             <a:custGeom>
@@ -29791,7 +29791,7 @@
           </p:nvSpPr>
           <p:spPr>
             <a:xfrm>
-              <a:off x="4736131" y="4674442"/>
+              <a:off x="3836131" y="4314442"/>
               <a:ext cx="0" cy="0"/>
             </a:xfrm>
             <a:custGeom>
@@ -29831,18 +29831,18 @@
           </p:nvSpPr>
           <p:spPr>
             <a:xfrm>
-              <a:off x="4664131" y="4746442"/>
-              <a:ext cx="143999" cy="0"/>
+              <a:off x="3764131" y="4386442"/>
+              <a:ext cx="144000" cy="0"/>
             </a:xfrm>
             <a:custGeom>
               <a:avLst/>
               <a:pathLst>
-                <a:path w="143999" h="0">
+                <a:path w="144000" h="0">
                   <a:moveTo>
                     <a:pt x="0" y="0"/>
                   </a:moveTo>
                   <a:lnTo>
-                    <a:pt x="143999" y="0"/>
+                    <a:pt x="144000" y="0"/>
                   </a:lnTo>
                 </a:path>
               </a:pathLst>
@@ -29871,7 +29871,7 @@
           </p:nvSpPr>
           <p:spPr>
             <a:xfrm>
-              <a:off x="3903012" y="4705431"/>
+              <a:off x="3003012" y="4345431"/>
               <a:ext cx="679856" cy="82021"/>
             </a:xfrm>
             <a:prstGeom prst="rect">
@@ -29917,7 +29917,7 @@
           </p:nvSpPr>
           <p:spPr>
             <a:xfrm>
-              <a:off x="4889394" y="4705431"/>
+              <a:off x="3989394" y="4345431"/>
               <a:ext cx="667146" cy="82021"/>
             </a:xfrm>
             <a:prstGeom prst="rect">

--- a/figures/Figure_3.pptx
+++ b/figures/Figure_3.pptx
@@ -2350,7 +2350,7 @@
           </p:nvSpPr>
           <p:spPr>
             <a:xfrm>
-              <a:off x="1632109" y="1803832"/>
+              <a:off x="1586394" y="1803832"/>
               <a:ext cx="62384" cy="62384"/>
             </a:xfrm>
             <a:prstGeom prst="ellipse">
@@ -2376,7 +2376,7 @@
           </p:nvSpPr>
           <p:spPr>
             <a:xfrm>
-              <a:off x="1769431" y="2770530"/>
+              <a:off x="1752055" y="2770530"/>
               <a:ext cx="62384" cy="62384"/>
             </a:xfrm>
             <a:prstGeom prst="ellipse">
@@ -2402,7 +2402,7 @@
           </p:nvSpPr>
           <p:spPr>
             <a:xfrm>
-              <a:off x="1569039" y="2922825"/>
+              <a:off x="1594805" y="2922825"/>
               <a:ext cx="62384" cy="62384"/>
             </a:xfrm>
             <a:prstGeom prst="ellipse">
@@ -2428,7 +2428,7 @@
           </p:nvSpPr>
           <p:spPr>
             <a:xfrm>
-              <a:off x="1774104" y="2734822"/>
+              <a:off x="1772669" y="2734822"/>
               <a:ext cx="62384" cy="62384"/>
             </a:xfrm>
             <a:prstGeom prst="ellipse">
@@ -2454,7 +2454,7 @@
           </p:nvSpPr>
           <p:spPr>
             <a:xfrm>
-              <a:off x="1615655" y="2330481"/>
+              <a:off x="1595998" y="2330481"/>
               <a:ext cx="62384" cy="62384"/>
             </a:xfrm>
             <a:prstGeom prst="ellipse">
@@ -2480,7 +2480,7 @@
           </p:nvSpPr>
           <p:spPr>
             <a:xfrm>
-              <a:off x="1719382" y="2818272"/>
+              <a:off x="1768030" y="2818272"/>
               <a:ext cx="62384" cy="62384"/>
             </a:xfrm>
             <a:prstGeom prst="ellipse">
@@ -2506,7 +2506,7 @@
           </p:nvSpPr>
           <p:spPr>
             <a:xfrm>
-              <a:off x="1602096" y="3089269"/>
+              <a:off x="1580100" y="3089269"/>
               <a:ext cx="62384" cy="62384"/>
             </a:xfrm>
             <a:prstGeom prst="ellipse">
@@ -2532,7 +2532,7 @@
           </p:nvSpPr>
           <p:spPr>
             <a:xfrm>
-              <a:off x="1765967" y="2990456"/>
+              <a:off x="1775856" y="2990456"/>
               <a:ext cx="62384" cy="62384"/>
             </a:xfrm>
             <a:prstGeom prst="ellipse">
@@ -2558,7 +2558,7 @@
           </p:nvSpPr>
           <p:spPr>
             <a:xfrm>
-              <a:off x="1614139" y="2898173"/>
+              <a:off x="1573115" y="2898173"/>
               <a:ext cx="62384" cy="62384"/>
             </a:xfrm>
             <a:prstGeom prst="ellipse">
@@ -2584,7 +2584,7 @@
           </p:nvSpPr>
           <p:spPr>
             <a:xfrm>
-              <a:off x="1771530" y="2971875"/>
+              <a:off x="1721360" y="2971875"/>
               <a:ext cx="62384" cy="62384"/>
             </a:xfrm>
             <a:prstGeom prst="ellipse">
@@ -2610,7 +2610,7 @@
           </p:nvSpPr>
           <p:spPr>
             <a:xfrm>
-              <a:off x="1599066" y="3240021"/>
+              <a:off x="1569723" y="3240021"/>
               <a:ext cx="62384" cy="62384"/>
             </a:xfrm>
             <a:prstGeom prst="ellipse">
@@ -2636,7 +2636,7 @@
           </p:nvSpPr>
           <p:spPr>
             <a:xfrm>
-              <a:off x="1777644" y="3236709"/>
+              <a:off x="1750298" y="3236709"/>
               <a:ext cx="62384" cy="62384"/>
             </a:xfrm>
             <a:prstGeom prst="ellipse">
@@ -2662,7 +2662,7 @@
           </p:nvSpPr>
           <p:spPr>
             <a:xfrm>
-              <a:off x="1562070" y="2981013"/>
+              <a:off x="1571388" y="2981013"/>
               <a:ext cx="62384" cy="62384"/>
             </a:xfrm>
             <a:prstGeom prst="ellipse">
@@ -2688,7 +2688,7 @@
           </p:nvSpPr>
           <p:spPr>
             <a:xfrm>
-              <a:off x="1723919" y="3036913"/>
+              <a:off x="1741961" y="3036913"/>
               <a:ext cx="62384" cy="62384"/>
             </a:xfrm>
             <a:prstGeom prst="ellipse">
@@ -2714,7 +2714,7 @@
           </p:nvSpPr>
           <p:spPr>
             <a:xfrm>
-              <a:off x="1625164" y="3054889"/>
+              <a:off x="1630338" y="3054889"/>
               <a:ext cx="62384" cy="62384"/>
             </a:xfrm>
             <a:prstGeom prst="ellipse">
@@ -2740,7 +2740,7 @@
           </p:nvSpPr>
           <p:spPr>
             <a:xfrm>
-              <a:off x="1774546" y="3156403"/>
+              <a:off x="1717488" y="3156403"/>
               <a:ext cx="62384" cy="62384"/>
             </a:xfrm>
             <a:prstGeom prst="ellipse">
@@ -2766,7 +2766,7 @@
           </p:nvSpPr>
           <p:spPr>
             <a:xfrm>
-              <a:off x="1612057" y="3002923"/>
+              <a:off x="1609362" y="3002923"/>
               <a:ext cx="62384" cy="62384"/>
             </a:xfrm>
             <a:prstGeom prst="ellipse">
@@ -2792,7 +2792,7 @@
           </p:nvSpPr>
           <p:spPr>
             <a:xfrm>
-              <a:off x="1721780" y="2884502"/>
+              <a:off x="1773810" y="2884502"/>
               <a:ext cx="62384" cy="62384"/>
             </a:xfrm>
             <a:prstGeom prst="ellipse">
@@ -2818,7 +2818,7 @@
           </p:nvSpPr>
           <p:spPr>
             <a:xfrm>
-              <a:off x="1615917" y="2439628"/>
+              <a:off x="1617399" y="2439628"/>
               <a:ext cx="62384" cy="62384"/>
             </a:xfrm>
             <a:prstGeom prst="ellipse">
@@ -2844,7 +2844,7 @@
           </p:nvSpPr>
           <p:spPr>
             <a:xfrm>
-              <a:off x="1770953" y="2450538"/>
+              <a:off x="1726835" y="2450538"/>
               <a:ext cx="62384" cy="62384"/>
             </a:xfrm>
             <a:prstGeom prst="ellipse">
@@ -2870,7 +2870,7 @@
           </p:nvSpPr>
           <p:spPr>
             <a:xfrm>
-              <a:off x="1600137" y="2993232"/>
+              <a:off x="1628620" y="2993232"/>
               <a:ext cx="62384" cy="62384"/>
             </a:xfrm>
             <a:prstGeom prst="ellipse">
@@ -2896,7 +2896,7 @@
           </p:nvSpPr>
           <p:spPr>
             <a:xfrm>
-              <a:off x="1739124" y="2973263"/>
+              <a:off x="1726857" y="2973263"/>
               <a:ext cx="62384" cy="62384"/>
             </a:xfrm>
             <a:prstGeom prst="ellipse">
@@ -2922,7 +2922,7 @@
           </p:nvSpPr>
           <p:spPr>
             <a:xfrm>
-              <a:off x="1627418" y="2822604"/>
+              <a:off x="1604752" y="2822604"/>
               <a:ext cx="62384" cy="62384"/>
             </a:xfrm>
             <a:prstGeom prst="ellipse">
@@ -2948,7 +2948,7 @@
           </p:nvSpPr>
           <p:spPr>
             <a:xfrm>
-              <a:off x="1712981" y="2969127"/>
+              <a:off x="1745777" y="2969127"/>
               <a:ext cx="62384" cy="62384"/>
             </a:xfrm>
             <a:prstGeom prst="ellipse">
@@ -2974,7 +2974,7 @@
           </p:nvSpPr>
           <p:spPr>
             <a:xfrm>
-              <a:off x="1585171" y="2710412"/>
+              <a:off x="1627502" y="2710412"/>
               <a:ext cx="62384" cy="62384"/>
             </a:xfrm>
             <a:prstGeom prst="ellipse">
@@ -3000,7 +3000,7 @@
           </p:nvSpPr>
           <p:spPr>
             <a:xfrm>
-              <a:off x="1729288" y="3122471"/>
+              <a:off x="1725982" y="3122471"/>
               <a:ext cx="62384" cy="62384"/>
             </a:xfrm>
             <a:prstGeom prst="ellipse">
@@ -3026,7 +3026,7 @@
           </p:nvSpPr>
           <p:spPr>
             <a:xfrm>
-              <a:off x="1604412" y="3052876"/>
+              <a:off x="1590467" y="3052876"/>
               <a:ext cx="62384" cy="62384"/>
             </a:xfrm>
             <a:prstGeom prst="ellipse">
@@ -3052,7 +3052,7 @@
           </p:nvSpPr>
           <p:spPr>
             <a:xfrm>
-              <a:off x="1756006" y="2924956"/>
+              <a:off x="1775984" y="2924956"/>
               <a:ext cx="62384" cy="62384"/>
             </a:xfrm>
             <a:prstGeom prst="ellipse">
@@ -3078,7 +3078,7 @@
           </p:nvSpPr>
           <p:spPr>
             <a:xfrm>
-              <a:off x="1607838" y="2666643"/>
+              <a:off x="1616892" y="2666643"/>
               <a:ext cx="62384" cy="62384"/>
             </a:xfrm>
             <a:prstGeom prst="ellipse">
@@ -3104,7 +3104,7 @@
           </p:nvSpPr>
           <p:spPr>
             <a:xfrm>
-              <a:off x="1756185" y="3245462"/>
+              <a:off x="1754945" y="3245462"/>
               <a:ext cx="62384" cy="62384"/>
             </a:xfrm>
             <a:prstGeom prst="ellipse">
@@ -3130,7 +3130,7 @@
           </p:nvSpPr>
           <p:spPr>
             <a:xfrm>
-              <a:off x="1610785" y="2876305"/>
+              <a:off x="1606056" y="2876305"/>
               <a:ext cx="62384" cy="62384"/>
             </a:xfrm>
             <a:prstGeom prst="ellipse">
@@ -3156,7 +3156,7 @@
           </p:nvSpPr>
           <p:spPr>
             <a:xfrm>
-              <a:off x="1738035" y="2880808"/>
+              <a:off x="1785139" y="2880808"/>
               <a:ext cx="62384" cy="62384"/>
             </a:xfrm>
             <a:prstGeom prst="ellipse">
@@ -3182,7 +3182,7 @@
           </p:nvSpPr>
           <p:spPr>
             <a:xfrm>
-              <a:off x="1605497" y="3063576"/>
+              <a:off x="1587761" y="3063576"/>
               <a:ext cx="62384" cy="62384"/>
             </a:xfrm>
             <a:prstGeom prst="ellipse">
@@ -3208,7 +3208,7 @@
           </p:nvSpPr>
           <p:spPr>
             <a:xfrm>
-              <a:off x="1775389" y="2999345"/>
+              <a:off x="1733441" y="2999345"/>
               <a:ext cx="62384" cy="62384"/>
             </a:xfrm>
             <a:prstGeom prst="ellipse">
@@ -3234,7 +3234,7 @@
           </p:nvSpPr>
           <p:spPr>
             <a:xfrm>
-              <a:off x="1571597" y="2916882"/>
+              <a:off x="1563013" y="2916882"/>
               <a:ext cx="62384" cy="62384"/>
             </a:xfrm>
             <a:prstGeom prst="ellipse">
@@ -3260,7 +3260,7 @@
           </p:nvSpPr>
           <p:spPr>
             <a:xfrm>
-              <a:off x="1741885" y="3004099"/>
+              <a:off x="1749467" y="3004099"/>
               <a:ext cx="62384" cy="62384"/>
             </a:xfrm>
             <a:prstGeom prst="ellipse">
@@ -3286,7 +3286,7 @@
           </p:nvSpPr>
           <p:spPr>
             <a:xfrm>
-              <a:off x="1589278" y="3027595"/>
+              <a:off x="1566528" y="3027595"/>
               <a:ext cx="62384" cy="62384"/>
             </a:xfrm>
             <a:prstGeom prst="ellipse">
@@ -3312,7 +3312,7 @@
           </p:nvSpPr>
           <p:spPr>
             <a:xfrm>
-              <a:off x="1729830" y="3058005"/>
+              <a:off x="1725183" y="3058005"/>
               <a:ext cx="62384" cy="62384"/>
             </a:xfrm>
             <a:prstGeom prst="ellipse">
@@ -3338,7 +3338,7 @@
           </p:nvSpPr>
           <p:spPr>
             <a:xfrm>
-              <a:off x="1571789" y="3329839"/>
+              <a:off x="1575163" y="3329839"/>
               <a:ext cx="62384" cy="62384"/>
             </a:xfrm>
             <a:prstGeom prst="ellipse">
@@ -3364,7 +3364,7 @@
           </p:nvSpPr>
           <p:spPr>
             <a:xfrm>
-              <a:off x="1768137" y="3159469"/>
+              <a:off x="1744137" y="3159469"/>
               <a:ext cx="62384" cy="62384"/>
             </a:xfrm>
             <a:prstGeom prst="ellipse">
@@ -3390,7 +3390,7 @@
           </p:nvSpPr>
           <p:spPr>
             <a:xfrm>
-              <a:off x="1594308" y="2723279"/>
+              <a:off x="1601677" y="2723279"/>
               <a:ext cx="62384" cy="62384"/>
             </a:xfrm>
             <a:prstGeom prst="ellipse">
@@ -3416,7 +3416,7 @@
           </p:nvSpPr>
           <p:spPr>
             <a:xfrm>
-              <a:off x="1773786" y="2857951"/>
+              <a:off x="1767203" y="2857951"/>
               <a:ext cx="62384" cy="62384"/>
             </a:xfrm>
             <a:prstGeom prst="ellipse">
@@ -3442,7 +3442,7 @@
           </p:nvSpPr>
           <p:spPr>
             <a:xfrm>
-              <a:off x="1614169" y="2960081"/>
+              <a:off x="1606099" y="2960081"/>
               <a:ext cx="62384" cy="62384"/>
             </a:xfrm>
             <a:prstGeom prst="ellipse">
@@ -3468,7 +3468,7 @@
           </p:nvSpPr>
           <p:spPr>
             <a:xfrm>
-              <a:off x="1745224" y="2804627"/>
+              <a:off x="1741472" y="2804627"/>
               <a:ext cx="62384" cy="62384"/>
             </a:xfrm>
             <a:prstGeom prst="ellipse">
@@ -3494,7 +3494,7 @@
           </p:nvSpPr>
           <p:spPr>
             <a:xfrm>
-              <a:off x="1633816" y="3025202"/>
+              <a:off x="1600682" y="3025202"/>
               <a:ext cx="62384" cy="62384"/>
             </a:xfrm>
             <a:prstGeom prst="ellipse">
@@ -3520,7 +3520,7 @@
           </p:nvSpPr>
           <p:spPr>
             <a:xfrm>
-              <a:off x="1750166" y="3048931"/>
+              <a:off x="1769772" y="3048931"/>
               <a:ext cx="62384" cy="62384"/>
             </a:xfrm>
             <a:prstGeom prst="ellipse">
@@ -3546,7 +3546,7 @@
           </p:nvSpPr>
           <p:spPr>
             <a:xfrm>
-              <a:off x="1562719" y="2684204"/>
+              <a:off x="1579256" y="2684204"/>
               <a:ext cx="62384" cy="62384"/>
             </a:xfrm>
             <a:prstGeom prst="ellipse">
@@ -3572,7 +3572,7 @@
           </p:nvSpPr>
           <p:spPr>
             <a:xfrm>
-              <a:off x="1758573" y="3289196"/>
+              <a:off x="1746339" y="3289196"/>
               <a:ext cx="62384" cy="62384"/>
             </a:xfrm>
             <a:prstGeom prst="ellipse">
@@ -3598,7 +3598,7 @@
           </p:nvSpPr>
           <p:spPr>
             <a:xfrm>
-              <a:off x="1616467" y="2944655"/>
+              <a:off x="1570644" y="2944655"/>
               <a:ext cx="62384" cy="62384"/>
             </a:xfrm>
             <a:prstGeom prst="ellipse">
@@ -3624,7 +3624,7 @@
           </p:nvSpPr>
           <p:spPr>
             <a:xfrm>
-              <a:off x="1728848" y="2888765"/>
+              <a:off x="1731106" y="2888765"/>
               <a:ext cx="62384" cy="62384"/>
             </a:xfrm>
             <a:prstGeom prst="ellipse">
@@ -3650,7 +3650,7 @@
           </p:nvSpPr>
           <p:spPr>
             <a:xfrm>
-              <a:off x="1634414" y="3278753"/>
+              <a:off x="1603397" y="3278753"/>
               <a:ext cx="62384" cy="62384"/>
             </a:xfrm>
             <a:prstGeom prst="ellipse">
@@ -3676,7 +3676,7 @@
           </p:nvSpPr>
           <p:spPr>
             <a:xfrm>
-              <a:off x="1748696" y="2993327"/>
+              <a:off x="1764757" y="2993327"/>
               <a:ext cx="62384" cy="62384"/>
             </a:xfrm>
             <a:prstGeom prst="ellipse">
@@ -3702,7 +3702,7 @@
           </p:nvSpPr>
           <p:spPr>
             <a:xfrm>
-              <a:off x="1578436" y="2913294"/>
+              <a:off x="1565790" y="2913294"/>
               <a:ext cx="62384" cy="62384"/>
             </a:xfrm>
             <a:prstGeom prst="ellipse">
@@ -3728,7 +3728,7 @@
           </p:nvSpPr>
           <p:spPr>
             <a:xfrm>
-              <a:off x="1750095" y="2822482"/>
+              <a:off x="1779359" y="2822482"/>
               <a:ext cx="62384" cy="62384"/>
             </a:xfrm>
             <a:prstGeom prst="ellipse">
@@ -3754,7 +3754,7 @@
           </p:nvSpPr>
           <p:spPr>
             <a:xfrm>
-              <a:off x="1584401" y="2578234"/>
+              <a:off x="1595377" y="2578234"/>
               <a:ext cx="62384" cy="62384"/>
             </a:xfrm>
             <a:prstGeom prst="ellipse">
@@ -3780,7 +3780,7 @@
           </p:nvSpPr>
           <p:spPr>
             <a:xfrm>
-              <a:off x="1758525" y="2535771"/>
+              <a:off x="1721975" y="2535771"/>
               <a:ext cx="62384" cy="62384"/>
             </a:xfrm>
             <a:prstGeom prst="ellipse">
@@ -3806,7 +3806,7 @@
           </p:nvSpPr>
           <p:spPr>
             <a:xfrm>
-              <a:off x="1575756" y="3668974"/>
+              <a:off x="1585586" y="3668974"/>
               <a:ext cx="62384" cy="62384"/>
             </a:xfrm>
             <a:prstGeom prst="ellipse">
@@ -3832,7 +3832,7 @@
           </p:nvSpPr>
           <p:spPr>
             <a:xfrm>
-              <a:off x="1761779" y="3042969"/>
+              <a:off x="1781826" y="3042969"/>
               <a:ext cx="62384" cy="62384"/>
             </a:xfrm>
             <a:prstGeom prst="ellipse">
@@ -3858,7 +3858,7 @@
           </p:nvSpPr>
           <p:spPr>
             <a:xfrm>
-              <a:off x="1577455" y="2778066"/>
+              <a:off x="1618194" y="2778066"/>
               <a:ext cx="62384" cy="62384"/>
             </a:xfrm>
             <a:prstGeom prst="ellipse">
@@ -3884,7 +3884,7 @@
           </p:nvSpPr>
           <p:spPr>
             <a:xfrm>
-              <a:off x="1758542" y="2618095"/>
+              <a:off x="1750785" y="2618095"/>
               <a:ext cx="62384" cy="62384"/>
             </a:xfrm>
             <a:prstGeom prst="ellipse">
@@ -3910,7 +3910,7 @@
           </p:nvSpPr>
           <p:spPr>
             <a:xfrm>
-              <a:off x="1590294" y="2853899"/>
+              <a:off x="1605964" y="2853899"/>
               <a:ext cx="62384" cy="62384"/>
             </a:xfrm>
             <a:prstGeom prst="ellipse">
@@ -3936,7 +3936,7 @@
           </p:nvSpPr>
           <p:spPr>
             <a:xfrm>
-              <a:off x="1722136" y="2820167"/>
+              <a:off x="1724677" y="2820167"/>
               <a:ext cx="62384" cy="62384"/>
             </a:xfrm>
             <a:prstGeom prst="ellipse">
@@ -3962,7 +3962,7 @@
           </p:nvSpPr>
           <p:spPr>
             <a:xfrm>
-              <a:off x="1607214" y="3070382"/>
+              <a:off x="1627467" y="3070382"/>
               <a:ext cx="62384" cy="62384"/>
             </a:xfrm>
             <a:prstGeom prst="ellipse">
@@ -3988,7 +3988,7 @@
           </p:nvSpPr>
           <p:spPr>
             <a:xfrm>
-              <a:off x="1724531" y="3250503"/>
+              <a:off x="1735856" y="3250503"/>
               <a:ext cx="62384" cy="62384"/>
             </a:xfrm>
             <a:prstGeom prst="ellipse">
@@ -4014,7 +4014,7 @@
           </p:nvSpPr>
           <p:spPr>
             <a:xfrm>
-              <a:off x="1609540" y="2649449"/>
+              <a:off x="1561861" y="2649449"/>
               <a:ext cx="62384" cy="62384"/>
             </a:xfrm>
             <a:prstGeom prst="ellipse">
@@ -4040,7 +4040,7 @@
           </p:nvSpPr>
           <p:spPr>
             <a:xfrm>
-              <a:off x="1733993" y="2739757"/>
+              <a:off x="1772600" y="2739757"/>
               <a:ext cx="62384" cy="62384"/>
             </a:xfrm>
             <a:prstGeom prst="ellipse">
@@ -4066,7 +4066,7 @@
           </p:nvSpPr>
           <p:spPr>
             <a:xfrm>
-              <a:off x="1580658" y="2422340"/>
+              <a:off x="1624363" y="2422340"/>
               <a:ext cx="62384" cy="62384"/>
             </a:xfrm>
             <a:prstGeom prst="ellipse">
@@ -4092,7 +4092,7 @@
           </p:nvSpPr>
           <p:spPr>
             <a:xfrm>
-              <a:off x="1771210" y="2323803"/>
+              <a:off x="1783017" y="2323803"/>
               <a:ext cx="62384" cy="62384"/>
             </a:xfrm>
             <a:prstGeom prst="ellipse">
@@ -4118,7 +4118,7 @@
           </p:nvSpPr>
           <p:spPr>
             <a:xfrm>
-              <a:off x="1576816" y="2697920"/>
+              <a:off x="1615385" y="2697920"/>
               <a:ext cx="62384" cy="62384"/>
             </a:xfrm>
             <a:prstGeom prst="ellipse">
@@ -4144,7 +4144,7 @@
           </p:nvSpPr>
           <p:spPr>
             <a:xfrm>
-              <a:off x="1738641" y="2464423"/>
+              <a:off x="1732337" y="2464423"/>
               <a:ext cx="62384" cy="62384"/>
             </a:xfrm>
             <a:prstGeom prst="ellipse">
@@ -4170,7 +4170,7 @@
           </p:nvSpPr>
           <p:spPr>
             <a:xfrm>
-              <a:off x="1589462" y="3097483"/>
+              <a:off x="1607624" y="3097483"/>
               <a:ext cx="62384" cy="62384"/>
             </a:xfrm>
             <a:prstGeom prst="ellipse">
@@ -4196,7 +4196,7 @@
           </p:nvSpPr>
           <p:spPr>
             <a:xfrm>
-              <a:off x="1780098" y="2950431"/>
+              <a:off x="1784207" y="2950431"/>
               <a:ext cx="62384" cy="62384"/>
             </a:xfrm>
             <a:prstGeom prst="ellipse">
@@ -4222,7 +4222,7 @@
           </p:nvSpPr>
           <p:spPr>
             <a:xfrm>
-              <a:off x="1629228" y="3048519"/>
+              <a:off x="1620366" y="3048519"/>
               <a:ext cx="62384" cy="62384"/>
             </a:xfrm>
             <a:prstGeom prst="ellipse">
@@ -4248,7 +4248,7 @@
           </p:nvSpPr>
           <p:spPr>
             <a:xfrm>
-              <a:off x="1773559" y="3132901"/>
+              <a:off x="1768044" y="3132901"/>
               <a:ext cx="62384" cy="62384"/>
             </a:xfrm>
             <a:prstGeom prst="ellipse">
@@ -4274,7 +4274,7 @@
           </p:nvSpPr>
           <p:spPr>
             <a:xfrm>
-              <a:off x="1591174" y="2721944"/>
+              <a:off x="1578772" y="2721944"/>
               <a:ext cx="62384" cy="62384"/>
             </a:xfrm>
             <a:prstGeom prst="ellipse">
@@ -4300,7 +4300,7 @@
           </p:nvSpPr>
           <p:spPr>
             <a:xfrm>
-              <a:off x="1743998" y="2793445"/>
+              <a:off x="1766438" y="2793445"/>
               <a:ext cx="62384" cy="62384"/>
             </a:xfrm>
             <a:prstGeom prst="ellipse">
@@ -4326,7 +4326,7 @@
           </p:nvSpPr>
           <p:spPr>
             <a:xfrm>
-              <a:off x="1610861" y="2649817"/>
+              <a:off x="1583527" y="2649817"/>
               <a:ext cx="62384" cy="62384"/>
             </a:xfrm>
             <a:prstGeom prst="ellipse">
@@ -4352,7 +4352,7 @@
           </p:nvSpPr>
           <p:spPr>
             <a:xfrm>
-              <a:off x="1769782" y="2403778"/>
+              <a:off x="1783147" y="2403778"/>
               <a:ext cx="62384" cy="62384"/>
             </a:xfrm>
             <a:prstGeom prst="ellipse">
@@ -4378,7 +4378,7 @@
           </p:nvSpPr>
           <p:spPr>
             <a:xfrm>
-              <a:off x="1608266" y="3074839"/>
+              <a:off x="1584936" y="3074839"/>
               <a:ext cx="62384" cy="62384"/>
             </a:xfrm>
             <a:prstGeom prst="ellipse">
@@ -4404,7 +4404,7 @@
           </p:nvSpPr>
           <p:spPr>
             <a:xfrm>
-              <a:off x="1743095" y="2896464"/>
+              <a:off x="1771694" y="2896464"/>
               <a:ext cx="62384" cy="62384"/>
             </a:xfrm>
             <a:prstGeom prst="ellipse">
@@ -4430,7 +4430,7 @@
           </p:nvSpPr>
           <p:spPr>
             <a:xfrm>
-              <a:off x="1628113" y="2720308"/>
+              <a:off x="1621143" y="2720308"/>
               <a:ext cx="62384" cy="62384"/>
             </a:xfrm>
             <a:prstGeom prst="ellipse">
@@ -4456,7 +4456,7 @@
           </p:nvSpPr>
           <p:spPr>
             <a:xfrm>
-              <a:off x="1726374" y="2811625"/>
+              <a:off x="1778987" y="2811625"/>
               <a:ext cx="62384" cy="62384"/>
             </a:xfrm>
             <a:prstGeom prst="ellipse">
@@ -4482,7 +4482,7 @@
           </p:nvSpPr>
           <p:spPr>
             <a:xfrm>
-              <a:off x="1599662" y="3087167"/>
+              <a:off x="1595209" y="3087167"/>
               <a:ext cx="62384" cy="62384"/>
             </a:xfrm>
             <a:prstGeom prst="ellipse">
@@ -4508,7 +4508,7 @@
           </p:nvSpPr>
           <p:spPr>
             <a:xfrm>
-              <a:off x="1746064" y="2347825"/>
+              <a:off x="1720008" y="2347825"/>
               <a:ext cx="62384" cy="62384"/>
             </a:xfrm>
             <a:prstGeom prst="ellipse">
@@ -4534,7 +4534,7 @@
           </p:nvSpPr>
           <p:spPr>
             <a:xfrm>
-              <a:off x="1578373" y="2639045"/>
+              <a:off x="1603326" y="2639045"/>
               <a:ext cx="62384" cy="62384"/>
             </a:xfrm>
             <a:prstGeom prst="ellipse">
@@ -4560,7 +4560,7 @@
           </p:nvSpPr>
           <p:spPr>
             <a:xfrm>
-              <a:off x="1775650" y="2127249"/>
+              <a:off x="1727757" y="2127249"/>
               <a:ext cx="62384" cy="62384"/>
             </a:xfrm>
             <a:prstGeom prst="ellipse">
@@ -4586,7 +4586,7 @@
           </p:nvSpPr>
           <p:spPr>
             <a:xfrm>
-              <a:off x="1600840" y="2777354"/>
+              <a:off x="1617119" y="2777354"/>
               <a:ext cx="62384" cy="62384"/>
             </a:xfrm>
             <a:prstGeom prst="ellipse">
@@ -4612,7 +4612,7 @@
           </p:nvSpPr>
           <p:spPr>
             <a:xfrm>
-              <a:off x="1722036" y="2780534"/>
+              <a:off x="1748514" y="2780534"/>
               <a:ext cx="62384" cy="62384"/>
             </a:xfrm>
             <a:prstGeom prst="ellipse">
@@ -4638,7 +4638,7 @@
           </p:nvSpPr>
           <p:spPr>
             <a:xfrm>
-              <a:off x="1635428" y="2885492"/>
+              <a:off x="1599342" y="2885492"/>
               <a:ext cx="62384" cy="62384"/>
             </a:xfrm>
             <a:prstGeom prst="ellipse">
@@ -4664,7 +4664,7 @@
           </p:nvSpPr>
           <p:spPr>
             <a:xfrm>
-              <a:off x="1744885" y="2588544"/>
+              <a:off x="1730686" y="2588544"/>
               <a:ext cx="62384" cy="62384"/>
             </a:xfrm>
             <a:prstGeom prst="ellipse">
@@ -4690,7 +4690,7 @@
           </p:nvSpPr>
           <p:spPr>
             <a:xfrm>
-              <a:off x="1582586" y="3559667"/>
+              <a:off x="1623798" y="3559667"/>
               <a:ext cx="62384" cy="62384"/>
             </a:xfrm>
             <a:prstGeom prst="ellipse">
@@ -4716,7 +4716,7 @@
           </p:nvSpPr>
           <p:spPr>
             <a:xfrm>
-              <a:off x="1717277" y="3240465"/>
+              <a:off x="1743789" y="3240465"/>
               <a:ext cx="62384" cy="62384"/>
             </a:xfrm>
             <a:prstGeom prst="ellipse">
@@ -4742,7 +4742,7 @@
           </p:nvSpPr>
           <p:spPr>
             <a:xfrm>
-              <a:off x="1615083" y="2580551"/>
+              <a:off x="1572152" y="2580551"/>
               <a:ext cx="62384" cy="62384"/>
             </a:xfrm>
             <a:prstGeom prst="ellipse">
@@ -4768,7 +4768,7 @@
           </p:nvSpPr>
           <p:spPr>
             <a:xfrm>
-              <a:off x="1766685" y="2390593"/>
+              <a:off x="1755061" y="2390593"/>
               <a:ext cx="62384" cy="62384"/>
             </a:xfrm>
             <a:prstGeom prst="ellipse">
@@ -4794,7 +4794,7 @@
           </p:nvSpPr>
           <p:spPr>
             <a:xfrm>
-              <a:off x="1633456" y="2762011"/>
+              <a:off x="1565529" y="2762011"/>
               <a:ext cx="62384" cy="62384"/>
             </a:xfrm>
             <a:prstGeom prst="ellipse">
@@ -4820,7 +4820,7 @@
           </p:nvSpPr>
           <p:spPr>
             <a:xfrm>
-              <a:off x="1729641" y="2903949"/>
+              <a:off x="1774401" y="2903949"/>
               <a:ext cx="62384" cy="62384"/>
             </a:xfrm>
             <a:prstGeom prst="ellipse">
@@ -4846,7 +4846,7 @@
           </p:nvSpPr>
           <p:spPr>
             <a:xfrm>
-              <a:off x="1631893" y="2494752"/>
+              <a:off x="1621752" y="2494752"/>
               <a:ext cx="62384" cy="62384"/>
             </a:xfrm>
             <a:prstGeom prst="ellipse">
@@ -4872,7 +4872,7 @@
           </p:nvSpPr>
           <p:spPr>
             <a:xfrm>
-              <a:off x="1732684" y="2271451"/>
+              <a:off x="1711390" y="2271451"/>
               <a:ext cx="62384" cy="62384"/>
             </a:xfrm>
             <a:prstGeom prst="ellipse">
@@ -4898,7 +4898,7 @@
           </p:nvSpPr>
           <p:spPr>
             <a:xfrm>
-              <a:off x="1623054" y="2861663"/>
+              <a:off x="1592734" y="2861663"/>
               <a:ext cx="62384" cy="62384"/>
             </a:xfrm>
             <a:prstGeom prst="ellipse">
@@ -4924,7 +4924,7 @@
           </p:nvSpPr>
           <p:spPr>
             <a:xfrm>
-              <a:off x="1744727" y="2558820"/>
+              <a:off x="1743823" y="2558820"/>
               <a:ext cx="62384" cy="62384"/>
             </a:xfrm>
             <a:prstGeom prst="ellipse">
@@ -4950,7 +4950,7 @@
           </p:nvSpPr>
           <p:spPr>
             <a:xfrm>
-              <a:off x="1618092" y="2550903"/>
+              <a:off x="1580266" y="2550903"/>
               <a:ext cx="62384" cy="62384"/>
             </a:xfrm>
             <a:prstGeom prst="ellipse">
@@ -4976,7 +4976,7 @@
           </p:nvSpPr>
           <p:spPr>
             <a:xfrm>
-              <a:off x="1773017" y="2717918"/>
+              <a:off x="1749041" y="2717918"/>
               <a:ext cx="62384" cy="62384"/>
             </a:xfrm>
             <a:prstGeom prst="ellipse">
@@ -5002,7 +5002,7 @@
           </p:nvSpPr>
           <p:spPr>
             <a:xfrm>
-              <a:off x="1602640" y="2642682"/>
+              <a:off x="1608441" y="2642682"/>
               <a:ext cx="62384" cy="62384"/>
             </a:xfrm>
             <a:prstGeom prst="ellipse">
@@ -5028,7 +5028,7 @@
           </p:nvSpPr>
           <p:spPr>
             <a:xfrm>
-              <a:off x="1731537" y="2922285"/>
+              <a:off x="1752610" y="2922285"/>
               <a:ext cx="62384" cy="62384"/>
             </a:xfrm>
             <a:prstGeom prst="ellipse">
@@ -5054,7 +5054,7 @@
           </p:nvSpPr>
           <p:spPr>
             <a:xfrm>
-              <a:off x="1563223" y="2351266"/>
+              <a:off x="1591214" y="2351266"/>
               <a:ext cx="62384" cy="62384"/>
             </a:xfrm>
             <a:prstGeom prst="ellipse">
@@ -5080,7 +5080,7 @@
           </p:nvSpPr>
           <p:spPr>
             <a:xfrm>
-              <a:off x="1777741" y="2464180"/>
+              <a:off x="1739832" y="2464180"/>
               <a:ext cx="62384" cy="62384"/>
             </a:xfrm>
             <a:prstGeom prst="ellipse">
@@ -5106,7 +5106,7 @@
           </p:nvSpPr>
           <p:spPr>
             <a:xfrm>
-              <a:off x="1569624" y="2879596"/>
+              <a:off x="1635637" y="2879596"/>
               <a:ext cx="62384" cy="62384"/>
             </a:xfrm>
             <a:prstGeom prst="ellipse">
@@ -5132,7 +5132,7 @@
           </p:nvSpPr>
           <p:spPr>
             <a:xfrm>
-              <a:off x="1718214" y="3015602"/>
+              <a:off x="1711300" y="3015602"/>
               <a:ext cx="62384" cy="62384"/>
             </a:xfrm>
             <a:prstGeom prst="ellipse">
@@ -5158,7 +5158,7 @@
           </p:nvSpPr>
           <p:spPr>
             <a:xfrm>
-              <a:off x="1593413" y="2959279"/>
+              <a:off x="1589783" y="2959279"/>
               <a:ext cx="62384" cy="62384"/>
             </a:xfrm>
             <a:prstGeom prst="ellipse">
@@ -5184,7 +5184,7 @@
           </p:nvSpPr>
           <p:spPr>
             <a:xfrm>
-              <a:off x="1760884" y="2999779"/>
+              <a:off x="1768228" y="2999779"/>
               <a:ext cx="62384" cy="62384"/>
             </a:xfrm>
             <a:prstGeom prst="ellipse">
@@ -5210,7 +5210,7 @@
           </p:nvSpPr>
           <p:spPr>
             <a:xfrm>
-              <a:off x="1562093" y="2891195"/>
+              <a:off x="1569865" y="2891195"/>
               <a:ext cx="62384" cy="62384"/>
             </a:xfrm>
             <a:prstGeom prst="ellipse">
@@ -5236,7 +5236,7 @@
           </p:nvSpPr>
           <p:spPr>
             <a:xfrm>
-              <a:off x="1718441" y="2901293"/>
+              <a:off x="1723447" y="2901293"/>
               <a:ext cx="62384" cy="62384"/>
             </a:xfrm>
             <a:prstGeom prst="ellipse">
@@ -5262,7 +5262,7 @@
           </p:nvSpPr>
           <p:spPr>
             <a:xfrm>
-              <a:off x="1579338" y="1624175"/>
+              <a:off x="1632503" y="1624175"/>
               <a:ext cx="62384" cy="62384"/>
             </a:xfrm>
             <a:prstGeom prst="ellipse">
@@ -5288,7 +5288,7 @@
           </p:nvSpPr>
           <p:spPr>
             <a:xfrm>
-              <a:off x="1745312" y="1979705"/>
+              <a:off x="1755232" y="1979705"/>
               <a:ext cx="62384" cy="62384"/>
             </a:xfrm>
             <a:prstGeom prst="ellipse">
@@ -5314,7 +5314,7 @@
           </p:nvSpPr>
           <p:spPr>
             <a:xfrm>
-              <a:off x="1573821" y="2020599"/>
+              <a:off x="1626901" y="2020599"/>
               <a:ext cx="62384" cy="62384"/>
             </a:xfrm>
             <a:prstGeom prst="ellipse">
@@ -5340,7 +5340,7 @@
           </p:nvSpPr>
           <p:spPr>
             <a:xfrm>
-              <a:off x="1733046" y="2279365"/>
+              <a:off x="1777693" y="2279365"/>
               <a:ext cx="62384" cy="62384"/>
             </a:xfrm>
             <a:prstGeom prst="ellipse">
@@ -5366,7 +5366,7 @@
           </p:nvSpPr>
           <p:spPr>
             <a:xfrm>
-              <a:off x="1576424" y="3119717"/>
+              <a:off x="1608542" y="3119717"/>
               <a:ext cx="62384" cy="62384"/>
             </a:xfrm>
             <a:prstGeom prst="ellipse">
@@ -5392,7 +5392,7 @@
           </p:nvSpPr>
           <p:spPr>
             <a:xfrm>
-              <a:off x="1723320" y="2961756"/>
+              <a:off x="1743913" y="2961756"/>
               <a:ext cx="62384" cy="62384"/>
             </a:xfrm>
             <a:prstGeom prst="ellipse">
@@ -5418,7 +5418,7 @@
           </p:nvSpPr>
           <p:spPr>
             <a:xfrm>
-              <a:off x="1591103" y="3202020"/>
+              <a:off x="1581602" y="3202020"/>
               <a:ext cx="62384" cy="62384"/>
             </a:xfrm>
             <a:prstGeom prst="ellipse">
@@ -5444,7 +5444,7 @@
           </p:nvSpPr>
           <p:spPr>
             <a:xfrm>
-              <a:off x="1719960" y="3145362"/>
+              <a:off x="1731500" y="3145362"/>
               <a:ext cx="62384" cy="62384"/>
             </a:xfrm>
             <a:prstGeom prst="ellipse">
@@ -5470,7 +5470,7 @@
           </p:nvSpPr>
           <p:spPr>
             <a:xfrm>
-              <a:off x="1588282" y="3002354"/>
+              <a:off x="1612864" y="3002354"/>
               <a:ext cx="62384" cy="62384"/>
             </a:xfrm>
             <a:prstGeom prst="ellipse">
@@ -5496,7 +5496,7 @@
           </p:nvSpPr>
           <p:spPr>
             <a:xfrm>
-              <a:off x="1732552" y="3078609"/>
+              <a:off x="1717700" y="3078609"/>
               <a:ext cx="62384" cy="62384"/>
             </a:xfrm>
             <a:prstGeom prst="ellipse">
@@ -5522,7 +5522,7 @@
           </p:nvSpPr>
           <p:spPr>
             <a:xfrm>
-              <a:off x="1601245" y="2609586"/>
+              <a:off x="1581909" y="2609586"/>
               <a:ext cx="62384" cy="62384"/>
             </a:xfrm>
             <a:prstGeom prst="ellipse">
@@ -5548,7 +5548,7 @@
           </p:nvSpPr>
           <p:spPr>
             <a:xfrm>
-              <a:off x="1772914" y="2983647"/>
+              <a:off x="1737507" y="2983647"/>
               <a:ext cx="62384" cy="62384"/>
             </a:xfrm>
             <a:prstGeom prst="ellipse">
@@ -5574,7 +5574,7 @@
           </p:nvSpPr>
           <p:spPr>
             <a:xfrm>
-              <a:off x="1618654" y="2955681"/>
+              <a:off x="1612655" y="2955681"/>
               <a:ext cx="62384" cy="62384"/>
             </a:xfrm>
             <a:prstGeom prst="ellipse">
@@ -5600,7 +5600,7 @@
           </p:nvSpPr>
           <p:spPr>
             <a:xfrm>
-              <a:off x="1723215" y="3088754"/>
+              <a:off x="1781189" y="3088754"/>
               <a:ext cx="62384" cy="62384"/>
             </a:xfrm>
             <a:prstGeom prst="ellipse">
@@ -5626,7 +5626,7 @@
           </p:nvSpPr>
           <p:spPr>
             <a:xfrm>
-              <a:off x="1626943" y="2807407"/>
+              <a:off x="1623280" y="2807407"/>
               <a:ext cx="62384" cy="62384"/>
             </a:xfrm>
             <a:prstGeom prst="ellipse">
@@ -5652,7 +5652,7 @@
           </p:nvSpPr>
           <p:spPr>
             <a:xfrm>
-              <a:off x="1747428" y="2973149"/>
+              <a:off x="1765196" y="2973149"/>
               <a:ext cx="62384" cy="62384"/>
             </a:xfrm>
             <a:prstGeom prst="ellipse">
@@ -5678,7 +5678,7 @@
           </p:nvSpPr>
           <p:spPr>
             <a:xfrm>
-              <a:off x="1611705" y="2842692"/>
+              <a:off x="1579738" y="2842692"/>
               <a:ext cx="62384" cy="62384"/>
             </a:xfrm>
             <a:prstGeom prst="ellipse">
@@ -5704,7 +5704,7 @@
           </p:nvSpPr>
           <p:spPr>
             <a:xfrm>
-              <a:off x="1721522" y="2980880"/>
+              <a:off x="1763965" y="2980880"/>
               <a:ext cx="62384" cy="62384"/>
             </a:xfrm>
             <a:prstGeom prst="ellipse">
@@ -5730,7 +5730,7 @@
           </p:nvSpPr>
           <p:spPr>
             <a:xfrm>
-              <a:off x="1602055" y="2773278"/>
+              <a:off x="1616620" y="2773278"/>
               <a:ext cx="62384" cy="62384"/>
             </a:xfrm>
             <a:prstGeom prst="ellipse">
@@ -5756,7 +5756,7 @@
           </p:nvSpPr>
           <p:spPr>
             <a:xfrm>
-              <a:off x="1786215" y="2892856"/>
+              <a:off x="1721052" y="2892856"/>
               <a:ext cx="62384" cy="62384"/>
             </a:xfrm>
             <a:prstGeom prst="ellipse">
@@ -5782,7 +5782,7 @@
           </p:nvSpPr>
           <p:spPr>
             <a:xfrm>
-              <a:off x="1615882" y="3088872"/>
+              <a:off x="1581829" y="3088872"/>
               <a:ext cx="62384" cy="62384"/>
             </a:xfrm>
             <a:prstGeom prst="ellipse">
@@ -5808,7 +5808,7 @@
           </p:nvSpPr>
           <p:spPr>
             <a:xfrm>
-              <a:off x="1735552" y="2895185"/>
+              <a:off x="1748700" y="2895185"/>
               <a:ext cx="62384" cy="62384"/>
             </a:xfrm>
             <a:prstGeom prst="ellipse">
@@ -5834,7 +5834,7 @@
           </p:nvSpPr>
           <p:spPr>
             <a:xfrm>
-              <a:off x="1612243" y="2778970"/>
+              <a:off x="1613107" y="2778970"/>
               <a:ext cx="62384" cy="62384"/>
             </a:xfrm>
             <a:prstGeom prst="ellipse">
@@ -5860,7 +5860,7 @@
           </p:nvSpPr>
           <p:spPr>
             <a:xfrm>
-              <a:off x="1760542" y="2861090"/>
+              <a:off x="1774147" y="2861090"/>
               <a:ext cx="62384" cy="62384"/>
             </a:xfrm>
             <a:prstGeom prst="ellipse">
@@ -5886,7 +5886,7 @@
           </p:nvSpPr>
           <p:spPr>
             <a:xfrm>
-              <a:off x="1616900" y="3026748"/>
+              <a:off x="1582081" y="3026748"/>
               <a:ext cx="62384" cy="62384"/>
             </a:xfrm>
             <a:prstGeom prst="ellipse">
@@ -5912,7 +5912,7 @@
           </p:nvSpPr>
           <p:spPr>
             <a:xfrm>
-              <a:off x="1785963" y="2942926"/>
+              <a:off x="1757152" y="2942926"/>
               <a:ext cx="62384" cy="62384"/>
             </a:xfrm>
             <a:prstGeom prst="ellipse">
@@ -5938,7 +5938,7 @@
           </p:nvSpPr>
           <p:spPr>
             <a:xfrm>
-              <a:off x="1629443" y="3053785"/>
+              <a:off x="1591929" y="3053785"/>
               <a:ext cx="62384" cy="62384"/>
             </a:xfrm>
             <a:prstGeom prst="ellipse">
@@ -5964,7 +5964,7 @@
           </p:nvSpPr>
           <p:spPr>
             <a:xfrm>
-              <a:off x="1771517" y="3214068"/>
+              <a:off x="1770415" y="3214068"/>
               <a:ext cx="62384" cy="62384"/>
             </a:xfrm>
             <a:prstGeom prst="ellipse">
@@ -5990,7 +5990,7 @@
           </p:nvSpPr>
           <p:spPr>
             <a:xfrm>
-              <a:off x="1615221" y="2779430"/>
+              <a:off x="1628868" y="2779430"/>
               <a:ext cx="62384" cy="62384"/>
             </a:xfrm>
             <a:prstGeom prst="ellipse">
@@ -6016,7 +6016,7 @@
           </p:nvSpPr>
           <p:spPr>
             <a:xfrm>
-              <a:off x="1722631" y="2999628"/>
+              <a:off x="1710853" y="2999628"/>
               <a:ext cx="62384" cy="62384"/>
             </a:xfrm>
             <a:prstGeom prst="ellipse">
@@ -6042,7 +6042,7 @@
           </p:nvSpPr>
           <p:spPr>
             <a:xfrm>
-              <a:off x="1601999" y="2849785"/>
+              <a:off x="1607861" y="2849785"/>
               <a:ext cx="62384" cy="62384"/>
             </a:xfrm>
             <a:prstGeom prst="ellipse">
@@ -6068,7 +6068,7 @@
           </p:nvSpPr>
           <p:spPr>
             <a:xfrm>
-              <a:off x="1768530" y="3136949"/>
+              <a:off x="1734721" y="3136949"/>
               <a:ext cx="62384" cy="62384"/>
             </a:xfrm>
             <a:prstGeom prst="ellipse">
@@ -6094,7 +6094,7 @@
           </p:nvSpPr>
           <p:spPr>
             <a:xfrm>
-              <a:off x="1564450" y="2877876"/>
+              <a:off x="1586834" y="2877876"/>
               <a:ext cx="62384" cy="62384"/>
             </a:xfrm>
             <a:prstGeom prst="ellipse">
@@ -6120,7 +6120,7 @@
           </p:nvSpPr>
           <p:spPr>
             <a:xfrm>
-              <a:off x="1761310" y="3068460"/>
+              <a:off x="1746546" y="3068460"/>
               <a:ext cx="62384" cy="62384"/>
             </a:xfrm>
             <a:prstGeom prst="ellipse">
@@ -6146,7 +6146,7 @@
           </p:nvSpPr>
           <p:spPr>
             <a:xfrm>
-              <a:off x="1604278" y="2027633"/>
+              <a:off x="1581734" y="2027633"/>
               <a:ext cx="62384" cy="62384"/>
             </a:xfrm>
             <a:prstGeom prst="ellipse">
@@ -6172,7 +6172,7 @@
           </p:nvSpPr>
           <p:spPr>
             <a:xfrm>
-              <a:off x="1722740" y="3145486"/>
+              <a:off x="1764671" y="3145486"/>
               <a:ext cx="62384" cy="62384"/>
             </a:xfrm>
             <a:prstGeom prst="ellipse">
@@ -6198,7 +6198,7 @@
           </p:nvSpPr>
           <p:spPr>
             <a:xfrm>
-              <a:off x="1564131" y="3310021"/>
+              <a:off x="1605640" y="3310021"/>
               <a:ext cx="62384" cy="62384"/>
             </a:xfrm>
             <a:prstGeom prst="ellipse">
@@ -6224,7 +6224,7 @@
           </p:nvSpPr>
           <p:spPr>
             <a:xfrm>
-              <a:off x="1743775" y="2920993"/>
+              <a:off x="1743749" y="2920993"/>
               <a:ext cx="62384" cy="62384"/>
             </a:xfrm>
             <a:prstGeom prst="ellipse">
@@ -6250,7 +6250,7 @@
           </p:nvSpPr>
           <p:spPr>
             <a:xfrm>
-              <a:off x="1587906" y="3214152"/>
+              <a:off x="1575269" y="3214152"/>
               <a:ext cx="62384" cy="62384"/>
             </a:xfrm>
             <a:prstGeom prst="ellipse">
@@ -6276,7 +6276,7 @@
           </p:nvSpPr>
           <p:spPr>
             <a:xfrm>
-              <a:off x="1765887" y="3028780"/>
+              <a:off x="1734430" y="3028780"/>
               <a:ext cx="62384" cy="62384"/>
             </a:xfrm>
             <a:prstGeom prst="ellipse">
@@ -6302,7 +6302,7 @@
           </p:nvSpPr>
           <p:spPr>
             <a:xfrm>
-              <a:off x="1615313" y="2851195"/>
+              <a:off x="1597509" y="2851195"/>
               <a:ext cx="62384" cy="62384"/>
             </a:xfrm>
             <a:prstGeom prst="ellipse">
@@ -6328,7 +6328,7 @@
           </p:nvSpPr>
           <p:spPr>
             <a:xfrm>
-              <a:off x="1762336" y="3010283"/>
+              <a:off x="1757099" y="3010283"/>
               <a:ext cx="62384" cy="62384"/>
             </a:xfrm>
             <a:prstGeom prst="ellipse">
@@ -6354,7 +6354,7 @@
           </p:nvSpPr>
           <p:spPr>
             <a:xfrm>
-              <a:off x="1570270" y="2869942"/>
+              <a:off x="1625552" y="2869942"/>
               <a:ext cx="62384" cy="62384"/>
             </a:xfrm>
             <a:prstGeom prst="ellipse">
@@ -6380,7 +6380,7 @@
           </p:nvSpPr>
           <p:spPr>
             <a:xfrm>
-              <a:off x="1780972" y="2835067"/>
+              <a:off x="1741527" y="2835067"/>
               <a:ext cx="62384" cy="62384"/>
             </a:xfrm>
             <a:prstGeom prst="ellipse">
@@ -6406,7 +6406,7 @@
           </p:nvSpPr>
           <p:spPr>
             <a:xfrm>
-              <a:off x="1591455" y="2385074"/>
+              <a:off x="1634968" y="2385074"/>
               <a:ext cx="62384" cy="62384"/>
             </a:xfrm>
             <a:prstGeom prst="ellipse">
@@ -6432,7 +6432,7 @@
           </p:nvSpPr>
           <p:spPr>
             <a:xfrm>
-              <a:off x="1714576" y="2372486"/>
+              <a:off x="1769468" y="2372486"/>
               <a:ext cx="62384" cy="62384"/>
             </a:xfrm>
             <a:prstGeom prst="ellipse">
@@ -6458,7 +6458,7 @@
           </p:nvSpPr>
           <p:spPr>
             <a:xfrm>
-              <a:off x="1599518" y="2303091"/>
+              <a:off x="1631330" y="2303091"/>
               <a:ext cx="62384" cy="62384"/>
             </a:xfrm>
             <a:prstGeom prst="ellipse">
@@ -6484,7 +6484,7 @@
           </p:nvSpPr>
           <p:spPr>
             <a:xfrm>
-              <a:off x="1760706" y="2210234"/>
+              <a:off x="1759978" y="2210234"/>
               <a:ext cx="62384" cy="62384"/>
             </a:xfrm>
             <a:prstGeom prst="ellipse">
@@ -6510,7 +6510,7 @@
           </p:nvSpPr>
           <p:spPr>
             <a:xfrm>
-              <a:off x="1631683" y="2906009"/>
+              <a:off x="1590193" y="2906009"/>
               <a:ext cx="62384" cy="62384"/>
             </a:xfrm>
             <a:prstGeom prst="ellipse">
@@ -6536,7 +6536,7 @@
           </p:nvSpPr>
           <p:spPr>
             <a:xfrm>
-              <a:off x="1730329" y="2639315"/>
+              <a:off x="1750890" y="2639315"/>
               <a:ext cx="62384" cy="62384"/>
             </a:xfrm>
             <a:prstGeom prst="ellipse">
@@ -6562,7 +6562,7 @@
           </p:nvSpPr>
           <p:spPr>
             <a:xfrm>
-              <a:off x="1608834" y="2479227"/>
+              <a:off x="1625925" y="2479227"/>
               <a:ext cx="62384" cy="62384"/>
             </a:xfrm>
             <a:prstGeom prst="ellipse">
@@ -6588,7 +6588,7 @@
           </p:nvSpPr>
           <p:spPr>
             <a:xfrm>
-              <a:off x="1781876" y="2693799"/>
+              <a:off x="1766931" y="2693799"/>
               <a:ext cx="62384" cy="62384"/>
             </a:xfrm>
             <a:prstGeom prst="ellipse">
@@ -6614,7 +6614,7 @@
           </p:nvSpPr>
           <p:spPr>
             <a:xfrm>
-              <a:off x="1591789" y="2311062"/>
+              <a:off x="1609822" y="2311062"/>
               <a:ext cx="62384" cy="62384"/>
             </a:xfrm>
             <a:prstGeom prst="ellipse">
@@ -6640,7 +6640,7 @@
           </p:nvSpPr>
           <p:spPr>
             <a:xfrm>
-              <a:off x="1721641" y="2155885"/>
+              <a:off x="1740336" y="2155885"/>
               <a:ext cx="62384" cy="62384"/>
             </a:xfrm>
             <a:prstGeom prst="ellipse">
@@ -6666,7 +6666,7 @@
           </p:nvSpPr>
           <p:spPr>
             <a:xfrm>
-              <a:off x="1618383" y="2992143"/>
+              <a:off x="1591860" y="2992143"/>
               <a:ext cx="62384" cy="62384"/>
             </a:xfrm>
             <a:prstGeom prst="ellipse">
@@ -6692,7 +6692,7 @@
           </p:nvSpPr>
           <p:spPr>
             <a:xfrm>
-              <a:off x="1728973" y="3085554"/>
+              <a:off x="1720942" y="3085554"/>
               <a:ext cx="62384" cy="62384"/>
             </a:xfrm>
             <a:prstGeom prst="ellipse">
@@ -6718,7 +6718,7 @@
           </p:nvSpPr>
           <p:spPr>
             <a:xfrm>
-              <a:off x="1561842" y="2693399"/>
+              <a:off x="1629694" y="2693399"/>
               <a:ext cx="62384" cy="62384"/>
             </a:xfrm>
             <a:prstGeom prst="ellipse">
@@ -6744,7 +6744,7 @@
           </p:nvSpPr>
           <p:spPr>
             <a:xfrm>
-              <a:off x="1720557" y="2912401"/>
+              <a:off x="1772031" y="2912401"/>
               <a:ext cx="62384" cy="62384"/>
             </a:xfrm>
             <a:prstGeom prst="ellipse">
@@ -6770,7 +6770,7 @@
           </p:nvSpPr>
           <p:spPr>
             <a:xfrm>
-              <a:off x="1625411" y="2243452"/>
+              <a:off x="1605263" y="2243452"/>
               <a:ext cx="62384" cy="62384"/>
             </a:xfrm>
             <a:prstGeom prst="ellipse">
@@ -6796,7 +6796,7 @@
           </p:nvSpPr>
           <p:spPr>
             <a:xfrm>
-              <a:off x="1754549" y="2469299"/>
+              <a:off x="1760678" y="2469299"/>
               <a:ext cx="62384" cy="62384"/>
             </a:xfrm>
             <a:prstGeom prst="ellipse">
@@ -6822,7 +6822,7 @@
           </p:nvSpPr>
           <p:spPr>
             <a:xfrm>
-              <a:off x="1621810" y="3383052"/>
+              <a:off x="1613545" y="3383052"/>
               <a:ext cx="62384" cy="62384"/>
             </a:xfrm>
             <a:prstGeom prst="ellipse">
@@ -6848,7 +6848,7 @@
           </p:nvSpPr>
           <p:spPr>
             <a:xfrm>
-              <a:off x="1730434" y="2717776"/>
+              <a:off x="1784230" y="2717776"/>
               <a:ext cx="62384" cy="62384"/>
             </a:xfrm>
             <a:prstGeom prst="ellipse">
@@ -6874,7 +6874,7 @@
           </p:nvSpPr>
           <p:spPr>
             <a:xfrm>
-              <a:off x="2674888" y="2084851"/>
+              <a:off x="2657553" y="2084851"/>
               <a:ext cx="62384" cy="62384"/>
             </a:xfrm>
             <a:prstGeom prst="ellipse">
@@ -6900,7 +6900,7 @@
           </p:nvSpPr>
           <p:spPr>
             <a:xfrm>
-              <a:off x="2786731" y="2219888"/>
+              <a:off x="2824489" y="2219888"/>
               <a:ext cx="62384" cy="62384"/>
             </a:xfrm>
             <a:prstGeom prst="ellipse">
@@ -6926,7 +6926,7 @@
           </p:nvSpPr>
           <p:spPr>
             <a:xfrm>
-              <a:off x="2610988" y="2434850"/>
+              <a:off x="2605467" y="2434850"/>
               <a:ext cx="62384" cy="62384"/>
             </a:xfrm>
             <a:prstGeom prst="ellipse">
@@ -6952,7 +6952,7 @@
           </p:nvSpPr>
           <p:spPr>
             <a:xfrm>
-              <a:off x="2822324" y="2816213"/>
+              <a:off x="2775403" y="2816213"/>
               <a:ext cx="62384" cy="62384"/>
             </a:xfrm>
             <a:prstGeom prst="ellipse">
@@ -6978,7 +6978,7 @@
           </p:nvSpPr>
           <p:spPr>
             <a:xfrm>
-              <a:off x="2600595" y="2781878"/>
+              <a:off x="2653116" y="2781878"/>
               <a:ext cx="62384" cy="62384"/>
             </a:xfrm>
             <a:prstGeom prst="ellipse">
@@ -7004,7 +7004,7 @@
           </p:nvSpPr>
           <p:spPr>
             <a:xfrm>
-              <a:off x="2776775" y="2832242"/>
+              <a:off x="2801396" y="2832242"/>
               <a:ext cx="62384" cy="62384"/>
             </a:xfrm>
             <a:prstGeom prst="ellipse">
@@ -7030,7 +7030,7 @@
           </p:nvSpPr>
           <p:spPr>
             <a:xfrm>
-              <a:off x="2672232" y="2461099"/>
+              <a:off x="2610807" y="2461099"/>
               <a:ext cx="62384" cy="62384"/>
             </a:xfrm>
             <a:prstGeom prst="ellipse">
@@ -7056,7 +7056,7 @@
           </p:nvSpPr>
           <p:spPr>
             <a:xfrm>
-              <a:off x="2820926" y="2580668"/>
+              <a:off x="2787180" y="2580668"/>
               <a:ext cx="62384" cy="62384"/>
             </a:xfrm>
             <a:prstGeom prst="ellipse">
@@ -7082,7 +7082,7 @@
           </p:nvSpPr>
           <p:spPr>
             <a:xfrm>
-              <a:off x="2642128" y="2376920"/>
+              <a:off x="2619112" y="2376920"/>
               <a:ext cx="62384" cy="62384"/>
             </a:xfrm>
             <a:prstGeom prst="ellipse">
@@ -7108,7 +7108,7 @@
           </p:nvSpPr>
           <p:spPr>
             <a:xfrm>
-              <a:off x="2793327" y="2478265"/>
+              <a:off x="2773209" y="2478265"/>
               <a:ext cx="62384" cy="62384"/>
             </a:xfrm>
             <a:prstGeom prst="ellipse">
@@ -7134,7 +7134,7 @@
           </p:nvSpPr>
           <p:spPr>
             <a:xfrm>
-              <a:off x="2663416" y="2476222"/>
+              <a:off x="2633748" y="2476222"/>
               <a:ext cx="62384" cy="62384"/>
             </a:xfrm>
             <a:prstGeom prst="ellipse">
@@ -7160,7 +7160,7 @@
           </p:nvSpPr>
           <p:spPr>
             <a:xfrm>
-              <a:off x="2759361" y="2648558"/>
+              <a:off x="2798398" y="2648558"/>
               <a:ext cx="62384" cy="62384"/>
             </a:xfrm>
             <a:prstGeom prst="ellipse">
@@ -7186,7 +7186,7 @@
           </p:nvSpPr>
           <p:spPr>
             <a:xfrm>
-              <a:off x="2672994" y="2628343"/>
+              <a:off x="2664218" y="2628343"/>
               <a:ext cx="62384" cy="62384"/>
             </a:xfrm>
             <a:prstGeom prst="ellipse">
@@ -7212,7 +7212,7 @@
           </p:nvSpPr>
           <p:spPr>
             <a:xfrm>
-              <a:off x="2810781" y="2676261"/>
+              <a:off x="2783192" y="2676261"/>
               <a:ext cx="62384" cy="62384"/>
             </a:xfrm>
             <a:prstGeom prst="ellipse">
@@ -7238,7 +7238,7 @@
           </p:nvSpPr>
           <p:spPr>
             <a:xfrm>
-              <a:off x="2645421" y="2381745"/>
+              <a:off x="2641143" y="2381745"/>
               <a:ext cx="62384" cy="62384"/>
             </a:xfrm>
             <a:prstGeom prst="ellipse">
@@ -7264,7 +7264,7 @@
           </p:nvSpPr>
           <p:spPr>
             <a:xfrm>
-              <a:off x="2776888" y="2560132"/>
+              <a:off x="2779663" y="2560132"/>
               <a:ext cx="62384" cy="62384"/>
             </a:xfrm>
             <a:prstGeom prst="ellipse">
@@ -7290,7 +7290,7 @@
           </p:nvSpPr>
           <p:spPr>
             <a:xfrm>
-              <a:off x="2657796" y="2977464"/>
+              <a:off x="2672106" y="2977464"/>
               <a:ext cx="62384" cy="62384"/>
             </a:xfrm>
             <a:prstGeom prst="ellipse">
@@ -7316,7 +7316,7 @@
           </p:nvSpPr>
           <p:spPr>
             <a:xfrm>
-              <a:off x="2765060" y="3228311"/>
+              <a:off x="2823278" y="3228311"/>
               <a:ext cx="62384" cy="62384"/>
             </a:xfrm>
             <a:prstGeom prst="ellipse">
@@ -7342,7 +7342,7 @@
           </p:nvSpPr>
           <p:spPr>
             <a:xfrm>
-              <a:off x="2638546" y="2772110"/>
+              <a:off x="2641774" y="2772110"/>
               <a:ext cx="62384" cy="62384"/>
             </a:xfrm>
             <a:prstGeom prst="ellipse">
@@ -7368,7 +7368,7 @@
           </p:nvSpPr>
           <p:spPr>
             <a:xfrm>
-              <a:off x="2768250" y="3206926"/>
+              <a:off x="2774204" y="3206926"/>
               <a:ext cx="62384" cy="62384"/>
             </a:xfrm>
             <a:prstGeom prst="ellipse">
@@ -7394,7 +7394,7 @@
           </p:nvSpPr>
           <p:spPr>
             <a:xfrm>
-              <a:off x="2639190" y="2485303"/>
+              <a:off x="2625050" y="2485303"/>
               <a:ext cx="62384" cy="62384"/>
             </a:xfrm>
             <a:prstGeom prst="ellipse">
@@ -7420,7 +7420,7 @@
           </p:nvSpPr>
           <p:spPr>
             <a:xfrm>
-              <a:off x="2791983" y="2672806"/>
+              <a:off x="2778182" y="2672806"/>
               <a:ext cx="62384" cy="62384"/>
             </a:xfrm>
             <a:prstGeom prst="ellipse">
@@ -7446,7 +7446,7 @@
           </p:nvSpPr>
           <p:spPr>
             <a:xfrm>
-              <a:off x="2626772" y="2368226"/>
+              <a:off x="2668056" y="2368226"/>
               <a:ext cx="62384" cy="62384"/>
             </a:xfrm>
             <a:prstGeom prst="ellipse">
@@ -7472,7 +7472,7 @@
           </p:nvSpPr>
           <p:spPr>
             <a:xfrm>
-              <a:off x="2817438" y="2818819"/>
+              <a:off x="2800159" y="2818819"/>
               <a:ext cx="62384" cy="62384"/>
             </a:xfrm>
             <a:prstGeom prst="ellipse">
@@ -7498,7 +7498,7 @@
           </p:nvSpPr>
           <p:spPr>
             <a:xfrm>
-              <a:off x="2637632" y="2493287"/>
+              <a:off x="2667430" y="2493287"/>
               <a:ext cx="62384" cy="62384"/>
             </a:xfrm>
             <a:prstGeom prst="ellipse">
@@ -7524,7 +7524,7 @@
           </p:nvSpPr>
           <p:spPr>
             <a:xfrm>
-              <a:off x="2750877" y="2775042"/>
+              <a:off x="2794956" y="2775042"/>
               <a:ext cx="62384" cy="62384"/>
             </a:xfrm>
             <a:prstGeom prst="ellipse">
@@ -7550,7 +7550,7 @@
           </p:nvSpPr>
           <p:spPr>
             <a:xfrm>
-              <a:off x="2601643" y="2950746"/>
+              <a:off x="2622974" y="2950746"/>
               <a:ext cx="62384" cy="62384"/>
             </a:xfrm>
             <a:prstGeom prst="ellipse">
@@ -7576,7 +7576,7 @@
           </p:nvSpPr>
           <p:spPr>
             <a:xfrm>
-              <a:off x="2775357" y="3124429"/>
+              <a:off x="2818251" y="3124429"/>
               <a:ext cx="62384" cy="62384"/>
             </a:xfrm>
             <a:prstGeom prst="ellipse">
@@ -7602,7 +7602,7 @@
           </p:nvSpPr>
           <p:spPr>
             <a:xfrm>
-              <a:off x="2659138" y="2454225"/>
+              <a:off x="2669132" y="2454225"/>
               <a:ext cx="62384" cy="62384"/>
             </a:xfrm>
             <a:prstGeom prst="ellipse">
@@ -7628,7 +7628,7 @@
           </p:nvSpPr>
           <p:spPr>
             <a:xfrm>
-              <a:off x="2752811" y="2845042"/>
+              <a:off x="2807538" y="2845042"/>
               <a:ext cx="62384" cy="62384"/>
             </a:xfrm>
             <a:prstGeom prst="ellipse">
@@ -7654,7 +7654,7 @@
           </p:nvSpPr>
           <p:spPr>
             <a:xfrm>
-              <a:off x="2669311" y="3124269"/>
+              <a:off x="2605921" y="3124269"/>
               <a:ext cx="62384" cy="62384"/>
             </a:xfrm>
             <a:prstGeom prst="ellipse">
@@ -7680,7 +7680,7 @@
           </p:nvSpPr>
           <p:spPr>
             <a:xfrm>
-              <a:off x="2817609" y="2947033"/>
+              <a:off x="2753781" y="2947033"/>
               <a:ext cx="62384" cy="62384"/>
             </a:xfrm>
             <a:prstGeom prst="ellipse">
@@ -7706,7 +7706,7 @@
           </p:nvSpPr>
           <p:spPr>
             <a:xfrm>
-              <a:off x="2673774" y="2682757"/>
+              <a:off x="2667260" y="2682757"/>
               <a:ext cx="62384" cy="62384"/>
             </a:xfrm>
             <a:prstGeom prst="ellipse">
@@ -7732,7 +7732,7 @@
           </p:nvSpPr>
           <p:spPr>
             <a:xfrm>
-              <a:off x="2783572" y="2780527"/>
+              <a:off x="2767012" y="2780527"/>
               <a:ext cx="62384" cy="62384"/>
             </a:xfrm>
             <a:prstGeom prst="ellipse">
@@ -7758,7 +7758,7 @@
           </p:nvSpPr>
           <p:spPr>
             <a:xfrm>
-              <a:off x="2631945" y="2723706"/>
+              <a:off x="2660573" y="2723706"/>
               <a:ext cx="62384" cy="62384"/>
             </a:xfrm>
             <a:prstGeom prst="ellipse">
@@ -7784,7 +7784,7 @@
           </p:nvSpPr>
           <p:spPr>
             <a:xfrm>
-              <a:off x="2779790" y="2949282"/>
+              <a:off x="2785465" y="2949282"/>
               <a:ext cx="62384" cy="62384"/>
             </a:xfrm>
             <a:prstGeom prst="ellipse">
@@ -7810,7 +7810,7 @@
           </p:nvSpPr>
           <p:spPr>
             <a:xfrm>
-              <a:off x="2651432" y="2431697"/>
+              <a:off x="2609171" y="2431697"/>
               <a:ext cx="62384" cy="62384"/>
             </a:xfrm>
             <a:prstGeom prst="ellipse">
@@ -7836,7 +7836,7 @@
           </p:nvSpPr>
           <p:spPr>
             <a:xfrm>
-              <a:off x="2791357" y="2638972"/>
+              <a:off x="2794922" y="2638972"/>
               <a:ext cx="62384" cy="62384"/>
             </a:xfrm>
             <a:prstGeom prst="ellipse">
@@ -7862,7 +7862,7 @@
           </p:nvSpPr>
           <p:spPr>
             <a:xfrm>
-              <a:off x="2668479" y="2296964"/>
+              <a:off x="2673395" y="2296964"/>
               <a:ext cx="62384" cy="62384"/>
             </a:xfrm>
             <a:prstGeom prst="ellipse">
@@ -7888,7 +7888,7 @@
           </p:nvSpPr>
           <p:spPr>
             <a:xfrm>
-              <a:off x="2752166" y="2609538"/>
+              <a:off x="2779882" y="2609538"/>
               <a:ext cx="62384" cy="62384"/>
             </a:xfrm>
             <a:prstGeom prst="ellipse">
@@ -7914,7 +7914,7 @@
           </p:nvSpPr>
           <p:spPr>
             <a:xfrm>
-              <a:off x="2620995" y="2689538"/>
+              <a:off x="2616901" y="2689538"/>
               <a:ext cx="62384" cy="62384"/>
             </a:xfrm>
             <a:prstGeom prst="ellipse">
@@ -7940,7 +7940,7 @@
           </p:nvSpPr>
           <p:spPr>
             <a:xfrm>
-              <a:off x="2787515" y="3347710"/>
+              <a:off x="2822979" y="3347710"/>
               <a:ext cx="62384" cy="62384"/>
             </a:xfrm>
             <a:prstGeom prst="ellipse">
@@ -7966,7 +7966,7 @@
           </p:nvSpPr>
           <p:spPr>
             <a:xfrm>
-              <a:off x="2661820" y="3054567"/>
+              <a:off x="2640924" y="3054567"/>
               <a:ext cx="62384" cy="62384"/>
             </a:xfrm>
             <a:prstGeom prst="ellipse">
@@ -7992,7 +7992,7 @@
           </p:nvSpPr>
           <p:spPr>
             <a:xfrm>
-              <a:off x="2755922" y="3166091"/>
+              <a:off x="2810963" y="3166091"/>
               <a:ext cx="62384" cy="62384"/>
             </a:xfrm>
             <a:prstGeom prst="ellipse">
@@ -8018,7 +8018,7 @@
           </p:nvSpPr>
           <p:spPr>
             <a:xfrm>
-              <a:off x="2609430" y="2524098"/>
+              <a:off x="2602738" y="2524098"/>
               <a:ext cx="62384" cy="62384"/>
             </a:xfrm>
             <a:prstGeom prst="ellipse">
@@ -8044,7 +8044,7 @@
           </p:nvSpPr>
           <p:spPr>
             <a:xfrm>
-              <a:off x="2797104" y="2502937"/>
+              <a:off x="2785932" y="2502937"/>
               <a:ext cx="62384" cy="62384"/>
             </a:xfrm>
             <a:prstGeom prst="ellipse">
@@ -8070,7 +8070,7 @@
           </p:nvSpPr>
           <p:spPr>
             <a:xfrm>
-              <a:off x="2627807" y="2447043"/>
+              <a:off x="2614252" y="2447043"/>
               <a:ext cx="62384" cy="62384"/>
             </a:xfrm>
             <a:prstGeom prst="ellipse">
@@ -8096,7 +8096,7 @@
           </p:nvSpPr>
           <p:spPr>
             <a:xfrm>
-              <a:off x="2767155" y="2957010"/>
+              <a:off x="2763466" y="2957010"/>
               <a:ext cx="62384" cy="62384"/>
             </a:xfrm>
             <a:prstGeom prst="ellipse">
@@ -8122,7 +8122,7 @@
           </p:nvSpPr>
           <p:spPr>
             <a:xfrm>
-              <a:off x="2671866" y="2488115"/>
+              <a:off x="2636020" y="2488115"/>
               <a:ext cx="62384" cy="62384"/>
             </a:xfrm>
             <a:prstGeom prst="ellipse">
@@ -8148,7 +8148,7 @@
           </p:nvSpPr>
           <p:spPr>
             <a:xfrm>
-              <a:off x="2763509" y="2636345"/>
+              <a:off x="2809836" y="2636345"/>
               <a:ext cx="62384" cy="62384"/>
             </a:xfrm>
             <a:prstGeom prst="ellipse">
@@ -8174,7 +8174,7 @@
           </p:nvSpPr>
           <p:spPr>
             <a:xfrm>
-              <a:off x="2662167" y="3331458"/>
+              <a:off x="2628972" y="3331458"/>
               <a:ext cx="62384" cy="62384"/>
             </a:xfrm>
             <a:prstGeom prst="ellipse">
@@ -8200,7 +8200,7 @@
           </p:nvSpPr>
           <p:spPr>
             <a:xfrm>
-              <a:off x="2778501" y="3176744"/>
+              <a:off x="2759393" y="3176744"/>
               <a:ext cx="62384" cy="62384"/>
             </a:xfrm>
             <a:prstGeom prst="ellipse">
@@ -8226,7 +8226,7 @@
           </p:nvSpPr>
           <p:spPr>
             <a:xfrm>
-              <a:off x="2670353" y="2946947"/>
+              <a:off x="2641884" y="2946947"/>
               <a:ext cx="62384" cy="62384"/>
             </a:xfrm>
             <a:prstGeom prst="ellipse">
@@ -8252,7 +8252,7 @@
           </p:nvSpPr>
           <p:spPr>
             <a:xfrm>
-              <a:off x="2754396" y="2994744"/>
+              <a:off x="2778607" y="2994744"/>
               <a:ext cx="62384" cy="62384"/>
             </a:xfrm>
             <a:prstGeom prst="ellipse">
@@ -8278,7 +8278,7 @@
           </p:nvSpPr>
           <p:spPr>
             <a:xfrm>
-              <a:off x="2601910" y="3049734"/>
+              <a:off x="2623533" y="3049734"/>
               <a:ext cx="62384" cy="62384"/>
             </a:xfrm>
             <a:prstGeom prst="ellipse">
@@ -8304,7 +8304,7 @@
           </p:nvSpPr>
           <p:spPr>
             <a:xfrm>
-              <a:off x="2823279" y="2980496"/>
+              <a:off x="2802248" y="2980496"/>
               <a:ext cx="62384" cy="62384"/>
             </a:xfrm>
             <a:prstGeom prst="ellipse">
@@ -8330,7 +8330,7 @@
           </p:nvSpPr>
           <p:spPr>
             <a:xfrm>
-              <a:off x="2665312" y="2853710"/>
+              <a:off x="2620746" y="2853710"/>
               <a:ext cx="62384" cy="62384"/>
             </a:xfrm>
             <a:prstGeom prst="ellipse">
@@ -8356,7 +8356,7 @@
           </p:nvSpPr>
           <p:spPr>
             <a:xfrm>
-              <a:off x="2798072" y="3070296"/>
+              <a:off x="2812623" y="3070296"/>
               <a:ext cx="62384" cy="62384"/>
             </a:xfrm>
             <a:prstGeom prst="ellipse">
@@ -8382,7 +8382,7 @@
           </p:nvSpPr>
           <p:spPr>
             <a:xfrm>
-              <a:off x="2658344" y="3365191"/>
+              <a:off x="2604283" y="3365191"/>
               <a:ext cx="62384" cy="62384"/>
             </a:xfrm>
             <a:prstGeom prst="ellipse">
@@ -8408,7 +8408,7 @@
           </p:nvSpPr>
           <p:spPr>
             <a:xfrm>
-              <a:off x="2824738" y="3631569"/>
+              <a:off x="2757406" y="3631569"/>
               <a:ext cx="62384" cy="62384"/>
             </a:xfrm>
             <a:prstGeom prst="ellipse">
@@ -8434,7 +8434,7 @@
           </p:nvSpPr>
           <p:spPr>
             <a:xfrm>
-              <a:off x="2645005" y="2445492"/>
+              <a:off x="2668352" y="2445492"/>
               <a:ext cx="62384" cy="62384"/>
             </a:xfrm>
             <a:prstGeom prst="ellipse">
@@ -8460,7 +8460,7 @@
           </p:nvSpPr>
           <p:spPr>
             <a:xfrm>
-              <a:off x="2818979" y="2376479"/>
+              <a:off x="2805945" y="2376479"/>
               <a:ext cx="62384" cy="62384"/>
             </a:xfrm>
             <a:prstGeom prst="ellipse">
@@ -8486,7 +8486,7 @@
           </p:nvSpPr>
           <p:spPr>
             <a:xfrm>
-              <a:off x="2635722" y="2851348"/>
+              <a:off x="2630583" y="2851348"/>
               <a:ext cx="62384" cy="62384"/>
             </a:xfrm>
             <a:prstGeom prst="ellipse">
@@ -8512,7 +8512,7 @@
           </p:nvSpPr>
           <p:spPr>
             <a:xfrm>
-              <a:off x="2796237" y="2969651"/>
+              <a:off x="2752938" y="2969651"/>
               <a:ext cx="62384" cy="62384"/>
             </a:xfrm>
             <a:prstGeom prst="ellipse">
@@ -8538,7 +8538,7 @@
           </p:nvSpPr>
           <p:spPr>
             <a:xfrm>
-              <a:off x="2665979" y="2409264"/>
+              <a:off x="2654238" y="2409264"/>
               <a:ext cx="62384" cy="62384"/>
             </a:xfrm>
             <a:prstGeom prst="ellipse">
@@ -8564,7 +8564,7 @@
           </p:nvSpPr>
           <p:spPr>
             <a:xfrm>
-              <a:off x="2782758" y="2288675"/>
+              <a:off x="2754011" y="2288675"/>
               <a:ext cx="62384" cy="62384"/>
             </a:xfrm>
             <a:prstGeom prst="ellipse">
@@ -8590,7 +8590,7 @@
           </p:nvSpPr>
           <p:spPr>
             <a:xfrm>
-              <a:off x="2672904" y="2651220"/>
+              <a:off x="2670164" y="2651220"/>
               <a:ext cx="62384" cy="62384"/>
             </a:xfrm>
             <a:prstGeom prst="ellipse">
@@ -8616,7 +8616,7 @@
           </p:nvSpPr>
           <p:spPr>
             <a:xfrm>
-              <a:off x="2778184" y="2677855"/>
+              <a:off x="2794083" y="2677855"/>
               <a:ext cx="62384" cy="62384"/>
             </a:xfrm>
             <a:prstGeom prst="ellipse">
@@ -8642,7 +8642,7 @@
           </p:nvSpPr>
           <p:spPr>
             <a:xfrm>
-              <a:off x="2655420" y="2434305"/>
+              <a:off x="2640143" y="2434305"/>
               <a:ext cx="62384" cy="62384"/>
             </a:xfrm>
             <a:prstGeom prst="ellipse">
@@ -8668,7 +8668,7 @@
           </p:nvSpPr>
           <p:spPr>
             <a:xfrm>
-              <a:off x="2823371" y="2542918"/>
+              <a:off x="2824038" y="2542918"/>
               <a:ext cx="62384" cy="62384"/>
             </a:xfrm>
             <a:prstGeom prst="ellipse">
@@ -8694,7 +8694,7 @@
           </p:nvSpPr>
           <p:spPr>
             <a:xfrm>
-              <a:off x="2666761" y="3613989"/>
+              <a:off x="2643104" y="3613989"/>
               <a:ext cx="62384" cy="62384"/>
             </a:xfrm>
             <a:prstGeom prst="ellipse">
@@ -8720,7 +8720,7 @@
           </p:nvSpPr>
           <p:spPr>
             <a:xfrm>
-              <a:off x="2763620" y="3540565"/>
+              <a:off x="2771205" y="3540565"/>
               <a:ext cx="62384" cy="62384"/>
             </a:xfrm>
             <a:prstGeom prst="ellipse">
@@ -8746,7 +8746,7 @@
           </p:nvSpPr>
           <p:spPr>
             <a:xfrm>
-              <a:off x="2672947" y="2467333"/>
+              <a:off x="2607274" y="2467333"/>
               <a:ext cx="62384" cy="62384"/>
             </a:xfrm>
             <a:prstGeom prst="ellipse">
@@ -8772,7 +8772,7 @@
           </p:nvSpPr>
           <p:spPr>
             <a:xfrm>
-              <a:off x="2780826" y="2672533"/>
+              <a:off x="2815314" y="2672533"/>
               <a:ext cx="62384" cy="62384"/>
             </a:xfrm>
             <a:prstGeom prst="ellipse">
@@ -8798,7 +8798,7 @@
           </p:nvSpPr>
           <p:spPr>
             <a:xfrm>
-              <a:off x="2667270" y="2697677"/>
+              <a:off x="2626881" y="2697677"/>
               <a:ext cx="62384" cy="62384"/>
             </a:xfrm>
             <a:prstGeom prst="ellipse">
@@ -8824,7 +8824,7 @@
           </p:nvSpPr>
           <p:spPr>
             <a:xfrm>
-              <a:off x="2800247" y="2661272"/>
+              <a:off x="2779572" y="2661272"/>
               <a:ext cx="62384" cy="62384"/>
             </a:xfrm>
             <a:prstGeom prst="ellipse">
@@ -8850,7 +8850,7 @@
           </p:nvSpPr>
           <p:spPr>
             <a:xfrm>
-              <a:off x="2629326" y="2543266"/>
+              <a:off x="2645006" y="2543266"/>
               <a:ext cx="62384" cy="62384"/>
             </a:xfrm>
             <a:prstGeom prst="ellipse">
@@ -8876,7 +8876,7 @@
           </p:nvSpPr>
           <p:spPr>
             <a:xfrm>
-              <a:off x="2812498" y="2826078"/>
+              <a:off x="2806158" y="2826078"/>
               <a:ext cx="62384" cy="62384"/>
             </a:xfrm>
             <a:prstGeom prst="ellipse">
@@ -8902,7 +8902,7 @@
           </p:nvSpPr>
           <p:spPr>
             <a:xfrm>
-              <a:off x="2635830" y="2223446"/>
+              <a:off x="2603489" y="2223446"/>
               <a:ext cx="62384" cy="62384"/>
             </a:xfrm>
             <a:prstGeom prst="ellipse">
@@ -8928,7 +8928,7 @@
           </p:nvSpPr>
           <p:spPr>
             <a:xfrm>
-              <a:off x="2770048" y="2406126"/>
+              <a:off x="2788483" y="2406126"/>
               <a:ext cx="62384" cy="62384"/>
             </a:xfrm>
             <a:prstGeom prst="ellipse">
@@ -8954,7 +8954,7 @@
           </p:nvSpPr>
           <p:spPr>
             <a:xfrm>
-              <a:off x="2602768" y="2427983"/>
+              <a:off x="2610892" y="2427983"/>
               <a:ext cx="62384" cy="62384"/>
             </a:xfrm>
             <a:prstGeom prst="ellipse">
@@ -8980,7 +8980,7 @@
           </p:nvSpPr>
           <p:spPr>
             <a:xfrm>
-              <a:off x="2768979" y="2452066"/>
+              <a:off x="2803156" y="2452066"/>
               <a:ext cx="62384" cy="62384"/>
             </a:xfrm>
             <a:prstGeom prst="ellipse">
@@ -9006,7 +9006,7 @@
           </p:nvSpPr>
           <p:spPr>
             <a:xfrm>
-              <a:off x="2656225" y="2844553"/>
+              <a:off x="2613649" y="2844553"/>
               <a:ext cx="62384" cy="62384"/>
             </a:xfrm>
             <a:prstGeom prst="ellipse">
@@ -9032,7 +9032,7 @@
           </p:nvSpPr>
           <p:spPr>
             <a:xfrm>
-              <a:off x="2784092" y="3247802"/>
+              <a:off x="2801635" y="3247802"/>
               <a:ext cx="62384" cy="62384"/>
             </a:xfrm>
             <a:prstGeom prst="ellipse">
@@ -9058,7 +9058,7 @@
           </p:nvSpPr>
           <p:spPr>
             <a:xfrm>
-              <a:off x="2636599" y="2803773"/>
+              <a:off x="2621807" y="2803773"/>
               <a:ext cx="62384" cy="62384"/>
             </a:xfrm>
             <a:prstGeom prst="ellipse">
@@ -9084,7 +9084,7 @@
           </p:nvSpPr>
           <p:spPr>
             <a:xfrm>
-              <a:off x="2771228" y="2695427"/>
+              <a:off x="2803872" y="2695427"/>
               <a:ext cx="62384" cy="62384"/>
             </a:xfrm>
             <a:prstGeom prst="ellipse">
@@ -9110,7 +9110,7 @@
           </p:nvSpPr>
           <p:spPr>
             <a:xfrm>
-              <a:off x="2651086" y="2452571"/>
+              <a:off x="2617856" y="2452571"/>
               <a:ext cx="62384" cy="62384"/>
             </a:xfrm>
             <a:prstGeom prst="ellipse">
@@ -9136,7 +9136,7 @@
           </p:nvSpPr>
           <p:spPr>
             <a:xfrm>
-              <a:off x="2795996" y="2660305"/>
+              <a:off x="2758606" y="2660305"/>
               <a:ext cx="62384" cy="62384"/>
             </a:xfrm>
             <a:prstGeom prst="ellipse">
@@ -9162,7 +9162,7 @@
           </p:nvSpPr>
           <p:spPr>
             <a:xfrm>
-              <a:off x="2608469" y="2763377"/>
+              <a:off x="2666386" y="2763377"/>
               <a:ext cx="62384" cy="62384"/>
             </a:xfrm>
             <a:prstGeom prst="ellipse">
@@ -9188,7 +9188,7 @@
           </p:nvSpPr>
           <p:spPr>
             <a:xfrm>
-              <a:off x="2815906" y="3077760"/>
+              <a:off x="2807828" y="3077760"/>
               <a:ext cx="62384" cy="62384"/>
             </a:xfrm>
             <a:prstGeom prst="ellipse">
@@ -9214,7 +9214,7 @@
           </p:nvSpPr>
           <p:spPr>
             <a:xfrm>
-              <a:off x="2605193" y="2558573"/>
+              <a:off x="2648230" y="2558573"/>
               <a:ext cx="62384" cy="62384"/>
             </a:xfrm>
             <a:prstGeom prst="ellipse">
@@ -9240,7 +9240,7 @@
           </p:nvSpPr>
           <p:spPr>
             <a:xfrm>
-              <a:off x="2774082" y="2728736"/>
+              <a:off x="2799585" y="2728736"/>
               <a:ext cx="62384" cy="62384"/>
             </a:xfrm>
             <a:prstGeom prst="ellipse">
@@ -9266,7 +9266,7 @@
           </p:nvSpPr>
           <p:spPr>
             <a:xfrm>
-              <a:off x="2646173" y="2475919"/>
+              <a:off x="2656396" y="2475919"/>
               <a:ext cx="62384" cy="62384"/>
             </a:xfrm>
             <a:prstGeom prst="ellipse">
@@ -9292,7 +9292,7 @@
           </p:nvSpPr>
           <p:spPr>
             <a:xfrm>
-              <a:off x="2787396" y="2674450"/>
+              <a:off x="2759677" y="2674450"/>
               <a:ext cx="62384" cy="62384"/>
             </a:xfrm>
             <a:prstGeom prst="ellipse">
@@ -9318,7 +9318,7 @@
           </p:nvSpPr>
           <p:spPr>
             <a:xfrm>
-              <a:off x="2611339" y="2116462"/>
+              <a:off x="2603000" y="2116462"/>
               <a:ext cx="62384" cy="62384"/>
             </a:xfrm>
             <a:prstGeom prst="ellipse">
@@ -9344,7 +9344,7 @@
           </p:nvSpPr>
           <p:spPr>
             <a:xfrm>
-              <a:off x="2812708" y="2446312"/>
+              <a:off x="2785436" y="2446312"/>
               <a:ext cx="62384" cy="62384"/>
             </a:xfrm>
             <a:prstGeom prst="ellipse">
@@ -9370,7 +9370,7 @@
           </p:nvSpPr>
           <p:spPr>
             <a:xfrm>
-              <a:off x="2613212" y="2334364"/>
+              <a:off x="2673053" y="2334364"/>
               <a:ext cx="62384" cy="62384"/>
             </a:xfrm>
             <a:prstGeom prst="ellipse">
@@ -9396,7 +9396,7 @@
           </p:nvSpPr>
           <p:spPr>
             <a:xfrm>
-              <a:off x="2822247" y="2862504"/>
+              <a:off x="2781054" y="2862504"/>
               <a:ext cx="62384" cy="62384"/>
             </a:xfrm>
             <a:prstGeom prst="ellipse">
@@ -9422,7 +9422,7 @@
           </p:nvSpPr>
           <p:spPr>
             <a:xfrm>
-              <a:off x="2631966" y="2040718"/>
+              <a:off x="2658903" y="2040718"/>
               <a:ext cx="62384" cy="62384"/>
             </a:xfrm>
             <a:prstGeom prst="ellipse">
@@ -9448,7 +9448,7 @@
           </p:nvSpPr>
           <p:spPr>
             <a:xfrm>
-              <a:off x="2775473" y="2487393"/>
+              <a:off x="2796591" y="2487393"/>
               <a:ext cx="62384" cy="62384"/>
             </a:xfrm>
             <a:prstGeom prst="ellipse">
@@ -9474,7 +9474,7 @@
           </p:nvSpPr>
           <p:spPr>
             <a:xfrm>
-              <a:off x="2667177" y="2377424"/>
+              <a:off x="2646770" y="2377424"/>
               <a:ext cx="62384" cy="62384"/>
             </a:xfrm>
             <a:prstGeom prst="ellipse">
@@ -9500,7 +9500,7 @@
           </p:nvSpPr>
           <p:spPr>
             <a:xfrm>
-              <a:off x="2789339" y="2501393"/>
+              <a:off x="2811615" y="2501393"/>
               <a:ext cx="62384" cy="62384"/>
             </a:xfrm>
             <a:prstGeom prst="ellipse">
@@ -9526,7 +9526,7 @@
           </p:nvSpPr>
           <p:spPr>
             <a:xfrm>
-              <a:off x="2630017" y="2585074"/>
+              <a:off x="2656465" y="2585074"/>
               <a:ext cx="62384" cy="62384"/>
             </a:xfrm>
             <a:prstGeom prst="ellipse">
@@ -9552,7 +9552,7 @@
           </p:nvSpPr>
           <p:spPr>
             <a:xfrm>
-              <a:off x="2780228" y="2403145"/>
+              <a:off x="2755533" y="2403145"/>
               <a:ext cx="62384" cy="62384"/>
             </a:xfrm>
             <a:prstGeom prst="ellipse">
@@ -9578,7 +9578,7 @@
           </p:nvSpPr>
           <p:spPr>
             <a:xfrm>
-              <a:off x="2606922" y="2640306"/>
+              <a:off x="2654922" y="2640306"/>
               <a:ext cx="62384" cy="62384"/>
             </a:xfrm>
             <a:prstGeom prst="ellipse">
@@ -9604,7 +9604,7 @@
           </p:nvSpPr>
           <p:spPr>
             <a:xfrm>
-              <a:off x="2765264" y="2884196"/>
+              <a:off x="2817471" y="2884196"/>
               <a:ext cx="62384" cy="62384"/>
             </a:xfrm>
             <a:prstGeom prst="ellipse">
@@ -9630,7 +9630,7 @@
           </p:nvSpPr>
           <p:spPr>
             <a:xfrm>
-              <a:off x="2608582" y="2916016"/>
+              <a:off x="2665973" y="2916016"/>
               <a:ext cx="62384" cy="62384"/>
             </a:xfrm>
             <a:prstGeom prst="ellipse">
@@ -9656,7 +9656,7 @@
           </p:nvSpPr>
           <p:spPr>
             <a:xfrm>
-              <a:off x="2775384" y="2815425"/>
+              <a:off x="2778523" y="2815425"/>
               <a:ext cx="62384" cy="62384"/>
             </a:xfrm>
             <a:prstGeom prst="ellipse">
@@ -9682,7 +9682,7 @@
           </p:nvSpPr>
           <p:spPr>
             <a:xfrm>
-              <a:off x="2656176" y="3048379"/>
+              <a:off x="2673182" y="3048379"/>
               <a:ext cx="62384" cy="62384"/>
             </a:xfrm>
             <a:prstGeom prst="ellipse">
@@ -9708,7 +9708,7 @@
           </p:nvSpPr>
           <p:spPr>
             <a:xfrm>
-              <a:off x="2756542" y="2867539"/>
+              <a:off x="2759193" y="2867539"/>
               <a:ext cx="62384" cy="62384"/>
             </a:xfrm>
             <a:prstGeom prst="ellipse">
@@ -9734,7 +9734,7 @@
           </p:nvSpPr>
           <p:spPr>
             <a:xfrm>
-              <a:off x="2626334" y="2421797"/>
+              <a:off x="2628615" y="2421797"/>
               <a:ext cx="62384" cy="62384"/>
             </a:xfrm>
             <a:prstGeom prst="ellipse">
@@ -9760,7 +9760,7 @@
           </p:nvSpPr>
           <p:spPr>
             <a:xfrm>
-              <a:off x="2817755" y="2471015"/>
+              <a:off x="2752428" y="2471015"/>
               <a:ext cx="62384" cy="62384"/>
             </a:xfrm>
             <a:prstGeom prst="ellipse">
@@ -9786,7 +9786,7 @@
           </p:nvSpPr>
           <p:spPr>
             <a:xfrm>
-              <a:off x="2644751" y="3006664"/>
+              <a:off x="2638829" y="3006664"/>
               <a:ext cx="62384" cy="62384"/>
             </a:xfrm>
             <a:prstGeom prst="ellipse">
@@ -9812,7 +9812,7 @@
           </p:nvSpPr>
           <p:spPr>
             <a:xfrm>
-              <a:off x="2803150" y="2842366"/>
+              <a:off x="2754631" y="2842366"/>
               <a:ext cx="62384" cy="62384"/>
             </a:xfrm>
             <a:prstGeom prst="ellipse">
@@ -9838,7 +9838,7 @@
           </p:nvSpPr>
           <p:spPr>
             <a:xfrm>
-              <a:off x="2641664" y="2761195"/>
+              <a:off x="2667867" y="2761195"/>
               <a:ext cx="62384" cy="62384"/>
             </a:xfrm>
             <a:prstGeom prst="ellipse">
@@ -9864,7 +9864,7 @@
           </p:nvSpPr>
           <p:spPr>
             <a:xfrm>
-              <a:off x="2774315" y="3071257"/>
+              <a:off x="2755122" y="3071257"/>
               <a:ext cx="62384" cy="62384"/>
             </a:xfrm>
             <a:prstGeom prst="ellipse">
@@ -9890,7 +9890,7 @@
           </p:nvSpPr>
           <p:spPr>
             <a:xfrm>
-              <a:off x="2632759" y="2819702"/>
+              <a:off x="2632709" y="2819702"/>
               <a:ext cx="62384" cy="62384"/>
             </a:xfrm>
             <a:prstGeom prst="ellipse">
@@ -9916,7 +9916,7 @@
           </p:nvSpPr>
           <p:spPr>
             <a:xfrm>
-              <a:off x="2763153" y="2796706"/>
+              <a:off x="2788236" y="2796706"/>
               <a:ext cx="62384" cy="62384"/>
             </a:xfrm>
             <a:prstGeom prst="ellipse">
@@ -9942,7 +9942,7 @@
           </p:nvSpPr>
           <p:spPr>
             <a:xfrm>
-              <a:off x="2633782" y="2894368"/>
+              <a:off x="2630037" y="2894368"/>
               <a:ext cx="62384" cy="62384"/>
             </a:xfrm>
             <a:prstGeom prst="ellipse">
@@ -9968,7 +9968,7 @@
           </p:nvSpPr>
           <p:spPr>
             <a:xfrm>
-              <a:off x="2787703" y="3196349"/>
+              <a:off x="2790143" y="3196349"/>
               <a:ext cx="62384" cy="62384"/>
             </a:xfrm>
             <a:prstGeom prst="ellipse">
@@ -9994,7 +9994,7 @@
           </p:nvSpPr>
           <p:spPr>
             <a:xfrm>
-              <a:off x="2624474" y="2562498"/>
+              <a:off x="2606976" y="2562498"/>
               <a:ext cx="62384" cy="62384"/>
             </a:xfrm>
             <a:prstGeom prst="ellipse">
@@ -10020,7 +10020,7 @@
           </p:nvSpPr>
           <p:spPr>
             <a:xfrm>
-              <a:off x="2786029" y="2549321"/>
+              <a:off x="2782972" y="2549321"/>
               <a:ext cx="62384" cy="62384"/>
             </a:xfrm>
             <a:prstGeom prst="ellipse">
@@ -10046,7 +10046,7 @@
           </p:nvSpPr>
           <p:spPr>
             <a:xfrm>
-              <a:off x="2665362" y="2826533"/>
+              <a:off x="2656148" y="2826533"/>
               <a:ext cx="62384" cy="62384"/>
             </a:xfrm>
             <a:prstGeom prst="ellipse">
@@ -10072,7 +10072,7 @@
           </p:nvSpPr>
           <p:spPr>
             <a:xfrm>
-              <a:off x="2758441" y="2950861"/>
+              <a:off x="2752437" y="2950861"/>
               <a:ext cx="62384" cy="62384"/>
             </a:xfrm>
             <a:prstGeom prst="ellipse">
@@ -10098,7 +10098,7 @@
           </p:nvSpPr>
           <p:spPr>
             <a:xfrm>
-              <a:off x="2644516" y="2626943"/>
+              <a:off x="2666580" y="2626943"/>
               <a:ext cx="62384" cy="62384"/>
             </a:xfrm>
             <a:prstGeom prst="ellipse">
@@ -10124,7 +10124,7 @@
           </p:nvSpPr>
           <p:spPr>
             <a:xfrm>
-              <a:off x="2774706" y="2644802"/>
+              <a:off x="2790348" y="2644802"/>
               <a:ext cx="62384" cy="62384"/>
             </a:xfrm>
             <a:prstGeom prst="ellipse">
@@ -10150,7 +10150,7 @@
           </p:nvSpPr>
           <p:spPr>
             <a:xfrm>
-              <a:off x="2666413" y="2357803"/>
+              <a:off x="2620380" y="2357803"/>
               <a:ext cx="62384" cy="62384"/>
             </a:xfrm>
             <a:prstGeom prst="ellipse">
@@ -10176,7 +10176,7 @@
           </p:nvSpPr>
           <p:spPr>
             <a:xfrm>
-              <a:off x="2800976" y="2418959"/>
+              <a:off x="2767929" y="2418959"/>
               <a:ext cx="62384" cy="62384"/>
             </a:xfrm>
             <a:prstGeom prst="ellipse">
@@ -10202,7 +10202,7 @@
           </p:nvSpPr>
           <p:spPr>
             <a:xfrm>
-              <a:off x="2620929" y="2676988"/>
+              <a:off x="2622439" y="2676988"/>
               <a:ext cx="62384" cy="62384"/>
             </a:xfrm>
             <a:prstGeom prst="ellipse">
@@ -10228,7 +10228,7 @@
           </p:nvSpPr>
           <p:spPr>
             <a:xfrm>
-              <a:off x="2766510" y="2738221"/>
+              <a:off x="2768329" y="2738221"/>
               <a:ext cx="62384" cy="62384"/>
             </a:xfrm>
             <a:prstGeom prst="ellipse">
@@ -10254,7 +10254,7 @@
           </p:nvSpPr>
           <p:spPr>
             <a:xfrm>
-              <a:off x="2655031" y="2781744"/>
+              <a:off x="2673924" y="2781744"/>
               <a:ext cx="62384" cy="62384"/>
             </a:xfrm>
             <a:prstGeom prst="ellipse">
@@ -10280,7 +10280,7 @@
           </p:nvSpPr>
           <p:spPr>
             <a:xfrm>
-              <a:off x="2767282" y="2720172"/>
+              <a:off x="2763107" y="2720172"/>
               <a:ext cx="62384" cy="62384"/>
             </a:xfrm>
             <a:prstGeom prst="ellipse">
@@ -10306,7 +10306,7 @@
           </p:nvSpPr>
           <p:spPr>
             <a:xfrm>
-              <a:off x="2669552" y="2435407"/>
+              <a:off x="2606162" y="2435407"/>
               <a:ext cx="62384" cy="62384"/>
             </a:xfrm>
             <a:prstGeom prst="ellipse">
@@ -10332,7 +10332,7 @@
           </p:nvSpPr>
           <p:spPr>
             <a:xfrm>
-              <a:off x="2799141" y="2967996"/>
+              <a:off x="2784187" y="2967996"/>
               <a:ext cx="62384" cy="62384"/>
             </a:xfrm>
             <a:prstGeom prst="ellipse">
@@ -10358,7 +10358,7 @@
           </p:nvSpPr>
           <p:spPr>
             <a:xfrm>
-              <a:off x="2673151" y="2782377"/>
+              <a:off x="2625596" y="2782377"/>
               <a:ext cx="62384" cy="62384"/>
             </a:xfrm>
             <a:prstGeom prst="ellipse">
@@ -10384,7 +10384,7 @@
           </p:nvSpPr>
           <p:spPr>
             <a:xfrm>
-              <a:off x="2811042" y="3148857"/>
+              <a:off x="2812584" y="3148857"/>
               <a:ext cx="62384" cy="62384"/>
             </a:xfrm>
             <a:prstGeom prst="ellipse">
@@ -10410,7 +10410,7 @@
           </p:nvSpPr>
           <p:spPr>
             <a:xfrm>
-              <a:off x="2627720" y="2763695"/>
+              <a:off x="2600280" y="2763695"/>
               <a:ext cx="62384" cy="62384"/>
             </a:xfrm>
             <a:prstGeom prst="ellipse">
@@ -10436,7 +10436,7 @@
           </p:nvSpPr>
           <p:spPr>
             <a:xfrm>
-              <a:off x="2777086" y="2590032"/>
+              <a:off x="2813058" y="2590032"/>
               <a:ext cx="62384" cy="62384"/>
             </a:xfrm>
             <a:prstGeom prst="ellipse">
@@ -10462,7 +10462,7 @@
           </p:nvSpPr>
           <p:spPr>
             <a:xfrm>
-              <a:off x="2625698" y="2609345"/>
+              <a:off x="2652969" y="2609345"/>
               <a:ext cx="62384" cy="62384"/>
             </a:xfrm>
             <a:prstGeom prst="ellipse">
@@ -10488,7 +10488,7 @@
           </p:nvSpPr>
           <p:spPr>
             <a:xfrm>
-              <a:off x="2774732" y="2795014"/>
+              <a:off x="2821139" y="2795014"/>
               <a:ext cx="62384" cy="62384"/>
             </a:xfrm>
             <a:prstGeom prst="ellipse">
@@ -10514,7 +10514,7 @@
           </p:nvSpPr>
           <p:spPr>
             <a:xfrm>
-              <a:off x="2624091" y="3136301"/>
+              <a:off x="2629597" y="3136301"/>
               <a:ext cx="62384" cy="62384"/>
             </a:xfrm>
             <a:prstGeom prst="ellipse">
@@ -10540,7 +10540,7 @@
           </p:nvSpPr>
           <p:spPr>
             <a:xfrm>
-              <a:off x="2810885" y="2954749"/>
+              <a:off x="2819662" y="2954749"/>
               <a:ext cx="62384" cy="62384"/>
             </a:xfrm>
             <a:prstGeom prst="ellipse">
@@ -10566,7 +10566,7 @@
           </p:nvSpPr>
           <p:spPr>
             <a:xfrm>
-              <a:off x="2667320" y="2620283"/>
+              <a:off x="2604655" y="2620283"/>
               <a:ext cx="62384" cy="62384"/>
             </a:xfrm>
             <a:prstGeom prst="ellipse">
@@ -10592,7 +10592,7 @@
           </p:nvSpPr>
           <p:spPr>
             <a:xfrm>
-              <a:off x="2778406" y="2525704"/>
+              <a:off x="2778151" y="2525704"/>
               <a:ext cx="62384" cy="62384"/>
             </a:xfrm>
             <a:prstGeom prst="ellipse">
@@ -10618,7 +10618,7 @@
           </p:nvSpPr>
           <p:spPr>
             <a:xfrm>
-              <a:off x="2622311" y="2580395"/>
+              <a:off x="2618767" y="2580395"/>
               <a:ext cx="62384" cy="62384"/>
             </a:xfrm>
             <a:prstGeom prst="ellipse">
@@ -10644,7 +10644,7 @@
           </p:nvSpPr>
           <p:spPr>
             <a:xfrm>
-              <a:off x="2755490" y="2472673"/>
+              <a:off x="2771049" y="2472673"/>
               <a:ext cx="62384" cy="62384"/>
             </a:xfrm>
             <a:prstGeom prst="ellipse">
@@ -10670,7 +10670,7 @@
           </p:nvSpPr>
           <p:spPr>
             <a:xfrm>
-              <a:off x="2612392" y="3097033"/>
+              <a:off x="2661781" y="3097033"/>
               <a:ext cx="62384" cy="62384"/>
             </a:xfrm>
             <a:prstGeom prst="ellipse">
@@ -10696,7 +10696,7 @@
           </p:nvSpPr>
           <p:spPr>
             <a:xfrm>
-              <a:off x="2789769" y="2626699"/>
+              <a:off x="2780167" y="2626699"/>
               <a:ext cx="62384" cy="62384"/>
             </a:xfrm>
             <a:prstGeom prst="ellipse">
@@ -10722,7 +10722,7 @@
           </p:nvSpPr>
           <p:spPr>
             <a:xfrm>
-              <a:off x="2623276" y="3186086"/>
+              <a:off x="2614764" y="3186086"/>
               <a:ext cx="62384" cy="62384"/>
             </a:xfrm>
             <a:prstGeom prst="ellipse">
@@ -10748,7 +10748,7 @@
           </p:nvSpPr>
           <p:spPr>
             <a:xfrm>
-              <a:off x="2766432" y="3110659"/>
+              <a:off x="2792054" y="3110659"/>
               <a:ext cx="62384" cy="62384"/>
             </a:xfrm>
             <a:prstGeom prst="ellipse">
@@ -10774,7 +10774,7 @@
           </p:nvSpPr>
           <p:spPr>
             <a:xfrm>
-              <a:off x="2620240" y="2412903"/>
+              <a:off x="2628313" y="2412903"/>
               <a:ext cx="62384" cy="62384"/>
             </a:xfrm>
             <a:prstGeom prst="ellipse">
@@ -10800,7 +10800,7 @@
           </p:nvSpPr>
           <p:spPr>
             <a:xfrm>
-              <a:off x="2773676" y="2588600"/>
+              <a:off x="2786518" y="2588600"/>
               <a:ext cx="62384" cy="62384"/>
             </a:xfrm>
             <a:prstGeom prst="ellipse">
@@ -10826,7 +10826,7 @@
           </p:nvSpPr>
           <p:spPr>
             <a:xfrm>
-              <a:off x="2634022" y="2868995"/>
+              <a:off x="2638104" y="2868995"/>
               <a:ext cx="62384" cy="62384"/>
             </a:xfrm>
             <a:prstGeom prst="ellipse">
@@ -10852,7 +10852,7 @@
           </p:nvSpPr>
           <p:spPr>
             <a:xfrm>
-              <a:off x="2810936" y="2858326"/>
+              <a:off x="2814869" y="2858326"/>
               <a:ext cx="62384" cy="62384"/>
             </a:xfrm>
             <a:prstGeom prst="ellipse">
@@ -10878,7 +10878,7 @@
           </p:nvSpPr>
           <p:spPr>
             <a:xfrm>
-              <a:off x="2652896" y="2717509"/>
+              <a:off x="2669820" y="2717509"/>
               <a:ext cx="62384" cy="62384"/>
             </a:xfrm>
             <a:prstGeom prst="ellipse">
@@ -10904,7 +10904,7 @@
           </p:nvSpPr>
           <p:spPr>
             <a:xfrm>
-              <a:off x="2786435" y="2742255"/>
+              <a:off x="2788421" y="2742255"/>
               <a:ext cx="62384" cy="62384"/>
             </a:xfrm>
             <a:prstGeom prst="ellipse">
@@ -10930,7 +10930,7 @@
           </p:nvSpPr>
           <p:spPr>
             <a:xfrm>
-              <a:off x="2651815" y="2582312"/>
+              <a:off x="2604118" y="2582312"/>
               <a:ext cx="62384" cy="62384"/>
             </a:xfrm>
             <a:prstGeom prst="ellipse">
@@ -10956,7 +10956,7 @@
           </p:nvSpPr>
           <p:spPr>
             <a:xfrm>
-              <a:off x="2805656" y="2772195"/>
+              <a:off x="2760800" y="2772195"/>
               <a:ext cx="62384" cy="62384"/>
             </a:xfrm>
             <a:prstGeom prst="ellipse">
@@ -10982,7 +10982,7 @@
           </p:nvSpPr>
           <p:spPr>
             <a:xfrm>
-              <a:off x="2614575" y="2802207"/>
+              <a:off x="2633272" y="2802207"/>
               <a:ext cx="62384" cy="62384"/>
             </a:xfrm>
             <a:prstGeom prst="ellipse">
@@ -11008,7 +11008,7 @@
           </p:nvSpPr>
           <p:spPr>
             <a:xfrm>
-              <a:off x="2806221" y="2553204"/>
+              <a:off x="2762343" y="2553204"/>
               <a:ext cx="62384" cy="62384"/>
             </a:xfrm>
             <a:prstGeom prst="ellipse">
@@ -11034,7 +11034,7 @@
           </p:nvSpPr>
           <p:spPr>
             <a:xfrm>
-              <a:off x="2662548" y="2873202"/>
+              <a:off x="2660052" y="2873202"/>
               <a:ext cx="62384" cy="62384"/>
             </a:xfrm>
             <a:prstGeom prst="ellipse">
@@ -11060,7 +11060,7 @@
           </p:nvSpPr>
           <p:spPr>
             <a:xfrm>
-              <a:off x="2766510" y="2651861"/>
+              <a:off x="2757221" y="2651861"/>
               <a:ext cx="62384" cy="62384"/>
             </a:xfrm>
             <a:prstGeom prst="ellipse">
@@ -11086,7 +11086,7 @@
           </p:nvSpPr>
           <p:spPr>
             <a:xfrm>
-              <a:off x="2659820" y="2526671"/>
+              <a:off x="2626140" y="2526671"/>
               <a:ext cx="62384" cy="62384"/>
             </a:xfrm>
             <a:prstGeom prst="ellipse">
@@ -11112,7 +11112,7 @@
           </p:nvSpPr>
           <p:spPr>
             <a:xfrm>
-              <a:off x="2775689" y="2461232"/>
+              <a:off x="2768276" y="2461232"/>
               <a:ext cx="62384" cy="62384"/>
             </a:xfrm>
             <a:prstGeom prst="ellipse">
@@ -11138,7 +11138,7 @@
           </p:nvSpPr>
           <p:spPr>
             <a:xfrm>
-              <a:off x="2657702" y="2238331"/>
+              <a:off x="2650999" y="2238331"/>
               <a:ext cx="62384" cy="62384"/>
             </a:xfrm>
             <a:prstGeom prst="ellipse">
@@ -11164,7 +11164,7 @@
           </p:nvSpPr>
           <p:spPr>
             <a:xfrm>
-              <a:off x="2764875" y="2207776"/>
+              <a:off x="2762756" y="2207776"/>
               <a:ext cx="62384" cy="62384"/>
             </a:xfrm>
             <a:prstGeom prst="ellipse">
@@ -11190,7 +11190,7 @@
           </p:nvSpPr>
           <p:spPr>
             <a:xfrm>
-              <a:off x="2621219" y="2480555"/>
+              <a:off x="2610537" y="2480555"/>
               <a:ext cx="62384" cy="62384"/>
             </a:xfrm>
             <a:prstGeom prst="ellipse">
@@ -11216,7 +11216,7 @@
           </p:nvSpPr>
           <p:spPr>
             <a:xfrm>
-              <a:off x="2765479" y="2413021"/>
+              <a:off x="2794228" y="2413021"/>
               <a:ext cx="62384" cy="62384"/>
             </a:xfrm>
             <a:prstGeom prst="ellipse">
@@ -11242,7 +11242,7 @@
           </p:nvSpPr>
           <p:spPr>
             <a:xfrm>
-              <a:off x="2635999" y="2378212"/>
+              <a:off x="2661916" y="2378212"/>
               <a:ext cx="62384" cy="62384"/>
             </a:xfrm>
             <a:prstGeom prst="ellipse">
@@ -11268,7 +11268,7 @@
           </p:nvSpPr>
           <p:spPr>
             <a:xfrm>
-              <a:off x="2766237" y="2319873"/>
+              <a:off x="2769182" y="2319873"/>
               <a:ext cx="62384" cy="62384"/>
             </a:xfrm>
             <a:prstGeom prst="ellipse">
@@ -11294,7 +11294,7 @@
           </p:nvSpPr>
           <p:spPr>
             <a:xfrm>
-              <a:off x="2669070" y="2516526"/>
+              <a:off x="2668695" y="2516526"/>
               <a:ext cx="62384" cy="62384"/>
             </a:xfrm>
             <a:prstGeom prst="ellipse">
@@ -11320,7 +11320,7 @@
           </p:nvSpPr>
           <p:spPr>
             <a:xfrm>
-              <a:off x="2792850" y="2671149"/>
+              <a:off x="2791765" y="2671149"/>
               <a:ext cx="62384" cy="62384"/>
             </a:xfrm>
             <a:prstGeom prst="ellipse">
@@ -11346,7 +11346,7 @@
           </p:nvSpPr>
           <p:spPr>
             <a:xfrm>
-              <a:off x="2628065" y="2891576"/>
+              <a:off x="2658006" y="2891576"/>
               <a:ext cx="62384" cy="62384"/>
             </a:xfrm>
             <a:prstGeom prst="ellipse">
@@ -11372,7 +11372,7 @@
           </p:nvSpPr>
           <p:spPr>
             <a:xfrm>
-              <a:off x="2762539" y="2854399"/>
+              <a:off x="2779246" y="2854399"/>
               <a:ext cx="62384" cy="62384"/>
             </a:xfrm>
             <a:prstGeom prst="ellipse">
@@ -11398,7 +11398,7 @@
           </p:nvSpPr>
           <p:spPr>
             <a:xfrm>
-              <a:off x="2608164" y="2790183"/>
+              <a:off x="2610573" y="2790183"/>
               <a:ext cx="62384" cy="62384"/>
             </a:xfrm>
             <a:prstGeom prst="ellipse">
@@ -11424,7 +11424,7 @@
           </p:nvSpPr>
           <p:spPr>
             <a:xfrm>
-              <a:off x="2755952" y="2633806"/>
+              <a:off x="2791173" y="2633806"/>
               <a:ext cx="62384" cy="62384"/>
             </a:xfrm>
             <a:prstGeom prst="ellipse">
@@ -11450,7 +11450,7 @@
           </p:nvSpPr>
           <p:spPr>
             <a:xfrm>
-              <a:off x="2605772" y="2664992"/>
+              <a:off x="2610475" y="2664992"/>
               <a:ext cx="62384" cy="62384"/>
             </a:xfrm>
             <a:prstGeom prst="ellipse">
@@ -11476,7 +11476,7 @@
           </p:nvSpPr>
           <p:spPr>
             <a:xfrm>
-              <a:off x="2779489" y="2462177"/>
+              <a:off x="2772914" y="2462177"/>
               <a:ext cx="62384" cy="62384"/>
             </a:xfrm>
             <a:prstGeom prst="ellipse">
@@ -11502,7 +11502,7 @@
           </p:nvSpPr>
           <p:spPr>
             <a:xfrm>
-              <a:off x="2603713" y="2226842"/>
+              <a:off x="2630553" y="2226842"/>
               <a:ext cx="62384" cy="62384"/>
             </a:xfrm>
             <a:prstGeom prst="ellipse">
@@ -11528,7 +11528,7 @@
           </p:nvSpPr>
           <p:spPr>
             <a:xfrm>
-              <a:off x="2762984" y="2271804"/>
+              <a:off x="2769924" y="2271804"/>
               <a:ext cx="62384" cy="62384"/>
             </a:xfrm>
             <a:prstGeom prst="ellipse">
@@ -11554,7 +11554,7 @@
           </p:nvSpPr>
           <p:spPr>
             <a:xfrm>
-              <a:off x="2610613" y="3018506"/>
+              <a:off x="2664042" y="3018506"/>
               <a:ext cx="62384" cy="62384"/>
             </a:xfrm>
             <a:prstGeom prst="ellipse">
@@ -11580,7 +11580,7 @@
           </p:nvSpPr>
           <p:spPr>
             <a:xfrm>
-              <a:off x="2802929" y="2477842"/>
+              <a:off x="2769809" y="2477842"/>
               <a:ext cx="62384" cy="62384"/>
             </a:xfrm>
             <a:prstGeom prst="ellipse">
@@ -11606,7 +11606,7 @@
           </p:nvSpPr>
           <p:spPr>
             <a:xfrm>
-              <a:off x="2623905" y="2524713"/>
+              <a:off x="2673639" y="2524713"/>
               <a:ext cx="62384" cy="62384"/>
             </a:xfrm>
             <a:prstGeom prst="ellipse">
@@ -11632,7 +11632,7 @@
           </p:nvSpPr>
           <p:spPr>
             <a:xfrm>
-              <a:off x="2776470" y="2699687"/>
+              <a:off x="2787292" y="2699687"/>
               <a:ext cx="62384" cy="62384"/>
             </a:xfrm>
             <a:prstGeom prst="ellipse">
@@ -11658,7 +11658,7 @@
           </p:nvSpPr>
           <p:spPr>
             <a:xfrm>
-              <a:off x="2610779" y="2330471"/>
+              <a:off x="2644747" y="2330471"/>
               <a:ext cx="62384" cy="62384"/>
             </a:xfrm>
             <a:prstGeom prst="ellipse">
@@ -11684,7 +11684,7 @@
           </p:nvSpPr>
           <p:spPr>
             <a:xfrm>
-              <a:off x="2772220" y="2386403"/>
+              <a:off x="2778186" y="2386403"/>
               <a:ext cx="62384" cy="62384"/>
             </a:xfrm>
             <a:prstGeom prst="ellipse">
@@ -11710,7 +11710,7 @@
           </p:nvSpPr>
           <p:spPr>
             <a:xfrm>
-              <a:off x="2669094" y="2194223"/>
+              <a:off x="2654205" y="2194223"/>
               <a:ext cx="62384" cy="62384"/>
             </a:xfrm>
             <a:prstGeom prst="ellipse">
@@ -11736,7 +11736,7 @@
           </p:nvSpPr>
           <p:spPr>
             <a:xfrm>
-              <a:off x="2807965" y="2175583"/>
+              <a:off x="2805816" y="2175583"/>
               <a:ext cx="62384" cy="62384"/>
             </a:xfrm>
             <a:prstGeom prst="ellipse">
@@ -11762,7 +11762,7 @@
           </p:nvSpPr>
           <p:spPr>
             <a:xfrm>
-              <a:off x="2654360" y="2143979"/>
+              <a:off x="2608202" y="2143979"/>
               <a:ext cx="62384" cy="62384"/>
             </a:xfrm>
             <a:prstGeom prst="ellipse">
@@ -11788,7 +11788,7 @@
           </p:nvSpPr>
           <p:spPr>
             <a:xfrm>
-              <a:off x="2773260" y="1999557"/>
+              <a:off x="2784177" y="1999557"/>
               <a:ext cx="62384" cy="62384"/>
             </a:xfrm>
             <a:prstGeom prst="ellipse">
@@ -11814,7 +11814,7 @@
           </p:nvSpPr>
           <p:spPr>
             <a:xfrm>
-              <a:off x="2647189" y="1573875"/>
+              <a:off x="2653520" y="1573875"/>
               <a:ext cx="62384" cy="62384"/>
             </a:xfrm>
             <a:prstGeom prst="ellipse">
@@ -11840,7 +11840,7 @@
           </p:nvSpPr>
           <p:spPr>
             <a:xfrm>
-              <a:off x="2770881" y="2338217"/>
+              <a:off x="2786910" y="2338217"/>
               <a:ext cx="62384" cy="62384"/>
             </a:xfrm>
             <a:prstGeom prst="ellipse">
@@ -11866,7 +11866,7 @@
           </p:nvSpPr>
           <p:spPr>
             <a:xfrm>
-              <a:off x="2661560" y="2537992"/>
+              <a:off x="2653249" y="2537992"/>
               <a:ext cx="62384" cy="62384"/>
             </a:xfrm>
             <a:prstGeom prst="ellipse">
@@ -11892,7 +11892,7 @@
           </p:nvSpPr>
           <p:spPr>
             <a:xfrm>
-              <a:off x="2797097" y="2581861"/>
+              <a:off x="2817697" y="2581861"/>
               <a:ext cx="62384" cy="62384"/>
             </a:xfrm>
             <a:prstGeom prst="ellipse">
@@ -11918,7 +11918,7 @@
           </p:nvSpPr>
           <p:spPr>
             <a:xfrm>
-              <a:off x="2672069" y="2278253"/>
+              <a:off x="2609070" y="2278253"/>
               <a:ext cx="62384" cy="62384"/>
             </a:xfrm>
             <a:prstGeom prst="ellipse">
@@ -11944,7 +11944,7 @@
           </p:nvSpPr>
           <p:spPr>
             <a:xfrm>
-              <a:off x="2820344" y="2238716"/>
+              <a:off x="2812804" y="2238716"/>
               <a:ext cx="62384" cy="62384"/>
             </a:xfrm>
             <a:prstGeom prst="ellipse">
@@ -11970,7 +11970,7 @@
           </p:nvSpPr>
           <p:spPr>
             <a:xfrm>
-              <a:off x="3665695" y="2977551"/>
+              <a:off x="3644122" y="2977551"/>
               <a:ext cx="62384" cy="62384"/>
             </a:xfrm>
             <a:prstGeom prst="ellipse">
@@ -11996,7 +11996,7 @@
           </p:nvSpPr>
           <p:spPr>
             <a:xfrm>
-              <a:off x="3841291" y="2742761"/>
+              <a:off x="3811965" y="2742761"/>
               <a:ext cx="62384" cy="62384"/>
             </a:xfrm>
             <a:prstGeom prst="ellipse">
@@ -12022,7 +12022,7 @@
           </p:nvSpPr>
           <p:spPr>
             <a:xfrm>
-              <a:off x="3674693" y="2240077"/>
+              <a:off x="3643337" y="2240077"/>
               <a:ext cx="62384" cy="62384"/>
             </a:xfrm>
             <a:prstGeom prst="ellipse">
@@ -12048,7 +12048,7 @@
           </p:nvSpPr>
           <p:spPr>
             <a:xfrm>
-              <a:off x="3803871" y="2461670"/>
+              <a:off x="3855661" y="2461670"/>
               <a:ext cx="62384" cy="62384"/>
             </a:xfrm>
             <a:prstGeom prst="ellipse">
@@ -12074,7 +12074,7 @@
           </p:nvSpPr>
           <p:spPr>
             <a:xfrm>
-              <a:off x="3690356" y="2283992"/>
+              <a:off x="3707780" y="2283992"/>
               <a:ext cx="62384" cy="62384"/>
             </a:xfrm>
             <a:prstGeom prst="ellipse">
@@ -12100,7 +12100,7 @@
           </p:nvSpPr>
           <p:spPr>
             <a:xfrm>
-              <a:off x="3801792" y="2723369"/>
+              <a:off x="3860030" y="2723369"/>
               <a:ext cx="62384" cy="62384"/>
             </a:xfrm>
             <a:prstGeom prst="ellipse">
@@ -12126,7 +12126,7 @@
           </p:nvSpPr>
           <p:spPr>
             <a:xfrm>
-              <a:off x="3689488" y="2041087"/>
+              <a:off x="3688152" y="2041087"/>
               <a:ext cx="62384" cy="62384"/>
             </a:xfrm>
             <a:prstGeom prst="ellipse">
@@ -12152,7 +12152,7 @@
           </p:nvSpPr>
           <p:spPr>
             <a:xfrm>
-              <a:off x="3799486" y="2268115"/>
+              <a:off x="3801914" y="2268115"/>
               <a:ext cx="62384" cy="62384"/>
             </a:xfrm>
             <a:prstGeom prst="ellipse">
@@ -12178,7 +12178,7 @@
           </p:nvSpPr>
           <p:spPr>
             <a:xfrm>
-              <a:off x="3687902" y="2323605"/>
+              <a:off x="3687734" y="2323605"/>
               <a:ext cx="62384" cy="62384"/>
             </a:xfrm>
             <a:prstGeom prst="ellipse">
@@ -12204,7 +12204,7 @@
           </p:nvSpPr>
           <p:spPr>
             <a:xfrm>
-              <a:off x="3833970" y="2444426"/>
+              <a:off x="3802829" y="2444426"/>
               <a:ext cx="62384" cy="62384"/>
             </a:xfrm>
             <a:prstGeom prst="ellipse">
@@ -12230,7 +12230,7 @@
           </p:nvSpPr>
           <p:spPr>
             <a:xfrm>
-              <a:off x="3649698" y="2473336"/>
+              <a:off x="3709111" y="2473336"/>
               <a:ext cx="62384" cy="62384"/>
             </a:xfrm>
             <a:prstGeom prst="ellipse">
@@ -12256,7 +12256,7 @@
           </p:nvSpPr>
           <p:spPr>
             <a:xfrm>
-              <a:off x="3862548" y="2879524"/>
+              <a:off x="3858426" y="2879524"/>
               <a:ext cx="62384" cy="62384"/>
             </a:xfrm>
             <a:prstGeom prst="ellipse">
@@ -12282,7 +12282,7 @@
           </p:nvSpPr>
           <p:spPr>
             <a:xfrm>
-              <a:off x="3684629" y="2359280"/>
+              <a:off x="3647322" y="2359280"/>
               <a:ext cx="62384" cy="62384"/>
             </a:xfrm>
             <a:prstGeom prst="ellipse">
@@ -12308,7 +12308,7 @@
           </p:nvSpPr>
           <p:spPr>
             <a:xfrm>
-              <a:off x="3823937" y="2416077"/>
+              <a:off x="3850897" y="2416077"/>
               <a:ext cx="62384" cy="62384"/>
             </a:xfrm>
             <a:prstGeom prst="ellipse">
@@ -12334,7 +12334,7 @@
           </p:nvSpPr>
           <p:spPr>
             <a:xfrm>
-              <a:off x="3677669" y="2548773"/>
+              <a:off x="3699114" y="2548773"/>
               <a:ext cx="62384" cy="62384"/>
             </a:xfrm>
             <a:prstGeom prst="ellipse">
@@ -12360,7 +12360,7 @@
           </p:nvSpPr>
           <p:spPr>
             <a:xfrm>
-              <a:off x="3804484" y="2545186"/>
+              <a:off x="3820369" y="2545186"/>
               <a:ext cx="62384" cy="62384"/>
             </a:xfrm>
             <a:prstGeom prst="ellipse">
@@ -12386,7 +12386,7 @@
           </p:nvSpPr>
           <p:spPr>
             <a:xfrm>
-              <a:off x="3703397" y="2621169"/>
+              <a:off x="3643809" y="2621169"/>
               <a:ext cx="62384" cy="62384"/>
             </a:xfrm>
             <a:prstGeom prst="ellipse">
@@ -12412,7 +12412,7 @@
           </p:nvSpPr>
           <p:spPr>
             <a:xfrm>
-              <a:off x="3828191" y="2652582"/>
+              <a:off x="3850410" y="2652582"/>
               <a:ext cx="62384" cy="62384"/>
             </a:xfrm>
             <a:prstGeom prst="ellipse">
@@ -12438,7 +12438,7 @@
           </p:nvSpPr>
           <p:spPr>
             <a:xfrm>
-              <a:off x="3683753" y="2757682"/>
+              <a:off x="3673975" y="2757682"/>
               <a:ext cx="62384" cy="62384"/>
             </a:xfrm>
             <a:prstGeom prst="ellipse">
@@ -12464,7 +12464,7 @@
           </p:nvSpPr>
           <p:spPr>
             <a:xfrm>
-              <a:off x="3859222" y="2917328"/>
+              <a:off x="3812847" y="2917328"/>
               <a:ext cx="62384" cy="62384"/>
             </a:xfrm>
             <a:prstGeom prst="ellipse">
@@ -12490,7 +12490,7 @@
           </p:nvSpPr>
           <p:spPr>
             <a:xfrm>
-              <a:off x="3714224" y="2875369"/>
+              <a:off x="3687057" y="2875369"/>
               <a:ext cx="62384" cy="62384"/>
             </a:xfrm>
             <a:prstGeom prst="ellipse">
@@ -12516,7 +12516,7 @@
           </p:nvSpPr>
           <p:spPr>
             <a:xfrm>
-              <a:off x="3854656" y="3234895"/>
+              <a:off x="3821563" y="3234895"/>
               <a:ext cx="62384" cy="62384"/>
             </a:xfrm>
             <a:prstGeom prst="ellipse">
@@ -12542,7 +12542,7 @@
           </p:nvSpPr>
           <p:spPr>
             <a:xfrm>
-              <a:off x="3670611" y="2281355"/>
+              <a:off x="3670076" y="2281355"/>
               <a:ext cx="62384" cy="62384"/>
             </a:xfrm>
             <a:prstGeom prst="ellipse">
@@ -12568,7 +12568,7 @@
           </p:nvSpPr>
           <p:spPr>
             <a:xfrm>
-              <a:off x="3836991" y="2494850"/>
+              <a:off x="3859084" y="2494850"/>
               <a:ext cx="62384" cy="62384"/>
             </a:xfrm>
             <a:prstGeom prst="ellipse">
@@ -12594,7 +12594,7 @@
           </p:nvSpPr>
           <p:spPr>
             <a:xfrm>
-              <a:off x="3641373" y="2750417"/>
+              <a:off x="3682318" y="2750417"/>
               <a:ext cx="62384" cy="62384"/>
             </a:xfrm>
             <a:prstGeom prst="ellipse">
@@ -12620,7 +12620,7 @@
           </p:nvSpPr>
           <p:spPr>
             <a:xfrm>
-              <a:off x="3825828" y="2929440"/>
+              <a:off x="3798941" y="2929440"/>
               <a:ext cx="62384" cy="62384"/>
             </a:xfrm>
             <a:prstGeom prst="ellipse">
@@ -12646,7 +12646,7 @@
           </p:nvSpPr>
           <p:spPr>
             <a:xfrm>
-              <a:off x="3646677" y="2054400"/>
+              <a:off x="3656403" y="2054400"/>
               <a:ext cx="62384" cy="62384"/>
             </a:xfrm>
             <a:prstGeom prst="ellipse">
@@ -12672,7 +12672,7 @@
           </p:nvSpPr>
           <p:spPr>
             <a:xfrm>
-              <a:off x="3795925" y="2378063"/>
+              <a:off x="3862686" y="2378063"/>
               <a:ext cx="62384" cy="62384"/>
             </a:xfrm>
             <a:prstGeom prst="ellipse">
@@ -12698,7 +12698,7 @@
           </p:nvSpPr>
           <p:spPr>
             <a:xfrm>
-              <a:off x="3646462" y="2280071"/>
+              <a:off x="3697924" y="2280071"/>
               <a:ext cx="62384" cy="62384"/>
             </a:xfrm>
             <a:prstGeom prst="ellipse">
@@ -12724,7 +12724,7 @@
           </p:nvSpPr>
           <p:spPr>
             <a:xfrm>
-              <a:off x="3838130" y="2442307"/>
+              <a:off x="3817728" y="2442307"/>
               <a:ext cx="62384" cy="62384"/>
             </a:xfrm>
             <a:prstGeom prst="ellipse">
@@ -12750,7 +12750,7 @@
           </p:nvSpPr>
           <p:spPr>
             <a:xfrm>
-              <a:off x="3697718" y="2068688"/>
+              <a:off x="3711532" y="2068688"/>
               <a:ext cx="62384" cy="62384"/>
             </a:xfrm>
             <a:prstGeom prst="ellipse">
@@ -12776,7 +12776,7 @@
           </p:nvSpPr>
           <p:spPr>
             <a:xfrm>
-              <a:off x="3805762" y="2353083"/>
+              <a:off x="3806153" y="2353083"/>
               <a:ext cx="62384" cy="62384"/>
             </a:xfrm>
             <a:prstGeom prst="ellipse">
@@ -12802,7 +12802,7 @@
           </p:nvSpPr>
           <p:spPr>
             <a:xfrm>
-              <a:off x="3683714" y="3379721"/>
+              <a:off x="3707141" y="3379721"/>
               <a:ext cx="62384" cy="62384"/>
             </a:xfrm>
             <a:prstGeom prst="ellipse">
@@ -12828,7 +12828,7 @@
           </p:nvSpPr>
           <p:spPr>
             <a:xfrm>
-              <a:off x="3843974" y="3189255"/>
+              <a:off x="3834154" y="3189255"/>
               <a:ext cx="62384" cy="62384"/>
             </a:xfrm>
             <a:prstGeom prst="ellipse">
@@ -12854,7 +12854,7 @@
           </p:nvSpPr>
           <p:spPr>
             <a:xfrm>
-              <a:off x="3674898" y="3009233"/>
+              <a:off x="3655683" y="3009233"/>
               <a:ext cx="62384" cy="62384"/>
             </a:xfrm>
             <a:prstGeom prst="ellipse">
@@ -12880,7 +12880,7 @@
           </p:nvSpPr>
           <p:spPr>
             <a:xfrm>
-              <a:off x="3800931" y="2727901"/>
+              <a:off x="3836846" y="2727901"/>
               <a:ext cx="62384" cy="62384"/>
             </a:xfrm>
             <a:prstGeom prst="ellipse">
@@ -12906,7 +12906,7 @@
           </p:nvSpPr>
           <p:spPr>
             <a:xfrm>
-              <a:off x="3706344" y="2078040"/>
+              <a:off x="3701091" y="2078040"/>
               <a:ext cx="62384" cy="62384"/>
             </a:xfrm>
             <a:prstGeom prst="ellipse">
@@ -12932,7 +12932,7 @@
           </p:nvSpPr>
           <p:spPr>
             <a:xfrm>
-              <a:off x="3855602" y="2538691"/>
+              <a:off x="3861198" y="2538691"/>
               <a:ext cx="62384" cy="62384"/>
             </a:xfrm>
             <a:prstGeom prst="ellipse">
@@ -12958,7 +12958,7 @@
           </p:nvSpPr>
           <p:spPr>
             <a:xfrm>
-              <a:off x="3697925" y="2664221"/>
+              <a:off x="3713864" y="2664221"/>
               <a:ext cx="62384" cy="62384"/>
             </a:xfrm>
             <a:prstGeom prst="ellipse">
@@ -12984,7 +12984,7 @@
           </p:nvSpPr>
           <p:spPr>
             <a:xfrm>
-              <a:off x="3815729" y="2933998"/>
+              <a:off x="3827058" y="2933998"/>
               <a:ext cx="62384" cy="62384"/>
             </a:xfrm>
             <a:prstGeom prst="ellipse">
@@ -13010,7 +13010,7 @@
           </p:nvSpPr>
           <p:spPr>
             <a:xfrm>
-              <a:off x="3674570" y="2348837"/>
+              <a:off x="3680065" y="2348837"/>
               <a:ext cx="62384" cy="62384"/>
             </a:xfrm>
             <a:prstGeom prst="ellipse">
@@ -13036,7 +13036,7 @@
           </p:nvSpPr>
           <p:spPr>
             <a:xfrm>
-              <a:off x="3861018" y="2509938"/>
+              <a:off x="3862976" y="2509938"/>
               <a:ext cx="62384" cy="62384"/>
             </a:xfrm>
             <a:prstGeom prst="ellipse">
@@ -13062,7 +13062,7 @@
           </p:nvSpPr>
           <p:spPr>
             <a:xfrm>
-              <a:off x="3675189" y="2517579"/>
+              <a:off x="3652396" y="2517579"/>
               <a:ext cx="62384" cy="62384"/>
             </a:xfrm>
             <a:prstGeom prst="ellipse">
@@ -13088,7 +13088,7 @@
           </p:nvSpPr>
           <p:spPr>
             <a:xfrm>
-              <a:off x="3806291" y="2715871"/>
+              <a:off x="3853616" y="2715871"/>
               <a:ext cx="62384" cy="62384"/>
             </a:xfrm>
             <a:prstGeom prst="ellipse">
@@ -13114,7 +13114,7 @@
           </p:nvSpPr>
           <p:spPr>
             <a:xfrm>
-              <a:off x="3670722" y="3235693"/>
+              <a:off x="3676379" y="3235693"/>
               <a:ext cx="62384" cy="62384"/>
             </a:xfrm>
             <a:prstGeom prst="ellipse">
@@ -13140,7 +13140,7 @@
           </p:nvSpPr>
           <p:spPr>
             <a:xfrm>
-              <a:off x="3843127" y="3000286"/>
+              <a:off x="3814819" y="3000286"/>
               <a:ext cx="62384" cy="62384"/>
             </a:xfrm>
             <a:prstGeom prst="ellipse">
@@ -13166,7 +13166,7 @@
           </p:nvSpPr>
           <p:spPr>
             <a:xfrm>
-              <a:off x="3653302" y="2669317"/>
+              <a:off x="3705942" y="2669317"/>
               <a:ext cx="62384" cy="62384"/>
             </a:xfrm>
             <a:prstGeom prst="ellipse">
@@ -13192,7 +13192,7 @@
           </p:nvSpPr>
           <p:spPr>
             <a:xfrm>
-              <a:off x="3833962" y="2847542"/>
+              <a:off x="3848193" y="2847542"/>
               <a:ext cx="62384" cy="62384"/>
             </a:xfrm>
             <a:prstGeom prst="ellipse">
@@ -13218,7 +13218,7 @@
           </p:nvSpPr>
           <p:spPr>
             <a:xfrm>
-              <a:off x="3659438" y="2498627"/>
+              <a:off x="3701975" y="2498627"/>
               <a:ext cx="62384" cy="62384"/>
             </a:xfrm>
             <a:prstGeom prst="ellipse">
@@ -13244,7 +13244,7 @@
           </p:nvSpPr>
           <p:spPr>
             <a:xfrm>
-              <a:off x="3853035" y="2819046"/>
+              <a:off x="3796727" y="2819046"/>
               <a:ext cx="62384" cy="62384"/>
             </a:xfrm>
             <a:prstGeom prst="ellipse">
@@ -13270,7 +13270,7 @@
           </p:nvSpPr>
           <p:spPr>
             <a:xfrm>
-              <a:off x="3687164" y="2578249"/>
+              <a:off x="3694782" y="2578249"/>
               <a:ext cx="62384" cy="62384"/>
             </a:xfrm>
             <a:prstGeom prst="ellipse">
@@ -13296,7 +13296,7 @@
           </p:nvSpPr>
           <p:spPr>
             <a:xfrm>
-              <a:off x="3821950" y="2537367"/>
+              <a:off x="3860656" y="2537367"/>
               <a:ext cx="62384" cy="62384"/>
             </a:xfrm>
             <a:prstGeom prst="ellipse">
@@ -13322,7 +13322,7 @@
           </p:nvSpPr>
           <p:spPr>
             <a:xfrm>
-              <a:off x="3699144" y="3167872"/>
+              <a:off x="3686889" y="3167872"/>
               <a:ext cx="62384" cy="62384"/>
             </a:xfrm>
             <a:prstGeom prst="ellipse">
@@ -13348,7 +13348,7 @@
           </p:nvSpPr>
           <p:spPr>
             <a:xfrm>
-              <a:off x="3861506" y="3593954"/>
+              <a:off x="3861852" y="3593954"/>
               <a:ext cx="62384" cy="62384"/>
             </a:xfrm>
             <a:prstGeom prst="ellipse">
@@ -13374,7 +13374,7 @@
           </p:nvSpPr>
           <p:spPr>
             <a:xfrm>
-              <a:off x="3706810" y="2262805"/>
+              <a:off x="3702161" y="2262805"/>
               <a:ext cx="62384" cy="62384"/>
             </a:xfrm>
             <a:prstGeom prst="ellipse">
@@ -13400,7 +13400,7 @@
           </p:nvSpPr>
           <p:spPr>
             <a:xfrm>
-              <a:off x="3852358" y="2408758"/>
+              <a:off x="3803745" y="2408758"/>
               <a:ext cx="62384" cy="62384"/>
             </a:xfrm>
             <a:prstGeom prst="ellipse">
@@ -13426,7 +13426,7 @@
           </p:nvSpPr>
           <p:spPr>
             <a:xfrm>
-              <a:off x="3687422" y="2373463"/>
+              <a:off x="3672317" y="2373463"/>
               <a:ext cx="62384" cy="62384"/>
             </a:xfrm>
             <a:prstGeom prst="ellipse">
@@ -13452,7 +13452,7 @@
           </p:nvSpPr>
           <p:spPr>
             <a:xfrm>
-              <a:off x="3797580" y="2445711"/>
+              <a:off x="3830602" y="2445711"/>
               <a:ext cx="62384" cy="62384"/>
             </a:xfrm>
             <a:prstGeom prst="ellipse">
@@ -13478,7 +13478,7 @@
           </p:nvSpPr>
           <p:spPr>
             <a:xfrm>
-              <a:off x="3691349" y="2099485"/>
+              <a:off x="3683529" y="2099485"/>
               <a:ext cx="62384" cy="62384"/>
             </a:xfrm>
             <a:prstGeom prst="ellipse">
@@ -13504,7 +13504,7 @@
           </p:nvSpPr>
           <p:spPr>
             <a:xfrm>
-              <a:off x="3842324" y="2316253"/>
+              <a:off x="3830853" y="2316253"/>
               <a:ext cx="62384" cy="62384"/>
             </a:xfrm>
             <a:prstGeom prst="ellipse">
@@ -13530,7 +13530,7 @@
           </p:nvSpPr>
           <p:spPr>
             <a:xfrm>
-              <a:off x="3666506" y="2181084"/>
+              <a:off x="3673085" y="2181084"/>
               <a:ext cx="62384" cy="62384"/>
             </a:xfrm>
             <a:prstGeom prst="ellipse">
@@ -13556,7 +13556,7 @@
           </p:nvSpPr>
           <p:spPr>
             <a:xfrm>
-              <a:off x="3840645" y="2237597"/>
+              <a:off x="3789881" y="2237597"/>
               <a:ext cx="62384" cy="62384"/>
             </a:xfrm>
             <a:prstGeom prst="ellipse">
@@ -13582,7 +13582,7 @@
           </p:nvSpPr>
           <p:spPr>
             <a:xfrm>
-              <a:off x="3707637" y="2140051"/>
+              <a:off x="3711852" y="2140051"/>
               <a:ext cx="62384" cy="62384"/>
             </a:xfrm>
             <a:prstGeom prst="ellipse">
@@ -13608,7 +13608,7 @@
           </p:nvSpPr>
           <p:spPr>
             <a:xfrm>
-              <a:off x="3811211" y="2246736"/>
+              <a:off x="3844086" y="2246736"/>
               <a:ext cx="62384" cy="62384"/>
             </a:xfrm>
             <a:prstGeom prst="ellipse">
@@ -13634,7 +13634,7 @@
           </p:nvSpPr>
           <p:spPr>
             <a:xfrm>
-              <a:off x="3708983" y="2581683"/>
+              <a:off x="3686458" y="2581683"/>
               <a:ext cx="62384" cy="62384"/>
             </a:xfrm>
             <a:prstGeom prst="ellipse">
@@ -13660,7 +13660,7 @@
           </p:nvSpPr>
           <p:spPr>
             <a:xfrm>
-              <a:off x="3805727" y="2438602"/>
+              <a:off x="3855248" y="2438602"/>
               <a:ext cx="62384" cy="62384"/>
             </a:xfrm>
             <a:prstGeom prst="ellipse">
@@ -13686,7 +13686,7 @@
           </p:nvSpPr>
           <p:spPr>
             <a:xfrm>
-              <a:off x="3713463" y="2349594"/>
+              <a:off x="3643070" y="2349594"/>
               <a:ext cx="62384" cy="62384"/>
             </a:xfrm>
             <a:prstGeom prst="ellipse">
@@ -13712,7 +13712,7 @@
           </p:nvSpPr>
           <p:spPr>
             <a:xfrm>
-              <a:off x="3851887" y="2437996"/>
+              <a:off x="3810514" y="2437996"/>
               <a:ext cx="62384" cy="62384"/>
             </a:xfrm>
             <a:prstGeom prst="ellipse">
@@ -13738,7 +13738,7 @@
           </p:nvSpPr>
           <p:spPr>
             <a:xfrm>
-              <a:off x="3679671" y="1964034"/>
+              <a:off x="3686443" y="1964034"/>
               <a:ext cx="62384" cy="62384"/>
             </a:xfrm>
             <a:prstGeom prst="ellipse">
@@ -13764,7 +13764,7 @@
           </p:nvSpPr>
           <p:spPr>
             <a:xfrm>
-              <a:off x="3831180" y="2252554"/>
+              <a:off x="3795094" y="2252554"/>
               <a:ext cx="62384" cy="62384"/>
             </a:xfrm>
             <a:prstGeom prst="ellipse">
@@ -13790,7 +13790,7 @@
           </p:nvSpPr>
           <p:spPr>
             <a:xfrm>
-              <a:off x="3713232" y="2132194"/>
+              <a:off x="3658157" y="2132194"/>
               <a:ext cx="62384" cy="62384"/>
             </a:xfrm>
             <a:prstGeom prst="ellipse">
@@ -13816,7 +13816,7 @@
           </p:nvSpPr>
           <p:spPr>
             <a:xfrm>
-              <a:off x="3799178" y="2407124"/>
+              <a:off x="3808535" y="2407124"/>
               <a:ext cx="62384" cy="62384"/>
             </a:xfrm>
             <a:prstGeom prst="ellipse">
@@ -13842,7 +13842,7 @@
           </p:nvSpPr>
           <p:spPr>
             <a:xfrm>
-              <a:off x="3706376" y="2248572"/>
+              <a:off x="3646863" y="2248572"/>
               <a:ext cx="62384" cy="62384"/>
             </a:xfrm>
             <a:prstGeom prst="ellipse">
@@ -13868,7 +13868,7 @@
           </p:nvSpPr>
           <p:spPr>
             <a:xfrm>
-              <a:off x="3805518" y="2278113"/>
+              <a:off x="3823917" y="2278113"/>
               <a:ext cx="62384" cy="62384"/>
             </a:xfrm>
             <a:prstGeom prst="ellipse">
@@ -13894,7 +13894,7 @@
           </p:nvSpPr>
           <p:spPr>
             <a:xfrm>
-              <a:off x="3654192" y="2292972"/>
+              <a:off x="3701758" y="2292972"/>
               <a:ext cx="62384" cy="62384"/>
             </a:xfrm>
             <a:prstGeom prst="ellipse">
@@ -13920,7 +13920,7 @@
           </p:nvSpPr>
           <p:spPr>
             <a:xfrm>
-              <a:off x="3821739" y="2458867"/>
+              <a:off x="3849582" y="2458867"/>
               <a:ext cx="62384" cy="62384"/>
             </a:xfrm>
             <a:prstGeom prst="ellipse">
@@ -13946,7 +13946,7 @@
           </p:nvSpPr>
           <p:spPr>
             <a:xfrm>
-              <a:off x="3639581" y="2015073"/>
+              <a:off x="3666546" y="2015073"/>
               <a:ext cx="62384" cy="62384"/>
             </a:xfrm>
             <a:prstGeom prst="ellipse">
@@ -13972,7 +13972,7 @@
           </p:nvSpPr>
           <p:spPr>
             <a:xfrm>
-              <a:off x="3855109" y="2152530"/>
+              <a:off x="3836065" y="2152530"/>
               <a:ext cx="62384" cy="62384"/>
             </a:xfrm>
             <a:prstGeom prst="ellipse">
@@ -13998,7 +13998,7 @@
           </p:nvSpPr>
           <p:spPr>
             <a:xfrm>
-              <a:off x="3703507" y="2053564"/>
+              <a:off x="3646778" y="2053564"/>
               <a:ext cx="62384" cy="62384"/>
             </a:xfrm>
             <a:prstGeom prst="ellipse">
@@ -14024,7 +14024,7 @@
           </p:nvSpPr>
           <p:spPr>
             <a:xfrm>
-              <a:off x="3853222" y="2015413"/>
+              <a:off x="3860356" y="2015413"/>
               <a:ext cx="62384" cy="62384"/>
             </a:xfrm>
             <a:prstGeom prst="ellipse">
@@ -14050,7 +14050,7 @@
           </p:nvSpPr>
           <p:spPr>
             <a:xfrm>
-              <a:off x="3660112" y="2293216"/>
+              <a:off x="3646222" y="2293216"/>
               <a:ext cx="62384" cy="62384"/>
             </a:xfrm>
             <a:prstGeom prst="ellipse">
@@ -14076,7 +14076,7 @@
           </p:nvSpPr>
           <p:spPr>
             <a:xfrm>
-              <a:off x="3795292" y="2322739"/>
+              <a:off x="3820886" y="2322739"/>
               <a:ext cx="62384" cy="62384"/>
             </a:xfrm>
             <a:prstGeom prst="ellipse">
@@ -14102,7 +14102,7 @@
           </p:nvSpPr>
           <p:spPr>
             <a:xfrm>
-              <a:off x="3701771" y="1888094"/>
+              <a:off x="3655739" y="1888094"/>
               <a:ext cx="62384" cy="62384"/>
             </a:xfrm>
             <a:prstGeom prst="ellipse">
@@ -14128,7 +14128,7 @@
           </p:nvSpPr>
           <p:spPr>
             <a:xfrm>
-              <a:off x="3794169" y="2522325"/>
+              <a:off x="3793878" y="2522325"/>
               <a:ext cx="62384" cy="62384"/>
             </a:xfrm>
             <a:prstGeom prst="ellipse">
@@ -14154,7 +14154,7 @@
           </p:nvSpPr>
           <p:spPr>
             <a:xfrm>
-              <a:off x="3669009" y="2121121"/>
+              <a:off x="3663184" y="2121121"/>
               <a:ext cx="62384" cy="62384"/>
             </a:xfrm>
             <a:prstGeom prst="ellipse">
@@ -14180,7 +14180,7 @@
           </p:nvSpPr>
           <p:spPr>
             <a:xfrm>
-              <a:off x="3845607" y="2376364"/>
+              <a:off x="3842960" y="2376364"/>
               <a:ext cx="62384" cy="62384"/>
             </a:xfrm>
             <a:prstGeom prst="ellipse">
@@ -14206,7 +14206,7 @@
           </p:nvSpPr>
           <p:spPr>
             <a:xfrm>
-              <a:off x="3686973" y="1984495"/>
+              <a:off x="3649938" y="1984495"/>
               <a:ext cx="62384" cy="62384"/>
             </a:xfrm>
             <a:prstGeom prst="ellipse">
@@ -14232,7 +14232,7 @@
           </p:nvSpPr>
           <p:spPr>
             <a:xfrm>
-              <a:off x="3791564" y="2234644"/>
+              <a:off x="3811839" y="2234644"/>
               <a:ext cx="62384" cy="62384"/>
             </a:xfrm>
             <a:prstGeom prst="ellipse">
@@ -14258,7 +14258,7 @@
           </p:nvSpPr>
           <p:spPr>
             <a:xfrm>
-              <a:off x="3679619" y="2191913"/>
+              <a:off x="3673740" y="2191913"/>
               <a:ext cx="62384" cy="62384"/>
             </a:xfrm>
             <a:prstGeom prst="ellipse">
@@ -14284,7 +14284,7 @@
           </p:nvSpPr>
           <p:spPr>
             <a:xfrm>
-              <a:off x="3811136" y="2416827"/>
+              <a:off x="3810946" y="2416827"/>
               <a:ext cx="62384" cy="62384"/>
             </a:xfrm>
             <a:prstGeom prst="ellipse">
@@ -14310,7 +14310,7 @@
           </p:nvSpPr>
           <p:spPr>
             <a:xfrm>
-              <a:off x="3678686" y="1671371"/>
+              <a:off x="3703636" y="1671371"/>
               <a:ext cx="62384" cy="62384"/>
             </a:xfrm>
             <a:prstGeom prst="ellipse">
@@ -14336,7 +14336,7 @@
           </p:nvSpPr>
           <p:spPr>
             <a:xfrm>
-              <a:off x="3809103" y="2197942"/>
+              <a:off x="3853708" y="2197942"/>
               <a:ext cx="62384" cy="62384"/>
             </a:xfrm>
             <a:prstGeom prst="ellipse">
@@ -14362,7 +14362,7 @@
           </p:nvSpPr>
           <p:spPr>
             <a:xfrm>
-              <a:off x="3667130" y="2494424"/>
+              <a:off x="3663545" y="2494424"/>
               <a:ext cx="62384" cy="62384"/>
             </a:xfrm>
             <a:prstGeom prst="ellipse">
@@ -14388,7 +14388,7 @@
           </p:nvSpPr>
           <p:spPr>
             <a:xfrm>
-              <a:off x="3815196" y="2608409"/>
+              <a:off x="3853719" y="2608409"/>
               <a:ext cx="62384" cy="62384"/>
             </a:xfrm>
             <a:prstGeom prst="ellipse">
@@ -14414,7 +14414,7 @@
           </p:nvSpPr>
           <p:spPr>
             <a:xfrm>
-              <a:off x="3713969" y="2190065"/>
+              <a:off x="3646632" y="2190065"/>
               <a:ext cx="62384" cy="62384"/>
             </a:xfrm>
             <a:prstGeom prst="ellipse">
@@ -14440,7 +14440,7 @@
           </p:nvSpPr>
           <p:spPr>
             <a:xfrm>
-              <a:off x="3816629" y="2509120"/>
+              <a:off x="3829121" y="2509120"/>
               <a:ext cx="62384" cy="62384"/>
             </a:xfrm>
             <a:prstGeom prst="ellipse">
@@ -14466,7 +14466,7 @@
           </p:nvSpPr>
           <p:spPr>
             <a:xfrm>
-              <a:off x="3701088" y="2143148"/>
+              <a:off x="3671996" y="2143148"/>
               <a:ext cx="62384" cy="62384"/>
             </a:xfrm>
             <a:prstGeom prst="ellipse">
@@ -14492,7 +14492,7 @@
           </p:nvSpPr>
           <p:spPr>
             <a:xfrm>
-              <a:off x="3858829" y="2563170"/>
+              <a:off x="3798334" y="2563170"/>
               <a:ext cx="62384" cy="62384"/>
             </a:xfrm>
             <a:prstGeom prst="ellipse">
@@ -14518,7 +14518,7 @@
           </p:nvSpPr>
           <p:spPr>
             <a:xfrm>
-              <a:off x="3679322" y="2638033"/>
+              <a:off x="3648051" y="2638033"/>
               <a:ext cx="62384" cy="62384"/>
             </a:xfrm>
             <a:prstGeom prst="ellipse">
@@ -14544,7 +14544,7 @@
           </p:nvSpPr>
           <p:spPr>
             <a:xfrm>
-              <a:off x="3832023" y="2513741"/>
+              <a:off x="3805929" y="2513741"/>
               <a:ext cx="62384" cy="62384"/>
             </a:xfrm>
             <a:prstGeom prst="ellipse">
@@ -14570,7 +14570,7 @@
           </p:nvSpPr>
           <p:spPr>
             <a:xfrm>
-              <a:off x="3676371" y="2220804"/>
+              <a:off x="3672460" y="2220804"/>
               <a:ext cx="62384" cy="62384"/>
             </a:xfrm>
             <a:prstGeom prst="ellipse">
@@ -14596,7 +14596,7 @@
           </p:nvSpPr>
           <p:spPr>
             <a:xfrm>
-              <a:off x="3829818" y="2443179"/>
+              <a:off x="3802520" y="2443179"/>
               <a:ext cx="62384" cy="62384"/>
             </a:xfrm>
             <a:prstGeom prst="ellipse">
@@ -14622,7 +14622,7 @@
           </p:nvSpPr>
           <p:spPr>
             <a:xfrm>
-              <a:off x="3702620" y="2032687"/>
+              <a:off x="3687536" y="2032687"/>
               <a:ext cx="62384" cy="62384"/>
             </a:xfrm>
             <a:prstGeom prst="ellipse">
@@ -14648,7 +14648,7 @@
           </p:nvSpPr>
           <p:spPr>
             <a:xfrm>
-              <a:off x="3822638" y="2381575"/>
+              <a:off x="3849292" y="2381575"/>
               <a:ext cx="62384" cy="62384"/>
             </a:xfrm>
             <a:prstGeom prst="ellipse">
@@ -14674,7 +14674,7 @@
           </p:nvSpPr>
           <p:spPr>
             <a:xfrm>
-              <a:off x="3656603" y="2805819"/>
+              <a:off x="3639643" y="2805819"/>
               <a:ext cx="62384" cy="62384"/>
             </a:xfrm>
             <a:prstGeom prst="ellipse">
@@ -14700,7 +14700,7 @@
           </p:nvSpPr>
           <p:spPr>
             <a:xfrm>
-              <a:off x="3847787" y="2682506"/>
+              <a:off x="3819828" y="2682506"/>
               <a:ext cx="62384" cy="62384"/>
             </a:xfrm>
             <a:prstGeom prst="ellipse">
@@ -14726,7 +14726,7 @@
           </p:nvSpPr>
           <p:spPr>
             <a:xfrm>
-              <a:off x="3703919" y="2552616"/>
+              <a:off x="3708786" y="2552616"/>
               <a:ext cx="62384" cy="62384"/>
             </a:xfrm>
             <a:prstGeom prst="ellipse">
@@ -14752,7 +14752,7 @@
           </p:nvSpPr>
           <p:spPr>
             <a:xfrm>
-              <a:off x="3814956" y="2928273"/>
+              <a:off x="3789214" y="2928273"/>
               <a:ext cx="62384" cy="62384"/>
             </a:xfrm>
             <a:prstGeom prst="ellipse">
@@ -14778,7 +14778,7 @@
           </p:nvSpPr>
           <p:spPr>
             <a:xfrm>
-              <a:off x="3699314" y="2259025"/>
+              <a:off x="3667950" y="2259025"/>
               <a:ext cx="62384" cy="62384"/>
             </a:xfrm>
             <a:prstGeom prst="ellipse">
@@ -14804,7 +14804,7 @@
           </p:nvSpPr>
           <p:spPr>
             <a:xfrm>
-              <a:off x="3816653" y="2378147"/>
+              <a:off x="3830239" y="2378147"/>
               <a:ext cx="62384" cy="62384"/>
             </a:xfrm>
             <a:prstGeom prst="ellipse">
@@ -14830,7 +14830,7 @@
           </p:nvSpPr>
           <p:spPr>
             <a:xfrm>
-              <a:off x="3680522" y="2223016"/>
+              <a:off x="3696392" y="2223016"/>
               <a:ext cx="62384" cy="62384"/>
             </a:xfrm>
             <a:prstGeom prst="ellipse">
@@ -14856,7 +14856,7 @@
           </p:nvSpPr>
           <p:spPr>
             <a:xfrm>
-              <a:off x="3835780" y="2224277"/>
+              <a:off x="3821193" y="2224277"/>
               <a:ext cx="62384" cy="62384"/>
             </a:xfrm>
             <a:prstGeom prst="ellipse">
@@ -14882,7 +14882,7 @@
           </p:nvSpPr>
           <p:spPr>
             <a:xfrm>
-              <a:off x="3703253" y="2181266"/>
+              <a:off x="3644326" y="2181266"/>
               <a:ext cx="62384" cy="62384"/>
             </a:xfrm>
             <a:prstGeom prst="ellipse">
@@ -14908,7 +14908,7 @@
           </p:nvSpPr>
           <p:spPr>
             <a:xfrm>
-              <a:off x="3806867" y="2437206"/>
+              <a:off x="3817673" y="2437206"/>
               <a:ext cx="62384" cy="62384"/>
             </a:xfrm>
             <a:prstGeom prst="ellipse">
@@ -14934,7 +14934,7 @@
           </p:nvSpPr>
           <p:spPr>
             <a:xfrm>
-              <a:off x="3702485" y="2274145"/>
+              <a:off x="3700576" y="2274145"/>
               <a:ext cx="62384" cy="62384"/>
             </a:xfrm>
             <a:prstGeom prst="ellipse">
@@ -14960,7 +14960,7 @@
           </p:nvSpPr>
           <p:spPr>
             <a:xfrm>
-              <a:off x="3802748" y="2491380"/>
+              <a:off x="3847625" y="2491380"/>
               <a:ext cx="62384" cy="62384"/>
             </a:xfrm>
             <a:prstGeom prst="ellipse">
@@ -14986,7 +14986,7 @@
           </p:nvSpPr>
           <p:spPr>
             <a:xfrm>
-              <a:off x="3650058" y="2134715"/>
+              <a:off x="3648311" y="2134715"/>
               <a:ext cx="62384" cy="62384"/>
             </a:xfrm>
             <a:prstGeom prst="ellipse">
@@ -15012,7 +15012,7 @@
           </p:nvSpPr>
           <p:spPr>
             <a:xfrm>
-              <a:off x="3820437" y="2797681"/>
+              <a:off x="3809848" y="2797681"/>
               <a:ext cx="62384" cy="62384"/>
             </a:xfrm>
             <a:prstGeom prst="ellipse">
@@ -15038,7 +15038,7 @@
           </p:nvSpPr>
           <p:spPr>
             <a:xfrm>
-              <a:off x="3659466" y="3179479"/>
+              <a:off x="3707630" y="3179479"/>
               <a:ext cx="62384" cy="62384"/>
             </a:xfrm>
             <a:prstGeom prst="ellipse">
@@ -15064,7 +15064,7 @@
           </p:nvSpPr>
           <p:spPr>
             <a:xfrm>
-              <a:off x="3829071" y="3106435"/>
+              <a:off x="3823064" y="3106435"/>
               <a:ext cx="62384" cy="62384"/>
             </a:xfrm>
             <a:prstGeom prst="ellipse">
@@ -15090,7 +15090,7 @@
           </p:nvSpPr>
           <p:spPr>
             <a:xfrm>
-              <a:off x="3661823" y="2485398"/>
+              <a:off x="3662338" y="2485398"/>
               <a:ext cx="62384" cy="62384"/>
             </a:xfrm>
             <a:prstGeom prst="ellipse">
@@ -15116,7 +15116,7 @@
           </p:nvSpPr>
           <p:spPr>
             <a:xfrm>
-              <a:off x="3862015" y="2815218"/>
+              <a:off x="3815386" y="2815218"/>
               <a:ext cx="62384" cy="62384"/>
             </a:xfrm>
             <a:prstGeom prst="ellipse">
@@ -15142,7 +15142,7 @@
           </p:nvSpPr>
           <p:spPr>
             <a:xfrm>
-              <a:off x="3663232" y="2411785"/>
+              <a:off x="3658075" y="2411785"/>
               <a:ext cx="62384" cy="62384"/>
             </a:xfrm>
             <a:prstGeom prst="ellipse">
@@ -15168,7 +15168,7 @@
           </p:nvSpPr>
           <p:spPr>
             <a:xfrm>
-              <a:off x="3846504" y="2385799"/>
+              <a:off x="3812768" y="2385799"/>
               <a:ext cx="62384" cy="62384"/>
             </a:xfrm>
             <a:prstGeom prst="ellipse">
@@ -15194,7 +15194,7 @@
           </p:nvSpPr>
           <p:spPr>
             <a:xfrm>
-              <a:off x="3684410" y="2401543"/>
+              <a:off x="3707537" y="2401543"/>
               <a:ext cx="62384" cy="62384"/>
             </a:xfrm>
             <a:prstGeom prst="ellipse">
@@ -15220,7 +15220,7 @@
           </p:nvSpPr>
           <p:spPr>
             <a:xfrm>
-              <a:off x="3849164" y="2267401"/>
+              <a:off x="3828113" y="2267401"/>
               <a:ext cx="62384" cy="62384"/>
             </a:xfrm>
             <a:prstGeom prst="ellipse">
@@ -15246,7 +15246,7 @@
           </p:nvSpPr>
           <p:spPr>
             <a:xfrm>
-              <a:off x="3656329" y="2793407"/>
+              <a:off x="3660711" y="2793407"/>
               <a:ext cx="62384" cy="62384"/>
             </a:xfrm>
             <a:prstGeom prst="ellipse">
@@ -15272,7 +15272,7 @@
           </p:nvSpPr>
           <p:spPr>
             <a:xfrm>
-              <a:off x="3811047" y="2771111"/>
+              <a:off x="3811036" y="2771111"/>
               <a:ext cx="62384" cy="62384"/>
             </a:xfrm>
             <a:prstGeom prst="ellipse">
@@ -15298,7 +15298,7 @@
           </p:nvSpPr>
           <p:spPr>
             <a:xfrm>
-              <a:off x="3706196" y="2870721"/>
+              <a:off x="3680374" y="2870721"/>
               <a:ext cx="62384" cy="62384"/>
             </a:xfrm>
             <a:prstGeom prst="ellipse">
@@ -15324,7 +15324,7 @@
           </p:nvSpPr>
           <p:spPr>
             <a:xfrm>
-              <a:off x="3794941" y="2984495"/>
+              <a:off x="3796329" y="2984495"/>
               <a:ext cx="62384" cy="62384"/>
             </a:xfrm>
             <a:prstGeom prst="ellipse">
@@ -15350,7 +15350,7 @@
           </p:nvSpPr>
           <p:spPr>
             <a:xfrm>
-              <a:off x="3682775" y="2378228"/>
+              <a:off x="3680063" y="2378228"/>
               <a:ext cx="62384" cy="62384"/>
             </a:xfrm>
             <a:prstGeom prst="ellipse">
@@ -15376,7 +15376,7 @@
           </p:nvSpPr>
           <p:spPr>
             <a:xfrm>
-              <a:off x="3801970" y="2805997"/>
+              <a:off x="3850536" y="2805997"/>
               <a:ext cx="62384" cy="62384"/>
             </a:xfrm>
             <a:prstGeom prst="ellipse">
@@ -15402,7 +15402,7 @@
           </p:nvSpPr>
           <p:spPr>
             <a:xfrm>
-              <a:off x="3648300" y="2544270"/>
+              <a:off x="3678877" y="2544270"/>
               <a:ext cx="62384" cy="62384"/>
             </a:xfrm>
             <a:prstGeom prst="ellipse">
@@ -15428,7 +15428,7 @@
           </p:nvSpPr>
           <p:spPr>
             <a:xfrm>
-              <a:off x="3808174" y="2886573"/>
+              <a:off x="3839045" y="2886573"/>
               <a:ext cx="62384" cy="62384"/>
             </a:xfrm>
             <a:prstGeom prst="ellipse">
@@ -15454,7 +15454,7 @@
           </p:nvSpPr>
           <p:spPr>
             <a:xfrm>
-              <a:off x="3712844" y="1976967"/>
+              <a:off x="3695847" y="1976967"/>
               <a:ext cx="62384" cy="62384"/>
             </a:xfrm>
             <a:prstGeom prst="ellipse">
@@ -15480,7 +15480,7 @@
           </p:nvSpPr>
           <p:spPr>
             <a:xfrm>
-              <a:off x="3801706" y="2416148"/>
+              <a:off x="3829931" y="2416148"/>
               <a:ext cx="62384" cy="62384"/>
             </a:xfrm>
             <a:prstGeom prst="ellipse">
@@ -15506,7 +15506,7 @@
           </p:nvSpPr>
           <p:spPr>
             <a:xfrm>
-              <a:off x="3680575" y="2171272"/>
+              <a:off x="3690187" y="2171272"/>
               <a:ext cx="62384" cy="62384"/>
             </a:xfrm>
             <a:prstGeom prst="ellipse">
@@ -15532,7 +15532,7 @@
           </p:nvSpPr>
           <p:spPr>
             <a:xfrm>
-              <a:off x="3859989" y="2512480"/>
+              <a:off x="3808055" y="2512480"/>
               <a:ext cx="62384" cy="62384"/>
             </a:xfrm>
             <a:prstGeom prst="ellipse">
@@ -15558,7 +15558,7 @@
           </p:nvSpPr>
           <p:spPr>
             <a:xfrm>
-              <a:off x="3700697" y="2174924"/>
+              <a:off x="3699986" y="2174924"/>
               <a:ext cx="62384" cy="62384"/>
             </a:xfrm>
             <a:prstGeom prst="ellipse">
@@ -15584,7 +15584,7 @@
           </p:nvSpPr>
           <p:spPr>
             <a:xfrm>
-              <a:off x="3810887" y="2722787"/>
+              <a:off x="3805301" y="2722787"/>
               <a:ext cx="62384" cy="62384"/>
             </a:xfrm>
             <a:prstGeom prst="ellipse">
@@ -15610,7 +15610,7 @@
           </p:nvSpPr>
           <p:spPr>
             <a:xfrm>
-              <a:off x="3712141" y="2437916"/>
+              <a:off x="3641929" y="2437916"/>
               <a:ext cx="62384" cy="62384"/>
             </a:xfrm>
             <a:prstGeom prst="ellipse">
@@ -15636,7 +15636,7 @@
           </p:nvSpPr>
           <p:spPr>
             <a:xfrm>
-              <a:off x="3789528" y="2890440"/>
+              <a:off x="3817777" y="2890440"/>
               <a:ext cx="62384" cy="62384"/>
             </a:xfrm>
             <a:prstGeom prst="ellipse">
@@ -15662,7 +15662,7 @@
           </p:nvSpPr>
           <p:spPr>
             <a:xfrm>
-              <a:off x="3654521" y="1867326"/>
+              <a:off x="3705464" y="1867326"/>
               <a:ext cx="62384" cy="62384"/>
             </a:xfrm>
             <a:prstGeom prst="ellipse">
@@ -15688,7 +15688,7 @@
           </p:nvSpPr>
           <p:spPr>
             <a:xfrm>
-              <a:off x="3840068" y="2235734"/>
+              <a:off x="3856081" y="2235734"/>
               <a:ext cx="62384" cy="62384"/>
             </a:xfrm>
             <a:prstGeom prst="ellipse">
@@ -15714,7 +15714,7 @@
           </p:nvSpPr>
           <p:spPr>
             <a:xfrm>
-              <a:off x="3668421" y="2583172"/>
+              <a:off x="3673558" y="2583172"/>
               <a:ext cx="62384" cy="62384"/>
             </a:xfrm>
             <a:prstGeom prst="ellipse">
@@ -15740,7 +15740,7 @@
           </p:nvSpPr>
           <p:spPr>
             <a:xfrm>
-              <a:off x="3847725" y="3116068"/>
+              <a:off x="3856702" y="3116068"/>
               <a:ext cx="62384" cy="62384"/>
             </a:xfrm>
             <a:prstGeom prst="ellipse">
@@ -15766,7 +15766,7 @@
           </p:nvSpPr>
           <p:spPr>
             <a:xfrm>
-              <a:off x="3701439" y="3074829"/>
+              <a:off x="3704586" y="3074829"/>
               <a:ext cx="62384" cy="62384"/>
             </a:xfrm>
             <a:prstGeom prst="ellipse">
@@ -15792,7 +15792,7 @@
           </p:nvSpPr>
           <p:spPr>
             <a:xfrm>
-              <a:off x="3808159" y="2778129"/>
+              <a:off x="3863233" y="2778129"/>
               <a:ext cx="62384" cy="62384"/>
             </a:xfrm>
             <a:prstGeom prst="ellipse">
@@ -15818,7 +15818,7 @@
           </p:nvSpPr>
           <p:spPr>
             <a:xfrm>
-              <a:off x="3701457" y="2238700"/>
+              <a:off x="3641069" y="2238700"/>
               <a:ext cx="62384" cy="62384"/>
             </a:xfrm>
             <a:prstGeom prst="ellipse">
@@ -15844,7 +15844,7 @@
           </p:nvSpPr>
           <p:spPr>
             <a:xfrm>
-              <a:off x="3813094" y="2759561"/>
+              <a:off x="3857456" y="2759561"/>
               <a:ext cx="62384" cy="62384"/>
             </a:xfrm>
             <a:prstGeom prst="ellipse">
@@ -15870,7 +15870,7 @@
           </p:nvSpPr>
           <p:spPr>
             <a:xfrm>
-              <a:off x="3662595" y="2116983"/>
+              <a:off x="3713731" y="2116983"/>
               <a:ext cx="62384" cy="62384"/>
             </a:xfrm>
             <a:prstGeom prst="ellipse">
@@ -15896,7 +15896,7 @@
           </p:nvSpPr>
           <p:spPr>
             <a:xfrm>
-              <a:off x="3859178" y="2800199"/>
+              <a:off x="3803240" y="2800199"/>
               <a:ext cx="62384" cy="62384"/>
             </a:xfrm>
             <a:prstGeom prst="ellipse">
@@ -15922,7 +15922,7 @@
           </p:nvSpPr>
           <p:spPr>
             <a:xfrm>
-              <a:off x="3652611" y="2075237"/>
+              <a:off x="3698258" y="2075237"/>
               <a:ext cx="62384" cy="62384"/>
             </a:xfrm>
             <a:prstGeom prst="ellipse">
@@ -15948,7 +15948,7 @@
           </p:nvSpPr>
           <p:spPr>
             <a:xfrm>
-              <a:off x="3861893" y="2266742"/>
+              <a:off x="3843105" y="2266742"/>
               <a:ext cx="62384" cy="62384"/>
             </a:xfrm>
             <a:prstGeom prst="ellipse">
@@ -15974,7 +15974,7 @@
           </p:nvSpPr>
           <p:spPr>
             <a:xfrm>
-              <a:off x="3680046" y="3124836"/>
+              <a:off x="3700105" y="3124836"/>
               <a:ext cx="62384" cy="62384"/>
             </a:xfrm>
             <a:prstGeom prst="ellipse">
@@ -16000,7 +16000,7 @@
           </p:nvSpPr>
           <p:spPr>
             <a:xfrm>
-              <a:off x="3804854" y="2956939"/>
+              <a:off x="3826502" y="2956939"/>
               <a:ext cx="62384" cy="62384"/>
             </a:xfrm>
             <a:prstGeom prst="ellipse">
@@ -16026,7 +16026,7 @@
           </p:nvSpPr>
           <p:spPr>
             <a:xfrm>
-              <a:off x="3675390" y="2808065"/>
+              <a:off x="3702402" y="2808065"/>
               <a:ext cx="62384" cy="62384"/>
             </a:xfrm>
             <a:prstGeom prst="ellipse">
@@ -16052,7 +16052,7 @@
           </p:nvSpPr>
           <p:spPr>
             <a:xfrm>
-              <a:off x="3798285" y="3195182"/>
+              <a:off x="3806699" y="3195182"/>
               <a:ext cx="62384" cy="62384"/>
             </a:xfrm>
             <a:prstGeom prst="ellipse">
@@ -16078,7 +16078,7 @@
           </p:nvSpPr>
           <p:spPr>
             <a:xfrm>
-              <a:off x="3672404" y="2457047"/>
+              <a:off x="3698258" y="2457047"/>
               <a:ext cx="62384" cy="62384"/>
             </a:xfrm>
             <a:prstGeom prst="ellipse">
@@ -16104,7 +16104,7 @@
           </p:nvSpPr>
           <p:spPr>
             <a:xfrm>
-              <a:off x="3813739" y="2764537"/>
+              <a:off x="3851234" y="2764537"/>
               <a:ext cx="62384" cy="62384"/>
             </a:xfrm>
             <a:prstGeom prst="ellipse">
@@ -16130,7 +16130,7 @@
           </p:nvSpPr>
           <p:spPr>
             <a:xfrm>
-              <a:off x="3662093" y="1981740"/>
+              <a:off x="3646349" y="1981740"/>
               <a:ext cx="62384" cy="62384"/>
             </a:xfrm>
             <a:prstGeom prst="ellipse">
@@ -16156,7 +16156,7 @@
           </p:nvSpPr>
           <p:spPr>
             <a:xfrm>
-              <a:off x="3853185" y="2491527"/>
+              <a:off x="3802024" y="2491527"/>
               <a:ext cx="62384" cy="62384"/>
             </a:xfrm>
             <a:prstGeom prst="ellipse">
@@ -16182,7 +16182,7 @@
           </p:nvSpPr>
           <p:spPr>
             <a:xfrm>
-              <a:off x="3692917" y="1874716"/>
+              <a:off x="3708230" y="1874716"/>
               <a:ext cx="62384" cy="62384"/>
             </a:xfrm>
             <a:prstGeom prst="ellipse">
@@ -16208,7 +16208,7 @@
           </p:nvSpPr>
           <p:spPr>
             <a:xfrm>
-              <a:off x="3806347" y="2117979"/>
+              <a:off x="3862649" y="2117979"/>
               <a:ext cx="62384" cy="62384"/>
             </a:xfrm>
             <a:prstGeom prst="ellipse">
@@ -16234,7 +16234,7 @@
           </p:nvSpPr>
           <p:spPr>
             <a:xfrm>
-              <a:off x="3694644" y="2423641"/>
+              <a:off x="3707034" y="2423641"/>
               <a:ext cx="62384" cy="62384"/>
             </a:xfrm>
             <a:prstGeom prst="ellipse">
@@ -16260,7 +16260,7 @@
           </p:nvSpPr>
           <p:spPr>
             <a:xfrm>
-              <a:off x="3814835" y="2890705"/>
+              <a:off x="3831802" y="2890705"/>
               <a:ext cx="62384" cy="62384"/>
             </a:xfrm>
             <a:prstGeom prst="ellipse">
@@ -16286,7 +16286,7 @@
           </p:nvSpPr>
           <p:spPr>
             <a:xfrm>
-              <a:off x="3646029" y="2519161"/>
+              <a:off x="3700914" y="2519161"/>
               <a:ext cx="62384" cy="62384"/>
             </a:xfrm>
             <a:prstGeom prst="ellipse">
@@ -16312,7 +16312,7 @@
           </p:nvSpPr>
           <p:spPr>
             <a:xfrm>
-              <a:off x="3836123" y="2683958"/>
+              <a:off x="3796882" y="2683958"/>
               <a:ext cx="62384" cy="62384"/>
             </a:xfrm>
             <a:prstGeom prst="ellipse">
@@ -16338,7 +16338,7 @@
           </p:nvSpPr>
           <p:spPr>
             <a:xfrm>
-              <a:off x="3663850" y="2675899"/>
+              <a:off x="3712197" y="2675899"/>
               <a:ext cx="62384" cy="62384"/>
             </a:xfrm>
             <a:prstGeom prst="ellipse">
@@ -16364,7 +16364,7 @@
           </p:nvSpPr>
           <p:spPr>
             <a:xfrm>
-              <a:off x="3802680" y="2736788"/>
+              <a:off x="3851081" y="2736788"/>
               <a:ext cx="62384" cy="62384"/>
             </a:xfrm>
             <a:prstGeom prst="ellipse">
@@ -16390,7 +16390,7 @@
           </p:nvSpPr>
           <p:spPr>
             <a:xfrm>
-              <a:off x="3687725" y="2193769"/>
+              <a:off x="3659287" y="2193769"/>
               <a:ext cx="62384" cy="62384"/>
             </a:xfrm>
             <a:prstGeom prst="ellipse">
@@ -16416,7 +16416,7 @@
           </p:nvSpPr>
           <p:spPr>
             <a:xfrm>
-              <a:off x="3843082" y="2484992"/>
+              <a:off x="3833340" y="2484992"/>
               <a:ext cx="62384" cy="62384"/>
             </a:xfrm>
             <a:prstGeom prst="ellipse">
@@ -16442,7 +16442,7 @@
           </p:nvSpPr>
           <p:spPr>
             <a:xfrm>
-              <a:off x="3662300" y="2600183"/>
+              <a:off x="3705704" y="2600183"/>
               <a:ext cx="62384" cy="62384"/>
             </a:xfrm>
             <a:prstGeom prst="ellipse">
@@ -16468,7 +16468,7 @@
           </p:nvSpPr>
           <p:spPr>
             <a:xfrm>
-              <a:off x="3822392" y="2973177"/>
+              <a:off x="3833950" y="2973177"/>
               <a:ext cx="62384" cy="62384"/>
             </a:xfrm>
             <a:prstGeom prst="ellipse">
@@ -16494,7 +16494,7 @@
           </p:nvSpPr>
           <p:spPr>
             <a:xfrm>
-              <a:off x="3679739" y="2241189"/>
+              <a:off x="3689090" y="2241189"/>
               <a:ext cx="62384" cy="62384"/>
             </a:xfrm>
             <a:prstGeom prst="ellipse">
@@ -16520,7 +16520,7 @@
           </p:nvSpPr>
           <p:spPr>
             <a:xfrm>
-              <a:off x="3802879" y="2853423"/>
+              <a:off x="3856480" y="2853423"/>
               <a:ext cx="62384" cy="62384"/>
             </a:xfrm>
             <a:prstGeom prst="ellipse">
@@ -16546,7 +16546,7 @@
           </p:nvSpPr>
           <p:spPr>
             <a:xfrm>
-              <a:off x="3708725" y="2581585"/>
+              <a:off x="3670830" y="2581585"/>
               <a:ext cx="62384" cy="62384"/>
             </a:xfrm>
             <a:prstGeom prst="ellipse">
@@ -16572,7 +16572,7 @@
           </p:nvSpPr>
           <p:spPr>
             <a:xfrm>
-              <a:off x="3842338" y="2748608"/>
+              <a:off x="3842009" y="2748608"/>
               <a:ext cx="62384" cy="62384"/>
             </a:xfrm>
             <a:prstGeom prst="ellipse">
@@ -16598,7 +16598,7 @@
           </p:nvSpPr>
           <p:spPr>
             <a:xfrm>
-              <a:off x="3695632" y="2820778"/>
+              <a:off x="3691783" y="2820778"/>
               <a:ext cx="62384" cy="62384"/>
             </a:xfrm>
             <a:prstGeom prst="ellipse">
@@ -16624,7 +16624,7 @@
           </p:nvSpPr>
           <p:spPr>
             <a:xfrm>
-              <a:off x="3837385" y="2617746"/>
+              <a:off x="3842119" y="2617746"/>
               <a:ext cx="62384" cy="62384"/>
             </a:xfrm>
             <a:prstGeom prst="ellipse">
@@ -16650,7 +16650,7 @@
           </p:nvSpPr>
           <p:spPr>
             <a:xfrm>
-              <a:off x="3673220" y="2043107"/>
+              <a:off x="3696766" y="2043107"/>
               <a:ext cx="62384" cy="62384"/>
             </a:xfrm>
             <a:prstGeom prst="ellipse">
@@ -16676,7 +16676,7 @@
           </p:nvSpPr>
           <p:spPr>
             <a:xfrm>
-              <a:off x="3790718" y="2591011"/>
+              <a:off x="3807255" y="2591011"/>
               <a:ext cx="62384" cy="62384"/>
             </a:xfrm>
             <a:prstGeom prst="ellipse">
@@ -16702,7 +16702,7 @@
           </p:nvSpPr>
           <p:spPr>
             <a:xfrm>
-              <a:off x="3641333" y="2257537"/>
+              <a:off x="3670552" y="2257537"/>
               <a:ext cx="62384" cy="62384"/>
             </a:xfrm>
             <a:prstGeom prst="ellipse">
@@ -16728,7 +16728,7 @@
           </p:nvSpPr>
           <p:spPr>
             <a:xfrm>
-              <a:off x="3816651" y="2440760"/>
+              <a:off x="3853830" y="2440760"/>
               <a:ext cx="62384" cy="62384"/>
             </a:xfrm>
             <a:prstGeom prst="ellipse">
@@ -16754,7 +16754,7 @@
           </p:nvSpPr>
           <p:spPr>
             <a:xfrm>
-              <a:off x="3655219" y="1660002"/>
+              <a:off x="3708436" y="1660002"/>
               <a:ext cx="62384" cy="62384"/>
             </a:xfrm>
             <a:prstGeom prst="ellipse">
@@ -16780,7 +16780,7 @@
           </p:nvSpPr>
           <p:spPr>
             <a:xfrm>
-              <a:off x="3848498" y="2071879"/>
+              <a:off x="3851610" y="2071879"/>
               <a:ext cx="62384" cy="62384"/>
             </a:xfrm>
             <a:prstGeom prst="ellipse">
@@ -16806,7 +16806,7 @@
           </p:nvSpPr>
           <p:spPr>
             <a:xfrm>
-              <a:off x="3643592" y="2712098"/>
+              <a:off x="3675424" y="2712098"/>
               <a:ext cx="62384" cy="62384"/>
             </a:xfrm>
             <a:prstGeom prst="ellipse">
@@ -16832,7 +16832,7 @@
           </p:nvSpPr>
           <p:spPr>
             <a:xfrm>
-              <a:off x="3803787" y="2923522"/>
+              <a:off x="3823097" y="2923522"/>
               <a:ext cx="62384" cy="62384"/>
             </a:xfrm>
             <a:prstGeom prst="ellipse">
@@ -16858,7 +16858,7 @@
           </p:nvSpPr>
           <p:spPr>
             <a:xfrm>
-              <a:off x="3692342" y="2629339"/>
+              <a:off x="3653211" y="2629339"/>
               <a:ext cx="62384" cy="62384"/>
             </a:xfrm>
             <a:prstGeom prst="ellipse">
@@ -16884,7 +16884,7 @@
           </p:nvSpPr>
           <p:spPr>
             <a:xfrm>
-              <a:off x="3814270" y="2168650"/>
+              <a:off x="3797620" y="2168650"/>
               <a:ext cx="62384" cy="62384"/>
             </a:xfrm>
             <a:prstGeom prst="ellipse">
@@ -16910,7 +16910,7 @@
           </p:nvSpPr>
           <p:spPr>
             <a:xfrm>
-              <a:off x="3649876" y="2583375"/>
+              <a:off x="3676604" y="2583375"/>
               <a:ext cx="62384" cy="62384"/>
             </a:xfrm>
             <a:prstGeom prst="ellipse">
@@ -16936,7 +16936,7 @@
           </p:nvSpPr>
           <p:spPr>
             <a:xfrm>
-              <a:off x="3810226" y="2264289"/>
+              <a:off x="3851542" y="2264289"/>
               <a:ext cx="62384" cy="62384"/>
             </a:xfrm>
             <a:prstGeom prst="ellipse">
@@ -16962,7 +16962,7 @@
           </p:nvSpPr>
           <p:spPr>
             <a:xfrm>
-              <a:off x="3681120" y="2635330"/>
+              <a:off x="3679965" y="2635330"/>
               <a:ext cx="62384" cy="62384"/>
             </a:xfrm>
             <a:prstGeom prst="ellipse">
@@ -16988,7 +16988,7 @@
           </p:nvSpPr>
           <p:spPr>
             <a:xfrm>
-              <a:off x="3860946" y="2523212"/>
+              <a:off x="3858468" y="2523212"/>
               <a:ext cx="62384" cy="62384"/>
             </a:xfrm>
             <a:prstGeom prst="ellipse">
@@ -17014,7 +17014,7 @@
           </p:nvSpPr>
           <p:spPr>
             <a:xfrm>
-              <a:off x="3694973" y="3294849"/>
+              <a:off x="3640842" y="3294849"/>
               <a:ext cx="62384" cy="62384"/>
             </a:xfrm>
             <a:prstGeom prst="ellipse">
@@ -17040,7 +17040,7 @@
           </p:nvSpPr>
           <p:spPr>
             <a:xfrm>
-              <a:off x="3823105" y="2931119"/>
+              <a:off x="3848823" y="2931119"/>
               <a:ext cx="62384" cy="62384"/>
             </a:xfrm>
             <a:prstGeom prst="ellipse">
@@ -17066,7 +17066,7 @@
           </p:nvSpPr>
           <p:spPr>
             <a:xfrm>
-              <a:off x="3710755" y="2581680"/>
+              <a:off x="3645976" y="2581680"/>
               <a:ext cx="62384" cy="62384"/>
             </a:xfrm>
             <a:prstGeom prst="ellipse">
@@ -17092,7 +17092,7 @@
           </p:nvSpPr>
           <p:spPr>
             <a:xfrm>
-              <a:off x="3824019" y="2695238"/>
+              <a:off x="3795267" y="2695238"/>
               <a:ext cx="62384" cy="62384"/>
             </a:xfrm>
             <a:prstGeom prst="ellipse">
@@ -17118,7 +17118,7 @@
           </p:nvSpPr>
           <p:spPr>
             <a:xfrm>
-              <a:off x="3674447" y="2201127"/>
+              <a:off x="3669754" y="2201127"/>
               <a:ext cx="62384" cy="62384"/>
             </a:xfrm>
             <a:prstGeom prst="ellipse">
@@ -17144,7 +17144,7 @@
           </p:nvSpPr>
           <p:spPr>
             <a:xfrm>
-              <a:off x="3821236" y="2387407"/>
+              <a:off x="3843581" y="2387407"/>
               <a:ext cx="62384" cy="62384"/>
             </a:xfrm>
             <a:prstGeom prst="ellipse">
@@ -17170,7 +17170,7 @@
           </p:nvSpPr>
           <p:spPr>
             <a:xfrm>
-              <a:off x="3644894" y="2804222"/>
+              <a:off x="3692689" y="2804222"/>
               <a:ext cx="62384" cy="62384"/>
             </a:xfrm>
             <a:prstGeom prst="ellipse">
@@ -17196,7 +17196,7 @@
           </p:nvSpPr>
           <p:spPr>
             <a:xfrm>
-              <a:off x="3841313" y="2864974"/>
+              <a:off x="3795072" y="2864974"/>
               <a:ext cx="62384" cy="62384"/>
             </a:xfrm>
             <a:prstGeom prst="ellipse">
@@ -17222,7 +17222,7 @@
           </p:nvSpPr>
           <p:spPr>
             <a:xfrm>
-              <a:off x="3646280" y="3421704"/>
+              <a:off x="3694493" y="3421704"/>
               <a:ext cx="62384" cy="62384"/>
             </a:xfrm>
             <a:prstGeom prst="ellipse">
@@ -17248,7 +17248,7 @@
           </p:nvSpPr>
           <p:spPr>
             <a:xfrm>
-              <a:off x="3838868" y="3230545"/>
+              <a:off x="3816595" y="3230545"/>
               <a:ext cx="62384" cy="62384"/>
             </a:xfrm>
             <a:prstGeom prst="ellipse">
@@ -17274,7 +17274,7 @@
           </p:nvSpPr>
           <p:spPr>
             <a:xfrm>
-              <a:off x="3655218" y="3033690"/>
+              <a:off x="3687646" y="3033690"/>
               <a:ext cx="62384" cy="62384"/>
             </a:xfrm>
             <a:prstGeom prst="ellipse">
@@ -17300,7 +17300,7 @@
           </p:nvSpPr>
           <p:spPr>
             <a:xfrm>
-              <a:off x="3801591" y="2695781"/>
+              <a:off x="3803624" y="2695781"/>
               <a:ext cx="62384" cy="62384"/>
             </a:xfrm>
             <a:prstGeom prst="ellipse">
@@ -17326,7 +17326,7 @@
           </p:nvSpPr>
           <p:spPr>
             <a:xfrm>
-              <a:off x="3643801" y="2800367"/>
+              <a:off x="3707290" y="2800367"/>
               <a:ext cx="62384" cy="62384"/>
             </a:xfrm>
             <a:prstGeom prst="ellipse">
@@ -17352,7 +17352,7 @@
           </p:nvSpPr>
           <p:spPr>
             <a:xfrm>
-              <a:off x="3863856" y="2470887"/>
+              <a:off x="3791853" y="2470887"/>
               <a:ext cx="62384" cy="62384"/>
             </a:xfrm>
             <a:prstGeom prst="ellipse">
@@ -17378,7 +17378,7 @@
           </p:nvSpPr>
           <p:spPr>
             <a:xfrm>
-              <a:off x="3707545" y="2660221"/>
+              <a:off x="3644959" y="2660221"/>
               <a:ext cx="62384" cy="62384"/>
             </a:xfrm>
             <a:prstGeom prst="ellipse">
@@ -17404,7 +17404,7 @@
           </p:nvSpPr>
           <p:spPr>
             <a:xfrm>
-              <a:off x="3790799" y="2426625"/>
+              <a:off x="3844705" y="2426625"/>
               <a:ext cx="62384" cy="62384"/>
             </a:xfrm>
             <a:prstGeom prst="ellipse">
@@ -17430,7 +17430,7 @@
           </p:nvSpPr>
           <p:spPr>
             <a:xfrm>
-              <a:off x="3712244" y="2501826"/>
+              <a:off x="3677369" y="2501826"/>
               <a:ext cx="62384" cy="62384"/>
             </a:xfrm>
             <a:prstGeom prst="ellipse">
@@ -17456,7 +17456,7 @@
           </p:nvSpPr>
           <p:spPr>
             <a:xfrm>
-              <a:off x="3855011" y="2715278"/>
+              <a:off x="3790900" y="2715278"/>
               <a:ext cx="62384" cy="62384"/>
             </a:xfrm>
             <a:prstGeom prst="ellipse">
@@ -17482,7 +17482,7 @@
           </p:nvSpPr>
           <p:spPr>
             <a:xfrm>
-              <a:off x="3711273" y="2697734"/>
+              <a:off x="3641004" y="2697734"/>
               <a:ext cx="62384" cy="62384"/>
             </a:xfrm>
             <a:prstGeom prst="ellipse">
@@ -17508,7 +17508,7 @@
           </p:nvSpPr>
           <p:spPr>
             <a:xfrm>
-              <a:off x="3813583" y="2723395"/>
+              <a:off x="3845118" y="2723395"/>
               <a:ext cx="62384" cy="62384"/>
             </a:xfrm>
             <a:prstGeom prst="ellipse">
@@ -17534,7 +17534,7 @@
           </p:nvSpPr>
           <p:spPr>
             <a:xfrm>
-              <a:off x="3655946" y="2657238"/>
+              <a:off x="3696957" y="2657238"/>
               <a:ext cx="62384" cy="62384"/>
             </a:xfrm>
             <a:prstGeom prst="ellipse">
@@ -17560,7 +17560,7 @@
           </p:nvSpPr>
           <p:spPr>
             <a:xfrm>
-              <a:off x="3804458" y="2565090"/>
+              <a:off x="3791848" y="2565090"/>
               <a:ext cx="62384" cy="62384"/>
             </a:xfrm>
             <a:prstGeom prst="ellipse">
@@ -17586,7 +17586,7 @@
           </p:nvSpPr>
           <p:spPr>
             <a:xfrm>
-              <a:off x="3705147" y="2487391"/>
+              <a:off x="3704498" y="2487391"/>
               <a:ext cx="62384" cy="62384"/>
             </a:xfrm>
             <a:prstGeom prst="ellipse">
@@ -17612,7 +17612,7 @@
           </p:nvSpPr>
           <p:spPr>
             <a:xfrm>
-              <a:off x="3810697" y="2351664"/>
+              <a:off x="3800786" y="2351664"/>
               <a:ext cx="62384" cy="62384"/>
             </a:xfrm>
             <a:prstGeom prst="ellipse">
@@ -17638,7 +17638,7 @@
           </p:nvSpPr>
           <p:spPr>
             <a:xfrm>
-              <a:off x="3640158" y="2527400"/>
+              <a:off x="3672370" y="2527400"/>
               <a:ext cx="62384" cy="62384"/>
             </a:xfrm>
             <a:prstGeom prst="ellipse">
@@ -17664,7 +17664,7 @@
           </p:nvSpPr>
           <p:spPr>
             <a:xfrm>
-              <a:off x="3841475" y="2512826"/>
+              <a:off x="3815654" y="2512826"/>
               <a:ext cx="62384" cy="62384"/>
             </a:xfrm>
             <a:prstGeom prst="ellipse">
@@ -17690,7 +17690,7 @@
           </p:nvSpPr>
           <p:spPr>
             <a:xfrm>
-              <a:off x="3649301" y="2756311"/>
+              <a:off x="3650394" y="2756311"/>
               <a:ext cx="62384" cy="62384"/>
             </a:xfrm>
             <a:prstGeom prst="ellipse">
@@ -17716,7 +17716,7 @@
           </p:nvSpPr>
           <p:spPr>
             <a:xfrm>
-              <a:off x="3847592" y="2423515"/>
+              <a:off x="3826639" y="2423515"/>
               <a:ext cx="62384" cy="62384"/>
             </a:xfrm>
             <a:prstGeom prst="ellipse">
@@ -17742,7 +17742,7 @@
           </p:nvSpPr>
           <p:spPr>
             <a:xfrm>
-              <a:off x="3643823" y="2291623"/>
+              <a:off x="3666174" y="2291623"/>
               <a:ext cx="62384" cy="62384"/>
             </a:xfrm>
             <a:prstGeom prst="ellipse">
@@ -17768,7 +17768,7 @@
           </p:nvSpPr>
           <p:spPr>
             <a:xfrm>
-              <a:off x="3827152" y="2101744"/>
+              <a:off x="3848094" y="2101744"/>
               <a:ext cx="62384" cy="62384"/>
             </a:xfrm>
             <a:prstGeom prst="ellipse">
@@ -17794,7 +17794,7 @@
           </p:nvSpPr>
           <p:spPr>
             <a:xfrm>
-              <a:off x="3655818" y="2946762"/>
+              <a:off x="3654533" y="2946762"/>
               <a:ext cx="62384" cy="62384"/>
             </a:xfrm>
             <a:prstGeom prst="ellipse">
@@ -17820,7 +17820,7 @@
           </p:nvSpPr>
           <p:spPr>
             <a:xfrm>
-              <a:off x="3834804" y="2932834"/>
+              <a:off x="3858311" y="2932834"/>
               <a:ext cx="62384" cy="62384"/>
             </a:xfrm>
             <a:prstGeom prst="ellipse">
@@ -17846,7 +17846,7 @@
           </p:nvSpPr>
           <p:spPr>
             <a:xfrm>
-              <a:off x="3652321" y="3175826"/>
+              <a:off x="3709486" y="3175826"/>
               <a:ext cx="62384" cy="62384"/>
             </a:xfrm>
             <a:prstGeom prst="ellipse">
@@ -17872,7 +17872,7 @@
           </p:nvSpPr>
           <p:spPr>
             <a:xfrm>
-              <a:off x="3838180" y="2940996"/>
+              <a:off x="3848198" y="2940996"/>
               <a:ext cx="62384" cy="62384"/>
             </a:xfrm>
             <a:prstGeom prst="ellipse">
@@ -17898,7 +17898,7 @@
           </p:nvSpPr>
           <p:spPr>
             <a:xfrm>
-              <a:off x="3688990" y="1942040"/>
+              <a:off x="3693336" y="1942040"/>
               <a:ext cx="62384" cy="62384"/>
             </a:xfrm>
             <a:prstGeom prst="ellipse">
@@ -17924,7 +17924,7 @@
           </p:nvSpPr>
           <p:spPr>
             <a:xfrm>
-              <a:off x="3849763" y="2090840"/>
+              <a:off x="3843976" y="2090840"/>
               <a:ext cx="62384" cy="62384"/>
             </a:xfrm>
             <a:prstGeom prst="ellipse">
@@ -17950,7 +17950,7 @@
           </p:nvSpPr>
           <p:spPr>
             <a:xfrm>
-              <a:off x="4733749" y="2311945"/>
+              <a:off x="4684537" y="2311945"/>
               <a:ext cx="62384" cy="62384"/>
             </a:xfrm>
             <a:prstGeom prst="ellipse">
@@ -17976,7 +17976,7 @@
           </p:nvSpPr>
           <p:spPr>
             <a:xfrm>
-              <a:off x="4892326" y="2369026"/>
+              <a:off x="4848440" y="2369026"/>
               <a:ext cx="62384" cy="62384"/>
             </a:xfrm>
             <a:prstGeom prst="ellipse">
@@ -18002,7 +18002,7 @@
           </p:nvSpPr>
           <p:spPr>
             <a:xfrm>
-              <a:off x="4705299" y="2894862"/>
+              <a:off x="4685595" y="2894862"/>
               <a:ext cx="62384" cy="62384"/>
             </a:xfrm>
             <a:prstGeom prst="ellipse">
@@ -18028,7 +18028,7 @@
           </p:nvSpPr>
           <p:spPr>
             <a:xfrm>
-              <a:off x="4861045" y="3229378"/>
+              <a:off x="4848005" y="3229378"/>
               <a:ext cx="62384" cy="62384"/>
             </a:xfrm>
             <a:prstGeom prst="ellipse">
@@ -18054,7 +18054,7 @@
           </p:nvSpPr>
           <p:spPr>
             <a:xfrm>
-              <a:off x="4728613" y="2364663"/>
+              <a:off x="4688840" y="2364663"/>
               <a:ext cx="62384" cy="62384"/>
             </a:xfrm>
             <a:prstGeom prst="ellipse">
@@ -18080,7 +18080,7 @@
           </p:nvSpPr>
           <p:spPr>
             <a:xfrm>
-              <a:off x="4857584" y="2181957"/>
+              <a:off x="4903078" y="2181957"/>
               <a:ext cx="62384" cy="62384"/>
             </a:xfrm>
             <a:prstGeom prst="ellipse">
@@ -18106,7 +18106,7 @@
           </p:nvSpPr>
           <p:spPr>
             <a:xfrm>
-              <a:off x="4740856" y="2715153"/>
+              <a:off x="4709323" y="2715153"/>
               <a:ext cx="62384" cy="62384"/>
             </a:xfrm>
             <a:prstGeom prst="ellipse">
@@ -18132,7 +18132,7 @@
           </p:nvSpPr>
           <p:spPr>
             <a:xfrm>
-              <a:off x="4853952" y="2479901"/>
+              <a:off x="4849391" y="2479901"/>
               <a:ext cx="62384" cy="62384"/>
             </a:xfrm>
             <a:prstGeom prst="ellipse">
@@ -18158,7 +18158,7 @@
           </p:nvSpPr>
           <p:spPr>
             <a:xfrm>
-              <a:off x="4720839" y="2158585"/>
+              <a:off x="4706154" y="2158585"/>
               <a:ext cx="62384" cy="62384"/>
             </a:xfrm>
             <a:prstGeom prst="ellipse">
@@ -18184,7 +18184,7 @@
           </p:nvSpPr>
           <p:spPr>
             <a:xfrm>
-              <a:off x="4870836" y="2614593"/>
+              <a:off x="4843378" y="2614593"/>
               <a:ext cx="62384" cy="62384"/>
             </a:xfrm>
             <a:prstGeom prst="ellipse">
@@ -18210,7 +18210,7 @@
           </p:nvSpPr>
           <p:spPr>
             <a:xfrm>
-              <a:off x="4690539" y="1775162"/>
+              <a:off x="4740976" y="1775162"/>
               <a:ext cx="62384" cy="62384"/>
             </a:xfrm>
             <a:prstGeom prst="ellipse">
@@ -18236,7 +18236,7 @@
           </p:nvSpPr>
           <p:spPr>
             <a:xfrm>
-              <a:off x="4874660" y="2120099"/>
+              <a:off x="4902797" y="2120099"/>
               <a:ext cx="62384" cy="62384"/>
             </a:xfrm>
             <a:prstGeom prst="ellipse">
@@ -18262,7 +18262,7 @@
           </p:nvSpPr>
           <p:spPr>
             <a:xfrm>
-              <a:off x="4710853" y="2900655"/>
+              <a:off x="4744342" y="2900655"/>
               <a:ext cx="62384" cy="62384"/>
             </a:xfrm>
             <a:prstGeom prst="ellipse">
@@ -18288,7 +18288,7 @@
           </p:nvSpPr>
           <p:spPr>
             <a:xfrm>
-              <a:off x="4846452" y="2808759"/>
+              <a:off x="4847549" y="2808759"/>
               <a:ext cx="62384" cy="62384"/>
             </a:xfrm>
             <a:prstGeom prst="ellipse">
@@ -18314,7 +18314,7 @@
           </p:nvSpPr>
           <p:spPr>
             <a:xfrm>
-              <a:off x="4722831" y="2437059"/>
+              <a:off x="4727154" y="2437059"/>
               <a:ext cx="62384" cy="62384"/>
             </a:xfrm>
             <a:prstGeom prst="ellipse">
@@ -18340,7 +18340,7 @@
           </p:nvSpPr>
           <p:spPr>
             <a:xfrm>
-              <a:off x="4884539" y="2620576"/>
+              <a:off x="4839154" y="2620576"/>
               <a:ext cx="62384" cy="62384"/>
             </a:xfrm>
             <a:prstGeom prst="ellipse">
@@ -18366,7 +18366,7 @@
           </p:nvSpPr>
           <p:spPr>
             <a:xfrm>
-              <a:off x="4717934" y="2460359"/>
+              <a:off x="4719619" y="2460359"/>
               <a:ext cx="62384" cy="62384"/>
             </a:xfrm>
             <a:prstGeom prst="ellipse">
@@ -18392,7 +18392,7 @@
           </p:nvSpPr>
           <p:spPr>
             <a:xfrm>
-              <a:off x="4832185" y="2563301"/>
+              <a:off x="4838169" y="2563301"/>
               <a:ext cx="62384" cy="62384"/>
             </a:xfrm>
             <a:prstGeom prst="ellipse">
@@ -18418,7 +18418,7 @@
           </p:nvSpPr>
           <p:spPr>
             <a:xfrm>
-              <a:off x="4729513" y="2841489"/>
+              <a:off x="4723055" y="2841489"/>
               <a:ext cx="62384" cy="62384"/>
             </a:xfrm>
             <a:prstGeom prst="ellipse">
@@ -18444,7 +18444,7 @@
           </p:nvSpPr>
           <p:spPr>
             <a:xfrm>
-              <a:off x="4852205" y="2355588"/>
+              <a:off x="4837869" y="2355588"/>
               <a:ext cx="62384" cy="62384"/>
             </a:xfrm>
             <a:prstGeom prst="ellipse">
@@ -18470,7 +18470,7 @@
           </p:nvSpPr>
           <p:spPr>
             <a:xfrm>
-              <a:off x="4730634" y="1606661"/>
+              <a:off x="4704170" y="1606661"/>
               <a:ext cx="62384" cy="62384"/>
             </a:xfrm>
             <a:prstGeom prst="ellipse">
@@ -18496,7 +18496,7 @@
           </p:nvSpPr>
           <p:spPr>
             <a:xfrm>
-              <a:off x="4893833" y="1907008"/>
+              <a:off x="4829914" y="1907008"/>
               <a:ext cx="62384" cy="62384"/>
             </a:xfrm>
             <a:prstGeom prst="ellipse">
@@ -18522,7 +18522,7 @@
           </p:nvSpPr>
           <p:spPr>
             <a:xfrm>
-              <a:off x="4727363" y="2769845"/>
+              <a:off x="4720841" y="2769845"/>
               <a:ext cx="62384" cy="62384"/>
             </a:xfrm>
             <a:prstGeom prst="ellipse">
@@ -18548,7 +18548,7 @@
           </p:nvSpPr>
           <p:spPr>
             <a:xfrm>
-              <a:off x="4832613" y="2526901"/>
+              <a:off x="4890985" y="2526901"/>
               <a:ext cx="62384" cy="62384"/>
             </a:xfrm>
             <a:prstGeom prst="ellipse">
@@ -18574,7 +18574,7 @@
           </p:nvSpPr>
           <p:spPr>
             <a:xfrm>
-              <a:off x="4698360" y="2528874"/>
+              <a:off x="4710447" y="2528874"/>
               <a:ext cx="62384" cy="62384"/>
             </a:xfrm>
             <a:prstGeom prst="ellipse">
@@ -18600,7 +18600,7 @@
           </p:nvSpPr>
           <p:spPr>
             <a:xfrm>
-              <a:off x="4832731" y="2508484"/>
+              <a:off x="4879390" y="2508484"/>
               <a:ext cx="62384" cy="62384"/>
             </a:xfrm>
             <a:prstGeom prst="ellipse">
@@ -18626,7 +18626,7 @@
           </p:nvSpPr>
           <p:spPr>
             <a:xfrm>
-              <a:off x="4698647" y="2108226"/>
+              <a:off x="4734876" y="2108226"/>
               <a:ext cx="62384" cy="62384"/>
             </a:xfrm>
             <a:prstGeom prst="ellipse">
@@ -18652,7 +18652,7 @@
           </p:nvSpPr>
           <p:spPr>
             <a:xfrm>
-              <a:off x="4837333" y="3063877"/>
+              <a:off x="4847731" y="3063877"/>
               <a:ext cx="62384" cy="62384"/>
             </a:xfrm>
             <a:prstGeom prst="ellipse">
@@ -18678,7 +18678,7 @@
           </p:nvSpPr>
           <p:spPr>
             <a:xfrm>
-              <a:off x="4680597" y="2540738"/>
+              <a:off x="4704328" y="2540738"/>
               <a:ext cx="62384" cy="62384"/>
             </a:xfrm>
             <a:prstGeom prst="ellipse">
@@ -18704,7 +18704,7 @@
           </p:nvSpPr>
           <p:spPr>
             <a:xfrm>
-              <a:off x="4897856" y="2471101"/>
+              <a:off x="4851850" y="2471101"/>
               <a:ext cx="62384" cy="62384"/>
             </a:xfrm>
             <a:prstGeom prst="ellipse">
@@ -18730,7 +18730,7 @@
           </p:nvSpPr>
           <p:spPr>
             <a:xfrm>
-              <a:off x="4690627" y="2845680"/>
+              <a:off x="4738371" y="2845680"/>
               <a:ext cx="62384" cy="62384"/>
             </a:xfrm>
             <a:prstGeom prst="ellipse">
@@ -18756,7 +18756,7 @@
           </p:nvSpPr>
           <p:spPr>
             <a:xfrm>
-              <a:off x="4880527" y="2964366"/>
+              <a:off x="4853834" y="2964366"/>
               <a:ext cx="62384" cy="62384"/>
             </a:xfrm>
             <a:prstGeom prst="ellipse">
@@ -18782,7 +18782,7 @@
           </p:nvSpPr>
           <p:spPr>
             <a:xfrm>
-              <a:off x="4718676" y="2761471"/>
+              <a:off x="4732402" y="2761471"/>
               <a:ext cx="62384" cy="62384"/>
             </a:xfrm>
             <a:prstGeom prst="ellipse">
@@ -18808,7 +18808,7 @@
           </p:nvSpPr>
           <p:spPr>
             <a:xfrm>
-              <a:off x="4872483" y="2923452"/>
+              <a:off x="4846032" y="2923452"/>
               <a:ext cx="62384" cy="62384"/>
             </a:xfrm>
             <a:prstGeom prst="ellipse">
@@ -18834,7 +18834,7 @@
           </p:nvSpPr>
           <p:spPr>
             <a:xfrm>
-              <a:off x="4743694" y="2607449"/>
+              <a:off x="4687784" y="2607449"/>
               <a:ext cx="62384" cy="62384"/>
             </a:xfrm>
             <a:prstGeom prst="ellipse">
@@ -18860,7 +18860,7 @@
           </p:nvSpPr>
           <p:spPr>
             <a:xfrm>
-              <a:off x="4902819" y="2208631"/>
+              <a:off x="4870030" y="2208631"/>
               <a:ext cx="62384" cy="62384"/>
             </a:xfrm>
             <a:prstGeom prst="ellipse">
@@ -18886,7 +18886,7 @@
           </p:nvSpPr>
           <p:spPr>
             <a:xfrm>
-              <a:off x="4702239" y="2681231"/>
+              <a:off x="4701324" y="2681231"/>
               <a:ext cx="62384" cy="62384"/>
             </a:xfrm>
             <a:prstGeom prst="ellipse">
@@ -18912,7 +18912,7 @@
           </p:nvSpPr>
           <p:spPr>
             <a:xfrm>
-              <a:off x="4873546" y="2374750"/>
+              <a:off x="4834576" y="2374750"/>
               <a:ext cx="62384" cy="62384"/>
             </a:xfrm>
             <a:prstGeom prst="ellipse">
@@ -18938,7 +18938,7 @@
           </p:nvSpPr>
           <p:spPr>
             <a:xfrm>
-              <a:off x="4683402" y="2288238"/>
+              <a:off x="4697063" y="2288238"/>
               <a:ext cx="62384" cy="62384"/>
             </a:xfrm>
             <a:prstGeom prst="ellipse">
@@ -18964,7 +18964,7 @@
           </p:nvSpPr>
           <p:spPr>
             <a:xfrm>
-              <a:off x="4864405" y="2930793"/>
+              <a:off x="4861838" y="2930793"/>
               <a:ext cx="62384" cy="62384"/>
             </a:xfrm>
             <a:prstGeom prst="ellipse">
@@ -18990,7 +18990,7 @@
           </p:nvSpPr>
           <p:spPr>
             <a:xfrm>
-              <a:off x="4699853" y="2806788"/>
+              <a:off x="4702284" y="2806788"/>
               <a:ext cx="62384" cy="62384"/>
             </a:xfrm>
             <a:prstGeom prst="ellipse">
@@ -19016,7 +19016,7 @@
           </p:nvSpPr>
           <p:spPr>
             <a:xfrm>
-              <a:off x="4862992" y="2769173"/>
+              <a:off x="4867221" y="2769173"/>
               <a:ext cx="62384" cy="62384"/>
             </a:xfrm>
             <a:prstGeom prst="ellipse">
@@ -19042,7 +19042,7 @@
           </p:nvSpPr>
           <p:spPr>
             <a:xfrm>
-              <a:off x="4717922" y="2125887"/>
+              <a:off x="4695543" y="2125887"/>
               <a:ext cx="62384" cy="62384"/>
             </a:xfrm>
             <a:prstGeom prst="ellipse">
@@ -19068,7 +19068,7 @@
           </p:nvSpPr>
           <p:spPr>
             <a:xfrm>
-              <a:off x="4868471" y="2426405"/>
+              <a:off x="4848749" y="2426405"/>
               <a:ext cx="62384" cy="62384"/>
             </a:xfrm>
             <a:prstGeom prst="ellipse">
@@ -19094,7 +19094,7 @@
           </p:nvSpPr>
           <p:spPr>
             <a:xfrm>
-              <a:off x="4725745" y="2851742"/>
+              <a:off x="4706950" y="2851742"/>
               <a:ext cx="62384" cy="62384"/>
             </a:xfrm>
             <a:prstGeom prst="ellipse">
@@ -19120,7 +19120,7 @@
           </p:nvSpPr>
           <p:spPr>
             <a:xfrm>
-              <a:off x="4871037" y="3194303"/>
+              <a:off x="4834156" y="3194303"/>
               <a:ext cx="62384" cy="62384"/>
             </a:xfrm>
             <a:prstGeom prst="ellipse">
@@ -19146,7 +19146,7 @@
           </p:nvSpPr>
           <p:spPr>
             <a:xfrm>
-              <a:off x="4747482" y="3013766"/>
+              <a:off x="4750903" y="3013766"/>
               <a:ext cx="62384" cy="62384"/>
             </a:xfrm>
             <a:prstGeom prst="ellipse">
@@ -19172,7 +19172,7 @@
           </p:nvSpPr>
           <p:spPr>
             <a:xfrm>
-              <a:off x="4871276" y="2626191"/>
+              <a:off x="4856993" y="2626191"/>
               <a:ext cx="62384" cy="62384"/>
             </a:xfrm>
             <a:prstGeom prst="ellipse">
@@ -19198,7 +19198,7 @@
           </p:nvSpPr>
           <p:spPr>
             <a:xfrm>
-              <a:off x="4735625" y="2009130"/>
+              <a:off x="4716505" y="2009130"/>
               <a:ext cx="62384" cy="62384"/>
             </a:xfrm>
             <a:prstGeom prst="ellipse">
@@ -19224,7 +19224,7 @@
           </p:nvSpPr>
           <p:spPr>
             <a:xfrm>
-              <a:off x="4875732" y="2572888"/>
+              <a:off x="4880484" y="2572888"/>
               <a:ext cx="62384" cy="62384"/>
             </a:xfrm>
             <a:prstGeom prst="ellipse">
@@ -19250,7 +19250,7 @@
           </p:nvSpPr>
           <p:spPr>
             <a:xfrm>
-              <a:off x="4740286" y="2180947"/>
+              <a:off x="4720539" y="2180947"/>
               <a:ext cx="62384" cy="62384"/>
             </a:xfrm>
             <a:prstGeom prst="ellipse">
@@ -19276,7 +19276,7 @@
           </p:nvSpPr>
           <p:spPr>
             <a:xfrm>
-              <a:off x="4858933" y="2606670"/>
+              <a:off x="4832882" y="2606670"/>
               <a:ext cx="62384" cy="62384"/>
             </a:xfrm>
             <a:prstGeom prst="ellipse">
@@ -19302,7 +19302,7 @@
           </p:nvSpPr>
           <p:spPr>
             <a:xfrm>
-              <a:off x="4721931" y="2302950"/>
+              <a:off x="4725681" y="2302950"/>
               <a:ext cx="62384" cy="62384"/>
             </a:xfrm>
             <a:prstGeom prst="ellipse">
@@ -19328,7 +19328,7 @@
           </p:nvSpPr>
           <p:spPr>
             <a:xfrm>
-              <a:off x="4886635" y="2628013"/>
+              <a:off x="4899093" y="2628013"/>
               <a:ext cx="62384" cy="62384"/>
             </a:xfrm>
             <a:prstGeom prst="ellipse">
@@ -19354,7 +19354,7 @@
           </p:nvSpPr>
           <p:spPr>
             <a:xfrm>
-              <a:off x="4712104" y="2882558"/>
+              <a:off x="4739228" y="2882558"/>
               <a:ext cx="62384" cy="62384"/>
             </a:xfrm>
             <a:prstGeom prst="ellipse">
@@ -19380,7 +19380,7 @@
           </p:nvSpPr>
           <p:spPr>
             <a:xfrm>
-              <a:off x="4860349" y="2297022"/>
+              <a:off x="4884946" y="2297022"/>
               <a:ext cx="62384" cy="62384"/>
             </a:xfrm>
             <a:prstGeom prst="ellipse">
@@ -19406,7 +19406,7 @@
           </p:nvSpPr>
           <p:spPr>
             <a:xfrm>
-              <a:off x="4746674" y="2781978"/>
+              <a:off x="4731960" y="2781978"/>
               <a:ext cx="62384" cy="62384"/>
             </a:xfrm>
             <a:prstGeom prst="ellipse">
@@ -19432,7 +19432,7 @@
           </p:nvSpPr>
           <p:spPr>
             <a:xfrm>
-              <a:off x="4829799" y="2467935"/>
+              <a:off x="4869265" y="2467935"/>
               <a:ext cx="62384" cy="62384"/>
             </a:xfrm>
             <a:prstGeom prst="ellipse">
@@ -19458,7 +19458,7 @@
           </p:nvSpPr>
           <p:spPr>
             <a:xfrm>
-              <a:off x="4750879" y="2228724"/>
+              <a:off x="4714410" y="2228724"/>
               <a:ext cx="62384" cy="62384"/>
             </a:xfrm>
             <a:prstGeom prst="ellipse">
@@ -19484,7 +19484,7 @@
           </p:nvSpPr>
           <p:spPr>
             <a:xfrm>
-              <a:off x="4854489" y="2561209"/>
+              <a:off x="4881690" y="2561209"/>
               <a:ext cx="62384" cy="62384"/>
             </a:xfrm>
             <a:prstGeom prst="ellipse">
@@ -19510,7 +19510,7 @@
           </p:nvSpPr>
           <p:spPr>
             <a:xfrm>
-              <a:off x="4693058" y="2374627"/>
+              <a:off x="4750819" y="2374627"/>
               <a:ext cx="62384" cy="62384"/>
             </a:xfrm>
             <a:prstGeom prst="ellipse">
@@ -19536,7 +19536,7 @@
           </p:nvSpPr>
           <p:spPr>
             <a:xfrm>
-              <a:off x="4843132" y="2083058"/>
+              <a:off x="4849135" y="2083058"/>
               <a:ext cx="62384" cy="62384"/>
             </a:xfrm>
             <a:prstGeom prst="ellipse">
@@ -19562,7 +19562,7 @@
           </p:nvSpPr>
           <p:spPr>
             <a:xfrm>
-              <a:off x="4742254" y="2680218"/>
+              <a:off x="4717473" y="2680218"/>
               <a:ext cx="62384" cy="62384"/>
             </a:xfrm>
             <a:prstGeom prst="ellipse">
@@ -19588,7 +19588,7 @@
           </p:nvSpPr>
           <p:spPr>
             <a:xfrm>
-              <a:off x="4893891" y="2481739"/>
+              <a:off x="4899481" y="2481739"/>
               <a:ext cx="62384" cy="62384"/>
             </a:xfrm>
             <a:prstGeom prst="ellipse">
@@ -19614,7 +19614,7 @@
           </p:nvSpPr>
           <p:spPr>
             <a:xfrm>
-              <a:off x="4752561" y="2081163"/>
+              <a:off x="4747762" y="2081163"/>
               <a:ext cx="62384" cy="62384"/>
             </a:xfrm>
             <a:prstGeom prst="ellipse">
@@ -19640,7 +19640,7 @@
           </p:nvSpPr>
           <p:spPr>
             <a:xfrm>
-              <a:off x="4837928" y="2167581"/>
+              <a:off x="4882609" y="2167581"/>
               <a:ext cx="62384" cy="62384"/>
             </a:xfrm>
             <a:prstGeom prst="ellipse">
@@ -19666,7 +19666,7 @@
           </p:nvSpPr>
           <p:spPr>
             <a:xfrm>
-              <a:off x="4703267" y="2681153"/>
+              <a:off x="4684774" y="2681153"/>
               <a:ext cx="62384" cy="62384"/>
             </a:xfrm>
             <a:prstGeom prst="ellipse">
@@ -19692,7 +19692,7 @@
           </p:nvSpPr>
           <p:spPr>
             <a:xfrm>
-              <a:off x="4846034" y="2737485"/>
+              <a:off x="4852160" y="2737485"/>
               <a:ext cx="62384" cy="62384"/>
             </a:xfrm>
             <a:prstGeom prst="ellipse">
@@ -19718,7 +19718,7 @@
           </p:nvSpPr>
           <p:spPr>
             <a:xfrm>
-              <a:off x="4742073" y="2317605"/>
+              <a:off x="4742184" y="2317605"/>
               <a:ext cx="62384" cy="62384"/>
             </a:xfrm>
             <a:prstGeom prst="ellipse">
@@ -19744,7 +19744,7 @@
           </p:nvSpPr>
           <p:spPr>
             <a:xfrm>
-              <a:off x="4884508" y="2612100"/>
+              <a:off x="4893936" y="2612100"/>
               <a:ext cx="62384" cy="62384"/>
             </a:xfrm>
             <a:prstGeom prst="ellipse">
@@ -19770,7 +19770,7 @@
           </p:nvSpPr>
           <p:spPr>
             <a:xfrm>
-              <a:off x="4734671" y="3185085"/>
+              <a:off x="4715212" y="3185085"/>
               <a:ext cx="62384" cy="62384"/>
             </a:xfrm>
             <a:prstGeom prst="ellipse">
@@ -19796,7 +19796,7 @@
           </p:nvSpPr>
           <p:spPr>
             <a:xfrm>
-              <a:off x="4838796" y="3251737"/>
+              <a:off x="4900710" y="3251737"/>
               <a:ext cx="62384" cy="62384"/>
             </a:xfrm>
             <a:prstGeom prst="ellipse">
@@ -19822,7 +19822,7 @@
           </p:nvSpPr>
           <p:spPr>
             <a:xfrm>
-              <a:off x="4707084" y="2162231"/>
+              <a:off x="4720287" y="2162231"/>
               <a:ext cx="62384" cy="62384"/>
             </a:xfrm>
             <a:prstGeom prst="ellipse">
@@ -19848,7 +19848,7 @@
           </p:nvSpPr>
           <p:spPr>
             <a:xfrm>
-              <a:off x="4882303" y="2727672"/>
+              <a:off x="4868425" y="2727672"/>
               <a:ext cx="62384" cy="62384"/>
             </a:xfrm>
             <a:prstGeom prst="ellipse">
@@ -19874,7 +19874,7 @@
           </p:nvSpPr>
           <p:spPr>
             <a:xfrm>
-              <a:off x="4730722" y="2348880"/>
+              <a:off x="4697614" y="2348880"/>
               <a:ext cx="62384" cy="62384"/>
             </a:xfrm>
             <a:prstGeom prst="ellipse">
@@ -19900,7 +19900,7 @@
           </p:nvSpPr>
           <p:spPr>
             <a:xfrm>
-              <a:off x="4892059" y="2601820"/>
+              <a:off x="4861231" y="2601820"/>
               <a:ext cx="62384" cy="62384"/>
             </a:xfrm>
             <a:prstGeom prst="ellipse">
@@ -19926,7 +19926,7 @@
           </p:nvSpPr>
           <p:spPr>
             <a:xfrm>
-              <a:off x="4692028" y="2424810"/>
+              <a:off x="4682236" y="2424810"/>
               <a:ext cx="62384" cy="62384"/>
             </a:xfrm>
             <a:prstGeom prst="ellipse">
@@ -19952,7 +19952,7 @@
           </p:nvSpPr>
           <p:spPr>
             <a:xfrm>
-              <a:off x="4839153" y="2768547"/>
+              <a:off x="4839117" y="2768547"/>
               <a:ext cx="62384" cy="62384"/>
             </a:xfrm>
             <a:prstGeom prst="ellipse">
@@ -19978,7 +19978,7 @@
           </p:nvSpPr>
           <p:spPr>
             <a:xfrm>
-              <a:off x="4678919" y="2319052"/>
+              <a:off x="4736076" y="2319052"/>
               <a:ext cx="62384" cy="62384"/>
             </a:xfrm>
             <a:prstGeom prst="ellipse">
@@ -20004,7 +20004,7 @@
           </p:nvSpPr>
           <p:spPr>
             <a:xfrm>
-              <a:off x="4831601" y="2342871"/>
+              <a:off x="4846545" y="2342871"/>
               <a:ext cx="62384" cy="62384"/>
             </a:xfrm>
             <a:prstGeom prst="ellipse">
@@ -20030,7 +20030,7 @@
           </p:nvSpPr>
           <p:spPr>
             <a:xfrm>
-              <a:off x="4719380" y="2344858"/>
+              <a:off x="4691426" y="2344858"/>
               <a:ext cx="62384" cy="62384"/>
             </a:xfrm>
             <a:prstGeom prst="ellipse">
@@ -20056,7 +20056,7 @@
           </p:nvSpPr>
           <p:spPr>
             <a:xfrm>
-              <a:off x="4855186" y="2646094"/>
+              <a:off x="4861693" y="2646094"/>
               <a:ext cx="62384" cy="62384"/>
             </a:xfrm>
             <a:prstGeom prst="ellipse">
@@ -20082,7 +20082,7 @@
           </p:nvSpPr>
           <p:spPr>
             <a:xfrm>
-              <a:off x="4718441" y="2530032"/>
+              <a:off x="4740428" y="2530032"/>
               <a:ext cx="62384" cy="62384"/>
             </a:xfrm>
             <a:prstGeom prst="ellipse">
@@ -20108,7 +20108,7 @@
           </p:nvSpPr>
           <p:spPr>
             <a:xfrm>
-              <a:off x="4884140" y="2585508"/>
+              <a:off x="4893544" y="2585508"/>
               <a:ext cx="62384" cy="62384"/>
             </a:xfrm>
             <a:prstGeom prst="ellipse">
@@ -20134,7 +20134,7 @@
           </p:nvSpPr>
           <p:spPr>
             <a:xfrm>
-              <a:off x="4688969" y="2411097"/>
+              <a:off x="4720959" y="2411097"/>
               <a:ext cx="62384" cy="62384"/>
             </a:xfrm>
             <a:prstGeom prst="ellipse">
@@ -20160,7 +20160,7 @@
           </p:nvSpPr>
           <p:spPr>
             <a:xfrm>
-              <a:off x="4880374" y="2286848"/>
+              <a:off x="4834763" y="2286848"/>
               <a:ext cx="62384" cy="62384"/>
             </a:xfrm>
             <a:prstGeom prst="ellipse">
@@ -20186,7 +20186,7 @@
           </p:nvSpPr>
           <p:spPr>
             <a:xfrm>
-              <a:off x="4693312" y="2683246"/>
+              <a:off x="4745419" y="2683246"/>
               <a:ext cx="62384" cy="62384"/>
             </a:xfrm>
             <a:prstGeom prst="ellipse">
@@ -20212,7 +20212,7 @@
           </p:nvSpPr>
           <p:spPr>
             <a:xfrm>
-              <a:off x="4898248" y="3124870"/>
+              <a:off x="4852990" y="3124870"/>
               <a:ext cx="62384" cy="62384"/>
             </a:xfrm>
             <a:prstGeom prst="ellipse">
@@ -20238,7 +20238,7 @@
           </p:nvSpPr>
           <p:spPr>
             <a:xfrm>
-              <a:off x="4731646" y="2917394"/>
+              <a:off x="4728718" y="2917394"/>
               <a:ext cx="62384" cy="62384"/>
             </a:xfrm>
             <a:prstGeom prst="ellipse">
@@ -20264,7 +20264,7 @@
           </p:nvSpPr>
           <p:spPr>
             <a:xfrm>
-              <a:off x="4873302" y="2497390"/>
+              <a:off x="4899921" y="2497390"/>
               <a:ext cx="62384" cy="62384"/>
             </a:xfrm>
             <a:prstGeom prst="ellipse">
@@ -20290,7 +20290,7 @@
           </p:nvSpPr>
           <p:spPr>
             <a:xfrm>
-              <a:off x="4722979" y="2511029"/>
+              <a:off x="4728660" y="2511029"/>
               <a:ext cx="62384" cy="62384"/>
             </a:xfrm>
             <a:prstGeom prst="ellipse">
@@ -20316,7 +20316,7 @@
           </p:nvSpPr>
           <p:spPr>
             <a:xfrm>
-              <a:off x="4897314" y="2554699"/>
+              <a:off x="4884126" y="2554699"/>
               <a:ext cx="62384" cy="62384"/>
             </a:xfrm>
             <a:prstGeom prst="ellipse">
@@ -20342,7 +20342,7 @@
           </p:nvSpPr>
           <p:spPr>
             <a:xfrm>
-              <a:off x="4721629" y="2559440"/>
+              <a:off x="4732963" y="2559440"/>
               <a:ext cx="62384" cy="62384"/>
             </a:xfrm>
             <a:prstGeom prst="ellipse">
@@ -20368,7 +20368,7 @@
           </p:nvSpPr>
           <p:spPr>
             <a:xfrm>
-              <a:off x="4886776" y="2762487"/>
+              <a:off x="4858145" y="2762487"/>
               <a:ext cx="62384" cy="62384"/>
             </a:xfrm>
             <a:prstGeom prst="ellipse">
@@ -20394,7 +20394,7 @@
           </p:nvSpPr>
           <p:spPr>
             <a:xfrm>
-              <a:off x="4691886" y="2609385"/>
+              <a:off x="4689612" y="2609385"/>
               <a:ext cx="62384" cy="62384"/>
             </a:xfrm>
             <a:prstGeom prst="ellipse">
@@ -20420,7 +20420,7 @@
           </p:nvSpPr>
           <p:spPr>
             <a:xfrm>
-              <a:off x="4844794" y="2228409"/>
+              <a:off x="4852380" y="2228409"/>
               <a:ext cx="62384" cy="62384"/>
             </a:xfrm>
             <a:prstGeom prst="ellipse">
@@ -20446,7 +20446,7 @@
           </p:nvSpPr>
           <p:spPr>
             <a:xfrm>
-              <a:off x="4686613" y="1783476"/>
+              <a:off x="4697283" y="1783476"/>
               <a:ext cx="62384" cy="62384"/>
             </a:xfrm>
             <a:prstGeom prst="ellipse">
@@ -20472,7 +20472,7 @@
           </p:nvSpPr>
           <p:spPr>
             <a:xfrm>
-              <a:off x="4847091" y="2113447"/>
+              <a:off x="4840823" y="2113447"/>
               <a:ext cx="62384" cy="62384"/>
             </a:xfrm>
             <a:prstGeom prst="ellipse">
@@ -20498,7 +20498,7 @@
           </p:nvSpPr>
           <p:spPr>
             <a:xfrm>
-              <a:off x="4719674" y="2254933"/>
+              <a:off x="4690244" y="2254933"/>
               <a:ext cx="62384" cy="62384"/>
             </a:xfrm>
             <a:prstGeom prst="ellipse">
@@ -20524,7 +20524,7 @@
           </p:nvSpPr>
           <p:spPr>
             <a:xfrm>
-              <a:off x="4829765" y="2332335"/>
+              <a:off x="4891214" y="2332335"/>
               <a:ext cx="62384" cy="62384"/>
             </a:xfrm>
             <a:prstGeom prst="ellipse">
@@ -20550,7 +20550,7 @@
           </p:nvSpPr>
           <p:spPr>
             <a:xfrm>
-              <a:off x="4751737" y="2031341"/>
+              <a:off x="4697412" y="2031341"/>
               <a:ext cx="62384" cy="62384"/>
             </a:xfrm>
             <a:prstGeom prst="ellipse">
@@ -20576,7 +20576,7 @@
           </p:nvSpPr>
           <p:spPr>
             <a:xfrm>
-              <a:off x="4886042" y="2263950"/>
+              <a:off x="4883522" y="2263950"/>
               <a:ext cx="62384" cy="62384"/>
             </a:xfrm>
             <a:prstGeom prst="ellipse">
@@ -20602,7 +20602,7 @@
           </p:nvSpPr>
           <p:spPr>
             <a:xfrm>
-              <a:off x="4722545" y="2777345"/>
+              <a:off x="4722070" y="2777345"/>
               <a:ext cx="62384" cy="62384"/>
             </a:xfrm>
             <a:prstGeom prst="ellipse">
@@ -20628,7 +20628,7 @@
           </p:nvSpPr>
           <p:spPr>
             <a:xfrm>
-              <a:off x="4895297" y="2777409"/>
+              <a:off x="4881770" y="2777409"/>
               <a:ext cx="62384" cy="62384"/>
             </a:xfrm>
             <a:prstGeom prst="ellipse">
@@ -20654,7 +20654,7 @@
           </p:nvSpPr>
           <p:spPr>
             <a:xfrm>
-              <a:off x="4736810" y="2253316"/>
+              <a:off x="4717874" y="2253316"/>
               <a:ext cx="62384" cy="62384"/>
             </a:xfrm>
             <a:prstGeom prst="ellipse">
@@ -20680,7 +20680,7 @@
           </p:nvSpPr>
           <p:spPr>
             <a:xfrm>
-              <a:off x="4830731" y="2352887"/>
+              <a:off x="4829655" y="2352887"/>
               <a:ext cx="62384" cy="62384"/>
             </a:xfrm>
             <a:prstGeom prst="ellipse">
@@ -20706,7 +20706,7 @@
           </p:nvSpPr>
           <p:spPr>
             <a:xfrm>
-              <a:off x="4728207" y="2401614"/>
+              <a:off x="4683871" y="2401614"/>
               <a:ext cx="62384" cy="62384"/>
             </a:xfrm>
             <a:prstGeom prst="ellipse">
@@ -20732,7 +20732,7 @@
           </p:nvSpPr>
           <p:spPr>
             <a:xfrm>
-              <a:off x="4874035" y="2351698"/>
+              <a:off x="4846761" y="2351698"/>
               <a:ext cx="62384" cy="62384"/>
             </a:xfrm>
             <a:prstGeom prst="ellipse">
@@ -20758,7 +20758,7 @@
           </p:nvSpPr>
           <p:spPr>
             <a:xfrm>
-              <a:off x="4715302" y="2783130"/>
+              <a:off x="4687784" y="2783130"/>
               <a:ext cx="62384" cy="62384"/>
             </a:xfrm>
             <a:prstGeom prst="ellipse">
@@ -20784,7 +20784,7 @@
           </p:nvSpPr>
           <p:spPr>
             <a:xfrm>
-              <a:off x="4871174" y="2628817"/>
+              <a:off x="4871511" y="2628817"/>
               <a:ext cx="62384" cy="62384"/>
             </a:xfrm>
             <a:prstGeom prst="ellipse">
@@ -20810,7 +20810,7 @@
           </p:nvSpPr>
           <p:spPr>
             <a:xfrm>
-              <a:off x="4735283" y="2034889"/>
+              <a:off x="4734512" y="2034889"/>
               <a:ext cx="62384" cy="62384"/>
             </a:xfrm>
             <a:prstGeom prst="ellipse">
@@ -20836,7 +20836,7 @@
           </p:nvSpPr>
           <p:spPr>
             <a:xfrm>
-              <a:off x="4882946" y="2402098"/>
+              <a:off x="4879426" y="2402098"/>
               <a:ext cx="62384" cy="62384"/>
             </a:xfrm>
             <a:prstGeom prst="ellipse">
@@ -20862,7 +20862,7 @@
           </p:nvSpPr>
           <p:spPr>
             <a:xfrm>
-              <a:off x="4706088" y="2580871"/>
+              <a:off x="4722252" y="2580871"/>
               <a:ext cx="62384" cy="62384"/>
             </a:xfrm>
             <a:prstGeom prst="ellipse">
@@ -20888,7 +20888,7 @@
           </p:nvSpPr>
           <p:spPr>
             <a:xfrm>
-              <a:off x="4830046" y="2494681"/>
+              <a:off x="4884541" y="2494681"/>
               <a:ext cx="62384" cy="62384"/>
             </a:xfrm>
             <a:prstGeom prst="ellipse">
@@ -20914,7 +20914,7 @@
           </p:nvSpPr>
           <p:spPr>
             <a:xfrm>
-              <a:off x="4686879" y="2441539"/>
+              <a:off x="4722559" y="2441539"/>
               <a:ext cx="62384" cy="62384"/>
             </a:xfrm>
             <a:prstGeom prst="ellipse">
@@ -20940,7 +20940,7 @@
           </p:nvSpPr>
           <p:spPr>
             <a:xfrm>
-              <a:off x="4898135" y="2772918"/>
+              <a:off x="4840598" y="2772918"/>
               <a:ext cx="62384" cy="62384"/>
             </a:xfrm>
             <a:prstGeom prst="ellipse">
@@ -20966,7 +20966,7 @@
           </p:nvSpPr>
           <p:spPr>
             <a:xfrm>
-              <a:off x="4695862" y="2521555"/>
+              <a:off x="4678922" y="2521555"/>
               <a:ext cx="62384" cy="62384"/>
             </a:xfrm>
             <a:prstGeom prst="ellipse">
@@ -20992,7 +20992,7 @@
           </p:nvSpPr>
           <p:spPr>
             <a:xfrm>
-              <a:off x="4835453" y="2696203"/>
+              <a:off x="4878800" y="2696203"/>
               <a:ext cx="62384" cy="62384"/>
             </a:xfrm>
             <a:prstGeom prst="ellipse">
@@ -21018,7 +21018,7 @@
           </p:nvSpPr>
           <p:spPr>
             <a:xfrm>
-              <a:off x="4727149" y="2300460"/>
+              <a:off x="4735889" y="2300460"/>
               <a:ext cx="62384" cy="62384"/>
             </a:xfrm>
             <a:prstGeom prst="ellipse">
@@ -21044,7 +21044,7 @@
           </p:nvSpPr>
           <p:spPr>
             <a:xfrm>
-              <a:off x="4903097" y="2557734"/>
+              <a:off x="4848832" y="2557734"/>
               <a:ext cx="62384" cy="62384"/>
             </a:xfrm>
             <a:prstGeom prst="ellipse">
@@ -21070,7 +21070,7 @@
           </p:nvSpPr>
           <p:spPr>
             <a:xfrm>
-              <a:off x="4692138" y="2297743"/>
+              <a:off x="4695735" y="2297743"/>
               <a:ext cx="62384" cy="62384"/>
             </a:xfrm>
             <a:prstGeom prst="ellipse">
@@ -21096,7 +21096,7 @@
           </p:nvSpPr>
           <p:spPr>
             <a:xfrm>
-              <a:off x="4895591" y="2708646"/>
+              <a:off x="4887246" y="2708646"/>
               <a:ext cx="62384" cy="62384"/>
             </a:xfrm>
             <a:prstGeom prst="ellipse">
@@ -21122,7 +21122,7 @@
           </p:nvSpPr>
           <p:spPr>
             <a:xfrm>
-              <a:off x="4708623" y="2538953"/>
+              <a:off x="4679151" y="2538953"/>
               <a:ext cx="62384" cy="62384"/>
             </a:xfrm>
             <a:prstGeom prst="ellipse">
@@ -21148,7 +21148,7 @@
           </p:nvSpPr>
           <p:spPr>
             <a:xfrm>
-              <a:off x="4876987" y="2588241"/>
+              <a:off x="4871398" y="2588241"/>
               <a:ext cx="62384" cy="62384"/>
             </a:xfrm>
             <a:prstGeom prst="ellipse">
@@ -21174,7 +21174,7 @@
           </p:nvSpPr>
           <p:spPr>
             <a:xfrm>
-              <a:off x="4697305" y="2216075"/>
+              <a:off x="4728589" y="2216075"/>
               <a:ext cx="62384" cy="62384"/>
             </a:xfrm>
             <a:prstGeom prst="ellipse">
@@ -21200,7 +21200,7 @@
           </p:nvSpPr>
           <p:spPr>
             <a:xfrm>
-              <a:off x="4885675" y="2413705"/>
+              <a:off x="4870154" y="2413705"/>
               <a:ext cx="62384" cy="62384"/>
             </a:xfrm>
             <a:prstGeom prst="ellipse">
@@ -21226,7 +21226,7 @@
           </p:nvSpPr>
           <p:spPr>
             <a:xfrm>
-              <a:off x="4682692" y="2669883"/>
+              <a:off x="4749221" y="2669883"/>
               <a:ext cx="62384" cy="62384"/>
             </a:xfrm>
             <a:prstGeom prst="ellipse">
@@ -21252,7 +21252,7 @@
           </p:nvSpPr>
           <p:spPr>
             <a:xfrm>
-              <a:off x="4847660" y="2214266"/>
+              <a:off x="4828756" y="2214266"/>
               <a:ext cx="62384" cy="62384"/>
             </a:xfrm>
             <a:prstGeom prst="ellipse">
@@ -21278,7 +21278,7 @@
           </p:nvSpPr>
           <p:spPr>
             <a:xfrm>
-              <a:off x="4683283" y="2074950"/>
+              <a:off x="4718945" y="2074950"/>
               <a:ext cx="62384" cy="62384"/>
             </a:xfrm>
             <a:prstGeom prst="ellipse">
@@ -21304,7 +21304,7 @@
           </p:nvSpPr>
           <p:spPr>
             <a:xfrm>
-              <a:off x="4830305" y="2067337"/>
+              <a:off x="4859192" y="2067337"/>
               <a:ext cx="62384" cy="62384"/>
             </a:xfrm>
             <a:prstGeom prst="ellipse">
@@ -21330,7 +21330,7 @@
           </p:nvSpPr>
           <p:spPr>
             <a:xfrm>
-              <a:off x="4739246" y="2450811"/>
+              <a:off x="4680627" y="2450811"/>
               <a:ext cx="62384" cy="62384"/>
             </a:xfrm>
             <a:prstGeom prst="ellipse">
@@ -21356,7 +21356,7 @@
           </p:nvSpPr>
           <p:spPr>
             <a:xfrm>
-              <a:off x="4840346" y="2521828"/>
+              <a:off x="4863673" y="2521828"/>
               <a:ext cx="62384" cy="62384"/>
             </a:xfrm>
             <a:prstGeom prst="ellipse">
@@ -21382,7 +21382,7 @@
           </p:nvSpPr>
           <p:spPr>
             <a:xfrm>
-              <a:off x="4735058" y="2562608"/>
+              <a:off x="4710287" y="2562608"/>
               <a:ext cx="62384" cy="62384"/>
             </a:xfrm>
             <a:prstGeom prst="ellipse">
@@ -21408,7 +21408,7 @@
           </p:nvSpPr>
           <p:spPr>
             <a:xfrm>
-              <a:off x="4844430" y="2410265"/>
+              <a:off x="4838867" y="2410265"/>
               <a:ext cx="62384" cy="62384"/>
             </a:xfrm>
             <a:prstGeom prst="ellipse">
@@ -21434,7 +21434,7 @@
           </p:nvSpPr>
           <p:spPr>
             <a:xfrm>
-              <a:off x="4697415" y="2000330"/>
+              <a:off x="4709795" y="2000330"/>
               <a:ext cx="62384" cy="62384"/>
             </a:xfrm>
             <a:prstGeom prst="ellipse">
@@ -21460,7 +21460,7 @@
           </p:nvSpPr>
           <p:spPr>
             <a:xfrm>
-              <a:off x="4860407" y="2835619"/>
+              <a:off x="4838221" y="2835619"/>
               <a:ext cx="62384" cy="62384"/>
             </a:xfrm>
             <a:prstGeom prst="ellipse">
@@ -21486,7 +21486,7 @@
           </p:nvSpPr>
           <p:spPr>
             <a:xfrm>
-              <a:off x="4713509" y="2883898"/>
+              <a:off x="4735853" y="2883898"/>
               <a:ext cx="62384" cy="62384"/>
             </a:xfrm>
             <a:prstGeom prst="ellipse">
@@ -21512,7 +21512,7 @@
           </p:nvSpPr>
           <p:spPr>
             <a:xfrm>
-              <a:off x="4897635" y="2434687"/>
+              <a:off x="4881030" y="2434687"/>
               <a:ext cx="62384" cy="62384"/>
             </a:xfrm>
             <a:prstGeom prst="ellipse">
@@ -21538,7 +21538,7 @@
           </p:nvSpPr>
           <p:spPr>
             <a:xfrm>
-              <a:off x="4711403" y="2621337"/>
+              <a:off x="4696556" y="2621337"/>
               <a:ext cx="62384" cy="62384"/>
             </a:xfrm>
             <a:prstGeom prst="ellipse">
@@ -21564,7 +21564,7 @@
           </p:nvSpPr>
           <p:spPr>
             <a:xfrm>
-              <a:off x="4834714" y="3061644"/>
+              <a:off x="4832428" y="3061644"/>
               <a:ext cx="62384" cy="62384"/>
             </a:xfrm>
             <a:prstGeom prst="ellipse">
@@ -21590,7 +21590,7 @@
           </p:nvSpPr>
           <p:spPr>
             <a:xfrm>
-              <a:off x="4695312" y="2463417"/>
+              <a:off x="4700701" y="2463417"/>
               <a:ext cx="62384" cy="62384"/>
             </a:xfrm>
             <a:prstGeom prst="ellipse">
@@ -21616,7 +21616,7 @@
           </p:nvSpPr>
           <p:spPr>
             <a:xfrm>
-              <a:off x="4847773" y="2473867"/>
+              <a:off x="4856234" y="2473867"/>
               <a:ext cx="62384" cy="62384"/>
             </a:xfrm>
             <a:prstGeom prst="ellipse">
@@ -21642,7 +21642,7 @@
           </p:nvSpPr>
           <p:spPr>
             <a:xfrm>
-              <a:off x="4750803" y="2498297"/>
+              <a:off x="4735985" y="2498297"/>
               <a:ext cx="62384" cy="62384"/>
             </a:xfrm>
             <a:prstGeom prst="ellipse">
@@ -21668,7 +21668,7 @@
           </p:nvSpPr>
           <p:spPr>
             <a:xfrm>
-              <a:off x="4880763" y="2493303"/>
+              <a:off x="4871751" y="2493303"/>
               <a:ext cx="62384" cy="62384"/>
             </a:xfrm>
             <a:prstGeom prst="ellipse">
@@ -21694,7 +21694,7 @@
           </p:nvSpPr>
           <p:spPr>
             <a:xfrm>
-              <a:off x="4733886" y="2476284"/>
+              <a:off x="4744426" y="2476284"/>
               <a:ext cx="62384" cy="62384"/>
             </a:xfrm>
             <a:prstGeom prst="ellipse">
@@ -21720,7 +21720,7 @@
           </p:nvSpPr>
           <p:spPr>
             <a:xfrm>
-              <a:off x="4835052" y="2723409"/>
+              <a:off x="4857517" y="2723409"/>
               <a:ext cx="62384" cy="62384"/>
             </a:xfrm>
             <a:prstGeom prst="ellipse">
@@ -21746,7 +21746,7 @@
           </p:nvSpPr>
           <p:spPr>
             <a:xfrm>
-              <a:off x="4727384" y="2508982"/>
+              <a:off x="4724995" y="2508982"/>
               <a:ext cx="62384" cy="62384"/>
             </a:xfrm>
             <a:prstGeom prst="ellipse">
@@ -21772,7 +21772,7 @@
           </p:nvSpPr>
           <p:spPr>
             <a:xfrm>
-              <a:off x="4865167" y="2399254"/>
+              <a:off x="4897042" y="2399254"/>
               <a:ext cx="62384" cy="62384"/>
             </a:xfrm>
             <a:prstGeom prst="ellipse">
@@ -21798,7 +21798,7 @@
           </p:nvSpPr>
           <p:spPr>
             <a:xfrm>
-              <a:off x="4716245" y="2852992"/>
+              <a:off x="4696978" y="2852992"/>
               <a:ext cx="62384" cy="62384"/>
             </a:xfrm>
             <a:prstGeom prst="ellipse">
@@ -21824,7 +21824,7 @@
           </p:nvSpPr>
           <p:spPr>
             <a:xfrm>
-              <a:off x="4891093" y="2507167"/>
+              <a:off x="4880222" y="2507167"/>
               <a:ext cx="62384" cy="62384"/>
             </a:xfrm>
             <a:prstGeom prst="ellipse">
@@ -21850,7 +21850,7 @@
           </p:nvSpPr>
           <p:spPr>
             <a:xfrm>
-              <a:off x="4680641" y="2776371"/>
+              <a:off x="4687878" y="2776371"/>
               <a:ext cx="62384" cy="62384"/>
             </a:xfrm>
             <a:prstGeom prst="ellipse">
@@ -21876,7 +21876,7 @@
           </p:nvSpPr>
           <p:spPr>
             <a:xfrm>
-              <a:off x="4860208" y="2186750"/>
+              <a:off x="4887423" y="2186750"/>
               <a:ext cx="62384" cy="62384"/>
             </a:xfrm>
             <a:prstGeom prst="ellipse">
@@ -21902,7 +21902,7 @@
           </p:nvSpPr>
           <p:spPr>
             <a:xfrm>
-              <a:off x="4697432" y="2961704"/>
+              <a:off x="4747668" y="2961704"/>
               <a:ext cx="62384" cy="62384"/>
             </a:xfrm>
             <a:prstGeom prst="ellipse">
@@ -21928,7 +21928,7 @@
           </p:nvSpPr>
           <p:spPr>
             <a:xfrm>
-              <a:off x="4849379" y="3096375"/>
+              <a:off x="4896075" y="3096375"/>
               <a:ext cx="62384" cy="62384"/>
             </a:xfrm>
             <a:prstGeom prst="ellipse">
@@ -21954,7 +21954,7 @@
           </p:nvSpPr>
           <p:spPr>
             <a:xfrm>
-              <a:off x="4689839" y="2757983"/>
+              <a:off x="4710074" y="2757983"/>
               <a:ext cx="62384" cy="62384"/>
             </a:xfrm>
             <a:prstGeom prst="ellipse">
@@ -21980,7 +21980,7 @@
           </p:nvSpPr>
           <p:spPr>
             <a:xfrm>
-              <a:off x="4869872" y="2657120"/>
+              <a:off x="4861543" y="2657120"/>
               <a:ext cx="62384" cy="62384"/>
             </a:xfrm>
             <a:prstGeom prst="ellipse">
@@ -22006,7 +22006,7 @@
           </p:nvSpPr>
           <p:spPr>
             <a:xfrm>
-              <a:off x="4702481" y="2641463"/>
+              <a:off x="4731705" y="2641463"/>
               <a:ext cx="62384" cy="62384"/>
             </a:xfrm>
             <a:prstGeom prst="ellipse">
@@ -22032,7 +22032,7 @@
           </p:nvSpPr>
           <p:spPr>
             <a:xfrm>
-              <a:off x="4849137" y="2485852"/>
+              <a:off x="4857873" y="2485852"/>
               <a:ext cx="62384" cy="62384"/>
             </a:xfrm>
             <a:prstGeom prst="ellipse">
@@ -22058,7 +22058,7 @@
           </p:nvSpPr>
           <p:spPr>
             <a:xfrm>
-              <a:off x="4747699" y="2538340"/>
+              <a:off x="4730676" y="2538340"/>
               <a:ext cx="62384" cy="62384"/>
             </a:xfrm>
             <a:prstGeom prst="ellipse">
@@ -22084,7 +22084,7 @@
           </p:nvSpPr>
           <p:spPr>
             <a:xfrm>
-              <a:off x="4877701" y="2442134"/>
+              <a:off x="4884437" y="2442134"/>
               <a:ext cx="62384" cy="62384"/>
             </a:xfrm>
             <a:prstGeom prst="ellipse">
@@ -22110,7 +22110,7 @@
           </p:nvSpPr>
           <p:spPr>
             <a:xfrm>
-              <a:off x="4687010" y="2611910"/>
+              <a:off x="4701869" y="2611910"/>
               <a:ext cx="62384" cy="62384"/>
             </a:xfrm>
             <a:prstGeom prst="ellipse">
@@ -22136,7 +22136,7 @@
           </p:nvSpPr>
           <p:spPr>
             <a:xfrm>
-              <a:off x="4892066" y="2811538"/>
+              <a:off x="4894249" y="2811538"/>
               <a:ext cx="62384" cy="62384"/>
             </a:xfrm>
             <a:prstGeom prst="ellipse">
@@ -22162,7 +22162,7 @@
           </p:nvSpPr>
           <p:spPr>
             <a:xfrm>
-              <a:off x="4743552" y="2492503"/>
+              <a:off x="4735741" y="2492503"/>
               <a:ext cx="62384" cy="62384"/>
             </a:xfrm>
             <a:prstGeom prst="ellipse">
@@ -22188,7 +22188,7 @@
           </p:nvSpPr>
           <p:spPr>
             <a:xfrm>
-              <a:off x="4894117" y="2345244"/>
+              <a:off x="4892997" y="2345244"/>
               <a:ext cx="62384" cy="62384"/>
             </a:xfrm>
             <a:prstGeom prst="ellipse">
@@ -22214,7 +22214,7 @@
           </p:nvSpPr>
           <p:spPr>
             <a:xfrm>
-              <a:off x="4730044" y="2713547"/>
+              <a:off x="4680587" y="2713547"/>
               <a:ext cx="62384" cy="62384"/>
             </a:xfrm>
             <a:prstGeom prst="ellipse">
@@ -22240,7 +22240,7 @@
           </p:nvSpPr>
           <p:spPr>
             <a:xfrm>
-              <a:off x="4869021" y="2496595"/>
+              <a:off x="4856612" y="2496595"/>
               <a:ext cx="62384" cy="62384"/>
             </a:xfrm>
             <a:prstGeom prst="ellipse">
@@ -22266,7 +22266,7 @@
           </p:nvSpPr>
           <p:spPr>
             <a:xfrm>
-              <a:off x="4694468" y="2751467"/>
+              <a:off x="4731950" y="2751467"/>
               <a:ext cx="62384" cy="62384"/>
             </a:xfrm>
             <a:prstGeom prst="ellipse">
@@ -22292,7 +22292,7 @@
           </p:nvSpPr>
           <p:spPr>
             <a:xfrm>
-              <a:off x="4865289" y="2879203"/>
+              <a:off x="4848605" y="2879203"/>
               <a:ext cx="62384" cy="62384"/>
             </a:xfrm>
             <a:prstGeom prst="ellipse">
@@ -22318,7 +22318,7 @@
           </p:nvSpPr>
           <p:spPr>
             <a:xfrm>
-              <a:off x="4680819" y="2750510"/>
+              <a:off x="4746465" y="2750510"/>
               <a:ext cx="62384" cy="62384"/>
             </a:xfrm>
             <a:prstGeom prst="ellipse">
@@ -22344,7 +22344,7 @@
           </p:nvSpPr>
           <p:spPr>
             <a:xfrm>
-              <a:off x="4899775" y="2443416"/>
+              <a:off x="4841933" y="2443416"/>
               <a:ext cx="62384" cy="62384"/>
             </a:xfrm>
             <a:prstGeom prst="ellipse">
@@ -22370,7 +22370,7 @@
           </p:nvSpPr>
           <p:spPr>
             <a:xfrm>
-              <a:off x="4695366" y="2646272"/>
+              <a:off x="4702188" y="2646272"/>
               <a:ext cx="62384" cy="62384"/>
             </a:xfrm>
             <a:prstGeom prst="ellipse">
@@ -22396,7 +22396,7 @@
           </p:nvSpPr>
           <p:spPr>
             <a:xfrm>
-              <a:off x="4834927" y="2741476"/>
+              <a:off x="4891527" y="2741476"/>
               <a:ext cx="62384" cy="62384"/>
             </a:xfrm>
             <a:prstGeom prst="ellipse">
@@ -22422,7 +22422,7 @@
           </p:nvSpPr>
           <p:spPr>
             <a:xfrm>
-              <a:off x="4693154" y="2318239"/>
+              <a:off x="4746773" y="2318239"/>
               <a:ext cx="62384" cy="62384"/>
             </a:xfrm>
             <a:prstGeom prst="ellipse">
@@ -22448,7 +22448,7 @@
           </p:nvSpPr>
           <p:spPr>
             <a:xfrm>
-              <a:off x="4836747" y="2419113"/>
+              <a:off x="4829775" y="2419113"/>
               <a:ext cx="62384" cy="62384"/>
             </a:xfrm>
             <a:prstGeom prst="ellipse">
@@ -22474,7 +22474,7 @@
           </p:nvSpPr>
           <p:spPr>
             <a:xfrm>
-              <a:off x="4735235" y="2469773"/>
+              <a:off x="4735833" y="2469773"/>
               <a:ext cx="62384" cy="62384"/>
             </a:xfrm>
             <a:prstGeom prst="ellipse">
@@ -22500,7 +22500,7 @@
           </p:nvSpPr>
           <p:spPr>
             <a:xfrm>
-              <a:off x="4881285" y="2608267"/>
+              <a:off x="4869429" y="2608267"/>
               <a:ext cx="62384" cy="62384"/>
             </a:xfrm>
             <a:prstGeom prst="ellipse">
@@ -22526,7 +22526,7 @@
           </p:nvSpPr>
           <p:spPr>
             <a:xfrm>
-              <a:off x="4742318" y="2625658"/>
+              <a:off x="4752432" y="2625658"/>
               <a:ext cx="62384" cy="62384"/>
             </a:xfrm>
             <a:prstGeom prst="ellipse">
@@ -22552,7 +22552,7 @@
           </p:nvSpPr>
           <p:spPr>
             <a:xfrm>
-              <a:off x="4853120" y="2564079"/>
+              <a:off x="4853933" y="2564079"/>
               <a:ext cx="62384" cy="62384"/>
             </a:xfrm>
             <a:prstGeom prst="ellipse">
@@ -22578,7 +22578,7 @@
           </p:nvSpPr>
           <p:spPr>
             <a:xfrm>
-              <a:off x="4693513" y="2609136"/>
+              <a:off x="4716510" y="2609136"/>
               <a:ext cx="62384" cy="62384"/>
             </a:xfrm>
             <a:prstGeom prst="ellipse">
@@ -22604,7 +22604,7 @@
           </p:nvSpPr>
           <p:spPr>
             <a:xfrm>
-              <a:off x="4852181" y="2653088"/>
+              <a:off x="4896885" y="2653088"/>
               <a:ext cx="62384" cy="62384"/>
             </a:xfrm>
             <a:prstGeom prst="ellipse">
@@ -22630,7 +22630,7 @@
           </p:nvSpPr>
           <p:spPr>
             <a:xfrm>
-              <a:off x="4701044" y="2024741"/>
+              <a:off x="4746203" y="2024741"/>
               <a:ext cx="62384" cy="62384"/>
             </a:xfrm>
             <a:prstGeom prst="ellipse">
@@ -22656,7 +22656,7 @@
           </p:nvSpPr>
           <p:spPr>
             <a:xfrm>
-              <a:off x="4865864" y="2193092"/>
+              <a:off x="4847213" y="2193092"/>
               <a:ext cx="62384" cy="62384"/>
             </a:xfrm>
             <a:prstGeom prst="ellipse">
@@ -22682,7 +22682,7 @@
           </p:nvSpPr>
           <p:spPr>
             <a:xfrm>
-              <a:off x="4722108" y="2100594"/>
+              <a:off x="4691868" y="2100594"/>
               <a:ext cx="62384" cy="62384"/>
             </a:xfrm>
             <a:prstGeom prst="ellipse">
@@ -22708,7 +22708,7 @@
           </p:nvSpPr>
           <p:spPr>
             <a:xfrm>
-              <a:off x="4853181" y="2405837"/>
+              <a:off x="4848936" y="2405837"/>
               <a:ext cx="62384" cy="62384"/>
             </a:xfrm>
             <a:prstGeom prst="ellipse">
@@ -22734,7 +22734,7 @@
           </p:nvSpPr>
           <p:spPr>
             <a:xfrm>
-              <a:off x="4741329" y="1788516"/>
+              <a:off x="4744899" y="1788516"/>
               <a:ext cx="62384" cy="62384"/>
             </a:xfrm>
             <a:prstGeom prst="ellipse">
@@ -22760,7 +22760,7 @@
           </p:nvSpPr>
           <p:spPr>
             <a:xfrm>
-              <a:off x="4854532" y="1913279"/>
+              <a:off x="4887059" y="1913279"/>
               <a:ext cx="62384" cy="62384"/>
             </a:xfrm>
             <a:prstGeom prst="ellipse">
@@ -22786,7 +22786,7 @@
           </p:nvSpPr>
           <p:spPr>
             <a:xfrm>
-              <a:off x="4724124" y="2388837"/>
+              <a:off x="4730561" y="2388837"/>
               <a:ext cx="62384" cy="62384"/>
             </a:xfrm>
             <a:prstGeom prst="ellipse">
@@ -22812,7 +22812,7 @@
           </p:nvSpPr>
           <p:spPr>
             <a:xfrm>
-              <a:off x="4845903" y="2434493"/>
+              <a:off x="4861819" y="2434493"/>
               <a:ext cx="62384" cy="62384"/>
             </a:xfrm>
             <a:prstGeom prst="ellipse">
@@ -22838,7 +22838,7 @@
           </p:nvSpPr>
           <p:spPr>
             <a:xfrm>
-              <a:off x="4708193" y="2195308"/>
+              <a:off x="4748573" y="2195308"/>
               <a:ext cx="62384" cy="62384"/>
             </a:xfrm>
             <a:prstGeom prst="ellipse">
@@ -22864,7 +22864,7 @@
           </p:nvSpPr>
           <p:spPr>
             <a:xfrm>
-              <a:off x="4879450" y="2268798"/>
+              <a:off x="4865798" y="2268798"/>
               <a:ext cx="62384" cy="62384"/>
             </a:xfrm>
             <a:prstGeom prst="ellipse">
@@ -22890,7 +22890,7 @@
           </p:nvSpPr>
           <p:spPr>
             <a:xfrm>
-              <a:off x="4750918" y="2432329"/>
+              <a:off x="4705997" y="2432329"/>
               <a:ext cx="62384" cy="62384"/>
             </a:xfrm>
             <a:prstGeom prst="ellipse">
@@ -22916,7 +22916,7 @@
           </p:nvSpPr>
           <p:spPr>
             <a:xfrm>
-              <a:off x="4832320" y="2612735"/>
+              <a:off x="4865056" y="2612735"/>
               <a:ext cx="62384" cy="62384"/>
             </a:xfrm>
             <a:prstGeom prst="ellipse">
@@ -22942,7 +22942,7 @@
           </p:nvSpPr>
           <p:spPr>
             <a:xfrm>
-              <a:off x="4735511" y="2918563"/>
+              <a:off x="4687955" y="2918563"/>
               <a:ext cx="62384" cy="62384"/>
             </a:xfrm>
             <a:prstGeom prst="ellipse">
@@ -22968,7 +22968,7 @@
           </p:nvSpPr>
           <p:spPr>
             <a:xfrm>
-              <a:off x="4900431" y="2955371"/>
+              <a:off x="4883128" y="2955371"/>
               <a:ext cx="62384" cy="62384"/>
             </a:xfrm>
             <a:prstGeom prst="ellipse">
@@ -22994,7 +22994,7 @@
           </p:nvSpPr>
           <p:spPr>
             <a:xfrm>
-              <a:off x="4748771" y="2611752"/>
+              <a:off x="4712238" y="2611752"/>
               <a:ext cx="62384" cy="62384"/>
             </a:xfrm>
             <a:prstGeom prst="ellipse">
@@ -23020,7 +23020,7 @@
           </p:nvSpPr>
           <p:spPr>
             <a:xfrm>
-              <a:off x="4839760" y="2522902"/>
+              <a:off x="4902635" y="2522902"/>
               <a:ext cx="62384" cy="62384"/>
             </a:xfrm>
             <a:prstGeom prst="ellipse">
@@ -23046,7 +23046,7 @@
           </p:nvSpPr>
           <p:spPr>
             <a:xfrm>
-              <a:off x="4747366" y="2041474"/>
+              <a:off x="4744015" y="2041474"/>
               <a:ext cx="62384" cy="62384"/>
             </a:xfrm>
             <a:prstGeom prst="ellipse">
@@ -23072,7 +23072,7 @@
           </p:nvSpPr>
           <p:spPr>
             <a:xfrm>
-              <a:off x="4867956" y="2291757"/>
+              <a:off x="4835277" y="2291757"/>
               <a:ext cx="62384" cy="62384"/>
             </a:xfrm>
             <a:prstGeom prst="ellipse">
@@ -23098,7 +23098,7 @@
           </p:nvSpPr>
           <p:spPr>
             <a:xfrm>
-              <a:off x="4687238" y="2529210"/>
+              <a:off x="4705775" y="2529210"/>
               <a:ext cx="62384" cy="62384"/>
             </a:xfrm>
             <a:prstGeom prst="ellipse">
@@ -23124,7 +23124,7 @@
           </p:nvSpPr>
           <p:spPr>
             <a:xfrm>
-              <a:off x="4864491" y="2572397"/>
+              <a:off x="4851772" y="2572397"/>
               <a:ext cx="62384" cy="62384"/>
             </a:xfrm>
             <a:prstGeom prst="ellipse">
@@ -23150,7 +23150,7 @@
           </p:nvSpPr>
           <p:spPr>
             <a:xfrm>
-              <a:off x="4729405" y="2392352"/>
+              <a:off x="4751267" y="2392352"/>
               <a:ext cx="62384" cy="62384"/>
             </a:xfrm>
             <a:prstGeom prst="ellipse">
@@ -23176,7 +23176,7 @@
           </p:nvSpPr>
           <p:spPr>
             <a:xfrm>
-              <a:off x="4900287" y="2403941"/>
+              <a:off x="4830626" y="2403941"/>
               <a:ext cx="62384" cy="62384"/>
             </a:xfrm>
             <a:prstGeom prst="ellipse">
@@ -23202,7 +23202,7 @@
           </p:nvSpPr>
           <p:spPr>
             <a:xfrm>
-              <a:off x="4717933" y="2158498"/>
+              <a:off x="4700924" y="2158498"/>
               <a:ext cx="62384" cy="62384"/>
             </a:xfrm>
             <a:prstGeom prst="ellipse">
@@ -23228,7 +23228,7 @@
           </p:nvSpPr>
           <p:spPr>
             <a:xfrm>
-              <a:off x="4875492" y="2190759"/>
+              <a:off x="4843760" y="2190759"/>
               <a:ext cx="62384" cy="62384"/>
             </a:xfrm>
             <a:prstGeom prst="ellipse">
@@ -23254,7 +23254,7 @@
           </p:nvSpPr>
           <p:spPr>
             <a:xfrm>
-              <a:off x="4685962" y="2254355"/>
+              <a:off x="4742416" y="2254355"/>
               <a:ext cx="62384" cy="62384"/>
             </a:xfrm>
             <a:prstGeom prst="ellipse">
@@ -23280,7 +23280,7 @@
           </p:nvSpPr>
           <p:spPr>
             <a:xfrm>
-              <a:off x="4844234" y="2567034"/>
+              <a:off x="4894863" y="2567034"/>
               <a:ext cx="62384" cy="62384"/>
             </a:xfrm>
             <a:prstGeom prst="ellipse">
@@ -23306,7 +23306,7 @@
           </p:nvSpPr>
           <p:spPr>
             <a:xfrm>
-              <a:off x="4702519" y="2484607"/>
+              <a:off x="4681043" y="2484607"/>
               <a:ext cx="62384" cy="62384"/>
             </a:xfrm>
             <a:prstGeom prst="ellipse">
@@ -23332,7 +23332,7 @@
           </p:nvSpPr>
           <p:spPr>
             <a:xfrm>
-              <a:off x="4845460" y="2735806"/>
+              <a:off x="4839531" y="2735806"/>
               <a:ext cx="62384" cy="62384"/>
             </a:xfrm>
             <a:prstGeom prst="ellipse">
@@ -23358,7 +23358,7 @@
           </p:nvSpPr>
           <p:spPr>
             <a:xfrm>
-              <a:off x="4729479" y="2413766"/>
+              <a:off x="4741893" y="2413766"/>
               <a:ext cx="62384" cy="62384"/>
             </a:xfrm>
             <a:prstGeom prst="ellipse">
@@ -23384,7 +23384,7 @@
           </p:nvSpPr>
           <p:spPr>
             <a:xfrm>
-              <a:off x="4857695" y="2134468"/>
+              <a:off x="4862636" y="2134468"/>
               <a:ext cx="62384" cy="62384"/>
             </a:xfrm>
             <a:prstGeom prst="ellipse">
@@ -23410,7 +23410,7 @@
           </p:nvSpPr>
           <p:spPr>
             <a:xfrm>
-              <a:off x="4684101" y="2660332"/>
+              <a:off x="4739962" y="2660332"/>
               <a:ext cx="62384" cy="62384"/>
             </a:xfrm>
             <a:prstGeom prst="ellipse">
@@ -23436,7 +23436,7 @@
           </p:nvSpPr>
           <p:spPr>
             <a:xfrm>
-              <a:off x="4877993" y="2309491"/>
+              <a:off x="4902110" y="2309491"/>
               <a:ext cx="62384" cy="62384"/>
             </a:xfrm>
             <a:prstGeom prst="ellipse">
@@ -23462,7 +23462,7 @@
           </p:nvSpPr>
           <p:spPr>
             <a:xfrm>
-              <a:off x="4737435" y="3002517"/>
+              <a:off x="4738872" y="3002517"/>
               <a:ext cx="62384" cy="62384"/>
             </a:xfrm>
             <a:prstGeom prst="ellipse">
@@ -23488,7 +23488,7 @@
           </p:nvSpPr>
           <p:spPr>
             <a:xfrm>
-              <a:off x="4857588" y="2471364"/>
+              <a:off x="4879667" y="2471364"/>
               <a:ext cx="62384" cy="62384"/>
             </a:xfrm>
             <a:prstGeom prst="ellipse">
@@ -23514,7 +23514,7 @@
           </p:nvSpPr>
           <p:spPr>
             <a:xfrm>
-              <a:off x="4707057" y="2279076"/>
+              <a:off x="4702918" y="2279076"/>
               <a:ext cx="62384" cy="62384"/>
             </a:xfrm>
             <a:prstGeom prst="ellipse">
@@ -23540,7 +23540,7 @@
           </p:nvSpPr>
           <p:spPr>
             <a:xfrm>
-              <a:off x="4833184" y="2663458"/>
+              <a:off x="4883764" y="2663458"/>
               <a:ext cx="62384" cy="62384"/>
             </a:xfrm>
             <a:prstGeom prst="ellipse">
@@ -23566,7 +23566,7 @@
           </p:nvSpPr>
           <p:spPr>
             <a:xfrm>
-              <a:off x="4734096" y="2408825"/>
+              <a:off x="4751680" y="2408825"/>
               <a:ext cx="62384" cy="62384"/>
             </a:xfrm>
             <a:prstGeom prst="ellipse">
@@ -23592,7 +23592,7 @@
           </p:nvSpPr>
           <p:spPr>
             <a:xfrm>
-              <a:off x="4874344" y="2529775"/>
+              <a:off x="4852000" y="2529775"/>
               <a:ext cx="62384" cy="62384"/>
             </a:xfrm>
             <a:prstGeom prst="ellipse">
@@ -23618,7 +23618,7 @@
           </p:nvSpPr>
           <p:spPr>
             <a:xfrm>
-              <a:off x="4691259" y="2290059"/>
+              <a:off x="4680443" y="2290059"/>
               <a:ext cx="62384" cy="62384"/>
             </a:xfrm>
             <a:prstGeom prst="ellipse">
@@ -23644,7 +23644,7 @@
           </p:nvSpPr>
           <p:spPr>
             <a:xfrm>
-              <a:off x="4842429" y="2407038"/>
+              <a:off x="4865057" y="2407038"/>
               <a:ext cx="62384" cy="62384"/>
             </a:xfrm>
             <a:prstGeom prst="ellipse">
@@ -23670,7 +23670,7 @@
           </p:nvSpPr>
           <p:spPr>
             <a:xfrm>
-              <a:off x="4695961" y="2713377"/>
+              <a:off x="4704535" y="2713377"/>
               <a:ext cx="62384" cy="62384"/>
             </a:xfrm>
             <a:prstGeom prst="ellipse">
@@ -23696,7 +23696,7 @@
           </p:nvSpPr>
           <p:spPr>
             <a:xfrm>
-              <a:off x="4881229" y="2650356"/>
+              <a:off x="4875355" y="2650356"/>
               <a:ext cx="62384" cy="62384"/>
             </a:xfrm>
             <a:prstGeom prst="ellipse">
@@ -23722,7 +23722,7 @@
           </p:nvSpPr>
           <p:spPr>
             <a:xfrm>
-              <a:off x="4700401" y="2673432"/>
+              <a:off x="4732703" y="2673432"/>
               <a:ext cx="62384" cy="62384"/>
             </a:xfrm>
             <a:prstGeom prst="ellipse">
@@ -23748,7 +23748,7 @@
           </p:nvSpPr>
           <p:spPr>
             <a:xfrm>
-              <a:off x="4842634" y="2660040"/>
+              <a:off x="4889357" y="2660040"/>
               <a:ext cx="62384" cy="62384"/>
             </a:xfrm>
             <a:prstGeom prst="ellipse">
@@ -23774,7 +23774,7 @@
           </p:nvSpPr>
           <p:spPr>
             <a:xfrm>
-              <a:off x="4728208" y="2538209"/>
+              <a:off x="4684720" y="2538209"/>
               <a:ext cx="62384" cy="62384"/>
             </a:xfrm>
             <a:prstGeom prst="ellipse">
@@ -23800,7 +23800,7 @@
           </p:nvSpPr>
           <p:spPr>
             <a:xfrm>
-              <a:off x="4897336" y="2673037"/>
+              <a:off x="4861849" y="2673037"/>
               <a:ext cx="62384" cy="62384"/>
             </a:xfrm>
             <a:prstGeom prst="ellipse">
@@ -23826,7 +23826,7 @@
           </p:nvSpPr>
           <p:spPr>
             <a:xfrm>
-              <a:off x="4726522" y="2616327"/>
+              <a:off x="4689531" y="2616327"/>
               <a:ext cx="62384" cy="62384"/>
             </a:xfrm>
             <a:prstGeom prst="ellipse">
@@ -23852,7 +23852,7 @@
           </p:nvSpPr>
           <p:spPr>
             <a:xfrm>
-              <a:off x="4872144" y="2767163"/>
+              <a:off x="4852113" y="2767163"/>
               <a:ext cx="62384" cy="62384"/>
             </a:xfrm>
             <a:prstGeom prst="ellipse">
@@ -23878,7 +23878,7 @@
           </p:nvSpPr>
           <p:spPr>
             <a:xfrm>
-              <a:off x="4689650" y="2600897"/>
+              <a:off x="4689851" y="2600897"/>
               <a:ext cx="62384" cy="62384"/>
             </a:xfrm>
             <a:prstGeom prst="ellipse">
@@ -23904,7 +23904,7 @@
           </p:nvSpPr>
           <p:spPr>
             <a:xfrm>
-              <a:off x="4888949" y="2398371"/>
+              <a:off x="4890042" y="2398371"/>
               <a:ext cx="62384" cy="62384"/>
             </a:xfrm>
             <a:prstGeom prst="ellipse">
@@ -23930,7 +23930,7 @@
           </p:nvSpPr>
           <p:spPr>
             <a:xfrm>
-              <a:off x="4683715" y="2158338"/>
+              <a:off x="4702453" y="2158338"/>
               <a:ext cx="62384" cy="62384"/>
             </a:xfrm>
             <a:prstGeom prst="ellipse">
@@ -23956,7 +23956,7 @@
           </p:nvSpPr>
           <p:spPr>
             <a:xfrm>
-              <a:off x="4898571" y="2530702"/>
+              <a:off x="4854953" y="2530702"/>
               <a:ext cx="62384" cy="62384"/>
             </a:xfrm>
             <a:prstGeom prst="ellipse">
@@ -23982,7 +23982,7 @@
           </p:nvSpPr>
           <p:spPr>
             <a:xfrm>
-              <a:off x="4747168" y="2616873"/>
+              <a:off x="4750327" y="2616873"/>
               <a:ext cx="62384" cy="62384"/>
             </a:xfrm>
             <a:prstGeom prst="ellipse">
@@ -24008,7 +24008,7 @@
           </p:nvSpPr>
           <p:spPr>
             <a:xfrm>
-              <a:off x="4863317" y="2903100"/>
+              <a:off x="4864980" y="2903100"/>
               <a:ext cx="62384" cy="62384"/>
             </a:xfrm>
             <a:prstGeom prst="ellipse">
@@ -24034,7 +24034,7 @@
           </p:nvSpPr>
           <p:spPr>
             <a:xfrm>
-              <a:off x="4684433" y="2524408"/>
+              <a:off x="4731265" y="2524408"/>
               <a:ext cx="62384" cy="62384"/>
             </a:xfrm>
             <a:prstGeom prst="ellipse">
@@ -24060,7 +24060,7 @@
           </p:nvSpPr>
           <p:spPr>
             <a:xfrm>
-              <a:off x="4868204" y="2376757"/>
+              <a:off x="4895769" y="2376757"/>
               <a:ext cx="62384" cy="62384"/>
             </a:xfrm>
             <a:prstGeom prst="ellipse">
@@ -24086,7 +24086,7 @@
           </p:nvSpPr>
           <p:spPr>
             <a:xfrm>
-              <a:off x="4727053" y="2478082"/>
+              <a:off x="4752767" y="2478082"/>
               <a:ext cx="62384" cy="62384"/>
             </a:xfrm>
             <a:prstGeom prst="ellipse">
@@ -24112,7 +24112,7 @@
           </p:nvSpPr>
           <p:spPr>
             <a:xfrm>
-              <a:off x="4901069" y="2919492"/>
+              <a:off x="4845339" y="2919492"/>
               <a:ext cx="62384" cy="62384"/>
             </a:xfrm>
             <a:prstGeom prst="ellipse">
@@ -24138,7 +24138,7 @@
           </p:nvSpPr>
           <p:spPr>
             <a:xfrm>
-              <a:off x="4691923" y="2687976"/>
+              <a:off x="4706850" y="2687976"/>
               <a:ext cx="62384" cy="62384"/>
             </a:xfrm>
             <a:prstGeom prst="ellipse">
@@ -24164,7 +24164,7 @@
           </p:nvSpPr>
           <p:spPr>
             <a:xfrm>
-              <a:off x="4828926" y="2328475"/>
+              <a:off x="4893247" y="2328475"/>
               <a:ext cx="62384" cy="62384"/>
             </a:xfrm>
             <a:prstGeom prst="ellipse">
@@ -24190,7 +24190,7 @@
           </p:nvSpPr>
           <p:spPr>
             <a:xfrm>
-              <a:off x="4715159" y="2165302"/>
+              <a:off x="4750349" y="2165302"/>
               <a:ext cx="62384" cy="62384"/>
             </a:xfrm>
             <a:prstGeom prst="ellipse">
@@ -24216,7 +24216,7 @@
           </p:nvSpPr>
           <p:spPr>
             <a:xfrm>
-              <a:off x="4847411" y="2343548"/>
+              <a:off x="4841914" y="2343548"/>
               <a:ext cx="62384" cy="62384"/>
             </a:xfrm>
             <a:prstGeom prst="ellipse">
@@ -24242,7 +24242,7 @@
           </p:nvSpPr>
           <p:spPr>
             <a:xfrm>
-              <a:off x="4723840" y="2646256"/>
+              <a:off x="4693631" y="2646256"/>
               <a:ext cx="62384" cy="62384"/>
             </a:xfrm>
             <a:prstGeom prst="ellipse">
@@ -24268,7 +24268,7 @@
           </p:nvSpPr>
           <p:spPr>
             <a:xfrm>
-              <a:off x="4857421" y="2690649"/>
+              <a:off x="4829260" y="2690649"/>
               <a:ext cx="62384" cy="62384"/>
             </a:xfrm>
             <a:prstGeom prst="ellipse">
@@ -24294,7 +24294,7 @@
           </p:nvSpPr>
           <p:spPr>
             <a:xfrm>
-              <a:off x="4704572" y="2493871"/>
+              <a:off x="4725318" y="2493871"/>
               <a:ext cx="62384" cy="62384"/>
             </a:xfrm>
             <a:prstGeom prst="ellipse">
@@ -24320,7 +24320,7 @@
           </p:nvSpPr>
           <p:spPr>
             <a:xfrm>
-              <a:off x="4831153" y="2704823"/>
+              <a:off x="4886623" y="2704823"/>
               <a:ext cx="62384" cy="62384"/>
             </a:xfrm>
             <a:prstGeom prst="ellipse">
@@ -24346,7 +24346,7 @@
           </p:nvSpPr>
           <p:spPr>
             <a:xfrm>
-              <a:off x="4727255" y="2653109"/>
+              <a:off x="4697694" y="2653109"/>
               <a:ext cx="62384" cy="62384"/>
             </a:xfrm>
             <a:prstGeom prst="ellipse">
@@ -24372,7 +24372,7 @@
           </p:nvSpPr>
           <p:spPr>
             <a:xfrm>
-              <a:off x="4886355" y="2399201"/>
+              <a:off x="4854851" y="2399201"/>
               <a:ext cx="62384" cy="62384"/>
             </a:xfrm>
             <a:prstGeom prst="ellipse">
@@ -24398,7 +24398,7 @@
           </p:nvSpPr>
           <p:spPr>
             <a:xfrm>
-              <a:off x="4727324" y="2506946"/>
+              <a:off x="4680448" y="2506946"/>
               <a:ext cx="62384" cy="62384"/>
             </a:xfrm>
             <a:prstGeom prst="ellipse">
@@ -24424,7 +24424,7 @@
           </p:nvSpPr>
           <p:spPr>
             <a:xfrm>
-              <a:off x="4883376" y="2343931"/>
+              <a:off x="4835971" y="2343931"/>
               <a:ext cx="62384" cy="62384"/>
             </a:xfrm>
             <a:prstGeom prst="ellipse">
@@ -24450,7 +24450,7 @@
           </p:nvSpPr>
           <p:spPr>
             <a:xfrm>
-              <a:off x="4715241" y="2653586"/>
+              <a:off x="4735248" y="2653586"/>
               <a:ext cx="62384" cy="62384"/>
             </a:xfrm>
             <a:prstGeom prst="ellipse">
@@ -24476,7 +24476,7 @@
           </p:nvSpPr>
           <p:spPr>
             <a:xfrm>
-              <a:off x="4829129" y="2487308"/>
+              <a:off x="4857810" y="2487308"/>
               <a:ext cx="62384" cy="62384"/>
             </a:xfrm>
             <a:prstGeom prst="ellipse">
@@ -24502,7 +24502,7 @@
           </p:nvSpPr>
           <p:spPr>
             <a:xfrm>
-              <a:off x="4735091" y="2249769"/>
+              <a:off x="4727379" y="2249769"/>
               <a:ext cx="62384" cy="62384"/>
             </a:xfrm>
             <a:prstGeom prst="ellipse">
@@ -24528,7 +24528,7 @@
           </p:nvSpPr>
           <p:spPr>
             <a:xfrm>
-              <a:off x="4893124" y="2326204"/>
+              <a:off x="4894808" y="2326204"/>
               <a:ext cx="62384" cy="62384"/>
             </a:xfrm>
             <a:prstGeom prst="ellipse">
@@ -24554,7 +24554,7 @@
           </p:nvSpPr>
           <p:spPr>
             <a:xfrm>
-              <a:off x="4747750" y="2424729"/>
+              <a:off x="4717130" y="2424729"/>
               <a:ext cx="62384" cy="62384"/>
             </a:xfrm>
             <a:prstGeom prst="ellipse">
@@ -24580,7 +24580,7 @@
           </p:nvSpPr>
           <p:spPr>
             <a:xfrm>
-              <a:off x="4839088" y="2748542"/>
+              <a:off x="4835073" y="2748542"/>
               <a:ext cx="62384" cy="62384"/>
             </a:xfrm>
             <a:prstGeom prst="ellipse">
@@ -24606,7 +24606,7 @@
           </p:nvSpPr>
           <p:spPr>
             <a:xfrm>
-              <a:off x="4741065" y="2600077"/>
+              <a:off x="4716861" y="2600077"/>
               <a:ext cx="62384" cy="62384"/>
             </a:xfrm>
             <a:prstGeom prst="ellipse">
@@ -24632,7 +24632,7 @@
           </p:nvSpPr>
           <p:spPr>
             <a:xfrm>
-              <a:off x="4848223" y="2312075"/>
+              <a:off x="4830909" y="2312075"/>
               <a:ext cx="62384" cy="62384"/>
             </a:xfrm>
             <a:prstGeom prst="ellipse">
@@ -24658,7 +24658,7 @@
           </p:nvSpPr>
           <p:spPr>
             <a:xfrm>
-              <a:off x="4685573" y="2114599"/>
+              <a:off x="4733867" y="2114599"/>
               <a:ext cx="62384" cy="62384"/>
             </a:xfrm>
             <a:prstGeom prst="ellipse">
@@ -24684,7 +24684,7 @@
           </p:nvSpPr>
           <p:spPr>
             <a:xfrm>
-              <a:off x="4837854" y="2268354"/>
+              <a:off x="4864814" y="2268354"/>
               <a:ext cx="62384" cy="62384"/>
             </a:xfrm>
             <a:prstGeom prst="ellipse">
@@ -24710,7 +24710,7 @@
           </p:nvSpPr>
           <p:spPr>
             <a:xfrm>
-              <a:off x="4713813" y="2349297"/>
+              <a:off x="4715666" y="2349297"/>
               <a:ext cx="62384" cy="62384"/>
             </a:xfrm>
             <a:prstGeom prst="ellipse">
@@ -24736,7 +24736,7 @@
           </p:nvSpPr>
           <p:spPr>
             <a:xfrm>
-              <a:off x="4876455" y="2477214"/>
+              <a:off x="4887728" y="2477214"/>
               <a:ext cx="62384" cy="62384"/>
             </a:xfrm>
             <a:prstGeom prst="ellipse">
@@ -24762,7 +24762,7 @@
           </p:nvSpPr>
           <p:spPr>
             <a:xfrm>
-              <a:off x="4706631" y="2484633"/>
+              <a:off x="4680622" y="2484633"/>
               <a:ext cx="62384" cy="62384"/>
             </a:xfrm>
             <a:prstGeom prst="ellipse">
@@ -24788,7 +24788,7 @@
           </p:nvSpPr>
           <p:spPr>
             <a:xfrm>
-              <a:off x="4902309" y="2608450"/>
+              <a:off x="4869139" y="2608450"/>
               <a:ext cx="62384" cy="62384"/>
             </a:xfrm>
             <a:prstGeom prst="ellipse">
@@ -24814,7 +24814,7 @@
           </p:nvSpPr>
           <p:spPr>
             <a:xfrm>
-              <a:off x="4722764" y="2992092"/>
+              <a:off x="4705586" y="2992092"/>
               <a:ext cx="62384" cy="62384"/>
             </a:xfrm>
             <a:prstGeom prst="ellipse">
@@ -24840,7 +24840,7 @@
           </p:nvSpPr>
           <p:spPr>
             <a:xfrm>
-              <a:off x="4878032" y="2993690"/>
+              <a:off x="4876094" y="2993690"/>
               <a:ext cx="62384" cy="62384"/>
             </a:xfrm>
             <a:prstGeom prst="ellipse">
@@ -24866,7 +24866,7 @@
           </p:nvSpPr>
           <p:spPr>
             <a:xfrm>
-              <a:off x="4726585" y="3523255"/>
+              <a:off x="4679251" y="3523255"/>
               <a:ext cx="62384" cy="62384"/>
             </a:xfrm>
             <a:prstGeom prst="ellipse">
@@ -24892,7 +24892,7 @@
           </p:nvSpPr>
           <p:spPr>
             <a:xfrm>
-              <a:off x="4871983" y="3269113"/>
+              <a:off x="4876670" y="3269113"/>
               <a:ext cx="62384" cy="62384"/>
             </a:xfrm>
             <a:prstGeom prst="ellipse">
@@ -24918,7 +24918,7 @@
           </p:nvSpPr>
           <p:spPr>
             <a:xfrm>
-              <a:off x="4706067" y="2248068"/>
+              <a:off x="4752068" y="2248068"/>
               <a:ext cx="62384" cy="62384"/>
             </a:xfrm>
             <a:prstGeom prst="ellipse">
@@ -24944,7 +24944,7 @@
           </p:nvSpPr>
           <p:spPr>
             <a:xfrm>
-              <a:off x="4899421" y="2460034"/>
+              <a:off x="4875168" y="2460034"/>
               <a:ext cx="62384" cy="62384"/>
             </a:xfrm>
             <a:prstGeom prst="ellipse">
@@ -24970,7 +24970,7 @@
           </p:nvSpPr>
           <p:spPr>
             <a:xfrm>
-              <a:off x="4700342" y="1978275"/>
+              <a:off x="4744543" y="1978275"/>
               <a:ext cx="62384" cy="62384"/>
             </a:xfrm>
             <a:prstGeom prst="ellipse">
@@ -24996,7 +24996,7 @@
           </p:nvSpPr>
           <p:spPr>
             <a:xfrm>
-              <a:off x="4859176" y="2274617"/>
+              <a:off x="4891864" y="2274617"/>
               <a:ext cx="62384" cy="62384"/>
             </a:xfrm>
             <a:prstGeom prst="ellipse">
@@ -25022,7 +25022,7 @@
           </p:nvSpPr>
           <p:spPr>
             <a:xfrm>
-              <a:off x="4695629" y="2832189"/>
+              <a:off x="4711131" y="2832189"/>
               <a:ext cx="62384" cy="62384"/>
             </a:xfrm>
             <a:prstGeom prst="ellipse">
@@ -25048,7 +25048,7 @@
           </p:nvSpPr>
           <p:spPr>
             <a:xfrm>
-              <a:off x="4850158" y="2493188"/>
+              <a:off x="4848770" y="2493188"/>
               <a:ext cx="62384" cy="62384"/>
             </a:xfrm>
             <a:prstGeom prst="ellipse">
@@ -25074,7 +25074,7 @@
           </p:nvSpPr>
           <p:spPr>
             <a:xfrm>
-              <a:off x="4686158" y="2613971"/>
+              <a:off x="4742723" y="2613971"/>
               <a:ext cx="62384" cy="62384"/>
             </a:xfrm>
             <a:prstGeom prst="ellipse">
@@ -25100,7 +25100,7 @@
           </p:nvSpPr>
           <p:spPr>
             <a:xfrm>
-              <a:off x="4851552" y="2386955"/>
+              <a:off x="4839839" y="2386955"/>
               <a:ext cx="62384" cy="62384"/>
             </a:xfrm>
             <a:prstGeom prst="ellipse">
@@ -25126,7 +25126,7 @@
           </p:nvSpPr>
           <p:spPr>
             <a:xfrm>
-              <a:off x="4684978" y="2397714"/>
+              <a:off x="4691155" y="2397714"/>
               <a:ext cx="62384" cy="62384"/>
             </a:xfrm>
             <a:prstGeom prst="ellipse">
@@ -25152,7 +25152,7 @@
           </p:nvSpPr>
           <p:spPr>
             <a:xfrm>
-              <a:off x="4850861" y="2373323"/>
+              <a:off x="4897745" y="2373323"/>
               <a:ext cx="62384" cy="62384"/>
             </a:xfrm>
             <a:prstGeom prst="ellipse">
@@ -25178,7 +25178,7 @@
           </p:nvSpPr>
           <p:spPr>
             <a:xfrm>
-              <a:off x="4708120" y="2589248"/>
+              <a:off x="4716798" y="2589248"/>
               <a:ext cx="62384" cy="62384"/>
             </a:xfrm>
             <a:prstGeom prst="ellipse">
@@ -25204,7 +25204,7 @@
           </p:nvSpPr>
           <p:spPr>
             <a:xfrm>
-              <a:off x="4887692" y="2469538"/>
+              <a:off x="4873879" y="2469538"/>
               <a:ext cx="62384" cy="62384"/>
             </a:xfrm>
             <a:prstGeom prst="ellipse">
@@ -25230,7 +25230,7 @@
           </p:nvSpPr>
           <p:spPr>
             <a:xfrm>
-              <a:off x="4738764" y="2397627"/>
+              <a:off x="4686683" y="2397627"/>
               <a:ext cx="62384" cy="62384"/>
             </a:xfrm>
             <a:prstGeom prst="ellipse">
@@ -25256,7 +25256,7 @@
           </p:nvSpPr>
           <p:spPr>
             <a:xfrm>
-              <a:off x="4863453" y="2463132"/>
+              <a:off x="4852729" y="2463132"/>
               <a:ext cx="62384" cy="62384"/>
             </a:xfrm>
             <a:prstGeom prst="ellipse">
@@ -25282,7 +25282,7 @@
           </p:nvSpPr>
           <p:spPr>
             <a:xfrm>
-              <a:off x="1630325" y="2274644"/>
+              <a:off x="1629374" y="2274644"/>
               <a:ext cx="0" cy="414778"/>
             </a:xfrm>
             <a:custGeom>
@@ -25322,7 +25322,7 @@
           </p:nvSpPr>
           <p:spPr>
             <a:xfrm>
-              <a:off x="1630325" y="3058364"/>
+              <a:off x="1629374" y="3058364"/>
               <a:ext cx="0" cy="532494"/>
             </a:xfrm>
             <a:custGeom>
@@ -25362,13 +25362,13 @@
           </p:nvSpPr>
           <p:spPr>
             <a:xfrm>
-              <a:off x="1555382" y="2689422"/>
-              <a:ext cx="149886" cy="368941"/>
+              <a:off x="1554412" y="2689422"/>
+              <a:ext cx="149923" cy="368941"/>
             </a:xfrm>
             <a:custGeom>
               <a:avLst/>
               <a:pathLst>
-                <a:path w="149886" h="368941">
+                <a:path w="149923" h="368941">
                   <a:moveTo>
                     <a:pt x="0" y="0"/>
                   </a:moveTo>
@@ -25376,10 +25376,10 @@
                     <a:pt x="0" y="368941"/>
                   </a:lnTo>
                   <a:lnTo>
-                    <a:pt x="149886" y="368941"/>
+                    <a:pt x="149923" y="368941"/>
                   </a:lnTo>
                   <a:lnTo>
-                    <a:pt x="149886" y="0"/>
+                    <a:pt x="149923" y="0"/>
                   </a:lnTo>
                   <a:close/>
                 </a:path>
@@ -25409,18 +25409,18 @@
           </p:nvSpPr>
           <p:spPr>
             <a:xfrm>
-              <a:off x="1555382" y="2901135"/>
-              <a:ext cx="149886" cy="0"/>
+              <a:off x="1554412" y="2901135"/>
+              <a:ext cx="149923" cy="0"/>
             </a:xfrm>
             <a:custGeom>
               <a:avLst/>
               <a:pathLst>
-                <a:path w="149886" h="0">
+                <a:path w="149923" h="0">
                   <a:moveTo>
                     <a:pt x="0" y="0"/>
                   </a:moveTo>
                   <a:lnTo>
-                    <a:pt x="149886" y="0"/>
+                    <a:pt x="149923" y="0"/>
                   </a:lnTo>
                 </a:path>
               </a:pathLst>
@@ -25449,7 +25449,7 @@
           </p:nvSpPr>
           <p:spPr>
             <a:xfrm>
-              <a:off x="2669258" y="2071910"/>
+              <a:off x="2668565" y="2071910"/>
               <a:ext cx="0" cy="393723"/>
             </a:xfrm>
             <a:custGeom>
@@ -25489,7 +25489,7 @@
           </p:nvSpPr>
           <p:spPr>
             <a:xfrm>
-              <a:off x="2669258" y="2846912"/>
+              <a:off x="2668565" y="2846912"/>
               <a:ext cx="0" cy="549470"/>
             </a:xfrm>
             <a:custGeom>
@@ -25529,13 +25529,13 @@
           </p:nvSpPr>
           <p:spPr>
             <a:xfrm>
-              <a:off x="2594315" y="2465634"/>
-              <a:ext cx="149886" cy="381278"/>
+              <a:off x="2593604" y="2465634"/>
+              <a:ext cx="149923" cy="381278"/>
             </a:xfrm>
             <a:custGeom>
               <a:avLst/>
               <a:pathLst>
-                <a:path w="149886" h="381278">
+                <a:path w="149923" h="381278">
                   <a:moveTo>
                     <a:pt x="0" y="0"/>
                   </a:moveTo>
@@ -25543,10 +25543,10 @@
                     <a:pt x="0" y="381278"/>
                   </a:lnTo>
                   <a:lnTo>
-                    <a:pt x="149886" y="381278"/>
+                    <a:pt x="149923" y="381278"/>
                   </a:lnTo>
                   <a:lnTo>
-                    <a:pt x="149886" y="0"/>
+                    <a:pt x="149923" y="0"/>
                   </a:lnTo>
                   <a:close/>
                 </a:path>
@@ -25576,18 +25576,18 @@
           </p:nvSpPr>
           <p:spPr>
             <a:xfrm>
-              <a:off x="2594315" y="2614885"/>
-              <a:ext cx="149886" cy="0"/>
+              <a:off x="2593604" y="2614885"/>
+              <a:ext cx="149923" cy="0"/>
             </a:xfrm>
             <a:custGeom>
               <a:avLst/>
               <a:pathLst>
-                <a:path w="149886" h="0">
+                <a:path w="149923" h="0">
                   <a:moveTo>
                     <a:pt x="0" y="0"/>
                   </a:moveTo>
                   <a:lnTo>
-                    <a:pt x="149886" y="0"/>
+                    <a:pt x="149923" y="0"/>
                   </a:lnTo>
                 </a:path>
               </a:pathLst>
@@ -25616,7 +25616,7 @@
           </p:nvSpPr>
           <p:spPr>
             <a:xfrm>
-              <a:off x="3708191" y="1691195"/>
+              <a:off x="3707757" y="1691195"/>
               <a:ext cx="0" cy="521172"/>
             </a:xfrm>
             <a:custGeom>
@@ -25656,7 +25656,7 @@
           </p:nvSpPr>
           <p:spPr>
             <a:xfrm>
-              <a:off x="3708191" y="2693413"/>
+              <a:off x="3707757" y="2693413"/>
               <a:ext cx="0" cy="717499"/>
             </a:xfrm>
             <a:custGeom>
@@ -25696,13 +25696,13 @@
           </p:nvSpPr>
           <p:spPr>
             <a:xfrm>
-              <a:off x="3633248" y="2212367"/>
-              <a:ext cx="149886" cy="481045"/>
+              <a:off x="3632795" y="2212367"/>
+              <a:ext cx="149923" cy="481045"/>
             </a:xfrm>
             <a:custGeom>
               <a:avLst/>
               <a:pathLst>
-                <a:path w="149886" h="481045">
+                <a:path w="149923" h="481045">
                   <a:moveTo>
                     <a:pt x="0" y="0"/>
                   </a:moveTo>
@@ -25710,10 +25710,10 @@
                     <a:pt x="0" y="481045"/>
                   </a:lnTo>
                   <a:lnTo>
-                    <a:pt x="149886" y="481045"/>
+                    <a:pt x="149923" y="481045"/>
                   </a:lnTo>
                   <a:lnTo>
-                    <a:pt x="149886" y="0"/>
+                    <a:pt x="149923" y="0"/>
                   </a:lnTo>
                   <a:close/>
                 </a:path>
@@ -25743,18 +25743,18 @@
           </p:nvSpPr>
           <p:spPr>
             <a:xfrm>
-              <a:off x="3633248" y="2442977"/>
-              <a:ext cx="149886" cy="0"/>
+              <a:off x="3632795" y="2442977"/>
+              <a:ext cx="149923" cy="0"/>
             </a:xfrm>
             <a:custGeom>
               <a:avLst/>
               <a:pathLst>
-                <a:path w="149886" h="0">
+                <a:path w="149923" h="0">
                   <a:moveTo>
                     <a:pt x="0" y="0"/>
                   </a:moveTo>
                   <a:lnTo>
-                    <a:pt x="149886" y="0"/>
+                    <a:pt x="149923" y="0"/>
                   </a:lnTo>
                 </a:path>
               </a:pathLst>
@@ -25783,7 +25783,7 @@
           </p:nvSpPr>
           <p:spPr>
             <a:xfrm>
-              <a:off x="4747124" y="1806354"/>
+              <a:off x="4746948" y="1806354"/>
               <a:ext cx="0" cy="525297"/>
             </a:xfrm>
             <a:custGeom>
@@ -25823,7 +25823,7 @@
           </p:nvSpPr>
           <p:spPr>
             <a:xfrm>
-              <a:off x="4747124" y="2704625"/>
+              <a:off x="4746948" y="2704625"/>
               <a:ext cx="0" cy="511652"/>
             </a:xfrm>
             <a:custGeom>
@@ -25863,13 +25863,13 @@
           </p:nvSpPr>
           <p:spPr>
             <a:xfrm>
-              <a:off x="4672181" y="2331652"/>
-              <a:ext cx="149886" cy="372972"/>
+              <a:off x="4671987" y="2331652"/>
+              <a:ext cx="149923" cy="372972"/>
             </a:xfrm>
             <a:custGeom>
               <a:avLst/>
               <a:pathLst>
-                <a:path w="149886" h="372972">
+                <a:path w="149923" h="372972">
                   <a:moveTo>
                     <a:pt x="0" y="0"/>
                   </a:moveTo>
@@ -25877,10 +25877,10 @@
                     <a:pt x="0" y="372972"/>
                   </a:lnTo>
                   <a:lnTo>
-                    <a:pt x="149886" y="372972"/>
+                    <a:pt x="149923" y="372972"/>
                   </a:lnTo>
                   <a:lnTo>
-                    <a:pt x="149886" y="0"/>
+                    <a:pt x="149923" y="0"/>
                   </a:lnTo>
                   <a:close/>
                 </a:path>
@@ -25910,18 +25910,18 @@
           </p:nvSpPr>
           <p:spPr>
             <a:xfrm>
-              <a:off x="4672181" y="2538138"/>
-              <a:ext cx="149886" cy="0"/>
+              <a:off x="4671987" y="2538138"/>
+              <a:ext cx="149923" cy="0"/>
             </a:xfrm>
             <a:custGeom>
               <a:avLst/>
               <a:pathLst>
-                <a:path w="149886" h="0">
+                <a:path w="149923" h="0">
                   <a:moveTo>
                     <a:pt x="0" y="0"/>
                   </a:moveTo>
                   <a:lnTo>
-                    <a:pt x="149886" y="0"/>
+                    <a:pt x="149923" y="0"/>
                   </a:lnTo>
                 </a:path>
               </a:pathLst>
@@ -25950,7 +25950,7 @@
           </p:nvSpPr>
           <p:spPr>
             <a:xfrm>
-              <a:off x="1780212" y="2302643"/>
+              <a:off x="1779297" y="2302643"/>
               <a:ext cx="0" cy="446396"/>
             </a:xfrm>
             <a:custGeom>
@@ -25990,7 +25990,7 @@
           </p:nvSpPr>
           <p:spPr>
             <a:xfrm>
-              <a:off x="1780212" y="3053383"/>
+              <a:off x="1779297" y="3053383"/>
               <a:ext cx="0" cy="267004"/>
             </a:xfrm>
             <a:custGeom>
@@ -26030,13 +26030,13 @@
           </p:nvSpPr>
           <p:spPr>
             <a:xfrm>
-              <a:off x="1705269" y="2749039"/>
-              <a:ext cx="149886" cy="304344"/>
+              <a:off x="1704336" y="2749039"/>
+              <a:ext cx="149923" cy="304344"/>
             </a:xfrm>
             <a:custGeom>
               <a:avLst/>
               <a:pathLst>
-                <a:path w="149886" h="304344">
+                <a:path w="149923" h="304344">
                   <a:moveTo>
                     <a:pt x="0" y="0"/>
                   </a:moveTo>
@@ -26044,10 +26044,10 @@
                     <a:pt x="0" y="304344"/>
                   </a:lnTo>
                   <a:lnTo>
-                    <a:pt x="149886" y="304344"/>
+                    <a:pt x="149923" y="304344"/>
                   </a:lnTo>
                   <a:lnTo>
-                    <a:pt x="149886" y="0"/>
+                    <a:pt x="149923" y="0"/>
                   </a:lnTo>
                   <a:close/>
                 </a:path>
@@ -26077,18 +26077,18 @@
           </p:nvSpPr>
           <p:spPr>
             <a:xfrm>
-              <a:off x="1705269" y="2935141"/>
-              <a:ext cx="149886" cy="0"/>
+              <a:off x="1704336" y="2935141"/>
+              <a:ext cx="149923" cy="0"/>
             </a:xfrm>
             <a:custGeom>
               <a:avLst/>
               <a:pathLst>
-                <a:path w="149886" h="0">
+                <a:path w="149923" h="0">
                   <a:moveTo>
                     <a:pt x="0" y="0"/>
                   </a:moveTo>
                   <a:lnTo>
-                    <a:pt x="149886" y="0"/>
+                    <a:pt x="149923" y="0"/>
                   </a:lnTo>
                 </a:path>
               </a:pathLst>
@@ -26117,7 +26117,7 @@
           </p:nvSpPr>
           <p:spPr>
             <a:xfrm>
-              <a:off x="2819145" y="2030749"/>
+              <a:off x="2818489" y="2030749"/>
               <a:ext cx="0" cy="502222"/>
             </a:xfrm>
             <a:custGeom>
@@ -26157,7 +26157,7 @@
           </p:nvSpPr>
           <p:spPr>
             <a:xfrm>
-              <a:off x="2819145" y="2911224"/>
+              <a:off x="2818489" y="2911224"/>
               <a:ext cx="0" cy="467677"/>
             </a:xfrm>
             <a:custGeom>
@@ -26197,13 +26197,13 @@
           </p:nvSpPr>
           <p:spPr>
             <a:xfrm>
-              <a:off x="2744202" y="2532971"/>
-              <a:ext cx="149886" cy="378253"/>
+              <a:off x="2743527" y="2532971"/>
+              <a:ext cx="149923" cy="378253"/>
             </a:xfrm>
             <a:custGeom>
               <a:avLst/>
               <a:pathLst>
-                <a:path w="149886" h="378253">
+                <a:path w="149923" h="378253">
                   <a:moveTo>
                     <a:pt x="0" y="0"/>
                   </a:moveTo>
@@ -26211,10 +26211,10 @@
                     <a:pt x="0" y="378253"/>
                   </a:lnTo>
                   <a:lnTo>
-                    <a:pt x="149886" y="378253"/>
+                    <a:pt x="149923" y="378253"/>
                   </a:lnTo>
                   <a:lnTo>
-                    <a:pt x="149886" y="0"/>
+                    <a:pt x="149923" y="0"/>
                   </a:lnTo>
                   <a:close/>
                 </a:path>
@@ -26244,18 +26244,18 @@
           </p:nvSpPr>
           <p:spPr>
             <a:xfrm>
-              <a:off x="2744202" y="2706548"/>
-              <a:ext cx="149886" cy="0"/>
+              <a:off x="2743527" y="2706548"/>
+              <a:ext cx="149923" cy="0"/>
             </a:xfrm>
             <a:custGeom>
               <a:avLst/>
               <a:pathLst>
-                <a:path w="149886" h="0">
+                <a:path w="149923" h="0">
                   <a:moveTo>
                     <a:pt x="0" y="0"/>
                   </a:moveTo>
                   <a:lnTo>
-                    <a:pt x="149886" y="0"/>
+                    <a:pt x="149923" y="0"/>
                   </a:lnTo>
                 </a:path>
               </a:pathLst>
@@ -26284,7 +26284,7 @@
           </p:nvSpPr>
           <p:spPr>
             <a:xfrm>
-              <a:off x="3858078" y="2046605"/>
+              <a:off x="3857680" y="2046605"/>
               <a:ext cx="0" cy="381852"/>
             </a:xfrm>
             <a:custGeom>
@@ -26324,7 +26324,7 @@
           </p:nvSpPr>
           <p:spPr>
             <a:xfrm>
-              <a:off x="3858078" y="2834290"/>
+              <a:off x="3857680" y="2834290"/>
               <a:ext cx="0" cy="431796"/>
             </a:xfrm>
             <a:custGeom>
@@ -26364,13 +26364,13 @@
           </p:nvSpPr>
           <p:spPr>
             <a:xfrm>
-              <a:off x="3783135" y="2428458"/>
-              <a:ext cx="149886" cy="405832"/>
+              <a:off x="3782719" y="2428458"/>
+              <a:ext cx="149923" cy="405832"/>
             </a:xfrm>
             <a:custGeom>
               <a:avLst/>
               <a:pathLst>
-                <a:path w="149886" h="405832">
+                <a:path w="149923" h="405832">
                   <a:moveTo>
                     <a:pt x="0" y="0"/>
                   </a:moveTo>
@@ -26378,10 +26378,10 @@
                     <a:pt x="0" y="405832"/>
                   </a:lnTo>
                   <a:lnTo>
-                    <a:pt x="149886" y="405832"/>
+                    <a:pt x="149923" y="405832"/>
                   </a:lnTo>
                   <a:lnTo>
-                    <a:pt x="149886" y="0"/>
+                    <a:pt x="149923" y="0"/>
                   </a:lnTo>
                   <a:close/>
                 </a:path>
@@ -26411,18 +26411,18 @@
           </p:nvSpPr>
           <p:spPr>
             <a:xfrm>
-              <a:off x="3783135" y="2554405"/>
-              <a:ext cx="149886" cy="0"/>
+              <a:off x="3782719" y="2554405"/>
+              <a:ext cx="149923" cy="0"/>
             </a:xfrm>
             <a:custGeom>
               <a:avLst/>
               <a:pathLst>
-                <a:path w="149886" h="0">
+                <a:path w="149923" h="0">
                   <a:moveTo>
                     <a:pt x="0" y="0"/>
                   </a:moveTo>
                   <a:lnTo>
-                    <a:pt x="149886" y="0"/>
+                    <a:pt x="149923" y="0"/>
                   </a:lnTo>
                 </a:path>
               </a:pathLst>
@@ -26451,7 +26451,7 @@
           </p:nvSpPr>
           <p:spPr>
             <a:xfrm>
-              <a:off x="4897011" y="2098530"/>
+              <a:off x="4896872" y="2098530"/>
               <a:ext cx="0" cy="305986"/>
             </a:xfrm>
             <a:custGeom>
@@ -26491,7 +26491,7 @@
           </p:nvSpPr>
           <p:spPr>
             <a:xfrm>
-              <a:off x="4897011" y="2704230"/>
+              <a:off x="4896872" y="2704230"/>
               <a:ext cx="0" cy="423337"/>
             </a:xfrm>
             <a:custGeom>
@@ -26531,13 +26531,13 @@
           </p:nvSpPr>
           <p:spPr>
             <a:xfrm>
-              <a:off x="4822068" y="2404516"/>
-              <a:ext cx="149886" cy="299713"/>
+              <a:off x="4821910" y="2404516"/>
+              <a:ext cx="149923" cy="299713"/>
             </a:xfrm>
             <a:custGeom>
               <a:avLst/>
               <a:pathLst>
-                <a:path w="149886" h="299713">
+                <a:path w="149923" h="299713">
                   <a:moveTo>
                     <a:pt x="0" y="0"/>
                   </a:moveTo>
@@ -26545,10 +26545,10 @@
                     <a:pt x="0" y="299713"/>
                   </a:lnTo>
                   <a:lnTo>
-                    <a:pt x="149886" y="299713"/>
+                    <a:pt x="149923" y="299713"/>
                   </a:lnTo>
                   <a:lnTo>
-                    <a:pt x="149886" y="0"/>
+                    <a:pt x="149923" y="0"/>
                   </a:lnTo>
                   <a:close/>
                 </a:path>
@@ -26578,18 +26578,18 @@
           </p:nvSpPr>
           <p:spPr>
             <a:xfrm>
-              <a:off x="4822068" y="2528582"/>
-              <a:ext cx="149886" cy="0"/>
+              <a:off x="4821910" y="2528582"/>
+              <a:ext cx="149923" cy="0"/>
             </a:xfrm>
             <a:custGeom>
               <a:avLst/>
               <a:pathLst>
-                <a:path w="149886" h="0">
+                <a:path w="149923" h="0">
                   <a:moveTo>
                     <a:pt x="0" y="0"/>
                   </a:moveTo>
                   <a:lnTo>
-                    <a:pt x="149886" y="0"/>
+                    <a:pt x="149923" y="0"/>
                   </a:lnTo>
                 </a:path>
               </a:pathLst>
@@ -26618,39 +26618,39 @@
           </p:nvSpPr>
           <p:spPr>
             <a:xfrm>
-              <a:off x="1705269" y="2314556"/>
-              <a:ext cx="3147613" cy="585786"/>
+              <a:off x="1704336" y="2314556"/>
+              <a:ext cx="3148396" cy="585786"/>
             </a:xfrm>
             <a:custGeom>
               <a:avLst/>
               <a:pathLst>
-                <a:path w="3147613" h="585786">
+                <a:path w="3148396" h="585786">
                   <a:moveTo>
                     <a:pt x="0" y="292622"/>
                   </a:moveTo>
                   <a:lnTo>
-                    <a:pt x="779409" y="264540"/>
+                    <a:pt x="779602" y="264540"/>
                   </a:lnTo>
                   <a:lnTo>
-                    <a:pt x="1498863" y="221351"/>
+                    <a:pt x="1499236" y="221351"/>
                   </a:lnTo>
                   <a:lnTo>
-                    <a:pt x="2398181" y="116377"/>
+                    <a:pt x="2398778" y="116377"/>
                   </a:lnTo>
                   <a:lnTo>
-                    <a:pt x="3147613" y="0"/>
+                    <a:pt x="3148396" y="0"/>
                   </a:lnTo>
                   <a:lnTo>
-                    <a:pt x="3147613" y="262592"/>
+                    <a:pt x="3148396" y="262592"/>
                   </a:lnTo>
                   <a:lnTo>
-                    <a:pt x="2398181" y="292838"/>
+                    <a:pt x="2398778" y="292838"/>
                   </a:lnTo>
                   <a:lnTo>
-                    <a:pt x="1498863" y="363811"/>
+                    <a:pt x="1499236" y="363811"/>
                   </a:lnTo>
                   <a:lnTo>
-                    <a:pt x="779409" y="461380"/>
+                    <a:pt x="779602" y="461380"/>
                   </a:lnTo>
                   <a:lnTo>
                     <a:pt x="0" y="585786"/>
@@ -26679,27 +26679,27 @@
           </p:nvSpPr>
           <p:spPr>
             <a:xfrm>
-              <a:off x="1705269" y="2314556"/>
-              <a:ext cx="3147613" cy="292622"/>
+              <a:off x="1704336" y="2314556"/>
+              <a:ext cx="3148396" cy="292622"/>
             </a:xfrm>
             <a:custGeom>
               <a:avLst/>
               <a:pathLst>
-                <a:path w="3147613" h="292622">
+                <a:path w="3148396" h="292622">
                   <a:moveTo>
                     <a:pt x="0" y="292622"/>
                   </a:moveTo>
                   <a:lnTo>
-                    <a:pt x="779409" y="264540"/>
+                    <a:pt x="779602" y="264540"/>
                   </a:lnTo>
                   <a:lnTo>
-                    <a:pt x="1498863" y="221351"/>
+                    <a:pt x="1499236" y="221351"/>
                   </a:lnTo>
                   <a:lnTo>
-                    <a:pt x="2398181" y="116377"/>
+                    <a:pt x="2398778" y="116377"/>
                   </a:lnTo>
                   <a:lnTo>
-                    <a:pt x="3147613" y="0"/>
+                    <a:pt x="3148396" y="0"/>
                   </a:lnTo>
                 </a:path>
               </a:pathLst>
@@ -26719,24 +26719,24 @@
           </p:nvSpPr>
           <p:spPr>
             <a:xfrm>
-              <a:off x="1705269" y="2577148"/>
-              <a:ext cx="3147613" cy="323194"/>
+              <a:off x="1704336" y="2577148"/>
+              <a:ext cx="3148396" cy="323194"/>
             </a:xfrm>
             <a:custGeom>
               <a:avLst/>
               <a:pathLst>
-                <a:path w="3147613" h="323194">
+                <a:path w="3148396" h="323194">
                   <a:moveTo>
-                    <a:pt x="3147613" y="0"/>
+                    <a:pt x="3148396" y="0"/>
                   </a:moveTo>
                   <a:lnTo>
-                    <a:pt x="2398181" y="30245"/>
+                    <a:pt x="2398778" y="30245"/>
                   </a:lnTo>
                   <a:lnTo>
-                    <a:pt x="1498863" y="101219"/>
+                    <a:pt x="1499236" y="101219"/>
                   </a:lnTo>
                   <a:lnTo>
-                    <a:pt x="779409" y="198788"/>
+                    <a:pt x="779602" y="198788"/>
                   </a:lnTo>
                   <a:lnTo>
                     <a:pt x="0" y="323194"/>
@@ -26759,39 +26759,39 @@
           </p:nvSpPr>
           <p:spPr>
             <a:xfrm>
-              <a:off x="1705269" y="2436875"/>
-              <a:ext cx="3147613" cy="530996"/>
+              <a:off x="1704336" y="2436875"/>
+              <a:ext cx="3148396" cy="530996"/>
             </a:xfrm>
             <a:custGeom>
               <a:avLst/>
               <a:pathLst>
-                <a:path w="3147613" h="530996">
+                <a:path w="3148396" h="530996">
                   <a:moveTo>
                     <a:pt x="0" y="284825"/>
                   </a:moveTo>
                   <a:lnTo>
-                    <a:pt x="779409" y="251361"/>
+                    <a:pt x="779602" y="251361"/>
                   </a:lnTo>
                   <a:lnTo>
-                    <a:pt x="1498863" y="206085"/>
+                    <a:pt x="1499236" y="206085"/>
                   </a:lnTo>
                   <a:lnTo>
-                    <a:pt x="2398181" y="106928"/>
+                    <a:pt x="2398778" y="106928"/>
                   </a:lnTo>
                   <a:lnTo>
-                    <a:pt x="3147613" y="0"/>
+                    <a:pt x="3148396" y="0"/>
                   </a:lnTo>
                   <a:lnTo>
-                    <a:pt x="3147613" y="219712"/>
+                    <a:pt x="3148396" y="219712"/>
                   </a:lnTo>
                   <a:lnTo>
-                    <a:pt x="2398181" y="254714"/>
+                    <a:pt x="2398778" y="254714"/>
                   </a:lnTo>
                   <a:lnTo>
-                    <a:pt x="1498863" y="325875"/>
+                    <a:pt x="1499236" y="325875"/>
                   </a:lnTo>
                   <a:lnTo>
-                    <a:pt x="779409" y="416852"/>
+                    <a:pt x="779602" y="416852"/>
                   </a:lnTo>
                   <a:lnTo>
                     <a:pt x="0" y="530996"/>
@@ -26820,27 +26820,27 @@
           </p:nvSpPr>
           <p:spPr>
             <a:xfrm>
-              <a:off x="1705269" y="2436875"/>
-              <a:ext cx="3147613" cy="284825"/>
+              <a:off x="1704336" y="2436875"/>
+              <a:ext cx="3148396" cy="284825"/>
             </a:xfrm>
             <a:custGeom>
               <a:avLst/>
               <a:pathLst>
-                <a:path w="3147613" h="284825">
+                <a:path w="3148396" h="284825">
                   <a:moveTo>
                     <a:pt x="0" y="284825"/>
                   </a:moveTo>
                   <a:lnTo>
-                    <a:pt x="779409" y="251361"/>
+                    <a:pt x="779602" y="251361"/>
                   </a:lnTo>
                   <a:lnTo>
-                    <a:pt x="1498863" y="206085"/>
+                    <a:pt x="1499236" y="206085"/>
                   </a:lnTo>
                   <a:lnTo>
-                    <a:pt x="2398181" y="106928"/>
+                    <a:pt x="2398778" y="106928"/>
                   </a:lnTo>
                   <a:lnTo>
-                    <a:pt x="3147613" y="0"/>
+                    <a:pt x="3148396" y="0"/>
                   </a:lnTo>
                 </a:path>
               </a:pathLst>
@@ -26860,24 +26860,24 @@
           </p:nvSpPr>
           <p:spPr>
             <a:xfrm>
-              <a:off x="1705269" y="2656588"/>
-              <a:ext cx="3147613" cy="311283"/>
+              <a:off x="1704336" y="2656588"/>
+              <a:ext cx="3148396" cy="311283"/>
             </a:xfrm>
             <a:custGeom>
               <a:avLst/>
               <a:pathLst>
-                <a:path w="3147613" h="311283">
+                <a:path w="3148396" h="311283">
                   <a:moveTo>
-                    <a:pt x="3147613" y="0"/>
+                    <a:pt x="3148396" y="0"/>
                   </a:moveTo>
                   <a:lnTo>
-                    <a:pt x="2398181" y="35002"/>
+                    <a:pt x="2398778" y="35002"/>
                   </a:lnTo>
                   <a:lnTo>
-                    <a:pt x="1498863" y="106162"/>
+                    <a:pt x="1499236" y="106162"/>
                   </a:lnTo>
                   <a:lnTo>
-                    <a:pt x="779409" y="197139"/>
+                    <a:pt x="779602" y="197139"/>
                   </a:lnTo>
                   <a:lnTo>
                     <a:pt x="0" y="311283"/>
@@ -26900,27 +26900,27 @@
           </p:nvSpPr>
           <p:spPr>
             <a:xfrm>
-              <a:off x="1705269" y="2445852"/>
-              <a:ext cx="3147613" cy="307908"/>
+              <a:off x="1704336" y="2445852"/>
+              <a:ext cx="3148396" cy="307908"/>
             </a:xfrm>
             <a:custGeom>
               <a:avLst/>
               <a:pathLst>
-                <a:path w="3147613" h="307908">
+                <a:path w="3148396" h="307908">
                   <a:moveTo>
                     <a:pt x="0" y="307908"/>
                   </a:moveTo>
                   <a:lnTo>
-                    <a:pt x="779409" y="231664"/>
+                    <a:pt x="779602" y="231664"/>
                   </a:lnTo>
                   <a:lnTo>
-                    <a:pt x="1498863" y="161285"/>
+                    <a:pt x="1499236" y="161285"/>
                   </a:lnTo>
                   <a:lnTo>
-                    <a:pt x="2398181" y="73311"/>
+                    <a:pt x="2398778" y="73311"/>
                   </a:lnTo>
                   <a:lnTo>
-                    <a:pt x="3147613" y="0"/>
+                    <a:pt x="3148396" y="0"/>
                   </a:lnTo>
                 </a:path>
               </a:pathLst>
@@ -26949,27 +26949,27 @@
           </p:nvSpPr>
           <p:spPr>
             <a:xfrm>
-              <a:off x="1705269" y="2546731"/>
-              <a:ext cx="3147613" cy="298054"/>
+              <a:off x="1704336" y="2546731"/>
+              <a:ext cx="3148396" cy="298054"/>
             </a:xfrm>
             <a:custGeom>
               <a:avLst/>
               <a:pathLst>
-                <a:path w="3147613" h="298054">
+                <a:path w="3148396" h="298054">
                   <a:moveTo>
                     <a:pt x="0" y="298054"/>
                   </a:moveTo>
                   <a:lnTo>
-                    <a:pt x="779409" y="224250"/>
+                    <a:pt x="779602" y="224250"/>
                   </a:lnTo>
                   <a:lnTo>
-                    <a:pt x="1498863" y="156123"/>
+                    <a:pt x="1499236" y="156123"/>
                   </a:lnTo>
                   <a:lnTo>
-                    <a:pt x="2398181" y="70965"/>
+                    <a:pt x="2398778" y="70965"/>
                   </a:lnTo>
                   <a:lnTo>
-                    <a:pt x="3147613" y="0"/>
+                    <a:pt x="3148396" y="0"/>
                   </a:lnTo>
                 </a:path>
               </a:pathLst>
@@ -26998,7 +26998,7 @@
           </p:nvSpPr>
           <p:spPr>
             <a:xfrm>
-              <a:off x="1705269" y="1047951"/>
+              <a:off x="1704336" y="1047951"/>
               <a:ext cx="825794" cy="91165"/>
             </a:xfrm>
             <a:prstGeom prst="rect">
@@ -27044,7 +27044,7 @@
           </p:nvSpPr>
           <p:spPr>
             <a:xfrm>
-              <a:off x="2531063" y="1048042"/>
+              <a:off x="2530130" y="1048042"/>
               <a:ext cx="84673" cy="91074"/>
             </a:xfrm>
             <a:prstGeom prst="rect">
@@ -27090,7 +27090,7 @@
           </p:nvSpPr>
           <p:spPr>
             <a:xfrm>
-              <a:off x="2629741" y="1048042"/>
+              <a:off x="2628808" y="1048042"/>
               <a:ext cx="28254" cy="91074"/>
             </a:xfrm>
             <a:prstGeom prst="rect">
@@ -27136,7 +27136,7 @@
           </p:nvSpPr>
           <p:spPr>
             <a:xfrm>
-              <a:off x="2671657" y="1048042"/>
+              <a:off x="2670724" y="1048042"/>
               <a:ext cx="70591" cy="91074"/>
             </a:xfrm>
             <a:prstGeom prst="rect">
@@ -27182,7 +27182,7 @@
           </p:nvSpPr>
           <p:spPr>
             <a:xfrm>
-              <a:off x="2752494" y="1048042"/>
+              <a:off x="2751561" y="1048042"/>
               <a:ext cx="70591" cy="91074"/>
             </a:xfrm>
             <a:prstGeom prst="rect">
@@ -27228,7 +27228,7 @@
           </p:nvSpPr>
           <p:spPr>
             <a:xfrm>
-              <a:off x="2833291" y="1048042"/>
+              <a:off x="2832358" y="1048042"/>
               <a:ext cx="70591" cy="91074"/>
             </a:xfrm>
             <a:prstGeom prst="rect">
@@ -27274,7 +27274,7 @@
           </p:nvSpPr>
           <p:spPr>
             <a:xfrm>
-              <a:off x="2914073" y="1047951"/>
+              <a:off x="2913140" y="1047951"/>
               <a:ext cx="462412" cy="91165"/>
             </a:xfrm>
             <a:prstGeom prst="rect">
@@ -27320,7 +27320,7 @@
           </p:nvSpPr>
           <p:spPr>
             <a:xfrm>
-              <a:off x="3376485" y="1047951"/>
+              <a:off x="3375553" y="1047951"/>
               <a:ext cx="70591" cy="91165"/>
             </a:xfrm>
             <a:prstGeom prst="rect">
@@ -27366,7 +27366,7 @@
           </p:nvSpPr>
           <p:spPr>
             <a:xfrm>
-              <a:off x="3447077" y="1048042"/>
+              <a:off x="3446144" y="1048042"/>
               <a:ext cx="70591" cy="91074"/>
             </a:xfrm>
             <a:prstGeom prst="rect">
@@ -27412,7 +27412,7 @@
           </p:nvSpPr>
           <p:spPr>
             <a:xfrm>
-              <a:off x="3527873" y="1047951"/>
+              <a:off x="3526941" y="1047951"/>
               <a:ext cx="462412" cy="91165"/>
             </a:xfrm>
             <a:prstGeom prst="rect">
@@ -27458,7 +27458,7 @@
           </p:nvSpPr>
           <p:spPr>
             <a:xfrm>
-              <a:off x="1705269" y="1224134"/>
+              <a:off x="1704336" y="1224134"/>
               <a:ext cx="811712" cy="91165"/>
             </a:xfrm>
             <a:prstGeom prst="rect">
@@ -27504,7 +27504,7 @@
           </p:nvSpPr>
           <p:spPr>
             <a:xfrm>
-              <a:off x="2516981" y="1224226"/>
+              <a:off x="2516049" y="1224226"/>
               <a:ext cx="84673" cy="91074"/>
             </a:xfrm>
             <a:prstGeom prst="rect">
@@ -27550,7 +27550,7 @@
           </p:nvSpPr>
           <p:spPr>
             <a:xfrm>
-              <a:off x="2615659" y="1224226"/>
+              <a:off x="2614726" y="1224226"/>
               <a:ext cx="28254" cy="91074"/>
             </a:xfrm>
             <a:prstGeom prst="rect">
@@ -27596,7 +27596,7 @@
           </p:nvSpPr>
           <p:spPr>
             <a:xfrm>
-              <a:off x="2657575" y="1224226"/>
+              <a:off x="2656642" y="1224226"/>
               <a:ext cx="70591" cy="91074"/>
             </a:xfrm>
             <a:prstGeom prst="rect">
@@ -27642,7 +27642,7 @@
           </p:nvSpPr>
           <p:spPr>
             <a:xfrm>
-              <a:off x="2738413" y="1224226"/>
+              <a:off x="2737480" y="1224226"/>
               <a:ext cx="70591" cy="91074"/>
             </a:xfrm>
             <a:prstGeom prst="rect">
@@ -27688,7 +27688,7 @@
           </p:nvSpPr>
           <p:spPr>
             <a:xfrm>
-              <a:off x="2819209" y="1224226"/>
+              <a:off x="2818276" y="1224226"/>
               <a:ext cx="70591" cy="91074"/>
             </a:xfrm>
             <a:prstGeom prst="rect">
@@ -27734,7 +27734,7 @@
           </p:nvSpPr>
           <p:spPr>
             <a:xfrm>
-              <a:off x="2899992" y="1224134"/>
+              <a:off x="2899059" y="1224134"/>
               <a:ext cx="462412" cy="91165"/>
             </a:xfrm>
             <a:prstGeom prst="rect">
@@ -27780,7 +27780,7 @@
           </p:nvSpPr>
           <p:spPr>
             <a:xfrm>
-              <a:off x="3362404" y="1224134"/>
+              <a:off x="3361471" y="1224134"/>
               <a:ext cx="70591" cy="91165"/>
             </a:xfrm>
             <a:prstGeom prst="rect">
@@ -27826,7 +27826,7 @@
           </p:nvSpPr>
           <p:spPr>
             <a:xfrm>
-              <a:off x="3432995" y="1224226"/>
+              <a:off x="3432062" y="1224226"/>
               <a:ext cx="70591" cy="91074"/>
             </a:xfrm>
             <a:prstGeom prst="rect">
@@ -27872,7 +27872,7 @@
           </p:nvSpPr>
           <p:spPr>
             <a:xfrm>
-              <a:off x="3513792" y="1224134"/>
+              <a:off x="3512859" y="1224134"/>
               <a:ext cx="462412" cy="91165"/>
             </a:xfrm>
             <a:prstGeom prst="rect">
@@ -27918,7 +27918,7 @@
           </p:nvSpPr>
           <p:spPr>
             <a:xfrm>
-              <a:off x="1638243" y="1507292"/>
+              <a:off x="1637310" y="1507292"/>
               <a:ext cx="134051" cy="91165"/>
             </a:xfrm>
             <a:prstGeom prst="rect">
@@ -27964,7 +27964,7 @@
           </p:nvSpPr>
           <p:spPr>
             <a:xfrm>
-              <a:off x="2669998" y="1454476"/>
+              <a:off x="2669324" y="1454476"/>
               <a:ext cx="148407" cy="91165"/>
             </a:xfrm>
             <a:prstGeom prst="rect">
@@ -28010,7 +28010,7 @@
           </p:nvSpPr>
           <p:spPr>
             <a:xfrm>
-              <a:off x="3708931" y="1544910"/>
+              <a:off x="3708515" y="1544910"/>
               <a:ext cx="148407" cy="91165"/>
             </a:xfrm>
             <a:prstGeom prst="rect">
@@ -28056,7 +28056,7 @@
           </p:nvSpPr>
           <p:spPr>
             <a:xfrm>
-              <a:off x="4797333" y="1488902"/>
+              <a:off x="4797176" y="1488902"/>
               <a:ext cx="49469" cy="91165"/>
             </a:xfrm>
             <a:prstGeom prst="rect">
@@ -28719,7 +28719,7 @@
           </p:nvSpPr>
           <p:spPr>
             <a:xfrm>
-              <a:off x="1705269" y="3842873"/>
+              <a:off x="1704336" y="3842873"/>
               <a:ext cx="0" cy="31631"/>
             </a:xfrm>
             <a:custGeom>
@@ -28759,7 +28759,7 @@
           </p:nvSpPr>
           <p:spPr>
             <a:xfrm>
-              <a:off x="2744202" y="3842873"/>
+              <a:off x="2743527" y="3842873"/>
               <a:ext cx="0" cy="31631"/>
             </a:xfrm>
             <a:custGeom>
@@ -28799,7 +28799,7 @@
           </p:nvSpPr>
           <p:spPr>
             <a:xfrm>
-              <a:off x="3783135" y="3842873"/>
+              <a:off x="3782719" y="3842873"/>
               <a:ext cx="0" cy="31631"/>
             </a:xfrm>
             <a:custGeom>
@@ -28839,7 +28839,7 @@
           </p:nvSpPr>
           <p:spPr>
             <a:xfrm>
-              <a:off x="4822068" y="3842873"/>
+              <a:off x="4821910" y="3842873"/>
               <a:ext cx="0" cy="31631"/>
             </a:xfrm>
             <a:custGeom>
@@ -28879,7 +28879,7 @@
           </p:nvSpPr>
           <p:spPr>
             <a:xfrm>
-              <a:off x="1673493" y="3899809"/>
+              <a:off x="1672560" y="3899809"/>
               <a:ext cx="63550" cy="82021"/>
             </a:xfrm>
             <a:prstGeom prst="rect">
@@ -28925,7 +28925,7 @@
           </p:nvSpPr>
           <p:spPr>
             <a:xfrm>
-              <a:off x="2712426" y="3899809"/>
+              <a:off x="2711752" y="3899809"/>
               <a:ext cx="63550" cy="82021"/>
             </a:xfrm>
             <a:prstGeom prst="rect">
@@ -28971,7 +28971,7 @@
           </p:nvSpPr>
           <p:spPr>
             <a:xfrm>
-              <a:off x="3751359" y="3899809"/>
+              <a:off x="3750943" y="3899809"/>
               <a:ext cx="63550" cy="82021"/>
             </a:xfrm>
             <a:prstGeom prst="rect">
@@ -29017,7 +29017,7 @@
           </p:nvSpPr>
           <p:spPr>
             <a:xfrm>
-              <a:off x="4790292" y="3899809"/>
+              <a:off x="4790135" y="3899809"/>
               <a:ext cx="63550" cy="82021"/>
             </a:xfrm>
             <a:prstGeom prst="rect">

--- a/figures/Figure_3.pptx
+++ b/figures/Figure_3.pptx
@@ -2350,7 +2350,7 @@
           </p:nvSpPr>
           <p:spPr>
             <a:xfrm>
-              <a:off x="1586394" y="1803832"/>
+              <a:off x="1563247" y="1803832"/>
               <a:ext cx="62384" cy="62384"/>
             </a:xfrm>
             <a:prstGeom prst="ellipse">
@@ -2376,7 +2376,7 @@
           </p:nvSpPr>
           <p:spPr>
             <a:xfrm>
-              <a:off x="1752055" y="2770530"/>
+              <a:off x="1744414" y="2770530"/>
               <a:ext cx="62384" cy="62384"/>
             </a:xfrm>
             <a:prstGeom prst="ellipse">
@@ -2402,7 +2402,7 @@
           </p:nvSpPr>
           <p:spPr>
             <a:xfrm>
-              <a:off x="1594805" y="2922825"/>
+              <a:off x="1590809" y="2922825"/>
               <a:ext cx="62384" cy="62384"/>
             </a:xfrm>
             <a:prstGeom prst="ellipse">
@@ -2428,7 +2428,7 @@
           </p:nvSpPr>
           <p:spPr>
             <a:xfrm>
-              <a:off x="1772669" y="2734822"/>
+              <a:off x="1738057" y="2734822"/>
               <a:ext cx="62384" cy="62384"/>
             </a:xfrm>
             <a:prstGeom prst="ellipse">
@@ -2454,7 +2454,7 @@
           </p:nvSpPr>
           <p:spPr>
             <a:xfrm>
-              <a:off x="1595998" y="2330481"/>
+              <a:off x="1603294" y="2330481"/>
               <a:ext cx="62384" cy="62384"/>
             </a:xfrm>
             <a:prstGeom prst="ellipse">
@@ -2480,7 +2480,7 @@
           </p:nvSpPr>
           <p:spPr>
             <a:xfrm>
-              <a:off x="1768030" y="2818272"/>
+              <a:off x="1733207" y="2818272"/>
               <a:ext cx="62384" cy="62384"/>
             </a:xfrm>
             <a:prstGeom prst="ellipse">
@@ -2506,7 +2506,7 @@
           </p:nvSpPr>
           <p:spPr>
             <a:xfrm>
-              <a:off x="1580100" y="3089269"/>
+              <a:off x="1634608" y="3089269"/>
               <a:ext cx="62384" cy="62384"/>
             </a:xfrm>
             <a:prstGeom prst="ellipse">
@@ -2532,7 +2532,7 @@
           </p:nvSpPr>
           <p:spPr>
             <a:xfrm>
-              <a:off x="1775856" y="2990456"/>
+              <a:off x="1780018" y="2990456"/>
               <a:ext cx="62384" cy="62384"/>
             </a:xfrm>
             <a:prstGeom prst="ellipse">
@@ -2558,7 +2558,7 @@
           </p:nvSpPr>
           <p:spPr>
             <a:xfrm>
-              <a:off x="1573115" y="2898173"/>
+              <a:off x="1615265" y="2898173"/>
               <a:ext cx="62384" cy="62384"/>
             </a:xfrm>
             <a:prstGeom prst="ellipse">
@@ -2584,7 +2584,7 @@
           </p:nvSpPr>
           <p:spPr>
             <a:xfrm>
-              <a:off x="1721360" y="2971875"/>
+              <a:off x="1727864" y="2971875"/>
               <a:ext cx="62384" cy="62384"/>
             </a:xfrm>
             <a:prstGeom prst="ellipse">
@@ -2610,7 +2610,7 @@
           </p:nvSpPr>
           <p:spPr>
             <a:xfrm>
-              <a:off x="1569723" y="3240021"/>
+              <a:off x="1563243" y="3240021"/>
               <a:ext cx="62384" cy="62384"/>
             </a:xfrm>
             <a:prstGeom prst="ellipse">
@@ -2636,7 +2636,7 @@
           </p:nvSpPr>
           <p:spPr>
             <a:xfrm>
-              <a:off x="1750298" y="3236709"/>
+              <a:off x="1745877" y="3236709"/>
               <a:ext cx="62384" cy="62384"/>
             </a:xfrm>
             <a:prstGeom prst="ellipse">
@@ -2662,7 +2662,7 @@
           </p:nvSpPr>
           <p:spPr>
             <a:xfrm>
-              <a:off x="1571388" y="2981013"/>
+              <a:off x="1608060" y="2981013"/>
               <a:ext cx="62384" cy="62384"/>
             </a:xfrm>
             <a:prstGeom prst="ellipse">
@@ -2688,7 +2688,7 @@
           </p:nvSpPr>
           <p:spPr>
             <a:xfrm>
-              <a:off x="1741961" y="3036913"/>
+              <a:off x="1756400" y="3036913"/>
               <a:ext cx="62384" cy="62384"/>
             </a:xfrm>
             <a:prstGeom prst="ellipse">
@@ -2714,7 +2714,7 @@
           </p:nvSpPr>
           <p:spPr>
             <a:xfrm>
-              <a:off x="1630338" y="3054889"/>
+              <a:off x="1576001" y="3054889"/>
               <a:ext cx="62384" cy="62384"/>
             </a:xfrm>
             <a:prstGeom prst="ellipse">
@@ -2740,7 +2740,7 @@
           </p:nvSpPr>
           <p:spPr>
             <a:xfrm>
-              <a:off x="1717488" y="3156403"/>
+              <a:off x="1785910" y="3156403"/>
               <a:ext cx="62384" cy="62384"/>
             </a:xfrm>
             <a:prstGeom prst="ellipse">
@@ -2766,7 +2766,7 @@
           </p:nvSpPr>
           <p:spPr>
             <a:xfrm>
-              <a:off x="1609362" y="3002923"/>
+              <a:off x="1615205" y="3002923"/>
               <a:ext cx="62384" cy="62384"/>
             </a:xfrm>
             <a:prstGeom prst="ellipse">
@@ -2792,7 +2792,7 @@
           </p:nvSpPr>
           <p:spPr>
             <a:xfrm>
-              <a:off x="1773810" y="2884502"/>
+              <a:off x="1726710" y="2884502"/>
               <a:ext cx="62384" cy="62384"/>
             </a:xfrm>
             <a:prstGeom prst="ellipse">
@@ -2818,7 +2818,7 @@
           </p:nvSpPr>
           <p:spPr>
             <a:xfrm>
-              <a:off x="1617399" y="2439628"/>
+              <a:off x="1626146" y="2439628"/>
               <a:ext cx="62384" cy="62384"/>
             </a:xfrm>
             <a:prstGeom prst="ellipse">
@@ -2844,7 +2844,7 @@
           </p:nvSpPr>
           <p:spPr>
             <a:xfrm>
-              <a:off x="1726835" y="2450538"/>
+              <a:off x="1724919" y="2450538"/>
               <a:ext cx="62384" cy="62384"/>
             </a:xfrm>
             <a:prstGeom prst="ellipse">
@@ -2870,7 +2870,7 @@
           </p:nvSpPr>
           <p:spPr>
             <a:xfrm>
-              <a:off x="1628620" y="2993232"/>
+              <a:off x="1601247" y="2993232"/>
               <a:ext cx="62384" cy="62384"/>
             </a:xfrm>
             <a:prstGeom prst="ellipse">
@@ -2896,7 +2896,7 @@
           </p:nvSpPr>
           <p:spPr>
             <a:xfrm>
-              <a:off x="1726857" y="2973263"/>
+              <a:off x="1779525" y="2973263"/>
               <a:ext cx="62384" cy="62384"/>
             </a:xfrm>
             <a:prstGeom prst="ellipse">
@@ -2922,7 +2922,7 @@
           </p:nvSpPr>
           <p:spPr>
             <a:xfrm>
-              <a:off x="1604752" y="2822604"/>
+              <a:off x="1612719" y="2822604"/>
               <a:ext cx="62384" cy="62384"/>
             </a:xfrm>
             <a:prstGeom prst="ellipse">
@@ -2948,7 +2948,7 @@
           </p:nvSpPr>
           <p:spPr>
             <a:xfrm>
-              <a:off x="1745777" y="2969127"/>
+              <a:off x="1742191" y="2969127"/>
               <a:ext cx="62384" cy="62384"/>
             </a:xfrm>
             <a:prstGeom prst="ellipse">
@@ -2974,7 +2974,7 @@
           </p:nvSpPr>
           <p:spPr>
             <a:xfrm>
-              <a:off x="1627502" y="2710412"/>
+              <a:off x="1578466" y="2710412"/>
               <a:ext cx="62384" cy="62384"/>
             </a:xfrm>
             <a:prstGeom prst="ellipse">
@@ -3000,7 +3000,7 @@
           </p:nvSpPr>
           <p:spPr>
             <a:xfrm>
-              <a:off x="1725982" y="3122471"/>
+              <a:off x="1755130" y="3122471"/>
               <a:ext cx="62384" cy="62384"/>
             </a:xfrm>
             <a:prstGeom prst="ellipse">
@@ -3026,7 +3026,7 @@
           </p:nvSpPr>
           <p:spPr>
             <a:xfrm>
-              <a:off x="1590467" y="3052876"/>
+              <a:off x="1597215" y="3052876"/>
               <a:ext cx="62384" cy="62384"/>
             </a:xfrm>
             <a:prstGeom prst="ellipse">
@@ -3052,7 +3052,7 @@
           </p:nvSpPr>
           <p:spPr>
             <a:xfrm>
-              <a:off x="1775984" y="2924956"/>
+              <a:off x="1740761" y="2924956"/>
               <a:ext cx="62384" cy="62384"/>
             </a:xfrm>
             <a:prstGeom prst="ellipse">
@@ -3078,7 +3078,7 @@
           </p:nvSpPr>
           <p:spPr>
             <a:xfrm>
-              <a:off x="1616892" y="2666643"/>
+              <a:off x="1572371" y="2666643"/>
               <a:ext cx="62384" cy="62384"/>
             </a:xfrm>
             <a:prstGeom prst="ellipse">
@@ -3104,7 +3104,7 @@
           </p:nvSpPr>
           <p:spPr>
             <a:xfrm>
-              <a:off x="1754945" y="3245462"/>
+              <a:off x="1754206" y="3245462"/>
               <a:ext cx="62384" cy="62384"/>
             </a:xfrm>
             <a:prstGeom prst="ellipse">
@@ -3130,7 +3130,7 @@
           </p:nvSpPr>
           <p:spPr>
             <a:xfrm>
-              <a:off x="1606056" y="2876305"/>
+              <a:off x="1565508" y="2876305"/>
               <a:ext cx="62384" cy="62384"/>
             </a:xfrm>
             <a:prstGeom prst="ellipse">
@@ -3156,7 +3156,7 @@
           </p:nvSpPr>
           <p:spPr>
             <a:xfrm>
-              <a:off x="1785139" y="2880808"/>
+              <a:off x="1727222" y="2880808"/>
               <a:ext cx="62384" cy="62384"/>
             </a:xfrm>
             <a:prstGeom prst="ellipse">
@@ -3182,7 +3182,7 @@
           </p:nvSpPr>
           <p:spPr>
             <a:xfrm>
-              <a:off x="1587761" y="3063576"/>
+              <a:off x="1586090" y="3063576"/>
               <a:ext cx="62384" cy="62384"/>
             </a:xfrm>
             <a:prstGeom prst="ellipse">
@@ -3208,7 +3208,7 @@
           </p:nvSpPr>
           <p:spPr>
             <a:xfrm>
-              <a:off x="1733441" y="2999345"/>
+              <a:off x="1714591" y="2999345"/>
               <a:ext cx="62384" cy="62384"/>
             </a:xfrm>
             <a:prstGeom prst="ellipse">
@@ -3234,7 +3234,7 @@
           </p:nvSpPr>
           <p:spPr>
             <a:xfrm>
-              <a:off x="1563013" y="2916882"/>
+              <a:off x="1599034" y="2916882"/>
               <a:ext cx="62384" cy="62384"/>
             </a:xfrm>
             <a:prstGeom prst="ellipse">
@@ -3260,7 +3260,7 @@
           </p:nvSpPr>
           <p:spPr>
             <a:xfrm>
-              <a:off x="1749467" y="3004099"/>
+              <a:off x="1772025" y="3004099"/>
               <a:ext cx="62384" cy="62384"/>
             </a:xfrm>
             <a:prstGeom prst="ellipse">
@@ -3286,7 +3286,7 @@
           </p:nvSpPr>
           <p:spPr>
             <a:xfrm>
-              <a:off x="1566528" y="3027595"/>
+              <a:off x="1588158" y="3027595"/>
               <a:ext cx="62384" cy="62384"/>
             </a:xfrm>
             <a:prstGeom prst="ellipse">
@@ -3312,7 +3312,7 @@
           </p:nvSpPr>
           <p:spPr>
             <a:xfrm>
-              <a:off x="1725183" y="3058005"/>
+              <a:off x="1737304" y="3058005"/>
               <a:ext cx="62384" cy="62384"/>
             </a:xfrm>
             <a:prstGeom prst="ellipse">
@@ -3338,7 +3338,7 @@
           </p:nvSpPr>
           <p:spPr>
             <a:xfrm>
-              <a:off x="1575163" y="3329839"/>
+              <a:off x="1573269" y="3329839"/>
               <a:ext cx="62384" cy="62384"/>
             </a:xfrm>
             <a:prstGeom prst="ellipse">
@@ -3364,7 +3364,7 @@
           </p:nvSpPr>
           <p:spPr>
             <a:xfrm>
-              <a:off x="1744137" y="3159469"/>
+              <a:off x="1721712" y="3159469"/>
               <a:ext cx="62384" cy="62384"/>
             </a:xfrm>
             <a:prstGeom prst="ellipse">
@@ -3390,7 +3390,7 @@
           </p:nvSpPr>
           <p:spPr>
             <a:xfrm>
-              <a:off x="1601677" y="2723279"/>
+              <a:off x="1572432" y="2723279"/>
               <a:ext cx="62384" cy="62384"/>
             </a:xfrm>
             <a:prstGeom prst="ellipse">
@@ -3416,7 +3416,7 @@
           </p:nvSpPr>
           <p:spPr>
             <a:xfrm>
-              <a:off x="1767203" y="2857951"/>
+              <a:off x="1777363" y="2857951"/>
               <a:ext cx="62384" cy="62384"/>
             </a:xfrm>
             <a:prstGeom prst="ellipse">
@@ -3442,7 +3442,7 @@
           </p:nvSpPr>
           <p:spPr>
             <a:xfrm>
-              <a:off x="1606099" y="2960081"/>
+              <a:off x="1593075" y="2960081"/>
               <a:ext cx="62384" cy="62384"/>
             </a:xfrm>
             <a:prstGeom prst="ellipse">
@@ -3468,7 +3468,7 @@
           </p:nvSpPr>
           <p:spPr>
             <a:xfrm>
-              <a:off x="1741472" y="2804627"/>
+              <a:off x="1729048" y="2804627"/>
               <a:ext cx="62384" cy="62384"/>
             </a:xfrm>
             <a:prstGeom prst="ellipse">
@@ -3494,7 +3494,7 @@
           </p:nvSpPr>
           <p:spPr>
             <a:xfrm>
-              <a:off x="1600682" y="3025202"/>
+              <a:off x="1601709" y="3025202"/>
               <a:ext cx="62384" cy="62384"/>
             </a:xfrm>
             <a:prstGeom prst="ellipse">
@@ -3520,7 +3520,7 @@
           </p:nvSpPr>
           <p:spPr>
             <a:xfrm>
-              <a:off x="1769772" y="3048931"/>
+              <a:off x="1725239" y="3048931"/>
               <a:ext cx="62384" cy="62384"/>
             </a:xfrm>
             <a:prstGeom prst="ellipse">
@@ -3546,7 +3546,7 @@
           </p:nvSpPr>
           <p:spPr>
             <a:xfrm>
-              <a:off x="1579256" y="2684204"/>
+              <a:off x="1597307" y="2684204"/>
               <a:ext cx="62384" cy="62384"/>
             </a:xfrm>
             <a:prstGeom prst="ellipse">
@@ -3572,7 +3572,7 @@
           </p:nvSpPr>
           <p:spPr>
             <a:xfrm>
-              <a:off x="1746339" y="3289196"/>
+              <a:off x="1775642" y="3289196"/>
               <a:ext cx="62384" cy="62384"/>
             </a:xfrm>
             <a:prstGeom prst="ellipse">
@@ -3598,7 +3598,7 @@
           </p:nvSpPr>
           <p:spPr>
             <a:xfrm>
-              <a:off x="1570644" y="2944655"/>
+              <a:off x="1596116" y="2944655"/>
               <a:ext cx="62384" cy="62384"/>
             </a:xfrm>
             <a:prstGeom prst="ellipse">
@@ -3624,7 +3624,7 @@
           </p:nvSpPr>
           <p:spPr>
             <a:xfrm>
-              <a:off x="1731106" y="2888765"/>
+              <a:off x="1713175" y="2888765"/>
               <a:ext cx="62384" cy="62384"/>
             </a:xfrm>
             <a:prstGeom prst="ellipse">
@@ -3650,7 +3650,7 @@
           </p:nvSpPr>
           <p:spPr>
             <a:xfrm>
-              <a:off x="1603397" y="3278753"/>
+              <a:off x="1607197" y="3278753"/>
               <a:ext cx="62384" cy="62384"/>
             </a:xfrm>
             <a:prstGeom prst="ellipse">
@@ -3676,7 +3676,7 @@
           </p:nvSpPr>
           <p:spPr>
             <a:xfrm>
-              <a:off x="1764757" y="2993327"/>
+              <a:off x="1712180" y="2993327"/>
               <a:ext cx="62384" cy="62384"/>
             </a:xfrm>
             <a:prstGeom prst="ellipse">
@@ -3702,7 +3702,7 @@
           </p:nvSpPr>
           <p:spPr>
             <a:xfrm>
-              <a:off x="1565790" y="2913294"/>
+              <a:off x="1596512" y="2913294"/>
               <a:ext cx="62384" cy="62384"/>
             </a:xfrm>
             <a:prstGeom prst="ellipse">
@@ -3728,7 +3728,7 @@
           </p:nvSpPr>
           <p:spPr>
             <a:xfrm>
-              <a:off x="1779359" y="2822482"/>
+              <a:off x="1757545" y="2822482"/>
               <a:ext cx="62384" cy="62384"/>
             </a:xfrm>
             <a:prstGeom prst="ellipse">
@@ -3754,7 +3754,7 @@
           </p:nvSpPr>
           <p:spPr>
             <a:xfrm>
-              <a:off x="1595377" y="2578234"/>
+              <a:off x="1588176" y="2578234"/>
               <a:ext cx="62384" cy="62384"/>
             </a:xfrm>
             <a:prstGeom prst="ellipse">
@@ -3780,7 +3780,7 @@
           </p:nvSpPr>
           <p:spPr>
             <a:xfrm>
-              <a:off x="1721975" y="2535771"/>
+              <a:off x="1759806" y="2535771"/>
               <a:ext cx="62384" cy="62384"/>
             </a:xfrm>
             <a:prstGeom prst="ellipse">
@@ -3806,7 +3806,7 @@
           </p:nvSpPr>
           <p:spPr>
             <a:xfrm>
-              <a:off x="1585586" y="3668974"/>
+              <a:off x="1582745" y="3668974"/>
               <a:ext cx="62384" cy="62384"/>
             </a:xfrm>
             <a:prstGeom prst="ellipse">
@@ -3832,7 +3832,7 @@
           </p:nvSpPr>
           <p:spPr>
             <a:xfrm>
-              <a:off x="1781826" y="3042969"/>
+              <a:off x="1740335" y="3042969"/>
               <a:ext cx="62384" cy="62384"/>
             </a:xfrm>
             <a:prstGeom prst="ellipse">
@@ -3858,7 +3858,7 @@
           </p:nvSpPr>
           <p:spPr>
             <a:xfrm>
-              <a:off x="1618194" y="2778066"/>
+              <a:off x="1605717" y="2778066"/>
               <a:ext cx="62384" cy="62384"/>
             </a:xfrm>
             <a:prstGeom prst="ellipse">
@@ -3884,7 +3884,7 @@
           </p:nvSpPr>
           <p:spPr>
             <a:xfrm>
-              <a:off x="1750785" y="2618095"/>
+              <a:off x="1714901" y="2618095"/>
               <a:ext cx="62384" cy="62384"/>
             </a:xfrm>
             <a:prstGeom prst="ellipse">
@@ -3910,7 +3910,7 @@
           </p:nvSpPr>
           <p:spPr>
             <a:xfrm>
-              <a:off x="1605964" y="2853899"/>
+              <a:off x="1619615" y="2853899"/>
               <a:ext cx="62384" cy="62384"/>
             </a:xfrm>
             <a:prstGeom prst="ellipse">
@@ -3936,7 +3936,7 @@
           </p:nvSpPr>
           <p:spPr>
             <a:xfrm>
-              <a:off x="1724677" y="2820167"/>
+              <a:off x="1727826" y="2820167"/>
               <a:ext cx="62384" cy="62384"/>
             </a:xfrm>
             <a:prstGeom prst="ellipse">
@@ -3962,7 +3962,7 @@
           </p:nvSpPr>
           <p:spPr>
             <a:xfrm>
-              <a:off x="1627467" y="3070382"/>
+              <a:off x="1568560" y="3070382"/>
               <a:ext cx="62384" cy="62384"/>
             </a:xfrm>
             <a:prstGeom prst="ellipse">
@@ -3988,7 +3988,7 @@
           </p:nvSpPr>
           <p:spPr>
             <a:xfrm>
-              <a:off x="1735856" y="3250503"/>
+              <a:off x="1767334" y="3250503"/>
               <a:ext cx="62384" cy="62384"/>
             </a:xfrm>
             <a:prstGeom prst="ellipse">
@@ -4014,7 +4014,7 @@
           </p:nvSpPr>
           <p:spPr>
             <a:xfrm>
-              <a:off x="1561861" y="2649449"/>
+              <a:off x="1601749" y="2649449"/>
               <a:ext cx="62384" cy="62384"/>
             </a:xfrm>
             <a:prstGeom prst="ellipse">
@@ -4040,7 +4040,7 @@
           </p:nvSpPr>
           <p:spPr>
             <a:xfrm>
-              <a:off x="1772600" y="2739757"/>
+              <a:off x="1730872" y="2739757"/>
               <a:ext cx="62384" cy="62384"/>
             </a:xfrm>
             <a:prstGeom prst="ellipse">
@@ -4066,7 +4066,7 @@
           </p:nvSpPr>
           <p:spPr>
             <a:xfrm>
-              <a:off x="1624363" y="2422340"/>
+              <a:off x="1582385" y="2422340"/>
               <a:ext cx="62384" cy="62384"/>
             </a:xfrm>
             <a:prstGeom prst="ellipse">
@@ -4092,7 +4092,7 @@
           </p:nvSpPr>
           <p:spPr>
             <a:xfrm>
-              <a:off x="1783017" y="2323803"/>
+              <a:off x="1737139" y="2323803"/>
               <a:ext cx="62384" cy="62384"/>
             </a:xfrm>
             <a:prstGeom prst="ellipse">
@@ -4118,7 +4118,7 @@
           </p:nvSpPr>
           <p:spPr>
             <a:xfrm>
-              <a:off x="1615385" y="2697920"/>
+              <a:off x="1612052" y="2697920"/>
               <a:ext cx="62384" cy="62384"/>
             </a:xfrm>
             <a:prstGeom prst="ellipse">
@@ -4144,7 +4144,7 @@
           </p:nvSpPr>
           <p:spPr>
             <a:xfrm>
-              <a:off x="1732337" y="2464423"/>
+              <a:off x="1750865" y="2464423"/>
               <a:ext cx="62384" cy="62384"/>
             </a:xfrm>
             <a:prstGeom prst="ellipse">
@@ -4170,7 +4170,7 @@
           </p:nvSpPr>
           <p:spPr>
             <a:xfrm>
-              <a:off x="1607624" y="3097483"/>
+              <a:off x="1584862" y="3097483"/>
               <a:ext cx="62384" cy="62384"/>
             </a:xfrm>
             <a:prstGeom prst="ellipse">
@@ -4196,7 +4196,7 @@
           </p:nvSpPr>
           <p:spPr>
             <a:xfrm>
-              <a:off x="1784207" y="2950431"/>
+              <a:off x="1730279" y="2950431"/>
               <a:ext cx="62384" cy="62384"/>
             </a:xfrm>
             <a:prstGeom prst="ellipse">
@@ -4222,7 +4222,7 @@
           </p:nvSpPr>
           <p:spPr>
             <a:xfrm>
-              <a:off x="1620366" y="3048519"/>
+              <a:off x="1611686" y="3048519"/>
               <a:ext cx="62384" cy="62384"/>
             </a:xfrm>
             <a:prstGeom prst="ellipse">
@@ -4248,7 +4248,7 @@
           </p:nvSpPr>
           <p:spPr>
             <a:xfrm>
-              <a:off x="1768044" y="3132901"/>
+              <a:off x="1756815" y="3132901"/>
               <a:ext cx="62384" cy="62384"/>
             </a:xfrm>
             <a:prstGeom prst="ellipse">
@@ -4274,7 +4274,7 @@
           </p:nvSpPr>
           <p:spPr>
             <a:xfrm>
-              <a:off x="1578772" y="2721944"/>
+              <a:off x="1561841" y="2721944"/>
               <a:ext cx="62384" cy="62384"/>
             </a:xfrm>
             <a:prstGeom prst="ellipse">
@@ -4300,7 +4300,7 @@
           </p:nvSpPr>
           <p:spPr>
             <a:xfrm>
-              <a:off x="1766438" y="2793445"/>
+              <a:off x="1753795" y="2793445"/>
               <a:ext cx="62384" cy="62384"/>
             </a:xfrm>
             <a:prstGeom prst="ellipse">
@@ -4326,7 +4326,7 @@
           </p:nvSpPr>
           <p:spPr>
             <a:xfrm>
-              <a:off x="1583527" y="2649817"/>
+              <a:off x="1593590" y="2649817"/>
               <a:ext cx="62384" cy="62384"/>
             </a:xfrm>
             <a:prstGeom prst="ellipse">
@@ -4352,7 +4352,7 @@
           </p:nvSpPr>
           <p:spPr>
             <a:xfrm>
-              <a:off x="1783147" y="2403778"/>
+              <a:off x="1784568" y="2403778"/>
               <a:ext cx="62384" cy="62384"/>
             </a:xfrm>
             <a:prstGeom prst="ellipse">
@@ -4378,7 +4378,7 @@
           </p:nvSpPr>
           <p:spPr>
             <a:xfrm>
-              <a:off x="1584936" y="3074839"/>
+              <a:off x="1626186" y="3074839"/>
               <a:ext cx="62384" cy="62384"/>
             </a:xfrm>
             <a:prstGeom prst="ellipse">
@@ -4404,7 +4404,7 @@
           </p:nvSpPr>
           <p:spPr>
             <a:xfrm>
-              <a:off x="1771694" y="2896464"/>
+              <a:off x="1783431" y="2896464"/>
               <a:ext cx="62384" cy="62384"/>
             </a:xfrm>
             <a:prstGeom prst="ellipse">
@@ -4430,7 +4430,7 @@
           </p:nvSpPr>
           <p:spPr>
             <a:xfrm>
-              <a:off x="1621143" y="2720308"/>
+              <a:off x="1607095" y="2720308"/>
               <a:ext cx="62384" cy="62384"/>
             </a:xfrm>
             <a:prstGeom prst="ellipse">
@@ -4456,7 +4456,7 @@
           </p:nvSpPr>
           <p:spPr>
             <a:xfrm>
-              <a:off x="1778987" y="2811625"/>
+              <a:off x="1735670" y="2811625"/>
               <a:ext cx="62384" cy="62384"/>
             </a:xfrm>
             <a:prstGeom prst="ellipse">
@@ -4482,7 +4482,7 @@
           </p:nvSpPr>
           <p:spPr>
             <a:xfrm>
-              <a:off x="1595209" y="3087167"/>
+              <a:off x="1595272" y="3087167"/>
               <a:ext cx="62384" cy="62384"/>
             </a:xfrm>
             <a:prstGeom prst="ellipse">
@@ -4508,7 +4508,7 @@
           </p:nvSpPr>
           <p:spPr>
             <a:xfrm>
-              <a:off x="1720008" y="2347825"/>
+              <a:off x="1730164" y="2347825"/>
               <a:ext cx="62384" cy="62384"/>
             </a:xfrm>
             <a:prstGeom prst="ellipse">
@@ -4534,7 +4534,7 @@
           </p:nvSpPr>
           <p:spPr>
             <a:xfrm>
-              <a:off x="1603326" y="2639045"/>
+              <a:off x="1616936" y="2639045"/>
               <a:ext cx="62384" cy="62384"/>
             </a:xfrm>
             <a:prstGeom prst="ellipse">
@@ -4560,7 +4560,7 @@
           </p:nvSpPr>
           <p:spPr>
             <a:xfrm>
-              <a:off x="1727757" y="2127249"/>
+              <a:off x="1774178" y="2127249"/>
               <a:ext cx="62384" cy="62384"/>
             </a:xfrm>
             <a:prstGeom prst="ellipse">
@@ -4586,7 +4586,7 @@
           </p:nvSpPr>
           <p:spPr>
             <a:xfrm>
-              <a:off x="1617119" y="2777354"/>
+              <a:off x="1616427" y="2777354"/>
               <a:ext cx="62384" cy="62384"/>
             </a:xfrm>
             <a:prstGeom prst="ellipse">
@@ -4612,7 +4612,7 @@
           </p:nvSpPr>
           <p:spPr>
             <a:xfrm>
-              <a:off x="1748514" y="2780534"/>
+              <a:off x="1771234" y="2780534"/>
               <a:ext cx="62384" cy="62384"/>
             </a:xfrm>
             <a:prstGeom prst="ellipse">
@@ -4638,7 +4638,7 @@
           </p:nvSpPr>
           <p:spPr>
             <a:xfrm>
-              <a:off x="1599342" y="2885492"/>
+              <a:off x="1596782" y="2885492"/>
               <a:ext cx="62384" cy="62384"/>
             </a:xfrm>
             <a:prstGeom prst="ellipse">
@@ -4664,7 +4664,7 @@
           </p:nvSpPr>
           <p:spPr>
             <a:xfrm>
-              <a:off x="1730686" y="2588544"/>
+              <a:off x="1718891" y="2588544"/>
               <a:ext cx="62384" cy="62384"/>
             </a:xfrm>
             <a:prstGeom prst="ellipse">
@@ -4690,7 +4690,7 @@
           </p:nvSpPr>
           <p:spPr>
             <a:xfrm>
-              <a:off x="1623798" y="3559667"/>
+              <a:off x="1586932" y="3559667"/>
               <a:ext cx="62384" cy="62384"/>
             </a:xfrm>
             <a:prstGeom prst="ellipse">
@@ -4716,7 +4716,7 @@
           </p:nvSpPr>
           <p:spPr>
             <a:xfrm>
-              <a:off x="1743789" y="3240465"/>
+              <a:off x="1772483" y="3240465"/>
               <a:ext cx="62384" cy="62384"/>
             </a:xfrm>
             <a:prstGeom prst="ellipse">
@@ -4742,7 +4742,7 @@
           </p:nvSpPr>
           <p:spPr>
             <a:xfrm>
-              <a:off x="1572152" y="2580551"/>
+              <a:off x="1617118" y="2580551"/>
               <a:ext cx="62384" cy="62384"/>
             </a:xfrm>
             <a:prstGeom prst="ellipse">
@@ -4768,7 +4768,7 @@
           </p:nvSpPr>
           <p:spPr>
             <a:xfrm>
-              <a:off x="1755061" y="2390593"/>
+              <a:off x="1741941" y="2390593"/>
               <a:ext cx="62384" cy="62384"/>
             </a:xfrm>
             <a:prstGeom prst="ellipse">
@@ -4794,7 +4794,7 @@
           </p:nvSpPr>
           <p:spPr>
             <a:xfrm>
-              <a:off x="1565529" y="2762011"/>
+              <a:off x="1606618" y="2762011"/>
               <a:ext cx="62384" cy="62384"/>
             </a:xfrm>
             <a:prstGeom prst="ellipse">
@@ -4820,7 +4820,7 @@
           </p:nvSpPr>
           <p:spPr>
             <a:xfrm>
-              <a:off x="1774401" y="2903949"/>
+              <a:off x="1729774" y="2903949"/>
               <a:ext cx="62384" cy="62384"/>
             </a:xfrm>
             <a:prstGeom prst="ellipse">
@@ -4846,7 +4846,7 @@
           </p:nvSpPr>
           <p:spPr>
             <a:xfrm>
-              <a:off x="1621752" y="2494752"/>
+              <a:off x="1635172" y="2494752"/>
               <a:ext cx="62384" cy="62384"/>
             </a:xfrm>
             <a:prstGeom prst="ellipse">
@@ -4872,7 +4872,7 @@
           </p:nvSpPr>
           <p:spPr>
             <a:xfrm>
-              <a:off x="1711390" y="2271451"/>
+              <a:off x="1728767" y="2271451"/>
               <a:ext cx="62384" cy="62384"/>
             </a:xfrm>
             <a:prstGeom prst="ellipse">
@@ -4898,7 +4898,7 @@
           </p:nvSpPr>
           <p:spPr>
             <a:xfrm>
-              <a:off x="1592734" y="2861663"/>
+              <a:off x="1634120" y="2861663"/>
               <a:ext cx="62384" cy="62384"/>
             </a:xfrm>
             <a:prstGeom prst="ellipse">
@@ -4924,7 +4924,7 @@
           </p:nvSpPr>
           <p:spPr>
             <a:xfrm>
-              <a:off x="1743823" y="2558820"/>
+              <a:off x="1764997" y="2558820"/>
               <a:ext cx="62384" cy="62384"/>
             </a:xfrm>
             <a:prstGeom prst="ellipse">
@@ -4950,7 +4950,7 @@
           </p:nvSpPr>
           <p:spPr>
             <a:xfrm>
-              <a:off x="1580266" y="2550903"/>
+              <a:off x="1566224" y="2550903"/>
               <a:ext cx="62384" cy="62384"/>
             </a:xfrm>
             <a:prstGeom prst="ellipse">
@@ -4976,7 +4976,7 @@
           </p:nvSpPr>
           <p:spPr>
             <a:xfrm>
-              <a:off x="1749041" y="2717918"/>
+              <a:off x="1776379" y="2717918"/>
               <a:ext cx="62384" cy="62384"/>
             </a:xfrm>
             <a:prstGeom prst="ellipse">
@@ -5002,7 +5002,7 @@
           </p:nvSpPr>
           <p:spPr>
             <a:xfrm>
-              <a:off x="1608441" y="2642682"/>
+              <a:off x="1595682" y="2642682"/>
               <a:ext cx="62384" cy="62384"/>
             </a:xfrm>
             <a:prstGeom prst="ellipse">
@@ -5028,7 +5028,7 @@
           </p:nvSpPr>
           <p:spPr>
             <a:xfrm>
-              <a:off x="1752610" y="2922285"/>
+              <a:off x="1761062" y="2922285"/>
               <a:ext cx="62384" cy="62384"/>
             </a:xfrm>
             <a:prstGeom prst="ellipse">
@@ -5054,7 +5054,7 @@
           </p:nvSpPr>
           <p:spPr>
             <a:xfrm>
-              <a:off x="1591214" y="2351266"/>
+              <a:off x="1594859" y="2351266"/>
               <a:ext cx="62384" cy="62384"/>
             </a:xfrm>
             <a:prstGeom prst="ellipse">
@@ -5080,7 +5080,7 @@
           </p:nvSpPr>
           <p:spPr>
             <a:xfrm>
-              <a:off x="1739832" y="2464180"/>
+              <a:off x="1735077" y="2464180"/>
               <a:ext cx="62384" cy="62384"/>
             </a:xfrm>
             <a:prstGeom prst="ellipse">
@@ -5106,7 +5106,7 @@
           </p:nvSpPr>
           <p:spPr>
             <a:xfrm>
-              <a:off x="1635637" y="2879596"/>
+              <a:off x="1621128" y="2879596"/>
               <a:ext cx="62384" cy="62384"/>
             </a:xfrm>
             <a:prstGeom prst="ellipse">
@@ -5132,7 +5132,7 @@
           </p:nvSpPr>
           <p:spPr>
             <a:xfrm>
-              <a:off x="1711300" y="3015602"/>
+              <a:off x="1726371" y="3015602"/>
               <a:ext cx="62384" cy="62384"/>
             </a:xfrm>
             <a:prstGeom prst="ellipse">
@@ -5158,7 +5158,7 @@
           </p:nvSpPr>
           <p:spPr>
             <a:xfrm>
-              <a:off x="1589783" y="2959279"/>
+              <a:off x="1636494" y="2959279"/>
               <a:ext cx="62384" cy="62384"/>
             </a:xfrm>
             <a:prstGeom prst="ellipse">
@@ -5184,7 +5184,7 @@
           </p:nvSpPr>
           <p:spPr>
             <a:xfrm>
-              <a:off x="1768228" y="2999779"/>
+              <a:off x="1746037" y="2999779"/>
               <a:ext cx="62384" cy="62384"/>
             </a:xfrm>
             <a:prstGeom prst="ellipse">
@@ -5210,7 +5210,7 @@
           </p:nvSpPr>
           <p:spPr>
             <a:xfrm>
-              <a:off x="1569865" y="2891195"/>
+              <a:off x="1609297" y="2891195"/>
               <a:ext cx="62384" cy="62384"/>
             </a:xfrm>
             <a:prstGeom prst="ellipse">
@@ -5236,7 +5236,7 @@
           </p:nvSpPr>
           <p:spPr>
             <a:xfrm>
-              <a:off x="1723447" y="2901293"/>
+              <a:off x="1727885" y="2901293"/>
               <a:ext cx="62384" cy="62384"/>
             </a:xfrm>
             <a:prstGeom prst="ellipse">
@@ -5262,7 +5262,7 @@
           </p:nvSpPr>
           <p:spPr>
             <a:xfrm>
-              <a:off x="1632503" y="1624175"/>
+              <a:off x="1614064" y="1624175"/>
               <a:ext cx="62384" cy="62384"/>
             </a:xfrm>
             <a:prstGeom prst="ellipse">
@@ -5288,7 +5288,7 @@
           </p:nvSpPr>
           <p:spPr>
             <a:xfrm>
-              <a:off x="1755232" y="1979705"/>
+              <a:off x="1726064" y="1979705"/>
               <a:ext cx="62384" cy="62384"/>
             </a:xfrm>
             <a:prstGeom prst="ellipse">
@@ -5314,7 +5314,7 @@
           </p:nvSpPr>
           <p:spPr>
             <a:xfrm>
-              <a:off x="1626901" y="2020599"/>
+              <a:off x="1621282" y="2020599"/>
               <a:ext cx="62384" cy="62384"/>
             </a:xfrm>
             <a:prstGeom prst="ellipse">
@@ -5340,7 +5340,7 @@
           </p:nvSpPr>
           <p:spPr>
             <a:xfrm>
-              <a:off x="1777693" y="2279365"/>
+              <a:off x="1734505" y="2279365"/>
               <a:ext cx="62384" cy="62384"/>
             </a:xfrm>
             <a:prstGeom prst="ellipse">
@@ -5366,7 +5366,7 @@
           </p:nvSpPr>
           <p:spPr>
             <a:xfrm>
-              <a:off x="1608542" y="3119717"/>
+              <a:off x="1568500" y="3119717"/>
               <a:ext cx="62384" cy="62384"/>
             </a:xfrm>
             <a:prstGeom prst="ellipse">
@@ -5392,7 +5392,7 @@
           </p:nvSpPr>
           <p:spPr>
             <a:xfrm>
-              <a:off x="1743913" y="2961756"/>
+              <a:off x="1782132" y="2961756"/>
               <a:ext cx="62384" cy="62384"/>
             </a:xfrm>
             <a:prstGeom prst="ellipse">
@@ -5418,7 +5418,7 @@
           </p:nvSpPr>
           <p:spPr>
             <a:xfrm>
-              <a:off x="1581602" y="3202020"/>
+              <a:off x="1572842" y="3202020"/>
               <a:ext cx="62384" cy="62384"/>
             </a:xfrm>
             <a:prstGeom prst="ellipse">
@@ -5444,7 +5444,7 @@
           </p:nvSpPr>
           <p:spPr>
             <a:xfrm>
-              <a:off x="1731500" y="3145362"/>
+              <a:off x="1748952" y="3145362"/>
               <a:ext cx="62384" cy="62384"/>
             </a:xfrm>
             <a:prstGeom prst="ellipse">
@@ -5470,7 +5470,7 @@
           </p:nvSpPr>
           <p:spPr>
             <a:xfrm>
-              <a:off x="1612864" y="3002354"/>
+              <a:off x="1626772" y="3002354"/>
               <a:ext cx="62384" cy="62384"/>
             </a:xfrm>
             <a:prstGeom prst="ellipse">
@@ -5496,7 +5496,7 @@
           </p:nvSpPr>
           <p:spPr>
             <a:xfrm>
-              <a:off x="1717700" y="3078609"/>
+              <a:off x="1774253" y="3078609"/>
               <a:ext cx="62384" cy="62384"/>
             </a:xfrm>
             <a:prstGeom prst="ellipse">
@@ -5522,7 +5522,7 @@
           </p:nvSpPr>
           <p:spPr>
             <a:xfrm>
-              <a:off x="1581909" y="2609586"/>
+              <a:off x="1572658" y="2609586"/>
               <a:ext cx="62384" cy="62384"/>
             </a:xfrm>
             <a:prstGeom prst="ellipse">
@@ -5548,7 +5548,7 @@
           </p:nvSpPr>
           <p:spPr>
             <a:xfrm>
-              <a:off x="1737507" y="2983647"/>
+              <a:off x="1724967" y="2983647"/>
               <a:ext cx="62384" cy="62384"/>
             </a:xfrm>
             <a:prstGeom prst="ellipse">
@@ -5574,7 +5574,7 @@
           </p:nvSpPr>
           <p:spPr>
             <a:xfrm>
-              <a:off x="1612655" y="2955681"/>
+              <a:off x="1590360" y="2955681"/>
               <a:ext cx="62384" cy="62384"/>
             </a:xfrm>
             <a:prstGeom prst="ellipse">
@@ -5600,7 +5600,7 @@
           </p:nvSpPr>
           <p:spPr>
             <a:xfrm>
-              <a:off x="1781189" y="3088754"/>
+              <a:off x="1778470" y="3088754"/>
               <a:ext cx="62384" cy="62384"/>
             </a:xfrm>
             <a:prstGeom prst="ellipse">
@@ -5626,7 +5626,7 @@
           </p:nvSpPr>
           <p:spPr>
             <a:xfrm>
-              <a:off x="1623280" y="2807407"/>
+              <a:off x="1621160" y="2807407"/>
               <a:ext cx="62384" cy="62384"/>
             </a:xfrm>
             <a:prstGeom prst="ellipse">
@@ -5652,7 +5652,7 @@
           </p:nvSpPr>
           <p:spPr>
             <a:xfrm>
-              <a:off x="1765196" y="2973149"/>
+              <a:off x="1714158" y="2973149"/>
               <a:ext cx="62384" cy="62384"/>
             </a:xfrm>
             <a:prstGeom prst="ellipse">
@@ -5678,7 +5678,7 @@
           </p:nvSpPr>
           <p:spPr>
             <a:xfrm>
-              <a:off x="1579738" y="2842692"/>
+              <a:off x="1624801" y="2842692"/>
               <a:ext cx="62384" cy="62384"/>
             </a:xfrm>
             <a:prstGeom prst="ellipse">
@@ -5704,7 +5704,7 @@
           </p:nvSpPr>
           <p:spPr>
             <a:xfrm>
-              <a:off x="1763965" y="2980880"/>
+              <a:off x="1749851" y="2980880"/>
               <a:ext cx="62384" cy="62384"/>
             </a:xfrm>
             <a:prstGeom prst="ellipse">
@@ -5730,7 +5730,7 @@
           </p:nvSpPr>
           <p:spPr>
             <a:xfrm>
-              <a:off x="1616620" y="2773278"/>
+              <a:off x="1587840" y="2773278"/>
               <a:ext cx="62384" cy="62384"/>
             </a:xfrm>
             <a:prstGeom prst="ellipse">
@@ -5756,7 +5756,7 @@
           </p:nvSpPr>
           <p:spPr>
             <a:xfrm>
-              <a:off x="1721052" y="2892856"/>
+              <a:off x="1726828" y="2892856"/>
               <a:ext cx="62384" cy="62384"/>
             </a:xfrm>
             <a:prstGeom prst="ellipse">
@@ -5782,7 +5782,7 @@
           </p:nvSpPr>
           <p:spPr>
             <a:xfrm>
-              <a:off x="1581829" y="3088872"/>
+              <a:off x="1618934" y="3088872"/>
               <a:ext cx="62384" cy="62384"/>
             </a:xfrm>
             <a:prstGeom prst="ellipse">
@@ -5808,7 +5808,7 @@
           </p:nvSpPr>
           <p:spPr>
             <a:xfrm>
-              <a:off x="1748700" y="2895185"/>
+              <a:off x="1733905" y="2895185"/>
               <a:ext cx="62384" cy="62384"/>
             </a:xfrm>
             <a:prstGeom prst="ellipse">
@@ -5834,7 +5834,7 @@
           </p:nvSpPr>
           <p:spPr>
             <a:xfrm>
-              <a:off x="1613107" y="2778970"/>
+              <a:off x="1591964" y="2778970"/>
               <a:ext cx="62384" cy="62384"/>
             </a:xfrm>
             <a:prstGeom prst="ellipse">
@@ -5860,7 +5860,7 @@
           </p:nvSpPr>
           <p:spPr>
             <a:xfrm>
-              <a:off x="1774147" y="2861090"/>
+              <a:off x="1763935" y="2861090"/>
               <a:ext cx="62384" cy="62384"/>
             </a:xfrm>
             <a:prstGeom prst="ellipse">
@@ -5886,7 +5886,7 @@
           </p:nvSpPr>
           <p:spPr>
             <a:xfrm>
-              <a:off x="1582081" y="3026748"/>
+              <a:off x="1591617" y="3026748"/>
               <a:ext cx="62384" cy="62384"/>
             </a:xfrm>
             <a:prstGeom prst="ellipse">
@@ -5912,7 +5912,7 @@
           </p:nvSpPr>
           <p:spPr>
             <a:xfrm>
-              <a:off x="1757152" y="2942926"/>
+              <a:off x="1762503" y="2942926"/>
               <a:ext cx="62384" cy="62384"/>
             </a:xfrm>
             <a:prstGeom prst="ellipse">
@@ -5938,7 +5938,7 @@
           </p:nvSpPr>
           <p:spPr>
             <a:xfrm>
-              <a:off x="1591929" y="3053785"/>
+              <a:off x="1623200" y="3053785"/>
               <a:ext cx="62384" cy="62384"/>
             </a:xfrm>
             <a:prstGeom prst="ellipse">
@@ -5964,7 +5964,7 @@
           </p:nvSpPr>
           <p:spPr>
             <a:xfrm>
-              <a:off x="1770415" y="3214068"/>
+              <a:off x="1775273" y="3214068"/>
               <a:ext cx="62384" cy="62384"/>
             </a:xfrm>
             <a:prstGeom prst="ellipse">
@@ -5990,7 +5990,7 @@
           </p:nvSpPr>
           <p:spPr>
             <a:xfrm>
-              <a:off x="1628868" y="2779430"/>
+              <a:off x="1630498" y="2779430"/>
               <a:ext cx="62384" cy="62384"/>
             </a:xfrm>
             <a:prstGeom prst="ellipse">
@@ -6016,7 +6016,7 @@
           </p:nvSpPr>
           <p:spPr>
             <a:xfrm>
-              <a:off x="1710853" y="2999628"/>
+              <a:off x="1724157" y="2999628"/>
               <a:ext cx="62384" cy="62384"/>
             </a:xfrm>
             <a:prstGeom prst="ellipse">
@@ -6042,7 +6042,7 @@
           </p:nvSpPr>
           <p:spPr>
             <a:xfrm>
-              <a:off x="1607861" y="2849785"/>
+              <a:off x="1574694" y="2849785"/>
               <a:ext cx="62384" cy="62384"/>
             </a:xfrm>
             <a:prstGeom prst="ellipse">
@@ -6068,7 +6068,7 @@
           </p:nvSpPr>
           <p:spPr>
             <a:xfrm>
-              <a:off x="1734721" y="3136949"/>
+              <a:off x="1769920" y="3136949"/>
               <a:ext cx="62384" cy="62384"/>
             </a:xfrm>
             <a:prstGeom prst="ellipse">
@@ -6094,7 +6094,7 @@
           </p:nvSpPr>
           <p:spPr>
             <a:xfrm>
-              <a:off x="1586834" y="2877876"/>
+              <a:off x="1618545" y="2877876"/>
               <a:ext cx="62384" cy="62384"/>
             </a:xfrm>
             <a:prstGeom prst="ellipse">
@@ -6120,7 +6120,7 @@
           </p:nvSpPr>
           <p:spPr>
             <a:xfrm>
-              <a:off x="1746546" y="3068460"/>
+              <a:off x="1728949" y="3068460"/>
               <a:ext cx="62384" cy="62384"/>
             </a:xfrm>
             <a:prstGeom prst="ellipse">
@@ -6146,7 +6146,7 @@
           </p:nvSpPr>
           <p:spPr>
             <a:xfrm>
-              <a:off x="1581734" y="2027633"/>
+              <a:off x="1627204" y="2027633"/>
               <a:ext cx="62384" cy="62384"/>
             </a:xfrm>
             <a:prstGeom prst="ellipse">
@@ -6172,7 +6172,7 @@
           </p:nvSpPr>
           <p:spPr>
             <a:xfrm>
-              <a:off x="1764671" y="3145486"/>
+              <a:off x="1764396" y="3145486"/>
               <a:ext cx="62384" cy="62384"/>
             </a:xfrm>
             <a:prstGeom prst="ellipse">
@@ -6198,7 +6198,7 @@
           </p:nvSpPr>
           <p:spPr>
             <a:xfrm>
-              <a:off x="1605640" y="3310021"/>
+              <a:off x="1576816" y="3310021"/>
               <a:ext cx="62384" cy="62384"/>
             </a:xfrm>
             <a:prstGeom prst="ellipse">
@@ -6224,7 +6224,7 @@
           </p:nvSpPr>
           <p:spPr>
             <a:xfrm>
-              <a:off x="1743749" y="2920993"/>
+              <a:off x="1721229" y="2920993"/>
               <a:ext cx="62384" cy="62384"/>
             </a:xfrm>
             <a:prstGeom prst="ellipse">
@@ -6250,7 +6250,7 @@
           </p:nvSpPr>
           <p:spPr>
             <a:xfrm>
-              <a:off x="1575269" y="3214152"/>
+              <a:off x="1636680" y="3214152"/>
               <a:ext cx="62384" cy="62384"/>
             </a:xfrm>
             <a:prstGeom prst="ellipse">
@@ -6276,7 +6276,7 @@
           </p:nvSpPr>
           <p:spPr>
             <a:xfrm>
-              <a:off x="1734430" y="3028780"/>
+              <a:off x="1763644" y="3028780"/>
               <a:ext cx="62384" cy="62384"/>
             </a:xfrm>
             <a:prstGeom prst="ellipse">
@@ -6302,7 +6302,7 @@
           </p:nvSpPr>
           <p:spPr>
             <a:xfrm>
-              <a:off x="1597509" y="2851195"/>
+              <a:off x="1580133" y="2851195"/>
               <a:ext cx="62384" cy="62384"/>
             </a:xfrm>
             <a:prstGeom prst="ellipse">
@@ -6328,7 +6328,7 @@
           </p:nvSpPr>
           <p:spPr>
             <a:xfrm>
-              <a:off x="1757099" y="3010283"/>
+              <a:off x="1764283" y="3010283"/>
               <a:ext cx="62384" cy="62384"/>
             </a:xfrm>
             <a:prstGeom prst="ellipse">
@@ -6354,7 +6354,7 @@
           </p:nvSpPr>
           <p:spPr>
             <a:xfrm>
-              <a:off x="1625552" y="2869942"/>
+              <a:off x="1564268" y="2869942"/>
               <a:ext cx="62384" cy="62384"/>
             </a:xfrm>
             <a:prstGeom prst="ellipse">
@@ -6380,7 +6380,7 @@
           </p:nvSpPr>
           <p:spPr>
             <a:xfrm>
-              <a:off x="1741527" y="2835067"/>
+              <a:off x="1763360" y="2835067"/>
               <a:ext cx="62384" cy="62384"/>
             </a:xfrm>
             <a:prstGeom prst="ellipse">
@@ -6406,7 +6406,7 @@
           </p:nvSpPr>
           <p:spPr>
             <a:xfrm>
-              <a:off x="1634968" y="2385074"/>
+              <a:off x="1625005" y="2385074"/>
               <a:ext cx="62384" cy="62384"/>
             </a:xfrm>
             <a:prstGeom prst="ellipse">
@@ -6432,7 +6432,7 @@
           </p:nvSpPr>
           <p:spPr>
             <a:xfrm>
-              <a:off x="1769468" y="2372486"/>
+              <a:off x="1728336" y="2372486"/>
               <a:ext cx="62384" cy="62384"/>
             </a:xfrm>
             <a:prstGeom prst="ellipse">
@@ -6458,7 +6458,7 @@
           </p:nvSpPr>
           <p:spPr>
             <a:xfrm>
-              <a:off x="1631330" y="2303091"/>
+              <a:off x="1581616" y="2303091"/>
               <a:ext cx="62384" cy="62384"/>
             </a:xfrm>
             <a:prstGeom prst="ellipse">
@@ -6484,7 +6484,7 @@
           </p:nvSpPr>
           <p:spPr>
             <a:xfrm>
-              <a:off x="1759978" y="2210234"/>
+              <a:off x="1727369" y="2210234"/>
               <a:ext cx="62384" cy="62384"/>
             </a:xfrm>
             <a:prstGeom prst="ellipse">
@@ -6510,7 +6510,7 @@
           </p:nvSpPr>
           <p:spPr>
             <a:xfrm>
-              <a:off x="1590193" y="2906009"/>
+              <a:off x="1580289" y="2906009"/>
               <a:ext cx="62384" cy="62384"/>
             </a:xfrm>
             <a:prstGeom prst="ellipse">
@@ -6536,7 +6536,7 @@
           </p:nvSpPr>
           <p:spPr>
             <a:xfrm>
-              <a:off x="1750890" y="2639315"/>
+              <a:off x="1772322" y="2639315"/>
               <a:ext cx="62384" cy="62384"/>
             </a:xfrm>
             <a:prstGeom prst="ellipse">
@@ -6562,7 +6562,7 @@
           </p:nvSpPr>
           <p:spPr>
             <a:xfrm>
-              <a:off x="1625925" y="2479227"/>
+              <a:off x="1605258" y="2479227"/>
               <a:ext cx="62384" cy="62384"/>
             </a:xfrm>
             <a:prstGeom prst="ellipse">
@@ -6588,7 +6588,7 @@
           </p:nvSpPr>
           <p:spPr>
             <a:xfrm>
-              <a:off x="1766931" y="2693799"/>
+              <a:off x="1718756" y="2693799"/>
               <a:ext cx="62384" cy="62384"/>
             </a:xfrm>
             <a:prstGeom prst="ellipse">
@@ -6614,7 +6614,7 @@
           </p:nvSpPr>
           <p:spPr>
             <a:xfrm>
-              <a:off x="1609822" y="2311062"/>
+              <a:off x="1633064" y="2311062"/>
               <a:ext cx="62384" cy="62384"/>
             </a:xfrm>
             <a:prstGeom prst="ellipse">
@@ -6640,7 +6640,7 @@
           </p:nvSpPr>
           <p:spPr>
             <a:xfrm>
-              <a:off x="1740336" y="2155885"/>
+              <a:off x="1741540" y="2155885"/>
               <a:ext cx="62384" cy="62384"/>
             </a:xfrm>
             <a:prstGeom prst="ellipse">
@@ -6666,7 +6666,7 @@
           </p:nvSpPr>
           <p:spPr>
             <a:xfrm>
-              <a:off x="1591860" y="2992143"/>
+              <a:off x="1570979" y="2992143"/>
               <a:ext cx="62384" cy="62384"/>
             </a:xfrm>
             <a:prstGeom prst="ellipse">
@@ -6692,7 +6692,7 @@
           </p:nvSpPr>
           <p:spPr>
             <a:xfrm>
-              <a:off x="1720942" y="3085554"/>
+              <a:off x="1719702" y="3085554"/>
               <a:ext cx="62384" cy="62384"/>
             </a:xfrm>
             <a:prstGeom prst="ellipse">
@@ -6718,7 +6718,7 @@
           </p:nvSpPr>
           <p:spPr>
             <a:xfrm>
-              <a:off x="1629694" y="2693399"/>
+              <a:off x="1625880" y="2693399"/>
               <a:ext cx="62384" cy="62384"/>
             </a:xfrm>
             <a:prstGeom prst="ellipse">
@@ -6744,7 +6744,7 @@
           </p:nvSpPr>
           <p:spPr>
             <a:xfrm>
-              <a:off x="1772031" y="2912401"/>
+              <a:off x="1782547" y="2912401"/>
               <a:ext cx="62384" cy="62384"/>
             </a:xfrm>
             <a:prstGeom prst="ellipse">
@@ -6770,7 +6770,7 @@
           </p:nvSpPr>
           <p:spPr>
             <a:xfrm>
-              <a:off x="1605263" y="2243452"/>
+              <a:off x="1604153" y="2243452"/>
               <a:ext cx="62384" cy="62384"/>
             </a:xfrm>
             <a:prstGeom prst="ellipse">
@@ -6796,7 +6796,7 @@
           </p:nvSpPr>
           <p:spPr>
             <a:xfrm>
-              <a:off x="1760678" y="2469299"/>
+              <a:off x="1774008" y="2469299"/>
               <a:ext cx="62384" cy="62384"/>
             </a:xfrm>
             <a:prstGeom prst="ellipse">
@@ -6822,7 +6822,7 @@
           </p:nvSpPr>
           <p:spPr>
             <a:xfrm>
-              <a:off x="1613545" y="3383052"/>
+              <a:off x="1576331" y="3383052"/>
               <a:ext cx="62384" cy="62384"/>
             </a:xfrm>
             <a:prstGeom prst="ellipse">
@@ -6848,7 +6848,7 @@
           </p:nvSpPr>
           <p:spPr>
             <a:xfrm>
-              <a:off x="1784230" y="2717776"/>
+              <a:off x="1729342" y="2717776"/>
               <a:ext cx="62384" cy="62384"/>
             </a:xfrm>
             <a:prstGeom prst="ellipse">
@@ -6874,7 +6874,7 @@
           </p:nvSpPr>
           <p:spPr>
             <a:xfrm>
-              <a:off x="2657553" y="2084851"/>
+              <a:off x="2627998" y="2084851"/>
               <a:ext cx="62384" cy="62384"/>
             </a:xfrm>
             <a:prstGeom prst="ellipse">
@@ -6900,7 +6900,7 @@
           </p:nvSpPr>
           <p:spPr>
             <a:xfrm>
-              <a:off x="2824489" y="2219888"/>
+              <a:off x="2782030" y="2219888"/>
               <a:ext cx="62384" cy="62384"/>
             </a:xfrm>
             <a:prstGeom prst="ellipse">
@@ -6926,7 +6926,7 @@
           </p:nvSpPr>
           <p:spPr>
             <a:xfrm>
-              <a:off x="2605467" y="2434850"/>
+              <a:off x="2627905" y="2434850"/>
               <a:ext cx="62384" cy="62384"/>
             </a:xfrm>
             <a:prstGeom prst="ellipse">
@@ -6952,7 +6952,7 @@
           </p:nvSpPr>
           <p:spPr>
             <a:xfrm>
-              <a:off x="2775403" y="2816213"/>
+              <a:off x="2806947" y="2816213"/>
               <a:ext cx="62384" cy="62384"/>
             </a:xfrm>
             <a:prstGeom prst="ellipse">
@@ -6978,7 +6978,7 @@
           </p:nvSpPr>
           <p:spPr>
             <a:xfrm>
-              <a:off x="2653116" y="2781878"/>
+              <a:off x="2662013" y="2781878"/>
               <a:ext cx="62384" cy="62384"/>
             </a:xfrm>
             <a:prstGeom prst="ellipse">
@@ -7004,7 +7004,7 @@
           </p:nvSpPr>
           <p:spPr>
             <a:xfrm>
-              <a:off x="2801396" y="2832242"/>
+              <a:off x="2784393" y="2832242"/>
               <a:ext cx="62384" cy="62384"/>
             </a:xfrm>
             <a:prstGeom prst="ellipse">
@@ -7030,7 +7030,7 @@
           </p:nvSpPr>
           <p:spPr>
             <a:xfrm>
-              <a:off x="2610807" y="2461099"/>
+              <a:off x="2633330" y="2461099"/>
               <a:ext cx="62384" cy="62384"/>
             </a:xfrm>
             <a:prstGeom prst="ellipse">
@@ -7056,7 +7056,7 @@
           </p:nvSpPr>
           <p:spPr>
             <a:xfrm>
-              <a:off x="2787180" y="2580668"/>
+              <a:off x="2823884" y="2580668"/>
               <a:ext cx="62384" cy="62384"/>
             </a:xfrm>
             <a:prstGeom prst="ellipse">
@@ -7082,7 +7082,7 @@
           </p:nvSpPr>
           <p:spPr>
             <a:xfrm>
-              <a:off x="2619112" y="2376920"/>
+              <a:off x="2658689" y="2376920"/>
               <a:ext cx="62384" cy="62384"/>
             </a:xfrm>
             <a:prstGeom prst="ellipse">
@@ -7108,7 +7108,7 @@
           </p:nvSpPr>
           <p:spPr>
             <a:xfrm>
-              <a:off x="2773209" y="2478265"/>
+              <a:off x="2823649" y="2478265"/>
               <a:ext cx="62384" cy="62384"/>
             </a:xfrm>
             <a:prstGeom prst="ellipse">
@@ -7134,7 +7134,7 @@
           </p:nvSpPr>
           <p:spPr>
             <a:xfrm>
-              <a:off x="2633748" y="2476222"/>
+              <a:off x="2663689" y="2476222"/>
               <a:ext cx="62384" cy="62384"/>
             </a:xfrm>
             <a:prstGeom prst="ellipse">
@@ -7160,7 +7160,7 @@
           </p:nvSpPr>
           <p:spPr>
             <a:xfrm>
-              <a:off x="2798398" y="2648558"/>
+              <a:off x="2766358" y="2648558"/>
               <a:ext cx="62384" cy="62384"/>
             </a:xfrm>
             <a:prstGeom prst="ellipse">
@@ -7186,7 +7186,7 @@
           </p:nvSpPr>
           <p:spPr>
             <a:xfrm>
-              <a:off x="2664218" y="2628343"/>
+              <a:off x="2671197" y="2628343"/>
               <a:ext cx="62384" cy="62384"/>
             </a:xfrm>
             <a:prstGeom prst="ellipse">
@@ -7212,7 +7212,7 @@
           </p:nvSpPr>
           <p:spPr>
             <a:xfrm>
-              <a:off x="2783192" y="2676261"/>
+              <a:off x="2815737" y="2676261"/>
               <a:ext cx="62384" cy="62384"/>
             </a:xfrm>
             <a:prstGeom prst="ellipse">
@@ -7238,7 +7238,7 @@
           </p:nvSpPr>
           <p:spPr>
             <a:xfrm>
-              <a:off x="2641143" y="2381745"/>
+              <a:off x="2615800" y="2381745"/>
               <a:ext cx="62384" cy="62384"/>
             </a:xfrm>
             <a:prstGeom prst="ellipse">
@@ -7264,7 +7264,7 @@
           </p:nvSpPr>
           <p:spPr>
             <a:xfrm>
-              <a:off x="2779663" y="2560132"/>
+              <a:off x="2784065" y="2560132"/>
               <a:ext cx="62384" cy="62384"/>
             </a:xfrm>
             <a:prstGeom prst="ellipse">
@@ -7290,7 +7290,7 @@
           </p:nvSpPr>
           <p:spPr>
             <a:xfrm>
-              <a:off x="2672106" y="2977464"/>
+              <a:off x="2630192" y="2977464"/>
               <a:ext cx="62384" cy="62384"/>
             </a:xfrm>
             <a:prstGeom prst="ellipse">
@@ -7316,7 +7316,7 @@
           </p:nvSpPr>
           <p:spPr>
             <a:xfrm>
-              <a:off x="2823278" y="3228311"/>
+              <a:off x="2782772" y="3228311"/>
               <a:ext cx="62384" cy="62384"/>
             </a:xfrm>
             <a:prstGeom prst="ellipse">
@@ -7342,7 +7342,7 @@
           </p:nvSpPr>
           <p:spPr>
             <a:xfrm>
-              <a:off x="2641774" y="2772110"/>
+              <a:off x="2671323" y="2772110"/>
               <a:ext cx="62384" cy="62384"/>
             </a:xfrm>
             <a:prstGeom prst="ellipse">
@@ -7368,7 +7368,7 @@
           </p:nvSpPr>
           <p:spPr>
             <a:xfrm>
-              <a:off x="2774204" y="3206926"/>
+              <a:off x="2793586" y="3206926"/>
               <a:ext cx="62384" cy="62384"/>
             </a:xfrm>
             <a:prstGeom prst="ellipse">
@@ -7394,7 +7394,7 @@
           </p:nvSpPr>
           <p:spPr>
             <a:xfrm>
-              <a:off x="2625050" y="2485303"/>
+              <a:off x="2665838" y="2485303"/>
               <a:ext cx="62384" cy="62384"/>
             </a:xfrm>
             <a:prstGeom prst="ellipse">
@@ -7420,7 +7420,7 @@
           </p:nvSpPr>
           <p:spPr>
             <a:xfrm>
-              <a:off x="2778182" y="2672806"/>
+              <a:off x="2823384" y="2672806"/>
               <a:ext cx="62384" cy="62384"/>
             </a:xfrm>
             <a:prstGeom prst="ellipse">
@@ -7446,7 +7446,7 @@
           </p:nvSpPr>
           <p:spPr>
             <a:xfrm>
-              <a:off x="2668056" y="2368226"/>
+              <a:off x="2623491" y="2368226"/>
               <a:ext cx="62384" cy="62384"/>
             </a:xfrm>
             <a:prstGeom prst="ellipse">
@@ -7472,7 +7472,7 @@
           </p:nvSpPr>
           <p:spPr>
             <a:xfrm>
-              <a:off x="2800159" y="2818819"/>
+              <a:off x="2771105" y="2818819"/>
               <a:ext cx="62384" cy="62384"/>
             </a:xfrm>
             <a:prstGeom prst="ellipse">
@@ -7498,7 +7498,7 @@
           </p:nvSpPr>
           <p:spPr>
             <a:xfrm>
-              <a:off x="2667430" y="2493287"/>
+              <a:off x="2638895" y="2493287"/>
               <a:ext cx="62384" cy="62384"/>
             </a:xfrm>
             <a:prstGeom prst="ellipse">
@@ -7524,7 +7524,7 @@
           </p:nvSpPr>
           <p:spPr>
             <a:xfrm>
-              <a:off x="2794956" y="2775042"/>
+              <a:off x="2781120" y="2775042"/>
               <a:ext cx="62384" cy="62384"/>
             </a:xfrm>
             <a:prstGeom prst="ellipse">
@@ -7550,7 +7550,7 @@
           </p:nvSpPr>
           <p:spPr>
             <a:xfrm>
-              <a:off x="2622974" y="2950746"/>
+              <a:off x="2604345" y="2950746"/>
               <a:ext cx="62384" cy="62384"/>
             </a:xfrm>
             <a:prstGeom prst="ellipse">
@@ -7576,7 +7576,7 @@
           </p:nvSpPr>
           <p:spPr>
             <a:xfrm>
-              <a:off x="2818251" y="3124429"/>
+              <a:off x="2755181" y="3124429"/>
               <a:ext cx="62384" cy="62384"/>
             </a:xfrm>
             <a:prstGeom prst="ellipse">
@@ -7602,7 +7602,7 @@
           </p:nvSpPr>
           <p:spPr>
             <a:xfrm>
-              <a:off x="2669132" y="2454225"/>
+              <a:off x="2613654" y="2454225"/>
               <a:ext cx="62384" cy="62384"/>
             </a:xfrm>
             <a:prstGeom prst="ellipse">
@@ -7628,7 +7628,7 @@
           </p:nvSpPr>
           <p:spPr>
             <a:xfrm>
-              <a:off x="2807538" y="2845042"/>
+              <a:off x="2758659" y="2845042"/>
               <a:ext cx="62384" cy="62384"/>
             </a:xfrm>
             <a:prstGeom prst="ellipse">
@@ -7654,7 +7654,7 @@
           </p:nvSpPr>
           <p:spPr>
             <a:xfrm>
-              <a:off x="2605921" y="3124269"/>
+              <a:off x="2618294" y="3124269"/>
               <a:ext cx="62384" cy="62384"/>
             </a:xfrm>
             <a:prstGeom prst="ellipse">
@@ -7680,7 +7680,7 @@
           </p:nvSpPr>
           <p:spPr>
             <a:xfrm>
-              <a:off x="2753781" y="2947033"/>
+              <a:off x="2807791" y="2947033"/>
               <a:ext cx="62384" cy="62384"/>
             </a:xfrm>
             <a:prstGeom prst="ellipse">
@@ -7706,7 +7706,7 @@
           </p:nvSpPr>
           <p:spPr>
             <a:xfrm>
-              <a:off x="2667260" y="2682757"/>
+              <a:off x="2623641" y="2682757"/>
               <a:ext cx="62384" cy="62384"/>
             </a:xfrm>
             <a:prstGeom prst="ellipse">
@@ -7732,7 +7732,7 @@
           </p:nvSpPr>
           <p:spPr>
             <a:xfrm>
-              <a:off x="2767012" y="2780527"/>
+              <a:off x="2815099" y="2780527"/>
               <a:ext cx="62384" cy="62384"/>
             </a:xfrm>
             <a:prstGeom prst="ellipse">
@@ -7758,7 +7758,7 @@
           </p:nvSpPr>
           <p:spPr>
             <a:xfrm>
-              <a:off x="2660573" y="2723706"/>
+              <a:off x="2635736" y="2723706"/>
               <a:ext cx="62384" cy="62384"/>
             </a:xfrm>
             <a:prstGeom prst="ellipse">
@@ -7784,7 +7784,7 @@
           </p:nvSpPr>
           <p:spPr>
             <a:xfrm>
-              <a:off x="2785465" y="2949282"/>
+              <a:off x="2774267" y="2949282"/>
               <a:ext cx="62384" cy="62384"/>
             </a:xfrm>
             <a:prstGeom prst="ellipse">
@@ -7810,7 +7810,7 @@
           </p:nvSpPr>
           <p:spPr>
             <a:xfrm>
-              <a:off x="2609171" y="2431697"/>
+              <a:off x="2608969" y="2431697"/>
               <a:ext cx="62384" cy="62384"/>
             </a:xfrm>
             <a:prstGeom prst="ellipse">
@@ -7836,7 +7836,7 @@
           </p:nvSpPr>
           <p:spPr>
             <a:xfrm>
-              <a:off x="2794922" y="2638972"/>
+              <a:off x="2767623" y="2638972"/>
               <a:ext cx="62384" cy="62384"/>
             </a:xfrm>
             <a:prstGeom prst="ellipse">
@@ -7862,7 +7862,7 @@
           </p:nvSpPr>
           <p:spPr>
             <a:xfrm>
-              <a:off x="2673395" y="2296964"/>
+              <a:off x="2659301" y="2296964"/>
               <a:ext cx="62384" cy="62384"/>
             </a:xfrm>
             <a:prstGeom prst="ellipse">
@@ -7888,7 +7888,7 @@
           </p:nvSpPr>
           <p:spPr>
             <a:xfrm>
-              <a:off x="2779882" y="2609538"/>
+              <a:off x="2790256" y="2609538"/>
               <a:ext cx="62384" cy="62384"/>
             </a:xfrm>
             <a:prstGeom prst="ellipse">
@@ -7914,7 +7914,7 @@
           </p:nvSpPr>
           <p:spPr>
             <a:xfrm>
-              <a:off x="2616901" y="2689538"/>
+              <a:off x="2625682" y="2689538"/>
               <a:ext cx="62384" cy="62384"/>
             </a:xfrm>
             <a:prstGeom prst="ellipse">
@@ -7940,7 +7940,7 @@
           </p:nvSpPr>
           <p:spPr>
             <a:xfrm>
-              <a:off x="2822979" y="3347710"/>
+              <a:off x="2809915" y="3347710"/>
               <a:ext cx="62384" cy="62384"/>
             </a:xfrm>
             <a:prstGeom prst="ellipse">
@@ -7966,7 +7966,7 @@
           </p:nvSpPr>
           <p:spPr>
             <a:xfrm>
-              <a:off x="2640924" y="3054567"/>
+              <a:off x="2658852" y="3054567"/>
               <a:ext cx="62384" cy="62384"/>
             </a:xfrm>
             <a:prstGeom prst="ellipse">
@@ -7992,7 +7992,7 @@
           </p:nvSpPr>
           <p:spPr>
             <a:xfrm>
-              <a:off x="2810963" y="3166091"/>
+              <a:off x="2756751" y="3166091"/>
               <a:ext cx="62384" cy="62384"/>
             </a:xfrm>
             <a:prstGeom prst="ellipse">
@@ -8018,7 +8018,7 @@
           </p:nvSpPr>
           <p:spPr>
             <a:xfrm>
-              <a:off x="2602738" y="2524098"/>
+              <a:off x="2623897" y="2524098"/>
               <a:ext cx="62384" cy="62384"/>
             </a:xfrm>
             <a:prstGeom prst="ellipse">
@@ -8044,7 +8044,7 @@
           </p:nvSpPr>
           <p:spPr>
             <a:xfrm>
-              <a:off x="2785932" y="2502937"/>
+              <a:off x="2755320" y="2502937"/>
               <a:ext cx="62384" cy="62384"/>
             </a:xfrm>
             <a:prstGeom prst="ellipse">
@@ -8070,7 +8070,7 @@
           </p:nvSpPr>
           <p:spPr>
             <a:xfrm>
-              <a:off x="2614252" y="2447043"/>
+              <a:off x="2636331" y="2447043"/>
               <a:ext cx="62384" cy="62384"/>
             </a:xfrm>
             <a:prstGeom prst="ellipse">
@@ -8096,7 +8096,7 @@
           </p:nvSpPr>
           <p:spPr>
             <a:xfrm>
-              <a:off x="2763466" y="2957010"/>
+              <a:off x="2761784" y="2957010"/>
               <a:ext cx="62384" cy="62384"/>
             </a:xfrm>
             <a:prstGeom prst="ellipse">
@@ -8122,7 +8122,7 @@
           </p:nvSpPr>
           <p:spPr>
             <a:xfrm>
-              <a:off x="2636020" y="2488115"/>
+              <a:off x="2625918" y="2488115"/>
               <a:ext cx="62384" cy="62384"/>
             </a:xfrm>
             <a:prstGeom prst="ellipse">
@@ -8148,7 +8148,7 @@
           </p:nvSpPr>
           <p:spPr>
             <a:xfrm>
-              <a:off x="2809836" y="2636345"/>
+              <a:off x="2821121" y="2636345"/>
               <a:ext cx="62384" cy="62384"/>
             </a:xfrm>
             <a:prstGeom prst="ellipse">
@@ -8174,7 +8174,7 @@
           </p:nvSpPr>
           <p:spPr>
             <a:xfrm>
-              <a:off x="2628972" y="3331458"/>
+              <a:off x="2619695" y="3331458"/>
               <a:ext cx="62384" cy="62384"/>
             </a:xfrm>
             <a:prstGeom prst="ellipse">
@@ -8200,7 +8200,7 @@
           </p:nvSpPr>
           <p:spPr>
             <a:xfrm>
-              <a:off x="2759393" y="3176744"/>
+              <a:off x="2786128" y="3176744"/>
               <a:ext cx="62384" cy="62384"/>
             </a:xfrm>
             <a:prstGeom prst="ellipse">
@@ -8226,7 +8226,7 @@
           </p:nvSpPr>
           <p:spPr>
             <a:xfrm>
-              <a:off x="2641884" y="2946947"/>
+              <a:off x="2669132" y="2946947"/>
               <a:ext cx="62384" cy="62384"/>
             </a:xfrm>
             <a:prstGeom prst="ellipse">
@@ -8252,7 +8252,7 @@
           </p:nvSpPr>
           <p:spPr>
             <a:xfrm>
-              <a:off x="2778607" y="2994744"/>
+              <a:off x="2786139" y="2994744"/>
               <a:ext cx="62384" cy="62384"/>
             </a:xfrm>
             <a:prstGeom prst="ellipse">
@@ -8278,7 +8278,7 @@
           </p:nvSpPr>
           <p:spPr>
             <a:xfrm>
-              <a:off x="2623533" y="3049734"/>
+              <a:off x="2657554" y="3049734"/>
               <a:ext cx="62384" cy="62384"/>
             </a:xfrm>
             <a:prstGeom prst="ellipse">
@@ -8304,7 +8304,7 @@
           </p:nvSpPr>
           <p:spPr>
             <a:xfrm>
-              <a:off x="2802248" y="2980496"/>
+              <a:off x="2753800" y="2980496"/>
               <a:ext cx="62384" cy="62384"/>
             </a:xfrm>
             <a:prstGeom prst="ellipse">
@@ -8330,7 +8330,7 @@
           </p:nvSpPr>
           <p:spPr>
             <a:xfrm>
-              <a:off x="2620746" y="2853710"/>
+              <a:off x="2658315" y="2853710"/>
               <a:ext cx="62384" cy="62384"/>
             </a:xfrm>
             <a:prstGeom prst="ellipse">
@@ -8356,7 +8356,7 @@
           </p:nvSpPr>
           <p:spPr>
             <a:xfrm>
-              <a:off x="2812623" y="3070296"/>
+              <a:off x="2760254" y="3070296"/>
               <a:ext cx="62384" cy="62384"/>
             </a:xfrm>
             <a:prstGeom prst="ellipse">
@@ -8382,7 +8382,7 @@
           </p:nvSpPr>
           <p:spPr>
             <a:xfrm>
-              <a:off x="2604283" y="3365191"/>
+              <a:off x="2602789" y="3365191"/>
               <a:ext cx="62384" cy="62384"/>
             </a:xfrm>
             <a:prstGeom prst="ellipse">
@@ -8408,7 +8408,7 @@
           </p:nvSpPr>
           <p:spPr>
             <a:xfrm>
-              <a:off x="2757406" y="3631569"/>
+              <a:off x="2824523" y="3631569"/>
               <a:ext cx="62384" cy="62384"/>
             </a:xfrm>
             <a:prstGeom prst="ellipse">
@@ -8434,7 +8434,7 @@
           </p:nvSpPr>
           <p:spPr>
             <a:xfrm>
-              <a:off x="2668352" y="2445492"/>
+              <a:off x="2663878" y="2445492"/>
               <a:ext cx="62384" cy="62384"/>
             </a:xfrm>
             <a:prstGeom prst="ellipse">
@@ -8460,7 +8460,7 @@
           </p:nvSpPr>
           <p:spPr>
             <a:xfrm>
-              <a:off x="2805945" y="2376479"/>
+              <a:off x="2755531" y="2376479"/>
               <a:ext cx="62384" cy="62384"/>
             </a:xfrm>
             <a:prstGeom prst="ellipse">
@@ -8486,7 +8486,7 @@
           </p:nvSpPr>
           <p:spPr>
             <a:xfrm>
-              <a:off x="2630583" y="2851348"/>
+              <a:off x="2666766" y="2851348"/>
               <a:ext cx="62384" cy="62384"/>
             </a:xfrm>
             <a:prstGeom prst="ellipse">
@@ -8512,7 +8512,7 @@
           </p:nvSpPr>
           <p:spPr>
             <a:xfrm>
-              <a:off x="2752938" y="2969651"/>
+              <a:off x="2797423" y="2969651"/>
               <a:ext cx="62384" cy="62384"/>
             </a:xfrm>
             <a:prstGeom prst="ellipse">
@@ -8538,7 +8538,7 @@
           </p:nvSpPr>
           <p:spPr>
             <a:xfrm>
-              <a:off x="2654238" y="2409264"/>
+              <a:off x="2603470" y="2409264"/>
               <a:ext cx="62384" cy="62384"/>
             </a:xfrm>
             <a:prstGeom prst="ellipse">
@@ -8564,7 +8564,7 @@
           </p:nvSpPr>
           <p:spPr>
             <a:xfrm>
-              <a:off x="2754011" y="2288675"/>
+              <a:off x="2816741" y="2288675"/>
               <a:ext cx="62384" cy="62384"/>
             </a:xfrm>
             <a:prstGeom prst="ellipse">
@@ -8590,7 +8590,7 @@
           </p:nvSpPr>
           <p:spPr>
             <a:xfrm>
-              <a:off x="2670164" y="2651220"/>
+              <a:off x="2662823" y="2651220"/>
               <a:ext cx="62384" cy="62384"/>
             </a:xfrm>
             <a:prstGeom prst="ellipse">
@@ -8616,7 +8616,7 @@
           </p:nvSpPr>
           <p:spPr>
             <a:xfrm>
-              <a:off x="2794083" y="2677855"/>
+              <a:off x="2807742" y="2677855"/>
               <a:ext cx="62384" cy="62384"/>
             </a:xfrm>
             <a:prstGeom prst="ellipse">
@@ -8642,7 +8642,7 @@
           </p:nvSpPr>
           <p:spPr>
             <a:xfrm>
-              <a:off x="2640143" y="2434305"/>
+              <a:off x="2617506" y="2434305"/>
               <a:ext cx="62384" cy="62384"/>
             </a:xfrm>
             <a:prstGeom prst="ellipse">
@@ -8668,7 +8668,7 @@
           </p:nvSpPr>
           <p:spPr>
             <a:xfrm>
-              <a:off x="2824038" y="2542918"/>
+              <a:off x="2780520" y="2542918"/>
               <a:ext cx="62384" cy="62384"/>
             </a:xfrm>
             <a:prstGeom prst="ellipse">
@@ -8694,7 +8694,7 @@
           </p:nvSpPr>
           <p:spPr>
             <a:xfrm>
-              <a:off x="2643104" y="3613989"/>
+              <a:off x="2673671" y="3613989"/>
               <a:ext cx="62384" cy="62384"/>
             </a:xfrm>
             <a:prstGeom prst="ellipse">
@@ -8720,7 +8720,7 @@
           </p:nvSpPr>
           <p:spPr>
             <a:xfrm>
-              <a:off x="2771205" y="3540565"/>
+              <a:off x="2791637" y="3540565"/>
               <a:ext cx="62384" cy="62384"/>
             </a:xfrm>
             <a:prstGeom prst="ellipse">
@@ -8746,7 +8746,7 @@
           </p:nvSpPr>
           <p:spPr>
             <a:xfrm>
-              <a:off x="2607274" y="2467333"/>
+              <a:off x="2625003" y="2467333"/>
               <a:ext cx="62384" cy="62384"/>
             </a:xfrm>
             <a:prstGeom prst="ellipse">
@@ -8772,7 +8772,7 @@
           </p:nvSpPr>
           <p:spPr>
             <a:xfrm>
-              <a:off x="2815314" y="2672533"/>
+              <a:off x="2821603" y="2672533"/>
               <a:ext cx="62384" cy="62384"/>
             </a:xfrm>
             <a:prstGeom prst="ellipse">
@@ -8798,7 +8798,7 @@
           </p:nvSpPr>
           <p:spPr>
             <a:xfrm>
-              <a:off x="2626881" y="2697677"/>
+              <a:off x="2607715" y="2697677"/>
               <a:ext cx="62384" cy="62384"/>
             </a:xfrm>
             <a:prstGeom prst="ellipse">
@@ -8824,7 +8824,7 @@
           </p:nvSpPr>
           <p:spPr>
             <a:xfrm>
-              <a:off x="2779572" y="2661272"/>
+              <a:off x="2793558" y="2661272"/>
               <a:ext cx="62384" cy="62384"/>
             </a:xfrm>
             <a:prstGeom prst="ellipse">
@@ -8850,7 +8850,7 @@
           </p:nvSpPr>
           <p:spPr>
             <a:xfrm>
-              <a:off x="2645006" y="2543266"/>
+              <a:off x="2607288" y="2543266"/>
               <a:ext cx="62384" cy="62384"/>
             </a:xfrm>
             <a:prstGeom prst="ellipse">
@@ -8876,7 +8876,7 @@
           </p:nvSpPr>
           <p:spPr>
             <a:xfrm>
-              <a:off x="2806158" y="2826078"/>
+              <a:off x="2778391" y="2826078"/>
               <a:ext cx="62384" cy="62384"/>
             </a:xfrm>
             <a:prstGeom prst="ellipse">
@@ -8902,7 +8902,7 @@
           </p:nvSpPr>
           <p:spPr>
             <a:xfrm>
-              <a:off x="2603489" y="2223446"/>
+              <a:off x="2621750" y="2223446"/>
               <a:ext cx="62384" cy="62384"/>
             </a:xfrm>
             <a:prstGeom prst="ellipse">
@@ -8928,7 +8928,7 @@
           </p:nvSpPr>
           <p:spPr>
             <a:xfrm>
-              <a:off x="2788483" y="2406126"/>
+              <a:off x="2761191" y="2406126"/>
               <a:ext cx="62384" cy="62384"/>
             </a:xfrm>
             <a:prstGeom prst="ellipse">
@@ -8954,7 +8954,7 @@
           </p:nvSpPr>
           <p:spPr>
             <a:xfrm>
-              <a:off x="2610892" y="2427983"/>
+              <a:off x="2649079" y="2427983"/>
               <a:ext cx="62384" cy="62384"/>
             </a:xfrm>
             <a:prstGeom prst="ellipse">
@@ -8980,7 +8980,7 @@
           </p:nvSpPr>
           <p:spPr>
             <a:xfrm>
-              <a:off x="2803156" y="2452066"/>
+              <a:off x="2753306" y="2452066"/>
               <a:ext cx="62384" cy="62384"/>
             </a:xfrm>
             <a:prstGeom prst="ellipse">
@@ -9006,7 +9006,7 @@
           </p:nvSpPr>
           <p:spPr>
             <a:xfrm>
-              <a:off x="2613649" y="2844553"/>
+              <a:off x="2641757" y="2844553"/>
               <a:ext cx="62384" cy="62384"/>
             </a:xfrm>
             <a:prstGeom prst="ellipse">
@@ -9032,7 +9032,7 @@
           </p:nvSpPr>
           <p:spPr>
             <a:xfrm>
-              <a:off x="2801635" y="3247802"/>
+              <a:off x="2817901" y="3247802"/>
               <a:ext cx="62384" cy="62384"/>
             </a:xfrm>
             <a:prstGeom prst="ellipse">
@@ -9058,7 +9058,7 @@
           </p:nvSpPr>
           <p:spPr>
             <a:xfrm>
-              <a:off x="2621807" y="2803773"/>
+              <a:off x="2653272" y="2803773"/>
               <a:ext cx="62384" cy="62384"/>
             </a:xfrm>
             <a:prstGeom prst="ellipse">
@@ -9084,7 +9084,7 @@
           </p:nvSpPr>
           <p:spPr>
             <a:xfrm>
-              <a:off x="2803872" y="2695427"/>
+              <a:off x="2774984" y="2695427"/>
               <a:ext cx="62384" cy="62384"/>
             </a:xfrm>
             <a:prstGeom prst="ellipse">
@@ -9110,7 +9110,7 @@
           </p:nvSpPr>
           <p:spPr>
             <a:xfrm>
-              <a:off x="2617856" y="2452571"/>
+              <a:off x="2636840" y="2452571"/>
               <a:ext cx="62384" cy="62384"/>
             </a:xfrm>
             <a:prstGeom prst="ellipse">
@@ -9136,7 +9136,7 @@
           </p:nvSpPr>
           <p:spPr>
             <a:xfrm>
-              <a:off x="2758606" y="2660305"/>
+              <a:off x="2792044" y="2660305"/>
               <a:ext cx="62384" cy="62384"/>
             </a:xfrm>
             <a:prstGeom prst="ellipse">
@@ -9162,7 +9162,7 @@
           </p:nvSpPr>
           <p:spPr>
             <a:xfrm>
-              <a:off x="2666386" y="2763377"/>
+              <a:off x="2624977" y="2763377"/>
               <a:ext cx="62384" cy="62384"/>
             </a:xfrm>
             <a:prstGeom prst="ellipse">
@@ -9188,7 +9188,7 @@
           </p:nvSpPr>
           <p:spPr>
             <a:xfrm>
-              <a:off x="2807828" y="3077760"/>
+              <a:off x="2767962" y="3077760"/>
               <a:ext cx="62384" cy="62384"/>
             </a:xfrm>
             <a:prstGeom prst="ellipse">
@@ -9214,7 +9214,7 @@
           </p:nvSpPr>
           <p:spPr>
             <a:xfrm>
-              <a:off x="2648230" y="2558573"/>
+              <a:off x="2628482" y="2558573"/>
               <a:ext cx="62384" cy="62384"/>
             </a:xfrm>
             <a:prstGeom prst="ellipse">
@@ -9240,7 +9240,7 @@
           </p:nvSpPr>
           <p:spPr>
             <a:xfrm>
-              <a:off x="2799585" y="2728736"/>
+              <a:off x="2774882" y="2728736"/>
               <a:ext cx="62384" cy="62384"/>
             </a:xfrm>
             <a:prstGeom prst="ellipse">
@@ -9266,7 +9266,7 @@
           </p:nvSpPr>
           <p:spPr>
             <a:xfrm>
-              <a:off x="2656396" y="2475919"/>
+              <a:off x="2661996" y="2475919"/>
               <a:ext cx="62384" cy="62384"/>
             </a:xfrm>
             <a:prstGeom prst="ellipse">
@@ -9292,7 +9292,7 @@
           </p:nvSpPr>
           <p:spPr>
             <a:xfrm>
-              <a:off x="2759677" y="2674450"/>
+              <a:off x="2774996" y="2674450"/>
               <a:ext cx="62384" cy="62384"/>
             </a:xfrm>
             <a:prstGeom prst="ellipse">
@@ -9318,7 +9318,7 @@
           </p:nvSpPr>
           <p:spPr>
             <a:xfrm>
-              <a:off x="2603000" y="2116462"/>
+              <a:off x="2620405" y="2116462"/>
               <a:ext cx="62384" cy="62384"/>
             </a:xfrm>
             <a:prstGeom prst="ellipse">
@@ -9344,7 +9344,7 @@
           </p:nvSpPr>
           <p:spPr>
             <a:xfrm>
-              <a:off x="2785436" y="2446312"/>
+              <a:off x="2825102" y="2446312"/>
               <a:ext cx="62384" cy="62384"/>
             </a:xfrm>
             <a:prstGeom prst="ellipse">
@@ -9370,7 +9370,7 @@
           </p:nvSpPr>
           <p:spPr>
             <a:xfrm>
-              <a:off x="2673053" y="2334364"/>
+              <a:off x="2658320" y="2334364"/>
               <a:ext cx="62384" cy="62384"/>
             </a:xfrm>
             <a:prstGeom prst="ellipse">
@@ -9396,7 +9396,7 @@
           </p:nvSpPr>
           <p:spPr>
             <a:xfrm>
-              <a:off x="2781054" y="2862504"/>
+              <a:off x="2801232" y="2862504"/>
               <a:ext cx="62384" cy="62384"/>
             </a:xfrm>
             <a:prstGeom prst="ellipse">
@@ -9422,7 +9422,7 @@
           </p:nvSpPr>
           <p:spPr>
             <a:xfrm>
-              <a:off x="2658903" y="2040718"/>
+              <a:off x="2625659" y="2040718"/>
               <a:ext cx="62384" cy="62384"/>
             </a:xfrm>
             <a:prstGeom prst="ellipse">
@@ -9448,7 +9448,7 @@
           </p:nvSpPr>
           <p:spPr>
             <a:xfrm>
-              <a:off x="2796591" y="2487393"/>
+              <a:off x="2810382" y="2487393"/>
               <a:ext cx="62384" cy="62384"/>
             </a:xfrm>
             <a:prstGeom prst="ellipse">
@@ -9474,7 +9474,7 @@
           </p:nvSpPr>
           <p:spPr>
             <a:xfrm>
-              <a:off x="2646770" y="2377424"/>
+              <a:off x="2652070" y="2377424"/>
               <a:ext cx="62384" cy="62384"/>
             </a:xfrm>
             <a:prstGeom prst="ellipse">
@@ -9500,7 +9500,7 @@
           </p:nvSpPr>
           <p:spPr>
             <a:xfrm>
-              <a:off x="2811615" y="2501393"/>
+              <a:off x="2823505" y="2501393"/>
               <a:ext cx="62384" cy="62384"/>
             </a:xfrm>
             <a:prstGeom prst="ellipse">
@@ -9526,7 +9526,7 @@
           </p:nvSpPr>
           <p:spPr>
             <a:xfrm>
-              <a:off x="2656465" y="2585074"/>
+              <a:off x="2652336" y="2585074"/>
               <a:ext cx="62384" cy="62384"/>
             </a:xfrm>
             <a:prstGeom prst="ellipse">
@@ -9552,7 +9552,7 @@
           </p:nvSpPr>
           <p:spPr>
             <a:xfrm>
-              <a:off x="2755533" y="2403145"/>
+              <a:off x="2784854" y="2403145"/>
               <a:ext cx="62384" cy="62384"/>
             </a:xfrm>
             <a:prstGeom prst="ellipse">
@@ -9578,7 +9578,7 @@
           </p:nvSpPr>
           <p:spPr>
             <a:xfrm>
-              <a:off x="2654922" y="2640306"/>
+              <a:off x="2663632" y="2640306"/>
               <a:ext cx="62384" cy="62384"/>
             </a:xfrm>
             <a:prstGeom prst="ellipse">
@@ -9604,7 +9604,7 @@
           </p:nvSpPr>
           <p:spPr>
             <a:xfrm>
-              <a:off x="2817471" y="2884196"/>
+              <a:off x="2766901" y="2884196"/>
               <a:ext cx="62384" cy="62384"/>
             </a:xfrm>
             <a:prstGeom prst="ellipse">
@@ -9630,7 +9630,7 @@
           </p:nvSpPr>
           <p:spPr>
             <a:xfrm>
-              <a:off x="2665973" y="2916016"/>
+              <a:off x="2614337" y="2916016"/>
               <a:ext cx="62384" cy="62384"/>
             </a:xfrm>
             <a:prstGeom prst="ellipse">
@@ -9656,7 +9656,7 @@
           </p:nvSpPr>
           <p:spPr>
             <a:xfrm>
-              <a:off x="2778523" y="2815425"/>
+              <a:off x="2754440" y="2815425"/>
               <a:ext cx="62384" cy="62384"/>
             </a:xfrm>
             <a:prstGeom prst="ellipse">
@@ -9682,7 +9682,7 @@
           </p:nvSpPr>
           <p:spPr>
             <a:xfrm>
-              <a:off x="2673182" y="3048379"/>
+              <a:off x="2650233" y="3048379"/>
               <a:ext cx="62384" cy="62384"/>
             </a:xfrm>
             <a:prstGeom prst="ellipse">
@@ -9708,7 +9708,7 @@
           </p:nvSpPr>
           <p:spPr>
             <a:xfrm>
-              <a:off x="2759193" y="2867539"/>
+              <a:off x="2784893" y="2867539"/>
               <a:ext cx="62384" cy="62384"/>
             </a:xfrm>
             <a:prstGeom prst="ellipse">
@@ -9734,7 +9734,7 @@
           </p:nvSpPr>
           <p:spPr>
             <a:xfrm>
-              <a:off x="2628615" y="2421797"/>
+              <a:off x="2654208" y="2421797"/>
               <a:ext cx="62384" cy="62384"/>
             </a:xfrm>
             <a:prstGeom prst="ellipse">
@@ -9760,7 +9760,7 @@
           </p:nvSpPr>
           <p:spPr>
             <a:xfrm>
-              <a:off x="2752428" y="2471015"/>
+              <a:off x="2768776" y="2471015"/>
               <a:ext cx="62384" cy="62384"/>
             </a:xfrm>
             <a:prstGeom prst="ellipse">
@@ -9786,7 +9786,7 @@
           </p:nvSpPr>
           <p:spPr>
             <a:xfrm>
-              <a:off x="2638829" y="3006664"/>
+              <a:off x="2611390" y="3006664"/>
               <a:ext cx="62384" cy="62384"/>
             </a:xfrm>
             <a:prstGeom prst="ellipse">
@@ -9812,7 +9812,7 @@
           </p:nvSpPr>
           <p:spPr>
             <a:xfrm>
-              <a:off x="2754631" y="2842366"/>
+              <a:off x="2803317" y="2842366"/>
               <a:ext cx="62384" cy="62384"/>
             </a:xfrm>
             <a:prstGeom prst="ellipse">
@@ -9838,7 +9838,7 @@
           </p:nvSpPr>
           <p:spPr>
             <a:xfrm>
-              <a:off x="2667867" y="2761195"/>
+              <a:off x="2617479" y="2761195"/>
               <a:ext cx="62384" cy="62384"/>
             </a:xfrm>
             <a:prstGeom prst="ellipse">
@@ -9864,7 +9864,7 @@
           </p:nvSpPr>
           <p:spPr>
             <a:xfrm>
-              <a:off x="2755122" y="3071257"/>
+              <a:off x="2772171" y="3071257"/>
               <a:ext cx="62384" cy="62384"/>
             </a:xfrm>
             <a:prstGeom prst="ellipse">
@@ -9890,7 +9890,7 @@
           </p:nvSpPr>
           <p:spPr>
             <a:xfrm>
-              <a:off x="2632709" y="2819702"/>
+              <a:off x="2600859" y="2819702"/>
               <a:ext cx="62384" cy="62384"/>
             </a:xfrm>
             <a:prstGeom prst="ellipse">
@@ -9916,7 +9916,7 @@
           </p:nvSpPr>
           <p:spPr>
             <a:xfrm>
-              <a:off x="2788236" y="2796706"/>
+              <a:off x="2784236" y="2796706"/>
               <a:ext cx="62384" cy="62384"/>
             </a:xfrm>
             <a:prstGeom prst="ellipse">
@@ -9942,7 +9942,7 @@
           </p:nvSpPr>
           <p:spPr>
             <a:xfrm>
-              <a:off x="2630037" y="2894368"/>
+              <a:off x="2665253" y="2894368"/>
               <a:ext cx="62384" cy="62384"/>
             </a:xfrm>
             <a:prstGeom prst="ellipse">
@@ -9968,7 +9968,7 @@
           </p:nvSpPr>
           <p:spPr>
             <a:xfrm>
-              <a:off x="2790143" y="3196349"/>
+              <a:off x="2753543" y="3196349"/>
               <a:ext cx="62384" cy="62384"/>
             </a:xfrm>
             <a:prstGeom prst="ellipse">
@@ -9994,7 +9994,7 @@
           </p:nvSpPr>
           <p:spPr>
             <a:xfrm>
-              <a:off x="2606976" y="2562498"/>
+              <a:off x="2604851" y="2562498"/>
               <a:ext cx="62384" cy="62384"/>
             </a:xfrm>
             <a:prstGeom prst="ellipse">
@@ -10020,7 +10020,7 @@
           </p:nvSpPr>
           <p:spPr>
             <a:xfrm>
-              <a:off x="2782972" y="2549321"/>
+              <a:off x="2801643" y="2549321"/>
               <a:ext cx="62384" cy="62384"/>
             </a:xfrm>
             <a:prstGeom prst="ellipse">
@@ -10046,7 +10046,7 @@
           </p:nvSpPr>
           <p:spPr>
             <a:xfrm>
-              <a:off x="2656148" y="2826533"/>
+              <a:off x="2662853" y="2826533"/>
               <a:ext cx="62384" cy="62384"/>
             </a:xfrm>
             <a:prstGeom prst="ellipse">
@@ -10072,7 +10072,7 @@
           </p:nvSpPr>
           <p:spPr>
             <a:xfrm>
-              <a:off x="2752437" y="2950861"/>
+              <a:off x="2779051" y="2950861"/>
               <a:ext cx="62384" cy="62384"/>
             </a:xfrm>
             <a:prstGeom prst="ellipse">
@@ -10098,7 +10098,7 @@
           </p:nvSpPr>
           <p:spPr>
             <a:xfrm>
-              <a:off x="2666580" y="2626943"/>
+              <a:off x="2627189" y="2626943"/>
               <a:ext cx="62384" cy="62384"/>
             </a:xfrm>
             <a:prstGeom prst="ellipse">
@@ -10124,7 +10124,7 @@
           </p:nvSpPr>
           <p:spPr>
             <a:xfrm>
-              <a:off x="2790348" y="2644802"/>
+              <a:off x="2785108" y="2644802"/>
               <a:ext cx="62384" cy="62384"/>
             </a:xfrm>
             <a:prstGeom prst="ellipse">
@@ -10150,7 +10150,7 @@
           </p:nvSpPr>
           <p:spPr>
             <a:xfrm>
-              <a:off x="2620380" y="2357803"/>
+              <a:off x="2616652" y="2357803"/>
               <a:ext cx="62384" cy="62384"/>
             </a:xfrm>
             <a:prstGeom prst="ellipse">
@@ -10176,7 +10176,7 @@
           </p:nvSpPr>
           <p:spPr>
             <a:xfrm>
-              <a:off x="2767929" y="2418959"/>
+              <a:off x="2750784" y="2418959"/>
               <a:ext cx="62384" cy="62384"/>
             </a:xfrm>
             <a:prstGeom prst="ellipse">
@@ -10202,7 +10202,7 @@
           </p:nvSpPr>
           <p:spPr>
             <a:xfrm>
-              <a:off x="2622439" y="2676988"/>
+              <a:off x="2661822" y="2676988"/>
               <a:ext cx="62384" cy="62384"/>
             </a:xfrm>
             <a:prstGeom prst="ellipse">
@@ -10228,7 +10228,7 @@
           </p:nvSpPr>
           <p:spPr>
             <a:xfrm>
-              <a:off x="2768329" y="2738221"/>
+              <a:off x="2815402" y="2738221"/>
               <a:ext cx="62384" cy="62384"/>
             </a:xfrm>
             <a:prstGeom prst="ellipse">
@@ -10254,7 +10254,7 @@
           </p:nvSpPr>
           <p:spPr>
             <a:xfrm>
-              <a:off x="2673924" y="2781744"/>
+              <a:off x="2673799" y="2781744"/>
               <a:ext cx="62384" cy="62384"/>
             </a:xfrm>
             <a:prstGeom prst="ellipse">
@@ -10280,7 +10280,7 @@
           </p:nvSpPr>
           <p:spPr>
             <a:xfrm>
-              <a:off x="2763107" y="2720172"/>
+              <a:off x="2799453" y="2720172"/>
               <a:ext cx="62384" cy="62384"/>
             </a:xfrm>
             <a:prstGeom prst="ellipse">
@@ -10306,7 +10306,7 @@
           </p:nvSpPr>
           <p:spPr>
             <a:xfrm>
-              <a:off x="2606162" y="2435407"/>
+              <a:off x="2632592" y="2435407"/>
               <a:ext cx="62384" cy="62384"/>
             </a:xfrm>
             <a:prstGeom prst="ellipse">
@@ -10332,7 +10332,7 @@
           </p:nvSpPr>
           <p:spPr>
             <a:xfrm>
-              <a:off x="2784187" y="2967996"/>
+              <a:off x="2762962" y="2967996"/>
               <a:ext cx="62384" cy="62384"/>
             </a:xfrm>
             <a:prstGeom prst="ellipse">
@@ -10358,7 +10358,7 @@
           </p:nvSpPr>
           <p:spPr>
             <a:xfrm>
-              <a:off x="2625596" y="2782377"/>
+              <a:off x="2603041" y="2782377"/>
               <a:ext cx="62384" cy="62384"/>
             </a:xfrm>
             <a:prstGeom prst="ellipse">
@@ -10384,7 +10384,7 @@
           </p:nvSpPr>
           <p:spPr>
             <a:xfrm>
-              <a:off x="2812584" y="3148857"/>
+              <a:off x="2820828" y="3148857"/>
               <a:ext cx="62384" cy="62384"/>
             </a:xfrm>
             <a:prstGeom prst="ellipse">
@@ -10410,7 +10410,7 @@
           </p:nvSpPr>
           <p:spPr>
             <a:xfrm>
-              <a:off x="2600280" y="2763695"/>
+              <a:off x="2671786" y="2763695"/>
               <a:ext cx="62384" cy="62384"/>
             </a:xfrm>
             <a:prstGeom prst="ellipse">
@@ -10436,7 +10436,7 @@
           </p:nvSpPr>
           <p:spPr>
             <a:xfrm>
-              <a:off x="2813058" y="2590032"/>
+              <a:off x="2788067" y="2590032"/>
               <a:ext cx="62384" cy="62384"/>
             </a:xfrm>
             <a:prstGeom prst="ellipse">
@@ -10462,7 +10462,7 @@
           </p:nvSpPr>
           <p:spPr>
             <a:xfrm>
-              <a:off x="2652969" y="2609345"/>
+              <a:off x="2671541" y="2609345"/>
               <a:ext cx="62384" cy="62384"/>
             </a:xfrm>
             <a:prstGeom prst="ellipse">
@@ -10488,7 +10488,7 @@
           </p:nvSpPr>
           <p:spPr>
             <a:xfrm>
-              <a:off x="2821139" y="2795014"/>
+              <a:off x="2806136" y="2795014"/>
               <a:ext cx="62384" cy="62384"/>
             </a:xfrm>
             <a:prstGeom prst="ellipse">
@@ -10514,7 +10514,7 @@
           </p:nvSpPr>
           <p:spPr>
             <a:xfrm>
-              <a:off x="2629597" y="3136301"/>
+              <a:off x="2655439" y="3136301"/>
               <a:ext cx="62384" cy="62384"/>
             </a:xfrm>
             <a:prstGeom prst="ellipse">
@@ -10540,7 +10540,7 @@
           </p:nvSpPr>
           <p:spPr>
             <a:xfrm>
-              <a:off x="2819662" y="2954749"/>
+              <a:off x="2758469" y="2954749"/>
               <a:ext cx="62384" cy="62384"/>
             </a:xfrm>
             <a:prstGeom prst="ellipse">
@@ -10566,7 +10566,7 @@
           </p:nvSpPr>
           <p:spPr>
             <a:xfrm>
-              <a:off x="2604655" y="2620283"/>
+              <a:off x="2621613" y="2620283"/>
               <a:ext cx="62384" cy="62384"/>
             </a:xfrm>
             <a:prstGeom prst="ellipse">
@@ -10592,7 +10592,7 @@
           </p:nvSpPr>
           <p:spPr>
             <a:xfrm>
-              <a:off x="2778151" y="2525704"/>
+              <a:off x="2772950" y="2525704"/>
               <a:ext cx="62384" cy="62384"/>
             </a:xfrm>
             <a:prstGeom prst="ellipse">
@@ -10618,7 +10618,7 @@
           </p:nvSpPr>
           <p:spPr>
             <a:xfrm>
-              <a:off x="2618767" y="2580395"/>
+              <a:off x="2602537" y="2580395"/>
               <a:ext cx="62384" cy="62384"/>
             </a:xfrm>
             <a:prstGeom prst="ellipse">
@@ -10644,7 +10644,7 @@
           </p:nvSpPr>
           <p:spPr>
             <a:xfrm>
-              <a:off x="2771049" y="2472673"/>
+              <a:off x="2799411" y="2472673"/>
               <a:ext cx="62384" cy="62384"/>
             </a:xfrm>
             <a:prstGeom prst="ellipse">
@@ -10670,7 +10670,7 @@
           </p:nvSpPr>
           <p:spPr>
             <a:xfrm>
-              <a:off x="2661781" y="3097033"/>
+              <a:off x="2642744" y="3097033"/>
               <a:ext cx="62384" cy="62384"/>
             </a:xfrm>
             <a:prstGeom prst="ellipse">
@@ -10696,7 +10696,7 @@
           </p:nvSpPr>
           <p:spPr>
             <a:xfrm>
-              <a:off x="2780167" y="2626699"/>
+              <a:off x="2801562" y="2626699"/>
               <a:ext cx="62384" cy="62384"/>
             </a:xfrm>
             <a:prstGeom prst="ellipse">
@@ -10722,7 +10722,7 @@
           </p:nvSpPr>
           <p:spPr>
             <a:xfrm>
-              <a:off x="2614764" y="3186086"/>
+              <a:off x="2665223" y="3186086"/>
               <a:ext cx="62384" cy="62384"/>
             </a:xfrm>
             <a:prstGeom prst="ellipse">
@@ -10748,7 +10748,7 @@
           </p:nvSpPr>
           <p:spPr>
             <a:xfrm>
-              <a:off x="2792054" y="3110659"/>
+              <a:off x="2787652" y="3110659"/>
               <a:ext cx="62384" cy="62384"/>
             </a:xfrm>
             <a:prstGeom prst="ellipse">
@@ -10774,7 +10774,7 @@
           </p:nvSpPr>
           <p:spPr>
             <a:xfrm>
-              <a:off x="2628313" y="2412903"/>
+              <a:off x="2640203" y="2412903"/>
               <a:ext cx="62384" cy="62384"/>
             </a:xfrm>
             <a:prstGeom prst="ellipse">
@@ -10800,7 +10800,7 @@
           </p:nvSpPr>
           <p:spPr>
             <a:xfrm>
-              <a:off x="2786518" y="2588600"/>
+              <a:off x="2761954" y="2588600"/>
               <a:ext cx="62384" cy="62384"/>
             </a:xfrm>
             <a:prstGeom prst="ellipse">
@@ -10826,7 +10826,7 @@
           </p:nvSpPr>
           <p:spPr>
             <a:xfrm>
-              <a:off x="2638104" y="2868995"/>
+              <a:off x="2651617" y="2868995"/>
               <a:ext cx="62384" cy="62384"/>
             </a:xfrm>
             <a:prstGeom prst="ellipse">
@@ -10852,7 +10852,7 @@
           </p:nvSpPr>
           <p:spPr>
             <a:xfrm>
-              <a:off x="2814869" y="2858326"/>
+              <a:off x="2762537" y="2858326"/>
               <a:ext cx="62384" cy="62384"/>
             </a:xfrm>
             <a:prstGeom prst="ellipse">
@@ -10878,7 +10878,7 @@
           </p:nvSpPr>
           <p:spPr>
             <a:xfrm>
-              <a:off x="2669820" y="2717509"/>
+              <a:off x="2640171" y="2717509"/>
               <a:ext cx="62384" cy="62384"/>
             </a:xfrm>
             <a:prstGeom prst="ellipse">
@@ -10904,7 +10904,7 @@
           </p:nvSpPr>
           <p:spPr>
             <a:xfrm>
-              <a:off x="2788421" y="2742255"/>
+              <a:off x="2786616" y="2742255"/>
               <a:ext cx="62384" cy="62384"/>
             </a:xfrm>
             <a:prstGeom prst="ellipse">
@@ -10930,7 +10930,7 @@
           </p:nvSpPr>
           <p:spPr>
             <a:xfrm>
-              <a:off x="2604118" y="2582312"/>
+              <a:off x="2652749" y="2582312"/>
               <a:ext cx="62384" cy="62384"/>
             </a:xfrm>
             <a:prstGeom prst="ellipse">
@@ -10956,7 +10956,7 @@
           </p:nvSpPr>
           <p:spPr>
             <a:xfrm>
-              <a:off x="2760800" y="2772195"/>
+              <a:off x="2761295" y="2772195"/>
               <a:ext cx="62384" cy="62384"/>
             </a:xfrm>
             <a:prstGeom prst="ellipse">
@@ -10982,7 +10982,7 @@
           </p:nvSpPr>
           <p:spPr>
             <a:xfrm>
-              <a:off x="2633272" y="2802207"/>
+              <a:off x="2658177" y="2802207"/>
               <a:ext cx="62384" cy="62384"/>
             </a:xfrm>
             <a:prstGeom prst="ellipse">
@@ -11008,7 +11008,7 @@
           </p:nvSpPr>
           <p:spPr>
             <a:xfrm>
-              <a:off x="2762343" y="2553204"/>
+              <a:off x="2773222" y="2553204"/>
               <a:ext cx="62384" cy="62384"/>
             </a:xfrm>
             <a:prstGeom prst="ellipse">
@@ -11034,7 +11034,7 @@
           </p:nvSpPr>
           <p:spPr>
             <a:xfrm>
-              <a:off x="2660052" y="2873202"/>
+              <a:off x="2653757" y="2873202"/>
               <a:ext cx="62384" cy="62384"/>
             </a:xfrm>
             <a:prstGeom prst="ellipse">
@@ -11060,7 +11060,7 @@
           </p:nvSpPr>
           <p:spPr>
             <a:xfrm>
-              <a:off x="2757221" y="2651861"/>
+              <a:off x="2755228" y="2651861"/>
               <a:ext cx="62384" cy="62384"/>
             </a:xfrm>
             <a:prstGeom prst="ellipse">
@@ -11086,7 +11086,7 @@
           </p:nvSpPr>
           <p:spPr>
             <a:xfrm>
-              <a:off x="2626140" y="2526671"/>
+              <a:off x="2658767" y="2526671"/>
               <a:ext cx="62384" cy="62384"/>
             </a:xfrm>
             <a:prstGeom prst="ellipse">
@@ -11112,7 +11112,7 @@
           </p:nvSpPr>
           <p:spPr>
             <a:xfrm>
-              <a:off x="2768276" y="2461232"/>
+              <a:off x="2789598" y="2461232"/>
               <a:ext cx="62384" cy="62384"/>
             </a:xfrm>
             <a:prstGeom prst="ellipse">
@@ -11138,7 +11138,7 @@
           </p:nvSpPr>
           <p:spPr>
             <a:xfrm>
-              <a:off x="2650999" y="2238331"/>
+              <a:off x="2664134" y="2238331"/>
               <a:ext cx="62384" cy="62384"/>
             </a:xfrm>
             <a:prstGeom prst="ellipse">
@@ -11164,7 +11164,7 @@
           </p:nvSpPr>
           <p:spPr>
             <a:xfrm>
-              <a:off x="2762756" y="2207776"/>
+              <a:off x="2803896" y="2207776"/>
               <a:ext cx="62384" cy="62384"/>
             </a:xfrm>
             <a:prstGeom prst="ellipse">
@@ -11190,7 +11190,7 @@
           </p:nvSpPr>
           <p:spPr>
             <a:xfrm>
-              <a:off x="2610537" y="2480555"/>
+              <a:off x="2614912" y="2480555"/>
               <a:ext cx="62384" cy="62384"/>
             </a:xfrm>
             <a:prstGeom prst="ellipse">
@@ -11216,7 +11216,7 @@
           </p:nvSpPr>
           <p:spPr>
             <a:xfrm>
-              <a:off x="2794228" y="2413021"/>
+              <a:off x="2796546" y="2413021"/>
               <a:ext cx="62384" cy="62384"/>
             </a:xfrm>
             <a:prstGeom prst="ellipse">
@@ -11242,7 +11242,7 @@
           </p:nvSpPr>
           <p:spPr>
             <a:xfrm>
-              <a:off x="2661916" y="2378212"/>
+              <a:off x="2658841" y="2378212"/>
               <a:ext cx="62384" cy="62384"/>
             </a:xfrm>
             <a:prstGeom prst="ellipse">
@@ -11268,7 +11268,7 @@
           </p:nvSpPr>
           <p:spPr>
             <a:xfrm>
-              <a:off x="2769182" y="2319873"/>
+              <a:off x="2816758" y="2319873"/>
               <a:ext cx="62384" cy="62384"/>
             </a:xfrm>
             <a:prstGeom prst="ellipse">
@@ -11294,7 +11294,7 @@
           </p:nvSpPr>
           <p:spPr>
             <a:xfrm>
-              <a:off x="2668695" y="2516526"/>
+              <a:off x="2663029" y="2516526"/>
               <a:ext cx="62384" cy="62384"/>
             </a:xfrm>
             <a:prstGeom prst="ellipse">
@@ -11320,7 +11320,7 @@
           </p:nvSpPr>
           <p:spPr>
             <a:xfrm>
-              <a:off x="2791765" y="2671149"/>
+              <a:off x="2797714" y="2671149"/>
               <a:ext cx="62384" cy="62384"/>
             </a:xfrm>
             <a:prstGeom prst="ellipse">
@@ -11346,7 +11346,7 @@
           </p:nvSpPr>
           <p:spPr>
             <a:xfrm>
-              <a:off x="2658006" y="2891576"/>
+              <a:off x="2635532" y="2891576"/>
               <a:ext cx="62384" cy="62384"/>
             </a:xfrm>
             <a:prstGeom prst="ellipse">
@@ -11372,7 +11372,7 @@
           </p:nvSpPr>
           <p:spPr>
             <a:xfrm>
-              <a:off x="2779246" y="2854399"/>
+              <a:off x="2767929" y="2854399"/>
               <a:ext cx="62384" cy="62384"/>
             </a:xfrm>
             <a:prstGeom prst="ellipse">
@@ -11398,7 +11398,7 @@
           </p:nvSpPr>
           <p:spPr>
             <a:xfrm>
-              <a:off x="2610573" y="2790183"/>
+              <a:off x="2625521" y="2790183"/>
               <a:ext cx="62384" cy="62384"/>
             </a:xfrm>
             <a:prstGeom prst="ellipse">
@@ -11424,7 +11424,7 @@
           </p:nvSpPr>
           <p:spPr>
             <a:xfrm>
-              <a:off x="2791173" y="2633806"/>
+              <a:off x="2792882" y="2633806"/>
               <a:ext cx="62384" cy="62384"/>
             </a:xfrm>
             <a:prstGeom prst="ellipse">
@@ -11450,7 +11450,7 @@
           </p:nvSpPr>
           <p:spPr>
             <a:xfrm>
-              <a:off x="2610475" y="2664992"/>
+              <a:off x="2666518" y="2664992"/>
               <a:ext cx="62384" cy="62384"/>
             </a:xfrm>
             <a:prstGeom prst="ellipse">
@@ -11476,7 +11476,7 @@
           </p:nvSpPr>
           <p:spPr>
             <a:xfrm>
-              <a:off x="2772914" y="2462177"/>
+              <a:off x="2763716" y="2462177"/>
               <a:ext cx="62384" cy="62384"/>
             </a:xfrm>
             <a:prstGeom prst="ellipse">
@@ -11502,7 +11502,7 @@
           </p:nvSpPr>
           <p:spPr>
             <a:xfrm>
-              <a:off x="2630553" y="2226842"/>
+              <a:off x="2627186" y="2226842"/>
               <a:ext cx="62384" cy="62384"/>
             </a:xfrm>
             <a:prstGeom prst="ellipse">
@@ -11528,7 +11528,7 @@
           </p:nvSpPr>
           <p:spPr>
             <a:xfrm>
-              <a:off x="2769924" y="2271804"/>
+              <a:off x="2778618" y="2271804"/>
               <a:ext cx="62384" cy="62384"/>
             </a:xfrm>
             <a:prstGeom prst="ellipse">
@@ -11554,7 +11554,7 @@
           </p:nvSpPr>
           <p:spPr>
             <a:xfrm>
-              <a:off x="2664042" y="3018506"/>
+              <a:off x="2615803" y="3018506"/>
               <a:ext cx="62384" cy="62384"/>
             </a:xfrm>
             <a:prstGeom prst="ellipse">
@@ -11580,7 +11580,7 @@
           </p:nvSpPr>
           <p:spPr>
             <a:xfrm>
-              <a:off x="2769809" y="2477842"/>
+              <a:off x="2751447" y="2477842"/>
               <a:ext cx="62384" cy="62384"/>
             </a:xfrm>
             <a:prstGeom prst="ellipse">
@@ -11606,7 +11606,7 @@
           </p:nvSpPr>
           <p:spPr>
             <a:xfrm>
-              <a:off x="2673639" y="2524713"/>
+              <a:off x="2659056" y="2524713"/>
               <a:ext cx="62384" cy="62384"/>
             </a:xfrm>
             <a:prstGeom prst="ellipse">
@@ -11632,7 +11632,7 @@
           </p:nvSpPr>
           <p:spPr>
             <a:xfrm>
-              <a:off x="2787292" y="2699687"/>
+              <a:off x="2778710" y="2699687"/>
               <a:ext cx="62384" cy="62384"/>
             </a:xfrm>
             <a:prstGeom prst="ellipse">
@@ -11658,7 +11658,7 @@
           </p:nvSpPr>
           <p:spPr>
             <a:xfrm>
-              <a:off x="2644747" y="2330471"/>
+              <a:off x="2638828" y="2330471"/>
               <a:ext cx="62384" cy="62384"/>
             </a:xfrm>
             <a:prstGeom prst="ellipse">
@@ -11684,7 +11684,7 @@
           </p:nvSpPr>
           <p:spPr>
             <a:xfrm>
-              <a:off x="2778186" y="2386403"/>
+              <a:off x="2788113" y="2386403"/>
               <a:ext cx="62384" cy="62384"/>
             </a:xfrm>
             <a:prstGeom prst="ellipse">
@@ -11710,7 +11710,7 @@
           </p:nvSpPr>
           <p:spPr>
             <a:xfrm>
-              <a:off x="2654205" y="2194223"/>
+              <a:off x="2634398" y="2194223"/>
               <a:ext cx="62384" cy="62384"/>
             </a:xfrm>
             <a:prstGeom prst="ellipse">
@@ -11736,7 +11736,7 @@
           </p:nvSpPr>
           <p:spPr>
             <a:xfrm>
-              <a:off x="2805816" y="2175583"/>
+              <a:off x="2811594" y="2175583"/>
               <a:ext cx="62384" cy="62384"/>
             </a:xfrm>
             <a:prstGeom prst="ellipse">
@@ -11762,7 +11762,7 @@
           </p:nvSpPr>
           <p:spPr>
             <a:xfrm>
-              <a:off x="2608202" y="2143979"/>
+              <a:off x="2601593" y="2143979"/>
               <a:ext cx="62384" cy="62384"/>
             </a:xfrm>
             <a:prstGeom prst="ellipse">
@@ -11788,7 +11788,7 @@
           </p:nvSpPr>
           <p:spPr>
             <a:xfrm>
-              <a:off x="2784177" y="1999557"/>
+              <a:off x="2753715" y="1999557"/>
               <a:ext cx="62384" cy="62384"/>
             </a:xfrm>
             <a:prstGeom prst="ellipse">
@@ -11814,7 +11814,7 @@
           </p:nvSpPr>
           <p:spPr>
             <a:xfrm>
-              <a:off x="2653520" y="1573875"/>
+              <a:off x="2670520" y="1573875"/>
               <a:ext cx="62384" cy="62384"/>
             </a:xfrm>
             <a:prstGeom prst="ellipse">
@@ -11840,7 +11840,7 @@
           </p:nvSpPr>
           <p:spPr>
             <a:xfrm>
-              <a:off x="2786910" y="2338217"/>
+              <a:off x="2764144" y="2338217"/>
               <a:ext cx="62384" cy="62384"/>
             </a:xfrm>
             <a:prstGeom prst="ellipse">
@@ -11866,7 +11866,7 @@
           </p:nvSpPr>
           <p:spPr>
             <a:xfrm>
-              <a:off x="2653249" y="2537992"/>
+              <a:off x="2656782" y="2537992"/>
               <a:ext cx="62384" cy="62384"/>
             </a:xfrm>
             <a:prstGeom prst="ellipse">
@@ -11892,7 +11892,7 @@
           </p:nvSpPr>
           <p:spPr>
             <a:xfrm>
-              <a:off x="2817697" y="2581861"/>
+              <a:off x="2779738" y="2581861"/>
               <a:ext cx="62384" cy="62384"/>
             </a:xfrm>
             <a:prstGeom prst="ellipse">
@@ -11918,7 +11918,7 @@
           </p:nvSpPr>
           <p:spPr>
             <a:xfrm>
-              <a:off x="2609070" y="2278253"/>
+              <a:off x="2629432" y="2278253"/>
               <a:ext cx="62384" cy="62384"/>
             </a:xfrm>
             <a:prstGeom prst="ellipse">
@@ -11944,7 +11944,7 @@
           </p:nvSpPr>
           <p:spPr>
             <a:xfrm>
-              <a:off x="2812804" y="2238716"/>
+              <a:off x="2752192" y="2238716"/>
               <a:ext cx="62384" cy="62384"/>
             </a:xfrm>
             <a:prstGeom prst="ellipse">
@@ -11970,7 +11970,7 @@
           </p:nvSpPr>
           <p:spPr>
             <a:xfrm>
-              <a:off x="3644122" y="2977551"/>
+              <a:off x="3670358" y="2977551"/>
               <a:ext cx="62384" cy="62384"/>
             </a:xfrm>
             <a:prstGeom prst="ellipse">
@@ -11996,7 +11996,7 @@
           </p:nvSpPr>
           <p:spPr>
             <a:xfrm>
-              <a:off x="3811965" y="2742761"/>
+              <a:off x="3827617" y="2742761"/>
               <a:ext cx="62384" cy="62384"/>
             </a:xfrm>
             <a:prstGeom prst="ellipse">
@@ -12022,7 +12022,7 @@
           </p:nvSpPr>
           <p:spPr>
             <a:xfrm>
-              <a:off x="3643337" y="2240077"/>
+              <a:off x="3675509" y="2240077"/>
               <a:ext cx="62384" cy="62384"/>
             </a:xfrm>
             <a:prstGeom prst="ellipse">
@@ -12048,7 +12048,7 @@
           </p:nvSpPr>
           <p:spPr>
             <a:xfrm>
-              <a:off x="3855661" y="2461670"/>
+              <a:off x="3790795" y="2461670"/>
               <a:ext cx="62384" cy="62384"/>
             </a:xfrm>
             <a:prstGeom prst="ellipse">
@@ -12074,7 +12074,7 @@
           </p:nvSpPr>
           <p:spPr>
             <a:xfrm>
-              <a:off x="3707780" y="2283992"/>
+              <a:off x="3707879" y="2283992"/>
               <a:ext cx="62384" cy="62384"/>
             </a:xfrm>
             <a:prstGeom prst="ellipse">
@@ -12100,7 +12100,7 @@
           </p:nvSpPr>
           <p:spPr>
             <a:xfrm>
-              <a:off x="3860030" y="2723369"/>
+              <a:off x="3804080" y="2723369"/>
               <a:ext cx="62384" cy="62384"/>
             </a:xfrm>
             <a:prstGeom prst="ellipse">
@@ -12126,7 +12126,7 @@
           </p:nvSpPr>
           <p:spPr>
             <a:xfrm>
-              <a:off x="3688152" y="2041087"/>
+              <a:off x="3690386" y="2041087"/>
               <a:ext cx="62384" cy="62384"/>
             </a:xfrm>
             <a:prstGeom prst="ellipse">
@@ -12152,7 +12152,7 @@
           </p:nvSpPr>
           <p:spPr>
             <a:xfrm>
-              <a:off x="3801914" y="2268115"/>
+              <a:off x="3855504" y="2268115"/>
               <a:ext cx="62384" cy="62384"/>
             </a:xfrm>
             <a:prstGeom prst="ellipse">
@@ -12178,7 +12178,7 @@
           </p:nvSpPr>
           <p:spPr>
             <a:xfrm>
-              <a:off x="3687734" y="2323605"/>
+              <a:off x="3678281" y="2323605"/>
               <a:ext cx="62384" cy="62384"/>
             </a:xfrm>
             <a:prstGeom prst="ellipse">
@@ -12204,7 +12204,7 @@
           </p:nvSpPr>
           <p:spPr>
             <a:xfrm>
-              <a:off x="3802829" y="2444426"/>
+              <a:off x="3793825" y="2444426"/>
               <a:ext cx="62384" cy="62384"/>
             </a:xfrm>
             <a:prstGeom prst="ellipse">
@@ -12230,7 +12230,7 @@
           </p:nvSpPr>
           <p:spPr>
             <a:xfrm>
-              <a:off x="3709111" y="2473336"/>
+              <a:off x="3641301" y="2473336"/>
               <a:ext cx="62384" cy="62384"/>
             </a:xfrm>
             <a:prstGeom prst="ellipse">
@@ -12256,7 +12256,7 @@
           </p:nvSpPr>
           <p:spPr>
             <a:xfrm>
-              <a:off x="3858426" y="2879524"/>
+              <a:off x="3842249" y="2879524"/>
               <a:ext cx="62384" cy="62384"/>
             </a:xfrm>
             <a:prstGeom prst="ellipse">
@@ -12282,7 +12282,7 @@
           </p:nvSpPr>
           <p:spPr>
             <a:xfrm>
-              <a:off x="3647322" y="2359280"/>
+              <a:off x="3699440" y="2359280"/>
               <a:ext cx="62384" cy="62384"/>
             </a:xfrm>
             <a:prstGeom prst="ellipse">
@@ -12308,7 +12308,7 @@
           </p:nvSpPr>
           <p:spPr>
             <a:xfrm>
-              <a:off x="3850897" y="2416077"/>
+              <a:off x="3799259" y="2416077"/>
               <a:ext cx="62384" cy="62384"/>
             </a:xfrm>
             <a:prstGeom prst="ellipse">
@@ -12334,7 +12334,7 @@
           </p:nvSpPr>
           <p:spPr>
             <a:xfrm>
-              <a:off x="3699114" y="2548773"/>
+              <a:off x="3694150" y="2548773"/>
               <a:ext cx="62384" cy="62384"/>
             </a:xfrm>
             <a:prstGeom prst="ellipse">
@@ -12360,7 +12360,7 @@
           </p:nvSpPr>
           <p:spPr>
             <a:xfrm>
-              <a:off x="3820369" y="2545186"/>
+              <a:off x="3837017" y="2545186"/>
               <a:ext cx="62384" cy="62384"/>
             </a:xfrm>
             <a:prstGeom prst="ellipse">
@@ -12386,7 +12386,7 @@
           </p:nvSpPr>
           <p:spPr>
             <a:xfrm>
-              <a:off x="3643809" y="2621169"/>
+              <a:off x="3697773" y="2621169"/>
               <a:ext cx="62384" cy="62384"/>
             </a:xfrm>
             <a:prstGeom prst="ellipse">
@@ -12412,7 +12412,7 @@
           </p:nvSpPr>
           <p:spPr>
             <a:xfrm>
-              <a:off x="3850410" y="2652582"/>
+              <a:off x="3843974" y="2652582"/>
               <a:ext cx="62384" cy="62384"/>
             </a:xfrm>
             <a:prstGeom prst="ellipse">
@@ -12438,7 +12438,7 @@
           </p:nvSpPr>
           <p:spPr>
             <a:xfrm>
-              <a:off x="3673975" y="2757682"/>
+              <a:off x="3639976" y="2757682"/>
               <a:ext cx="62384" cy="62384"/>
             </a:xfrm>
             <a:prstGeom prst="ellipse">
@@ -12464,7 +12464,7 @@
           </p:nvSpPr>
           <p:spPr>
             <a:xfrm>
-              <a:off x="3812847" y="2917328"/>
+              <a:off x="3835821" y="2917328"/>
               <a:ext cx="62384" cy="62384"/>
             </a:xfrm>
             <a:prstGeom prst="ellipse">
@@ -12490,7 +12490,7 @@
           </p:nvSpPr>
           <p:spPr>
             <a:xfrm>
-              <a:off x="3687057" y="2875369"/>
+              <a:off x="3683493" y="2875369"/>
               <a:ext cx="62384" cy="62384"/>
             </a:xfrm>
             <a:prstGeom prst="ellipse">
@@ -12516,7 +12516,7 @@
           </p:nvSpPr>
           <p:spPr>
             <a:xfrm>
-              <a:off x="3821563" y="3234895"/>
+              <a:off x="3792788" y="3234895"/>
               <a:ext cx="62384" cy="62384"/>
             </a:xfrm>
             <a:prstGeom prst="ellipse">
@@ -12542,7 +12542,7 @@
           </p:nvSpPr>
           <p:spPr>
             <a:xfrm>
-              <a:off x="3670076" y="2281355"/>
+              <a:off x="3644330" y="2281355"/>
               <a:ext cx="62384" cy="62384"/>
             </a:xfrm>
             <a:prstGeom prst="ellipse">
@@ -12568,7 +12568,7 @@
           </p:nvSpPr>
           <p:spPr>
             <a:xfrm>
-              <a:off x="3859084" y="2494850"/>
+              <a:off x="3856175" y="2494850"/>
               <a:ext cx="62384" cy="62384"/>
             </a:xfrm>
             <a:prstGeom prst="ellipse">
@@ -12594,7 +12594,7 @@
           </p:nvSpPr>
           <p:spPr>
             <a:xfrm>
-              <a:off x="3682318" y="2750417"/>
+              <a:off x="3678630" y="2750417"/>
               <a:ext cx="62384" cy="62384"/>
             </a:xfrm>
             <a:prstGeom prst="ellipse">
@@ -12620,7 +12620,7 @@
           </p:nvSpPr>
           <p:spPr>
             <a:xfrm>
-              <a:off x="3798941" y="2929440"/>
+              <a:off x="3813890" y="2929440"/>
               <a:ext cx="62384" cy="62384"/>
             </a:xfrm>
             <a:prstGeom prst="ellipse">
@@ -12646,7 +12646,7 @@
           </p:nvSpPr>
           <p:spPr>
             <a:xfrm>
-              <a:off x="3656403" y="2054400"/>
+              <a:off x="3660475" y="2054400"/>
               <a:ext cx="62384" cy="62384"/>
             </a:xfrm>
             <a:prstGeom prst="ellipse">
@@ -12672,7 +12672,7 @@
           </p:nvSpPr>
           <p:spPr>
             <a:xfrm>
-              <a:off x="3862686" y="2378063"/>
+              <a:off x="3790085" y="2378063"/>
               <a:ext cx="62384" cy="62384"/>
             </a:xfrm>
             <a:prstGeom prst="ellipse">
@@ -12698,7 +12698,7 @@
           </p:nvSpPr>
           <p:spPr>
             <a:xfrm>
-              <a:off x="3697924" y="2280071"/>
+              <a:off x="3657678" y="2280071"/>
               <a:ext cx="62384" cy="62384"/>
             </a:xfrm>
             <a:prstGeom prst="ellipse">
@@ -12724,7 +12724,7 @@
           </p:nvSpPr>
           <p:spPr>
             <a:xfrm>
-              <a:off x="3817728" y="2442307"/>
+              <a:off x="3803561" y="2442307"/>
               <a:ext cx="62384" cy="62384"/>
             </a:xfrm>
             <a:prstGeom prst="ellipse">
@@ -12750,7 +12750,7 @@
           </p:nvSpPr>
           <p:spPr>
             <a:xfrm>
-              <a:off x="3711532" y="2068688"/>
+              <a:off x="3675662" y="2068688"/>
               <a:ext cx="62384" cy="62384"/>
             </a:xfrm>
             <a:prstGeom prst="ellipse">
@@ -12776,7 +12776,7 @@
           </p:nvSpPr>
           <p:spPr>
             <a:xfrm>
-              <a:off x="3806153" y="2353083"/>
+              <a:off x="3812496" y="2353083"/>
               <a:ext cx="62384" cy="62384"/>
             </a:xfrm>
             <a:prstGeom prst="ellipse">
@@ -12802,7 +12802,7 @@
           </p:nvSpPr>
           <p:spPr>
             <a:xfrm>
-              <a:off x="3707141" y="3379721"/>
+              <a:off x="3644264" y="3379721"/>
               <a:ext cx="62384" cy="62384"/>
             </a:xfrm>
             <a:prstGeom prst="ellipse">
@@ -12828,7 +12828,7 @@
           </p:nvSpPr>
           <p:spPr>
             <a:xfrm>
-              <a:off x="3834154" y="3189255"/>
+              <a:off x="3849156" y="3189255"/>
               <a:ext cx="62384" cy="62384"/>
             </a:xfrm>
             <a:prstGeom prst="ellipse">
@@ -12854,7 +12854,7 @@
           </p:nvSpPr>
           <p:spPr>
             <a:xfrm>
-              <a:off x="3655683" y="3009233"/>
+              <a:off x="3667184" y="3009233"/>
               <a:ext cx="62384" cy="62384"/>
             </a:xfrm>
             <a:prstGeom prst="ellipse">
@@ -12880,7 +12880,7 @@
           </p:nvSpPr>
           <p:spPr>
             <a:xfrm>
-              <a:off x="3836846" y="2727901"/>
+              <a:off x="3804285" y="2727901"/>
               <a:ext cx="62384" cy="62384"/>
             </a:xfrm>
             <a:prstGeom prst="ellipse">
@@ -12906,7 +12906,7 @@
           </p:nvSpPr>
           <p:spPr>
             <a:xfrm>
-              <a:off x="3701091" y="2078040"/>
+              <a:off x="3712220" y="2078040"/>
               <a:ext cx="62384" cy="62384"/>
             </a:xfrm>
             <a:prstGeom prst="ellipse">
@@ -12932,7 +12932,7 @@
           </p:nvSpPr>
           <p:spPr>
             <a:xfrm>
-              <a:off x="3861198" y="2538691"/>
+              <a:off x="3814522" y="2538691"/>
               <a:ext cx="62384" cy="62384"/>
             </a:xfrm>
             <a:prstGeom prst="ellipse">
@@ -12958,7 +12958,7 @@
           </p:nvSpPr>
           <p:spPr>
             <a:xfrm>
-              <a:off x="3713864" y="2664221"/>
+              <a:off x="3657305" y="2664221"/>
               <a:ext cx="62384" cy="62384"/>
             </a:xfrm>
             <a:prstGeom prst="ellipse">
@@ -12984,7 +12984,7 @@
           </p:nvSpPr>
           <p:spPr>
             <a:xfrm>
-              <a:off x="3827058" y="2933998"/>
+              <a:off x="3862367" y="2933998"/>
               <a:ext cx="62384" cy="62384"/>
             </a:xfrm>
             <a:prstGeom prst="ellipse">
@@ -13010,7 +13010,7 @@
           </p:nvSpPr>
           <p:spPr>
             <a:xfrm>
-              <a:off x="3680065" y="2348837"/>
+              <a:off x="3668308" y="2348837"/>
               <a:ext cx="62384" cy="62384"/>
             </a:xfrm>
             <a:prstGeom prst="ellipse">
@@ -13036,7 +13036,7 @@
           </p:nvSpPr>
           <p:spPr>
             <a:xfrm>
-              <a:off x="3862976" y="2509938"/>
+              <a:off x="3819025" y="2509938"/>
               <a:ext cx="62384" cy="62384"/>
             </a:xfrm>
             <a:prstGeom prst="ellipse">
@@ -13062,7 +13062,7 @@
           </p:nvSpPr>
           <p:spPr>
             <a:xfrm>
-              <a:off x="3652396" y="2517579"/>
+              <a:off x="3691334" y="2517579"/>
               <a:ext cx="62384" cy="62384"/>
             </a:xfrm>
             <a:prstGeom prst="ellipse">
@@ -13088,7 +13088,7 @@
           </p:nvSpPr>
           <p:spPr>
             <a:xfrm>
-              <a:off x="3853616" y="2715871"/>
+              <a:off x="3844939" y="2715871"/>
               <a:ext cx="62384" cy="62384"/>
             </a:xfrm>
             <a:prstGeom prst="ellipse">
@@ -13114,7 +13114,7 @@
           </p:nvSpPr>
           <p:spPr>
             <a:xfrm>
-              <a:off x="3676379" y="3235693"/>
+              <a:off x="3670565" y="3235693"/>
               <a:ext cx="62384" cy="62384"/>
             </a:xfrm>
             <a:prstGeom prst="ellipse">
@@ -13140,7 +13140,7 @@
           </p:nvSpPr>
           <p:spPr>
             <a:xfrm>
-              <a:off x="3814819" y="3000286"/>
+              <a:off x="3843853" y="3000286"/>
               <a:ext cx="62384" cy="62384"/>
             </a:xfrm>
             <a:prstGeom prst="ellipse">
@@ -13166,7 +13166,7 @@
           </p:nvSpPr>
           <p:spPr>
             <a:xfrm>
-              <a:off x="3705942" y="2669317"/>
+              <a:off x="3656106" y="2669317"/>
               <a:ext cx="62384" cy="62384"/>
             </a:xfrm>
             <a:prstGeom prst="ellipse">
@@ -13192,7 +13192,7 @@
           </p:nvSpPr>
           <p:spPr>
             <a:xfrm>
-              <a:off x="3848193" y="2847542"/>
+              <a:off x="3789675" y="2847542"/>
               <a:ext cx="62384" cy="62384"/>
             </a:xfrm>
             <a:prstGeom prst="ellipse">
@@ -13218,7 +13218,7 @@
           </p:nvSpPr>
           <p:spPr>
             <a:xfrm>
-              <a:off x="3701975" y="2498627"/>
+              <a:off x="3664308" y="2498627"/>
               <a:ext cx="62384" cy="62384"/>
             </a:xfrm>
             <a:prstGeom prst="ellipse">
@@ -13244,7 +13244,7 @@
           </p:nvSpPr>
           <p:spPr>
             <a:xfrm>
-              <a:off x="3796727" y="2819046"/>
+              <a:off x="3808799" y="2819046"/>
               <a:ext cx="62384" cy="62384"/>
             </a:xfrm>
             <a:prstGeom prst="ellipse">
@@ -13270,7 +13270,7 @@
           </p:nvSpPr>
           <p:spPr>
             <a:xfrm>
-              <a:off x="3694782" y="2578249"/>
+              <a:off x="3689528" y="2578249"/>
               <a:ext cx="62384" cy="62384"/>
             </a:xfrm>
             <a:prstGeom prst="ellipse">
@@ -13296,7 +13296,7 @@
           </p:nvSpPr>
           <p:spPr>
             <a:xfrm>
-              <a:off x="3860656" y="2537367"/>
+              <a:off x="3822133" y="2537367"/>
               <a:ext cx="62384" cy="62384"/>
             </a:xfrm>
             <a:prstGeom prst="ellipse">
@@ -13322,7 +13322,7 @@
           </p:nvSpPr>
           <p:spPr>
             <a:xfrm>
-              <a:off x="3686889" y="3167872"/>
+              <a:off x="3654453" y="3167872"/>
               <a:ext cx="62384" cy="62384"/>
             </a:xfrm>
             <a:prstGeom prst="ellipse">
@@ -13348,7 +13348,7 @@
           </p:nvSpPr>
           <p:spPr>
             <a:xfrm>
-              <a:off x="3861852" y="3593954"/>
+              <a:off x="3808902" y="3593954"/>
               <a:ext cx="62384" cy="62384"/>
             </a:xfrm>
             <a:prstGeom prst="ellipse">
@@ -13374,7 +13374,7 @@
           </p:nvSpPr>
           <p:spPr>
             <a:xfrm>
-              <a:off x="3702161" y="2262805"/>
+              <a:off x="3683671" y="2262805"/>
               <a:ext cx="62384" cy="62384"/>
             </a:xfrm>
             <a:prstGeom prst="ellipse">
@@ -13400,7 +13400,7 @@
           </p:nvSpPr>
           <p:spPr>
             <a:xfrm>
-              <a:off x="3803745" y="2408758"/>
+              <a:off x="3857089" y="2408758"/>
               <a:ext cx="62384" cy="62384"/>
             </a:xfrm>
             <a:prstGeom prst="ellipse">
@@ -13426,7 +13426,7 @@
           </p:nvSpPr>
           <p:spPr>
             <a:xfrm>
-              <a:off x="3672317" y="2373463"/>
+              <a:off x="3688788" y="2373463"/>
               <a:ext cx="62384" cy="62384"/>
             </a:xfrm>
             <a:prstGeom prst="ellipse">
@@ -13452,7 +13452,7 @@
           </p:nvSpPr>
           <p:spPr>
             <a:xfrm>
-              <a:off x="3830602" y="2445711"/>
+              <a:off x="3844553" y="2445711"/>
               <a:ext cx="62384" cy="62384"/>
             </a:xfrm>
             <a:prstGeom prst="ellipse">
@@ -13478,7 +13478,7 @@
           </p:nvSpPr>
           <p:spPr>
             <a:xfrm>
-              <a:off x="3683529" y="2099485"/>
+              <a:off x="3653418" y="2099485"/>
               <a:ext cx="62384" cy="62384"/>
             </a:xfrm>
             <a:prstGeom prst="ellipse">
@@ -13504,7 +13504,7 @@
           </p:nvSpPr>
           <p:spPr>
             <a:xfrm>
-              <a:off x="3830853" y="2316253"/>
+              <a:off x="3837002" y="2316253"/>
               <a:ext cx="62384" cy="62384"/>
             </a:xfrm>
             <a:prstGeom prst="ellipse">
@@ -13530,7 +13530,7 @@
           </p:nvSpPr>
           <p:spPr>
             <a:xfrm>
-              <a:off x="3673085" y="2181084"/>
+              <a:off x="3655061" y="2181084"/>
               <a:ext cx="62384" cy="62384"/>
             </a:xfrm>
             <a:prstGeom prst="ellipse">
@@ -13556,7 +13556,7 @@
           </p:nvSpPr>
           <p:spPr>
             <a:xfrm>
-              <a:off x="3789881" y="2237597"/>
+              <a:off x="3853374" y="2237597"/>
               <a:ext cx="62384" cy="62384"/>
             </a:xfrm>
             <a:prstGeom prst="ellipse">
@@ -13582,7 +13582,7 @@
           </p:nvSpPr>
           <p:spPr>
             <a:xfrm>
-              <a:off x="3711852" y="2140051"/>
+              <a:off x="3647832" y="2140051"/>
               <a:ext cx="62384" cy="62384"/>
             </a:xfrm>
             <a:prstGeom prst="ellipse">
@@ -13608,7 +13608,7 @@
           </p:nvSpPr>
           <p:spPr>
             <a:xfrm>
-              <a:off x="3844086" y="2246736"/>
+              <a:off x="3843864" y="2246736"/>
               <a:ext cx="62384" cy="62384"/>
             </a:xfrm>
             <a:prstGeom prst="ellipse">
@@ -13634,7 +13634,7 @@
           </p:nvSpPr>
           <p:spPr>
             <a:xfrm>
-              <a:off x="3686458" y="2581683"/>
+              <a:off x="3684535" y="2581683"/>
               <a:ext cx="62384" cy="62384"/>
             </a:xfrm>
             <a:prstGeom prst="ellipse">
@@ -13660,7 +13660,7 @@
           </p:nvSpPr>
           <p:spPr>
             <a:xfrm>
-              <a:off x="3855248" y="2438602"/>
+              <a:off x="3813275" y="2438602"/>
               <a:ext cx="62384" cy="62384"/>
             </a:xfrm>
             <a:prstGeom prst="ellipse">
@@ -13686,7 +13686,7 @@
           </p:nvSpPr>
           <p:spPr>
             <a:xfrm>
-              <a:off x="3643070" y="2349594"/>
+              <a:off x="3675199" y="2349594"/>
               <a:ext cx="62384" cy="62384"/>
             </a:xfrm>
             <a:prstGeom prst="ellipse">
@@ -13712,7 +13712,7 @@
           </p:nvSpPr>
           <p:spPr>
             <a:xfrm>
-              <a:off x="3810514" y="2437996"/>
+              <a:off x="3805798" y="2437996"/>
               <a:ext cx="62384" cy="62384"/>
             </a:xfrm>
             <a:prstGeom prst="ellipse">
@@ -13738,7 +13738,7 @@
           </p:nvSpPr>
           <p:spPr>
             <a:xfrm>
-              <a:off x="3686443" y="1964034"/>
+              <a:off x="3694739" y="1964034"/>
               <a:ext cx="62384" cy="62384"/>
             </a:xfrm>
             <a:prstGeom prst="ellipse">
@@ -13764,7 +13764,7 @@
           </p:nvSpPr>
           <p:spPr>
             <a:xfrm>
-              <a:off x="3795094" y="2252554"/>
+              <a:off x="3838361" y="2252554"/>
               <a:ext cx="62384" cy="62384"/>
             </a:xfrm>
             <a:prstGeom prst="ellipse">
@@ -13790,7 +13790,7 @@
           </p:nvSpPr>
           <p:spPr>
             <a:xfrm>
-              <a:off x="3658157" y="2132194"/>
+              <a:off x="3662004" y="2132194"/>
               <a:ext cx="62384" cy="62384"/>
             </a:xfrm>
             <a:prstGeom prst="ellipse">
@@ -13816,7 +13816,7 @@
           </p:nvSpPr>
           <p:spPr>
             <a:xfrm>
-              <a:off x="3808535" y="2407124"/>
+              <a:off x="3852560" y="2407124"/>
               <a:ext cx="62384" cy="62384"/>
             </a:xfrm>
             <a:prstGeom prst="ellipse">
@@ -13842,7 +13842,7 @@
           </p:nvSpPr>
           <p:spPr>
             <a:xfrm>
-              <a:off x="3646863" y="2248572"/>
+              <a:off x="3653929" y="2248572"/>
               <a:ext cx="62384" cy="62384"/>
             </a:xfrm>
             <a:prstGeom prst="ellipse">
@@ -13868,7 +13868,7 @@
           </p:nvSpPr>
           <p:spPr>
             <a:xfrm>
-              <a:off x="3823917" y="2278113"/>
+              <a:off x="3847994" y="2278113"/>
               <a:ext cx="62384" cy="62384"/>
             </a:xfrm>
             <a:prstGeom prst="ellipse">
@@ -13894,7 +13894,7 @@
           </p:nvSpPr>
           <p:spPr>
             <a:xfrm>
-              <a:off x="3701758" y="2292972"/>
+              <a:off x="3659107" y="2292972"/>
               <a:ext cx="62384" cy="62384"/>
             </a:xfrm>
             <a:prstGeom prst="ellipse">
@@ -13920,7 +13920,7 @@
           </p:nvSpPr>
           <p:spPr>
             <a:xfrm>
-              <a:off x="3849582" y="2458867"/>
+              <a:off x="3811132" y="2458867"/>
               <a:ext cx="62384" cy="62384"/>
             </a:xfrm>
             <a:prstGeom prst="ellipse">
@@ -13946,7 +13946,7 @@
           </p:nvSpPr>
           <p:spPr>
             <a:xfrm>
-              <a:off x="3666546" y="2015073"/>
+              <a:off x="3674784" y="2015073"/>
               <a:ext cx="62384" cy="62384"/>
             </a:xfrm>
             <a:prstGeom prst="ellipse">
@@ -13972,7 +13972,7 @@
           </p:nvSpPr>
           <p:spPr>
             <a:xfrm>
-              <a:off x="3836065" y="2152530"/>
+              <a:off x="3855615" y="2152530"/>
               <a:ext cx="62384" cy="62384"/>
             </a:xfrm>
             <a:prstGeom prst="ellipse">
@@ -13998,7 +13998,7 @@
           </p:nvSpPr>
           <p:spPr>
             <a:xfrm>
-              <a:off x="3646778" y="2053564"/>
+              <a:off x="3647325" y="2053564"/>
               <a:ext cx="62384" cy="62384"/>
             </a:xfrm>
             <a:prstGeom prst="ellipse">
@@ -14024,7 +14024,7 @@
           </p:nvSpPr>
           <p:spPr>
             <a:xfrm>
-              <a:off x="3860356" y="2015413"/>
+              <a:off x="3831572" y="2015413"/>
               <a:ext cx="62384" cy="62384"/>
             </a:xfrm>
             <a:prstGeom prst="ellipse">
@@ -14050,7 +14050,7 @@
           </p:nvSpPr>
           <p:spPr>
             <a:xfrm>
-              <a:off x="3646222" y="2293216"/>
+              <a:off x="3663364" y="2293216"/>
               <a:ext cx="62384" cy="62384"/>
             </a:xfrm>
             <a:prstGeom prst="ellipse">
@@ -14076,7 +14076,7 @@
           </p:nvSpPr>
           <p:spPr>
             <a:xfrm>
-              <a:off x="3820886" y="2322739"/>
+              <a:off x="3838417" y="2322739"/>
               <a:ext cx="62384" cy="62384"/>
             </a:xfrm>
             <a:prstGeom prst="ellipse">
@@ -14102,7 +14102,7 @@
           </p:nvSpPr>
           <p:spPr>
             <a:xfrm>
-              <a:off x="3655739" y="1888094"/>
+              <a:off x="3640832" y="1888094"/>
               <a:ext cx="62384" cy="62384"/>
             </a:xfrm>
             <a:prstGeom prst="ellipse">
@@ -14128,7 +14128,7 @@
           </p:nvSpPr>
           <p:spPr>
             <a:xfrm>
-              <a:off x="3793878" y="2522325"/>
+              <a:off x="3835747" y="2522325"/>
               <a:ext cx="62384" cy="62384"/>
             </a:xfrm>
             <a:prstGeom prst="ellipse">
@@ -14154,7 +14154,7 @@
           </p:nvSpPr>
           <p:spPr>
             <a:xfrm>
-              <a:off x="3663184" y="2121121"/>
+              <a:off x="3651172" y="2121121"/>
               <a:ext cx="62384" cy="62384"/>
             </a:xfrm>
             <a:prstGeom prst="ellipse">
@@ -14180,7 +14180,7 @@
           </p:nvSpPr>
           <p:spPr>
             <a:xfrm>
-              <a:off x="3842960" y="2376364"/>
+              <a:off x="3823216" y="2376364"/>
               <a:ext cx="62384" cy="62384"/>
             </a:xfrm>
             <a:prstGeom prst="ellipse">
@@ -14206,7 +14206,7 @@
           </p:nvSpPr>
           <p:spPr>
             <a:xfrm>
-              <a:off x="3649938" y="1984495"/>
+              <a:off x="3697151" y="1984495"/>
               <a:ext cx="62384" cy="62384"/>
             </a:xfrm>
             <a:prstGeom prst="ellipse">
@@ -14232,7 +14232,7 @@
           </p:nvSpPr>
           <p:spPr>
             <a:xfrm>
-              <a:off x="3811839" y="2234644"/>
+              <a:off x="3835125" y="2234644"/>
               <a:ext cx="62384" cy="62384"/>
             </a:xfrm>
             <a:prstGeom prst="ellipse">
@@ -14258,7 +14258,7 @@
           </p:nvSpPr>
           <p:spPr>
             <a:xfrm>
-              <a:off x="3673740" y="2191913"/>
+              <a:off x="3655604" y="2191913"/>
               <a:ext cx="62384" cy="62384"/>
             </a:xfrm>
             <a:prstGeom prst="ellipse">
@@ -14284,7 +14284,7 @@
           </p:nvSpPr>
           <p:spPr>
             <a:xfrm>
-              <a:off x="3810946" y="2416827"/>
+              <a:off x="3810950" y="2416827"/>
               <a:ext cx="62384" cy="62384"/>
             </a:xfrm>
             <a:prstGeom prst="ellipse">
@@ -14310,7 +14310,7 @@
           </p:nvSpPr>
           <p:spPr>
             <a:xfrm>
-              <a:off x="3703636" y="1671371"/>
+              <a:off x="3648200" y="1671371"/>
               <a:ext cx="62384" cy="62384"/>
             </a:xfrm>
             <a:prstGeom prst="ellipse">
@@ -14336,7 +14336,7 @@
           </p:nvSpPr>
           <p:spPr>
             <a:xfrm>
-              <a:off x="3853708" y="2197942"/>
+              <a:off x="3863007" y="2197942"/>
               <a:ext cx="62384" cy="62384"/>
             </a:xfrm>
             <a:prstGeom prst="ellipse">
@@ -14362,7 +14362,7 @@
           </p:nvSpPr>
           <p:spPr>
             <a:xfrm>
-              <a:off x="3663545" y="2494424"/>
+              <a:off x="3648141" y="2494424"/>
               <a:ext cx="62384" cy="62384"/>
             </a:xfrm>
             <a:prstGeom prst="ellipse">
@@ -14388,7 +14388,7 @@
           </p:nvSpPr>
           <p:spPr>
             <a:xfrm>
-              <a:off x="3853719" y="2608409"/>
+              <a:off x="3799119" y="2608409"/>
               <a:ext cx="62384" cy="62384"/>
             </a:xfrm>
             <a:prstGeom prst="ellipse">
@@ -14414,7 +14414,7 @@
           </p:nvSpPr>
           <p:spPr>
             <a:xfrm>
-              <a:off x="3646632" y="2190065"/>
+              <a:off x="3699445" y="2190065"/>
               <a:ext cx="62384" cy="62384"/>
             </a:xfrm>
             <a:prstGeom prst="ellipse">
@@ -14440,7 +14440,7 @@
           </p:nvSpPr>
           <p:spPr>
             <a:xfrm>
-              <a:off x="3829121" y="2509120"/>
+              <a:off x="3804420" y="2509120"/>
               <a:ext cx="62384" cy="62384"/>
             </a:xfrm>
             <a:prstGeom prst="ellipse">
@@ -14466,7 +14466,7 @@
           </p:nvSpPr>
           <p:spPr>
             <a:xfrm>
-              <a:off x="3671996" y="2143148"/>
+              <a:off x="3670708" y="2143148"/>
               <a:ext cx="62384" cy="62384"/>
             </a:xfrm>
             <a:prstGeom prst="ellipse">
@@ -14492,7 +14492,7 @@
           </p:nvSpPr>
           <p:spPr>
             <a:xfrm>
-              <a:off x="3798334" y="2563170"/>
+              <a:off x="3856620" y="2563170"/>
               <a:ext cx="62384" cy="62384"/>
             </a:xfrm>
             <a:prstGeom prst="ellipse">
@@ -14518,7 +14518,7 @@
           </p:nvSpPr>
           <p:spPr>
             <a:xfrm>
-              <a:off x="3648051" y="2638033"/>
+              <a:off x="3650158" y="2638033"/>
               <a:ext cx="62384" cy="62384"/>
             </a:xfrm>
             <a:prstGeom prst="ellipse">
@@ -14544,7 +14544,7 @@
           </p:nvSpPr>
           <p:spPr>
             <a:xfrm>
-              <a:off x="3805929" y="2513741"/>
+              <a:off x="3826240" y="2513741"/>
               <a:ext cx="62384" cy="62384"/>
             </a:xfrm>
             <a:prstGeom prst="ellipse">
@@ -14570,7 +14570,7 @@
           </p:nvSpPr>
           <p:spPr>
             <a:xfrm>
-              <a:off x="3672460" y="2220804"/>
+              <a:off x="3671315" y="2220804"/>
               <a:ext cx="62384" cy="62384"/>
             </a:xfrm>
             <a:prstGeom prst="ellipse">
@@ -14596,7 +14596,7 @@
           </p:nvSpPr>
           <p:spPr>
             <a:xfrm>
-              <a:off x="3802520" y="2443179"/>
+              <a:off x="3795914" y="2443179"/>
               <a:ext cx="62384" cy="62384"/>
             </a:xfrm>
             <a:prstGeom prst="ellipse">
@@ -14622,7 +14622,7 @@
           </p:nvSpPr>
           <p:spPr>
             <a:xfrm>
-              <a:off x="3687536" y="2032687"/>
+              <a:off x="3652129" y="2032687"/>
               <a:ext cx="62384" cy="62384"/>
             </a:xfrm>
             <a:prstGeom prst="ellipse">
@@ -14648,7 +14648,7 @@
           </p:nvSpPr>
           <p:spPr>
             <a:xfrm>
-              <a:off x="3849292" y="2381575"/>
+              <a:off x="3862502" y="2381575"/>
               <a:ext cx="62384" cy="62384"/>
             </a:xfrm>
             <a:prstGeom prst="ellipse">
@@ -14674,7 +14674,7 @@
           </p:nvSpPr>
           <p:spPr>
             <a:xfrm>
-              <a:off x="3639643" y="2805819"/>
+              <a:off x="3675473" y="2805819"/>
               <a:ext cx="62384" cy="62384"/>
             </a:xfrm>
             <a:prstGeom prst="ellipse">
@@ -14700,7 +14700,7 @@
           </p:nvSpPr>
           <p:spPr>
             <a:xfrm>
-              <a:off x="3819828" y="2682506"/>
+              <a:off x="3797070" y="2682506"/>
               <a:ext cx="62384" cy="62384"/>
             </a:xfrm>
             <a:prstGeom prst="ellipse">
@@ -14726,7 +14726,7 @@
           </p:nvSpPr>
           <p:spPr>
             <a:xfrm>
-              <a:off x="3708786" y="2552616"/>
+              <a:off x="3687204" y="2552616"/>
               <a:ext cx="62384" cy="62384"/>
             </a:xfrm>
             <a:prstGeom prst="ellipse">
@@ -14752,7 +14752,7 @@
           </p:nvSpPr>
           <p:spPr>
             <a:xfrm>
-              <a:off x="3789214" y="2928273"/>
+              <a:off x="3846427" y="2928273"/>
               <a:ext cx="62384" cy="62384"/>
             </a:xfrm>
             <a:prstGeom prst="ellipse">
@@ -14778,7 +14778,7 @@
           </p:nvSpPr>
           <p:spPr>
             <a:xfrm>
-              <a:off x="3667950" y="2259025"/>
+              <a:off x="3643544" y="2259025"/>
               <a:ext cx="62384" cy="62384"/>
             </a:xfrm>
             <a:prstGeom prst="ellipse">
@@ -14804,7 +14804,7 @@
           </p:nvSpPr>
           <p:spPr>
             <a:xfrm>
-              <a:off x="3830239" y="2378147"/>
+              <a:off x="3849275" y="2378147"/>
               <a:ext cx="62384" cy="62384"/>
             </a:xfrm>
             <a:prstGeom prst="ellipse">
@@ -14830,7 +14830,7 @@
           </p:nvSpPr>
           <p:spPr>
             <a:xfrm>
-              <a:off x="3696392" y="2223016"/>
+              <a:off x="3669785" y="2223016"/>
               <a:ext cx="62384" cy="62384"/>
             </a:xfrm>
             <a:prstGeom prst="ellipse">
@@ -14856,7 +14856,7 @@
           </p:nvSpPr>
           <p:spPr>
             <a:xfrm>
-              <a:off x="3821193" y="2224277"/>
+              <a:off x="3847971" y="2224277"/>
               <a:ext cx="62384" cy="62384"/>
             </a:xfrm>
             <a:prstGeom prst="ellipse">
@@ -14882,7 +14882,7 @@
           </p:nvSpPr>
           <p:spPr>
             <a:xfrm>
-              <a:off x="3644326" y="2181266"/>
+              <a:off x="3656421" y="2181266"/>
               <a:ext cx="62384" cy="62384"/>
             </a:xfrm>
             <a:prstGeom prst="ellipse">
@@ -14908,7 +14908,7 @@
           </p:nvSpPr>
           <p:spPr>
             <a:xfrm>
-              <a:off x="3817673" y="2437206"/>
+              <a:off x="3811673" y="2437206"/>
               <a:ext cx="62384" cy="62384"/>
             </a:xfrm>
             <a:prstGeom prst="ellipse">
@@ -14934,7 +14934,7 @@
           </p:nvSpPr>
           <p:spPr>
             <a:xfrm>
-              <a:off x="3700576" y="2274145"/>
+              <a:off x="3688632" y="2274145"/>
               <a:ext cx="62384" cy="62384"/>
             </a:xfrm>
             <a:prstGeom prst="ellipse">
@@ -14960,7 +14960,7 @@
           </p:nvSpPr>
           <p:spPr>
             <a:xfrm>
-              <a:off x="3847625" y="2491380"/>
+              <a:off x="3820691" y="2491380"/>
               <a:ext cx="62384" cy="62384"/>
             </a:xfrm>
             <a:prstGeom prst="ellipse">
@@ -14986,7 +14986,7 @@
           </p:nvSpPr>
           <p:spPr>
             <a:xfrm>
-              <a:off x="3648311" y="2134715"/>
+              <a:off x="3702527" y="2134715"/>
               <a:ext cx="62384" cy="62384"/>
             </a:xfrm>
             <a:prstGeom prst="ellipse">
@@ -15012,7 +15012,7 @@
           </p:nvSpPr>
           <p:spPr>
             <a:xfrm>
-              <a:off x="3809848" y="2797681"/>
+              <a:off x="3841596" y="2797681"/>
               <a:ext cx="62384" cy="62384"/>
             </a:xfrm>
             <a:prstGeom prst="ellipse">
@@ -15038,7 +15038,7 @@
           </p:nvSpPr>
           <p:spPr>
             <a:xfrm>
-              <a:off x="3707630" y="3179479"/>
+              <a:off x="3654302" y="3179479"/>
               <a:ext cx="62384" cy="62384"/>
             </a:xfrm>
             <a:prstGeom prst="ellipse">
@@ -15064,7 +15064,7 @@
           </p:nvSpPr>
           <p:spPr>
             <a:xfrm>
-              <a:off x="3823064" y="3106435"/>
+              <a:off x="3817341" y="3106435"/>
               <a:ext cx="62384" cy="62384"/>
             </a:xfrm>
             <a:prstGeom prst="ellipse">
@@ -15090,7 +15090,7 @@
           </p:nvSpPr>
           <p:spPr>
             <a:xfrm>
-              <a:off x="3662338" y="2485398"/>
+              <a:off x="3675520" y="2485398"/>
               <a:ext cx="62384" cy="62384"/>
             </a:xfrm>
             <a:prstGeom prst="ellipse">
@@ -15116,7 +15116,7 @@
           </p:nvSpPr>
           <p:spPr>
             <a:xfrm>
-              <a:off x="3815386" y="2815218"/>
+              <a:off x="3846236" y="2815218"/>
               <a:ext cx="62384" cy="62384"/>
             </a:xfrm>
             <a:prstGeom prst="ellipse">
@@ -15142,7 +15142,7 @@
           </p:nvSpPr>
           <p:spPr>
             <a:xfrm>
-              <a:off x="3658075" y="2411785"/>
+              <a:off x="3662239" y="2411785"/>
               <a:ext cx="62384" cy="62384"/>
             </a:xfrm>
             <a:prstGeom prst="ellipse">
@@ -15168,7 +15168,7 @@
           </p:nvSpPr>
           <p:spPr>
             <a:xfrm>
-              <a:off x="3812768" y="2385799"/>
+              <a:off x="3794190" y="2385799"/>
               <a:ext cx="62384" cy="62384"/>
             </a:xfrm>
             <a:prstGeom prst="ellipse">
@@ -15194,7 +15194,7 @@
           </p:nvSpPr>
           <p:spPr>
             <a:xfrm>
-              <a:off x="3707537" y="2401543"/>
+              <a:off x="3669212" y="2401543"/>
               <a:ext cx="62384" cy="62384"/>
             </a:xfrm>
             <a:prstGeom prst="ellipse">
@@ -15220,7 +15220,7 @@
           </p:nvSpPr>
           <p:spPr>
             <a:xfrm>
-              <a:off x="3828113" y="2267401"/>
+              <a:off x="3804316" y="2267401"/>
               <a:ext cx="62384" cy="62384"/>
             </a:xfrm>
             <a:prstGeom prst="ellipse">
@@ -15246,7 +15246,7 @@
           </p:nvSpPr>
           <p:spPr>
             <a:xfrm>
-              <a:off x="3660711" y="2793407"/>
+              <a:off x="3667478" y="2793407"/>
               <a:ext cx="62384" cy="62384"/>
             </a:xfrm>
             <a:prstGeom prst="ellipse">
@@ -15272,7 +15272,7 @@
           </p:nvSpPr>
           <p:spPr>
             <a:xfrm>
-              <a:off x="3811036" y="2771111"/>
+              <a:off x="3851853" y="2771111"/>
               <a:ext cx="62384" cy="62384"/>
             </a:xfrm>
             <a:prstGeom prst="ellipse">
@@ -15298,7 +15298,7 @@
           </p:nvSpPr>
           <p:spPr>
             <a:xfrm>
-              <a:off x="3680374" y="2870721"/>
+              <a:off x="3657073" y="2870721"/>
               <a:ext cx="62384" cy="62384"/>
             </a:xfrm>
             <a:prstGeom prst="ellipse">
@@ -15324,7 +15324,7 @@
           </p:nvSpPr>
           <p:spPr>
             <a:xfrm>
-              <a:off x="3796329" y="2984495"/>
+              <a:off x="3824944" y="2984495"/>
               <a:ext cx="62384" cy="62384"/>
             </a:xfrm>
             <a:prstGeom prst="ellipse">
@@ -15350,7 +15350,7 @@
           </p:nvSpPr>
           <p:spPr>
             <a:xfrm>
-              <a:off x="3680063" y="2378228"/>
+              <a:off x="3643229" y="2378228"/>
               <a:ext cx="62384" cy="62384"/>
             </a:xfrm>
             <a:prstGeom prst="ellipse">
@@ -15376,7 +15376,7 @@
           </p:nvSpPr>
           <p:spPr>
             <a:xfrm>
-              <a:off x="3850536" y="2805997"/>
+              <a:off x="3810118" y="2805997"/>
               <a:ext cx="62384" cy="62384"/>
             </a:xfrm>
             <a:prstGeom prst="ellipse">
@@ -15402,7 +15402,7 @@
           </p:nvSpPr>
           <p:spPr>
             <a:xfrm>
-              <a:off x="3678877" y="2544270"/>
+              <a:off x="3648143" y="2544270"/>
               <a:ext cx="62384" cy="62384"/>
             </a:xfrm>
             <a:prstGeom prst="ellipse">
@@ -15428,7 +15428,7 @@
           </p:nvSpPr>
           <p:spPr>
             <a:xfrm>
-              <a:off x="3839045" y="2886573"/>
+              <a:off x="3837055" y="2886573"/>
               <a:ext cx="62384" cy="62384"/>
             </a:xfrm>
             <a:prstGeom prst="ellipse">
@@ -15454,7 +15454,7 @@
           </p:nvSpPr>
           <p:spPr>
             <a:xfrm>
-              <a:off x="3695847" y="1976967"/>
+              <a:off x="3686048" y="1976967"/>
               <a:ext cx="62384" cy="62384"/>
             </a:xfrm>
             <a:prstGeom prst="ellipse">
@@ -15480,7 +15480,7 @@
           </p:nvSpPr>
           <p:spPr>
             <a:xfrm>
-              <a:off x="3829931" y="2416148"/>
+              <a:off x="3791059" y="2416148"/>
               <a:ext cx="62384" cy="62384"/>
             </a:xfrm>
             <a:prstGeom prst="ellipse">
@@ -15506,7 +15506,7 @@
           </p:nvSpPr>
           <p:spPr>
             <a:xfrm>
-              <a:off x="3690187" y="2171272"/>
+              <a:off x="3681333" y="2171272"/>
               <a:ext cx="62384" cy="62384"/>
             </a:xfrm>
             <a:prstGeom prst="ellipse">
@@ -15532,7 +15532,7 @@
           </p:nvSpPr>
           <p:spPr>
             <a:xfrm>
-              <a:off x="3808055" y="2512480"/>
+              <a:off x="3814793" y="2512480"/>
               <a:ext cx="62384" cy="62384"/>
             </a:xfrm>
             <a:prstGeom prst="ellipse">
@@ -15558,7 +15558,7 @@
           </p:nvSpPr>
           <p:spPr>
             <a:xfrm>
-              <a:off x="3699986" y="2174924"/>
+              <a:off x="3677182" y="2174924"/>
               <a:ext cx="62384" cy="62384"/>
             </a:xfrm>
             <a:prstGeom prst="ellipse">
@@ -15584,7 +15584,7 @@
           </p:nvSpPr>
           <p:spPr>
             <a:xfrm>
-              <a:off x="3805301" y="2722787"/>
+              <a:off x="3843285" y="2722787"/>
               <a:ext cx="62384" cy="62384"/>
             </a:xfrm>
             <a:prstGeom prst="ellipse">
@@ -15610,7 +15610,7 @@
           </p:nvSpPr>
           <p:spPr>
             <a:xfrm>
-              <a:off x="3641929" y="2437916"/>
+              <a:off x="3692407" y="2437916"/>
               <a:ext cx="62384" cy="62384"/>
             </a:xfrm>
             <a:prstGeom prst="ellipse">
@@ -15636,7 +15636,7 @@
           </p:nvSpPr>
           <p:spPr>
             <a:xfrm>
-              <a:off x="3817777" y="2890440"/>
+              <a:off x="3816200" y="2890440"/>
               <a:ext cx="62384" cy="62384"/>
             </a:xfrm>
             <a:prstGeom prst="ellipse">
@@ -15662,7 +15662,7 @@
           </p:nvSpPr>
           <p:spPr>
             <a:xfrm>
-              <a:off x="3705464" y="1867326"/>
+              <a:off x="3668306" y="1867326"/>
               <a:ext cx="62384" cy="62384"/>
             </a:xfrm>
             <a:prstGeom prst="ellipse">
@@ -15688,7 +15688,7 @@
           </p:nvSpPr>
           <p:spPr>
             <a:xfrm>
-              <a:off x="3856081" y="2235734"/>
+              <a:off x="3835185" y="2235734"/>
               <a:ext cx="62384" cy="62384"/>
             </a:xfrm>
             <a:prstGeom prst="ellipse">
@@ -15714,7 +15714,7 @@
           </p:nvSpPr>
           <p:spPr>
             <a:xfrm>
-              <a:off x="3673558" y="2583172"/>
+              <a:off x="3692931" y="2583172"/>
               <a:ext cx="62384" cy="62384"/>
             </a:xfrm>
             <a:prstGeom prst="ellipse">
@@ -15740,7 +15740,7 @@
           </p:nvSpPr>
           <p:spPr>
             <a:xfrm>
-              <a:off x="3856702" y="3116068"/>
+              <a:off x="3856916" y="3116068"/>
               <a:ext cx="62384" cy="62384"/>
             </a:xfrm>
             <a:prstGeom prst="ellipse">
@@ -15766,7 +15766,7 @@
           </p:nvSpPr>
           <p:spPr>
             <a:xfrm>
-              <a:off x="3704586" y="3074829"/>
+              <a:off x="3696683" y="3074829"/>
               <a:ext cx="62384" cy="62384"/>
             </a:xfrm>
             <a:prstGeom prst="ellipse">
@@ -15792,7 +15792,7 @@
           </p:nvSpPr>
           <p:spPr>
             <a:xfrm>
-              <a:off x="3863233" y="2778129"/>
+              <a:off x="3803828" y="2778129"/>
               <a:ext cx="62384" cy="62384"/>
             </a:xfrm>
             <a:prstGeom prst="ellipse">
@@ -15818,7 +15818,7 @@
           </p:nvSpPr>
           <p:spPr>
             <a:xfrm>
-              <a:off x="3641069" y="2238700"/>
+              <a:off x="3695372" y="2238700"/>
               <a:ext cx="62384" cy="62384"/>
             </a:xfrm>
             <a:prstGeom prst="ellipse">
@@ -15844,7 +15844,7 @@
           </p:nvSpPr>
           <p:spPr>
             <a:xfrm>
-              <a:off x="3857456" y="2759561"/>
+              <a:off x="3818104" y="2759561"/>
               <a:ext cx="62384" cy="62384"/>
             </a:xfrm>
             <a:prstGeom prst="ellipse">
@@ -15870,7 +15870,7 @@
           </p:nvSpPr>
           <p:spPr>
             <a:xfrm>
-              <a:off x="3713731" y="2116983"/>
+              <a:off x="3698768" y="2116983"/>
               <a:ext cx="62384" cy="62384"/>
             </a:xfrm>
             <a:prstGeom prst="ellipse">
@@ -15896,7 +15896,7 @@
           </p:nvSpPr>
           <p:spPr>
             <a:xfrm>
-              <a:off x="3803240" y="2800199"/>
+              <a:off x="3802422" y="2800199"/>
               <a:ext cx="62384" cy="62384"/>
             </a:xfrm>
             <a:prstGeom prst="ellipse">
@@ -15922,7 +15922,7 @@
           </p:nvSpPr>
           <p:spPr>
             <a:xfrm>
-              <a:off x="3698258" y="2075237"/>
+              <a:off x="3684514" y="2075237"/>
               <a:ext cx="62384" cy="62384"/>
             </a:xfrm>
             <a:prstGeom prst="ellipse">
@@ -15948,7 +15948,7 @@
           </p:nvSpPr>
           <p:spPr>
             <a:xfrm>
-              <a:off x="3843105" y="2266742"/>
+              <a:off x="3817761" y="2266742"/>
               <a:ext cx="62384" cy="62384"/>
             </a:xfrm>
             <a:prstGeom prst="ellipse">
@@ -15974,7 +15974,7 @@
           </p:nvSpPr>
           <p:spPr>
             <a:xfrm>
-              <a:off x="3700105" y="3124836"/>
+              <a:off x="3668600" y="3124836"/>
               <a:ext cx="62384" cy="62384"/>
             </a:xfrm>
             <a:prstGeom prst="ellipse">
@@ -16000,7 +16000,7 @@
           </p:nvSpPr>
           <p:spPr>
             <a:xfrm>
-              <a:off x="3826502" y="2956939"/>
+              <a:off x="3842681" y="2956939"/>
               <a:ext cx="62384" cy="62384"/>
             </a:xfrm>
             <a:prstGeom prst="ellipse">
@@ -16026,7 +16026,7 @@
           </p:nvSpPr>
           <p:spPr>
             <a:xfrm>
-              <a:off x="3702402" y="2808065"/>
+              <a:off x="3693444" y="2808065"/>
               <a:ext cx="62384" cy="62384"/>
             </a:xfrm>
             <a:prstGeom prst="ellipse">
@@ -16052,7 +16052,7 @@
           </p:nvSpPr>
           <p:spPr>
             <a:xfrm>
-              <a:off x="3806699" y="3195182"/>
+              <a:off x="3820221" y="3195182"/>
               <a:ext cx="62384" cy="62384"/>
             </a:xfrm>
             <a:prstGeom prst="ellipse">
@@ -16078,7 +16078,7 @@
           </p:nvSpPr>
           <p:spPr>
             <a:xfrm>
-              <a:off x="3698258" y="2457047"/>
+              <a:off x="3691121" y="2457047"/>
               <a:ext cx="62384" cy="62384"/>
             </a:xfrm>
             <a:prstGeom prst="ellipse">
@@ -16104,7 +16104,7 @@
           </p:nvSpPr>
           <p:spPr>
             <a:xfrm>
-              <a:off x="3851234" y="2764537"/>
+              <a:off x="3832298" y="2764537"/>
               <a:ext cx="62384" cy="62384"/>
             </a:xfrm>
             <a:prstGeom prst="ellipse">
@@ -16130,7 +16130,7 @@
           </p:nvSpPr>
           <p:spPr>
             <a:xfrm>
-              <a:off x="3646349" y="1981740"/>
+              <a:off x="3664184" y="1981740"/>
               <a:ext cx="62384" cy="62384"/>
             </a:xfrm>
             <a:prstGeom prst="ellipse">
@@ -16156,7 +16156,7 @@
           </p:nvSpPr>
           <p:spPr>
             <a:xfrm>
-              <a:off x="3802024" y="2491527"/>
+              <a:off x="3844824" y="2491527"/>
               <a:ext cx="62384" cy="62384"/>
             </a:xfrm>
             <a:prstGeom prst="ellipse">
@@ -16182,7 +16182,7 @@
           </p:nvSpPr>
           <p:spPr>
             <a:xfrm>
-              <a:off x="3708230" y="1874716"/>
+              <a:off x="3659849" y="1874716"/>
               <a:ext cx="62384" cy="62384"/>
             </a:xfrm>
             <a:prstGeom prst="ellipse">
@@ -16208,7 +16208,7 @@
           </p:nvSpPr>
           <p:spPr>
             <a:xfrm>
-              <a:off x="3862649" y="2117979"/>
+              <a:off x="3829268" y="2117979"/>
               <a:ext cx="62384" cy="62384"/>
             </a:xfrm>
             <a:prstGeom prst="ellipse">
@@ -16234,7 +16234,7 @@
           </p:nvSpPr>
           <p:spPr>
             <a:xfrm>
-              <a:off x="3707034" y="2423641"/>
+              <a:off x="3692966" y="2423641"/>
               <a:ext cx="62384" cy="62384"/>
             </a:xfrm>
             <a:prstGeom prst="ellipse">
@@ -16260,7 +16260,7 @@
           </p:nvSpPr>
           <p:spPr>
             <a:xfrm>
-              <a:off x="3831802" y="2890705"/>
+              <a:off x="3823796" y="2890705"/>
               <a:ext cx="62384" cy="62384"/>
             </a:xfrm>
             <a:prstGeom prst="ellipse">
@@ -16286,7 +16286,7 @@
           </p:nvSpPr>
           <p:spPr>
             <a:xfrm>
-              <a:off x="3700914" y="2519161"/>
+              <a:off x="3709776" y="2519161"/>
               <a:ext cx="62384" cy="62384"/>
             </a:xfrm>
             <a:prstGeom prst="ellipse">
@@ -16312,7 +16312,7 @@
           </p:nvSpPr>
           <p:spPr>
             <a:xfrm>
-              <a:off x="3796882" y="2683958"/>
+              <a:off x="3839526" y="2683958"/>
               <a:ext cx="62384" cy="62384"/>
             </a:xfrm>
             <a:prstGeom prst="ellipse">
@@ -16338,7 +16338,7 @@
           </p:nvSpPr>
           <p:spPr>
             <a:xfrm>
-              <a:off x="3712197" y="2675899"/>
+              <a:off x="3699751" y="2675899"/>
               <a:ext cx="62384" cy="62384"/>
             </a:xfrm>
             <a:prstGeom prst="ellipse">
@@ -16364,7 +16364,7 @@
           </p:nvSpPr>
           <p:spPr>
             <a:xfrm>
-              <a:off x="3851081" y="2736788"/>
+              <a:off x="3860153" y="2736788"/>
               <a:ext cx="62384" cy="62384"/>
             </a:xfrm>
             <a:prstGeom prst="ellipse">
@@ -16390,7 +16390,7 @@
           </p:nvSpPr>
           <p:spPr>
             <a:xfrm>
-              <a:off x="3659287" y="2193769"/>
+              <a:off x="3689810" y="2193769"/>
               <a:ext cx="62384" cy="62384"/>
             </a:xfrm>
             <a:prstGeom prst="ellipse">
@@ -16416,7 +16416,7 @@
           </p:nvSpPr>
           <p:spPr>
             <a:xfrm>
-              <a:off x="3833340" y="2484992"/>
+              <a:off x="3844189" y="2484992"/>
               <a:ext cx="62384" cy="62384"/>
             </a:xfrm>
             <a:prstGeom prst="ellipse">
@@ -16442,7 +16442,7 @@
           </p:nvSpPr>
           <p:spPr>
             <a:xfrm>
-              <a:off x="3705704" y="2600183"/>
+              <a:off x="3680147" y="2600183"/>
               <a:ext cx="62384" cy="62384"/>
             </a:xfrm>
             <a:prstGeom prst="ellipse">
@@ -16468,7 +16468,7 @@
           </p:nvSpPr>
           <p:spPr>
             <a:xfrm>
-              <a:off x="3833950" y="2973177"/>
+              <a:off x="3799318" y="2973177"/>
               <a:ext cx="62384" cy="62384"/>
             </a:xfrm>
             <a:prstGeom prst="ellipse">
@@ -16494,7 +16494,7 @@
           </p:nvSpPr>
           <p:spPr>
             <a:xfrm>
-              <a:off x="3689090" y="2241189"/>
+              <a:off x="3671510" y="2241189"/>
               <a:ext cx="62384" cy="62384"/>
             </a:xfrm>
             <a:prstGeom prst="ellipse">
@@ -16520,7 +16520,7 @@
           </p:nvSpPr>
           <p:spPr>
             <a:xfrm>
-              <a:off x="3856480" y="2853423"/>
+              <a:off x="3837424" y="2853423"/>
               <a:ext cx="62384" cy="62384"/>
             </a:xfrm>
             <a:prstGeom prst="ellipse">
@@ -16546,7 +16546,7 @@
           </p:nvSpPr>
           <p:spPr>
             <a:xfrm>
-              <a:off x="3670830" y="2581585"/>
+              <a:off x="3648984" y="2581585"/>
               <a:ext cx="62384" cy="62384"/>
             </a:xfrm>
             <a:prstGeom prst="ellipse">
@@ -16572,7 +16572,7 @@
           </p:nvSpPr>
           <p:spPr>
             <a:xfrm>
-              <a:off x="3842009" y="2748608"/>
+              <a:off x="3858598" y="2748608"/>
               <a:ext cx="62384" cy="62384"/>
             </a:xfrm>
             <a:prstGeom prst="ellipse">
@@ -16598,7 +16598,7 @@
           </p:nvSpPr>
           <p:spPr>
             <a:xfrm>
-              <a:off x="3691783" y="2820778"/>
+              <a:off x="3703147" y="2820778"/>
               <a:ext cx="62384" cy="62384"/>
             </a:xfrm>
             <a:prstGeom prst="ellipse">
@@ -16624,7 +16624,7 @@
           </p:nvSpPr>
           <p:spPr>
             <a:xfrm>
-              <a:off x="3842119" y="2617746"/>
+              <a:off x="3789893" y="2617746"/>
               <a:ext cx="62384" cy="62384"/>
             </a:xfrm>
             <a:prstGeom prst="ellipse">
@@ -16650,7 +16650,7 @@
           </p:nvSpPr>
           <p:spPr>
             <a:xfrm>
-              <a:off x="3696766" y="2043107"/>
+              <a:off x="3651749" y="2043107"/>
               <a:ext cx="62384" cy="62384"/>
             </a:xfrm>
             <a:prstGeom prst="ellipse">
@@ -16676,7 +16676,7 @@
           </p:nvSpPr>
           <p:spPr>
             <a:xfrm>
-              <a:off x="3807255" y="2591011"/>
+              <a:off x="3811980" y="2591011"/>
               <a:ext cx="62384" cy="62384"/>
             </a:xfrm>
             <a:prstGeom prst="ellipse">
@@ -16702,7 +16702,7 @@
           </p:nvSpPr>
           <p:spPr>
             <a:xfrm>
-              <a:off x="3670552" y="2257537"/>
+              <a:off x="3711672" y="2257537"/>
               <a:ext cx="62384" cy="62384"/>
             </a:xfrm>
             <a:prstGeom prst="ellipse">
@@ -16728,7 +16728,7 @@
           </p:nvSpPr>
           <p:spPr>
             <a:xfrm>
-              <a:off x="3853830" y="2440760"/>
+              <a:off x="3794168" y="2440760"/>
               <a:ext cx="62384" cy="62384"/>
             </a:xfrm>
             <a:prstGeom prst="ellipse">
@@ -16754,7 +16754,7 @@
           </p:nvSpPr>
           <p:spPr>
             <a:xfrm>
-              <a:off x="3708436" y="1660002"/>
+              <a:off x="3700487" y="1660002"/>
               <a:ext cx="62384" cy="62384"/>
             </a:xfrm>
             <a:prstGeom prst="ellipse">
@@ -16780,7 +16780,7 @@
           </p:nvSpPr>
           <p:spPr>
             <a:xfrm>
-              <a:off x="3851610" y="2071879"/>
+              <a:off x="3863013" y="2071879"/>
               <a:ext cx="62384" cy="62384"/>
             </a:xfrm>
             <a:prstGeom prst="ellipse">
@@ -16806,7 +16806,7 @@
           </p:nvSpPr>
           <p:spPr>
             <a:xfrm>
-              <a:off x="3675424" y="2712098"/>
+              <a:off x="3682181" y="2712098"/>
               <a:ext cx="62384" cy="62384"/>
             </a:xfrm>
             <a:prstGeom prst="ellipse">
@@ -16832,7 +16832,7 @@
           </p:nvSpPr>
           <p:spPr>
             <a:xfrm>
-              <a:off x="3823097" y="2923522"/>
+              <a:off x="3791395" y="2923522"/>
               <a:ext cx="62384" cy="62384"/>
             </a:xfrm>
             <a:prstGeom prst="ellipse">
@@ -16858,7 +16858,7 @@
           </p:nvSpPr>
           <p:spPr>
             <a:xfrm>
-              <a:off x="3653211" y="2629339"/>
+              <a:off x="3651184" y="2629339"/>
               <a:ext cx="62384" cy="62384"/>
             </a:xfrm>
             <a:prstGeom prst="ellipse">
@@ -16884,7 +16884,7 @@
           </p:nvSpPr>
           <p:spPr>
             <a:xfrm>
-              <a:off x="3797620" y="2168650"/>
+              <a:off x="3822957" y="2168650"/>
               <a:ext cx="62384" cy="62384"/>
             </a:xfrm>
             <a:prstGeom prst="ellipse">
@@ -16910,7 +16910,7 @@
           </p:nvSpPr>
           <p:spPr>
             <a:xfrm>
-              <a:off x="3676604" y="2583375"/>
+              <a:off x="3699974" y="2583375"/>
               <a:ext cx="62384" cy="62384"/>
             </a:xfrm>
             <a:prstGeom prst="ellipse">
@@ -16936,7 +16936,7 @@
           </p:nvSpPr>
           <p:spPr>
             <a:xfrm>
-              <a:off x="3851542" y="2264289"/>
+              <a:off x="3829669" y="2264289"/>
               <a:ext cx="62384" cy="62384"/>
             </a:xfrm>
             <a:prstGeom prst="ellipse">
@@ -16962,7 +16962,7 @@
           </p:nvSpPr>
           <p:spPr>
             <a:xfrm>
-              <a:off x="3679965" y="2635330"/>
+              <a:off x="3665274" y="2635330"/>
               <a:ext cx="62384" cy="62384"/>
             </a:xfrm>
             <a:prstGeom prst="ellipse">
@@ -16988,7 +16988,7 @@
           </p:nvSpPr>
           <p:spPr>
             <a:xfrm>
-              <a:off x="3858468" y="2523212"/>
+              <a:off x="3792993" y="2523212"/>
               <a:ext cx="62384" cy="62384"/>
             </a:xfrm>
             <a:prstGeom prst="ellipse">
@@ -17014,7 +17014,7 @@
           </p:nvSpPr>
           <p:spPr>
             <a:xfrm>
-              <a:off x="3640842" y="3294849"/>
+              <a:off x="3682207" y="3294849"/>
               <a:ext cx="62384" cy="62384"/>
             </a:xfrm>
             <a:prstGeom prst="ellipse">
@@ -17040,7 +17040,7 @@
           </p:nvSpPr>
           <p:spPr>
             <a:xfrm>
-              <a:off x="3848823" y="2931119"/>
+              <a:off x="3820748" y="2931119"/>
               <a:ext cx="62384" cy="62384"/>
             </a:xfrm>
             <a:prstGeom prst="ellipse">
@@ -17066,7 +17066,7 @@
           </p:nvSpPr>
           <p:spPr>
             <a:xfrm>
-              <a:off x="3645976" y="2581680"/>
+              <a:off x="3642847" y="2581680"/>
               <a:ext cx="62384" cy="62384"/>
             </a:xfrm>
             <a:prstGeom prst="ellipse">
@@ -17092,7 +17092,7 @@
           </p:nvSpPr>
           <p:spPr>
             <a:xfrm>
-              <a:off x="3795267" y="2695238"/>
+              <a:off x="3815557" y="2695238"/>
               <a:ext cx="62384" cy="62384"/>
             </a:xfrm>
             <a:prstGeom prst="ellipse">
@@ -17118,7 +17118,7 @@
           </p:nvSpPr>
           <p:spPr>
             <a:xfrm>
-              <a:off x="3669754" y="2201127"/>
+              <a:off x="3689831" y="2201127"/>
               <a:ext cx="62384" cy="62384"/>
             </a:xfrm>
             <a:prstGeom prst="ellipse">
@@ -17144,7 +17144,7 @@
           </p:nvSpPr>
           <p:spPr>
             <a:xfrm>
-              <a:off x="3843581" y="2387407"/>
+              <a:off x="3805843" y="2387407"/>
               <a:ext cx="62384" cy="62384"/>
             </a:xfrm>
             <a:prstGeom prst="ellipse">
@@ -17170,7 +17170,7 @@
           </p:nvSpPr>
           <p:spPr>
             <a:xfrm>
-              <a:off x="3692689" y="2804222"/>
+              <a:off x="3708217" y="2804222"/>
               <a:ext cx="62384" cy="62384"/>
             </a:xfrm>
             <a:prstGeom prst="ellipse">
@@ -17196,7 +17196,7 @@
           </p:nvSpPr>
           <p:spPr>
             <a:xfrm>
-              <a:off x="3795072" y="2864974"/>
+              <a:off x="3853703" y="2864974"/>
               <a:ext cx="62384" cy="62384"/>
             </a:xfrm>
             <a:prstGeom prst="ellipse">
@@ -17222,7 +17222,7 @@
           </p:nvSpPr>
           <p:spPr>
             <a:xfrm>
-              <a:off x="3694493" y="3421704"/>
+              <a:off x="3660787" y="3421704"/>
               <a:ext cx="62384" cy="62384"/>
             </a:xfrm>
             <a:prstGeom prst="ellipse">
@@ -17248,7 +17248,7 @@
           </p:nvSpPr>
           <p:spPr>
             <a:xfrm>
-              <a:off x="3816595" y="3230545"/>
+              <a:off x="3800391" y="3230545"/>
               <a:ext cx="62384" cy="62384"/>
             </a:xfrm>
             <a:prstGeom prst="ellipse">
@@ -17274,7 +17274,7 @@
           </p:nvSpPr>
           <p:spPr>
             <a:xfrm>
-              <a:off x="3687646" y="3033690"/>
+              <a:off x="3712606" y="3033690"/>
               <a:ext cx="62384" cy="62384"/>
             </a:xfrm>
             <a:prstGeom prst="ellipse">
@@ -17300,7 +17300,7 @@
           </p:nvSpPr>
           <p:spPr>
             <a:xfrm>
-              <a:off x="3803624" y="2695781"/>
+              <a:off x="3823641" y="2695781"/>
               <a:ext cx="62384" cy="62384"/>
             </a:xfrm>
             <a:prstGeom prst="ellipse">
@@ -17326,7 +17326,7 @@
           </p:nvSpPr>
           <p:spPr>
             <a:xfrm>
-              <a:off x="3707290" y="2800367"/>
+              <a:off x="3695589" y="2800367"/>
               <a:ext cx="62384" cy="62384"/>
             </a:xfrm>
             <a:prstGeom prst="ellipse">
@@ -17352,7 +17352,7 @@
           </p:nvSpPr>
           <p:spPr>
             <a:xfrm>
-              <a:off x="3791853" y="2470887"/>
+              <a:off x="3816038" y="2470887"/>
               <a:ext cx="62384" cy="62384"/>
             </a:xfrm>
             <a:prstGeom prst="ellipse">
@@ -17378,7 +17378,7 @@
           </p:nvSpPr>
           <p:spPr>
             <a:xfrm>
-              <a:off x="3644959" y="2660221"/>
+              <a:off x="3656911" y="2660221"/>
               <a:ext cx="62384" cy="62384"/>
             </a:xfrm>
             <a:prstGeom prst="ellipse">
@@ -17404,7 +17404,7 @@
           </p:nvSpPr>
           <p:spPr>
             <a:xfrm>
-              <a:off x="3844705" y="2426625"/>
+              <a:off x="3827762" y="2426625"/>
               <a:ext cx="62384" cy="62384"/>
             </a:xfrm>
             <a:prstGeom prst="ellipse">
@@ -17430,7 +17430,7 @@
           </p:nvSpPr>
           <p:spPr>
             <a:xfrm>
-              <a:off x="3677369" y="2501826"/>
+              <a:off x="3667356" y="2501826"/>
               <a:ext cx="62384" cy="62384"/>
             </a:xfrm>
             <a:prstGeom prst="ellipse">
@@ -17456,7 +17456,7 @@
           </p:nvSpPr>
           <p:spPr>
             <a:xfrm>
-              <a:off x="3790900" y="2715278"/>
+              <a:off x="3853864" y="2715278"/>
               <a:ext cx="62384" cy="62384"/>
             </a:xfrm>
             <a:prstGeom prst="ellipse">
@@ -17482,7 +17482,7 @@
           </p:nvSpPr>
           <p:spPr>
             <a:xfrm>
-              <a:off x="3641004" y="2697734"/>
+              <a:off x="3651648" y="2697734"/>
               <a:ext cx="62384" cy="62384"/>
             </a:xfrm>
             <a:prstGeom prst="ellipse">
@@ -17508,7 +17508,7 @@
           </p:nvSpPr>
           <p:spPr>
             <a:xfrm>
-              <a:off x="3845118" y="2723395"/>
+              <a:off x="3835947" y="2723395"/>
               <a:ext cx="62384" cy="62384"/>
             </a:xfrm>
             <a:prstGeom prst="ellipse">
@@ -17534,7 +17534,7 @@
           </p:nvSpPr>
           <p:spPr>
             <a:xfrm>
-              <a:off x="3696957" y="2657238"/>
+              <a:off x="3660056" y="2657238"/>
               <a:ext cx="62384" cy="62384"/>
             </a:xfrm>
             <a:prstGeom prst="ellipse">
@@ -17560,7 +17560,7 @@
           </p:nvSpPr>
           <p:spPr>
             <a:xfrm>
-              <a:off x="3791848" y="2565090"/>
+              <a:off x="3811887" y="2565090"/>
               <a:ext cx="62384" cy="62384"/>
             </a:xfrm>
             <a:prstGeom prst="ellipse">
@@ -17586,7 +17586,7 @@
           </p:nvSpPr>
           <p:spPr>
             <a:xfrm>
-              <a:off x="3704498" y="2487391"/>
+              <a:off x="3697180" y="2487391"/>
               <a:ext cx="62384" cy="62384"/>
             </a:xfrm>
             <a:prstGeom prst="ellipse">
@@ -17612,7 +17612,7 @@
           </p:nvSpPr>
           <p:spPr>
             <a:xfrm>
-              <a:off x="3800786" y="2351664"/>
+              <a:off x="3814285" y="2351664"/>
               <a:ext cx="62384" cy="62384"/>
             </a:xfrm>
             <a:prstGeom prst="ellipse">
@@ -17638,7 +17638,7 @@
           </p:nvSpPr>
           <p:spPr>
             <a:xfrm>
-              <a:off x="3672370" y="2527400"/>
+              <a:off x="3655656" y="2527400"/>
               <a:ext cx="62384" cy="62384"/>
             </a:xfrm>
             <a:prstGeom prst="ellipse">
@@ -17664,7 +17664,7 @@
           </p:nvSpPr>
           <p:spPr>
             <a:xfrm>
-              <a:off x="3815654" y="2512826"/>
+              <a:off x="3836433" y="2512826"/>
               <a:ext cx="62384" cy="62384"/>
             </a:xfrm>
             <a:prstGeom prst="ellipse">
@@ -17690,7 +17690,7 @@
           </p:nvSpPr>
           <p:spPr>
             <a:xfrm>
-              <a:off x="3650394" y="2756311"/>
+              <a:off x="3653647" y="2756311"/>
               <a:ext cx="62384" cy="62384"/>
             </a:xfrm>
             <a:prstGeom prst="ellipse">
@@ -17716,7 +17716,7 @@
           </p:nvSpPr>
           <p:spPr>
             <a:xfrm>
-              <a:off x="3826639" y="2423515"/>
+              <a:off x="3847718" y="2423515"/>
               <a:ext cx="62384" cy="62384"/>
             </a:xfrm>
             <a:prstGeom prst="ellipse">
@@ -17742,7 +17742,7 @@
           </p:nvSpPr>
           <p:spPr>
             <a:xfrm>
-              <a:off x="3666174" y="2291623"/>
+              <a:off x="3671524" y="2291623"/>
               <a:ext cx="62384" cy="62384"/>
             </a:xfrm>
             <a:prstGeom prst="ellipse">
@@ -17768,7 +17768,7 @@
           </p:nvSpPr>
           <p:spPr>
             <a:xfrm>
-              <a:off x="3848094" y="2101744"/>
+              <a:off x="3839602" y="2101744"/>
               <a:ext cx="62384" cy="62384"/>
             </a:xfrm>
             <a:prstGeom prst="ellipse">
@@ -17794,7 +17794,7 @@
           </p:nvSpPr>
           <p:spPr>
             <a:xfrm>
-              <a:off x="3654533" y="2946762"/>
+              <a:off x="3668764" y="2946762"/>
               <a:ext cx="62384" cy="62384"/>
             </a:xfrm>
             <a:prstGeom prst="ellipse">
@@ -17820,7 +17820,7 @@
           </p:nvSpPr>
           <p:spPr>
             <a:xfrm>
-              <a:off x="3858311" y="2932834"/>
+              <a:off x="3822619" y="2932834"/>
               <a:ext cx="62384" cy="62384"/>
             </a:xfrm>
             <a:prstGeom prst="ellipse">
@@ -17846,7 +17846,7 @@
           </p:nvSpPr>
           <p:spPr>
             <a:xfrm>
-              <a:off x="3709486" y="3175826"/>
+              <a:off x="3667805" y="3175826"/>
               <a:ext cx="62384" cy="62384"/>
             </a:xfrm>
             <a:prstGeom prst="ellipse">
@@ -17872,7 +17872,7 @@
           </p:nvSpPr>
           <p:spPr>
             <a:xfrm>
-              <a:off x="3848198" y="2940996"/>
+              <a:off x="3818712" y="2940996"/>
               <a:ext cx="62384" cy="62384"/>
             </a:xfrm>
             <a:prstGeom prst="ellipse">
@@ -17898,7 +17898,7 @@
           </p:nvSpPr>
           <p:spPr>
             <a:xfrm>
-              <a:off x="3693336" y="1942040"/>
+              <a:off x="3665080" y="1942040"/>
               <a:ext cx="62384" cy="62384"/>
             </a:xfrm>
             <a:prstGeom prst="ellipse">
@@ -17924,7 +17924,7 @@
           </p:nvSpPr>
           <p:spPr>
             <a:xfrm>
-              <a:off x="3843976" y="2090840"/>
+              <a:off x="3831784" y="2090840"/>
               <a:ext cx="62384" cy="62384"/>
             </a:xfrm>
             <a:prstGeom prst="ellipse">
@@ -17950,7 +17950,7 @@
           </p:nvSpPr>
           <p:spPr>
             <a:xfrm>
-              <a:off x="4684537" y="2311945"/>
+              <a:off x="4747031" y="2311945"/>
               <a:ext cx="62384" cy="62384"/>
             </a:xfrm>
             <a:prstGeom prst="ellipse">
@@ -17976,7 +17976,7 @@
           </p:nvSpPr>
           <p:spPr>
             <a:xfrm>
-              <a:off x="4848440" y="2369026"/>
+              <a:off x="4896663" y="2369026"/>
               <a:ext cx="62384" cy="62384"/>
             </a:xfrm>
             <a:prstGeom prst="ellipse">
@@ -18002,7 +18002,7 @@
           </p:nvSpPr>
           <p:spPr>
             <a:xfrm>
-              <a:off x="4685595" y="2894862"/>
+              <a:off x="4721553" y="2894862"/>
               <a:ext cx="62384" cy="62384"/>
             </a:xfrm>
             <a:prstGeom prst="ellipse">
@@ -18028,7 +18028,7 @@
           </p:nvSpPr>
           <p:spPr>
             <a:xfrm>
-              <a:off x="4848005" y="3229378"/>
+              <a:off x="4874691" y="3229378"/>
               <a:ext cx="62384" cy="62384"/>
             </a:xfrm>
             <a:prstGeom prst="ellipse">
@@ -18054,7 +18054,7 @@
           </p:nvSpPr>
           <p:spPr>
             <a:xfrm>
-              <a:off x="4688840" y="2364663"/>
+              <a:off x="4690121" y="2364663"/>
               <a:ext cx="62384" cy="62384"/>
             </a:xfrm>
             <a:prstGeom prst="ellipse">
@@ -18080,7 +18080,7 @@
           </p:nvSpPr>
           <p:spPr>
             <a:xfrm>
-              <a:off x="4903078" y="2181957"/>
+              <a:off x="4869767" y="2181957"/>
               <a:ext cx="62384" cy="62384"/>
             </a:xfrm>
             <a:prstGeom prst="ellipse">
@@ -18106,7 +18106,7 @@
           </p:nvSpPr>
           <p:spPr>
             <a:xfrm>
-              <a:off x="4709323" y="2715153"/>
+              <a:off x="4694507" y="2715153"/>
               <a:ext cx="62384" cy="62384"/>
             </a:xfrm>
             <a:prstGeom prst="ellipse">
@@ -18132,7 +18132,7 @@
           </p:nvSpPr>
           <p:spPr>
             <a:xfrm>
-              <a:off x="4849391" y="2479901"/>
+              <a:off x="4848399" y="2479901"/>
               <a:ext cx="62384" cy="62384"/>
             </a:xfrm>
             <a:prstGeom prst="ellipse">
@@ -18158,7 +18158,7 @@
           </p:nvSpPr>
           <p:spPr>
             <a:xfrm>
-              <a:off x="4706154" y="2158585"/>
+              <a:off x="4684706" y="2158585"/>
               <a:ext cx="62384" cy="62384"/>
             </a:xfrm>
             <a:prstGeom prst="ellipse">
@@ -18184,7 +18184,7 @@
           </p:nvSpPr>
           <p:spPr>
             <a:xfrm>
-              <a:off x="4843378" y="2614593"/>
+              <a:off x="4832591" y="2614593"/>
               <a:ext cx="62384" cy="62384"/>
             </a:xfrm>
             <a:prstGeom prst="ellipse">
@@ -18210,7 +18210,7 @@
           </p:nvSpPr>
           <p:spPr>
             <a:xfrm>
-              <a:off x="4740976" y="1775162"/>
+              <a:off x="4710616" y="1775162"/>
               <a:ext cx="62384" cy="62384"/>
             </a:xfrm>
             <a:prstGeom prst="ellipse">
@@ -18236,7 +18236,7 @@
           </p:nvSpPr>
           <p:spPr>
             <a:xfrm>
-              <a:off x="4902797" y="2120099"/>
+              <a:off x="4864866" y="2120099"/>
               <a:ext cx="62384" cy="62384"/>
             </a:xfrm>
             <a:prstGeom prst="ellipse">
@@ -18262,7 +18262,7 @@
           </p:nvSpPr>
           <p:spPr>
             <a:xfrm>
-              <a:off x="4744342" y="2900655"/>
+              <a:off x="4713130" y="2900655"/>
               <a:ext cx="62384" cy="62384"/>
             </a:xfrm>
             <a:prstGeom prst="ellipse">
@@ -18288,7 +18288,7 @@
           </p:nvSpPr>
           <p:spPr>
             <a:xfrm>
-              <a:off x="4847549" y="2808759"/>
+              <a:off x="4839096" y="2808759"/>
               <a:ext cx="62384" cy="62384"/>
             </a:xfrm>
             <a:prstGeom prst="ellipse">
@@ -18314,7 +18314,7 @@
           </p:nvSpPr>
           <p:spPr>
             <a:xfrm>
-              <a:off x="4727154" y="2437059"/>
+              <a:off x="4750690" y="2437059"/>
               <a:ext cx="62384" cy="62384"/>
             </a:xfrm>
             <a:prstGeom prst="ellipse">
@@ -18340,7 +18340,7 @@
           </p:nvSpPr>
           <p:spPr>
             <a:xfrm>
-              <a:off x="4839154" y="2620576"/>
+              <a:off x="4900037" y="2620576"/>
               <a:ext cx="62384" cy="62384"/>
             </a:xfrm>
             <a:prstGeom prst="ellipse">
@@ -18366,7 +18366,7 @@
           </p:nvSpPr>
           <p:spPr>
             <a:xfrm>
-              <a:off x="4719619" y="2460359"/>
+              <a:off x="4684409" y="2460359"/>
               <a:ext cx="62384" cy="62384"/>
             </a:xfrm>
             <a:prstGeom prst="ellipse">
@@ -18392,7 +18392,7 @@
           </p:nvSpPr>
           <p:spPr>
             <a:xfrm>
-              <a:off x="4838169" y="2563301"/>
+              <a:off x="4889815" y="2563301"/>
               <a:ext cx="62384" cy="62384"/>
             </a:xfrm>
             <a:prstGeom prst="ellipse">
@@ -18418,7 +18418,7 @@
           </p:nvSpPr>
           <p:spPr>
             <a:xfrm>
-              <a:off x="4723055" y="2841489"/>
+              <a:off x="4709243" y="2841489"/>
               <a:ext cx="62384" cy="62384"/>
             </a:xfrm>
             <a:prstGeom prst="ellipse">
@@ -18444,7 +18444,7 @@
           </p:nvSpPr>
           <p:spPr>
             <a:xfrm>
-              <a:off x="4837869" y="2355588"/>
+              <a:off x="4875306" y="2355588"/>
               <a:ext cx="62384" cy="62384"/>
             </a:xfrm>
             <a:prstGeom prst="ellipse">
@@ -18470,7 +18470,7 @@
           </p:nvSpPr>
           <p:spPr>
             <a:xfrm>
-              <a:off x="4704170" y="1606661"/>
+              <a:off x="4699415" y="1606661"/>
               <a:ext cx="62384" cy="62384"/>
             </a:xfrm>
             <a:prstGeom prst="ellipse">
@@ -18496,7 +18496,7 @@
           </p:nvSpPr>
           <p:spPr>
             <a:xfrm>
-              <a:off x="4829914" y="1907008"/>
+              <a:off x="4864327" y="1907008"/>
               <a:ext cx="62384" cy="62384"/>
             </a:xfrm>
             <a:prstGeom prst="ellipse">
@@ -18522,7 +18522,7 @@
           </p:nvSpPr>
           <p:spPr>
             <a:xfrm>
-              <a:off x="4720841" y="2769845"/>
+              <a:off x="4678676" y="2769845"/>
               <a:ext cx="62384" cy="62384"/>
             </a:xfrm>
             <a:prstGeom prst="ellipse">
@@ -18548,7 +18548,7 @@
           </p:nvSpPr>
           <p:spPr>
             <a:xfrm>
-              <a:off x="4890985" y="2526901"/>
+              <a:off x="4875118" y="2526901"/>
               <a:ext cx="62384" cy="62384"/>
             </a:xfrm>
             <a:prstGeom prst="ellipse">
@@ -18574,7 +18574,7 @@
           </p:nvSpPr>
           <p:spPr>
             <a:xfrm>
-              <a:off x="4710447" y="2528874"/>
+              <a:off x="4691065" y="2528874"/>
               <a:ext cx="62384" cy="62384"/>
             </a:xfrm>
             <a:prstGeom prst="ellipse">
@@ -18600,7 +18600,7 @@
           </p:nvSpPr>
           <p:spPr>
             <a:xfrm>
-              <a:off x="4879390" y="2508484"/>
+              <a:off x="4837893" y="2508484"/>
               <a:ext cx="62384" cy="62384"/>
             </a:xfrm>
             <a:prstGeom prst="ellipse">
@@ -18626,7 +18626,7 @@
           </p:nvSpPr>
           <p:spPr>
             <a:xfrm>
-              <a:off x="4734876" y="2108226"/>
+              <a:off x="4713203" y="2108226"/>
               <a:ext cx="62384" cy="62384"/>
             </a:xfrm>
             <a:prstGeom prst="ellipse">
@@ -18652,7 +18652,7 @@
           </p:nvSpPr>
           <p:spPr>
             <a:xfrm>
-              <a:off x="4847731" y="3063877"/>
+              <a:off x="4898272" y="3063877"/>
               <a:ext cx="62384" cy="62384"/>
             </a:xfrm>
             <a:prstGeom prst="ellipse">
@@ -18678,7 +18678,7 @@
           </p:nvSpPr>
           <p:spPr>
             <a:xfrm>
-              <a:off x="4704328" y="2540738"/>
+              <a:off x="4723751" y="2540738"/>
               <a:ext cx="62384" cy="62384"/>
             </a:xfrm>
             <a:prstGeom prst="ellipse">
@@ -18704,7 +18704,7 @@
           </p:nvSpPr>
           <p:spPr>
             <a:xfrm>
-              <a:off x="4851850" y="2471101"/>
+              <a:off x="4854563" y="2471101"/>
               <a:ext cx="62384" cy="62384"/>
             </a:xfrm>
             <a:prstGeom prst="ellipse">
@@ -18730,7 +18730,7 @@
           </p:nvSpPr>
           <p:spPr>
             <a:xfrm>
-              <a:off x="4738371" y="2845680"/>
+              <a:off x="4698510" y="2845680"/>
               <a:ext cx="62384" cy="62384"/>
             </a:xfrm>
             <a:prstGeom prst="ellipse">
@@ -18756,7 +18756,7 @@
           </p:nvSpPr>
           <p:spPr>
             <a:xfrm>
-              <a:off x="4853834" y="2964366"/>
+              <a:off x="4882513" y="2964366"/>
               <a:ext cx="62384" cy="62384"/>
             </a:xfrm>
             <a:prstGeom prst="ellipse">
@@ -18782,7 +18782,7 @@
           </p:nvSpPr>
           <p:spPr>
             <a:xfrm>
-              <a:off x="4732402" y="2761471"/>
+              <a:off x="4743324" y="2761471"/>
               <a:ext cx="62384" cy="62384"/>
             </a:xfrm>
             <a:prstGeom prst="ellipse">
@@ -18808,7 +18808,7 @@
           </p:nvSpPr>
           <p:spPr>
             <a:xfrm>
-              <a:off x="4846032" y="2923452"/>
+              <a:off x="4874559" y="2923452"/>
               <a:ext cx="62384" cy="62384"/>
             </a:xfrm>
             <a:prstGeom prst="ellipse">
@@ -18834,7 +18834,7 @@
           </p:nvSpPr>
           <p:spPr>
             <a:xfrm>
-              <a:off x="4687784" y="2607449"/>
+              <a:off x="4712005" y="2607449"/>
               <a:ext cx="62384" cy="62384"/>
             </a:xfrm>
             <a:prstGeom prst="ellipse">
@@ -18860,7 +18860,7 @@
           </p:nvSpPr>
           <p:spPr>
             <a:xfrm>
-              <a:off x="4870030" y="2208631"/>
+              <a:off x="4869643" y="2208631"/>
               <a:ext cx="62384" cy="62384"/>
             </a:xfrm>
             <a:prstGeom prst="ellipse">
@@ -18886,7 +18886,7 @@
           </p:nvSpPr>
           <p:spPr>
             <a:xfrm>
-              <a:off x="4701324" y="2681231"/>
+              <a:off x="4736126" y="2681231"/>
               <a:ext cx="62384" cy="62384"/>
             </a:xfrm>
             <a:prstGeom prst="ellipse">
@@ -18912,7 +18912,7 @@
           </p:nvSpPr>
           <p:spPr>
             <a:xfrm>
-              <a:off x="4834576" y="2374750"/>
+              <a:off x="4891630" y="2374750"/>
               <a:ext cx="62384" cy="62384"/>
             </a:xfrm>
             <a:prstGeom prst="ellipse">
@@ -18938,7 +18938,7 @@
           </p:nvSpPr>
           <p:spPr>
             <a:xfrm>
-              <a:off x="4697063" y="2288238"/>
+              <a:off x="4745694" y="2288238"/>
               <a:ext cx="62384" cy="62384"/>
             </a:xfrm>
             <a:prstGeom prst="ellipse">
@@ -18964,7 +18964,7 @@
           </p:nvSpPr>
           <p:spPr>
             <a:xfrm>
-              <a:off x="4861838" y="2930793"/>
+              <a:off x="4830107" y="2930793"/>
               <a:ext cx="62384" cy="62384"/>
             </a:xfrm>
             <a:prstGeom prst="ellipse">
@@ -18990,7 +18990,7 @@
           </p:nvSpPr>
           <p:spPr>
             <a:xfrm>
-              <a:off x="4702284" y="2806788"/>
+              <a:off x="4702511" y="2806788"/>
               <a:ext cx="62384" cy="62384"/>
             </a:xfrm>
             <a:prstGeom prst="ellipse">
@@ -19016,7 +19016,7 @@
           </p:nvSpPr>
           <p:spPr>
             <a:xfrm>
-              <a:off x="4867221" y="2769173"/>
+              <a:off x="4871795" y="2769173"/>
               <a:ext cx="62384" cy="62384"/>
             </a:xfrm>
             <a:prstGeom prst="ellipse">
@@ -19042,7 +19042,7 @@
           </p:nvSpPr>
           <p:spPr>
             <a:xfrm>
-              <a:off x="4695543" y="2125887"/>
+              <a:off x="4723956" y="2125887"/>
               <a:ext cx="62384" cy="62384"/>
             </a:xfrm>
             <a:prstGeom prst="ellipse">
@@ -19068,7 +19068,7 @@
           </p:nvSpPr>
           <p:spPr>
             <a:xfrm>
-              <a:off x="4848749" y="2426405"/>
+              <a:off x="4899493" y="2426405"/>
               <a:ext cx="62384" cy="62384"/>
             </a:xfrm>
             <a:prstGeom prst="ellipse">
@@ -19094,7 +19094,7 @@
           </p:nvSpPr>
           <p:spPr>
             <a:xfrm>
-              <a:off x="4706950" y="2851742"/>
+              <a:off x="4742202" y="2851742"/>
               <a:ext cx="62384" cy="62384"/>
             </a:xfrm>
             <a:prstGeom prst="ellipse">
@@ -19120,7 +19120,7 @@
           </p:nvSpPr>
           <p:spPr>
             <a:xfrm>
-              <a:off x="4834156" y="3194303"/>
+              <a:off x="4831869" y="3194303"/>
               <a:ext cx="62384" cy="62384"/>
             </a:xfrm>
             <a:prstGeom prst="ellipse">
@@ -19146,7 +19146,7 @@
           </p:nvSpPr>
           <p:spPr>
             <a:xfrm>
-              <a:off x="4750903" y="3013766"/>
+              <a:off x="4707444" y="3013766"/>
               <a:ext cx="62384" cy="62384"/>
             </a:xfrm>
             <a:prstGeom prst="ellipse">
@@ -19172,7 +19172,7 @@
           </p:nvSpPr>
           <p:spPr>
             <a:xfrm>
-              <a:off x="4856993" y="2626191"/>
+              <a:off x="4852642" y="2626191"/>
               <a:ext cx="62384" cy="62384"/>
             </a:xfrm>
             <a:prstGeom prst="ellipse">
@@ -19198,7 +19198,7 @@
           </p:nvSpPr>
           <p:spPr>
             <a:xfrm>
-              <a:off x="4716505" y="2009130"/>
+              <a:off x="4681675" y="2009130"/>
               <a:ext cx="62384" cy="62384"/>
             </a:xfrm>
             <a:prstGeom prst="ellipse">
@@ -19224,7 +19224,7 @@
           </p:nvSpPr>
           <p:spPr>
             <a:xfrm>
-              <a:off x="4880484" y="2572888"/>
+              <a:off x="4833876" y="2572888"/>
               <a:ext cx="62384" cy="62384"/>
             </a:xfrm>
             <a:prstGeom prst="ellipse">
@@ -19250,7 +19250,7 @@
           </p:nvSpPr>
           <p:spPr>
             <a:xfrm>
-              <a:off x="4720539" y="2180947"/>
+              <a:off x="4712560" y="2180947"/>
               <a:ext cx="62384" cy="62384"/>
             </a:xfrm>
             <a:prstGeom prst="ellipse">
@@ -19276,7 +19276,7 @@
           </p:nvSpPr>
           <p:spPr>
             <a:xfrm>
-              <a:off x="4832882" y="2606670"/>
+              <a:off x="4866249" y="2606670"/>
               <a:ext cx="62384" cy="62384"/>
             </a:xfrm>
             <a:prstGeom prst="ellipse">
@@ -19302,7 +19302,7 @@
           </p:nvSpPr>
           <p:spPr>
             <a:xfrm>
-              <a:off x="4725681" y="2302950"/>
+              <a:off x="4689335" y="2302950"/>
               <a:ext cx="62384" cy="62384"/>
             </a:xfrm>
             <a:prstGeom prst="ellipse">
@@ -19328,7 +19328,7 @@
           </p:nvSpPr>
           <p:spPr>
             <a:xfrm>
-              <a:off x="4899093" y="2628013"/>
+              <a:off x="4898654" y="2628013"/>
               <a:ext cx="62384" cy="62384"/>
             </a:xfrm>
             <a:prstGeom prst="ellipse">
@@ -19354,7 +19354,7 @@
           </p:nvSpPr>
           <p:spPr>
             <a:xfrm>
-              <a:off x="4739228" y="2882558"/>
+              <a:off x="4737973" y="2882558"/>
               <a:ext cx="62384" cy="62384"/>
             </a:xfrm>
             <a:prstGeom prst="ellipse">
@@ -19380,7 +19380,7 @@
           </p:nvSpPr>
           <p:spPr>
             <a:xfrm>
-              <a:off x="4884946" y="2297022"/>
+              <a:off x="4879467" y="2297022"/>
               <a:ext cx="62384" cy="62384"/>
             </a:xfrm>
             <a:prstGeom prst="ellipse">
@@ -19406,7 +19406,7 @@
           </p:nvSpPr>
           <p:spPr>
             <a:xfrm>
-              <a:off x="4731960" y="2781978"/>
+              <a:off x="4708804" y="2781978"/>
               <a:ext cx="62384" cy="62384"/>
             </a:xfrm>
             <a:prstGeom prst="ellipse">
@@ -19432,7 +19432,7 @@
           </p:nvSpPr>
           <p:spPr>
             <a:xfrm>
-              <a:off x="4869265" y="2467935"/>
+              <a:off x="4843328" y="2467935"/>
               <a:ext cx="62384" cy="62384"/>
             </a:xfrm>
             <a:prstGeom prst="ellipse">
@@ -19458,7 +19458,7 @@
           </p:nvSpPr>
           <p:spPr>
             <a:xfrm>
-              <a:off x="4714410" y="2228724"/>
+              <a:off x="4711011" y="2228724"/>
               <a:ext cx="62384" cy="62384"/>
             </a:xfrm>
             <a:prstGeom prst="ellipse">
@@ -19484,7 +19484,7 @@
           </p:nvSpPr>
           <p:spPr>
             <a:xfrm>
-              <a:off x="4881690" y="2561209"/>
+              <a:off x="4858724" y="2561209"/>
               <a:ext cx="62384" cy="62384"/>
             </a:xfrm>
             <a:prstGeom prst="ellipse">
@@ -19510,7 +19510,7 @@
           </p:nvSpPr>
           <p:spPr>
             <a:xfrm>
-              <a:off x="4750819" y="2374627"/>
+              <a:off x="4739069" y="2374627"/>
               <a:ext cx="62384" cy="62384"/>
             </a:xfrm>
             <a:prstGeom prst="ellipse">
@@ -19536,7 +19536,7 @@
           </p:nvSpPr>
           <p:spPr>
             <a:xfrm>
-              <a:off x="4849135" y="2083058"/>
+              <a:off x="4895020" y="2083058"/>
               <a:ext cx="62384" cy="62384"/>
             </a:xfrm>
             <a:prstGeom prst="ellipse">
@@ -19562,7 +19562,7 @@
           </p:nvSpPr>
           <p:spPr>
             <a:xfrm>
-              <a:off x="4717473" y="2680218"/>
+              <a:off x="4691180" y="2680218"/>
               <a:ext cx="62384" cy="62384"/>
             </a:xfrm>
             <a:prstGeom prst="ellipse">
@@ -19588,7 +19588,7 @@
           </p:nvSpPr>
           <p:spPr>
             <a:xfrm>
-              <a:off x="4899481" y="2481739"/>
+              <a:off x="4882372" y="2481739"/>
               <a:ext cx="62384" cy="62384"/>
             </a:xfrm>
             <a:prstGeom prst="ellipse">
@@ -19614,7 +19614,7 @@
           </p:nvSpPr>
           <p:spPr>
             <a:xfrm>
-              <a:off x="4747762" y="2081163"/>
+              <a:off x="4689633" y="2081163"/>
               <a:ext cx="62384" cy="62384"/>
             </a:xfrm>
             <a:prstGeom prst="ellipse">
@@ -19640,7 +19640,7 @@
           </p:nvSpPr>
           <p:spPr>
             <a:xfrm>
-              <a:off x="4882609" y="2167581"/>
+              <a:off x="4867254" y="2167581"/>
               <a:ext cx="62384" cy="62384"/>
             </a:xfrm>
             <a:prstGeom prst="ellipse">
@@ -19666,7 +19666,7 @@
           </p:nvSpPr>
           <p:spPr>
             <a:xfrm>
-              <a:off x="4684774" y="2681153"/>
+              <a:off x="4695499" y="2681153"/>
               <a:ext cx="62384" cy="62384"/>
             </a:xfrm>
             <a:prstGeom prst="ellipse">
@@ -19692,7 +19692,7 @@
           </p:nvSpPr>
           <p:spPr>
             <a:xfrm>
-              <a:off x="4852160" y="2737485"/>
+              <a:off x="4833383" y="2737485"/>
               <a:ext cx="62384" cy="62384"/>
             </a:xfrm>
             <a:prstGeom prst="ellipse">
@@ -19718,7 +19718,7 @@
           </p:nvSpPr>
           <p:spPr>
             <a:xfrm>
-              <a:off x="4742184" y="2317605"/>
+              <a:off x="4753376" y="2317605"/>
               <a:ext cx="62384" cy="62384"/>
             </a:xfrm>
             <a:prstGeom prst="ellipse">
@@ -19744,7 +19744,7 @@
           </p:nvSpPr>
           <p:spPr>
             <a:xfrm>
-              <a:off x="4893936" y="2612100"/>
+              <a:off x="4858913" y="2612100"/>
               <a:ext cx="62384" cy="62384"/>
             </a:xfrm>
             <a:prstGeom prst="ellipse">
@@ -19770,7 +19770,7 @@
           </p:nvSpPr>
           <p:spPr>
             <a:xfrm>
-              <a:off x="4715212" y="3185085"/>
+              <a:off x="4753235" y="3185085"/>
               <a:ext cx="62384" cy="62384"/>
             </a:xfrm>
             <a:prstGeom prst="ellipse">
@@ -19796,7 +19796,7 @@
           </p:nvSpPr>
           <p:spPr>
             <a:xfrm>
-              <a:off x="4900710" y="3251737"/>
+              <a:off x="4902964" y="3251737"/>
               <a:ext cx="62384" cy="62384"/>
             </a:xfrm>
             <a:prstGeom prst="ellipse">
@@ -19822,7 +19822,7 @@
           </p:nvSpPr>
           <p:spPr>
             <a:xfrm>
-              <a:off x="4720287" y="2162231"/>
+              <a:off x="4747696" y="2162231"/>
               <a:ext cx="62384" cy="62384"/>
             </a:xfrm>
             <a:prstGeom prst="ellipse">
@@ -19848,7 +19848,7 @@
           </p:nvSpPr>
           <p:spPr>
             <a:xfrm>
-              <a:off x="4868425" y="2727672"/>
+              <a:off x="4898995" y="2727672"/>
               <a:ext cx="62384" cy="62384"/>
             </a:xfrm>
             <a:prstGeom prst="ellipse">
@@ -19874,7 +19874,7 @@
           </p:nvSpPr>
           <p:spPr>
             <a:xfrm>
-              <a:off x="4697614" y="2348880"/>
+              <a:off x="4690670" y="2348880"/>
               <a:ext cx="62384" cy="62384"/>
             </a:xfrm>
             <a:prstGeom prst="ellipse">
@@ -19900,7 +19900,7 @@
           </p:nvSpPr>
           <p:spPr>
             <a:xfrm>
-              <a:off x="4861231" y="2601820"/>
+              <a:off x="4863750" y="2601820"/>
               <a:ext cx="62384" cy="62384"/>
             </a:xfrm>
             <a:prstGeom prst="ellipse">
@@ -19926,7 +19926,7 @@
           </p:nvSpPr>
           <p:spPr>
             <a:xfrm>
-              <a:off x="4682236" y="2424810"/>
+              <a:off x="4708500" y="2424810"/>
               <a:ext cx="62384" cy="62384"/>
             </a:xfrm>
             <a:prstGeom prst="ellipse">
@@ -19952,7 +19952,7 @@
           </p:nvSpPr>
           <p:spPr>
             <a:xfrm>
-              <a:off x="4839117" y="2768547"/>
+              <a:off x="4872486" y="2768547"/>
               <a:ext cx="62384" cy="62384"/>
             </a:xfrm>
             <a:prstGeom prst="ellipse">
@@ -19978,7 +19978,7 @@
           </p:nvSpPr>
           <p:spPr>
             <a:xfrm>
-              <a:off x="4736076" y="2319052"/>
+              <a:off x="4720894" y="2319052"/>
               <a:ext cx="62384" cy="62384"/>
             </a:xfrm>
             <a:prstGeom prst="ellipse">
@@ -20004,7 +20004,7 @@
           </p:nvSpPr>
           <p:spPr>
             <a:xfrm>
-              <a:off x="4846545" y="2342871"/>
+              <a:off x="4891386" y="2342871"/>
               <a:ext cx="62384" cy="62384"/>
             </a:xfrm>
             <a:prstGeom prst="ellipse">
@@ -20030,7 +20030,7 @@
           </p:nvSpPr>
           <p:spPr>
             <a:xfrm>
-              <a:off x="4691426" y="2344858"/>
+              <a:off x="4746219" y="2344858"/>
               <a:ext cx="62384" cy="62384"/>
             </a:xfrm>
             <a:prstGeom prst="ellipse">
@@ -20056,7 +20056,7 @@
           </p:nvSpPr>
           <p:spPr>
             <a:xfrm>
-              <a:off x="4861693" y="2646094"/>
+              <a:off x="4854541" y="2646094"/>
               <a:ext cx="62384" cy="62384"/>
             </a:xfrm>
             <a:prstGeom prst="ellipse">
@@ -20082,7 +20082,7 @@
           </p:nvSpPr>
           <p:spPr>
             <a:xfrm>
-              <a:off x="4740428" y="2530032"/>
+              <a:off x="4681324" y="2530032"/>
               <a:ext cx="62384" cy="62384"/>
             </a:xfrm>
             <a:prstGeom prst="ellipse">
@@ -20108,7 +20108,7 @@
           </p:nvSpPr>
           <p:spPr>
             <a:xfrm>
-              <a:off x="4893544" y="2585508"/>
+              <a:off x="4873959" y="2585508"/>
               <a:ext cx="62384" cy="62384"/>
             </a:xfrm>
             <a:prstGeom prst="ellipse">
@@ -20134,7 +20134,7 @@
           </p:nvSpPr>
           <p:spPr>
             <a:xfrm>
-              <a:off x="4720959" y="2411097"/>
+              <a:off x="4743305" y="2411097"/>
               <a:ext cx="62384" cy="62384"/>
             </a:xfrm>
             <a:prstGeom prst="ellipse">
@@ -20160,7 +20160,7 @@
           </p:nvSpPr>
           <p:spPr>
             <a:xfrm>
-              <a:off x="4834763" y="2286848"/>
+              <a:off x="4828693" y="2286848"/>
               <a:ext cx="62384" cy="62384"/>
             </a:xfrm>
             <a:prstGeom prst="ellipse">
@@ -20186,7 +20186,7 @@
           </p:nvSpPr>
           <p:spPr>
             <a:xfrm>
-              <a:off x="4745419" y="2683246"/>
+              <a:off x="4724001" y="2683246"/>
               <a:ext cx="62384" cy="62384"/>
             </a:xfrm>
             <a:prstGeom prst="ellipse">
@@ -20212,7 +20212,7 @@
           </p:nvSpPr>
           <p:spPr>
             <a:xfrm>
-              <a:off x="4852990" y="3124870"/>
+              <a:off x="4902467" y="3124870"/>
               <a:ext cx="62384" cy="62384"/>
             </a:xfrm>
             <a:prstGeom prst="ellipse">
@@ -20238,7 +20238,7 @@
           </p:nvSpPr>
           <p:spPr>
             <a:xfrm>
-              <a:off x="4728718" y="2917394"/>
+              <a:off x="4736276" y="2917394"/>
               <a:ext cx="62384" cy="62384"/>
             </a:xfrm>
             <a:prstGeom prst="ellipse">
@@ -20264,7 +20264,7 @@
           </p:nvSpPr>
           <p:spPr>
             <a:xfrm>
-              <a:off x="4899921" y="2497390"/>
+              <a:off x="4829392" y="2497390"/>
               <a:ext cx="62384" cy="62384"/>
             </a:xfrm>
             <a:prstGeom prst="ellipse">
@@ -20290,7 +20290,7 @@
           </p:nvSpPr>
           <p:spPr>
             <a:xfrm>
-              <a:off x="4728660" y="2511029"/>
+              <a:off x="4736531" y="2511029"/>
               <a:ext cx="62384" cy="62384"/>
             </a:xfrm>
             <a:prstGeom prst="ellipse">
@@ -20316,7 +20316,7 @@
           </p:nvSpPr>
           <p:spPr>
             <a:xfrm>
-              <a:off x="4884126" y="2554699"/>
+              <a:off x="4878102" y="2554699"/>
               <a:ext cx="62384" cy="62384"/>
             </a:xfrm>
             <a:prstGeom prst="ellipse">
@@ -20342,7 +20342,7 @@
           </p:nvSpPr>
           <p:spPr>
             <a:xfrm>
-              <a:off x="4732963" y="2559440"/>
+              <a:off x="4732791" y="2559440"/>
               <a:ext cx="62384" cy="62384"/>
             </a:xfrm>
             <a:prstGeom prst="ellipse">
@@ -20368,7 +20368,7 @@
           </p:nvSpPr>
           <p:spPr>
             <a:xfrm>
-              <a:off x="4858145" y="2762487"/>
+              <a:off x="4889672" y="2762487"/>
               <a:ext cx="62384" cy="62384"/>
             </a:xfrm>
             <a:prstGeom prst="ellipse">
@@ -20394,7 +20394,7 @@
           </p:nvSpPr>
           <p:spPr>
             <a:xfrm>
-              <a:off x="4689612" y="2609385"/>
+              <a:off x="4750772" y="2609385"/>
               <a:ext cx="62384" cy="62384"/>
             </a:xfrm>
             <a:prstGeom prst="ellipse">
@@ -20420,7 +20420,7 @@
           </p:nvSpPr>
           <p:spPr>
             <a:xfrm>
-              <a:off x="4852380" y="2228409"/>
+              <a:off x="4857907" y="2228409"/>
               <a:ext cx="62384" cy="62384"/>
             </a:xfrm>
             <a:prstGeom prst="ellipse">
@@ -20446,7 +20446,7 @@
           </p:nvSpPr>
           <p:spPr>
             <a:xfrm>
-              <a:off x="4697283" y="1783476"/>
+              <a:off x="4706131" y="1783476"/>
               <a:ext cx="62384" cy="62384"/>
             </a:xfrm>
             <a:prstGeom prst="ellipse">
@@ -20472,7 +20472,7 @@
           </p:nvSpPr>
           <p:spPr>
             <a:xfrm>
-              <a:off x="4840823" y="2113447"/>
+              <a:off x="4888888" y="2113447"/>
               <a:ext cx="62384" cy="62384"/>
             </a:xfrm>
             <a:prstGeom prst="ellipse">
@@ -20498,7 +20498,7 @@
           </p:nvSpPr>
           <p:spPr>
             <a:xfrm>
-              <a:off x="4690244" y="2254933"/>
+              <a:off x="4734857" y="2254933"/>
               <a:ext cx="62384" cy="62384"/>
             </a:xfrm>
             <a:prstGeom prst="ellipse">
@@ -20524,7 +20524,7 @@
           </p:nvSpPr>
           <p:spPr>
             <a:xfrm>
-              <a:off x="4891214" y="2332335"/>
+              <a:off x="4856285" y="2332335"/>
               <a:ext cx="62384" cy="62384"/>
             </a:xfrm>
             <a:prstGeom prst="ellipse">
@@ -20550,7 +20550,7 @@
           </p:nvSpPr>
           <p:spPr>
             <a:xfrm>
-              <a:off x="4697412" y="2031341"/>
+              <a:off x="4692197" y="2031341"/>
               <a:ext cx="62384" cy="62384"/>
             </a:xfrm>
             <a:prstGeom prst="ellipse">
@@ -20576,7 +20576,7 @@
           </p:nvSpPr>
           <p:spPr>
             <a:xfrm>
-              <a:off x="4883522" y="2263950"/>
+              <a:off x="4854915" y="2263950"/>
               <a:ext cx="62384" cy="62384"/>
             </a:xfrm>
             <a:prstGeom prst="ellipse">
@@ -20602,7 +20602,7 @@
           </p:nvSpPr>
           <p:spPr>
             <a:xfrm>
-              <a:off x="4722070" y="2777345"/>
+              <a:off x="4739764" y="2777345"/>
               <a:ext cx="62384" cy="62384"/>
             </a:xfrm>
             <a:prstGeom prst="ellipse">
@@ -20628,7 +20628,7 @@
           </p:nvSpPr>
           <p:spPr>
             <a:xfrm>
-              <a:off x="4881770" y="2777409"/>
+              <a:off x="4841135" y="2777409"/>
               <a:ext cx="62384" cy="62384"/>
             </a:xfrm>
             <a:prstGeom prst="ellipse">
@@ -20654,7 +20654,7 @@
           </p:nvSpPr>
           <p:spPr>
             <a:xfrm>
-              <a:off x="4717874" y="2253316"/>
+              <a:off x="4694325" y="2253316"/>
               <a:ext cx="62384" cy="62384"/>
             </a:xfrm>
             <a:prstGeom prst="ellipse">
@@ -20680,7 +20680,7 @@
           </p:nvSpPr>
           <p:spPr>
             <a:xfrm>
-              <a:off x="4829655" y="2352887"/>
+              <a:off x="4865108" y="2352887"/>
               <a:ext cx="62384" cy="62384"/>
             </a:xfrm>
             <a:prstGeom prst="ellipse">
@@ -20706,7 +20706,7 @@
           </p:nvSpPr>
           <p:spPr>
             <a:xfrm>
-              <a:off x="4683871" y="2401614"/>
+              <a:off x="4747070" y="2401614"/>
               <a:ext cx="62384" cy="62384"/>
             </a:xfrm>
             <a:prstGeom prst="ellipse">
@@ -20732,7 +20732,7 @@
           </p:nvSpPr>
           <p:spPr>
             <a:xfrm>
-              <a:off x="4846761" y="2351698"/>
+              <a:off x="4898856" y="2351698"/>
               <a:ext cx="62384" cy="62384"/>
             </a:xfrm>
             <a:prstGeom prst="ellipse">
@@ -20758,7 +20758,7 @@
           </p:nvSpPr>
           <p:spPr>
             <a:xfrm>
-              <a:off x="4687784" y="2783130"/>
+              <a:off x="4683225" y="2783130"/>
               <a:ext cx="62384" cy="62384"/>
             </a:xfrm>
             <a:prstGeom prst="ellipse">
@@ -20784,7 +20784,7 @@
           </p:nvSpPr>
           <p:spPr>
             <a:xfrm>
-              <a:off x="4871511" y="2628817"/>
+              <a:off x="4863943" y="2628817"/>
               <a:ext cx="62384" cy="62384"/>
             </a:xfrm>
             <a:prstGeom prst="ellipse">
@@ -20810,7 +20810,7 @@
           </p:nvSpPr>
           <p:spPr>
             <a:xfrm>
-              <a:off x="4734512" y="2034889"/>
+              <a:off x="4685208" y="2034889"/>
               <a:ext cx="62384" cy="62384"/>
             </a:xfrm>
             <a:prstGeom prst="ellipse">
@@ -20836,7 +20836,7 @@
           </p:nvSpPr>
           <p:spPr>
             <a:xfrm>
-              <a:off x="4879426" y="2402098"/>
+              <a:off x="4844390" y="2402098"/>
               <a:ext cx="62384" cy="62384"/>
             </a:xfrm>
             <a:prstGeom prst="ellipse">
@@ -20862,7 +20862,7 @@
           </p:nvSpPr>
           <p:spPr>
             <a:xfrm>
-              <a:off x="4722252" y="2580871"/>
+              <a:off x="4752696" y="2580871"/>
               <a:ext cx="62384" cy="62384"/>
             </a:xfrm>
             <a:prstGeom prst="ellipse">
@@ -20888,7 +20888,7 @@
           </p:nvSpPr>
           <p:spPr>
             <a:xfrm>
-              <a:off x="4884541" y="2494681"/>
+              <a:off x="4884230" y="2494681"/>
               <a:ext cx="62384" cy="62384"/>
             </a:xfrm>
             <a:prstGeom prst="ellipse">
@@ -20914,7 +20914,7 @@
           </p:nvSpPr>
           <p:spPr>
             <a:xfrm>
-              <a:off x="4722559" y="2441539"/>
+              <a:off x="4695757" y="2441539"/>
               <a:ext cx="62384" cy="62384"/>
             </a:xfrm>
             <a:prstGeom prst="ellipse">
@@ -20940,7 +20940,7 @@
           </p:nvSpPr>
           <p:spPr>
             <a:xfrm>
-              <a:off x="4840598" y="2772918"/>
+              <a:off x="4880219" y="2772918"/>
               <a:ext cx="62384" cy="62384"/>
             </a:xfrm>
             <a:prstGeom prst="ellipse">
@@ -20966,7 +20966,7 @@
           </p:nvSpPr>
           <p:spPr>
             <a:xfrm>
-              <a:off x="4678922" y="2521555"/>
+              <a:off x="4685388" y="2521555"/>
               <a:ext cx="62384" cy="62384"/>
             </a:xfrm>
             <a:prstGeom prst="ellipse">
@@ -20992,7 +20992,7 @@
           </p:nvSpPr>
           <p:spPr>
             <a:xfrm>
-              <a:off x="4878800" y="2696203"/>
+              <a:off x="4845066" y="2696203"/>
               <a:ext cx="62384" cy="62384"/>
             </a:xfrm>
             <a:prstGeom prst="ellipse">
@@ -21018,7 +21018,7 @@
           </p:nvSpPr>
           <p:spPr>
             <a:xfrm>
-              <a:off x="4735889" y="2300460"/>
+              <a:off x="4691321" y="2300460"/>
               <a:ext cx="62384" cy="62384"/>
             </a:xfrm>
             <a:prstGeom prst="ellipse">
@@ -21044,7 +21044,7 @@
           </p:nvSpPr>
           <p:spPr>
             <a:xfrm>
-              <a:off x="4848832" y="2557734"/>
+              <a:off x="4876427" y="2557734"/>
               <a:ext cx="62384" cy="62384"/>
             </a:xfrm>
             <a:prstGeom prst="ellipse">
@@ -21070,7 +21070,7 @@
           </p:nvSpPr>
           <p:spPr>
             <a:xfrm>
-              <a:off x="4695735" y="2297743"/>
+              <a:off x="4691900" y="2297743"/>
               <a:ext cx="62384" cy="62384"/>
             </a:xfrm>
             <a:prstGeom prst="ellipse">
@@ -21096,7 +21096,7 @@
           </p:nvSpPr>
           <p:spPr>
             <a:xfrm>
-              <a:off x="4887246" y="2708646"/>
+              <a:off x="4888744" y="2708646"/>
               <a:ext cx="62384" cy="62384"/>
             </a:xfrm>
             <a:prstGeom prst="ellipse">
@@ -21122,7 +21122,7 @@
           </p:nvSpPr>
           <p:spPr>
             <a:xfrm>
-              <a:off x="4679151" y="2538953"/>
+              <a:off x="4694992" y="2538953"/>
               <a:ext cx="62384" cy="62384"/>
             </a:xfrm>
             <a:prstGeom prst="ellipse">
@@ -21148,7 +21148,7 @@
           </p:nvSpPr>
           <p:spPr>
             <a:xfrm>
-              <a:off x="4871398" y="2588241"/>
+              <a:off x="4859360" y="2588241"/>
               <a:ext cx="62384" cy="62384"/>
             </a:xfrm>
             <a:prstGeom prst="ellipse">
@@ -21174,7 +21174,7 @@
           </p:nvSpPr>
           <p:spPr>
             <a:xfrm>
-              <a:off x="4728589" y="2216075"/>
+              <a:off x="4697225" y="2216075"/>
               <a:ext cx="62384" cy="62384"/>
             </a:xfrm>
             <a:prstGeom prst="ellipse">
@@ -21200,7 +21200,7 @@
           </p:nvSpPr>
           <p:spPr>
             <a:xfrm>
-              <a:off x="4870154" y="2413705"/>
+              <a:off x="4892717" y="2413705"/>
               <a:ext cx="62384" cy="62384"/>
             </a:xfrm>
             <a:prstGeom prst="ellipse">
@@ -21226,7 +21226,7 @@
           </p:nvSpPr>
           <p:spPr>
             <a:xfrm>
-              <a:off x="4749221" y="2669883"/>
+              <a:off x="4711247" y="2669883"/>
               <a:ext cx="62384" cy="62384"/>
             </a:xfrm>
             <a:prstGeom prst="ellipse">
@@ -21252,7 +21252,7 @@
           </p:nvSpPr>
           <p:spPr>
             <a:xfrm>
-              <a:off x="4828756" y="2214266"/>
+              <a:off x="4872124" y="2214266"/>
               <a:ext cx="62384" cy="62384"/>
             </a:xfrm>
             <a:prstGeom prst="ellipse">
@@ -21278,7 +21278,7 @@
           </p:nvSpPr>
           <p:spPr>
             <a:xfrm>
-              <a:off x="4718945" y="2074950"/>
+              <a:off x="4744441" y="2074950"/>
               <a:ext cx="62384" cy="62384"/>
             </a:xfrm>
             <a:prstGeom prst="ellipse">
@@ -21304,7 +21304,7 @@
           </p:nvSpPr>
           <p:spPr>
             <a:xfrm>
-              <a:off x="4859192" y="2067337"/>
+              <a:off x="4873304" y="2067337"/>
               <a:ext cx="62384" cy="62384"/>
             </a:xfrm>
             <a:prstGeom prst="ellipse">
@@ -21330,7 +21330,7 @@
           </p:nvSpPr>
           <p:spPr>
             <a:xfrm>
-              <a:off x="4680627" y="2450811"/>
+              <a:off x="4684617" y="2450811"/>
               <a:ext cx="62384" cy="62384"/>
             </a:xfrm>
             <a:prstGeom prst="ellipse">
@@ -21356,7 +21356,7 @@
           </p:nvSpPr>
           <p:spPr>
             <a:xfrm>
-              <a:off x="4863673" y="2521828"/>
+              <a:off x="4890527" y="2521828"/>
               <a:ext cx="62384" cy="62384"/>
             </a:xfrm>
             <a:prstGeom prst="ellipse">
@@ -21382,7 +21382,7 @@
           </p:nvSpPr>
           <p:spPr>
             <a:xfrm>
-              <a:off x="4710287" y="2562608"/>
+              <a:off x="4739269" y="2562608"/>
               <a:ext cx="62384" cy="62384"/>
             </a:xfrm>
             <a:prstGeom prst="ellipse">
@@ -21408,7 +21408,7 @@
           </p:nvSpPr>
           <p:spPr>
             <a:xfrm>
-              <a:off x="4838867" y="2410265"/>
+              <a:off x="4883851" y="2410265"/>
               <a:ext cx="62384" cy="62384"/>
             </a:xfrm>
             <a:prstGeom prst="ellipse">
@@ -21434,7 +21434,7 @@
           </p:nvSpPr>
           <p:spPr>
             <a:xfrm>
-              <a:off x="4709795" y="2000330"/>
+              <a:off x="4728193" y="2000330"/>
               <a:ext cx="62384" cy="62384"/>
             </a:xfrm>
             <a:prstGeom prst="ellipse">
@@ -21460,7 +21460,7 @@
           </p:nvSpPr>
           <p:spPr>
             <a:xfrm>
-              <a:off x="4838221" y="2835619"/>
+              <a:off x="4893576" y="2835619"/>
               <a:ext cx="62384" cy="62384"/>
             </a:xfrm>
             <a:prstGeom prst="ellipse">
@@ -21486,7 +21486,7 @@
           </p:nvSpPr>
           <p:spPr>
             <a:xfrm>
-              <a:off x="4735853" y="2883898"/>
+              <a:off x="4748304" y="2883898"/>
               <a:ext cx="62384" cy="62384"/>
             </a:xfrm>
             <a:prstGeom prst="ellipse">
@@ -21512,7 +21512,7 @@
           </p:nvSpPr>
           <p:spPr>
             <a:xfrm>
-              <a:off x="4881030" y="2434687"/>
+              <a:off x="4828649" y="2434687"/>
               <a:ext cx="62384" cy="62384"/>
             </a:xfrm>
             <a:prstGeom prst="ellipse">
@@ -21538,7 +21538,7 @@
           </p:nvSpPr>
           <p:spPr>
             <a:xfrm>
-              <a:off x="4696556" y="2621337"/>
+              <a:off x="4710982" y="2621337"/>
               <a:ext cx="62384" cy="62384"/>
             </a:xfrm>
             <a:prstGeom prst="ellipse">
@@ -21564,7 +21564,7 @@
           </p:nvSpPr>
           <p:spPr>
             <a:xfrm>
-              <a:off x="4832428" y="3061644"/>
+              <a:off x="4833557" y="3061644"/>
               <a:ext cx="62384" cy="62384"/>
             </a:xfrm>
             <a:prstGeom prst="ellipse">
@@ -21590,7 +21590,7 @@
           </p:nvSpPr>
           <p:spPr>
             <a:xfrm>
-              <a:off x="4700701" y="2463417"/>
+              <a:off x="4695393" y="2463417"/>
               <a:ext cx="62384" cy="62384"/>
             </a:xfrm>
             <a:prstGeom prst="ellipse">
@@ -21616,7 +21616,7 @@
           </p:nvSpPr>
           <p:spPr>
             <a:xfrm>
-              <a:off x="4856234" y="2473867"/>
+              <a:off x="4871302" y="2473867"/>
               <a:ext cx="62384" cy="62384"/>
             </a:xfrm>
             <a:prstGeom prst="ellipse">
@@ -21642,7 +21642,7 @@
           </p:nvSpPr>
           <p:spPr>
             <a:xfrm>
-              <a:off x="4735985" y="2498297"/>
+              <a:off x="4708099" y="2498297"/>
               <a:ext cx="62384" cy="62384"/>
             </a:xfrm>
             <a:prstGeom prst="ellipse">
@@ -21668,7 +21668,7 @@
           </p:nvSpPr>
           <p:spPr>
             <a:xfrm>
-              <a:off x="4871751" y="2493303"/>
+              <a:off x="4875896" y="2493303"/>
               <a:ext cx="62384" cy="62384"/>
             </a:xfrm>
             <a:prstGeom prst="ellipse">
@@ -21694,7 +21694,7 @@
           </p:nvSpPr>
           <p:spPr>
             <a:xfrm>
-              <a:off x="4744426" y="2476284"/>
+              <a:off x="4687661" y="2476284"/>
               <a:ext cx="62384" cy="62384"/>
             </a:xfrm>
             <a:prstGeom prst="ellipse">
@@ -21720,7 +21720,7 @@
           </p:nvSpPr>
           <p:spPr>
             <a:xfrm>
-              <a:off x="4857517" y="2723409"/>
+              <a:off x="4883070" y="2723409"/>
               <a:ext cx="62384" cy="62384"/>
             </a:xfrm>
             <a:prstGeom prst="ellipse">
@@ -21746,7 +21746,7 @@
           </p:nvSpPr>
           <p:spPr>
             <a:xfrm>
-              <a:off x="4724995" y="2508982"/>
+              <a:off x="4708359" y="2508982"/>
               <a:ext cx="62384" cy="62384"/>
             </a:xfrm>
             <a:prstGeom prst="ellipse">
@@ -21772,7 +21772,7 @@
           </p:nvSpPr>
           <p:spPr>
             <a:xfrm>
-              <a:off x="4897042" y="2399254"/>
+              <a:off x="4871652" y="2399254"/>
               <a:ext cx="62384" cy="62384"/>
             </a:xfrm>
             <a:prstGeom prst="ellipse">
@@ -21798,7 +21798,7 @@
           </p:nvSpPr>
           <p:spPr>
             <a:xfrm>
-              <a:off x="4696978" y="2852992"/>
+              <a:off x="4718397" y="2852992"/>
               <a:ext cx="62384" cy="62384"/>
             </a:xfrm>
             <a:prstGeom prst="ellipse">
@@ -21824,7 +21824,7 @@
           </p:nvSpPr>
           <p:spPr>
             <a:xfrm>
-              <a:off x="4880222" y="2507167"/>
+              <a:off x="4875459" y="2507167"/>
               <a:ext cx="62384" cy="62384"/>
             </a:xfrm>
             <a:prstGeom prst="ellipse">
@@ -21850,7 +21850,7 @@
           </p:nvSpPr>
           <p:spPr>
             <a:xfrm>
-              <a:off x="4687878" y="2776371"/>
+              <a:off x="4712170" y="2776371"/>
               <a:ext cx="62384" cy="62384"/>
             </a:xfrm>
             <a:prstGeom prst="ellipse">
@@ -21876,7 +21876,7 @@
           </p:nvSpPr>
           <p:spPr>
             <a:xfrm>
-              <a:off x="4887423" y="2186750"/>
+              <a:off x="4861370" y="2186750"/>
               <a:ext cx="62384" cy="62384"/>
             </a:xfrm>
             <a:prstGeom prst="ellipse">
@@ -21902,7 +21902,7 @@
           </p:nvSpPr>
           <p:spPr>
             <a:xfrm>
-              <a:off x="4747668" y="2961704"/>
+              <a:off x="4719739" y="2961704"/>
               <a:ext cx="62384" cy="62384"/>
             </a:xfrm>
             <a:prstGeom prst="ellipse">
@@ -21928,7 +21928,7 @@
           </p:nvSpPr>
           <p:spPr>
             <a:xfrm>
-              <a:off x="4896075" y="3096375"/>
+              <a:off x="4859174" y="3096375"/>
               <a:ext cx="62384" cy="62384"/>
             </a:xfrm>
             <a:prstGeom prst="ellipse">
@@ -21954,7 +21954,7 @@
           </p:nvSpPr>
           <p:spPr>
             <a:xfrm>
-              <a:off x="4710074" y="2757983"/>
+              <a:off x="4731537" y="2757983"/>
               <a:ext cx="62384" cy="62384"/>
             </a:xfrm>
             <a:prstGeom prst="ellipse">
@@ -21980,7 +21980,7 @@
           </p:nvSpPr>
           <p:spPr>
             <a:xfrm>
-              <a:off x="4861543" y="2657120"/>
+              <a:off x="4900388" y="2657120"/>
               <a:ext cx="62384" cy="62384"/>
             </a:xfrm>
             <a:prstGeom prst="ellipse">
@@ -22006,7 +22006,7 @@
           </p:nvSpPr>
           <p:spPr>
             <a:xfrm>
-              <a:off x="4731705" y="2641463"/>
+              <a:off x="4705430" y="2641463"/>
               <a:ext cx="62384" cy="62384"/>
             </a:xfrm>
             <a:prstGeom prst="ellipse">
@@ -22032,7 +22032,7 @@
           </p:nvSpPr>
           <p:spPr>
             <a:xfrm>
-              <a:off x="4857873" y="2485852"/>
+              <a:off x="4845955" y="2485852"/>
               <a:ext cx="62384" cy="62384"/>
             </a:xfrm>
             <a:prstGeom prst="ellipse">
@@ -22058,7 +22058,7 @@
           </p:nvSpPr>
           <p:spPr>
             <a:xfrm>
-              <a:off x="4730676" y="2538340"/>
+              <a:off x="4690189" y="2538340"/>
               <a:ext cx="62384" cy="62384"/>
             </a:xfrm>
             <a:prstGeom prst="ellipse">
@@ -22084,7 +22084,7 @@
           </p:nvSpPr>
           <p:spPr>
             <a:xfrm>
-              <a:off x="4884437" y="2442134"/>
+              <a:off x="4863542" y="2442134"/>
               <a:ext cx="62384" cy="62384"/>
             </a:xfrm>
             <a:prstGeom prst="ellipse">
@@ -22110,7 +22110,7 @@
           </p:nvSpPr>
           <p:spPr>
             <a:xfrm>
-              <a:off x="4701869" y="2611910"/>
+              <a:off x="4698970" y="2611910"/>
               <a:ext cx="62384" cy="62384"/>
             </a:xfrm>
             <a:prstGeom prst="ellipse">
@@ -22136,7 +22136,7 @@
           </p:nvSpPr>
           <p:spPr>
             <a:xfrm>
-              <a:off x="4894249" y="2811538"/>
+              <a:off x="4869158" y="2811538"/>
               <a:ext cx="62384" cy="62384"/>
             </a:xfrm>
             <a:prstGeom prst="ellipse">
@@ -22162,7 +22162,7 @@
           </p:nvSpPr>
           <p:spPr>
             <a:xfrm>
-              <a:off x="4735741" y="2492503"/>
+              <a:off x="4701516" y="2492503"/>
               <a:ext cx="62384" cy="62384"/>
             </a:xfrm>
             <a:prstGeom prst="ellipse">
@@ -22188,7 +22188,7 @@
           </p:nvSpPr>
           <p:spPr>
             <a:xfrm>
-              <a:off x="4892997" y="2345244"/>
+              <a:off x="4839416" y="2345244"/>
               <a:ext cx="62384" cy="62384"/>
             </a:xfrm>
             <a:prstGeom prst="ellipse">
@@ -22214,7 +22214,7 @@
           </p:nvSpPr>
           <p:spPr>
             <a:xfrm>
-              <a:off x="4680587" y="2713547"/>
+              <a:off x="4720294" y="2713547"/>
               <a:ext cx="62384" cy="62384"/>
             </a:xfrm>
             <a:prstGeom prst="ellipse">
@@ -22240,7 +22240,7 @@
           </p:nvSpPr>
           <p:spPr>
             <a:xfrm>
-              <a:off x="4856612" y="2496595"/>
+              <a:off x="4879681" y="2496595"/>
               <a:ext cx="62384" cy="62384"/>
             </a:xfrm>
             <a:prstGeom prst="ellipse">
@@ -22266,7 +22266,7 @@
           </p:nvSpPr>
           <p:spPr>
             <a:xfrm>
-              <a:off x="4731950" y="2751467"/>
+              <a:off x="4738147" y="2751467"/>
               <a:ext cx="62384" cy="62384"/>
             </a:xfrm>
             <a:prstGeom prst="ellipse">
@@ -22292,7 +22292,7 @@
           </p:nvSpPr>
           <p:spPr>
             <a:xfrm>
-              <a:off x="4848605" y="2879203"/>
+              <a:off x="4863107" y="2879203"/>
               <a:ext cx="62384" cy="62384"/>
             </a:xfrm>
             <a:prstGeom prst="ellipse">
@@ -22318,7 +22318,7 @@
           </p:nvSpPr>
           <p:spPr>
             <a:xfrm>
-              <a:off x="4746465" y="2750510"/>
+              <a:off x="4693712" y="2750510"/>
               <a:ext cx="62384" cy="62384"/>
             </a:xfrm>
             <a:prstGeom prst="ellipse">
@@ -22344,7 +22344,7 @@
           </p:nvSpPr>
           <p:spPr>
             <a:xfrm>
-              <a:off x="4841933" y="2443416"/>
+              <a:off x="4829913" y="2443416"/>
               <a:ext cx="62384" cy="62384"/>
             </a:xfrm>
             <a:prstGeom prst="ellipse">
@@ -22370,7 +22370,7 @@
           </p:nvSpPr>
           <p:spPr>
             <a:xfrm>
-              <a:off x="4702188" y="2646272"/>
+              <a:off x="4699764" y="2646272"/>
               <a:ext cx="62384" cy="62384"/>
             </a:xfrm>
             <a:prstGeom prst="ellipse">
@@ -22396,7 +22396,7 @@
           </p:nvSpPr>
           <p:spPr>
             <a:xfrm>
-              <a:off x="4891527" y="2741476"/>
+              <a:off x="4898127" y="2741476"/>
               <a:ext cx="62384" cy="62384"/>
             </a:xfrm>
             <a:prstGeom prst="ellipse">
@@ -22422,7 +22422,7 @@
           </p:nvSpPr>
           <p:spPr>
             <a:xfrm>
-              <a:off x="4746773" y="2318239"/>
+              <a:off x="4724145" y="2318239"/>
               <a:ext cx="62384" cy="62384"/>
             </a:xfrm>
             <a:prstGeom prst="ellipse">
@@ -22448,7 +22448,7 @@
           </p:nvSpPr>
           <p:spPr>
             <a:xfrm>
-              <a:off x="4829775" y="2419113"/>
+              <a:off x="4903098" y="2419113"/>
               <a:ext cx="62384" cy="62384"/>
             </a:xfrm>
             <a:prstGeom prst="ellipse">
@@ -22474,7 +22474,7 @@
           </p:nvSpPr>
           <p:spPr>
             <a:xfrm>
-              <a:off x="4735833" y="2469773"/>
+              <a:off x="4740696" y="2469773"/>
               <a:ext cx="62384" cy="62384"/>
             </a:xfrm>
             <a:prstGeom prst="ellipse">
@@ -22500,7 +22500,7 @@
           </p:nvSpPr>
           <p:spPr>
             <a:xfrm>
-              <a:off x="4869429" y="2608267"/>
+              <a:off x="4835892" y="2608267"/>
               <a:ext cx="62384" cy="62384"/>
             </a:xfrm>
             <a:prstGeom prst="ellipse">
@@ -22526,7 +22526,7 @@
           </p:nvSpPr>
           <p:spPr>
             <a:xfrm>
-              <a:off x="4752432" y="2625658"/>
+              <a:off x="4688921" y="2625658"/>
               <a:ext cx="62384" cy="62384"/>
             </a:xfrm>
             <a:prstGeom prst="ellipse">
@@ -22552,7 +22552,7 @@
           </p:nvSpPr>
           <p:spPr>
             <a:xfrm>
-              <a:off x="4853933" y="2564079"/>
+              <a:off x="4897573" y="2564079"/>
               <a:ext cx="62384" cy="62384"/>
             </a:xfrm>
             <a:prstGeom prst="ellipse">
@@ -22578,7 +22578,7 @@
           </p:nvSpPr>
           <p:spPr>
             <a:xfrm>
-              <a:off x="4716510" y="2609136"/>
+              <a:off x="4710151" y="2609136"/>
               <a:ext cx="62384" cy="62384"/>
             </a:xfrm>
             <a:prstGeom prst="ellipse">
@@ -22604,7 +22604,7 @@
           </p:nvSpPr>
           <p:spPr>
             <a:xfrm>
-              <a:off x="4896885" y="2653088"/>
+              <a:off x="4867232" y="2653088"/>
               <a:ext cx="62384" cy="62384"/>
             </a:xfrm>
             <a:prstGeom prst="ellipse">
@@ -22630,7 +22630,7 @@
           </p:nvSpPr>
           <p:spPr>
             <a:xfrm>
-              <a:off x="4746203" y="2024741"/>
+              <a:off x="4750087" y="2024741"/>
               <a:ext cx="62384" cy="62384"/>
             </a:xfrm>
             <a:prstGeom prst="ellipse">
@@ -22656,7 +22656,7 @@
           </p:nvSpPr>
           <p:spPr>
             <a:xfrm>
-              <a:off x="4847213" y="2193092"/>
+              <a:off x="4891301" y="2193092"/>
               <a:ext cx="62384" cy="62384"/>
             </a:xfrm>
             <a:prstGeom prst="ellipse">
@@ -22682,7 +22682,7 @@
           </p:nvSpPr>
           <p:spPr>
             <a:xfrm>
-              <a:off x="4691868" y="2100594"/>
+              <a:off x="4678626" y="2100594"/>
               <a:ext cx="62384" cy="62384"/>
             </a:xfrm>
             <a:prstGeom prst="ellipse">
@@ -22708,7 +22708,7 @@
           </p:nvSpPr>
           <p:spPr>
             <a:xfrm>
-              <a:off x="4848936" y="2405837"/>
+              <a:off x="4836350" y="2405837"/>
               <a:ext cx="62384" cy="62384"/>
             </a:xfrm>
             <a:prstGeom prst="ellipse">
@@ -22734,7 +22734,7 @@
           </p:nvSpPr>
           <p:spPr>
             <a:xfrm>
-              <a:off x="4744899" y="1788516"/>
+              <a:off x="4691667" y="1788516"/>
               <a:ext cx="62384" cy="62384"/>
             </a:xfrm>
             <a:prstGeom prst="ellipse">
@@ -22760,7 +22760,7 @@
           </p:nvSpPr>
           <p:spPr>
             <a:xfrm>
-              <a:off x="4887059" y="1913279"/>
+              <a:off x="4853084" y="1913279"/>
               <a:ext cx="62384" cy="62384"/>
             </a:xfrm>
             <a:prstGeom prst="ellipse">
@@ -22786,7 +22786,7 @@
           </p:nvSpPr>
           <p:spPr>
             <a:xfrm>
-              <a:off x="4730561" y="2388837"/>
+              <a:off x="4734097" y="2388837"/>
               <a:ext cx="62384" cy="62384"/>
             </a:xfrm>
             <a:prstGeom prst="ellipse">
@@ -22812,7 +22812,7 @@
           </p:nvSpPr>
           <p:spPr>
             <a:xfrm>
-              <a:off x="4861819" y="2434493"/>
+              <a:off x="4855427" y="2434493"/>
               <a:ext cx="62384" cy="62384"/>
             </a:xfrm>
             <a:prstGeom prst="ellipse">
@@ -22838,7 +22838,7 @@
           </p:nvSpPr>
           <p:spPr>
             <a:xfrm>
-              <a:off x="4748573" y="2195308"/>
+              <a:off x="4750125" y="2195308"/>
               <a:ext cx="62384" cy="62384"/>
             </a:xfrm>
             <a:prstGeom prst="ellipse">
@@ -22864,7 +22864,7 @@
           </p:nvSpPr>
           <p:spPr>
             <a:xfrm>
-              <a:off x="4865798" y="2268798"/>
+              <a:off x="4832085" y="2268798"/>
               <a:ext cx="62384" cy="62384"/>
             </a:xfrm>
             <a:prstGeom prst="ellipse">
@@ -22890,7 +22890,7 @@
           </p:nvSpPr>
           <p:spPr>
             <a:xfrm>
-              <a:off x="4705997" y="2432329"/>
+              <a:off x="4717989" y="2432329"/>
               <a:ext cx="62384" cy="62384"/>
             </a:xfrm>
             <a:prstGeom prst="ellipse">
@@ -22916,7 +22916,7 @@
           </p:nvSpPr>
           <p:spPr>
             <a:xfrm>
-              <a:off x="4865056" y="2612735"/>
+              <a:off x="4861614" y="2612735"/>
               <a:ext cx="62384" cy="62384"/>
             </a:xfrm>
             <a:prstGeom prst="ellipse">
@@ -22942,7 +22942,7 @@
           </p:nvSpPr>
           <p:spPr>
             <a:xfrm>
-              <a:off x="4687955" y="2918563"/>
+              <a:off x="4714399" y="2918563"/>
               <a:ext cx="62384" cy="62384"/>
             </a:xfrm>
             <a:prstGeom prst="ellipse">
@@ -22968,7 +22968,7 @@
           </p:nvSpPr>
           <p:spPr>
             <a:xfrm>
-              <a:off x="4883128" y="2955371"/>
+              <a:off x="4890921" y="2955371"/>
               <a:ext cx="62384" cy="62384"/>
             </a:xfrm>
             <a:prstGeom prst="ellipse">
@@ -22994,7 +22994,7 @@
           </p:nvSpPr>
           <p:spPr>
             <a:xfrm>
-              <a:off x="4712238" y="2611752"/>
+              <a:off x="4734651" y="2611752"/>
               <a:ext cx="62384" cy="62384"/>
             </a:xfrm>
             <a:prstGeom prst="ellipse">
@@ -23020,7 +23020,7 @@
           </p:nvSpPr>
           <p:spPr>
             <a:xfrm>
-              <a:off x="4902635" y="2522902"/>
+              <a:off x="4848477" y="2522902"/>
               <a:ext cx="62384" cy="62384"/>
             </a:xfrm>
             <a:prstGeom prst="ellipse">
@@ -23046,7 +23046,7 @@
           </p:nvSpPr>
           <p:spPr>
             <a:xfrm>
-              <a:off x="4744015" y="2041474"/>
+              <a:off x="4743580" y="2041474"/>
               <a:ext cx="62384" cy="62384"/>
             </a:xfrm>
             <a:prstGeom prst="ellipse">
@@ -23072,7 +23072,7 @@
           </p:nvSpPr>
           <p:spPr>
             <a:xfrm>
-              <a:off x="4835277" y="2291757"/>
+              <a:off x="4892793" y="2291757"/>
               <a:ext cx="62384" cy="62384"/>
             </a:xfrm>
             <a:prstGeom prst="ellipse">
@@ -23098,7 +23098,7 @@
           </p:nvSpPr>
           <p:spPr>
             <a:xfrm>
-              <a:off x="4705775" y="2529210"/>
+              <a:off x="4704761" y="2529210"/>
               <a:ext cx="62384" cy="62384"/>
             </a:xfrm>
             <a:prstGeom prst="ellipse">
@@ -23124,7 +23124,7 @@
           </p:nvSpPr>
           <p:spPr>
             <a:xfrm>
-              <a:off x="4851772" y="2572397"/>
+              <a:off x="4878046" y="2572397"/>
               <a:ext cx="62384" cy="62384"/>
             </a:xfrm>
             <a:prstGeom prst="ellipse">
@@ -23150,7 +23150,7 @@
           </p:nvSpPr>
           <p:spPr>
             <a:xfrm>
-              <a:off x="4751267" y="2392352"/>
+              <a:off x="4750200" y="2392352"/>
               <a:ext cx="62384" cy="62384"/>
             </a:xfrm>
             <a:prstGeom prst="ellipse">
@@ -23176,7 +23176,7 @@
           </p:nvSpPr>
           <p:spPr>
             <a:xfrm>
-              <a:off x="4830626" y="2403941"/>
+              <a:off x="4872980" y="2403941"/>
               <a:ext cx="62384" cy="62384"/>
             </a:xfrm>
             <a:prstGeom prst="ellipse">
@@ -23202,7 +23202,7 @@
           </p:nvSpPr>
           <p:spPr>
             <a:xfrm>
-              <a:off x="4700924" y="2158498"/>
+              <a:off x="4744122" y="2158498"/>
               <a:ext cx="62384" cy="62384"/>
             </a:xfrm>
             <a:prstGeom prst="ellipse">
@@ -23228,7 +23228,7 @@
           </p:nvSpPr>
           <p:spPr>
             <a:xfrm>
-              <a:off x="4843760" y="2190759"/>
+              <a:off x="4893768" y="2190759"/>
               <a:ext cx="62384" cy="62384"/>
             </a:xfrm>
             <a:prstGeom prst="ellipse">
@@ -23254,7 +23254,7 @@
           </p:nvSpPr>
           <p:spPr>
             <a:xfrm>
-              <a:off x="4742416" y="2254355"/>
+              <a:off x="4712208" y="2254355"/>
               <a:ext cx="62384" cy="62384"/>
             </a:xfrm>
             <a:prstGeom prst="ellipse">
@@ -23280,7 +23280,7 @@
           </p:nvSpPr>
           <p:spPr>
             <a:xfrm>
-              <a:off x="4894863" y="2567034"/>
+              <a:off x="4851074" y="2567034"/>
               <a:ext cx="62384" cy="62384"/>
             </a:xfrm>
             <a:prstGeom prst="ellipse">
@@ -23306,7 +23306,7 @@
           </p:nvSpPr>
           <p:spPr>
             <a:xfrm>
-              <a:off x="4681043" y="2484607"/>
+              <a:off x="4740341" y="2484607"/>
               <a:ext cx="62384" cy="62384"/>
             </a:xfrm>
             <a:prstGeom prst="ellipse">
@@ -23332,7 +23332,7 @@
           </p:nvSpPr>
           <p:spPr>
             <a:xfrm>
-              <a:off x="4839531" y="2735806"/>
+              <a:off x="4885409" y="2735806"/>
               <a:ext cx="62384" cy="62384"/>
             </a:xfrm>
             <a:prstGeom prst="ellipse">
@@ -23358,7 +23358,7 @@
           </p:nvSpPr>
           <p:spPr>
             <a:xfrm>
-              <a:off x="4741893" y="2413766"/>
+              <a:off x="4697388" y="2413766"/>
               <a:ext cx="62384" cy="62384"/>
             </a:xfrm>
             <a:prstGeom prst="ellipse">
@@ -23384,7 +23384,7 @@
           </p:nvSpPr>
           <p:spPr>
             <a:xfrm>
-              <a:off x="4862636" y="2134468"/>
+              <a:off x="4885649" y="2134468"/>
               <a:ext cx="62384" cy="62384"/>
             </a:xfrm>
             <a:prstGeom prst="ellipse">
@@ -23410,7 +23410,7 @@
           </p:nvSpPr>
           <p:spPr>
             <a:xfrm>
-              <a:off x="4739962" y="2660332"/>
+              <a:off x="4683346" y="2660332"/>
               <a:ext cx="62384" cy="62384"/>
             </a:xfrm>
             <a:prstGeom prst="ellipse">
@@ -23436,7 +23436,7 @@
           </p:nvSpPr>
           <p:spPr>
             <a:xfrm>
-              <a:off x="4902110" y="2309491"/>
+              <a:off x="4850730" y="2309491"/>
               <a:ext cx="62384" cy="62384"/>
             </a:xfrm>
             <a:prstGeom prst="ellipse">
@@ -23462,7 +23462,7 @@
           </p:nvSpPr>
           <p:spPr>
             <a:xfrm>
-              <a:off x="4738872" y="3002517"/>
+              <a:off x="4730988" y="3002517"/>
               <a:ext cx="62384" cy="62384"/>
             </a:xfrm>
             <a:prstGeom prst="ellipse">
@@ -23488,7 +23488,7 @@
           </p:nvSpPr>
           <p:spPr>
             <a:xfrm>
-              <a:off x="4879667" y="2471364"/>
+              <a:off x="4831887" y="2471364"/>
               <a:ext cx="62384" cy="62384"/>
             </a:xfrm>
             <a:prstGeom prst="ellipse">
@@ -23514,7 +23514,7 @@
           </p:nvSpPr>
           <p:spPr>
             <a:xfrm>
-              <a:off x="4702918" y="2279076"/>
+              <a:off x="4737334" y="2279076"/>
               <a:ext cx="62384" cy="62384"/>
             </a:xfrm>
             <a:prstGeom prst="ellipse">
@@ -23540,7 +23540,7 @@
           </p:nvSpPr>
           <p:spPr>
             <a:xfrm>
-              <a:off x="4883764" y="2663458"/>
+              <a:off x="4878748" y="2663458"/>
               <a:ext cx="62384" cy="62384"/>
             </a:xfrm>
             <a:prstGeom prst="ellipse">
@@ -23566,7 +23566,7 @@
           </p:nvSpPr>
           <p:spPr>
             <a:xfrm>
-              <a:off x="4751680" y="2408825"/>
+              <a:off x="4697517" y="2408825"/>
               <a:ext cx="62384" cy="62384"/>
             </a:xfrm>
             <a:prstGeom prst="ellipse">
@@ -23592,7 +23592,7 @@
           </p:nvSpPr>
           <p:spPr>
             <a:xfrm>
-              <a:off x="4852000" y="2529775"/>
+              <a:off x="4876048" y="2529775"/>
               <a:ext cx="62384" cy="62384"/>
             </a:xfrm>
             <a:prstGeom prst="ellipse">
@@ -23618,7 +23618,7 @@
           </p:nvSpPr>
           <p:spPr>
             <a:xfrm>
-              <a:off x="4680443" y="2290059"/>
+              <a:off x="4698302" y="2290059"/>
               <a:ext cx="62384" cy="62384"/>
             </a:xfrm>
             <a:prstGeom prst="ellipse">
@@ -23644,7 +23644,7 @@
           </p:nvSpPr>
           <p:spPr>
             <a:xfrm>
-              <a:off x="4865057" y="2407038"/>
+              <a:off x="4874320" y="2407038"/>
               <a:ext cx="62384" cy="62384"/>
             </a:xfrm>
             <a:prstGeom prst="ellipse">
@@ -23670,7 +23670,7 @@
           </p:nvSpPr>
           <p:spPr>
             <a:xfrm>
-              <a:off x="4704535" y="2713377"/>
+              <a:off x="4682449" y="2713377"/>
               <a:ext cx="62384" cy="62384"/>
             </a:xfrm>
             <a:prstGeom prst="ellipse">
@@ -23696,7 +23696,7 @@
           </p:nvSpPr>
           <p:spPr>
             <a:xfrm>
-              <a:off x="4875355" y="2650356"/>
+              <a:off x="4840060" y="2650356"/>
               <a:ext cx="62384" cy="62384"/>
             </a:xfrm>
             <a:prstGeom prst="ellipse">
@@ -23722,7 +23722,7 @@
           </p:nvSpPr>
           <p:spPr>
             <a:xfrm>
-              <a:off x="4732703" y="2673432"/>
+              <a:off x="4684048" y="2673432"/>
               <a:ext cx="62384" cy="62384"/>
             </a:xfrm>
             <a:prstGeom prst="ellipse">
@@ -23748,7 +23748,7 @@
           </p:nvSpPr>
           <p:spPr>
             <a:xfrm>
-              <a:off x="4889357" y="2660040"/>
+              <a:off x="4852994" y="2660040"/>
               <a:ext cx="62384" cy="62384"/>
             </a:xfrm>
             <a:prstGeom prst="ellipse">
@@ -23774,7 +23774,7 @@
           </p:nvSpPr>
           <p:spPr>
             <a:xfrm>
-              <a:off x="4684720" y="2538209"/>
+              <a:off x="4688357" y="2538209"/>
               <a:ext cx="62384" cy="62384"/>
             </a:xfrm>
             <a:prstGeom prst="ellipse">
@@ -23800,7 +23800,7 @@
           </p:nvSpPr>
           <p:spPr>
             <a:xfrm>
-              <a:off x="4861849" y="2673037"/>
+              <a:off x="4867737" y="2673037"/>
               <a:ext cx="62384" cy="62384"/>
             </a:xfrm>
             <a:prstGeom prst="ellipse">
@@ -23826,7 +23826,7 @@
           </p:nvSpPr>
           <p:spPr>
             <a:xfrm>
-              <a:off x="4689531" y="2616327"/>
+              <a:off x="4739666" y="2616327"/>
               <a:ext cx="62384" cy="62384"/>
             </a:xfrm>
             <a:prstGeom prst="ellipse">
@@ -23852,7 +23852,7 @@
           </p:nvSpPr>
           <p:spPr>
             <a:xfrm>
-              <a:off x="4852113" y="2767163"/>
+              <a:off x="4854036" y="2767163"/>
               <a:ext cx="62384" cy="62384"/>
             </a:xfrm>
             <a:prstGeom prst="ellipse">
@@ -23878,7 +23878,7 @@
           </p:nvSpPr>
           <p:spPr>
             <a:xfrm>
-              <a:off x="4689851" y="2600897"/>
+              <a:off x="4692075" y="2600897"/>
               <a:ext cx="62384" cy="62384"/>
             </a:xfrm>
             <a:prstGeom prst="ellipse">
@@ -23904,7 +23904,7 @@
           </p:nvSpPr>
           <p:spPr>
             <a:xfrm>
-              <a:off x="4890042" y="2398371"/>
+              <a:off x="4883334" y="2398371"/>
               <a:ext cx="62384" cy="62384"/>
             </a:xfrm>
             <a:prstGeom prst="ellipse">
@@ -23930,7 +23930,7 @@
           </p:nvSpPr>
           <p:spPr>
             <a:xfrm>
-              <a:off x="4702453" y="2158338"/>
+              <a:off x="4729452" y="2158338"/>
               <a:ext cx="62384" cy="62384"/>
             </a:xfrm>
             <a:prstGeom prst="ellipse">
@@ -23956,7 +23956,7 @@
           </p:nvSpPr>
           <p:spPr>
             <a:xfrm>
-              <a:off x="4854953" y="2530702"/>
+              <a:off x="4841395" y="2530702"/>
               <a:ext cx="62384" cy="62384"/>
             </a:xfrm>
             <a:prstGeom prst="ellipse">
@@ -23982,7 +23982,7 @@
           </p:nvSpPr>
           <p:spPr>
             <a:xfrm>
-              <a:off x="4750327" y="2616873"/>
+              <a:off x="4720537" y="2616873"/>
               <a:ext cx="62384" cy="62384"/>
             </a:xfrm>
             <a:prstGeom prst="ellipse">
@@ -24008,7 +24008,7 @@
           </p:nvSpPr>
           <p:spPr>
             <a:xfrm>
-              <a:off x="4864980" y="2903100"/>
+              <a:off x="4885302" y="2903100"/>
               <a:ext cx="62384" cy="62384"/>
             </a:xfrm>
             <a:prstGeom prst="ellipse">
@@ -24034,7 +24034,7 @@
           </p:nvSpPr>
           <p:spPr>
             <a:xfrm>
-              <a:off x="4731265" y="2524408"/>
+              <a:off x="4704303" y="2524408"/>
               <a:ext cx="62384" cy="62384"/>
             </a:xfrm>
             <a:prstGeom prst="ellipse">
@@ -24060,7 +24060,7 @@
           </p:nvSpPr>
           <p:spPr>
             <a:xfrm>
-              <a:off x="4895769" y="2376757"/>
+              <a:off x="4890993" y="2376757"/>
               <a:ext cx="62384" cy="62384"/>
             </a:xfrm>
             <a:prstGeom prst="ellipse">
@@ -24086,7 +24086,7 @@
           </p:nvSpPr>
           <p:spPr>
             <a:xfrm>
-              <a:off x="4752767" y="2478082"/>
+              <a:off x="4705342" y="2478082"/>
               <a:ext cx="62384" cy="62384"/>
             </a:xfrm>
             <a:prstGeom prst="ellipse">
@@ -24112,7 +24112,7 @@
           </p:nvSpPr>
           <p:spPr>
             <a:xfrm>
-              <a:off x="4845339" y="2919492"/>
+              <a:off x="4879645" y="2919492"/>
               <a:ext cx="62384" cy="62384"/>
             </a:xfrm>
             <a:prstGeom prst="ellipse">
@@ -24138,7 +24138,7 @@
           </p:nvSpPr>
           <p:spPr>
             <a:xfrm>
-              <a:off x="4706850" y="2687976"/>
+              <a:off x="4748721" y="2687976"/>
               <a:ext cx="62384" cy="62384"/>
             </a:xfrm>
             <a:prstGeom prst="ellipse">
@@ -24164,7 +24164,7 @@
           </p:nvSpPr>
           <p:spPr>
             <a:xfrm>
-              <a:off x="4893247" y="2328475"/>
+              <a:off x="4839940" y="2328475"/>
               <a:ext cx="62384" cy="62384"/>
             </a:xfrm>
             <a:prstGeom prst="ellipse">
@@ -24190,7 +24190,7 @@
           </p:nvSpPr>
           <p:spPr>
             <a:xfrm>
-              <a:off x="4750349" y="2165302"/>
+              <a:off x="4724807" y="2165302"/>
               <a:ext cx="62384" cy="62384"/>
             </a:xfrm>
             <a:prstGeom prst="ellipse">
@@ -24216,7 +24216,7 @@
           </p:nvSpPr>
           <p:spPr>
             <a:xfrm>
-              <a:off x="4841914" y="2343548"/>
+              <a:off x="4894454" y="2343548"/>
               <a:ext cx="62384" cy="62384"/>
             </a:xfrm>
             <a:prstGeom prst="ellipse">
@@ -24242,7 +24242,7 @@
           </p:nvSpPr>
           <p:spPr>
             <a:xfrm>
-              <a:off x="4693631" y="2646256"/>
+              <a:off x="4702851" y="2646256"/>
               <a:ext cx="62384" cy="62384"/>
             </a:xfrm>
             <a:prstGeom prst="ellipse">
@@ -24268,7 +24268,7 @@
           </p:nvSpPr>
           <p:spPr>
             <a:xfrm>
-              <a:off x="4829260" y="2690649"/>
+              <a:off x="4847159" y="2690649"/>
               <a:ext cx="62384" cy="62384"/>
             </a:xfrm>
             <a:prstGeom prst="ellipse">
@@ -24294,7 +24294,7 @@
           </p:nvSpPr>
           <p:spPr>
             <a:xfrm>
-              <a:off x="4725318" y="2493871"/>
+              <a:off x="4718353" y="2493871"/>
               <a:ext cx="62384" cy="62384"/>
             </a:xfrm>
             <a:prstGeom prst="ellipse">
@@ -24320,7 +24320,7 @@
           </p:nvSpPr>
           <p:spPr>
             <a:xfrm>
-              <a:off x="4886623" y="2704823"/>
+              <a:off x="4879765" y="2704823"/>
               <a:ext cx="62384" cy="62384"/>
             </a:xfrm>
             <a:prstGeom prst="ellipse">
@@ -24346,7 +24346,7 @@
           </p:nvSpPr>
           <p:spPr>
             <a:xfrm>
-              <a:off x="4697694" y="2653109"/>
+              <a:off x="4742965" y="2653109"/>
               <a:ext cx="62384" cy="62384"/>
             </a:xfrm>
             <a:prstGeom prst="ellipse">
@@ -24372,7 +24372,7 @@
           </p:nvSpPr>
           <p:spPr>
             <a:xfrm>
-              <a:off x="4854851" y="2399201"/>
+              <a:off x="4845385" y="2399201"/>
               <a:ext cx="62384" cy="62384"/>
             </a:xfrm>
             <a:prstGeom prst="ellipse">
@@ -24398,7 +24398,7 @@
           </p:nvSpPr>
           <p:spPr>
             <a:xfrm>
-              <a:off x="4680448" y="2506946"/>
+              <a:off x="4720487" y="2506946"/>
               <a:ext cx="62384" cy="62384"/>
             </a:xfrm>
             <a:prstGeom prst="ellipse">
@@ -24424,7 +24424,7 @@
           </p:nvSpPr>
           <p:spPr>
             <a:xfrm>
-              <a:off x="4835971" y="2343931"/>
+              <a:off x="4829627" y="2343931"/>
               <a:ext cx="62384" cy="62384"/>
             </a:xfrm>
             <a:prstGeom prst="ellipse">
@@ -24450,7 +24450,7 @@
           </p:nvSpPr>
           <p:spPr>
             <a:xfrm>
-              <a:off x="4735248" y="2653586"/>
+              <a:off x="4689490" y="2653586"/>
               <a:ext cx="62384" cy="62384"/>
             </a:xfrm>
             <a:prstGeom prst="ellipse">
@@ -24476,7 +24476,7 @@
           </p:nvSpPr>
           <p:spPr>
             <a:xfrm>
-              <a:off x="4857810" y="2487308"/>
+              <a:off x="4864696" y="2487308"/>
               <a:ext cx="62384" cy="62384"/>
             </a:xfrm>
             <a:prstGeom prst="ellipse">
@@ -24502,7 +24502,7 @@
           </p:nvSpPr>
           <p:spPr>
             <a:xfrm>
-              <a:off x="4727379" y="2249769"/>
+              <a:off x="4694899" y="2249769"/>
               <a:ext cx="62384" cy="62384"/>
             </a:xfrm>
             <a:prstGeom prst="ellipse">
@@ -24528,7 +24528,7 @@
           </p:nvSpPr>
           <p:spPr>
             <a:xfrm>
-              <a:off x="4894808" y="2326204"/>
+              <a:off x="4898961" y="2326204"/>
               <a:ext cx="62384" cy="62384"/>
             </a:xfrm>
             <a:prstGeom prst="ellipse">
@@ -24554,7 +24554,7 @@
           </p:nvSpPr>
           <p:spPr>
             <a:xfrm>
-              <a:off x="4717130" y="2424729"/>
+              <a:off x="4712294" y="2424729"/>
               <a:ext cx="62384" cy="62384"/>
             </a:xfrm>
             <a:prstGeom prst="ellipse">
@@ -24580,7 +24580,7 @@
           </p:nvSpPr>
           <p:spPr>
             <a:xfrm>
-              <a:off x="4835073" y="2748542"/>
+              <a:off x="4899027" y="2748542"/>
               <a:ext cx="62384" cy="62384"/>
             </a:xfrm>
             <a:prstGeom prst="ellipse">
@@ -24606,7 +24606,7 @@
           </p:nvSpPr>
           <p:spPr>
             <a:xfrm>
-              <a:off x="4716861" y="2600077"/>
+              <a:off x="4735546" y="2600077"/>
               <a:ext cx="62384" cy="62384"/>
             </a:xfrm>
             <a:prstGeom prst="ellipse">
@@ -24632,7 +24632,7 @@
           </p:nvSpPr>
           <p:spPr>
             <a:xfrm>
-              <a:off x="4830909" y="2312075"/>
+              <a:off x="4859955" y="2312075"/>
               <a:ext cx="62384" cy="62384"/>
             </a:xfrm>
             <a:prstGeom prst="ellipse">
@@ -24658,7 +24658,7 @@
           </p:nvSpPr>
           <p:spPr>
             <a:xfrm>
-              <a:off x="4733867" y="2114599"/>
+              <a:off x="4740540" y="2114599"/>
               <a:ext cx="62384" cy="62384"/>
             </a:xfrm>
             <a:prstGeom prst="ellipse">
@@ -24684,7 +24684,7 @@
           </p:nvSpPr>
           <p:spPr>
             <a:xfrm>
-              <a:off x="4864814" y="2268354"/>
+              <a:off x="4844449" y="2268354"/>
               <a:ext cx="62384" cy="62384"/>
             </a:xfrm>
             <a:prstGeom prst="ellipse">
@@ -24710,7 +24710,7 @@
           </p:nvSpPr>
           <p:spPr>
             <a:xfrm>
-              <a:off x="4715666" y="2349297"/>
+              <a:off x="4692493" y="2349297"/>
               <a:ext cx="62384" cy="62384"/>
             </a:xfrm>
             <a:prstGeom prst="ellipse">
@@ -24736,7 +24736,7 @@
           </p:nvSpPr>
           <p:spPr>
             <a:xfrm>
-              <a:off x="4887728" y="2477214"/>
+              <a:off x="4870087" y="2477214"/>
               <a:ext cx="62384" cy="62384"/>
             </a:xfrm>
             <a:prstGeom prst="ellipse">
@@ -24762,7 +24762,7 @@
           </p:nvSpPr>
           <p:spPr>
             <a:xfrm>
-              <a:off x="4680622" y="2484633"/>
+              <a:off x="4709697" y="2484633"/>
               <a:ext cx="62384" cy="62384"/>
             </a:xfrm>
             <a:prstGeom prst="ellipse">
@@ -24788,7 +24788,7 @@
           </p:nvSpPr>
           <p:spPr>
             <a:xfrm>
-              <a:off x="4869139" y="2608450"/>
+              <a:off x="4857086" y="2608450"/>
               <a:ext cx="62384" cy="62384"/>
             </a:xfrm>
             <a:prstGeom prst="ellipse">
@@ -24814,7 +24814,7 @@
           </p:nvSpPr>
           <p:spPr>
             <a:xfrm>
-              <a:off x="4705586" y="2992092"/>
+              <a:off x="4725014" y="2992092"/>
               <a:ext cx="62384" cy="62384"/>
             </a:xfrm>
             <a:prstGeom prst="ellipse">
@@ -24840,7 +24840,7 @@
           </p:nvSpPr>
           <p:spPr>
             <a:xfrm>
-              <a:off x="4876094" y="2993690"/>
+              <a:off x="4833288" y="2993690"/>
               <a:ext cx="62384" cy="62384"/>
             </a:xfrm>
             <a:prstGeom prst="ellipse">
@@ -24866,7 +24866,7 @@
           </p:nvSpPr>
           <p:spPr>
             <a:xfrm>
-              <a:off x="4679251" y="3523255"/>
+              <a:off x="4711860" y="3523255"/>
               <a:ext cx="62384" cy="62384"/>
             </a:xfrm>
             <a:prstGeom prst="ellipse">
@@ -24892,7 +24892,7 @@
           </p:nvSpPr>
           <p:spPr>
             <a:xfrm>
-              <a:off x="4876670" y="3269113"/>
+              <a:off x="4828755" y="3269113"/>
               <a:ext cx="62384" cy="62384"/>
             </a:xfrm>
             <a:prstGeom prst="ellipse">
@@ -24918,7 +24918,7 @@
           </p:nvSpPr>
           <p:spPr>
             <a:xfrm>
-              <a:off x="4752068" y="2248068"/>
+              <a:off x="4734722" y="2248068"/>
               <a:ext cx="62384" cy="62384"/>
             </a:xfrm>
             <a:prstGeom prst="ellipse">
@@ -24944,7 +24944,7 @@
           </p:nvSpPr>
           <p:spPr>
             <a:xfrm>
-              <a:off x="4875168" y="2460034"/>
+              <a:off x="4893286" y="2460034"/>
               <a:ext cx="62384" cy="62384"/>
             </a:xfrm>
             <a:prstGeom prst="ellipse">
@@ -24970,7 +24970,7 @@
           </p:nvSpPr>
           <p:spPr>
             <a:xfrm>
-              <a:off x="4744543" y="1978275"/>
+              <a:off x="4746680" y="1978275"/>
               <a:ext cx="62384" cy="62384"/>
             </a:xfrm>
             <a:prstGeom prst="ellipse">
@@ -24996,7 +24996,7 @@
           </p:nvSpPr>
           <p:spPr>
             <a:xfrm>
-              <a:off x="4891864" y="2274617"/>
+              <a:off x="4865932" y="2274617"/>
               <a:ext cx="62384" cy="62384"/>
             </a:xfrm>
             <a:prstGeom prst="ellipse">
@@ -25022,7 +25022,7 @@
           </p:nvSpPr>
           <p:spPr>
             <a:xfrm>
-              <a:off x="4711131" y="2832189"/>
+              <a:off x="4743039" y="2832189"/>
               <a:ext cx="62384" cy="62384"/>
             </a:xfrm>
             <a:prstGeom prst="ellipse">
@@ -25048,7 +25048,7 @@
           </p:nvSpPr>
           <p:spPr>
             <a:xfrm>
-              <a:off x="4848770" y="2493188"/>
+              <a:off x="4889835" y="2493188"/>
               <a:ext cx="62384" cy="62384"/>
             </a:xfrm>
             <a:prstGeom prst="ellipse">
@@ -25074,7 +25074,7 @@
           </p:nvSpPr>
           <p:spPr>
             <a:xfrm>
-              <a:off x="4742723" y="2613971"/>
+              <a:off x="4743475" y="2613971"/>
               <a:ext cx="62384" cy="62384"/>
             </a:xfrm>
             <a:prstGeom prst="ellipse">
@@ -25100,7 +25100,7 @@
           </p:nvSpPr>
           <p:spPr>
             <a:xfrm>
-              <a:off x="4839839" y="2386955"/>
+              <a:off x="4839901" y="2386955"/>
               <a:ext cx="62384" cy="62384"/>
             </a:xfrm>
             <a:prstGeom prst="ellipse">
@@ -25126,7 +25126,7 @@
           </p:nvSpPr>
           <p:spPr>
             <a:xfrm>
-              <a:off x="4691155" y="2397714"/>
+              <a:off x="4701999" y="2397714"/>
               <a:ext cx="62384" cy="62384"/>
             </a:xfrm>
             <a:prstGeom prst="ellipse">
@@ -25152,7 +25152,7 @@
           </p:nvSpPr>
           <p:spPr>
             <a:xfrm>
-              <a:off x="4897745" y="2373323"/>
+              <a:off x="4856345" y="2373323"/>
               <a:ext cx="62384" cy="62384"/>
             </a:xfrm>
             <a:prstGeom prst="ellipse">
@@ -25178,7 +25178,7 @@
           </p:nvSpPr>
           <p:spPr>
             <a:xfrm>
-              <a:off x="4716798" y="2589248"/>
+              <a:off x="4716350" y="2589248"/>
               <a:ext cx="62384" cy="62384"/>
             </a:xfrm>
             <a:prstGeom prst="ellipse">
@@ -25204,7 +25204,7 @@
           </p:nvSpPr>
           <p:spPr>
             <a:xfrm>
-              <a:off x="4873879" y="2469538"/>
+              <a:off x="4889725" y="2469538"/>
               <a:ext cx="62384" cy="62384"/>
             </a:xfrm>
             <a:prstGeom prst="ellipse">
@@ -25230,7 +25230,7 @@
           </p:nvSpPr>
           <p:spPr>
             <a:xfrm>
-              <a:off x="4686683" y="2397627"/>
+              <a:off x="4699530" y="2397627"/>
               <a:ext cx="62384" cy="62384"/>
             </a:xfrm>
             <a:prstGeom prst="ellipse">
@@ -25256,7 +25256,7 @@
           </p:nvSpPr>
           <p:spPr>
             <a:xfrm>
-              <a:off x="4852729" y="2463132"/>
+              <a:off x="4832096" y="2463132"/>
               <a:ext cx="62384" cy="62384"/>
             </a:xfrm>
             <a:prstGeom prst="ellipse">
@@ -25282,7 +25282,7 @@
           </p:nvSpPr>
           <p:spPr>
             <a:xfrm>
-              <a:off x="1629374" y="2274644"/>
+              <a:off x="1630482" y="2274644"/>
               <a:ext cx="0" cy="414778"/>
             </a:xfrm>
             <a:custGeom>
@@ -25322,7 +25322,7 @@
           </p:nvSpPr>
           <p:spPr>
             <a:xfrm>
-              <a:off x="1629374" y="3058364"/>
+              <a:off x="1630482" y="3058364"/>
               <a:ext cx="0" cy="532494"/>
             </a:xfrm>
             <a:custGeom>
@@ -25362,13 +25362,13 @@
           </p:nvSpPr>
           <p:spPr>
             <a:xfrm>
-              <a:off x="1554412" y="2689422"/>
-              <a:ext cx="149923" cy="368941"/>
+              <a:off x="1555540" y="2689422"/>
+              <a:ext cx="149884" cy="368941"/>
             </a:xfrm>
             <a:custGeom>
               <a:avLst/>
               <a:pathLst>
-                <a:path w="149923" h="368941">
+                <a:path w="149884" h="368941">
                   <a:moveTo>
                     <a:pt x="0" y="0"/>
                   </a:moveTo>
@@ -25376,10 +25376,10 @@
                     <a:pt x="0" y="368941"/>
                   </a:lnTo>
                   <a:lnTo>
-                    <a:pt x="149923" y="368941"/>
+                    <a:pt x="149884" y="368941"/>
                   </a:lnTo>
                   <a:lnTo>
-                    <a:pt x="149923" y="0"/>
+                    <a:pt x="149884" y="0"/>
                   </a:lnTo>
                   <a:close/>
                 </a:path>
@@ -25409,18 +25409,18 @@
           </p:nvSpPr>
           <p:spPr>
             <a:xfrm>
-              <a:off x="1554412" y="2901135"/>
-              <a:ext cx="149923" cy="0"/>
+              <a:off x="1555540" y="2901135"/>
+              <a:ext cx="149884" cy="0"/>
             </a:xfrm>
             <a:custGeom>
               <a:avLst/>
               <a:pathLst>
-                <a:path w="149923" h="0">
+                <a:path w="149884" h="0">
                   <a:moveTo>
                     <a:pt x="0" y="0"/>
                   </a:moveTo>
                   <a:lnTo>
-                    <a:pt x="149923" y="0"/>
+                    <a:pt x="149884" y="0"/>
                   </a:lnTo>
                 </a:path>
               </a:pathLst>
@@ -25449,7 +25449,7 @@
           </p:nvSpPr>
           <p:spPr>
             <a:xfrm>
-              <a:off x="2668565" y="2071910"/>
+              <a:off x="2669400" y="2071910"/>
               <a:ext cx="0" cy="393723"/>
             </a:xfrm>
             <a:custGeom>
@@ -25489,7 +25489,7 @@
           </p:nvSpPr>
           <p:spPr>
             <a:xfrm>
-              <a:off x="2668565" y="2846912"/>
+              <a:off x="2669400" y="2846912"/>
               <a:ext cx="0" cy="549470"/>
             </a:xfrm>
             <a:custGeom>
@@ -25529,13 +25529,13 @@
           </p:nvSpPr>
           <p:spPr>
             <a:xfrm>
-              <a:off x="2593604" y="2465634"/>
-              <a:ext cx="149923" cy="381278"/>
+              <a:off x="2594458" y="2465634"/>
+              <a:ext cx="149884" cy="381278"/>
             </a:xfrm>
             <a:custGeom>
               <a:avLst/>
               <a:pathLst>
-                <a:path w="149923" h="381278">
+                <a:path w="149884" h="381278">
                   <a:moveTo>
                     <a:pt x="0" y="0"/>
                   </a:moveTo>
@@ -25543,10 +25543,10 @@
                     <a:pt x="0" y="381278"/>
                   </a:lnTo>
                   <a:lnTo>
-                    <a:pt x="149923" y="381278"/>
+                    <a:pt x="149884" y="381278"/>
                   </a:lnTo>
                   <a:lnTo>
-                    <a:pt x="149923" y="0"/>
+                    <a:pt x="149884" y="0"/>
                   </a:lnTo>
                   <a:close/>
                 </a:path>
@@ -25576,18 +25576,18 @@
           </p:nvSpPr>
           <p:spPr>
             <a:xfrm>
-              <a:off x="2593604" y="2614885"/>
-              <a:ext cx="149923" cy="0"/>
+              <a:off x="2594458" y="2614885"/>
+              <a:ext cx="149884" cy="0"/>
             </a:xfrm>
             <a:custGeom>
               <a:avLst/>
               <a:pathLst>
-                <a:path w="149923" h="0">
+                <a:path w="149884" h="0">
                   <a:moveTo>
                     <a:pt x="0" y="0"/>
                   </a:moveTo>
                   <a:lnTo>
-                    <a:pt x="149923" y="0"/>
+                    <a:pt x="149884" y="0"/>
                   </a:lnTo>
                 </a:path>
               </a:pathLst>
@@ -25616,7 +25616,7 @@
           </p:nvSpPr>
           <p:spPr>
             <a:xfrm>
-              <a:off x="3707757" y="1691195"/>
+              <a:off x="3708318" y="1691195"/>
               <a:ext cx="0" cy="521172"/>
             </a:xfrm>
             <a:custGeom>
@@ -25656,7 +25656,7 @@
           </p:nvSpPr>
           <p:spPr>
             <a:xfrm>
-              <a:off x="3707757" y="2693413"/>
+              <a:off x="3708318" y="2693413"/>
               <a:ext cx="0" cy="717499"/>
             </a:xfrm>
             <a:custGeom>
@@ -25696,13 +25696,13 @@
           </p:nvSpPr>
           <p:spPr>
             <a:xfrm>
-              <a:off x="3632795" y="2212367"/>
-              <a:ext cx="149923" cy="481045"/>
+              <a:off x="3633376" y="2212367"/>
+              <a:ext cx="149884" cy="481045"/>
             </a:xfrm>
             <a:custGeom>
               <a:avLst/>
               <a:pathLst>
-                <a:path w="149923" h="481045">
+                <a:path w="149884" h="481045">
                   <a:moveTo>
                     <a:pt x="0" y="0"/>
                   </a:moveTo>
@@ -25710,10 +25710,10 @@
                     <a:pt x="0" y="481045"/>
                   </a:lnTo>
                   <a:lnTo>
-                    <a:pt x="149923" y="481045"/>
+                    <a:pt x="149884" y="481045"/>
                   </a:lnTo>
                   <a:lnTo>
-                    <a:pt x="149923" y="0"/>
+                    <a:pt x="149884" y="0"/>
                   </a:lnTo>
                   <a:close/>
                 </a:path>
@@ -25743,18 +25743,18 @@
           </p:nvSpPr>
           <p:spPr>
             <a:xfrm>
-              <a:off x="3632795" y="2442977"/>
-              <a:ext cx="149923" cy="0"/>
+              <a:off x="3633376" y="2442977"/>
+              <a:ext cx="149884" cy="0"/>
             </a:xfrm>
             <a:custGeom>
               <a:avLst/>
               <a:pathLst>
-                <a:path w="149923" h="0">
+                <a:path w="149884" h="0">
                   <a:moveTo>
                     <a:pt x="0" y="0"/>
                   </a:moveTo>
                   <a:lnTo>
-                    <a:pt x="149923" y="0"/>
+                    <a:pt x="149884" y="0"/>
                   </a:lnTo>
                 </a:path>
               </a:pathLst>
@@ -25783,7 +25783,7 @@
           </p:nvSpPr>
           <p:spPr>
             <a:xfrm>
-              <a:off x="4746948" y="1806354"/>
+              <a:off x="4747236" y="1806354"/>
               <a:ext cx="0" cy="525297"/>
             </a:xfrm>
             <a:custGeom>
@@ -25823,7 +25823,7 @@
           </p:nvSpPr>
           <p:spPr>
             <a:xfrm>
-              <a:off x="4746948" y="2704625"/>
+              <a:off x="4747236" y="2704625"/>
               <a:ext cx="0" cy="511652"/>
             </a:xfrm>
             <a:custGeom>
@@ -25863,13 +25863,13 @@
           </p:nvSpPr>
           <p:spPr>
             <a:xfrm>
-              <a:off x="4671987" y="2331652"/>
-              <a:ext cx="149923" cy="372972"/>
+              <a:off x="4672294" y="2331652"/>
+              <a:ext cx="149884" cy="372972"/>
             </a:xfrm>
             <a:custGeom>
               <a:avLst/>
               <a:pathLst>
-                <a:path w="149923" h="372972">
+                <a:path w="149884" h="372972">
                   <a:moveTo>
                     <a:pt x="0" y="0"/>
                   </a:moveTo>
@@ -25877,10 +25877,10 @@
                     <a:pt x="0" y="372972"/>
                   </a:lnTo>
                   <a:lnTo>
-                    <a:pt x="149923" y="372972"/>
+                    <a:pt x="149884" y="372972"/>
                   </a:lnTo>
                   <a:lnTo>
-                    <a:pt x="149923" y="0"/>
+                    <a:pt x="149884" y="0"/>
                   </a:lnTo>
                   <a:close/>
                 </a:path>
@@ -25910,18 +25910,18 @@
           </p:nvSpPr>
           <p:spPr>
             <a:xfrm>
-              <a:off x="4671987" y="2538138"/>
-              <a:ext cx="149923" cy="0"/>
+              <a:off x="4672294" y="2538138"/>
+              <a:ext cx="149884" cy="0"/>
             </a:xfrm>
             <a:custGeom>
               <a:avLst/>
               <a:pathLst>
-                <a:path w="149923" h="0">
+                <a:path w="149884" h="0">
                   <a:moveTo>
                     <a:pt x="0" y="0"/>
                   </a:moveTo>
                   <a:lnTo>
-                    <a:pt x="149923" y="0"/>
+                    <a:pt x="149884" y="0"/>
                   </a:lnTo>
                 </a:path>
               </a:pathLst>
@@ -25950,7 +25950,7 @@
           </p:nvSpPr>
           <p:spPr>
             <a:xfrm>
-              <a:off x="1779297" y="2302643"/>
+              <a:off x="1780366" y="2302643"/>
               <a:ext cx="0" cy="446396"/>
             </a:xfrm>
             <a:custGeom>
@@ -25990,7 +25990,7 @@
           </p:nvSpPr>
           <p:spPr>
             <a:xfrm>
-              <a:off x="1779297" y="3053383"/>
+              <a:off x="1780366" y="3053383"/>
               <a:ext cx="0" cy="267004"/>
             </a:xfrm>
             <a:custGeom>
@@ -26030,13 +26030,13 @@
           </p:nvSpPr>
           <p:spPr>
             <a:xfrm>
-              <a:off x="1704336" y="2749039"/>
-              <a:ext cx="149923" cy="304344"/>
+              <a:off x="1705424" y="2749039"/>
+              <a:ext cx="149884" cy="304344"/>
             </a:xfrm>
             <a:custGeom>
               <a:avLst/>
               <a:pathLst>
-                <a:path w="149923" h="304344">
+                <a:path w="149884" h="304344">
                   <a:moveTo>
                     <a:pt x="0" y="0"/>
                   </a:moveTo>
@@ -26044,10 +26044,10 @@
                     <a:pt x="0" y="304344"/>
                   </a:lnTo>
                   <a:lnTo>
-                    <a:pt x="149923" y="304344"/>
+                    <a:pt x="149884" y="304344"/>
                   </a:lnTo>
                   <a:lnTo>
-                    <a:pt x="149923" y="0"/>
+                    <a:pt x="149884" y="0"/>
                   </a:lnTo>
                   <a:close/>
                 </a:path>
@@ -26077,18 +26077,18 @@
           </p:nvSpPr>
           <p:spPr>
             <a:xfrm>
-              <a:off x="1704336" y="2935141"/>
-              <a:ext cx="149923" cy="0"/>
+              <a:off x="1705424" y="2935141"/>
+              <a:ext cx="149884" cy="0"/>
             </a:xfrm>
             <a:custGeom>
               <a:avLst/>
               <a:pathLst>
-                <a:path w="149923" h="0">
+                <a:path w="149884" h="0">
                   <a:moveTo>
                     <a:pt x="0" y="0"/>
                   </a:moveTo>
                   <a:lnTo>
-                    <a:pt x="149923" y="0"/>
+                    <a:pt x="149884" y="0"/>
                   </a:lnTo>
                 </a:path>
               </a:pathLst>
@@ -26117,7 +26117,7 @@
           </p:nvSpPr>
           <p:spPr>
             <a:xfrm>
-              <a:off x="2818489" y="2030749"/>
+              <a:off x="2819284" y="2030749"/>
               <a:ext cx="0" cy="502222"/>
             </a:xfrm>
             <a:custGeom>
@@ -26157,7 +26157,7 @@
           </p:nvSpPr>
           <p:spPr>
             <a:xfrm>
-              <a:off x="2818489" y="2911224"/>
+              <a:off x="2819284" y="2911224"/>
               <a:ext cx="0" cy="467677"/>
             </a:xfrm>
             <a:custGeom>
@@ -26197,13 +26197,13 @@
           </p:nvSpPr>
           <p:spPr>
             <a:xfrm>
-              <a:off x="2743527" y="2532971"/>
-              <a:ext cx="149923" cy="378253"/>
+              <a:off x="2744342" y="2532971"/>
+              <a:ext cx="149884" cy="378253"/>
             </a:xfrm>
             <a:custGeom>
               <a:avLst/>
               <a:pathLst>
-                <a:path w="149923" h="378253">
+                <a:path w="149884" h="378253">
                   <a:moveTo>
                     <a:pt x="0" y="0"/>
                   </a:moveTo>
@@ -26211,10 +26211,10 @@
                     <a:pt x="0" y="378253"/>
                   </a:lnTo>
                   <a:lnTo>
-                    <a:pt x="149923" y="378253"/>
+                    <a:pt x="149884" y="378253"/>
                   </a:lnTo>
                   <a:lnTo>
-                    <a:pt x="149923" y="0"/>
+                    <a:pt x="149884" y="0"/>
                   </a:lnTo>
                   <a:close/>
                 </a:path>
@@ -26244,18 +26244,18 @@
           </p:nvSpPr>
           <p:spPr>
             <a:xfrm>
-              <a:off x="2743527" y="2706548"/>
-              <a:ext cx="149923" cy="0"/>
+              <a:off x="2744342" y="2706548"/>
+              <a:ext cx="149884" cy="0"/>
             </a:xfrm>
             <a:custGeom>
               <a:avLst/>
               <a:pathLst>
-                <a:path w="149923" h="0">
+                <a:path w="149884" h="0">
                   <a:moveTo>
                     <a:pt x="0" y="0"/>
                   </a:moveTo>
                   <a:lnTo>
-                    <a:pt x="149923" y="0"/>
+                    <a:pt x="149884" y="0"/>
                   </a:lnTo>
                 </a:path>
               </a:pathLst>
@@ -26284,7 +26284,7 @@
           </p:nvSpPr>
           <p:spPr>
             <a:xfrm>
-              <a:off x="3857680" y="2046605"/>
+              <a:off x="3858202" y="2046605"/>
               <a:ext cx="0" cy="381852"/>
             </a:xfrm>
             <a:custGeom>
@@ -26324,7 +26324,7 @@
           </p:nvSpPr>
           <p:spPr>
             <a:xfrm>
-              <a:off x="3857680" y="2834290"/>
+              <a:off x="3858202" y="2834290"/>
               <a:ext cx="0" cy="431796"/>
             </a:xfrm>
             <a:custGeom>
@@ -26364,13 +26364,13 @@
           </p:nvSpPr>
           <p:spPr>
             <a:xfrm>
-              <a:off x="3782719" y="2428458"/>
-              <a:ext cx="149923" cy="405832"/>
+              <a:off x="3783260" y="2428458"/>
+              <a:ext cx="149884" cy="405832"/>
             </a:xfrm>
             <a:custGeom>
               <a:avLst/>
               <a:pathLst>
-                <a:path w="149923" h="405832">
+                <a:path w="149884" h="405832">
                   <a:moveTo>
                     <a:pt x="0" y="0"/>
                   </a:moveTo>
@@ -26378,10 +26378,10 @@
                     <a:pt x="0" y="405832"/>
                   </a:lnTo>
                   <a:lnTo>
-                    <a:pt x="149923" y="405832"/>
+                    <a:pt x="149884" y="405832"/>
                   </a:lnTo>
                   <a:lnTo>
-                    <a:pt x="149923" y="0"/>
+                    <a:pt x="149884" y="0"/>
                   </a:lnTo>
                   <a:close/>
                 </a:path>
@@ -26411,18 +26411,18 @@
           </p:nvSpPr>
           <p:spPr>
             <a:xfrm>
-              <a:off x="3782719" y="2554405"/>
-              <a:ext cx="149923" cy="0"/>
+              <a:off x="3783260" y="2554405"/>
+              <a:ext cx="149884" cy="0"/>
             </a:xfrm>
             <a:custGeom>
               <a:avLst/>
               <a:pathLst>
-                <a:path w="149923" h="0">
+                <a:path w="149884" h="0">
                   <a:moveTo>
                     <a:pt x="0" y="0"/>
                   </a:moveTo>
                   <a:lnTo>
-                    <a:pt x="149923" y="0"/>
+                    <a:pt x="149884" y="0"/>
                   </a:lnTo>
                 </a:path>
               </a:pathLst>
@@ -26451,7 +26451,7 @@
           </p:nvSpPr>
           <p:spPr>
             <a:xfrm>
-              <a:off x="4896872" y="2098530"/>
+              <a:off x="4897121" y="2098530"/>
               <a:ext cx="0" cy="305986"/>
             </a:xfrm>
             <a:custGeom>
@@ -26491,7 +26491,7 @@
           </p:nvSpPr>
           <p:spPr>
             <a:xfrm>
-              <a:off x="4896872" y="2704230"/>
+              <a:off x="4897121" y="2704230"/>
               <a:ext cx="0" cy="423337"/>
             </a:xfrm>
             <a:custGeom>
@@ -26531,13 +26531,13 @@
           </p:nvSpPr>
           <p:spPr>
             <a:xfrm>
-              <a:off x="4821910" y="2404516"/>
-              <a:ext cx="149923" cy="299713"/>
+              <a:off x="4822179" y="2404516"/>
+              <a:ext cx="149884" cy="299713"/>
             </a:xfrm>
             <a:custGeom>
               <a:avLst/>
               <a:pathLst>
-                <a:path w="149923" h="299713">
+                <a:path w="149884" h="299713">
                   <a:moveTo>
                     <a:pt x="0" y="0"/>
                   </a:moveTo>
@@ -26545,10 +26545,10 @@
                     <a:pt x="0" y="299713"/>
                   </a:lnTo>
                   <a:lnTo>
-                    <a:pt x="149923" y="299713"/>
+                    <a:pt x="149884" y="299713"/>
                   </a:lnTo>
                   <a:lnTo>
-                    <a:pt x="149923" y="0"/>
+                    <a:pt x="149884" y="0"/>
                   </a:lnTo>
                   <a:close/>
                 </a:path>
@@ -26578,18 +26578,18 @@
           </p:nvSpPr>
           <p:spPr>
             <a:xfrm>
-              <a:off x="4821910" y="2528582"/>
-              <a:ext cx="149923" cy="0"/>
+              <a:off x="4822179" y="2528582"/>
+              <a:ext cx="149884" cy="0"/>
             </a:xfrm>
             <a:custGeom>
               <a:avLst/>
               <a:pathLst>
-                <a:path w="149923" h="0">
+                <a:path w="149884" h="0">
                   <a:moveTo>
                     <a:pt x="0" y="0"/>
                   </a:moveTo>
                   <a:lnTo>
-                    <a:pt x="149923" y="0"/>
+                    <a:pt x="149884" y="0"/>
                   </a:lnTo>
                 </a:path>
               </a:pathLst>
@@ -26618,39 +26618,39 @@
           </p:nvSpPr>
           <p:spPr>
             <a:xfrm>
-              <a:off x="1704336" y="2314556"/>
-              <a:ext cx="3148396" cy="585786"/>
+              <a:off x="1705424" y="2314556"/>
+              <a:ext cx="3147568" cy="585786"/>
             </a:xfrm>
             <a:custGeom>
               <a:avLst/>
               <a:pathLst>
-                <a:path w="3148396" h="585786">
+                <a:path w="3147568" h="585786">
                   <a:moveTo>
                     <a:pt x="0" y="292622"/>
                   </a:moveTo>
                   <a:lnTo>
-                    <a:pt x="779602" y="264540"/>
+                    <a:pt x="779397" y="264540"/>
                   </a:lnTo>
                   <a:lnTo>
-                    <a:pt x="1499236" y="221351"/>
+                    <a:pt x="1498842" y="221351"/>
                   </a:lnTo>
                   <a:lnTo>
-                    <a:pt x="2398778" y="116377"/>
+                    <a:pt x="2398147" y="116377"/>
                   </a:lnTo>
                   <a:lnTo>
-                    <a:pt x="3148396" y="0"/>
+                    <a:pt x="3147568" y="0"/>
                   </a:lnTo>
                   <a:lnTo>
-                    <a:pt x="3148396" y="262592"/>
+                    <a:pt x="3147568" y="262592"/>
                   </a:lnTo>
                   <a:lnTo>
-                    <a:pt x="2398778" y="292838"/>
+                    <a:pt x="2398147" y="292838"/>
                   </a:lnTo>
                   <a:lnTo>
-                    <a:pt x="1499236" y="363811"/>
+                    <a:pt x="1498842" y="363811"/>
                   </a:lnTo>
                   <a:lnTo>
-                    <a:pt x="779602" y="461380"/>
+                    <a:pt x="779397" y="461380"/>
                   </a:lnTo>
                   <a:lnTo>
                     <a:pt x="0" y="585786"/>
@@ -26679,27 +26679,27 @@
           </p:nvSpPr>
           <p:spPr>
             <a:xfrm>
-              <a:off x="1704336" y="2314556"/>
-              <a:ext cx="3148396" cy="292622"/>
+              <a:off x="1705424" y="2314556"/>
+              <a:ext cx="3147568" cy="292622"/>
             </a:xfrm>
             <a:custGeom>
               <a:avLst/>
               <a:pathLst>
-                <a:path w="3148396" h="292622">
+                <a:path w="3147568" h="292622">
                   <a:moveTo>
                     <a:pt x="0" y="292622"/>
                   </a:moveTo>
                   <a:lnTo>
-                    <a:pt x="779602" y="264540"/>
+                    <a:pt x="779397" y="264540"/>
                   </a:lnTo>
                   <a:lnTo>
-                    <a:pt x="1499236" y="221351"/>
+                    <a:pt x="1498842" y="221351"/>
                   </a:lnTo>
                   <a:lnTo>
-                    <a:pt x="2398778" y="116377"/>
+                    <a:pt x="2398147" y="116377"/>
                   </a:lnTo>
                   <a:lnTo>
-                    <a:pt x="3148396" y="0"/>
+                    <a:pt x="3147568" y="0"/>
                   </a:lnTo>
                 </a:path>
               </a:pathLst>
@@ -26719,24 +26719,24 @@
           </p:nvSpPr>
           <p:spPr>
             <a:xfrm>
-              <a:off x="1704336" y="2577148"/>
-              <a:ext cx="3148396" cy="323194"/>
+              <a:off x="1705424" y="2577148"/>
+              <a:ext cx="3147568" cy="323194"/>
             </a:xfrm>
             <a:custGeom>
               <a:avLst/>
               <a:pathLst>
-                <a:path w="3148396" h="323194">
+                <a:path w="3147568" h="323194">
                   <a:moveTo>
-                    <a:pt x="3148396" y="0"/>
+                    <a:pt x="3147568" y="0"/>
                   </a:moveTo>
                   <a:lnTo>
-                    <a:pt x="2398778" y="30245"/>
+                    <a:pt x="2398147" y="30245"/>
                   </a:lnTo>
                   <a:lnTo>
-                    <a:pt x="1499236" y="101219"/>
+                    <a:pt x="1498842" y="101219"/>
                   </a:lnTo>
                   <a:lnTo>
-                    <a:pt x="779602" y="198788"/>
+                    <a:pt x="779397" y="198788"/>
                   </a:lnTo>
                   <a:lnTo>
                     <a:pt x="0" y="323194"/>
@@ -26759,39 +26759,39 @@
           </p:nvSpPr>
           <p:spPr>
             <a:xfrm>
-              <a:off x="1704336" y="2436875"/>
-              <a:ext cx="3148396" cy="530996"/>
+              <a:off x="1705424" y="2436875"/>
+              <a:ext cx="3147568" cy="530996"/>
             </a:xfrm>
             <a:custGeom>
               <a:avLst/>
               <a:pathLst>
-                <a:path w="3148396" h="530996">
+                <a:path w="3147568" h="530996">
                   <a:moveTo>
                     <a:pt x="0" y="284825"/>
                   </a:moveTo>
                   <a:lnTo>
-                    <a:pt x="779602" y="251361"/>
+                    <a:pt x="779397" y="251361"/>
                   </a:lnTo>
                   <a:lnTo>
-                    <a:pt x="1499236" y="206085"/>
+                    <a:pt x="1498842" y="206085"/>
                   </a:lnTo>
                   <a:lnTo>
-                    <a:pt x="2398778" y="106928"/>
+                    <a:pt x="2398147" y="106928"/>
                   </a:lnTo>
                   <a:lnTo>
-                    <a:pt x="3148396" y="0"/>
+                    <a:pt x="3147568" y="0"/>
                   </a:lnTo>
                   <a:lnTo>
-                    <a:pt x="3148396" y="219712"/>
+                    <a:pt x="3147568" y="219712"/>
                   </a:lnTo>
                   <a:lnTo>
-                    <a:pt x="2398778" y="254714"/>
+                    <a:pt x="2398147" y="254714"/>
                   </a:lnTo>
                   <a:lnTo>
-                    <a:pt x="1499236" y="325875"/>
+                    <a:pt x="1498842" y="325875"/>
                   </a:lnTo>
                   <a:lnTo>
-                    <a:pt x="779602" y="416852"/>
+                    <a:pt x="779397" y="416852"/>
                   </a:lnTo>
                   <a:lnTo>
                     <a:pt x="0" y="530996"/>
@@ -26820,27 +26820,27 @@
           </p:nvSpPr>
           <p:spPr>
             <a:xfrm>
-              <a:off x="1704336" y="2436875"/>
-              <a:ext cx="3148396" cy="284825"/>
+              <a:off x="1705424" y="2436875"/>
+              <a:ext cx="3147568" cy="284825"/>
             </a:xfrm>
             <a:custGeom>
               <a:avLst/>
               <a:pathLst>
-                <a:path w="3148396" h="284825">
+                <a:path w="3147568" h="284825">
                   <a:moveTo>
                     <a:pt x="0" y="284825"/>
                   </a:moveTo>
                   <a:lnTo>
-                    <a:pt x="779602" y="251361"/>
+                    <a:pt x="779397" y="251361"/>
                   </a:lnTo>
                   <a:lnTo>
-                    <a:pt x="1499236" y="206085"/>
+                    <a:pt x="1498842" y="206085"/>
                   </a:lnTo>
                   <a:lnTo>
-                    <a:pt x="2398778" y="106928"/>
+                    <a:pt x="2398147" y="106928"/>
                   </a:lnTo>
                   <a:lnTo>
-                    <a:pt x="3148396" y="0"/>
+                    <a:pt x="3147568" y="0"/>
                   </a:lnTo>
                 </a:path>
               </a:pathLst>
@@ -26860,24 +26860,24 @@
           </p:nvSpPr>
           <p:spPr>
             <a:xfrm>
-              <a:off x="1704336" y="2656588"/>
-              <a:ext cx="3148396" cy="311283"/>
+              <a:off x="1705424" y="2656588"/>
+              <a:ext cx="3147568" cy="311283"/>
             </a:xfrm>
             <a:custGeom>
               <a:avLst/>
               <a:pathLst>
-                <a:path w="3148396" h="311283">
+                <a:path w="3147568" h="311283">
                   <a:moveTo>
-                    <a:pt x="3148396" y="0"/>
+                    <a:pt x="3147568" y="0"/>
                   </a:moveTo>
                   <a:lnTo>
-                    <a:pt x="2398778" y="35002"/>
+                    <a:pt x="2398147" y="35002"/>
                   </a:lnTo>
                   <a:lnTo>
-                    <a:pt x="1499236" y="106162"/>
+                    <a:pt x="1498842" y="106162"/>
                   </a:lnTo>
                   <a:lnTo>
-                    <a:pt x="779602" y="197139"/>
+                    <a:pt x="779397" y="197139"/>
                   </a:lnTo>
                   <a:lnTo>
                     <a:pt x="0" y="311283"/>
@@ -26900,27 +26900,27 @@
           </p:nvSpPr>
           <p:spPr>
             <a:xfrm>
-              <a:off x="1704336" y="2445852"/>
-              <a:ext cx="3148396" cy="307908"/>
+              <a:off x="1705424" y="2445852"/>
+              <a:ext cx="3147568" cy="307908"/>
             </a:xfrm>
             <a:custGeom>
               <a:avLst/>
               <a:pathLst>
-                <a:path w="3148396" h="307908">
+                <a:path w="3147568" h="307908">
                   <a:moveTo>
                     <a:pt x="0" y="307908"/>
                   </a:moveTo>
                   <a:lnTo>
-                    <a:pt x="779602" y="231664"/>
+                    <a:pt x="779397" y="231664"/>
                   </a:lnTo>
                   <a:lnTo>
-                    <a:pt x="1499236" y="161285"/>
+                    <a:pt x="1498842" y="161285"/>
                   </a:lnTo>
                   <a:lnTo>
-                    <a:pt x="2398778" y="73311"/>
+                    <a:pt x="2398147" y="73311"/>
                   </a:lnTo>
                   <a:lnTo>
-                    <a:pt x="3148396" y="0"/>
+                    <a:pt x="3147568" y="0"/>
                   </a:lnTo>
                 </a:path>
               </a:pathLst>
@@ -26949,27 +26949,27 @@
           </p:nvSpPr>
           <p:spPr>
             <a:xfrm>
-              <a:off x="1704336" y="2546731"/>
-              <a:ext cx="3148396" cy="298054"/>
+              <a:off x="1705424" y="2546731"/>
+              <a:ext cx="3147568" cy="298054"/>
             </a:xfrm>
             <a:custGeom>
               <a:avLst/>
               <a:pathLst>
-                <a:path w="3148396" h="298054">
+                <a:path w="3147568" h="298054">
                   <a:moveTo>
                     <a:pt x="0" y="298054"/>
                   </a:moveTo>
                   <a:lnTo>
-                    <a:pt x="779602" y="224250"/>
+                    <a:pt x="779397" y="224250"/>
                   </a:lnTo>
                   <a:lnTo>
-                    <a:pt x="1499236" y="156123"/>
+                    <a:pt x="1498842" y="156123"/>
                   </a:lnTo>
                   <a:lnTo>
-                    <a:pt x="2398778" y="70965"/>
+                    <a:pt x="2398147" y="70965"/>
                   </a:lnTo>
                   <a:lnTo>
-                    <a:pt x="3148396" y="0"/>
+                    <a:pt x="3147568" y="0"/>
                   </a:lnTo>
                 </a:path>
               </a:pathLst>
@@ -26998,7 +26998,7 @@
           </p:nvSpPr>
           <p:spPr>
             <a:xfrm>
-              <a:off x="1704336" y="1047951"/>
+              <a:off x="1705424" y="1047951"/>
               <a:ext cx="825794" cy="91165"/>
             </a:xfrm>
             <a:prstGeom prst="rect">
@@ -27044,7 +27044,7 @@
           </p:nvSpPr>
           <p:spPr>
             <a:xfrm>
-              <a:off x="2530130" y="1048042"/>
+              <a:off x="2531218" y="1048042"/>
               <a:ext cx="84673" cy="91074"/>
             </a:xfrm>
             <a:prstGeom prst="rect">
@@ -27090,7 +27090,7 @@
           </p:nvSpPr>
           <p:spPr>
             <a:xfrm>
-              <a:off x="2628808" y="1048042"/>
+              <a:off x="2629896" y="1048042"/>
               <a:ext cx="28254" cy="91074"/>
             </a:xfrm>
             <a:prstGeom prst="rect">
@@ -27136,7 +27136,7 @@
           </p:nvSpPr>
           <p:spPr>
             <a:xfrm>
-              <a:off x="2670724" y="1048042"/>
+              <a:off x="2671812" y="1048042"/>
               <a:ext cx="70591" cy="91074"/>
             </a:xfrm>
             <a:prstGeom prst="rect">
@@ -27182,7 +27182,7 @@
           </p:nvSpPr>
           <p:spPr>
             <a:xfrm>
-              <a:off x="2751561" y="1048042"/>
+              <a:off x="2752650" y="1048042"/>
               <a:ext cx="70591" cy="91074"/>
             </a:xfrm>
             <a:prstGeom prst="rect">
@@ -27228,7 +27228,7 @@
           </p:nvSpPr>
           <p:spPr>
             <a:xfrm>
-              <a:off x="2832358" y="1048042"/>
+              <a:off x="2833446" y="1048042"/>
               <a:ext cx="70591" cy="91074"/>
             </a:xfrm>
             <a:prstGeom prst="rect">
@@ -27274,7 +27274,7 @@
           </p:nvSpPr>
           <p:spPr>
             <a:xfrm>
-              <a:off x="2913140" y="1047951"/>
+              <a:off x="2914229" y="1047951"/>
               <a:ext cx="462412" cy="91165"/>
             </a:xfrm>
             <a:prstGeom prst="rect">
@@ -27320,7 +27320,7 @@
           </p:nvSpPr>
           <p:spPr>
             <a:xfrm>
-              <a:off x="3375553" y="1047951"/>
+              <a:off x="3376641" y="1047951"/>
               <a:ext cx="70591" cy="91165"/>
             </a:xfrm>
             <a:prstGeom prst="rect">
@@ -27366,7 +27366,7 @@
           </p:nvSpPr>
           <p:spPr>
             <a:xfrm>
-              <a:off x="3446144" y="1048042"/>
+              <a:off x="3447232" y="1048042"/>
               <a:ext cx="70591" cy="91074"/>
             </a:xfrm>
             <a:prstGeom prst="rect">
@@ -27412,7 +27412,7 @@
           </p:nvSpPr>
           <p:spPr>
             <a:xfrm>
-              <a:off x="3526941" y="1047951"/>
+              <a:off x="3528029" y="1047951"/>
               <a:ext cx="462412" cy="91165"/>
             </a:xfrm>
             <a:prstGeom prst="rect">
@@ -27458,7 +27458,7 @@
           </p:nvSpPr>
           <p:spPr>
             <a:xfrm>
-              <a:off x="1704336" y="1224134"/>
+              <a:off x="1705424" y="1224134"/>
               <a:ext cx="811712" cy="91165"/>
             </a:xfrm>
             <a:prstGeom prst="rect">
@@ -27504,7 +27504,7 @@
           </p:nvSpPr>
           <p:spPr>
             <a:xfrm>
-              <a:off x="2516049" y="1224226"/>
+              <a:off x="2517137" y="1224226"/>
               <a:ext cx="84673" cy="91074"/>
             </a:xfrm>
             <a:prstGeom prst="rect">
@@ -27550,7 +27550,7 @@
           </p:nvSpPr>
           <p:spPr>
             <a:xfrm>
-              <a:off x="2614726" y="1224226"/>
+              <a:off x="2615814" y="1224226"/>
               <a:ext cx="28254" cy="91074"/>
             </a:xfrm>
             <a:prstGeom prst="rect">
@@ -27596,7 +27596,7 @@
           </p:nvSpPr>
           <p:spPr>
             <a:xfrm>
-              <a:off x="2656642" y="1224226"/>
+              <a:off x="2657730" y="1224226"/>
               <a:ext cx="70591" cy="91074"/>
             </a:xfrm>
             <a:prstGeom prst="rect">
@@ -27642,7 +27642,7 @@
           </p:nvSpPr>
           <p:spPr>
             <a:xfrm>
-              <a:off x="2737480" y="1224226"/>
+              <a:off x="2738568" y="1224226"/>
               <a:ext cx="70591" cy="91074"/>
             </a:xfrm>
             <a:prstGeom prst="rect">
@@ -27688,7 +27688,7 @@
           </p:nvSpPr>
           <p:spPr>
             <a:xfrm>
-              <a:off x="2818276" y="1224226"/>
+              <a:off x="2819364" y="1224226"/>
               <a:ext cx="70591" cy="91074"/>
             </a:xfrm>
             <a:prstGeom prst="rect">
@@ -27734,7 +27734,7 @@
           </p:nvSpPr>
           <p:spPr>
             <a:xfrm>
-              <a:off x="2899059" y="1224134"/>
+              <a:off x="2900147" y="1224134"/>
               <a:ext cx="462412" cy="91165"/>
             </a:xfrm>
             <a:prstGeom prst="rect">
@@ -27780,7 +27780,7 @@
           </p:nvSpPr>
           <p:spPr>
             <a:xfrm>
-              <a:off x="3361471" y="1224134"/>
+              <a:off x="3362559" y="1224134"/>
               <a:ext cx="70591" cy="91165"/>
             </a:xfrm>
             <a:prstGeom prst="rect">
@@ -27826,7 +27826,7 @@
           </p:nvSpPr>
           <p:spPr>
             <a:xfrm>
-              <a:off x="3432062" y="1224226"/>
+              <a:off x="3433151" y="1224226"/>
               <a:ext cx="70591" cy="91074"/>
             </a:xfrm>
             <a:prstGeom prst="rect">
@@ -27872,7 +27872,7 @@
           </p:nvSpPr>
           <p:spPr>
             <a:xfrm>
-              <a:off x="3512859" y="1224134"/>
+              <a:off x="3513947" y="1224134"/>
               <a:ext cx="462412" cy="91165"/>
             </a:xfrm>
             <a:prstGeom prst="rect">
@@ -27918,7 +27918,7 @@
           </p:nvSpPr>
           <p:spPr>
             <a:xfrm>
-              <a:off x="1637310" y="1507292"/>
+              <a:off x="1638398" y="1507292"/>
               <a:ext cx="134051" cy="91165"/>
             </a:xfrm>
             <a:prstGeom prst="rect">
@@ -27964,7 +27964,7 @@
           </p:nvSpPr>
           <p:spPr>
             <a:xfrm>
-              <a:off x="2669324" y="1454476"/>
+              <a:off x="2670139" y="1454476"/>
               <a:ext cx="148407" cy="91165"/>
             </a:xfrm>
             <a:prstGeom prst="rect">
@@ -28010,7 +28010,7 @@
           </p:nvSpPr>
           <p:spPr>
             <a:xfrm>
-              <a:off x="3708515" y="1544910"/>
+              <a:off x="3709057" y="1544910"/>
               <a:ext cx="148407" cy="91165"/>
             </a:xfrm>
             <a:prstGeom prst="rect">
@@ -28056,7 +28056,7 @@
           </p:nvSpPr>
           <p:spPr>
             <a:xfrm>
-              <a:off x="4797176" y="1488902"/>
+              <a:off x="4797444" y="1488902"/>
               <a:ext cx="49469" cy="91165"/>
             </a:xfrm>
             <a:prstGeom prst="rect">
@@ -28719,7 +28719,7 @@
           </p:nvSpPr>
           <p:spPr>
             <a:xfrm>
-              <a:off x="1704336" y="3842873"/>
+              <a:off x="1705424" y="3842873"/>
               <a:ext cx="0" cy="31631"/>
             </a:xfrm>
             <a:custGeom>
@@ -28759,7 +28759,7 @@
           </p:nvSpPr>
           <p:spPr>
             <a:xfrm>
-              <a:off x="2743527" y="3842873"/>
+              <a:off x="2744342" y="3842873"/>
               <a:ext cx="0" cy="31631"/>
             </a:xfrm>
             <a:custGeom>
@@ -28799,7 +28799,7 @@
           </p:nvSpPr>
           <p:spPr>
             <a:xfrm>
-              <a:off x="3782719" y="3842873"/>
+              <a:off x="3783260" y="3842873"/>
               <a:ext cx="0" cy="31631"/>
             </a:xfrm>
             <a:custGeom>
@@ -28839,7 +28839,7 @@
           </p:nvSpPr>
           <p:spPr>
             <a:xfrm>
-              <a:off x="4821910" y="3842873"/>
+              <a:off x="4822179" y="3842873"/>
               <a:ext cx="0" cy="31631"/>
             </a:xfrm>
             <a:custGeom>
@@ -28879,7 +28879,7 @@
           </p:nvSpPr>
           <p:spPr>
             <a:xfrm>
-              <a:off x="1672560" y="3899809"/>
+              <a:off x="1673648" y="3899809"/>
               <a:ext cx="63550" cy="82021"/>
             </a:xfrm>
             <a:prstGeom prst="rect">
@@ -28925,7 +28925,7 @@
           </p:nvSpPr>
           <p:spPr>
             <a:xfrm>
-              <a:off x="2711752" y="3899809"/>
+              <a:off x="2712567" y="3899809"/>
               <a:ext cx="63550" cy="82021"/>
             </a:xfrm>
             <a:prstGeom prst="rect">
@@ -28971,7 +28971,7 @@
           </p:nvSpPr>
           <p:spPr>
             <a:xfrm>
-              <a:off x="3750943" y="3899809"/>
+              <a:off x="3751485" y="3899809"/>
               <a:ext cx="63550" cy="82021"/>
             </a:xfrm>
             <a:prstGeom prst="rect">
@@ -29017,7 +29017,7 @@
           </p:nvSpPr>
           <p:spPr>
             <a:xfrm>
-              <a:off x="4790135" y="3899809"/>
+              <a:off x="4790403" y="3899809"/>
               <a:ext cx="63550" cy="82021"/>
             </a:xfrm>
             <a:prstGeom prst="rect">

--- a/figures/Figure_3.pptx
+++ b/figures/Figure_3.pptx
@@ -2350,7 +2350,7 @@
           </p:nvSpPr>
           <p:spPr>
             <a:xfrm>
-              <a:off x="1563247" y="1803832"/>
+              <a:off x="1625896" y="1803832"/>
               <a:ext cx="62384" cy="62384"/>
             </a:xfrm>
             <a:prstGeom prst="ellipse">
@@ -2376,7 +2376,7 @@
           </p:nvSpPr>
           <p:spPr>
             <a:xfrm>
-              <a:off x="1744414" y="2770530"/>
+              <a:off x="1765707" y="2770530"/>
               <a:ext cx="62384" cy="62384"/>
             </a:xfrm>
             <a:prstGeom prst="ellipse">
@@ -2402,7 +2402,7 @@
           </p:nvSpPr>
           <p:spPr>
             <a:xfrm>
-              <a:off x="1590809" y="2922825"/>
+              <a:off x="1598878" y="2922825"/>
               <a:ext cx="62384" cy="62384"/>
             </a:xfrm>
             <a:prstGeom prst="ellipse">
@@ -2428,7 +2428,7 @@
           </p:nvSpPr>
           <p:spPr>
             <a:xfrm>
-              <a:off x="1738057" y="2734822"/>
+              <a:off x="1771687" y="2734822"/>
               <a:ext cx="62384" cy="62384"/>
             </a:xfrm>
             <a:prstGeom prst="ellipse">
@@ -2454,7 +2454,7 @@
           </p:nvSpPr>
           <p:spPr>
             <a:xfrm>
-              <a:off x="1603294" y="2330481"/>
+              <a:off x="1573566" y="2330481"/>
               <a:ext cx="62384" cy="62384"/>
             </a:xfrm>
             <a:prstGeom prst="ellipse">
@@ -2480,7 +2480,7 @@
           </p:nvSpPr>
           <p:spPr>
             <a:xfrm>
-              <a:off x="1733207" y="2818272"/>
+              <a:off x="1723014" y="2818272"/>
               <a:ext cx="62384" cy="62384"/>
             </a:xfrm>
             <a:prstGeom prst="ellipse">
@@ -2506,7 +2506,7 @@
           </p:nvSpPr>
           <p:spPr>
             <a:xfrm>
-              <a:off x="1634608" y="3089269"/>
+              <a:off x="1610471" y="3089269"/>
               <a:ext cx="62384" cy="62384"/>
             </a:xfrm>
             <a:prstGeom prst="ellipse">
@@ -2532,7 +2532,7 @@
           </p:nvSpPr>
           <p:spPr>
             <a:xfrm>
-              <a:off x="1780018" y="2990456"/>
+              <a:off x="1733960" y="2990456"/>
               <a:ext cx="62384" cy="62384"/>
             </a:xfrm>
             <a:prstGeom prst="ellipse">
@@ -2558,7 +2558,7 @@
           </p:nvSpPr>
           <p:spPr>
             <a:xfrm>
-              <a:off x="1615265" y="2898173"/>
+              <a:off x="1608681" y="2898173"/>
               <a:ext cx="62384" cy="62384"/>
             </a:xfrm>
             <a:prstGeom prst="ellipse">
@@ -2584,7 +2584,7 @@
           </p:nvSpPr>
           <p:spPr>
             <a:xfrm>
-              <a:off x="1727864" y="2971875"/>
+              <a:off x="1767836" y="2971875"/>
               <a:ext cx="62384" cy="62384"/>
             </a:xfrm>
             <a:prstGeom prst="ellipse">
@@ -2610,7 +2610,7 @@
           </p:nvSpPr>
           <p:spPr>
             <a:xfrm>
-              <a:off x="1563243" y="3240021"/>
+              <a:off x="1608144" y="3240021"/>
               <a:ext cx="62384" cy="62384"/>
             </a:xfrm>
             <a:prstGeom prst="ellipse">
@@ -2636,7 +2636,7 @@
           </p:nvSpPr>
           <p:spPr>
             <a:xfrm>
-              <a:off x="1745877" y="3236709"/>
+              <a:off x="1711524" y="3236709"/>
               <a:ext cx="62384" cy="62384"/>
             </a:xfrm>
             <a:prstGeom prst="ellipse">
@@ -2662,7 +2662,7 @@
           </p:nvSpPr>
           <p:spPr>
             <a:xfrm>
-              <a:off x="1608060" y="2981013"/>
+              <a:off x="1606546" y="2981013"/>
               <a:ext cx="62384" cy="62384"/>
             </a:xfrm>
             <a:prstGeom prst="ellipse">
@@ -2688,7 +2688,7 @@
           </p:nvSpPr>
           <p:spPr>
             <a:xfrm>
-              <a:off x="1756400" y="3036913"/>
+              <a:off x="1713722" y="3036913"/>
               <a:ext cx="62384" cy="62384"/>
             </a:xfrm>
             <a:prstGeom prst="ellipse">
@@ -2714,7 +2714,7 @@
           </p:nvSpPr>
           <p:spPr>
             <a:xfrm>
-              <a:off x="1576001" y="3054889"/>
+              <a:off x="1583425" y="3054889"/>
               <a:ext cx="62384" cy="62384"/>
             </a:xfrm>
             <a:prstGeom prst="ellipse">
@@ -2740,7 +2740,7 @@
           </p:nvSpPr>
           <p:spPr>
             <a:xfrm>
-              <a:off x="1785910" y="3156403"/>
+              <a:off x="1736432" y="3156403"/>
               <a:ext cx="62384" cy="62384"/>
             </a:xfrm>
             <a:prstGeom prst="ellipse">
@@ -2766,7 +2766,7 @@
           </p:nvSpPr>
           <p:spPr>
             <a:xfrm>
-              <a:off x="1615205" y="3002923"/>
+              <a:off x="1579865" y="3002923"/>
               <a:ext cx="62384" cy="62384"/>
             </a:xfrm>
             <a:prstGeom prst="ellipse">
@@ -2792,7 +2792,7 @@
           </p:nvSpPr>
           <p:spPr>
             <a:xfrm>
-              <a:off x="1726710" y="2884502"/>
+              <a:off x="1722533" y="2884502"/>
               <a:ext cx="62384" cy="62384"/>
             </a:xfrm>
             <a:prstGeom prst="ellipse">
@@ -2818,7 +2818,7 @@
           </p:nvSpPr>
           <p:spPr>
             <a:xfrm>
-              <a:off x="1626146" y="2439628"/>
+              <a:off x="1631945" y="2439628"/>
               <a:ext cx="62384" cy="62384"/>
             </a:xfrm>
             <a:prstGeom prst="ellipse">
@@ -2844,7 +2844,7 @@
           </p:nvSpPr>
           <p:spPr>
             <a:xfrm>
-              <a:off x="1724919" y="2450538"/>
+              <a:off x="1744988" y="2450538"/>
               <a:ext cx="62384" cy="62384"/>
             </a:xfrm>
             <a:prstGeom prst="ellipse">
@@ -2870,7 +2870,7 @@
           </p:nvSpPr>
           <p:spPr>
             <a:xfrm>
-              <a:off x="1601247" y="2993232"/>
+              <a:off x="1592464" y="2993232"/>
               <a:ext cx="62384" cy="62384"/>
             </a:xfrm>
             <a:prstGeom prst="ellipse">
@@ -2896,7 +2896,7 @@
           </p:nvSpPr>
           <p:spPr>
             <a:xfrm>
-              <a:off x="1779525" y="2973263"/>
+              <a:off x="1765869" y="2973263"/>
               <a:ext cx="62384" cy="62384"/>
             </a:xfrm>
             <a:prstGeom prst="ellipse">
@@ -2922,7 +2922,7 @@
           </p:nvSpPr>
           <p:spPr>
             <a:xfrm>
-              <a:off x="1612719" y="2822604"/>
+              <a:off x="1634911" y="2822604"/>
               <a:ext cx="62384" cy="62384"/>
             </a:xfrm>
             <a:prstGeom prst="ellipse">
@@ -2948,7 +2948,7 @@
           </p:nvSpPr>
           <p:spPr>
             <a:xfrm>
-              <a:off x="1742191" y="2969127"/>
+              <a:off x="1716971" y="2969127"/>
               <a:ext cx="62384" cy="62384"/>
             </a:xfrm>
             <a:prstGeom prst="ellipse">
@@ -2974,7 +2974,7 @@
           </p:nvSpPr>
           <p:spPr>
             <a:xfrm>
-              <a:off x="1578466" y="2710412"/>
+              <a:off x="1632058" y="2710412"/>
               <a:ext cx="62384" cy="62384"/>
             </a:xfrm>
             <a:prstGeom prst="ellipse">
@@ -3000,7 +3000,7 @@
           </p:nvSpPr>
           <p:spPr>
             <a:xfrm>
-              <a:off x="1755130" y="3122471"/>
+              <a:off x="1727791" y="3122471"/>
               <a:ext cx="62384" cy="62384"/>
             </a:xfrm>
             <a:prstGeom prst="ellipse">
@@ -3026,7 +3026,7 @@
           </p:nvSpPr>
           <p:spPr>
             <a:xfrm>
-              <a:off x="1597215" y="3052876"/>
+              <a:off x="1609133" y="3052876"/>
               <a:ext cx="62384" cy="62384"/>
             </a:xfrm>
             <a:prstGeom prst="ellipse">
@@ -3052,7 +3052,7 @@
           </p:nvSpPr>
           <p:spPr>
             <a:xfrm>
-              <a:off x="1740761" y="2924956"/>
+              <a:off x="1718371" y="2924956"/>
               <a:ext cx="62384" cy="62384"/>
             </a:xfrm>
             <a:prstGeom prst="ellipse">
@@ -3078,7 +3078,7 @@
           </p:nvSpPr>
           <p:spPr>
             <a:xfrm>
-              <a:off x="1572371" y="2666643"/>
+              <a:off x="1629538" y="2666643"/>
               <a:ext cx="62384" cy="62384"/>
             </a:xfrm>
             <a:prstGeom prst="ellipse">
@@ -3104,7 +3104,7 @@
           </p:nvSpPr>
           <p:spPr>
             <a:xfrm>
-              <a:off x="1754206" y="3245462"/>
+              <a:off x="1742171" y="3245462"/>
               <a:ext cx="62384" cy="62384"/>
             </a:xfrm>
             <a:prstGeom prst="ellipse">
@@ -3130,7 +3130,7 @@
           </p:nvSpPr>
           <p:spPr>
             <a:xfrm>
-              <a:off x="1565508" y="2876305"/>
+              <a:off x="1572778" y="2876305"/>
               <a:ext cx="62384" cy="62384"/>
             </a:xfrm>
             <a:prstGeom prst="ellipse">
@@ -3156,7 +3156,7 @@
           </p:nvSpPr>
           <p:spPr>
             <a:xfrm>
-              <a:off x="1727222" y="2880808"/>
+              <a:off x="1752724" y="2880808"/>
               <a:ext cx="62384" cy="62384"/>
             </a:xfrm>
             <a:prstGeom prst="ellipse">
@@ -3182,7 +3182,7 @@
           </p:nvSpPr>
           <p:spPr>
             <a:xfrm>
-              <a:off x="1586090" y="3063576"/>
+              <a:off x="1588354" y="3063576"/>
               <a:ext cx="62384" cy="62384"/>
             </a:xfrm>
             <a:prstGeom prst="ellipse">
@@ -3208,7 +3208,7 @@
           </p:nvSpPr>
           <p:spPr>
             <a:xfrm>
-              <a:off x="1714591" y="2999345"/>
+              <a:off x="1770992" y="2999345"/>
               <a:ext cx="62384" cy="62384"/>
             </a:xfrm>
             <a:prstGeom prst="ellipse">
@@ -3234,7 +3234,7 @@
           </p:nvSpPr>
           <p:spPr>
             <a:xfrm>
-              <a:off x="1599034" y="2916882"/>
+              <a:off x="1568925" y="2916882"/>
               <a:ext cx="62384" cy="62384"/>
             </a:xfrm>
             <a:prstGeom prst="ellipse">
@@ -3260,7 +3260,7 @@
           </p:nvSpPr>
           <p:spPr>
             <a:xfrm>
-              <a:off x="1772025" y="3004099"/>
+              <a:off x="1719125" y="3004099"/>
               <a:ext cx="62384" cy="62384"/>
             </a:xfrm>
             <a:prstGeom prst="ellipse">
@@ -3286,7 +3286,7 @@
           </p:nvSpPr>
           <p:spPr>
             <a:xfrm>
-              <a:off x="1588158" y="3027595"/>
+              <a:off x="1610044" y="3027595"/>
               <a:ext cx="62384" cy="62384"/>
             </a:xfrm>
             <a:prstGeom prst="ellipse">
@@ -3312,7 +3312,7 @@
           </p:nvSpPr>
           <p:spPr>
             <a:xfrm>
-              <a:off x="1737304" y="3058005"/>
+              <a:off x="1774159" y="3058005"/>
               <a:ext cx="62384" cy="62384"/>
             </a:xfrm>
             <a:prstGeom prst="ellipse">
@@ -3338,7 +3338,7 @@
           </p:nvSpPr>
           <p:spPr>
             <a:xfrm>
-              <a:off x="1573269" y="3329839"/>
+              <a:off x="1617972" y="3329839"/>
               <a:ext cx="62384" cy="62384"/>
             </a:xfrm>
             <a:prstGeom prst="ellipse">
@@ -3364,7 +3364,7 @@
           </p:nvSpPr>
           <p:spPr>
             <a:xfrm>
-              <a:off x="1721712" y="3159469"/>
+              <a:off x="1724439" y="3159469"/>
               <a:ext cx="62384" cy="62384"/>
             </a:xfrm>
             <a:prstGeom prst="ellipse">
@@ -3390,7 +3390,7 @@
           </p:nvSpPr>
           <p:spPr>
             <a:xfrm>
-              <a:off x="1572432" y="2723279"/>
+              <a:off x="1623548" y="2723279"/>
               <a:ext cx="62384" cy="62384"/>
             </a:xfrm>
             <a:prstGeom prst="ellipse">
@@ -3416,7 +3416,7 @@
           </p:nvSpPr>
           <p:spPr>
             <a:xfrm>
-              <a:off x="1777363" y="2857951"/>
+              <a:off x="1749185" y="2857951"/>
               <a:ext cx="62384" cy="62384"/>
             </a:xfrm>
             <a:prstGeom prst="ellipse">
@@ -3442,7 +3442,7 @@
           </p:nvSpPr>
           <p:spPr>
             <a:xfrm>
-              <a:off x="1593075" y="2960081"/>
+              <a:off x="1569313" y="2960081"/>
               <a:ext cx="62384" cy="62384"/>
             </a:xfrm>
             <a:prstGeom prst="ellipse">
@@ -3468,7 +3468,7 @@
           </p:nvSpPr>
           <p:spPr>
             <a:xfrm>
-              <a:off x="1729048" y="2804627"/>
+              <a:off x="1774810" y="2804627"/>
               <a:ext cx="62384" cy="62384"/>
             </a:xfrm>
             <a:prstGeom prst="ellipse">
@@ -3494,7 +3494,7 @@
           </p:nvSpPr>
           <p:spPr>
             <a:xfrm>
-              <a:off x="1601709" y="3025202"/>
+              <a:off x="1567446" y="3025202"/>
               <a:ext cx="62384" cy="62384"/>
             </a:xfrm>
             <a:prstGeom prst="ellipse">
@@ -3520,7 +3520,7 @@
           </p:nvSpPr>
           <p:spPr>
             <a:xfrm>
-              <a:off x="1725239" y="3048931"/>
+              <a:off x="1762760" y="3048931"/>
               <a:ext cx="62384" cy="62384"/>
             </a:xfrm>
             <a:prstGeom prst="ellipse">
@@ -3546,7 +3546,7 @@
           </p:nvSpPr>
           <p:spPr>
             <a:xfrm>
-              <a:off x="1597307" y="2684204"/>
+              <a:off x="1606645" y="2684204"/>
               <a:ext cx="62384" cy="62384"/>
             </a:xfrm>
             <a:prstGeom prst="ellipse">
@@ -3572,7 +3572,7 @@
           </p:nvSpPr>
           <p:spPr>
             <a:xfrm>
-              <a:off x="1775642" y="3289196"/>
+              <a:off x="1741462" y="3289196"/>
               <a:ext cx="62384" cy="62384"/>
             </a:xfrm>
             <a:prstGeom prst="ellipse">
@@ -3598,7 +3598,7 @@
           </p:nvSpPr>
           <p:spPr>
             <a:xfrm>
-              <a:off x="1596116" y="2944655"/>
+              <a:off x="1566916" y="2944655"/>
               <a:ext cx="62384" cy="62384"/>
             </a:xfrm>
             <a:prstGeom prst="ellipse">
@@ -3624,7 +3624,7 @@
           </p:nvSpPr>
           <p:spPr>
             <a:xfrm>
-              <a:off x="1713175" y="2888765"/>
+              <a:off x="1761236" y="2888765"/>
               <a:ext cx="62384" cy="62384"/>
             </a:xfrm>
             <a:prstGeom prst="ellipse">
@@ -3650,7 +3650,7 @@
           </p:nvSpPr>
           <p:spPr>
             <a:xfrm>
-              <a:off x="1607197" y="3278753"/>
+              <a:off x="1576175" y="3278753"/>
               <a:ext cx="62384" cy="62384"/>
             </a:xfrm>
             <a:prstGeom prst="ellipse">
@@ -3676,7 +3676,7 @@
           </p:nvSpPr>
           <p:spPr>
             <a:xfrm>
-              <a:off x="1712180" y="2993327"/>
+              <a:off x="1751071" y="2993327"/>
               <a:ext cx="62384" cy="62384"/>
             </a:xfrm>
             <a:prstGeom prst="ellipse">
@@ -3702,7 +3702,7 @@
           </p:nvSpPr>
           <p:spPr>
             <a:xfrm>
-              <a:off x="1596512" y="2913294"/>
+              <a:off x="1563133" y="2913294"/>
               <a:ext cx="62384" cy="62384"/>
             </a:xfrm>
             <a:prstGeom prst="ellipse">
@@ -3728,7 +3728,7 @@
           </p:nvSpPr>
           <p:spPr>
             <a:xfrm>
-              <a:off x="1757545" y="2822482"/>
+              <a:off x="1783408" y="2822482"/>
               <a:ext cx="62384" cy="62384"/>
             </a:xfrm>
             <a:prstGeom prst="ellipse">
@@ -3754,7 +3754,7 @@
           </p:nvSpPr>
           <p:spPr>
             <a:xfrm>
-              <a:off x="1588176" y="2578234"/>
+              <a:off x="1582902" y="2578234"/>
               <a:ext cx="62384" cy="62384"/>
             </a:xfrm>
             <a:prstGeom prst="ellipse">
@@ -3780,7 +3780,7 @@
           </p:nvSpPr>
           <p:spPr>
             <a:xfrm>
-              <a:off x="1759806" y="2535771"/>
+              <a:off x="1731710" y="2535771"/>
               <a:ext cx="62384" cy="62384"/>
             </a:xfrm>
             <a:prstGeom prst="ellipse">
@@ -3806,7 +3806,7 @@
           </p:nvSpPr>
           <p:spPr>
             <a:xfrm>
-              <a:off x="1582745" y="3668974"/>
+              <a:off x="1563213" y="3668974"/>
               <a:ext cx="62384" cy="62384"/>
             </a:xfrm>
             <a:prstGeom prst="ellipse">
@@ -3832,7 +3832,7 @@
           </p:nvSpPr>
           <p:spPr>
             <a:xfrm>
-              <a:off x="1740335" y="3042969"/>
+              <a:off x="1740165" y="3042969"/>
               <a:ext cx="62384" cy="62384"/>
             </a:xfrm>
             <a:prstGeom prst="ellipse">
@@ -3858,7 +3858,7 @@
           </p:nvSpPr>
           <p:spPr>
             <a:xfrm>
-              <a:off x="1605717" y="2778066"/>
+              <a:off x="1569659" y="2778066"/>
               <a:ext cx="62384" cy="62384"/>
             </a:xfrm>
             <a:prstGeom prst="ellipse">
@@ -3884,7 +3884,7 @@
           </p:nvSpPr>
           <p:spPr>
             <a:xfrm>
-              <a:off x="1714901" y="2618095"/>
+              <a:off x="1731544" y="2618095"/>
               <a:ext cx="62384" cy="62384"/>
             </a:xfrm>
             <a:prstGeom prst="ellipse">
@@ -3910,7 +3910,7 @@
           </p:nvSpPr>
           <p:spPr>
             <a:xfrm>
-              <a:off x="1619615" y="2853899"/>
+              <a:off x="1582118" y="2853899"/>
               <a:ext cx="62384" cy="62384"/>
             </a:xfrm>
             <a:prstGeom prst="ellipse">
@@ -3936,7 +3936,7 @@
           </p:nvSpPr>
           <p:spPr>
             <a:xfrm>
-              <a:off x="1727826" y="2820167"/>
+              <a:off x="1745333" y="2820167"/>
               <a:ext cx="62384" cy="62384"/>
             </a:xfrm>
             <a:prstGeom prst="ellipse">
@@ -3962,7 +3962,7 @@
           </p:nvSpPr>
           <p:spPr>
             <a:xfrm>
-              <a:off x="1568560" y="3070382"/>
+              <a:off x="1592899" y="3070382"/>
               <a:ext cx="62384" cy="62384"/>
             </a:xfrm>
             <a:prstGeom prst="ellipse">
@@ -3988,7 +3988,7 @@
           </p:nvSpPr>
           <p:spPr>
             <a:xfrm>
-              <a:off x="1767334" y="3250503"/>
+              <a:off x="1733582" y="3250503"/>
               <a:ext cx="62384" cy="62384"/>
             </a:xfrm>
             <a:prstGeom prst="ellipse">
@@ -4014,7 +4014,7 @@
           </p:nvSpPr>
           <p:spPr>
             <a:xfrm>
-              <a:off x="1601749" y="2649449"/>
+              <a:off x="1570858" y="2649449"/>
               <a:ext cx="62384" cy="62384"/>
             </a:xfrm>
             <a:prstGeom prst="ellipse">
@@ -4040,7 +4040,7 @@
           </p:nvSpPr>
           <p:spPr>
             <a:xfrm>
-              <a:off x="1730872" y="2739757"/>
+              <a:off x="1745399" y="2739757"/>
               <a:ext cx="62384" cy="62384"/>
             </a:xfrm>
             <a:prstGeom prst="ellipse">
@@ -4066,7 +4066,7 @@
           </p:nvSpPr>
           <p:spPr>
             <a:xfrm>
-              <a:off x="1582385" y="2422340"/>
+              <a:off x="1610369" y="2422340"/>
               <a:ext cx="62384" cy="62384"/>
             </a:xfrm>
             <a:prstGeom prst="ellipse">
@@ -4092,7 +4092,7 @@
           </p:nvSpPr>
           <p:spPr>
             <a:xfrm>
-              <a:off x="1737139" y="2323803"/>
+              <a:off x="1751587" y="2323803"/>
               <a:ext cx="62384" cy="62384"/>
             </a:xfrm>
             <a:prstGeom prst="ellipse">
@@ -4118,7 +4118,7 @@
           </p:nvSpPr>
           <p:spPr>
             <a:xfrm>
-              <a:off x="1612052" y="2697920"/>
+              <a:off x="1602216" y="2697920"/>
               <a:ext cx="62384" cy="62384"/>
             </a:xfrm>
             <a:prstGeom prst="ellipse">
@@ -4144,7 +4144,7 @@
           </p:nvSpPr>
           <p:spPr>
             <a:xfrm>
-              <a:off x="1750865" y="2464423"/>
+              <a:off x="1783547" y="2464423"/>
               <a:ext cx="62384" cy="62384"/>
             </a:xfrm>
             <a:prstGeom prst="ellipse">
@@ -4170,7 +4170,7 @@
           </p:nvSpPr>
           <p:spPr>
             <a:xfrm>
-              <a:off x="1584862" y="3097483"/>
+              <a:off x="1581114" y="3097483"/>
               <a:ext cx="62384" cy="62384"/>
             </a:xfrm>
             <a:prstGeom prst="ellipse">
@@ -4196,7 +4196,7 @@
           </p:nvSpPr>
           <p:spPr>
             <a:xfrm>
-              <a:off x="1730279" y="2950431"/>
+              <a:off x="1755208" y="2950431"/>
               <a:ext cx="62384" cy="62384"/>
             </a:xfrm>
             <a:prstGeom prst="ellipse">
@@ -4222,7 +4222,7 @@
           </p:nvSpPr>
           <p:spPr>
             <a:xfrm>
-              <a:off x="1611686" y="3048519"/>
+              <a:off x="1579720" y="3048519"/>
               <a:ext cx="62384" cy="62384"/>
             </a:xfrm>
             <a:prstGeom prst="ellipse">
@@ -4248,7 +4248,7 @@
           </p:nvSpPr>
           <p:spPr>
             <a:xfrm>
-              <a:off x="1756815" y="3132901"/>
+              <a:off x="1721057" y="3132901"/>
               <a:ext cx="62384" cy="62384"/>
             </a:xfrm>
             <a:prstGeom prst="ellipse">
@@ -4274,7 +4274,7 @@
           </p:nvSpPr>
           <p:spPr>
             <a:xfrm>
-              <a:off x="1561841" y="2721944"/>
+              <a:off x="1631224" y="2721944"/>
               <a:ext cx="62384" cy="62384"/>
             </a:xfrm>
             <a:prstGeom prst="ellipse">
@@ -4300,7 +4300,7 @@
           </p:nvSpPr>
           <p:spPr>
             <a:xfrm>
-              <a:off x="1753795" y="2793445"/>
+              <a:off x="1744766" y="2793445"/>
               <a:ext cx="62384" cy="62384"/>
             </a:xfrm>
             <a:prstGeom prst="ellipse">
@@ -4326,7 +4326,7 @@
           </p:nvSpPr>
           <p:spPr>
             <a:xfrm>
-              <a:off x="1593590" y="2649817"/>
+              <a:off x="1636018" y="2649817"/>
               <a:ext cx="62384" cy="62384"/>
             </a:xfrm>
             <a:prstGeom prst="ellipse">
@@ -4352,7 +4352,7 @@
           </p:nvSpPr>
           <p:spPr>
             <a:xfrm>
-              <a:off x="1784568" y="2403778"/>
+              <a:off x="1739749" y="2403778"/>
               <a:ext cx="62384" cy="62384"/>
             </a:xfrm>
             <a:prstGeom prst="ellipse">
@@ -4378,7 +4378,7 @@
           </p:nvSpPr>
           <p:spPr>
             <a:xfrm>
-              <a:off x="1626186" y="3074839"/>
+              <a:off x="1626237" y="3074839"/>
               <a:ext cx="62384" cy="62384"/>
             </a:xfrm>
             <a:prstGeom prst="ellipse">
@@ -4404,7 +4404,7 @@
           </p:nvSpPr>
           <p:spPr>
             <a:xfrm>
-              <a:off x="1783431" y="2896464"/>
+              <a:off x="1726088" y="2896464"/>
               <a:ext cx="62384" cy="62384"/>
             </a:xfrm>
             <a:prstGeom prst="ellipse">
@@ -4430,7 +4430,7 @@
           </p:nvSpPr>
           <p:spPr>
             <a:xfrm>
-              <a:off x="1607095" y="2720308"/>
+              <a:off x="1624983" y="2720308"/>
               <a:ext cx="62384" cy="62384"/>
             </a:xfrm>
             <a:prstGeom prst="ellipse">
@@ -4456,7 +4456,7 @@
           </p:nvSpPr>
           <p:spPr>
             <a:xfrm>
-              <a:off x="1735670" y="2811625"/>
+              <a:off x="1748191" y="2811625"/>
               <a:ext cx="62384" cy="62384"/>
             </a:xfrm>
             <a:prstGeom prst="ellipse">
@@ -4482,7 +4482,7 @@
           </p:nvSpPr>
           <p:spPr>
             <a:xfrm>
-              <a:off x="1595272" y="3087167"/>
+              <a:off x="1572852" y="3087167"/>
               <a:ext cx="62384" cy="62384"/>
             </a:xfrm>
             <a:prstGeom prst="ellipse">
@@ -4508,7 +4508,7 @@
           </p:nvSpPr>
           <p:spPr>
             <a:xfrm>
-              <a:off x="1730164" y="2347825"/>
+              <a:off x="1776782" y="2347825"/>
               <a:ext cx="62384" cy="62384"/>
             </a:xfrm>
             <a:prstGeom prst="ellipse">
@@ -4534,7 +4534,7 @@
           </p:nvSpPr>
           <p:spPr>
             <a:xfrm>
-              <a:off x="1616936" y="2639045"/>
+              <a:off x="1618141" y="2639045"/>
               <a:ext cx="62384" cy="62384"/>
             </a:xfrm>
             <a:prstGeom prst="ellipse">
@@ -4560,7 +4560,7 @@
           </p:nvSpPr>
           <p:spPr>
             <a:xfrm>
-              <a:off x="1774178" y="2127249"/>
+              <a:off x="1752168" y="2127249"/>
               <a:ext cx="62384" cy="62384"/>
             </a:xfrm>
             <a:prstGeom prst="ellipse">
@@ -4586,7 +4586,7 @@
           </p:nvSpPr>
           <p:spPr>
             <a:xfrm>
-              <a:off x="1616427" y="2777354"/>
+              <a:off x="1597447" y="2777354"/>
               <a:ext cx="62384" cy="62384"/>
             </a:xfrm>
             <a:prstGeom prst="ellipse">
@@ -4612,7 +4612,7 @@
           </p:nvSpPr>
           <p:spPr>
             <a:xfrm>
-              <a:off x="1771234" y="2780534"/>
+              <a:off x="1753063" y="2780534"/>
               <a:ext cx="62384" cy="62384"/>
             </a:xfrm>
             <a:prstGeom prst="ellipse">
@@ -4638,7 +4638,7 @@
           </p:nvSpPr>
           <p:spPr>
             <a:xfrm>
-              <a:off x="1596782" y="2885492"/>
+              <a:off x="1564647" y="2885492"/>
               <a:ext cx="62384" cy="62384"/>
             </a:xfrm>
             <a:prstGeom prst="ellipse">
@@ -4664,7 +4664,7 @@
           </p:nvSpPr>
           <p:spPr>
             <a:xfrm>
-              <a:off x="1718891" y="2588544"/>
+              <a:off x="1742029" y="2588544"/>
               <a:ext cx="62384" cy="62384"/>
             </a:xfrm>
             <a:prstGeom prst="ellipse">
@@ -4690,7 +4690,7 @@
           </p:nvSpPr>
           <p:spPr>
             <a:xfrm>
-              <a:off x="1586932" y="3559667"/>
+              <a:off x="1584634" y="3559667"/>
               <a:ext cx="62384" cy="62384"/>
             </a:xfrm>
             <a:prstGeom prst="ellipse">
@@ -4716,7 +4716,7 @@
           </p:nvSpPr>
           <p:spPr>
             <a:xfrm>
-              <a:off x="1772483" y="3240465"/>
+              <a:off x="1738193" y="3240465"/>
               <a:ext cx="62384" cy="62384"/>
             </a:xfrm>
             <a:prstGeom prst="ellipse">
@@ -4742,7 +4742,7 @@
           </p:nvSpPr>
           <p:spPr>
             <a:xfrm>
-              <a:off x="1617118" y="2580551"/>
+              <a:off x="1629196" y="2580551"/>
               <a:ext cx="62384" cy="62384"/>
             </a:xfrm>
             <a:prstGeom prst="ellipse">
@@ -4768,7 +4768,7 @@
           </p:nvSpPr>
           <p:spPr>
             <a:xfrm>
-              <a:off x="1741941" y="2390593"/>
+              <a:off x="1750294" y="2390593"/>
               <a:ext cx="62384" cy="62384"/>
             </a:xfrm>
             <a:prstGeom prst="ellipse">
@@ -4794,7 +4794,7 @@
           </p:nvSpPr>
           <p:spPr>
             <a:xfrm>
-              <a:off x="1606618" y="2762011"/>
+              <a:off x="1561846" y="2762011"/>
               <a:ext cx="62384" cy="62384"/>
             </a:xfrm>
             <a:prstGeom prst="ellipse">
@@ -4820,7 +4820,7 @@
           </p:nvSpPr>
           <p:spPr>
             <a:xfrm>
-              <a:off x="1729774" y="2903949"/>
+              <a:off x="1748215" y="2903949"/>
               <a:ext cx="62384" cy="62384"/>
             </a:xfrm>
             <a:prstGeom prst="ellipse">
@@ -4846,7 +4846,7 @@
           </p:nvSpPr>
           <p:spPr>
             <a:xfrm>
-              <a:off x="1635172" y="2494752"/>
+              <a:off x="1595919" y="2494752"/>
               <a:ext cx="62384" cy="62384"/>
             </a:xfrm>
             <a:prstGeom prst="ellipse">
@@ -4872,7 +4872,7 @@
           </p:nvSpPr>
           <p:spPr>
             <a:xfrm>
-              <a:off x="1728767" y="2271451"/>
+              <a:off x="1746243" y="2271451"/>
               <a:ext cx="62384" cy="62384"/>
             </a:xfrm>
             <a:prstGeom prst="ellipse">
@@ -4898,7 +4898,7 @@
           </p:nvSpPr>
           <p:spPr>
             <a:xfrm>
-              <a:off x="1634120" y="2861663"/>
+              <a:off x="1624366" y="2861663"/>
               <a:ext cx="62384" cy="62384"/>
             </a:xfrm>
             <a:prstGeom prst="ellipse">
@@ -4924,7 +4924,7 @@
           </p:nvSpPr>
           <p:spPr>
             <a:xfrm>
-              <a:off x="1764997" y="2558820"/>
+              <a:off x="1752611" y="2558820"/>
               <a:ext cx="62384" cy="62384"/>
             </a:xfrm>
             <a:prstGeom prst="ellipse">
@@ -4950,7 +4950,7 @@
           </p:nvSpPr>
           <p:spPr>
             <a:xfrm>
-              <a:off x="1566224" y="2550903"/>
+              <a:off x="1582686" y="2550903"/>
               <a:ext cx="62384" cy="62384"/>
             </a:xfrm>
             <a:prstGeom prst="ellipse">
@@ -4976,7 +4976,7 @@
           </p:nvSpPr>
           <p:spPr>
             <a:xfrm>
-              <a:off x="1776379" y="2717918"/>
+              <a:off x="1773536" y="2717918"/>
               <a:ext cx="62384" cy="62384"/>
             </a:xfrm>
             <a:prstGeom prst="ellipse">
@@ -5002,7 +5002,7 @@
           </p:nvSpPr>
           <p:spPr>
             <a:xfrm>
-              <a:off x="1595682" y="2642682"/>
+              <a:off x="1619343" y="2642682"/>
               <a:ext cx="62384" cy="62384"/>
             </a:xfrm>
             <a:prstGeom prst="ellipse">
@@ -5028,7 +5028,7 @@
           </p:nvSpPr>
           <p:spPr>
             <a:xfrm>
-              <a:off x="1761062" y="2922285"/>
+              <a:off x="1759975" y="2922285"/>
               <a:ext cx="62384" cy="62384"/>
             </a:xfrm>
             <a:prstGeom prst="ellipse">
@@ -5054,7 +5054,7 @@
           </p:nvSpPr>
           <p:spPr>
             <a:xfrm>
-              <a:off x="1594859" y="2351266"/>
+              <a:off x="1611987" y="2351266"/>
               <a:ext cx="62384" cy="62384"/>
             </a:xfrm>
             <a:prstGeom prst="ellipse">
@@ -5080,7 +5080,7 @@
           </p:nvSpPr>
           <p:spPr>
             <a:xfrm>
-              <a:off x="1735077" y="2464180"/>
+              <a:off x="1749117" y="2464180"/>
               <a:ext cx="62384" cy="62384"/>
             </a:xfrm>
             <a:prstGeom prst="ellipse">
@@ -5106,7 +5106,7 @@
           </p:nvSpPr>
           <p:spPr>
             <a:xfrm>
-              <a:off x="1621128" y="2879596"/>
+              <a:off x="1567822" y="2879596"/>
               <a:ext cx="62384" cy="62384"/>
             </a:xfrm>
             <a:prstGeom prst="ellipse">
@@ -5132,7 +5132,7 @@
           </p:nvSpPr>
           <p:spPr>
             <a:xfrm>
-              <a:off x="1726371" y="3015602"/>
+              <a:off x="1761330" y="3015602"/>
               <a:ext cx="62384" cy="62384"/>
             </a:xfrm>
             <a:prstGeom prst="ellipse">
@@ -5158,7 +5158,7 @@
           </p:nvSpPr>
           <p:spPr>
             <a:xfrm>
-              <a:off x="1636494" y="2959279"/>
+              <a:off x="1630227" y="2959279"/>
               <a:ext cx="62384" cy="62384"/>
             </a:xfrm>
             <a:prstGeom prst="ellipse">
@@ -5184,7 +5184,7 @@
           </p:nvSpPr>
           <p:spPr>
             <a:xfrm>
-              <a:off x="1746037" y="2999779"/>
+              <a:off x="1736482" y="2999779"/>
               <a:ext cx="62384" cy="62384"/>
             </a:xfrm>
             <a:prstGeom prst="ellipse">
@@ -5210,7 +5210,7 @@
           </p:nvSpPr>
           <p:spPr>
             <a:xfrm>
-              <a:off x="1609297" y="2891195"/>
+              <a:off x="1596361" y="2891195"/>
               <a:ext cx="62384" cy="62384"/>
             </a:xfrm>
             <a:prstGeom prst="ellipse">
@@ -5236,7 +5236,7 @@
           </p:nvSpPr>
           <p:spPr>
             <a:xfrm>
-              <a:off x="1727885" y="2901293"/>
+              <a:off x="1727602" y="2901293"/>
               <a:ext cx="62384" cy="62384"/>
             </a:xfrm>
             <a:prstGeom prst="ellipse">
@@ -5262,7 +5262,7 @@
           </p:nvSpPr>
           <p:spPr>
             <a:xfrm>
-              <a:off x="1614064" y="1624175"/>
+              <a:off x="1570096" y="1624175"/>
               <a:ext cx="62384" cy="62384"/>
             </a:xfrm>
             <a:prstGeom prst="ellipse">
@@ -5288,7 +5288,7 @@
           </p:nvSpPr>
           <p:spPr>
             <a:xfrm>
-              <a:off x="1726064" y="1979705"/>
+              <a:off x="1778897" y="1979705"/>
               <a:ext cx="62384" cy="62384"/>
             </a:xfrm>
             <a:prstGeom prst="ellipse">
@@ -5314,7 +5314,7 @@
           </p:nvSpPr>
           <p:spPr>
             <a:xfrm>
-              <a:off x="1621282" y="2020599"/>
+              <a:off x="1608305" y="2020599"/>
               <a:ext cx="62384" cy="62384"/>
             </a:xfrm>
             <a:prstGeom prst="ellipse">
@@ -5340,7 +5340,7 @@
           </p:nvSpPr>
           <p:spPr>
             <a:xfrm>
-              <a:off x="1734505" y="2279365"/>
+              <a:off x="1738942" y="2279365"/>
               <a:ext cx="62384" cy="62384"/>
             </a:xfrm>
             <a:prstGeom prst="ellipse">
@@ -5366,7 +5366,7 @@
           </p:nvSpPr>
           <p:spPr>
             <a:xfrm>
-              <a:off x="1568500" y="3119717"/>
+              <a:off x="1588986" y="3119717"/>
               <a:ext cx="62384" cy="62384"/>
             </a:xfrm>
             <a:prstGeom prst="ellipse">
@@ -5392,7 +5392,7 @@
           </p:nvSpPr>
           <p:spPr>
             <a:xfrm>
-              <a:off x="1782132" y="2961756"/>
+              <a:off x="1780525" y="2961756"/>
               <a:ext cx="62384" cy="62384"/>
             </a:xfrm>
             <a:prstGeom prst="ellipse">
@@ -5418,7 +5418,7 @@
           </p:nvSpPr>
           <p:spPr>
             <a:xfrm>
-              <a:off x="1572842" y="3202020"/>
+              <a:off x="1615601" y="3202020"/>
               <a:ext cx="62384" cy="62384"/>
             </a:xfrm>
             <a:prstGeom prst="ellipse">
@@ -5444,7 +5444,7 @@
           </p:nvSpPr>
           <p:spPr>
             <a:xfrm>
-              <a:off x="1748952" y="3145362"/>
+              <a:off x="1732454" y="3145362"/>
               <a:ext cx="62384" cy="62384"/>
             </a:xfrm>
             <a:prstGeom prst="ellipse">
@@ -5470,7 +5470,7 @@
           </p:nvSpPr>
           <p:spPr>
             <a:xfrm>
-              <a:off x="1626772" y="3002354"/>
+              <a:off x="1579006" y="3002354"/>
               <a:ext cx="62384" cy="62384"/>
             </a:xfrm>
             <a:prstGeom prst="ellipse">
@@ -5496,7 +5496,7 @@
           </p:nvSpPr>
           <p:spPr>
             <a:xfrm>
-              <a:off x="1774253" y="3078609"/>
+              <a:off x="1753415" y="3078609"/>
               <a:ext cx="62384" cy="62384"/>
             </a:xfrm>
             <a:prstGeom prst="ellipse">
@@ -5522,7 +5522,7 @@
           </p:nvSpPr>
           <p:spPr>
             <a:xfrm>
-              <a:off x="1572658" y="2609586"/>
+              <a:off x="1635230" y="2609586"/>
               <a:ext cx="62384" cy="62384"/>
             </a:xfrm>
             <a:prstGeom prst="ellipse">
@@ -5548,7 +5548,7 @@
           </p:nvSpPr>
           <p:spPr>
             <a:xfrm>
-              <a:off x="1724967" y="2983647"/>
+              <a:off x="1766547" y="2983647"/>
               <a:ext cx="62384" cy="62384"/>
             </a:xfrm>
             <a:prstGeom prst="ellipse">
@@ -5574,7 +5574,7 @@
           </p:nvSpPr>
           <p:spPr>
             <a:xfrm>
-              <a:off x="1590360" y="2955681"/>
+              <a:off x="1562090" y="2955681"/>
               <a:ext cx="62384" cy="62384"/>
             </a:xfrm>
             <a:prstGeom prst="ellipse">
@@ -5600,7 +5600,7 @@
           </p:nvSpPr>
           <p:spPr>
             <a:xfrm>
-              <a:off x="1778470" y="3088754"/>
+              <a:off x="1750500" y="3088754"/>
               <a:ext cx="62384" cy="62384"/>
             </a:xfrm>
             <a:prstGeom prst="ellipse">
@@ -5626,7 +5626,7 @@
           </p:nvSpPr>
           <p:spPr>
             <a:xfrm>
-              <a:off x="1621160" y="2807407"/>
+              <a:off x="1597549" y="2807407"/>
               <a:ext cx="62384" cy="62384"/>
             </a:xfrm>
             <a:prstGeom prst="ellipse">
@@ -5652,7 +5652,7 @@
           </p:nvSpPr>
           <p:spPr>
             <a:xfrm>
-              <a:off x="1714158" y="2973149"/>
+              <a:off x="1733851" y="2973149"/>
               <a:ext cx="62384" cy="62384"/>
             </a:xfrm>
             <a:prstGeom prst="ellipse">
@@ -5678,7 +5678,7 @@
           </p:nvSpPr>
           <p:spPr>
             <a:xfrm>
-              <a:off x="1624801" y="2842692"/>
+              <a:off x="1607923" y="2842692"/>
               <a:ext cx="62384" cy="62384"/>
             </a:xfrm>
             <a:prstGeom prst="ellipse">
@@ -5704,7 +5704,7 @@
           </p:nvSpPr>
           <p:spPr>
             <a:xfrm>
-              <a:off x="1749851" y="2980880"/>
+              <a:off x="1727728" y="2980880"/>
               <a:ext cx="62384" cy="62384"/>
             </a:xfrm>
             <a:prstGeom prst="ellipse">
@@ -5730,7 +5730,7 @@
           </p:nvSpPr>
           <p:spPr>
             <a:xfrm>
-              <a:off x="1587840" y="2773278"/>
+              <a:off x="1613995" y="2773278"/>
               <a:ext cx="62384" cy="62384"/>
             </a:xfrm>
             <a:prstGeom prst="ellipse">
@@ -5756,7 +5756,7 @@
           </p:nvSpPr>
           <p:spPr>
             <a:xfrm>
-              <a:off x="1726828" y="2892856"/>
+              <a:off x="1722650" y="2892856"/>
               <a:ext cx="62384" cy="62384"/>
             </a:xfrm>
             <a:prstGeom prst="ellipse">
@@ -5782,7 +5782,7 @@
           </p:nvSpPr>
           <p:spPr>
             <a:xfrm>
-              <a:off x="1618934" y="3088872"/>
+              <a:off x="1583526" y="3088872"/>
               <a:ext cx="62384" cy="62384"/>
             </a:xfrm>
             <a:prstGeom prst="ellipse">
@@ -5808,7 +5808,7 @@
           </p:nvSpPr>
           <p:spPr>
             <a:xfrm>
-              <a:off x="1733905" y="2895185"/>
+              <a:off x="1763709" y="2895185"/>
               <a:ext cx="62384" cy="62384"/>
             </a:xfrm>
             <a:prstGeom prst="ellipse">
@@ -5834,7 +5834,7 @@
           </p:nvSpPr>
           <p:spPr>
             <a:xfrm>
-              <a:off x="1591964" y="2778970"/>
+              <a:off x="1615664" y="2778970"/>
               <a:ext cx="62384" cy="62384"/>
             </a:xfrm>
             <a:prstGeom prst="ellipse">
@@ -5860,7 +5860,7 @@
           </p:nvSpPr>
           <p:spPr>
             <a:xfrm>
-              <a:off x="1763935" y="2861090"/>
+              <a:off x="1760571" y="2861090"/>
               <a:ext cx="62384" cy="62384"/>
             </a:xfrm>
             <a:prstGeom prst="ellipse">
@@ -5886,7 +5886,7 @@
           </p:nvSpPr>
           <p:spPr>
             <a:xfrm>
-              <a:off x="1591617" y="3026748"/>
+              <a:off x="1566239" y="3026748"/>
               <a:ext cx="62384" cy="62384"/>
             </a:xfrm>
             <a:prstGeom prst="ellipse">
@@ -5912,7 +5912,7 @@
           </p:nvSpPr>
           <p:spPr>
             <a:xfrm>
-              <a:off x="1762503" y="2942926"/>
+              <a:off x="1781392" y="2942926"/>
               <a:ext cx="62384" cy="62384"/>
             </a:xfrm>
             <a:prstGeom prst="ellipse">
@@ -5938,7 +5938,7 @@
           </p:nvSpPr>
           <p:spPr>
             <a:xfrm>
-              <a:off x="1623200" y="3053785"/>
+              <a:off x="1587052" y="3053785"/>
               <a:ext cx="62384" cy="62384"/>
             </a:xfrm>
             <a:prstGeom prst="ellipse">
@@ -5964,7 +5964,7 @@
           </p:nvSpPr>
           <p:spPr>
             <a:xfrm>
-              <a:off x="1775273" y="3214068"/>
+              <a:off x="1721195" y="3214068"/>
               <a:ext cx="62384" cy="62384"/>
             </a:xfrm>
             <a:prstGeom prst="ellipse">
@@ -5990,7 +5990,7 @@
           </p:nvSpPr>
           <p:spPr>
             <a:xfrm>
-              <a:off x="1630498" y="2779430"/>
+              <a:off x="1617817" y="2779430"/>
               <a:ext cx="62384" cy="62384"/>
             </a:xfrm>
             <a:prstGeom prst="ellipse">
@@ -6016,7 +6016,7 @@
           </p:nvSpPr>
           <p:spPr>
             <a:xfrm>
-              <a:off x="1724157" y="2999628"/>
+              <a:off x="1738709" y="2999628"/>
               <a:ext cx="62384" cy="62384"/>
             </a:xfrm>
             <a:prstGeom prst="ellipse">
@@ -6042,7 +6042,7 @@
           </p:nvSpPr>
           <p:spPr>
             <a:xfrm>
-              <a:off x="1574694" y="2849785"/>
+              <a:off x="1600891" y="2849785"/>
               <a:ext cx="62384" cy="62384"/>
             </a:xfrm>
             <a:prstGeom prst="ellipse">
@@ -6068,7 +6068,7 @@
           </p:nvSpPr>
           <p:spPr>
             <a:xfrm>
-              <a:off x="1769920" y="3136949"/>
+              <a:off x="1746647" y="3136949"/>
               <a:ext cx="62384" cy="62384"/>
             </a:xfrm>
             <a:prstGeom prst="ellipse">
@@ -6094,7 +6094,7 @@
           </p:nvSpPr>
           <p:spPr>
             <a:xfrm>
-              <a:off x="1618545" y="2877876"/>
+              <a:off x="1607330" y="2877876"/>
               <a:ext cx="62384" cy="62384"/>
             </a:xfrm>
             <a:prstGeom prst="ellipse">
@@ -6120,7 +6120,7 @@
           </p:nvSpPr>
           <p:spPr>
             <a:xfrm>
-              <a:off x="1728949" y="3068460"/>
+              <a:off x="1749537" y="3068460"/>
               <a:ext cx="62384" cy="62384"/>
             </a:xfrm>
             <a:prstGeom prst="ellipse">
@@ -6146,7 +6146,7 @@
           </p:nvSpPr>
           <p:spPr>
             <a:xfrm>
-              <a:off x="1627204" y="2027633"/>
+              <a:off x="1573492" y="2027633"/>
               <a:ext cx="62384" cy="62384"/>
             </a:xfrm>
             <a:prstGeom prst="ellipse">
@@ -6172,7 +6172,7 @@
           </p:nvSpPr>
           <p:spPr>
             <a:xfrm>
-              <a:off x="1764396" y="3145486"/>
+              <a:off x="1775914" y="3145486"/>
               <a:ext cx="62384" cy="62384"/>
             </a:xfrm>
             <a:prstGeom prst="ellipse">
@@ -6198,7 +6198,7 @@
           </p:nvSpPr>
           <p:spPr>
             <a:xfrm>
-              <a:off x="1576816" y="3310021"/>
+              <a:off x="1599387" y="3310021"/>
               <a:ext cx="62384" cy="62384"/>
             </a:xfrm>
             <a:prstGeom prst="ellipse">
@@ -6224,7 +6224,7 @@
           </p:nvSpPr>
           <p:spPr>
             <a:xfrm>
-              <a:off x="1721229" y="2920993"/>
+              <a:off x="1758272" y="2920993"/>
               <a:ext cx="62384" cy="62384"/>
             </a:xfrm>
             <a:prstGeom prst="ellipse">
@@ -6250,7 +6250,7 @@
           </p:nvSpPr>
           <p:spPr>
             <a:xfrm>
-              <a:off x="1636680" y="3214152"/>
+              <a:off x="1599415" y="3214152"/>
               <a:ext cx="62384" cy="62384"/>
             </a:xfrm>
             <a:prstGeom prst="ellipse">
@@ -6276,7 +6276,7 @@
           </p:nvSpPr>
           <p:spPr>
             <a:xfrm>
-              <a:off x="1763644" y="3028780"/>
+              <a:off x="1778363" y="3028780"/>
               <a:ext cx="62384" cy="62384"/>
             </a:xfrm>
             <a:prstGeom prst="ellipse">
@@ -6302,7 +6302,7 @@
           </p:nvSpPr>
           <p:spPr>
             <a:xfrm>
-              <a:off x="1580133" y="2851195"/>
+              <a:off x="1576329" y="2851195"/>
               <a:ext cx="62384" cy="62384"/>
             </a:xfrm>
             <a:prstGeom prst="ellipse">
@@ -6328,7 +6328,7 @@
           </p:nvSpPr>
           <p:spPr>
             <a:xfrm>
-              <a:off x="1764283" y="3010283"/>
+              <a:off x="1716421" y="3010283"/>
               <a:ext cx="62384" cy="62384"/>
             </a:xfrm>
             <a:prstGeom prst="ellipse">
@@ -6354,7 +6354,7 @@
           </p:nvSpPr>
           <p:spPr>
             <a:xfrm>
-              <a:off x="1564268" y="2869942"/>
+              <a:off x="1617516" y="2869942"/>
               <a:ext cx="62384" cy="62384"/>
             </a:xfrm>
             <a:prstGeom prst="ellipse">
@@ -6380,7 +6380,7 @@
           </p:nvSpPr>
           <p:spPr>
             <a:xfrm>
-              <a:off x="1763360" y="2835067"/>
+              <a:off x="1765816" y="2835067"/>
               <a:ext cx="62384" cy="62384"/>
             </a:xfrm>
             <a:prstGeom prst="ellipse">
@@ -6406,7 +6406,7 @@
           </p:nvSpPr>
           <p:spPr>
             <a:xfrm>
-              <a:off x="1625005" y="2385074"/>
+              <a:off x="1615963" y="2385074"/>
               <a:ext cx="62384" cy="62384"/>
             </a:xfrm>
             <a:prstGeom prst="ellipse">
@@ -6432,7 +6432,7 @@
           </p:nvSpPr>
           <p:spPr>
             <a:xfrm>
-              <a:off x="1728336" y="2372486"/>
+              <a:off x="1753181" y="2372486"/>
               <a:ext cx="62384" cy="62384"/>
             </a:xfrm>
             <a:prstGeom prst="ellipse">
@@ -6458,7 +6458,7 @@
           </p:nvSpPr>
           <p:spPr>
             <a:xfrm>
-              <a:off x="1581616" y="2303091"/>
+              <a:off x="1619101" y="2303091"/>
               <a:ext cx="62384" cy="62384"/>
             </a:xfrm>
             <a:prstGeom prst="ellipse">
@@ -6484,7 +6484,7 @@
           </p:nvSpPr>
           <p:spPr>
             <a:xfrm>
-              <a:off x="1727369" y="2210234"/>
+              <a:off x="1726533" y="2210234"/>
               <a:ext cx="62384" cy="62384"/>
             </a:xfrm>
             <a:prstGeom prst="ellipse">
@@ -6510,7 +6510,7 @@
           </p:nvSpPr>
           <p:spPr>
             <a:xfrm>
-              <a:off x="1580289" y="2906009"/>
+              <a:off x="1564890" y="2906009"/>
               <a:ext cx="62384" cy="62384"/>
             </a:xfrm>
             <a:prstGeom prst="ellipse">
@@ -6536,7 +6536,7 @@
           </p:nvSpPr>
           <p:spPr>
             <a:xfrm>
-              <a:off x="1772322" y="2639315"/>
+              <a:off x="1771034" y="2639315"/>
               <a:ext cx="62384" cy="62384"/>
             </a:xfrm>
             <a:prstGeom prst="ellipse">
@@ -6562,7 +6562,7 @@
           </p:nvSpPr>
           <p:spPr>
             <a:xfrm>
-              <a:off x="1605258" y="2479227"/>
+              <a:off x="1594615" y="2479227"/>
               <a:ext cx="62384" cy="62384"/>
             </a:xfrm>
             <a:prstGeom prst="ellipse">
@@ -6588,7 +6588,7 @@
           </p:nvSpPr>
           <p:spPr>
             <a:xfrm>
-              <a:off x="1718756" y="2693799"/>
+              <a:off x="1757790" y="2693799"/>
               <a:ext cx="62384" cy="62384"/>
             </a:xfrm>
             <a:prstGeom prst="ellipse">
@@ -6614,7 +6614,7 @@
           </p:nvSpPr>
           <p:spPr>
             <a:xfrm>
-              <a:off x="1633064" y="2311062"/>
+              <a:off x="1579578" y="2311062"/>
               <a:ext cx="62384" cy="62384"/>
             </a:xfrm>
             <a:prstGeom prst="ellipse">
@@ -6640,7 +6640,7 @@
           </p:nvSpPr>
           <p:spPr>
             <a:xfrm>
-              <a:off x="1741540" y="2155885"/>
+              <a:off x="1754663" y="2155885"/>
               <a:ext cx="62384" cy="62384"/>
             </a:xfrm>
             <a:prstGeom prst="ellipse">
@@ -6666,7 +6666,7 @@
           </p:nvSpPr>
           <p:spPr>
             <a:xfrm>
-              <a:off x="1570979" y="2992143"/>
+              <a:off x="1582886" y="2992143"/>
               <a:ext cx="62384" cy="62384"/>
             </a:xfrm>
             <a:prstGeom prst="ellipse">
@@ -6692,7 +6692,7 @@
           </p:nvSpPr>
           <p:spPr>
             <a:xfrm>
-              <a:off x="1719702" y="3085554"/>
+              <a:off x="1779871" y="3085554"/>
               <a:ext cx="62384" cy="62384"/>
             </a:xfrm>
             <a:prstGeom prst="ellipse">
@@ -6718,7 +6718,7 @@
           </p:nvSpPr>
           <p:spPr>
             <a:xfrm>
-              <a:off x="1625880" y="2693399"/>
+              <a:off x="1606268" y="2693399"/>
               <a:ext cx="62384" cy="62384"/>
             </a:xfrm>
             <a:prstGeom prst="ellipse">
@@ -6744,7 +6744,7 @@
           </p:nvSpPr>
           <p:spPr>
             <a:xfrm>
-              <a:off x="1782547" y="2912401"/>
+              <a:off x="1722951" y="2912401"/>
               <a:ext cx="62384" cy="62384"/>
             </a:xfrm>
             <a:prstGeom prst="ellipse">
@@ -6770,7 +6770,7 @@
           </p:nvSpPr>
           <p:spPr>
             <a:xfrm>
-              <a:off x="1604153" y="2243452"/>
+              <a:off x="1574107" y="2243452"/>
               <a:ext cx="62384" cy="62384"/>
             </a:xfrm>
             <a:prstGeom prst="ellipse">
@@ -6796,7 +6796,7 @@
           </p:nvSpPr>
           <p:spPr>
             <a:xfrm>
-              <a:off x="1774008" y="2469299"/>
+              <a:off x="1778310" y="2469299"/>
               <a:ext cx="62384" cy="62384"/>
             </a:xfrm>
             <a:prstGeom prst="ellipse">
@@ -6822,7 +6822,7 @@
           </p:nvSpPr>
           <p:spPr>
             <a:xfrm>
-              <a:off x="1576331" y="3383052"/>
+              <a:off x="1622382" y="3383052"/>
               <a:ext cx="62384" cy="62384"/>
             </a:xfrm>
             <a:prstGeom prst="ellipse">
@@ -6848,7 +6848,7 @@
           </p:nvSpPr>
           <p:spPr>
             <a:xfrm>
-              <a:off x="1729342" y="2717776"/>
+              <a:off x="1717420" y="2717776"/>
               <a:ext cx="62384" cy="62384"/>
             </a:xfrm>
             <a:prstGeom prst="ellipse">
@@ -6874,7 +6874,7 @@
           </p:nvSpPr>
           <p:spPr>
             <a:xfrm>
-              <a:off x="2627998" y="2084851"/>
+              <a:off x="2666250" y="2084851"/>
               <a:ext cx="62384" cy="62384"/>
             </a:xfrm>
             <a:prstGeom prst="ellipse">
@@ -6900,7 +6900,7 @@
           </p:nvSpPr>
           <p:spPr>
             <a:xfrm>
-              <a:off x="2782030" y="2219888"/>
+              <a:off x="2779881" y="2219888"/>
               <a:ext cx="62384" cy="62384"/>
             </a:xfrm>
             <a:prstGeom prst="ellipse">
@@ -6926,7 +6926,7 @@
           </p:nvSpPr>
           <p:spPr>
             <a:xfrm>
-              <a:off x="2627905" y="2434850"/>
+              <a:off x="2672015" y="2434850"/>
               <a:ext cx="62384" cy="62384"/>
             </a:xfrm>
             <a:prstGeom prst="ellipse">
@@ -6952,7 +6952,7 @@
           </p:nvSpPr>
           <p:spPr>
             <a:xfrm>
-              <a:off x="2806947" y="2816213"/>
+              <a:off x="2792469" y="2816213"/>
               <a:ext cx="62384" cy="62384"/>
             </a:xfrm>
             <a:prstGeom prst="ellipse">
@@ -6978,7 +6978,7 @@
           </p:nvSpPr>
           <p:spPr>
             <a:xfrm>
-              <a:off x="2662013" y="2781878"/>
+              <a:off x="2660355" y="2781878"/>
               <a:ext cx="62384" cy="62384"/>
             </a:xfrm>
             <a:prstGeom prst="ellipse">
@@ -7004,7 +7004,7 @@
           </p:nvSpPr>
           <p:spPr>
             <a:xfrm>
-              <a:off x="2784393" y="2832242"/>
+              <a:off x="2770422" y="2832242"/>
               <a:ext cx="62384" cy="62384"/>
             </a:xfrm>
             <a:prstGeom prst="ellipse">
@@ -7030,7 +7030,7 @@
           </p:nvSpPr>
           <p:spPr>
             <a:xfrm>
-              <a:off x="2633330" y="2461099"/>
+              <a:off x="2641106" y="2461099"/>
               <a:ext cx="62384" cy="62384"/>
             </a:xfrm>
             <a:prstGeom prst="ellipse">
@@ -7056,7 +7056,7 @@
           </p:nvSpPr>
           <p:spPr>
             <a:xfrm>
-              <a:off x="2823884" y="2580668"/>
+              <a:off x="2788945" y="2580668"/>
               <a:ext cx="62384" cy="62384"/>
             </a:xfrm>
             <a:prstGeom prst="ellipse">
@@ -7082,7 +7082,7 @@
           </p:nvSpPr>
           <p:spPr>
             <a:xfrm>
-              <a:off x="2658689" y="2376920"/>
+              <a:off x="2647946" y="2376920"/>
               <a:ext cx="62384" cy="62384"/>
             </a:xfrm>
             <a:prstGeom prst="ellipse">
@@ -7108,7 +7108,7 @@
           </p:nvSpPr>
           <p:spPr>
             <a:xfrm>
-              <a:off x="2823649" y="2478265"/>
+              <a:off x="2776176" y="2478265"/>
               <a:ext cx="62384" cy="62384"/>
             </a:xfrm>
             <a:prstGeom prst="ellipse">
@@ -7134,7 +7134,7 @@
           </p:nvSpPr>
           <p:spPr>
             <a:xfrm>
-              <a:off x="2663689" y="2476222"/>
+              <a:off x="2630793" y="2476222"/>
               <a:ext cx="62384" cy="62384"/>
             </a:xfrm>
             <a:prstGeom prst="ellipse">
@@ -7160,7 +7160,7 @@
           </p:nvSpPr>
           <p:spPr>
             <a:xfrm>
-              <a:off x="2766358" y="2648558"/>
+              <a:off x="2813314" y="2648558"/>
               <a:ext cx="62384" cy="62384"/>
             </a:xfrm>
             <a:prstGeom prst="ellipse">
@@ -7186,7 +7186,7 @@
           </p:nvSpPr>
           <p:spPr>
             <a:xfrm>
-              <a:off x="2671197" y="2628343"/>
+              <a:off x="2661925" y="2628343"/>
               <a:ext cx="62384" cy="62384"/>
             </a:xfrm>
             <a:prstGeom prst="ellipse">
@@ -7212,7 +7212,7 @@
           </p:nvSpPr>
           <p:spPr>
             <a:xfrm>
-              <a:off x="2815737" y="2676261"/>
+              <a:off x="2756181" y="2676261"/>
               <a:ext cx="62384" cy="62384"/>
             </a:xfrm>
             <a:prstGeom prst="ellipse">
@@ -7238,7 +7238,7 @@
           </p:nvSpPr>
           <p:spPr>
             <a:xfrm>
-              <a:off x="2615800" y="2381745"/>
+              <a:off x="2616305" y="2381745"/>
               <a:ext cx="62384" cy="62384"/>
             </a:xfrm>
             <a:prstGeom prst="ellipse">
@@ -7264,7 +7264,7 @@
           </p:nvSpPr>
           <p:spPr>
             <a:xfrm>
-              <a:off x="2784065" y="2560132"/>
+              <a:off x="2795774" y="2560132"/>
               <a:ext cx="62384" cy="62384"/>
             </a:xfrm>
             <a:prstGeom prst="ellipse">
@@ -7290,7 +7290,7 @@
           </p:nvSpPr>
           <p:spPr>
             <a:xfrm>
-              <a:off x="2630192" y="2977464"/>
+              <a:off x="2657562" y="2977464"/>
               <a:ext cx="62384" cy="62384"/>
             </a:xfrm>
             <a:prstGeom prst="ellipse">
@@ -7316,7 +7316,7 @@
           </p:nvSpPr>
           <p:spPr>
             <a:xfrm>
-              <a:off x="2782772" y="3228311"/>
+              <a:off x="2800727" y="3228311"/>
               <a:ext cx="62384" cy="62384"/>
             </a:xfrm>
             <a:prstGeom prst="ellipse">
@@ -7342,7 +7342,7 @@
           </p:nvSpPr>
           <p:spPr>
             <a:xfrm>
-              <a:off x="2671323" y="2772110"/>
+              <a:off x="2625153" y="2772110"/>
               <a:ext cx="62384" cy="62384"/>
             </a:xfrm>
             <a:prstGeom prst="ellipse">
@@ -7368,7 +7368,7 @@
           </p:nvSpPr>
           <p:spPr>
             <a:xfrm>
-              <a:off x="2793586" y="3206926"/>
+              <a:off x="2809830" y="3206926"/>
               <a:ext cx="62384" cy="62384"/>
             </a:xfrm>
             <a:prstGeom prst="ellipse">
@@ -7394,7 +7394,7 @@
           </p:nvSpPr>
           <p:spPr>
             <a:xfrm>
-              <a:off x="2665838" y="2485303"/>
+              <a:off x="2656748" y="2485303"/>
               <a:ext cx="62384" cy="62384"/>
             </a:xfrm>
             <a:prstGeom prst="ellipse">
@@ -7420,7 +7420,7 @@
           </p:nvSpPr>
           <p:spPr>
             <a:xfrm>
-              <a:off x="2823384" y="2672806"/>
+              <a:off x="2775909" y="2672806"/>
               <a:ext cx="62384" cy="62384"/>
             </a:xfrm>
             <a:prstGeom prst="ellipse">
@@ -7446,7 +7446,7 @@
           </p:nvSpPr>
           <p:spPr>
             <a:xfrm>
-              <a:off x="2623491" y="2368226"/>
+              <a:off x="2631630" y="2368226"/>
               <a:ext cx="62384" cy="62384"/>
             </a:xfrm>
             <a:prstGeom prst="ellipse">
@@ -7472,7 +7472,7 @@
           </p:nvSpPr>
           <p:spPr>
             <a:xfrm>
-              <a:off x="2771105" y="2818819"/>
+              <a:off x="2755398" y="2818819"/>
               <a:ext cx="62384" cy="62384"/>
             </a:xfrm>
             <a:prstGeom prst="ellipse">
@@ -7498,7 +7498,7 @@
           </p:nvSpPr>
           <p:spPr>
             <a:xfrm>
-              <a:off x="2638895" y="2493287"/>
+              <a:off x="2617176" y="2493287"/>
               <a:ext cx="62384" cy="62384"/>
             </a:xfrm>
             <a:prstGeom prst="ellipse">
@@ -7524,7 +7524,7 @@
           </p:nvSpPr>
           <p:spPr>
             <a:xfrm>
-              <a:off x="2781120" y="2775042"/>
+              <a:off x="2822810" y="2775042"/>
               <a:ext cx="62384" cy="62384"/>
             </a:xfrm>
             <a:prstGeom prst="ellipse">
@@ -7550,7 +7550,7 @@
           </p:nvSpPr>
           <p:spPr>
             <a:xfrm>
-              <a:off x="2604345" y="2950746"/>
+              <a:off x="2666276" y="2950746"/>
               <a:ext cx="62384" cy="62384"/>
             </a:xfrm>
             <a:prstGeom prst="ellipse">
@@ -7576,7 +7576,7 @@
           </p:nvSpPr>
           <p:spPr>
             <a:xfrm>
-              <a:off x="2755181" y="3124429"/>
+              <a:off x="2801871" y="3124429"/>
               <a:ext cx="62384" cy="62384"/>
             </a:xfrm>
             <a:prstGeom prst="ellipse">
@@ -7602,7 +7602,7 @@
           </p:nvSpPr>
           <p:spPr>
             <a:xfrm>
-              <a:off x="2613654" y="2454225"/>
+              <a:off x="2656461" y="2454225"/>
               <a:ext cx="62384" cy="62384"/>
             </a:xfrm>
             <a:prstGeom prst="ellipse">
@@ -7628,7 +7628,7 @@
           </p:nvSpPr>
           <p:spPr>
             <a:xfrm>
-              <a:off x="2758659" y="2845042"/>
+              <a:off x="2818949" y="2845042"/>
               <a:ext cx="62384" cy="62384"/>
             </a:xfrm>
             <a:prstGeom prst="ellipse">
@@ -7654,7 +7654,7 @@
           </p:nvSpPr>
           <p:spPr>
             <a:xfrm>
-              <a:off x="2618294" y="3124269"/>
+              <a:off x="2666713" y="3124269"/>
               <a:ext cx="62384" cy="62384"/>
             </a:xfrm>
             <a:prstGeom prst="ellipse">
@@ -7680,7 +7680,7 @@
           </p:nvSpPr>
           <p:spPr>
             <a:xfrm>
-              <a:off x="2807791" y="2947033"/>
+              <a:off x="2760681" y="2947033"/>
               <a:ext cx="62384" cy="62384"/>
             </a:xfrm>
             <a:prstGeom prst="ellipse">
@@ -7706,7 +7706,7 @@
           </p:nvSpPr>
           <p:spPr>
             <a:xfrm>
-              <a:off x="2623641" y="2682757"/>
+              <a:off x="2673995" y="2682757"/>
               <a:ext cx="62384" cy="62384"/>
             </a:xfrm>
             <a:prstGeom prst="ellipse">
@@ -7732,7 +7732,7 @@
           </p:nvSpPr>
           <p:spPr>
             <a:xfrm>
-              <a:off x="2815099" y="2780527"/>
+              <a:off x="2773008" y="2780527"/>
               <a:ext cx="62384" cy="62384"/>
             </a:xfrm>
             <a:prstGeom prst="ellipse">
@@ -7758,7 +7758,7 @@
           </p:nvSpPr>
           <p:spPr>
             <a:xfrm>
-              <a:off x="2635736" y="2723706"/>
+              <a:off x="2664216" y="2723706"/>
               <a:ext cx="62384" cy="62384"/>
             </a:xfrm>
             <a:prstGeom prst="ellipse">
@@ -7784,7 +7784,7 @@
           </p:nvSpPr>
           <p:spPr>
             <a:xfrm>
-              <a:off x="2774267" y="2949282"/>
+              <a:off x="2765302" y="2949282"/>
               <a:ext cx="62384" cy="62384"/>
             </a:xfrm>
             <a:prstGeom prst="ellipse">
@@ -7810,7 +7810,7 @@
           </p:nvSpPr>
           <p:spPr>
             <a:xfrm>
-              <a:off x="2608969" y="2431697"/>
+              <a:off x="2622709" y="2431697"/>
               <a:ext cx="62384" cy="62384"/>
             </a:xfrm>
             <a:prstGeom prst="ellipse">
@@ -7836,7 +7836,7 @@
           </p:nvSpPr>
           <p:spPr>
             <a:xfrm>
-              <a:off x="2767623" y="2638972"/>
+              <a:off x="2822175" y="2638972"/>
               <a:ext cx="62384" cy="62384"/>
             </a:xfrm>
             <a:prstGeom prst="ellipse">
@@ -7862,7 +7862,7 @@
           </p:nvSpPr>
           <p:spPr>
             <a:xfrm>
-              <a:off x="2659301" y="2296964"/>
+              <a:off x="2651530" y="2296964"/>
               <a:ext cx="62384" cy="62384"/>
             </a:xfrm>
             <a:prstGeom prst="ellipse">
@@ -7888,7 +7888,7 @@
           </p:nvSpPr>
           <p:spPr>
             <a:xfrm>
-              <a:off x="2790256" y="2609538"/>
+              <a:off x="2776266" y="2609538"/>
               <a:ext cx="62384" cy="62384"/>
             </a:xfrm>
             <a:prstGeom prst="ellipse">
@@ -7914,7 +7914,7 @@
           </p:nvSpPr>
           <p:spPr>
             <a:xfrm>
-              <a:off x="2625682" y="2689538"/>
+              <a:off x="2661928" y="2689538"/>
               <a:ext cx="62384" cy="62384"/>
             </a:xfrm>
             <a:prstGeom prst="ellipse">
@@ -7940,7 +7940,7 @@
           </p:nvSpPr>
           <p:spPr>
             <a:xfrm>
-              <a:off x="2809915" y="3347710"/>
+              <a:off x="2752746" y="3347710"/>
               <a:ext cx="62384" cy="62384"/>
             </a:xfrm>
             <a:prstGeom prst="ellipse">
@@ -7966,7 +7966,7 @@
           </p:nvSpPr>
           <p:spPr>
             <a:xfrm>
-              <a:off x="2658852" y="3054567"/>
+              <a:off x="2624942" y="3054567"/>
               <a:ext cx="62384" cy="62384"/>
             </a:xfrm>
             <a:prstGeom prst="ellipse">
@@ -7992,7 +7992,7 @@
           </p:nvSpPr>
           <p:spPr>
             <a:xfrm>
-              <a:off x="2756751" y="3166091"/>
+              <a:off x="2787021" y="3166091"/>
               <a:ext cx="62384" cy="62384"/>
             </a:xfrm>
             <a:prstGeom prst="ellipse">
@@ -8018,7 +8018,7 @@
           </p:nvSpPr>
           <p:spPr>
             <a:xfrm>
-              <a:off x="2623897" y="2524098"/>
+              <a:off x="2646466" y="2524098"/>
               <a:ext cx="62384" cy="62384"/>
             </a:xfrm>
             <a:prstGeom prst="ellipse">
@@ -8044,7 +8044,7 @@
           </p:nvSpPr>
           <p:spPr>
             <a:xfrm>
-              <a:off x="2755320" y="2502937"/>
+              <a:off x="2779882" y="2502937"/>
               <a:ext cx="62384" cy="62384"/>
             </a:xfrm>
             <a:prstGeom prst="ellipse">
@@ -8070,7 +8070,7 @@
           </p:nvSpPr>
           <p:spPr>
             <a:xfrm>
-              <a:off x="2636331" y="2447043"/>
+              <a:off x="2632034" y="2447043"/>
               <a:ext cx="62384" cy="62384"/>
             </a:xfrm>
             <a:prstGeom prst="ellipse">
@@ -8096,7 +8096,7 @@
           </p:nvSpPr>
           <p:spPr>
             <a:xfrm>
-              <a:off x="2761784" y="2957010"/>
+              <a:off x="2787970" y="2957010"/>
               <a:ext cx="62384" cy="62384"/>
             </a:xfrm>
             <a:prstGeom prst="ellipse">
@@ -8122,7 +8122,7 @@
           </p:nvSpPr>
           <p:spPr>
             <a:xfrm>
-              <a:off x="2625918" y="2488115"/>
+              <a:off x="2632988" y="2488115"/>
               <a:ext cx="62384" cy="62384"/>
             </a:xfrm>
             <a:prstGeom prst="ellipse">
@@ -8148,7 +8148,7 @@
           </p:nvSpPr>
           <p:spPr>
             <a:xfrm>
-              <a:off x="2821121" y="2636345"/>
+              <a:off x="2813634" y="2636345"/>
               <a:ext cx="62384" cy="62384"/>
             </a:xfrm>
             <a:prstGeom prst="ellipse">
@@ -8174,7 +8174,7 @@
           </p:nvSpPr>
           <p:spPr>
             <a:xfrm>
-              <a:off x="2619695" y="3331458"/>
+              <a:off x="2607462" y="3331458"/>
               <a:ext cx="62384" cy="62384"/>
             </a:xfrm>
             <a:prstGeom prst="ellipse">
@@ -8200,7 +8200,7 @@
           </p:nvSpPr>
           <p:spPr>
             <a:xfrm>
-              <a:off x="2786128" y="3176744"/>
+              <a:off x="2769707" y="3176744"/>
               <a:ext cx="62384" cy="62384"/>
             </a:xfrm>
             <a:prstGeom prst="ellipse">
@@ -8226,7 +8226,7 @@
           </p:nvSpPr>
           <p:spPr>
             <a:xfrm>
-              <a:off x="2669132" y="2946947"/>
+              <a:off x="2620905" y="2946947"/>
               <a:ext cx="62384" cy="62384"/>
             </a:xfrm>
             <a:prstGeom prst="ellipse">
@@ -8252,7 +8252,7 @@
           </p:nvSpPr>
           <p:spPr>
             <a:xfrm>
-              <a:off x="2786139" y="2994744"/>
+              <a:off x="2755851" y="2994744"/>
               <a:ext cx="62384" cy="62384"/>
             </a:xfrm>
             <a:prstGeom prst="ellipse">
@@ -8278,7 +8278,7 @@
           </p:nvSpPr>
           <p:spPr>
             <a:xfrm>
-              <a:off x="2657554" y="3049734"/>
+              <a:off x="2639586" y="3049734"/>
               <a:ext cx="62384" cy="62384"/>
             </a:xfrm>
             <a:prstGeom prst="ellipse">
@@ -8304,7 +8304,7 @@
           </p:nvSpPr>
           <p:spPr>
             <a:xfrm>
-              <a:off x="2753800" y="2980496"/>
+              <a:off x="2802843" y="2980496"/>
               <a:ext cx="62384" cy="62384"/>
             </a:xfrm>
             <a:prstGeom prst="ellipse">
@@ -8330,7 +8330,7 @@
           </p:nvSpPr>
           <p:spPr>
             <a:xfrm>
-              <a:off x="2658315" y="2853710"/>
+              <a:off x="2620731" y="2853710"/>
               <a:ext cx="62384" cy="62384"/>
             </a:xfrm>
             <a:prstGeom prst="ellipse">
@@ -8356,7 +8356,7 @@
           </p:nvSpPr>
           <p:spPr>
             <a:xfrm>
-              <a:off x="2760254" y="3070296"/>
+              <a:off x="2751264" y="3070296"/>
               <a:ext cx="62384" cy="62384"/>
             </a:xfrm>
             <a:prstGeom prst="ellipse">
@@ -8382,7 +8382,7 @@
           </p:nvSpPr>
           <p:spPr>
             <a:xfrm>
-              <a:off x="2602789" y="3365191"/>
+              <a:off x="2603306" y="3365191"/>
               <a:ext cx="62384" cy="62384"/>
             </a:xfrm>
             <a:prstGeom prst="ellipse">
@@ -8408,7 +8408,7 @@
           </p:nvSpPr>
           <p:spPr>
             <a:xfrm>
-              <a:off x="2824523" y="3631569"/>
+              <a:off x="2755184" y="3631569"/>
               <a:ext cx="62384" cy="62384"/>
             </a:xfrm>
             <a:prstGeom prst="ellipse">
@@ -8434,7 +8434,7 @@
           </p:nvSpPr>
           <p:spPr>
             <a:xfrm>
-              <a:off x="2663878" y="2445492"/>
+              <a:off x="2650722" y="2445492"/>
               <a:ext cx="62384" cy="62384"/>
             </a:xfrm>
             <a:prstGeom prst="ellipse">
@@ -8460,7 +8460,7 @@
           </p:nvSpPr>
           <p:spPr>
             <a:xfrm>
-              <a:off x="2755531" y="2376479"/>
+              <a:off x="2799103" y="2376479"/>
               <a:ext cx="62384" cy="62384"/>
             </a:xfrm>
             <a:prstGeom prst="ellipse">
@@ -8486,7 +8486,7 @@
           </p:nvSpPr>
           <p:spPr>
             <a:xfrm>
-              <a:off x="2666766" y="2851348"/>
+              <a:off x="2649034" y="2851348"/>
               <a:ext cx="62384" cy="62384"/>
             </a:xfrm>
             <a:prstGeom prst="ellipse">
@@ -8512,7 +8512,7 @@
           </p:nvSpPr>
           <p:spPr>
             <a:xfrm>
-              <a:off x="2797423" y="2969651"/>
+              <a:off x="2781340" y="2969651"/>
               <a:ext cx="62384" cy="62384"/>
             </a:xfrm>
             <a:prstGeom prst="ellipse">
@@ -8538,7 +8538,7 @@
           </p:nvSpPr>
           <p:spPr>
             <a:xfrm>
-              <a:off x="2603470" y="2409264"/>
+              <a:off x="2673584" y="2409264"/>
               <a:ext cx="62384" cy="62384"/>
             </a:xfrm>
             <a:prstGeom prst="ellipse">
@@ -8564,7 +8564,7 @@
           </p:nvSpPr>
           <p:spPr>
             <a:xfrm>
-              <a:off x="2816741" y="2288675"/>
+              <a:off x="2821012" y="2288675"/>
               <a:ext cx="62384" cy="62384"/>
             </a:xfrm>
             <a:prstGeom prst="ellipse">
@@ -8590,7 +8590,7 @@
           </p:nvSpPr>
           <p:spPr>
             <a:xfrm>
-              <a:off x="2662823" y="2651220"/>
+              <a:off x="2642526" y="2651220"/>
               <a:ext cx="62384" cy="62384"/>
             </a:xfrm>
             <a:prstGeom prst="ellipse">
@@ -8616,7 +8616,7 @@
           </p:nvSpPr>
           <p:spPr>
             <a:xfrm>
-              <a:off x="2807742" y="2677855"/>
+              <a:off x="2818613" y="2677855"/>
               <a:ext cx="62384" cy="62384"/>
             </a:xfrm>
             <a:prstGeom prst="ellipse">
@@ -8642,7 +8642,7 @@
           </p:nvSpPr>
           <p:spPr>
             <a:xfrm>
-              <a:off x="2617506" y="2434305"/>
+              <a:off x="2656615" y="2434305"/>
               <a:ext cx="62384" cy="62384"/>
             </a:xfrm>
             <a:prstGeom prst="ellipse">
@@ -8668,7 +8668,7 @@
           </p:nvSpPr>
           <p:spPr>
             <a:xfrm>
-              <a:off x="2780520" y="2542918"/>
+              <a:off x="2807786" y="2542918"/>
               <a:ext cx="62384" cy="62384"/>
             </a:xfrm>
             <a:prstGeom prst="ellipse">
@@ -8694,7 +8694,7 @@
           </p:nvSpPr>
           <p:spPr>
             <a:xfrm>
-              <a:off x="2673671" y="3613989"/>
+              <a:off x="2610796" y="3613989"/>
               <a:ext cx="62384" cy="62384"/>
             </a:xfrm>
             <a:prstGeom prst="ellipse">
@@ -8720,7 +8720,7 @@
           </p:nvSpPr>
           <p:spPr>
             <a:xfrm>
-              <a:off x="2791637" y="3540565"/>
+              <a:off x="2788062" y="3540565"/>
               <a:ext cx="62384" cy="62384"/>
             </a:xfrm>
             <a:prstGeom prst="ellipse">
@@ -8746,7 +8746,7 @@
           </p:nvSpPr>
           <p:spPr>
             <a:xfrm>
-              <a:off x="2625003" y="2467333"/>
+              <a:off x="2638076" y="2467333"/>
               <a:ext cx="62384" cy="62384"/>
             </a:xfrm>
             <a:prstGeom prst="ellipse">
@@ -8772,7 +8772,7 @@
           </p:nvSpPr>
           <p:spPr>
             <a:xfrm>
-              <a:off x="2821603" y="2672533"/>
+              <a:off x="2824358" y="2672533"/>
               <a:ext cx="62384" cy="62384"/>
             </a:xfrm>
             <a:prstGeom prst="ellipse">
@@ -8798,7 +8798,7 @@
           </p:nvSpPr>
           <p:spPr>
             <a:xfrm>
-              <a:off x="2607715" y="2697677"/>
+              <a:off x="2627964" y="2697677"/>
               <a:ext cx="62384" cy="62384"/>
             </a:xfrm>
             <a:prstGeom prst="ellipse">
@@ -8824,7 +8824,7 @@
           </p:nvSpPr>
           <p:spPr>
             <a:xfrm>
-              <a:off x="2793558" y="2661272"/>
+              <a:off x="2821198" y="2661272"/>
               <a:ext cx="62384" cy="62384"/>
             </a:xfrm>
             <a:prstGeom prst="ellipse">
@@ -8850,7 +8850,7 @@
           </p:nvSpPr>
           <p:spPr>
             <a:xfrm>
-              <a:off x="2607288" y="2543266"/>
+              <a:off x="2653916" y="2543266"/>
               <a:ext cx="62384" cy="62384"/>
             </a:xfrm>
             <a:prstGeom prst="ellipse">
@@ -8876,7 +8876,7 @@
           </p:nvSpPr>
           <p:spPr>
             <a:xfrm>
-              <a:off x="2778391" y="2826078"/>
+              <a:off x="2783795" y="2826078"/>
               <a:ext cx="62384" cy="62384"/>
             </a:xfrm>
             <a:prstGeom prst="ellipse">
@@ -8902,7 +8902,7 @@
           </p:nvSpPr>
           <p:spPr>
             <a:xfrm>
-              <a:off x="2621750" y="2223446"/>
+              <a:off x="2668862" y="2223446"/>
               <a:ext cx="62384" cy="62384"/>
             </a:xfrm>
             <a:prstGeom prst="ellipse">
@@ -8928,7 +8928,7 @@
           </p:nvSpPr>
           <p:spPr>
             <a:xfrm>
-              <a:off x="2761191" y="2406126"/>
+              <a:off x="2800985" y="2406126"/>
               <a:ext cx="62384" cy="62384"/>
             </a:xfrm>
             <a:prstGeom prst="ellipse">
@@ -8954,7 +8954,7 @@
           </p:nvSpPr>
           <p:spPr>
             <a:xfrm>
-              <a:off x="2649079" y="2427983"/>
+              <a:off x="2674900" y="2427983"/>
               <a:ext cx="62384" cy="62384"/>
             </a:xfrm>
             <a:prstGeom prst="ellipse">
@@ -8980,7 +8980,7 @@
           </p:nvSpPr>
           <p:spPr>
             <a:xfrm>
-              <a:off x="2753306" y="2452066"/>
+              <a:off x="2753586" y="2452066"/>
               <a:ext cx="62384" cy="62384"/>
             </a:xfrm>
             <a:prstGeom prst="ellipse">
@@ -9006,7 +9006,7 @@
           </p:nvSpPr>
           <p:spPr>
             <a:xfrm>
-              <a:off x="2641757" y="2844553"/>
+              <a:off x="2633436" y="2844553"/>
               <a:ext cx="62384" cy="62384"/>
             </a:xfrm>
             <a:prstGeom prst="ellipse">
@@ -9032,7 +9032,7 @@
           </p:nvSpPr>
           <p:spPr>
             <a:xfrm>
-              <a:off x="2817901" y="3247802"/>
+              <a:off x="2794001" y="3247802"/>
               <a:ext cx="62384" cy="62384"/>
             </a:xfrm>
             <a:prstGeom prst="ellipse">
@@ -9058,7 +9058,7 @@
           </p:nvSpPr>
           <p:spPr>
             <a:xfrm>
-              <a:off x="2653272" y="2803773"/>
+              <a:off x="2669168" y="2803773"/>
               <a:ext cx="62384" cy="62384"/>
             </a:xfrm>
             <a:prstGeom prst="ellipse">
@@ -9084,7 +9084,7 @@
           </p:nvSpPr>
           <p:spPr>
             <a:xfrm>
-              <a:off x="2774984" y="2695427"/>
+              <a:off x="2763359" y="2695427"/>
               <a:ext cx="62384" cy="62384"/>
             </a:xfrm>
             <a:prstGeom prst="ellipse">
@@ -9110,7 +9110,7 @@
           </p:nvSpPr>
           <p:spPr>
             <a:xfrm>
-              <a:off x="2636840" y="2452571"/>
+              <a:off x="2660767" y="2452571"/>
               <a:ext cx="62384" cy="62384"/>
             </a:xfrm>
             <a:prstGeom prst="ellipse">
@@ -9136,7 +9136,7 @@
           </p:nvSpPr>
           <p:spPr>
             <a:xfrm>
-              <a:off x="2792044" y="2660305"/>
+              <a:off x="2789830" y="2660305"/>
               <a:ext cx="62384" cy="62384"/>
             </a:xfrm>
             <a:prstGeom prst="ellipse">
@@ -9162,7 +9162,7 @@
           </p:nvSpPr>
           <p:spPr>
             <a:xfrm>
-              <a:off x="2624977" y="2763377"/>
+              <a:off x="2656646" y="2763377"/>
               <a:ext cx="62384" cy="62384"/>
             </a:xfrm>
             <a:prstGeom prst="ellipse">
@@ -9188,7 +9188,7 @@
           </p:nvSpPr>
           <p:spPr>
             <a:xfrm>
-              <a:off x="2767962" y="3077760"/>
+              <a:off x="2806679" y="3077760"/>
               <a:ext cx="62384" cy="62384"/>
             </a:xfrm>
             <a:prstGeom prst="ellipse">
@@ -9214,7 +9214,7 @@
           </p:nvSpPr>
           <p:spPr>
             <a:xfrm>
-              <a:off x="2628482" y="2558573"/>
+              <a:off x="2618240" y="2558573"/>
               <a:ext cx="62384" cy="62384"/>
             </a:xfrm>
             <a:prstGeom prst="ellipse">
@@ -9240,7 +9240,7 @@
           </p:nvSpPr>
           <p:spPr>
             <a:xfrm>
-              <a:off x="2774882" y="2728736"/>
+              <a:off x="2793521" y="2728736"/>
               <a:ext cx="62384" cy="62384"/>
             </a:xfrm>
             <a:prstGeom prst="ellipse">
@@ -9266,7 +9266,7 @@
           </p:nvSpPr>
           <p:spPr>
             <a:xfrm>
-              <a:off x="2661996" y="2475919"/>
+              <a:off x="2658205" y="2475919"/>
               <a:ext cx="62384" cy="62384"/>
             </a:xfrm>
             <a:prstGeom prst="ellipse">
@@ -9292,7 +9292,7 @@
           </p:nvSpPr>
           <p:spPr>
             <a:xfrm>
-              <a:off x="2774996" y="2674450"/>
+              <a:off x="2771145" y="2674450"/>
               <a:ext cx="62384" cy="62384"/>
             </a:xfrm>
             <a:prstGeom prst="ellipse">
@@ -9318,7 +9318,7 @@
           </p:nvSpPr>
           <p:spPr>
             <a:xfrm>
-              <a:off x="2620405" y="2116462"/>
+              <a:off x="2610894" y="2116462"/>
               <a:ext cx="62384" cy="62384"/>
             </a:xfrm>
             <a:prstGeom prst="ellipse">
@@ -9344,7 +9344,7 @@
           </p:nvSpPr>
           <p:spPr>
             <a:xfrm>
-              <a:off x="2825102" y="2446312"/>
+              <a:off x="2768550" y="2446312"/>
               <a:ext cx="62384" cy="62384"/>
             </a:xfrm>
             <a:prstGeom prst="ellipse">
@@ -9370,7 +9370,7 @@
           </p:nvSpPr>
           <p:spPr>
             <a:xfrm>
-              <a:off x="2658320" y="2334364"/>
+              <a:off x="2653685" y="2334364"/>
               <a:ext cx="62384" cy="62384"/>
             </a:xfrm>
             <a:prstGeom prst="ellipse">
@@ -9396,7 +9396,7 @@
           </p:nvSpPr>
           <p:spPr>
             <a:xfrm>
-              <a:off x="2801232" y="2862504"/>
+              <a:off x="2789690" y="2862504"/>
               <a:ext cx="62384" cy="62384"/>
             </a:xfrm>
             <a:prstGeom prst="ellipse">
@@ -9422,7 +9422,7 @@
           </p:nvSpPr>
           <p:spPr>
             <a:xfrm>
-              <a:off x="2625659" y="2040718"/>
+              <a:off x="2663670" y="2040718"/>
               <a:ext cx="62384" cy="62384"/>
             </a:xfrm>
             <a:prstGeom prst="ellipse">
@@ -9448,7 +9448,7 @@
           </p:nvSpPr>
           <p:spPr>
             <a:xfrm>
-              <a:off x="2810382" y="2487393"/>
+              <a:off x="2765466" y="2487393"/>
               <a:ext cx="62384" cy="62384"/>
             </a:xfrm>
             <a:prstGeom prst="ellipse">
@@ -9474,7 +9474,7 @@
           </p:nvSpPr>
           <p:spPr>
             <a:xfrm>
-              <a:off x="2652070" y="2377424"/>
+              <a:off x="2630516" y="2377424"/>
               <a:ext cx="62384" cy="62384"/>
             </a:xfrm>
             <a:prstGeom prst="ellipse">
@@ -9500,7 +9500,7 @@
           </p:nvSpPr>
           <p:spPr>
             <a:xfrm>
-              <a:off x="2823505" y="2501393"/>
+              <a:off x="2798787" y="2501393"/>
               <a:ext cx="62384" cy="62384"/>
             </a:xfrm>
             <a:prstGeom prst="ellipse">
@@ -9526,7 +9526,7 @@
           </p:nvSpPr>
           <p:spPr>
             <a:xfrm>
-              <a:off x="2652336" y="2585074"/>
+              <a:off x="2626352" y="2585074"/>
               <a:ext cx="62384" cy="62384"/>
             </a:xfrm>
             <a:prstGeom prst="ellipse">
@@ -9552,7 +9552,7 @@
           </p:nvSpPr>
           <p:spPr>
             <a:xfrm>
-              <a:off x="2784854" y="2403145"/>
+              <a:off x="2790491" y="2403145"/>
               <a:ext cx="62384" cy="62384"/>
             </a:xfrm>
             <a:prstGeom prst="ellipse">
@@ -9578,7 +9578,7 @@
           </p:nvSpPr>
           <p:spPr>
             <a:xfrm>
-              <a:off x="2663632" y="2640306"/>
+              <a:off x="2631768" y="2640306"/>
               <a:ext cx="62384" cy="62384"/>
             </a:xfrm>
             <a:prstGeom prst="ellipse">
@@ -9604,7 +9604,7 @@
           </p:nvSpPr>
           <p:spPr>
             <a:xfrm>
-              <a:off x="2766901" y="2884196"/>
+              <a:off x="2767628" y="2884196"/>
               <a:ext cx="62384" cy="62384"/>
             </a:xfrm>
             <a:prstGeom prst="ellipse">
@@ -9630,7 +9630,7 @@
           </p:nvSpPr>
           <p:spPr>
             <a:xfrm>
-              <a:off x="2614337" y="2916016"/>
+              <a:off x="2615445" y="2916016"/>
               <a:ext cx="62384" cy="62384"/>
             </a:xfrm>
             <a:prstGeom prst="ellipse">
@@ -9656,7 +9656,7 @@
           </p:nvSpPr>
           <p:spPr>
             <a:xfrm>
-              <a:off x="2754440" y="2815425"/>
+              <a:off x="2765941" y="2815425"/>
               <a:ext cx="62384" cy="62384"/>
             </a:xfrm>
             <a:prstGeom prst="ellipse">
@@ -9682,7 +9682,7 @@
           </p:nvSpPr>
           <p:spPr>
             <a:xfrm>
-              <a:off x="2650233" y="3048379"/>
+              <a:off x="2618878" y="3048379"/>
               <a:ext cx="62384" cy="62384"/>
             </a:xfrm>
             <a:prstGeom prst="ellipse">
@@ -9708,7 +9708,7 @@
           </p:nvSpPr>
           <p:spPr>
             <a:xfrm>
-              <a:off x="2784893" y="2867539"/>
+              <a:off x="2769602" y="2867539"/>
               <a:ext cx="62384" cy="62384"/>
             </a:xfrm>
             <a:prstGeom prst="ellipse">
@@ -9734,7 +9734,7 @@
           </p:nvSpPr>
           <p:spPr>
             <a:xfrm>
-              <a:off x="2654208" y="2421797"/>
+              <a:off x="2630254" y="2421797"/>
               <a:ext cx="62384" cy="62384"/>
             </a:xfrm>
             <a:prstGeom prst="ellipse">
@@ -9760,7 +9760,7 @@
           </p:nvSpPr>
           <p:spPr>
             <a:xfrm>
-              <a:off x="2768776" y="2471015"/>
+              <a:off x="2814603" y="2471015"/>
               <a:ext cx="62384" cy="62384"/>
             </a:xfrm>
             <a:prstGeom prst="ellipse">
@@ -9786,7 +9786,7 @@
           </p:nvSpPr>
           <p:spPr>
             <a:xfrm>
-              <a:off x="2611390" y="3006664"/>
+              <a:off x="2669683" y="3006664"/>
               <a:ext cx="62384" cy="62384"/>
             </a:xfrm>
             <a:prstGeom prst="ellipse">
@@ -9812,7 +9812,7 @@
           </p:nvSpPr>
           <p:spPr>
             <a:xfrm>
-              <a:off x="2803317" y="2842366"/>
+              <a:off x="2784448" y="2842366"/>
               <a:ext cx="62384" cy="62384"/>
             </a:xfrm>
             <a:prstGeom prst="ellipse">
@@ -9838,7 +9838,7 @@
           </p:nvSpPr>
           <p:spPr>
             <a:xfrm>
-              <a:off x="2617479" y="2761195"/>
+              <a:off x="2633480" y="2761195"/>
               <a:ext cx="62384" cy="62384"/>
             </a:xfrm>
             <a:prstGeom prst="ellipse">
@@ -9864,7 +9864,7 @@
           </p:nvSpPr>
           <p:spPr>
             <a:xfrm>
-              <a:off x="2772171" y="3071257"/>
+              <a:off x="2792741" y="3071257"/>
               <a:ext cx="62384" cy="62384"/>
             </a:xfrm>
             <a:prstGeom prst="ellipse">
@@ -9890,7 +9890,7 @@
           </p:nvSpPr>
           <p:spPr>
             <a:xfrm>
-              <a:off x="2600859" y="2819702"/>
+              <a:off x="2673403" y="2819702"/>
               <a:ext cx="62384" cy="62384"/>
             </a:xfrm>
             <a:prstGeom prst="ellipse">
@@ -9916,7 +9916,7 @@
           </p:nvSpPr>
           <p:spPr>
             <a:xfrm>
-              <a:off x="2784236" y="2796706"/>
+              <a:off x="2823504" y="2796706"/>
               <a:ext cx="62384" cy="62384"/>
             </a:xfrm>
             <a:prstGeom prst="ellipse">
@@ -9942,7 +9942,7 @@
           </p:nvSpPr>
           <p:spPr>
             <a:xfrm>
-              <a:off x="2665253" y="2894368"/>
+              <a:off x="2623480" y="2894368"/>
               <a:ext cx="62384" cy="62384"/>
             </a:xfrm>
             <a:prstGeom prst="ellipse">
@@ -9968,7 +9968,7 @@
           </p:nvSpPr>
           <p:spPr>
             <a:xfrm>
-              <a:off x="2753543" y="3196349"/>
+              <a:off x="2788769" y="3196349"/>
               <a:ext cx="62384" cy="62384"/>
             </a:xfrm>
             <a:prstGeom prst="ellipse">
@@ -9994,7 +9994,7 @@
           </p:nvSpPr>
           <p:spPr>
             <a:xfrm>
-              <a:off x="2604851" y="2562498"/>
+              <a:off x="2675273" y="2562498"/>
               <a:ext cx="62384" cy="62384"/>
             </a:xfrm>
             <a:prstGeom prst="ellipse">
@@ -10020,7 +10020,7 @@
           </p:nvSpPr>
           <p:spPr>
             <a:xfrm>
-              <a:off x="2801643" y="2549321"/>
+              <a:off x="2763837" y="2549321"/>
               <a:ext cx="62384" cy="62384"/>
             </a:xfrm>
             <a:prstGeom prst="ellipse">
@@ -10046,7 +10046,7 @@
           </p:nvSpPr>
           <p:spPr>
             <a:xfrm>
-              <a:off x="2662853" y="2826533"/>
+              <a:off x="2616979" y="2826533"/>
               <a:ext cx="62384" cy="62384"/>
             </a:xfrm>
             <a:prstGeom prst="ellipse">
@@ -10072,7 +10072,7 @@
           </p:nvSpPr>
           <p:spPr>
             <a:xfrm>
-              <a:off x="2779051" y="2950861"/>
+              <a:off x="2807237" y="2950861"/>
               <a:ext cx="62384" cy="62384"/>
             </a:xfrm>
             <a:prstGeom prst="ellipse">
@@ -10098,7 +10098,7 @@
           </p:nvSpPr>
           <p:spPr>
             <a:xfrm>
-              <a:off x="2627189" y="2626943"/>
+              <a:off x="2650143" y="2626943"/>
               <a:ext cx="62384" cy="62384"/>
             </a:xfrm>
             <a:prstGeom prst="ellipse">
@@ -10124,7 +10124,7 @@
           </p:nvSpPr>
           <p:spPr>
             <a:xfrm>
-              <a:off x="2785108" y="2644802"/>
+              <a:off x="2793856" y="2644802"/>
               <a:ext cx="62384" cy="62384"/>
             </a:xfrm>
             <a:prstGeom prst="ellipse">
@@ -10150,7 +10150,7 @@
           </p:nvSpPr>
           <p:spPr>
             <a:xfrm>
-              <a:off x="2616652" y="2357803"/>
+              <a:off x="2640959" y="2357803"/>
               <a:ext cx="62384" cy="62384"/>
             </a:xfrm>
             <a:prstGeom prst="ellipse">
@@ -10176,7 +10176,7 @@
           </p:nvSpPr>
           <p:spPr>
             <a:xfrm>
-              <a:off x="2750784" y="2418959"/>
+              <a:off x="2773872" y="2418959"/>
               <a:ext cx="62384" cy="62384"/>
             </a:xfrm>
             <a:prstGeom prst="ellipse">
@@ -10202,7 +10202,7 @@
           </p:nvSpPr>
           <p:spPr>
             <a:xfrm>
-              <a:off x="2661822" y="2676988"/>
+              <a:off x="2639087" y="2676988"/>
               <a:ext cx="62384" cy="62384"/>
             </a:xfrm>
             <a:prstGeom prst="ellipse">
@@ -10228,7 +10228,7 @@
           </p:nvSpPr>
           <p:spPr>
             <a:xfrm>
-              <a:off x="2815402" y="2738221"/>
+              <a:off x="2756225" y="2738221"/>
               <a:ext cx="62384" cy="62384"/>
             </a:xfrm>
             <a:prstGeom prst="ellipse">
@@ -10254,7 +10254,7 @@
           </p:nvSpPr>
           <p:spPr>
             <a:xfrm>
-              <a:off x="2673799" y="2781744"/>
+              <a:off x="2668066" y="2781744"/>
               <a:ext cx="62384" cy="62384"/>
             </a:xfrm>
             <a:prstGeom prst="ellipse">
@@ -10280,7 +10280,7 @@
           </p:nvSpPr>
           <p:spPr>
             <a:xfrm>
-              <a:off x="2799453" y="2720172"/>
+              <a:off x="2823342" y="2720172"/>
               <a:ext cx="62384" cy="62384"/>
             </a:xfrm>
             <a:prstGeom prst="ellipse">
@@ -10306,7 +10306,7 @@
           </p:nvSpPr>
           <p:spPr>
             <a:xfrm>
-              <a:off x="2632592" y="2435407"/>
+              <a:off x="2630453" y="2435407"/>
               <a:ext cx="62384" cy="62384"/>
             </a:xfrm>
             <a:prstGeom prst="ellipse">
@@ -10332,7 +10332,7 @@
           </p:nvSpPr>
           <p:spPr>
             <a:xfrm>
-              <a:off x="2762962" y="2967996"/>
+              <a:off x="2778910" y="2967996"/>
               <a:ext cx="62384" cy="62384"/>
             </a:xfrm>
             <a:prstGeom prst="ellipse">
@@ -10358,7 +10358,7 @@
           </p:nvSpPr>
           <p:spPr>
             <a:xfrm>
-              <a:off x="2603041" y="2782377"/>
+              <a:off x="2670369" y="2782377"/>
               <a:ext cx="62384" cy="62384"/>
             </a:xfrm>
             <a:prstGeom prst="ellipse">
@@ -10384,7 +10384,7 @@
           </p:nvSpPr>
           <p:spPr>
             <a:xfrm>
-              <a:off x="2820828" y="3148857"/>
+              <a:off x="2758167" y="3148857"/>
               <a:ext cx="62384" cy="62384"/>
             </a:xfrm>
             <a:prstGeom prst="ellipse">
@@ -10410,7 +10410,7 @@
           </p:nvSpPr>
           <p:spPr>
             <a:xfrm>
-              <a:off x="2671786" y="2763695"/>
+              <a:off x="2617625" y="2763695"/>
               <a:ext cx="62384" cy="62384"/>
             </a:xfrm>
             <a:prstGeom prst="ellipse">
@@ -10436,7 +10436,7 @@
           </p:nvSpPr>
           <p:spPr>
             <a:xfrm>
-              <a:off x="2788067" y="2590032"/>
+              <a:off x="2823003" y="2590032"/>
               <a:ext cx="62384" cy="62384"/>
             </a:xfrm>
             <a:prstGeom prst="ellipse">
@@ -10462,7 +10462,7 @@
           </p:nvSpPr>
           <p:spPr>
             <a:xfrm>
-              <a:off x="2671541" y="2609345"/>
+              <a:off x="2626999" y="2609345"/>
               <a:ext cx="62384" cy="62384"/>
             </a:xfrm>
             <a:prstGeom prst="ellipse">
@@ -10488,7 +10488,7 @@
           </p:nvSpPr>
           <p:spPr>
             <a:xfrm>
-              <a:off x="2806136" y="2795014"/>
+              <a:off x="2784446" y="2795014"/>
               <a:ext cx="62384" cy="62384"/>
             </a:xfrm>
             <a:prstGeom prst="ellipse">
@@ -10514,7 +10514,7 @@
           </p:nvSpPr>
           <p:spPr>
             <a:xfrm>
-              <a:off x="2655439" y="3136301"/>
+              <a:off x="2650842" y="3136301"/>
               <a:ext cx="62384" cy="62384"/>
             </a:xfrm>
             <a:prstGeom prst="ellipse">
@@ -10540,7 +10540,7 @@
           </p:nvSpPr>
           <p:spPr>
             <a:xfrm>
-              <a:off x="2758469" y="2954749"/>
+              <a:off x="2786913" y="2954749"/>
               <a:ext cx="62384" cy="62384"/>
             </a:xfrm>
             <a:prstGeom prst="ellipse">
@@ -10566,7 +10566,7 @@
           </p:nvSpPr>
           <p:spPr>
             <a:xfrm>
-              <a:off x="2621613" y="2620283"/>
+              <a:off x="2610906" y="2620283"/>
               <a:ext cx="62384" cy="62384"/>
             </a:xfrm>
             <a:prstGeom prst="ellipse">
@@ -10592,7 +10592,7 @@
           </p:nvSpPr>
           <p:spPr>
             <a:xfrm>
-              <a:off x="2772950" y="2525704"/>
+              <a:off x="2798622" y="2525704"/>
               <a:ext cx="62384" cy="62384"/>
             </a:xfrm>
             <a:prstGeom prst="ellipse">
@@ -10618,7 +10618,7 @@
           </p:nvSpPr>
           <p:spPr>
             <a:xfrm>
-              <a:off x="2602537" y="2580395"/>
+              <a:off x="2637020" y="2580395"/>
               <a:ext cx="62384" cy="62384"/>
             </a:xfrm>
             <a:prstGeom prst="ellipse">
@@ -10644,7 +10644,7 @@
           </p:nvSpPr>
           <p:spPr>
             <a:xfrm>
-              <a:off x="2799411" y="2472673"/>
+              <a:off x="2820936" y="2472673"/>
               <a:ext cx="62384" cy="62384"/>
             </a:xfrm>
             <a:prstGeom prst="ellipse">
@@ -10670,7 +10670,7 @@
           </p:nvSpPr>
           <p:spPr>
             <a:xfrm>
-              <a:off x="2642744" y="3097033"/>
+              <a:off x="2644794" y="3097033"/>
               <a:ext cx="62384" cy="62384"/>
             </a:xfrm>
             <a:prstGeom prst="ellipse">
@@ -10696,7 +10696,7 @@
           </p:nvSpPr>
           <p:spPr>
             <a:xfrm>
-              <a:off x="2801562" y="2626699"/>
+              <a:off x="2798935" y="2626699"/>
               <a:ext cx="62384" cy="62384"/>
             </a:xfrm>
             <a:prstGeom prst="ellipse">
@@ -10722,7 +10722,7 @@
           </p:nvSpPr>
           <p:spPr>
             <a:xfrm>
-              <a:off x="2665223" y="3186086"/>
+              <a:off x="2672784" y="3186086"/>
               <a:ext cx="62384" cy="62384"/>
             </a:xfrm>
             <a:prstGeom prst="ellipse">
@@ -10748,7 +10748,7 @@
           </p:nvSpPr>
           <p:spPr>
             <a:xfrm>
-              <a:off x="2787652" y="3110659"/>
+              <a:off x="2770910" y="3110659"/>
               <a:ext cx="62384" cy="62384"/>
             </a:xfrm>
             <a:prstGeom prst="ellipse">
@@ -10774,7 +10774,7 @@
           </p:nvSpPr>
           <p:spPr>
             <a:xfrm>
-              <a:off x="2640203" y="2412903"/>
+              <a:off x="2607487" y="2412903"/>
               <a:ext cx="62384" cy="62384"/>
             </a:xfrm>
             <a:prstGeom prst="ellipse">
@@ -10800,7 +10800,7 @@
           </p:nvSpPr>
           <p:spPr>
             <a:xfrm>
-              <a:off x="2761954" y="2588600"/>
+              <a:off x="2782489" y="2588600"/>
               <a:ext cx="62384" cy="62384"/>
             </a:xfrm>
             <a:prstGeom prst="ellipse">
@@ -10826,7 +10826,7 @@
           </p:nvSpPr>
           <p:spPr>
             <a:xfrm>
-              <a:off x="2651617" y="2868995"/>
+              <a:off x="2632698" y="2868995"/>
               <a:ext cx="62384" cy="62384"/>
             </a:xfrm>
             <a:prstGeom prst="ellipse">
@@ -10852,7 +10852,7 @@
           </p:nvSpPr>
           <p:spPr>
             <a:xfrm>
-              <a:off x="2762537" y="2858326"/>
+              <a:off x="2808215" y="2858326"/>
               <a:ext cx="62384" cy="62384"/>
             </a:xfrm>
             <a:prstGeom prst="ellipse">
@@ -10878,7 +10878,7 @@
           </p:nvSpPr>
           <p:spPr>
             <a:xfrm>
-              <a:off x="2640171" y="2717509"/>
+              <a:off x="2646484" y="2717509"/>
               <a:ext cx="62384" cy="62384"/>
             </a:xfrm>
             <a:prstGeom prst="ellipse">
@@ -10904,7 +10904,7 @@
           </p:nvSpPr>
           <p:spPr>
             <a:xfrm>
-              <a:off x="2786616" y="2742255"/>
+              <a:off x="2788000" y="2742255"/>
               <a:ext cx="62384" cy="62384"/>
             </a:xfrm>
             <a:prstGeom prst="ellipse">
@@ -10930,7 +10930,7 @@
           </p:nvSpPr>
           <p:spPr>
             <a:xfrm>
-              <a:off x="2652749" y="2582312"/>
+              <a:off x="2646845" y="2582312"/>
               <a:ext cx="62384" cy="62384"/>
             </a:xfrm>
             <a:prstGeom prst="ellipse">
@@ -10956,7 +10956,7 @@
           </p:nvSpPr>
           <p:spPr>
             <a:xfrm>
-              <a:off x="2761295" y="2772195"/>
+              <a:off x="2768682" y="2772195"/>
               <a:ext cx="62384" cy="62384"/>
             </a:xfrm>
             <a:prstGeom prst="ellipse">
@@ -10982,7 +10982,7 @@
           </p:nvSpPr>
           <p:spPr>
             <a:xfrm>
-              <a:off x="2658177" y="2802207"/>
+              <a:off x="2657043" y="2802207"/>
               <a:ext cx="62384" cy="62384"/>
             </a:xfrm>
             <a:prstGeom prst="ellipse">
@@ -11008,7 +11008,7 @@
           </p:nvSpPr>
           <p:spPr>
             <a:xfrm>
-              <a:off x="2773222" y="2553204"/>
+              <a:off x="2784907" y="2553204"/>
               <a:ext cx="62384" cy="62384"/>
             </a:xfrm>
             <a:prstGeom prst="ellipse">
@@ -11034,7 +11034,7 @@
           </p:nvSpPr>
           <p:spPr>
             <a:xfrm>
-              <a:off x="2653757" y="2873202"/>
+              <a:off x="2666825" y="2873202"/>
               <a:ext cx="62384" cy="62384"/>
             </a:xfrm>
             <a:prstGeom prst="ellipse">
@@ -11060,7 +11060,7 @@
           </p:nvSpPr>
           <p:spPr>
             <a:xfrm>
-              <a:off x="2755228" y="2651861"/>
+              <a:off x="2782661" y="2651861"/>
               <a:ext cx="62384" cy="62384"/>
             </a:xfrm>
             <a:prstGeom prst="ellipse">
@@ -11086,7 +11086,7 @@
           </p:nvSpPr>
           <p:spPr>
             <a:xfrm>
-              <a:off x="2658767" y="2526671"/>
+              <a:off x="2646811" y="2526671"/>
               <a:ext cx="62384" cy="62384"/>
             </a:xfrm>
             <a:prstGeom prst="ellipse">
@@ -11112,7 +11112,7 @@
           </p:nvSpPr>
           <p:spPr>
             <a:xfrm>
-              <a:off x="2789598" y="2461232"/>
+              <a:off x="2787849" y="2461232"/>
               <a:ext cx="62384" cy="62384"/>
             </a:xfrm>
             <a:prstGeom prst="ellipse">
@@ -11138,7 +11138,7 @@
           </p:nvSpPr>
           <p:spPr>
             <a:xfrm>
-              <a:off x="2664134" y="2238331"/>
+              <a:off x="2635759" y="2238331"/>
               <a:ext cx="62384" cy="62384"/>
             </a:xfrm>
             <a:prstGeom prst="ellipse">
@@ -11164,7 +11164,7 @@
           </p:nvSpPr>
           <p:spPr>
             <a:xfrm>
-              <a:off x="2803896" y="2207776"/>
+              <a:off x="2822679" y="2207776"/>
               <a:ext cx="62384" cy="62384"/>
             </a:xfrm>
             <a:prstGeom prst="ellipse">
@@ -11190,7 +11190,7 @@
           </p:nvSpPr>
           <p:spPr>
             <a:xfrm>
-              <a:off x="2614912" y="2480555"/>
+              <a:off x="2662596" y="2480555"/>
               <a:ext cx="62384" cy="62384"/>
             </a:xfrm>
             <a:prstGeom prst="ellipse">
@@ -11216,7 +11216,7 @@
           </p:nvSpPr>
           <p:spPr>
             <a:xfrm>
-              <a:off x="2796546" y="2413021"/>
+              <a:off x="2786504" y="2413021"/>
               <a:ext cx="62384" cy="62384"/>
             </a:xfrm>
             <a:prstGeom prst="ellipse">
@@ -11242,7 +11242,7 @@
           </p:nvSpPr>
           <p:spPr>
             <a:xfrm>
-              <a:off x="2658841" y="2378212"/>
+              <a:off x="2669807" y="2378212"/>
               <a:ext cx="62384" cy="62384"/>
             </a:xfrm>
             <a:prstGeom prst="ellipse">
@@ -11268,7 +11268,7 @@
           </p:nvSpPr>
           <p:spPr>
             <a:xfrm>
-              <a:off x="2816758" y="2319873"/>
+              <a:off x="2781823" y="2319873"/>
               <a:ext cx="62384" cy="62384"/>
             </a:xfrm>
             <a:prstGeom prst="ellipse">
@@ -11294,7 +11294,7 @@
           </p:nvSpPr>
           <p:spPr>
             <a:xfrm>
-              <a:off x="2663029" y="2516526"/>
+              <a:off x="2614087" y="2516526"/>
               <a:ext cx="62384" cy="62384"/>
             </a:xfrm>
             <a:prstGeom prst="ellipse">
@@ -11320,7 +11320,7 @@
           </p:nvSpPr>
           <p:spPr>
             <a:xfrm>
-              <a:off x="2797714" y="2671149"/>
+              <a:off x="2771001" y="2671149"/>
               <a:ext cx="62384" cy="62384"/>
             </a:xfrm>
             <a:prstGeom prst="ellipse">
@@ -11346,7 +11346,7 @@
           </p:nvSpPr>
           <p:spPr>
             <a:xfrm>
-              <a:off x="2635532" y="2891576"/>
+              <a:off x="2633909" y="2891576"/>
               <a:ext cx="62384" cy="62384"/>
             </a:xfrm>
             <a:prstGeom prst="ellipse">
@@ -11372,7 +11372,7 @@
           </p:nvSpPr>
           <p:spPr>
             <a:xfrm>
-              <a:off x="2767929" y="2854399"/>
+              <a:off x="2802850" y="2854399"/>
               <a:ext cx="62384" cy="62384"/>
             </a:xfrm>
             <a:prstGeom prst="ellipse">
@@ -11398,7 +11398,7 @@
           </p:nvSpPr>
           <p:spPr>
             <a:xfrm>
-              <a:off x="2625521" y="2790183"/>
+              <a:off x="2629108" y="2790183"/>
               <a:ext cx="62384" cy="62384"/>
             </a:xfrm>
             <a:prstGeom prst="ellipse">
@@ -11424,7 +11424,7 @@
           </p:nvSpPr>
           <p:spPr>
             <a:xfrm>
-              <a:off x="2792882" y="2633806"/>
+              <a:off x="2816642" y="2633806"/>
               <a:ext cx="62384" cy="62384"/>
             </a:xfrm>
             <a:prstGeom prst="ellipse">
@@ -11450,7 +11450,7 @@
           </p:nvSpPr>
           <p:spPr>
             <a:xfrm>
-              <a:off x="2666518" y="2664992"/>
+              <a:off x="2668117" y="2664992"/>
               <a:ext cx="62384" cy="62384"/>
             </a:xfrm>
             <a:prstGeom prst="ellipse">
@@ -11476,7 +11476,7 @@
           </p:nvSpPr>
           <p:spPr>
             <a:xfrm>
-              <a:off x="2763716" y="2462177"/>
+              <a:off x="2790073" y="2462177"/>
               <a:ext cx="62384" cy="62384"/>
             </a:xfrm>
             <a:prstGeom prst="ellipse">
@@ -11502,7 +11502,7 @@
           </p:nvSpPr>
           <p:spPr>
             <a:xfrm>
-              <a:off x="2627186" y="2226842"/>
+              <a:off x="2641666" y="2226842"/>
               <a:ext cx="62384" cy="62384"/>
             </a:xfrm>
             <a:prstGeom prst="ellipse">
@@ -11528,7 +11528,7 @@
           </p:nvSpPr>
           <p:spPr>
             <a:xfrm>
-              <a:off x="2778618" y="2271804"/>
+              <a:off x="2784520" y="2271804"/>
               <a:ext cx="62384" cy="62384"/>
             </a:xfrm>
             <a:prstGeom prst="ellipse">
@@ -11554,7 +11554,7 @@
           </p:nvSpPr>
           <p:spPr>
             <a:xfrm>
-              <a:off x="2615803" y="3018506"/>
+              <a:off x="2622443" y="3018506"/>
               <a:ext cx="62384" cy="62384"/>
             </a:xfrm>
             <a:prstGeom prst="ellipse">
@@ -11580,7 +11580,7 @@
           </p:nvSpPr>
           <p:spPr>
             <a:xfrm>
-              <a:off x="2751447" y="2477842"/>
+              <a:off x="2778873" y="2477842"/>
               <a:ext cx="62384" cy="62384"/>
             </a:xfrm>
             <a:prstGeom prst="ellipse">
@@ -11606,7 +11606,7 @@
           </p:nvSpPr>
           <p:spPr>
             <a:xfrm>
-              <a:off x="2659056" y="2524713"/>
+              <a:off x="2646349" y="2524713"/>
               <a:ext cx="62384" cy="62384"/>
             </a:xfrm>
             <a:prstGeom prst="ellipse">
@@ -11632,7 +11632,7 @@
           </p:nvSpPr>
           <p:spPr>
             <a:xfrm>
-              <a:off x="2778710" y="2699687"/>
+              <a:off x="2792217" y="2699687"/>
               <a:ext cx="62384" cy="62384"/>
             </a:xfrm>
             <a:prstGeom prst="ellipse">
@@ -11658,7 +11658,7 @@
           </p:nvSpPr>
           <p:spPr>
             <a:xfrm>
-              <a:off x="2638828" y="2330471"/>
+              <a:off x="2639317" y="2330471"/>
               <a:ext cx="62384" cy="62384"/>
             </a:xfrm>
             <a:prstGeom prst="ellipse">
@@ -11684,7 +11684,7 @@
           </p:nvSpPr>
           <p:spPr>
             <a:xfrm>
-              <a:off x="2788113" y="2386403"/>
+              <a:off x="2762958" y="2386403"/>
               <a:ext cx="62384" cy="62384"/>
             </a:xfrm>
             <a:prstGeom prst="ellipse">
@@ -11710,7 +11710,7 @@
           </p:nvSpPr>
           <p:spPr>
             <a:xfrm>
-              <a:off x="2634398" y="2194223"/>
+              <a:off x="2663815" y="2194223"/>
               <a:ext cx="62384" cy="62384"/>
             </a:xfrm>
             <a:prstGeom prst="ellipse">
@@ -11736,7 +11736,7 @@
           </p:nvSpPr>
           <p:spPr>
             <a:xfrm>
-              <a:off x="2811594" y="2175583"/>
+              <a:off x="2802594" y="2175583"/>
               <a:ext cx="62384" cy="62384"/>
             </a:xfrm>
             <a:prstGeom prst="ellipse">
@@ -11762,7 +11762,7 @@
           </p:nvSpPr>
           <p:spPr>
             <a:xfrm>
-              <a:off x="2601593" y="2143979"/>
+              <a:off x="2622028" y="2143979"/>
               <a:ext cx="62384" cy="62384"/>
             </a:xfrm>
             <a:prstGeom prst="ellipse">
@@ -11788,7 +11788,7 @@
           </p:nvSpPr>
           <p:spPr>
             <a:xfrm>
-              <a:off x="2753715" y="1999557"/>
+              <a:off x="2792697" y="1999557"/>
               <a:ext cx="62384" cy="62384"/>
             </a:xfrm>
             <a:prstGeom prst="ellipse">
@@ -11814,7 +11814,7 @@
           </p:nvSpPr>
           <p:spPr>
             <a:xfrm>
-              <a:off x="2670520" y="1573875"/>
+              <a:off x="2665868" y="1573875"/>
               <a:ext cx="62384" cy="62384"/>
             </a:xfrm>
             <a:prstGeom prst="ellipse">
@@ -11840,7 +11840,7 @@
           </p:nvSpPr>
           <p:spPr>
             <a:xfrm>
-              <a:off x="2764144" y="2338217"/>
+              <a:off x="2802788" y="2338217"/>
               <a:ext cx="62384" cy="62384"/>
             </a:xfrm>
             <a:prstGeom prst="ellipse">
@@ -11866,7 +11866,7 @@
           </p:nvSpPr>
           <p:spPr>
             <a:xfrm>
-              <a:off x="2656782" y="2537992"/>
+              <a:off x="2661623" y="2537992"/>
               <a:ext cx="62384" cy="62384"/>
             </a:xfrm>
             <a:prstGeom prst="ellipse">
@@ -11892,7 +11892,7 @@
           </p:nvSpPr>
           <p:spPr>
             <a:xfrm>
-              <a:off x="2779738" y="2581861"/>
+              <a:off x="2819824" y="2581861"/>
               <a:ext cx="62384" cy="62384"/>
             </a:xfrm>
             <a:prstGeom prst="ellipse">
@@ -11918,7 +11918,7 @@
           </p:nvSpPr>
           <p:spPr>
             <a:xfrm>
-              <a:off x="2629432" y="2278253"/>
+              <a:off x="2640468" y="2278253"/>
               <a:ext cx="62384" cy="62384"/>
             </a:xfrm>
             <a:prstGeom prst="ellipse">
@@ -11944,7 +11944,7 @@
           </p:nvSpPr>
           <p:spPr>
             <a:xfrm>
-              <a:off x="2752192" y="2238716"/>
+              <a:off x="2756809" y="2238716"/>
               <a:ext cx="62384" cy="62384"/>
             </a:xfrm>
             <a:prstGeom prst="ellipse">
@@ -11970,7 +11970,7 @@
           </p:nvSpPr>
           <p:spPr>
             <a:xfrm>
-              <a:off x="3670358" y="2977551"/>
+              <a:off x="3678461" y="2977551"/>
               <a:ext cx="62384" cy="62384"/>
             </a:xfrm>
             <a:prstGeom prst="ellipse">
@@ -11996,7 +11996,7 @@
           </p:nvSpPr>
           <p:spPr>
             <a:xfrm>
-              <a:off x="3827617" y="2742761"/>
+              <a:off x="3848654" y="2742761"/>
               <a:ext cx="62384" cy="62384"/>
             </a:xfrm>
             <a:prstGeom prst="ellipse">
@@ -12022,7 +12022,7 @@
           </p:nvSpPr>
           <p:spPr>
             <a:xfrm>
-              <a:off x="3675509" y="2240077"/>
+              <a:off x="3675902" y="2240077"/>
               <a:ext cx="62384" cy="62384"/>
             </a:xfrm>
             <a:prstGeom prst="ellipse">
@@ -12048,7 +12048,7 @@
           </p:nvSpPr>
           <p:spPr>
             <a:xfrm>
-              <a:off x="3790795" y="2461670"/>
+              <a:off x="3843644" y="2461670"/>
               <a:ext cx="62384" cy="62384"/>
             </a:xfrm>
             <a:prstGeom prst="ellipse">
@@ -12074,7 +12074,7 @@
           </p:nvSpPr>
           <p:spPr>
             <a:xfrm>
-              <a:off x="3707879" y="2283992"/>
+              <a:off x="3650026" y="2283992"/>
               <a:ext cx="62384" cy="62384"/>
             </a:xfrm>
             <a:prstGeom prst="ellipse">
@@ -12100,7 +12100,7 @@
           </p:nvSpPr>
           <p:spPr>
             <a:xfrm>
-              <a:off x="3804080" y="2723369"/>
+              <a:off x="3835822" y="2723369"/>
               <a:ext cx="62384" cy="62384"/>
             </a:xfrm>
             <a:prstGeom prst="ellipse">
@@ -12126,7 +12126,7 @@
           </p:nvSpPr>
           <p:spPr>
             <a:xfrm>
-              <a:off x="3690386" y="2041087"/>
+              <a:off x="3682008" y="2041087"/>
               <a:ext cx="62384" cy="62384"/>
             </a:xfrm>
             <a:prstGeom prst="ellipse">
@@ -12152,7 +12152,7 @@
           </p:nvSpPr>
           <p:spPr>
             <a:xfrm>
-              <a:off x="3855504" y="2268115"/>
+              <a:off x="3796749" y="2268115"/>
               <a:ext cx="62384" cy="62384"/>
             </a:xfrm>
             <a:prstGeom prst="ellipse">
@@ -12178,7 +12178,7 @@
           </p:nvSpPr>
           <p:spPr>
             <a:xfrm>
-              <a:off x="3678281" y="2323605"/>
+              <a:off x="3642903" y="2323605"/>
               <a:ext cx="62384" cy="62384"/>
             </a:xfrm>
             <a:prstGeom prst="ellipse">
@@ -12204,7 +12204,7 @@
           </p:nvSpPr>
           <p:spPr>
             <a:xfrm>
-              <a:off x="3793825" y="2444426"/>
+              <a:off x="3794945" y="2444426"/>
               <a:ext cx="62384" cy="62384"/>
             </a:xfrm>
             <a:prstGeom prst="ellipse">
@@ -12230,7 +12230,7 @@
           </p:nvSpPr>
           <p:spPr>
             <a:xfrm>
-              <a:off x="3641301" y="2473336"/>
+              <a:off x="3708530" y="2473336"/>
               <a:ext cx="62384" cy="62384"/>
             </a:xfrm>
             <a:prstGeom prst="ellipse">
@@ -12256,7 +12256,7 @@
           </p:nvSpPr>
           <p:spPr>
             <a:xfrm>
-              <a:off x="3842249" y="2879524"/>
+              <a:off x="3807030" y="2879524"/>
               <a:ext cx="62384" cy="62384"/>
             </a:xfrm>
             <a:prstGeom prst="ellipse">
@@ -12282,7 +12282,7 @@
           </p:nvSpPr>
           <p:spPr>
             <a:xfrm>
-              <a:off x="3699440" y="2359280"/>
+              <a:off x="3694165" y="2359280"/>
               <a:ext cx="62384" cy="62384"/>
             </a:xfrm>
             <a:prstGeom prst="ellipse">
@@ -12308,7 +12308,7 @@
           </p:nvSpPr>
           <p:spPr>
             <a:xfrm>
-              <a:off x="3799259" y="2416077"/>
+              <a:off x="3834767" y="2416077"/>
               <a:ext cx="62384" cy="62384"/>
             </a:xfrm>
             <a:prstGeom prst="ellipse">
@@ -12334,7 +12334,7 @@
           </p:nvSpPr>
           <p:spPr>
             <a:xfrm>
-              <a:off x="3694150" y="2548773"/>
+              <a:off x="3686527" y="2548773"/>
               <a:ext cx="62384" cy="62384"/>
             </a:xfrm>
             <a:prstGeom prst="ellipse">
@@ -12360,7 +12360,7 @@
           </p:nvSpPr>
           <p:spPr>
             <a:xfrm>
-              <a:off x="3837017" y="2545186"/>
+              <a:off x="3820585" y="2545186"/>
               <a:ext cx="62384" cy="62384"/>
             </a:xfrm>
             <a:prstGeom prst="ellipse">
@@ -12386,7 +12386,7 @@
           </p:nvSpPr>
           <p:spPr>
             <a:xfrm>
-              <a:off x="3697773" y="2621169"/>
+              <a:off x="3688543" y="2621169"/>
               <a:ext cx="62384" cy="62384"/>
             </a:xfrm>
             <a:prstGeom prst="ellipse">
@@ -12412,7 +12412,7 @@
           </p:nvSpPr>
           <p:spPr>
             <a:xfrm>
-              <a:off x="3843974" y="2652582"/>
+              <a:off x="3834403" y="2652582"/>
               <a:ext cx="62384" cy="62384"/>
             </a:xfrm>
             <a:prstGeom prst="ellipse">
@@ -12438,7 +12438,7 @@
           </p:nvSpPr>
           <p:spPr>
             <a:xfrm>
-              <a:off x="3639976" y="2757682"/>
+              <a:off x="3674992" y="2757682"/>
               <a:ext cx="62384" cy="62384"/>
             </a:xfrm>
             <a:prstGeom prst="ellipse">
@@ -12464,7 +12464,7 @@
           </p:nvSpPr>
           <p:spPr>
             <a:xfrm>
-              <a:off x="3835821" y="2917328"/>
+              <a:off x="3812519" y="2917328"/>
               <a:ext cx="62384" cy="62384"/>
             </a:xfrm>
             <a:prstGeom prst="ellipse">
@@ -12490,7 +12490,7 @@
           </p:nvSpPr>
           <p:spPr>
             <a:xfrm>
-              <a:off x="3683493" y="2875369"/>
+              <a:off x="3664209" y="2875369"/>
               <a:ext cx="62384" cy="62384"/>
             </a:xfrm>
             <a:prstGeom prst="ellipse">
@@ -12516,7 +12516,7 @@
           </p:nvSpPr>
           <p:spPr>
             <a:xfrm>
-              <a:off x="3792788" y="3234895"/>
+              <a:off x="3821140" y="3234895"/>
               <a:ext cx="62384" cy="62384"/>
             </a:xfrm>
             <a:prstGeom prst="ellipse">
@@ -12542,7 +12542,7 @@
           </p:nvSpPr>
           <p:spPr>
             <a:xfrm>
-              <a:off x="3644330" y="2281355"/>
+              <a:off x="3680847" y="2281355"/>
               <a:ext cx="62384" cy="62384"/>
             </a:xfrm>
             <a:prstGeom prst="ellipse">
@@ -12568,7 +12568,7 @@
           </p:nvSpPr>
           <p:spPr>
             <a:xfrm>
-              <a:off x="3856175" y="2494850"/>
+              <a:off x="3811954" y="2494850"/>
               <a:ext cx="62384" cy="62384"/>
             </a:xfrm>
             <a:prstGeom prst="ellipse">
@@ -12594,7 +12594,7 @@
           </p:nvSpPr>
           <p:spPr>
             <a:xfrm>
-              <a:off x="3678630" y="2750417"/>
+              <a:off x="3711260" y="2750417"/>
               <a:ext cx="62384" cy="62384"/>
             </a:xfrm>
             <a:prstGeom prst="ellipse">
@@ -12620,7 +12620,7 @@
           </p:nvSpPr>
           <p:spPr>
             <a:xfrm>
-              <a:off x="3813890" y="2929440"/>
+              <a:off x="3798375" y="2929440"/>
               <a:ext cx="62384" cy="62384"/>
             </a:xfrm>
             <a:prstGeom prst="ellipse">
@@ -12646,7 +12646,7 @@
           </p:nvSpPr>
           <p:spPr>
             <a:xfrm>
-              <a:off x="3660475" y="2054400"/>
+              <a:off x="3688099" y="2054400"/>
               <a:ext cx="62384" cy="62384"/>
             </a:xfrm>
             <a:prstGeom prst="ellipse">
@@ -12672,7 +12672,7 @@
           </p:nvSpPr>
           <p:spPr>
             <a:xfrm>
-              <a:off x="3790085" y="2378063"/>
+              <a:off x="3801108" y="2378063"/>
               <a:ext cx="62384" cy="62384"/>
             </a:xfrm>
             <a:prstGeom prst="ellipse">
@@ -12698,7 +12698,7 @@
           </p:nvSpPr>
           <p:spPr>
             <a:xfrm>
-              <a:off x="3657678" y="2280071"/>
+              <a:off x="3654012" y="2280071"/>
               <a:ext cx="62384" cy="62384"/>
             </a:xfrm>
             <a:prstGeom prst="ellipse">
@@ -12724,7 +12724,7 @@
           </p:nvSpPr>
           <p:spPr>
             <a:xfrm>
-              <a:off x="3803561" y="2442307"/>
+              <a:off x="3793359" y="2442307"/>
               <a:ext cx="62384" cy="62384"/>
             </a:xfrm>
             <a:prstGeom prst="ellipse">
@@ -12750,7 +12750,7 @@
           </p:nvSpPr>
           <p:spPr>
             <a:xfrm>
-              <a:off x="3675662" y="2068688"/>
+              <a:off x="3669346" y="2068688"/>
               <a:ext cx="62384" cy="62384"/>
             </a:xfrm>
             <a:prstGeom prst="ellipse">
@@ -12776,7 +12776,7 @@
           </p:nvSpPr>
           <p:spPr>
             <a:xfrm>
-              <a:off x="3812496" y="2353083"/>
+              <a:off x="3792989" y="2353083"/>
               <a:ext cx="62384" cy="62384"/>
             </a:xfrm>
             <a:prstGeom prst="ellipse">
@@ -12802,7 +12802,7 @@
           </p:nvSpPr>
           <p:spPr>
             <a:xfrm>
-              <a:off x="3644264" y="3379721"/>
+              <a:off x="3664039" y="3379721"/>
               <a:ext cx="62384" cy="62384"/>
             </a:xfrm>
             <a:prstGeom prst="ellipse">
@@ -12828,7 +12828,7 @@
           </p:nvSpPr>
           <p:spPr>
             <a:xfrm>
-              <a:off x="3849156" y="3189255"/>
+              <a:off x="3795379" y="3189255"/>
               <a:ext cx="62384" cy="62384"/>
             </a:xfrm>
             <a:prstGeom prst="ellipse">
@@ -12854,7 +12854,7 @@
           </p:nvSpPr>
           <p:spPr>
             <a:xfrm>
-              <a:off x="3667184" y="3009233"/>
+              <a:off x="3698671" y="3009233"/>
               <a:ext cx="62384" cy="62384"/>
             </a:xfrm>
             <a:prstGeom prst="ellipse">
@@ -12880,7 +12880,7 @@
           </p:nvSpPr>
           <p:spPr>
             <a:xfrm>
-              <a:off x="3804285" y="2727901"/>
+              <a:off x="3815002" y="2727901"/>
               <a:ext cx="62384" cy="62384"/>
             </a:xfrm>
             <a:prstGeom prst="ellipse">
@@ -12906,7 +12906,7 @@
           </p:nvSpPr>
           <p:spPr>
             <a:xfrm>
-              <a:off x="3712220" y="2078040"/>
+              <a:off x="3706559" y="2078040"/>
               <a:ext cx="62384" cy="62384"/>
             </a:xfrm>
             <a:prstGeom prst="ellipse">
@@ -12932,7 +12932,7 @@
           </p:nvSpPr>
           <p:spPr>
             <a:xfrm>
-              <a:off x="3814522" y="2538691"/>
+              <a:off x="3811525" y="2538691"/>
               <a:ext cx="62384" cy="62384"/>
             </a:xfrm>
             <a:prstGeom prst="ellipse">
@@ -12958,7 +12958,7 @@
           </p:nvSpPr>
           <p:spPr>
             <a:xfrm>
-              <a:off x="3657305" y="2664221"/>
+              <a:off x="3679488" y="2664221"/>
               <a:ext cx="62384" cy="62384"/>
             </a:xfrm>
             <a:prstGeom prst="ellipse">
@@ -12984,7 +12984,7 @@
           </p:nvSpPr>
           <p:spPr>
             <a:xfrm>
-              <a:off x="3862367" y="2933998"/>
+              <a:off x="3796021" y="2933998"/>
               <a:ext cx="62384" cy="62384"/>
             </a:xfrm>
             <a:prstGeom prst="ellipse">
@@ -13010,7 +13010,7 @@
           </p:nvSpPr>
           <p:spPr>
             <a:xfrm>
-              <a:off x="3668308" y="2348837"/>
+              <a:off x="3693546" y="2348837"/>
               <a:ext cx="62384" cy="62384"/>
             </a:xfrm>
             <a:prstGeom prst="ellipse">
@@ -13036,7 +13036,7 @@
           </p:nvSpPr>
           <p:spPr>
             <a:xfrm>
-              <a:off x="3819025" y="2509938"/>
+              <a:off x="3808297" y="2509938"/>
               <a:ext cx="62384" cy="62384"/>
             </a:xfrm>
             <a:prstGeom prst="ellipse">
@@ -13062,7 +13062,7 @@
           </p:nvSpPr>
           <p:spPr>
             <a:xfrm>
-              <a:off x="3691334" y="2517579"/>
+              <a:off x="3640253" y="2517579"/>
               <a:ext cx="62384" cy="62384"/>
             </a:xfrm>
             <a:prstGeom prst="ellipse">
@@ -13088,7 +13088,7 @@
           </p:nvSpPr>
           <p:spPr>
             <a:xfrm>
-              <a:off x="3844939" y="2715871"/>
+              <a:off x="3817691" y="2715871"/>
               <a:ext cx="62384" cy="62384"/>
             </a:xfrm>
             <a:prstGeom prst="ellipse">
@@ -13114,7 +13114,7 @@
           </p:nvSpPr>
           <p:spPr>
             <a:xfrm>
-              <a:off x="3670565" y="3235693"/>
+              <a:off x="3644960" y="3235693"/>
               <a:ext cx="62384" cy="62384"/>
             </a:xfrm>
             <a:prstGeom prst="ellipse">
@@ -13140,7 +13140,7 @@
           </p:nvSpPr>
           <p:spPr>
             <a:xfrm>
-              <a:off x="3843853" y="3000286"/>
+              <a:off x="3834047" y="3000286"/>
               <a:ext cx="62384" cy="62384"/>
             </a:xfrm>
             <a:prstGeom prst="ellipse">
@@ -13166,7 +13166,7 @@
           </p:nvSpPr>
           <p:spPr>
             <a:xfrm>
-              <a:off x="3656106" y="2669317"/>
+              <a:off x="3698399" y="2669317"/>
               <a:ext cx="62384" cy="62384"/>
             </a:xfrm>
             <a:prstGeom prst="ellipse">
@@ -13192,7 +13192,7 @@
           </p:nvSpPr>
           <p:spPr>
             <a:xfrm>
-              <a:off x="3789675" y="2847542"/>
+              <a:off x="3792556" y="2847542"/>
               <a:ext cx="62384" cy="62384"/>
             </a:xfrm>
             <a:prstGeom prst="ellipse">
@@ -13218,7 +13218,7 @@
           </p:nvSpPr>
           <p:spPr>
             <a:xfrm>
-              <a:off x="3664308" y="2498627"/>
+              <a:off x="3697613" y="2498627"/>
               <a:ext cx="62384" cy="62384"/>
             </a:xfrm>
             <a:prstGeom prst="ellipse">
@@ -13244,7 +13244,7 @@
           </p:nvSpPr>
           <p:spPr>
             <a:xfrm>
-              <a:off x="3808799" y="2819046"/>
+              <a:off x="3842894" y="2819046"/>
               <a:ext cx="62384" cy="62384"/>
             </a:xfrm>
             <a:prstGeom prst="ellipse">
@@ -13270,7 +13270,7 @@
           </p:nvSpPr>
           <p:spPr>
             <a:xfrm>
-              <a:off x="3689528" y="2578249"/>
+              <a:off x="3679562" y="2578249"/>
               <a:ext cx="62384" cy="62384"/>
             </a:xfrm>
             <a:prstGeom prst="ellipse">
@@ -13296,7 +13296,7 @@
           </p:nvSpPr>
           <p:spPr>
             <a:xfrm>
-              <a:off x="3822133" y="2537367"/>
+              <a:off x="3845264" y="2537367"/>
               <a:ext cx="62384" cy="62384"/>
             </a:xfrm>
             <a:prstGeom prst="ellipse">
@@ -13322,7 +13322,7 @@
           </p:nvSpPr>
           <p:spPr>
             <a:xfrm>
-              <a:off x="3654453" y="3167872"/>
+              <a:off x="3668681" y="3167872"/>
               <a:ext cx="62384" cy="62384"/>
             </a:xfrm>
             <a:prstGeom prst="ellipse">
@@ -13348,7 +13348,7 @@
           </p:nvSpPr>
           <p:spPr>
             <a:xfrm>
-              <a:off x="3808902" y="3593954"/>
+              <a:off x="3819822" y="3593954"/>
               <a:ext cx="62384" cy="62384"/>
             </a:xfrm>
             <a:prstGeom prst="ellipse">
@@ -13374,7 +13374,7 @@
           </p:nvSpPr>
           <p:spPr>
             <a:xfrm>
-              <a:off x="3683671" y="2262805"/>
+              <a:off x="3656101" y="2262805"/>
               <a:ext cx="62384" cy="62384"/>
             </a:xfrm>
             <a:prstGeom prst="ellipse">
@@ -13400,7 +13400,7 @@
           </p:nvSpPr>
           <p:spPr>
             <a:xfrm>
-              <a:off x="3857089" y="2408758"/>
+              <a:off x="3860527" y="2408758"/>
               <a:ext cx="62384" cy="62384"/>
             </a:xfrm>
             <a:prstGeom prst="ellipse">
@@ -13426,7 +13426,7 @@
           </p:nvSpPr>
           <p:spPr>
             <a:xfrm>
-              <a:off x="3688788" y="2373463"/>
+              <a:off x="3707913" y="2373463"/>
               <a:ext cx="62384" cy="62384"/>
             </a:xfrm>
             <a:prstGeom prst="ellipse">
@@ -13452,7 +13452,7 @@
           </p:nvSpPr>
           <p:spPr>
             <a:xfrm>
-              <a:off x="3844553" y="2445711"/>
+              <a:off x="3844181" y="2445711"/>
               <a:ext cx="62384" cy="62384"/>
             </a:xfrm>
             <a:prstGeom prst="ellipse">
@@ -13478,7 +13478,7 @@
           </p:nvSpPr>
           <p:spPr>
             <a:xfrm>
-              <a:off x="3653418" y="2099485"/>
+              <a:off x="3661092" y="2099485"/>
               <a:ext cx="62384" cy="62384"/>
             </a:xfrm>
             <a:prstGeom prst="ellipse">
@@ -13504,7 +13504,7 @@
           </p:nvSpPr>
           <p:spPr>
             <a:xfrm>
-              <a:off x="3837002" y="2316253"/>
+              <a:off x="3805381" y="2316253"/>
               <a:ext cx="62384" cy="62384"/>
             </a:xfrm>
             <a:prstGeom prst="ellipse">
@@ -13530,7 +13530,7 @@
           </p:nvSpPr>
           <p:spPr>
             <a:xfrm>
-              <a:off x="3655061" y="2181084"/>
+              <a:off x="3689475" y="2181084"/>
               <a:ext cx="62384" cy="62384"/>
             </a:xfrm>
             <a:prstGeom prst="ellipse">
@@ -13556,7 +13556,7 @@
           </p:nvSpPr>
           <p:spPr>
             <a:xfrm>
-              <a:off x="3853374" y="2237597"/>
+              <a:off x="3852062" y="2237597"/>
               <a:ext cx="62384" cy="62384"/>
             </a:xfrm>
             <a:prstGeom prst="ellipse">
@@ -13582,7 +13582,7 @@
           </p:nvSpPr>
           <p:spPr>
             <a:xfrm>
-              <a:off x="3647832" y="2140051"/>
+              <a:off x="3639457" y="2140051"/>
               <a:ext cx="62384" cy="62384"/>
             </a:xfrm>
             <a:prstGeom prst="ellipse">
@@ -13608,7 +13608,7 @@
           </p:nvSpPr>
           <p:spPr>
             <a:xfrm>
-              <a:off x="3843864" y="2246736"/>
+              <a:off x="3795487" y="2246736"/>
               <a:ext cx="62384" cy="62384"/>
             </a:xfrm>
             <a:prstGeom prst="ellipse">
@@ -13634,7 +13634,7 @@
           </p:nvSpPr>
           <p:spPr>
             <a:xfrm>
-              <a:off x="3684535" y="2581683"/>
+              <a:off x="3694995" y="2581683"/>
               <a:ext cx="62384" cy="62384"/>
             </a:xfrm>
             <a:prstGeom prst="ellipse">
@@ -13660,7 +13660,7 @@
           </p:nvSpPr>
           <p:spPr>
             <a:xfrm>
-              <a:off x="3813275" y="2438602"/>
+              <a:off x="3830330" y="2438602"/>
               <a:ext cx="62384" cy="62384"/>
             </a:xfrm>
             <a:prstGeom prst="ellipse">
@@ -13686,7 +13686,7 @@
           </p:nvSpPr>
           <p:spPr>
             <a:xfrm>
-              <a:off x="3675199" y="2349594"/>
+              <a:off x="3687817" y="2349594"/>
               <a:ext cx="62384" cy="62384"/>
             </a:xfrm>
             <a:prstGeom prst="ellipse">
@@ -13712,7 +13712,7 @@
           </p:nvSpPr>
           <p:spPr>
             <a:xfrm>
-              <a:off x="3805798" y="2437996"/>
+              <a:off x="3837488" y="2437996"/>
               <a:ext cx="62384" cy="62384"/>
             </a:xfrm>
             <a:prstGeom prst="ellipse">
@@ -13738,7 +13738,7 @@
           </p:nvSpPr>
           <p:spPr>
             <a:xfrm>
-              <a:off x="3694739" y="1964034"/>
+              <a:off x="3678603" y="1964034"/>
               <a:ext cx="62384" cy="62384"/>
             </a:xfrm>
             <a:prstGeom prst="ellipse">
@@ -13764,7 +13764,7 @@
           </p:nvSpPr>
           <p:spPr>
             <a:xfrm>
-              <a:off x="3838361" y="2252554"/>
+              <a:off x="3846265" y="2252554"/>
               <a:ext cx="62384" cy="62384"/>
             </a:xfrm>
             <a:prstGeom prst="ellipse">
@@ -13790,7 +13790,7 @@
           </p:nvSpPr>
           <p:spPr>
             <a:xfrm>
-              <a:off x="3662004" y="2132194"/>
+              <a:off x="3662066" y="2132194"/>
               <a:ext cx="62384" cy="62384"/>
             </a:xfrm>
             <a:prstGeom prst="ellipse">
@@ -13816,7 +13816,7 @@
           </p:nvSpPr>
           <p:spPr>
             <a:xfrm>
-              <a:off x="3852560" y="2407124"/>
+              <a:off x="3812125" y="2407124"/>
               <a:ext cx="62384" cy="62384"/>
             </a:xfrm>
             <a:prstGeom prst="ellipse">
@@ -13842,7 +13842,7 @@
           </p:nvSpPr>
           <p:spPr>
             <a:xfrm>
-              <a:off x="3653929" y="2248572"/>
+              <a:off x="3710815" y="2248572"/>
               <a:ext cx="62384" cy="62384"/>
             </a:xfrm>
             <a:prstGeom prst="ellipse">
@@ -13868,7 +13868,7 @@
           </p:nvSpPr>
           <p:spPr>
             <a:xfrm>
-              <a:off x="3847994" y="2278113"/>
+              <a:off x="3822828" y="2278113"/>
               <a:ext cx="62384" cy="62384"/>
             </a:xfrm>
             <a:prstGeom prst="ellipse">
@@ -13894,7 +13894,7 @@
           </p:nvSpPr>
           <p:spPr>
             <a:xfrm>
-              <a:off x="3659107" y="2292972"/>
+              <a:off x="3684304" y="2292972"/>
               <a:ext cx="62384" cy="62384"/>
             </a:xfrm>
             <a:prstGeom prst="ellipse">
@@ -13920,7 +13920,7 @@
           </p:nvSpPr>
           <p:spPr>
             <a:xfrm>
-              <a:off x="3811132" y="2458867"/>
+              <a:off x="3849272" y="2458867"/>
               <a:ext cx="62384" cy="62384"/>
             </a:xfrm>
             <a:prstGeom prst="ellipse">
@@ -13946,7 +13946,7 @@
           </p:nvSpPr>
           <p:spPr>
             <a:xfrm>
-              <a:off x="3674784" y="2015073"/>
+              <a:off x="3688385" y="2015073"/>
               <a:ext cx="62384" cy="62384"/>
             </a:xfrm>
             <a:prstGeom prst="ellipse">
@@ -13972,7 +13972,7 @@
           </p:nvSpPr>
           <p:spPr>
             <a:xfrm>
-              <a:off x="3855615" y="2152530"/>
+              <a:off x="3811015" y="2152530"/>
               <a:ext cx="62384" cy="62384"/>
             </a:xfrm>
             <a:prstGeom prst="ellipse">
@@ -13998,7 +13998,7 @@
           </p:nvSpPr>
           <p:spPr>
             <a:xfrm>
-              <a:off x="3647325" y="2053564"/>
+              <a:off x="3669064" y="2053564"/>
               <a:ext cx="62384" cy="62384"/>
             </a:xfrm>
             <a:prstGeom prst="ellipse">
@@ -14024,7 +14024,7 @@
           </p:nvSpPr>
           <p:spPr>
             <a:xfrm>
-              <a:off x="3831572" y="2015413"/>
+              <a:off x="3848208" y="2015413"/>
               <a:ext cx="62384" cy="62384"/>
             </a:xfrm>
             <a:prstGeom prst="ellipse">
@@ -14050,7 +14050,7 @@
           </p:nvSpPr>
           <p:spPr>
             <a:xfrm>
-              <a:off x="3663364" y="2293216"/>
+              <a:off x="3672285" y="2293216"/>
               <a:ext cx="62384" cy="62384"/>
             </a:xfrm>
             <a:prstGeom prst="ellipse">
@@ -14076,7 +14076,7 @@
           </p:nvSpPr>
           <p:spPr>
             <a:xfrm>
-              <a:off x="3838417" y="2322739"/>
+              <a:off x="3799657" y="2322739"/>
               <a:ext cx="62384" cy="62384"/>
             </a:xfrm>
             <a:prstGeom prst="ellipse">
@@ -14102,7 +14102,7 @@
           </p:nvSpPr>
           <p:spPr>
             <a:xfrm>
-              <a:off x="3640832" y="1888094"/>
+              <a:off x="3690192" y="1888094"/>
               <a:ext cx="62384" cy="62384"/>
             </a:xfrm>
             <a:prstGeom prst="ellipse">
@@ -14128,7 +14128,7 @@
           </p:nvSpPr>
           <p:spPr>
             <a:xfrm>
-              <a:off x="3835747" y="2522325"/>
+              <a:off x="3857618" y="2522325"/>
               <a:ext cx="62384" cy="62384"/>
             </a:xfrm>
             <a:prstGeom prst="ellipse">
@@ -14154,7 +14154,7 @@
           </p:nvSpPr>
           <p:spPr>
             <a:xfrm>
-              <a:off x="3651172" y="2121121"/>
+              <a:off x="3659937" y="2121121"/>
               <a:ext cx="62384" cy="62384"/>
             </a:xfrm>
             <a:prstGeom prst="ellipse">
@@ -14180,7 +14180,7 @@
           </p:nvSpPr>
           <p:spPr>
             <a:xfrm>
-              <a:off x="3823216" y="2376364"/>
+              <a:off x="3824999" y="2376364"/>
               <a:ext cx="62384" cy="62384"/>
             </a:xfrm>
             <a:prstGeom prst="ellipse">
@@ -14206,7 +14206,7 @@
           </p:nvSpPr>
           <p:spPr>
             <a:xfrm>
-              <a:off x="3697151" y="1984495"/>
+              <a:off x="3665565" y="1984495"/>
               <a:ext cx="62384" cy="62384"/>
             </a:xfrm>
             <a:prstGeom prst="ellipse">
@@ -14232,7 +14232,7 @@
           </p:nvSpPr>
           <p:spPr>
             <a:xfrm>
-              <a:off x="3835125" y="2234644"/>
+              <a:off x="3844814" y="2234644"/>
               <a:ext cx="62384" cy="62384"/>
             </a:xfrm>
             <a:prstGeom prst="ellipse">
@@ -14258,7 +14258,7 @@
           </p:nvSpPr>
           <p:spPr>
             <a:xfrm>
-              <a:off x="3655604" y="2191913"/>
+              <a:off x="3678884" y="2191913"/>
               <a:ext cx="62384" cy="62384"/>
             </a:xfrm>
             <a:prstGeom prst="ellipse">
@@ -14284,7 +14284,7 @@
           </p:nvSpPr>
           <p:spPr>
             <a:xfrm>
-              <a:off x="3810950" y="2416827"/>
+              <a:off x="3789601" y="2416827"/>
               <a:ext cx="62384" cy="62384"/>
             </a:xfrm>
             <a:prstGeom prst="ellipse">
@@ -14310,7 +14310,7 @@
           </p:nvSpPr>
           <p:spPr>
             <a:xfrm>
-              <a:off x="3648200" y="1671371"/>
+              <a:off x="3703325" y="1671371"/>
               <a:ext cx="62384" cy="62384"/>
             </a:xfrm>
             <a:prstGeom prst="ellipse">
@@ -14336,7 +14336,7 @@
           </p:nvSpPr>
           <p:spPr>
             <a:xfrm>
-              <a:off x="3863007" y="2197942"/>
+              <a:off x="3859950" y="2197942"/>
               <a:ext cx="62384" cy="62384"/>
             </a:xfrm>
             <a:prstGeom prst="ellipse">
@@ -14362,7 +14362,7 @@
           </p:nvSpPr>
           <p:spPr>
             <a:xfrm>
-              <a:off x="3648141" y="2494424"/>
+              <a:off x="3689257" y="2494424"/>
               <a:ext cx="62384" cy="62384"/>
             </a:xfrm>
             <a:prstGeom prst="ellipse">
@@ -14388,7 +14388,7 @@
           </p:nvSpPr>
           <p:spPr>
             <a:xfrm>
-              <a:off x="3799119" y="2608409"/>
+              <a:off x="3841446" y="2608409"/>
               <a:ext cx="62384" cy="62384"/>
             </a:xfrm>
             <a:prstGeom prst="ellipse">
@@ -14414,7 +14414,7 @@
           </p:nvSpPr>
           <p:spPr>
             <a:xfrm>
-              <a:off x="3699445" y="2190065"/>
+              <a:off x="3699228" y="2190065"/>
               <a:ext cx="62384" cy="62384"/>
             </a:xfrm>
             <a:prstGeom prst="ellipse">
@@ -14440,7 +14440,7 @@
           </p:nvSpPr>
           <p:spPr>
             <a:xfrm>
-              <a:off x="3804420" y="2509120"/>
+              <a:off x="3831394" y="2509120"/>
               <a:ext cx="62384" cy="62384"/>
             </a:xfrm>
             <a:prstGeom prst="ellipse">
@@ -14466,7 +14466,7 @@
           </p:nvSpPr>
           <p:spPr>
             <a:xfrm>
-              <a:off x="3670708" y="2143148"/>
+              <a:off x="3648734" y="2143148"/>
               <a:ext cx="62384" cy="62384"/>
             </a:xfrm>
             <a:prstGeom prst="ellipse">
@@ -14492,7 +14492,7 @@
           </p:nvSpPr>
           <p:spPr>
             <a:xfrm>
-              <a:off x="3856620" y="2563170"/>
+              <a:off x="3855145" y="2563170"/>
               <a:ext cx="62384" cy="62384"/>
             </a:xfrm>
             <a:prstGeom prst="ellipse">
@@ -14518,7 +14518,7 @@
           </p:nvSpPr>
           <p:spPr>
             <a:xfrm>
-              <a:off x="3650158" y="2638033"/>
+              <a:off x="3684793" y="2638033"/>
               <a:ext cx="62384" cy="62384"/>
             </a:xfrm>
             <a:prstGeom prst="ellipse">
@@ -14544,7 +14544,7 @@
           </p:nvSpPr>
           <p:spPr>
             <a:xfrm>
-              <a:off x="3826240" y="2513741"/>
+              <a:off x="3861193" y="2513741"/>
               <a:ext cx="62384" cy="62384"/>
             </a:xfrm>
             <a:prstGeom prst="ellipse">
@@ -14570,7 +14570,7 @@
           </p:nvSpPr>
           <p:spPr>
             <a:xfrm>
-              <a:off x="3671315" y="2220804"/>
+              <a:off x="3675106" y="2220804"/>
               <a:ext cx="62384" cy="62384"/>
             </a:xfrm>
             <a:prstGeom prst="ellipse">
@@ -14596,7 +14596,7 @@
           </p:nvSpPr>
           <p:spPr>
             <a:xfrm>
-              <a:off x="3795914" y="2443179"/>
+              <a:off x="3801758" y="2443179"/>
               <a:ext cx="62384" cy="62384"/>
             </a:xfrm>
             <a:prstGeom prst="ellipse">
@@ -14622,7 +14622,7 @@
           </p:nvSpPr>
           <p:spPr>
             <a:xfrm>
-              <a:off x="3652129" y="2032687"/>
+              <a:off x="3665001" y="2032687"/>
               <a:ext cx="62384" cy="62384"/>
             </a:xfrm>
             <a:prstGeom prst="ellipse">
@@ -14648,7 +14648,7 @@
           </p:nvSpPr>
           <p:spPr>
             <a:xfrm>
-              <a:off x="3862502" y="2381575"/>
+              <a:off x="3829708" y="2381575"/>
               <a:ext cx="62384" cy="62384"/>
             </a:xfrm>
             <a:prstGeom prst="ellipse">
@@ -14674,7 +14674,7 @@
           </p:nvSpPr>
           <p:spPr>
             <a:xfrm>
-              <a:off x="3675473" y="2805819"/>
+              <a:off x="3707094" y="2805819"/>
               <a:ext cx="62384" cy="62384"/>
             </a:xfrm>
             <a:prstGeom prst="ellipse">
@@ -14700,7 +14700,7 @@
           </p:nvSpPr>
           <p:spPr>
             <a:xfrm>
-              <a:off x="3797070" y="2682506"/>
+              <a:off x="3802998" y="2682506"/>
               <a:ext cx="62384" cy="62384"/>
             </a:xfrm>
             <a:prstGeom prst="ellipse">
@@ -14726,7 +14726,7 @@
           </p:nvSpPr>
           <p:spPr>
             <a:xfrm>
-              <a:off x="3687204" y="2552616"/>
+              <a:off x="3673267" y="2552616"/>
               <a:ext cx="62384" cy="62384"/>
             </a:xfrm>
             <a:prstGeom prst="ellipse">
@@ -14752,7 +14752,7 @@
           </p:nvSpPr>
           <p:spPr>
             <a:xfrm>
-              <a:off x="3846427" y="2928273"/>
+              <a:off x="3795273" y="2928273"/>
               <a:ext cx="62384" cy="62384"/>
             </a:xfrm>
             <a:prstGeom prst="ellipse">
@@ -14778,7 +14778,7 @@
           </p:nvSpPr>
           <p:spPr>
             <a:xfrm>
-              <a:off x="3643544" y="2259025"/>
+              <a:off x="3709726" y="2259025"/>
               <a:ext cx="62384" cy="62384"/>
             </a:xfrm>
             <a:prstGeom prst="ellipse">
@@ -14804,7 +14804,7 @@
           </p:nvSpPr>
           <p:spPr>
             <a:xfrm>
-              <a:off x="3849275" y="2378147"/>
+              <a:off x="3838566" y="2378147"/>
               <a:ext cx="62384" cy="62384"/>
             </a:xfrm>
             <a:prstGeom prst="ellipse">
@@ -14830,7 +14830,7 @@
           </p:nvSpPr>
           <p:spPr>
             <a:xfrm>
-              <a:off x="3669785" y="2223016"/>
+              <a:off x="3652771" y="2223016"/>
               <a:ext cx="62384" cy="62384"/>
             </a:xfrm>
             <a:prstGeom prst="ellipse">
@@ -14856,7 +14856,7 @@
           </p:nvSpPr>
           <p:spPr>
             <a:xfrm>
-              <a:off x="3847971" y="2224277"/>
+              <a:off x="3848369" y="2224277"/>
               <a:ext cx="62384" cy="62384"/>
             </a:xfrm>
             <a:prstGeom prst="ellipse">
@@ -14882,7 +14882,7 @@
           </p:nvSpPr>
           <p:spPr>
             <a:xfrm>
-              <a:off x="3656421" y="2181266"/>
+              <a:off x="3712847" y="2181266"/>
               <a:ext cx="62384" cy="62384"/>
             </a:xfrm>
             <a:prstGeom prst="ellipse">
@@ -14908,7 +14908,7 @@
           </p:nvSpPr>
           <p:spPr>
             <a:xfrm>
-              <a:off x="3811673" y="2437206"/>
+              <a:off x="3845656" y="2437206"/>
               <a:ext cx="62384" cy="62384"/>
             </a:xfrm>
             <a:prstGeom prst="ellipse">
@@ -14934,7 +14934,7 @@
           </p:nvSpPr>
           <p:spPr>
             <a:xfrm>
-              <a:off x="3688632" y="2274145"/>
+              <a:off x="3650771" y="2274145"/>
               <a:ext cx="62384" cy="62384"/>
             </a:xfrm>
             <a:prstGeom prst="ellipse">
@@ -14960,7 +14960,7 @@
           </p:nvSpPr>
           <p:spPr>
             <a:xfrm>
-              <a:off x="3820691" y="2491380"/>
+              <a:off x="3858491" y="2491380"/>
               <a:ext cx="62384" cy="62384"/>
             </a:xfrm>
             <a:prstGeom prst="ellipse">
@@ -14986,7 +14986,7 @@
           </p:nvSpPr>
           <p:spPr>
             <a:xfrm>
-              <a:off x="3702527" y="2134715"/>
+              <a:off x="3664439" y="2134715"/>
               <a:ext cx="62384" cy="62384"/>
             </a:xfrm>
             <a:prstGeom prst="ellipse">
@@ -15012,7 +15012,7 @@
           </p:nvSpPr>
           <p:spPr>
             <a:xfrm>
-              <a:off x="3841596" y="2797681"/>
+              <a:off x="3797650" y="2797681"/>
               <a:ext cx="62384" cy="62384"/>
             </a:xfrm>
             <a:prstGeom prst="ellipse">
@@ -15038,7 +15038,7 @@
           </p:nvSpPr>
           <p:spPr>
             <a:xfrm>
-              <a:off x="3654302" y="3179479"/>
+              <a:off x="3702136" y="3179479"/>
               <a:ext cx="62384" cy="62384"/>
             </a:xfrm>
             <a:prstGeom prst="ellipse">
@@ -15064,7 +15064,7 @@
           </p:nvSpPr>
           <p:spPr>
             <a:xfrm>
-              <a:off x="3817341" y="3106435"/>
+              <a:off x="3847794" y="3106435"/>
               <a:ext cx="62384" cy="62384"/>
             </a:xfrm>
             <a:prstGeom prst="ellipse">
@@ -15090,7 +15090,7 @@
           </p:nvSpPr>
           <p:spPr>
             <a:xfrm>
-              <a:off x="3675520" y="2485398"/>
+              <a:off x="3641071" y="2485398"/>
               <a:ext cx="62384" cy="62384"/>
             </a:xfrm>
             <a:prstGeom prst="ellipse">
@@ -15116,7 +15116,7 @@
           </p:nvSpPr>
           <p:spPr>
             <a:xfrm>
-              <a:off x="3846236" y="2815218"/>
+              <a:off x="3795427" y="2815218"/>
               <a:ext cx="62384" cy="62384"/>
             </a:xfrm>
             <a:prstGeom prst="ellipse">
@@ -15142,7 +15142,7 @@
           </p:nvSpPr>
           <p:spPr>
             <a:xfrm>
-              <a:off x="3662239" y="2411785"/>
+              <a:off x="3666792" y="2411785"/>
               <a:ext cx="62384" cy="62384"/>
             </a:xfrm>
             <a:prstGeom prst="ellipse">
@@ -15168,7 +15168,7 @@
           </p:nvSpPr>
           <p:spPr>
             <a:xfrm>
-              <a:off x="3794190" y="2385799"/>
+              <a:off x="3820745" y="2385799"/>
               <a:ext cx="62384" cy="62384"/>
             </a:xfrm>
             <a:prstGeom prst="ellipse">
@@ -15194,7 +15194,7 @@
           </p:nvSpPr>
           <p:spPr>
             <a:xfrm>
-              <a:off x="3669212" y="2401543"/>
+              <a:off x="3651973" y="2401543"/>
               <a:ext cx="62384" cy="62384"/>
             </a:xfrm>
             <a:prstGeom prst="ellipse">
@@ -15220,7 +15220,7 @@
           </p:nvSpPr>
           <p:spPr>
             <a:xfrm>
-              <a:off x="3804316" y="2267401"/>
+              <a:off x="3792335" y="2267401"/>
               <a:ext cx="62384" cy="62384"/>
             </a:xfrm>
             <a:prstGeom prst="ellipse">
@@ -15246,7 +15246,7 @@
           </p:nvSpPr>
           <p:spPr>
             <a:xfrm>
-              <a:off x="3667478" y="2793407"/>
+              <a:off x="3672073" y="2793407"/>
               <a:ext cx="62384" cy="62384"/>
             </a:xfrm>
             <a:prstGeom prst="ellipse">
@@ -15272,7 +15272,7 @@
           </p:nvSpPr>
           <p:spPr>
             <a:xfrm>
-              <a:off x="3851853" y="2771111"/>
+              <a:off x="3842088" y="2771111"/>
               <a:ext cx="62384" cy="62384"/>
             </a:xfrm>
             <a:prstGeom prst="ellipse">
@@ -15298,7 +15298,7 @@
           </p:nvSpPr>
           <p:spPr>
             <a:xfrm>
-              <a:off x="3657073" y="2870721"/>
+              <a:off x="3713746" y="2870721"/>
               <a:ext cx="62384" cy="62384"/>
             </a:xfrm>
             <a:prstGeom prst="ellipse">
@@ -15324,7 +15324,7 @@
           </p:nvSpPr>
           <p:spPr>
             <a:xfrm>
-              <a:off x="3824944" y="2984495"/>
+              <a:off x="3856453" y="2984495"/>
               <a:ext cx="62384" cy="62384"/>
             </a:xfrm>
             <a:prstGeom prst="ellipse">
@@ -15350,7 +15350,7 @@
           </p:nvSpPr>
           <p:spPr>
             <a:xfrm>
-              <a:off x="3643229" y="2378228"/>
+              <a:off x="3701942" y="2378228"/>
               <a:ext cx="62384" cy="62384"/>
             </a:xfrm>
             <a:prstGeom prst="ellipse">
@@ -15376,7 +15376,7 @@
           </p:nvSpPr>
           <p:spPr>
             <a:xfrm>
-              <a:off x="3810118" y="2805997"/>
+              <a:off x="3800792" y="2805997"/>
               <a:ext cx="62384" cy="62384"/>
             </a:xfrm>
             <a:prstGeom prst="ellipse">
@@ -15402,7 +15402,7 @@
           </p:nvSpPr>
           <p:spPr>
             <a:xfrm>
-              <a:off x="3648143" y="2544270"/>
+              <a:off x="3702075" y="2544270"/>
               <a:ext cx="62384" cy="62384"/>
             </a:xfrm>
             <a:prstGeom prst="ellipse">
@@ -15428,7 +15428,7 @@
           </p:nvSpPr>
           <p:spPr>
             <a:xfrm>
-              <a:off x="3837055" y="2886573"/>
+              <a:off x="3858496" y="2886573"/>
               <a:ext cx="62384" cy="62384"/>
             </a:xfrm>
             <a:prstGeom prst="ellipse">
@@ -15454,7 +15454,7 @@
           </p:nvSpPr>
           <p:spPr>
             <a:xfrm>
-              <a:off x="3686048" y="1976967"/>
+              <a:off x="3713141" y="1976967"/>
               <a:ext cx="62384" cy="62384"/>
             </a:xfrm>
             <a:prstGeom prst="ellipse">
@@ -15480,7 +15480,7 @@
           </p:nvSpPr>
           <p:spPr>
             <a:xfrm>
-              <a:off x="3791059" y="2416148"/>
+              <a:off x="3820678" y="2416148"/>
               <a:ext cx="62384" cy="62384"/>
             </a:xfrm>
             <a:prstGeom prst="ellipse">
@@ -15506,7 +15506,7 @@
           </p:nvSpPr>
           <p:spPr>
             <a:xfrm>
-              <a:off x="3681333" y="2171272"/>
+              <a:off x="3682301" y="2171272"/>
               <a:ext cx="62384" cy="62384"/>
             </a:xfrm>
             <a:prstGeom prst="ellipse">
@@ -15532,7 +15532,7 @@
           </p:nvSpPr>
           <p:spPr>
             <a:xfrm>
-              <a:off x="3814793" y="2512480"/>
+              <a:off x="3801883" y="2512480"/>
               <a:ext cx="62384" cy="62384"/>
             </a:xfrm>
             <a:prstGeom prst="ellipse">
@@ -15558,7 +15558,7 @@
           </p:nvSpPr>
           <p:spPr>
             <a:xfrm>
-              <a:off x="3677182" y="2174924"/>
+              <a:off x="3643388" y="2174924"/>
               <a:ext cx="62384" cy="62384"/>
             </a:xfrm>
             <a:prstGeom prst="ellipse">
@@ -15584,7 +15584,7 @@
           </p:nvSpPr>
           <p:spPr>
             <a:xfrm>
-              <a:off x="3843285" y="2722787"/>
+              <a:off x="3833511" y="2722787"/>
               <a:ext cx="62384" cy="62384"/>
             </a:xfrm>
             <a:prstGeom prst="ellipse">
@@ -15610,7 +15610,7 @@
           </p:nvSpPr>
           <p:spPr>
             <a:xfrm>
-              <a:off x="3692407" y="2437916"/>
+              <a:off x="3690162" y="2437916"/>
               <a:ext cx="62384" cy="62384"/>
             </a:xfrm>
             <a:prstGeom prst="ellipse">
@@ -15636,7 +15636,7 @@
           </p:nvSpPr>
           <p:spPr>
             <a:xfrm>
-              <a:off x="3816200" y="2890440"/>
+              <a:off x="3817506" y="2890440"/>
               <a:ext cx="62384" cy="62384"/>
             </a:xfrm>
             <a:prstGeom prst="ellipse">
@@ -15662,7 +15662,7 @@
           </p:nvSpPr>
           <p:spPr>
             <a:xfrm>
-              <a:off x="3668306" y="1867326"/>
+              <a:off x="3699392" y="1867326"/>
               <a:ext cx="62384" cy="62384"/>
             </a:xfrm>
             <a:prstGeom prst="ellipse">
@@ -15688,7 +15688,7 @@
           </p:nvSpPr>
           <p:spPr>
             <a:xfrm>
-              <a:off x="3835185" y="2235734"/>
+              <a:off x="3849643" y="2235734"/>
               <a:ext cx="62384" cy="62384"/>
             </a:xfrm>
             <a:prstGeom prst="ellipse">
@@ -15714,7 +15714,7 @@
           </p:nvSpPr>
           <p:spPr>
             <a:xfrm>
-              <a:off x="3692931" y="2583172"/>
+              <a:off x="3673638" y="2583172"/>
               <a:ext cx="62384" cy="62384"/>
             </a:xfrm>
             <a:prstGeom prst="ellipse">
@@ -15740,7 +15740,7 @@
           </p:nvSpPr>
           <p:spPr>
             <a:xfrm>
-              <a:off x="3856916" y="3116068"/>
+              <a:off x="3800873" y="3116068"/>
               <a:ext cx="62384" cy="62384"/>
             </a:xfrm>
             <a:prstGeom prst="ellipse">
@@ -15766,7 +15766,7 @@
           </p:nvSpPr>
           <p:spPr>
             <a:xfrm>
-              <a:off x="3696683" y="3074829"/>
+              <a:off x="3688833" y="3074829"/>
               <a:ext cx="62384" cy="62384"/>
             </a:xfrm>
             <a:prstGeom prst="ellipse">
@@ -15792,7 +15792,7 @@
           </p:nvSpPr>
           <p:spPr>
             <a:xfrm>
-              <a:off x="3803828" y="2778129"/>
+              <a:off x="3800000" y="2778129"/>
               <a:ext cx="62384" cy="62384"/>
             </a:xfrm>
             <a:prstGeom prst="ellipse">
@@ -15818,7 +15818,7 @@
           </p:nvSpPr>
           <p:spPr>
             <a:xfrm>
-              <a:off x="3695372" y="2238700"/>
+              <a:off x="3661049" y="2238700"/>
               <a:ext cx="62384" cy="62384"/>
             </a:xfrm>
             <a:prstGeom prst="ellipse">
@@ -15844,7 +15844,7 @@
           </p:nvSpPr>
           <p:spPr>
             <a:xfrm>
-              <a:off x="3818104" y="2759561"/>
+              <a:off x="3827707" y="2759561"/>
               <a:ext cx="62384" cy="62384"/>
             </a:xfrm>
             <a:prstGeom prst="ellipse">
@@ -15870,7 +15870,7 @@
           </p:nvSpPr>
           <p:spPr>
             <a:xfrm>
-              <a:off x="3698768" y="2116983"/>
+              <a:off x="3654749" y="2116983"/>
               <a:ext cx="62384" cy="62384"/>
             </a:xfrm>
             <a:prstGeom prst="ellipse">
@@ -15896,7 +15896,7 @@
           </p:nvSpPr>
           <p:spPr>
             <a:xfrm>
-              <a:off x="3802422" y="2800199"/>
+              <a:off x="3853152" y="2800199"/>
               <a:ext cx="62384" cy="62384"/>
             </a:xfrm>
             <a:prstGeom prst="ellipse">
@@ -15922,7 +15922,7 @@
           </p:nvSpPr>
           <p:spPr>
             <a:xfrm>
-              <a:off x="3684514" y="2075237"/>
+              <a:off x="3696370" y="2075237"/>
               <a:ext cx="62384" cy="62384"/>
             </a:xfrm>
             <a:prstGeom prst="ellipse">
@@ -15948,7 +15948,7 @@
           </p:nvSpPr>
           <p:spPr>
             <a:xfrm>
-              <a:off x="3817761" y="2266742"/>
+              <a:off x="3821052" y="2266742"/>
               <a:ext cx="62384" cy="62384"/>
             </a:xfrm>
             <a:prstGeom prst="ellipse">
@@ -15974,7 +15974,7 @@
           </p:nvSpPr>
           <p:spPr>
             <a:xfrm>
-              <a:off x="3668600" y="3124836"/>
+              <a:off x="3653768" y="3124836"/>
               <a:ext cx="62384" cy="62384"/>
             </a:xfrm>
             <a:prstGeom prst="ellipse">
@@ -16000,7 +16000,7 @@
           </p:nvSpPr>
           <p:spPr>
             <a:xfrm>
-              <a:off x="3842681" y="2956939"/>
+              <a:off x="3857933" y="2956939"/>
               <a:ext cx="62384" cy="62384"/>
             </a:xfrm>
             <a:prstGeom prst="ellipse">
@@ -16026,7 +16026,7 @@
           </p:nvSpPr>
           <p:spPr>
             <a:xfrm>
-              <a:off x="3693444" y="2808065"/>
+              <a:off x="3702033" y="2808065"/>
               <a:ext cx="62384" cy="62384"/>
             </a:xfrm>
             <a:prstGeom prst="ellipse">
@@ -16052,7 +16052,7 @@
           </p:nvSpPr>
           <p:spPr>
             <a:xfrm>
-              <a:off x="3820221" y="3195182"/>
+              <a:off x="3856847" y="3195182"/>
               <a:ext cx="62384" cy="62384"/>
             </a:xfrm>
             <a:prstGeom prst="ellipse">
@@ -16078,7 +16078,7 @@
           </p:nvSpPr>
           <p:spPr>
             <a:xfrm>
-              <a:off x="3691121" y="2457047"/>
+              <a:off x="3687921" y="2457047"/>
               <a:ext cx="62384" cy="62384"/>
             </a:xfrm>
             <a:prstGeom prst="ellipse">
@@ -16104,7 +16104,7 @@
           </p:nvSpPr>
           <p:spPr>
             <a:xfrm>
-              <a:off x="3832298" y="2764537"/>
+              <a:off x="3834354" y="2764537"/>
               <a:ext cx="62384" cy="62384"/>
             </a:xfrm>
             <a:prstGeom prst="ellipse">
@@ -16130,7 +16130,7 @@
           </p:nvSpPr>
           <p:spPr>
             <a:xfrm>
-              <a:off x="3664184" y="1981740"/>
+              <a:off x="3643180" y="1981740"/>
               <a:ext cx="62384" cy="62384"/>
             </a:xfrm>
             <a:prstGeom prst="ellipse">
@@ -16156,7 +16156,7 @@
           </p:nvSpPr>
           <p:spPr>
             <a:xfrm>
-              <a:off x="3844824" y="2491527"/>
+              <a:off x="3828118" y="2491527"/>
               <a:ext cx="62384" cy="62384"/>
             </a:xfrm>
             <a:prstGeom prst="ellipse">
@@ -16182,7 +16182,7 @@
           </p:nvSpPr>
           <p:spPr>
             <a:xfrm>
-              <a:off x="3659849" y="1874716"/>
+              <a:off x="3709701" y="1874716"/>
               <a:ext cx="62384" cy="62384"/>
             </a:xfrm>
             <a:prstGeom prst="ellipse">
@@ -16208,7 +16208,7 @@
           </p:nvSpPr>
           <p:spPr>
             <a:xfrm>
-              <a:off x="3829268" y="2117979"/>
+              <a:off x="3800253" y="2117979"/>
               <a:ext cx="62384" cy="62384"/>
             </a:xfrm>
             <a:prstGeom prst="ellipse">
@@ -16234,7 +16234,7 @@
           </p:nvSpPr>
           <p:spPr>
             <a:xfrm>
-              <a:off x="3692966" y="2423641"/>
+              <a:off x="3696362" y="2423641"/>
               <a:ext cx="62384" cy="62384"/>
             </a:xfrm>
             <a:prstGeom prst="ellipse">
@@ -16260,7 +16260,7 @@
           </p:nvSpPr>
           <p:spPr>
             <a:xfrm>
-              <a:off x="3823796" y="2890705"/>
+              <a:off x="3811052" y="2890705"/>
               <a:ext cx="62384" cy="62384"/>
             </a:xfrm>
             <a:prstGeom prst="ellipse">
@@ -16286,7 +16286,7 @@
           </p:nvSpPr>
           <p:spPr>
             <a:xfrm>
-              <a:off x="3709776" y="2519161"/>
+              <a:off x="3663367" y="2519161"/>
               <a:ext cx="62384" cy="62384"/>
             </a:xfrm>
             <a:prstGeom prst="ellipse">
@@ -16312,7 +16312,7 @@
           </p:nvSpPr>
           <p:spPr>
             <a:xfrm>
-              <a:off x="3839526" y="2683958"/>
+              <a:off x="3834648" y="2683958"/>
               <a:ext cx="62384" cy="62384"/>
             </a:xfrm>
             <a:prstGeom prst="ellipse">
@@ -16338,7 +16338,7 @@
           </p:nvSpPr>
           <p:spPr>
             <a:xfrm>
-              <a:off x="3699751" y="2675899"/>
+              <a:off x="3701200" y="2675899"/>
               <a:ext cx="62384" cy="62384"/>
             </a:xfrm>
             <a:prstGeom prst="ellipse">
@@ -16364,7 +16364,7 @@
           </p:nvSpPr>
           <p:spPr>
             <a:xfrm>
-              <a:off x="3860153" y="2736788"/>
+              <a:off x="3834387" y="2736788"/>
               <a:ext cx="62384" cy="62384"/>
             </a:xfrm>
             <a:prstGeom prst="ellipse">
@@ -16390,7 +16390,7 @@
           </p:nvSpPr>
           <p:spPr>
             <a:xfrm>
-              <a:off x="3689810" y="2193769"/>
+              <a:off x="3650345" y="2193769"/>
               <a:ext cx="62384" cy="62384"/>
             </a:xfrm>
             <a:prstGeom prst="ellipse">
@@ -16416,7 +16416,7 @@
           </p:nvSpPr>
           <p:spPr>
             <a:xfrm>
-              <a:off x="3844189" y="2484992"/>
+              <a:off x="3823525" y="2484992"/>
               <a:ext cx="62384" cy="62384"/>
             </a:xfrm>
             <a:prstGeom prst="ellipse">
@@ -16442,7 +16442,7 @@
           </p:nvSpPr>
           <p:spPr>
             <a:xfrm>
-              <a:off x="3680147" y="2600183"/>
+              <a:off x="3704160" y="2600183"/>
               <a:ext cx="62384" cy="62384"/>
             </a:xfrm>
             <a:prstGeom prst="ellipse">
@@ -16468,7 +16468,7 @@
           </p:nvSpPr>
           <p:spPr>
             <a:xfrm>
-              <a:off x="3799318" y="2973177"/>
+              <a:off x="3848437" y="2973177"/>
               <a:ext cx="62384" cy="62384"/>
             </a:xfrm>
             <a:prstGeom prst="ellipse">
@@ -16494,7 +16494,7 @@
           </p:nvSpPr>
           <p:spPr>
             <a:xfrm>
-              <a:off x="3671510" y="2241189"/>
+              <a:off x="3643099" y="2241189"/>
               <a:ext cx="62384" cy="62384"/>
             </a:xfrm>
             <a:prstGeom prst="ellipse">
@@ -16520,7 +16520,7 @@
           </p:nvSpPr>
           <p:spPr>
             <a:xfrm>
-              <a:off x="3837424" y="2853423"/>
+              <a:off x="3817774" y="2853423"/>
               <a:ext cx="62384" cy="62384"/>
             </a:xfrm>
             <a:prstGeom prst="ellipse">
@@ -16546,7 +16546,7 @@
           </p:nvSpPr>
           <p:spPr>
             <a:xfrm>
-              <a:off x="3648984" y="2581585"/>
+              <a:off x="3713307" y="2581585"/>
               <a:ext cx="62384" cy="62384"/>
             </a:xfrm>
             <a:prstGeom prst="ellipse">
@@ -16572,7 +16572,7 @@
           </p:nvSpPr>
           <p:spPr>
             <a:xfrm>
-              <a:off x="3858598" y="2748608"/>
+              <a:off x="3795025" y="2748608"/>
               <a:ext cx="62384" cy="62384"/>
             </a:xfrm>
             <a:prstGeom prst="ellipse">
@@ -16598,7 +16598,7 @@
           </p:nvSpPr>
           <p:spPr>
             <a:xfrm>
-              <a:off x="3703147" y="2820778"/>
+              <a:off x="3699286" y="2820778"/>
               <a:ext cx="62384" cy="62384"/>
             </a:xfrm>
             <a:prstGeom prst="ellipse">
@@ -16624,7 +16624,7 @@
           </p:nvSpPr>
           <p:spPr>
             <a:xfrm>
-              <a:off x="3789893" y="2617746"/>
+              <a:off x="3814553" y="2617746"/>
               <a:ext cx="62384" cy="62384"/>
             </a:xfrm>
             <a:prstGeom prst="ellipse">
@@ -16650,7 +16650,7 @@
           </p:nvSpPr>
           <p:spPr>
             <a:xfrm>
-              <a:off x="3651749" y="2043107"/>
+              <a:off x="3694991" y="2043107"/>
               <a:ext cx="62384" cy="62384"/>
             </a:xfrm>
             <a:prstGeom prst="ellipse">
@@ -16676,7 +16676,7 @@
           </p:nvSpPr>
           <p:spPr>
             <a:xfrm>
-              <a:off x="3811980" y="2591011"/>
+              <a:off x="3826468" y="2591011"/>
               <a:ext cx="62384" cy="62384"/>
             </a:xfrm>
             <a:prstGeom prst="ellipse">
@@ -16702,7 +16702,7 @@
           </p:nvSpPr>
           <p:spPr>
             <a:xfrm>
-              <a:off x="3711672" y="2257537"/>
+              <a:off x="3642647" y="2257537"/>
               <a:ext cx="62384" cy="62384"/>
             </a:xfrm>
             <a:prstGeom prst="ellipse">
@@ -16728,7 +16728,7 @@
           </p:nvSpPr>
           <p:spPr>
             <a:xfrm>
-              <a:off x="3794168" y="2440760"/>
+              <a:off x="3809339" y="2440760"/>
               <a:ext cx="62384" cy="62384"/>
             </a:xfrm>
             <a:prstGeom prst="ellipse">
@@ -16754,7 +16754,7 @@
           </p:nvSpPr>
           <p:spPr>
             <a:xfrm>
-              <a:off x="3700487" y="1660002"/>
+              <a:off x="3648493" y="1660002"/>
               <a:ext cx="62384" cy="62384"/>
             </a:xfrm>
             <a:prstGeom prst="ellipse">
@@ -16780,7 +16780,7 @@
           </p:nvSpPr>
           <p:spPr>
             <a:xfrm>
-              <a:off x="3863013" y="2071879"/>
+              <a:off x="3842126" y="2071879"/>
               <a:ext cx="62384" cy="62384"/>
             </a:xfrm>
             <a:prstGeom prst="ellipse">
@@ -16806,7 +16806,7 @@
           </p:nvSpPr>
           <p:spPr>
             <a:xfrm>
-              <a:off x="3682181" y="2712098"/>
+              <a:off x="3656205" y="2712098"/>
               <a:ext cx="62384" cy="62384"/>
             </a:xfrm>
             <a:prstGeom prst="ellipse">
@@ -16832,7 +16832,7 @@
           </p:nvSpPr>
           <p:spPr>
             <a:xfrm>
-              <a:off x="3791395" y="2923522"/>
+              <a:off x="3815532" y="2923522"/>
               <a:ext cx="62384" cy="62384"/>
             </a:xfrm>
             <a:prstGeom prst="ellipse">
@@ -16858,7 +16858,7 @@
           </p:nvSpPr>
           <p:spPr>
             <a:xfrm>
-              <a:off x="3651184" y="2629339"/>
+              <a:off x="3685287" y="2629339"/>
               <a:ext cx="62384" cy="62384"/>
             </a:xfrm>
             <a:prstGeom prst="ellipse">
@@ -16884,7 +16884,7 @@
           </p:nvSpPr>
           <p:spPr>
             <a:xfrm>
-              <a:off x="3822957" y="2168650"/>
+              <a:off x="3805352" y="2168650"/>
               <a:ext cx="62384" cy="62384"/>
             </a:xfrm>
             <a:prstGeom prst="ellipse">
@@ -16910,7 +16910,7 @@
           </p:nvSpPr>
           <p:spPr>
             <a:xfrm>
-              <a:off x="3699974" y="2583375"/>
+              <a:off x="3665551" y="2583375"/>
               <a:ext cx="62384" cy="62384"/>
             </a:xfrm>
             <a:prstGeom prst="ellipse">
@@ -16936,7 +16936,7 @@
           </p:nvSpPr>
           <p:spPr>
             <a:xfrm>
-              <a:off x="3829669" y="2264289"/>
+              <a:off x="3844722" y="2264289"/>
               <a:ext cx="62384" cy="62384"/>
             </a:xfrm>
             <a:prstGeom prst="ellipse">
@@ -16962,7 +16962,7 @@
           </p:nvSpPr>
           <p:spPr>
             <a:xfrm>
-              <a:off x="3665274" y="2635330"/>
+              <a:off x="3652826" y="2635330"/>
               <a:ext cx="62384" cy="62384"/>
             </a:xfrm>
             <a:prstGeom prst="ellipse">
@@ -16988,7 +16988,7 @@
           </p:nvSpPr>
           <p:spPr>
             <a:xfrm>
-              <a:off x="3792993" y="2523212"/>
+              <a:off x="3834771" y="2523212"/>
               <a:ext cx="62384" cy="62384"/>
             </a:xfrm>
             <a:prstGeom prst="ellipse">
@@ -17014,7 +17014,7 @@
           </p:nvSpPr>
           <p:spPr>
             <a:xfrm>
-              <a:off x="3682207" y="3294849"/>
+              <a:off x="3648922" y="3294849"/>
               <a:ext cx="62384" cy="62384"/>
             </a:xfrm>
             <a:prstGeom prst="ellipse">
@@ -17040,7 +17040,7 @@
           </p:nvSpPr>
           <p:spPr>
             <a:xfrm>
-              <a:off x="3820748" y="2931119"/>
+              <a:off x="3858116" y="2931119"/>
               <a:ext cx="62384" cy="62384"/>
             </a:xfrm>
             <a:prstGeom prst="ellipse">
@@ -17066,7 +17066,7 @@
           </p:nvSpPr>
           <p:spPr>
             <a:xfrm>
-              <a:off x="3642847" y="2581680"/>
+              <a:off x="3710938" y="2581680"/>
               <a:ext cx="62384" cy="62384"/>
             </a:xfrm>
             <a:prstGeom prst="ellipse">
@@ -17092,7 +17092,7 @@
           </p:nvSpPr>
           <p:spPr>
             <a:xfrm>
-              <a:off x="3815557" y="2695238"/>
+              <a:off x="3854916" y="2695238"/>
               <a:ext cx="62384" cy="62384"/>
             </a:xfrm>
             <a:prstGeom prst="ellipse">
@@ -17118,7 +17118,7 @@
           </p:nvSpPr>
           <p:spPr>
             <a:xfrm>
-              <a:off x="3689831" y="2201127"/>
+              <a:off x="3678874" y="2201127"/>
               <a:ext cx="62384" cy="62384"/>
             </a:xfrm>
             <a:prstGeom prst="ellipse">
@@ -17144,7 +17144,7 @@
           </p:nvSpPr>
           <p:spPr>
             <a:xfrm>
-              <a:off x="3805843" y="2387407"/>
+              <a:off x="3797606" y="2387407"/>
               <a:ext cx="62384" cy="62384"/>
             </a:xfrm>
             <a:prstGeom prst="ellipse">
@@ -17170,7 +17170,7 @@
           </p:nvSpPr>
           <p:spPr>
             <a:xfrm>
-              <a:off x="3708217" y="2804222"/>
+              <a:off x="3656997" y="2804222"/>
               <a:ext cx="62384" cy="62384"/>
             </a:xfrm>
             <a:prstGeom prst="ellipse">
@@ -17196,7 +17196,7 @@
           </p:nvSpPr>
           <p:spPr>
             <a:xfrm>
-              <a:off x="3853703" y="2864974"/>
+              <a:off x="3802251" y="2864974"/>
               <a:ext cx="62384" cy="62384"/>
             </a:xfrm>
             <a:prstGeom prst="ellipse">
@@ -17222,7 +17222,7 @@
           </p:nvSpPr>
           <p:spPr>
             <a:xfrm>
-              <a:off x="3660787" y="3421704"/>
+              <a:off x="3699232" y="3421704"/>
               <a:ext cx="62384" cy="62384"/>
             </a:xfrm>
             <a:prstGeom prst="ellipse">
@@ -17248,7 +17248,7 @@
           </p:nvSpPr>
           <p:spPr>
             <a:xfrm>
-              <a:off x="3800391" y="3230545"/>
+              <a:off x="3810348" y="3230545"/>
               <a:ext cx="62384" cy="62384"/>
             </a:xfrm>
             <a:prstGeom prst="ellipse">
@@ -17274,7 +17274,7 @@
           </p:nvSpPr>
           <p:spPr>
             <a:xfrm>
-              <a:off x="3712606" y="3033690"/>
+              <a:off x="3698545" y="3033690"/>
               <a:ext cx="62384" cy="62384"/>
             </a:xfrm>
             <a:prstGeom prst="ellipse">
@@ -17300,7 +17300,7 @@
           </p:nvSpPr>
           <p:spPr>
             <a:xfrm>
-              <a:off x="3823641" y="2695781"/>
+              <a:off x="3820774" y="2695781"/>
               <a:ext cx="62384" cy="62384"/>
             </a:xfrm>
             <a:prstGeom prst="ellipse">
@@ -17326,7 +17326,7 @@
           </p:nvSpPr>
           <p:spPr>
             <a:xfrm>
-              <a:off x="3695589" y="2800367"/>
+              <a:off x="3695615" y="2800367"/>
               <a:ext cx="62384" cy="62384"/>
             </a:xfrm>
             <a:prstGeom prst="ellipse">
@@ -17352,7 +17352,7 @@
           </p:nvSpPr>
           <p:spPr>
             <a:xfrm>
-              <a:off x="3816038" y="2470887"/>
+              <a:off x="3818929" y="2470887"/>
               <a:ext cx="62384" cy="62384"/>
             </a:xfrm>
             <a:prstGeom prst="ellipse">
@@ -17378,7 +17378,7 @@
           </p:nvSpPr>
           <p:spPr>
             <a:xfrm>
-              <a:off x="3656911" y="2660221"/>
+              <a:off x="3714076" y="2660221"/>
               <a:ext cx="62384" cy="62384"/>
             </a:xfrm>
             <a:prstGeom prst="ellipse">
@@ -17404,7 +17404,7 @@
           </p:nvSpPr>
           <p:spPr>
             <a:xfrm>
-              <a:off x="3827762" y="2426625"/>
+              <a:off x="3800296" y="2426625"/>
               <a:ext cx="62384" cy="62384"/>
             </a:xfrm>
             <a:prstGeom prst="ellipse">
@@ -17430,7 +17430,7 @@
           </p:nvSpPr>
           <p:spPr>
             <a:xfrm>
-              <a:off x="3667356" y="2501826"/>
+              <a:off x="3682272" y="2501826"/>
               <a:ext cx="62384" cy="62384"/>
             </a:xfrm>
             <a:prstGeom prst="ellipse">
@@ -17456,7 +17456,7 @@
           </p:nvSpPr>
           <p:spPr>
             <a:xfrm>
-              <a:off x="3853864" y="2715278"/>
+              <a:off x="3794091" y="2715278"/>
               <a:ext cx="62384" cy="62384"/>
             </a:xfrm>
             <a:prstGeom prst="ellipse">
@@ -17482,7 +17482,7 @@
           </p:nvSpPr>
           <p:spPr>
             <a:xfrm>
-              <a:off x="3651648" y="2697734"/>
+              <a:off x="3692554" y="2697734"/>
               <a:ext cx="62384" cy="62384"/>
             </a:xfrm>
             <a:prstGeom prst="ellipse">
@@ -17508,7 +17508,7 @@
           </p:nvSpPr>
           <p:spPr>
             <a:xfrm>
-              <a:off x="3835947" y="2723395"/>
+              <a:off x="3841589" y="2723395"/>
               <a:ext cx="62384" cy="62384"/>
             </a:xfrm>
             <a:prstGeom prst="ellipse">
@@ -17534,7 +17534,7 @@
           </p:nvSpPr>
           <p:spPr>
             <a:xfrm>
-              <a:off x="3660056" y="2657238"/>
+              <a:off x="3705917" y="2657238"/>
               <a:ext cx="62384" cy="62384"/>
             </a:xfrm>
             <a:prstGeom prst="ellipse">
@@ -17560,7 +17560,7 @@
           </p:nvSpPr>
           <p:spPr>
             <a:xfrm>
-              <a:off x="3811887" y="2565090"/>
+              <a:off x="3836446" y="2565090"/>
               <a:ext cx="62384" cy="62384"/>
             </a:xfrm>
             <a:prstGeom prst="ellipse">
@@ -17586,7 +17586,7 @@
           </p:nvSpPr>
           <p:spPr>
             <a:xfrm>
-              <a:off x="3697180" y="2487391"/>
+              <a:off x="3680114" y="2487391"/>
               <a:ext cx="62384" cy="62384"/>
             </a:xfrm>
             <a:prstGeom prst="ellipse">
@@ -17612,7 +17612,7 @@
           </p:nvSpPr>
           <p:spPr>
             <a:xfrm>
-              <a:off x="3814285" y="2351664"/>
+              <a:off x="3852877" y="2351664"/>
               <a:ext cx="62384" cy="62384"/>
             </a:xfrm>
             <a:prstGeom prst="ellipse">
@@ -17638,7 +17638,7 @@
           </p:nvSpPr>
           <p:spPr>
             <a:xfrm>
-              <a:off x="3655656" y="2527400"/>
+              <a:off x="3699063" y="2527400"/>
               <a:ext cx="62384" cy="62384"/>
             </a:xfrm>
             <a:prstGeom prst="ellipse">
@@ -17664,7 +17664,7 @@
           </p:nvSpPr>
           <p:spPr>
             <a:xfrm>
-              <a:off x="3836433" y="2512826"/>
+              <a:off x="3862398" y="2512826"/>
               <a:ext cx="62384" cy="62384"/>
             </a:xfrm>
             <a:prstGeom prst="ellipse">
@@ -17690,7 +17690,7 @@
           </p:nvSpPr>
           <p:spPr>
             <a:xfrm>
-              <a:off x="3653647" y="2756311"/>
+              <a:off x="3641521" y="2756311"/>
               <a:ext cx="62384" cy="62384"/>
             </a:xfrm>
             <a:prstGeom prst="ellipse">
@@ -17716,7 +17716,7 @@
           </p:nvSpPr>
           <p:spPr>
             <a:xfrm>
-              <a:off x="3847718" y="2423515"/>
+              <a:off x="3813024" y="2423515"/>
               <a:ext cx="62384" cy="62384"/>
             </a:xfrm>
             <a:prstGeom prst="ellipse">
@@ -17742,7 +17742,7 @@
           </p:nvSpPr>
           <p:spPr>
             <a:xfrm>
-              <a:off x="3671524" y="2291623"/>
+              <a:off x="3695217" y="2291623"/>
               <a:ext cx="62384" cy="62384"/>
             </a:xfrm>
             <a:prstGeom prst="ellipse">
@@ -17768,7 +17768,7 @@
           </p:nvSpPr>
           <p:spPr>
             <a:xfrm>
-              <a:off x="3839602" y="2101744"/>
+              <a:off x="3836780" y="2101744"/>
               <a:ext cx="62384" cy="62384"/>
             </a:xfrm>
             <a:prstGeom prst="ellipse">
@@ -17794,7 +17794,7 @@
           </p:nvSpPr>
           <p:spPr>
             <a:xfrm>
-              <a:off x="3668764" y="2946762"/>
+              <a:off x="3693594" y="2946762"/>
               <a:ext cx="62384" cy="62384"/>
             </a:xfrm>
             <a:prstGeom prst="ellipse">
@@ -17820,7 +17820,7 @@
           </p:nvSpPr>
           <p:spPr>
             <a:xfrm>
-              <a:off x="3822619" y="2932834"/>
+              <a:off x="3841692" y="2932834"/>
               <a:ext cx="62384" cy="62384"/>
             </a:xfrm>
             <a:prstGeom prst="ellipse">
@@ -17846,7 +17846,7 @@
           </p:nvSpPr>
           <p:spPr>
             <a:xfrm>
-              <a:off x="3667805" y="3175826"/>
+              <a:off x="3708605" y="3175826"/>
               <a:ext cx="62384" cy="62384"/>
             </a:xfrm>
             <a:prstGeom prst="ellipse">
@@ -17872,7 +17872,7 @@
           </p:nvSpPr>
           <p:spPr>
             <a:xfrm>
-              <a:off x="3818712" y="2940996"/>
+              <a:off x="3789850" y="2940996"/>
               <a:ext cx="62384" cy="62384"/>
             </a:xfrm>
             <a:prstGeom prst="ellipse">
@@ -17898,7 +17898,7 @@
           </p:nvSpPr>
           <p:spPr>
             <a:xfrm>
-              <a:off x="3665080" y="1942040"/>
+              <a:off x="3644563" y="1942040"/>
               <a:ext cx="62384" cy="62384"/>
             </a:xfrm>
             <a:prstGeom prst="ellipse">
@@ -17924,7 +17924,7 @@
           </p:nvSpPr>
           <p:spPr>
             <a:xfrm>
-              <a:off x="3831784" y="2090840"/>
+              <a:off x="3837433" y="2090840"/>
               <a:ext cx="62384" cy="62384"/>
             </a:xfrm>
             <a:prstGeom prst="ellipse">
@@ -17950,7 +17950,7 @@
           </p:nvSpPr>
           <p:spPr>
             <a:xfrm>
-              <a:off x="4747031" y="2311945"/>
+              <a:off x="4696734" y="2311945"/>
               <a:ext cx="62384" cy="62384"/>
             </a:xfrm>
             <a:prstGeom prst="ellipse">
@@ -17976,7 +17976,7 @@
           </p:nvSpPr>
           <p:spPr>
             <a:xfrm>
-              <a:off x="4896663" y="2369026"/>
+              <a:off x="4894556" y="2369026"/>
               <a:ext cx="62384" cy="62384"/>
             </a:xfrm>
             <a:prstGeom prst="ellipse">
@@ -18002,7 +18002,7 @@
           </p:nvSpPr>
           <p:spPr>
             <a:xfrm>
-              <a:off x="4721553" y="2894862"/>
+              <a:off x="4723527" y="2894862"/>
               <a:ext cx="62384" cy="62384"/>
             </a:xfrm>
             <a:prstGeom prst="ellipse">
@@ -18028,7 +18028,7 @@
           </p:nvSpPr>
           <p:spPr>
             <a:xfrm>
-              <a:off x="4874691" y="3229378"/>
+              <a:off x="4863709" y="3229378"/>
               <a:ext cx="62384" cy="62384"/>
             </a:xfrm>
             <a:prstGeom prst="ellipse">
@@ -18054,7 +18054,7 @@
           </p:nvSpPr>
           <p:spPr>
             <a:xfrm>
-              <a:off x="4690121" y="2364663"/>
+              <a:off x="4742757" y="2364663"/>
               <a:ext cx="62384" cy="62384"/>
             </a:xfrm>
             <a:prstGeom prst="ellipse">
@@ -18080,7 +18080,7 @@
           </p:nvSpPr>
           <p:spPr>
             <a:xfrm>
-              <a:off x="4869767" y="2181957"/>
+              <a:off x="4843135" y="2181957"/>
               <a:ext cx="62384" cy="62384"/>
             </a:xfrm>
             <a:prstGeom prst="ellipse">
@@ -18106,7 +18106,7 @@
           </p:nvSpPr>
           <p:spPr>
             <a:xfrm>
-              <a:off x="4694507" y="2715153"/>
+              <a:off x="4744579" y="2715153"/>
               <a:ext cx="62384" cy="62384"/>
             </a:xfrm>
             <a:prstGeom prst="ellipse">
@@ -18132,7 +18132,7 @@
           </p:nvSpPr>
           <p:spPr>
             <a:xfrm>
-              <a:off x="4848399" y="2479901"/>
+              <a:off x="4891064" y="2479901"/>
               <a:ext cx="62384" cy="62384"/>
             </a:xfrm>
             <a:prstGeom prst="ellipse">
@@ -18158,7 +18158,7 @@
           </p:nvSpPr>
           <p:spPr>
             <a:xfrm>
-              <a:off x="4684706" y="2158585"/>
+              <a:off x="4710933" y="2158585"/>
               <a:ext cx="62384" cy="62384"/>
             </a:xfrm>
             <a:prstGeom prst="ellipse">
@@ -18184,7 +18184,7 @@
           </p:nvSpPr>
           <p:spPr>
             <a:xfrm>
-              <a:off x="4832591" y="2614593"/>
+              <a:off x="4883858" y="2614593"/>
               <a:ext cx="62384" cy="62384"/>
             </a:xfrm>
             <a:prstGeom prst="ellipse">
@@ -18210,7 +18210,7 @@
           </p:nvSpPr>
           <p:spPr>
             <a:xfrm>
-              <a:off x="4710616" y="1775162"/>
+              <a:off x="4742616" y="1775162"/>
               <a:ext cx="62384" cy="62384"/>
             </a:xfrm>
             <a:prstGeom prst="ellipse">
@@ -18236,7 +18236,7 @@
           </p:nvSpPr>
           <p:spPr>
             <a:xfrm>
-              <a:off x="4864866" y="2120099"/>
+              <a:off x="4866027" y="2120099"/>
               <a:ext cx="62384" cy="62384"/>
             </a:xfrm>
             <a:prstGeom prst="ellipse">
@@ -18262,7 +18262,7 @@
           </p:nvSpPr>
           <p:spPr>
             <a:xfrm>
-              <a:off x="4713130" y="2900655"/>
+              <a:off x="4691396" y="2900655"/>
               <a:ext cx="62384" cy="62384"/>
             </a:xfrm>
             <a:prstGeom prst="ellipse">
@@ -18288,7 +18288,7 @@
           </p:nvSpPr>
           <p:spPr>
             <a:xfrm>
-              <a:off x="4839096" y="2808759"/>
+              <a:off x="4899874" y="2808759"/>
               <a:ext cx="62384" cy="62384"/>
             </a:xfrm>
             <a:prstGeom prst="ellipse">
@@ -18314,7 +18314,7 @@
           </p:nvSpPr>
           <p:spPr>
             <a:xfrm>
-              <a:off x="4750690" y="2437059"/>
+              <a:off x="4688237" y="2437059"/>
               <a:ext cx="62384" cy="62384"/>
             </a:xfrm>
             <a:prstGeom prst="ellipse">
@@ -18340,7 +18340,7 @@
           </p:nvSpPr>
           <p:spPr>
             <a:xfrm>
-              <a:off x="4900037" y="2620576"/>
+              <a:off x="4863040" y="2620576"/>
               <a:ext cx="62384" cy="62384"/>
             </a:xfrm>
             <a:prstGeom prst="ellipse">
@@ -18366,7 +18366,7 @@
           </p:nvSpPr>
           <p:spPr>
             <a:xfrm>
-              <a:off x="4684409" y="2460359"/>
+              <a:off x="4693279" y="2460359"/>
               <a:ext cx="62384" cy="62384"/>
             </a:xfrm>
             <a:prstGeom prst="ellipse">
@@ -18392,7 +18392,7 @@
           </p:nvSpPr>
           <p:spPr>
             <a:xfrm>
-              <a:off x="4889815" y="2563301"/>
+              <a:off x="4883094" y="2563301"/>
               <a:ext cx="62384" cy="62384"/>
             </a:xfrm>
             <a:prstGeom prst="ellipse">
@@ -18418,7 +18418,7 @@
           </p:nvSpPr>
           <p:spPr>
             <a:xfrm>
-              <a:off x="4709243" y="2841489"/>
+              <a:off x="4742931" y="2841489"/>
               <a:ext cx="62384" cy="62384"/>
             </a:xfrm>
             <a:prstGeom prst="ellipse">
@@ -18444,7 +18444,7 @@
           </p:nvSpPr>
           <p:spPr>
             <a:xfrm>
-              <a:off x="4875306" y="2355588"/>
+              <a:off x="4873616" y="2355588"/>
               <a:ext cx="62384" cy="62384"/>
             </a:xfrm>
             <a:prstGeom prst="ellipse">
@@ -18470,7 +18470,7 @@
           </p:nvSpPr>
           <p:spPr>
             <a:xfrm>
-              <a:off x="4699415" y="1606661"/>
+              <a:off x="4735879" y="1606661"/>
               <a:ext cx="62384" cy="62384"/>
             </a:xfrm>
             <a:prstGeom prst="ellipse">
@@ -18496,7 +18496,7 @@
           </p:nvSpPr>
           <p:spPr>
             <a:xfrm>
-              <a:off x="4864327" y="1907008"/>
+              <a:off x="4877618" y="1907008"/>
               <a:ext cx="62384" cy="62384"/>
             </a:xfrm>
             <a:prstGeom prst="ellipse">
@@ -18522,7 +18522,7 @@
           </p:nvSpPr>
           <p:spPr>
             <a:xfrm>
-              <a:off x="4678676" y="2769845"/>
+              <a:off x="4704098" y="2769845"/>
               <a:ext cx="62384" cy="62384"/>
             </a:xfrm>
             <a:prstGeom prst="ellipse">
@@ -18548,7 +18548,7 @@
           </p:nvSpPr>
           <p:spPr>
             <a:xfrm>
-              <a:off x="4875118" y="2526901"/>
+              <a:off x="4870363" y="2526901"/>
               <a:ext cx="62384" cy="62384"/>
             </a:xfrm>
             <a:prstGeom prst="ellipse">
@@ -18574,7 +18574,7 @@
           </p:nvSpPr>
           <p:spPr>
             <a:xfrm>
-              <a:off x="4691065" y="2528874"/>
+              <a:off x="4714631" y="2528874"/>
               <a:ext cx="62384" cy="62384"/>
             </a:xfrm>
             <a:prstGeom prst="ellipse">
@@ -18600,7 +18600,7 @@
           </p:nvSpPr>
           <p:spPr>
             <a:xfrm>
-              <a:off x="4837893" y="2508484"/>
+              <a:off x="4881816" y="2508484"/>
               <a:ext cx="62384" cy="62384"/>
             </a:xfrm>
             <a:prstGeom prst="ellipse">
@@ -18626,7 +18626,7 @@
           </p:nvSpPr>
           <p:spPr>
             <a:xfrm>
-              <a:off x="4713203" y="2108226"/>
+              <a:off x="4726203" y="2108226"/>
               <a:ext cx="62384" cy="62384"/>
             </a:xfrm>
             <a:prstGeom prst="ellipse">
@@ -18652,7 +18652,7 @@
           </p:nvSpPr>
           <p:spPr>
             <a:xfrm>
-              <a:off x="4898272" y="3063877"/>
+              <a:off x="4860290" y="3063877"/>
               <a:ext cx="62384" cy="62384"/>
             </a:xfrm>
             <a:prstGeom prst="ellipse">
@@ -18678,7 +18678,7 @@
           </p:nvSpPr>
           <p:spPr>
             <a:xfrm>
-              <a:off x="4723751" y="2540738"/>
+              <a:off x="4751965" y="2540738"/>
               <a:ext cx="62384" cy="62384"/>
             </a:xfrm>
             <a:prstGeom prst="ellipse">
@@ -18704,7 +18704,7 @@
           </p:nvSpPr>
           <p:spPr>
             <a:xfrm>
-              <a:off x="4854563" y="2471101"/>
+              <a:off x="4877887" y="2471101"/>
               <a:ext cx="62384" cy="62384"/>
             </a:xfrm>
             <a:prstGeom prst="ellipse">
@@ -18730,7 +18730,7 @@
           </p:nvSpPr>
           <p:spPr>
             <a:xfrm>
-              <a:off x="4698510" y="2845680"/>
+              <a:off x="4725035" y="2845680"/>
               <a:ext cx="62384" cy="62384"/>
             </a:xfrm>
             <a:prstGeom prst="ellipse">
@@ -18756,7 +18756,7 @@
           </p:nvSpPr>
           <p:spPr>
             <a:xfrm>
-              <a:off x="4882513" y="2964366"/>
+              <a:off x="4833189" y="2964366"/>
               <a:ext cx="62384" cy="62384"/>
             </a:xfrm>
             <a:prstGeom prst="ellipse">
@@ -18782,7 +18782,7 @@
           </p:nvSpPr>
           <p:spPr>
             <a:xfrm>
-              <a:off x="4743324" y="2761471"/>
+              <a:off x="4681110" y="2761471"/>
               <a:ext cx="62384" cy="62384"/>
             </a:xfrm>
             <a:prstGeom prst="ellipse">
@@ -18808,7 +18808,7 @@
           </p:nvSpPr>
           <p:spPr>
             <a:xfrm>
-              <a:off x="4874559" y="2923452"/>
+              <a:off x="4834903" y="2923452"/>
               <a:ext cx="62384" cy="62384"/>
             </a:xfrm>
             <a:prstGeom prst="ellipse">
@@ -18834,7 +18834,7 @@
           </p:nvSpPr>
           <p:spPr>
             <a:xfrm>
-              <a:off x="4712005" y="2607449"/>
+              <a:off x="4712127" y="2607449"/>
               <a:ext cx="62384" cy="62384"/>
             </a:xfrm>
             <a:prstGeom prst="ellipse">
@@ -18860,7 +18860,7 @@
           </p:nvSpPr>
           <p:spPr>
             <a:xfrm>
-              <a:off x="4869643" y="2208631"/>
+              <a:off x="4870611" y="2208631"/>
               <a:ext cx="62384" cy="62384"/>
             </a:xfrm>
             <a:prstGeom prst="ellipse">
@@ -18886,7 +18886,7 @@
           </p:nvSpPr>
           <p:spPr>
             <a:xfrm>
-              <a:off x="4736126" y="2681231"/>
+              <a:off x="4687599" y="2681231"/>
               <a:ext cx="62384" cy="62384"/>
             </a:xfrm>
             <a:prstGeom prst="ellipse">
@@ -18912,7 +18912,7 @@
           </p:nvSpPr>
           <p:spPr>
             <a:xfrm>
-              <a:off x="4891630" y="2374750"/>
+              <a:off x="4865965" y="2374750"/>
               <a:ext cx="62384" cy="62384"/>
             </a:xfrm>
             <a:prstGeom prst="ellipse">
@@ -18938,7 +18938,7 @@
           </p:nvSpPr>
           <p:spPr>
             <a:xfrm>
-              <a:off x="4745694" y="2288238"/>
+              <a:off x="4717302" y="2288238"/>
               <a:ext cx="62384" cy="62384"/>
             </a:xfrm>
             <a:prstGeom prst="ellipse">
@@ -18964,7 +18964,7 @@
           </p:nvSpPr>
           <p:spPr>
             <a:xfrm>
-              <a:off x="4830107" y="2930793"/>
+              <a:off x="4830454" y="2930793"/>
               <a:ext cx="62384" cy="62384"/>
             </a:xfrm>
             <a:prstGeom prst="ellipse">
@@ -18990,7 +18990,7 @@
           </p:nvSpPr>
           <p:spPr>
             <a:xfrm>
-              <a:off x="4702511" y="2806788"/>
+              <a:off x="4694045" y="2806788"/>
               <a:ext cx="62384" cy="62384"/>
             </a:xfrm>
             <a:prstGeom prst="ellipse">
@@ -19016,7 +19016,7 @@
           </p:nvSpPr>
           <p:spPr>
             <a:xfrm>
-              <a:off x="4871795" y="2769173"/>
+              <a:off x="4855469" y="2769173"/>
               <a:ext cx="62384" cy="62384"/>
             </a:xfrm>
             <a:prstGeom prst="ellipse">
@@ -19042,7 +19042,7 @@
           </p:nvSpPr>
           <p:spPr>
             <a:xfrm>
-              <a:off x="4723956" y="2125887"/>
+              <a:off x="4750270" y="2125887"/>
               <a:ext cx="62384" cy="62384"/>
             </a:xfrm>
             <a:prstGeom prst="ellipse">
@@ -19068,7 +19068,7 @@
           </p:nvSpPr>
           <p:spPr>
             <a:xfrm>
-              <a:off x="4899493" y="2426405"/>
+              <a:off x="4875773" y="2426405"/>
               <a:ext cx="62384" cy="62384"/>
             </a:xfrm>
             <a:prstGeom prst="ellipse">
@@ -19094,7 +19094,7 @@
           </p:nvSpPr>
           <p:spPr>
             <a:xfrm>
-              <a:off x="4742202" y="2851742"/>
+              <a:off x="4741737" y="2851742"/>
               <a:ext cx="62384" cy="62384"/>
             </a:xfrm>
             <a:prstGeom prst="ellipse">
@@ -19120,7 +19120,7 @@
           </p:nvSpPr>
           <p:spPr>
             <a:xfrm>
-              <a:off x="4831869" y="3194303"/>
+              <a:off x="4868312" y="3194303"/>
               <a:ext cx="62384" cy="62384"/>
             </a:xfrm>
             <a:prstGeom prst="ellipse">
@@ -19146,7 +19146,7 @@
           </p:nvSpPr>
           <p:spPr>
             <a:xfrm>
-              <a:off x="4707444" y="3013766"/>
+              <a:off x="4727240" y="3013766"/>
               <a:ext cx="62384" cy="62384"/>
             </a:xfrm>
             <a:prstGeom prst="ellipse">
@@ -19172,7 +19172,7 @@
           </p:nvSpPr>
           <p:spPr>
             <a:xfrm>
-              <a:off x="4852642" y="2626191"/>
+              <a:off x="4876973" y="2626191"/>
               <a:ext cx="62384" cy="62384"/>
             </a:xfrm>
             <a:prstGeom prst="ellipse">
@@ -19198,7 +19198,7 @@
           </p:nvSpPr>
           <p:spPr>
             <a:xfrm>
-              <a:off x="4681675" y="2009130"/>
+              <a:off x="4740836" y="2009130"/>
               <a:ext cx="62384" cy="62384"/>
             </a:xfrm>
             <a:prstGeom prst="ellipse">
@@ -19224,7 +19224,7 @@
           </p:nvSpPr>
           <p:spPr>
             <a:xfrm>
-              <a:off x="4833876" y="2572888"/>
+              <a:off x="4876560" y="2572888"/>
               <a:ext cx="62384" cy="62384"/>
             </a:xfrm>
             <a:prstGeom prst="ellipse">
@@ -19250,7 +19250,7 @@
           </p:nvSpPr>
           <p:spPr>
             <a:xfrm>
-              <a:off x="4712560" y="2180947"/>
+              <a:off x="4718448" y="2180947"/>
               <a:ext cx="62384" cy="62384"/>
             </a:xfrm>
             <a:prstGeom prst="ellipse">
@@ -19276,7 +19276,7 @@
           </p:nvSpPr>
           <p:spPr>
             <a:xfrm>
-              <a:off x="4866249" y="2606670"/>
+              <a:off x="4842903" y="2606670"/>
               <a:ext cx="62384" cy="62384"/>
             </a:xfrm>
             <a:prstGeom prst="ellipse">
@@ -19302,7 +19302,7 @@
           </p:nvSpPr>
           <p:spPr>
             <a:xfrm>
-              <a:off x="4689335" y="2302950"/>
+              <a:off x="4697191" y="2302950"/>
               <a:ext cx="62384" cy="62384"/>
             </a:xfrm>
             <a:prstGeom prst="ellipse">
@@ -19328,7 +19328,7 @@
           </p:nvSpPr>
           <p:spPr>
             <a:xfrm>
-              <a:off x="4898654" y="2628013"/>
+              <a:off x="4865060" y="2628013"/>
               <a:ext cx="62384" cy="62384"/>
             </a:xfrm>
             <a:prstGeom prst="ellipse">
@@ -19354,7 +19354,7 @@
           </p:nvSpPr>
           <p:spPr>
             <a:xfrm>
-              <a:off x="4737973" y="2882558"/>
+              <a:off x="4733069" y="2882558"/>
               <a:ext cx="62384" cy="62384"/>
             </a:xfrm>
             <a:prstGeom prst="ellipse">
@@ -19380,7 +19380,7 @@
           </p:nvSpPr>
           <p:spPr>
             <a:xfrm>
-              <a:off x="4879467" y="2297022"/>
+              <a:off x="4865198" y="2297022"/>
               <a:ext cx="62384" cy="62384"/>
             </a:xfrm>
             <a:prstGeom prst="ellipse">
@@ -19406,7 +19406,7 @@
           </p:nvSpPr>
           <p:spPr>
             <a:xfrm>
-              <a:off x="4708804" y="2781978"/>
+              <a:off x="4747595" y="2781978"/>
               <a:ext cx="62384" cy="62384"/>
             </a:xfrm>
             <a:prstGeom prst="ellipse">
@@ -19432,7 +19432,7 @@
           </p:nvSpPr>
           <p:spPr>
             <a:xfrm>
-              <a:off x="4843328" y="2467935"/>
+              <a:off x="4898565" y="2467935"/>
               <a:ext cx="62384" cy="62384"/>
             </a:xfrm>
             <a:prstGeom prst="ellipse">
@@ -19458,7 +19458,7 @@
           </p:nvSpPr>
           <p:spPr>
             <a:xfrm>
-              <a:off x="4711011" y="2228724"/>
+              <a:off x="4717183" y="2228724"/>
               <a:ext cx="62384" cy="62384"/>
             </a:xfrm>
             <a:prstGeom prst="ellipse">
@@ -19484,7 +19484,7 @@
           </p:nvSpPr>
           <p:spPr>
             <a:xfrm>
-              <a:off x="4858724" y="2561209"/>
+              <a:off x="4900042" y="2561209"/>
               <a:ext cx="62384" cy="62384"/>
             </a:xfrm>
             <a:prstGeom prst="ellipse">
@@ -19510,7 +19510,7 @@
           </p:nvSpPr>
           <p:spPr>
             <a:xfrm>
-              <a:off x="4739069" y="2374627"/>
+              <a:off x="4696785" y="2374627"/>
               <a:ext cx="62384" cy="62384"/>
             </a:xfrm>
             <a:prstGeom prst="ellipse">
@@ -19536,7 +19536,7 @@
           </p:nvSpPr>
           <p:spPr>
             <a:xfrm>
-              <a:off x="4895020" y="2083058"/>
+              <a:off x="4893269" y="2083058"/>
               <a:ext cx="62384" cy="62384"/>
             </a:xfrm>
             <a:prstGeom prst="ellipse">
@@ -19562,7 +19562,7 @@
           </p:nvSpPr>
           <p:spPr>
             <a:xfrm>
-              <a:off x="4691180" y="2680218"/>
+              <a:off x="4707664" y="2680218"/>
               <a:ext cx="62384" cy="62384"/>
             </a:xfrm>
             <a:prstGeom prst="ellipse">
@@ -19588,7 +19588,7 @@
           </p:nvSpPr>
           <p:spPr>
             <a:xfrm>
-              <a:off x="4882372" y="2481739"/>
+              <a:off x="4841595" y="2481739"/>
               <a:ext cx="62384" cy="62384"/>
             </a:xfrm>
             <a:prstGeom prst="ellipse">
@@ -19614,7 +19614,7 @@
           </p:nvSpPr>
           <p:spPr>
             <a:xfrm>
-              <a:off x="4689633" y="2081163"/>
+              <a:off x="4710050" y="2081163"/>
               <a:ext cx="62384" cy="62384"/>
             </a:xfrm>
             <a:prstGeom prst="ellipse">
@@ -19640,7 +19640,7 @@
           </p:nvSpPr>
           <p:spPr>
             <a:xfrm>
-              <a:off x="4867254" y="2167581"/>
+              <a:off x="4855877" y="2167581"/>
               <a:ext cx="62384" cy="62384"/>
             </a:xfrm>
             <a:prstGeom prst="ellipse">
@@ -19666,7 +19666,7 @@
           </p:nvSpPr>
           <p:spPr>
             <a:xfrm>
-              <a:off x="4695499" y="2681153"/>
+              <a:off x="4712826" y="2681153"/>
               <a:ext cx="62384" cy="62384"/>
             </a:xfrm>
             <a:prstGeom prst="ellipse">
@@ -19692,7 +19692,7 @@
           </p:nvSpPr>
           <p:spPr>
             <a:xfrm>
-              <a:off x="4833383" y="2737485"/>
+              <a:off x="4865153" y="2737485"/>
               <a:ext cx="62384" cy="62384"/>
             </a:xfrm>
             <a:prstGeom prst="ellipse">
@@ -19718,7 +19718,7 @@
           </p:nvSpPr>
           <p:spPr>
             <a:xfrm>
-              <a:off x="4753376" y="2317605"/>
+              <a:off x="4745636" y="2317605"/>
               <a:ext cx="62384" cy="62384"/>
             </a:xfrm>
             <a:prstGeom prst="ellipse">
@@ -19744,7 +19744,7 @@
           </p:nvSpPr>
           <p:spPr>
             <a:xfrm>
-              <a:off x="4858913" y="2612100"/>
+              <a:off x="4844685" y="2612100"/>
               <a:ext cx="62384" cy="62384"/>
             </a:xfrm>
             <a:prstGeom prst="ellipse">
@@ -19770,7 +19770,7 @@
           </p:nvSpPr>
           <p:spPr>
             <a:xfrm>
-              <a:off x="4753235" y="3185085"/>
+              <a:off x="4743176" y="3185085"/>
               <a:ext cx="62384" cy="62384"/>
             </a:xfrm>
             <a:prstGeom prst="ellipse">
@@ -19796,7 +19796,7 @@
           </p:nvSpPr>
           <p:spPr>
             <a:xfrm>
-              <a:off x="4902964" y="3251737"/>
+              <a:off x="4833600" y="3251737"/>
               <a:ext cx="62384" cy="62384"/>
             </a:xfrm>
             <a:prstGeom prst="ellipse">
@@ -19822,7 +19822,7 @@
           </p:nvSpPr>
           <p:spPr>
             <a:xfrm>
-              <a:off x="4747696" y="2162231"/>
+              <a:off x="4681960" y="2162231"/>
               <a:ext cx="62384" cy="62384"/>
             </a:xfrm>
             <a:prstGeom prst="ellipse">
@@ -19848,7 +19848,7 @@
           </p:nvSpPr>
           <p:spPr>
             <a:xfrm>
-              <a:off x="4898995" y="2727672"/>
+              <a:off x="4860094" y="2727672"/>
               <a:ext cx="62384" cy="62384"/>
             </a:xfrm>
             <a:prstGeom prst="ellipse">
@@ -19874,7 +19874,7 @@
           </p:nvSpPr>
           <p:spPr>
             <a:xfrm>
-              <a:off x="4690670" y="2348880"/>
+              <a:off x="4686935" y="2348880"/>
               <a:ext cx="62384" cy="62384"/>
             </a:xfrm>
             <a:prstGeom prst="ellipse">
@@ -19900,7 +19900,7 @@
           </p:nvSpPr>
           <p:spPr>
             <a:xfrm>
-              <a:off x="4863750" y="2601820"/>
+              <a:off x="4862142" y="2601820"/>
               <a:ext cx="62384" cy="62384"/>
             </a:xfrm>
             <a:prstGeom prst="ellipse">
@@ -19926,7 +19926,7 @@
           </p:nvSpPr>
           <p:spPr>
             <a:xfrm>
-              <a:off x="4708500" y="2424810"/>
+              <a:off x="4690268" y="2424810"/>
               <a:ext cx="62384" cy="62384"/>
             </a:xfrm>
             <a:prstGeom prst="ellipse">
@@ -19952,7 +19952,7 @@
           </p:nvSpPr>
           <p:spPr>
             <a:xfrm>
-              <a:off x="4872486" y="2768547"/>
+              <a:off x="4882427" y="2768547"/>
               <a:ext cx="62384" cy="62384"/>
             </a:xfrm>
             <a:prstGeom prst="ellipse">
@@ -19978,7 +19978,7 @@
           </p:nvSpPr>
           <p:spPr>
             <a:xfrm>
-              <a:off x="4720894" y="2319052"/>
+              <a:off x="4726702" y="2319052"/>
               <a:ext cx="62384" cy="62384"/>
             </a:xfrm>
             <a:prstGeom prst="ellipse">
@@ -20004,7 +20004,7 @@
           </p:nvSpPr>
           <p:spPr>
             <a:xfrm>
-              <a:off x="4891386" y="2342871"/>
+              <a:off x="4840260" y="2342871"/>
               <a:ext cx="62384" cy="62384"/>
             </a:xfrm>
             <a:prstGeom prst="ellipse">
@@ -20030,7 +20030,7 @@
           </p:nvSpPr>
           <p:spPr>
             <a:xfrm>
-              <a:off x="4746219" y="2344858"/>
+              <a:off x="4711804" y="2344858"/>
               <a:ext cx="62384" cy="62384"/>
             </a:xfrm>
             <a:prstGeom prst="ellipse">
@@ -20056,7 +20056,7 @@
           </p:nvSpPr>
           <p:spPr>
             <a:xfrm>
-              <a:off x="4854541" y="2646094"/>
+              <a:off x="4860509" y="2646094"/>
               <a:ext cx="62384" cy="62384"/>
             </a:xfrm>
             <a:prstGeom prst="ellipse">
@@ -20082,7 +20082,7 @@
           </p:nvSpPr>
           <p:spPr>
             <a:xfrm>
-              <a:off x="4681324" y="2530032"/>
+              <a:off x="4720928" y="2530032"/>
               <a:ext cx="62384" cy="62384"/>
             </a:xfrm>
             <a:prstGeom prst="ellipse">
@@ -20108,7 +20108,7 @@
           </p:nvSpPr>
           <p:spPr>
             <a:xfrm>
-              <a:off x="4873959" y="2585508"/>
+              <a:off x="4875793" y="2585508"/>
               <a:ext cx="62384" cy="62384"/>
             </a:xfrm>
             <a:prstGeom prst="ellipse">
@@ -20134,7 +20134,7 @@
           </p:nvSpPr>
           <p:spPr>
             <a:xfrm>
-              <a:off x="4743305" y="2411097"/>
+              <a:off x="4730502" y="2411097"/>
               <a:ext cx="62384" cy="62384"/>
             </a:xfrm>
             <a:prstGeom prst="ellipse">
@@ -20160,7 +20160,7 @@
           </p:nvSpPr>
           <p:spPr>
             <a:xfrm>
-              <a:off x="4828693" y="2286848"/>
+              <a:off x="4857152" y="2286848"/>
               <a:ext cx="62384" cy="62384"/>
             </a:xfrm>
             <a:prstGeom prst="ellipse">
@@ -20186,7 +20186,7 @@
           </p:nvSpPr>
           <p:spPr>
             <a:xfrm>
-              <a:off x="4724001" y="2683246"/>
+              <a:off x="4710041" y="2683246"/>
               <a:ext cx="62384" cy="62384"/>
             </a:xfrm>
             <a:prstGeom prst="ellipse">
@@ -20212,7 +20212,7 @@
           </p:nvSpPr>
           <p:spPr>
             <a:xfrm>
-              <a:off x="4902467" y="3124870"/>
+              <a:off x="4897009" y="3124870"/>
               <a:ext cx="62384" cy="62384"/>
             </a:xfrm>
             <a:prstGeom prst="ellipse">
@@ -20238,7 +20238,7 @@
           </p:nvSpPr>
           <p:spPr>
             <a:xfrm>
-              <a:off x="4736276" y="2917394"/>
+              <a:off x="4737712" y="2917394"/>
               <a:ext cx="62384" cy="62384"/>
             </a:xfrm>
             <a:prstGeom prst="ellipse">
@@ -20264,7 +20264,7 @@
           </p:nvSpPr>
           <p:spPr>
             <a:xfrm>
-              <a:off x="4829392" y="2497390"/>
+              <a:off x="4850696" y="2497390"/>
               <a:ext cx="62384" cy="62384"/>
             </a:xfrm>
             <a:prstGeom prst="ellipse">
@@ -20290,7 +20290,7 @@
           </p:nvSpPr>
           <p:spPr>
             <a:xfrm>
-              <a:off x="4736531" y="2511029"/>
+              <a:off x="4728510" y="2511029"/>
               <a:ext cx="62384" cy="62384"/>
             </a:xfrm>
             <a:prstGeom prst="ellipse">
@@ -20316,7 +20316,7 @@
           </p:nvSpPr>
           <p:spPr>
             <a:xfrm>
-              <a:off x="4878102" y="2554699"/>
+              <a:off x="4893689" y="2554699"/>
               <a:ext cx="62384" cy="62384"/>
             </a:xfrm>
             <a:prstGeom prst="ellipse">
@@ -20342,7 +20342,7 @@
           </p:nvSpPr>
           <p:spPr>
             <a:xfrm>
-              <a:off x="4732791" y="2559440"/>
+              <a:off x="4730305" y="2559440"/>
               <a:ext cx="62384" cy="62384"/>
             </a:xfrm>
             <a:prstGeom prst="ellipse">
@@ -20368,7 +20368,7 @@
           </p:nvSpPr>
           <p:spPr>
             <a:xfrm>
-              <a:off x="4889672" y="2762487"/>
+              <a:off x="4873523" y="2762487"/>
               <a:ext cx="62384" cy="62384"/>
             </a:xfrm>
             <a:prstGeom prst="ellipse">
@@ -20394,7 +20394,7 @@
           </p:nvSpPr>
           <p:spPr>
             <a:xfrm>
-              <a:off x="4750772" y="2609385"/>
+              <a:off x="4751993" y="2609385"/>
               <a:ext cx="62384" cy="62384"/>
             </a:xfrm>
             <a:prstGeom prst="ellipse">
@@ -20420,7 +20420,7 @@
           </p:nvSpPr>
           <p:spPr>
             <a:xfrm>
-              <a:off x="4857907" y="2228409"/>
+              <a:off x="4835966" y="2228409"/>
               <a:ext cx="62384" cy="62384"/>
             </a:xfrm>
             <a:prstGeom prst="ellipse">
@@ -20446,7 +20446,7 @@
           </p:nvSpPr>
           <p:spPr>
             <a:xfrm>
-              <a:off x="4706131" y="1783476"/>
+              <a:off x="4711507" y="1783476"/>
               <a:ext cx="62384" cy="62384"/>
             </a:xfrm>
             <a:prstGeom prst="ellipse">
@@ -20472,7 +20472,7 @@
           </p:nvSpPr>
           <p:spPr>
             <a:xfrm>
-              <a:off x="4888888" y="2113447"/>
+              <a:off x="4831003" y="2113447"/>
               <a:ext cx="62384" cy="62384"/>
             </a:xfrm>
             <a:prstGeom prst="ellipse">
@@ -20498,7 +20498,7 @@
           </p:nvSpPr>
           <p:spPr>
             <a:xfrm>
-              <a:off x="4734857" y="2254933"/>
+              <a:off x="4686420" y="2254933"/>
               <a:ext cx="62384" cy="62384"/>
             </a:xfrm>
             <a:prstGeom prst="ellipse">
@@ -20524,7 +20524,7 @@
           </p:nvSpPr>
           <p:spPr>
             <a:xfrm>
-              <a:off x="4856285" y="2332335"/>
+              <a:off x="4838637" y="2332335"/>
               <a:ext cx="62384" cy="62384"/>
             </a:xfrm>
             <a:prstGeom prst="ellipse">
@@ -20550,7 +20550,7 @@
           </p:nvSpPr>
           <p:spPr>
             <a:xfrm>
-              <a:off x="4692197" y="2031341"/>
+              <a:off x="4720893" y="2031341"/>
               <a:ext cx="62384" cy="62384"/>
             </a:xfrm>
             <a:prstGeom prst="ellipse">
@@ -20576,7 +20576,7 @@
           </p:nvSpPr>
           <p:spPr>
             <a:xfrm>
-              <a:off x="4854915" y="2263950"/>
+              <a:off x="4853139" y="2263950"/>
               <a:ext cx="62384" cy="62384"/>
             </a:xfrm>
             <a:prstGeom prst="ellipse">
@@ -20602,7 +20602,7 @@
           </p:nvSpPr>
           <p:spPr>
             <a:xfrm>
-              <a:off x="4739764" y="2777345"/>
+              <a:off x="4705864" y="2777345"/>
               <a:ext cx="62384" cy="62384"/>
             </a:xfrm>
             <a:prstGeom prst="ellipse">
@@ -20628,7 +20628,7 @@
           </p:nvSpPr>
           <p:spPr>
             <a:xfrm>
-              <a:off x="4841135" y="2777409"/>
+              <a:off x="4834359" y="2777409"/>
               <a:ext cx="62384" cy="62384"/>
             </a:xfrm>
             <a:prstGeom prst="ellipse">
@@ -20654,7 +20654,7 @@
           </p:nvSpPr>
           <p:spPr>
             <a:xfrm>
-              <a:off x="4694325" y="2253316"/>
+              <a:off x="4729947" y="2253316"/>
               <a:ext cx="62384" cy="62384"/>
             </a:xfrm>
             <a:prstGeom prst="ellipse">
@@ -20680,7 +20680,7 @@
           </p:nvSpPr>
           <p:spPr>
             <a:xfrm>
-              <a:off x="4865108" y="2352887"/>
+              <a:off x="4870958" y="2352887"/>
               <a:ext cx="62384" cy="62384"/>
             </a:xfrm>
             <a:prstGeom prst="ellipse">
@@ -20706,7 +20706,7 @@
           </p:nvSpPr>
           <p:spPr>
             <a:xfrm>
-              <a:off x="4747070" y="2401614"/>
+              <a:off x="4699309" y="2401614"/>
               <a:ext cx="62384" cy="62384"/>
             </a:xfrm>
             <a:prstGeom prst="ellipse">
@@ -20732,7 +20732,7 @@
           </p:nvSpPr>
           <p:spPr>
             <a:xfrm>
-              <a:off x="4898856" y="2351698"/>
+              <a:off x="4870226" y="2351698"/>
               <a:ext cx="62384" cy="62384"/>
             </a:xfrm>
             <a:prstGeom prst="ellipse">
@@ -20758,7 +20758,7 @@
           </p:nvSpPr>
           <p:spPr>
             <a:xfrm>
-              <a:off x="4683225" y="2783130"/>
+              <a:off x="4721503" y="2783130"/>
               <a:ext cx="62384" cy="62384"/>
             </a:xfrm>
             <a:prstGeom prst="ellipse">
@@ -20784,7 +20784,7 @@
           </p:nvSpPr>
           <p:spPr>
             <a:xfrm>
-              <a:off x="4863943" y="2628817"/>
+              <a:off x="4845458" y="2628817"/>
               <a:ext cx="62384" cy="62384"/>
             </a:xfrm>
             <a:prstGeom prst="ellipse">
@@ -20810,7 +20810,7 @@
           </p:nvSpPr>
           <p:spPr>
             <a:xfrm>
-              <a:off x="4685208" y="2034889"/>
+              <a:off x="4750784" y="2034889"/>
               <a:ext cx="62384" cy="62384"/>
             </a:xfrm>
             <a:prstGeom prst="ellipse">
@@ -20836,7 +20836,7 @@
           </p:nvSpPr>
           <p:spPr>
             <a:xfrm>
-              <a:off x="4844390" y="2402098"/>
+              <a:off x="4877042" y="2402098"/>
               <a:ext cx="62384" cy="62384"/>
             </a:xfrm>
             <a:prstGeom prst="ellipse">
@@ -20862,7 +20862,7 @@
           </p:nvSpPr>
           <p:spPr>
             <a:xfrm>
-              <a:off x="4752696" y="2580871"/>
+              <a:off x="4748663" y="2580871"/>
               <a:ext cx="62384" cy="62384"/>
             </a:xfrm>
             <a:prstGeom prst="ellipse">
@@ -20888,7 +20888,7 @@
           </p:nvSpPr>
           <p:spPr>
             <a:xfrm>
-              <a:off x="4884230" y="2494681"/>
+              <a:off x="4899741" y="2494681"/>
               <a:ext cx="62384" cy="62384"/>
             </a:xfrm>
             <a:prstGeom prst="ellipse">
@@ -20914,7 +20914,7 @@
           </p:nvSpPr>
           <p:spPr>
             <a:xfrm>
-              <a:off x="4695757" y="2441539"/>
+              <a:off x="4736411" y="2441539"/>
               <a:ext cx="62384" cy="62384"/>
             </a:xfrm>
             <a:prstGeom prst="ellipse">
@@ -20940,7 +20940,7 @@
           </p:nvSpPr>
           <p:spPr>
             <a:xfrm>
-              <a:off x="4880219" y="2772918"/>
+              <a:off x="4898324" y="2772918"/>
               <a:ext cx="62384" cy="62384"/>
             </a:xfrm>
             <a:prstGeom prst="ellipse">
@@ -20966,7 +20966,7 @@
           </p:nvSpPr>
           <p:spPr>
             <a:xfrm>
-              <a:off x="4685388" y="2521555"/>
+              <a:off x="4720219" y="2521555"/>
               <a:ext cx="62384" cy="62384"/>
             </a:xfrm>
             <a:prstGeom prst="ellipse">
@@ -20992,7 +20992,7 @@
           </p:nvSpPr>
           <p:spPr>
             <a:xfrm>
-              <a:off x="4845066" y="2696203"/>
+              <a:off x="4858267" y="2696203"/>
               <a:ext cx="62384" cy="62384"/>
             </a:xfrm>
             <a:prstGeom prst="ellipse">
@@ -21018,7 +21018,7 @@
           </p:nvSpPr>
           <p:spPr>
             <a:xfrm>
-              <a:off x="4691321" y="2300460"/>
+              <a:off x="4744672" y="2300460"/>
               <a:ext cx="62384" cy="62384"/>
             </a:xfrm>
             <a:prstGeom prst="ellipse">
@@ -21044,7 +21044,7 @@
           </p:nvSpPr>
           <p:spPr>
             <a:xfrm>
-              <a:off x="4876427" y="2557734"/>
+              <a:off x="4847644" y="2557734"/>
               <a:ext cx="62384" cy="62384"/>
             </a:xfrm>
             <a:prstGeom prst="ellipse">
@@ -21070,7 +21070,7 @@
           </p:nvSpPr>
           <p:spPr>
             <a:xfrm>
-              <a:off x="4691900" y="2297743"/>
+              <a:off x="4701755" y="2297743"/>
               <a:ext cx="62384" cy="62384"/>
             </a:xfrm>
             <a:prstGeom prst="ellipse">
@@ -21096,7 +21096,7 @@
           </p:nvSpPr>
           <p:spPr>
             <a:xfrm>
-              <a:off x="4888744" y="2708646"/>
+              <a:off x="4891030" y="2708646"/>
               <a:ext cx="62384" cy="62384"/>
             </a:xfrm>
             <a:prstGeom prst="ellipse">
@@ -21122,7 +21122,7 @@
           </p:nvSpPr>
           <p:spPr>
             <a:xfrm>
-              <a:off x="4694992" y="2538953"/>
+              <a:off x="4729384" y="2538953"/>
               <a:ext cx="62384" cy="62384"/>
             </a:xfrm>
             <a:prstGeom prst="ellipse">
@@ -21148,7 +21148,7 @@
           </p:nvSpPr>
           <p:spPr>
             <a:xfrm>
-              <a:off x="4859360" y="2588241"/>
+              <a:off x="4890541" y="2588241"/>
               <a:ext cx="62384" cy="62384"/>
             </a:xfrm>
             <a:prstGeom prst="ellipse">
@@ -21174,7 +21174,7 @@
           </p:nvSpPr>
           <p:spPr>
             <a:xfrm>
-              <a:off x="4697225" y="2216075"/>
+              <a:off x="4682828" y="2216075"/>
               <a:ext cx="62384" cy="62384"/>
             </a:xfrm>
             <a:prstGeom prst="ellipse">
@@ -21200,7 +21200,7 @@
           </p:nvSpPr>
           <p:spPr>
             <a:xfrm>
-              <a:off x="4892717" y="2413705"/>
+              <a:off x="4830792" y="2413705"/>
               <a:ext cx="62384" cy="62384"/>
             </a:xfrm>
             <a:prstGeom prst="ellipse">
@@ -21226,7 +21226,7 @@
           </p:nvSpPr>
           <p:spPr>
             <a:xfrm>
-              <a:off x="4711247" y="2669883"/>
+              <a:off x="4700741" y="2669883"/>
               <a:ext cx="62384" cy="62384"/>
             </a:xfrm>
             <a:prstGeom prst="ellipse">
@@ -21252,7 +21252,7 @@
           </p:nvSpPr>
           <p:spPr>
             <a:xfrm>
-              <a:off x="4872124" y="2214266"/>
+              <a:off x="4840056" y="2214266"/>
               <a:ext cx="62384" cy="62384"/>
             </a:xfrm>
             <a:prstGeom prst="ellipse">
@@ -21278,7 +21278,7 @@
           </p:nvSpPr>
           <p:spPr>
             <a:xfrm>
-              <a:off x="4744441" y="2074950"/>
+              <a:off x="4712535" y="2074950"/>
               <a:ext cx="62384" cy="62384"/>
             </a:xfrm>
             <a:prstGeom prst="ellipse">
@@ -21304,7 +21304,7 @@
           </p:nvSpPr>
           <p:spPr>
             <a:xfrm>
-              <a:off x="4873304" y="2067337"/>
+              <a:off x="4873805" y="2067337"/>
               <a:ext cx="62384" cy="62384"/>
             </a:xfrm>
             <a:prstGeom prst="ellipse">
@@ -21330,7 +21330,7 @@
           </p:nvSpPr>
           <p:spPr>
             <a:xfrm>
-              <a:off x="4684617" y="2450811"/>
+              <a:off x="4708823" y="2450811"/>
               <a:ext cx="62384" cy="62384"/>
             </a:xfrm>
             <a:prstGeom prst="ellipse">
@@ -21356,7 +21356,7 @@
           </p:nvSpPr>
           <p:spPr>
             <a:xfrm>
-              <a:off x="4890527" y="2521828"/>
+              <a:off x="4837501" y="2521828"/>
               <a:ext cx="62384" cy="62384"/>
             </a:xfrm>
             <a:prstGeom prst="ellipse">
@@ -21382,7 +21382,7 @@
           </p:nvSpPr>
           <p:spPr>
             <a:xfrm>
-              <a:off x="4739269" y="2562608"/>
+              <a:off x="4738643" y="2562608"/>
               <a:ext cx="62384" cy="62384"/>
             </a:xfrm>
             <a:prstGeom prst="ellipse">
@@ -21408,7 +21408,7 @@
           </p:nvSpPr>
           <p:spPr>
             <a:xfrm>
-              <a:off x="4883851" y="2410265"/>
+              <a:off x="4892315" y="2410265"/>
               <a:ext cx="62384" cy="62384"/>
             </a:xfrm>
             <a:prstGeom prst="ellipse">
@@ -21434,7 +21434,7 @@
           </p:nvSpPr>
           <p:spPr>
             <a:xfrm>
-              <a:off x="4728193" y="2000330"/>
+              <a:off x="4706890" y="2000330"/>
               <a:ext cx="62384" cy="62384"/>
             </a:xfrm>
             <a:prstGeom prst="ellipse">
@@ -21460,7 +21460,7 @@
           </p:nvSpPr>
           <p:spPr>
             <a:xfrm>
-              <a:off x="4893576" y="2835619"/>
+              <a:off x="4892528" y="2835619"/>
               <a:ext cx="62384" cy="62384"/>
             </a:xfrm>
             <a:prstGeom prst="ellipse">
@@ -21486,7 +21486,7 @@
           </p:nvSpPr>
           <p:spPr>
             <a:xfrm>
-              <a:off x="4748304" y="2883898"/>
+              <a:off x="4688575" y="2883898"/>
               <a:ext cx="62384" cy="62384"/>
             </a:xfrm>
             <a:prstGeom prst="ellipse">
@@ -21512,7 +21512,7 @@
           </p:nvSpPr>
           <p:spPr>
             <a:xfrm>
-              <a:off x="4828649" y="2434687"/>
+              <a:off x="4831328" y="2434687"/>
               <a:ext cx="62384" cy="62384"/>
             </a:xfrm>
             <a:prstGeom prst="ellipse">
@@ -21538,7 +21538,7 @@
           </p:nvSpPr>
           <p:spPr>
             <a:xfrm>
-              <a:off x="4710982" y="2621337"/>
+              <a:off x="4689675" y="2621337"/>
               <a:ext cx="62384" cy="62384"/>
             </a:xfrm>
             <a:prstGeom prst="ellipse">
@@ -21564,7 +21564,7 @@
           </p:nvSpPr>
           <p:spPr>
             <a:xfrm>
-              <a:off x="4833557" y="3061644"/>
+              <a:off x="4883460" y="3061644"/>
               <a:ext cx="62384" cy="62384"/>
             </a:xfrm>
             <a:prstGeom prst="ellipse">
@@ -21590,7 +21590,7 @@
           </p:nvSpPr>
           <p:spPr>
             <a:xfrm>
-              <a:off x="4695393" y="2463417"/>
+              <a:off x="4711916" y="2463417"/>
               <a:ext cx="62384" cy="62384"/>
             </a:xfrm>
             <a:prstGeom prst="ellipse">
@@ -21616,7 +21616,7 @@
           </p:nvSpPr>
           <p:spPr>
             <a:xfrm>
-              <a:off x="4871302" y="2473867"/>
+              <a:off x="4842144" y="2473867"/>
               <a:ext cx="62384" cy="62384"/>
             </a:xfrm>
             <a:prstGeom prst="ellipse">
@@ -21642,7 +21642,7 @@
           </p:nvSpPr>
           <p:spPr>
             <a:xfrm>
-              <a:off x="4708099" y="2498297"/>
+              <a:off x="4697041" y="2498297"/>
               <a:ext cx="62384" cy="62384"/>
             </a:xfrm>
             <a:prstGeom prst="ellipse">
@@ -21668,7 +21668,7 @@
           </p:nvSpPr>
           <p:spPr>
             <a:xfrm>
-              <a:off x="4875896" y="2493303"/>
+              <a:off x="4875645" y="2493303"/>
               <a:ext cx="62384" cy="62384"/>
             </a:xfrm>
             <a:prstGeom prst="ellipse">
@@ -21694,7 +21694,7 @@
           </p:nvSpPr>
           <p:spPr>
             <a:xfrm>
-              <a:off x="4687661" y="2476284"/>
+              <a:off x="4685982" y="2476284"/>
               <a:ext cx="62384" cy="62384"/>
             </a:xfrm>
             <a:prstGeom prst="ellipse">
@@ -21720,7 +21720,7 @@
           </p:nvSpPr>
           <p:spPr>
             <a:xfrm>
-              <a:off x="4883070" y="2723409"/>
+              <a:off x="4858723" y="2723409"/>
               <a:ext cx="62384" cy="62384"/>
             </a:xfrm>
             <a:prstGeom prst="ellipse">
@@ -21746,7 +21746,7 @@
           </p:nvSpPr>
           <p:spPr>
             <a:xfrm>
-              <a:off x="4708359" y="2508982"/>
+              <a:off x="4738863" y="2508982"/>
               <a:ext cx="62384" cy="62384"/>
             </a:xfrm>
             <a:prstGeom prst="ellipse">
@@ -21772,7 +21772,7 @@
           </p:nvSpPr>
           <p:spPr>
             <a:xfrm>
-              <a:off x="4871652" y="2399254"/>
+              <a:off x="4893420" y="2399254"/>
               <a:ext cx="62384" cy="62384"/>
             </a:xfrm>
             <a:prstGeom prst="ellipse">
@@ -21798,7 +21798,7 @@
           </p:nvSpPr>
           <p:spPr>
             <a:xfrm>
-              <a:off x="4718397" y="2852992"/>
+              <a:off x="4706926" y="2852992"/>
               <a:ext cx="62384" cy="62384"/>
             </a:xfrm>
             <a:prstGeom prst="ellipse">
@@ -21824,7 +21824,7 @@
           </p:nvSpPr>
           <p:spPr>
             <a:xfrm>
-              <a:off x="4875459" y="2507167"/>
+              <a:off x="4889859" y="2507167"/>
               <a:ext cx="62384" cy="62384"/>
             </a:xfrm>
             <a:prstGeom prst="ellipse">
@@ -21850,7 +21850,7 @@
           </p:nvSpPr>
           <p:spPr>
             <a:xfrm>
-              <a:off x="4712170" y="2776371"/>
+              <a:off x="4704537" y="2776371"/>
               <a:ext cx="62384" cy="62384"/>
             </a:xfrm>
             <a:prstGeom prst="ellipse">
@@ -21876,7 +21876,7 @@
           </p:nvSpPr>
           <p:spPr>
             <a:xfrm>
-              <a:off x="4861370" y="2186750"/>
+              <a:off x="4878093" y="2186750"/>
               <a:ext cx="62384" cy="62384"/>
             </a:xfrm>
             <a:prstGeom prst="ellipse">
@@ -21902,7 +21902,7 @@
           </p:nvSpPr>
           <p:spPr>
             <a:xfrm>
-              <a:off x="4719739" y="2961704"/>
+              <a:off x="4715398" y="2961704"/>
               <a:ext cx="62384" cy="62384"/>
             </a:xfrm>
             <a:prstGeom prst="ellipse">
@@ -21928,7 +21928,7 @@
           </p:nvSpPr>
           <p:spPr>
             <a:xfrm>
-              <a:off x="4859174" y="3096375"/>
+              <a:off x="4899790" y="3096375"/>
               <a:ext cx="62384" cy="62384"/>
             </a:xfrm>
             <a:prstGeom prst="ellipse">
@@ -21954,7 +21954,7 @@
           </p:nvSpPr>
           <p:spPr>
             <a:xfrm>
-              <a:off x="4731537" y="2757983"/>
+              <a:off x="4738276" y="2757983"/>
               <a:ext cx="62384" cy="62384"/>
             </a:xfrm>
             <a:prstGeom prst="ellipse">
@@ -21980,7 +21980,7 @@
           </p:nvSpPr>
           <p:spPr>
             <a:xfrm>
-              <a:off x="4900388" y="2657120"/>
+              <a:off x="4849997" y="2657120"/>
               <a:ext cx="62384" cy="62384"/>
             </a:xfrm>
             <a:prstGeom prst="ellipse">
@@ -22006,7 +22006,7 @@
           </p:nvSpPr>
           <p:spPr>
             <a:xfrm>
-              <a:off x="4705430" y="2641463"/>
+              <a:off x="4714601" y="2641463"/>
               <a:ext cx="62384" cy="62384"/>
             </a:xfrm>
             <a:prstGeom prst="ellipse">
@@ -22032,7 +22032,7 @@
           </p:nvSpPr>
           <p:spPr>
             <a:xfrm>
-              <a:off x="4845955" y="2485852"/>
+              <a:off x="4841204" y="2485852"/>
               <a:ext cx="62384" cy="62384"/>
             </a:xfrm>
             <a:prstGeom prst="ellipse">
@@ -22058,7 +22058,7 @@
           </p:nvSpPr>
           <p:spPr>
             <a:xfrm>
-              <a:off x="4690189" y="2538340"/>
+              <a:off x="4738846" y="2538340"/>
               <a:ext cx="62384" cy="62384"/>
             </a:xfrm>
             <a:prstGeom prst="ellipse">
@@ -22084,7 +22084,7 @@
           </p:nvSpPr>
           <p:spPr>
             <a:xfrm>
-              <a:off x="4863542" y="2442134"/>
+              <a:off x="4897694" y="2442134"/>
               <a:ext cx="62384" cy="62384"/>
             </a:xfrm>
             <a:prstGeom prst="ellipse">
@@ -22110,7 +22110,7 @@
           </p:nvSpPr>
           <p:spPr>
             <a:xfrm>
-              <a:off x="4698970" y="2611910"/>
+              <a:off x="4728602" y="2611910"/>
               <a:ext cx="62384" cy="62384"/>
             </a:xfrm>
             <a:prstGeom prst="ellipse">
@@ -22136,7 +22136,7 @@
           </p:nvSpPr>
           <p:spPr>
             <a:xfrm>
-              <a:off x="4869158" y="2811538"/>
+              <a:off x="4845665" y="2811538"/>
               <a:ext cx="62384" cy="62384"/>
             </a:xfrm>
             <a:prstGeom prst="ellipse">
@@ -22162,7 +22162,7 @@
           </p:nvSpPr>
           <p:spPr>
             <a:xfrm>
-              <a:off x="4701516" y="2492503"/>
+              <a:off x="4751716" y="2492503"/>
               <a:ext cx="62384" cy="62384"/>
             </a:xfrm>
             <a:prstGeom prst="ellipse">
@@ -22188,7 +22188,7 @@
           </p:nvSpPr>
           <p:spPr>
             <a:xfrm>
-              <a:off x="4839416" y="2345244"/>
+              <a:off x="4832595" y="2345244"/>
               <a:ext cx="62384" cy="62384"/>
             </a:xfrm>
             <a:prstGeom prst="ellipse">
@@ -22214,7 +22214,7 @@
           </p:nvSpPr>
           <p:spPr>
             <a:xfrm>
-              <a:off x="4720294" y="2713547"/>
+              <a:off x="4681874" y="2713547"/>
               <a:ext cx="62384" cy="62384"/>
             </a:xfrm>
             <a:prstGeom prst="ellipse">
@@ -22240,7 +22240,7 @@
           </p:nvSpPr>
           <p:spPr>
             <a:xfrm>
-              <a:off x="4879681" y="2496595"/>
+              <a:off x="4863952" y="2496595"/>
               <a:ext cx="62384" cy="62384"/>
             </a:xfrm>
             <a:prstGeom prst="ellipse">
@@ -22266,7 +22266,7 @@
           </p:nvSpPr>
           <p:spPr>
             <a:xfrm>
-              <a:off x="4738147" y="2751467"/>
+              <a:off x="4701867" y="2751467"/>
               <a:ext cx="62384" cy="62384"/>
             </a:xfrm>
             <a:prstGeom prst="ellipse">
@@ -22292,7 +22292,7 @@
           </p:nvSpPr>
           <p:spPr>
             <a:xfrm>
-              <a:off x="4863107" y="2879203"/>
+              <a:off x="4836953" y="2879203"/>
               <a:ext cx="62384" cy="62384"/>
             </a:xfrm>
             <a:prstGeom prst="ellipse">
@@ -22318,7 +22318,7 @@
           </p:nvSpPr>
           <p:spPr>
             <a:xfrm>
-              <a:off x="4693712" y="2750510"/>
+              <a:off x="4716163" y="2750510"/>
               <a:ext cx="62384" cy="62384"/>
             </a:xfrm>
             <a:prstGeom prst="ellipse">
@@ -22344,7 +22344,7 @@
           </p:nvSpPr>
           <p:spPr>
             <a:xfrm>
-              <a:off x="4829913" y="2443416"/>
+              <a:off x="4860432" y="2443416"/>
               <a:ext cx="62384" cy="62384"/>
             </a:xfrm>
             <a:prstGeom prst="ellipse">
@@ -22370,7 +22370,7 @@
           </p:nvSpPr>
           <p:spPr>
             <a:xfrm>
-              <a:off x="4699764" y="2646272"/>
+              <a:off x="4684279" y="2646272"/>
               <a:ext cx="62384" cy="62384"/>
             </a:xfrm>
             <a:prstGeom prst="ellipse">
@@ -22396,7 +22396,7 @@
           </p:nvSpPr>
           <p:spPr>
             <a:xfrm>
-              <a:off x="4898127" y="2741476"/>
+              <a:off x="4895087" y="2741476"/>
               <a:ext cx="62384" cy="62384"/>
             </a:xfrm>
             <a:prstGeom prst="ellipse">
@@ -22422,7 +22422,7 @@
           </p:nvSpPr>
           <p:spPr>
             <a:xfrm>
-              <a:off x="4724145" y="2318239"/>
+              <a:off x="4752681" y="2318239"/>
               <a:ext cx="62384" cy="62384"/>
             </a:xfrm>
             <a:prstGeom prst="ellipse">
@@ -22448,7 +22448,7 @@
           </p:nvSpPr>
           <p:spPr>
             <a:xfrm>
-              <a:off x="4903098" y="2419113"/>
+              <a:off x="4836744" y="2419113"/>
               <a:ext cx="62384" cy="62384"/>
             </a:xfrm>
             <a:prstGeom prst="ellipse">
@@ -22474,7 +22474,7 @@
           </p:nvSpPr>
           <p:spPr>
             <a:xfrm>
-              <a:off x="4740696" y="2469773"/>
+              <a:off x="4750750" y="2469773"/>
               <a:ext cx="62384" cy="62384"/>
             </a:xfrm>
             <a:prstGeom prst="ellipse">
@@ -22500,7 +22500,7 @@
           </p:nvSpPr>
           <p:spPr>
             <a:xfrm>
-              <a:off x="4835892" y="2608267"/>
+              <a:off x="4853536" y="2608267"/>
               <a:ext cx="62384" cy="62384"/>
             </a:xfrm>
             <a:prstGeom prst="ellipse">
@@ -22526,7 +22526,7 @@
           </p:nvSpPr>
           <p:spPr>
             <a:xfrm>
-              <a:off x="4688921" y="2625658"/>
+              <a:off x="4732614" y="2625658"/>
               <a:ext cx="62384" cy="62384"/>
             </a:xfrm>
             <a:prstGeom prst="ellipse">
@@ -22552,7 +22552,7 @@
           </p:nvSpPr>
           <p:spPr>
             <a:xfrm>
-              <a:off x="4897573" y="2564079"/>
+              <a:off x="4852933" y="2564079"/>
               <a:ext cx="62384" cy="62384"/>
             </a:xfrm>
             <a:prstGeom prst="ellipse">
@@ -22578,7 +22578,7 @@
           </p:nvSpPr>
           <p:spPr>
             <a:xfrm>
-              <a:off x="4710151" y="2609136"/>
+              <a:off x="4745143" y="2609136"/>
               <a:ext cx="62384" cy="62384"/>
             </a:xfrm>
             <a:prstGeom prst="ellipse">
@@ -22604,7 +22604,7 @@
           </p:nvSpPr>
           <p:spPr>
             <a:xfrm>
-              <a:off x="4867232" y="2653088"/>
+              <a:off x="4888948" y="2653088"/>
               <a:ext cx="62384" cy="62384"/>
             </a:xfrm>
             <a:prstGeom prst="ellipse">
@@ -22630,7 +22630,7 @@
           </p:nvSpPr>
           <p:spPr>
             <a:xfrm>
-              <a:off x="4750087" y="2024741"/>
+              <a:off x="4699730" y="2024741"/>
               <a:ext cx="62384" cy="62384"/>
             </a:xfrm>
             <a:prstGeom prst="ellipse">
@@ -22656,7 +22656,7 @@
           </p:nvSpPr>
           <p:spPr>
             <a:xfrm>
-              <a:off x="4891301" y="2193092"/>
+              <a:off x="4877282" y="2193092"/>
               <a:ext cx="62384" cy="62384"/>
             </a:xfrm>
             <a:prstGeom prst="ellipse">
@@ -22682,7 +22682,7 @@
           </p:nvSpPr>
           <p:spPr>
             <a:xfrm>
-              <a:off x="4678626" y="2100594"/>
+              <a:off x="4728839" y="2100594"/>
               <a:ext cx="62384" cy="62384"/>
             </a:xfrm>
             <a:prstGeom prst="ellipse">
@@ -22708,7 +22708,7 @@
           </p:nvSpPr>
           <p:spPr>
             <a:xfrm>
-              <a:off x="4836350" y="2405837"/>
+              <a:off x="4875006" y="2405837"/>
               <a:ext cx="62384" cy="62384"/>
             </a:xfrm>
             <a:prstGeom prst="ellipse">
@@ -22734,7 +22734,7 @@
           </p:nvSpPr>
           <p:spPr>
             <a:xfrm>
-              <a:off x="4691667" y="1788516"/>
+              <a:off x="4711629" y="1788516"/>
               <a:ext cx="62384" cy="62384"/>
             </a:xfrm>
             <a:prstGeom prst="ellipse">
@@ -22760,7 +22760,7 @@
           </p:nvSpPr>
           <p:spPr>
             <a:xfrm>
-              <a:off x="4853084" y="1913279"/>
+              <a:off x="4834109" y="1913279"/>
               <a:ext cx="62384" cy="62384"/>
             </a:xfrm>
             <a:prstGeom prst="ellipse">
@@ -22786,7 +22786,7 @@
           </p:nvSpPr>
           <p:spPr>
             <a:xfrm>
-              <a:off x="4734097" y="2388837"/>
+              <a:off x="4751697" y="2388837"/>
               <a:ext cx="62384" cy="62384"/>
             </a:xfrm>
             <a:prstGeom prst="ellipse">
@@ -22812,7 +22812,7 @@
           </p:nvSpPr>
           <p:spPr>
             <a:xfrm>
-              <a:off x="4855427" y="2434493"/>
+              <a:off x="4842154" y="2434493"/>
               <a:ext cx="62384" cy="62384"/>
             </a:xfrm>
             <a:prstGeom prst="ellipse">
@@ -22838,7 +22838,7 @@
           </p:nvSpPr>
           <p:spPr>
             <a:xfrm>
-              <a:off x="4750125" y="2195308"/>
+              <a:off x="4721428" y="2195308"/>
               <a:ext cx="62384" cy="62384"/>
             </a:xfrm>
             <a:prstGeom prst="ellipse">
@@ -22864,7 +22864,7 @@
           </p:nvSpPr>
           <p:spPr>
             <a:xfrm>
-              <a:off x="4832085" y="2268798"/>
+              <a:off x="4865376" y="2268798"/>
               <a:ext cx="62384" cy="62384"/>
             </a:xfrm>
             <a:prstGeom prst="ellipse">
@@ -22890,7 +22890,7 @@
           </p:nvSpPr>
           <p:spPr>
             <a:xfrm>
-              <a:off x="4717989" y="2432329"/>
+              <a:off x="4691845" y="2432329"/>
               <a:ext cx="62384" cy="62384"/>
             </a:xfrm>
             <a:prstGeom prst="ellipse">
@@ -22916,7 +22916,7 @@
           </p:nvSpPr>
           <p:spPr>
             <a:xfrm>
-              <a:off x="4861614" y="2612735"/>
+              <a:off x="4847649" y="2612735"/>
               <a:ext cx="62384" cy="62384"/>
             </a:xfrm>
             <a:prstGeom prst="ellipse">
@@ -22942,7 +22942,7 @@
           </p:nvSpPr>
           <p:spPr>
             <a:xfrm>
-              <a:off x="4714399" y="2918563"/>
+              <a:off x="4749410" y="2918563"/>
               <a:ext cx="62384" cy="62384"/>
             </a:xfrm>
             <a:prstGeom prst="ellipse">
@@ -22968,7 +22968,7 @@
           </p:nvSpPr>
           <p:spPr>
             <a:xfrm>
-              <a:off x="4890921" y="2955371"/>
+              <a:off x="4872616" y="2955371"/>
               <a:ext cx="62384" cy="62384"/>
             </a:xfrm>
             <a:prstGeom prst="ellipse">
@@ -22994,7 +22994,7 @@
           </p:nvSpPr>
           <p:spPr>
             <a:xfrm>
-              <a:off x="4734651" y="2611752"/>
+              <a:off x="4696215" y="2611752"/>
               <a:ext cx="62384" cy="62384"/>
             </a:xfrm>
             <a:prstGeom prst="ellipse">
@@ -23020,7 +23020,7 @@
           </p:nvSpPr>
           <p:spPr>
             <a:xfrm>
-              <a:off x="4848477" y="2522902"/>
+              <a:off x="4852501" y="2522902"/>
               <a:ext cx="62384" cy="62384"/>
             </a:xfrm>
             <a:prstGeom prst="ellipse">
@@ -23046,7 +23046,7 @@
           </p:nvSpPr>
           <p:spPr>
             <a:xfrm>
-              <a:off x="4743580" y="2041474"/>
+              <a:off x="4750215" y="2041474"/>
               <a:ext cx="62384" cy="62384"/>
             </a:xfrm>
             <a:prstGeom prst="ellipse">
@@ -23072,7 +23072,7 @@
           </p:nvSpPr>
           <p:spPr>
             <a:xfrm>
-              <a:off x="4892793" y="2291757"/>
+              <a:off x="4840740" y="2291757"/>
               <a:ext cx="62384" cy="62384"/>
             </a:xfrm>
             <a:prstGeom prst="ellipse">
@@ -23098,7 +23098,7 @@
           </p:nvSpPr>
           <p:spPr>
             <a:xfrm>
-              <a:off x="4704761" y="2529210"/>
+              <a:off x="4684703" y="2529210"/>
               <a:ext cx="62384" cy="62384"/>
             </a:xfrm>
             <a:prstGeom prst="ellipse">
@@ -23124,7 +23124,7 @@
           </p:nvSpPr>
           <p:spPr>
             <a:xfrm>
-              <a:off x="4878046" y="2572397"/>
+              <a:off x="4877443" y="2572397"/>
               <a:ext cx="62384" cy="62384"/>
             </a:xfrm>
             <a:prstGeom prst="ellipse">
@@ -23150,7 +23150,7 @@
           </p:nvSpPr>
           <p:spPr>
             <a:xfrm>
-              <a:off x="4750200" y="2392352"/>
+              <a:off x="4745965" y="2392352"/>
               <a:ext cx="62384" cy="62384"/>
             </a:xfrm>
             <a:prstGeom prst="ellipse">
@@ -23176,7 +23176,7 @@
           </p:nvSpPr>
           <p:spPr>
             <a:xfrm>
-              <a:off x="4872980" y="2403941"/>
+              <a:off x="4883654" y="2403941"/>
               <a:ext cx="62384" cy="62384"/>
             </a:xfrm>
             <a:prstGeom prst="ellipse">
@@ -23202,7 +23202,7 @@
           </p:nvSpPr>
           <p:spPr>
             <a:xfrm>
-              <a:off x="4744122" y="2158498"/>
+              <a:off x="4730982" y="2158498"/>
               <a:ext cx="62384" cy="62384"/>
             </a:xfrm>
             <a:prstGeom prst="ellipse">
@@ -23228,7 +23228,7 @@
           </p:nvSpPr>
           <p:spPr>
             <a:xfrm>
-              <a:off x="4893768" y="2190759"/>
+              <a:off x="4889677" y="2190759"/>
               <a:ext cx="62384" cy="62384"/>
             </a:xfrm>
             <a:prstGeom prst="ellipse">
@@ -23254,7 +23254,7 @@
           </p:nvSpPr>
           <p:spPr>
             <a:xfrm>
-              <a:off x="4712208" y="2254355"/>
+              <a:off x="4694163" y="2254355"/>
               <a:ext cx="62384" cy="62384"/>
             </a:xfrm>
             <a:prstGeom prst="ellipse">
@@ -23280,7 +23280,7 @@
           </p:nvSpPr>
           <p:spPr>
             <a:xfrm>
-              <a:off x="4851074" y="2567034"/>
+              <a:off x="4896448" y="2567034"/>
               <a:ext cx="62384" cy="62384"/>
             </a:xfrm>
             <a:prstGeom prst="ellipse">
@@ -23306,7 +23306,7 @@
           </p:nvSpPr>
           <p:spPr>
             <a:xfrm>
-              <a:off x="4740341" y="2484607"/>
+              <a:off x="4702724" y="2484607"/>
               <a:ext cx="62384" cy="62384"/>
             </a:xfrm>
             <a:prstGeom prst="ellipse">
@@ -23332,7 +23332,7 @@
           </p:nvSpPr>
           <p:spPr>
             <a:xfrm>
-              <a:off x="4885409" y="2735806"/>
+              <a:off x="4845785" y="2735806"/>
               <a:ext cx="62384" cy="62384"/>
             </a:xfrm>
             <a:prstGeom prst="ellipse">
@@ -23358,7 +23358,7 @@
           </p:nvSpPr>
           <p:spPr>
             <a:xfrm>
-              <a:off x="4697388" y="2413766"/>
+              <a:off x="4687495" y="2413766"/>
               <a:ext cx="62384" cy="62384"/>
             </a:xfrm>
             <a:prstGeom prst="ellipse">
@@ -23384,7 +23384,7 @@
           </p:nvSpPr>
           <p:spPr>
             <a:xfrm>
-              <a:off x="4885649" y="2134468"/>
+              <a:off x="4830975" y="2134468"/>
               <a:ext cx="62384" cy="62384"/>
             </a:xfrm>
             <a:prstGeom prst="ellipse">
@@ -23410,7 +23410,7 @@
           </p:nvSpPr>
           <p:spPr>
             <a:xfrm>
-              <a:off x="4683346" y="2660332"/>
+              <a:off x="4715732" y="2660332"/>
               <a:ext cx="62384" cy="62384"/>
             </a:xfrm>
             <a:prstGeom prst="ellipse">
@@ -23436,7 +23436,7 @@
           </p:nvSpPr>
           <p:spPr>
             <a:xfrm>
-              <a:off x="4850730" y="2309491"/>
+              <a:off x="4838381" y="2309491"/>
               <a:ext cx="62384" cy="62384"/>
             </a:xfrm>
             <a:prstGeom prst="ellipse">
@@ -23462,7 +23462,7 @@
           </p:nvSpPr>
           <p:spPr>
             <a:xfrm>
-              <a:off x="4730988" y="3002517"/>
+              <a:off x="4745656" y="3002517"/>
               <a:ext cx="62384" cy="62384"/>
             </a:xfrm>
             <a:prstGeom prst="ellipse">
@@ -23488,7 +23488,7 @@
           </p:nvSpPr>
           <p:spPr>
             <a:xfrm>
-              <a:off x="4831887" y="2471364"/>
+              <a:off x="4903092" y="2471364"/>
               <a:ext cx="62384" cy="62384"/>
             </a:xfrm>
             <a:prstGeom prst="ellipse">
@@ -23514,7 +23514,7 @@
           </p:nvSpPr>
           <p:spPr>
             <a:xfrm>
-              <a:off x="4737334" y="2279076"/>
+              <a:off x="4713524" y="2279076"/>
               <a:ext cx="62384" cy="62384"/>
             </a:xfrm>
             <a:prstGeom prst="ellipse">
@@ -23540,7 +23540,7 @@
           </p:nvSpPr>
           <p:spPr>
             <a:xfrm>
-              <a:off x="4878748" y="2663458"/>
+              <a:off x="4841597" y="2663458"/>
               <a:ext cx="62384" cy="62384"/>
             </a:xfrm>
             <a:prstGeom prst="ellipse">
@@ -23566,7 +23566,7 @@
           </p:nvSpPr>
           <p:spPr>
             <a:xfrm>
-              <a:off x="4697517" y="2408825"/>
+              <a:off x="4728613" y="2408825"/>
               <a:ext cx="62384" cy="62384"/>
             </a:xfrm>
             <a:prstGeom prst="ellipse">
@@ -23592,7 +23592,7 @@
           </p:nvSpPr>
           <p:spPr>
             <a:xfrm>
-              <a:off x="4876048" y="2529775"/>
+              <a:off x="4830618" y="2529775"/>
               <a:ext cx="62384" cy="62384"/>
             </a:xfrm>
             <a:prstGeom prst="ellipse">
@@ -23618,7 +23618,7 @@
           </p:nvSpPr>
           <p:spPr>
             <a:xfrm>
-              <a:off x="4698302" y="2290059"/>
+              <a:off x="4715525" y="2290059"/>
               <a:ext cx="62384" cy="62384"/>
             </a:xfrm>
             <a:prstGeom prst="ellipse">
@@ -23644,7 +23644,7 @@
           </p:nvSpPr>
           <p:spPr>
             <a:xfrm>
-              <a:off x="4874320" y="2407038"/>
+              <a:off x="4833450" y="2407038"/>
               <a:ext cx="62384" cy="62384"/>
             </a:xfrm>
             <a:prstGeom prst="ellipse">
@@ -23670,7 +23670,7 @@
           </p:nvSpPr>
           <p:spPr>
             <a:xfrm>
-              <a:off x="4682449" y="2713377"/>
+              <a:off x="4745488" y="2713377"/>
               <a:ext cx="62384" cy="62384"/>
             </a:xfrm>
             <a:prstGeom prst="ellipse">
@@ -23696,7 +23696,7 @@
           </p:nvSpPr>
           <p:spPr>
             <a:xfrm>
-              <a:off x="4840060" y="2650356"/>
+              <a:off x="4843154" y="2650356"/>
               <a:ext cx="62384" cy="62384"/>
             </a:xfrm>
             <a:prstGeom prst="ellipse">
@@ -23722,7 +23722,7 @@
           </p:nvSpPr>
           <p:spPr>
             <a:xfrm>
-              <a:off x="4684048" y="2673432"/>
+              <a:off x="4710071" y="2673432"/>
               <a:ext cx="62384" cy="62384"/>
             </a:xfrm>
             <a:prstGeom prst="ellipse">
@@ -23748,7 +23748,7 @@
           </p:nvSpPr>
           <p:spPr>
             <a:xfrm>
-              <a:off x="4852994" y="2660040"/>
+              <a:off x="4858264" y="2660040"/>
               <a:ext cx="62384" cy="62384"/>
             </a:xfrm>
             <a:prstGeom prst="ellipse">
@@ -23774,7 +23774,7 @@
           </p:nvSpPr>
           <p:spPr>
             <a:xfrm>
-              <a:off x="4688357" y="2538209"/>
+              <a:off x="4745728" y="2538209"/>
               <a:ext cx="62384" cy="62384"/>
             </a:xfrm>
             <a:prstGeom prst="ellipse">
@@ -23800,7 +23800,7 @@
           </p:nvSpPr>
           <p:spPr>
             <a:xfrm>
-              <a:off x="4867737" y="2673037"/>
+              <a:off x="4829768" y="2673037"/>
               <a:ext cx="62384" cy="62384"/>
             </a:xfrm>
             <a:prstGeom prst="ellipse">
@@ -23826,7 +23826,7 @@
           </p:nvSpPr>
           <p:spPr>
             <a:xfrm>
-              <a:off x="4739666" y="2616327"/>
+              <a:off x="4709481" y="2616327"/>
               <a:ext cx="62384" cy="62384"/>
             </a:xfrm>
             <a:prstGeom prst="ellipse">
@@ -23852,7 +23852,7 @@
           </p:nvSpPr>
           <p:spPr>
             <a:xfrm>
-              <a:off x="4854036" y="2767163"/>
+              <a:off x="4900961" y="2767163"/>
               <a:ext cx="62384" cy="62384"/>
             </a:xfrm>
             <a:prstGeom prst="ellipse">
@@ -23878,7 +23878,7 @@
           </p:nvSpPr>
           <p:spPr>
             <a:xfrm>
-              <a:off x="4692075" y="2600897"/>
+              <a:off x="4708618" y="2600897"/>
               <a:ext cx="62384" cy="62384"/>
             </a:xfrm>
             <a:prstGeom prst="ellipse">
@@ -23904,7 +23904,7 @@
           </p:nvSpPr>
           <p:spPr>
             <a:xfrm>
-              <a:off x="4883334" y="2398371"/>
+              <a:off x="4853336" y="2398371"/>
               <a:ext cx="62384" cy="62384"/>
             </a:xfrm>
             <a:prstGeom prst="ellipse">
@@ -23930,7 +23930,7 @@
           </p:nvSpPr>
           <p:spPr>
             <a:xfrm>
-              <a:off x="4729452" y="2158338"/>
+              <a:off x="4694523" y="2158338"/>
               <a:ext cx="62384" cy="62384"/>
             </a:xfrm>
             <a:prstGeom prst="ellipse">
@@ -23956,7 +23956,7 @@
           </p:nvSpPr>
           <p:spPr>
             <a:xfrm>
-              <a:off x="4841395" y="2530702"/>
+              <a:off x="4879739" y="2530702"/>
               <a:ext cx="62384" cy="62384"/>
             </a:xfrm>
             <a:prstGeom prst="ellipse">
@@ -23982,7 +23982,7 @@
           </p:nvSpPr>
           <p:spPr>
             <a:xfrm>
-              <a:off x="4720537" y="2616873"/>
+              <a:off x="4713913" y="2616873"/>
               <a:ext cx="62384" cy="62384"/>
             </a:xfrm>
             <a:prstGeom prst="ellipse">
@@ -24008,7 +24008,7 @@
           </p:nvSpPr>
           <p:spPr>
             <a:xfrm>
-              <a:off x="4885302" y="2903100"/>
+              <a:off x="4865152" y="2903100"/>
               <a:ext cx="62384" cy="62384"/>
             </a:xfrm>
             <a:prstGeom prst="ellipse">
@@ -24034,7 +24034,7 @@
           </p:nvSpPr>
           <p:spPr>
             <a:xfrm>
-              <a:off x="4704303" y="2524408"/>
+              <a:off x="4725829" y="2524408"/>
               <a:ext cx="62384" cy="62384"/>
             </a:xfrm>
             <a:prstGeom prst="ellipse">
@@ -24060,7 +24060,7 @@
           </p:nvSpPr>
           <p:spPr>
             <a:xfrm>
-              <a:off x="4890993" y="2376757"/>
+              <a:off x="4873901" y="2376757"/>
               <a:ext cx="62384" cy="62384"/>
             </a:xfrm>
             <a:prstGeom prst="ellipse">
@@ -24086,7 +24086,7 @@
           </p:nvSpPr>
           <p:spPr>
             <a:xfrm>
-              <a:off x="4705342" y="2478082"/>
+              <a:off x="4694571" y="2478082"/>
               <a:ext cx="62384" cy="62384"/>
             </a:xfrm>
             <a:prstGeom prst="ellipse">
@@ -24112,7 +24112,7 @@
           </p:nvSpPr>
           <p:spPr>
             <a:xfrm>
-              <a:off x="4879645" y="2919492"/>
+              <a:off x="4874569" y="2919492"/>
               <a:ext cx="62384" cy="62384"/>
             </a:xfrm>
             <a:prstGeom prst="ellipse">
@@ -24138,7 +24138,7 @@
           </p:nvSpPr>
           <p:spPr>
             <a:xfrm>
-              <a:off x="4748721" y="2687976"/>
+              <a:off x="4715598" y="2687976"/>
               <a:ext cx="62384" cy="62384"/>
             </a:xfrm>
             <a:prstGeom prst="ellipse">
@@ -24164,7 +24164,7 @@
           </p:nvSpPr>
           <p:spPr>
             <a:xfrm>
-              <a:off x="4839940" y="2328475"/>
+              <a:off x="4855229" y="2328475"/>
               <a:ext cx="62384" cy="62384"/>
             </a:xfrm>
             <a:prstGeom prst="ellipse">
@@ -24190,7 +24190,7 @@
           </p:nvSpPr>
           <p:spPr>
             <a:xfrm>
-              <a:off x="4724807" y="2165302"/>
+              <a:off x="4730036" y="2165302"/>
               <a:ext cx="62384" cy="62384"/>
             </a:xfrm>
             <a:prstGeom prst="ellipse">
@@ -24216,7 +24216,7 @@
           </p:nvSpPr>
           <p:spPr>
             <a:xfrm>
-              <a:off x="4894454" y="2343548"/>
+              <a:off x="4840973" y="2343548"/>
               <a:ext cx="62384" cy="62384"/>
             </a:xfrm>
             <a:prstGeom prst="ellipse">
@@ -24242,7 +24242,7 @@
           </p:nvSpPr>
           <p:spPr>
             <a:xfrm>
-              <a:off x="4702851" y="2646256"/>
+              <a:off x="4730894" y="2646256"/>
               <a:ext cx="62384" cy="62384"/>
             </a:xfrm>
             <a:prstGeom prst="ellipse">
@@ -24268,7 +24268,7 @@
           </p:nvSpPr>
           <p:spPr>
             <a:xfrm>
-              <a:off x="4847159" y="2690649"/>
+              <a:off x="4846972" y="2690649"/>
               <a:ext cx="62384" cy="62384"/>
             </a:xfrm>
             <a:prstGeom prst="ellipse">
@@ -24294,7 +24294,7 @@
           </p:nvSpPr>
           <p:spPr>
             <a:xfrm>
-              <a:off x="4718353" y="2493871"/>
+              <a:off x="4744871" y="2493871"/>
               <a:ext cx="62384" cy="62384"/>
             </a:xfrm>
             <a:prstGeom prst="ellipse">
@@ -24320,7 +24320,7 @@
           </p:nvSpPr>
           <p:spPr>
             <a:xfrm>
-              <a:off x="4879765" y="2704823"/>
+              <a:off x="4883085" y="2704823"/>
               <a:ext cx="62384" cy="62384"/>
             </a:xfrm>
             <a:prstGeom prst="ellipse">
@@ -24346,7 +24346,7 @@
           </p:nvSpPr>
           <p:spPr>
             <a:xfrm>
-              <a:off x="4742965" y="2653109"/>
+              <a:off x="4751891" y="2653109"/>
               <a:ext cx="62384" cy="62384"/>
             </a:xfrm>
             <a:prstGeom prst="ellipse">
@@ -24372,7 +24372,7 @@
           </p:nvSpPr>
           <p:spPr>
             <a:xfrm>
-              <a:off x="4845385" y="2399201"/>
+              <a:off x="4839865" y="2399201"/>
               <a:ext cx="62384" cy="62384"/>
             </a:xfrm>
             <a:prstGeom prst="ellipse">
@@ -24398,7 +24398,7 @@
           </p:nvSpPr>
           <p:spPr>
             <a:xfrm>
-              <a:off x="4720487" y="2506946"/>
+              <a:off x="4697293" y="2506946"/>
               <a:ext cx="62384" cy="62384"/>
             </a:xfrm>
             <a:prstGeom prst="ellipse">
@@ -24424,7 +24424,7 @@
           </p:nvSpPr>
           <p:spPr>
             <a:xfrm>
-              <a:off x="4829627" y="2343931"/>
+              <a:off x="4867721" y="2343931"/>
               <a:ext cx="62384" cy="62384"/>
             </a:xfrm>
             <a:prstGeom prst="ellipse">
@@ -24450,7 +24450,7 @@
           </p:nvSpPr>
           <p:spPr>
             <a:xfrm>
-              <a:off x="4689490" y="2653586"/>
+              <a:off x="4712388" y="2653586"/>
               <a:ext cx="62384" cy="62384"/>
             </a:xfrm>
             <a:prstGeom prst="ellipse">
@@ -24476,7 +24476,7 @@
           </p:nvSpPr>
           <p:spPr>
             <a:xfrm>
-              <a:off x="4864696" y="2487308"/>
+              <a:off x="4851455" y="2487308"/>
               <a:ext cx="62384" cy="62384"/>
             </a:xfrm>
             <a:prstGeom prst="ellipse">
@@ -24502,7 +24502,7 @@
           </p:nvSpPr>
           <p:spPr>
             <a:xfrm>
-              <a:off x="4694899" y="2249769"/>
+              <a:off x="4684029" y="2249769"/>
               <a:ext cx="62384" cy="62384"/>
             </a:xfrm>
             <a:prstGeom prst="ellipse">
@@ -24528,7 +24528,7 @@
           </p:nvSpPr>
           <p:spPr>
             <a:xfrm>
-              <a:off x="4898961" y="2326204"/>
+              <a:off x="4839930" y="2326204"/>
               <a:ext cx="62384" cy="62384"/>
             </a:xfrm>
             <a:prstGeom prst="ellipse">
@@ -24554,7 +24554,7 @@
           </p:nvSpPr>
           <p:spPr>
             <a:xfrm>
-              <a:off x="4712294" y="2424729"/>
+              <a:off x="4739341" y="2424729"/>
               <a:ext cx="62384" cy="62384"/>
             </a:xfrm>
             <a:prstGeom prst="ellipse">
@@ -24580,7 +24580,7 @@
           </p:nvSpPr>
           <p:spPr>
             <a:xfrm>
-              <a:off x="4899027" y="2748542"/>
+              <a:off x="4862197" y="2748542"/>
               <a:ext cx="62384" cy="62384"/>
             </a:xfrm>
             <a:prstGeom prst="ellipse">
@@ -24606,7 +24606,7 @@
           </p:nvSpPr>
           <p:spPr>
             <a:xfrm>
-              <a:off x="4735546" y="2600077"/>
+              <a:off x="4733365" y="2600077"/>
               <a:ext cx="62384" cy="62384"/>
             </a:xfrm>
             <a:prstGeom prst="ellipse">
@@ -24632,7 +24632,7 @@
           </p:nvSpPr>
           <p:spPr>
             <a:xfrm>
-              <a:off x="4859955" y="2312075"/>
+              <a:off x="4840640" y="2312075"/>
               <a:ext cx="62384" cy="62384"/>
             </a:xfrm>
             <a:prstGeom prst="ellipse">
@@ -24658,7 +24658,7 @@
           </p:nvSpPr>
           <p:spPr>
             <a:xfrm>
-              <a:off x="4740540" y="2114599"/>
+              <a:off x="4692767" y="2114599"/>
               <a:ext cx="62384" cy="62384"/>
             </a:xfrm>
             <a:prstGeom prst="ellipse">
@@ -24684,7 +24684,7 @@
           </p:nvSpPr>
           <p:spPr>
             <a:xfrm>
-              <a:off x="4844449" y="2268354"/>
+              <a:off x="4845554" y="2268354"/>
               <a:ext cx="62384" cy="62384"/>
             </a:xfrm>
             <a:prstGeom prst="ellipse">
@@ -24710,7 +24710,7 @@
           </p:nvSpPr>
           <p:spPr>
             <a:xfrm>
-              <a:off x="4692493" y="2349297"/>
+              <a:off x="4687822" y="2349297"/>
               <a:ext cx="62384" cy="62384"/>
             </a:xfrm>
             <a:prstGeom prst="ellipse">
@@ -24736,7 +24736,7 @@
           </p:nvSpPr>
           <p:spPr>
             <a:xfrm>
-              <a:off x="4870087" y="2477214"/>
+              <a:off x="4885270" y="2477214"/>
               <a:ext cx="62384" cy="62384"/>
             </a:xfrm>
             <a:prstGeom prst="ellipse">
@@ -24762,7 +24762,7 @@
           </p:nvSpPr>
           <p:spPr>
             <a:xfrm>
-              <a:off x="4709697" y="2484633"/>
+              <a:off x="4730848" y="2484633"/>
               <a:ext cx="62384" cy="62384"/>
             </a:xfrm>
             <a:prstGeom prst="ellipse">
@@ -24788,7 +24788,7 @@
           </p:nvSpPr>
           <p:spPr>
             <a:xfrm>
-              <a:off x="4857086" y="2608450"/>
+              <a:off x="4837416" y="2608450"/>
               <a:ext cx="62384" cy="62384"/>
             </a:xfrm>
             <a:prstGeom prst="ellipse">
@@ -24814,7 +24814,7 @@
           </p:nvSpPr>
           <p:spPr>
             <a:xfrm>
-              <a:off x="4725014" y="2992092"/>
+              <a:off x="4716736" y="2992092"/>
               <a:ext cx="62384" cy="62384"/>
             </a:xfrm>
             <a:prstGeom prst="ellipse">
@@ -24840,7 +24840,7 @@
           </p:nvSpPr>
           <p:spPr>
             <a:xfrm>
-              <a:off x="4833288" y="2993690"/>
+              <a:off x="4876888" y="2993690"/>
               <a:ext cx="62384" cy="62384"/>
             </a:xfrm>
             <a:prstGeom prst="ellipse">
@@ -24866,7 +24866,7 @@
           </p:nvSpPr>
           <p:spPr>
             <a:xfrm>
-              <a:off x="4711860" y="3523255"/>
+              <a:off x="4723722" y="3523255"/>
               <a:ext cx="62384" cy="62384"/>
             </a:xfrm>
             <a:prstGeom prst="ellipse">
@@ -24892,7 +24892,7 @@
           </p:nvSpPr>
           <p:spPr>
             <a:xfrm>
-              <a:off x="4828755" y="3269113"/>
+              <a:off x="4829014" y="3269113"/>
               <a:ext cx="62384" cy="62384"/>
             </a:xfrm>
             <a:prstGeom prst="ellipse">
@@ -24918,7 +24918,7 @@
           </p:nvSpPr>
           <p:spPr>
             <a:xfrm>
-              <a:off x="4734722" y="2248068"/>
+              <a:off x="4715653" y="2248068"/>
               <a:ext cx="62384" cy="62384"/>
             </a:xfrm>
             <a:prstGeom prst="ellipse">
@@ -24944,7 +24944,7 @@
           </p:nvSpPr>
           <p:spPr>
             <a:xfrm>
-              <a:off x="4893286" y="2460034"/>
+              <a:off x="4876086" y="2460034"/>
               <a:ext cx="62384" cy="62384"/>
             </a:xfrm>
             <a:prstGeom prst="ellipse">
@@ -24970,7 +24970,7 @@
           </p:nvSpPr>
           <p:spPr>
             <a:xfrm>
-              <a:off x="4746680" y="1978275"/>
+              <a:off x="4743403" y="1978275"/>
               <a:ext cx="62384" cy="62384"/>
             </a:xfrm>
             <a:prstGeom prst="ellipse">
@@ -24996,7 +24996,7 @@
           </p:nvSpPr>
           <p:spPr>
             <a:xfrm>
-              <a:off x="4865932" y="2274617"/>
+              <a:off x="4885347" y="2274617"/>
               <a:ext cx="62384" cy="62384"/>
             </a:xfrm>
             <a:prstGeom prst="ellipse">
@@ -25022,7 +25022,7 @@
           </p:nvSpPr>
           <p:spPr>
             <a:xfrm>
-              <a:off x="4743039" y="2832189"/>
+              <a:off x="4680767" y="2832189"/>
               <a:ext cx="62384" cy="62384"/>
             </a:xfrm>
             <a:prstGeom prst="ellipse">
@@ -25048,7 +25048,7 @@
           </p:nvSpPr>
           <p:spPr>
             <a:xfrm>
-              <a:off x="4889835" y="2493188"/>
+              <a:off x="4886691" y="2493188"/>
               <a:ext cx="62384" cy="62384"/>
             </a:xfrm>
             <a:prstGeom prst="ellipse">
@@ -25074,7 +25074,7 @@
           </p:nvSpPr>
           <p:spPr>
             <a:xfrm>
-              <a:off x="4743475" y="2613971"/>
+              <a:off x="4712140" y="2613971"/>
               <a:ext cx="62384" cy="62384"/>
             </a:xfrm>
             <a:prstGeom prst="ellipse">
@@ -25100,7 +25100,7 @@
           </p:nvSpPr>
           <p:spPr>
             <a:xfrm>
-              <a:off x="4839901" y="2386955"/>
+              <a:off x="4829965" y="2386955"/>
               <a:ext cx="62384" cy="62384"/>
             </a:xfrm>
             <a:prstGeom prst="ellipse">
@@ -25126,7 +25126,7 @@
           </p:nvSpPr>
           <p:spPr>
             <a:xfrm>
-              <a:off x="4701999" y="2397714"/>
+              <a:off x="4698768" y="2397714"/>
               <a:ext cx="62384" cy="62384"/>
             </a:xfrm>
             <a:prstGeom prst="ellipse">
@@ -25152,7 +25152,7 @@
           </p:nvSpPr>
           <p:spPr>
             <a:xfrm>
-              <a:off x="4856345" y="2373323"/>
+              <a:off x="4843137" y="2373323"/>
               <a:ext cx="62384" cy="62384"/>
             </a:xfrm>
             <a:prstGeom prst="ellipse">
@@ -25178,7 +25178,7 @@
           </p:nvSpPr>
           <p:spPr>
             <a:xfrm>
-              <a:off x="4716350" y="2589248"/>
+              <a:off x="4691908" y="2589248"/>
               <a:ext cx="62384" cy="62384"/>
             </a:xfrm>
             <a:prstGeom prst="ellipse">
@@ -25204,7 +25204,7 @@
           </p:nvSpPr>
           <p:spPr>
             <a:xfrm>
-              <a:off x="4889725" y="2469538"/>
+              <a:off x="4839594" y="2469538"/>
               <a:ext cx="62384" cy="62384"/>
             </a:xfrm>
             <a:prstGeom prst="ellipse">
@@ -25230,7 +25230,7 @@
           </p:nvSpPr>
           <p:spPr>
             <a:xfrm>
-              <a:off x="4699530" y="2397627"/>
+              <a:off x="4697778" y="2397627"/>
               <a:ext cx="62384" cy="62384"/>
             </a:xfrm>
             <a:prstGeom prst="ellipse">
@@ -25256,7 +25256,7 @@
           </p:nvSpPr>
           <p:spPr>
             <a:xfrm>
-              <a:off x="4832096" y="2463132"/>
+              <a:off x="4900238" y="2463132"/>
               <a:ext cx="62384" cy="62384"/>
             </a:xfrm>
             <a:prstGeom prst="ellipse">
@@ -25282,7 +25282,7 @@
           </p:nvSpPr>
           <p:spPr>
             <a:xfrm>
-              <a:off x="1630482" y="2274644"/>
+              <a:off x="1630090" y="2274644"/>
               <a:ext cx="0" cy="414778"/>
             </a:xfrm>
             <a:custGeom>
@@ -25322,7 +25322,7 @@
           </p:nvSpPr>
           <p:spPr>
             <a:xfrm>
-              <a:off x="1630482" y="3058364"/>
+              <a:off x="1630090" y="3058364"/>
               <a:ext cx="0" cy="532494"/>
             </a:xfrm>
             <a:custGeom>
@@ -25362,13 +25362,13 @@
           </p:nvSpPr>
           <p:spPr>
             <a:xfrm>
-              <a:off x="1555540" y="2689422"/>
-              <a:ext cx="149884" cy="368941"/>
+              <a:off x="1555142" y="2689422"/>
+              <a:ext cx="149895" cy="368941"/>
             </a:xfrm>
             <a:custGeom>
               <a:avLst/>
               <a:pathLst>
-                <a:path w="149884" h="368941">
+                <a:path w="149895" h="368941">
                   <a:moveTo>
                     <a:pt x="0" y="0"/>
                   </a:moveTo>
@@ -25376,10 +25376,10 @@
                     <a:pt x="0" y="368941"/>
                   </a:lnTo>
                   <a:lnTo>
-                    <a:pt x="149884" y="368941"/>
+                    <a:pt x="149895" y="368941"/>
                   </a:lnTo>
                   <a:lnTo>
-                    <a:pt x="149884" y="0"/>
+                    <a:pt x="149895" y="0"/>
                   </a:lnTo>
                   <a:close/>
                 </a:path>
@@ -25409,18 +25409,18 @@
           </p:nvSpPr>
           <p:spPr>
             <a:xfrm>
-              <a:off x="1555540" y="2901135"/>
-              <a:ext cx="149884" cy="0"/>
+              <a:off x="1555142" y="2901135"/>
+              <a:ext cx="149895" cy="0"/>
             </a:xfrm>
             <a:custGeom>
               <a:avLst/>
               <a:pathLst>
-                <a:path w="149884" h="0">
+                <a:path w="149895" h="0">
                   <a:moveTo>
                     <a:pt x="0" y="0"/>
                   </a:moveTo>
                   <a:lnTo>
-                    <a:pt x="149884" y="0"/>
+                    <a:pt x="149895" y="0"/>
                   </a:lnTo>
                 </a:path>
               </a:pathLst>
@@ -25449,7 +25449,7 @@
           </p:nvSpPr>
           <p:spPr>
             <a:xfrm>
-              <a:off x="2669400" y="2071910"/>
+              <a:off x="2669085" y="2071910"/>
               <a:ext cx="0" cy="393723"/>
             </a:xfrm>
             <a:custGeom>
@@ -25489,7 +25489,7 @@
           </p:nvSpPr>
           <p:spPr>
             <a:xfrm>
-              <a:off x="2669400" y="2846912"/>
+              <a:off x="2669085" y="2846912"/>
               <a:ext cx="0" cy="549470"/>
             </a:xfrm>
             <a:custGeom>
@@ -25529,13 +25529,13 @@
           </p:nvSpPr>
           <p:spPr>
             <a:xfrm>
-              <a:off x="2594458" y="2465634"/>
-              <a:ext cx="149884" cy="381278"/>
+              <a:off x="2594137" y="2465634"/>
+              <a:ext cx="149895" cy="381278"/>
             </a:xfrm>
             <a:custGeom>
               <a:avLst/>
               <a:pathLst>
-                <a:path w="149884" h="381278">
+                <a:path w="149895" h="381278">
                   <a:moveTo>
                     <a:pt x="0" y="0"/>
                   </a:moveTo>
@@ -25543,10 +25543,10 @@
                     <a:pt x="0" y="381278"/>
                   </a:lnTo>
                   <a:lnTo>
-                    <a:pt x="149884" y="381278"/>
+                    <a:pt x="149895" y="381278"/>
                   </a:lnTo>
                   <a:lnTo>
-                    <a:pt x="149884" y="0"/>
+                    <a:pt x="149895" y="0"/>
                   </a:lnTo>
                   <a:close/>
                 </a:path>
@@ -25576,18 +25576,18 @@
           </p:nvSpPr>
           <p:spPr>
             <a:xfrm>
-              <a:off x="2594458" y="2614885"/>
-              <a:ext cx="149884" cy="0"/>
+              <a:off x="2594137" y="2614885"/>
+              <a:ext cx="149895" cy="0"/>
             </a:xfrm>
             <a:custGeom>
               <a:avLst/>
               <a:pathLst>
-                <a:path w="149884" h="0">
+                <a:path w="149895" h="0">
                   <a:moveTo>
                     <a:pt x="0" y="0"/>
                   </a:moveTo>
                   <a:lnTo>
-                    <a:pt x="149884" y="0"/>
+                    <a:pt x="149895" y="0"/>
                   </a:lnTo>
                 </a:path>
               </a:pathLst>
@@ -25616,7 +25616,7 @@
           </p:nvSpPr>
           <p:spPr>
             <a:xfrm>
-              <a:off x="3708318" y="1691195"/>
+              <a:off x="3708079" y="1691195"/>
               <a:ext cx="0" cy="521172"/>
             </a:xfrm>
             <a:custGeom>
@@ -25656,7 +25656,7 @@
           </p:nvSpPr>
           <p:spPr>
             <a:xfrm>
-              <a:off x="3708318" y="2693413"/>
+              <a:off x="3708079" y="2693413"/>
               <a:ext cx="0" cy="717499"/>
             </a:xfrm>
             <a:custGeom>
@@ -25696,13 +25696,13 @@
           </p:nvSpPr>
           <p:spPr>
             <a:xfrm>
-              <a:off x="3633376" y="2212367"/>
-              <a:ext cx="149884" cy="481045"/>
+              <a:off x="3633132" y="2212367"/>
+              <a:ext cx="149895" cy="481045"/>
             </a:xfrm>
             <a:custGeom>
               <a:avLst/>
               <a:pathLst>
-                <a:path w="149884" h="481045">
+                <a:path w="149895" h="481045">
                   <a:moveTo>
                     <a:pt x="0" y="0"/>
                   </a:moveTo>
@@ -25710,10 +25710,10 @@
                     <a:pt x="0" y="481045"/>
                   </a:lnTo>
                   <a:lnTo>
-                    <a:pt x="149884" y="481045"/>
+                    <a:pt x="149895" y="481045"/>
                   </a:lnTo>
                   <a:lnTo>
-                    <a:pt x="149884" y="0"/>
+                    <a:pt x="149895" y="0"/>
                   </a:lnTo>
                   <a:close/>
                 </a:path>
@@ -25743,18 +25743,18 @@
           </p:nvSpPr>
           <p:spPr>
             <a:xfrm>
-              <a:off x="3633376" y="2442977"/>
-              <a:ext cx="149884" cy="0"/>
+              <a:off x="3633132" y="2442977"/>
+              <a:ext cx="149895" cy="0"/>
             </a:xfrm>
             <a:custGeom>
               <a:avLst/>
               <a:pathLst>
-                <a:path w="149884" h="0">
+                <a:path w="149895" h="0">
                   <a:moveTo>
                     <a:pt x="0" y="0"/>
                   </a:moveTo>
                   <a:lnTo>
-                    <a:pt x="149884" y="0"/>
+                    <a:pt x="149895" y="0"/>
                   </a:lnTo>
                 </a:path>
               </a:pathLst>
@@ -25783,7 +25783,7 @@
           </p:nvSpPr>
           <p:spPr>
             <a:xfrm>
-              <a:off x="4747236" y="1806354"/>
+              <a:off x="4747074" y="1806354"/>
               <a:ext cx="0" cy="525297"/>
             </a:xfrm>
             <a:custGeom>
@@ -25823,7 +25823,7 @@
           </p:nvSpPr>
           <p:spPr>
             <a:xfrm>
-              <a:off x="4747236" y="2704625"/>
+              <a:off x="4747074" y="2704625"/>
               <a:ext cx="0" cy="511652"/>
             </a:xfrm>
             <a:custGeom>
@@ -25863,13 +25863,13 @@
           </p:nvSpPr>
           <p:spPr>
             <a:xfrm>
-              <a:off x="4672294" y="2331652"/>
-              <a:ext cx="149884" cy="372972"/>
+              <a:off x="4672126" y="2331652"/>
+              <a:ext cx="149895" cy="372972"/>
             </a:xfrm>
             <a:custGeom>
               <a:avLst/>
               <a:pathLst>
-                <a:path w="149884" h="372972">
+                <a:path w="149895" h="372972">
                   <a:moveTo>
                     <a:pt x="0" y="0"/>
                   </a:moveTo>
@@ -25877,10 +25877,10 @@
                     <a:pt x="0" y="372972"/>
                   </a:lnTo>
                   <a:lnTo>
-                    <a:pt x="149884" y="372972"/>
+                    <a:pt x="149895" y="372972"/>
                   </a:lnTo>
                   <a:lnTo>
-                    <a:pt x="149884" y="0"/>
+                    <a:pt x="149895" y="0"/>
                   </a:lnTo>
                   <a:close/>
                 </a:path>
@@ -25910,18 +25910,18 @@
           </p:nvSpPr>
           <p:spPr>
             <a:xfrm>
-              <a:off x="4672294" y="2538138"/>
-              <a:ext cx="149884" cy="0"/>
+              <a:off x="4672126" y="2538138"/>
+              <a:ext cx="149895" cy="0"/>
             </a:xfrm>
             <a:custGeom>
               <a:avLst/>
               <a:pathLst>
-                <a:path w="149884" h="0">
+                <a:path w="149895" h="0">
                   <a:moveTo>
                     <a:pt x="0" y="0"/>
                   </a:moveTo>
                   <a:lnTo>
-                    <a:pt x="149884" y="0"/>
+                    <a:pt x="149895" y="0"/>
                   </a:lnTo>
                 </a:path>
               </a:pathLst>
@@ -25950,7 +25950,7 @@
           </p:nvSpPr>
           <p:spPr>
             <a:xfrm>
-              <a:off x="1780366" y="2302643"/>
+              <a:off x="1779985" y="2302643"/>
               <a:ext cx="0" cy="446396"/>
             </a:xfrm>
             <a:custGeom>
@@ -25990,7 +25990,7 @@
           </p:nvSpPr>
           <p:spPr>
             <a:xfrm>
-              <a:off x="1780366" y="3053383"/>
+              <a:off x="1779985" y="3053383"/>
               <a:ext cx="0" cy="267004"/>
             </a:xfrm>
             <a:custGeom>
@@ -26030,13 +26030,13 @@
           </p:nvSpPr>
           <p:spPr>
             <a:xfrm>
-              <a:off x="1705424" y="2749039"/>
-              <a:ext cx="149884" cy="304344"/>
+              <a:off x="1705038" y="2749039"/>
+              <a:ext cx="149895" cy="304344"/>
             </a:xfrm>
             <a:custGeom>
               <a:avLst/>
               <a:pathLst>
-                <a:path w="149884" h="304344">
+                <a:path w="149895" h="304344">
                   <a:moveTo>
                     <a:pt x="0" y="0"/>
                   </a:moveTo>
@@ -26044,10 +26044,10 @@
                     <a:pt x="0" y="304344"/>
                   </a:lnTo>
                   <a:lnTo>
-                    <a:pt x="149884" y="304344"/>
+                    <a:pt x="149895" y="304344"/>
                   </a:lnTo>
                   <a:lnTo>
-                    <a:pt x="149884" y="0"/>
+                    <a:pt x="149895" y="0"/>
                   </a:lnTo>
                   <a:close/>
                 </a:path>
@@ -26077,18 +26077,18 @@
           </p:nvSpPr>
           <p:spPr>
             <a:xfrm>
-              <a:off x="1705424" y="2935141"/>
-              <a:ext cx="149884" cy="0"/>
+              <a:off x="1705038" y="2935141"/>
+              <a:ext cx="149895" cy="0"/>
             </a:xfrm>
             <a:custGeom>
               <a:avLst/>
               <a:pathLst>
-                <a:path w="149884" h="0">
+                <a:path w="149895" h="0">
                   <a:moveTo>
                     <a:pt x="0" y="0"/>
                   </a:moveTo>
                   <a:lnTo>
-                    <a:pt x="149884" y="0"/>
+                    <a:pt x="149895" y="0"/>
                   </a:lnTo>
                 </a:path>
               </a:pathLst>
@@ -26117,7 +26117,7 @@
           </p:nvSpPr>
           <p:spPr>
             <a:xfrm>
-              <a:off x="2819284" y="2030749"/>
+              <a:off x="2818980" y="2030749"/>
               <a:ext cx="0" cy="502222"/>
             </a:xfrm>
             <a:custGeom>
@@ -26157,7 +26157,7 @@
           </p:nvSpPr>
           <p:spPr>
             <a:xfrm>
-              <a:off x="2819284" y="2911224"/>
+              <a:off x="2818980" y="2911224"/>
               <a:ext cx="0" cy="467677"/>
             </a:xfrm>
             <a:custGeom>
@@ -26197,13 +26197,13 @@
           </p:nvSpPr>
           <p:spPr>
             <a:xfrm>
-              <a:off x="2744342" y="2532971"/>
-              <a:ext cx="149884" cy="378253"/>
+              <a:off x="2744032" y="2532971"/>
+              <a:ext cx="149895" cy="378253"/>
             </a:xfrm>
             <a:custGeom>
               <a:avLst/>
               <a:pathLst>
-                <a:path w="149884" h="378253">
+                <a:path w="149895" h="378253">
                   <a:moveTo>
                     <a:pt x="0" y="0"/>
                   </a:moveTo>
@@ -26211,10 +26211,10 @@
                     <a:pt x="0" y="378253"/>
                   </a:lnTo>
                   <a:lnTo>
-                    <a:pt x="149884" y="378253"/>
+                    <a:pt x="149895" y="378253"/>
                   </a:lnTo>
                   <a:lnTo>
-                    <a:pt x="149884" y="0"/>
+                    <a:pt x="149895" y="0"/>
                   </a:lnTo>
                   <a:close/>
                 </a:path>
@@ -26244,18 +26244,18 @@
           </p:nvSpPr>
           <p:spPr>
             <a:xfrm>
-              <a:off x="2744342" y="2706548"/>
-              <a:ext cx="149884" cy="0"/>
+              <a:off x="2744032" y="2706548"/>
+              <a:ext cx="149895" cy="0"/>
             </a:xfrm>
             <a:custGeom>
               <a:avLst/>
               <a:pathLst>
-                <a:path w="149884" h="0">
+                <a:path w="149895" h="0">
                   <a:moveTo>
                     <a:pt x="0" y="0"/>
                   </a:moveTo>
                   <a:lnTo>
-                    <a:pt x="149884" y="0"/>
+                    <a:pt x="149895" y="0"/>
                   </a:lnTo>
                 </a:path>
               </a:pathLst>
@@ -26284,7 +26284,7 @@
           </p:nvSpPr>
           <p:spPr>
             <a:xfrm>
-              <a:off x="3858202" y="2046605"/>
+              <a:off x="3857974" y="2046605"/>
               <a:ext cx="0" cy="381852"/>
             </a:xfrm>
             <a:custGeom>
@@ -26324,7 +26324,7 @@
           </p:nvSpPr>
           <p:spPr>
             <a:xfrm>
-              <a:off x="3858202" y="2834290"/>
+              <a:off x="3857974" y="2834290"/>
               <a:ext cx="0" cy="431796"/>
             </a:xfrm>
             <a:custGeom>
@@ -26364,13 +26364,13 @@
           </p:nvSpPr>
           <p:spPr>
             <a:xfrm>
-              <a:off x="3783260" y="2428458"/>
-              <a:ext cx="149884" cy="405832"/>
+              <a:off x="3783027" y="2428458"/>
+              <a:ext cx="149895" cy="405832"/>
             </a:xfrm>
             <a:custGeom>
               <a:avLst/>
               <a:pathLst>
-                <a:path w="149884" h="405832">
+                <a:path w="149895" h="405832">
                   <a:moveTo>
                     <a:pt x="0" y="0"/>
                   </a:moveTo>
@@ -26378,10 +26378,10 @@
                     <a:pt x="0" y="405832"/>
                   </a:lnTo>
                   <a:lnTo>
-                    <a:pt x="149884" y="405832"/>
+                    <a:pt x="149895" y="405832"/>
                   </a:lnTo>
                   <a:lnTo>
-                    <a:pt x="149884" y="0"/>
+                    <a:pt x="149895" y="0"/>
                   </a:lnTo>
                   <a:close/>
                 </a:path>
@@ -26411,18 +26411,18 @@
           </p:nvSpPr>
           <p:spPr>
             <a:xfrm>
-              <a:off x="3783260" y="2554405"/>
-              <a:ext cx="149884" cy="0"/>
+              <a:off x="3783027" y="2554405"/>
+              <a:ext cx="149895" cy="0"/>
             </a:xfrm>
             <a:custGeom>
               <a:avLst/>
               <a:pathLst>
-                <a:path w="149884" h="0">
+                <a:path w="149895" h="0">
                   <a:moveTo>
                     <a:pt x="0" y="0"/>
                   </a:moveTo>
                   <a:lnTo>
-                    <a:pt x="149884" y="0"/>
+                    <a:pt x="149895" y="0"/>
                   </a:lnTo>
                 </a:path>
               </a:pathLst>
@@ -26451,7 +26451,7 @@
           </p:nvSpPr>
           <p:spPr>
             <a:xfrm>
-              <a:off x="4897121" y="2098530"/>
+              <a:off x="4896969" y="2098530"/>
               <a:ext cx="0" cy="305986"/>
             </a:xfrm>
             <a:custGeom>
@@ -26491,7 +26491,7 @@
           </p:nvSpPr>
           <p:spPr>
             <a:xfrm>
-              <a:off x="4897121" y="2704230"/>
+              <a:off x="4896969" y="2704230"/>
               <a:ext cx="0" cy="423337"/>
             </a:xfrm>
             <a:custGeom>
@@ -26531,13 +26531,13 @@
           </p:nvSpPr>
           <p:spPr>
             <a:xfrm>
-              <a:off x="4822179" y="2404516"/>
-              <a:ext cx="149884" cy="299713"/>
+              <a:off x="4822021" y="2404516"/>
+              <a:ext cx="149895" cy="299713"/>
             </a:xfrm>
             <a:custGeom>
               <a:avLst/>
               <a:pathLst>
-                <a:path w="149884" h="299713">
+                <a:path w="149895" h="299713">
                   <a:moveTo>
                     <a:pt x="0" y="0"/>
                   </a:moveTo>
@@ -26545,10 +26545,10 @@
                     <a:pt x="0" y="299713"/>
                   </a:lnTo>
                   <a:lnTo>
-                    <a:pt x="149884" y="299713"/>
+                    <a:pt x="149895" y="299713"/>
                   </a:lnTo>
                   <a:lnTo>
-                    <a:pt x="149884" y="0"/>
+                    <a:pt x="149895" y="0"/>
                   </a:lnTo>
                   <a:close/>
                 </a:path>
@@ -26578,18 +26578,18 @@
           </p:nvSpPr>
           <p:spPr>
             <a:xfrm>
-              <a:off x="4822179" y="2528582"/>
-              <a:ext cx="149884" cy="0"/>
+              <a:off x="4822021" y="2528582"/>
+              <a:ext cx="149895" cy="0"/>
             </a:xfrm>
             <a:custGeom>
               <a:avLst/>
               <a:pathLst>
-                <a:path w="149884" h="0">
+                <a:path w="149895" h="0">
                   <a:moveTo>
                     <a:pt x="0" y="0"/>
                   </a:moveTo>
                   <a:lnTo>
-                    <a:pt x="149884" y="0"/>
+                    <a:pt x="149895" y="0"/>
                   </a:lnTo>
                 </a:path>
               </a:pathLst>
@@ -26618,39 +26618,39 @@
           </p:nvSpPr>
           <p:spPr>
             <a:xfrm>
-              <a:off x="1705424" y="2314556"/>
-              <a:ext cx="3147568" cy="585786"/>
+              <a:off x="1705038" y="2314556"/>
+              <a:ext cx="3147799" cy="585786"/>
             </a:xfrm>
             <a:custGeom>
               <a:avLst/>
               <a:pathLst>
-                <a:path w="3147568" h="585786">
+                <a:path w="3147799" h="585786">
                   <a:moveTo>
                     <a:pt x="0" y="292622"/>
                   </a:moveTo>
                   <a:lnTo>
-                    <a:pt x="779397" y="264540"/>
+                    <a:pt x="779455" y="264540"/>
                   </a:lnTo>
                   <a:lnTo>
-                    <a:pt x="1498842" y="221351"/>
+                    <a:pt x="1498952" y="221351"/>
                   </a:lnTo>
                   <a:lnTo>
-                    <a:pt x="2398147" y="116377"/>
+                    <a:pt x="2398323" y="116377"/>
                   </a:lnTo>
                   <a:lnTo>
-                    <a:pt x="3147568" y="0"/>
+                    <a:pt x="3147799" y="0"/>
                   </a:lnTo>
                   <a:lnTo>
-                    <a:pt x="3147568" y="262592"/>
+                    <a:pt x="3147799" y="262592"/>
                   </a:lnTo>
                   <a:lnTo>
-                    <a:pt x="2398147" y="292838"/>
+                    <a:pt x="2398323" y="292838"/>
                   </a:lnTo>
                   <a:lnTo>
-                    <a:pt x="1498842" y="363811"/>
+                    <a:pt x="1498952" y="363811"/>
                   </a:lnTo>
                   <a:lnTo>
-                    <a:pt x="779397" y="461380"/>
+                    <a:pt x="779455" y="461380"/>
                   </a:lnTo>
                   <a:lnTo>
                     <a:pt x="0" y="585786"/>
@@ -26679,27 +26679,27 @@
           </p:nvSpPr>
           <p:spPr>
             <a:xfrm>
-              <a:off x="1705424" y="2314556"/>
-              <a:ext cx="3147568" cy="292622"/>
+              <a:off x="1705038" y="2314556"/>
+              <a:ext cx="3147799" cy="292622"/>
             </a:xfrm>
             <a:custGeom>
               <a:avLst/>
               <a:pathLst>
-                <a:path w="3147568" h="292622">
+                <a:path w="3147799" h="292622">
                   <a:moveTo>
                     <a:pt x="0" y="292622"/>
                   </a:moveTo>
                   <a:lnTo>
-                    <a:pt x="779397" y="264540"/>
+                    <a:pt x="779455" y="264540"/>
                   </a:lnTo>
                   <a:lnTo>
-                    <a:pt x="1498842" y="221351"/>
+                    <a:pt x="1498952" y="221351"/>
                   </a:lnTo>
                   <a:lnTo>
-                    <a:pt x="2398147" y="116377"/>
+                    <a:pt x="2398323" y="116377"/>
                   </a:lnTo>
                   <a:lnTo>
-                    <a:pt x="3147568" y="0"/>
+                    <a:pt x="3147799" y="0"/>
                   </a:lnTo>
                 </a:path>
               </a:pathLst>
@@ -26719,24 +26719,24 @@
           </p:nvSpPr>
           <p:spPr>
             <a:xfrm>
-              <a:off x="1705424" y="2577148"/>
-              <a:ext cx="3147568" cy="323194"/>
+              <a:off x="1705038" y="2577148"/>
+              <a:ext cx="3147799" cy="323194"/>
             </a:xfrm>
             <a:custGeom>
               <a:avLst/>
               <a:pathLst>
-                <a:path w="3147568" h="323194">
+                <a:path w="3147799" h="323194">
                   <a:moveTo>
-                    <a:pt x="3147568" y="0"/>
+                    <a:pt x="3147799" y="0"/>
                   </a:moveTo>
                   <a:lnTo>
-                    <a:pt x="2398147" y="30245"/>
+                    <a:pt x="2398323" y="30245"/>
                   </a:lnTo>
                   <a:lnTo>
-                    <a:pt x="1498842" y="101219"/>
+                    <a:pt x="1498952" y="101219"/>
                   </a:lnTo>
                   <a:lnTo>
-                    <a:pt x="779397" y="198788"/>
+                    <a:pt x="779455" y="198788"/>
                   </a:lnTo>
                   <a:lnTo>
                     <a:pt x="0" y="323194"/>
@@ -26759,39 +26759,39 @@
           </p:nvSpPr>
           <p:spPr>
             <a:xfrm>
-              <a:off x="1705424" y="2436875"/>
-              <a:ext cx="3147568" cy="530996"/>
+              <a:off x="1705038" y="2436875"/>
+              <a:ext cx="3147799" cy="530996"/>
             </a:xfrm>
             <a:custGeom>
               <a:avLst/>
               <a:pathLst>
-                <a:path w="3147568" h="530996">
+                <a:path w="3147799" h="530996">
                   <a:moveTo>
                     <a:pt x="0" y="284825"/>
                   </a:moveTo>
                   <a:lnTo>
-                    <a:pt x="779397" y="251361"/>
+                    <a:pt x="779455" y="251361"/>
                   </a:lnTo>
                   <a:lnTo>
-                    <a:pt x="1498842" y="206085"/>
+                    <a:pt x="1498952" y="206085"/>
                   </a:lnTo>
                   <a:lnTo>
-                    <a:pt x="2398147" y="106928"/>
+                    <a:pt x="2398323" y="106928"/>
                   </a:lnTo>
                   <a:lnTo>
-                    <a:pt x="3147568" y="0"/>
+                    <a:pt x="3147799" y="0"/>
                   </a:lnTo>
                   <a:lnTo>
-                    <a:pt x="3147568" y="219712"/>
+                    <a:pt x="3147799" y="219712"/>
                   </a:lnTo>
                   <a:lnTo>
-                    <a:pt x="2398147" y="254714"/>
+                    <a:pt x="2398323" y="254714"/>
                   </a:lnTo>
                   <a:lnTo>
-                    <a:pt x="1498842" y="325875"/>
+                    <a:pt x="1498952" y="325875"/>
                   </a:lnTo>
                   <a:lnTo>
-                    <a:pt x="779397" y="416852"/>
+                    <a:pt x="779455" y="416852"/>
                   </a:lnTo>
                   <a:lnTo>
                     <a:pt x="0" y="530996"/>
@@ -26820,27 +26820,27 @@
           </p:nvSpPr>
           <p:spPr>
             <a:xfrm>
-              <a:off x="1705424" y="2436875"/>
-              <a:ext cx="3147568" cy="284825"/>
+              <a:off x="1705038" y="2436875"/>
+              <a:ext cx="3147799" cy="284825"/>
             </a:xfrm>
             <a:custGeom>
               <a:avLst/>
               <a:pathLst>
-                <a:path w="3147568" h="284825">
+                <a:path w="3147799" h="284825">
                   <a:moveTo>
                     <a:pt x="0" y="284825"/>
                   </a:moveTo>
                   <a:lnTo>
-                    <a:pt x="779397" y="251361"/>
+                    <a:pt x="779455" y="251361"/>
                   </a:lnTo>
                   <a:lnTo>
-                    <a:pt x="1498842" y="206085"/>
+                    <a:pt x="1498952" y="206085"/>
                   </a:lnTo>
                   <a:lnTo>
-                    <a:pt x="2398147" y="106928"/>
+                    <a:pt x="2398323" y="106928"/>
                   </a:lnTo>
                   <a:lnTo>
-                    <a:pt x="3147568" y="0"/>
+                    <a:pt x="3147799" y="0"/>
                   </a:lnTo>
                 </a:path>
               </a:pathLst>
@@ -26860,24 +26860,24 @@
           </p:nvSpPr>
           <p:spPr>
             <a:xfrm>
-              <a:off x="1705424" y="2656588"/>
-              <a:ext cx="3147568" cy="311283"/>
+              <a:off x="1705038" y="2656588"/>
+              <a:ext cx="3147799" cy="311283"/>
             </a:xfrm>
             <a:custGeom>
               <a:avLst/>
               <a:pathLst>
-                <a:path w="3147568" h="311283">
+                <a:path w="3147799" h="311283">
                   <a:moveTo>
-                    <a:pt x="3147568" y="0"/>
+                    <a:pt x="3147799" y="0"/>
                   </a:moveTo>
                   <a:lnTo>
-                    <a:pt x="2398147" y="35002"/>
+                    <a:pt x="2398323" y="35002"/>
                   </a:lnTo>
                   <a:lnTo>
-                    <a:pt x="1498842" y="106162"/>
+                    <a:pt x="1498952" y="106162"/>
                   </a:lnTo>
                   <a:lnTo>
-                    <a:pt x="779397" y="197139"/>
+                    <a:pt x="779455" y="197139"/>
                   </a:lnTo>
                   <a:lnTo>
                     <a:pt x="0" y="311283"/>
@@ -26900,27 +26900,27 @@
           </p:nvSpPr>
           <p:spPr>
             <a:xfrm>
-              <a:off x="1705424" y="2445852"/>
-              <a:ext cx="3147568" cy="307908"/>
+              <a:off x="1705038" y="2445852"/>
+              <a:ext cx="3147799" cy="307908"/>
             </a:xfrm>
             <a:custGeom>
               <a:avLst/>
               <a:pathLst>
-                <a:path w="3147568" h="307908">
+                <a:path w="3147799" h="307908">
                   <a:moveTo>
                     <a:pt x="0" y="307908"/>
                   </a:moveTo>
                   <a:lnTo>
-                    <a:pt x="779397" y="231664"/>
+                    <a:pt x="779455" y="231664"/>
                   </a:lnTo>
                   <a:lnTo>
-                    <a:pt x="1498842" y="161285"/>
+                    <a:pt x="1498952" y="161285"/>
                   </a:lnTo>
                   <a:lnTo>
-                    <a:pt x="2398147" y="73311"/>
+                    <a:pt x="2398323" y="73311"/>
                   </a:lnTo>
                   <a:lnTo>
-                    <a:pt x="3147568" y="0"/>
+                    <a:pt x="3147799" y="0"/>
                   </a:lnTo>
                 </a:path>
               </a:pathLst>
@@ -26949,27 +26949,27 @@
           </p:nvSpPr>
           <p:spPr>
             <a:xfrm>
-              <a:off x="1705424" y="2546731"/>
-              <a:ext cx="3147568" cy="298054"/>
+              <a:off x="1705038" y="2546731"/>
+              <a:ext cx="3147799" cy="298054"/>
             </a:xfrm>
             <a:custGeom>
               <a:avLst/>
               <a:pathLst>
-                <a:path w="3147568" h="298054">
+                <a:path w="3147799" h="298054">
                   <a:moveTo>
                     <a:pt x="0" y="298054"/>
                   </a:moveTo>
                   <a:lnTo>
-                    <a:pt x="779397" y="224250"/>
+                    <a:pt x="779455" y="224250"/>
                   </a:lnTo>
                   <a:lnTo>
-                    <a:pt x="1498842" y="156123"/>
+                    <a:pt x="1498952" y="156123"/>
                   </a:lnTo>
                   <a:lnTo>
-                    <a:pt x="2398147" y="70965"/>
+                    <a:pt x="2398323" y="70965"/>
                   </a:lnTo>
                   <a:lnTo>
-                    <a:pt x="3147568" y="0"/>
+                    <a:pt x="3147799" y="0"/>
                   </a:lnTo>
                 </a:path>
               </a:pathLst>
@@ -26998,7 +26998,7 @@
           </p:nvSpPr>
           <p:spPr>
             <a:xfrm>
-              <a:off x="1705424" y="1047951"/>
+              <a:off x="1705038" y="1047951"/>
               <a:ext cx="825794" cy="91165"/>
             </a:xfrm>
             <a:prstGeom prst="rect">
@@ -27044,7 +27044,7 @@
           </p:nvSpPr>
           <p:spPr>
             <a:xfrm>
-              <a:off x="2531218" y="1048042"/>
+              <a:off x="2530832" y="1048042"/>
               <a:ext cx="84673" cy="91074"/>
             </a:xfrm>
             <a:prstGeom prst="rect">
@@ -27090,7 +27090,7 @@
           </p:nvSpPr>
           <p:spPr>
             <a:xfrm>
-              <a:off x="2629896" y="1048042"/>
+              <a:off x="2629510" y="1048042"/>
               <a:ext cx="28254" cy="91074"/>
             </a:xfrm>
             <a:prstGeom prst="rect">
@@ -27136,7 +27136,7 @@
           </p:nvSpPr>
           <p:spPr>
             <a:xfrm>
-              <a:off x="2671812" y="1048042"/>
+              <a:off x="2671426" y="1048042"/>
               <a:ext cx="70591" cy="91074"/>
             </a:xfrm>
             <a:prstGeom prst="rect">
@@ -27182,7 +27182,7 @@
           </p:nvSpPr>
           <p:spPr>
             <a:xfrm>
-              <a:off x="2752650" y="1048042"/>
+              <a:off x="2752263" y="1048042"/>
               <a:ext cx="70591" cy="91074"/>
             </a:xfrm>
             <a:prstGeom prst="rect">
@@ -27228,7 +27228,7 @@
           </p:nvSpPr>
           <p:spPr>
             <a:xfrm>
-              <a:off x="2833446" y="1048042"/>
+              <a:off x="2833060" y="1048042"/>
               <a:ext cx="70591" cy="91074"/>
             </a:xfrm>
             <a:prstGeom prst="rect">
@@ -27274,7 +27274,7 @@
           </p:nvSpPr>
           <p:spPr>
             <a:xfrm>
-              <a:off x="2914229" y="1047951"/>
+              <a:off x="2913842" y="1047951"/>
               <a:ext cx="462412" cy="91165"/>
             </a:xfrm>
             <a:prstGeom prst="rect">
@@ -27320,7 +27320,7 @@
           </p:nvSpPr>
           <p:spPr>
             <a:xfrm>
-              <a:off x="3376641" y="1047951"/>
+              <a:off x="3376255" y="1047951"/>
               <a:ext cx="70591" cy="91165"/>
             </a:xfrm>
             <a:prstGeom prst="rect">
@@ -27366,7 +27366,7 @@
           </p:nvSpPr>
           <p:spPr>
             <a:xfrm>
-              <a:off x="3447232" y="1048042"/>
+              <a:off x="3446846" y="1048042"/>
               <a:ext cx="70591" cy="91074"/>
             </a:xfrm>
             <a:prstGeom prst="rect">
@@ -27412,7 +27412,7 @@
           </p:nvSpPr>
           <p:spPr>
             <a:xfrm>
-              <a:off x="3528029" y="1047951"/>
+              <a:off x="3527643" y="1047951"/>
               <a:ext cx="462412" cy="91165"/>
             </a:xfrm>
             <a:prstGeom prst="rect">
@@ -27458,7 +27458,7 @@
           </p:nvSpPr>
           <p:spPr>
             <a:xfrm>
-              <a:off x="1705424" y="1224134"/>
+              <a:off x="1705038" y="1224134"/>
               <a:ext cx="811712" cy="91165"/>
             </a:xfrm>
             <a:prstGeom prst="rect">
@@ -27504,7 +27504,7 @@
           </p:nvSpPr>
           <p:spPr>
             <a:xfrm>
-              <a:off x="2517137" y="1224226"/>
+              <a:off x="2516751" y="1224226"/>
               <a:ext cx="84673" cy="91074"/>
             </a:xfrm>
             <a:prstGeom prst="rect">
@@ -27550,7 +27550,7 @@
           </p:nvSpPr>
           <p:spPr>
             <a:xfrm>
-              <a:off x="2615814" y="1224226"/>
+              <a:off x="2615428" y="1224226"/>
               <a:ext cx="28254" cy="91074"/>
             </a:xfrm>
             <a:prstGeom prst="rect">
@@ -27596,7 +27596,7 @@
           </p:nvSpPr>
           <p:spPr>
             <a:xfrm>
-              <a:off x="2657730" y="1224226"/>
+              <a:off x="2657344" y="1224226"/>
               <a:ext cx="70591" cy="91074"/>
             </a:xfrm>
             <a:prstGeom prst="rect">
@@ -27642,7 +27642,7 @@
           </p:nvSpPr>
           <p:spPr>
             <a:xfrm>
-              <a:off x="2738568" y="1224226"/>
+              <a:off x="2738182" y="1224226"/>
               <a:ext cx="70591" cy="91074"/>
             </a:xfrm>
             <a:prstGeom prst="rect">
@@ -27688,7 +27688,7 @@
           </p:nvSpPr>
           <p:spPr>
             <a:xfrm>
-              <a:off x="2819364" y="1224226"/>
+              <a:off x="2818978" y="1224226"/>
               <a:ext cx="70591" cy="91074"/>
             </a:xfrm>
             <a:prstGeom prst="rect">
@@ -27734,7 +27734,7 @@
           </p:nvSpPr>
           <p:spPr>
             <a:xfrm>
-              <a:off x="2900147" y="1224134"/>
+              <a:off x="2899761" y="1224134"/>
               <a:ext cx="462412" cy="91165"/>
             </a:xfrm>
             <a:prstGeom prst="rect">
@@ -27780,7 +27780,7 @@
           </p:nvSpPr>
           <p:spPr>
             <a:xfrm>
-              <a:off x="3362559" y="1224134"/>
+              <a:off x="3362173" y="1224134"/>
               <a:ext cx="70591" cy="91165"/>
             </a:xfrm>
             <a:prstGeom prst="rect">
@@ -27826,7 +27826,7 @@
           </p:nvSpPr>
           <p:spPr>
             <a:xfrm>
-              <a:off x="3433151" y="1224226"/>
+              <a:off x="3432764" y="1224226"/>
               <a:ext cx="70591" cy="91074"/>
             </a:xfrm>
             <a:prstGeom prst="rect">
@@ -27872,7 +27872,7 @@
           </p:nvSpPr>
           <p:spPr>
             <a:xfrm>
-              <a:off x="3513947" y="1224134"/>
+              <a:off x="3513561" y="1224134"/>
               <a:ext cx="462412" cy="91165"/>
             </a:xfrm>
             <a:prstGeom prst="rect">
@@ -27918,7 +27918,7 @@
           </p:nvSpPr>
           <p:spPr>
             <a:xfrm>
-              <a:off x="1638398" y="1507292"/>
+              <a:off x="1638012" y="1507292"/>
               <a:ext cx="134051" cy="91165"/>
             </a:xfrm>
             <a:prstGeom prst="rect">
@@ -27964,7 +27964,7 @@
           </p:nvSpPr>
           <p:spPr>
             <a:xfrm>
-              <a:off x="2670139" y="1454476"/>
+              <a:off x="2669829" y="1454476"/>
               <a:ext cx="148407" cy="91165"/>
             </a:xfrm>
             <a:prstGeom prst="rect">
@@ -28010,7 +28010,7 @@
           </p:nvSpPr>
           <p:spPr>
             <a:xfrm>
-              <a:off x="3709057" y="1544910"/>
+              <a:off x="3708823" y="1544910"/>
               <a:ext cx="148407" cy="91165"/>
             </a:xfrm>
             <a:prstGeom prst="rect">
@@ -28056,7 +28056,7 @@
           </p:nvSpPr>
           <p:spPr>
             <a:xfrm>
-              <a:off x="4797444" y="1488902"/>
+              <a:off x="4797287" y="1488902"/>
               <a:ext cx="49469" cy="91165"/>
             </a:xfrm>
             <a:prstGeom prst="rect">
@@ -28719,7 +28719,7 @@
           </p:nvSpPr>
           <p:spPr>
             <a:xfrm>
-              <a:off x="1705424" y="3842873"/>
+              <a:off x="1705038" y="3842873"/>
               <a:ext cx="0" cy="31631"/>
             </a:xfrm>
             <a:custGeom>
@@ -28759,7 +28759,7 @@
           </p:nvSpPr>
           <p:spPr>
             <a:xfrm>
-              <a:off x="2744342" y="3842873"/>
+              <a:off x="2744032" y="3842873"/>
               <a:ext cx="0" cy="31631"/>
             </a:xfrm>
             <a:custGeom>
@@ -28799,7 +28799,7 @@
           </p:nvSpPr>
           <p:spPr>
             <a:xfrm>
-              <a:off x="3783260" y="3842873"/>
+              <a:off x="3783027" y="3842873"/>
               <a:ext cx="0" cy="31631"/>
             </a:xfrm>
             <a:custGeom>
@@ -28839,7 +28839,7 @@
           </p:nvSpPr>
           <p:spPr>
             <a:xfrm>
-              <a:off x="4822179" y="3842873"/>
+              <a:off x="4822021" y="3842873"/>
               <a:ext cx="0" cy="31631"/>
             </a:xfrm>
             <a:custGeom>
@@ -28879,7 +28879,7 @@
           </p:nvSpPr>
           <p:spPr>
             <a:xfrm>
-              <a:off x="1673648" y="3899809"/>
+              <a:off x="1673262" y="3899809"/>
               <a:ext cx="63550" cy="82021"/>
             </a:xfrm>
             <a:prstGeom prst="rect">
@@ -28925,7 +28925,7 @@
           </p:nvSpPr>
           <p:spPr>
             <a:xfrm>
-              <a:off x="2712567" y="3899809"/>
+              <a:off x="2712257" y="3899809"/>
               <a:ext cx="63550" cy="82021"/>
             </a:xfrm>
             <a:prstGeom prst="rect">
@@ -28971,7 +28971,7 @@
           </p:nvSpPr>
           <p:spPr>
             <a:xfrm>
-              <a:off x="3751485" y="3899809"/>
+              <a:off x="3751251" y="3899809"/>
               <a:ext cx="63550" cy="82021"/>
             </a:xfrm>
             <a:prstGeom prst="rect">
@@ -29017,7 +29017,7 @@
           </p:nvSpPr>
           <p:spPr>
             <a:xfrm>
-              <a:off x="4790403" y="3899809"/>
+              <a:off x="4790246" y="3899809"/>
               <a:ext cx="63550" cy="82021"/>
             </a:xfrm>
             <a:prstGeom prst="rect">
